--- a/outputs/HIT2_일본_런칭_6개월전_로드맵_초안.pptx
+++ b/outputs/HIT2_일본_런칭_6개월전_로드맵_초안.pptx
@@ -2,13 +2,14 @@
 <file path=ppt/presentation.xml><?xml version="1.0" encoding="utf-8"?>
 <p:presentation xmlns:p="http://schemas.openxmlformats.org/presentationml/2006/main">
   <p:sldMasterIdLst>
-    <p:sldMasterId xmlns:r="http://schemas.openxmlformats.org/officeDocument/2006/relationships" id="2147483648" r:id="R862491ddb63243c0"/>
+    <p:sldMasterId xmlns:r="http://schemas.openxmlformats.org/officeDocument/2006/relationships" id="2147483648" r:id="Ra73ca0284a5045bb"/>
   </p:sldMasterIdLst>
   <p:notesMasterIdLst>
-    <p:notesMasterId xmlns:r="http://schemas.openxmlformats.org/officeDocument/2006/relationships" r:id="R10e58742bff54142"/>
+    <p:notesMasterId xmlns:r="http://schemas.openxmlformats.org/officeDocument/2006/relationships" r:id="Rd05d2d6db90245b2"/>
   </p:notesMasterIdLst>
   <p:sldIdLst>
-    <p:sldId xmlns:r="http://schemas.openxmlformats.org/officeDocument/2006/relationships" id="256" r:id="Rde8df3105faa408a"/>
+    <p:sldId xmlns:r="http://schemas.openxmlformats.org/officeDocument/2006/relationships" id="256" r:id="Rcabe6be937b54c9b"/>
+    <p:sldId xmlns:r="http://schemas.openxmlformats.org/officeDocument/2006/relationships" id="257" r:id="Rafd15bd06e254ca0"/>
   </p:sldIdLst>
   <p:sldSz cx="12192000" cy="6858000"/>
   <p:notesSz cx="6858000" cy="9144000"/>
@@ -563,6 +564,72 @@
 </p:notes>
 </file>
 
+<file path=ppt/notesSlides/notesSlide2.xml><?xml version="1.0" encoding="utf-8"?>
+<p:notes xmlns:p="http://schemas.openxmlformats.org/presentationml/2006/main">
+  <p:cSld>
+    <p:spTree>
+      <p:nvGrpSpPr>
+        <p:cNvPr id="1" name=""/>
+        <p:cNvGrpSpPr/>
+        <p:nvPr/>
+      </p:nvGrpSpPr>
+      <p:grpSpPr>
+        <a:xfrm xmlns:a="http://schemas.openxmlformats.org/drawingml/2006/main"/>
+      </p:grpSpPr>
+      <p:sp>
+        <p:nvSpPr>
+          <p:cNvPr id="2" name="Slide Image Placeholder 1"/>
+          <p:cNvSpPr>
+            <a:spLocks xmlns:a="http://schemas.openxmlformats.org/drawingml/2006/main" noGrp="1"/>
+          </p:cNvSpPr>
+          <p:nvPr>
+            <p:ph type="sldImg" idx="0"/>
+          </p:nvPr>
+        </p:nvSpPr>
+        <p:spPr/>
+      </p:sp>
+      <p:sp>
+        <p:nvSpPr>
+          <p:cNvPr id="3" name="Notes Placeholder 2"/>
+          <p:cNvSpPr>
+            <a:spLocks xmlns:a="http://schemas.openxmlformats.org/drawingml/2006/main" noGrp="1"/>
+          </p:cNvSpPr>
+          <p:nvPr>
+            <p:ph type="body" idx="1"/>
+          </p:nvPr>
+        </p:nvSpPr>
+        <p:spPr/>
+        <p:txBody>
+          <a:bodyPr xmlns:a="http://schemas.openxmlformats.org/drawingml/2006/main"/>
+          <a:lstStyle xmlns:a="http://schemas.openxmlformats.org/drawingml/2006/main"/>
+          <a:p xmlns:a="http://schemas.openxmlformats.org/drawingml/2006/main"/>
+        </p:txBody>
+      </p:sp>
+      <p:sp>
+        <p:nvSpPr>
+          <p:cNvPr id="4" name="Slide Number Placeholder 3"/>
+          <p:cNvSpPr>
+            <a:spLocks xmlns:a="http://schemas.openxmlformats.org/drawingml/2006/main" noGrp="1"/>
+          </p:cNvSpPr>
+          <p:nvPr>
+            <p:ph type="sldNum" idx="5"/>
+          </p:nvPr>
+        </p:nvSpPr>
+        <p:spPr/>
+        <p:txBody>
+          <a:bodyPr xmlns:a="http://schemas.openxmlformats.org/drawingml/2006/main"/>
+          <a:lstStyle xmlns:a="http://schemas.openxmlformats.org/drawingml/2006/main"/>
+          <a:p xmlns:a="http://schemas.openxmlformats.org/drawingml/2006/main"/>
+        </p:txBody>
+      </p:sp>
+    </p:spTree>
+  </p:cSld>
+  <p:clrMapOvr>
+    <a:masterClrMapping xmlns:a="http://schemas.openxmlformats.org/drawingml/2006/main"/>
+  </p:clrMapOvr>
+</p:notes>
+</file>
+
 <file path=ppt/slideLayouts/slideLayout1.xml><?xml version="1.0" encoding="utf-8"?>
 <p:sldLayout xmlns:p="http://schemas.openxmlformats.org/presentationml/2006/main" type="title">
   <p:cSld name="Title Slide">
@@ -601,7 +668,7 @@
   </p:cSld>
   <p:clrMap bg1="lt1" tx1="dk1" bg2="lt2" tx2="dk2" accent1="accent1" accent2="accent2" accent3="accent3" accent4="accent4" accent5="accent5" accent6="accent6" hlink="hlink" folHlink="folHlink"/>
   <p:sldLayoutIdLst>
-    <p:sldLayoutId xmlns:r="http://schemas.openxmlformats.org/officeDocument/2006/relationships" id="2147483649" r:id="R0a59564abe494e98"/>
+    <p:sldLayoutId xmlns:r="http://schemas.openxmlformats.org/officeDocument/2006/relationships" id="2147483649" r:id="Reae83263f9e94357"/>
   </p:sldLayoutIdLst>
   <p:txStyles>
     <p:titleStyle>
@@ -1152,7 +1219,7 @@
           <p:cNvPr id="1" name="top-accent">
             <a:extLst xmlns:a="http://schemas.openxmlformats.org/drawingml/2006/main">
               <a:ext uri="{FF2B5EF4-FFF2-40B4-BE49-F238E27FC236}">
-                <a16:creationId xmlns:a16="http://schemas.microsoft.com/office/drawing/2014/main" id="{7485DD3D-49CA-4E11-95BA-C0B0B4E3A417}"/>
+                <a16:creationId xmlns:a16="http://schemas.microsoft.com/office/drawing/2014/main" id="{BA9FC31A-24E2-4404-8D73-0C0E94D66413}"/>
               </a:ext>
             </a:extLst>
           </p:cNvPr>
@@ -1185,7 +1252,7 @@
           <p:cNvPr id="2" name="left-accent">
             <a:extLst xmlns:a="http://schemas.openxmlformats.org/drawingml/2006/main">
               <a:ext uri="{FF2B5EF4-FFF2-40B4-BE49-F238E27FC236}">
-                <a16:creationId xmlns:a16="http://schemas.microsoft.com/office/drawing/2014/main" id="{9C6457F4-349D-4CCF-8069-2EFF64D2122D}"/>
+                <a16:creationId xmlns:a16="http://schemas.microsoft.com/office/drawing/2014/main" id="{318ECBE9-8C22-4F3C-A00A-0DBDAB7CC6BA}"/>
               </a:ext>
             </a:extLst>
           </p:cNvPr>
@@ -1218,7 +1285,7 @@
           <p:cNvPr id="3" name="eyebrow">
             <a:extLst xmlns:a="http://schemas.openxmlformats.org/drawingml/2006/main">
               <a:ext uri="{FF2B5EF4-FFF2-40B4-BE49-F238E27FC236}">
-                <a16:creationId xmlns:a16="http://schemas.microsoft.com/office/drawing/2014/main" id="{F48689D7-D6BF-415F-A133-BB57B809815E}"/>
+                <a16:creationId xmlns:a16="http://schemas.microsoft.com/office/drawing/2014/main" id="{A1088874-0181-4485-8D4B-6D337C2D4B34}"/>
               </a:ext>
             </a:extLst>
           </p:cNvPr>
@@ -1230,7 +1297,7 @@
         <p:spPr>
           <a:xfrm xmlns:a="http://schemas.openxmlformats.org/drawingml/2006/main">
             <a:off x="514350" y="361950"/>
-            <a:ext cx="5334000" cy="285750"/>
+            <a:ext cx="5905500" cy="285750"/>
           </a:xfrm>
           <a:prstGeom xmlns:a="http://schemas.openxmlformats.org/drawingml/2006/main" prst="rect">
             <a:avLst/>
@@ -1268,7 +1335,7 @@
           <p:cNvPr id="4" name="footer">
             <a:extLst xmlns:a="http://schemas.openxmlformats.org/drawingml/2006/main">
               <a:ext uri="{FF2B5EF4-FFF2-40B4-BE49-F238E27FC236}">
-                <a16:creationId xmlns:a16="http://schemas.microsoft.com/office/drawing/2014/main" id="{7C4C45AF-1FDA-423C-A59F-42E878CC96BC}"/>
+                <a16:creationId xmlns:a16="http://schemas.microsoft.com/office/drawing/2014/main" id="{F27946D4-1325-49F4-A7C7-396F3A828558}"/>
               </a:ext>
             </a:extLst>
           </p:cNvPr>
@@ -1318,7 +1385,7 @@
           <p:cNvPr id="5" name="page-no">
             <a:extLst xmlns:a="http://schemas.openxmlformats.org/drawingml/2006/main">
               <a:ext uri="{FF2B5EF4-FFF2-40B4-BE49-F238E27FC236}">
-                <a16:creationId xmlns:a16="http://schemas.microsoft.com/office/drawing/2014/main" id="{01DFE2D1-3011-4265-AEA9-0BC99D584093}"/>
+                <a16:creationId xmlns:a16="http://schemas.microsoft.com/office/drawing/2014/main" id="{03285238-2862-4D0E-AA45-748D870B772A}"/>
               </a:ext>
             </a:extLst>
           </p:cNvPr>
@@ -1368,7 +1435,7 @@
           <p:cNvPr id="6" name="hero-panel">
             <a:extLst xmlns:a="http://schemas.openxmlformats.org/drawingml/2006/main">
               <a:ext uri="{FF2B5EF4-FFF2-40B4-BE49-F238E27FC236}">
-                <a16:creationId xmlns:a16="http://schemas.microsoft.com/office/drawing/2014/main" id="{4383C236-DB54-4097-B3D1-747EDA50822A}"/>
+                <a16:creationId xmlns:a16="http://schemas.microsoft.com/office/drawing/2014/main" id="{FD609226-52E0-494C-8185-45B80C8E88E0}"/>
               </a:ext>
             </a:extLst>
           </p:cNvPr>
@@ -1401,7 +1468,7 @@
           <p:cNvPr id="7" name="hero-kicker">
             <a:extLst xmlns:a="http://schemas.openxmlformats.org/drawingml/2006/main">
               <a:ext uri="{FF2B5EF4-FFF2-40B4-BE49-F238E27FC236}">
-                <a16:creationId xmlns:a16="http://schemas.microsoft.com/office/drawing/2014/main" id="{E4DC28E6-1B95-42A5-B8A2-419BDD63F818}"/>
+                <a16:creationId xmlns:a16="http://schemas.microsoft.com/office/drawing/2014/main" id="{7D29E825-A250-42CC-93B2-2582FB102106}"/>
               </a:ext>
             </a:extLst>
           </p:cNvPr>
@@ -1451,7 +1518,7 @@
           <p:cNvPr id="8" name="hero-title">
             <a:extLst xmlns:a="http://schemas.openxmlformats.org/drawingml/2006/main">
               <a:ext uri="{FF2B5EF4-FFF2-40B4-BE49-F238E27FC236}">
-                <a16:creationId xmlns:a16="http://schemas.microsoft.com/office/drawing/2014/main" id="{C055DF5B-91F6-404C-9970-3DC7A1F038FA}"/>
+                <a16:creationId xmlns:a16="http://schemas.microsoft.com/office/drawing/2014/main" id="{CEBCDEA0-AB34-49D3-B587-18E4B8685E76}"/>
               </a:ext>
             </a:extLst>
           </p:cNvPr>
@@ -1501,7 +1568,7 @@
           <p:cNvPr id="9" name="hero-subtitle">
             <a:extLst xmlns:a="http://schemas.openxmlformats.org/drawingml/2006/main">
               <a:ext uri="{FF2B5EF4-FFF2-40B4-BE49-F238E27FC236}">
-                <a16:creationId xmlns:a16="http://schemas.microsoft.com/office/drawing/2014/main" id="{3301D87B-D90F-4F89-8249-A4C263C83C23}"/>
+                <a16:creationId xmlns:a16="http://schemas.microsoft.com/office/drawing/2014/main" id="{F36DB0B3-40AF-4C87-80C1-DD45C1636414}"/>
               </a:ext>
             </a:extLst>
           </p:cNvPr>
@@ -1551,7 +1618,7 @@
           <p:cNvPr id="10" name="tag-1">
             <a:extLst xmlns:a="http://schemas.openxmlformats.org/drawingml/2006/main">
               <a:ext uri="{FF2B5EF4-FFF2-40B4-BE49-F238E27FC236}">
-                <a16:creationId xmlns:a16="http://schemas.microsoft.com/office/drawing/2014/main" id="{365480EB-F0C6-442B-9531-4D0C261F5C8E}"/>
+                <a16:creationId xmlns:a16="http://schemas.microsoft.com/office/drawing/2014/main" id="{3C230F18-95ED-4475-8E79-85CE2E583DA2}"/>
               </a:ext>
             </a:extLst>
           </p:cNvPr>
@@ -1607,7 +1674,7 @@
           <p:cNvPr id="11" name="tag-2">
             <a:extLst xmlns:a="http://schemas.openxmlformats.org/drawingml/2006/main">
               <a:ext uri="{FF2B5EF4-FFF2-40B4-BE49-F238E27FC236}">
-                <a16:creationId xmlns:a16="http://schemas.microsoft.com/office/drawing/2014/main" id="{C0DC44E7-5115-4875-9791-118A84076625}"/>
+                <a16:creationId xmlns:a16="http://schemas.microsoft.com/office/drawing/2014/main" id="{51E654B1-2B53-4070-8AAD-BC79C07BE457}"/>
               </a:ext>
             </a:extLst>
           </p:cNvPr>
@@ -1663,7 +1730,7 @@
           <p:cNvPr id="12" name="tag-3">
             <a:extLst xmlns:a="http://schemas.openxmlformats.org/drawingml/2006/main">
               <a:ext uri="{FF2B5EF4-FFF2-40B4-BE49-F238E27FC236}">
-                <a16:creationId xmlns:a16="http://schemas.microsoft.com/office/drawing/2014/main" id="{BEAF8971-35C2-49D2-8039-35949799BB8D}"/>
+                <a16:creationId xmlns:a16="http://schemas.microsoft.com/office/drawing/2014/main" id="{F9DEF68A-91EE-4212-AD10-F7BF4B3B98A2}"/>
               </a:ext>
             </a:extLst>
           </p:cNvPr>
@@ -1719,7 +1786,7 @@
           <p:cNvPr id="13" name="scope-title">
             <a:extLst xmlns:a="http://schemas.openxmlformats.org/drawingml/2006/main">
               <a:ext uri="{FF2B5EF4-FFF2-40B4-BE49-F238E27FC236}">
-                <a16:creationId xmlns:a16="http://schemas.microsoft.com/office/drawing/2014/main" id="{959997CE-44A4-4CFD-8D8F-713495787B13}"/>
+                <a16:creationId xmlns:a16="http://schemas.microsoft.com/office/drawing/2014/main" id="{DE00ADF5-937B-4350-97C0-4F09F1B3A46A}"/>
               </a:ext>
             </a:extLst>
           </p:cNvPr>
@@ -1769,7 +1836,7 @@
           <p:cNvPr id="14" name="scope-note">
             <a:extLst xmlns:a="http://schemas.openxmlformats.org/drawingml/2006/main">
               <a:ext uri="{FF2B5EF4-FFF2-40B4-BE49-F238E27FC236}">
-                <a16:creationId xmlns:a16="http://schemas.microsoft.com/office/drawing/2014/main" id="{119295B3-927C-4E41-95E3-CEC9F5D6AD8D}"/>
+                <a16:creationId xmlns:a16="http://schemas.microsoft.com/office/drawing/2014/main" id="{F4A25A1E-BD60-434D-949D-46F03D72D672}"/>
               </a:ext>
             </a:extLst>
           </p:cNvPr>
@@ -1819,7 +1886,7 @@
           <p:cNvPr id="15" name="scope-row-1">
             <a:extLst xmlns:a="http://schemas.openxmlformats.org/drawingml/2006/main">
               <a:ext uri="{FF2B5EF4-FFF2-40B4-BE49-F238E27FC236}">
-                <a16:creationId xmlns:a16="http://schemas.microsoft.com/office/drawing/2014/main" id="{A1F78B5B-9D2E-409B-BFC8-D8AD951C5499}"/>
+                <a16:creationId xmlns:a16="http://schemas.microsoft.com/office/drawing/2014/main" id="{57A04C4A-D67B-4AE3-8A04-3D58CF5483ED}"/>
               </a:ext>
             </a:extLst>
           </p:cNvPr>
@@ -1852,7 +1919,7 @@
           <p:cNvPr id="16" name="scope-label-1">
             <a:extLst xmlns:a="http://schemas.openxmlformats.org/drawingml/2006/main">
               <a:ext uri="{FF2B5EF4-FFF2-40B4-BE49-F238E27FC236}">
-                <a16:creationId xmlns:a16="http://schemas.microsoft.com/office/drawing/2014/main" id="{26DBA780-AAC7-4A81-AFEF-51C1EC8609EA}"/>
+                <a16:creationId xmlns:a16="http://schemas.microsoft.com/office/drawing/2014/main" id="{658382CF-33F6-449F-A938-CE6049F75E7F}"/>
               </a:ext>
             </a:extLst>
           </p:cNvPr>
@@ -1902,7 +1969,7 @@
           <p:cNvPr id="17" name="scope-value-1">
             <a:extLst xmlns:a="http://schemas.openxmlformats.org/drawingml/2006/main">
               <a:ext uri="{FF2B5EF4-FFF2-40B4-BE49-F238E27FC236}">
-                <a16:creationId xmlns:a16="http://schemas.microsoft.com/office/drawing/2014/main" id="{75A3B9C4-2580-4C86-AAD7-65DF9D51BB94}"/>
+                <a16:creationId xmlns:a16="http://schemas.microsoft.com/office/drawing/2014/main" id="{958A698B-FB6D-408A-A016-79A50C0A600D}"/>
               </a:ext>
             </a:extLst>
           </p:cNvPr>
@@ -1952,7 +2019,7 @@
           <p:cNvPr id="18" name="scope-row-2">
             <a:extLst xmlns:a="http://schemas.openxmlformats.org/drawingml/2006/main">
               <a:ext uri="{FF2B5EF4-FFF2-40B4-BE49-F238E27FC236}">
-                <a16:creationId xmlns:a16="http://schemas.microsoft.com/office/drawing/2014/main" id="{747A003F-0026-4D2B-A143-B2ADFE300204}"/>
+                <a16:creationId xmlns:a16="http://schemas.microsoft.com/office/drawing/2014/main" id="{FAA8AA22-D23C-4662-BFC3-342F8D78C932}"/>
               </a:ext>
             </a:extLst>
           </p:cNvPr>
@@ -1985,7 +2052,7 @@
           <p:cNvPr id="19" name="scope-label-2">
             <a:extLst xmlns:a="http://schemas.openxmlformats.org/drawingml/2006/main">
               <a:ext uri="{FF2B5EF4-FFF2-40B4-BE49-F238E27FC236}">
-                <a16:creationId xmlns:a16="http://schemas.microsoft.com/office/drawing/2014/main" id="{808832D2-3436-4749-970A-B5B007F7FA90}"/>
+                <a16:creationId xmlns:a16="http://schemas.microsoft.com/office/drawing/2014/main" id="{857210C4-0BD7-481A-B085-0C863E570C78}"/>
               </a:ext>
             </a:extLst>
           </p:cNvPr>
@@ -2035,7 +2102,7 @@
           <p:cNvPr id="20" name="scope-value-2">
             <a:extLst xmlns:a="http://schemas.openxmlformats.org/drawingml/2006/main">
               <a:ext uri="{FF2B5EF4-FFF2-40B4-BE49-F238E27FC236}">
-                <a16:creationId xmlns:a16="http://schemas.microsoft.com/office/drawing/2014/main" id="{AB0E592C-E904-46BE-8C60-BD1028AC7219}"/>
+                <a16:creationId xmlns:a16="http://schemas.microsoft.com/office/drawing/2014/main" id="{1F4EC4FE-49C0-48C7-9317-6B5EE8F9D505}"/>
               </a:ext>
             </a:extLst>
           </p:cNvPr>
@@ -2085,7 +2152,7 @@
           <p:cNvPr id="21" name="scope-row-3">
             <a:extLst xmlns:a="http://schemas.openxmlformats.org/drawingml/2006/main">
               <a:ext uri="{FF2B5EF4-FFF2-40B4-BE49-F238E27FC236}">
-                <a16:creationId xmlns:a16="http://schemas.microsoft.com/office/drawing/2014/main" id="{254FE3C6-141F-4041-AB83-3CE1C1C789F2}"/>
+                <a16:creationId xmlns:a16="http://schemas.microsoft.com/office/drawing/2014/main" id="{DCEDB403-193A-4FDA-8B1C-C3528D274A9D}"/>
               </a:ext>
             </a:extLst>
           </p:cNvPr>
@@ -2118,7 +2185,7 @@
           <p:cNvPr id="22" name="scope-label-3">
             <a:extLst xmlns:a="http://schemas.openxmlformats.org/drawingml/2006/main">
               <a:ext uri="{FF2B5EF4-FFF2-40B4-BE49-F238E27FC236}">
-                <a16:creationId xmlns:a16="http://schemas.microsoft.com/office/drawing/2014/main" id="{9882EFD8-FB8B-4FFF-B718-5D03D887B25E}"/>
+                <a16:creationId xmlns:a16="http://schemas.microsoft.com/office/drawing/2014/main" id="{EF8A8527-2333-4FE1-BDB5-85394A0F0672}"/>
               </a:ext>
             </a:extLst>
           </p:cNvPr>
@@ -2168,7 +2235,7 @@
           <p:cNvPr id="23" name="scope-value-3">
             <a:extLst xmlns:a="http://schemas.openxmlformats.org/drawingml/2006/main">
               <a:ext uri="{FF2B5EF4-FFF2-40B4-BE49-F238E27FC236}">
-                <a16:creationId xmlns:a16="http://schemas.microsoft.com/office/drawing/2014/main" id="{0CF421D7-5E14-4E69-BE94-1A8A5BC8ED5A}"/>
+                <a16:creationId xmlns:a16="http://schemas.microsoft.com/office/drawing/2014/main" id="{BD0BA77F-1F53-4CD9-8D29-03B1205F2629}"/>
               </a:ext>
             </a:extLst>
           </p:cNvPr>
@@ -2218,7 +2285,7 @@
           <p:cNvPr id="24" name="scope-row-4">
             <a:extLst xmlns:a="http://schemas.openxmlformats.org/drawingml/2006/main">
               <a:ext uri="{FF2B5EF4-FFF2-40B4-BE49-F238E27FC236}">
-                <a16:creationId xmlns:a16="http://schemas.microsoft.com/office/drawing/2014/main" id="{A0706CBB-BF16-40D8-B0C1-445582E53533}"/>
+                <a16:creationId xmlns:a16="http://schemas.microsoft.com/office/drawing/2014/main" id="{4E5E8517-434A-4200-98FF-3A61BF8C2793}"/>
               </a:ext>
             </a:extLst>
           </p:cNvPr>
@@ -2251,7 +2318,7 @@
           <p:cNvPr id="25" name="scope-label-4">
             <a:extLst xmlns:a="http://schemas.openxmlformats.org/drawingml/2006/main">
               <a:ext uri="{FF2B5EF4-FFF2-40B4-BE49-F238E27FC236}">
-                <a16:creationId xmlns:a16="http://schemas.microsoft.com/office/drawing/2014/main" id="{A14FBE55-DF5D-40A9-A6F2-F5BC6BE86B13}"/>
+                <a16:creationId xmlns:a16="http://schemas.microsoft.com/office/drawing/2014/main" id="{3FD7D3B8-F3D6-4D8C-BF9C-25E80BD4B53D}"/>
               </a:ext>
             </a:extLst>
           </p:cNvPr>
@@ -2301,7 +2368,7 @@
           <p:cNvPr id="26" name="scope-value-4">
             <a:extLst xmlns:a="http://schemas.openxmlformats.org/drawingml/2006/main">
               <a:ext uri="{FF2B5EF4-FFF2-40B4-BE49-F238E27FC236}">
-                <a16:creationId xmlns:a16="http://schemas.microsoft.com/office/drawing/2014/main" id="{F82D48E4-4143-4C36-94F7-86C385E34E16}"/>
+                <a16:creationId xmlns:a16="http://schemas.microsoft.com/office/drawing/2014/main" id="{2FE173D4-F179-413D-89B6-DEA695318E05}"/>
               </a:ext>
             </a:extLst>
           </p:cNvPr>
@@ -2351,7 +2418,7 @@
           <p:cNvPr id="27" name="evidence-title">
             <a:extLst xmlns:a="http://schemas.openxmlformats.org/drawingml/2006/main">
               <a:ext uri="{FF2B5EF4-FFF2-40B4-BE49-F238E27FC236}">
-                <a16:creationId xmlns:a16="http://schemas.microsoft.com/office/drawing/2014/main" id="{62873B73-2344-4B83-A008-5A5CEE7E46C7}"/>
+                <a16:creationId xmlns:a16="http://schemas.microsoft.com/office/drawing/2014/main" id="{A69FE48F-F86B-42D3-AAEE-9148AE6AEE7D}"/>
               </a:ext>
             </a:extLst>
           </p:cNvPr>
@@ -2401,7 +2468,7 @@
           <p:cNvPr id="28" name="evidence-card-1">
             <a:extLst xmlns:a="http://schemas.openxmlformats.org/drawingml/2006/main">
               <a:ext uri="{FF2B5EF4-FFF2-40B4-BE49-F238E27FC236}">
-                <a16:creationId xmlns:a16="http://schemas.microsoft.com/office/drawing/2014/main" id="{AF39F80D-3B67-49C1-9E44-B669E8E66D09}"/>
+                <a16:creationId xmlns:a16="http://schemas.microsoft.com/office/drawing/2014/main" id="{8F8751F5-E4BD-4F7C-9DBE-C1AD8DEAD100}"/>
               </a:ext>
             </a:extLst>
           </p:cNvPr>
@@ -2436,7 +2503,7 @@
           <p:cNvPr id="29" name="evidence-bar-1">
             <a:extLst xmlns:a="http://schemas.openxmlformats.org/drawingml/2006/main">
               <a:ext uri="{FF2B5EF4-FFF2-40B4-BE49-F238E27FC236}">
-                <a16:creationId xmlns:a16="http://schemas.microsoft.com/office/drawing/2014/main" id="{5F88EE19-D4B3-4DBA-82B6-25BC3C81C1F6}"/>
+                <a16:creationId xmlns:a16="http://schemas.microsoft.com/office/drawing/2014/main" id="{D3946514-A71F-4A76-93AE-E9B8436F774F}"/>
               </a:ext>
             </a:extLst>
           </p:cNvPr>
@@ -2469,7 +2536,7 @@
           <p:cNvPr id="30" name="evidence-title-1">
             <a:extLst xmlns:a="http://schemas.openxmlformats.org/drawingml/2006/main">
               <a:ext uri="{FF2B5EF4-FFF2-40B4-BE49-F238E27FC236}">
-                <a16:creationId xmlns:a16="http://schemas.microsoft.com/office/drawing/2014/main" id="{25B6F673-939D-468E-BE28-F9BBE8BD8B10}"/>
+                <a16:creationId xmlns:a16="http://schemas.microsoft.com/office/drawing/2014/main" id="{0ACB3B3B-5594-4D6D-A20C-2CDFDB9E3494}"/>
               </a:ext>
             </a:extLst>
           </p:cNvPr>
@@ -2519,7 +2586,7 @@
           <p:cNvPr id="31" name="evidence-body-1">
             <a:extLst xmlns:a="http://schemas.openxmlformats.org/drawingml/2006/main">
               <a:ext uri="{FF2B5EF4-FFF2-40B4-BE49-F238E27FC236}">
-                <a16:creationId xmlns:a16="http://schemas.microsoft.com/office/drawing/2014/main" id="{62DCB257-1096-4A46-9A60-E9FC97AE22B6}"/>
+                <a16:creationId xmlns:a16="http://schemas.microsoft.com/office/drawing/2014/main" id="{1864AB51-8B78-4549-A3C4-5DF3A917A8A9}"/>
               </a:ext>
             </a:extLst>
           </p:cNvPr>
@@ -2569,7 +2636,7 @@
           <p:cNvPr id="32" name="evidence-card-2">
             <a:extLst xmlns:a="http://schemas.openxmlformats.org/drawingml/2006/main">
               <a:ext uri="{FF2B5EF4-FFF2-40B4-BE49-F238E27FC236}">
-                <a16:creationId xmlns:a16="http://schemas.microsoft.com/office/drawing/2014/main" id="{AD4DE1F4-A875-4355-A636-0DFC8534AF1C}"/>
+                <a16:creationId xmlns:a16="http://schemas.microsoft.com/office/drawing/2014/main" id="{7181B067-7D75-44B3-B434-7135E72E6C7D}"/>
               </a:ext>
             </a:extLst>
           </p:cNvPr>
@@ -2604,7 +2671,7 @@
           <p:cNvPr id="33" name="evidence-bar-2">
             <a:extLst xmlns:a="http://schemas.openxmlformats.org/drawingml/2006/main">
               <a:ext uri="{FF2B5EF4-FFF2-40B4-BE49-F238E27FC236}">
-                <a16:creationId xmlns:a16="http://schemas.microsoft.com/office/drawing/2014/main" id="{743832EF-A64B-49A4-90B1-F46221B5170A}"/>
+                <a16:creationId xmlns:a16="http://schemas.microsoft.com/office/drawing/2014/main" id="{0618AE7F-A349-4F0B-9F29-5A8D5E4E7064}"/>
               </a:ext>
             </a:extLst>
           </p:cNvPr>
@@ -2637,7 +2704,7 @@
           <p:cNvPr id="34" name="evidence-title-2">
             <a:extLst xmlns:a="http://schemas.openxmlformats.org/drawingml/2006/main">
               <a:ext uri="{FF2B5EF4-FFF2-40B4-BE49-F238E27FC236}">
-                <a16:creationId xmlns:a16="http://schemas.microsoft.com/office/drawing/2014/main" id="{0FC03D62-297D-43F6-9384-8E94EBBA6946}"/>
+                <a16:creationId xmlns:a16="http://schemas.microsoft.com/office/drawing/2014/main" id="{C84310C6-A1C5-4E24-8066-794B43ACA04E}"/>
               </a:ext>
             </a:extLst>
           </p:cNvPr>
@@ -2687,7 +2754,7 @@
           <p:cNvPr id="35" name="evidence-body-2">
             <a:extLst xmlns:a="http://schemas.openxmlformats.org/drawingml/2006/main">
               <a:ext uri="{FF2B5EF4-FFF2-40B4-BE49-F238E27FC236}">
-                <a16:creationId xmlns:a16="http://schemas.microsoft.com/office/drawing/2014/main" id="{6AFAB91C-4411-414D-A82A-132515F544BF}"/>
+                <a16:creationId xmlns:a16="http://schemas.microsoft.com/office/drawing/2014/main" id="{C510D274-6E8C-4EC0-BCBB-657D6A37ED45}"/>
               </a:ext>
             </a:extLst>
           </p:cNvPr>
@@ -2737,7 +2804,7 @@
           <p:cNvPr id="36" name="evidence-card-3">
             <a:extLst xmlns:a="http://schemas.openxmlformats.org/drawingml/2006/main">
               <a:ext uri="{FF2B5EF4-FFF2-40B4-BE49-F238E27FC236}">
-                <a16:creationId xmlns:a16="http://schemas.microsoft.com/office/drawing/2014/main" id="{A440D78A-F75F-4943-A706-D461B0977506}"/>
+                <a16:creationId xmlns:a16="http://schemas.microsoft.com/office/drawing/2014/main" id="{0879F31C-1545-4B71-8D1C-4E182904FE4B}"/>
               </a:ext>
             </a:extLst>
           </p:cNvPr>
@@ -2772,7 +2839,7 @@
           <p:cNvPr id="37" name="evidence-bar-3">
             <a:extLst xmlns:a="http://schemas.openxmlformats.org/drawingml/2006/main">
               <a:ext uri="{FF2B5EF4-FFF2-40B4-BE49-F238E27FC236}">
-                <a16:creationId xmlns:a16="http://schemas.microsoft.com/office/drawing/2014/main" id="{20A6A53C-1810-4C04-8763-18C335DA4215}"/>
+                <a16:creationId xmlns:a16="http://schemas.microsoft.com/office/drawing/2014/main" id="{869906C6-9186-42F5-A2E2-B131D7AE65FF}"/>
               </a:ext>
             </a:extLst>
           </p:cNvPr>
@@ -2805,7 +2872,7 @@
           <p:cNvPr id="38" name="evidence-title-3">
             <a:extLst xmlns:a="http://schemas.openxmlformats.org/drawingml/2006/main">
               <a:ext uri="{FF2B5EF4-FFF2-40B4-BE49-F238E27FC236}">
-                <a16:creationId xmlns:a16="http://schemas.microsoft.com/office/drawing/2014/main" id="{265EE72B-1E94-40F3-84A4-3AA7E58BE4ED}"/>
+                <a16:creationId xmlns:a16="http://schemas.microsoft.com/office/drawing/2014/main" id="{A42996BC-EB0E-493F-857E-9582E1ADAE12}"/>
               </a:ext>
             </a:extLst>
           </p:cNvPr>
@@ -2855,7 +2922,7 @@
           <p:cNvPr id="39" name="evidence-body-3">
             <a:extLst xmlns:a="http://schemas.openxmlformats.org/drawingml/2006/main">
               <a:ext uri="{FF2B5EF4-FFF2-40B4-BE49-F238E27FC236}">
-                <a16:creationId xmlns:a16="http://schemas.microsoft.com/office/drawing/2014/main" id="{00051384-EDBE-4D35-B627-573CCE107221}"/>
+                <a16:creationId xmlns:a16="http://schemas.microsoft.com/office/drawing/2014/main" id="{6112007E-216F-4F3F-B515-F92FA3BF0777}"/>
               </a:ext>
             </a:extLst>
           </p:cNvPr>
@@ -2903,7 +2970,3965 @@
     </p:spTree>
     <p:extLst>
       <p:ext uri="{BB962C8B-B14F-4D97-AF65-F5344CB8AC3E}">
-        <p14:creationId xmlns:p14="http://schemas.microsoft.com/office/powerpoint/2010/main" val="503259153"/>
+        <p14:creationId xmlns:p14="http://schemas.microsoft.com/office/powerpoint/2010/main" val="1814583000"/>
+      </p:ext>
+    </p:extLst>
+  </p:cSld>
+</p:sld>
+</file>
+
+<file path=ppt/slides/slide2.xml><?xml version="1.0" encoding="utf-8"?>
+<p:sld xmlns:p="http://schemas.openxmlformats.org/presentationml/2006/main">
+  <p:cSld>
+    <p:bg>
+      <p:bgPr>
+        <a:solidFill xmlns:a="http://schemas.openxmlformats.org/drawingml/2006/main">
+          <a:srgbClr val="0B1020"/>
+        </a:solidFill>
+      </p:bgPr>
+    </p:bg>
+    <p:spTree>
+      <p:nvGrpSpPr>
+        <p:cNvPr id="1" name=""/>
+        <p:cNvGrpSpPr/>
+        <p:nvPr/>
+      </p:nvGrpSpPr>
+      <p:grpSpPr>
+        <a:xfrm xmlns:a="http://schemas.openxmlformats.org/drawingml/2006/main"/>
+      </p:grpSpPr>
+      <p:sp>
+        <p:nvSpPr>
+          <p:cNvPr id="1" name="top-accent">
+            <a:extLst xmlns:a="http://schemas.openxmlformats.org/drawingml/2006/main">
+              <a:ext uri="{FF2B5EF4-FFF2-40B4-BE49-F238E27FC236}">
+                <a16:creationId xmlns:a16="http://schemas.microsoft.com/office/drawing/2014/main" id="{EBB80E51-0ED0-49EC-8FE2-B00791127130}"/>
+              </a:ext>
+            </a:extLst>
+          </p:cNvPr>
+          <p:cNvSpPr>
+            <a:spLocks xmlns:a="http://schemas.openxmlformats.org/drawingml/2006/main" noGrp="1"/>
+          </p:cNvSpPr>
+          <p:nvPr/>
+        </p:nvSpPr>
+        <p:spPr>
+          <a:xfrm xmlns:a="http://schemas.openxmlformats.org/drawingml/2006/main">
+            <a:off x="0" y="0"/>
+            <a:ext cx="12192000" cy="95250"/>
+          </a:xfrm>
+          <a:prstGeom xmlns:a="http://schemas.openxmlformats.org/drawingml/2006/main" prst="rect">
+            <a:avLst/>
+          </a:prstGeom>
+          <a:solidFill xmlns:a="http://schemas.openxmlformats.org/drawingml/2006/main">
+            <a:srgbClr val="00B8D9"/>
+          </a:solidFill>
+          <a:ln xmlns:a="http://schemas.openxmlformats.org/drawingml/2006/main" w="0">
+            <a:solidFill>
+              <a:srgbClr val="00B8D9"/>
+            </a:solidFill>
+            <a:prstDash val="solid"/>
+          </a:ln>
+        </p:spPr>
+      </p:sp>
+      <p:sp>
+        <p:nvSpPr>
+          <p:cNvPr id="2" name="left-accent">
+            <a:extLst xmlns:a="http://schemas.openxmlformats.org/drawingml/2006/main">
+              <a:ext uri="{FF2B5EF4-FFF2-40B4-BE49-F238E27FC236}">
+                <a16:creationId xmlns:a16="http://schemas.microsoft.com/office/drawing/2014/main" id="{C24A0E22-DBDD-40F8-9CE4-B7DE98CA4311}"/>
+              </a:ext>
+            </a:extLst>
+          </p:cNvPr>
+          <p:cNvSpPr>
+            <a:spLocks xmlns:a="http://schemas.openxmlformats.org/drawingml/2006/main" noGrp="1"/>
+          </p:cNvSpPr>
+          <p:nvPr/>
+        </p:nvSpPr>
+        <p:spPr>
+          <a:xfrm xmlns:a="http://schemas.openxmlformats.org/drawingml/2006/main">
+            <a:off x="0" y="0"/>
+            <a:ext cx="152400" cy="6858000"/>
+          </a:xfrm>
+          <a:prstGeom xmlns:a="http://schemas.openxmlformats.org/drawingml/2006/main" prst="rect">
+            <a:avLst/>
+          </a:prstGeom>
+          <a:solidFill xmlns:a="http://schemas.openxmlformats.org/drawingml/2006/main">
+            <a:srgbClr val="FF6B35"/>
+          </a:solidFill>
+          <a:ln xmlns:a="http://schemas.openxmlformats.org/drawingml/2006/main" w="0">
+            <a:solidFill>
+              <a:srgbClr val="FF6B35"/>
+            </a:solidFill>
+            <a:prstDash val="solid"/>
+          </a:ln>
+        </p:spPr>
+      </p:sp>
+      <p:sp>
+        <p:nvSpPr>
+          <p:cNvPr id="3" name="eyebrow">
+            <a:extLst xmlns:a="http://schemas.openxmlformats.org/drawingml/2006/main">
+              <a:ext uri="{FF2B5EF4-FFF2-40B4-BE49-F238E27FC236}">
+                <a16:creationId xmlns:a16="http://schemas.microsoft.com/office/drawing/2014/main" id="{ACE46DBE-529B-45B7-9DDB-08AB9C00C335}"/>
+              </a:ext>
+            </a:extLst>
+          </p:cNvPr>
+          <p:cNvSpPr>
+            <a:spLocks xmlns:a="http://schemas.openxmlformats.org/drawingml/2006/main" noGrp="1"/>
+          </p:cNvSpPr>
+          <p:nvPr/>
+        </p:nvSpPr>
+        <p:spPr>
+          <a:xfrm xmlns:a="http://schemas.openxmlformats.org/drawingml/2006/main">
+            <a:off x="514350" y="361950"/>
+            <a:ext cx="5905500" cy="285750"/>
+          </a:xfrm>
+          <a:prstGeom xmlns:a="http://schemas.openxmlformats.org/drawingml/2006/main" prst="rect">
+            <a:avLst/>
+          </a:prstGeom>
+          <a:noFill xmlns:a="http://schemas.openxmlformats.org/drawingml/2006/main"/>
+          <a:ln xmlns:a="http://schemas.openxmlformats.org/drawingml/2006/main" w="0">
+            <a:noFill/>
+            <a:prstDash val="solid"/>
+          </a:ln>
+        </p:spPr>
+        <p:txBody>
+          <a:bodyPr xmlns:a="http://schemas.openxmlformats.org/drawingml/2006/main"/>
+          <a:lstStyle xmlns:a="http://schemas.openxmlformats.org/drawingml/2006/main"/>
+          <a:p xmlns:a="http://schemas.openxmlformats.org/drawingml/2006/main">
+            <a:pPr>
+              <a:defRPr sz="1125" b="1">
+                <a:solidFill>
+                  <a:srgbClr val="8BD9E8"/>
+                </a:solidFill>
+              </a:defRPr>
+            </a:pPr>
+            <a:r>
+              <a:rPr sz="1125" b="1">
+                <a:solidFill>
+                  <a:srgbClr val="8BD9E8"/>
+                </a:solidFill>
+              </a:rPr>
+              <a:t>SIX-MONTH LAUNCH ROADMAP | PAGE 02</a:t>
+            </a:r>
+          </a:p>
+        </p:txBody>
+      </p:sp>
+      <p:sp>
+        <p:nvSpPr>
+          <p:cNvPr id="4" name="footer">
+            <a:extLst xmlns:a="http://schemas.openxmlformats.org/drawingml/2006/main">
+              <a:ext uri="{FF2B5EF4-FFF2-40B4-BE49-F238E27FC236}">
+                <a16:creationId xmlns:a16="http://schemas.microsoft.com/office/drawing/2014/main" id="{4912B251-6BBA-4BA2-A2DF-E4F5BC0CDB98}"/>
+              </a:ext>
+            </a:extLst>
+          </p:cNvPr>
+          <p:cNvSpPr>
+            <a:spLocks xmlns:a="http://schemas.openxmlformats.org/drawingml/2006/main" noGrp="1"/>
+          </p:cNvSpPr>
+          <p:nvPr/>
+        </p:nvSpPr>
+        <p:spPr>
+          <a:xfrm xmlns:a="http://schemas.openxmlformats.org/drawingml/2006/main">
+            <a:off x="514350" y="6457950"/>
+            <a:ext cx="4953000" cy="266700"/>
+          </a:xfrm>
+          <a:prstGeom xmlns:a="http://schemas.openxmlformats.org/drawingml/2006/main" prst="rect">
+            <a:avLst/>
+          </a:prstGeom>
+          <a:noFill xmlns:a="http://schemas.openxmlformats.org/drawingml/2006/main"/>
+          <a:ln xmlns:a="http://schemas.openxmlformats.org/drawingml/2006/main" w="0">
+            <a:noFill/>
+            <a:prstDash val="solid"/>
+          </a:ln>
+        </p:spPr>
+        <p:txBody>
+          <a:bodyPr xmlns:a="http://schemas.openxmlformats.org/drawingml/2006/main"/>
+          <a:lstStyle xmlns:a="http://schemas.openxmlformats.org/drawingml/2006/main"/>
+          <a:p xmlns:a="http://schemas.openxmlformats.org/drawingml/2006/main">
+            <a:pPr>
+              <a:defRPr sz="1125">
+                <a:solidFill>
+                  <a:srgbClr val="94A3B8"/>
+                </a:solidFill>
+              </a:defRPr>
+            </a:pPr>
+            <a:r>
+              <a:rPr sz="1125">
+                <a:solidFill>
+                  <a:srgbClr val="94A3B8"/>
+                </a:solidFill>
+              </a:rPr>
+              <a:t>HIT2 일본 서비스 런칭 6개월 전 로드맵</a:t>
+            </a:r>
+          </a:p>
+        </p:txBody>
+      </p:sp>
+      <p:sp>
+        <p:nvSpPr>
+          <p:cNvPr id="5" name="page-no">
+            <a:extLst xmlns:a="http://schemas.openxmlformats.org/drawingml/2006/main">
+              <a:ext uri="{FF2B5EF4-FFF2-40B4-BE49-F238E27FC236}">
+                <a16:creationId xmlns:a16="http://schemas.microsoft.com/office/drawing/2014/main" id="{2F44404A-D74F-4723-A909-5A7426041865}"/>
+              </a:ext>
+            </a:extLst>
+          </p:cNvPr>
+          <p:cNvSpPr>
+            <a:spLocks xmlns:a="http://schemas.openxmlformats.org/drawingml/2006/main" noGrp="1"/>
+          </p:cNvSpPr>
+          <p:nvPr/>
+        </p:nvSpPr>
+        <p:spPr>
+          <a:xfrm xmlns:a="http://schemas.openxmlformats.org/drawingml/2006/main">
+            <a:off x="10953750" y="6457950"/>
+            <a:ext cx="419100" cy="266700"/>
+          </a:xfrm>
+          <a:prstGeom xmlns:a="http://schemas.openxmlformats.org/drawingml/2006/main" prst="rect">
+            <a:avLst/>
+          </a:prstGeom>
+          <a:noFill xmlns:a="http://schemas.openxmlformats.org/drawingml/2006/main"/>
+          <a:ln xmlns:a="http://schemas.openxmlformats.org/drawingml/2006/main" w="0">
+            <a:noFill/>
+            <a:prstDash val="solid"/>
+          </a:ln>
+        </p:spPr>
+        <p:txBody>
+          <a:bodyPr xmlns:a="http://schemas.openxmlformats.org/drawingml/2006/main"/>
+          <a:lstStyle xmlns:a="http://schemas.openxmlformats.org/drawingml/2006/main"/>
+          <a:p xmlns:a="http://schemas.openxmlformats.org/drawingml/2006/main">
+            <a:pPr algn="r">
+              <a:defRPr sz="1200" b="1">
+                <a:solidFill>
+                  <a:srgbClr val="94A3B8"/>
+                </a:solidFill>
+              </a:defRPr>
+            </a:pPr>
+            <a:r>
+              <a:rPr sz="1200" b="1">
+                <a:solidFill>
+                  <a:srgbClr val="94A3B8"/>
+                </a:solidFill>
+              </a:rPr>
+              <a:t>02</a:t>
+            </a:r>
+          </a:p>
+        </p:txBody>
+      </p:sp>
+      <p:sp>
+        <p:nvSpPr>
+          <p:cNvPr id="6" name="title-02">
+            <a:extLst xmlns:a="http://schemas.openxmlformats.org/drawingml/2006/main">
+              <a:ext uri="{FF2B5EF4-FFF2-40B4-BE49-F238E27FC236}">
+                <a16:creationId xmlns:a16="http://schemas.microsoft.com/office/drawing/2014/main" id="{AD090A17-AB26-44C5-AE0A-9FF3F5451184}"/>
+              </a:ext>
+            </a:extLst>
+          </p:cNvPr>
+          <p:cNvSpPr>
+            <a:spLocks xmlns:a="http://schemas.openxmlformats.org/drawingml/2006/main" noGrp="1"/>
+          </p:cNvSpPr>
+          <p:nvPr/>
+        </p:nvSpPr>
+        <p:spPr>
+          <a:xfrm xmlns:a="http://schemas.openxmlformats.org/drawingml/2006/main">
+            <a:off x="514350" y="781050"/>
+            <a:ext cx="10572750" cy="533400"/>
+          </a:xfrm>
+          <a:prstGeom xmlns:a="http://schemas.openxmlformats.org/drawingml/2006/main" prst="rect">
+            <a:avLst/>
+          </a:prstGeom>
+          <a:noFill xmlns:a="http://schemas.openxmlformats.org/drawingml/2006/main"/>
+          <a:ln xmlns:a="http://schemas.openxmlformats.org/drawingml/2006/main" w="0">
+            <a:noFill/>
+            <a:prstDash val="solid"/>
+          </a:ln>
+        </p:spPr>
+        <p:txBody>
+          <a:bodyPr xmlns:a="http://schemas.openxmlformats.org/drawingml/2006/main"/>
+          <a:lstStyle xmlns:a="http://schemas.openxmlformats.org/drawingml/2006/main"/>
+          <a:p xmlns:a="http://schemas.openxmlformats.org/drawingml/2006/main">
+            <a:pPr>
+              <a:defRPr sz="2550" b="1">
+                <a:solidFill>
+                  <a:srgbClr val="FFFFFF"/>
+                </a:solidFill>
+              </a:defRPr>
+            </a:pPr>
+            <a:r>
+              <a:rPr sz="2550" b="1">
+                <a:solidFill>
+                  <a:srgbClr val="FFFFFF"/>
+                </a:solidFill>
+              </a:rPr>
+              <a:t>6개월 런칭 준비는 네 축이 병렬로 움직입니다</a:t>
+            </a:r>
+          </a:p>
+        </p:txBody>
+      </p:sp>
+      <p:sp>
+        <p:nvSpPr>
+          <p:cNvPr id="7" name="subtitle-02">
+            <a:extLst xmlns:a="http://schemas.openxmlformats.org/drawingml/2006/main">
+              <a:ext uri="{FF2B5EF4-FFF2-40B4-BE49-F238E27FC236}">
+                <a16:creationId xmlns:a16="http://schemas.microsoft.com/office/drawing/2014/main" id="{3F87A94A-29D3-4C6A-AAD5-A2EB499DF463}"/>
+              </a:ext>
+            </a:extLst>
+          </p:cNvPr>
+          <p:cNvSpPr>
+            <a:spLocks xmlns:a="http://schemas.openxmlformats.org/drawingml/2006/main" noGrp="1"/>
+          </p:cNvSpPr>
+          <p:nvPr/>
+        </p:nvSpPr>
+        <p:spPr>
+          <a:xfrm xmlns:a="http://schemas.openxmlformats.org/drawingml/2006/main">
+            <a:off x="533400" y="1371600"/>
+            <a:ext cx="10287000" cy="323850"/>
+          </a:xfrm>
+          <a:prstGeom xmlns:a="http://schemas.openxmlformats.org/drawingml/2006/main" prst="rect">
+            <a:avLst/>
+          </a:prstGeom>
+          <a:noFill xmlns:a="http://schemas.openxmlformats.org/drawingml/2006/main"/>
+          <a:ln xmlns:a="http://schemas.openxmlformats.org/drawingml/2006/main" w="0">
+            <a:noFill/>
+            <a:prstDash val="solid"/>
+          </a:ln>
+        </p:spPr>
+        <p:txBody>
+          <a:bodyPr xmlns:a="http://schemas.openxmlformats.org/drawingml/2006/main"/>
+          <a:lstStyle xmlns:a="http://schemas.openxmlformats.org/drawingml/2006/main"/>
+          <a:p xmlns:a="http://schemas.openxmlformats.org/drawingml/2006/main">
+            <a:pPr>
+              <a:defRPr sz="1275">
+                <a:solidFill>
+                  <a:srgbClr val="CBD5E1"/>
+                </a:solidFill>
+              </a:defRPr>
+            </a:pPr>
+            <a:r>
+              <a:rPr sz="1275">
+                <a:solidFill>
+                  <a:srgbClr val="CBD5E1"/>
+                </a:solidFill>
+              </a:rPr>
+              <a:t>월별 단계는 순차 진행처럼 보이지만, PM 관점에서는 범위·버전·검수 기준을 동시에 맞춰야 합니다.</a:t>
+            </a:r>
+          </a:p>
+        </p:txBody>
+      </p:sp>
+      <p:sp>
+        <p:nvSpPr>
+          <p:cNvPr id="8" name="timeline-line">
+            <a:extLst xmlns:a="http://schemas.openxmlformats.org/drawingml/2006/main">
+              <a:ext uri="{FF2B5EF4-FFF2-40B4-BE49-F238E27FC236}">
+                <a16:creationId xmlns:a16="http://schemas.microsoft.com/office/drawing/2014/main" id="{1AF8BC8D-223B-43A2-9E68-EF004A05E248}"/>
+              </a:ext>
+            </a:extLst>
+          </p:cNvPr>
+          <p:cNvSpPr>
+            <a:spLocks xmlns:a="http://schemas.openxmlformats.org/drawingml/2006/main" noGrp="1"/>
+          </p:cNvSpPr>
+          <p:nvPr/>
+        </p:nvSpPr>
+        <p:spPr>
+          <a:xfrm xmlns:a="http://schemas.openxmlformats.org/drawingml/2006/main">
+            <a:off x="781050" y="3400425"/>
+            <a:ext cx="9963150" cy="28575"/>
+          </a:xfrm>
+          <a:prstGeom xmlns:a="http://schemas.openxmlformats.org/drawingml/2006/main" prst="rect">
+            <a:avLst/>
+          </a:prstGeom>
+          <a:solidFill xmlns:a="http://schemas.openxmlformats.org/drawingml/2006/main">
+            <a:srgbClr val="2F3B55"/>
+          </a:solidFill>
+          <a:ln xmlns:a="http://schemas.openxmlformats.org/drawingml/2006/main" w="0">
+            <a:solidFill>
+              <a:srgbClr val="2F3B55"/>
+            </a:solidFill>
+            <a:prstDash val="solid"/>
+          </a:ln>
+        </p:spPr>
+      </p:sp>
+      <p:sp>
+        <p:nvSpPr>
+          <p:cNvPr id="9" name="timeline-card-1">
+            <a:extLst xmlns:a="http://schemas.openxmlformats.org/drawingml/2006/main">
+              <a:ext uri="{FF2B5EF4-FFF2-40B4-BE49-F238E27FC236}">
+                <a16:creationId xmlns:a16="http://schemas.microsoft.com/office/drawing/2014/main" id="{EFBFFD49-DD52-4A22-8ADE-37BE131635FA}"/>
+              </a:ext>
+            </a:extLst>
+          </p:cNvPr>
+          <p:cNvSpPr>
+            <a:spLocks xmlns:a="http://schemas.openxmlformats.org/drawingml/2006/main" noGrp="1"/>
+          </p:cNvSpPr>
+          <p:nvPr/>
+        </p:nvSpPr>
+        <p:spPr>
+          <a:xfrm xmlns:a="http://schemas.openxmlformats.org/drawingml/2006/main">
+            <a:off x="514350" y="2209800"/>
+            <a:ext cx="1581150" cy="2381250"/>
+          </a:xfrm>
+          <a:prstGeom xmlns:a="http://schemas.openxmlformats.org/drawingml/2006/main" prst="roundRect">
+            <a:avLst>
+              <a:gd name="adj" fmla="val 4819"/>
+            </a:avLst>
+          </a:prstGeom>
+          <a:solidFill xmlns:a="http://schemas.openxmlformats.org/drawingml/2006/main">
+            <a:srgbClr val="111827"/>
+          </a:solidFill>
+          <a:ln xmlns:a="http://schemas.openxmlformats.org/drawingml/2006/main" w="9525">
+            <a:solidFill>
+              <a:srgbClr val="2F3B55"/>
+            </a:solidFill>
+            <a:prstDash val="solid"/>
+          </a:ln>
+        </p:spPr>
+      </p:sp>
+      <p:sp>
+        <p:nvSpPr>
+          <p:cNvPr id="10" name="timeline-bar-1">
+            <a:extLst xmlns:a="http://schemas.openxmlformats.org/drawingml/2006/main">
+              <a:ext uri="{FF2B5EF4-FFF2-40B4-BE49-F238E27FC236}">
+                <a16:creationId xmlns:a16="http://schemas.microsoft.com/office/drawing/2014/main" id="{5A3401E8-7500-4EB5-8E2C-BB27C1F4A13A}"/>
+              </a:ext>
+            </a:extLst>
+          </p:cNvPr>
+          <p:cNvSpPr>
+            <a:spLocks xmlns:a="http://schemas.openxmlformats.org/drawingml/2006/main" noGrp="1"/>
+          </p:cNvSpPr>
+          <p:nvPr/>
+        </p:nvSpPr>
+        <p:spPr>
+          <a:xfrm xmlns:a="http://schemas.openxmlformats.org/drawingml/2006/main">
+            <a:off x="514350" y="2209800"/>
+            <a:ext cx="1581150" cy="66675"/>
+          </a:xfrm>
+          <a:prstGeom xmlns:a="http://schemas.openxmlformats.org/drawingml/2006/main" prst="rect">
+            <a:avLst/>
+          </a:prstGeom>
+          <a:solidFill xmlns:a="http://schemas.openxmlformats.org/drawingml/2006/main">
+            <a:srgbClr val="00B8D9"/>
+          </a:solidFill>
+          <a:ln xmlns:a="http://schemas.openxmlformats.org/drawingml/2006/main" w="0">
+            <a:solidFill>
+              <a:srgbClr val="00B8D9"/>
+            </a:solidFill>
+            <a:prstDash val="solid"/>
+          </a:ln>
+        </p:spPr>
+      </p:sp>
+      <p:sp>
+        <p:nvSpPr>
+          <p:cNvPr id="11" name="timeline-month-1">
+            <a:extLst xmlns:a="http://schemas.openxmlformats.org/drawingml/2006/main">
+              <a:ext uri="{FF2B5EF4-FFF2-40B4-BE49-F238E27FC236}">
+                <a16:creationId xmlns:a16="http://schemas.microsoft.com/office/drawing/2014/main" id="{703AAC99-3161-44FF-9822-7B87989DDD58}"/>
+              </a:ext>
+            </a:extLst>
+          </p:cNvPr>
+          <p:cNvSpPr>
+            <a:spLocks xmlns:a="http://schemas.openxmlformats.org/drawingml/2006/main" noGrp="1"/>
+          </p:cNvSpPr>
+          <p:nvPr/>
+        </p:nvSpPr>
+        <p:spPr>
+          <a:xfrm xmlns:a="http://schemas.openxmlformats.org/drawingml/2006/main">
+            <a:off x="666750" y="2438400"/>
+            <a:ext cx="666750" cy="228600"/>
+          </a:xfrm>
+          <a:prstGeom xmlns:a="http://schemas.openxmlformats.org/drawingml/2006/main" prst="rect">
+            <a:avLst/>
+          </a:prstGeom>
+          <a:noFill xmlns:a="http://schemas.openxmlformats.org/drawingml/2006/main"/>
+          <a:ln xmlns:a="http://schemas.openxmlformats.org/drawingml/2006/main" w="0">
+            <a:noFill/>
+            <a:prstDash val="solid"/>
+          </a:ln>
+        </p:spPr>
+        <p:txBody>
+          <a:bodyPr xmlns:a="http://schemas.openxmlformats.org/drawingml/2006/main"/>
+          <a:lstStyle xmlns:a="http://schemas.openxmlformats.org/drawingml/2006/main"/>
+          <a:p xmlns:a="http://schemas.openxmlformats.org/drawingml/2006/main">
+            <a:pPr>
+              <a:defRPr sz="1275" b="1">
+                <a:solidFill>
+                  <a:srgbClr val="00B8D9"/>
+                </a:solidFill>
+              </a:defRPr>
+            </a:pPr>
+            <a:r>
+              <a:rPr sz="1275" b="1">
+                <a:solidFill>
+                  <a:srgbClr val="00B8D9"/>
+                </a:solidFill>
+              </a:rPr>
+              <a:t>D-6M</a:t>
+            </a:r>
+          </a:p>
+        </p:txBody>
+      </p:sp>
+      <p:sp>
+        <p:nvSpPr>
+          <p:cNvPr id="12" name="timeline-title-1">
+            <a:extLst xmlns:a="http://schemas.openxmlformats.org/drawingml/2006/main">
+              <a:ext uri="{FF2B5EF4-FFF2-40B4-BE49-F238E27FC236}">
+                <a16:creationId xmlns:a16="http://schemas.microsoft.com/office/drawing/2014/main" id="{310E51D9-78D8-41E2-BD52-A6D90BB6F05E}"/>
+              </a:ext>
+            </a:extLst>
+          </p:cNvPr>
+          <p:cNvSpPr>
+            <a:spLocks xmlns:a="http://schemas.openxmlformats.org/drawingml/2006/main" noGrp="1"/>
+          </p:cNvSpPr>
+          <p:nvPr/>
+        </p:nvSpPr>
+        <p:spPr>
+          <a:xfrm xmlns:a="http://schemas.openxmlformats.org/drawingml/2006/main">
+            <a:off x="666750" y="2762250"/>
+            <a:ext cx="1257300" cy="457200"/>
+          </a:xfrm>
+          <a:prstGeom xmlns:a="http://schemas.openxmlformats.org/drawingml/2006/main" prst="rect">
+            <a:avLst/>
+          </a:prstGeom>
+          <a:noFill xmlns:a="http://schemas.openxmlformats.org/drawingml/2006/main"/>
+          <a:ln xmlns:a="http://schemas.openxmlformats.org/drawingml/2006/main" w="0">
+            <a:noFill/>
+            <a:prstDash val="solid"/>
+          </a:ln>
+        </p:spPr>
+        <p:txBody>
+          <a:bodyPr xmlns:a="http://schemas.openxmlformats.org/drawingml/2006/main"/>
+          <a:lstStyle xmlns:a="http://schemas.openxmlformats.org/drawingml/2006/main"/>
+          <a:p xmlns:a="http://schemas.openxmlformats.org/drawingml/2006/main">
+            <a:pPr>
+              <a:defRPr sz="1350" b="1">
+                <a:solidFill>
+                  <a:srgbClr val="FFFFFF"/>
+                </a:solidFill>
+              </a:defRPr>
+            </a:pPr>
+            <a:r>
+              <a:rPr sz="1350" b="1">
+                <a:solidFill>
+                  <a:srgbClr val="FFFFFF"/>
+                </a:solidFill>
+              </a:rPr>
+              <a:t>런칭 범위 확정</a:t>
+            </a:r>
+          </a:p>
+        </p:txBody>
+      </p:sp>
+      <p:sp>
+        <p:nvSpPr>
+          <p:cNvPr id="13" name="timeline-dot-1-1">
+            <a:extLst xmlns:a="http://schemas.openxmlformats.org/drawingml/2006/main">
+              <a:ext uri="{FF2B5EF4-FFF2-40B4-BE49-F238E27FC236}">
+                <a16:creationId xmlns:a16="http://schemas.microsoft.com/office/drawing/2014/main" id="{2545BA35-18C3-4855-B268-0F93E7310E76}"/>
+              </a:ext>
+            </a:extLst>
+          </p:cNvPr>
+          <p:cNvSpPr>
+            <a:spLocks xmlns:a="http://schemas.openxmlformats.org/drawingml/2006/main" noGrp="1"/>
+          </p:cNvSpPr>
+          <p:nvPr/>
+        </p:nvSpPr>
+        <p:spPr>
+          <a:xfrm xmlns:a="http://schemas.openxmlformats.org/drawingml/2006/main">
+            <a:off x="666750" y="3371850"/>
+            <a:ext cx="114300" cy="209550"/>
+          </a:xfrm>
+          <a:prstGeom xmlns:a="http://schemas.openxmlformats.org/drawingml/2006/main" prst="rect">
+            <a:avLst/>
+          </a:prstGeom>
+          <a:noFill xmlns:a="http://schemas.openxmlformats.org/drawingml/2006/main"/>
+          <a:ln xmlns:a="http://schemas.openxmlformats.org/drawingml/2006/main" w="0">
+            <a:noFill/>
+            <a:prstDash val="solid"/>
+          </a:ln>
+        </p:spPr>
+        <p:txBody>
+          <a:bodyPr xmlns:a="http://schemas.openxmlformats.org/drawingml/2006/main"/>
+          <a:lstStyle xmlns:a="http://schemas.openxmlformats.org/drawingml/2006/main"/>
+          <a:p xmlns:a="http://schemas.openxmlformats.org/drawingml/2006/main">
+            <a:pPr>
+              <a:defRPr sz="1350" b="1">
+                <a:solidFill>
+                  <a:srgbClr val="00B8D9"/>
+                </a:solidFill>
+              </a:defRPr>
+            </a:pPr>
+            <a:r>
+              <a:rPr sz="1350" b="1">
+                <a:solidFill>
+                  <a:srgbClr val="00B8D9"/>
+                </a:solidFill>
+              </a:rPr>
+              <a:t>·</a:t>
+            </a:r>
+          </a:p>
+        </p:txBody>
+      </p:sp>
+      <p:sp>
+        <p:nvSpPr>
+          <p:cNvPr id="14" name="timeline-item-1-1">
+            <a:extLst xmlns:a="http://schemas.openxmlformats.org/drawingml/2006/main">
+              <a:ext uri="{FF2B5EF4-FFF2-40B4-BE49-F238E27FC236}">
+                <a16:creationId xmlns:a16="http://schemas.microsoft.com/office/drawing/2014/main" id="{C3BF3712-6DCB-452E-9361-31439A5109C9}"/>
+              </a:ext>
+            </a:extLst>
+          </p:cNvPr>
+          <p:cNvSpPr>
+            <a:spLocks xmlns:a="http://schemas.openxmlformats.org/drawingml/2006/main" noGrp="1"/>
+          </p:cNvSpPr>
+          <p:nvPr/>
+        </p:nvSpPr>
+        <p:spPr>
+          <a:xfrm xmlns:a="http://schemas.openxmlformats.org/drawingml/2006/main">
+            <a:off x="800100" y="3400425"/>
+            <a:ext cx="1123950" cy="285750"/>
+          </a:xfrm>
+          <a:prstGeom xmlns:a="http://schemas.openxmlformats.org/drawingml/2006/main" prst="rect">
+            <a:avLst/>
+          </a:prstGeom>
+          <a:noFill xmlns:a="http://schemas.openxmlformats.org/drawingml/2006/main"/>
+          <a:ln xmlns:a="http://schemas.openxmlformats.org/drawingml/2006/main" w="0">
+            <a:noFill/>
+            <a:prstDash val="solid"/>
+          </a:ln>
+        </p:spPr>
+        <p:txBody>
+          <a:bodyPr xmlns:a="http://schemas.openxmlformats.org/drawingml/2006/main"/>
+          <a:lstStyle xmlns:a="http://schemas.openxmlformats.org/drawingml/2006/main"/>
+          <a:p xmlns:a="http://schemas.openxmlformats.org/drawingml/2006/main">
+            <a:pPr>
+              <a:defRPr sz="938">
+                <a:solidFill>
+                  <a:srgbClr val="CBD5E1"/>
+                </a:solidFill>
+              </a:defRPr>
+            </a:pPr>
+            <a:r>
+              <a:rPr sz="938">
+                <a:solidFill>
+                  <a:srgbClr val="CBD5E1"/>
+                </a:solidFill>
+              </a:rPr>
+              <a:t>일본 서비스 범위</a:t>
+            </a:r>
+          </a:p>
+        </p:txBody>
+      </p:sp>
+      <p:sp>
+        <p:nvSpPr>
+          <p:cNvPr id="15" name="timeline-dot-1-2">
+            <a:extLst xmlns:a="http://schemas.openxmlformats.org/drawingml/2006/main">
+              <a:ext uri="{FF2B5EF4-FFF2-40B4-BE49-F238E27FC236}">
+                <a16:creationId xmlns:a16="http://schemas.microsoft.com/office/drawing/2014/main" id="{BAE03365-4177-4DBF-93B3-32C74B6B9703}"/>
+              </a:ext>
+            </a:extLst>
+          </p:cNvPr>
+          <p:cNvSpPr>
+            <a:spLocks xmlns:a="http://schemas.openxmlformats.org/drawingml/2006/main" noGrp="1"/>
+          </p:cNvSpPr>
+          <p:nvPr/>
+        </p:nvSpPr>
+        <p:spPr>
+          <a:xfrm xmlns:a="http://schemas.openxmlformats.org/drawingml/2006/main">
+            <a:off x="666750" y="3695700"/>
+            <a:ext cx="114300" cy="209550"/>
+          </a:xfrm>
+          <a:prstGeom xmlns:a="http://schemas.openxmlformats.org/drawingml/2006/main" prst="rect">
+            <a:avLst/>
+          </a:prstGeom>
+          <a:noFill xmlns:a="http://schemas.openxmlformats.org/drawingml/2006/main"/>
+          <a:ln xmlns:a="http://schemas.openxmlformats.org/drawingml/2006/main" w="0">
+            <a:noFill/>
+            <a:prstDash val="solid"/>
+          </a:ln>
+        </p:spPr>
+        <p:txBody>
+          <a:bodyPr xmlns:a="http://schemas.openxmlformats.org/drawingml/2006/main"/>
+          <a:lstStyle xmlns:a="http://schemas.openxmlformats.org/drawingml/2006/main"/>
+          <a:p xmlns:a="http://schemas.openxmlformats.org/drawingml/2006/main">
+            <a:pPr>
+              <a:defRPr sz="1350" b="1">
+                <a:solidFill>
+                  <a:srgbClr val="00B8D9"/>
+                </a:solidFill>
+              </a:defRPr>
+            </a:pPr>
+            <a:r>
+              <a:rPr sz="1350" b="1">
+                <a:solidFill>
+                  <a:srgbClr val="00B8D9"/>
+                </a:solidFill>
+              </a:rPr>
+              <a:t>·</a:t>
+            </a:r>
+          </a:p>
+        </p:txBody>
+      </p:sp>
+      <p:sp>
+        <p:nvSpPr>
+          <p:cNvPr id="16" name="timeline-item-1-2">
+            <a:extLst xmlns:a="http://schemas.openxmlformats.org/drawingml/2006/main">
+              <a:ext uri="{FF2B5EF4-FFF2-40B4-BE49-F238E27FC236}">
+                <a16:creationId xmlns:a16="http://schemas.microsoft.com/office/drawing/2014/main" id="{C72E1EAB-6587-4DFC-A7E0-5CA9317DFCF4}"/>
+              </a:ext>
+            </a:extLst>
+          </p:cNvPr>
+          <p:cNvSpPr>
+            <a:spLocks xmlns:a="http://schemas.openxmlformats.org/drawingml/2006/main" noGrp="1"/>
+          </p:cNvSpPr>
+          <p:nvPr/>
+        </p:nvSpPr>
+        <p:spPr>
+          <a:xfrm xmlns:a="http://schemas.openxmlformats.org/drawingml/2006/main">
+            <a:off x="800100" y="3724275"/>
+            <a:ext cx="1123950" cy="285750"/>
+          </a:xfrm>
+          <a:prstGeom xmlns:a="http://schemas.openxmlformats.org/drawingml/2006/main" prst="rect">
+            <a:avLst/>
+          </a:prstGeom>
+          <a:noFill xmlns:a="http://schemas.openxmlformats.org/drawingml/2006/main"/>
+          <a:ln xmlns:a="http://schemas.openxmlformats.org/drawingml/2006/main" w="0">
+            <a:noFill/>
+            <a:prstDash val="solid"/>
+          </a:ln>
+        </p:spPr>
+        <p:txBody>
+          <a:bodyPr xmlns:a="http://schemas.openxmlformats.org/drawingml/2006/main"/>
+          <a:lstStyle xmlns:a="http://schemas.openxmlformats.org/drawingml/2006/main"/>
+          <a:p xmlns:a="http://schemas.openxmlformats.org/drawingml/2006/main">
+            <a:pPr>
+              <a:defRPr sz="938">
+                <a:solidFill>
+                  <a:srgbClr val="CBD5E1"/>
+                </a:solidFill>
+              </a:defRPr>
+            </a:pPr>
+            <a:r>
+              <a:rPr sz="938">
+                <a:solidFill>
+                  <a:srgbClr val="CBD5E1"/>
+                </a:solidFill>
+              </a:rPr>
+              <a:t>주요 콘텐츠 기준</a:t>
+            </a:r>
+          </a:p>
+        </p:txBody>
+      </p:sp>
+      <p:sp>
+        <p:nvSpPr>
+          <p:cNvPr id="17" name="timeline-dot-1-3">
+            <a:extLst xmlns:a="http://schemas.openxmlformats.org/drawingml/2006/main">
+              <a:ext uri="{FF2B5EF4-FFF2-40B4-BE49-F238E27FC236}">
+                <a16:creationId xmlns:a16="http://schemas.microsoft.com/office/drawing/2014/main" id="{4EB239D0-99D9-478C-AB5A-4C3346BBCB5E}"/>
+              </a:ext>
+            </a:extLst>
+          </p:cNvPr>
+          <p:cNvSpPr>
+            <a:spLocks xmlns:a="http://schemas.openxmlformats.org/drawingml/2006/main" noGrp="1"/>
+          </p:cNvSpPr>
+          <p:nvPr/>
+        </p:nvSpPr>
+        <p:spPr>
+          <a:xfrm xmlns:a="http://schemas.openxmlformats.org/drawingml/2006/main">
+            <a:off x="666750" y="4019550"/>
+            <a:ext cx="114300" cy="209550"/>
+          </a:xfrm>
+          <a:prstGeom xmlns:a="http://schemas.openxmlformats.org/drawingml/2006/main" prst="rect">
+            <a:avLst/>
+          </a:prstGeom>
+          <a:noFill xmlns:a="http://schemas.openxmlformats.org/drawingml/2006/main"/>
+          <a:ln xmlns:a="http://schemas.openxmlformats.org/drawingml/2006/main" w="0">
+            <a:noFill/>
+            <a:prstDash val="solid"/>
+          </a:ln>
+        </p:spPr>
+        <p:txBody>
+          <a:bodyPr xmlns:a="http://schemas.openxmlformats.org/drawingml/2006/main"/>
+          <a:lstStyle xmlns:a="http://schemas.openxmlformats.org/drawingml/2006/main"/>
+          <a:p xmlns:a="http://schemas.openxmlformats.org/drawingml/2006/main">
+            <a:pPr>
+              <a:defRPr sz="1350" b="1">
+                <a:solidFill>
+                  <a:srgbClr val="00B8D9"/>
+                </a:solidFill>
+              </a:defRPr>
+            </a:pPr>
+            <a:r>
+              <a:rPr sz="1350" b="1">
+                <a:solidFill>
+                  <a:srgbClr val="00B8D9"/>
+                </a:solidFill>
+              </a:rPr>
+              <a:t>·</a:t>
+            </a:r>
+          </a:p>
+        </p:txBody>
+      </p:sp>
+      <p:sp>
+        <p:nvSpPr>
+          <p:cNvPr id="18" name="timeline-item-1-3">
+            <a:extLst xmlns:a="http://schemas.openxmlformats.org/drawingml/2006/main">
+              <a:ext uri="{FF2B5EF4-FFF2-40B4-BE49-F238E27FC236}">
+                <a16:creationId xmlns:a16="http://schemas.microsoft.com/office/drawing/2014/main" id="{CD947CD6-1804-424A-A055-55F33C68C8E0}"/>
+              </a:ext>
+            </a:extLst>
+          </p:cNvPr>
+          <p:cNvSpPr>
+            <a:spLocks xmlns:a="http://schemas.openxmlformats.org/drawingml/2006/main" noGrp="1"/>
+          </p:cNvSpPr>
+          <p:nvPr/>
+        </p:nvSpPr>
+        <p:spPr>
+          <a:xfrm xmlns:a="http://schemas.openxmlformats.org/drawingml/2006/main">
+            <a:off x="800100" y="4048125"/>
+            <a:ext cx="1123950" cy="285750"/>
+          </a:xfrm>
+          <a:prstGeom xmlns:a="http://schemas.openxmlformats.org/drawingml/2006/main" prst="rect">
+            <a:avLst/>
+          </a:prstGeom>
+          <a:noFill xmlns:a="http://schemas.openxmlformats.org/drawingml/2006/main"/>
+          <a:ln xmlns:a="http://schemas.openxmlformats.org/drawingml/2006/main" w="0">
+            <a:noFill/>
+            <a:prstDash val="solid"/>
+          </a:ln>
+        </p:spPr>
+        <p:txBody>
+          <a:bodyPr xmlns:a="http://schemas.openxmlformats.org/drawingml/2006/main"/>
+          <a:lstStyle xmlns:a="http://schemas.openxmlformats.org/drawingml/2006/main"/>
+          <a:p xmlns:a="http://schemas.openxmlformats.org/drawingml/2006/main">
+            <a:pPr>
+              <a:defRPr sz="938">
+                <a:solidFill>
+                  <a:srgbClr val="CBD5E1"/>
+                </a:solidFill>
+              </a:defRPr>
+            </a:pPr>
+            <a:r>
+              <a:rPr sz="938">
+                <a:solidFill>
+                  <a:srgbClr val="CBD5E1"/>
+                </a:solidFill>
+              </a:rPr>
+              <a:t>브랜치 운영 원칙</a:t>
+            </a:r>
+          </a:p>
+        </p:txBody>
+      </p:sp>
+      <p:sp>
+        <p:nvSpPr>
+          <p:cNvPr id="19" name="timeline-card-2">
+            <a:extLst xmlns:a="http://schemas.openxmlformats.org/drawingml/2006/main">
+              <a:ext uri="{FF2B5EF4-FFF2-40B4-BE49-F238E27FC236}">
+                <a16:creationId xmlns:a16="http://schemas.microsoft.com/office/drawing/2014/main" id="{A6A5FF29-6E45-4EAB-9E78-33592C55CDE7}"/>
+              </a:ext>
+            </a:extLst>
+          </p:cNvPr>
+          <p:cNvSpPr>
+            <a:spLocks xmlns:a="http://schemas.openxmlformats.org/drawingml/2006/main" noGrp="1"/>
+          </p:cNvSpPr>
+          <p:nvPr/>
+        </p:nvSpPr>
+        <p:spPr>
+          <a:xfrm xmlns:a="http://schemas.openxmlformats.org/drawingml/2006/main">
+            <a:off x="2324100" y="2209800"/>
+            <a:ext cx="1581150" cy="2381250"/>
+          </a:xfrm>
+          <a:prstGeom xmlns:a="http://schemas.openxmlformats.org/drawingml/2006/main" prst="roundRect">
+            <a:avLst>
+              <a:gd name="adj" fmla="val 4819"/>
+            </a:avLst>
+          </a:prstGeom>
+          <a:solidFill xmlns:a="http://schemas.openxmlformats.org/drawingml/2006/main">
+            <a:srgbClr val="111827"/>
+          </a:solidFill>
+          <a:ln xmlns:a="http://schemas.openxmlformats.org/drawingml/2006/main" w="9525">
+            <a:solidFill>
+              <a:srgbClr val="2F3B55"/>
+            </a:solidFill>
+            <a:prstDash val="solid"/>
+          </a:ln>
+        </p:spPr>
+      </p:sp>
+      <p:sp>
+        <p:nvSpPr>
+          <p:cNvPr id="20" name="timeline-bar-2">
+            <a:extLst xmlns:a="http://schemas.openxmlformats.org/drawingml/2006/main">
+              <a:ext uri="{FF2B5EF4-FFF2-40B4-BE49-F238E27FC236}">
+                <a16:creationId xmlns:a16="http://schemas.microsoft.com/office/drawing/2014/main" id="{195578C6-DF0A-417B-8993-D858D5074EFE}"/>
+              </a:ext>
+            </a:extLst>
+          </p:cNvPr>
+          <p:cNvSpPr>
+            <a:spLocks xmlns:a="http://schemas.openxmlformats.org/drawingml/2006/main" noGrp="1"/>
+          </p:cNvSpPr>
+          <p:nvPr/>
+        </p:nvSpPr>
+        <p:spPr>
+          <a:xfrm xmlns:a="http://schemas.openxmlformats.org/drawingml/2006/main">
+            <a:off x="2324100" y="2209800"/>
+            <a:ext cx="1581150" cy="66675"/>
+          </a:xfrm>
+          <a:prstGeom xmlns:a="http://schemas.openxmlformats.org/drawingml/2006/main" prst="rect">
+            <a:avLst/>
+          </a:prstGeom>
+          <a:solidFill xmlns:a="http://schemas.openxmlformats.org/drawingml/2006/main">
+            <a:srgbClr val="FF6B35"/>
+          </a:solidFill>
+          <a:ln xmlns:a="http://schemas.openxmlformats.org/drawingml/2006/main" w="0">
+            <a:solidFill>
+              <a:srgbClr val="FF6B35"/>
+            </a:solidFill>
+            <a:prstDash val="solid"/>
+          </a:ln>
+        </p:spPr>
+      </p:sp>
+      <p:sp>
+        <p:nvSpPr>
+          <p:cNvPr id="21" name="timeline-month-2">
+            <a:extLst xmlns:a="http://schemas.openxmlformats.org/drawingml/2006/main">
+              <a:ext uri="{FF2B5EF4-FFF2-40B4-BE49-F238E27FC236}">
+                <a16:creationId xmlns:a16="http://schemas.microsoft.com/office/drawing/2014/main" id="{2F94A874-4DB0-4CA3-83CA-394EFD5BA16E}"/>
+              </a:ext>
+            </a:extLst>
+          </p:cNvPr>
+          <p:cNvSpPr>
+            <a:spLocks xmlns:a="http://schemas.openxmlformats.org/drawingml/2006/main" noGrp="1"/>
+          </p:cNvSpPr>
+          <p:nvPr/>
+        </p:nvSpPr>
+        <p:spPr>
+          <a:xfrm xmlns:a="http://schemas.openxmlformats.org/drawingml/2006/main">
+            <a:off x="2476500" y="2438400"/>
+            <a:ext cx="666750" cy="228600"/>
+          </a:xfrm>
+          <a:prstGeom xmlns:a="http://schemas.openxmlformats.org/drawingml/2006/main" prst="rect">
+            <a:avLst/>
+          </a:prstGeom>
+          <a:noFill xmlns:a="http://schemas.openxmlformats.org/drawingml/2006/main"/>
+          <a:ln xmlns:a="http://schemas.openxmlformats.org/drawingml/2006/main" w="0">
+            <a:noFill/>
+            <a:prstDash val="solid"/>
+          </a:ln>
+        </p:spPr>
+        <p:txBody>
+          <a:bodyPr xmlns:a="http://schemas.openxmlformats.org/drawingml/2006/main"/>
+          <a:lstStyle xmlns:a="http://schemas.openxmlformats.org/drawingml/2006/main"/>
+          <a:p xmlns:a="http://schemas.openxmlformats.org/drawingml/2006/main">
+            <a:pPr>
+              <a:defRPr sz="1275" b="1">
+                <a:solidFill>
+                  <a:srgbClr val="FF6B35"/>
+                </a:solidFill>
+              </a:defRPr>
+            </a:pPr>
+            <a:r>
+              <a:rPr sz="1275" b="1">
+                <a:solidFill>
+                  <a:srgbClr val="FF6B35"/>
+                </a:solidFill>
+              </a:rPr>
+              <a:t>D-5M</a:t>
+            </a:r>
+          </a:p>
+        </p:txBody>
+      </p:sp>
+      <p:sp>
+        <p:nvSpPr>
+          <p:cNvPr id="22" name="timeline-title-2">
+            <a:extLst xmlns:a="http://schemas.openxmlformats.org/drawingml/2006/main">
+              <a:ext uri="{FF2B5EF4-FFF2-40B4-BE49-F238E27FC236}">
+                <a16:creationId xmlns:a16="http://schemas.microsoft.com/office/drawing/2014/main" id="{76C5231A-93DB-45B9-86B3-CEFBF886ACEB}"/>
+              </a:ext>
+            </a:extLst>
+          </p:cNvPr>
+          <p:cNvSpPr>
+            <a:spLocks xmlns:a="http://schemas.openxmlformats.org/drawingml/2006/main" noGrp="1"/>
+          </p:cNvSpPr>
+          <p:nvPr/>
+        </p:nvSpPr>
+        <p:spPr>
+          <a:xfrm xmlns:a="http://schemas.openxmlformats.org/drawingml/2006/main">
+            <a:off x="2476500" y="2762250"/>
+            <a:ext cx="1257300" cy="457200"/>
+          </a:xfrm>
+          <a:prstGeom xmlns:a="http://schemas.openxmlformats.org/drawingml/2006/main" prst="rect">
+            <a:avLst/>
+          </a:prstGeom>
+          <a:noFill xmlns:a="http://schemas.openxmlformats.org/drawingml/2006/main"/>
+          <a:ln xmlns:a="http://schemas.openxmlformats.org/drawingml/2006/main" w="0">
+            <a:noFill/>
+            <a:prstDash val="solid"/>
+          </a:ln>
+        </p:spPr>
+        <p:txBody>
+          <a:bodyPr xmlns:a="http://schemas.openxmlformats.org/drawingml/2006/main"/>
+          <a:lstStyle xmlns:a="http://schemas.openxmlformats.org/drawingml/2006/main"/>
+          <a:p xmlns:a="http://schemas.openxmlformats.org/drawingml/2006/main">
+            <a:pPr>
+              <a:defRPr sz="1350" b="1">
+                <a:solidFill>
+                  <a:srgbClr val="FFFFFF"/>
+                </a:solidFill>
+              </a:defRPr>
+            </a:pPr>
+            <a:r>
+              <a:rPr sz="1350" b="1">
+                <a:solidFill>
+                  <a:srgbClr val="FFFFFF"/>
+                </a:solidFill>
+              </a:rPr>
+              <a:t>개발·현지화 동기화</a:t>
+            </a:r>
+          </a:p>
+        </p:txBody>
+      </p:sp>
+      <p:sp>
+        <p:nvSpPr>
+          <p:cNvPr id="23" name="timeline-dot-2-1">
+            <a:extLst xmlns:a="http://schemas.openxmlformats.org/drawingml/2006/main">
+              <a:ext uri="{FF2B5EF4-FFF2-40B4-BE49-F238E27FC236}">
+                <a16:creationId xmlns:a16="http://schemas.microsoft.com/office/drawing/2014/main" id="{020463C6-BC47-48BF-8E26-D5597B163F5B}"/>
+              </a:ext>
+            </a:extLst>
+          </p:cNvPr>
+          <p:cNvSpPr>
+            <a:spLocks xmlns:a="http://schemas.openxmlformats.org/drawingml/2006/main" noGrp="1"/>
+          </p:cNvSpPr>
+          <p:nvPr/>
+        </p:nvSpPr>
+        <p:spPr>
+          <a:xfrm xmlns:a="http://schemas.openxmlformats.org/drawingml/2006/main">
+            <a:off x="2476500" y="3371850"/>
+            <a:ext cx="114300" cy="209550"/>
+          </a:xfrm>
+          <a:prstGeom xmlns:a="http://schemas.openxmlformats.org/drawingml/2006/main" prst="rect">
+            <a:avLst/>
+          </a:prstGeom>
+          <a:noFill xmlns:a="http://schemas.openxmlformats.org/drawingml/2006/main"/>
+          <a:ln xmlns:a="http://schemas.openxmlformats.org/drawingml/2006/main" w="0">
+            <a:noFill/>
+            <a:prstDash val="solid"/>
+          </a:ln>
+        </p:spPr>
+        <p:txBody>
+          <a:bodyPr xmlns:a="http://schemas.openxmlformats.org/drawingml/2006/main"/>
+          <a:lstStyle xmlns:a="http://schemas.openxmlformats.org/drawingml/2006/main"/>
+          <a:p xmlns:a="http://schemas.openxmlformats.org/drawingml/2006/main">
+            <a:pPr>
+              <a:defRPr sz="1350" b="1">
+                <a:solidFill>
+                  <a:srgbClr val="FF6B35"/>
+                </a:solidFill>
+              </a:defRPr>
+            </a:pPr>
+            <a:r>
+              <a:rPr sz="1350" b="1">
+                <a:solidFill>
+                  <a:srgbClr val="FF6B35"/>
+                </a:solidFill>
+              </a:rPr>
+              <a:t>·</a:t>
+            </a:r>
+          </a:p>
+        </p:txBody>
+      </p:sp>
+      <p:sp>
+        <p:nvSpPr>
+          <p:cNvPr id="24" name="timeline-item-2-1">
+            <a:extLst xmlns:a="http://schemas.openxmlformats.org/drawingml/2006/main">
+              <a:ext uri="{FF2B5EF4-FFF2-40B4-BE49-F238E27FC236}">
+                <a16:creationId xmlns:a16="http://schemas.microsoft.com/office/drawing/2014/main" id="{3601A83A-6A0D-4219-922A-88584211CE82}"/>
+              </a:ext>
+            </a:extLst>
+          </p:cNvPr>
+          <p:cNvSpPr>
+            <a:spLocks xmlns:a="http://schemas.openxmlformats.org/drawingml/2006/main" noGrp="1"/>
+          </p:cNvSpPr>
+          <p:nvPr/>
+        </p:nvSpPr>
+        <p:spPr>
+          <a:xfrm xmlns:a="http://schemas.openxmlformats.org/drawingml/2006/main">
+            <a:off x="2609850" y="3400425"/>
+            <a:ext cx="1123950" cy="285750"/>
+          </a:xfrm>
+          <a:prstGeom xmlns:a="http://schemas.openxmlformats.org/drawingml/2006/main" prst="rect">
+            <a:avLst/>
+          </a:prstGeom>
+          <a:noFill xmlns:a="http://schemas.openxmlformats.org/drawingml/2006/main"/>
+          <a:ln xmlns:a="http://schemas.openxmlformats.org/drawingml/2006/main" w="0">
+            <a:noFill/>
+            <a:prstDash val="solid"/>
+          </a:ln>
+        </p:spPr>
+        <p:txBody>
+          <a:bodyPr xmlns:a="http://schemas.openxmlformats.org/drawingml/2006/main"/>
+          <a:lstStyle xmlns:a="http://schemas.openxmlformats.org/drawingml/2006/main"/>
+          <a:p xmlns:a="http://schemas.openxmlformats.org/drawingml/2006/main">
+            <a:pPr>
+              <a:defRPr sz="938">
+                <a:solidFill>
+                  <a:srgbClr val="CBD5E1"/>
+                </a:solidFill>
+              </a:defRPr>
+            </a:pPr>
+            <a:r>
+              <a:rPr sz="938">
+                <a:solidFill>
+                  <a:srgbClr val="CBD5E1"/>
+                </a:solidFill>
+              </a:rPr>
+              <a:t>번역·리소스 반영</a:t>
+            </a:r>
+          </a:p>
+        </p:txBody>
+      </p:sp>
+      <p:sp>
+        <p:nvSpPr>
+          <p:cNvPr id="25" name="timeline-dot-2-2">
+            <a:extLst xmlns:a="http://schemas.openxmlformats.org/drawingml/2006/main">
+              <a:ext uri="{FF2B5EF4-FFF2-40B4-BE49-F238E27FC236}">
+                <a16:creationId xmlns:a16="http://schemas.microsoft.com/office/drawing/2014/main" id="{DBCA3854-95EB-4A81-8013-74D58CFF98D3}"/>
+              </a:ext>
+            </a:extLst>
+          </p:cNvPr>
+          <p:cNvSpPr>
+            <a:spLocks xmlns:a="http://schemas.openxmlformats.org/drawingml/2006/main" noGrp="1"/>
+          </p:cNvSpPr>
+          <p:nvPr/>
+        </p:nvSpPr>
+        <p:spPr>
+          <a:xfrm xmlns:a="http://schemas.openxmlformats.org/drawingml/2006/main">
+            <a:off x="2476500" y="3695700"/>
+            <a:ext cx="114300" cy="209550"/>
+          </a:xfrm>
+          <a:prstGeom xmlns:a="http://schemas.openxmlformats.org/drawingml/2006/main" prst="rect">
+            <a:avLst/>
+          </a:prstGeom>
+          <a:noFill xmlns:a="http://schemas.openxmlformats.org/drawingml/2006/main"/>
+          <a:ln xmlns:a="http://schemas.openxmlformats.org/drawingml/2006/main" w="0">
+            <a:noFill/>
+            <a:prstDash val="solid"/>
+          </a:ln>
+        </p:spPr>
+        <p:txBody>
+          <a:bodyPr xmlns:a="http://schemas.openxmlformats.org/drawingml/2006/main"/>
+          <a:lstStyle xmlns:a="http://schemas.openxmlformats.org/drawingml/2006/main"/>
+          <a:p xmlns:a="http://schemas.openxmlformats.org/drawingml/2006/main">
+            <a:pPr>
+              <a:defRPr sz="1350" b="1">
+                <a:solidFill>
+                  <a:srgbClr val="FF6B35"/>
+                </a:solidFill>
+              </a:defRPr>
+            </a:pPr>
+            <a:r>
+              <a:rPr sz="1350" b="1">
+                <a:solidFill>
+                  <a:srgbClr val="FF6B35"/>
+                </a:solidFill>
+              </a:rPr>
+              <a:t>·</a:t>
+            </a:r>
+          </a:p>
+        </p:txBody>
+      </p:sp>
+      <p:sp>
+        <p:nvSpPr>
+          <p:cNvPr id="26" name="timeline-item-2-2">
+            <a:extLst xmlns:a="http://schemas.openxmlformats.org/drawingml/2006/main">
+              <a:ext uri="{FF2B5EF4-FFF2-40B4-BE49-F238E27FC236}">
+                <a16:creationId xmlns:a16="http://schemas.microsoft.com/office/drawing/2014/main" id="{95A3EB83-2426-4D0C-9654-94ECA511AC99}"/>
+              </a:ext>
+            </a:extLst>
+          </p:cNvPr>
+          <p:cNvSpPr>
+            <a:spLocks xmlns:a="http://schemas.openxmlformats.org/drawingml/2006/main" noGrp="1"/>
+          </p:cNvSpPr>
+          <p:nvPr/>
+        </p:nvSpPr>
+        <p:spPr>
+          <a:xfrm xmlns:a="http://schemas.openxmlformats.org/drawingml/2006/main">
+            <a:off x="2609850" y="3724275"/>
+            <a:ext cx="1123950" cy="285750"/>
+          </a:xfrm>
+          <a:prstGeom xmlns:a="http://schemas.openxmlformats.org/drawingml/2006/main" prst="rect">
+            <a:avLst/>
+          </a:prstGeom>
+          <a:noFill xmlns:a="http://schemas.openxmlformats.org/drawingml/2006/main"/>
+          <a:ln xmlns:a="http://schemas.openxmlformats.org/drawingml/2006/main" w="0">
+            <a:noFill/>
+            <a:prstDash val="solid"/>
+          </a:ln>
+        </p:spPr>
+        <p:txBody>
+          <a:bodyPr xmlns:a="http://schemas.openxmlformats.org/drawingml/2006/main"/>
+          <a:lstStyle xmlns:a="http://schemas.openxmlformats.org/drawingml/2006/main"/>
+          <a:p xmlns:a="http://schemas.openxmlformats.org/drawingml/2006/main">
+            <a:pPr>
+              <a:defRPr sz="938">
+                <a:solidFill>
+                  <a:srgbClr val="CBD5E1"/>
+                </a:solidFill>
+              </a:defRPr>
+            </a:pPr>
+            <a:r>
+              <a:rPr sz="938">
+                <a:solidFill>
+                  <a:srgbClr val="CBD5E1"/>
+                </a:solidFill>
+              </a:rPr>
+              <a:t>퍼블리셔 요청 정리</a:t>
+            </a:r>
+          </a:p>
+        </p:txBody>
+      </p:sp>
+      <p:sp>
+        <p:nvSpPr>
+          <p:cNvPr id="27" name="timeline-dot-2-3">
+            <a:extLst xmlns:a="http://schemas.openxmlformats.org/drawingml/2006/main">
+              <a:ext uri="{FF2B5EF4-FFF2-40B4-BE49-F238E27FC236}">
+                <a16:creationId xmlns:a16="http://schemas.microsoft.com/office/drawing/2014/main" id="{E89A61DA-D74F-4394-AA66-6EAC342B81E2}"/>
+              </a:ext>
+            </a:extLst>
+          </p:cNvPr>
+          <p:cNvSpPr>
+            <a:spLocks xmlns:a="http://schemas.openxmlformats.org/drawingml/2006/main" noGrp="1"/>
+          </p:cNvSpPr>
+          <p:nvPr/>
+        </p:nvSpPr>
+        <p:spPr>
+          <a:xfrm xmlns:a="http://schemas.openxmlformats.org/drawingml/2006/main">
+            <a:off x="2476500" y="4019550"/>
+            <a:ext cx="114300" cy="209550"/>
+          </a:xfrm>
+          <a:prstGeom xmlns:a="http://schemas.openxmlformats.org/drawingml/2006/main" prst="rect">
+            <a:avLst/>
+          </a:prstGeom>
+          <a:noFill xmlns:a="http://schemas.openxmlformats.org/drawingml/2006/main"/>
+          <a:ln xmlns:a="http://schemas.openxmlformats.org/drawingml/2006/main" w="0">
+            <a:noFill/>
+            <a:prstDash val="solid"/>
+          </a:ln>
+        </p:spPr>
+        <p:txBody>
+          <a:bodyPr xmlns:a="http://schemas.openxmlformats.org/drawingml/2006/main"/>
+          <a:lstStyle xmlns:a="http://schemas.openxmlformats.org/drawingml/2006/main"/>
+          <a:p xmlns:a="http://schemas.openxmlformats.org/drawingml/2006/main">
+            <a:pPr>
+              <a:defRPr sz="1350" b="1">
+                <a:solidFill>
+                  <a:srgbClr val="FF6B35"/>
+                </a:solidFill>
+              </a:defRPr>
+            </a:pPr>
+            <a:r>
+              <a:rPr sz="1350" b="1">
+                <a:solidFill>
+                  <a:srgbClr val="FF6B35"/>
+                </a:solidFill>
+              </a:rPr>
+              <a:t>·</a:t>
+            </a:r>
+          </a:p>
+        </p:txBody>
+      </p:sp>
+      <p:sp>
+        <p:nvSpPr>
+          <p:cNvPr id="28" name="timeline-item-2-3">
+            <a:extLst xmlns:a="http://schemas.openxmlformats.org/drawingml/2006/main">
+              <a:ext uri="{FF2B5EF4-FFF2-40B4-BE49-F238E27FC236}">
+                <a16:creationId xmlns:a16="http://schemas.microsoft.com/office/drawing/2014/main" id="{5B3A70E0-2073-4398-AA10-6696199C42FE}"/>
+              </a:ext>
+            </a:extLst>
+          </p:cNvPr>
+          <p:cNvSpPr>
+            <a:spLocks xmlns:a="http://schemas.openxmlformats.org/drawingml/2006/main" noGrp="1"/>
+          </p:cNvSpPr>
+          <p:nvPr/>
+        </p:nvSpPr>
+        <p:spPr>
+          <a:xfrm xmlns:a="http://schemas.openxmlformats.org/drawingml/2006/main">
+            <a:off x="2609850" y="4048125"/>
+            <a:ext cx="1123950" cy="285750"/>
+          </a:xfrm>
+          <a:prstGeom xmlns:a="http://schemas.openxmlformats.org/drawingml/2006/main" prst="rect">
+            <a:avLst/>
+          </a:prstGeom>
+          <a:noFill xmlns:a="http://schemas.openxmlformats.org/drawingml/2006/main"/>
+          <a:ln xmlns:a="http://schemas.openxmlformats.org/drawingml/2006/main" w="0">
+            <a:noFill/>
+            <a:prstDash val="solid"/>
+          </a:ln>
+        </p:spPr>
+        <p:txBody>
+          <a:bodyPr xmlns:a="http://schemas.openxmlformats.org/drawingml/2006/main"/>
+          <a:lstStyle xmlns:a="http://schemas.openxmlformats.org/drawingml/2006/main"/>
+          <a:p xmlns:a="http://schemas.openxmlformats.org/drawingml/2006/main">
+            <a:pPr>
+              <a:defRPr sz="938">
+                <a:solidFill>
+                  <a:srgbClr val="CBD5E1"/>
+                </a:solidFill>
+              </a:defRPr>
+            </a:pPr>
+            <a:r>
+              <a:rPr sz="938">
+                <a:solidFill>
+                  <a:srgbClr val="CBD5E1"/>
+                </a:solidFill>
+              </a:rPr>
+              <a:t>기능 마감 기준</a:t>
+            </a:r>
+          </a:p>
+        </p:txBody>
+      </p:sp>
+      <p:sp>
+        <p:nvSpPr>
+          <p:cNvPr id="29" name="timeline-card-3">
+            <a:extLst xmlns:a="http://schemas.openxmlformats.org/drawingml/2006/main">
+              <a:ext uri="{FF2B5EF4-FFF2-40B4-BE49-F238E27FC236}">
+                <a16:creationId xmlns:a16="http://schemas.microsoft.com/office/drawing/2014/main" id="{8136DCB9-7B16-4913-B210-019306A147DF}"/>
+              </a:ext>
+            </a:extLst>
+          </p:cNvPr>
+          <p:cNvSpPr>
+            <a:spLocks xmlns:a="http://schemas.openxmlformats.org/drawingml/2006/main" noGrp="1"/>
+          </p:cNvSpPr>
+          <p:nvPr/>
+        </p:nvSpPr>
+        <p:spPr>
+          <a:xfrm xmlns:a="http://schemas.openxmlformats.org/drawingml/2006/main">
+            <a:off x="4133850" y="2209800"/>
+            <a:ext cx="1581150" cy="2381250"/>
+          </a:xfrm>
+          <a:prstGeom xmlns:a="http://schemas.openxmlformats.org/drawingml/2006/main" prst="roundRect">
+            <a:avLst>
+              <a:gd name="adj" fmla="val 4819"/>
+            </a:avLst>
+          </a:prstGeom>
+          <a:solidFill xmlns:a="http://schemas.openxmlformats.org/drawingml/2006/main">
+            <a:srgbClr val="111827"/>
+          </a:solidFill>
+          <a:ln xmlns:a="http://schemas.openxmlformats.org/drawingml/2006/main" w="9525">
+            <a:solidFill>
+              <a:srgbClr val="2F3B55"/>
+            </a:solidFill>
+            <a:prstDash val="solid"/>
+          </a:ln>
+        </p:spPr>
+      </p:sp>
+      <p:sp>
+        <p:nvSpPr>
+          <p:cNvPr id="30" name="timeline-bar-3">
+            <a:extLst xmlns:a="http://schemas.openxmlformats.org/drawingml/2006/main">
+              <a:ext uri="{FF2B5EF4-FFF2-40B4-BE49-F238E27FC236}">
+                <a16:creationId xmlns:a16="http://schemas.microsoft.com/office/drawing/2014/main" id="{B2144D0E-8254-4CB6-B9A8-ABDA7373B5B3}"/>
+              </a:ext>
+            </a:extLst>
+          </p:cNvPr>
+          <p:cNvSpPr>
+            <a:spLocks xmlns:a="http://schemas.openxmlformats.org/drawingml/2006/main" noGrp="1"/>
+          </p:cNvSpPr>
+          <p:nvPr/>
+        </p:nvSpPr>
+        <p:spPr>
+          <a:xfrm xmlns:a="http://schemas.openxmlformats.org/drawingml/2006/main">
+            <a:off x="4133850" y="2209800"/>
+            <a:ext cx="1581150" cy="66675"/>
+          </a:xfrm>
+          <a:prstGeom xmlns:a="http://schemas.openxmlformats.org/drawingml/2006/main" prst="rect">
+            <a:avLst/>
+          </a:prstGeom>
+          <a:solidFill xmlns:a="http://schemas.openxmlformats.org/drawingml/2006/main">
+            <a:srgbClr val="7C3AED"/>
+          </a:solidFill>
+          <a:ln xmlns:a="http://schemas.openxmlformats.org/drawingml/2006/main" w="0">
+            <a:solidFill>
+              <a:srgbClr val="7C3AED"/>
+            </a:solidFill>
+            <a:prstDash val="solid"/>
+          </a:ln>
+        </p:spPr>
+      </p:sp>
+      <p:sp>
+        <p:nvSpPr>
+          <p:cNvPr id="31" name="timeline-month-3">
+            <a:extLst xmlns:a="http://schemas.openxmlformats.org/drawingml/2006/main">
+              <a:ext uri="{FF2B5EF4-FFF2-40B4-BE49-F238E27FC236}">
+                <a16:creationId xmlns:a16="http://schemas.microsoft.com/office/drawing/2014/main" id="{77674FC3-5C2A-4F69-A853-0FED66BEE363}"/>
+              </a:ext>
+            </a:extLst>
+          </p:cNvPr>
+          <p:cNvSpPr>
+            <a:spLocks xmlns:a="http://schemas.openxmlformats.org/drawingml/2006/main" noGrp="1"/>
+          </p:cNvSpPr>
+          <p:nvPr/>
+        </p:nvSpPr>
+        <p:spPr>
+          <a:xfrm xmlns:a="http://schemas.openxmlformats.org/drawingml/2006/main">
+            <a:off x="4286250" y="2438400"/>
+            <a:ext cx="666750" cy="228600"/>
+          </a:xfrm>
+          <a:prstGeom xmlns:a="http://schemas.openxmlformats.org/drawingml/2006/main" prst="rect">
+            <a:avLst/>
+          </a:prstGeom>
+          <a:noFill xmlns:a="http://schemas.openxmlformats.org/drawingml/2006/main"/>
+          <a:ln xmlns:a="http://schemas.openxmlformats.org/drawingml/2006/main" w="0">
+            <a:noFill/>
+            <a:prstDash val="solid"/>
+          </a:ln>
+        </p:spPr>
+        <p:txBody>
+          <a:bodyPr xmlns:a="http://schemas.openxmlformats.org/drawingml/2006/main"/>
+          <a:lstStyle xmlns:a="http://schemas.openxmlformats.org/drawingml/2006/main"/>
+          <a:p xmlns:a="http://schemas.openxmlformats.org/drawingml/2006/main">
+            <a:pPr>
+              <a:defRPr sz="1275" b="1">
+                <a:solidFill>
+                  <a:srgbClr val="7C3AED"/>
+                </a:solidFill>
+              </a:defRPr>
+            </a:pPr>
+            <a:r>
+              <a:rPr sz="1275" b="1">
+                <a:solidFill>
+                  <a:srgbClr val="7C3AED"/>
+                </a:solidFill>
+              </a:rPr>
+              <a:t>D-4M</a:t>
+            </a:r>
+          </a:p>
+        </p:txBody>
+      </p:sp>
+      <p:sp>
+        <p:nvSpPr>
+          <p:cNvPr id="32" name="timeline-title-3">
+            <a:extLst xmlns:a="http://schemas.openxmlformats.org/drawingml/2006/main">
+              <a:ext uri="{FF2B5EF4-FFF2-40B4-BE49-F238E27FC236}">
+                <a16:creationId xmlns:a16="http://schemas.microsoft.com/office/drawing/2014/main" id="{E5C1CD1D-8EE7-48FC-8C18-ED01B85A7784}"/>
+              </a:ext>
+            </a:extLst>
+          </p:cNvPr>
+          <p:cNvSpPr>
+            <a:spLocks xmlns:a="http://schemas.openxmlformats.org/drawingml/2006/main" noGrp="1"/>
+          </p:cNvSpPr>
+          <p:nvPr/>
+        </p:nvSpPr>
+        <p:spPr>
+          <a:xfrm xmlns:a="http://schemas.openxmlformats.org/drawingml/2006/main">
+            <a:off x="4286250" y="2762250"/>
+            <a:ext cx="1257300" cy="457200"/>
+          </a:xfrm>
+          <a:prstGeom xmlns:a="http://schemas.openxmlformats.org/drawingml/2006/main" prst="rect">
+            <a:avLst/>
+          </a:prstGeom>
+          <a:noFill xmlns:a="http://schemas.openxmlformats.org/drawingml/2006/main"/>
+          <a:ln xmlns:a="http://schemas.openxmlformats.org/drawingml/2006/main" w="0">
+            <a:noFill/>
+            <a:prstDash val="solid"/>
+          </a:ln>
+        </p:spPr>
+        <p:txBody>
+          <a:bodyPr xmlns:a="http://schemas.openxmlformats.org/drawingml/2006/main"/>
+          <a:lstStyle xmlns:a="http://schemas.openxmlformats.org/drawingml/2006/main"/>
+          <a:p xmlns:a="http://schemas.openxmlformats.org/drawingml/2006/main">
+            <a:pPr>
+              <a:defRPr sz="1350" b="1">
+                <a:solidFill>
+                  <a:srgbClr val="FFFFFF"/>
+                </a:solidFill>
+              </a:defRPr>
+            </a:pPr>
+            <a:r>
+              <a:rPr sz="1350" b="1">
+                <a:solidFill>
+                  <a:srgbClr val="FFFFFF"/>
+                </a:solidFill>
+              </a:rPr>
+              <a:t>내부 QA 진입</a:t>
+            </a:r>
+          </a:p>
+        </p:txBody>
+      </p:sp>
+      <p:sp>
+        <p:nvSpPr>
+          <p:cNvPr id="33" name="timeline-dot-3-1">
+            <a:extLst xmlns:a="http://schemas.openxmlformats.org/drawingml/2006/main">
+              <a:ext uri="{FF2B5EF4-FFF2-40B4-BE49-F238E27FC236}">
+                <a16:creationId xmlns:a16="http://schemas.microsoft.com/office/drawing/2014/main" id="{E646D37B-A309-43BD-9623-BEB634A2106B}"/>
+              </a:ext>
+            </a:extLst>
+          </p:cNvPr>
+          <p:cNvSpPr>
+            <a:spLocks xmlns:a="http://schemas.openxmlformats.org/drawingml/2006/main" noGrp="1"/>
+          </p:cNvSpPr>
+          <p:nvPr/>
+        </p:nvSpPr>
+        <p:spPr>
+          <a:xfrm xmlns:a="http://schemas.openxmlformats.org/drawingml/2006/main">
+            <a:off x="4286250" y="3371850"/>
+            <a:ext cx="114300" cy="209550"/>
+          </a:xfrm>
+          <a:prstGeom xmlns:a="http://schemas.openxmlformats.org/drawingml/2006/main" prst="rect">
+            <a:avLst/>
+          </a:prstGeom>
+          <a:noFill xmlns:a="http://schemas.openxmlformats.org/drawingml/2006/main"/>
+          <a:ln xmlns:a="http://schemas.openxmlformats.org/drawingml/2006/main" w="0">
+            <a:noFill/>
+            <a:prstDash val="solid"/>
+          </a:ln>
+        </p:spPr>
+        <p:txBody>
+          <a:bodyPr xmlns:a="http://schemas.openxmlformats.org/drawingml/2006/main"/>
+          <a:lstStyle xmlns:a="http://schemas.openxmlformats.org/drawingml/2006/main"/>
+          <a:p xmlns:a="http://schemas.openxmlformats.org/drawingml/2006/main">
+            <a:pPr>
+              <a:defRPr sz="1350" b="1">
+                <a:solidFill>
+                  <a:srgbClr val="7C3AED"/>
+                </a:solidFill>
+              </a:defRPr>
+            </a:pPr>
+            <a:r>
+              <a:rPr sz="1350" b="1">
+                <a:solidFill>
+                  <a:srgbClr val="7C3AED"/>
+                </a:solidFill>
+              </a:rPr>
+              <a:t>·</a:t>
+            </a:r>
+          </a:p>
+        </p:txBody>
+      </p:sp>
+      <p:sp>
+        <p:nvSpPr>
+          <p:cNvPr id="34" name="timeline-item-3-1">
+            <a:extLst xmlns:a="http://schemas.openxmlformats.org/drawingml/2006/main">
+              <a:ext uri="{FF2B5EF4-FFF2-40B4-BE49-F238E27FC236}">
+                <a16:creationId xmlns:a16="http://schemas.microsoft.com/office/drawing/2014/main" id="{F2439954-C73C-450D-B0BA-31CA66C854E3}"/>
+              </a:ext>
+            </a:extLst>
+          </p:cNvPr>
+          <p:cNvSpPr>
+            <a:spLocks xmlns:a="http://schemas.openxmlformats.org/drawingml/2006/main" noGrp="1"/>
+          </p:cNvSpPr>
+          <p:nvPr/>
+        </p:nvSpPr>
+        <p:spPr>
+          <a:xfrm xmlns:a="http://schemas.openxmlformats.org/drawingml/2006/main">
+            <a:off x="4419600" y="3400425"/>
+            <a:ext cx="1123950" cy="285750"/>
+          </a:xfrm>
+          <a:prstGeom xmlns:a="http://schemas.openxmlformats.org/drawingml/2006/main" prst="rect">
+            <a:avLst/>
+          </a:prstGeom>
+          <a:noFill xmlns:a="http://schemas.openxmlformats.org/drawingml/2006/main"/>
+          <a:ln xmlns:a="http://schemas.openxmlformats.org/drawingml/2006/main" w="0">
+            <a:noFill/>
+            <a:prstDash val="solid"/>
+          </a:ln>
+        </p:spPr>
+        <p:txBody>
+          <a:bodyPr xmlns:a="http://schemas.openxmlformats.org/drawingml/2006/main"/>
+          <a:lstStyle xmlns:a="http://schemas.openxmlformats.org/drawingml/2006/main"/>
+          <a:p xmlns:a="http://schemas.openxmlformats.org/drawingml/2006/main">
+            <a:pPr>
+              <a:defRPr sz="938">
+                <a:solidFill>
+                  <a:srgbClr val="CBD5E1"/>
+                </a:solidFill>
+              </a:defRPr>
+            </a:pPr>
+            <a:r>
+              <a:rPr sz="938">
+                <a:solidFill>
+                  <a:srgbClr val="CBD5E1"/>
+                </a:solidFill>
+              </a:rPr>
+              <a:t>일본향 빌드 점검</a:t>
+            </a:r>
+          </a:p>
+        </p:txBody>
+      </p:sp>
+      <p:sp>
+        <p:nvSpPr>
+          <p:cNvPr id="35" name="timeline-dot-3-2">
+            <a:extLst xmlns:a="http://schemas.openxmlformats.org/drawingml/2006/main">
+              <a:ext uri="{FF2B5EF4-FFF2-40B4-BE49-F238E27FC236}">
+                <a16:creationId xmlns:a16="http://schemas.microsoft.com/office/drawing/2014/main" id="{819E8031-7889-44B8-A34D-0CC7BDAA3DF4}"/>
+              </a:ext>
+            </a:extLst>
+          </p:cNvPr>
+          <p:cNvSpPr>
+            <a:spLocks xmlns:a="http://schemas.openxmlformats.org/drawingml/2006/main" noGrp="1"/>
+          </p:cNvSpPr>
+          <p:nvPr/>
+        </p:nvSpPr>
+        <p:spPr>
+          <a:xfrm xmlns:a="http://schemas.openxmlformats.org/drawingml/2006/main">
+            <a:off x="4286250" y="3695700"/>
+            <a:ext cx="114300" cy="209550"/>
+          </a:xfrm>
+          <a:prstGeom xmlns:a="http://schemas.openxmlformats.org/drawingml/2006/main" prst="rect">
+            <a:avLst/>
+          </a:prstGeom>
+          <a:noFill xmlns:a="http://schemas.openxmlformats.org/drawingml/2006/main"/>
+          <a:ln xmlns:a="http://schemas.openxmlformats.org/drawingml/2006/main" w="0">
+            <a:noFill/>
+            <a:prstDash val="solid"/>
+          </a:ln>
+        </p:spPr>
+        <p:txBody>
+          <a:bodyPr xmlns:a="http://schemas.openxmlformats.org/drawingml/2006/main"/>
+          <a:lstStyle xmlns:a="http://schemas.openxmlformats.org/drawingml/2006/main"/>
+          <a:p xmlns:a="http://schemas.openxmlformats.org/drawingml/2006/main">
+            <a:pPr>
+              <a:defRPr sz="1350" b="1">
+                <a:solidFill>
+                  <a:srgbClr val="7C3AED"/>
+                </a:solidFill>
+              </a:defRPr>
+            </a:pPr>
+            <a:r>
+              <a:rPr sz="1350" b="1">
+                <a:solidFill>
+                  <a:srgbClr val="7C3AED"/>
+                </a:solidFill>
+              </a:rPr>
+              <a:t>·</a:t>
+            </a:r>
+          </a:p>
+        </p:txBody>
+      </p:sp>
+      <p:sp>
+        <p:nvSpPr>
+          <p:cNvPr id="36" name="timeline-item-3-2">
+            <a:extLst xmlns:a="http://schemas.openxmlformats.org/drawingml/2006/main">
+              <a:ext uri="{FF2B5EF4-FFF2-40B4-BE49-F238E27FC236}">
+                <a16:creationId xmlns:a16="http://schemas.microsoft.com/office/drawing/2014/main" id="{DB62570B-87A0-4119-A730-3E2AE8C291AE}"/>
+              </a:ext>
+            </a:extLst>
+          </p:cNvPr>
+          <p:cNvSpPr>
+            <a:spLocks xmlns:a="http://schemas.openxmlformats.org/drawingml/2006/main" noGrp="1"/>
+          </p:cNvSpPr>
+          <p:nvPr/>
+        </p:nvSpPr>
+        <p:spPr>
+          <a:xfrm xmlns:a="http://schemas.openxmlformats.org/drawingml/2006/main">
+            <a:off x="4419600" y="3724275"/>
+            <a:ext cx="1123950" cy="285750"/>
+          </a:xfrm>
+          <a:prstGeom xmlns:a="http://schemas.openxmlformats.org/drawingml/2006/main" prst="rect">
+            <a:avLst/>
+          </a:prstGeom>
+          <a:noFill xmlns:a="http://schemas.openxmlformats.org/drawingml/2006/main"/>
+          <a:ln xmlns:a="http://schemas.openxmlformats.org/drawingml/2006/main" w="0">
+            <a:noFill/>
+            <a:prstDash val="solid"/>
+          </a:ln>
+        </p:spPr>
+        <p:txBody>
+          <a:bodyPr xmlns:a="http://schemas.openxmlformats.org/drawingml/2006/main"/>
+          <a:lstStyle xmlns:a="http://schemas.openxmlformats.org/drawingml/2006/main"/>
+          <a:p xmlns:a="http://schemas.openxmlformats.org/drawingml/2006/main">
+            <a:pPr>
+              <a:defRPr sz="938">
+                <a:solidFill>
+                  <a:srgbClr val="CBD5E1"/>
+                </a:solidFill>
+              </a:defRPr>
+            </a:pPr>
+            <a:r>
+              <a:rPr sz="938">
+                <a:solidFill>
+                  <a:srgbClr val="CBD5E1"/>
+                </a:solidFill>
+              </a:rPr>
+              <a:t>결함 등급 분류</a:t>
+            </a:r>
+          </a:p>
+        </p:txBody>
+      </p:sp>
+      <p:sp>
+        <p:nvSpPr>
+          <p:cNvPr id="37" name="timeline-dot-3-3">
+            <a:extLst xmlns:a="http://schemas.openxmlformats.org/drawingml/2006/main">
+              <a:ext uri="{FF2B5EF4-FFF2-40B4-BE49-F238E27FC236}">
+                <a16:creationId xmlns:a16="http://schemas.microsoft.com/office/drawing/2014/main" id="{CA12C054-94C1-404C-9508-DE304EC1F921}"/>
+              </a:ext>
+            </a:extLst>
+          </p:cNvPr>
+          <p:cNvSpPr>
+            <a:spLocks xmlns:a="http://schemas.openxmlformats.org/drawingml/2006/main" noGrp="1"/>
+          </p:cNvSpPr>
+          <p:nvPr/>
+        </p:nvSpPr>
+        <p:spPr>
+          <a:xfrm xmlns:a="http://schemas.openxmlformats.org/drawingml/2006/main">
+            <a:off x="4286250" y="4019550"/>
+            <a:ext cx="114300" cy="209550"/>
+          </a:xfrm>
+          <a:prstGeom xmlns:a="http://schemas.openxmlformats.org/drawingml/2006/main" prst="rect">
+            <a:avLst/>
+          </a:prstGeom>
+          <a:noFill xmlns:a="http://schemas.openxmlformats.org/drawingml/2006/main"/>
+          <a:ln xmlns:a="http://schemas.openxmlformats.org/drawingml/2006/main" w="0">
+            <a:noFill/>
+            <a:prstDash val="solid"/>
+          </a:ln>
+        </p:spPr>
+        <p:txBody>
+          <a:bodyPr xmlns:a="http://schemas.openxmlformats.org/drawingml/2006/main"/>
+          <a:lstStyle xmlns:a="http://schemas.openxmlformats.org/drawingml/2006/main"/>
+          <a:p xmlns:a="http://schemas.openxmlformats.org/drawingml/2006/main">
+            <a:pPr>
+              <a:defRPr sz="1350" b="1">
+                <a:solidFill>
+                  <a:srgbClr val="7C3AED"/>
+                </a:solidFill>
+              </a:defRPr>
+            </a:pPr>
+            <a:r>
+              <a:rPr sz="1350" b="1">
+                <a:solidFill>
+                  <a:srgbClr val="7C3AED"/>
+                </a:solidFill>
+              </a:rPr>
+              <a:t>·</a:t>
+            </a:r>
+          </a:p>
+        </p:txBody>
+      </p:sp>
+      <p:sp>
+        <p:nvSpPr>
+          <p:cNvPr id="38" name="timeline-item-3-3">
+            <a:extLst xmlns:a="http://schemas.openxmlformats.org/drawingml/2006/main">
+              <a:ext uri="{FF2B5EF4-FFF2-40B4-BE49-F238E27FC236}">
+                <a16:creationId xmlns:a16="http://schemas.microsoft.com/office/drawing/2014/main" id="{46D63C6A-6226-4AFA-ABC5-56C1A671A8B0}"/>
+              </a:ext>
+            </a:extLst>
+          </p:cNvPr>
+          <p:cNvSpPr>
+            <a:spLocks xmlns:a="http://schemas.openxmlformats.org/drawingml/2006/main" noGrp="1"/>
+          </p:cNvSpPr>
+          <p:nvPr/>
+        </p:nvSpPr>
+        <p:spPr>
+          <a:xfrm xmlns:a="http://schemas.openxmlformats.org/drawingml/2006/main">
+            <a:off x="4419600" y="4048125"/>
+            <a:ext cx="1123950" cy="285750"/>
+          </a:xfrm>
+          <a:prstGeom xmlns:a="http://schemas.openxmlformats.org/drawingml/2006/main" prst="rect">
+            <a:avLst/>
+          </a:prstGeom>
+          <a:noFill xmlns:a="http://schemas.openxmlformats.org/drawingml/2006/main"/>
+          <a:ln xmlns:a="http://schemas.openxmlformats.org/drawingml/2006/main" w="0">
+            <a:noFill/>
+            <a:prstDash val="solid"/>
+          </a:ln>
+        </p:spPr>
+        <p:txBody>
+          <a:bodyPr xmlns:a="http://schemas.openxmlformats.org/drawingml/2006/main"/>
+          <a:lstStyle xmlns:a="http://schemas.openxmlformats.org/drawingml/2006/main"/>
+          <a:p xmlns:a="http://schemas.openxmlformats.org/drawingml/2006/main">
+            <a:pPr>
+              <a:defRPr sz="938">
+                <a:solidFill>
+                  <a:srgbClr val="CBD5E1"/>
+                </a:solidFill>
+              </a:defRPr>
+            </a:pPr>
+            <a:r>
+              <a:rPr sz="938">
+                <a:solidFill>
+                  <a:srgbClr val="CBD5E1"/>
+                </a:solidFill>
+              </a:rPr>
+              <a:t>수정 우선순위</a:t>
+            </a:r>
+          </a:p>
+        </p:txBody>
+      </p:sp>
+      <p:sp>
+        <p:nvSpPr>
+          <p:cNvPr id="39" name="timeline-card-4">
+            <a:extLst xmlns:a="http://schemas.openxmlformats.org/drawingml/2006/main">
+              <a:ext uri="{FF2B5EF4-FFF2-40B4-BE49-F238E27FC236}">
+                <a16:creationId xmlns:a16="http://schemas.microsoft.com/office/drawing/2014/main" id="{BBAFE33F-817D-45E3-BA76-8DFBDF1F5E32}"/>
+              </a:ext>
+            </a:extLst>
+          </p:cNvPr>
+          <p:cNvSpPr>
+            <a:spLocks xmlns:a="http://schemas.openxmlformats.org/drawingml/2006/main" noGrp="1"/>
+          </p:cNvSpPr>
+          <p:nvPr/>
+        </p:nvSpPr>
+        <p:spPr>
+          <a:xfrm xmlns:a="http://schemas.openxmlformats.org/drawingml/2006/main">
+            <a:off x="5943600" y="2209800"/>
+            <a:ext cx="1581150" cy="2381250"/>
+          </a:xfrm>
+          <a:prstGeom xmlns:a="http://schemas.openxmlformats.org/drawingml/2006/main" prst="roundRect">
+            <a:avLst>
+              <a:gd name="adj" fmla="val 4819"/>
+            </a:avLst>
+          </a:prstGeom>
+          <a:solidFill xmlns:a="http://schemas.openxmlformats.org/drawingml/2006/main">
+            <a:srgbClr val="111827"/>
+          </a:solidFill>
+          <a:ln xmlns:a="http://schemas.openxmlformats.org/drawingml/2006/main" w="9525">
+            <a:solidFill>
+              <a:srgbClr val="2F3B55"/>
+            </a:solidFill>
+            <a:prstDash val="solid"/>
+          </a:ln>
+        </p:spPr>
+      </p:sp>
+      <p:sp>
+        <p:nvSpPr>
+          <p:cNvPr id="40" name="timeline-bar-4">
+            <a:extLst xmlns:a="http://schemas.openxmlformats.org/drawingml/2006/main">
+              <a:ext uri="{FF2B5EF4-FFF2-40B4-BE49-F238E27FC236}">
+                <a16:creationId xmlns:a16="http://schemas.microsoft.com/office/drawing/2014/main" id="{62CDFD11-7E16-4C63-974C-8DC49757E0B0}"/>
+              </a:ext>
+            </a:extLst>
+          </p:cNvPr>
+          <p:cNvSpPr>
+            <a:spLocks xmlns:a="http://schemas.openxmlformats.org/drawingml/2006/main" noGrp="1"/>
+          </p:cNvSpPr>
+          <p:nvPr/>
+        </p:nvSpPr>
+        <p:spPr>
+          <a:xfrm xmlns:a="http://schemas.openxmlformats.org/drawingml/2006/main">
+            <a:off x="5943600" y="2209800"/>
+            <a:ext cx="1581150" cy="66675"/>
+          </a:xfrm>
+          <a:prstGeom xmlns:a="http://schemas.openxmlformats.org/drawingml/2006/main" prst="rect">
+            <a:avLst/>
+          </a:prstGeom>
+          <a:solidFill xmlns:a="http://schemas.openxmlformats.org/drawingml/2006/main">
+            <a:srgbClr val="8BD9E8"/>
+          </a:solidFill>
+          <a:ln xmlns:a="http://schemas.openxmlformats.org/drawingml/2006/main" w="0">
+            <a:solidFill>
+              <a:srgbClr val="8BD9E8"/>
+            </a:solidFill>
+            <a:prstDash val="solid"/>
+          </a:ln>
+        </p:spPr>
+      </p:sp>
+      <p:sp>
+        <p:nvSpPr>
+          <p:cNvPr id="41" name="timeline-month-4">
+            <a:extLst xmlns:a="http://schemas.openxmlformats.org/drawingml/2006/main">
+              <a:ext uri="{FF2B5EF4-FFF2-40B4-BE49-F238E27FC236}">
+                <a16:creationId xmlns:a16="http://schemas.microsoft.com/office/drawing/2014/main" id="{D3AEAB97-9726-4D3F-982F-7A6DB28ED4BB}"/>
+              </a:ext>
+            </a:extLst>
+          </p:cNvPr>
+          <p:cNvSpPr>
+            <a:spLocks xmlns:a="http://schemas.openxmlformats.org/drawingml/2006/main" noGrp="1"/>
+          </p:cNvSpPr>
+          <p:nvPr/>
+        </p:nvSpPr>
+        <p:spPr>
+          <a:xfrm xmlns:a="http://schemas.openxmlformats.org/drawingml/2006/main">
+            <a:off x="6096000" y="2438400"/>
+            <a:ext cx="666750" cy="228600"/>
+          </a:xfrm>
+          <a:prstGeom xmlns:a="http://schemas.openxmlformats.org/drawingml/2006/main" prst="rect">
+            <a:avLst/>
+          </a:prstGeom>
+          <a:noFill xmlns:a="http://schemas.openxmlformats.org/drawingml/2006/main"/>
+          <a:ln xmlns:a="http://schemas.openxmlformats.org/drawingml/2006/main" w="0">
+            <a:noFill/>
+            <a:prstDash val="solid"/>
+          </a:ln>
+        </p:spPr>
+        <p:txBody>
+          <a:bodyPr xmlns:a="http://schemas.openxmlformats.org/drawingml/2006/main"/>
+          <a:lstStyle xmlns:a="http://schemas.openxmlformats.org/drawingml/2006/main"/>
+          <a:p xmlns:a="http://schemas.openxmlformats.org/drawingml/2006/main">
+            <a:pPr>
+              <a:defRPr sz="1275" b="1">
+                <a:solidFill>
+                  <a:srgbClr val="8BD9E8"/>
+                </a:solidFill>
+              </a:defRPr>
+            </a:pPr>
+            <a:r>
+              <a:rPr sz="1275" b="1">
+                <a:solidFill>
+                  <a:srgbClr val="8BD9E8"/>
+                </a:solidFill>
+              </a:rPr>
+              <a:t>D-3M</a:t>
+            </a:r>
+          </a:p>
+        </p:txBody>
+      </p:sp>
+      <p:sp>
+        <p:nvSpPr>
+          <p:cNvPr id="42" name="timeline-title-4">
+            <a:extLst xmlns:a="http://schemas.openxmlformats.org/drawingml/2006/main">
+              <a:ext uri="{FF2B5EF4-FFF2-40B4-BE49-F238E27FC236}">
+                <a16:creationId xmlns:a16="http://schemas.microsoft.com/office/drawing/2014/main" id="{E5B6B059-0906-4D60-8B2C-7B5FEF746CA5}"/>
+              </a:ext>
+            </a:extLst>
+          </p:cNvPr>
+          <p:cNvSpPr>
+            <a:spLocks xmlns:a="http://schemas.openxmlformats.org/drawingml/2006/main" noGrp="1"/>
+          </p:cNvSpPr>
+          <p:nvPr/>
+        </p:nvSpPr>
+        <p:spPr>
+          <a:xfrm xmlns:a="http://schemas.openxmlformats.org/drawingml/2006/main">
+            <a:off x="6096000" y="2762250"/>
+            <a:ext cx="1257300" cy="457200"/>
+          </a:xfrm>
+          <a:prstGeom xmlns:a="http://schemas.openxmlformats.org/drawingml/2006/main" prst="rect">
+            <a:avLst/>
+          </a:prstGeom>
+          <a:noFill xmlns:a="http://schemas.openxmlformats.org/drawingml/2006/main"/>
+          <a:ln xmlns:a="http://schemas.openxmlformats.org/drawingml/2006/main" w="0">
+            <a:noFill/>
+            <a:prstDash val="solid"/>
+          </a:ln>
+        </p:spPr>
+        <p:txBody>
+          <a:bodyPr xmlns:a="http://schemas.openxmlformats.org/drawingml/2006/main"/>
+          <a:lstStyle xmlns:a="http://schemas.openxmlformats.org/drawingml/2006/main"/>
+          <a:p xmlns:a="http://schemas.openxmlformats.org/drawingml/2006/main">
+            <a:pPr>
+              <a:defRPr sz="1350" b="1">
+                <a:solidFill>
+                  <a:srgbClr val="FFFFFF"/>
+                </a:solidFill>
+              </a:defRPr>
+            </a:pPr>
+            <a:r>
+              <a:rPr sz="1350" b="1">
+                <a:solidFill>
+                  <a:srgbClr val="FFFFFF"/>
+                </a:solidFill>
+              </a:rPr>
+              <a:t>검수·CBT 준비</a:t>
+            </a:r>
+          </a:p>
+        </p:txBody>
+      </p:sp>
+      <p:sp>
+        <p:nvSpPr>
+          <p:cNvPr id="43" name="timeline-dot-4-1">
+            <a:extLst xmlns:a="http://schemas.openxmlformats.org/drawingml/2006/main">
+              <a:ext uri="{FF2B5EF4-FFF2-40B4-BE49-F238E27FC236}">
+                <a16:creationId xmlns:a16="http://schemas.microsoft.com/office/drawing/2014/main" id="{22471788-1676-4C04-A2C5-F8A8E0230848}"/>
+              </a:ext>
+            </a:extLst>
+          </p:cNvPr>
+          <p:cNvSpPr>
+            <a:spLocks xmlns:a="http://schemas.openxmlformats.org/drawingml/2006/main" noGrp="1"/>
+          </p:cNvSpPr>
+          <p:nvPr/>
+        </p:nvSpPr>
+        <p:spPr>
+          <a:xfrm xmlns:a="http://schemas.openxmlformats.org/drawingml/2006/main">
+            <a:off x="6096000" y="3371850"/>
+            <a:ext cx="114300" cy="209550"/>
+          </a:xfrm>
+          <a:prstGeom xmlns:a="http://schemas.openxmlformats.org/drawingml/2006/main" prst="rect">
+            <a:avLst/>
+          </a:prstGeom>
+          <a:noFill xmlns:a="http://schemas.openxmlformats.org/drawingml/2006/main"/>
+          <a:ln xmlns:a="http://schemas.openxmlformats.org/drawingml/2006/main" w="0">
+            <a:noFill/>
+            <a:prstDash val="solid"/>
+          </a:ln>
+        </p:spPr>
+        <p:txBody>
+          <a:bodyPr xmlns:a="http://schemas.openxmlformats.org/drawingml/2006/main"/>
+          <a:lstStyle xmlns:a="http://schemas.openxmlformats.org/drawingml/2006/main"/>
+          <a:p xmlns:a="http://schemas.openxmlformats.org/drawingml/2006/main">
+            <a:pPr>
+              <a:defRPr sz="1350" b="1">
+                <a:solidFill>
+                  <a:srgbClr val="8BD9E8"/>
+                </a:solidFill>
+              </a:defRPr>
+            </a:pPr>
+            <a:r>
+              <a:rPr sz="1350" b="1">
+                <a:solidFill>
+                  <a:srgbClr val="8BD9E8"/>
+                </a:solidFill>
+              </a:rPr>
+              <a:t>·</a:t>
+            </a:r>
+          </a:p>
+        </p:txBody>
+      </p:sp>
+      <p:sp>
+        <p:nvSpPr>
+          <p:cNvPr id="44" name="timeline-item-4-1">
+            <a:extLst xmlns:a="http://schemas.openxmlformats.org/drawingml/2006/main">
+              <a:ext uri="{FF2B5EF4-FFF2-40B4-BE49-F238E27FC236}">
+                <a16:creationId xmlns:a16="http://schemas.microsoft.com/office/drawing/2014/main" id="{CC168F41-406A-4B99-904D-2DE9BA834DE5}"/>
+              </a:ext>
+            </a:extLst>
+          </p:cNvPr>
+          <p:cNvSpPr>
+            <a:spLocks xmlns:a="http://schemas.openxmlformats.org/drawingml/2006/main" noGrp="1"/>
+          </p:cNvSpPr>
+          <p:nvPr/>
+        </p:nvSpPr>
+        <p:spPr>
+          <a:xfrm xmlns:a="http://schemas.openxmlformats.org/drawingml/2006/main">
+            <a:off x="6229350" y="3400425"/>
+            <a:ext cx="1123950" cy="285750"/>
+          </a:xfrm>
+          <a:prstGeom xmlns:a="http://schemas.openxmlformats.org/drawingml/2006/main" prst="rect">
+            <a:avLst/>
+          </a:prstGeom>
+          <a:noFill xmlns:a="http://schemas.openxmlformats.org/drawingml/2006/main"/>
+          <a:ln xmlns:a="http://schemas.openxmlformats.org/drawingml/2006/main" w="0">
+            <a:noFill/>
+            <a:prstDash val="solid"/>
+          </a:ln>
+        </p:spPr>
+        <p:txBody>
+          <a:bodyPr xmlns:a="http://schemas.openxmlformats.org/drawingml/2006/main"/>
+          <a:lstStyle xmlns:a="http://schemas.openxmlformats.org/drawingml/2006/main"/>
+          <a:p xmlns:a="http://schemas.openxmlformats.org/drawingml/2006/main">
+            <a:pPr>
+              <a:defRPr sz="938">
+                <a:solidFill>
+                  <a:srgbClr val="CBD5E1"/>
+                </a:solidFill>
+              </a:defRPr>
+            </a:pPr>
+            <a:r>
+              <a:rPr sz="938">
+                <a:solidFill>
+                  <a:srgbClr val="CBD5E1"/>
+                </a:solidFill>
+              </a:rPr>
+              <a:t>퍼블리셔 검수 대응</a:t>
+            </a:r>
+          </a:p>
+        </p:txBody>
+      </p:sp>
+      <p:sp>
+        <p:nvSpPr>
+          <p:cNvPr id="45" name="timeline-dot-4-2">
+            <a:extLst xmlns:a="http://schemas.openxmlformats.org/drawingml/2006/main">
+              <a:ext uri="{FF2B5EF4-FFF2-40B4-BE49-F238E27FC236}">
+                <a16:creationId xmlns:a16="http://schemas.microsoft.com/office/drawing/2014/main" id="{8C1DB313-AEAD-4331-A234-19185727C628}"/>
+              </a:ext>
+            </a:extLst>
+          </p:cNvPr>
+          <p:cNvSpPr>
+            <a:spLocks xmlns:a="http://schemas.openxmlformats.org/drawingml/2006/main" noGrp="1"/>
+          </p:cNvSpPr>
+          <p:nvPr/>
+        </p:nvSpPr>
+        <p:spPr>
+          <a:xfrm xmlns:a="http://schemas.openxmlformats.org/drawingml/2006/main">
+            <a:off x="6096000" y="3695700"/>
+            <a:ext cx="114300" cy="209550"/>
+          </a:xfrm>
+          <a:prstGeom xmlns:a="http://schemas.openxmlformats.org/drawingml/2006/main" prst="rect">
+            <a:avLst/>
+          </a:prstGeom>
+          <a:noFill xmlns:a="http://schemas.openxmlformats.org/drawingml/2006/main"/>
+          <a:ln xmlns:a="http://schemas.openxmlformats.org/drawingml/2006/main" w="0">
+            <a:noFill/>
+            <a:prstDash val="solid"/>
+          </a:ln>
+        </p:spPr>
+        <p:txBody>
+          <a:bodyPr xmlns:a="http://schemas.openxmlformats.org/drawingml/2006/main"/>
+          <a:lstStyle xmlns:a="http://schemas.openxmlformats.org/drawingml/2006/main"/>
+          <a:p xmlns:a="http://schemas.openxmlformats.org/drawingml/2006/main">
+            <a:pPr>
+              <a:defRPr sz="1350" b="1">
+                <a:solidFill>
+                  <a:srgbClr val="8BD9E8"/>
+                </a:solidFill>
+              </a:defRPr>
+            </a:pPr>
+            <a:r>
+              <a:rPr sz="1350" b="1">
+                <a:solidFill>
+                  <a:srgbClr val="8BD9E8"/>
+                </a:solidFill>
+              </a:rPr>
+              <a:t>·</a:t>
+            </a:r>
+          </a:p>
+        </p:txBody>
+      </p:sp>
+      <p:sp>
+        <p:nvSpPr>
+          <p:cNvPr id="46" name="timeline-item-4-2">
+            <a:extLst xmlns:a="http://schemas.openxmlformats.org/drawingml/2006/main">
+              <a:ext uri="{FF2B5EF4-FFF2-40B4-BE49-F238E27FC236}">
+                <a16:creationId xmlns:a16="http://schemas.microsoft.com/office/drawing/2014/main" id="{41F72C9B-9C28-4CE7-9B7C-BFDD8458A1D5}"/>
+              </a:ext>
+            </a:extLst>
+          </p:cNvPr>
+          <p:cNvSpPr>
+            <a:spLocks xmlns:a="http://schemas.openxmlformats.org/drawingml/2006/main" noGrp="1"/>
+          </p:cNvSpPr>
+          <p:nvPr/>
+        </p:nvSpPr>
+        <p:spPr>
+          <a:xfrm xmlns:a="http://schemas.openxmlformats.org/drawingml/2006/main">
+            <a:off x="6229350" y="3724275"/>
+            <a:ext cx="1123950" cy="285750"/>
+          </a:xfrm>
+          <a:prstGeom xmlns:a="http://schemas.openxmlformats.org/drawingml/2006/main" prst="rect">
+            <a:avLst/>
+          </a:prstGeom>
+          <a:noFill xmlns:a="http://schemas.openxmlformats.org/drawingml/2006/main"/>
+          <a:ln xmlns:a="http://schemas.openxmlformats.org/drawingml/2006/main" w="0">
+            <a:noFill/>
+            <a:prstDash val="solid"/>
+          </a:ln>
+        </p:spPr>
+        <p:txBody>
+          <a:bodyPr xmlns:a="http://schemas.openxmlformats.org/drawingml/2006/main"/>
+          <a:lstStyle xmlns:a="http://schemas.openxmlformats.org/drawingml/2006/main"/>
+          <a:p xmlns:a="http://schemas.openxmlformats.org/drawingml/2006/main">
+            <a:pPr>
+              <a:defRPr sz="938">
+                <a:solidFill>
+                  <a:srgbClr val="CBD5E1"/>
+                </a:solidFill>
+              </a:defRPr>
+            </a:pPr>
+            <a:r>
+              <a:rPr sz="938">
+                <a:solidFill>
+                  <a:srgbClr val="CBD5E1"/>
+                </a:solidFill>
+              </a:rPr>
+              <a:t>CBT 빌드 기준</a:t>
+            </a:r>
+          </a:p>
+        </p:txBody>
+      </p:sp>
+      <p:sp>
+        <p:nvSpPr>
+          <p:cNvPr id="47" name="timeline-dot-4-3">
+            <a:extLst xmlns:a="http://schemas.openxmlformats.org/drawingml/2006/main">
+              <a:ext uri="{FF2B5EF4-FFF2-40B4-BE49-F238E27FC236}">
+                <a16:creationId xmlns:a16="http://schemas.microsoft.com/office/drawing/2014/main" id="{5DFA0259-D8C2-4D21-990D-3E7344EA1C19}"/>
+              </a:ext>
+            </a:extLst>
+          </p:cNvPr>
+          <p:cNvSpPr>
+            <a:spLocks xmlns:a="http://schemas.openxmlformats.org/drawingml/2006/main" noGrp="1"/>
+          </p:cNvSpPr>
+          <p:nvPr/>
+        </p:nvSpPr>
+        <p:spPr>
+          <a:xfrm xmlns:a="http://schemas.openxmlformats.org/drawingml/2006/main">
+            <a:off x="6096000" y="4019550"/>
+            <a:ext cx="114300" cy="209550"/>
+          </a:xfrm>
+          <a:prstGeom xmlns:a="http://schemas.openxmlformats.org/drawingml/2006/main" prst="rect">
+            <a:avLst/>
+          </a:prstGeom>
+          <a:noFill xmlns:a="http://schemas.openxmlformats.org/drawingml/2006/main"/>
+          <a:ln xmlns:a="http://schemas.openxmlformats.org/drawingml/2006/main" w="0">
+            <a:noFill/>
+            <a:prstDash val="solid"/>
+          </a:ln>
+        </p:spPr>
+        <p:txBody>
+          <a:bodyPr xmlns:a="http://schemas.openxmlformats.org/drawingml/2006/main"/>
+          <a:lstStyle xmlns:a="http://schemas.openxmlformats.org/drawingml/2006/main"/>
+          <a:p xmlns:a="http://schemas.openxmlformats.org/drawingml/2006/main">
+            <a:pPr>
+              <a:defRPr sz="1350" b="1">
+                <a:solidFill>
+                  <a:srgbClr val="8BD9E8"/>
+                </a:solidFill>
+              </a:defRPr>
+            </a:pPr>
+            <a:r>
+              <a:rPr sz="1350" b="1">
+                <a:solidFill>
+                  <a:srgbClr val="8BD9E8"/>
+                </a:solidFill>
+              </a:rPr>
+              <a:t>·</a:t>
+            </a:r>
+          </a:p>
+        </p:txBody>
+      </p:sp>
+      <p:sp>
+        <p:nvSpPr>
+          <p:cNvPr id="48" name="timeline-item-4-3">
+            <a:extLst xmlns:a="http://schemas.openxmlformats.org/drawingml/2006/main">
+              <a:ext uri="{FF2B5EF4-FFF2-40B4-BE49-F238E27FC236}">
+                <a16:creationId xmlns:a16="http://schemas.microsoft.com/office/drawing/2014/main" id="{96EE19D7-C07E-402A-9C45-DF64809023B2}"/>
+              </a:ext>
+            </a:extLst>
+          </p:cNvPr>
+          <p:cNvSpPr>
+            <a:spLocks xmlns:a="http://schemas.openxmlformats.org/drawingml/2006/main" noGrp="1"/>
+          </p:cNvSpPr>
+          <p:nvPr/>
+        </p:nvSpPr>
+        <p:spPr>
+          <a:xfrm xmlns:a="http://schemas.openxmlformats.org/drawingml/2006/main">
+            <a:off x="6229350" y="4048125"/>
+            <a:ext cx="1123950" cy="285750"/>
+          </a:xfrm>
+          <a:prstGeom xmlns:a="http://schemas.openxmlformats.org/drawingml/2006/main" prst="rect">
+            <a:avLst/>
+          </a:prstGeom>
+          <a:noFill xmlns:a="http://schemas.openxmlformats.org/drawingml/2006/main"/>
+          <a:ln xmlns:a="http://schemas.openxmlformats.org/drawingml/2006/main" w="0">
+            <a:noFill/>
+            <a:prstDash val="solid"/>
+          </a:ln>
+        </p:spPr>
+        <p:txBody>
+          <a:bodyPr xmlns:a="http://schemas.openxmlformats.org/drawingml/2006/main"/>
+          <a:lstStyle xmlns:a="http://schemas.openxmlformats.org/drawingml/2006/main"/>
+          <a:p xmlns:a="http://schemas.openxmlformats.org/drawingml/2006/main">
+            <a:pPr>
+              <a:defRPr sz="938">
+                <a:solidFill>
+                  <a:srgbClr val="CBD5E1"/>
+                </a:solidFill>
+              </a:defRPr>
+            </a:pPr>
+            <a:r>
+              <a:rPr sz="938">
+                <a:solidFill>
+                  <a:srgbClr val="CBD5E1"/>
+                </a:solidFill>
+              </a:rPr>
+              <a:t>운영 시나리오</a:t>
+            </a:r>
+          </a:p>
+        </p:txBody>
+      </p:sp>
+      <p:sp>
+        <p:nvSpPr>
+          <p:cNvPr id="49" name="timeline-card-5">
+            <a:extLst xmlns:a="http://schemas.openxmlformats.org/drawingml/2006/main">
+              <a:ext uri="{FF2B5EF4-FFF2-40B4-BE49-F238E27FC236}">
+                <a16:creationId xmlns:a16="http://schemas.microsoft.com/office/drawing/2014/main" id="{178273AE-828F-483A-864D-368840254D40}"/>
+              </a:ext>
+            </a:extLst>
+          </p:cNvPr>
+          <p:cNvSpPr>
+            <a:spLocks xmlns:a="http://schemas.openxmlformats.org/drawingml/2006/main" noGrp="1"/>
+          </p:cNvSpPr>
+          <p:nvPr/>
+        </p:nvSpPr>
+        <p:spPr>
+          <a:xfrm xmlns:a="http://schemas.openxmlformats.org/drawingml/2006/main">
+            <a:off x="7753350" y="2209800"/>
+            <a:ext cx="1581150" cy="2381250"/>
+          </a:xfrm>
+          <a:prstGeom xmlns:a="http://schemas.openxmlformats.org/drawingml/2006/main" prst="roundRect">
+            <a:avLst>
+              <a:gd name="adj" fmla="val 4819"/>
+            </a:avLst>
+          </a:prstGeom>
+          <a:solidFill xmlns:a="http://schemas.openxmlformats.org/drawingml/2006/main">
+            <a:srgbClr val="111827"/>
+          </a:solidFill>
+          <a:ln xmlns:a="http://schemas.openxmlformats.org/drawingml/2006/main" w="9525">
+            <a:solidFill>
+              <a:srgbClr val="2F3B55"/>
+            </a:solidFill>
+            <a:prstDash val="solid"/>
+          </a:ln>
+        </p:spPr>
+      </p:sp>
+      <p:sp>
+        <p:nvSpPr>
+          <p:cNvPr id="50" name="timeline-bar-5">
+            <a:extLst xmlns:a="http://schemas.openxmlformats.org/drawingml/2006/main">
+              <a:ext uri="{FF2B5EF4-FFF2-40B4-BE49-F238E27FC236}">
+                <a16:creationId xmlns:a16="http://schemas.microsoft.com/office/drawing/2014/main" id="{44E61251-C9A2-4BC4-987B-821C6687A3C4}"/>
+              </a:ext>
+            </a:extLst>
+          </p:cNvPr>
+          <p:cNvSpPr>
+            <a:spLocks xmlns:a="http://schemas.openxmlformats.org/drawingml/2006/main" noGrp="1"/>
+          </p:cNvSpPr>
+          <p:nvPr/>
+        </p:nvSpPr>
+        <p:spPr>
+          <a:xfrm xmlns:a="http://schemas.openxmlformats.org/drawingml/2006/main">
+            <a:off x="7753350" y="2209800"/>
+            <a:ext cx="1581150" cy="66675"/>
+          </a:xfrm>
+          <a:prstGeom xmlns:a="http://schemas.openxmlformats.org/drawingml/2006/main" prst="rect">
+            <a:avLst/>
+          </a:prstGeom>
+          <a:solidFill xmlns:a="http://schemas.openxmlformats.org/drawingml/2006/main">
+            <a:srgbClr val="FF6B35"/>
+          </a:solidFill>
+          <a:ln xmlns:a="http://schemas.openxmlformats.org/drawingml/2006/main" w="0">
+            <a:solidFill>
+              <a:srgbClr val="FF6B35"/>
+            </a:solidFill>
+            <a:prstDash val="solid"/>
+          </a:ln>
+        </p:spPr>
+      </p:sp>
+      <p:sp>
+        <p:nvSpPr>
+          <p:cNvPr id="51" name="timeline-month-5">
+            <a:extLst xmlns:a="http://schemas.openxmlformats.org/drawingml/2006/main">
+              <a:ext uri="{FF2B5EF4-FFF2-40B4-BE49-F238E27FC236}">
+                <a16:creationId xmlns:a16="http://schemas.microsoft.com/office/drawing/2014/main" id="{C1C4B18B-32B9-42FF-8FB7-9F02F4077960}"/>
+              </a:ext>
+            </a:extLst>
+          </p:cNvPr>
+          <p:cNvSpPr>
+            <a:spLocks xmlns:a="http://schemas.openxmlformats.org/drawingml/2006/main" noGrp="1"/>
+          </p:cNvSpPr>
+          <p:nvPr/>
+        </p:nvSpPr>
+        <p:spPr>
+          <a:xfrm xmlns:a="http://schemas.openxmlformats.org/drawingml/2006/main">
+            <a:off x="7905750" y="2438400"/>
+            <a:ext cx="666750" cy="228600"/>
+          </a:xfrm>
+          <a:prstGeom xmlns:a="http://schemas.openxmlformats.org/drawingml/2006/main" prst="rect">
+            <a:avLst/>
+          </a:prstGeom>
+          <a:noFill xmlns:a="http://schemas.openxmlformats.org/drawingml/2006/main"/>
+          <a:ln xmlns:a="http://schemas.openxmlformats.org/drawingml/2006/main" w="0">
+            <a:noFill/>
+            <a:prstDash val="solid"/>
+          </a:ln>
+        </p:spPr>
+        <p:txBody>
+          <a:bodyPr xmlns:a="http://schemas.openxmlformats.org/drawingml/2006/main"/>
+          <a:lstStyle xmlns:a="http://schemas.openxmlformats.org/drawingml/2006/main"/>
+          <a:p xmlns:a="http://schemas.openxmlformats.org/drawingml/2006/main">
+            <a:pPr>
+              <a:defRPr sz="1275" b="1">
+                <a:solidFill>
+                  <a:srgbClr val="FF6B35"/>
+                </a:solidFill>
+              </a:defRPr>
+            </a:pPr>
+            <a:r>
+              <a:rPr sz="1275" b="1">
+                <a:solidFill>
+                  <a:srgbClr val="FF6B35"/>
+                </a:solidFill>
+              </a:rPr>
+              <a:t>D-2M</a:t>
+            </a:r>
+          </a:p>
+        </p:txBody>
+      </p:sp>
+      <p:sp>
+        <p:nvSpPr>
+          <p:cNvPr id="52" name="timeline-title-5">
+            <a:extLst xmlns:a="http://schemas.openxmlformats.org/drawingml/2006/main">
+              <a:ext uri="{FF2B5EF4-FFF2-40B4-BE49-F238E27FC236}">
+                <a16:creationId xmlns:a16="http://schemas.microsoft.com/office/drawing/2014/main" id="{0784565D-925E-4DE6-8186-6715B52BB3D6}"/>
+              </a:ext>
+            </a:extLst>
+          </p:cNvPr>
+          <p:cNvSpPr>
+            <a:spLocks xmlns:a="http://schemas.openxmlformats.org/drawingml/2006/main" noGrp="1"/>
+          </p:cNvSpPr>
+          <p:nvPr/>
+        </p:nvSpPr>
+        <p:spPr>
+          <a:xfrm xmlns:a="http://schemas.openxmlformats.org/drawingml/2006/main">
+            <a:off x="7905750" y="2762250"/>
+            <a:ext cx="1257300" cy="457200"/>
+          </a:xfrm>
+          <a:prstGeom xmlns:a="http://schemas.openxmlformats.org/drawingml/2006/main" prst="rect">
+            <a:avLst/>
+          </a:prstGeom>
+          <a:noFill xmlns:a="http://schemas.openxmlformats.org/drawingml/2006/main"/>
+          <a:ln xmlns:a="http://schemas.openxmlformats.org/drawingml/2006/main" w="0">
+            <a:noFill/>
+            <a:prstDash val="solid"/>
+          </a:ln>
+        </p:spPr>
+        <p:txBody>
+          <a:bodyPr xmlns:a="http://schemas.openxmlformats.org/drawingml/2006/main"/>
+          <a:lstStyle xmlns:a="http://schemas.openxmlformats.org/drawingml/2006/main"/>
+          <a:p xmlns:a="http://schemas.openxmlformats.org/drawingml/2006/main">
+            <a:pPr>
+              <a:defRPr sz="1350" b="1">
+                <a:solidFill>
+                  <a:srgbClr val="FFFFFF"/>
+                </a:solidFill>
+              </a:defRPr>
+            </a:pPr>
+            <a:r>
+              <a:rPr sz="1350" b="1">
+                <a:solidFill>
+                  <a:srgbClr val="FFFFFF"/>
+                </a:solidFill>
+              </a:rPr>
+              <a:t>후보 빌드 안정화</a:t>
+            </a:r>
+          </a:p>
+        </p:txBody>
+      </p:sp>
+      <p:sp>
+        <p:nvSpPr>
+          <p:cNvPr id="53" name="timeline-dot-5-1">
+            <a:extLst xmlns:a="http://schemas.openxmlformats.org/drawingml/2006/main">
+              <a:ext uri="{FF2B5EF4-FFF2-40B4-BE49-F238E27FC236}">
+                <a16:creationId xmlns:a16="http://schemas.microsoft.com/office/drawing/2014/main" id="{368FE6CF-3F55-49D3-AC08-67F2EF7DAA97}"/>
+              </a:ext>
+            </a:extLst>
+          </p:cNvPr>
+          <p:cNvSpPr>
+            <a:spLocks xmlns:a="http://schemas.openxmlformats.org/drawingml/2006/main" noGrp="1"/>
+          </p:cNvSpPr>
+          <p:nvPr/>
+        </p:nvSpPr>
+        <p:spPr>
+          <a:xfrm xmlns:a="http://schemas.openxmlformats.org/drawingml/2006/main">
+            <a:off x="7905750" y="3371850"/>
+            <a:ext cx="114300" cy="209550"/>
+          </a:xfrm>
+          <a:prstGeom xmlns:a="http://schemas.openxmlformats.org/drawingml/2006/main" prst="rect">
+            <a:avLst/>
+          </a:prstGeom>
+          <a:noFill xmlns:a="http://schemas.openxmlformats.org/drawingml/2006/main"/>
+          <a:ln xmlns:a="http://schemas.openxmlformats.org/drawingml/2006/main" w="0">
+            <a:noFill/>
+            <a:prstDash val="solid"/>
+          </a:ln>
+        </p:spPr>
+        <p:txBody>
+          <a:bodyPr xmlns:a="http://schemas.openxmlformats.org/drawingml/2006/main"/>
+          <a:lstStyle xmlns:a="http://schemas.openxmlformats.org/drawingml/2006/main"/>
+          <a:p xmlns:a="http://schemas.openxmlformats.org/drawingml/2006/main">
+            <a:pPr>
+              <a:defRPr sz="1350" b="1">
+                <a:solidFill>
+                  <a:srgbClr val="FF6B35"/>
+                </a:solidFill>
+              </a:defRPr>
+            </a:pPr>
+            <a:r>
+              <a:rPr sz="1350" b="1">
+                <a:solidFill>
+                  <a:srgbClr val="FF6B35"/>
+                </a:solidFill>
+              </a:rPr>
+              <a:t>·</a:t>
+            </a:r>
+          </a:p>
+        </p:txBody>
+      </p:sp>
+      <p:sp>
+        <p:nvSpPr>
+          <p:cNvPr id="54" name="timeline-item-5-1">
+            <a:extLst xmlns:a="http://schemas.openxmlformats.org/drawingml/2006/main">
+              <a:ext uri="{FF2B5EF4-FFF2-40B4-BE49-F238E27FC236}">
+                <a16:creationId xmlns:a16="http://schemas.microsoft.com/office/drawing/2014/main" id="{E16AC7F9-5689-42BF-8F30-C51E557F3836}"/>
+              </a:ext>
+            </a:extLst>
+          </p:cNvPr>
+          <p:cNvSpPr>
+            <a:spLocks xmlns:a="http://schemas.openxmlformats.org/drawingml/2006/main" noGrp="1"/>
+          </p:cNvSpPr>
+          <p:nvPr/>
+        </p:nvSpPr>
+        <p:spPr>
+          <a:xfrm xmlns:a="http://schemas.openxmlformats.org/drawingml/2006/main">
+            <a:off x="8039100" y="3400425"/>
+            <a:ext cx="1123950" cy="285750"/>
+          </a:xfrm>
+          <a:prstGeom xmlns:a="http://schemas.openxmlformats.org/drawingml/2006/main" prst="rect">
+            <a:avLst/>
+          </a:prstGeom>
+          <a:noFill xmlns:a="http://schemas.openxmlformats.org/drawingml/2006/main"/>
+          <a:ln xmlns:a="http://schemas.openxmlformats.org/drawingml/2006/main" w="0">
+            <a:noFill/>
+            <a:prstDash val="solid"/>
+          </a:ln>
+        </p:spPr>
+        <p:txBody>
+          <a:bodyPr xmlns:a="http://schemas.openxmlformats.org/drawingml/2006/main"/>
+          <a:lstStyle xmlns:a="http://schemas.openxmlformats.org/drawingml/2006/main"/>
+          <a:p xmlns:a="http://schemas.openxmlformats.org/drawingml/2006/main">
+            <a:pPr>
+              <a:defRPr sz="938">
+                <a:solidFill>
+                  <a:srgbClr val="CBD5E1"/>
+                </a:solidFill>
+              </a:defRPr>
+            </a:pPr>
+            <a:r>
+              <a:rPr sz="938">
+                <a:solidFill>
+                  <a:srgbClr val="CBD5E1"/>
+                </a:solidFill>
+              </a:rPr>
+              <a:t>릴리즈 후보 관리</a:t>
+            </a:r>
+          </a:p>
+        </p:txBody>
+      </p:sp>
+      <p:sp>
+        <p:nvSpPr>
+          <p:cNvPr id="55" name="timeline-dot-5-2">
+            <a:extLst xmlns:a="http://schemas.openxmlformats.org/drawingml/2006/main">
+              <a:ext uri="{FF2B5EF4-FFF2-40B4-BE49-F238E27FC236}">
+                <a16:creationId xmlns:a16="http://schemas.microsoft.com/office/drawing/2014/main" id="{19D62180-B89D-4575-BD80-AEB35A81D074}"/>
+              </a:ext>
+            </a:extLst>
+          </p:cNvPr>
+          <p:cNvSpPr>
+            <a:spLocks xmlns:a="http://schemas.openxmlformats.org/drawingml/2006/main" noGrp="1"/>
+          </p:cNvSpPr>
+          <p:nvPr/>
+        </p:nvSpPr>
+        <p:spPr>
+          <a:xfrm xmlns:a="http://schemas.openxmlformats.org/drawingml/2006/main">
+            <a:off x="7905750" y="3695700"/>
+            <a:ext cx="114300" cy="209550"/>
+          </a:xfrm>
+          <a:prstGeom xmlns:a="http://schemas.openxmlformats.org/drawingml/2006/main" prst="rect">
+            <a:avLst/>
+          </a:prstGeom>
+          <a:noFill xmlns:a="http://schemas.openxmlformats.org/drawingml/2006/main"/>
+          <a:ln xmlns:a="http://schemas.openxmlformats.org/drawingml/2006/main" w="0">
+            <a:noFill/>
+            <a:prstDash val="solid"/>
+          </a:ln>
+        </p:spPr>
+        <p:txBody>
+          <a:bodyPr xmlns:a="http://schemas.openxmlformats.org/drawingml/2006/main"/>
+          <a:lstStyle xmlns:a="http://schemas.openxmlformats.org/drawingml/2006/main"/>
+          <a:p xmlns:a="http://schemas.openxmlformats.org/drawingml/2006/main">
+            <a:pPr>
+              <a:defRPr sz="1350" b="1">
+                <a:solidFill>
+                  <a:srgbClr val="FF6B35"/>
+                </a:solidFill>
+              </a:defRPr>
+            </a:pPr>
+            <a:r>
+              <a:rPr sz="1350" b="1">
+                <a:solidFill>
+                  <a:srgbClr val="FF6B35"/>
+                </a:solidFill>
+              </a:rPr>
+              <a:t>·</a:t>
+            </a:r>
+          </a:p>
+        </p:txBody>
+      </p:sp>
+      <p:sp>
+        <p:nvSpPr>
+          <p:cNvPr id="56" name="timeline-item-5-2">
+            <a:extLst xmlns:a="http://schemas.openxmlformats.org/drawingml/2006/main">
+              <a:ext uri="{FF2B5EF4-FFF2-40B4-BE49-F238E27FC236}">
+                <a16:creationId xmlns:a16="http://schemas.microsoft.com/office/drawing/2014/main" id="{8A040A55-7FF4-49E4-BB19-E9D24DEF3BAF}"/>
+              </a:ext>
+            </a:extLst>
+          </p:cNvPr>
+          <p:cNvSpPr>
+            <a:spLocks xmlns:a="http://schemas.openxmlformats.org/drawingml/2006/main" noGrp="1"/>
+          </p:cNvSpPr>
+          <p:nvPr/>
+        </p:nvSpPr>
+        <p:spPr>
+          <a:xfrm xmlns:a="http://schemas.openxmlformats.org/drawingml/2006/main">
+            <a:off x="8039100" y="3724275"/>
+            <a:ext cx="1123950" cy="285750"/>
+          </a:xfrm>
+          <a:prstGeom xmlns:a="http://schemas.openxmlformats.org/drawingml/2006/main" prst="rect">
+            <a:avLst/>
+          </a:prstGeom>
+          <a:noFill xmlns:a="http://schemas.openxmlformats.org/drawingml/2006/main"/>
+          <a:ln xmlns:a="http://schemas.openxmlformats.org/drawingml/2006/main" w="0">
+            <a:noFill/>
+            <a:prstDash val="solid"/>
+          </a:ln>
+        </p:spPr>
+        <p:txBody>
+          <a:bodyPr xmlns:a="http://schemas.openxmlformats.org/drawingml/2006/main"/>
+          <a:lstStyle xmlns:a="http://schemas.openxmlformats.org/drawingml/2006/main"/>
+          <a:p xmlns:a="http://schemas.openxmlformats.org/drawingml/2006/main">
+            <a:pPr>
+              <a:defRPr sz="938">
+                <a:solidFill>
+                  <a:srgbClr val="CBD5E1"/>
+                </a:solidFill>
+              </a:defRPr>
+            </a:pPr>
+            <a:r>
+              <a:rPr sz="938">
+                <a:solidFill>
+                  <a:srgbClr val="CBD5E1"/>
+                </a:solidFill>
+              </a:rPr>
+              <a:t>잔여 이슈 추적</a:t>
+            </a:r>
+          </a:p>
+        </p:txBody>
+      </p:sp>
+      <p:sp>
+        <p:nvSpPr>
+          <p:cNvPr id="57" name="timeline-dot-5-3">
+            <a:extLst xmlns:a="http://schemas.openxmlformats.org/drawingml/2006/main">
+              <a:ext uri="{FF2B5EF4-FFF2-40B4-BE49-F238E27FC236}">
+                <a16:creationId xmlns:a16="http://schemas.microsoft.com/office/drawing/2014/main" id="{FAD2EAFF-1EBD-475C-A77D-00797D2C45AE}"/>
+              </a:ext>
+            </a:extLst>
+          </p:cNvPr>
+          <p:cNvSpPr>
+            <a:spLocks xmlns:a="http://schemas.openxmlformats.org/drawingml/2006/main" noGrp="1"/>
+          </p:cNvSpPr>
+          <p:nvPr/>
+        </p:nvSpPr>
+        <p:spPr>
+          <a:xfrm xmlns:a="http://schemas.openxmlformats.org/drawingml/2006/main">
+            <a:off x="7905750" y="4019550"/>
+            <a:ext cx="114300" cy="209550"/>
+          </a:xfrm>
+          <a:prstGeom xmlns:a="http://schemas.openxmlformats.org/drawingml/2006/main" prst="rect">
+            <a:avLst/>
+          </a:prstGeom>
+          <a:noFill xmlns:a="http://schemas.openxmlformats.org/drawingml/2006/main"/>
+          <a:ln xmlns:a="http://schemas.openxmlformats.org/drawingml/2006/main" w="0">
+            <a:noFill/>
+            <a:prstDash val="solid"/>
+          </a:ln>
+        </p:spPr>
+        <p:txBody>
+          <a:bodyPr xmlns:a="http://schemas.openxmlformats.org/drawingml/2006/main"/>
+          <a:lstStyle xmlns:a="http://schemas.openxmlformats.org/drawingml/2006/main"/>
+          <a:p xmlns:a="http://schemas.openxmlformats.org/drawingml/2006/main">
+            <a:pPr>
+              <a:defRPr sz="1350" b="1">
+                <a:solidFill>
+                  <a:srgbClr val="FF6B35"/>
+                </a:solidFill>
+              </a:defRPr>
+            </a:pPr>
+            <a:r>
+              <a:rPr sz="1350" b="1">
+                <a:solidFill>
+                  <a:srgbClr val="FF6B35"/>
+                </a:solidFill>
+              </a:rPr>
+              <a:t>·</a:t>
+            </a:r>
+          </a:p>
+        </p:txBody>
+      </p:sp>
+      <p:sp>
+        <p:nvSpPr>
+          <p:cNvPr id="58" name="timeline-item-5-3">
+            <a:extLst xmlns:a="http://schemas.openxmlformats.org/drawingml/2006/main">
+              <a:ext uri="{FF2B5EF4-FFF2-40B4-BE49-F238E27FC236}">
+                <a16:creationId xmlns:a16="http://schemas.microsoft.com/office/drawing/2014/main" id="{5D39F1B2-7C29-4BE1-87B3-1D69E437FABC}"/>
+              </a:ext>
+            </a:extLst>
+          </p:cNvPr>
+          <p:cNvSpPr>
+            <a:spLocks xmlns:a="http://schemas.openxmlformats.org/drawingml/2006/main" noGrp="1"/>
+          </p:cNvSpPr>
+          <p:nvPr/>
+        </p:nvSpPr>
+        <p:spPr>
+          <a:xfrm xmlns:a="http://schemas.openxmlformats.org/drawingml/2006/main">
+            <a:off x="8039100" y="4048125"/>
+            <a:ext cx="1123950" cy="285750"/>
+          </a:xfrm>
+          <a:prstGeom xmlns:a="http://schemas.openxmlformats.org/drawingml/2006/main" prst="rect">
+            <a:avLst/>
+          </a:prstGeom>
+          <a:noFill xmlns:a="http://schemas.openxmlformats.org/drawingml/2006/main"/>
+          <a:ln xmlns:a="http://schemas.openxmlformats.org/drawingml/2006/main" w="0">
+            <a:noFill/>
+            <a:prstDash val="solid"/>
+          </a:ln>
+        </p:spPr>
+        <p:txBody>
+          <a:bodyPr xmlns:a="http://schemas.openxmlformats.org/drawingml/2006/main"/>
+          <a:lstStyle xmlns:a="http://schemas.openxmlformats.org/drawingml/2006/main"/>
+          <a:p xmlns:a="http://schemas.openxmlformats.org/drawingml/2006/main">
+            <a:pPr>
+              <a:defRPr sz="938">
+                <a:solidFill>
+                  <a:srgbClr val="CBD5E1"/>
+                </a:solidFill>
+              </a:defRPr>
+            </a:pPr>
+            <a:r>
+              <a:rPr sz="938">
+                <a:solidFill>
+                  <a:srgbClr val="CBD5E1"/>
+                </a:solidFill>
+              </a:rPr>
+              <a:t>스토어·심의 체크</a:t>
+            </a:r>
+          </a:p>
+        </p:txBody>
+      </p:sp>
+      <p:sp>
+        <p:nvSpPr>
+          <p:cNvPr id="59" name="timeline-card-6">
+            <a:extLst xmlns:a="http://schemas.openxmlformats.org/drawingml/2006/main">
+              <a:ext uri="{FF2B5EF4-FFF2-40B4-BE49-F238E27FC236}">
+                <a16:creationId xmlns:a16="http://schemas.microsoft.com/office/drawing/2014/main" id="{D8A66099-8B7F-4D6E-8D39-2BE63B1D141D}"/>
+              </a:ext>
+            </a:extLst>
+          </p:cNvPr>
+          <p:cNvSpPr>
+            <a:spLocks xmlns:a="http://schemas.openxmlformats.org/drawingml/2006/main" noGrp="1"/>
+          </p:cNvSpPr>
+          <p:nvPr/>
+        </p:nvSpPr>
+        <p:spPr>
+          <a:xfrm xmlns:a="http://schemas.openxmlformats.org/drawingml/2006/main">
+            <a:off x="9563100" y="2209800"/>
+            <a:ext cx="1581150" cy="2381250"/>
+          </a:xfrm>
+          <a:prstGeom xmlns:a="http://schemas.openxmlformats.org/drawingml/2006/main" prst="roundRect">
+            <a:avLst>
+              <a:gd name="adj" fmla="val 4819"/>
+            </a:avLst>
+          </a:prstGeom>
+          <a:solidFill xmlns:a="http://schemas.openxmlformats.org/drawingml/2006/main">
+            <a:srgbClr val="111827"/>
+          </a:solidFill>
+          <a:ln xmlns:a="http://schemas.openxmlformats.org/drawingml/2006/main" w="9525">
+            <a:solidFill>
+              <a:srgbClr val="2F3B55"/>
+            </a:solidFill>
+            <a:prstDash val="solid"/>
+          </a:ln>
+        </p:spPr>
+      </p:sp>
+      <p:sp>
+        <p:nvSpPr>
+          <p:cNvPr id="60" name="timeline-bar-6">
+            <a:extLst xmlns:a="http://schemas.openxmlformats.org/drawingml/2006/main">
+              <a:ext uri="{FF2B5EF4-FFF2-40B4-BE49-F238E27FC236}">
+                <a16:creationId xmlns:a16="http://schemas.microsoft.com/office/drawing/2014/main" id="{1140E738-A66E-408C-ADCE-4F6716445A32}"/>
+              </a:ext>
+            </a:extLst>
+          </p:cNvPr>
+          <p:cNvSpPr>
+            <a:spLocks xmlns:a="http://schemas.openxmlformats.org/drawingml/2006/main" noGrp="1"/>
+          </p:cNvSpPr>
+          <p:nvPr/>
+        </p:nvSpPr>
+        <p:spPr>
+          <a:xfrm xmlns:a="http://schemas.openxmlformats.org/drawingml/2006/main">
+            <a:off x="9563100" y="2209800"/>
+            <a:ext cx="1581150" cy="66675"/>
+          </a:xfrm>
+          <a:prstGeom xmlns:a="http://schemas.openxmlformats.org/drawingml/2006/main" prst="rect">
+            <a:avLst/>
+          </a:prstGeom>
+          <a:solidFill xmlns:a="http://schemas.openxmlformats.org/drawingml/2006/main">
+            <a:srgbClr val="7C3AED"/>
+          </a:solidFill>
+          <a:ln xmlns:a="http://schemas.openxmlformats.org/drawingml/2006/main" w="0">
+            <a:solidFill>
+              <a:srgbClr val="7C3AED"/>
+            </a:solidFill>
+            <a:prstDash val="solid"/>
+          </a:ln>
+        </p:spPr>
+      </p:sp>
+      <p:sp>
+        <p:nvSpPr>
+          <p:cNvPr id="61" name="timeline-month-6">
+            <a:extLst xmlns:a="http://schemas.openxmlformats.org/drawingml/2006/main">
+              <a:ext uri="{FF2B5EF4-FFF2-40B4-BE49-F238E27FC236}">
+                <a16:creationId xmlns:a16="http://schemas.microsoft.com/office/drawing/2014/main" id="{C4B5D2FF-AB84-458D-B9DC-63E6391C2689}"/>
+              </a:ext>
+            </a:extLst>
+          </p:cNvPr>
+          <p:cNvSpPr>
+            <a:spLocks xmlns:a="http://schemas.openxmlformats.org/drawingml/2006/main" noGrp="1"/>
+          </p:cNvSpPr>
+          <p:nvPr/>
+        </p:nvSpPr>
+        <p:spPr>
+          <a:xfrm xmlns:a="http://schemas.openxmlformats.org/drawingml/2006/main">
+            <a:off x="9715500" y="2438400"/>
+            <a:ext cx="666750" cy="228600"/>
+          </a:xfrm>
+          <a:prstGeom xmlns:a="http://schemas.openxmlformats.org/drawingml/2006/main" prst="rect">
+            <a:avLst/>
+          </a:prstGeom>
+          <a:noFill xmlns:a="http://schemas.openxmlformats.org/drawingml/2006/main"/>
+          <a:ln xmlns:a="http://schemas.openxmlformats.org/drawingml/2006/main" w="0">
+            <a:noFill/>
+            <a:prstDash val="solid"/>
+          </a:ln>
+        </p:spPr>
+        <p:txBody>
+          <a:bodyPr xmlns:a="http://schemas.openxmlformats.org/drawingml/2006/main"/>
+          <a:lstStyle xmlns:a="http://schemas.openxmlformats.org/drawingml/2006/main"/>
+          <a:p xmlns:a="http://schemas.openxmlformats.org/drawingml/2006/main">
+            <a:pPr>
+              <a:defRPr sz="1275" b="1">
+                <a:solidFill>
+                  <a:srgbClr val="7C3AED"/>
+                </a:solidFill>
+              </a:defRPr>
+            </a:pPr>
+            <a:r>
+              <a:rPr sz="1275" b="1">
+                <a:solidFill>
+                  <a:srgbClr val="7C3AED"/>
+                </a:solidFill>
+              </a:rPr>
+              <a:t>D-1M</a:t>
+            </a:r>
+          </a:p>
+        </p:txBody>
+      </p:sp>
+      <p:sp>
+        <p:nvSpPr>
+          <p:cNvPr id="62" name="timeline-title-6">
+            <a:extLst xmlns:a="http://schemas.openxmlformats.org/drawingml/2006/main">
+              <a:ext uri="{FF2B5EF4-FFF2-40B4-BE49-F238E27FC236}">
+                <a16:creationId xmlns:a16="http://schemas.microsoft.com/office/drawing/2014/main" id="{0375A532-2E38-46C0-8C10-C7A6043AF38C}"/>
+              </a:ext>
+            </a:extLst>
+          </p:cNvPr>
+          <p:cNvSpPr>
+            <a:spLocks xmlns:a="http://schemas.openxmlformats.org/drawingml/2006/main" noGrp="1"/>
+          </p:cNvSpPr>
+          <p:nvPr/>
+        </p:nvSpPr>
+        <p:spPr>
+          <a:xfrm xmlns:a="http://schemas.openxmlformats.org/drawingml/2006/main">
+            <a:off x="9715500" y="2762250"/>
+            <a:ext cx="1257300" cy="457200"/>
+          </a:xfrm>
+          <a:prstGeom xmlns:a="http://schemas.openxmlformats.org/drawingml/2006/main" prst="rect">
+            <a:avLst/>
+          </a:prstGeom>
+          <a:noFill xmlns:a="http://schemas.openxmlformats.org/drawingml/2006/main"/>
+          <a:ln xmlns:a="http://schemas.openxmlformats.org/drawingml/2006/main" w="0">
+            <a:noFill/>
+            <a:prstDash val="solid"/>
+          </a:ln>
+        </p:spPr>
+        <p:txBody>
+          <a:bodyPr xmlns:a="http://schemas.openxmlformats.org/drawingml/2006/main"/>
+          <a:lstStyle xmlns:a="http://schemas.openxmlformats.org/drawingml/2006/main"/>
+          <a:p xmlns:a="http://schemas.openxmlformats.org/drawingml/2006/main">
+            <a:pPr>
+              <a:defRPr sz="1350" b="1">
+                <a:solidFill>
+                  <a:srgbClr val="FFFFFF"/>
+                </a:solidFill>
+              </a:defRPr>
+            </a:pPr>
+            <a:r>
+              <a:rPr sz="1350" b="1">
+                <a:solidFill>
+                  <a:srgbClr val="FFFFFF"/>
+                </a:solidFill>
+              </a:rPr>
+              <a:t>리허설·배포</a:t>
+            </a:r>
+          </a:p>
+        </p:txBody>
+      </p:sp>
+      <p:sp>
+        <p:nvSpPr>
+          <p:cNvPr id="63" name="timeline-dot-6-1">
+            <a:extLst xmlns:a="http://schemas.openxmlformats.org/drawingml/2006/main">
+              <a:ext uri="{FF2B5EF4-FFF2-40B4-BE49-F238E27FC236}">
+                <a16:creationId xmlns:a16="http://schemas.microsoft.com/office/drawing/2014/main" id="{190106D9-6D00-41DA-BC71-EA376B99D2A5}"/>
+              </a:ext>
+            </a:extLst>
+          </p:cNvPr>
+          <p:cNvSpPr>
+            <a:spLocks xmlns:a="http://schemas.openxmlformats.org/drawingml/2006/main" noGrp="1"/>
+          </p:cNvSpPr>
+          <p:nvPr/>
+        </p:nvSpPr>
+        <p:spPr>
+          <a:xfrm xmlns:a="http://schemas.openxmlformats.org/drawingml/2006/main">
+            <a:off x="9715500" y="3371850"/>
+            <a:ext cx="114300" cy="209550"/>
+          </a:xfrm>
+          <a:prstGeom xmlns:a="http://schemas.openxmlformats.org/drawingml/2006/main" prst="rect">
+            <a:avLst/>
+          </a:prstGeom>
+          <a:noFill xmlns:a="http://schemas.openxmlformats.org/drawingml/2006/main"/>
+          <a:ln xmlns:a="http://schemas.openxmlformats.org/drawingml/2006/main" w="0">
+            <a:noFill/>
+            <a:prstDash val="solid"/>
+          </a:ln>
+        </p:spPr>
+        <p:txBody>
+          <a:bodyPr xmlns:a="http://schemas.openxmlformats.org/drawingml/2006/main"/>
+          <a:lstStyle xmlns:a="http://schemas.openxmlformats.org/drawingml/2006/main"/>
+          <a:p xmlns:a="http://schemas.openxmlformats.org/drawingml/2006/main">
+            <a:pPr>
+              <a:defRPr sz="1350" b="1">
+                <a:solidFill>
+                  <a:srgbClr val="7C3AED"/>
+                </a:solidFill>
+              </a:defRPr>
+            </a:pPr>
+            <a:r>
+              <a:rPr sz="1350" b="1">
+                <a:solidFill>
+                  <a:srgbClr val="7C3AED"/>
+                </a:solidFill>
+              </a:rPr>
+              <a:t>·</a:t>
+            </a:r>
+          </a:p>
+        </p:txBody>
+      </p:sp>
+      <p:sp>
+        <p:nvSpPr>
+          <p:cNvPr id="64" name="timeline-item-6-1">
+            <a:extLst xmlns:a="http://schemas.openxmlformats.org/drawingml/2006/main">
+              <a:ext uri="{FF2B5EF4-FFF2-40B4-BE49-F238E27FC236}">
+                <a16:creationId xmlns:a16="http://schemas.microsoft.com/office/drawing/2014/main" id="{2439D32B-D33C-41BA-9F00-74807B4A648D}"/>
+              </a:ext>
+            </a:extLst>
+          </p:cNvPr>
+          <p:cNvSpPr>
+            <a:spLocks xmlns:a="http://schemas.openxmlformats.org/drawingml/2006/main" noGrp="1"/>
+          </p:cNvSpPr>
+          <p:nvPr/>
+        </p:nvSpPr>
+        <p:spPr>
+          <a:xfrm xmlns:a="http://schemas.openxmlformats.org/drawingml/2006/main">
+            <a:off x="9848850" y="3400425"/>
+            <a:ext cx="1123950" cy="285750"/>
+          </a:xfrm>
+          <a:prstGeom xmlns:a="http://schemas.openxmlformats.org/drawingml/2006/main" prst="rect">
+            <a:avLst/>
+          </a:prstGeom>
+          <a:noFill xmlns:a="http://schemas.openxmlformats.org/drawingml/2006/main"/>
+          <a:ln xmlns:a="http://schemas.openxmlformats.org/drawingml/2006/main" w="0">
+            <a:noFill/>
+            <a:prstDash val="solid"/>
+          </a:ln>
+        </p:spPr>
+        <p:txBody>
+          <a:bodyPr xmlns:a="http://schemas.openxmlformats.org/drawingml/2006/main"/>
+          <a:lstStyle xmlns:a="http://schemas.openxmlformats.org/drawingml/2006/main"/>
+          <a:p xmlns:a="http://schemas.openxmlformats.org/drawingml/2006/main">
+            <a:pPr>
+              <a:defRPr sz="938">
+                <a:solidFill>
+                  <a:srgbClr val="CBD5E1"/>
+                </a:solidFill>
+              </a:defRPr>
+            </a:pPr>
+            <a:r>
+              <a:rPr sz="938">
+                <a:solidFill>
+                  <a:srgbClr val="CBD5E1"/>
+                </a:solidFill>
+              </a:rPr>
+              <a:t>배포 리허설</a:t>
+            </a:r>
+          </a:p>
+        </p:txBody>
+      </p:sp>
+      <p:sp>
+        <p:nvSpPr>
+          <p:cNvPr id="65" name="timeline-dot-6-2">
+            <a:extLst xmlns:a="http://schemas.openxmlformats.org/drawingml/2006/main">
+              <a:ext uri="{FF2B5EF4-FFF2-40B4-BE49-F238E27FC236}">
+                <a16:creationId xmlns:a16="http://schemas.microsoft.com/office/drawing/2014/main" id="{2748027A-A1E0-44FB-8956-79C4FDFAEEEC}"/>
+              </a:ext>
+            </a:extLst>
+          </p:cNvPr>
+          <p:cNvSpPr>
+            <a:spLocks xmlns:a="http://schemas.openxmlformats.org/drawingml/2006/main" noGrp="1"/>
+          </p:cNvSpPr>
+          <p:nvPr/>
+        </p:nvSpPr>
+        <p:spPr>
+          <a:xfrm xmlns:a="http://schemas.openxmlformats.org/drawingml/2006/main">
+            <a:off x="9715500" y="3695700"/>
+            <a:ext cx="114300" cy="209550"/>
+          </a:xfrm>
+          <a:prstGeom xmlns:a="http://schemas.openxmlformats.org/drawingml/2006/main" prst="rect">
+            <a:avLst/>
+          </a:prstGeom>
+          <a:noFill xmlns:a="http://schemas.openxmlformats.org/drawingml/2006/main"/>
+          <a:ln xmlns:a="http://schemas.openxmlformats.org/drawingml/2006/main" w="0">
+            <a:noFill/>
+            <a:prstDash val="solid"/>
+          </a:ln>
+        </p:spPr>
+        <p:txBody>
+          <a:bodyPr xmlns:a="http://schemas.openxmlformats.org/drawingml/2006/main"/>
+          <a:lstStyle xmlns:a="http://schemas.openxmlformats.org/drawingml/2006/main"/>
+          <a:p xmlns:a="http://schemas.openxmlformats.org/drawingml/2006/main">
+            <a:pPr>
+              <a:defRPr sz="1350" b="1">
+                <a:solidFill>
+                  <a:srgbClr val="7C3AED"/>
+                </a:solidFill>
+              </a:defRPr>
+            </a:pPr>
+            <a:r>
+              <a:rPr sz="1350" b="1">
+                <a:solidFill>
+                  <a:srgbClr val="7C3AED"/>
+                </a:solidFill>
+              </a:rPr>
+              <a:t>·</a:t>
+            </a:r>
+          </a:p>
+        </p:txBody>
+      </p:sp>
+      <p:sp>
+        <p:nvSpPr>
+          <p:cNvPr id="66" name="timeline-item-6-2">
+            <a:extLst xmlns:a="http://schemas.openxmlformats.org/drawingml/2006/main">
+              <a:ext uri="{FF2B5EF4-FFF2-40B4-BE49-F238E27FC236}">
+                <a16:creationId xmlns:a16="http://schemas.microsoft.com/office/drawing/2014/main" id="{31B4E298-D9E7-40C3-AA0B-6B93AA2CFA53}"/>
+              </a:ext>
+            </a:extLst>
+          </p:cNvPr>
+          <p:cNvSpPr>
+            <a:spLocks xmlns:a="http://schemas.openxmlformats.org/drawingml/2006/main" noGrp="1"/>
+          </p:cNvSpPr>
+          <p:nvPr/>
+        </p:nvSpPr>
+        <p:spPr>
+          <a:xfrm xmlns:a="http://schemas.openxmlformats.org/drawingml/2006/main">
+            <a:off x="9848850" y="3724275"/>
+            <a:ext cx="1123950" cy="285750"/>
+          </a:xfrm>
+          <a:prstGeom xmlns:a="http://schemas.openxmlformats.org/drawingml/2006/main" prst="rect">
+            <a:avLst/>
+          </a:prstGeom>
+          <a:noFill xmlns:a="http://schemas.openxmlformats.org/drawingml/2006/main"/>
+          <a:ln xmlns:a="http://schemas.openxmlformats.org/drawingml/2006/main" w="0">
+            <a:noFill/>
+            <a:prstDash val="solid"/>
+          </a:ln>
+        </p:spPr>
+        <p:txBody>
+          <a:bodyPr xmlns:a="http://schemas.openxmlformats.org/drawingml/2006/main"/>
+          <a:lstStyle xmlns:a="http://schemas.openxmlformats.org/drawingml/2006/main"/>
+          <a:p xmlns:a="http://schemas.openxmlformats.org/drawingml/2006/main">
+            <a:pPr>
+              <a:defRPr sz="938">
+                <a:solidFill>
+                  <a:srgbClr val="CBD5E1"/>
+                </a:solidFill>
+              </a:defRPr>
+            </a:pPr>
+            <a:r>
+              <a:rPr sz="938">
+                <a:solidFill>
+                  <a:srgbClr val="CBD5E1"/>
+                </a:solidFill>
+              </a:rPr>
+              <a:t>장애 대응 플랜</a:t>
+            </a:r>
+          </a:p>
+        </p:txBody>
+      </p:sp>
+      <p:sp>
+        <p:nvSpPr>
+          <p:cNvPr id="67" name="timeline-dot-6-3">
+            <a:extLst xmlns:a="http://schemas.openxmlformats.org/drawingml/2006/main">
+              <a:ext uri="{FF2B5EF4-FFF2-40B4-BE49-F238E27FC236}">
+                <a16:creationId xmlns:a16="http://schemas.microsoft.com/office/drawing/2014/main" id="{2A73B4AA-186E-4F3F-B741-F805FEEFE827}"/>
+              </a:ext>
+            </a:extLst>
+          </p:cNvPr>
+          <p:cNvSpPr>
+            <a:spLocks xmlns:a="http://schemas.openxmlformats.org/drawingml/2006/main" noGrp="1"/>
+          </p:cNvSpPr>
+          <p:nvPr/>
+        </p:nvSpPr>
+        <p:spPr>
+          <a:xfrm xmlns:a="http://schemas.openxmlformats.org/drawingml/2006/main">
+            <a:off x="9715500" y="4019550"/>
+            <a:ext cx="114300" cy="209550"/>
+          </a:xfrm>
+          <a:prstGeom xmlns:a="http://schemas.openxmlformats.org/drawingml/2006/main" prst="rect">
+            <a:avLst/>
+          </a:prstGeom>
+          <a:noFill xmlns:a="http://schemas.openxmlformats.org/drawingml/2006/main"/>
+          <a:ln xmlns:a="http://schemas.openxmlformats.org/drawingml/2006/main" w="0">
+            <a:noFill/>
+            <a:prstDash val="solid"/>
+          </a:ln>
+        </p:spPr>
+        <p:txBody>
+          <a:bodyPr xmlns:a="http://schemas.openxmlformats.org/drawingml/2006/main"/>
+          <a:lstStyle xmlns:a="http://schemas.openxmlformats.org/drawingml/2006/main"/>
+          <a:p xmlns:a="http://schemas.openxmlformats.org/drawingml/2006/main">
+            <a:pPr>
+              <a:defRPr sz="1350" b="1">
+                <a:solidFill>
+                  <a:srgbClr val="7C3AED"/>
+                </a:solidFill>
+              </a:defRPr>
+            </a:pPr>
+            <a:r>
+              <a:rPr sz="1350" b="1">
+                <a:solidFill>
+                  <a:srgbClr val="7C3AED"/>
+                </a:solidFill>
+              </a:rPr>
+              <a:t>·</a:t>
+            </a:r>
+          </a:p>
+        </p:txBody>
+      </p:sp>
+      <p:sp>
+        <p:nvSpPr>
+          <p:cNvPr id="68" name="timeline-item-6-3">
+            <a:extLst xmlns:a="http://schemas.openxmlformats.org/drawingml/2006/main">
+              <a:ext uri="{FF2B5EF4-FFF2-40B4-BE49-F238E27FC236}">
+                <a16:creationId xmlns:a16="http://schemas.microsoft.com/office/drawing/2014/main" id="{8A876E37-2E83-499E-BE87-22697CC10A46}"/>
+              </a:ext>
+            </a:extLst>
+          </p:cNvPr>
+          <p:cNvSpPr>
+            <a:spLocks xmlns:a="http://schemas.openxmlformats.org/drawingml/2006/main" noGrp="1"/>
+          </p:cNvSpPr>
+          <p:nvPr/>
+        </p:nvSpPr>
+        <p:spPr>
+          <a:xfrm xmlns:a="http://schemas.openxmlformats.org/drawingml/2006/main">
+            <a:off x="9848850" y="4048125"/>
+            <a:ext cx="1123950" cy="285750"/>
+          </a:xfrm>
+          <a:prstGeom xmlns:a="http://schemas.openxmlformats.org/drawingml/2006/main" prst="rect">
+            <a:avLst/>
+          </a:prstGeom>
+          <a:noFill xmlns:a="http://schemas.openxmlformats.org/drawingml/2006/main"/>
+          <a:ln xmlns:a="http://schemas.openxmlformats.org/drawingml/2006/main" w="0">
+            <a:noFill/>
+            <a:prstDash val="solid"/>
+          </a:ln>
+        </p:spPr>
+        <p:txBody>
+          <a:bodyPr xmlns:a="http://schemas.openxmlformats.org/drawingml/2006/main"/>
+          <a:lstStyle xmlns:a="http://schemas.openxmlformats.org/drawingml/2006/main"/>
+          <a:p xmlns:a="http://schemas.openxmlformats.org/drawingml/2006/main">
+            <a:pPr>
+              <a:defRPr sz="938">
+                <a:solidFill>
+                  <a:srgbClr val="CBD5E1"/>
+                </a:solidFill>
+              </a:defRPr>
+            </a:pPr>
+            <a:r>
+              <a:rPr sz="938">
+                <a:solidFill>
+                  <a:srgbClr val="CBD5E1"/>
+                </a:solidFill>
+              </a:rPr>
+              <a:t>런칭 당일 체계</a:t>
+            </a:r>
+          </a:p>
+        </p:txBody>
+      </p:sp>
+      <p:sp>
+        <p:nvSpPr>
+          <p:cNvPr id="69" name="management-title">
+            <a:extLst xmlns:a="http://schemas.openxmlformats.org/drawingml/2006/main">
+              <a:ext uri="{FF2B5EF4-FFF2-40B4-BE49-F238E27FC236}">
+                <a16:creationId xmlns:a16="http://schemas.microsoft.com/office/drawing/2014/main" id="{657A9D68-DA2F-4D05-8737-8459A3EAB631}"/>
+              </a:ext>
+            </a:extLst>
+          </p:cNvPr>
+          <p:cNvSpPr>
+            <a:spLocks xmlns:a="http://schemas.openxmlformats.org/drawingml/2006/main" noGrp="1"/>
+          </p:cNvSpPr>
+          <p:nvPr/>
+        </p:nvSpPr>
+        <p:spPr>
+          <a:xfrm xmlns:a="http://schemas.openxmlformats.org/drawingml/2006/main">
+            <a:off x="514350" y="4819650"/>
+            <a:ext cx="2286000" cy="266700"/>
+          </a:xfrm>
+          <a:prstGeom xmlns:a="http://schemas.openxmlformats.org/drawingml/2006/main" prst="rect">
+            <a:avLst/>
+          </a:prstGeom>
+          <a:noFill xmlns:a="http://schemas.openxmlformats.org/drawingml/2006/main"/>
+          <a:ln xmlns:a="http://schemas.openxmlformats.org/drawingml/2006/main" w="0">
+            <a:noFill/>
+            <a:prstDash val="solid"/>
+          </a:ln>
+        </p:spPr>
+        <p:txBody>
+          <a:bodyPr xmlns:a="http://schemas.openxmlformats.org/drawingml/2006/main"/>
+          <a:lstStyle xmlns:a="http://schemas.openxmlformats.org/drawingml/2006/main"/>
+          <a:p xmlns:a="http://schemas.openxmlformats.org/drawingml/2006/main">
+            <a:pPr>
+              <a:defRPr sz="1650" b="1">
+                <a:solidFill>
+                  <a:srgbClr val="FFFFFF"/>
+                </a:solidFill>
+              </a:defRPr>
+            </a:pPr>
+            <a:r>
+              <a:rPr sz="1650" b="1">
+                <a:solidFill>
+                  <a:srgbClr val="FFFFFF"/>
+                </a:solidFill>
+              </a:rPr>
+              <a:t>PM 관리 포인트</a:t>
+            </a:r>
+          </a:p>
+        </p:txBody>
+      </p:sp>
+      <p:sp>
+        <p:nvSpPr>
+          <p:cNvPr id="70" name="management-note">
+            <a:extLst xmlns:a="http://schemas.openxmlformats.org/drawingml/2006/main">
+              <a:ext uri="{FF2B5EF4-FFF2-40B4-BE49-F238E27FC236}">
+                <a16:creationId xmlns:a16="http://schemas.microsoft.com/office/drawing/2014/main" id="{2DB3FD3C-0397-4C22-A692-AA449B6C0B95}"/>
+              </a:ext>
+            </a:extLst>
+          </p:cNvPr>
+          <p:cNvSpPr>
+            <a:spLocks xmlns:a="http://schemas.openxmlformats.org/drawingml/2006/main" noGrp="1"/>
+          </p:cNvSpPr>
+          <p:nvPr/>
+        </p:nvSpPr>
+        <p:spPr>
+          <a:xfrm xmlns:a="http://schemas.openxmlformats.org/drawingml/2006/main">
+            <a:off x="2305050" y="4867275"/>
+            <a:ext cx="7239000" cy="209550"/>
+          </a:xfrm>
+          <a:prstGeom xmlns:a="http://schemas.openxmlformats.org/drawingml/2006/main" prst="rect">
+            <a:avLst/>
+          </a:prstGeom>
+          <a:noFill xmlns:a="http://schemas.openxmlformats.org/drawingml/2006/main"/>
+          <a:ln xmlns:a="http://schemas.openxmlformats.org/drawingml/2006/main" w="0">
+            <a:noFill/>
+            <a:prstDash val="solid"/>
+          </a:ln>
+        </p:spPr>
+        <p:txBody>
+          <a:bodyPr xmlns:a="http://schemas.openxmlformats.org/drawingml/2006/main"/>
+          <a:lstStyle xmlns:a="http://schemas.openxmlformats.org/drawingml/2006/main"/>
+          <a:p xmlns:a="http://schemas.openxmlformats.org/drawingml/2006/main">
+            <a:pPr>
+              <a:defRPr sz="1050">
+                <a:solidFill>
+                  <a:srgbClr val="94A3B8"/>
+                </a:solidFill>
+              </a:defRPr>
+            </a:pPr>
+            <a:r>
+              <a:rPr sz="1050">
+                <a:solidFill>
+                  <a:srgbClr val="94A3B8"/>
+                </a:solidFill>
+              </a:rPr>
+              <a:t>각 단계의 완료 기준을 명확히 두고, 빌드·QA·퍼블리셔 대응을 같은 리듬으로 관리합니다.</a:t>
+            </a:r>
+          </a:p>
+        </p:txBody>
+      </p:sp>
+      <p:sp>
+        <p:nvSpPr>
+          <p:cNvPr id="71" name="mgmt-card-1">
+            <a:extLst xmlns:a="http://schemas.openxmlformats.org/drawingml/2006/main">
+              <a:ext uri="{FF2B5EF4-FFF2-40B4-BE49-F238E27FC236}">
+                <a16:creationId xmlns:a16="http://schemas.microsoft.com/office/drawing/2014/main" id="{95874C78-B412-491A-8015-2E614E140F1A}"/>
+              </a:ext>
+            </a:extLst>
+          </p:cNvPr>
+          <p:cNvSpPr>
+            <a:spLocks xmlns:a="http://schemas.openxmlformats.org/drawingml/2006/main" noGrp="1"/>
+          </p:cNvSpPr>
+          <p:nvPr/>
+        </p:nvSpPr>
+        <p:spPr>
+          <a:xfrm xmlns:a="http://schemas.openxmlformats.org/drawingml/2006/main">
+            <a:off x="514350" y="5200650"/>
+            <a:ext cx="2476500" cy="781050"/>
+          </a:xfrm>
+          <a:prstGeom xmlns:a="http://schemas.openxmlformats.org/drawingml/2006/main" prst="roundRect">
+            <a:avLst>
+              <a:gd name="adj" fmla="val 9756"/>
+            </a:avLst>
+          </a:prstGeom>
+          <a:solidFill xmlns:a="http://schemas.openxmlformats.org/drawingml/2006/main">
+            <a:srgbClr val="151F34"/>
+          </a:solidFill>
+          <a:ln xmlns:a="http://schemas.openxmlformats.org/drawingml/2006/main" w="9525">
+            <a:solidFill>
+              <a:srgbClr val="2F3B55"/>
+            </a:solidFill>
+            <a:prstDash val="solid"/>
+          </a:ln>
+        </p:spPr>
+      </p:sp>
+      <p:sp>
+        <p:nvSpPr>
+          <p:cNvPr id="72" name="mgmt-bar-1">
+            <a:extLst xmlns:a="http://schemas.openxmlformats.org/drawingml/2006/main">
+              <a:ext uri="{FF2B5EF4-FFF2-40B4-BE49-F238E27FC236}">
+                <a16:creationId xmlns:a16="http://schemas.microsoft.com/office/drawing/2014/main" id="{387AF5D1-66A7-4E42-B8F3-225B9438CFBA}"/>
+              </a:ext>
+            </a:extLst>
+          </p:cNvPr>
+          <p:cNvSpPr>
+            <a:spLocks xmlns:a="http://schemas.openxmlformats.org/drawingml/2006/main" noGrp="1"/>
+          </p:cNvSpPr>
+          <p:nvPr/>
+        </p:nvSpPr>
+        <p:spPr>
+          <a:xfrm xmlns:a="http://schemas.openxmlformats.org/drawingml/2006/main">
+            <a:off x="514350" y="5200650"/>
+            <a:ext cx="2476500" cy="47625"/>
+          </a:xfrm>
+          <a:prstGeom xmlns:a="http://schemas.openxmlformats.org/drawingml/2006/main" prst="rect">
+            <a:avLst/>
+          </a:prstGeom>
+          <a:solidFill xmlns:a="http://schemas.openxmlformats.org/drawingml/2006/main">
+            <a:srgbClr val="00B8D9"/>
+          </a:solidFill>
+          <a:ln xmlns:a="http://schemas.openxmlformats.org/drawingml/2006/main" w="0">
+            <a:solidFill>
+              <a:srgbClr val="00B8D9"/>
+            </a:solidFill>
+            <a:prstDash val="solid"/>
+          </a:ln>
+        </p:spPr>
+      </p:sp>
+      <p:sp>
+        <p:nvSpPr>
+          <p:cNvPr id="73" name="mgmt-label-1">
+            <a:extLst xmlns:a="http://schemas.openxmlformats.org/drawingml/2006/main">
+              <a:ext uri="{FF2B5EF4-FFF2-40B4-BE49-F238E27FC236}">
+                <a16:creationId xmlns:a16="http://schemas.microsoft.com/office/drawing/2014/main" id="{29D969DC-8823-4FAD-8BB5-66225A29291B}"/>
+              </a:ext>
+            </a:extLst>
+          </p:cNvPr>
+          <p:cNvSpPr>
+            <a:spLocks xmlns:a="http://schemas.openxmlformats.org/drawingml/2006/main" noGrp="1"/>
+          </p:cNvSpPr>
+          <p:nvPr/>
+        </p:nvSpPr>
+        <p:spPr>
+          <a:xfrm xmlns:a="http://schemas.openxmlformats.org/drawingml/2006/main">
+            <a:off x="704850" y="5391150"/>
+            <a:ext cx="2000250" cy="228600"/>
+          </a:xfrm>
+          <a:prstGeom xmlns:a="http://schemas.openxmlformats.org/drawingml/2006/main" prst="rect">
+            <a:avLst/>
+          </a:prstGeom>
+          <a:noFill xmlns:a="http://schemas.openxmlformats.org/drawingml/2006/main"/>
+          <a:ln xmlns:a="http://schemas.openxmlformats.org/drawingml/2006/main" w="0">
+            <a:noFill/>
+            <a:prstDash val="solid"/>
+          </a:ln>
+        </p:spPr>
+        <p:txBody>
+          <a:bodyPr xmlns:a="http://schemas.openxmlformats.org/drawingml/2006/main"/>
+          <a:lstStyle xmlns:a="http://schemas.openxmlformats.org/drawingml/2006/main"/>
+          <a:p xmlns:a="http://schemas.openxmlformats.org/drawingml/2006/main">
+            <a:pPr>
+              <a:defRPr sz="1275" b="1">
+                <a:solidFill>
+                  <a:srgbClr val="FFFFFF"/>
+                </a:solidFill>
+              </a:defRPr>
+            </a:pPr>
+            <a:r>
+              <a:rPr sz="1275" b="1">
+                <a:solidFill>
+                  <a:srgbClr val="FFFFFF"/>
+                </a:solidFill>
+              </a:rPr>
+              <a:t>마일스톤</a:t>
+            </a:r>
+          </a:p>
+        </p:txBody>
+      </p:sp>
+      <p:sp>
+        <p:nvSpPr>
+          <p:cNvPr id="74" name="mgmt-body-1">
+            <a:extLst xmlns:a="http://schemas.openxmlformats.org/drawingml/2006/main">
+              <a:ext uri="{FF2B5EF4-FFF2-40B4-BE49-F238E27FC236}">
+                <a16:creationId xmlns:a16="http://schemas.microsoft.com/office/drawing/2014/main" id="{1B0F1B00-84EC-4081-86FE-A13B2C45563A}"/>
+              </a:ext>
+            </a:extLst>
+          </p:cNvPr>
+          <p:cNvSpPr>
+            <a:spLocks xmlns:a="http://schemas.openxmlformats.org/drawingml/2006/main" noGrp="1"/>
+          </p:cNvSpPr>
+          <p:nvPr/>
+        </p:nvSpPr>
+        <p:spPr>
+          <a:xfrm xmlns:a="http://schemas.openxmlformats.org/drawingml/2006/main">
+            <a:off x="704850" y="5657850"/>
+            <a:ext cx="2038350" cy="228600"/>
+          </a:xfrm>
+          <a:prstGeom xmlns:a="http://schemas.openxmlformats.org/drawingml/2006/main" prst="rect">
+            <a:avLst/>
+          </a:prstGeom>
+          <a:noFill xmlns:a="http://schemas.openxmlformats.org/drawingml/2006/main"/>
+          <a:ln xmlns:a="http://schemas.openxmlformats.org/drawingml/2006/main" w="0">
+            <a:noFill/>
+            <a:prstDash val="solid"/>
+          </a:ln>
+        </p:spPr>
+        <p:txBody>
+          <a:bodyPr xmlns:a="http://schemas.openxmlformats.org/drawingml/2006/main"/>
+          <a:lstStyle xmlns:a="http://schemas.openxmlformats.org/drawingml/2006/main"/>
+          <a:p xmlns:a="http://schemas.openxmlformats.org/drawingml/2006/main">
+            <a:pPr>
+              <a:defRPr sz="975">
+                <a:solidFill>
+                  <a:srgbClr val="CBD5E1"/>
+                </a:solidFill>
+              </a:defRPr>
+            </a:pPr>
+            <a:r>
+              <a:rPr sz="975">
+                <a:solidFill>
+                  <a:srgbClr val="CBD5E1"/>
+                </a:solidFill>
+              </a:rPr>
+              <a:t>단계별 게이트 기준 관리</a:t>
+            </a:r>
+          </a:p>
+        </p:txBody>
+      </p:sp>
+      <p:sp>
+        <p:nvSpPr>
+          <p:cNvPr id="75" name="mgmt-card-2">
+            <a:extLst xmlns:a="http://schemas.openxmlformats.org/drawingml/2006/main">
+              <a:ext uri="{FF2B5EF4-FFF2-40B4-BE49-F238E27FC236}">
+                <a16:creationId xmlns:a16="http://schemas.microsoft.com/office/drawing/2014/main" id="{75F9B55D-63EB-4E2F-8846-2237E2F6F73C}"/>
+              </a:ext>
+            </a:extLst>
+          </p:cNvPr>
+          <p:cNvSpPr>
+            <a:spLocks xmlns:a="http://schemas.openxmlformats.org/drawingml/2006/main" noGrp="1"/>
+          </p:cNvSpPr>
+          <p:nvPr/>
+        </p:nvSpPr>
+        <p:spPr>
+          <a:xfrm xmlns:a="http://schemas.openxmlformats.org/drawingml/2006/main">
+            <a:off x="3238500" y="5200650"/>
+            <a:ext cx="2476500" cy="781050"/>
+          </a:xfrm>
+          <a:prstGeom xmlns:a="http://schemas.openxmlformats.org/drawingml/2006/main" prst="roundRect">
+            <a:avLst>
+              <a:gd name="adj" fmla="val 9756"/>
+            </a:avLst>
+          </a:prstGeom>
+          <a:solidFill xmlns:a="http://schemas.openxmlformats.org/drawingml/2006/main">
+            <a:srgbClr val="151F34"/>
+          </a:solidFill>
+          <a:ln xmlns:a="http://schemas.openxmlformats.org/drawingml/2006/main" w="9525">
+            <a:solidFill>
+              <a:srgbClr val="2F3B55"/>
+            </a:solidFill>
+            <a:prstDash val="solid"/>
+          </a:ln>
+        </p:spPr>
+      </p:sp>
+      <p:sp>
+        <p:nvSpPr>
+          <p:cNvPr id="76" name="mgmt-bar-2">
+            <a:extLst xmlns:a="http://schemas.openxmlformats.org/drawingml/2006/main">
+              <a:ext uri="{FF2B5EF4-FFF2-40B4-BE49-F238E27FC236}">
+                <a16:creationId xmlns:a16="http://schemas.microsoft.com/office/drawing/2014/main" id="{CD430347-1047-4BA2-A3EC-AED3E9851618}"/>
+              </a:ext>
+            </a:extLst>
+          </p:cNvPr>
+          <p:cNvSpPr>
+            <a:spLocks xmlns:a="http://schemas.openxmlformats.org/drawingml/2006/main" noGrp="1"/>
+          </p:cNvSpPr>
+          <p:nvPr/>
+        </p:nvSpPr>
+        <p:spPr>
+          <a:xfrm xmlns:a="http://schemas.openxmlformats.org/drawingml/2006/main">
+            <a:off x="3238500" y="5200650"/>
+            <a:ext cx="2476500" cy="47625"/>
+          </a:xfrm>
+          <a:prstGeom xmlns:a="http://schemas.openxmlformats.org/drawingml/2006/main" prst="rect">
+            <a:avLst/>
+          </a:prstGeom>
+          <a:solidFill xmlns:a="http://schemas.openxmlformats.org/drawingml/2006/main">
+            <a:srgbClr val="FF6B35"/>
+          </a:solidFill>
+          <a:ln xmlns:a="http://schemas.openxmlformats.org/drawingml/2006/main" w="0">
+            <a:solidFill>
+              <a:srgbClr val="FF6B35"/>
+            </a:solidFill>
+            <a:prstDash val="solid"/>
+          </a:ln>
+        </p:spPr>
+      </p:sp>
+      <p:sp>
+        <p:nvSpPr>
+          <p:cNvPr id="77" name="mgmt-label-2">
+            <a:extLst xmlns:a="http://schemas.openxmlformats.org/drawingml/2006/main">
+              <a:ext uri="{FF2B5EF4-FFF2-40B4-BE49-F238E27FC236}">
+                <a16:creationId xmlns:a16="http://schemas.microsoft.com/office/drawing/2014/main" id="{16686872-EE19-4CCD-9BF5-90BB18013C6D}"/>
+              </a:ext>
+            </a:extLst>
+          </p:cNvPr>
+          <p:cNvSpPr>
+            <a:spLocks xmlns:a="http://schemas.openxmlformats.org/drawingml/2006/main" noGrp="1"/>
+          </p:cNvSpPr>
+          <p:nvPr/>
+        </p:nvSpPr>
+        <p:spPr>
+          <a:xfrm xmlns:a="http://schemas.openxmlformats.org/drawingml/2006/main">
+            <a:off x="3429000" y="5391150"/>
+            <a:ext cx="2000250" cy="228600"/>
+          </a:xfrm>
+          <a:prstGeom xmlns:a="http://schemas.openxmlformats.org/drawingml/2006/main" prst="rect">
+            <a:avLst/>
+          </a:prstGeom>
+          <a:noFill xmlns:a="http://schemas.openxmlformats.org/drawingml/2006/main"/>
+          <a:ln xmlns:a="http://schemas.openxmlformats.org/drawingml/2006/main" w="0">
+            <a:noFill/>
+            <a:prstDash val="solid"/>
+          </a:ln>
+        </p:spPr>
+        <p:txBody>
+          <a:bodyPr xmlns:a="http://schemas.openxmlformats.org/drawingml/2006/main"/>
+          <a:lstStyle xmlns:a="http://schemas.openxmlformats.org/drawingml/2006/main"/>
+          <a:p xmlns:a="http://schemas.openxmlformats.org/drawingml/2006/main">
+            <a:pPr>
+              <a:defRPr sz="1275" b="1">
+                <a:solidFill>
+                  <a:srgbClr val="FFFFFF"/>
+                </a:solidFill>
+              </a:defRPr>
+            </a:pPr>
+            <a:r>
+              <a:rPr sz="1275" b="1">
+                <a:solidFill>
+                  <a:srgbClr val="FFFFFF"/>
+                </a:solidFill>
+              </a:rPr>
+              <a:t>빌드·버전</a:t>
+            </a:r>
+          </a:p>
+        </p:txBody>
+      </p:sp>
+      <p:sp>
+        <p:nvSpPr>
+          <p:cNvPr id="78" name="mgmt-body-2">
+            <a:extLst xmlns:a="http://schemas.openxmlformats.org/drawingml/2006/main">
+              <a:ext uri="{FF2B5EF4-FFF2-40B4-BE49-F238E27FC236}">
+                <a16:creationId xmlns:a16="http://schemas.microsoft.com/office/drawing/2014/main" id="{266ADA6D-5169-4F74-B1F5-10F88A2D4354}"/>
+              </a:ext>
+            </a:extLst>
+          </p:cNvPr>
+          <p:cNvSpPr>
+            <a:spLocks xmlns:a="http://schemas.openxmlformats.org/drawingml/2006/main" noGrp="1"/>
+          </p:cNvSpPr>
+          <p:nvPr/>
+        </p:nvSpPr>
+        <p:spPr>
+          <a:xfrm xmlns:a="http://schemas.openxmlformats.org/drawingml/2006/main">
+            <a:off x="3429000" y="5657850"/>
+            <a:ext cx="2038350" cy="228600"/>
+          </a:xfrm>
+          <a:prstGeom xmlns:a="http://schemas.openxmlformats.org/drawingml/2006/main" prst="rect">
+            <a:avLst/>
+          </a:prstGeom>
+          <a:noFill xmlns:a="http://schemas.openxmlformats.org/drawingml/2006/main"/>
+          <a:ln xmlns:a="http://schemas.openxmlformats.org/drawingml/2006/main" w="0">
+            <a:noFill/>
+            <a:prstDash val="solid"/>
+          </a:ln>
+        </p:spPr>
+        <p:txBody>
+          <a:bodyPr xmlns:a="http://schemas.openxmlformats.org/drawingml/2006/main"/>
+          <a:lstStyle xmlns:a="http://schemas.openxmlformats.org/drawingml/2006/main"/>
+          <a:p xmlns:a="http://schemas.openxmlformats.org/drawingml/2006/main">
+            <a:pPr>
+              <a:defRPr sz="975">
+                <a:solidFill>
+                  <a:srgbClr val="CBD5E1"/>
+                </a:solidFill>
+              </a:defRPr>
+            </a:pPr>
+            <a:r>
+              <a:rPr sz="975">
+                <a:solidFill>
+                  <a:srgbClr val="CBD5E1"/>
+                </a:solidFill>
+              </a:rPr>
+              <a:t>Perforce 기반 후보 빌드 통제</a:t>
+            </a:r>
+          </a:p>
+        </p:txBody>
+      </p:sp>
+      <p:sp>
+        <p:nvSpPr>
+          <p:cNvPr id="79" name="mgmt-card-3">
+            <a:extLst xmlns:a="http://schemas.openxmlformats.org/drawingml/2006/main">
+              <a:ext uri="{FF2B5EF4-FFF2-40B4-BE49-F238E27FC236}">
+                <a16:creationId xmlns:a16="http://schemas.microsoft.com/office/drawing/2014/main" id="{76DA3954-FC8B-404C-9EFF-DE5A5FCD564F}"/>
+              </a:ext>
+            </a:extLst>
+          </p:cNvPr>
+          <p:cNvSpPr>
+            <a:spLocks xmlns:a="http://schemas.openxmlformats.org/drawingml/2006/main" noGrp="1"/>
+          </p:cNvSpPr>
+          <p:nvPr/>
+        </p:nvSpPr>
+        <p:spPr>
+          <a:xfrm xmlns:a="http://schemas.openxmlformats.org/drawingml/2006/main">
+            <a:off x="5962650" y="5200650"/>
+            <a:ext cx="2476500" cy="781050"/>
+          </a:xfrm>
+          <a:prstGeom xmlns:a="http://schemas.openxmlformats.org/drawingml/2006/main" prst="roundRect">
+            <a:avLst>
+              <a:gd name="adj" fmla="val 9756"/>
+            </a:avLst>
+          </a:prstGeom>
+          <a:solidFill xmlns:a="http://schemas.openxmlformats.org/drawingml/2006/main">
+            <a:srgbClr val="151F34"/>
+          </a:solidFill>
+          <a:ln xmlns:a="http://schemas.openxmlformats.org/drawingml/2006/main" w="9525">
+            <a:solidFill>
+              <a:srgbClr val="2F3B55"/>
+            </a:solidFill>
+            <a:prstDash val="solid"/>
+          </a:ln>
+        </p:spPr>
+      </p:sp>
+      <p:sp>
+        <p:nvSpPr>
+          <p:cNvPr id="80" name="mgmt-bar-3">
+            <a:extLst xmlns:a="http://schemas.openxmlformats.org/drawingml/2006/main">
+              <a:ext uri="{FF2B5EF4-FFF2-40B4-BE49-F238E27FC236}">
+                <a16:creationId xmlns:a16="http://schemas.microsoft.com/office/drawing/2014/main" id="{BD1C5FA8-DA5A-4385-8F85-DAE4548F551C}"/>
+              </a:ext>
+            </a:extLst>
+          </p:cNvPr>
+          <p:cNvSpPr>
+            <a:spLocks xmlns:a="http://schemas.openxmlformats.org/drawingml/2006/main" noGrp="1"/>
+          </p:cNvSpPr>
+          <p:nvPr/>
+        </p:nvSpPr>
+        <p:spPr>
+          <a:xfrm xmlns:a="http://schemas.openxmlformats.org/drawingml/2006/main">
+            <a:off x="5962650" y="5200650"/>
+            <a:ext cx="2476500" cy="47625"/>
+          </a:xfrm>
+          <a:prstGeom xmlns:a="http://schemas.openxmlformats.org/drawingml/2006/main" prst="rect">
+            <a:avLst/>
+          </a:prstGeom>
+          <a:solidFill xmlns:a="http://schemas.openxmlformats.org/drawingml/2006/main">
+            <a:srgbClr val="7C3AED"/>
+          </a:solidFill>
+          <a:ln xmlns:a="http://schemas.openxmlformats.org/drawingml/2006/main" w="0">
+            <a:solidFill>
+              <a:srgbClr val="7C3AED"/>
+            </a:solidFill>
+            <a:prstDash val="solid"/>
+          </a:ln>
+        </p:spPr>
+      </p:sp>
+      <p:sp>
+        <p:nvSpPr>
+          <p:cNvPr id="81" name="mgmt-label-3">
+            <a:extLst xmlns:a="http://schemas.openxmlformats.org/drawingml/2006/main">
+              <a:ext uri="{FF2B5EF4-FFF2-40B4-BE49-F238E27FC236}">
+                <a16:creationId xmlns:a16="http://schemas.microsoft.com/office/drawing/2014/main" id="{1A475A50-1440-4941-BE44-EB878926FADB}"/>
+              </a:ext>
+            </a:extLst>
+          </p:cNvPr>
+          <p:cNvSpPr>
+            <a:spLocks xmlns:a="http://schemas.openxmlformats.org/drawingml/2006/main" noGrp="1"/>
+          </p:cNvSpPr>
+          <p:nvPr/>
+        </p:nvSpPr>
+        <p:spPr>
+          <a:xfrm xmlns:a="http://schemas.openxmlformats.org/drawingml/2006/main">
+            <a:off x="6153150" y="5391150"/>
+            <a:ext cx="2000250" cy="228600"/>
+          </a:xfrm>
+          <a:prstGeom xmlns:a="http://schemas.openxmlformats.org/drawingml/2006/main" prst="rect">
+            <a:avLst/>
+          </a:prstGeom>
+          <a:noFill xmlns:a="http://schemas.openxmlformats.org/drawingml/2006/main"/>
+          <a:ln xmlns:a="http://schemas.openxmlformats.org/drawingml/2006/main" w="0">
+            <a:noFill/>
+            <a:prstDash val="solid"/>
+          </a:ln>
+        </p:spPr>
+        <p:txBody>
+          <a:bodyPr xmlns:a="http://schemas.openxmlformats.org/drawingml/2006/main"/>
+          <a:lstStyle xmlns:a="http://schemas.openxmlformats.org/drawingml/2006/main"/>
+          <a:p xmlns:a="http://schemas.openxmlformats.org/drawingml/2006/main">
+            <a:pPr>
+              <a:defRPr sz="1275" b="1">
+                <a:solidFill>
+                  <a:srgbClr val="FFFFFF"/>
+                </a:solidFill>
+              </a:defRPr>
+            </a:pPr>
+            <a:r>
+              <a:rPr sz="1275" b="1">
+                <a:solidFill>
+                  <a:srgbClr val="FFFFFF"/>
+                </a:solidFill>
+              </a:rPr>
+              <a:t>QA</a:t>
+            </a:r>
+          </a:p>
+        </p:txBody>
+      </p:sp>
+      <p:sp>
+        <p:nvSpPr>
+          <p:cNvPr id="82" name="mgmt-body-3">
+            <a:extLst xmlns:a="http://schemas.openxmlformats.org/drawingml/2006/main">
+              <a:ext uri="{FF2B5EF4-FFF2-40B4-BE49-F238E27FC236}">
+                <a16:creationId xmlns:a16="http://schemas.microsoft.com/office/drawing/2014/main" id="{CD5C234B-41EE-4783-A273-5CCA0840F2F9}"/>
+              </a:ext>
+            </a:extLst>
+          </p:cNvPr>
+          <p:cNvSpPr>
+            <a:spLocks xmlns:a="http://schemas.openxmlformats.org/drawingml/2006/main" noGrp="1"/>
+          </p:cNvSpPr>
+          <p:nvPr/>
+        </p:nvSpPr>
+        <p:spPr>
+          <a:xfrm xmlns:a="http://schemas.openxmlformats.org/drawingml/2006/main">
+            <a:off x="6153150" y="5657850"/>
+            <a:ext cx="2038350" cy="228600"/>
+          </a:xfrm>
+          <a:prstGeom xmlns:a="http://schemas.openxmlformats.org/drawingml/2006/main" prst="rect">
+            <a:avLst/>
+          </a:prstGeom>
+          <a:noFill xmlns:a="http://schemas.openxmlformats.org/drawingml/2006/main"/>
+          <a:ln xmlns:a="http://schemas.openxmlformats.org/drawingml/2006/main" w="0">
+            <a:noFill/>
+            <a:prstDash val="solid"/>
+          </a:ln>
+        </p:spPr>
+        <p:txBody>
+          <a:bodyPr xmlns:a="http://schemas.openxmlformats.org/drawingml/2006/main"/>
+          <a:lstStyle xmlns:a="http://schemas.openxmlformats.org/drawingml/2006/main"/>
+          <a:p xmlns:a="http://schemas.openxmlformats.org/drawingml/2006/main">
+            <a:pPr>
+              <a:defRPr sz="975">
+                <a:solidFill>
+                  <a:srgbClr val="CBD5E1"/>
+                </a:solidFill>
+              </a:defRPr>
+            </a:pPr>
+            <a:r>
+              <a:rPr sz="975">
+                <a:solidFill>
+                  <a:srgbClr val="CBD5E1"/>
+                </a:solidFill>
+              </a:rPr>
+              <a:t>결함 우선순위와 수정 반영 추적</a:t>
+            </a:r>
+          </a:p>
+        </p:txBody>
+      </p:sp>
+      <p:sp>
+        <p:nvSpPr>
+          <p:cNvPr id="83" name="mgmt-card-4">
+            <a:extLst xmlns:a="http://schemas.openxmlformats.org/drawingml/2006/main">
+              <a:ext uri="{FF2B5EF4-FFF2-40B4-BE49-F238E27FC236}">
+                <a16:creationId xmlns:a16="http://schemas.microsoft.com/office/drawing/2014/main" id="{97F788D7-0534-4D8A-9201-75B130289D68}"/>
+              </a:ext>
+            </a:extLst>
+          </p:cNvPr>
+          <p:cNvSpPr>
+            <a:spLocks xmlns:a="http://schemas.openxmlformats.org/drawingml/2006/main" noGrp="1"/>
+          </p:cNvSpPr>
+          <p:nvPr/>
+        </p:nvSpPr>
+        <p:spPr>
+          <a:xfrm xmlns:a="http://schemas.openxmlformats.org/drawingml/2006/main">
+            <a:off x="8686800" y="5200650"/>
+            <a:ext cx="2476500" cy="781050"/>
+          </a:xfrm>
+          <a:prstGeom xmlns:a="http://schemas.openxmlformats.org/drawingml/2006/main" prst="roundRect">
+            <a:avLst>
+              <a:gd name="adj" fmla="val 9756"/>
+            </a:avLst>
+          </a:prstGeom>
+          <a:solidFill xmlns:a="http://schemas.openxmlformats.org/drawingml/2006/main">
+            <a:srgbClr val="151F34"/>
+          </a:solidFill>
+          <a:ln xmlns:a="http://schemas.openxmlformats.org/drawingml/2006/main" w="9525">
+            <a:solidFill>
+              <a:srgbClr val="2F3B55"/>
+            </a:solidFill>
+            <a:prstDash val="solid"/>
+          </a:ln>
+        </p:spPr>
+      </p:sp>
+      <p:sp>
+        <p:nvSpPr>
+          <p:cNvPr id="84" name="mgmt-bar-4">
+            <a:extLst xmlns:a="http://schemas.openxmlformats.org/drawingml/2006/main">
+              <a:ext uri="{FF2B5EF4-FFF2-40B4-BE49-F238E27FC236}">
+                <a16:creationId xmlns:a16="http://schemas.microsoft.com/office/drawing/2014/main" id="{DF0CA658-C20E-4AF6-BBC5-D6A3B931803F}"/>
+              </a:ext>
+            </a:extLst>
+          </p:cNvPr>
+          <p:cNvSpPr>
+            <a:spLocks xmlns:a="http://schemas.openxmlformats.org/drawingml/2006/main" noGrp="1"/>
+          </p:cNvSpPr>
+          <p:nvPr/>
+        </p:nvSpPr>
+        <p:spPr>
+          <a:xfrm xmlns:a="http://schemas.openxmlformats.org/drawingml/2006/main">
+            <a:off x="8686800" y="5200650"/>
+            <a:ext cx="2476500" cy="47625"/>
+          </a:xfrm>
+          <a:prstGeom xmlns:a="http://schemas.openxmlformats.org/drawingml/2006/main" prst="rect">
+            <a:avLst/>
+          </a:prstGeom>
+          <a:solidFill xmlns:a="http://schemas.openxmlformats.org/drawingml/2006/main">
+            <a:srgbClr val="8BD9E8"/>
+          </a:solidFill>
+          <a:ln xmlns:a="http://schemas.openxmlformats.org/drawingml/2006/main" w="0">
+            <a:solidFill>
+              <a:srgbClr val="8BD9E8"/>
+            </a:solidFill>
+            <a:prstDash val="solid"/>
+          </a:ln>
+        </p:spPr>
+      </p:sp>
+      <p:sp>
+        <p:nvSpPr>
+          <p:cNvPr id="85" name="mgmt-label-4">
+            <a:extLst xmlns:a="http://schemas.openxmlformats.org/drawingml/2006/main">
+              <a:ext uri="{FF2B5EF4-FFF2-40B4-BE49-F238E27FC236}">
+                <a16:creationId xmlns:a16="http://schemas.microsoft.com/office/drawing/2014/main" id="{122A1E17-FE56-474C-B9CC-481F5BF8D235}"/>
+              </a:ext>
+            </a:extLst>
+          </p:cNvPr>
+          <p:cNvSpPr>
+            <a:spLocks xmlns:a="http://schemas.openxmlformats.org/drawingml/2006/main" noGrp="1"/>
+          </p:cNvSpPr>
+          <p:nvPr/>
+        </p:nvSpPr>
+        <p:spPr>
+          <a:xfrm xmlns:a="http://schemas.openxmlformats.org/drawingml/2006/main">
+            <a:off x="8877300" y="5391150"/>
+            <a:ext cx="2000250" cy="228600"/>
+          </a:xfrm>
+          <a:prstGeom xmlns:a="http://schemas.openxmlformats.org/drawingml/2006/main" prst="rect">
+            <a:avLst/>
+          </a:prstGeom>
+          <a:noFill xmlns:a="http://schemas.openxmlformats.org/drawingml/2006/main"/>
+          <a:ln xmlns:a="http://schemas.openxmlformats.org/drawingml/2006/main" w="0">
+            <a:noFill/>
+            <a:prstDash val="solid"/>
+          </a:ln>
+        </p:spPr>
+        <p:txBody>
+          <a:bodyPr xmlns:a="http://schemas.openxmlformats.org/drawingml/2006/main"/>
+          <a:lstStyle xmlns:a="http://schemas.openxmlformats.org/drawingml/2006/main"/>
+          <a:p xmlns:a="http://schemas.openxmlformats.org/drawingml/2006/main">
+            <a:pPr>
+              <a:defRPr sz="1275" b="1">
+                <a:solidFill>
+                  <a:srgbClr val="FFFFFF"/>
+                </a:solidFill>
+              </a:defRPr>
+            </a:pPr>
+            <a:r>
+              <a:rPr sz="1275" b="1">
+                <a:solidFill>
+                  <a:srgbClr val="FFFFFF"/>
+                </a:solidFill>
+              </a:rPr>
+              <a:t>커뮤니케이션</a:t>
+            </a:r>
+          </a:p>
+        </p:txBody>
+      </p:sp>
+      <p:sp>
+        <p:nvSpPr>
+          <p:cNvPr id="86" name="mgmt-body-4">
+            <a:extLst xmlns:a="http://schemas.openxmlformats.org/drawingml/2006/main">
+              <a:ext uri="{FF2B5EF4-FFF2-40B4-BE49-F238E27FC236}">
+                <a16:creationId xmlns:a16="http://schemas.microsoft.com/office/drawing/2014/main" id="{584C4ED0-EF63-438C-9188-D292E450F6D5}"/>
+              </a:ext>
+            </a:extLst>
+          </p:cNvPr>
+          <p:cNvSpPr>
+            <a:spLocks xmlns:a="http://schemas.openxmlformats.org/drawingml/2006/main" noGrp="1"/>
+          </p:cNvSpPr>
+          <p:nvPr/>
+        </p:nvSpPr>
+        <p:spPr>
+          <a:xfrm xmlns:a="http://schemas.openxmlformats.org/drawingml/2006/main">
+            <a:off x="8877300" y="5657850"/>
+            <a:ext cx="2038350" cy="228600"/>
+          </a:xfrm>
+          <a:prstGeom xmlns:a="http://schemas.openxmlformats.org/drawingml/2006/main" prst="rect">
+            <a:avLst/>
+          </a:prstGeom>
+          <a:noFill xmlns:a="http://schemas.openxmlformats.org/drawingml/2006/main"/>
+          <a:ln xmlns:a="http://schemas.openxmlformats.org/drawingml/2006/main" w="0">
+            <a:noFill/>
+            <a:prstDash val="solid"/>
+          </a:ln>
+        </p:spPr>
+        <p:txBody>
+          <a:bodyPr xmlns:a="http://schemas.openxmlformats.org/drawingml/2006/main"/>
+          <a:lstStyle xmlns:a="http://schemas.openxmlformats.org/drawingml/2006/main"/>
+          <a:p xmlns:a="http://schemas.openxmlformats.org/drawingml/2006/main">
+            <a:pPr>
+              <a:defRPr sz="975">
+                <a:solidFill>
+                  <a:srgbClr val="CBD5E1"/>
+                </a:solidFill>
+              </a:defRPr>
+            </a:pPr>
+            <a:r>
+              <a:rPr sz="975">
+                <a:solidFill>
+                  <a:srgbClr val="CBD5E1"/>
+                </a:solidFill>
+              </a:rPr>
+              <a:t>개발·QA·퍼블리셔 의사결정 정리</a:t>
+            </a:r>
+          </a:p>
+        </p:txBody>
+      </p:sp>
+    </p:spTree>
+    <p:extLst>
+      <p:ext uri="{BB962C8B-B14F-4D97-AF65-F5344CB8AC3E}">
+        <p14:creationId xmlns:p14="http://schemas.microsoft.com/office/powerpoint/2010/main" val="1483899283"/>
       </p:ext>
     </p:extLst>
   </p:cSld>

--- a/outputs/HIT2_일본_런칭_6개월전_로드맵_초안.pptx
+++ b/outputs/HIT2_일본_런칭_6개월전_로드맵_초안.pptx
@@ -2,14 +2,15 @@
 <file path=ppt/presentation.xml><?xml version="1.0" encoding="utf-8"?>
 <p:presentation xmlns:p="http://schemas.openxmlformats.org/presentationml/2006/main">
   <p:sldMasterIdLst>
-    <p:sldMasterId xmlns:r="http://schemas.openxmlformats.org/officeDocument/2006/relationships" id="2147483648" r:id="Ra73ca0284a5045bb"/>
+    <p:sldMasterId xmlns:r="http://schemas.openxmlformats.org/officeDocument/2006/relationships" id="2147483648" r:id="R7418ac167d254113"/>
   </p:sldMasterIdLst>
   <p:notesMasterIdLst>
-    <p:notesMasterId xmlns:r="http://schemas.openxmlformats.org/officeDocument/2006/relationships" r:id="Rd05d2d6db90245b2"/>
+    <p:notesMasterId xmlns:r="http://schemas.openxmlformats.org/officeDocument/2006/relationships" r:id="R914258d389384800"/>
   </p:notesMasterIdLst>
   <p:sldIdLst>
-    <p:sldId xmlns:r="http://schemas.openxmlformats.org/officeDocument/2006/relationships" id="256" r:id="Rcabe6be937b54c9b"/>
-    <p:sldId xmlns:r="http://schemas.openxmlformats.org/officeDocument/2006/relationships" id="257" r:id="Rafd15bd06e254ca0"/>
+    <p:sldId xmlns:r="http://schemas.openxmlformats.org/officeDocument/2006/relationships" id="256" r:id="Rbf84308bdb1b4a64"/>
+    <p:sldId xmlns:r="http://schemas.openxmlformats.org/officeDocument/2006/relationships" id="257" r:id="R62c02af46f574785"/>
+    <p:sldId xmlns:r="http://schemas.openxmlformats.org/officeDocument/2006/relationships" id="258" r:id="R1e1f5645a8ae41e2"/>
   </p:sldIdLst>
   <p:sldSz cx="12192000" cy="6858000"/>
   <p:notesSz cx="6858000" cy="9144000"/>
@@ -630,6 +631,72 @@
 </p:notes>
 </file>
 
+<file path=ppt/notesSlides/notesSlide3.xml><?xml version="1.0" encoding="utf-8"?>
+<p:notes xmlns:p="http://schemas.openxmlformats.org/presentationml/2006/main">
+  <p:cSld>
+    <p:spTree>
+      <p:nvGrpSpPr>
+        <p:cNvPr id="1" name=""/>
+        <p:cNvGrpSpPr/>
+        <p:nvPr/>
+      </p:nvGrpSpPr>
+      <p:grpSpPr>
+        <a:xfrm xmlns:a="http://schemas.openxmlformats.org/drawingml/2006/main"/>
+      </p:grpSpPr>
+      <p:sp>
+        <p:nvSpPr>
+          <p:cNvPr id="2" name="Slide Image Placeholder 1"/>
+          <p:cNvSpPr>
+            <a:spLocks xmlns:a="http://schemas.openxmlformats.org/drawingml/2006/main" noGrp="1"/>
+          </p:cNvSpPr>
+          <p:nvPr>
+            <p:ph type="sldImg" idx="0"/>
+          </p:nvPr>
+        </p:nvSpPr>
+        <p:spPr/>
+      </p:sp>
+      <p:sp>
+        <p:nvSpPr>
+          <p:cNvPr id="3" name="Notes Placeholder 2"/>
+          <p:cNvSpPr>
+            <a:spLocks xmlns:a="http://schemas.openxmlformats.org/drawingml/2006/main" noGrp="1"/>
+          </p:cNvSpPr>
+          <p:nvPr>
+            <p:ph type="body" idx="1"/>
+          </p:nvPr>
+        </p:nvSpPr>
+        <p:spPr/>
+        <p:txBody>
+          <a:bodyPr xmlns:a="http://schemas.openxmlformats.org/drawingml/2006/main"/>
+          <a:lstStyle xmlns:a="http://schemas.openxmlformats.org/drawingml/2006/main"/>
+          <a:p xmlns:a="http://schemas.openxmlformats.org/drawingml/2006/main"/>
+        </p:txBody>
+      </p:sp>
+      <p:sp>
+        <p:nvSpPr>
+          <p:cNvPr id="4" name="Slide Number Placeholder 3"/>
+          <p:cNvSpPr>
+            <a:spLocks xmlns:a="http://schemas.openxmlformats.org/drawingml/2006/main" noGrp="1"/>
+          </p:cNvSpPr>
+          <p:nvPr>
+            <p:ph type="sldNum" idx="5"/>
+          </p:nvPr>
+        </p:nvSpPr>
+        <p:spPr/>
+        <p:txBody>
+          <a:bodyPr xmlns:a="http://schemas.openxmlformats.org/drawingml/2006/main"/>
+          <a:lstStyle xmlns:a="http://schemas.openxmlformats.org/drawingml/2006/main"/>
+          <a:p xmlns:a="http://schemas.openxmlformats.org/drawingml/2006/main"/>
+        </p:txBody>
+      </p:sp>
+    </p:spTree>
+  </p:cSld>
+  <p:clrMapOvr>
+    <a:masterClrMapping xmlns:a="http://schemas.openxmlformats.org/drawingml/2006/main"/>
+  </p:clrMapOvr>
+</p:notes>
+</file>
+
 <file path=ppt/slideLayouts/slideLayout1.xml><?xml version="1.0" encoding="utf-8"?>
 <p:sldLayout xmlns:p="http://schemas.openxmlformats.org/presentationml/2006/main" type="title">
   <p:cSld name="Title Slide">
@@ -668,7 +735,7 @@
   </p:cSld>
   <p:clrMap bg1="lt1" tx1="dk1" bg2="lt2" tx2="dk2" accent1="accent1" accent2="accent2" accent3="accent3" accent4="accent4" accent5="accent5" accent6="accent6" hlink="hlink" folHlink="folHlink"/>
   <p:sldLayoutIdLst>
-    <p:sldLayoutId xmlns:r="http://schemas.openxmlformats.org/officeDocument/2006/relationships" id="2147483649" r:id="Reae83263f9e94357"/>
+    <p:sldLayoutId xmlns:r="http://schemas.openxmlformats.org/officeDocument/2006/relationships" id="2147483649" r:id="R520cccd694914c8d"/>
   </p:sldLayoutIdLst>
   <p:txStyles>
     <p:titleStyle>
@@ -1219,7 +1286,7 @@
           <p:cNvPr id="1" name="top-accent">
             <a:extLst xmlns:a="http://schemas.openxmlformats.org/drawingml/2006/main">
               <a:ext uri="{FF2B5EF4-FFF2-40B4-BE49-F238E27FC236}">
-                <a16:creationId xmlns:a16="http://schemas.microsoft.com/office/drawing/2014/main" id="{BA9FC31A-24E2-4404-8D73-0C0E94D66413}"/>
+                <a16:creationId xmlns:a16="http://schemas.microsoft.com/office/drawing/2014/main" id="{915478D6-C4E2-4B02-B978-E2F4ED0B4302}"/>
               </a:ext>
             </a:extLst>
           </p:cNvPr>
@@ -1252,7 +1319,7 @@
           <p:cNvPr id="2" name="left-accent">
             <a:extLst xmlns:a="http://schemas.openxmlformats.org/drawingml/2006/main">
               <a:ext uri="{FF2B5EF4-FFF2-40B4-BE49-F238E27FC236}">
-                <a16:creationId xmlns:a16="http://schemas.microsoft.com/office/drawing/2014/main" id="{318ECBE9-8C22-4F3C-A00A-0DBDAB7CC6BA}"/>
+                <a16:creationId xmlns:a16="http://schemas.microsoft.com/office/drawing/2014/main" id="{ED023C25-CB6D-456D-AE1F-3AB87497C6EE}"/>
               </a:ext>
             </a:extLst>
           </p:cNvPr>
@@ -1285,7 +1352,7 @@
           <p:cNvPr id="3" name="eyebrow">
             <a:extLst xmlns:a="http://schemas.openxmlformats.org/drawingml/2006/main">
               <a:ext uri="{FF2B5EF4-FFF2-40B4-BE49-F238E27FC236}">
-                <a16:creationId xmlns:a16="http://schemas.microsoft.com/office/drawing/2014/main" id="{A1088874-0181-4485-8D4B-6D337C2D4B34}"/>
+                <a16:creationId xmlns:a16="http://schemas.microsoft.com/office/drawing/2014/main" id="{7DB9DD6E-0B1E-409D-9F47-FAD1755D8796}"/>
               </a:ext>
             </a:extLst>
           </p:cNvPr>
@@ -1335,7 +1402,7 @@
           <p:cNvPr id="4" name="footer">
             <a:extLst xmlns:a="http://schemas.openxmlformats.org/drawingml/2006/main">
               <a:ext uri="{FF2B5EF4-FFF2-40B4-BE49-F238E27FC236}">
-                <a16:creationId xmlns:a16="http://schemas.microsoft.com/office/drawing/2014/main" id="{F27946D4-1325-49F4-A7C7-396F3A828558}"/>
+                <a16:creationId xmlns:a16="http://schemas.microsoft.com/office/drawing/2014/main" id="{589EBEF4-E64A-4757-B3AA-658A0BEB716C}"/>
               </a:ext>
             </a:extLst>
           </p:cNvPr>
@@ -1385,7 +1452,7 @@
           <p:cNvPr id="5" name="page-no">
             <a:extLst xmlns:a="http://schemas.openxmlformats.org/drawingml/2006/main">
               <a:ext uri="{FF2B5EF4-FFF2-40B4-BE49-F238E27FC236}">
-                <a16:creationId xmlns:a16="http://schemas.microsoft.com/office/drawing/2014/main" id="{03285238-2862-4D0E-AA45-748D870B772A}"/>
+                <a16:creationId xmlns:a16="http://schemas.microsoft.com/office/drawing/2014/main" id="{7C8D61A1-8182-427F-9A8C-3EEC5C7D58FD}"/>
               </a:ext>
             </a:extLst>
           </p:cNvPr>
@@ -1435,7 +1502,7 @@
           <p:cNvPr id="6" name="hero-panel">
             <a:extLst xmlns:a="http://schemas.openxmlformats.org/drawingml/2006/main">
               <a:ext uri="{FF2B5EF4-FFF2-40B4-BE49-F238E27FC236}">
-                <a16:creationId xmlns:a16="http://schemas.microsoft.com/office/drawing/2014/main" id="{FD609226-52E0-494C-8185-45B80C8E88E0}"/>
+                <a16:creationId xmlns:a16="http://schemas.microsoft.com/office/drawing/2014/main" id="{7F599A71-FE45-4C49-96E6-376333CFDEFC}"/>
               </a:ext>
             </a:extLst>
           </p:cNvPr>
@@ -1468,7 +1535,7 @@
           <p:cNvPr id="7" name="hero-kicker">
             <a:extLst xmlns:a="http://schemas.openxmlformats.org/drawingml/2006/main">
               <a:ext uri="{FF2B5EF4-FFF2-40B4-BE49-F238E27FC236}">
-                <a16:creationId xmlns:a16="http://schemas.microsoft.com/office/drawing/2014/main" id="{7D29E825-A250-42CC-93B2-2582FB102106}"/>
+                <a16:creationId xmlns:a16="http://schemas.microsoft.com/office/drawing/2014/main" id="{90BFCC91-B00C-485F-B5D4-0FEFE6A16920}"/>
               </a:ext>
             </a:extLst>
           </p:cNvPr>
@@ -1518,7 +1585,7 @@
           <p:cNvPr id="8" name="hero-title">
             <a:extLst xmlns:a="http://schemas.openxmlformats.org/drawingml/2006/main">
               <a:ext uri="{FF2B5EF4-FFF2-40B4-BE49-F238E27FC236}">
-                <a16:creationId xmlns:a16="http://schemas.microsoft.com/office/drawing/2014/main" id="{CEBCDEA0-AB34-49D3-B587-18E4B8685E76}"/>
+                <a16:creationId xmlns:a16="http://schemas.microsoft.com/office/drawing/2014/main" id="{1C1624C8-8DA4-42D9-B024-2AFD8DD768CA}"/>
               </a:ext>
             </a:extLst>
           </p:cNvPr>
@@ -1568,7 +1635,7 @@
           <p:cNvPr id="9" name="hero-subtitle">
             <a:extLst xmlns:a="http://schemas.openxmlformats.org/drawingml/2006/main">
               <a:ext uri="{FF2B5EF4-FFF2-40B4-BE49-F238E27FC236}">
-                <a16:creationId xmlns:a16="http://schemas.microsoft.com/office/drawing/2014/main" id="{F36DB0B3-40AF-4C87-80C1-DD45C1636414}"/>
+                <a16:creationId xmlns:a16="http://schemas.microsoft.com/office/drawing/2014/main" id="{BF1973F7-EDD0-4609-98B4-6074D36C725E}"/>
               </a:ext>
             </a:extLst>
           </p:cNvPr>
@@ -1618,7 +1685,7 @@
           <p:cNvPr id="10" name="tag-1">
             <a:extLst xmlns:a="http://schemas.openxmlformats.org/drawingml/2006/main">
               <a:ext uri="{FF2B5EF4-FFF2-40B4-BE49-F238E27FC236}">
-                <a16:creationId xmlns:a16="http://schemas.microsoft.com/office/drawing/2014/main" id="{3C230F18-95ED-4475-8E79-85CE2E583DA2}"/>
+                <a16:creationId xmlns:a16="http://schemas.microsoft.com/office/drawing/2014/main" id="{E7D25977-DB2E-4C56-BBDB-EBF5336941CB}"/>
               </a:ext>
             </a:extLst>
           </p:cNvPr>
@@ -1674,7 +1741,7 @@
           <p:cNvPr id="11" name="tag-2">
             <a:extLst xmlns:a="http://schemas.openxmlformats.org/drawingml/2006/main">
               <a:ext uri="{FF2B5EF4-FFF2-40B4-BE49-F238E27FC236}">
-                <a16:creationId xmlns:a16="http://schemas.microsoft.com/office/drawing/2014/main" id="{51E654B1-2B53-4070-8AAD-BC79C07BE457}"/>
+                <a16:creationId xmlns:a16="http://schemas.microsoft.com/office/drawing/2014/main" id="{25EAF25A-8F71-46E2-83E8-2341EE1CE9AA}"/>
               </a:ext>
             </a:extLst>
           </p:cNvPr>
@@ -1730,7 +1797,7 @@
           <p:cNvPr id="12" name="tag-3">
             <a:extLst xmlns:a="http://schemas.openxmlformats.org/drawingml/2006/main">
               <a:ext uri="{FF2B5EF4-FFF2-40B4-BE49-F238E27FC236}">
-                <a16:creationId xmlns:a16="http://schemas.microsoft.com/office/drawing/2014/main" id="{F9DEF68A-91EE-4212-AD10-F7BF4B3B98A2}"/>
+                <a16:creationId xmlns:a16="http://schemas.microsoft.com/office/drawing/2014/main" id="{A882FE4B-C872-4CCB-B7FD-CA0AE586B88B}"/>
               </a:ext>
             </a:extLst>
           </p:cNvPr>
@@ -1786,7 +1853,7 @@
           <p:cNvPr id="13" name="scope-title">
             <a:extLst xmlns:a="http://schemas.openxmlformats.org/drawingml/2006/main">
               <a:ext uri="{FF2B5EF4-FFF2-40B4-BE49-F238E27FC236}">
-                <a16:creationId xmlns:a16="http://schemas.microsoft.com/office/drawing/2014/main" id="{DE00ADF5-937B-4350-97C0-4F09F1B3A46A}"/>
+                <a16:creationId xmlns:a16="http://schemas.microsoft.com/office/drawing/2014/main" id="{DCC71DF3-4F72-4FC7-A341-27A46AF26988}"/>
               </a:ext>
             </a:extLst>
           </p:cNvPr>
@@ -1836,7 +1903,7 @@
           <p:cNvPr id="14" name="scope-note">
             <a:extLst xmlns:a="http://schemas.openxmlformats.org/drawingml/2006/main">
               <a:ext uri="{FF2B5EF4-FFF2-40B4-BE49-F238E27FC236}">
-                <a16:creationId xmlns:a16="http://schemas.microsoft.com/office/drawing/2014/main" id="{F4A25A1E-BD60-434D-949D-46F03D72D672}"/>
+                <a16:creationId xmlns:a16="http://schemas.microsoft.com/office/drawing/2014/main" id="{4E5FAB43-19AB-4831-BA4A-663D456C7B9A}"/>
               </a:ext>
             </a:extLst>
           </p:cNvPr>
@@ -1886,7 +1953,7 @@
           <p:cNvPr id="15" name="scope-row-1">
             <a:extLst xmlns:a="http://schemas.openxmlformats.org/drawingml/2006/main">
               <a:ext uri="{FF2B5EF4-FFF2-40B4-BE49-F238E27FC236}">
-                <a16:creationId xmlns:a16="http://schemas.microsoft.com/office/drawing/2014/main" id="{57A04C4A-D67B-4AE3-8A04-3D58CF5483ED}"/>
+                <a16:creationId xmlns:a16="http://schemas.microsoft.com/office/drawing/2014/main" id="{14595D21-8304-4EBB-BEA7-CE99EC4F026A}"/>
               </a:ext>
             </a:extLst>
           </p:cNvPr>
@@ -1919,7 +1986,7 @@
           <p:cNvPr id="16" name="scope-label-1">
             <a:extLst xmlns:a="http://schemas.openxmlformats.org/drawingml/2006/main">
               <a:ext uri="{FF2B5EF4-FFF2-40B4-BE49-F238E27FC236}">
-                <a16:creationId xmlns:a16="http://schemas.microsoft.com/office/drawing/2014/main" id="{658382CF-33F6-449F-A938-CE6049F75E7F}"/>
+                <a16:creationId xmlns:a16="http://schemas.microsoft.com/office/drawing/2014/main" id="{07E724B2-100F-4078-9CB9-ADFAC0406180}"/>
               </a:ext>
             </a:extLst>
           </p:cNvPr>
@@ -1969,7 +2036,7 @@
           <p:cNvPr id="17" name="scope-value-1">
             <a:extLst xmlns:a="http://schemas.openxmlformats.org/drawingml/2006/main">
               <a:ext uri="{FF2B5EF4-FFF2-40B4-BE49-F238E27FC236}">
-                <a16:creationId xmlns:a16="http://schemas.microsoft.com/office/drawing/2014/main" id="{958A698B-FB6D-408A-A016-79A50C0A600D}"/>
+                <a16:creationId xmlns:a16="http://schemas.microsoft.com/office/drawing/2014/main" id="{F513CBC5-C018-430F-A0C7-D02C876A99C2}"/>
               </a:ext>
             </a:extLst>
           </p:cNvPr>
@@ -2019,7 +2086,7 @@
           <p:cNvPr id="18" name="scope-row-2">
             <a:extLst xmlns:a="http://schemas.openxmlformats.org/drawingml/2006/main">
               <a:ext uri="{FF2B5EF4-FFF2-40B4-BE49-F238E27FC236}">
-                <a16:creationId xmlns:a16="http://schemas.microsoft.com/office/drawing/2014/main" id="{FAA8AA22-D23C-4662-BFC3-342F8D78C932}"/>
+                <a16:creationId xmlns:a16="http://schemas.microsoft.com/office/drawing/2014/main" id="{211FAC08-5FE6-461F-AEEA-C2DAA87D426C}"/>
               </a:ext>
             </a:extLst>
           </p:cNvPr>
@@ -2052,7 +2119,7 @@
           <p:cNvPr id="19" name="scope-label-2">
             <a:extLst xmlns:a="http://schemas.openxmlformats.org/drawingml/2006/main">
               <a:ext uri="{FF2B5EF4-FFF2-40B4-BE49-F238E27FC236}">
-                <a16:creationId xmlns:a16="http://schemas.microsoft.com/office/drawing/2014/main" id="{857210C4-0BD7-481A-B085-0C863E570C78}"/>
+                <a16:creationId xmlns:a16="http://schemas.microsoft.com/office/drawing/2014/main" id="{C1D609A1-251D-4C43-A8DF-60CE86A126CA}"/>
               </a:ext>
             </a:extLst>
           </p:cNvPr>
@@ -2102,7 +2169,7 @@
           <p:cNvPr id="20" name="scope-value-2">
             <a:extLst xmlns:a="http://schemas.openxmlformats.org/drawingml/2006/main">
               <a:ext uri="{FF2B5EF4-FFF2-40B4-BE49-F238E27FC236}">
-                <a16:creationId xmlns:a16="http://schemas.microsoft.com/office/drawing/2014/main" id="{1F4EC4FE-49C0-48C7-9317-6B5EE8F9D505}"/>
+                <a16:creationId xmlns:a16="http://schemas.microsoft.com/office/drawing/2014/main" id="{FE07C9B7-9251-4B43-9E01-4083708FBFF8}"/>
               </a:ext>
             </a:extLst>
           </p:cNvPr>
@@ -2152,7 +2219,7 @@
           <p:cNvPr id="21" name="scope-row-3">
             <a:extLst xmlns:a="http://schemas.openxmlformats.org/drawingml/2006/main">
               <a:ext uri="{FF2B5EF4-FFF2-40B4-BE49-F238E27FC236}">
-                <a16:creationId xmlns:a16="http://schemas.microsoft.com/office/drawing/2014/main" id="{DCEDB403-193A-4FDA-8B1C-C3528D274A9D}"/>
+                <a16:creationId xmlns:a16="http://schemas.microsoft.com/office/drawing/2014/main" id="{21C8AF00-CCD6-46F2-8DBE-D2845BB7CCFD}"/>
               </a:ext>
             </a:extLst>
           </p:cNvPr>
@@ -2185,7 +2252,7 @@
           <p:cNvPr id="22" name="scope-label-3">
             <a:extLst xmlns:a="http://schemas.openxmlformats.org/drawingml/2006/main">
               <a:ext uri="{FF2B5EF4-FFF2-40B4-BE49-F238E27FC236}">
-                <a16:creationId xmlns:a16="http://schemas.microsoft.com/office/drawing/2014/main" id="{EF8A8527-2333-4FE1-BDB5-85394A0F0672}"/>
+                <a16:creationId xmlns:a16="http://schemas.microsoft.com/office/drawing/2014/main" id="{C300E796-8E6E-43F6-A80F-C9670605ED63}"/>
               </a:ext>
             </a:extLst>
           </p:cNvPr>
@@ -2235,7 +2302,7 @@
           <p:cNvPr id="23" name="scope-value-3">
             <a:extLst xmlns:a="http://schemas.openxmlformats.org/drawingml/2006/main">
               <a:ext uri="{FF2B5EF4-FFF2-40B4-BE49-F238E27FC236}">
-                <a16:creationId xmlns:a16="http://schemas.microsoft.com/office/drawing/2014/main" id="{BD0BA77F-1F53-4CD9-8D29-03B1205F2629}"/>
+                <a16:creationId xmlns:a16="http://schemas.microsoft.com/office/drawing/2014/main" id="{56474A90-BFBB-4C1D-A98C-99EEF3BCAE81}"/>
               </a:ext>
             </a:extLst>
           </p:cNvPr>
@@ -2285,7 +2352,7 @@
           <p:cNvPr id="24" name="scope-row-4">
             <a:extLst xmlns:a="http://schemas.openxmlformats.org/drawingml/2006/main">
               <a:ext uri="{FF2B5EF4-FFF2-40B4-BE49-F238E27FC236}">
-                <a16:creationId xmlns:a16="http://schemas.microsoft.com/office/drawing/2014/main" id="{4E5E8517-434A-4200-98FF-3A61BF8C2793}"/>
+                <a16:creationId xmlns:a16="http://schemas.microsoft.com/office/drawing/2014/main" id="{73653595-F7BC-4DFD-83C4-2D0E57A7E781}"/>
               </a:ext>
             </a:extLst>
           </p:cNvPr>
@@ -2318,7 +2385,7 @@
           <p:cNvPr id="25" name="scope-label-4">
             <a:extLst xmlns:a="http://schemas.openxmlformats.org/drawingml/2006/main">
               <a:ext uri="{FF2B5EF4-FFF2-40B4-BE49-F238E27FC236}">
-                <a16:creationId xmlns:a16="http://schemas.microsoft.com/office/drawing/2014/main" id="{3FD7D3B8-F3D6-4D8C-BF9C-25E80BD4B53D}"/>
+                <a16:creationId xmlns:a16="http://schemas.microsoft.com/office/drawing/2014/main" id="{85390BD5-B89F-4BB8-BA98-689D64857A30}"/>
               </a:ext>
             </a:extLst>
           </p:cNvPr>
@@ -2368,7 +2435,7 @@
           <p:cNvPr id="26" name="scope-value-4">
             <a:extLst xmlns:a="http://schemas.openxmlformats.org/drawingml/2006/main">
               <a:ext uri="{FF2B5EF4-FFF2-40B4-BE49-F238E27FC236}">
-                <a16:creationId xmlns:a16="http://schemas.microsoft.com/office/drawing/2014/main" id="{2FE173D4-F179-413D-89B6-DEA695318E05}"/>
+                <a16:creationId xmlns:a16="http://schemas.microsoft.com/office/drawing/2014/main" id="{8EB7FB78-6B7A-460D-A1D4-35DE81FC8814}"/>
               </a:ext>
             </a:extLst>
           </p:cNvPr>
@@ -2418,7 +2485,7 @@
           <p:cNvPr id="27" name="evidence-title">
             <a:extLst xmlns:a="http://schemas.openxmlformats.org/drawingml/2006/main">
               <a:ext uri="{FF2B5EF4-FFF2-40B4-BE49-F238E27FC236}">
-                <a16:creationId xmlns:a16="http://schemas.microsoft.com/office/drawing/2014/main" id="{A69FE48F-F86B-42D3-AAEE-9148AE6AEE7D}"/>
+                <a16:creationId xmlns:a16="http://schemas.microsoft.com/office/drawing/2014/main" id="{E144894E-E9C3-4C11-A88C-B54C375B6B69}"/>
               </a:ext>
             </a:extLst>
           </p:cNvPr>
@@ -2468,7 +2535,7 @@
           <p:cNvPr id="28" name="evidence-card-1">
             <a:extLst xmlns:a="http://schemas.openxmlformats.org/drawingml/2006/main">
               <a:ext uri="{FF2B5EF4-FFF2-40B4-BE49-F238E27FC236}">
-                <a16:creationId xmlns:a16="http://schemas.microsoft.com/office/drawing/2014/main" id="{8F8751F5-E4BD-4F7C-9DBE-C1AD8DEAD100}"/>
+                <a16:creationId xmlns:a16="http://schemas.microsoft.com/office/drawing/2014/main" id="{9F0A17F9-2C37-4464-A861-B1F2A50E45D2}"/>
               </a:ext>
             </a:extLst>
           </p:cNvPr>
@@ -2503,7 +2570,7 @@
           <p:cNvPr id="29" name="evidence-bar-1">
             <a:extLst xmlns:a="http://schemas.openxmlformats.org/drawingml/2006/main">
               <a:ext uri="{FF2B5EF4-FFF2-40B4-BE49-F238E27FC236}">
-                <a16:creationId xmlns:a16="http://schemas.microsoft.com/office/drawing/2014/main" id="{D3946514-A71F-4A76-93AE-E9B8436F774F}"/>
+                <a16:creationId xmlns:a16="http://schemas.microsoft.com/office/drawing/2014/main" id="{E1D4CD3B-1413-4F23-89D8-7D6D932FB9A9}"/>
               </a:ext>
             </a:extLst>
           </p:cNvPr>
@@ -2536,7 +2603,7 @@
           <p:cNvPr id="30" name="evidence-title-1">
             <a:extLst xmlns:a="http://schemas.openxmlformats.org/drawingml/2006/main">
               <a:ext uri="{FF2B5EF4-FFF2-40B4-BE49-F238E27FC236}">
-                <a16:creationId xmlns:a16="http://schemas.microsoft.com/office/drawing/2014/main" id="{0ACB3B3B-5594-4D6D-A20C-2CDFDB9E3494}"/>
+                <a16:creationId xmlns:a16="http://schemas.microsoft.com/office/drawing/2014/main" id="{FECBBD11-8719-4334-AE99-8D7050E3EEA1}"/>
               </a:ext>
             </a:extLst>
           </p:cNvPr>
@@ -2586,7 +2653,7 @@
           <p:cNvPr id="31" name="evidence-body-1">
             <a:extLst xmlns:a="http://schemas.openxmlformats.org/drawingml/2006/main">
               <a:ext uri="{FF2B5EF4-FFF2-40B4-BE49-F238E27FC236}">
-                <a16:creationId xmlns:a16="http://schemas.microsoft.com/office/drawing/2014/main" id="{1864AB51-8B78-4549-A3C4-5DF3A917A8A9}"/>
+                <a16:creationId xmlns:a16="http://schemas.microsoft.com/office/drawing/2014/main" id="{7DA3C8AF-2BE6-4EAA-B12F-E6F86AD4FB73}"/>
               </a:ext>
             </a:extLst>
           </p:cNvPr>
@@ -2636,7 +2703,7 @@
           <p:cNvPr id="32" name="evidence-card-2">
             <a:extLst xmlns:a="http://schemas.openxmlformats.org/drawingml/2006/main">
               <a:ext uri="{FF2B5EF4-FFF2-40B4-BE49-F238E27FC236}">
-                <a16:creationId xmlns:a16="http://schemas.microsoft.com/office/drawing/2014/main" id="{7181B067-7D75-44B3-B434-7135E72E6C7D}"/>
+                <a16:creationId xmlns:a16="http://schemas.microsoft.com/office/drawing/2014/main" id="{0402305E-2FC3-4D57-9615-EC82D4528476}"/>
               </a:ext>
             </a:extLst>
           </p:cNvPr>
@@ -2671,7 +2738,7 @@
           <p:cNvPr id="33" name="evidence-bar-2">
             <a:extLst xmlns:a="http://schemas.openxmlformats.org/drawingml/2006/main">
               <a:ext uri="{FF2B5EF4-FFF2-40B4-BE49-F238E27FC236}">
-                <a16:creationId xmlns:a16="http://schemas.microsoft.com/office/drawing/2014/main" id="{0618AE7F-A349-4F0B-9F29-5A8D5E4E7064}"/>
+                <a16:creationId xmlns:a16="http://schemas.microsoft.com/office/drawing/2014/main" id="{7A0852F6-63E3-4D71-95B8-5D543F31E956}"/>
               </a:ext>
             </a:extLst>
           </p:cNvPr>
@@ -2704,7 +2771,7 @@
           <p:cNvPr id="34" name="evidence-title-2">
             <a:extLst xmlns:a="http://schemas.openxmlformats.org/drawingml/2006/main">
               <a:ext uri="{FF2B5EF4-FFF2-40B4-BE49-F238E27FC236}">
-                <a16:creationId xmlns:a16="http://schemas.microsoft.com/office/drawing/2014/main" id="{C84310C6-A1C5-4E24-8066-794B43ACA04E}"/>
+                <a16:creationId xmlns:a16="http://schemas.microsoft.com/office/drawing/2014/main" id="{00172DA9-9DA4-41F7-93F0-DA3C609E9A45}"/>
               </a:ext>
             </a:extLst>
           </p:cNvPr>
@@ -2754,7 +2821,7 @@
           <p:cNvPr id="35" name="evidence-body-2">
             <a:extLst xmlns:a="http://schemas.openxmlformats.org/drawingml/2006/main">
               <a:ext uri="{FF2B5EF4-FFF2-40B4-BE49-F238E27FC236}">
-                <a16:creationId xmlns:a16="http://schemas.microsoft.com/office/drawing/2014/main" id="{C510D274-6E8C-4EC0-BCBB-657D6A37ED45}"/>
+                <a16:creationId xmlns:a16="http://schemas.microsoft.com/office/drawing/2014/main" id="{0C1CEADD-B4AF-45C6-A413-BF9B600D5944}"/>
               </a:ext>
             </a:extLst>
           </p:cNvPr>
@@ -2804,7 +2871,7 @@
           <p:cNvPr id="36" name="evidence-card-3">
             <a:extLst xmlns:a="http://schemas.openxmlformats.org/drawingml/2006/main">
               <a:ext uri="{FF2B5EF4-FFF2-40B4-BE49-F238E27FC236}">
-                <a16:creationId xmlns:a16="http://schemas.microsoft.com/office/drawing/2014/main" id="{0879F31C-1545-4B71-8D1C-4E182904FE4B}"/>
+                <a16:creationId xmlns:a16="http://schemas.microsoft.com/office/drawing/2014/main" id="{2FD10DC0-7D6D-4493-B081-68F14DB5E5DD}"/>
               </a:ext>
             </a:extLst>
           </p:cNvPr>
@@ -2839,7 +2906,7 @@
           <p:cNvPr id="37" name="evidence-bar-3">
             <a:extLst xmlns:a="http://schemas.openxmlformats.org/drawingml/2006/main">
               <a:ext uri="{FF2B5EF4-FFF2-40B4-BE49-F238E27FC236}">
-                <a16:creationId xmlns:a16="http://schemas.microsoft.com/office/drawing/2014/main" id="{869906C6-9186-42F5-A2E2-B131D7AE65FF}"/>
+                <a16:creationId xmlns:a16="http://schemas.microsoft.com/office/drawing/2014/main" id="{71BBF68A-5F9D-46DA-8F79-B0F6D3F28786}"/>
               </a:ext>
             </a:extLst>
           </p:cNvPr>
@@ -2872,7 +2939,7 @@
           <p:cNvPr id="38" name="evidence-title-3">
             <a:extLst xmlns:a="http://schemas.openxmlformats.org/drawingml/2006/main">
               <a:ext uri="{FF2B5EF4-FFF2-40B4-BE49-F238E27FC236}">
-                <a16:creationId xmlns:a16="http://schemas.microsoft.com/office/drawing/2014/main" id="{A42996BC-EB0E-493F-857E-9582E1ADAE12}"/>
+                <a16:creationId xmlns:a16="http://schemas.microsoft.com/office/drawing/2014/main" id="{582CC6DC-17B6-4C56-B9C6-4C11AF3FFBBE}"/>
               </a:ext>
             </a:extLst>
           </p:cNvPr>
@@ -2922,7 +2989,7 @@
           <p:cNvPr id="39" name="evidence-body-3">
             <a:extLst xmlns:a="http://schemas.openxmlformats.org/drawingml/2006/main">
               <a:ext uri="{FF2B5EF4-FFF2-40B4-BE49-F238E27FC236}">
-                <a16:creationId xmlns:a16="http://schemas.microsoft.com/office/drawing/2014/main" id="{6112007E-216F-4F3F-B515-F92FA3BF0777}"/>
+                <a16:creationId xmlns:a16="http://schemas.microsoft.com/office/drawing/2014/main" id="{7060E1E2-4592-4FEC-84B8-08631965E3D6}"/>
               </a:ext>
             </a:extLst>
           </p:cNvPr>
@@ -2970,7 +3037,7 @@
     </p:spTree>
     <p:extLst>
       <p:ext uri="{BB962C8B-B14F-4D97-AF65-F5344CB8AC3E}">
-        <p14:creationId xmlns:p14="http://schemas.microsoft.com/office/powerpoint/2010/main" val="1814583000"/>
+        <p14:creationId xmlns:p14="http://schemas.microsoft.com/office/powerpoint/2010/main" val="1414832179"/>
       </p:ext>
     </p:extLst>
   </p:cSld>
@@ -3001,7 +3068,7 @@
           <p:cNvPr id="1" name="top-accent">
             <a:extLst xmlns:a="http://schemas.openxmlformats.org/drawingml/2006/main">
               <a:ext uri="{FF2B5EF4-FFF2-40B4-BE49-F238E27FC236}">
-                <a16:creationId xmlns:a16="http://schemas.microsoft.com/office/drawing/2014/main" id="{EBB80E51-0ED0-49EC-8FE2-B00791127130}"/>
+                <a16:creationId xmlns:a16="http://schemas.microsoft.com/office/drawing/2014/main" id="{C5B4065F-AF9C-472D-BEAC-01079763F569}"/>
               </a:ext>
             </a:extLst>
           </p:cNvPr>
@@ -3034,7 +3101,7 @@
           <p:cNvPr id="2" name="left-accent">
             <a:extLst xmlns:a="http://schemas.openxmlformats.org/drawingml/2006/main">
               <a:ext uri="{FF2B5EF4-FFF2-40B4-BE49-F238E27FC236}">
-                <a16:creationId xmlns:a16="http://schemas.microsoft.com/office/drawing/2014/main" id="{C24A0E22-DBDD-40F8-9CE4-B7DE98CA4311}"/>
+                <a16:creationId xmlns:a16="http://schemas.microsoft.com/office/drawing/2014/main" id="{108FB09B-C99E-40FA-B33C-CB151F014D58}"/>
               </a:ext>
             </a:extLst>
           </p:cNvPr>
@@ -3067,7 +3134,7 @@
           <p:cNvPr id="3" name="eyebrow">
             <a:extLst xmlns:a="http://schemas.openxmlformats.org/drawingml/2006/main">
               <a:ext uri="{FF2B5EF4-FFF2-40B4-BE49-F238E27FC236}">
-                <a16:creationId xmlns:a16="http://schemas.microsoft.com/office/drawing/2014/main" id="{ACE46DBE-529B-45B7-9DDB-08AB9C00C335}"/>
+                <a16:creationId xmlns:a16="http://schemas.microsoft.com/office/drawing/2014/main" id="{79F5C9BA-0339-4966-B12E-4B48029BD32C}"/>
               </a:ext>
             </a:extLst>
           </p:cNvPr>
@@ -3117,7 +3184,7 @@
           <p:cNvPr id="4" name="footer">
             <a:extLst xmlns:a="http://schemas.openxmlformats.org/drawingml/2006/main">
               <a:ext uri="{FF2B5EF4-FFF2-40B4-BE49-F238E27FC236}">
-                <a16:creationId xmlns:a16="http://schemas.microsoft.com/office/drawing/2014/main" id="{4912B251-6BBA-4BA2-A2DF-E4F5BC0CDB98}"/>
+                <a16:creationId xmlns:a16="http://schemas.microsoft.com/office/drawing/2014/main" id="{E5F9E4AD-7573-48A5-ACD7-C7697C81D5BD}"/>
               </a:ext>
             </a:extLst>
           </p:cNvPr>
@@ -3167,7 +3234,7 @@
           <p:cNvPr id="5" name="page-no">
             <a:extLst xmlns:a="http://schemas.openxmlformats.org/drawingml/2006/main">
               <a:ext uri="{FF2B5EF4-FFF2-40B4-BE49-F238E27FC236}">
-                <a16:creationId xmlns:a16="http://schemas.microsoft.com/office/drawing/2014/main" id="{2F44404A-D74F-4723-A909-5A7426041865}"/>
+                <a16:creationId xmlns:a16="http://schemas.microsoft.com/office/drawing/2014/main" id="{EA804ACF-259E-4576-BC80-30A91CFCC5C9}"/>
               </a:ext>
             </a:extLst>
           </p:cNvPr>
@@ -3217,7 +3284,7 @@
           <p:cNvPr id="6" name="title-02">
             <a:extLst xmlns:a="http://schemas.openxmlformats.org/drawingml/2006/main">
               <a:ext uri="{FF2B5EF4-FFF2-40B4-BE49-F238E27FC236}">
-                <a16:creationId xmlns:a16="http://schemas.microsoft.com/office/drawing/2014/main" id="{AD090A17-AB26-44C5-AE0A-9FF3F5451184}"/>
+                <a16:creationId xmlns:a16="http://schemas.microsoft.com/office/drawing/2014/main" id="{78331278-F27C-4F68-B39D-4C8FE45FE7EF}"/>
               </a:ext>
             </a:extLst>
           </p:cNvPr>
@@ -3267,7 +3334,7 @@
           <p:cNvPr id="7" name="subtitle-02">
             <a:extLst xmlns:a="http://schemas.openxmlformats.org/drawingml/2006/main">
               <a:ext uri="{FF2B5EF4-FFF2-40B4-BE49-F238E27FC236}">
-                <a16:creationId xmlns:a16="http://schemas.microsoft.com/office/drawing/2014/main" id="{3F87A94A-29D3-4C6A-AAD5-A2EB499DF463}"/>
+                <a16:creationId xmlns:a16="http://schemas.microsoft.com/office/drawing/2014/main" id="{06A6556A-7FB6-4A2A-894E-DF69689361A0}"/>
               </a:ext>
             </a:extLst>
           </p:cNvPr>
@@ -3317,7 +3384,7 @@
           <p:cNvPr id="8" name="timeline-line">
             <a:extLst xmlns:a="http://schemas.openxmlformats.org/drawingml/2006/main">
               <a:ext uri="{FF2B5EF4-FFF2-40B4-BE49-F238E27FC236}">
-                <a16:creationId xmlns:a16="http://schemas.microsoft.com/office/drawing/2014/main" id="{1AF8BC8D-223B-43A2-9E68-EF004A05E248}"/>
+                <a16:creationId xmlns:a16="http://schemas.microsoft.com/office/drawing/2014/main" id="{F91F3DFC-FD0B-49A9-B449-8A082B1A6CA5}"/>
               </a:ext>
             </a:extLst>
           </p:cNvPr>
@@ -3350,7 +3417,7 @@
           <p:cNvPr id="9" name="timeline-card-1">
             <a:extLst xmlns:a="http://schemas.openxmlformats.org/drawingml/2006/main">
               <a:ext uri="{FF2B5EF4-FFF2-40B4-BE49-F238E27FC236}">
-                <a16:creationId xmlns:a16="http://schemas.microsoft.com/office/drawing/2014/main" id="{EFBFFD49-DD52-4A22-8ADE-37BE131635FA}"/>
+                <a16:creationId xmlns:a16="http://schemas.microsoft.com/office/drawing/2014/main" id="{7C77F99E-032D-4082-A73D-ACFCA4610A4B}"/>
               </a:ext>
             </a:extLst>
           </p:cNvPr>
@@ -3385,7 +3452,7 @@
           <p:cNvPr id="10" name="timeline-bar-1">
             <a:extLst xmlns:a="http://schemas.openxmlformats.org/drawingml/2006/main">
               <a:ext uri="{FF2B5EF4-FFF2-40B4-BE49-F238E27FC236}">
-                <a16:creationId xmlns:a16="http://schemas.microsoft.com/office/drawing/2014/main" id="{5A3401E8-7500-4EB5-8E2C-BB27C1F4A13A}"/>
+                <a16:creationId xmlns:a16="http://schemas.microsoft.com/office/drawing/2014/main" id="{DC9B893B-A935-411F-BD8B-472C4675A11A}"/>
               </a:ext>
             </a:extLst>
           </p:cNvPr>
@@ -3418,7 +3485,7 @@
           <p:cNvPr id="11" name="timeline-month-1">
             <a:extLst xmlns:a="http://schemas.openxmlformats.org/drawingml/2006/main">
               <a:ext uri="{FF2B5EF4-FFF2-40B4-BE49-F238E27FC236}">
-                <a16:creationId xmlns:a16="http://schemas.microsoft.com/office/drawing/2014/main" id="{703AAC99-3161-44FF-9822-7B87989DDD58}"/>
+                <a16:creationId xmlns:a16="http://schemas.microsoft.com/office/drawing/2014/main" id="{D8D2538B-AEF6-42C5-83B2-FF5C5510FD29}"/>
               </a:ext>
             </a:extLst>
           </p:cNvPr>
@@ -3468,7 +3535,7 @@
           <p:cNvPr id="12" name="timeline-title-1">
             <a:extLst xmlns:a="http://schemas.openxmlformats.org/drawingml/2006/main">
               <a:ext uri="{FF2B5EF4-FFF2-40B4-BE49-F238E27FC236}">
-                <a16:creationId xmlns:a16="http://schemas.microsoft.com/office/drawing/2014/main" id="{310E51D9-78D8-41E2-BD52-A6D90BB6F05E}"/>
+                <a16:creationId xmlns:a16="http://schemas.microsoft.com/office/drawing/2014/main" id="{8F055F9B-1FD6-4BD3-A5E6-FFFB716924A6}"/>
               </a:ext>
             </a:extLst>
           </p:cNvPr>
@@ -3518,7 +3585,7 @@
           <p:cNvPr id="13" name="timeline-dot-1-1">
             <a:extLst xmlns:a="http://schemas.openxmlformats.org/drawingml/2006/main">
               <a:ext uri="{FF2B5EF4-FFF2-40B4-BE49-F238E27FC236}">
-                <a16:creationId xmlns:a16="http://schemas.microsoft.com/office/drawing/2014/main" id="{2545BA35-18C3-4855-B268-0F93E7310E76}"/>
+                <a16:creationId xmlns:a16="http://schemas.microsoft.com/office/drawing/2014/main" id="{80971BCC-3E95-401E-AC84-3D9D98071784}"/>
               </a:ext>
             </a:extLst>
           </p:cNvPr>
@@ -3568,7 +3635,7 @@
           <p:cNvPr id="14" name="timeline-item-1-1">
             <a:extLst xmlns:a="http://schemas.openxmlformats.org/drawingml/2006/main">
               <a:ext uri="{FF2B5EF4-FFF2-40B4-BE49-F238E27FC236}">
-                <a16:creationId xmlns:a16="http://schemas.microsoft.com/office/drawing/2014/main" id="{C3BF3712-6DCB-452E-9361-31439A5109C9}"/>
+                <a16:creationId xmlns:a16="http://schemas.microsoft.com/office/drawing/2014/main" id="{CD321824-E8AB-4817-8643-F9EFC76F8F08}"/>
               </a:ext>
             </a:extLst>
           </p:cNvPr>
@@ -3618,7 +3685,7 @@
           <p:cNvPr id="15" name="timeline-dot-1-2">
             <a:extLst xmlns:a="http://schemas.openxmlformats.org/drawingml/2006/main">
               <a:ext uri="{FF2B5EF4-FFF2-40B4-BE49-F238E27FC236}">
-                <a16:creationId xmlns:a16="http://schemas.microsoft.com/office/drawing/2014/main" id="{BAE03365-4177-4DBF-93B3-32C74B6B9703}"/>
+                <a16:creationId xmlns:a16="http://schemas.microsoft.com/office/drawing/2014/main" id="{6C80BE1F-3692-402D-A54D-A9AED1732DED}"/>
               </a:ext>
             </a:extLst>
           </p:cNvPr>
@@ -3668,7 +3735,7 @@
           <p:cNvPr id="16" name="timeline-item-1-2">
             <a:extLst xmlns:a="http://schemas.openxmlformats.org/drawingml/2006/main">
               <a:ext uri="{FF2B5EF4-FFF2-40B4-BE49-F238E27FC236}">
-                <a16:creationId xmlns:a16="http://schemas.microsoft.com/office/drawing/2014/main" id="{C72E1EAB-6587-4DFC-A7E0-5CA9317DFCF4}"/>
+                <a16:creationId xmlns:a16="http://schemas.microsoft.com/office/drawing/2014/main" id="{41ACFFF6-0F0E-491C-9FC3-2F490CF7E94E}"/>
               </a:ext>
             </a:extLst>
           </p:cNvPr>
@@ -3718,7 +3785,7 @@
           <p:cNvPr id="17" name="timeline-dot-1-3">
             <a:extLst xmlns:a="http://schemas.openxmlformats.org/drawingml/2006/main">
               <a:ext uri="{FF2B5EF4-FFF2-40B4-BE49-F238E27FC236}">
-                <a16:creationId xmlns:a16="http://schemas.microsoft.com/office/drawing/2014/main" id="{4EB239D0-99D9-478C-AB5A-4C3346BBCB5E}"/>
+                <a16:creationId xmlns:a16="http://schemas.microsoft.com/office/drawing/2014/main" id="{93FB5EA8-3AF8-40B6-A1A6-A1C03486FDAD}"/>
               </a:ext>
             </a:extLst>
           </p:cNvPr>
@@ -3768,7 +3835,7 @@
           <p:cNvPr id="18" name="timeline-item-1-3">
             <a:extLst xmlns:a="http://schemas.openxmlformats.org/drawingml/2006/main">
               <a:ext uri="{FF2B5EF4-FFF2-40B4-BE49-F238E27FC236}">
-                <a16:creationId xmlns:a16="http://schemas.microsoft.com/office/drawing/2014/main" id="{CD947CD6-1804-424A-A055-55F33C68C8E0}"/>
+                <a16:creationId xmlns:a16="http://schemas.microsoft.com/office/drawing/2014/main" id="{688CC708-B5E4-4124-9905-347F2F4DB545}"/>
               </a:ext>
             </a:extLst>
           </p:cNvPr>
@@ -3818,7 +3885,7 @@
           <p:cNvPr id="19" name="timeline-card-2">
             <a:extLst xmlns:a="http://schemas.openxmlformats.org/drawingml/2006/main">
               <a:ext uri="{FF2B5EF4-FFF2-40B4-BE49-F238E27FC236}">
-                <a16:creationId xmlns:a16="http://schemas.microsoft.com/office/drawing/2014/main" id="{A6A5FF29-6E45-4EAB-9E78-33592C55CDE7}"/>
+                <a16:creationId xmlns:a16="http://schemas.microsoft.com/office/drawing/2014/main" id="{FFDA65BA-3851-4630-AADC-C8C7C5E58341}"/>
               </a:ext>
             </a:extLst>
           </p:cNvPr>
@@ -3853,7 +3920,7 @@
           <p:cNvPr id="20" name="timeline-bar-2">
             <a:extLst xmlns:a="http://schemas.openxmlformats.org/drawingml/2006/main">
               <a:ext uri="{FF2B5EF4-FFF2-40B4-BE49-F238E27FC236}">
-                <a16:creationId xmlns:a16="http://schemas.microsoft.com/office/drawing/2014/main" id="{195578C6-DF0A-417B-8993-D858D5074EFE}"/>
+                <a16:creationId xmlns:a16="http://schemas.microsoft.com/office/drawing/2014/main" id="{DFB40DC3-62CB-46FF-9115-A62DE7525413}"/>
               </a:ext>
             </a:extLst>
           </p:cNvPr>
@@ -3886,7 +3953,7 @@
           <p:cNvPr id="21" name="timeline-month-2">
             <a:extLst xmlns:a="http://schemas.openxmlformats.org/drawingml/2006/main">
               <a:ext uri="{FF2B5EF4-FFF2-40B4-BE49-F238E27FC236}">
-                <a16:creationId xmlns:a16="http://schemas.microsoft.com/office/drawing/2014/main" id="{2F94A874-4DB0-4CA3-83CA-394EFD5BA16E}"/>
+                <a16:creationId xmlns:a16="http://schemas.microsoft.com/office/drawing/2014/main" id="{8E56C1FC-16A7-46D6-81CC-83BC6D5FBD1A}"/>
               </a:ext>
             </a:extLst>
           </p:cNvPr>
@@ -3936,7 +4003,7 @@
           <p:cNvPr id="22" name="timeline-title-2">
             <a:extLst xmlns:a="http://schemas.openxmlformats.org/drawingml/2006/main">
               <a:ext uri="{FF2B5EF4-FFF2-40B4-BE49-F238E27FC236}">
-                <a16:creationId xmlns:a16="http://schemas.microsoft.com/office/drawing/2014/main" id="{76C5231A-93DB-45B9-86B3-CEFBF886ACEB}"/>
+                <a16:creationId xmlns:a16="http://schemas.microsoft.com/office/drawing/2014/main" id="{F5A3600C-4C7E-4B5B-9E0A-4B5C35708D0B}"/>
               </a:ext>
             </a:extLst>
           </p:cNvPr>
@@ -3986,7 +4053,7 @@
           <p:cNvPr id="23" name="timeline-dot-2-1">
             <a:extLst xmlns:a="http://schemas.openxmlformats.org/drawingml/2006/main">
               <a:ext uri="{FF2B5EF4-FFF2-40B4-BE49-F238E27FC236}">
-                <a16:creationId xmlns:a16="http://schemas.microsoft.com/office/drawing/2014/main" id="{020463C6-BC47-48BF-8E26-D5597B163F5B}"/>
+                <a16:creationId xmlns:a16="http://schemas.microsoft.com/office/drawing/2014/main" id="{02A0192B-0F5C-496D-8AFA-9A9A22D38638}"/>
               </a:ext>
             </a:extLst>
           </p:cNvPr>
@@ -4036,7 +4103,7 @@
           <p:cNvPr id="24" name="timeline-item-2-1">
             <a:extLst xmlns:a="http://schemas.openxmlformats.org/drawingml/2006/main">
               <a:ext uri="{FF2B5EF4-FFF2-40B4-BE49-F238E27FC236}">
-                <a16:creationId xmlns:a16="http://schemas.microsoft.com/office/drawing/2014/main" id="{3601A83A-6A0D-4219-922A-88584211CE82}"/>
+                <a16:creationId xmlns:a16="http://schemas.microsoft.com/office/drawing/2014/main" id="{1B617751-0E19-44A9-885C-5248CD6F92B4}"/>
               </a:ext>
             </a:extLst>
           </p:cNvPr>
@@ -4086,7 +4153,7 @@
           <p:cNvPr id="25" name="timeline-dot-2-2">
             <a:extLst xmlns:a="http://schemas.openxmlformats.org/drawingml/2006/main">
               <a:ext uri="{FF2B5EF4-FFF2-40B4-BE49-F238E27FC236}">
-                <a16:creationId xmlns:a16="http://schemas.microsoft.com/office/drawing/2014/main" id="{DBCA3854-95EB-4A81-8013-74D58CFF98D3}"/>
+                <a16:creationId xmlns:a16="http://schemas.microsoft.com/office/drawing/2014/main" id="{DCF2427C-B0D1-4741-A7EC-6665F528DAEF}"/>
               </a:ext>
             </a:extLst>
           </p:cNvPr>
@@ -4136,7 +4203,7 @@
           <p:cNvPr id="26" name="timeline-item-2-2">
             <a:extLst xmlns:a="http://schemas.openxmlformats.org/drawingml/2006/main">
               <a:ext uri="{FF2B5EF4-FFF2-40B4-BE49-F238E27FC236}">
-                <a16:creationId xmlns:a16="http://schemas.microsoft.com/office/drawing/2014/main" id="{95A3EB83-2426-4D0C-9654-94ECA511AC99}"/>
+                <a16:creationId xmlns:a16="http://schemas.microsoft.com/office/drawing/2014/main" id="{C4114685-59AA-4F8D-A302-36C5E17610E6}"/>
               </a:ext>
             </a:extLst>
           </p:cNvPr>
@@ -4186,7 +4253,7 @@
           <p:cNvPr id="27" name="timeline-dot-2-3">
             <a:extLst xmlns:a="http://schemas.openxmlformats.org/drawingml/2006/main">
               <a:ext uri="{FF2B5EF4-FFF2-40B4-BE49-F238E27FC236}">
-                <a16:creationId xmlns:a16="http://schemas.microsoft.com/office/drawing/2014/main" id="{E89A61DA-D74F-4394-AA66-6EAC342B81E2}"/>
+                <a16:creationId xmlns:a16="http://schemas.microsoft.com/office/drawing/2014/main" id="{81570395-076B-4FED-A557-EC569F0B7504}"/>
               </a:ext>
             </a:extLst>
           </p:cNvPr>
@@ -4236,7 +4303,7 @@
           <p:cNvPr id="28" name="timeline-item-2-3">
             <a:extLst xmlns:a="http://schemas.openxmlformats.org/drawingml/2006/main">
               <a:ext uri="{FF2B5EF4-FFF2-40B4-BE49-F238E27FC236}">
-                <a16:creationId xmlns:a16="http://schemas.microsoft.com/office/drawing/2014/main" id="{5B3A70E0-2073-4398-AA10-6696199C42FE}"/>
+                <a16:creationId xmlns:a16="http://schemas.microsoft.com/office/drawing/2014/main" id="{23A0BD52-9FAE-4941-831F-A134F181F5EE}"/>
               </a:ext>
             </a:extLst>
           </p:cNvPr>
@@ -4286,7 +4353,7 @@
           <p:cNvPr id="29" name="timeline-card-3">
             <a:extLst xmlns:a="http://schemas.openxmlformats.org/drawingml/2006/main">
               <a:ext uri="{FF2B5EF4-FFF2-40B4-BE49-F238E27FC236}">
-                <a16:creationId xmlns:a16="http://schemas.microsoft.com/office/drawing/2014/main" id="{8136DCB9-7B16-4913-B210-019306A147DF}"/>
+                <a16:creationId xmlns:a16="http://schemas.microsoft.com/office/drawing/2014/main" id="{1B6A0DB0-0281-4B47-B3CE-008B196B1D06}"/>
               </a:ext>
             </a:extLst>
           </p:cNvPr>
@@ -4321,7 +4388,7 @@
           <p:cNvPr id="30" name="timeline-bar-3">
             <a:extLst xmlns:a="http://schemas.openxmlformats.org/drawingml/2006/main">
               <a:ext uri="{FF2B5EF4-FFF2-40B4-BE49-F238E27FC236}">
-                <a16:creationId xmlns:a16="http://schemas.microsoft.com/office/drawing/2014/main" id="{B2144D0E-8254-4CB6-B9A8-ABDA7373B5B3}"/>
+                <a16:creationId xmlns:a16="http://schemas.microsoft.com/office/drawing/2014/main" id="{D01BEA83-8DBD-48F2-B5F4-65C655709F87}"/>
               </a:ext>
             </a:extLst>
           </p:cNvPr>
@@ -4354,7 +4421,7 @@
           <p:cNvPr id="31" name="timeline-month-3">
             <a:extLst xmlns:a="http://schemas.openxmlformats.org/drawingml/2006/main">
               <a:ext uri="{FF2B5EF4-FFF2-40B4-BE49-F238E27FC236}">
-                <a16:creationId xmlns:a16="http://schemas.microsoft.com/office/drawing/2014/main" id="{77674FC3-5C2A-4F69-A853-0FED66BEE363}"/>
+                <a16:creationId xmlns:a16="http://schemas.microsoft.com/office/drawing/2014/main" id="{AB52A153-9088-4B9F-8969-835F9CE5864E}"/>
               </a:ext>
             </a:extLst>
           </p:cNvPr>
@@ -4404,7 +4471,7 @@
           <p:cNvPr id="32" name="timeline-title-3">
             <a:extLst xmlns:a="http://schemas.openxmlformats.org/drawingml/2006/main">
               <a:ext uri="{FF2B5EF4-FFF2-40B4-BE49-F238E27FC236}">
-                <a16:creationId xmlns:a16="http://schemas.microsoft.com/office/drawing/2014/main" id="{E5C1CD1D-8EE7-48FC-8C18-ED01B85A7784}"/>
+                <a16:creationId xmlns:a16="http://schemas.microsoft.com/office/drawing/2014/main" id="{DB557715-32F0-4615-A65D-51786465E29C}"/>
               </a:ext>
             </a:extLst>
           </p:cNvPr>
@@ -4454,7 +4521,7 @@
           <p:cNvPr id="33" name="timeline-dot-3-1">
             <a:extLst xmlns:a="http://schemas.openxmlformats.org/drawingml/2006/main">
               <a:ext uri="{FF2B5EF4-FFF2-40B4-BE49-F238E27FC236}">
-                <a16:creationId xmlns:a16="http://schemas.microsoft.com/office/drawing/2014/main" id="{E646D37B-A309-43BD-9623-BEB634A2106B}"/>
+                <a16:creationId xmlns:a16="http://schemas.microsoft.com/office/drawing/2014/main" id="{76A309AA-CA30-499F-BB0E-5856264DC388}"/>
               </a:ext>
             </a:extLst>
           </p:cNvPr>
@@ -4504,7 +4571,7 @@
           <p:cNvPr id="34" name="timeline-item-3-1">
             <a:extLst xmlns:a="http://schemas.openxmlformats.org/drawingml/2006/main">
               <a:ext uri="{FF2B5EF4-FFF2-40B4-BE49-F238E27FC236}">
-                <a16:creationId xmlns:a16="http://schemas.microsoft.com/office/drawing/2014/main" id="{F2439954-C73C-450D-B0BA-31CA66C854E3}"/>
+                <a16:creationId xmlns:a16="http://schemas.microsoft.com/office/drawing/2014/main" id="{DB4D1398-DD4C-46B8-9D91-52BCEF95632B}"/>
               </a:ext>
             </a:extLst>
           </p:cNvPr>
@@ -4554,7 +4621,7 @@
           <p:cNvPr id="35" name="timeline-dot-3-2">
             <a:extLst xmlns:a="http://schemas.openxmlformats.org/drawingml/2006/main">
               <a:ext uri="{FF2B5EF4-FFF2-40B4-BE49-F238E27FC236}">
-                <a16:creationId xmlns:a16="http://schemas.microsoft.com/office/drawing/2014/main" id="{819E8031-7889-44B8-A34D-0CC7BDAA3DF4}"/>
+                <a16:creationId xmlns:a16="http://schemas.microsoft.com/office/drawing/2014/main" id="{35BDA465-81F7-40F5-93A7-4A01701CF8C7}"/>
               </a:ext>
             </a:extLst>
           </p:cNvPr>
@@ -4604,7 +4671,7 @@
           <p:cNvPr id="36" name="timeline-item-3-2">
             <a:extLst xmlns:a="http://schemas.openxmlformats.org/drawingml/2006/main">
               <a:ext uri="{FF2B5EF4-FFF2-40B4-BE49-F238E27FC236}">
-                <a16:creationId xmlns:a16="http://schemas.microsoft.com/office/drawing/2014/main" id="{DB62570B-87A0-4119-A730-3E2AE8C291AE}"/>
+                <a16:creationId xmlns:a16="http://schemas.microsoft.com/office/drawing/2014/main" id="{646CBF00-3F2B-42E7-9FCD-39398F6DC1D1}"/>
               </a:ext>
             </a:extLst>
           </p:cNvPr>
@@ -4654,7 +4721,7 @@
           <p:cNvPr id="37" name="timeline-dot-3-3">
             <a:extLst xmlns:a="http://schemas.openxmlformats.org/drawingml/2006/main">
               <a:ext uri="{FF2B5EF4-FFF2-40B4-BE49-F238E27FC236}">
-                <a16:creationId xmlns:a16="http://schemas.microsoft.com/office/drawing/2014/main" id="{CA12C054-94C1-404C-9508-DE304EC1F921}"/>
+                <a16:creationId xmlns:a16="http://schemas.microsoft.com/office/drawing/2014/main" id="{3DF94618-5622-48C6-B2F7-701476A20C61}"/>
               </a:ext>
             </a:extLst>
           </p:cNvPr>
@@ -4704,7 +4771,7 @@
           <p:cNvPr id="38" name="timeline-item-3-3">
             <a:extLst xmlns:a="http://schemas.openxmlformats.org/drawingml/2006/main">
               <a:ext uri="{FF2B5EF4-FFF2-40B4-BE49-F238E27FC236}">
-                <a16:creationId xmlns:a16="http://schemas.microsoft.com/office/drawing/2014/main" id="{46D63C6A-6226-4AFA-ABC5-56C1A671A8B0}"/>
+                <a16:creationId xmlns:a16="http://schemas.microsoft.com/office/drawing/2014/main" id="{C375F0E8-5005-4417-A950-8E90F7519E6A}"/>
               </a:ext>
             </a:extLst>
           </p:cNvPr>
@@ -4754,7 +4821,7 @@
           <p:cNvPr id="39" name="timeline-card-4">
             <a:extLst xmlns:a="http://schemas.openxmlformats.org/drawingml/2006/main">
               <a:ext uri="{FF2B5EF4-FFF2-40B4-BE49-F238E27FC236}">
-                <a16:creationId xmlns:a16="http://schemas.microsoft.com/office/drawing/2014/main" id="{BBAFE33F-817D-45E3-BA76-8DFBDF1F5E32}"/>
+                <a16:creationId xmlns:a16="http://schemas.microsoft.com/office/drawing/2014/main" id="{AAC8974D-9BF0-4614-8443-8BB3A06390B4}"/>
               </a:ext>
             </a:extLst>
           </p:cNvPr>
@@ -4789,7 +4856,7 @@
           <p:cNvPr id="40" name="timeline-bar-4">
             <a:extLst xmlns:a="http://schemas.openxmlformats.org/drawingml/2006/main">
               <a:ext uri="{FF2B5EF4-FFF2-40B4-BE49-F238E27FC236}">
-                <a16:creationId xmlns:a16="http://schemas.microsoft.com/office/drawing/2014/main" id="{62CDFD11-7E16-4C63-974C-8DC49757E0B0}"/>
+                <a16:creationId xmlns:a16="http://schemas.microsoft.com/office/drawing/2014/main" id="{4D525D06-E5BD-473E-929B-ADC8810D2DB3}"/>
               </a:ext>
             </a:extLst>
           </p:cNvPr>
@@ -4822,7 +4889,7 @@
           <p:cNvPr id="41" name="timeline-month-4">
             <a:extLst xmlns:a="http://schemas.openxmlformats.org/drawingml/2006/main">
               <a:ext uri="{FF2B5EF4-FFF2-40B4-BE49-F238E27FC236}">
-                <a16:creationId xmlns:a16="http://schemas.microsoft.com/office/drawing/2014/main" id="{D3AEAB97-9726-4D3F-982F-7A6DB28ED4BB}"/>
+                <a16:creationId xmlns:a16="http://schemas.microsoft.com/office/drawing/2014/main" id="{39847B26-AE16-4ED8-B115-F124D0270868}"/>
               </a:ext>
             </a:extLst>
           </p:cNvPr>
@@ -4872,7 +4939,7 @@
           <p:cNvPr id="42" name="timeline-title-4">
             <a:extLst xmlns:a="http://schemas.openxmlformats.org/drawingml/2006/main">
               <a:ext uri="{FF2B5EF4-FFF2-40B4-BE49-F238E27FC236}">
-                <a16:creationId xmlns:a16="http://schemas.microsoft.com/office/drawing/2014/main" id="{E5B6B059-0906-4D60-8B2C-7B5FEF746CA5}"/>
+                <a16:creationId xmlns:a16="http://schemas.microsoft.com/office/drawing/2014/main" id="{7728BD85-7BAB-462B-B35D-DE20D3C255DB}"/>
               </a:ext>
             </a:extLst>
           </p:cNvPr>
@@ -4922,7 +4989,7 @@
           <p:cNvPr id="43" name="timeline-dot-4-1">
             <a:extLst xmlns:a="http://schemas.openxmlformats.org/drawingml/2006/main">
               <a:ext uri="{FF2B5EF4-FFF2-40B4-BE49-F238E27FC236}">
-                <a16:creationId xmlns:a16="http://schemas.microsoft.com/office/drawing/2014/main" id="{22471788-1676-4C04-A2C5-F8A8E0230848}"/>
+                <a16:creationId xmlns:a16="http://schemas.microsoft.com/office/drawing/2014/main" id="{1EF3C154-8231-4A08-8B53-2F8B1AE830A4}"/>
               </a:ext>
             </a:extLst>
           </p:cNvPr>
@@ -4972,7 +5039,7 @@
           <p:cNvPr id="44" name="timeline-item-4-1">
             <a:extLst xmlns:a="http://schemas.openxmlformats.org/drawingml/2006/main">
               <a:ext uri="{FF2B5EF4-FFF2-40B4-BE49-F238E27FC236}">
-                <a16:creationId xmlns:a16="http://schemas.microsoft.com/office/drawing/2014/main" id="{CC168F41-406A-4B99-904D-2DE9BA834DE5}"/>
+                <a16:creationId xmlns:a16="http://schemas.microsoft.com/office/drawing/2014/main" id="{D446BC95-5D78-4F17-8EB5-182E2876B308}"/>
               </a:ext>
             </a:extLst>
           </p:cNvPr>
@@ -5022,7 +5089,7 @@
           <p:cNvPr id="45" name="timeline-dot-4-2">
             <a:extLst xmlns:a="http://schemas.openxmlformats.org/drawingml/2006/main">
               <a:ext uri="{FF2B5EF4-FFF2-40B4-BE49-F238E27FC236}">
-                <a16:creationId xmlns:a16="http://schemas.microsoft.com/office/drawing/2014/main" id="{8C1DB313-AEAD-4331-A234-19185727C628}"/>
+                <a16:creationId xmlns:a16="http://schemas.microsoft.com/office/drawing/2014/main" id="{94AE69AA-75D2-4D23-AEFA-97A6B9C7DDCC}"/>
               </a:ext>
             </a:extLst>
           </p:cNvPr>
@@ -5072,7 +5139,7 @@
           <p:cNvPr id="46" name="timeline-item-4-2">
             <a:extLst xmlns:a="http://schemas.openxmlformats.org/drawingml/2006/main">
               <a:ext uri="{FF2B5EF4-FFF2-40B4-BE49-F238E27FC236}">
-                <a16:creationId xmlns:a16="http://schemas.microsoft.com/office/drawing/2014/main" id="{41F72C9B-9C28-4CE7-9B7C-BFDD8458A1D5}"/>
+                <a16:creationId xmlns:a16="http://schemas.microsoft.com/office/drawing/2014/main" id="{E95DE8D2-DE78-456D-8B95-1F56149BB8B7}"/>
               </a:ext>
             </a:extLst>
           </p:cNvPr>
@@ -5122,7 +5189,7 @@
           <p:cNvPr id="47" name="timeline-dot-4-3">
             <a:extLst xmlns:a="http://schemas.openxmlformats.org/drawingml/2006/main">
               <a:ext uri="{FF2B5EF4-FFF2-40B4-BE49-F238E27FC236}">
-                <a16:creationId xmlns:a16="http://schemas.microsoft.com/office/drawing/2014/main" id="{5DFA0259-D8C2-4D21-990D-3E7344EA1C19}"/>
+                <a16:creationId xmlns:a16="http://schemas.microsoft.com/office/drawing/2014/main" id="{0D0409BB-B352-4AD4-B4CE-8FFDF30CD2F0}"/>
               </a:ext>
             </a:extLst>
           </p:cNvPr>
@@ -5172,7 +5239,7 @@
           <p:cNvPr id="48" name="timeline-item-4-3">
             <a:extLst xmlns:a="http://schemas.openxmlformats.org/drawingml/2006/main">
               <a:ext uri="{FF2B5EF4-FFF2-40B4-BE49-F238E27FC236}">
-                <a16:creationId xmlns:a16="http://schemas.microsoft.com/office/drawing/2014/main" id="{96EE19D7-C07E-402A-9C45-DF64809023B2}"/>
+                <a16:creationId xmlns:a16="http://schemas.microsoft.com/office/drawing/2014/main" id="{FF8795DD-3BF8-474F-B441-D2528F5499A0}"/>
               </a:ext>
             </a:extLst>
           </p:cNvPr>
@@ -5222,7 +5289,7 @@
           <p:cNvPr id="49" name="timeline-card-5">
             <a:extLst xmlns:a="http://schemas.openxmlformats.org/drawingml/2006/main">
               <a:ext uri="{FF2B5EF4-FFF2-40B4-BE49-F238E27FC236}">
-                <a16:creationId xmlns:a16="http://schemas.microsoft.com/office/drawing/2014/main" id="{178273AE-828F-483A-864D-368840254D40}"/>
+                <a16:creationId xmlns:a16="http://schemas.microsoft.com/office/drawing/2014/main" id="{D1E9EE8D-5ACD-4A39-A481-07953AADB0D6}"/>
               </a:ext>
             </a:extLst>
           </p:cNvPr>
@@ -5257,7 +5324,7 @@
           <p:cNvPr id="50" name="timeline-bar-5">
             <a:extLst xmlns:a="http://schemas.openxmlformats.org/drawingml/2006/main">
               <a:ext uri="{FF2B5EF4-FFF2-40B4-BE49-F238E27FC236}">
-                <a16:creationId xmlns:a16="http://schemas.microsoft.com/office/drawing/2014/main" id="{44E61251-C9A2-4BC4-987B-821C6687A3C4}"/>
+                <a16:creationId xmlns:a16="http://schemas.microsoft.com/office/drawing/2014/main" id="{378D48FE-331B-4CCA-A695-197E2D129F2D}"/>
               </a:ext>
             </a:extLst>
           </p:cNvPr>
@@ -5290,7 +5357,7 @@
           <p:cNvPr id="51" name="timeline-month-5">
             <a:extLst xmlns:a="http://schemas.openxmlformats.org/drawingml/2006/main">
               <a:ext uri="{FF2B5EF4-FFF2-40B4-BE49-F238E27FC236}">
-                <a16:creationId xmlns:a16="http://schemas.microsoft.com/office/drawing/2014/main" id="{C1C4B18B-32B9-42FF-8FB7-9F02F4077960}"/>
+                <a16:creationId xmlns:a16="http://schemas.microsoft.com/office/drawing/2014/main" id="{0272FC7C-3E2D-474C-8746-792FADE9D55F}"/>
               </a:ext>
             </a:extLst>
           </p:cNvPr>
@@ -5340,7 +5407,7 @@
           <p:cNvPr id="52" name="timeline-title-5">
             <a:extLst xmlns:a="http://schemas.openxmlformats.org/drawingml/2006/main">
               <a:ext uri="{FF2B5EF4-FFF2-40B4-BE49-F238E27FC236}">
-                <a16:creationId xmlns:a16="http://schemas.microsoft.com/office/drawing/2014/main" id="{0784565D-925E-4DE6-8186-6715B52BB3D6}"/>
+                <a16:creationId xmlns:a16="http://schemas.microsoft.com/office/drawing/2014/main" id="{6782BFB3-41BC-4B05-9E89-7E21A0679A7C}"/>
               </a:ext>
             </a:extLst>
           </p:cNvPr>
@@ -5390,7 +5457,7 @@
           <p:cNvPr id="53" name="timeline-dot-5-1">
             <a:extLst xmlns:a="http://schemas.openxmlformats.org/drawingml/2006/main">
               <a:ext uri="{FF2B5EF4-FFF2-40B4-BE49-F238E27FC236}">
-                <a16:creationId xmlns:a16="http://schemas.microsoft.com/office/drawing/2014/main" id="{368FE6CF-3F55-49D3-AC08-67F2EF7DAA97}"/>
+                <a16:creationId xmlns:a16="http://schemas.microsoft.com/office/drawing/2014/main" id="{EE670B59-AB95-42D3-B87D-55EA92B06E20}"/>
               </a:ext>
             </a:extLst>
           </p:cNvPr>
@@ -5440,7 +5507,7 @@
           <p:cNvPr id="54" name="timeline-item-5-1">
             <a:extLst xmlns:a="http://schemas.openxmlformats.org/drawingml/2006/main">
               <a:ext uri="{FF2B5EF4-FFF2-40B4-BE49-F238E27FC236}">
-                <a16:creationId xmlns:a16="http://schemas.microsoft.com/office/drawing/2014/main" id="{E16AC7F9-5689-42BF-8F30-C51E557F3836}"/>
+                <a16:creationId xmlns:a16="http://schemas.microsoft.com/office/drawing/2014/main" id="{267724D5-D8B1-452F-BDA4-33110D16DF3D}"/>
               </a:ext>
             </a:extLst>
           </p:cNvPr>
@@ -5490,7 +5557,7 @@
           <p:cNvPr id="55" name="timeline-dot-5-2">
             <a:extLst xmlns:a="http://schemas.openxmlformats.org/drawingml/2006/main">
               <a:ext uri="{FF2B5EF4-FFF2-40B4-BE49-F238E27FC236}">
-                <a16:creationId xmlns:a16="http://schemas.microsoft.com/office/drawing/2014/main" id="{19D62180-B89D-4575-BD80-AEB35A81D074}"/>
+                <a16:creationId xmlns:a16="http://schemas.microsoft.com/office/drawing/2014/main" id="{98B057A9-B951-4945-AD07-4B2D35652285}"/>
               </a:ext>
             </a:extLst>
           </p:cNvPr>
@@ -5540,7 +5607,7 @@
           <p:cNvPr id="56" name="timeline-item-5-2">
             <a:extLst xmlns:a="http://schemas.openxmlformats.org/drawingml/2006/main">
               <a:ext uri="{FF2B5EF4-FFF2-40B4-BE49-F238E27FC236}">
-                <a16:creationId xmlns:a16="http://schemas.microsoft.com/office/drawing/2014/main" id="{8A040A55-7FF4-49E4-BB19-E9D24DEF3BAF}"/>
+                <a16:creationId xmlns:a16="http://schemas.microsoft.com/office/drawing/2014/main" id="{E7AA0977-2113-4DD8-9B8D-096E8146D6EB}"/>
               </a:ext>
             </a:extLst>
           </p:cNvPr>
@@ -5590,7 +5657,7 @@
           <p:cNvPr id="57" name="timeline-dot-5-3">
             <a:extLst xmlns:a="http://schemas.openxmlformats.org/drawingml/2006/main">
               <a:ext uri="{FF2B5EF4-FFF2-40B4-BE49-F238E27FC236}">
-                <a16:creationId xmlns:a16="http://schemas.microsoft.com/office/drawing/2014/main" id="{FAD2EAFF-1EBD-475C-A77D-00797D2C45AE}"/>
+                <a16:creationId xmlns:a16="http://schemas.microsoft.com/office/drawing/2014/main" id="{C608EACA-F1A6-4050-8E59-71BE5578F226}"/>
               </a:ext>
             </a:extLst>
           </p:cNvPr>
@@ -5640,7 +5707,7 @@
           <p:cNvPr id="58" name="timeline-item-5-3">
             <a:extLst xmlns:a="http://schemas.openxmlformats.org/drawingml/2006/main">
               <a:ext uri="{FF2B5EF4-FFF2-40B4-BE49-F238E27FC236}">
-                <a16:creationId xmlns:a16="http://schemas.microsoft.com/office/drawing/2014/main" id="{5D39F1B2-7C29-4BE1-87B3-1D69E437FABC}"/>
+                <a16:creationId xmlns:a16="http://schemas.microsoft.com/office/drawing/2014/main" id="{52C54133-7A2A-4A91-A196-5BC77FF16E8D}"/>
               </a:ext>
             </a:extLst>
           </p:cNvPr>
@@ -5690,7 +5757,7 @@
           <p:cNvPr id="59" name="timeline-card-6">
             <a:extLst xmlns:a="http://schemas.openxmlformats.org/drawingml/2006/main">
               <a:ext uri="{FF2B5EF4-FFF2-40B4-BE49-F238E27FC236}">
-                <a16:creationId xmlns:a16="http://schemas.microsoft.com/office/drawing/2014/main" id="{D8A66099-8B7F-4D6E-8D39-2BE63B1D141D}"/>
+                <a16:creationId xmlns:a16="http://schemas.microsoft.com/office/drawing/2014/main" id="{F6CEE417-E5C5-42A1-836D-640A400B90DA}"/>
               </a:ext>
             </a:extLst>
           </p:cNvPr>
@@ -5725,7 +5792,7 @@
           <p:cNvPr id="60" name="timeline-bar-6">
             <a:extLst xmlns:a="http://schemas.openxmlformats.org/drawingml/2006/main">
               <a:ext uri="{FF2B5EF4-FFF2-40B4-BE49-F238E27FC236}">
-                <a16:creationId xmlns:a16="http://schemas.microsoft.com/office/drawing/2014/main" id="{1140E738-A66E-408C-ADCE-4F6716445A32}"/>
+                <a16:creationId xmlns:a16="http://schemas.microsoft.com/office/drawing/2014/main" id="{DBB628AA-ACB9-47D9-B43E-0EAAF85CAC36}"/>
               </a:ext>
             </a:extLst>
           </p:cNvPr>
@@ -5758,7 +5825,7 @@
           <p:cNvPr id="61" name="timeline-month-6">
             <a:extLst xmlns:a="http://schemas.openxmlformats.org/drawingml/2006/main">
               <a:ext uri="{FF2B5EF4-FFF2-40B4-BE49-F238E27FC236}">
-                <a16:creationId xmlns:a16="http://schemas.microsoft.com/office/drawing/2014/main" id="{C4B5D2FF-AB84-458D-B9DC-63E6391C2689}"/>
+                <a16:creationId xmlns:a16="http://schemas.microsoft.com/office/drawing/2014/main" id="{6483C664-D17D-4AA2-945B-C16AD65457B5}"/>
               </a:ext>
             </a:extLst>
           </p:cNvPr>
@@ -5808,7 +5875,7 @@
           <p:cNvPr id="62" name="timeline-title-6">
             <a:extLst xmlns:a="http://schemas.openxmlformats.org/drawingml/2006/main">
               <a:ext uri="{FF2B5EF4-FFF2-40B4-BE49-F238E27FC236}">
-                <a16:creationId xmlns:a16="http://schemas.microsoft.com/office/drawing/2014/main" id="{0375A532-2E38-46C0-8C10-C7A6043AF38C}"/>
+                <a16:creationId xmlns:a16="http://schemas.microsoft.com/office/drawing/2014/main" id="{5F526A02-A929-4699-99B9-A02F8013D499}"/>
               </a:ext>
             </a:extLst>
           </p:cNvPr>
@@ -5858,7 +5925,7 @@
           <p:cNvPr id="63" name="timeline-dot-6-1">
             <a:extLst xmlns:a="http://schemas.openxmlformats.org/drawingml/2006/main">
               <a:ext uri="{FF2B5EF4-FFF2-40B4-BE49-F238E27FC236}">
-                <a16:creationId xmlns:a16="http://schemas.microsoft.com/office/drawing/2014/main" id="{190106D9-6D00-41DA-BC71-EA376B99D2A5}"/>
+                <a16:creationId xmlns:a16="http://schemas.microsoft.com/office/drawing/2014/main" id="{7AE6970A-196D-4CF4-B9E6-31169E4613C4}"/>
               </a:ext>
             </a:extLst>
           </p:cNvPr>
@@ -5908,7 +5975,7 @@
           <p:cNvPr id="64" name="timeline-item-6-1">
             <a:extLst xmlns:a="http://schemas.openxmlformats.org/drawingml/2006/main">
               <a:ext uri="{FF2B5EF4-FFF2-40B4-BE49-F238E27FC236}">
-                <a16:creationId xmlns:a16="http://schemas.microsoft.com/office/drawing/2014/main" id="{2439D32B-D33C-41BA-9F00-74807B4A648D}"/>
+                <a16:creationId xmlns:a16="http://schemas.microsoft.com/office/drawing/2014/main" id="{62C06B8D-D1A2-4F2E-89FA-6D7B9EFF47D1}"/>
               </a:ext>
             </a:extLst>
           </p:cNvPr>
@@ -5958,7 +6025,7 @@
           <p:cNvPr id="65" name="timeline-dot-6-2">
             <a:extLst xmlns:a="http://schemas.openxmlformats.org/drawingml/2006/main">
               <a:ext uri="{FF2B5EF4-FFF2-40B4-BE49-F238E27FC236}">
-                <a16:creationId xmlns:a16="http://schemas.microsoft.com/office/drawing/2014/main" id="{2748027A-A1E0-44FB-8956-79C4FDFAEEEC}"/>
+                <a16:creationId xmlns:a16="http://schemas.microsoft.com/office/drawing/2014/main" id="{47B44FB4-7CC4-4C6B-BB08-397515522B32}"/>
               </a:ext>
             </a:extLst>
           </p:cNvPr>
@@ -6008,7 +6075,7 @@
           <p:cNvPr id="66" name="timeline-item-6-2">
             <a:extLst xmlns:a="http://schemas.openxmlformats.org/drawingml/2006/main">
               <a:ext uri="{FF2B5EF4-FFF2-40B4-BE49-F238E27FC236}">
-                <a16:creationId xmlns:a16="http://schemas.microsoft.com/office/drawing/2014/main" id="{31B4E298-D9E7-40C3-AA0B-6B93AA2CFA53}"/>
+                <a16:creationId xmlns:a16="http://schemas.microsoft.com/office/drawing/2014/main" id="{77E639F7-CD89-47FA-B263-EB47EC35C521}"/>
               </a:ext>
             </a:extLst>
           </p:cNvPr>
@@ -6058,7 +6125,7 @@
           <p:cNvPr id="67" name="timeline-dot-6-3">
             <a:extLst xmlns:a="http://schemas.openxmlformats.org/drawingml/2006/main">
               <a:ext uri="{FF2B5EF4-FFF2-40B4-BE49-F238E27FC236}">
-                <a16:creationId xmlns:a16="http://schemas.microsoft.com/office/drawing/2014/main" id="{2A73B4AA-186E-4F3F-B741-F805FEEFE827}"/>
+                <a16:creationId xmlns:a16="http://schemas.microsoft.com/office/drawing/2014/main" id="{F05B7C0A-7E65-4954-9F76-228225B24F65}"/>
               </a:ext>
             </a:extLst>
           </p:cNvPr>
@@ -6108,7 +6175,7 @@
           <p:cNvPr id="68" name="timeline-item-6-3">
             <a:extLst xmlns:a="http://schemas.openxmlformats.org/drawingml/2006/main">
               <a:ext uri="{FF2B5EF4-FFF2-40B4-BE49-F238E27FC236}">
-                <a16:creationId xmlns:a16="http://schemas.microsoft.com/office/drawing/2014/main" id="{8A876E37-2E83-499E-BE87-22697CC10A46}"/>
+                <a16:creationId xmlns:a16="http://schemas.microsoft.com/office/drawing/2014/main" id="{D2CE6211-C823-44E1-9986-66E6ABC6BEDF}"/>
               </a:ext>
             </a:extLst>
           </p:cNvPr>
@@ -6158,7 +6225,7 @@
           <p:cNvPr id="69" name="management-title">
             <a:extLst xmlns:a="http://schemas.openxmlformats.org/drawingml/2006/main">
               <a:ext uri="{FF2B5EF4-FFF2-40B4-BE49-F238E27FC236}">
-                <a16:creationId xmlns:a16="http://schemas.microsoft.com/office/drawing/2014/main" id="{657A9D68-DA2F-4D05-8737-8459A3EAB631}"/>
+                <a16:creationId xmlns:a16="http://schemas.microsoft.com/office/drawing/2014/main" id="{23E6D33D-7CA3-4039-80DB-3AC3DBD23DA0}"/>
               </a:ext>
             </a:extLst>
           </p:cNvPr>
@@ -6208,7 +6275,7 @@
           <p:cNvPr id="70" name="management-note">
             <a:extLst xmlns:a="http://schemas.openxmlformats.org/drawingml/2006/main">
               <a:ext uri="{FF2B5EF4-FFF2-40B4-BE49-F238E27FC236}">
-                <a16:creationId xmlns:a16="http://schemas.microsoft.com/office/drawing/2014/main" id="{2DB3FD3C-0397-4C22-A692-AA449B6C0B95}"/>
+                <a16:creationId xmlns:a16="http://schemas.microsoft.com/office/drawing/2014/main" id="{46A80453-4025-4817-992D-70C82E4CBB7E}"/>
               </a:ext>
             </a:extLst>
           </p:cNvPr>
@@ -6258,7 +6325,7 @@
           <p:cNvPr id="71" name="mgmt-card-1">
             <a:extLst xmlns:a="http://schemas.openxmlformats.org/drawingml/2006/main">
               <a:ext uri="{FF2B5EF4-FFF2-40B4-BE49-F238E27FC236}">
-                <a16:creationId xmlns:a16="http://schemas.microsoft.com/office/drawing/2014/main" id="{95874C78-B412-491A-8015-2E614E140F1A}"/>
+                <a16:creationId xmlns:a16="http://schemas.microsoft.com/office/drawing/2014/main" id="{84824C05-2EE7-46D7-9137-44C25129EB91}"/>
               </a:ext>
             </a:extLst>
           </p:cNvPr>
@@ -6293,7 +6360,7 @@
           <p:cNvPr id="72" name="mgmt-bar-1">
             <a:extLst xmlns:a="http://schemas.openxmlformats.org/drawingml/2006/main">
               <a:ext uri="{FF2B5EF4-FFF2-40B4-BE49-F238E27FC236}">
-                <a16:creationId xmlns:a16="http://schemas.microsoft.com/office/drawing/2014/main" id="{387AF5D1-66A7-4E42-B8F3-225B9438CFBA}"/>
+                <a16:creationId xmlns:a16="http://schemas.microsoft.com/office/drawing/2014/main" id="{B1B1AEC8-CD5E-4E2E-8972-EE2EA14974F1}"/>
               </a:ext>
             </a:extLst>
           </p:cNvPr>
@@ -6326,7 +6393,7 @@
           <p:cNvPr id="73" name="mgmt-label-1">
             <a:extLst xmlns:a="http://schemas.openxmlformats.org/drawingml/2006/main">
               <a:ext uri="{FF2B5EF4-FFF2-40B4-BE49-F238E27FC236}">
-                <a16:creationId xmlns:a16="http://schemas.microsoft.com/office/drawing/2014/main" id="{29D969DC-8823-4FAD-8BB5-66225A29291B}"/>
+                <a16:creationId xmlns:a16="http://schemas.microsoft.com/office/drawing/2014/main" id="{A8347DE2-982C-49F1-9EFD-0862056DB028}"/>
               </a:ext>
             </a:extLst>
           </p:cNvPr>
@@ -6376,7 +6443,7 @@
           <p:cNvPr id="74" name="mgmt-body-1">
             <a:extLst xmlns:a="http://schemas.openxmlformats.org/drawingml/2006/main">
               <a:ext uri="{FF2B5EF4-FFF2-40B4-BE49-F238E27FC236}">
-                <a16:creationId xmlns:a16="http://schemas.microsoft.com/office/drawing/2014/main" id="{1B0F1B00-84EC-4081-86FE-A13B2C45563A}"/>
+                <a16:creationId xmlns:a16="http://schemas.microsoft.com/office/drawing/2014/main" id="{8507851C-FCCA-49B7-AC28-D1F10D4C3D8F}"/>
               </a:ext>
             </a:extLst>
           </p:cNvPr>
@@ -6426,7 +6493,7 @@
           <p:cNvPr id="75" name="mgmt-card-2">
             <a:extLst xmlns:a="http://schemas.openxmlformats.org/drawingml/2006/main">
               <a:ext uri="{FF2B5EF4-FFF2-40B4-BE49-F238E27FC236}">
-                <a16:creationId xmlns:a16="http://schemas.microsoft.com/office/drawing/2014/main" id="{75F9B55D-63EB-4E2F-8846-2237E2F6F73C}"/>
+                <a16:creationId xmlns:a16="http://schemas.microsoft.com/office/drawing/2014/main" id="{B35691A3-ECBA-4042-9A05-3C7EAB11FD7A}"/>
               </a:ext>
             </a:extLst>
           </p:cNvPr>
@@ -6461,7 +6528,7 @@
           <p:cNvPr id="76" name="mgmt-bar-2">
             <a:extLst xmlns:a="http://schemas.openxmlformats.org/drawingml/2006/main">
               <a:ext uri="{FF2B5EF4-FFF2-40B4-BE49-F238E27FC236}">
-                <a16:creationId xmlns:a16="http://schemas.microsoft.com/office/drawing/2014/main" id="{CD430347-1047-4BA2-A3EC-AED3E9851618}"/>
+                <a16:creationId xmlns:a16="http://schemas.microsoft.com/office/drawing/2014/main" id="{80969DE9-6307-4C60-83C5-F10AD4B853E0}"/>
               </a:ext>
             </a:extLst>
           </p:cNvPr>
@@ -6494,7 +6561,7 @@
           <p:cNvPr id="77" name="mgmt-label-2">
             <a:extLst xmlns:a="http://schemas.openxmlformats.org/drawingml/2006/main">
               <a:ext uri="{FF2B5EF4-FFF2-40B4-BE49-F238E27FC236}">
-                <a16:creationId xmlns:a16="http://schemas.microsoft.com/office/drawing/2014/main" id="{16686872-EE19-4CCD-9BF5-90BB18013C6D}"/>
+                <a16:creationId xmlns:a16="http://schemas.microsoft.com/office/drawing/2014/main" id="{D82233D0-1F10-4EAB-ACD5-B4F4A51F20F5}"/>
               </a:ext>
             </a:extLst>
           </p:cNvPr>
@@ -6544,7 +6611,7 @@
           <p:cNvPr id="78" name="mgmt-body-2">
             <a:extLst xmlns:a="http://schemas.openxmlformats.org/drawingml/2006/main">
               <a:ext uri="{FF2B5EF4-FFF2-40B4-BE49-F238E27FC236}">
-                <a16:creationId xmlns:a16="http://schemas.microsoft.com/office/drawing/2014/main" id="{266ADA6D-5169-4F74-B1F5-10F88A2D4354}"/>
+                <a16:creationId xmlns:a16="http://schemas.microsoft.com/office/drawing/2014/main" id="{0062A4BE-8F01-4ACE-BC76-65A0C92AACEF}"/>
               </a:ext>
             </a:extLst>
           </p:cNvPr>
@@ -6594,7 +6661,7 @@
           <p:cNvPr id="79" name="mgmt-card-3">
             <a:extLst xmlns:a="http://schemas.openxmlformats.org/drawingml/2006/main">
               <a:ext uri="{FF2B5EF4-FFF2-40B4-BE49-F238E27FC236}">
-                <a16:creationId xmlns:a16="http://schemas.microsoft.com/office/drawing/2014/main" id="{76DA3954-FC8B-404C-9EFF-DE5A5FCD564F}"/>
+                <a16:creationId xmlns:a16="http://schemas.microsoft.com/office/drawing/2014/main" id="{66013F89-EF7E-4898-8DBE-5992D6B0C742}"/>
               </a:ext>
             </a:extLst>
           </p:cNvPr>
@@ -6629,7 +6696,7 @@
           <p:cNvPr id="80" name="mgmt-bar-3">
             <a:extLst xmlns:a="http://schemas.openxmlformats.org/drawingml/2006/main">
               <a:ext uri="{FF2B5EF4-FFF2-40B4-BE49-F238E27FC236}">
-                <a16:creationId xmlns:a16="http://schemas.microsoft.com/office/drawing/2014/main" id="{BD1C5FA8-DA5A-4385-8F85-DAE4548F551C}"/>
+                <a16:creationId xmlns:a16="http://schemas.microsoft.com/office/drawing/2014/main" id="{04C6820E-BA70-453F-B7ED-F7D9F728EF4F}"/>
               </a:ext>
             </a:extLst>
           </p:cNvPr>
@@ -6662,7 +6729,7 @@
           <p:cNvPr id="81" name="mgmt-label-3">
             <a:extLst xmlns:a="http://schemas.openxmlformats.org/drawingml/2006/main">
               <a:ext uri="{FF2B5EF4-FFF2-40B4-BE49-F238E27FC236}">
-                <a16:creationId xmlns:a16="http://schemas.microsoft.com/office/drawing/2014/main" id="{1A475A50-1440-4941-BE44-EB878926FADB}"/>
+                <a16:creationId xmlns:a16="http://schemas.microsoft.com/office/drawing/2014/main" id="{F44A9C6C-7453-49CF-A2B5-93D31C32F8B6}"/>
               </a:ext>
             </a:extLst>
           </p:cNvPr>
@@ -6712,7 +6779,7 @@
           <p:cNvPr id="82" name="mgmt-body-3">
             <a:extLst xmlns:a="http://schemas.openxmlformats.org/drawingml/2006/main">
               <a:ext uri="{FF2B5EF4-FFF2-40B4-BE49-F238E27FC236}">
-                <a16:creationId xmlns:a16="http://schemas.microsoft.com/office/drawing/2014/main" id="{CD5C234B-41EE-4783-A273-5CCA0840F2F9}"/>
+                <a16:creationId xmlns:a16="http://schemas.microsoft.com/office/drawing/2014/main" id="{0670FCB6-76ED-45BD-8F37-08C8F5AEFDC1}"/>
               </a:ext>
             </a:extLst>
           </p:cNvPr>
@@ -6762,7 +6829,7 @@
           <p:cNvPr id="83" name="mgmt-card-4">
             <a:extLst xmlns:a="http://schemas.openxmlformats.org/drawingml/2006/main">
               <a:ext uri="{FF2B5EF4-FFF2-40B4-BE49-F238E27FC236}">
-                <a16:creationId xmlns:a16="http://schemas.microsoft.com/office/drawing/2014/main" id="{97F788D7-0534-4D8A-9201-75B130289D68}"/>
+                <a16:creationId xmlns:a16="http://schemas.microsoft.com/office/drawing/2014/main" id="{AC32FC36-E2E9-465C-B4E9-E56D3B3CE28C}"/>
               </a:ext>
             </a:extLst>
           </p:cNvPr>
@@ -6797,7 +6864,7 @@
           <p:cNvPr id="84" name="mgmt-bar-4">
             <a:extLst xmlns:a="http://schemas.openxmlformats.org/drawingml/2006/main">
               <a:ext uri="{FF2B5EF4-FFF2-40B4-BE49-F238E27FC236}">
-                <a16:creationId xmlns:a16="http://schemas.microsoft.com/office/drawing/2014/main" id="{DF0CA658-C20E-4AF6-BBC5-D6A3B931803F}"/>
+                <a16:creationId xmlns:a16="http://schemas.microsoft.com/office/drawing/2014/main" id="{A0A98AAA-F63F-4B49-8517-8F1EF20D850D}"/>
               </a:ext>
             </a:extLst>
           </p:cNvPr>
@@ -6830,7 +6897,7 @@
           <p:cNvPr id="85" name="mgmt-label-4">
             <a:extLst xmlns:a="http://schemas.openxmlformats.org/drawingml/2006/main">
               <a:ext uri="{FF2B5EF4-FFF2-40B4-BE49-F238E27FC236}">
-                <a16:creationId xmlns:a16="http://schemas.microsoft.com/office/drawing/2014/main" id="{122A1E17-FE56-474C-B9CC-481F5BF8D235}"/>
+                <a16:creationId xmlns:a16="http://schemas.microsoft.com/office/drawing/2014/main" id="{DAD6C970-B201-402B-9545-3B5D986ACEE1}"/>
               </a:ext>
             </a:extLst>
           </p:cNvPr>
@@ -6880,7 +6947,7 @@
           <p:cNvPr id="86" name="mgmt-body-4">
             <a:extLst xmlns:a="http://schemas.openxmlformats.org/drawingml/2006/main">
               <a:ext uri="{FF2B5EF4-FFF2-40B4-BE49-F238E27FC236}">
-                <a16:creationId xmlns:a16="http://schemas.microsoft.com/office/drawing/2014/main" id="{584C4ED0-EF63-438C-9188-D292E450F6D5}"/>
+                <a16:creationId xmlns:a16="http://schemas.microsoft.com/office/drawing/2014/main" id="{A08A694A-A422-4068-896D-4D2B709EF470}"/>
               </a:ext>
             </a:extLst>
           </p:cNvPr>
@@ -6928,7 +6995,2389 @@
     </p:spTree>
     <p:extLst>
       <p:ext uri="{BB962C8B-B14F-4D97-AF65-F5344CB8AC3E}">
-        <p14:creationId xmlns:p14="http://schemas.microsoft.com/office/powerpoint/2010/main" val="1483899283"/>
+        <p14:creationId xmlns:p14="http://schemas.microsoft.com/office/powerpoint/2010/main" val="58456663"/>
+      </p:ext>
+    </p:extLst>
+  </p:cSld>
+</p:sld>
+</file>
+
+<file path=ppt/slides/slide3.xml><?xml version="1.0" encoding="utf-8"?>
+<p:sld xmlns:p="http://schemas.openxmlformats.org/presentationml/2006/main">
+  <p:cSld>
+    <p:bg>
+      <p:bgPr>
+        <a:solidFill xmlns:a="http://schemas.openxmlformats.org/drawingml/2006/main">
+          <a:srgbClr val="0B1020"/>
+        </a:solidFill>
+      </p:bgPr>
+    </p:bg>
+    <p:spTree>
+      <p:nvGrpSpPr>
+        <p:cNvPr id="1" name=""/>
+        <p:cNvGrpSpPr/>
+        <p:nvPr/>
+      </p:nvGrpSpPr>
+      <p:grpSpPr>
+        <a:xfrm xmlns:a="http://schemas.openxmlformats.org/drawingml/2006/main"/>
+      </p:grpSpPr>
+      <p:sp>
+        <p:nvSpPr>
+          <p:cNvPr id="1" name="top-accent">
+            <a:extLst xmlns:a="http://schemas.openxmlformats.org/drawingml/2006/main">
+              <a:ext uri="{FF2B5EF4-FFF2-40B4-BE49-F238E27FC236}">
+                <a16:creationId xmlns:a16="http://schemas.microsoft.com/office/drawing/2014/main" id="{F2C4A980-4570-4BB2-A38C-0D91B067527C}"/>
+              </a:ext>
+            </a:extLst>
+          </p:cNvPr>
+          <p:cNvSpPr>
+            <a:spLocks xmlns:a="http://schemas.openxmlformats.org/drawingml/2006/main" noGrp="1"/>
+          </p:cNvSpPr>
+          <p:nvPr/>
+        </p:nvSpPr>
+        <p:spPr>
+          <a:xfrm xmlns:a="http://schemas.openxmlformats.org/drawingml/2006/main">
+            <a:off x="0" y="0"/>
+            <a:ext cx="12192000" cy="95250"/>
+          </a:xfrm>
+          <a:prstGeom xmlns:a="http://schemas.openxmlformats.org/drawingml/2006/main" prst="rect">
+            <a:avLst/>
+          </a:prstGeom>
+          <a:solidFill xmlns:a="http://schemas.openxmlformats.org/drawingml/2006/main">
+            <a:srgbClr val="00B8D9"/>
+          </a:solidFill>
+          <a:ln xmlns:a="http://schemas.openxmlformats.org/drawingml/2006/main" w="0">
+            <a:solidFill>
+              <a:srgbClr val="00B8D9"/>
+            </a:solidFill>
+            <a:prstDash val="solid"/>
+          </a:ln>
+        </p:spPr>
+      </p:sp>
+      <p:sp>
+        <p:nvSpPr>
+          <p:cNvPr id="2" name="left-accent">
+            <a:extLst xmlns:a="http://schemas.openxmlformats.org/drawingml/2006/main">
+              <a:ext uri="{FF2B5EF4-FFF2-40B4-BE49-F238E27FC236}">
+                <a16:creationId xmlns:a16="http://schemas.microsoft.com/office/drawing/2014/main" id="{EA1F300C-3F46-41A4-9832-75643A9E0554}"/>
+              </a:ext>
+            </a:extLst>
+          </p:cNvPr>
+          <p:cNvSpPr>
+            <a:spLocks xmlns:a="http://schemas.openxmlformats.org/drawingml/2006/main" noGrp="1"/>
+          </p:cNvSpPr>
+          <p:nvPr/>
+        </p:nvSpPr>
+        <p:spPr>
+          <a:xfrm xmlns:a="http://schemas.openxmlformats.org/drawingml/2006/main">
+            <a:off x="0" y="0"/>
+            <a:ext cx="152400" cy="6858000"/>
+          </a:xfrm>
+          <a:prstGeom xmlns:a="http://schemas.openxmlformats.org/drawingml/2006/main" prst="rect">
+            <a:avLst/>
+          </a:prstGeom>
+          <a:solidFill xmlns:a="http://schemas.openxmlformats.org/drawingml/2006/main">
+            <a:srgbClr val="FF6B35"/>
+          </a:solidFill>
+          <a:ln xmlns:a="http://schemas.openxmlformats.org/drawingml/2006/main" w="0">
+            <a:solidFill>
+              <a:srgbClr val="FF6B35"/>
+            </a:solidFill>
+            <a:prstDash val="solid"/>
+          </a:ln>
+        </p:spPr>
+      </p:sp>
+      <p:sp>
+        <p:nvSpPr>
+          <p:cNvPr id="3" name="eyebrow">
+            <a:extLst xmlns:a="http://schemas.openxmlformats.org/drawingml/2006/main">
+              <a:ext uri="{FF2B5EF4-FFF2-40B4-BE49-F238E27FC236}">
+                <a16:creationId xmlns:a16="http://schemas.microsoft.com/office/drawing/2014/main" id="{7D982622-6C19-49FE-A7AF-7BB7007F7CC7}"/>
+              </a:ext>
+            </a:extLst>
+          </p:cNvPr>
+          <p:cNvSpPr>
+            <a:spLocks xmlns:a="http://schemas.openxmlformats.org/drawingml/2006/main" noGrp="1"/>
+          </p:cNvSpPr>
+          <p:nvPr/>
+        </p:nvSpPr>
+        <p:spPr>
+          <a:xfrm xmlns:a="http://schemas.openxmlformats.org/drawingml/2006/main">
+            <a:off x="514350" y="361950"/>
+            <a:ext cx="5905500" cy="285750"/>
+          </a:xfrm>
+          <a:prstGeom xmlns:a="http://schemas.openxmlformats.org/drawingml/2006/main" prst="rect">
+            <a:avLst/>
+          </a:prstGeom>
+          <a:noFill xmlns:a="http://schemas.openxmlformats.org/drawingml/2006/main"/>
+          <a:ln xmlns:a="http://schemas.openxmlformats.org/drawingml/2006/main" w="0">
+            <a:noFill/>
+            <a:prstDash val="solid"/>
+          </a:ln>
+        </p:spPr>
+        <p:txBody>
+          <a:bodyPr xmlns:a="http://schemas.openxmlformats.org/drawingml/2006/main"/>
+          <a:lstStyle xmlns:a="http://schemas.openxmlformats.org/drawingml/2006/main"/>
+          <a:p xmlns:a="http://schemas.openxmlformats.org/drawingml/2006/main">
+            <a:pPr>
+              <a:defRPr sz="1125" b="1">
+                <a:solidFill>
+                  <a:srgbClr val="8BD9E8"/>
+                </a:solidFill>
+              </a:defRPr>
+            </a:pPr>
+            <a:r>
+              <a:rPr sz="1125" b="1">
+                <a:solidFill>
+                  <a:srgbClr val="8BD9E8"/>
+                </a:solidFill>
+              </a:rPr>
+              <a:t>LAUNCH GATE CRITERIA | PAGE 03</a:t>
+            </a:r>
+          </a:p>
+        </p:txBody>
+      </p:sp>
+      <p:sp>
+        <p:nvSpPr>
+          <p:cNvPr id="4" name="footer">
+            <a:extLst xmlns:a="http://schemas.openxmlformats.org/drawingml/2006/main">
+              <a:ext uri="{FF2B5EF4-FFF2-40B4-BE49-F238E27FC236}">
+                <a16:creationId xmlns:a16="http://schemas.microsoft.com/office/drawing/2014/main" id="{B3B15104-419C-4A4E-B3B5-7AAB760ADB9E}"/>
+              </a:ext>
+            </a:extLst>
+          </p:cNvPr>
+          <p:cNvSpPr>
+            <a:spLocks xmlns:a="http://schemas.openxmlformats.org/drawingml/2006/main" noGrp="1"/>
+          </p:cNvSpPr>
+          <p:nvPr/>
+        </p:nvSpPr>
+        <p:spPr>
+          <a:xfrm xmlns:a="http://schemas.openxmlformats.org/drawingml/2006/main">
+            <a:off x="514350" y="6457950"/>
+            <a:ext cx="4953000" cy="266700"/>
+          </a:xfrm>
+          <a:prstGeom xmlns:a="http://schemas.openxmlformats.org/drawingml/2006/main" prst="rect">
+            <a:avLst/>
+          </a:prstGeom>
+          <a:noFill xmlns:a="http://schemas.openxmlformats.org/drawingml/2006/main"/>
+          <a:ln xmlns:a="http://schemas.openxmlformats.org/drawingml/2006/main" w="0">
+            <a:noFill/>
+            <a:prstDash val="solid"/>
+          </a:ln>
+        </p:spPr>
+        <p:txBody>
+          <a:bodyPr xmlns:a="http://schemas.openxmlformats.org/drawingml/2006/main"/>
+          <a:lstStyle xmlns:a="http://schemas.openxmlformats.org/drawingml/2006/main"/>
+          <a:p xmlns:a="http://schemas.openxmlformats.org/drawingml/2006/main">
+            <a:pPr>
+              <a:defRPr sz="1125">
+                <a:solidFill>
+                  <a:srgbClr val="94A3B8"/>
+                </a:solidFill>
+              </a:defRPr>
+            </a:pPr>
+            <a:r>
+              <a:rPr sz="1125">
+                <a:solidFill>
+                  <a:srgbClr val="94A3B8"/>
+                </a:solidFill>
+              </a:rPr>
+              <a:t>HIT2 일본 서비스 런칭 6개월 전 로드맵</a:t>
+            </a:r>
+          </a:p>
+        </p:txBody>
+      </p:sp>
+      <p:sp>
+        <p:nvSpPr>
+          <p:cNvPr id="5" name="page-no">
+            <a:extLst xmlns:a="http://schemas.openxmlformats.org/drawingml/2006/main">
+              <a:ext uri="{FF2B5EF4-FFF2-40B4-BE49-F238E27FC236}">
+                <a16:creationId xmlns:a16="http://schemas.microsoft.com/office/drawing/2014/main" id="{D32EA220-CEB8-4865-93D5-4B1A5DAEE738}"/>
+              </a:ext>
+            </a:extLst>
+          </p:cNvPr>
+          <p:cNvSpPr>
+            <a:spLocks xmlns:a="http://schemas.openxmlformats.org/drawingml/2006/main" noGrp="1"/>
+          </p:cNvSpPr>
+          <p:nvPr/>
+        </p:nvSpPr>
+        <p:spPr>
+          <a:xfrm xmlns:a="http://schemas.openxmlformats.org/drawingml/2006/main">
+            <a:off x="10953750" y="6457950"/>
+            <a:ext cx="419100" cy="266700"/>
+          </a:xfrm>
+          <a:prstGeom xmlns:a="http://schemas.openxmlformats.org/drawingml/2006/main" prst="rect">
+            <a:avLst/>
+          </a:prstGeom>
+          <a:noFill xmlns:a="http://schemas.openxmlformats.org/drawingml/2006/main"/>
+          <a:ln xmlns:a="http://schemas.openxmlformats.org/drawingml/2006/main" w="0">
+            <a:noFill/>
+            <a:prstDash val="solid"/>
+          </a:ln>
+        </p:spPr>
+        <p:txBody>
+          <a:bodyPr xmlns:a="http://schemas.openxmlformats.org/drawingml/2006/main"/>
+          <a:lstStyle xmlns:a="http://schemas.openxmlformats.org/drawingml/2006/main"/>
+          <a:p xmlns:a="http://schemas.openxmlformats.org/drawingml/2006/main">
+            <a:pPr algn="r">
+              <a:defRPr sz="1200" b="1">
+                <a:solidFill>
+                  <a:srgbClr val="94A3B8"/>
+                </a:solidFill>
+              </a:defRPr>
+            </a:pPr>
+            <a:r>
+              <a:rPr sz="1200" b="1">
+                <a:solidFill>
+                  <a:srgbClr val="94A3B8"/>
+                </a:solidFill>
+              </a:rPr>
+              <a:t>03</a:t>
+            </a:r>
+          </a:p>
+        </p:txBody>
+      </p:sp>
+      <p:sp>
+        <p:nvSpPr>
+          <p:cNvPr id="6" name="title-03">
+            <a:extLst xmlns:a="http://schemas.openxmlformats.org/drawingml/2006/main">
+              <a:ext uri="{FF2B5EF4-FFF2-40B4-BE49-F238E27FC236}">
+                <a16:creationId xmlns:a16="http://schemas.microsoft.com/office/drawing/2014/main" id="{77BFF889-8ACA-4062-8395-E09342248453}"/>
+              </a:ext>
+            </a:extLst>
+          </p:cNvPr>
+          <p:cNvSpPr>
+            <a:spLocks xmlns:a="http://schemas.openxmlformats.org/drawingml/2006/main" noGrp="1"/>
+          </p:cNvSpPr>
+          <p:nvPr/>
+        </p:nvSpPr>
+        <p:spPr>
+          <a:xfrm xmlns:a="http://schemas.openxmlformats.org/drawingml/2006/main">
+            <a:off x="514350" y="781050"/>
+            <a:ext cx="10572750" cy="533400"/>
+          </a:xfrm>
+          <a:prstGeom xmlns:a="http://schemas.openxmlformats.org/drawingml/2006/main" prst="rect">
+            <a:avLst/>
+          </a:prstGeom>
+          <a:noFill xmlns:a="http://schemas.openxmlformats.org/drawingml/2006/main"/>
+          <a:ln xmlns:a="http://schemas.openxmlformats.org/drawingml/2006/main" w="0">
+            <a:noFill/>
+            <a:prstDash val="solid"/>
+          </a:ln>
+        </p:spPr>
+        <p:txBody>
+          <a:bodyPr xmlns:a="http://schemas.openxmlformats.org/drawingml/2006/main"/>
+          <a:lstStyle xmlns:a="http://schemas.openxmlformats.org/drawingml/2006/main"/>
+          <a:p xmlns:a="http://schemas.openxmlformats.org/drawingml/2006/main">
+            <a:pPr>
+              <a:defRPr sz="2550" b="1">
+                <a:solidFill>
+                  <a:srgbClr val="FFFFFF"/>
+                </a:solidFill>
+              </a:defRPr>
+            </a:pPr>
+            <a:r>
+              <a:rPr sz="2550" b="1">
+                <a:solidFill>
+                  <a:srgbClr val="FFFFFF"/>
+                </a:solidFill>
+              </a:rPr>
+              <a:t>런칭 게이트는 일정이 아니라 통과 기준으로 관리합니다</a:t>
+            </a:r>
+          </a:p>
+        </p:txBody>
+      </p:sp>
+      <p:sp>
+        <p:nvSpPr>
+          <p:cNvPr id="7" name="subtitle-03">
+            <a:extLst xmlns:a="http://schemas.openxmlformats.org/drawingml/2006/main">
+              <a:ext uri="{FF2B5EF4-FFF2-40B4-BE49-F238E27FC236}">
+                <a16:creationId xmlns:a16="http://schemas.microsoft.com/office/drawing/2014/main" id="{C1665073-6F92-4F61-B6CD-36448A6CFFD7}"/>
+              </a:ext>
+            </a:extLst>
+          </p:cNvPr>
+          <p:cNvSpPr>
+            <a:spLocks xmlns:a="http://schemas.openxmlformats.org/drawingml/2006/main" noGrp="1"/>
+          </p:cNvSpPr>
+          <p:nvPr/>
+        </p:nvSpPr>
+        <p:spPr>
+          <a:xfrm xmlns:a="http://schemas.openxmlformats.org/drawingml/2006/main">
+            <a:off x="533400" y="1371600"/>
+            <a:ext cx="10287000" cy="323850"/>
+          </a:xfrm>
+          <a:prstGeom xmlns:a="http://schemas.openxmlformats.org/drawingml/2006/main" prst="rect">
+            <a:avLst/>
+          </a:prstGeom>
+          <a:noFill xmlns:a="http://schemas.openxmlformats.org/drawingml/2006/main"/>
+          <a:ln xmlns:a="http://schemas.openxmlformats.org/drawingml/2006/main" w="0">
+            <a:noFill/>
+            <a:prstDash val="solid"/>
+          </a:ln>
+        </p:spPr>
+        <p:txBody>
+          <a:bodyPr xmlns:a="http://schemas.openxmlformats.org/drawingml/2006/main"/>
+          <a:lstStyle xmlns:a="http://schemas.openxmlformats.org/drawingml/2006/main"/>
+          <a:p xmlns:a="http://schemas.openxmlformats.org/drawingml/2006/main">
+            <a:pPr>
+              <a:defRPr sz="1275">
+                <a:solidFill>
+                  <a:srgbClr val="CBD5E1"/>
+                </a:solidFill>
+              </a:defRPr>
+            </a:pPr>
+            <a:r>
+              <a:rPr sz="1275">
+                <a:solidFill>
+                  <a:srgbClr val="CBD5E1"/>
+                </a:solidFill>
+              </a:rPr>
+              <a:t>월별 일정표만으로는 리스크가 숨기 쉽기 때문에, 범위·빌드·QA·검수 기준을 게이트로 묶어 판정합니다.</a:t>
+            </a:r>
+          </a:p>
+        </p:txBody>
+      </p:sp>
+      <p:sp>
+        <p:nvSpPr>
+          <p:cNvPr id="8" name="gate-section-title">
+            <a:extLst xmlns:a="http://schemas.openxmlformats.org/drawingml/2006/main">
+              <a:ext uri="{FF2B5EF4-FFF2-40B4-BE49-F238E27FC236}">
+                <a16:creationId xmlns:a16="http://schemas.microsoft.com/office/drawing/2014/main" id="{0FE4A4AF-373E-4940-BB4C-7F4C74238DA1}"/>
+              </a:ext>
+            </a:extLst>
+          </p:cNvPr>
+          <p:cNvSpPr>
+            <a:spLocks xmlns:a="http://schemas.openxmlformats.org/drawingml/2006/main" noGrp="1"/>
+          </p:cNvSpPr>
+          <p:nvPr/>
+        </p:nvSpPr>
+        <p:spPr>
+          <a:xfrm xmlns:a="http://schemas.openxmlformats.org/drawingml/2006/main">
+            <a:off x="514350" y="1752600"/>
+            <a:ext cx="2095500" cy="285750"/>
+          </a:xfrm>
+          <a:prstGeom xmlns:a="http://schemas.openxmlformats.org/drawingml/2006/main" prst="rect">
+            <a:avLst/>
+          </a:prstGeom>
+          <a:noFill xmlns:a="http://schemas.openxmlformats.org/drawingml/2006/main"/>
+          <a:ln xmlns:a="http://schemas.openxmlformats.org/drawingml/2006/main" w="0">
+            <a:noFill/>
+            <a:prstDash val="solid"/>
+          </a:ln>
+        </p:spPr>
+        <p:txBody>
+          <a:bodyPr xmlns:a="http://schemas.openxmlformats.org/drawingml/2006/main"/>
+          <a:lstStyle xmlns:a="http://schemas.openxmlformats.org/drawingml/2006/main"/>
+          <a:p xmlns:a="http://schemas.openxmlformats.org/drawingml/2006/main">
+            <a:pPr>
+              <a:defRPr sz="1650" b="1">
+                <a:solidFill>
+                  <a:srgbClr val="FFFFFF"/>
+                </a:solidFill>
+              </a:defRPr>
+            </a:pPr>
+            <a:r>
+              <a:rPr sz="1650" b="1">
+                <a:solidFill>
+                  <a:srgbClr val="FFFFFF"/>
+                </a:solidFill>
+              </a:rPr>
+              <a:t>핵심 게이트</a:t>
+            </a:r>
+          </a:p>
+        </p:txBody>
+      </p:sp>
+      <p:sp>
+        <p:nvSpPr>
+          <p:cNvPr id="9" name="gate-card-1">
+            <a:extLst xmlns:a="http://schemas.openxmlformats.org/drawingml/2006/main">
+              <a:ext uri="{FF2B5EF4-FFF2-40B4-BE49-F238E27FC236}">
+                <a16:creationId xmlns:a16="http://schemas.microsoft.com/office/drawing/2014/main" id="{B3111E65-678B-433B-AF3A-81F7AA7B5A4B}"/>
+              </a:ext>
+            </a:extLst>
+          </p:cNvPr>
+          <p:cNvSpPr>
+            <a:spLocks xmlns:a="http://schemas.openxmlformats.org/drawingml/2006/main" noGrp="1"/>
+          </p:cNvSpPr>
+          <p:nvPr/>
+        </p:nvSpPr>
+        <p:spPr>
+          <a:xfrm xmlns:a="http://schemas.openxmlformats.org/drawingml/2006/main">
+            <a:off x="514350" y="2095500"/>
+            <a:ext cx="3714750" cy="933450"/>
+          </a:xfrm>
+          <a:prstGeom xmlns:a="http://schemas.openxmlformats.org/drawingml/2006/main" prst="roundRect">
+            <a:avLst>
+              <a:gd name="adj" fmla="val 8163"/>
+            </a:avLst>
+          </a:prstGeom>
+          <a:solidFill xmlns:a="http://schemas.openxmlformats.org/drawingml/2006/main">
+            <a:srgbClr val="111827"/>
+          </a:solidFill>
+          <a:ln xmlns:a="http://schemas.openxmlformats.org/drawingml/2006/main" w="9525">
+            <a:solidFill>
+              <a:srgbClr val="2F3B55"/>
+            </a:solidFill>
+            <a:prstDash val="solid"/>
+          </a:ln>
+        </p:spPr>
+      </p:sp>
+      <p:sp>
+        <p:nvSpPr>
+          <p:cNvPr id="10" name="gate-bar-1">
+            <a:extLst xmlns:a="http://schemas.openxmlformats.org/drawingml/2006/main">
+              <a:ext uri="{FF2B5EF4-FFF2-40B4-BE49-F238E27FC236}">
+                <a16:creationId xmlns:a16="http://schemas.microsoft.com/office/drawing/2014/main" id="{8A8850C3-9CB2-4977-AB96-79633811AB4D}"/>
+              </a:ext>
+            </a:extLst>
+          </p:cNvPr>
+          <p:cNvSpPr>
+            <a:spLocks xmlns:a="http://schemas.openxmlformats.org/drawingml/2006/main" noGrp="1"/>
+          </p:cNvSpPr>
+          <p:nvPr/>
+        </p:nvSpPr>
+        <p:spPr>
+          <a:xfrm xmlns:a="http://schemas.openxmlformats.org/drawingml/2006/main">
+            <a:off x="514350" y="2095500"/>
+            <a:ext cx="66675" cy="933450"/>
+          </a:xfrm>
+          <a:prstGeom xmlns:a="http://schemas.openxmlformats.org/drawingml/2006/main" prst="rect">
+            <a:avLst/>
+          </a:prstGeom>
+          <a:solidFill xmlns:a="http://schemas.openxmlformats.org/drawingml/2006/main">
+            <a:srgbClr val="00B8D9"/>
+          </a:solidFill>
+          <a:ln xmlns:a="http://schemas.openxmlformats.org/drawingml/2006/main" w="0">
+            <a:solidFill>
+              <a:srgbClr val="00B8D9"/>
+            </a:solidFill>
+            <a:prstDash val="solid"/>
+          </a:ln>
+        </p:spPr>
+      </p:sp>
+      <p:sp>
+        <p:nvSpPr>
+          <p:cNvPr id="11" name="gate-phase-1">
+            <a:extLst xmlns:a="http://schemas.openxmlformats.org/drawingml/2006/main">
+              <a:ext uri="{FF2B5EF4-FFF2-40B4-BE49-F238E27FC236}">
+                <a16:creationId xmlns:a16="http://schemas.microsoft.com/office/drawing/2014/main" id="{84DD06CD-8B5F-4273-A5B5-179DED53871A}"/>
+              </a:ext>
+            </a:extLst>
+          </p:cNvPr>
+          <p:cNvSpPr>
+            <a:spLocks xmlns:a="http://schemas.openxmlformats.org/drawingml/2006/main" noGrp="1"/>
+          </p:cNvSpPr>
+          <p:nvPr/>
+        </p:nvSpPr>
+        <p:spPr>
+          <a:xfrm xmlns:a="http://schemas.openxmlformats.org/drawingml/2006/main">
+            <a:off x="781050" y="2247900"/>
+            <a:ext cx="800100" cy="228600"/>
+          </a:xfrm>
+          <a:prstGeom xmlns:a="http://schemas.openxmlformats.org/drawingml/2006/main" prst="rect">
+            <a:avLst/>
+          </a:prstGeom>
+          <a:noFill xmlns:a="http://schemas.openxmlformats.org/drawingml/2006/main"/>
+          <a:ln xmlns:a="http://schemas.openxmlformats.org/drawingml/2006/main" w="0">
+            <a:noFill/>
+            <a:prstDash val="solid"/>
+          </a:ln>
+        </p:spPr>
+        <p:txBody>
+          <a:bodyPr xmlns:a="http://schemas.openxmlformats.org/drawingml/2006/main"/>
+          <a:lstStyle xmlns:a="http://schemas.openxmlformats.org/drawingml/2006/main"/>
+          <a:p xmlns:a="http://schemas.openxmlformats.org/drawingml/2006/main">
+            <a:pPr>
+              <a:defRPr sz="1200" b="1">
+                <a:solidFill>
+                  <a:srgbClr val="00B8D9"/>
+                </a:solidFill>
+              </a:defRPr>
+            </a:pPr>
+            <a:r>
+              <a:rPr sz="1200" b="1">
+                <a:solidFill>
+                  <a:srgbClr val="00B8D9"/>
+                </a:solidFill>
+              </a:rPr>
+              <a:t>Gate 1</a:t>
+            </a:r>
+          </a:p>
+        </p:txBody>
+      </p:sp>
+      <p:sp>
+        <p:nvSpPr>
+          <p:cNvPr id="12" name="gate-title-1">
+            <a:extLst xmlns:a="http://schemas.openxmlformats.org/drawingml/2006/main">
+              <a:ext uri="{FF2B5EF4-FFF2-40B4-BE49-F238E27FC236}">
+                <a16:creationId xmlns:a16="http://schemas.microsoft.com/office/drawing/2014/main" id="{766CF535-C27B-4F6D-8F4A-D7D4A956B04B}"/>
+              </a:ext>
+            </a:extLst>
+          </p:cNvPr>
+          <p:cNvSpPr>
+            <a:spLocks xmlns:a="http://schemas.openxmlformats.org/drawingml/2006/main" noGrp="1"/>
+          </p:cNvSpPr>
+          <p:nvPr/>
+        </p:nvSpPr>
+        <p:spPr>
+          <a:xfrm xmlns:a="http://schemas.openxmlformats.org/drawingml/2006/main">
+            <a:off x="1619250" y="2238375"/>
+            <a:ext cx="2190750" cy="247650"/>
+          </a:xfrm>
+          <a:prstGeom xmlns:a="http://schemas.openxmlformats.org/drawingml/2006/main" prst="rect">
+            <a:avLst/>
+          </a:prstGeom>
+          <a:noFill xmlns:a="http://schemas.openxmlformats.org/drawingml/2006/main"/>
+          <a:ln xmlns:a="http://schemas.openxmlformats.org/drawingml/2006/main" w="0">
+            <a:noFill/>
+            <a:prstDash val="solid"/>
+          </a:ln>
+        </p:spPr>
+        <p:txBody>
+          <a:bodyPr xmlns:a="http://schemas.openxmlformats.org/drawingml/2006/main"/>
+          <a:lstStyle xmlns:a="http://schemas.openxmlformats.org/drawingml/2006/main"/>
+          <a:p xmlns:a="http://schemas.openxmlformats.org/drawingml/2006/main">
+            <a:pPr>
+              <a:defRPr sz="1425" b="1">
+                <a:solidFill>
+                  <a:srgbClr val="FFFFFF"/>
+                </a:solidFill>
+              </a:defRPr>
+            </a:pPr>
+            <a:r>
+              <a:rPr sz="1425" b="1">
+                <a:solidFill>
+                  <a:srgbClr val="FFFFFF"/>
+                </a:solidFill>
+              </a:rPr>
+              <a:t>범위 고정</a:t>
+            </a:r>
+          </a:p>
+        </p:txBody>
+      </p:sp>
+      <p:sp>
+        <p:nvSpPr>
+          <p:cNvPr id="13" name="gate-body-1">
+            <a:extLst xmlns:a="http://schemas.openxmlformats.org/drawingml/2006/main">
+              <a:ext uri="{FF2B5EF4-FFF2-40B4-BE49-F238E27FC236}">
+                <a16:creationId xmlns:a16="http://schemas.microsoft.com/office/drawing/2014/main" id="{EF0C9AD2-35DA-4C63-AE64-E7ADD496D969}"/>
+              </a:ext>
+            </a:extLst>
+          </p:cNvPr>
+          <p:cNvSpPr>
+            <a:spLocks xmlns:a="http://schemas.openxmlformats.org/drawingml/2006/main" noGrp="1"/>
+          </p:cNvSpPr>
+          <p:nvPr/>
+        </p:nvSpPr>
+        <p:spPr>
+          <a:xfrm xmlns:a="http://schemas.openxmlformats.org/drawingml/2006/main">
+            <a:off x="781050" y="2590800"/>
+            <a:ext cx="3028950" cy="304800"/>
+          </a:xfrm>
+          <a:prstGeom xmlns:a="http://schemas.openxmlformats.org/drawingml/2006/main" prst="rect">
+            <a:avLst/>
+          </a:prstGeom>
+          <a:noFill xmlns:a="http://schemas.openxmlformats.org/drawingml/2006/main"/>
+          <a:ln xmlns:a="http://schemas.openxmlformats.org/drawingml/2006/main" w="0">
+            <a:noFill/>
+            <a:prstDash val="solid"/>
+          </a:ln>
+        </p:spPr>
+        <p:txBody>
+          <a:bodyPr xmlns:a="http://schemas.openxmlformats.org/drawingml/2006/main"/>
+          <a:lstStyle xmlns:a="http://schemas.openxmlformats.org/drawingml/2006/main"/>
+          <a:p xmlns:a="http://schemas.openxmlformats.org/drawingml/2006/main">
+            <a:pPr>
+              <a:defRPr sz="1050">
+                <a:solidFill>
+                  <a:srgbClr val="CBD5E1"/>
+                </a:solidFill>
+              </a:defRPr>
+            </a:pPr>
+            <a:r>
+              <a:rPr sz="1050">
+                <a:solidFill>
+                  <a:srgbClr val="CBD5E1"/>
+                </a:solidFill>
+              </a:rPr>
+              <a:t>일본 서비스 범위와 콘텐츠 기준을 확정하고, 변경 요청은 영향도 검토 후 반영합니다.</a:t>
+            </a:r>
+          </a:p>
+        </p:txBody>
+      </p:sp>
+      <p:sp>
+        <p:nvSpPr>
+          <p:cNvPr id="14" name="gate-card-2">
+            <a:extLst xmlns:a="http://schemas.openxmlformats.org/drawingml/2006/main">
+              <a:ext uri="{FF2B5EF4-FFF2-40B4-BE49-F238E27FC236}">
+                <a16:creationId xmlns:a16="http://schemas.microsoft.com/office/drawing/2014/main" id="{3DE61C86-46EA-49A1-BE79-8C6EC96BDC57}"/>
+              </a:ext>
+            </a:extLst>
+          </p:cNvPr>
+          <p:cNvSpPr>
+            <a:spLocks xmlns:a="http://schemas.openxmlformats.org/drawingml/2006/main" noGrp="1"/>
+          </p:cNvSpPr>
+          <p:nvPr/>
+        </p:nvSpPr>
+        <p:spPr>
+          <a:xfrm xmlns:a="http://schemas.openxmlformats.org/drawingml/2006/main">
+            <a:off x="514350" y="3295650"/>
+            <a:ext cx="3714750" cy="933450"/>
+          </a:xfrm>
+          <a:prstGeom xmlns:a="http://schemas.openxmlformats.org/drawingml/2006/main" prst="roundRect">
+            <a:avLst>
+              <a:gd name="adj" fmla="val 8163"/>
+            </a:avLst>
+          </a:prstGeom>
+          <a:solidFill xmlns:a="http://schemas.openxmlformats.org/drawingml/2006/main">
+            <a:srgbClr val="111827"/>
+          </a:solidFill>
+          <a:ln xmlns:a="http://schemas.openxmlformats.org/drawingml/2006/main" w="9525">
+            <a:solidFill>
+              <a:srgbClr val="2F3B55"/>
+            </a:solidFill>
+            <a:prstDash val="solid"/>
+          </a:ln>
+        </p:spPr>
+      </p:sp>
+      <p:sp>
+        <p:nvSpPr>
+          <p:cNvPr id="15" name="gate-bar-2">
+            <a:extLst xmlns:a="http://schemas.openxmlformats.org/drawingml/2006/main">
+              <a:ext uri="{FF2B5EF4-FFF2-40B4-BE49-F238E27FC236}">
+                <a16:creationId xmlns:a16="http://schemas.microsoft.com/office/drawing/2014/main" id="{308BA253-CF53-40C9-B876-518D53FF1B0A}"/>
+              </a:ext>
+            </a:extLst>
+          </p:cNvPr>
+          <p:cNvSpPr>
+            <a:spLocks xmlns:a="http://schemas.openxmlformats.org/drawingml/2006/main" noGrp="1"/>
+          </p:cNvSpPr>
+          <p:nvPr/>
+        </p:nvSpPr>
+        <p:spPr>
+          <a:xfrm xmlns:a="http://schemas.openxmlformats.org/drawingml/2006/main">
+            <a:off x="514350" y="3295650"/>
+            <a:ext cx="66675" cy="933450"/>
+          </a:xfrm>
+          <a:prstGeom xmlns:a="http://schemas.openxmlformats.org/drawingml/2006/main" prst="rect">
+            <a:avLst/>
+          </a:prstGeom>
+          <a:solidFill xmlns:a="http://schemas.openxmlformats.org/drawingml/2006/main">
+            <a:srgbClr val="FF6B35"/>
+          </a:solidFill>
+          <a:ln xmlns:a="http://schemas.openxmlformats.org/drawingml/2006/main" w="0">
+            <a:solidFill>
+              <a:srgbClr val="FF6B35"/>
+            </a:solidFill>
+            <a:prstDash val="solid"/>
+          </a:ln>
+        </p:spPr>
+      </p:sp>
+      <p:sp>
+        <p:nvSpPr>
+          <p:cNvPr id="16" name="gate-phase-2">
+            <a:extLst xmlns:a="http://schemas.openxmlformats.org/drawingml/2006/main">
+              <a:ext uri="{FF2B5EF4-FFF2-40B4-BE49-F238E27FC236}">
+                <a16:creationId xmlns:a16="http://schemas.microsoft.com/office/drawing/2014/main" id="{CADFB0A6-10B6-4B08-9175-22D85E22B330}"/>
+              </a:ext>
+            </a:extLst>
+          </p:cNvPr>
+          <p:cNvSpPr>
+            <a:spLocks xmlns:a="http://schemas.openxmlformats.org/drawingml/2006/main" noGrp="1"/>
+          </p:cNvSpPr>
+          <p:nvPr/>
+        </p:nvSpPr>
+        <p:spPr>
+          <a:xfrm xmlns:a="http://schemas.openxmlformats.org/drawingml/2006/main">
+            <a:off x="781050" y="3448050"/>
+            <a:ext cx="800100" cy="228600"/>
+          </a:xfrm>
+          <a:prstGeom xmlns:a="http://schemas.openxmlformats.org/drawingml/2006/main" prst="rect">
+            <a:avLst/>
+          </a:prstGeom>
+          <a:noFill xmlns:a="http://schemas.openxmlformats.org/drawingml/2006/main"/>
+          <a:ln xmlns:a="http://schemas.openxmlformats.org/drawingml/2006/main" w="0">
+            <a:noFill/>
+            <a:prstDash val="solid"/>
+          </a:ln>
+        </p:spPr>
+        <p:txBody>
+          <a:bodyPr xmlns:a="http://schemas.openxmlformats.org/drawingml/2006/main"/>
+          <a:lstStyle xmlns:a="http://schemas.openxmlformats.org/drawingml/2006/main"/>
+          <a:p xmlns:a="http://schemas.openxmlformats.org/drawingml/2006/main">
+            <a:pPr>
+              <a:defRPr sz="1200" b="1">
+                <a:solidFill>
+                  <a:srgbClr val="FF6B35"/>
+                </a:solidFill>
+              </a:defRPr>
+            </a:pPr>
+            <a:r>
+              <a:rPr sz="1200" b="1">
+                <a:solidFill>
+                  <a:srgbClr val="FF6B35"/>
+                </a:solidFill>
+              </a:rPr>
+              <a:t>Gate 2</a:t>
+            </a:r>
+          </a:p>
+        </p:txBody>
+      </p:sp>
+      <p:sp>
+        <p:nvSpPr>
+          <p:cNvPr id="17" name="gate-title-2">
+            <a:extLst xmlns:a="http://schemas.openxmlformats.org/drawingml/2006/main">
+              <a:ext uri="{FF2B5EF4-FFF2-40B4-BE49-F238E27FC236}">
+                <a16:creationId xmlns:a16="http://schemas.microsoft.com/office/drawing/2014/main" id="{7227540E-5488-441E-8B8D-D2D4E3BD7DF6}"/>
+              </a:ext>
+            </a:extLst>
+          </p:cNvPr>
+          <p:cNvSpPr>
+            <a:spLocks xmlns:a="http://schemas.openxmlformats.org/drawingml/2006/main" noGrp="1"/>
+          </p:cNvSpPr>
+          <p:nvPr/>
+        </p:nvSpPr>
+        <p:spPr>
+          <a:xfrm xmlns:a="http://schemas.openxmlformats.org/drawingml/2006/main">
+            <a:off x="1619250" y="3438525"/>
+            <a:ext cx="2190750" cy="247650"/>
+          </a:xfrm>
+          <a:prstGeom xmlns:a="http://schemas.openxmlformats.org/drawingml/2006/main" prst="rect">
+            <a:avLst/>
+          </a:prstGeom>
+          <a:noFill xmlns:a="http://schemas.openxmlformats.org/drawingml/2006/main"/>
+          <a:ln xmlns:a="http://schemas.openxmlformats.org/drawingml/2006/main" w="0">
+            <a:noFill/>
+            <a:prstDash val="solid"/>
+          </a:ln>
+        </p:spPr>
+        <p:txBody>
+          <a:bodyPr xmlns:a="http://schemas.openxmlformats.org/drawingml/2006/main"/>
+          <a:lstStyle xmlns:a="http://schemas.openxmlformats.org/drawingml/2006/main"/>
+          <a:p xmlns:a="http://schemas.openxmlformats.org/drawingml/2006/main">
+            <a:pPr>
+              <a:defRPr sz="1425" b="1">
+                <a:solidFill>
+                  <a:srgbClr val="FFFFFF"/>
+                </a:solidFill>
+              </a:defRPr>
+            </a:pPr>
+            <a:r>
+              <a:rPr sz="1425" b="1">
+                <a:solidFill>
+                  <a:srgbClr val="FFFFFF"/>
+                </a:solidFill>
+              </a:rPr>
+              <a:t>검수 진입</a:t>
+            </a:r>
+          </a:p>
+        </p:txBody>
+      </p:sp>
+      <p:sp>
+        <p:nvSpPr>
+          <p:cNvPr id="18" name="gate-body-2">
+            <a:extLst xmlns:a="http://schemas.openxmlformats.org/drawingml/2006/main">
+              <a:ext uri="{FF2B5EF4-FFF2-40B4-BE49-F238E27FC236}">
+                <a16:creationId xmlns:a16="http://schemas.microsoft.com/office/drawing/2014/main" id="{4F9E845A-59D7-49F2-BEDB-FE5B7E20BF67}"/>
+              </a:ext>
+            </a:extLst>
+          </p:cNvPr>
+          <p:cNvSpPr>
+            <a:spLocks xmlns:a="http://schemas.openxmlformats.org/drawingml/2006/main" noGrp="1"/>
+          </p:cNvSpPr>
+          <p:nvPr/>
+        </p:nvSpPr>
+        <p:spPr>
+          <a:xfrm xmlns:a="http://schemas.openxmlformats.org/drawingml/2006/main">
+            <a:off x="781050" y="3790950"/>
+            <a:ext cx="3028950" cy="304800"/>
+          </a:xfrm>
+          <a:prstGeom xmlns:a="http://schemas.openxmlformats.org/drawingml/2006/main" prst="rect">
+            <a:avLst/>
+          </a:prstGeom>
+          <a:noFill xmlns:a="http://schemas.openxmlformats.org/drawingml/2006/main"/>
+          <a:ln xmlns:a="http://schemas.openxmlformats.org/drawingml/2006/main" w="0">
+            <a:noFill/>
+            <a:prstDash val="solid"/>
+          </a:ln>
+        </p:spPr>
+        <p:txBody>
+          <a:bodyPr xmlns:a="http://schemas.openxmlformats.org/drawingml/2006/main"/>
+          <a:lstStyle xmlns:a="http://schemas.openxmlformats.org/drawingml/2006/main"/>
+          <a:p xmlns:a="http://schemas.openxmlformats.org/drawingml/2006/main">
+            <a:pPr>
+              <a:defRPr sz="1050">
+                <a:solidFill>
+                  <a:srgbClr val="CBD5E1"/>
+                </a:solidFill>
+              </a:defRPr>
+            </a:pPr>
+            <a:r>
+              <a:rPr sz="1050">
+                <a:solidFill>
+                  <a:srgbClr val="CBD5E1"/>
+                </a:solidFill>
+              </a:rPr>
+              <a:t>현지화 리소스와 주요 기능 반영 상태를 확인한 뒤 내부 QA와 퍼블리셔 검수에 진입합니다.</a:t>
+            </a:r>
+          </a:p>
+        </p:txBody>
+      </p:sp>
+      <p:sp>
+        <p:nvSpPr>
+          <p:cNvPr id="19" name="gate-card-3">
+            <a:extLst xmlns:a="http://schemas.openxmlformats.org/drawingml/2006/main">
+              <a:ext uri="{FF2B5EF4-FFF2-40B4-BE49-F238E27FC236}">
+                <a16:creationId xmlns:a16="http://schemas.microsoft.com/office/drawing/2014/main" id="{A5A89A7E-5FCA-41DC-9187-1D00D84EEB4D}"/>
+              </a:ext>
+            </a:extLst>
+          </p:cNvPr>
+          <p:cNvSpPr>
+            <a:spLocks xmlns:a="http://schemas.openxmlformats.org/drawingml/2006/main" noGrp="1"/>
+          </p:cNvSpPr>
+          <p:nvPr/>
+        </p:nvSpPr>
+        <p:spPr>
+          <a:xfrm xmlns:a="http://schemas.openxmlformats.org/drawingml/2006/main">
+            <a:off x="514350" y="4495800"/>
+            <a:ext cx="3714750" cy="933450"/>
+          </a:xfrm>
+          <a:prstGeom xmlns:a="http://schemas.openxmlformats.org/drawingml/2006/main" prst="roundRect">
+            <a:avLst>
+              <a:gd name="adj" fmla="val 8163"/>
+            </a:avLst>
+          </a:prstGeom>
+          <a:solidFill xmlns:a="http://schemas.openxmlformats.org/drawingml/2006/main">
+            <a:srgbClr val="111827"/>
+          </a:solidFill>
+          <a:ln xmlns:a="http://schemas.openxmlformats.org/drawingml/2006/main" w="9525">
+            <a:solidFill>
+              <a:srgbClr val="2F3B55"/>
+            </a:solidFill>
+            <a:prstDash val="solid"/>
+          </a:ln>
+        </p:spPr>
+      </p:sp>
+      <p:sp>
+        <p:nvSpPr>
+          <p:cNvPr id="20" name="gate-bar-3">
+            <a:extLst xmlns:a="http://schemas.openxmlformats.org/drawingml/2006/main">
+              <a:ext uri="{FF2B5EF4-FFF2-40B4-BE49-F238E27FC236}">
+                <a16:creationId xmlns:a16="http://schemas.microsoft.com/office/drawing/2014/main" id="{E1475169-C584-4153-9783-4EB14A53593B}"/>
+              </a:ext>
+            </a:extLst>
+          </p:cNvPr>
+          <p:cNvSpPr>
+            <a:spLocks xmlns:a="http://schemas.openxmlformats.org/drawingml/2006/main" noGrp="1"/>
+          </p:cNvSpPr>
+          <p:nvPr/>
+        </p:nvSpPr>
+        <p:spPr>
+          <a:xfrm xmlns:a="http://schemas.openxmlformats.org/drawingml/2006/main">
+            <a:off x="514350" y="4495800"/>
+            <a:ext cx="66675" cy="933450"/>
+          </a:xfrm>
+          <a:prstGeom xmlns:a="http://schemas.openxmlformats.org/drawingml/2006/main" prst="rect">
+            <a:avLst/>
+          </a:prstGeom>
+          <a:solidFill xmlns:a="http://schemas.openxmlformats.org/drawingml/2006/main">
+            <a:srgbClr val="7C3AED"/>
+          </a:solidFill>
+          <a:ln xmlns:a="http://schemas.openxmlformats.org/drawingml/2006/main" w="0">
+            <a:solidFill>
+              <a:srgbClr val="7C3AED"/>
+            </a:solidFill>
+            <a:prstDash val="solid"/>
+          </a:ln>
+        </p:spPr>
+      </p:sp>
+      <p:sp>
+        <p:nvSpPr>
+          <p:cNvPr id="21" name="gate-phase-3">
+            <a:extLst xmlns:a="http://schemas.openxmlformats.org/drawingml/2006/main">
+              <a:ext uri="{FF2B5EF4-FFF2-40B4-BE49-F238E27FC236}">
+                <a16:creationId xmlns:a16="http://schemas.microsoft.com/office/drawing/2014/main" id="{BBFD7033-5848-4B76-B68F-AB55B36F5916}"/>
+              </a:ext>
+            </a:extLst>
+          </p:cNvPr>
+          <p:cNvSpPr>
+            <a:spLocks xmlns:a="http://schemas.openxmlformats.org/drawingml/2006/main" noGrp="1"/>
+          </p:cNvSpPr>
+          <p:nvPr/>
+        </p:nvSpPr>
+        <p:spPr>
+          <a:xfrm xmlns:a="http://schemas.openxmlformats.org/drawingml/2006/main">
+            <a:off x="781050" y="4648200"/>
+            <a:ext cx="800100" cy="228600"/>
+          </a:xfrm>
+          <a:prstGeom xmlns:a="http://schemas.openxmlformats.org/drawingml/2006/main" prst="rect">
+            <a:avLst/>
+          </a:prstGeom>
+          <a:noFill xmlns:a="http://schemas.openxmlformats.org/drawingml/2006/main"/>
+          <a:ln xmlns:a="http://schemas.openxmlformats.org/drawingml/2006/main" w="0">
+            <a:noFill/>
+            <a:prstDash val="solid"/>
+          </a:ln>
+        </p:spPr>
+        <p:txBody>
+          <a:bodyPr xmlns:a="http://schemas.openxmlformats.org/drawingml/2006/main"/>
+          <a:lstStyle xmlns:a="http://schemas.openxmlformats.org/drawingml/2006/main"/>
+          <a:p xmlns:a="http://schemas.openxmlformats.org/drawingml/2006/main">
+            <a:pPr>
+              <a:defRPr sz="1200" b="1">
+                <a:solidFill>
+                  <a:srgbClr val="7C3AED"/>
+                </a:solidFill>
+              </a:defRPr>
+            </a:pPr>
+            <a:r>
+              <a:rPr sz="1200" b="1">
+                <a:solidFill>
+                  <a:srgbClr val="7C3AED"/>
+                </a:solidFill>
+              </a:rPr>
+              <a:t>Gate 3</a:t>
+            </a:r>
+          </a:p>
+        </p:txBody>
+      </p:sp>
+      <p:sp>
+        <p:nvSpPr>
+          <p:cNvPr id="22" name="gate-title-3">
+            <a:extLst xmlns:a="http://schemas.openxmlformats.org/drawingml/2006/main">
+              <a:ext uri="{FF2B5EF4-FFF2-40B4-BE49-F238E27FC236}">
+                <a16:creationId xmlns:a16="http://schemas.microsoft.com/office/drawing/2014/main" id="{F6027F08-AAD3-4A8F-9909-9F83CA3EF5D2}"/>
+              </a:ext>
+            </a:extLst>
+          </p:cNvPr>
+          <p:cNvSpPr>
+            <a:spLocks xmlns:a="http://schemas.openxmlformats.org/drawingml/2006/main" noGrp="1"/>
+          </p:cNvSpPr>
+          <p:nvPr/>
+        </p:nvSpPr>
+        <p:spPr>
+          <a:xfrm xmlns:a="http://schemas.openxmlformats.org/drawingml/2006/main">
+            <a:off x="1619250" y="4638675"/>
+            <a:ext cx="2190750" cy="247650"/>
+          </a:xfrm>
+          <a:prstGeom xmlns:a="http://schemas.openxmlformats.org/drawingml/2006/main" prst="rect">
+            <a:avLst/>
+          </a:prstGeom>
+          <a:noFill xmlns:a="http://schemas.openxmlformats.org/drawingml/2006/main"/>
+          <a:ln xmlns:a="http://schemas.openxmlformats.org/drawingml/2006/main" w="0">
+            <a:noFill/>
+            <a:prstDash val="solid"/>
+          </a:ln>
+        </p:spPr>
+        <p:txBody>
+          <a:bodyPr xmlns:a="http://schemas.openxmlformats.org/drawingml/2006/main"/>
+          <a:lstStyle xmlns:a="http://schemas.openxmlformats.org/drawingml/2006/main"/>
+          <a:p xmlns:a="http://schemas.openxmlformats.org/drawingml/2006/main">
+            <a:pPr>
+              <a:defRPr sz="1425" b="1">
+                <a:solidFill>
+                  <a:srgbClr val="FFFFFF"/>
+                </a:solidFill>
+              </a:defRPr>
+            </a:pPr>
+            <a:r>
+              <a:rPr sz="1425" b="1">
+                <a:solidFill>
+                  <a:srgbClr val="FFFFFF"/>
+                </a:solidFill>
+              </a:rPr>
+              <a:t>런칭 후보</a:t>
+            </a:r>
+          </a:p>
+        </p:txBody>
+      </p:sp>
+      <p:sp>
+        <p:nvSpPr>
+          <p:cNvPr id="23" name="gate-body-3">
+            <a:extLst xmlns:a="http://schemas.openxmlformats.org/drawingml/2006/main">
+              <a:ext uri="{FF2B5EF4-FFF2-40B4-BE49-F238E27FC236}">
+                <a16:creationId xmlns:a16="http://schemas.microsoft.com/office/drawing/2014/main" id="{A7C0D76F-0114-47D7-8A81-9F83B6DE3C4B}"/>
+              </a:ext>
+            </a:extLst>
+          </p:cNvPr>
+          <p:cNvSpPr>
+            <a:spLocks xmlns:a="http://schemas.openxmlformats.org/drawingml/2006/main" noGrp="1"/>
+          </p:cNvSpPr>
+          <p:nvPr/>
+        </p:nvSpPr>
+        <p:spPr>
+          <a:xfrm xmlns:a="http://schemas.openxmlformats.org/drawingml/2006/main">
+            <a:off x="781050" y="4991100"/>
+            <a:ext cx="3028950" cy="304800"/>
+          </a:xfrm>
+          <a:prstGeom xmlns:a="http://schemas.openxmlformats.org/drawingml/2006/main" prst="rect">
+            <a:avLst/>
+          </a:prstGeom>
+          <a:noFill xmlns:a="http://schemas.openxmlformats.org/drawingml/2006/main"/>
+          <a:ln xmlns:a="http://schemas.openxmlformats.org/drawingml/2006/main" w="0">
+            <a:noFill/>
+            <a:prstDash val="solid"/>
+          </a:ln>
+        </p:spPr>
+        <p:txBody>
+          <a:bodyPr xmlns:a="http://schemas.openxmlformats.org/drawingml/2006/main"/>
+          <a:lstStyle xmlns:a="http://schemas.openxmlformats.org/drawingml/2006/main"/>
+          <a:p xmlns:a="http://schemas.openxmlformats.org/drawingml/2006/main">
+            <a:pPr>
+              <a:defRPr sz="1050">
+                <a:solidFill>
+                  <a:srgbClr val="CBD5E1"/>
+                </a:solidFill>
+              </a:defRPr>
+            </a:pPr>
+            <a:r>
+              <a:rPr sz="1050">
+                <a:solidFill>
+                  <a:srgbClr val="CBD5E1"/>
+                </a:solidFill>
+              </a:rPr>
+              <a:t>치명 이슈와 잔여 리스크를 분리하고, 배포 가능한 후보 빌드 기준을 고정합니다.</a:t>
+            </a:r>
+          </a:p>
+        </p:txBody>
+      </p:sp>
+      <p:sp>
+        <p:nvSpPr>
+          <p:cNvPr id="24" name="decision-title">
+            <a:extLst xmlns:a="http://schemas.openxmlformats.org/drawingml/2006/main">
+              <a:ext uri="{FF2B5EF4-FFF2-40B4-BE49-F238E27FC236}">
+                <a16:creationId xmlns:a16="http://schemas.microsoft.com/office/drawing/2014/main" id="{6D530ED2-89A2-475C-8FDB-9DB6A9222A9A}"/>
+              </a:ext>
+            </a:extLst>
+          </p:cNvPr>
+          <p:cNvSpPr>
+            <a:spLocks xmlns:a="http://schemas.openxmlformats.org/drawingml/2006/main" noGrp="1"/>
+          </p:cNvSpPr>
+          <p:nvPr/>
+        </p:nvSpPr>
+        <p:spPr>
+          <a:xfrm xmlns:a="http://schemas.openxmlformats.org/drawingml/2006/main">
+            <a:off x="4686300" y="1752600"/>
+            <a:ext cx="2286000" cy="285750"/>
+          </a:xfrm>
+          <a:prstGeom xmlns:a="http://schemas.openxmlformats.org/drawingml/2006/main" prst="rect">
+            <a:avLst/>
+          </a:prstGeom>
+          <a:noFill xmlns:a="http://schemas.openxmlformats.org/drawingml/2006/main"/>
+          <a:ln xmlns:a="http://schemas.openxmlformats.org/drawingml/2006/main" w="0">
+            <a:noFill/>
+            <a:prstDash val="solid"/>
+          </a:ln>
+        </p:spPr>
+        <p:txBody>
+          <a:bodyPr xmlns:a="http://schemas.openxmlformats.org/drawingml/2006/main"/>
+          <a:lstStyle xmlns:a="http://schemas.openxmlformats.org/drawingml/2006/main"/>
+          <a:p xmlns:a="http://schemas.openxmlformats.org/drawingml/2006/main">
+            <a:pPr>
+              <a:defRPr sz="1650" b="1">
+                <a:solidFill>
+                  <a:srgbClr val="FFFFFF"/>
+                </a:solidFill>
+              </a:defRPr>
+            </a:pPr>
+            <a:r>
+              <a:rPr sz="1650" b="1">
+                <a:solidFill>
+                  <a:srgbClr val="FFFFFF"/>
+                </a:solidFill>
+              </a:rPr>
+              <a:t>판정 체크리스트</a:t>
+            </a:r>
+          </a:p>
+        </p:txBody>
+      </p:sp>
+      <p:sp>
+        <p:nvSpPr>
+          <p:cNvPr id="25" name="decision-note">
+            <a:extLst xmlns:a="http://schemas.openxmlformats.org/drawingml/2006/main">
+              <a:ext uri="{FF2B5EF4-FFF2-40B4-BE49-F238E27FC236}">
+                <a16:creationId xmlns:a16="http://schemas.microsoft.com/office/drawing/2014/main" id="{39536B98-6D8E-4AE8-B165-087F2FB13BC8}"/>
+              </a:ext>
+            </a:extLst>
+          </p:cNvPr>
+          <p:cNvSpPr>
+            <a:spLocks xmlns:a="http://schemas.openxmlformats.org/drawingml/2006/main" noGrp="1"/>
+          </p:cNvSpPr>
+          <p:nvPr/>
+        </p:nvSpPr>
+        <p:spPr>
+          <a:xfrm xmlns:a="http://schemas.openxmlformats.org/drawingml/2006/main">
+            <a:off x="6896100" y="1809750"/>
+            <a:ext cx="4095750" cy="209550"/>
+          </a:xfrm>
+          <a:prstGeom xmlns:a="http://schemas.openxmlformats.org/drawingml/2006/main" prst="rect">
+            <a:avLst/>
+          </a:prstGeom>
+          <a:noFill xmlns:a="http://schemas.openxmlformats.org/drawingml/2006/main"/>
+          <a:ln xmlns:a="http://schemas.openxmlformats.org/drawingml/2006/main" w="0">
+            <a:noFill/>
+            <a:prstDash val="solid"/>
+          </a:ln>
+        </p:spPr>
+        <p:txBody>
+          <a:bodyPr xmlns:a="http://schemas.openxmlformats.org/drawingml/2006/main"/>
+          <a:lstStyle xmlns:a="http://schemas.openxmlformats.org/drawingml/2006/main"/>
+          <a:p xmlns:a="http://schemas.openxmlformats.org/drawingml/2006/main">
+            <a:pPr>
+              <a:defRPr sz="1050">
+                <a:solidFill>
+                  <a:srgbClr val="94A3B8"/>
+                </a:solidFill>
+              </a:defRPr>
+            </a:pPr>
+            <a:r>
+              <a:rPr sz="1050">
+                <a:solidFill>
+                  <a:srgbClr val="94A3B8"/>
+                </a:solidFill>
+              </a:rPr>
+              <a:t>각 항목은 완료 여부보다 다음 단계 진입 가능성을 기준으로 판단합니다.</a:t>
+            </a:r>
+          </a:p>
+        </p:txBody>
+      </p:sp>
+      <p:sp>
+        <p:nvSpPr>
+          <p:cNvPr id="26" name="decision-header">
+            <a:extLst xmlns:a="http://schemas.openxmlformats.org/drawingml/2006/main">
+              <a:ext uri="{FF2B5EF4-FFF2-40B4-BE49-F238E27FC236}">
+                <a16:creationId xmlns:a16="http://schemas.microsoft.com/office/drawing/2014/main" id="{41D2B7DA-1D40-4D79-8371-8EAD20001EFB}"/>
+              </a:ext>
+            </a:extLst>
+          </p:cNvPr>
+          <p:cNvSpPr>
+            <a:spLocks xmlns:a="http://schemas.openxmlformats.org/drawingml/2006/main" noGrp="1"/>
+          </p:cNvSpPr>
+          <p:nvPr/>
+        </p:nvSpPr>
+        <p:spPr>
+          <a:xfrm xmlns:a="http://schemas.openxmlformats.org/drawingml/2006/main">
+            <a:off x="4686300" y="2133600"/>
+            <a:ext cx="6705600" cy="323850"/>
+          </a:xfrm>
+          <a:prstGeom xmlns:a="http://schemas.openxmlformats.org/drawingml/2006/main" prst="rect">
+            <a:avLst/>
+          </a:prstGeom>
+          <a:solidFill xmlns:a="http://schemas.openxmlformats.org/drawingml/2006/main">
+            <a:srgbClr val="00B8D9"/>
+          </a:solidFill>
+          <a:ln xmlns:a="http://schemas.openxmlformats.org/drawingml/2006/main" w="0">
+            <a:solidFill>
+              <a:srgbClr val="00B8D9"/>
+            </a:solidFill>
+            <a:prstDash val="solid"/>
+          </a:ln>
+        </p:spPr>
+      </p:sp>
+      <p:sp>
+        <p:nvSpPr>
+          <p:cNvPr id="27" name="decision-th-1">
+            <a:extLst xmlns:a="http://schemas.openxmlformats.org/drawingml/2006/main">
+              <a:ext uri="{FF2B5EF4-FFF2-40B4-BE49-F238E27FC236}">
+                <a16:creationId xmlns:a16="http://schemas.microsoft.com/office/drawing/2014/main" id="{5CE88542-8D22-4C90-B2B6-4E7E14F4B53E}"/>
+              </a:ext>
+            </a:extLst>
+          </p:cNvPr>
+          <p:cNvSpPr>
+            <a:spLocks xmlns:a="http://schemas.openxmlformats.org/drawingml/2006/main" noGrp="1"/>
+          </p:cNvSpPr>
+          <p:nvPr/>
+        </p:nvSpPr>
+        <p:spPr>
+          <a:xfrm xmlns:a="http://schemas.openxmlformats.org/drawingml/2006/main">
+            <a:off x="4933950" y="2209800"/>
+            <a:ext cx="1143000" cy="190500"/>
+          </a:xfrm>
+          <a:prstGeom xmlns:a="http://schemas.openxmlformats.org/drawingml/2006/main" prst="rect">
+            <a:avLst/>
+          </a:prstGeom>
+          <a:noFill xmlns:a="http://schemas.openxmlformats.org/drawingml/2006/main"/>
+          <a:ln xmlns:a="http://schemas.openxmlformats.org/drawingml/2006/main" w="0">
+            <a:noFill/>
+            <a:prstDash val="solid"/>
+          </a:ln>
+        </p:spPr>
+        <p:txBody>
+          <a:bodyPr xmlns:a="http://schemas.openxmlformats.org/drawingml/2006/main"/>
+          <a:lstStyle xmlns:a="http://schemas.openxmlformats.org/drawingml/2006/main"/>
+          <a:p xmlns:a="http://schemas.openxmlformats.org/drawingml/2006/main">
+            <a:pPr>
+              <a:defRPr sz="1050" b="1">
+                <a:solidFill>
+                  <a:srgbClr val="06111F"/>
+                </a:solidFill>
+              </a:defRPr>
+            </a:pPr>
+            <a:r>
+              <a:rPr sz="1050" b="1">
+                <a:solidFill>
+                  <a:srgbClr val="06111F"/>
+                </a:solidFill>
+              </a:rPr>
+              <a:t>항목</a:t>
+            </a:r>
+          </a:p>
+        </p:txBody>
+      </p:sp>
+      <p:sp>
+        <p:nvSpPr>
+          <p:cNvPr id="28" name="decision-th-2">
+            <a:extLst xmlns:a="http://schemas.openxmlformats.org/drawingml/2006/main">
+              <a:ext uri="{FF2B5EF4-FFF2-40B4-BE49-F238E27FC236}">
+                <a16:creationId xmlns:a16="http://schemas.microsoft.com/office/drawing/2014/main" id="{76B20F2D-CE05-4AFA-B6CD-C63C544C76A1}"/>
+              </a:ext>
+            </a:extLst>
+          </p:cNvPr>
+          <p:cNvSpPr>
+            <a:spLocks xmlns:a="http://schemas.openxmlformats.org/drawingml/2006/main" noGrp="1"/>
+          </p:cNvSpPr>
+          <p:nvPr/>
+        </p:nvSpPr>
+        <p:spPr>
+          <a:xfrm xmlns:a="http://schemas.openxmlformats.org/drawingml/2006/main">
+            <a:off x="6934200" y="2209800"/>
+            <a:ext cx="1714500" cy="190500"/>
+          </a:xfrm>
+          <a:prstGeom xmlns:a="http://schemas.openxmlformats.org/drawingml/2006/main" prst="rect">
+            <a:avLst/>
+          </a:prstGeom>
+          <a:noFill xmlns:a="http://schemas.openxmlformats.org/drawingml/2006/main"/>
+          <a:ln xmlns:a="http://schemas.openxmlformats.org/drawingml/2006/main" w="0">
+            <a:noFill/>
+            <a:prstDash val="solid"/>
+          </a:ln>
+        </p:spPr>
+        <p:txBody>
+          <a:bodyPr xmlns:a="http://schemas.openxmlformats.org/drawingml/2006/main"/>
+          <a:lstStyle xmlns:a="http://schemas.openxmlformats.org/drawingml/2006/main"/>
+          <a:p xmlns:a="http://schemas.openxmlformats.org/drawingml/2006/main">
+            <a:pPr>
+              <a:defRPr sz="1050" b="1">
+                <a:solidFill>
+                  <a:srgbClr val="06111F"/>
+                </a:solidFill>
+              </a:defRPr>
+            </a:pPr>
+            <a:r>
+              <a:rPr sz="1050" b="1">
+                <a:solidFill>
+                  <a:srgbClr val="06111F"/>
+                </a:solidFill>
+              </a:rPr>
+              <a:t>통과 기준</a:t>
+            </a:r>
+          </a:p>
+        </p:txBody>
+      </p:sp>
+      <p:sp>
+        <p:nvSpPr>
+          <p:cNvPr id="29" name="decision-th-3">
+            <a:extLst xmlns:a="http://schemas.openxmlformats.org/drawingml/2006/main">
+              <a:ext uri="{FF2B5EF4-FFF2-40B4-BE49-F238E27FC236}">
+                <a16:creationId xmlns:a16="http://schemas.microsoft.com/office/drawing/2014/main" id="{C86BD559-5D48-4873-A243-398D5833D104}"/>
+              </a:ext>
+            </a:extLst>
+          </p:cNvPr>
+          <p:cNvSpPr>
+            <a:spLocks xmlns:a="http://schemas.openxmlformats.org/drawingml/2006/main" noGrp="1"/>
+          </p:cNvSpPr>
+          <p:nvPr/>
+        </p:nvSpPr>
+        <p:spPr>
+          <a:xfrm xmlns:a="http://schemas.openxmlformats.org/drawingml/2006/main">
+            <a:off x="10096500" y="2209800"/>
+            <a:ext cx="762000" cy="190500"/>
+          </a:xfrm>
+          <a:prstGeom xmlns:a="http://schemas.openxmlformats.org/drawingml/2006/main" prst="rect">
+            <a:avLst/>
+          </a:prstGeom>
+          <a:noFill xmlns:a="http://schemas.openxmlformats.org/drawingml/2006/main"/>
+          <a:ln xmlns:a="http://schemas.openxmlformats.org/drawingml/2006/main" w="0">
+            <a:noFill/>
+            <a:prstDash val="solid"/>
+          </a:ln>
+        </p:spPr>
+        <p:txBody>
+          <a:bodyPr xmlns:a="http://schemas.openxmlformats.org/drawingml/2006/main"/>
+          <a:lstStyle xmlns:a="http://schemas.openxmlformats.org/drawingml/2006/main"/>
+          <a:p xmlns:a="http://schemas.openxmlformats.org/drawingml/2006/main">
+            <a:pPr algn="ctr">
+              <a:defRPr sz="1050" b="1">
+                <a:solidFill>
+                  <a:srgbClr val="06111F"/>
+                </a:solidFill>
+              </a:defRPr>
+            </a:pPr>
+            <a:r>
+              <a:rPr sz="1050" b="1">
+                <a:solidFill>
+                  <a:srgbClr val="06111F"/>
+                </a:solidFill>
+              </a:rPr>
+              <a:t>주관</a:t>
+            </a:r>
+          </a:p>
+        </p:txBody>
+      </p:sp>
+      <p:sp>
+        <p:nvSpPr>
+          <p:cNvPr id="30" name="decision-row-1">
+            <a:extLst xmlns:a="http://schemas.openxmlformats.org/drawingml/2006/main">
+              <a:ext uri="{FF2B5EF4-FFF2-40B4-BE49-F238E27FC236}">
+                <a16:creationId xmlns:a16="http://schemas.microsoft.com/office/drawing/2014/main" id="{F8AE3080-F1FF-4475-9C7D-CC5961266049}"/>
+              </a:ext>
+            </a:extLst>
+          </p:cNvPr>
+          <p:cNvSpPr>
+            <a:spLocks xmlns:a="http://schemas.openxmlformats.org/drawingml/2006/main" noGrp="1"/>
+          </p:cNvSpPr>
+          <p:nvPr/>
+        </p:nvSpPr>
+        <p:spPr>
+          <a:xfrm xmlns:a="http://schemas.openxmlformats.org/drawingml/2006/main">
+            <a:off x="4686300" y="2457450"/>
+            <a:ext cx="6705600" cy="552450"/>
+          </a:xfrm>
+          <a:prstGeom xmlns:a="http://schemas.openxmlformats.org/drawingml/2006/main" prst="rect">
+            <a:avLst/>
+          </a:prstGeom>
+          <a:solidFill xmlns:a="http://schemas.openxmlformats.org/drawingml/2006/main">
+            <a:srgbClr val="151F34"/>
+          </a:solidFill>
+          <a:ln xmlns:a="http://schemas.openxmlformats.org/drawingml/2006/main" w="9525">
+            <a:solidFill>
+              <a:srgbClr val="2F3B55"/>
+            </a:solidFill>
+            <a:prstDash val="solid"/>
+          </a:ln>
+        </p:spPr>
+      </p:sp>
+      <p:sp>
+        <p:nvSpPr>
+          <p:cNvPr id="31" name="decision-item-1">
+            <a:extLst xmlns:a="http://schemas.openxmlformats.org/drawingml/2006/main">
+              <a:ext uri="{FF2B5EF4-FFF2-40B4-BE49-F238E27FC236}">
+                <a16:creationId xmlns:a16="http://schemas.microsoft.com/office/drawing/2014/main" id="{93AF291A-E5D6-4568-B24F-32EE68EDC51D}"/>
+              </a:ext>
+            </a:extLst>
+          </p:cNvPr>
+          <p:cNvSpPr>
+            <a:spLocks xmlns:a="http://schemas.openxmlformats.org/drawingml/2006/main" noGrp="1"/>
+          </p:cNvSpPr>
+          <p:nvPr/>
+        </p:nvSpPr>
+        <p:spPr>
+          <a:xfrm xmlns:a="http://schemas.openxmlformats.org/drawingml/2006/main">
+            <a:off x="4933950" y="2619375"/>
+            <a:ext cx="1809750" cy="228600"/>
+          </a:xfrm>
+          <a:prstGeom xmlns:a="http://schemas.openxmlformats.org/drawingml/2006/main" prst="rect">
+            <a:avLst/>
+          </a:prstGeom>
+          <a:noFill xmlns:a="http://schemas.openxmlformats.org/drawingml/2006/main"/>
+          <a:ln xmlns:a="http://schemas.openxmlformats.org/drawingml/2006/main" w="0">
+            <a:noFill/>
+            <a:prstDash val="solid"/>
+          </a:ln>
+        </p:spPr>
+        <p:txBody>
+          <a:bodyPr xmlns:a="http://schemas.openxmlformats.org/drawingml/2006/main"/>
+          <a:lstStyle xmlns:a="http://schemas.openxmlformats.org/drawingml/2006/main"/>
+          <a:p xmlns:a="http://schemas.openxmlformats.org/drawingml/2006/main">
+            <a:pPr>
+              <a:defRPr sz="1125" b="1">
+                <a:solidFill>
+                  <a:srgbClr val="00B8D9"/>
+                </a:solidFill>
+              </a:defRPr>
+            </a:pPr>
+            <a:r>
+              <a:rPr sz="1125" b="1">
+                <a:solidFill>
+                  <a:srgbClr val="00B8D9"/>
+                </a:solidFill>
+              </a:rPr>
+              <a:t>서비스 범위</a:t>
+            </a:r>
+          </a:p>
+        </p:txBody>
+      </p:sp>
+      <p:sp>
+        <p:nvSpPr>
+          <p:cNvPr id="32" name="decision-gate-1">
+            <a:extLst xmlns:a="http://schemas.openxmlformats.org/drawingml/2006/main">
+              <a:ext uri="{FF2B5EF4-FFF2-40B4-BE49-F238E27FC236}">
+                <a16:creationId xmlns:a16="http://schemas.microsoft.com/office/drawing/2014/main" id="{F0A265BB-77A5-4636-AE83-9CC6FF767A5F}"/>
+              </a:ext>
+            </a:extLst>
+          </p:cNvPr>
+          <p:cNvSpPr>
+            <a:spLocks xmlns:a="http://schemas.openxmlformats.org/drawingml/2006/main" noGrp="1"/>
+          </p:cNvSpPr>
+          <p:nvPr/>
+        </p:nvSpPr>
+        <p:spPr>
+          <a:xfrm xmlns:a="http://schemas.openxmlformats.org/drawingml/2006/main">
+            <a:off x="6934200" y="2581275"/>
+            <a:ext cx="2857500" cy="285750"/>
+          </a:xfrm>
+          <a:prstGeom xmlns:a="http://schemas.openxmlformats.org/drawingml/2006/main" prst="rect">
+            <a:avLst/>
+          </a:prstGeom>
+          <a:noFill xmlns:a="http://schemas.openxmlformats.org/drawingml/2006/main"/>
+          <a:ln xmlns:a="http://schemas.openxmlformats.org/drawingml/2006/main" w="0">
+            <a:noFill/>
+            <a:prstDash val="solid"/>
+          </a:ln>
+        </p:spPr>
+        <p:txBody>
+          <a:bodyPr xmlns:a="http://schemas.openxmlformats.org/drawingml/2006/main"/>
+          <a:lstStyle xmlns:a="http://schemas.openxmlformats.org/drawingml/2006/main"/>
+          <a:p xmlns:a="http://schemas.openxmlformats.org/drawingml/2006/main">
+            <a:pPr>
+              <a:defRPr sz="1050">
+                <a:solidFill>
+                  <a:srgbClr val="FFFFFF"/>
+                </a:solidFill>
+              </a:defRPr>
+            </a:pPr>
+            <a:r>
+              <a:rPr sz="1050">
+                <a:solidFill>
+                  <a:srgbClr val="FFFFFF"/>
+                </a:solidFill>
+              </a:rPr>
+              <a:t>런칭 포함·제외 콘텐츠와 변경 승인 기준 확정</a:t>
+            </a:r>
+          </a:p>
+        </p:txBody>
+      </p:sp>
+      <p:sp>
+        <p:nvSpPr>
+          <p:cNvPr id="33" name="decision-owner-1">
+            <a:extLst xmlns:a="http://schemas.openxmlformats.org/drawingml/2006/main">
+              <a:ext uri="{FF2B5EF4-FFF2-40B4-BE49-F238E27FC236}">
+                <a16:creationId xmlns:a16="http://schemas.microsoft.com/office/drawing/2014/main" id="{DB90D8E3-911E-42ED-B905-1D757A23A4AA}"/>
+              </a:ext>
+            </a:extLst>
+          </p:cNvPr>
+          <p:cNvSpPr>
+            <a:spLocks xmlns:a="http://schemas.openxmlformats.org/drawingml/2006/main" noGrp="1"/>
+          </p:cNvSpPr>
+          <p:nvPr/>
+        </p:nvSpPr>
+        <p:spPr>
+          <a:xfrm xmlns:a="http://schemas.openxmlformats.org/drawingml/2006/main">
+            <a:off x="10058400" y="2619375"/>
+            <a:ext cx="933450" cy="228600"/>
+          </a:xfrm>
+          <a:prstGeom xmlns:a="http://schemas.openxmlformats.org/drawingml/2006/main" prst="rect">
+            <a:avLst/>
+          </a:prstGeom>
+          <a:noFill xmlns:a="http://schemas.openxmlformats.org/drawingml/2006/main"/>
+          <a:ln xmlns:a="http://schemas.openxmlformats.org/drawingml/2006/main" w="0">
+            <a:noFill/>
+            <a:prstDash val="solid"/>
+          </a:ln>
+        </p:spPr>
+        <p:txBody>
+          <a:bodyPr xmlns:a="http://schemas.openxmlformats.org/drawingml/2006/main"/>
+          <a:lstStyle xmlns:a="http://schemas.openxmlformats.org/drawingml/2006/main"/>
+          <a:p xmlns:a="http://schemas.openxmlformats.org/drawingml/2006/main">
+            <a:pPr algn="ctr">
+              <a:defRPr sz="1050" b="1">
+                <a:solidFill>
+                  <a:srgbClr val="CBD5E1"/>
+                </a:solidFill>
+              </a:defRPr>
+            </a:pPr>
+            <a:r>
+              <a:rPr sz="1050" b="1">
+                <a:solidFill>
+                  <a:srgbClr val="CBD5E1"/>
+                </a:solidFill>
+              </a:rPr>
+              <a:t>PM</a:t>
+            </a:r>
+          </a:p>
+        </p:txBody>
+      </p:sp>
+      <p:sp>
+        <p:nvSpPr>
+          <p:cNvPr id="34" name="decision-row-2">
+            <a:extLst xmlns:a="http://schemas.openxmlformats.org/drawingml/2006/main">
+              <a:ext uri="{FF2B5EF4-FFF2-40B4-BE49-F238E27FC236}">
+                <a16:creationId xmlns:a16="http://schemas.microsoft.com/office/drawing/2014/main" id="{DA00C44D-5B34-446A-B3AE-29F6B3F684D2}"/>
+              </a:ext>
+            </a:extLst>
+          </p:cNvPr>
+          <p:cNvSpPr>
+            <a:spLocks xmlns:a="http://schemas.openxmlformats.org/drawingml/2006/main" noGrp="1"/>
+          </p:cNvSpPr>
+          <p:nvPr/>
+        </p:nvSpPr>
+        <p:spPr>
+          <a:xfrm xmlns:a="http://schemas.openxmlformats.org/drawingml/2006/main">
+            <a:off x="4686300" y="3009900"/>
+            <a:ext cx="6705600" cy="552450"/>
+          </a:xfrm>
+          <a:prstGeom xmlns:a="http://schemas.openxmlformats.org/drawingml/2006/main" prst="rect">
+            <a:avLst/>
+          </a:prstGeom>
+          <a:solidFill xmlns:a="http://schemas.openxmlformats.org/drawingml/2006/main">
+            <a:srgbClr val="111827"/>
+          </a:solidFill>
+          <a:ln xmlns:a="http://schemas.openxmlformats.org/drawingml/2006/main" w="9525">
+            <a:solidFill>
+              <a:srgbClr val="2F3B55"/>
+            </a:solidFill>
+            <a:prstDash val="solid"/>
+          </a:ln>
+        </p:spPr>
+      </p:sp>
+      <p:sp>
+        <p:nvSpPr>
+          <p:cNvPr id="35" name="decision-item-2">
+            <a:extLst xmlns:a="http://schemas.openxmlformats.org/drawingml/2006/main">
+              <a:ext uri="{FF2B5EF4-FFF2-40B4-BE49-F238E27FC236}">
+                <a16:creationId xmlns:a16="http://schemas.microsoft.com/office/drawing/2014/main" id="{E3760915-D434-4E8B-AEAE-A1E1D56F976E}"/>
+              </a:ext>
+            </a:extLst>
+          </p:cNvPr>
+          <p:cNvSpPr>
+            <a:spLocks xmlns:a="http://schemas.openxmlformats.org/drawingml/2006/main" noGrp="1"/>
+          </p:cNvSpPr>
+          <p:nvPr/>
+        </p:nvSpPr>
+        <p:spPr>
+          <a:xfrm xmlns:a="http://schemas.openxmlformats.org/drawingml/2006/main">
+            <a:off x="4933950" y="3171825"/>
+            <a:ext cx="1809750" cy="228600"/>
+          </a:xfrm>
+          <a:prstGeom xmlns:a="http://schemas.openxmlformats.org/drawingml/2006/main" prst="rect">
+            <a:avLst/>
+          </a:prstGeom>
+          <a:noFill xmlns:a="http://schemas.openxmlformats.org/drawingml/2006/main"/>
+          <a:ln xmlns:a="http://schemas.openxmlformats.org/drawingml/2006/main" w="0">
+            <a:noFill/>
+            <a:prstDash val="solid"/>
+          </a:ln>
+        </p:spPr>
+        <p:txBody>
+          <a:bodyPr xmlns:a="http://schemas.openxmlformats.org/drawingml/2006/main"/>
+          <a:lstStyle xmlns:a="http://schemas.openxmlformats.org/drawingml/2006/main"/>
+          <a:p xmlns:a="http://schemas.openxmlformats.org/drawingml/2006/main">
+            <a:pPr>
+              <a:defRPr sz="1125" b="1">
+                <a:solidFill>
+                  <a:srgbClr val="FF6B35"/>
+                </a:solidFill>
+              </a:defRPr>
+            </a:pPr>
+            <a:r>
+              <a:rPr sz="1125" b="1">
+                <a:solidFill>
+                  <a:srgbClr val="FF6B35"/>
+                </a:solidFill>
+              </a:rPr>
+              <a:t>빌드 기준</a:t>
+            </a:r>
+          </a:p>
+        </p:txBody>
+      </p:sp>
+      <p:sp>
+        <p:nvSpPr>
+          <p:cNvPr id="36" name="decision-gate-2">
+            <a:extLst xmlns:a="http://schemas.openxmlformats.org/drawingml/2006/main">
+              <a:ext uri="{FF2B5EF4-FFF2-40B4-BE49-F238E27FC236}">
+                <a16:creationId xmlns:a16="http://schemas.microsoft.com/office/drawing/2014/main" id="{81E81F00-9AF0-43DB-9D93-F1215693AD5A}"/>
+              </a:ext>
+            </a:extLst>
+          </p:cNvPr>
+          <p:cNvSpPr>
+            <a:spLocks xmlns:a="http://schemas.openxmlformats.org/drawingml/2006/main" noGrp="1"/>
+          </p:cNvSpPr>
+          <p:nvPr/>
+        </p:nvSpPr>
+        <p:spPr>
+          <a:xfrm xmlns:a="http://schemas.openxmlformats.org/drawingml/2006/main">
+            <a:off x="6934200" y="3133725"/>
+            <a:ext cx="2857500" cy="285750"/>
+          </a:xfrm>
+          <a:prstGeom xmlns:a="http://schemas.openxmlformats.org/drawingml/2006/main" prst="rect">
+            <a:avLst/>
+          </a:prstGeom>
+          <a:noFill xmlns:a="http://schemas.openxmlformats.org/drawingml/2006/main"/>
+          <a:ln xmlns:a="http://schemas.openxmlformats.org/drawingml/2006/main" w="0">
+            <a:noFill/>
+            <a:prstDash val="solid"/>
+          </a:ln>
+        </p:spPr>
+        <p:txBody>
+          <a:bodyPr xmlns:a="http://schemas.openxmlformats.org/drawingml/2006/main"/>
+          <a:lstStyle xmlns:a="http://schemas.openxmlformats.org/drawingml/2006/main"/>
+          <a:p xmlns:a="http://schemas.openxmlformats.org/drawingml/2006/main">
+            <a:pPr>
+              <a:defRPr sz="1050">
+                <a:solidFill>
+                  <a:srgbClr val="FFFFFF"/>
+                </a:solidFill>
+              </a:defRPr>
+            </a:pPr>
+            <a:r>
+              <a:rPr sz="1050">
+                <a:solidFill>
+                  <a:srgbClr val="FFFFFF"/>
+                </a:solidFill>
+              </a:rPr>
+              <a:t>Perforce 브랜치와 후보 빌드 태그 운영 기준 합의</a:t>
+            </a:r>
+          </a:p>
+        </p:txBody>
+      </p:sp>
+      <p:sp>
+        <p:nvSpPr>
+          <p:cNvPr id="37" name="decision-owner-2">
+            <a:extLst xmlns:a="http://schemas.openxmlformats.org/drawingml/2006/main">
+              <a:ext uri="{FF2B5EF4-FFF2-40B4-BE49-F238E27FC236}">
+                <a16:creationId xmlns:a16="http://schemas.microsoft.com/office/drawing/2014/main" id="{DA9AC35A-733C-4589-8D2E-A846E6E651D9}"/>
+              </a:ext>
+            </a:extLst>
+          </p:cNvPr>
+          <p:cNvSpPr>
+            <a:spLocks xmlns:a="http://schemas.openxmlformats.org/drawingml/2006/main" noGrp="1"/>
+          </p:cNvSpPr>
+          <p:nvPr/>
+        </p:nvSpPr>
+        <p:spPr>
+          <a:xfrm xmlns:a="http://schemas.openxmlformats.org/drawingml/2006/main">
+            <a:off x="10058400" y="3171825"/>
+            <a:ext cx="933450" cy="228600"/>
+          </a:xfrm>
+          <a:prstGeom xmlns:a="http://schemas.openxmlformats.org/drawingml/2006/main" prst="rect">
+            <a:avLst/>
+          </a:prstGeom>
+          <a:noFill xmlns:a="http://schemas.openxmlformats.org/drawingml/2006/main"/>
+          <a:ln xmlns:a="http://schemas.openxmlformats.org/drawingml/2006/main" w="0">
+            <a:noFill/>
+            <a:prstDash val="solid"/>
+          </a:ln>
+        </p:spPr>
+        <p:txBody>
+          <a:bodyPr xmlns:a="http://schemas.openxmlformats.org/drawingml/2006/main"/>
+          <a:lstStyle xmlns:a="http://schemas.openxmlformats.org/drawingml/2006/main"/>
+          <a:p xmlns:a="http://schemas.openxmlformats.org/drawingml/2006/main">
+            <a:pPr algn="ctr">
+              <a:defRPr sz="1050" b="1">
+                <a:solidFill>
+                  <a:srgbClr val="CBD5E1"/>
+                </a:solidFill>
+              </a:defRPr>
+            </a:pPr>
+            <a:r>
+              <a:rPr sz="1050" b="1">
+                <a:solidFill>
+                  <a:srgbClr val="CBD5E1"/>
+                </a:solidFill>
+              </a:rPr>
+              <a:t>개발</a:t>
+            </a:r>
+          </a:p>
+        </p:txBody>
+      </p:sp>
+      <p:sp>
+        <p:nvSpPr>
+          <p:cNvPr id="38" name="decision-row-3">
+            <a:extLst xmlns:a="http://schemas.openxmlformats.org/drawingml/2006/main">
+              <a:ext uri="{FF2B5EF4-FFF2-40B4-BE49-F238E27FC236}">
+                <a16:creationId xmlns:a16="http://schemas.microsoft.com/office/drawing/2014/main" id="{5487862A-C0BE-4868-B70E-AFBCFC8549E3}"/>
+              </a:ext>
+            </a:extLst>
+          </p:cNvPr>
+          <p:cNvSpPr>
+            <a:spLocks xmlns:a="http://schemas.openxmlformats.org/drawingml/2006/main" noGrp="1"/>
+          </p:cNvSpPr>
+          <p:nvPr/>
+        </p:nvSpPr>
+        <p:spPr>
+          <a:xfrm xmlns:a="http://schemas.openxmlformats.org/drawingml/2006/main">
+            <a:off x="4686300" y="3562350"/>
+            <a:ext cx="6705600" cy="552450"/>
+          </a:xfrm>
+          <a:prstGeom xmlns:a="http://schemas.openxmlformats.org/drawingml/2006/main" prst="rect">
+            <a:avLst/>
+          </a:prstGeom>
+          <a:solidFill xmlns:a="http://schemas.openxmlformats.org/drawingml/2006/main">
+            <a:srgbClr val="151F34"/>
+          </a:solidFill>
+          <a:ln xmlns:a="http://schemas.openxmlformats.org/drawingml/2006/main" w="9525">
+            <a:solidFill>
+              <a:srgbClr val="2F3B55"/>
+            </a:solidFill>
+            <a:prstDash val="solid"/>
+          </a:ln>
+        </p:spPr>
+      </p:sp>
+      <p:sp>
+        <p:nvSpPr>
+          <p:cNvPr id="39" name="decision-item-3">
+            <a:extLst xmlns:a="http://schemas.openxmlformats.org/drawingml/2006/main">
+              <a:ext uri="{FF2B5EF4-FFF2-40B4-BE49-F238E27FC236}">
+                <a16:creationId xmlns:a16="http://schemas.microsoft.com/office/drawing/2014/main" id="{FDFE9D2A-B567-4244-BC99-56FB30F512A5}"/>
+              </a:ext>
+            </a:extLst>
+          </p:cNvPr>
+          <p:cNvSpPr>
+            <a:spLocks xmlns:a="http://schemas.openxmlformats.org/drawingml/2006/main" noGrp="1"/>
+          </p:cNvSpPr>
+          <p:nvPr/>
+        </p:nvSpPr>
+        <p:spPr>
+          <a:xfrm xmlns:a="http://schemas.openxmlformats.org/drawingml/2006/main">
+            <a:off x="4933950" y="3724275"/>
+            <a:ext cx="1809750" cy="228600"/>
+          </a:xfrm>
+          <a:prstGeom xmlns:a="http://schemas.openxmlformats.org/drawingml/2006/main" prst="rect">
+            <a:avLst/>
+          </a:prstGeom>
+          <a:noFill xmlns:a="http://schemas.openxmlformats.org/drawingml/2006/main"/>
+          <a:ln xmlns:a="http://schemas.openxmlformats.org/drawingml/2006/main" w="0">
+            <a:noFill/>
+            <a:prstDash val="solid"/>
+          </a:ln>
+        </p:spPr>
+        <p:txBody>
+          <a:bodyPr xmlns:a="http://schemas.openxmlformats.org/drawingml/2006/main"/>
+          <a:lstStyle xmlns:a="http://schemas.openxmlformats.org/drawingml/2006/main"/>
+          <a:p xmlns:a="http://schemas.openxmlformats.org/drawingml/2006/main">
+            <a:pPr>
+              <a:defRPr sz="1125" b="1">
+                <a:solidFill>
+                  <a:srgbClr val="7C3AED"/>
+                </a:solidFill>
+              </a:defRPr>
+            </a:pPr>
+            <a:r>
+              <a:rPr sz="1125" b="1">
+                <a:solidFill>
+                  <a:srgbClr val="7C3AED"/>
+                </a:solidFill>
+              </a:rPr>
+              <a:t>QA 안정성</a:t>
+            </a:r>
+          </a:p>
+        </p:txBody>
+      </p:sp>
+      <p:sp>
+        <p:nvSpPr>
+          <p:cNvPr id="40" name="decision-gate-3">
+            <a:extLst xmlns:a="http://schemas.openxmlformats.org/drawingml/2006/main">
+              <a:ext uri="{FF2B5EF4-FFF2-40B4-BE49-F238E27FC236}">
+                <a16:creationId xmlns:a16="http://schemas.microsoft.com/office/drawing/2014/main" id="{C30CBF68-52F3-422D-8E49-F3D8A1CD4407}"/>
+              </a:ext>
+            </a:extLst>
+          </p:cNvPr>
+          <p:cNvSpPr>
+            <a:spLocks xmlns:a="http://schemas.openxmlformats.org/drawingml/2006/main" noGrp="1"/>
+          </p:cNvSpPr>
+          <p:nvPr/>
+        </p:nvSpPr>
+        <p:spPr>
+          <a:xfrm xmlns:a="http://schemas.openxmlformats.org/drawingml/2006/main">
+            <a:off x="6934200" y="3686175"/>
+            <a:ext cx="2857500" cy="285750"/>
+          </a:xfrm>
+          <a:prstGeom xmlns:a="http://schemas.openxmlformats.org/drawingml/2006/main" prst="rect">
+            <a:avLst/>
+          </a:prstGeom>
+          <a:noFill xmlns:a="http://schemas.openxmlformats.org/drawingml/2006/main"/>
+          <a:ln xmlns:a="http://schemas.openxmlformats.org/drawingml/2006/main" w="0">
+            <a:noFill/>
+            <a:prstDash val="solid"/>
+          </a:ln>
+        </p:spPr>
+        <p:txBody>
+          <a:bodyPr xmlns:a="http://schemas.openxmlformats.org/drawingml/2006/main"/>
+          <a:lstStyle xmlns:a="http://schemas.openxmlformats.org/drawingml/2006/main"/>
+          <a:p xmlns:a="http://schemas.openxmlformats.org/drawingml/2006/main">
+            <a:pPr>
+              <a:defRPr sz="1050">
+                <a:solidFill>
+                  <a:srgbClr val="FFFFFF"/>
+                </a:solidFill>
+              </a:defRPr>
+            </a:pPr>
+            <a:r>
+              <a:rPr sz="1050">
+                <a:solidFill>
+                  <a:srgbClr val="FFFFFF"/>
+                </a:solidFill>
+              </a:rPr>
+              <a:t>치명 이슈 0건, 주요 이슈 수정 계획과 잔여 리스크 공유</a:t>
+            </a:r>
+          </a:p>
+        </p:txBody>
+      </p:sp>
+      <p:sp>
+        <p:nvSpPr>
+          <p:cNvPr id="41" name="decision-owner-3">
+            <a:extLst xmlns:a="http://schemas.openxmlformats.org/drawingml/2006/main">
+              <a:ext uri="{FF2B5EF4-FFF2-40B4-BE49-F238E27FC236}">
+                <a16:creationId xmlns:a16="http://schemas.microsoft.com/office/drawing/2014/main" id="{CC23460F-80F8-4D1A-B797-3E178C412CFC}"/>
+              </a:ext>
+            </a:extLst>
+          </p:cNvPr>
+          <p:cNvSpPr>
+            <a:spLocks xmlns:a="http://schemas.openxmlformats.org/drawingml/2006/main" noGrp="1"/>
+          </p:cNvSpPr>
+          <p:nvPr/>
+        </p:nvSpPr>
+        <p:spPr>
+          <a:xfrm xmlns:a="http://schemas.openxmlformats.org/drawingml/2006/main">
+            <a:off x="10058400" y="3724275"/>
+            <a:ext cx="933450" cy="228600"/>
+          </a:xfrm>
+          <a:prstGeom xmlns:a="http://schemas.openxmlformats.org/drawingml/2006/main" prst="rect">
+            <a:avLst/>
+          </a:prstGeom>
+          <a:noFill xmlns:a="http://schemas.openxmlformats.org/drawingml/2006/main"/>
+          <a:ln xmlns:a="http://schemas.openxmlformats.org/drawingml/2006/main" w="0">
+            <a:noFill/>
+            <a:prstDash val="solid"/>
+          </a:ln>
+        </p:spPr>
+        <p:txBody>
+          <a:bodyPr xmlns:a="http://schemas.openxmlformats.org/drawingml/2006/main"/>
+          <a:lstStyle xmlns:a="http://schemas.openxmlformats.org/drawingml/2006/main"/>
+          <a:p xmlns:a="http://schemas.openxmlformats.org/drawingml/2006/main">
+            <a:pPr algn="ctr">
+              <a:defRPr sz="1050" b="1">
+                <a:solidFill>
+                  <a:srgbClr val="CBD5E1"/>
+                </a:solidFill>
+              </a:defRPr>
+            </a:pPr>
+            <a:r>
+              <a:rPr sz="1050" b="1">
+                <a:solidFill>
+                  <a:srgbClr val="CBD5E1"/>
+                </a:solidFill>
+              </a:rPr>
+              <a:t>QA</a:t>
+            </a:r>
+          </a:p>
+        </p:txBody>
+      </p:sp>
+      <p:sp>
+        <p:nvSpPr>
+          <p:cNvPr id="42" name="decision-row-4">
+            <a:extLst xmlns:a="http://schemas.openxmlformats.org/drawingml/2006/main">
+              <a:ext uri="{FF2B5EF4-FFF2-40B4-BE49-F238E27FC236}">
+                <a16:creationId xmlns:a16="http://schemas.microsoft.com/office/drawing/2014/main" id="{8511F758-BA17-42B9-94C8-1A04FCC2E5EE}"/>
+              </a:ext>
+            </a:extLst>
+          </p:cNvPr>
+          <p:cNvSpPr>
+            <a:spLocks xmlns:a="http://schemas.openxmlformats.org/drawingml/2006/main" noGrp="1"/>
+          </p:cNvSpPr>
+          <p:nvPr/>
+        </p:nvSpPr>
+        <p:spPr>
+          <a:xfrm xmlns:a="http://schemas.openxmlformats.org/drawingml/2006/main">
+            <a:off x="4686300" y="4114800"/>
+            <a:ext cx="6705600" cy="552450"/>
+          </a:xfrm>
+          <a:prstGeom xmlns:a="http://schemas.openxmlformats.org/drawingml/2006/main" prst="rect">
+            <a:avLst/>
+          </a:prstGeom>
+          <a:solidFill xmlns:a="http://schemas.openxmlformats.org/drawingml/2006/main">
+            <a:srgbClr val="111827"/>
+          </a:solidFill>
+          <a:ln xmlns:a="http://schemas.openxmlformats.org/drawingml/2006/main" w="9525">
+            <a:solidFill>
+              <a:srgbClr val="2F3B55"/>
+            </a:solidFill>
+            <a:prstDash val="solid"/>
+          </a:ln>
+        </p:spPr>
+      </p:sp>
+      <p:sp>
+        <p:nvSpPr>
+          <p:cNvPr id="43" name="decision-item-4">
+            <a:extLst xmlns:a="http://schemas.openxmlformats.org/drawingml/2006/main">
+              <a:ext uri="{FF2B5EF4-FFF2-40B4-BE49-F238E27FC236}">
+                <a16:creationId xmlns:a16="http://schemas.microsoft.com/office/drawing/2014/main" id="{F14DECFC-7F8D-45E6-B5EC-7ED25711BC91}"/>
+              </a:ext>
+            </a:extLst>
+          </p:cNvPr>
+          <p:cNvSpPr>
+            <a:spLocks xmlns:a="http://schemas.openxmlformats.org/drawingml/2006/main" noGrp="1"/>
+          </p:cNvSpPr>
+          <p:nvPr/>
+        </p:nvSpPr>
+        <p:spPr>
+          <a:xfrm xmlns:a="http://schemas.openxmlformats.org/drawingml/2006/main">
+            <a:off x="4933950" y="4276725"/>
+            <a:ext cx="1809750" cy="228600"/>
+          </a:xfrm>
+          <a:prstGeom xmlns:a="http://schemas.openxmlformats.org/drawingml/2006/main" prst="rect">
+            <a:avLst/>
+          </a:prstGeom>
+          <a:noFill xmlns:a="http://schemas.openxmlformats.org/drawingml/2006/main"/>
+          <a:ln xmlns:a="http://schemas.openxmlformats.org/drawingml/2006/main" w="0">
+            <a:noFill/>
+            <a:prstDash val="solid"/>
+          </a:ln>
+        </p:spPr>
+        <p:txBody>
+          <a:bodyPr xmlns:a="http://schemas.openxmlformats.org/drawingml/2006/main"/>
+          <a:lstStyle xmlns:a="http://schemas.openxmlformats.org/drawingml/2006/main"/>
+          <a:p xmlns:a="http://schemas.openxmlformats.org/drawingml/2006/main">
+            <a:pPr>
+              <a:defRPr sz="1125" b="1">
+                <a:solidFill>
+                  <a:srgbClr val="8BD9E8"/>
+                </a:solidFill>
+              </a:defRPr>
+            </a:pPr>
+            <a:r>
+              <a:rPr sz="1125" b="1">
+                <a:solidFill>
+                  <a:srgbClr val="8BD9E8"/>
+                </a:solidFill>
+              </a:rPr>
+              <a:t>퍼블리셔 검수</a:t>
+            </a:r>
+          </a:p>
+        </p:txBody>
+      </p:sp>
+      <p:sp>
+        <p:nvSpPr>
+          <p:cNvPr id="44" name="decision-gate-4">
+            <a:extLst xmlns:a="http://schemas.openxmlformats.org/drawingml/2006/main">
+              <a:ext uri="{FF2B5EF4-FFF2-40B4-BE49-F238E27FC236}">
+                <a16:creationId xmlns:a16="http://schemas.microsoft.com/office/drawing/2014/main" id="{D1E17F3F-64A1-4AA5-B441-DFCF0531A7F7}"/>
+              </a:ext>
+            </a:extLst>
+          </p:cNvPr>
+          <p:cNvSpPr>
+            <a:spLocks xmlns:a="http://schemas.openxmlformats.org/drawingml/2006/main" noGrp="1"/>
+          </p:cNvSpPr>
+          <p:nvPr/>
+        </p:nvSpPr>
+        <p:spPr>
+          <a:xfrm xmlns:a="http://schemas.openxmlformats.org/drawingml/2006/main">
+            <a:off x="6934200" y="4238625"/>
+            <a:ext cx="2857500" cy="285750"/>
+          </a:xfrm>
+          <a:prstGeom xmlns:a="http://schemas.openxmlformats.org/drawingml/2006/main" prst="rect">
+            <a:avLst/>
+          </a:prstGeom>
+          <a:noFill xmlns:a="http://schemas.openxmlformats.org/drawingml/2006/main"/>
+          <a:ln xmlns:a="http://schemas.openxmlformats.org/drawingml/2006/main" w="0">
+            <a:noFill/>
+            <a:prstDash val="solid"/>
+          </a:ln>
+        </p:spPr>
+        <p:txBody>
+          <a:bodyPr xmlns:a="http://schemas.openxmlformats.org/drawingml/2006/main"/>
+          <a:lstStyle xmlns:a="http://schemas.openxmlformats.org/drawingml/2006/main"/>
+          <a:p xmlns:a="http://schemas.openxmlformats.org/drawingml/2006/main">
+            <a:pPr>
+              <a:defRPr sz="1050">
+                <a:solidFill>
+                  <a:srgbClr val="FFFFFF"/>
+                </a:solidFill>
+              </a:defRPr>
+            </a:pPr>
+            <a:r>
+              <a:rPr sz="1050">
+                <a:solidFill>
+                  <a:srgbClr val="FFFFFF"/>
+                </a:solidFill>
+              </a:rPr>
+              <a:t>검수 요청, 피드백, 재전달 일정이 추적 가능한 상태</a:t>
+            </a:r>
+          </a:p>
+        </p:txBody>
+      </p:sp>
+      <p:sp>
+        <p:nvSpPr>
+          <p:cNvPr id="45" name="decision-owner-4">
+            <a:extLst xmlns:a="http://schemas.openxmlformats.org/drawingml/2006/main">
+              <a:ext uri="{FF2B5EF4-FFF2-40B4-BE49-F238E27FC236}">
+                <a16:creationId xmlns:a16="http://schemas.microsoft.com/office/drawing/2014/main" id="{BB4C2B74-D2E3-47A1-8209-696E666A33A1}"/>
+              </a:ext>
+            </a:extLst>
+          </p:cNvPr>
+          <p:cNvSpPr>
+            <a:spLocks xmlns:a="http://schemas.openxmlformats.org/drawingml/2006/main" noGrp="1"/>
+          </p:cNvSpPr>
+          <p:nvPr/>
+        </p:nvSpPr>
+        <p:spPr>
+          <a:xfrm xmlns:a="http://schemas.openxmlformats.org/drawingml/2006/main">
+            <a:off x="10058400" y="4276725"/>
+            <a:ext cx="933450" cy="228600"/>
+          </a:xfrm>
+          <a:prstGeom xmlns:a="http://schemas.openxmlformats.org/drawingml/2006/main" prst="rect">
+            <a:avLst/>
+          </a:prstGeom>
+          <a:noFill xmlns:a="http://schemas.openxmlformats.org/drawingml/2006/main"/>
+          <a:ln xmlns:a="http://schemas.openxmlformats.org/drawingml/2006/main" w="0">
+            <a:noFill/>
+            <a:prstDash val="solid"/>
+          </a:ln>
+        </p:spPr>
+        <p:txBody>
+          <a:bodyPr xmlns:a="http://schemas.openxmlformats.org/drawingml/2006/main"/>
+          <a:lstStyle xmlns:a="http://schemas.openxmlformats.org/drawingml/2006/main"/>
+          <a:p xmlns:a="http://schemas.openxmlformats.org/drawingml/2006/main">
+            <a:pPr algn="ctr">
+              <a:defRPr sz="1050" b="1">
+                <a:solidFill>
+                  <a:srgbClr val="CBD5E1"/>
+                </a:solidFill>
+              </a:defRPr>
+            </a:pPr>
+            <a:r>
+              <a:rPr sz="1050" b="1">
+                <a:solidFill>
+                  <a:srgbClr val="CBD5E1"/>
+                </a:solidFill>
+              </a:rPr>
+              <a:t>PM</a:t>
+            </a:r>
+          </a:p>
+        </p:txBody>
+      </p:sp>
+      <p:sp>
+        <p:nvSpPr>
+          <p:cNvPr id="46" name="decision-row-5">
+            <a:extLst xmlns:a="http://schemas.openxmlformats.org/drawingml/2006/main">
+              <a:ext uri="{FF2B5EF4-FFF2-40B4-BE49-F238E27FC236}">
+                <a16:creationId xmlns:a16="http://schemas.microsoft.com/office/drawing/2014/main" id="{1C8981E7-03FE-4E62-9343-8D1E3A17B4B6}"/>
+              </a:ext>
+            </a:extLst>
+          </p:cNvPr>
+          <p:cNvSpPr>
+            <a:spLocks xmlns:a="http://schemas.openxmlformats.org/drawingml/2006/main" noGrp="1"/>
+          </p:cNvSpPr>
+          <p:nvPr/>
+        </p:nvSpPr>
+        <p:spPr>
+          <a:xfrm xmlns:a="http://schemas.openxmlformats.org/drawingml/2006/main">
+            <a:off x="4686300" y="4667250"/>
+            <a:ext cx="6705600" cy="552450"/>
+          </a:xfrm>
+          <a:prstGeom xmlns:a="http://schemas.openxmlformats.org/drawingml/2006/main" prst="rect">
+            <a:avLst/>
+          </a:prstGeom>
+          <a:solidFill xmlns:a="http://schemas.openxmlformats.org/drawingml/2006/main">
+            <a:srgbClr val="151F34"/>
+          </a:solidFill>
+          <a:ln xmlns:a="http://schemas.openxmlformats.org/drawingml/2006/main" w="9525">
+            <a:solidFill>
+              <a:srgbClr val="2F3B55"/>
+            </a:solidFill>
+            <a:prstDash val="solid"/>
+          </a:ln>
+        </p:spPr>
+      </p:sp>
+      <p:sp>
+        <p:nvSpPr>
+          <p:cNvPr id="47" name="decision-item-5">
+            <a:extLst xmlns:a="http://schemas.openxmlformats.org/drawingml/2006/main">
+              <a:ext uri="{FF2B5EF4-FFF2-40B4-BE49-F238E27FC236}">
+                <a16:creationId xmlns:a16="http://schemas.microsoft.com/office/drawing/2014/main" id="{0AD55C7B-21E5-4802-A2AC-BE70FC586B63}"/>
+              </a:ext>
+            </a:extLst>
+          </p:cNvPr>
+          <p:cNvSpPr>
+            <a:spLocks xmlns:a="http://schemas.openxmlformats.org/drawingml/2006/main" noGrp="1"/>
+          </p:cNvSpPr>
+          <p:nvPr/>
+        </p:nvSpPr>
+        <p:spPr>
+          <a:xfrm xmlns:a="http://schemas.openxmlformats.org/drawingml/2006/main">
+            <a:off x="4933950" y="4829175"/>
+            <a:ext cx="1809750" cy="228600"/>
+          </a:xfrm>
+          <a:prstGeom xmlns:a="http://schemas.openxmlformats.org/drawingml/2006/main" prst="rect">
+            <a:avLst/>
+          </a:prstGeom>
+          <a:noFill xmlns:a="http://schemas.openxmlformats.org/drawingml/2006/main"/>
+          <a:ln xmlns:a="http://schemas.openxmlformats.org/drawingml/2006/main" w="0">
+            <a:noFill/>
+            <a:prstDash val="solid"/>
+          </a:ln>
+        </p:spPr>
+        <p:txBody>
+          <a:bodyPr xmlns:a="http://schemas.openxmlformats.org/drawingml/2006/main"/>
+          <a:lstStyle xmlns:a="http://schemas.openxmlformats.org/drawingml/2006/main"/>
+          <a:p xmlns:a="http://schemas.openxmlformats.org/drawingml/2006/main">
+            <a:pPr>
+              <a:defRPr sz="1125" b="1">
+                <a:solidFill>
+                  <a:srgbClr val="FF6B35"/>
+                </a:solidFill>
+              </a:defRPr>
+            </a:pPr>
+            <a:r>
+              <a:rPr sz="1125" b="1">
+                <a:solidFill>
+                  <a:srgbClr val="FF6B35"/>
+                </a:solidFill>
+              </a:rPr>
+              <a:t>배포 준비</a:t>
+            </a:r>
+          </a:p>
+        </p:txBody>
+      </p:sp>
+      <p:sp>
+        <p:nvSpPr>
+          <p:cNvPr id="48" name="decision-gate-5">
+            <a:extLst xmlns:a="http://schemas.openxmlformats.org/drawingml/2006/main">
+              <a:ext uri="{FF2B5EF4-FFF2-40B4-BE49-F238E27FC236}">
+                <a16:creationId xmlns:a16="http://schemas.microsoft.com/office/drawing/2014/main" id="{B280930C-024D-4D89-8184-525E6467912E}"/>
+              </a:ext>
+            </a:extLst>
+          </p:cNvPr>
+          <p:cNvSpPr>
+            <a:spLocks xmlns:a="http://schemas.openxmlformats.org/drawingml/2006/main" noGrp="1"/>
+          </p:cNvSpPr>
+          <p:nvPr/>
+        </p:nvSpPr>
+        <p:spPr>
+          <a:xfrm xmlns:a="http://schemas.openxmlformats.org/drawingml/2006/main">
+            <a:off x="6934200" y="4791075"/>
+            <a:ext cx="2857500" cy="285750"/>
+          </a:xfrm>
+          <a:prstGeom xmlns:a="http://schemas.openxmlformats.org/drawingml/2006/main" prst="rect">
+            <a:avLst/>
+          </a:prstGeom>
+          <a:noFill xmlns:a="http://schemas.openxmlformats.org/drawingml/2006/main"/>
+          <a:ln xmlns:a="http://schemas.openxmlformats.org/drawingml/2006/main" w="0">
+            <a:noFill/>
+            <a:prstDash val="solid"/>
+          </a:ln>
+        </p:spPr>
+        <p:txBody>
+          <a:bodyPr xmlns:a="http://schemas.openxmlformats.org/drawingml/2006/main"/>
+          <a:lstStyle xmlns:a="http://schemas.openxmlformats.org/drawingml/2006/main"/>
+          <a:p xmlns:a="http://schemas.openxmlformats.org/drawingml/2006/main">
+            <a:pPr>
+              <a:defRPr sz="1050">
+                <a:solidFill>
+                  <a:srgbClr val="FFFFFF"/>
+                </a:solidFill>
+              </a:defRPr>
+            </a:pPr>
+            <a:r>
+              <a:rPr sz="1050">
+                <a:solidFill>
+                  <a:srgbClr val="FFFFFF"/>
+                </a:solidFill>
+              </a:rPr>
+              <a:t>스토어·공지·장애 대응 플랜의 최종 담당자 확인</a:t>
+            </a:r>
+          </a:p>
+        </p:txBody>
+      </p:sp>
+      <p:sp>
+        <p:nvSpPr>
+          <p:cNvPr id="49" name="decision-owner-5">
+            <a:extLst xmlns:a="http://schemas.openxmlformats.org/drawingml/2006/main">
+              <a:ext uri="{FF2B5EF4-FFF2-40B4-BE49-F238E27FC236}">
+                <a16:creationId xmlns:a16="http://schemas.microsoft.com/office/drawing/2014/main" id="{C25E2986-0D1C-4E0E-B4A7-419E8D084F7D}"/>
+              </a:ext>
+            </a:extLst>
+          </p:cNvPr>
+          <p:cNvSpPr>
+            <a:spLocks xmlns:a="http://schemas.openxmlformats.org/drawingml/2006/main" noGrp="1"/>
+          </p:cNvSpPr>
+          <p:nvPr/>
+        </p:nvSpPr>
+        <p:spPr>
+          <a:xfrm xmlns:a="http://schemas.openxmlformats.org/drawingml/2006/main">
+            <a:off x="10058400" y="4829175"/>
+            <a:ext cx="933450" cy="228600"/>
+          </a:xfrm>
+          <a:prstGeom xmlns:a="http://schemas.openxmlformats.org/drawingml/2006/main" prst="rect">
+            <a:avLst/>
+          </a:prstGeom>
+          <a:noFill xmlns:a="http://schemas.openxmlformats.org/drawingml/2006/main"/>
+          <a:ln xmlns:a="http://schemas.openxmlformats.org/drawingml/2006/main" w="0">
+            <a:noFill/>
+            <a:prstDash val="solid"/>
+          </a:ln>
+        </p:spPr>
+        <p:txBody>
+          <a:bodyPr xmlns:a="http://schemas.openxmlformats.org/drawingml/2006/main"/>
+          <a:lstStyle xmlns:a="http://schemas.openxmlformats.org/drawingml/2006/main"/>
+          <a:p xmlns:a="http://schemas.openxmlformats.org/drawingml/2006/main">
+            <a:pPr algn="ctr">
+              <a:defRPr sz="1050" b="1">
+                <a:solidFill>
+                  <a:srgbClr val="CBD5E1"/>
+                </a:solidFill>
+              </a:defRPr>
+            </a:pPr>
+            <a:r>
+              <a:rPr sz="1050" b="1">
+                <a:solidFill>
+                  <a:srgbClr val="CBD5E1"/>
+                </a:solidFill>
+              </a:rPr>
+              <a:t>운영</a:t>
+            </a:r>
+          </a:p>
+        </p:txBody>
+      </p:sp>
+      <p:sp>
+        <p:nvSpPr>
+          <p:cNvPr id="50" name="principle-panel">
+            <a:extLst xmlns:a="http://schemas.openxmlformats.org/drawingml/2006/main">
+              <a:ext uri="{FF2B5EF4-FFF2-40B4-BE49-F238E27FC236}">
+                <a16:creationId xmlns:a16="http://schemas.microsoft.com/office/drawing/2014/main" id="{21D4491B-93B1-4BE6-90D8-AFAC6F5BA384}"/>
+              </a:ext>
+            </a:extLst>
+          </p:cNvPr>
+          <p:cNvSpPr>
+            <a:spLocks xmlns:a="http://schemas.openxmlformats.org/drawingml/2006/main" noGrp="1"/>
+          </p:cNvSpPr>
+          <p:nvPr/>
+        </p:nvSpPr>
+        <p:spPr>
+          <a:xfrm xmlns:a="http://schemas.openxmlformats.org/drawingml/2006/main">
+            <a:off x="514350" y="5791200"/>
+            <a:ext cx="10877550" cy="419100"/>
+          </a:xfrm>
+          <a:prstGeom xmlns:a="http://schemas.openxmlformats.org/drawingml/2006/main" prst="roundRect">
+            <a:avLst>
+              <a:gd name="adj" fmla="val 18182"/>
+            </a:avLst>
+          </a:prstGeom>
+          <a:solidFill xmlns:a="http://schemas.openxmlformats.org/drawingml/2006/main">
+            <a:srgbClr val="10192E"/>
+          </a:solidFill>
+          <a:ln xmlns:a="http://schemas.openxmlformats.org/drawingml/2006/main" w="9525">
+            <a:solidFill>
+              <a:srgbClr val="22304E"/>
+            </a:solidFill>
+            <a:prstDash val="solid"/>
+          </a:ln>
+        </p:spPr>
+      </p:sp>
+      <p:sp>
+        <p:nvSpPr>
+          <p:cNvPr id="51" name="principle-label">
+            <a:extLst xmlns:a="http://schemas.openxmlformats.org/drawingml/2006/main">
+              <a:ext uri="{FF2B5EF4-FFF2-40B4-BE49-F238E27FC236}">
+                <a16:creationId xmlns:a16="http://schemas.microsoft.com/office/drawing/2014/main" id="{9B217DDC-3F38-4CEF-A73A-AEEABAA14758}"/>
+              </a:ext>
+            </a:extLst>
+          </p:cNvPr>
+          <p:cNvSpPr>
+            <a:spLocks xmlns:a="http://schemas.openxmlformats.org/drawingml/2006/main" noGrp="1"/>
+          </p:cNvSpPr>
+          <p:nvPr/>
+        </p:nvSpPr>
+        <p:spPr>
+          <a:xfrm xmlns:a="http://schemas.openxmlformats.org/drawingml/2006/main">
+            <a:off x="781050" y="5905500"/>
+            <a:ext cx="1143000" cy="209550"/>
+          </a:xfrm>
+          <a:prstGeom xmlns:a="http://schemas.openxmlformats.org/drawingml/2006/main" prst="rect">
+            <a:avLst/>
+          </a:prstGeom>
+          <a:noFill xmlns:a="http://schemas.openxmlformats.org/drawingml/2006/main"/>
+          <a:ln xmlns:a="http://schemas.openxmlformats.org/drawingml/2006/main" w="0">
+            <a:noFill/>
+            <a:prstDash val="solid"/>
+          </a:ln>
+        </p:spPr>
+        <p:txBody>
+          <a:bodyPr xmlns:a="http://schemas.openxmlformats.org/drawingml/2006/main"/>
+          <a:lstStyle xmlns:a="http://schemas.openxmlformats.org/drawingml/2006/main"/>
+          <a:p xmlns:a="http://schemas.openxmlformats.org/drawingml/2006/main">
+            <a:pPr>
+              <a:defRPr sz="1200" b="1">
+                <a:solidFill>
+                  <a:srgbClr val="8BD9E8"/>
+                </a:solidFill>
+              </a:defRPr>
+            </a:pPr>
+            <a:r>
+              <a:rPr sz="1200" b="1">
+                <a:solidFill>
+                  <a:srgbClr val="8BD9E8"/>
+                </a:solidFill>
+              </a:rPr>
+              <a:t>운영 원칙</a:t>
+            </a:r>
+          </a:p>
+        </p:txBody>
+      </p:sp>
+      <p:sp>
+        <p:nvSpPr>
+          <p:cNvPr id="52" name="principle-body">
+            <a:extLst xmlns:a="http://schemas.openxmlformats.org/drawingml/2006/main">
+              <a:ext uri="{FF2B5EF4-FFF2-40B4-BE49-F238E27FC236}">
+                <a16:creationId xmlns:a16="http://schemas.microsoft.com/office/drawing/2014/main" id="{9F9B4364-8B18-44B3-A579-B65AC8A5C124}"/>
+              </a:ext>
+            </a:extLst>
+          </p:cNvPr>
+          <p:cNvSpPr>
+            <a:spLocks xmlns:a="http://schemas.openxmlformats.org/drawingml/2006/main" noGrp="1"/>
+          </p:cNvSpPr>
+          <p:nvPr/>
+        </p:nvSpPr>
+        <p:spPr>
+          <a:xfrm xmlns:a="http://schemas.openxmlformats.org/drawingml/2006/main">
+            <a:off x="1962150" y="5905500"/>
+            <a:ext cx="8096250" cy="209550"/>
+          </a:xfrm>
+          <a:prstGeom xmlns:a="http://schemas.openxmlformats.org/drawingml/2006/main" prst="rect">
+            <a:avLst/>
+          </a:prstGeom>
+          <a:noFill xmlns:a="http://schemas.openxmlformats.org/drawingml/2006/main"/>
+          <a:ln xmlns:a="http://schemas.openxmlformats.org/drawingml/2006/main" w="0">
+            <a:noFill/>
+            <a:prstDash val="solid"/>
+          </a:ln>
+        </p:spPr>
+        <p:txBody>
+          <a:bodyPr xmlns:a="http://schemas.openxmlformats.org/drawingml/2006/main"/>
+          <a:lstStyle xmlns:a="http://schemas.openxmlformats.org/drawingml/2006/main"/>
+          <a:p xmlns:a="http://schemas.openxmlformats.org/drawingml/2006/main">
+            <a:pPr>
+              <a:defRPr sz="1125">
+                <a:solidFill>
+                  <a:srgbClr val="FFFFFF"/>
+                </a:solidFill>
+              </a:defRPr>
+            </a:pPr>
+            <a:r>
+              <a:rPr sz="1125">
+                <a:solidFill>
+                  <a:srgbClr val="FFFFFF"/>
+                </a:solidFill>
+              </a:rPr>
+              <a:t>게이트 미통과 항목은 일정 지연이 아니라 의사결정 이슈로 분리해, 영향도와 대안을 함께 보고합니다.</a:t>
+            </a:r>
+          </a:p>
+        </p:txBody>
+      </p:sp>
+    </p:spTree>
+    <p:extLst>
+      <p:ext uri="{BB962C8B-B14F-4D97-AF65-F5344CB8AC3E}">
+        <p14:creationId xmlns:p14="http://schemas.microsoft.com/office/powerpoint/2010/main" val="535118993"/>
       </p:ext>
     </p:extLst>
   </p:cSld>

--- a/outputs/HIT2_일본_런칭_6개월전_로드맵_초안.pptx
+++ b/outputs/HIT2_일본_런칭_6개월전_로드맵_초안.pptx
@@ -2,15 +2,16 @@
 <file path=ppt/presentation.xml><?xml version="1.0" encoding="utf-8"?>
 <p:presentation xmlns:p="http://schemas.openxmlformats.org/presentationml/2006/main">
   <p:sldMasterIdLst>
-    <p:sldMasterId xmlns:r="http://schemas.openxmlformats.org/officeDocument/2006/relationships" id="2147483648" r:id="R7418ac167d254113"/>
+    <p:sldMasterId xmlns:r="http://schemas.openxmlformats.org/officeDocument/2006/relationships" id="2147483648" r:id="Re2abd73a81de496d"/>
   </p:sldMasterIdLst>
   <p:notesMasterIdLst>
-    <p:notesMasterId xmlns:r="http://schemas.openxmlformats.org/officeDocument/2006/relationships" r:id="R914258d389384800"/>
+    <p:notesMasterId xmlns:r="http://schemas.openxmlformats.org/officeDocument/2006/relationships" r:id="Rbbabfd3ada2b443a"/>
   </p:notesMasterIdLst>
   <p:sldIdLst>
-    <p:sldId xmlns:r="http://schemas.openxmlformats.org/officeDocument/2006/relationships" id="256" r:id="Rbf84308bdb1b4a64"/>
-    <p:sldId xmlns:r="http://schemas.openxmlformats.org/officeDocument/2006/relationships" id="257" r:id="R62c02af46f574785"/>
-    <p:sldId xmlns:r="http://schemas.openxmlformats.org/officeDocument/2006/relationships" id="258" r:id="R1e1f5645a8ae41e2"/>
+    <p:sldId xmlns:r="http://schemas.openxmlformats.org/officeDocument/2006/relationships" id="256" r:id="R024cdb1efd834df7"/>
+    <p:sldId xmlns:r="http://schemas.openxmlformats.org/officeDocument/2006/relationships" id="257" r:id="R2dc7314c8eb643cc"/>
+    <p:sldId xmlns:r="http://schemas.openxmlformats.org/officeDocument/2006/relationships" id="258" r:id="Rcc906091a5b44633"/>
+    <p:sldId xmlns:r="http://schemas.openxmlformats.org/officeDocument/2006/relationships" id="259" r:id="R02074470234f403d"/>
   </p:sldIdLst>
   <p:sldSz cx="12192000" cy="6858000"/>
   <p:notesSz cx="6858000" cy="9144000"/>
@@ -697,6 +698,72 @@
 </p:notes>
 </file>
 
+<file path=ppt/notesSlides/notesSlide4.xml><?xml version="1.0" encoding="utf-8"?>
+<p:notes xmlns:p="http://schemas.openxmlformats.org/presentationml/2006/main">
+  <p:cSld>
+    <p:spTree>
+      <p:nvGrpSpPr>
+        <p:cNvPr id="1" name=""/>
+        <p:cNvGrpSpPr/>
+        <p:nvPr/>
+      </p:nvGrpSpPr>
+      <p:grpSpPr>
+        <a:xfrm xmlns:a="http://schemas.openxmlformats.org/drawingml/2006/main"/>
+      </p:grpSpPr>
+      <p:sp>
+        <p:nvSpPr>
+          <p:cNvPr id="2" name="Slide Image Placeholder 1"/>
+          <p:cNvSpPr>
+            <a:spLocks xmlns:a="http://schemas.openxmlformats.org/drawingml/2006/main" noGrp="1"/>
+          </p:cNvSpPr>
+          <p:nvPr>
+            <p:ph type="sldImg" idx="0"/>
+          </p:nvPr>
+        </p:nvSpPr>
+        <p:spPr/>
+      </p:sp>
+      <p:sp>
+        <p:nvSpPr>
+          <p:cNvPr id="3" name="Notes Placeholder 2"/>
+          <p:cNvSpPr>
+            <a:spLocks xmlns:a="http://schemas.openxmlformats.org/drawingml/2006/main" noGrp="1"/>
+          </p:cNvSpPr>
+          <p:nvPr>
+            <p:ph type="body" idx="1"/>
+          </p:nvPr>
+        </p:nvSpPr>
+        <p:spPr/>
+        <p:txBody>
+          <a:bodyPr xmlns:a="http://schemas.openxmlformats.org/drawingml/2006/main"/>
+          <a:lstStyle xmlns:a="http://schemas.openxmlformats.org/drawingml/2006/main"/>
+          <a:p xmlns:a="http://schemas.openxmlformats.org/drawingml/2006/main"/>
+        </p:txBody>
+      </p:sp>
+      <p:sp>
+        <p:nvSpPr>
+          <p:cNvPr id="4" name="Slide Number Placeholder 3"/>
+          <p:cNvSpPr>
+            <a:spLocks xmlns:a="http://schemas.openxmlformats.org/drawingml/2006/main" noGrp="1"/>
+          </p:cNvSpPr>
+          <p:nvPr>
+            <p:ph type="sldNum" idx="5"/>
+          </p:nvPr>
+        </p:nvSpPr>
+        <p:spPr/>
+        <p:txBody>
+          <a:bodyPr xmlns:a="http://schemas.openxmlformats.org/drawingml/2006/main"/>
+          <a:lstStyle xmlns:a="http://schemas.openxmlformats.org/drawingml/2006/main"/>
+          <a:p xmlns:a="http://schemas.openxmlformats.org/drawingml/2006/main"/>
+        </p:txBody>
+      </p:sp>
+    </p:spTree>
+  </p:cSld>
+  <p:clrMapOvr>
+    <a:masterClrMapping xmlns:a="http://schemas.openxmlformats.org/drawingml/2006/main"/>
+  </p:clrMapOvr>
+</p:notes>
+</file>
+
 <file path=ppt/slideLayouts/slideLayout1.xml><?xml version="1.0" encoding="utf-8"?>
 <p:sldLayout xmlns:p="http://schemas.openxmlformats.org/presentationml/2006/main" type="title">
   <p:cSld name="Title Slide">
@@ -735,7 +802,7 @@
   </p:cSld>
   <p:clrMap bg1="lt1" tx1="dk1" bg2="lt2" tx2="dk2" accent1="accent1" accent2="accent2" accent3="accent3" accent4="accent4" accent5="accent5" accent6="accent6" hlink="hlink" folHlink="folHlink"/>
   <p:sldLayoutIdLst>
-    <p:sldLayoutId xmlns:r="http://schemas.openxmlformats.org/officeDocument/2006/relationships" id="2147483649" r:id="R520cccd694914c8d"/>
+    <p:sldLayoutId xmlns:r="http://schemas.openxmlformats.org/officeDocument/2006/relationships" id="2147483649" r:id="Re05a8c3bde804376"/>
   </p:sldLayoutIdLst>
   <p:txStyles>
     <p:titleStyle>
@@ -1286,7 +1353,7 @@
           <p:cNvPr id="1" name="top-accent">
             <a:extLst xmlns:a="http://schemas.openxmlformats.org/drawingml/2006/main">
               <a:ext uri="{FF2B5EF4-FFF2-40B4-BE49-F238E27FC236}">
-                <a16:creationId xmlns:a16="http://schemas.microsoft.com/office/drawing/2014/main" id="{915478D6-C4E2-4B02-B978-E2F4ED0B4302}"/>
+                <a16:creationId xmlns:a16="http://schemas.microsoft.com/office/drawing/2014/main" id="{EF6E871E-54F0-46E6-8632-C6221EA04BE9}"/>
               </a:ext>
             </a:extLst>
           </p:cNvPr>
@@ -1319,7 +1386,7 @@
           <p:cNvPr id="2" name="left-accent">
             <a:extLst xmlns:a="http://schemas.openxmlformats.org/drawingml/2006/main">
               <a:ext uri="{FF2B5EF4-FFF2-40B4-BE49-F238E27FC236}">
-                <a16:creationId xmlns:a16="http://schemas.microsoft.com/office/drawing/2014/main" id="{ED023C25-CB6D-456D-AE1F-3AB87497C6EE}"/>
+                <a16:creationId xmlns:a16="http://schemas.microsoft.com/office/drawing/2014/main" id="{3A14BE7F-9051-4111-8876-2915016BCA97}"/>
               </a:ext>
             </a:extLst>
           </p:cNvPr>
@@ -1352,7 +1419,7 @@
           <p:cNvPr id="3" name="eyebrow">
             <a:extLst xmlns:a="http://schemas.openxmlformats.org/drawingml/2006/main">
               <a:ext uri="{FF2B5EF4-FFF2-40B4-BE49-F238E27FC236}">
-                <a16:creationId xmlns:a16="http://schemas.microsoft.com/office/drawing/2014/main" id="{7DB9DD6E-0B1E-409D-9F47-FAD1755D8796}"/>
+                <a16:creationId xmlns:a16="http://schemas.microsoft.com/office/drawing/2014/main" id="{C32C1A1C-5FFC-41B9-A302-1295D55D94DB}"/>
               </a:ext>
             </a:extLst>
           </p:cNvPr>
@@ -1402,7 +1469,7 @@
           <p:cNvPr id="4" name="footer">
             <a:extLst xmlns:a="http://schemas.openxmlformats.org/drawingml/2006/main">
               <a:ext uri="{FF2B5EF4-FFF2-40B4-BE49-F238E27FC236}">
-                <a16:creationId xmlns:a16="http://schemas.microsoft.com/office/drawing/2014/main" id="{589EBEF4-E64A-4757-B3AA-658A0BEB716C}"/>
+                <a16:creationId xmlns:a16="http://schemas.microsoft.com/office/drawing/2014/main" id="{FD5DD82E-E3DB-4FEB-9FCB-F5EA6BE73D10}"/>
               </a:ext>
             </a:extLst>
           </p:cNvPr>
@@ -1452,7 +1519,7 @@
           <p:cNvPr id="5" name="page-no">
             <a:extLst xmlns:a="http://schemas.openxmlformats.org/drawingml/2006/main">
               <a:ext uri="{FF2B5EF4-FFF2-40B4-BE49-F238E27FC236}">
-                <a16:creationId xmlns:a16="http://schemas.microsoft.com/office/drawing/2014/main" id="{7C8D61A1-8182-427F-9A8C-3EEC5C7D58FD}"/>
+                <a16:creationId xmlns:a16="http://schemas.microsoft.com/office/drawing/2014/main" id="{CA3927E2-ED2A-4F33-A815-A4799442B53B}"/>
               </a:ext>
             </a:extLst>
           </p:cNvPr>
@@ -1502,7 +1569,7 @@
           <p:cNvPr id="6" name="hero-panel">
             <a:extLst xmlns:a="http://schemas.openxmlformats.org/drawingml/2006/main">
               <a:ext uri="{FF2B5EF4-FFF2-40B4-BE49-F238E27FC236}">
-                <a16:creationId xmlns:a16="http://schemas.microsoft.com/office/drawing/2014/main" id="{7F599A71-FE45-4C49-96E6-376333CFDEFC}"/>
+                <a16:creationId xmlns:a16="http://schemas.microsoft.com/office/drawing/2014/main" id="{B5FF9048-4163-4B0B-93C6-B38C81DB7D1D}"/>
               </a:ext>
             </a:extLst>
           </p:cNvPr>
@@ -1535,7 +1602,7 @@
           <p:cNvPr id="7" name="hero-kicker">
             <a:extLst xmlns:a="http://schemas.openxmlformats.org/drawingml/2006/main">
               <a:ext uri="{FF2B5EF4-FFF2-40B4-BE49-F238E27FC236}">
-                <a16:creationId xmlns:a16="http://schemas.microsoft.com/office/drawing/2014/main" id="{90BFCC91-B00C-485F-B5D4-0FEFE6A16920}"/>
+                <a16:creationId xmlns:a16="http://schemas.microsoft.com/office/drawing/2014/main" id="{4B3D6365-598D-4C53-A782-0DDE18628968}"/>
               </a:ext>
             </a:extLst>
           </p:cNvPr>
@@ -1585,7 +1652,7 @@
           <p:cNvPr id="8" name="hero-title">
             <a:extLst xmlns:a="http://schemas.openxmlformats.org/drawingml/2006/main">
               <a:ext uri="{FF2B5EF4-FFF2-40B4-BE49-F238E27FC236}">
-                <a16:creationId xmlns:a16="http://schemas.microsoft.com/office/drawing/2014/main" id="{1C1624C8-8DA4-42D9-B024-2AFD8DD768CA}"/>
+                <a16:creationId xmlns:a16="http://schemas.microsoft.com/office/drawing/2014/main" id="{ADDCD46F-298C-4890-A394-6DEB66135A7D}"/>
               </a:ext>
             </a:extLst>
           </p:cNvPr>
@@ -1635,7 +1702,7 @@
           <p:cNvPr id="9" name="hero-subtitle">
             <a:extLst xmlns:a="http://schemas.openxmlformats.org/drawingml/2006/main">
               <a:ext uri="{FF2B5EF4-FFF2-40B4-BE49-F238E27FC236}">
-                <a16:creationId xmlns:a16="http://schemas.microsoft.com/office/drawing/2014/main" id="{BF1973F7-EDD0-4609-98B4-6074D36C725E}"/>
+                <a16:creationId xmlns:a16="http://schemas.microsoft.com/office/drawing/2014/main" id="{B2035ACF-A406-4B83-8FC5-790E60FECC20}"/>
               </a:ext>
             </a:extLst>
           </p:cNvPr>
@@ -1685,7 +1752,7 @@
           <p:cNvPr id="10" name="tag-1">
             <a:extLst xmlns:a="http://schemas.openxmlformats.org/drawingml/2006/main">
               <a:ext uri="{FF2B5EF4-FFF2-40B4-BE49-F238E27FC236}">
-                <a16:creationId xmlns:a16="http://schemas.microsoft.com/office/drawing/2014/main" id="{E7D25977-DB2E-4C56-BBDB-EBF5336941CB}"/>
+                <a16:creationId xmlns:a16="http://schemas.microsoft.com/office/drawing/2014/main" id="{CF57E612-CB17-4AD0-8089-6E513D93C944}"/>
               </a:ext>
             </a:extLst>
           </p:cNvPr>
@@ -1741,7 +1808,7 @@
           <p:cNvPr id="11" name="tag-2">
             <a:extLst xmlns:a="http://schemas.openxmlformats.org/drawingml/2006/main">
               <a:ext uri="{FF2B5EF4-FFF2-40B4-BE49-F238E27FC236}">
-                <a16:creationId xmlns:a16="http://schemas.microsoft.com/office/drawing/2014/main" id="{25EAF25A-8F71-46E2-83E8-2341EE1CE9AA}"/>
+                <a16:creationId xmlns:a16="http://schemas.microsoft.com/office/drawing/2014/main" id="{24F0C8BB-A82A-4004-849C-D4BF74FA91B4}"/>
               </a:ext>
             </a:extLst>
           </p:cNvPr>
@@ -1797,7 +1864,7 @@
           <p:cNvPr id="12" name="tag-3">
             <a:extLst xmlns:a="http://schemas.openxmlformats.org/drawingml/2006/main">
               <a:ext uri="{FF2B5EF4-FFF2-40B4-BE49-F238E27FC236}">
-                <a16:creationId xmlns:a16="http://schemas.microsoft.com/office/drawing/2014/main" id="{A882FE4B-C872-4CCB-B7FD-CA0AE586B88B}"/>
+                <a16:creationId xmlns:a16="http://schemas.microsoft.com/office/drawing/2014/main" id="{54D690C4-BCBD-4C88-A91C-A0CF61AFFA22}"/>
               </a:ext>
             </a:extLst>
           </p:cNvPr>
@@ -1853,7 +1920,7 @@
           <p:cNvPr id="13" name="scope-title">
             <a:extLst xmlns:a="http://schemas.openxmlformats.org/drawingml/2006/main">
               <a:ext uri="{FF2B5EF4-FFF2-40B4-BE49-F238E27FC236}">
-                <a16:creationId xmlns:a16="http://schemas.microsoft.com/office/drawing/2014/main" id="{DCC71DF3-4F72-4FC7-A341-27A46AF26988}"/>
+                <a16:creationId xmlns:a16="http://schemas.microsoft.com/office/drawing/2014/main" id="{E2FD3ADC-F90D-4E4B-A9F3-78846F15D4D1}"/>
               </a:ext>
             </a:extLst>
           </p:cNvPr>
@@ -1903,7 +1970,7 @@
           <p:cNvPr id="14" name="scope-note">
             <a:extLst xmlns:a="http://schemas.openxmlformats.org/drawingml/2006/main">
               <a:ext uri="{FF2B5EF4-FFF2-40B4-BE49-F238E27FC236}">
-                <a16:creationId xmlns:a16="http://schemas.microsoft.com/office/drawing/2014/main" id="{4E5FAB43-19AB-4831-BA4A-663D456C7B9A}"/>
+                <a16:creationId xmlns:a16="http://schemas.microsoft.com/office/drawing/2014/main" id="{67DB9ADC-84EC-4214-8A32-A95E83F163AD}"/>
               </a:ext>
             </a:extLst>
           </p:cNvPr>
@@ -1953,7 +2020,7 @@
           <p:cNvPr id="15" name="scope-row-1">
             <a:extLst xmlns:a="http://schemas.openxmlformats.org/drawingml/2006/main">
               <a:ext uri="{FF2B5EF4-FFF2-40B4-BE49-F238E27FC236}">
-                <a16:creationId xmlns:a16="http://schemas.microsoft.com/office/drawing/2014/main" id="{14595D21-8304-4EBB-BEA7-CE99EC4F026A}"/>
+                <a16:creationId xmlns:a16="http://schemas.microsoft.com/office/drawing/2014/main" id="{4C12610D-4C0A-4214-A87F-4CE4CFCC5388}"/>
               </a:ext>
             </a:extLst>
           </p:cNvPr>
@@ -1986,7 +2053,7 @@
           <p:cNvPr id="16" name="scope-label-1">
             <a:extLst xmlns:a="http://schemas.openxmlformats.org/drawingml/2006/main">
               <a:ext uri="{FF2B5EF4-FFF2-40B4-BE49-F238E27FC236}">
-                <a16:creationId xmlns:a16="http://schemas.microsoft.com/office/drawing/2014/main" id="{07E724B2-100F-4078-9CB9-ADFAC0406180}"/>
+                <a16:creationId xmlns:a16="http://schemas.microsoft.com/office/drawing/2014/main" id="{335F205F-678E-4644-BF6F-DFF2B1A0CB01}"/>
               </a:ext>
             </a:extLst>
           </p:cNvPr>
@@ -2036,7 +2103,7 @@
           <p:cNvPr id="17" name="scope-value-1">
             <a:extLst xmlns:a="http://schemas.openxmlformats.org/drawingml/2006/main">
               <a:ext uri="{FF2B5EF4-FFF2-40B4-BE49-F238E27FC236}">
-                <a16:creationId xmlns:a16="http://schemas.microsoft.com/office/drawing/2014/main" id="{F513CBC5-C018-430F-A0C7-D02C876A99C2}"/>
+                <a16:creationId xmlns:a16="http://schemas.microsoft.com/office/drawing/2014/main" id="{00DBFD1A-EB29-4725-B716-FAFE3197E388}"/>
               </a:ext>
             </a:extLst>
           </p:cNvPr>
@@ -2086,7 +2153,7 @@
           <p:cNvPr id="18" name="scope-row-2">
             <a:extLst xmlns:a="http://schemas.openxmlformats.org/drawingml/2006/main">
               <a:ext uri="{FF2B5EF4-FFF2-40B4-BE49-F238E27FC236}">
-                <a16:creationId xmlns:a16="http://schemas.microsoft.com/office/drawing/2014/main" id="{211FAC08-5FE6-461F-AEEA-C2DAA87D426C}"/>
+                <a16:creationId xmlns:a16="http://schemas.microsoft.com/office/drawing/2014/main" id="{E2C42690-E149-4D87-BB53-D4C433F83DEF}"/>
               </a:ext>
             </a:extLst>
           </p:cNvPr>
@@ -2119,7 +2186,7 @@
           <p:cNvPr id="19" name="scope-label-2">
             <a:extLst xmlns:a="http://schemas.openxmlformats.org/drawingml/2006/main">
               <a:ext uri="{FF2B5EF4-FFF2-40B4-BE49-F238E27FC236}">
-                <a16:creationId xmlns:a16="http://schemas.microsoft.com/office/drawing/2014/main" id="{C1D609A1-251D-4C43-A8DF-60CE86A126CA}"/>
+                <a16:creationId xmlns:a16="http://schemas.microsoft.com/office/drawing/2014/main" id="{7564D172-F2AA-47A5-B310-FB14808851A8}"/>
               </a:ext>
             </a:extLst>
           </p:cNvPr>
@@ -2169,7 +2236,7 @@
           <p:cNvPr id="20" name="scope-value-2">
             <a:extLst xmlns:a="http://schemas.openxmlformats.org/drawingml/2006/main">
               <a:ext uri="{FF2B5EF4-FFF2-40B4-BE49-F238E27FC236}">
-                <a16:creationId xmlns:a16="http://schemas.microsoft.com/office/drawing/2014/main" id="{FE07C9B7-9251-4B43-9E01-4083708FBFF8}"/>
+                <a16:creationId xmlns:a16="http://schemas.microsoft.com/office/drawing/2014/main" id="{72CE553D-A5A4-460B-A0A0-645FA4F87452}"/>
               </a:ext>
             </a:extLst>
           </p:cNvPr>
@@ -2219,7 +2286,7 @@
           <p:cNvPr id="21" name="scope-row-3">
             <a:extLst xmlns:a="http://schemas.openxmlformats.org/drawingml/2006/main">
               <a:ext uri="{FF2B5EF4-FFF2-40B4-BE49-F238E27FC236}">
-                <a16:creationId xmlns:a16="http://schemas.microsoft.com/office/drawing/2014/main" id="{21C8AF00-CCD6-46F2-8DBE-D2845BB7CCFD}"/>
+                <a16:creationId xmlns:a16="http://schemas.microsoft.com/office/drawing/2014/main" id="{B667751D-BD09-406F-99F1-722EEC65EB80}"/>
               </a:ext>
             </a:extLst>
           </p:cNvPr>
@@ -2252,7 +2319,7 @@
           <p:cNvPr id="22" name="scope-label-3">
             <a:extLst xmlns:a="http://schemas.openxmlformats.org/drawingml/2006/main">
               <a:ext uri="{FF2B5EF4-FFF2-40B4-BE49-F238E27FC236}">
-                <a16:creationId xmlns:a16="http://schemas.microsoft.com/office/drawing/2014/main" id="{C300E796-8E6E-43F6-A80F-C9670605ED63}"/>
+                <a16:creationId xmlns:a16="http://schemas.microsoft.com/office/drawing/2014/main" id="{2F87E506-3350-4812-A89B-23CE9E6A589D}"/>
               </a:ext>
             </a:extLst>
           </p:cNvPr>
@@ -2302,7 +2369,7 @@
           <p:cNvPr id="23" name="scope-value-3">
             <a:extLst xmlns:a="http://schemas.openxmlformats.org/drawingml/2006/main">
               <a:ext uri="{FF2B5EF4-FFF2-40B4-BE49-F238E27FC236}">
-                <a16:creationId xmlns:a16="http://schemas.microsoft.com/office/drawing/2014/main" id="{56474A90-BFBB-4C1D-A98C-99EEF3BCAE81}"/>
+                <a16:creationId xmlns:a16="http://schemas.microsoft.com/office/drawing/2014/main" id="{536D4063-A103-4223-ABBD-5BE69D1DAD6B}"/>
               </a:ext>
             </a:extLst>
           </p:cNvPr>
@@ -2352,7 +2419,7 @@
           <p:cNvPr id="24" name="scope-row-4">
             <a:extLst xmlns:a="http://schemas.openxmlformats.org/drawingml/2006/main">
               <a:ext uri="{FF2B5EF4-FFF2-40B4-BE49-F238E27FC236}">
-                <a16:creationId xmlns:a16="http://schemas.microsoft.com/office/drawing/2014/main" id="{73653595-F7BC-4DFD-83C4-2D0E57A7E781}"/>
+                <a16:creationId xmlns:a16="http://schemas.microsoft.com/office/drawing/2014/main" id="{833BE1D9-9783-4146-A0CC-C52E2D831BD0}"/>
               </a:ext>
             </a:extLst>
           </p:cNvPr>
@@ -2385,7 +2452,7 @@
           <p:cNvPr id="25" name="scope-label-4">
             <a:extLst xmlns:a="http://schemas.openxmlformats.org/drawingml/2006/main">
               <a:ext uri="{FF2B5EF4-FFF2-40B4-BE49-F238E27FC236}">
-                <a16:creationId xmlns:a16="http://schemas.microsoft.com/office/drawing/2014/main" id="{85390BD5-B89F-4BB8-BA98-689D64857A30}"/>
+                <a16:creationId xmlns:a16="http://schemas.microsoft.com/office/drawing/2014/main" id="{48716E3A-78B4-4F01-B41F-738A48415E0E}"/>
               </a:ext>
             </a:extLst>
           </p:cNvPr>
@@ -2435,7 +2502,7 @@
           <p:cNvPr id="26" name="scope-value-4">
             <a:extLst xmlns:a="http://schemas.openxmlformats.org/drawingml/2006/main">
               <a:ext uri="{FF2B5EF4-FFF2-40B4-BE49-F238E27FC236}">
-                <a16:creationId xmlns:a16="http://schemas.microsoft.com/office/drawing/2014/main" id="{8EB7FB78-6B7A-460D-A1D4-35DE81FC8814}"/>
+                <a16:creationId xmlns:a16="http://schemas.microsoft.com/office/drawing/2014/main" id="{20287506-F50E-4BEC-9DDD-AE98ACFE6920}"/>
               </a:ext>
             </a:extLst>
           </p:cNvPr>
@@ -2485,7 +2552,7 @@
           <p:cNvPr id="27" name="evidence-title">
             <a:extLst xmlns:a="http://schemas.openxmlformats.org/drawingml/2006/main">
               <a:ext uri="{FF2B5EF4-FFF2-40B4-BE49-F238E27FC236}">
-                <a16:creationId xmlns:a16="http://schemas.microsoft.com/office/drawing/2014/main" id="{E144894E-E9C3-4C11-A88C-B54C375B6B69}"/>
+                <a16:creationId xmlns:a16="http://schemas.microsoft.com/office/drawing/2014/main" id="{5FC098D1-8FE2-4FA9-B3BA-39F847ED071A}"/>
               </a:ext>
             </a:extLst>
           </p:cNvPr>
@@ -2535,7 +2602,7 @@
           <p:cNvPr id="28" name="evidence-card-1">
             <a:extLst xmlns:a="http://schemas.openxmlformats.org/drawingml/2006/main">
               <a:ext uri="{FF2B5EF4-FFF2-40B4-BE49-F238E27FC236}">
-                <a16:creationId xmlns:a16="http://schemas.microsoft.com/office/drawing/2014/main" id="{9F0A17F9-2C37-4464-A861-B1F2A50E45D2}"/>
+                <a16:creationId xmlns:a16="http://schemas.microsoft.com/office/drawing/2014/main" id="{0557C158-E4DA-4C69-9F38-744AF0D0AC43}"/>
               </a:ext>
             </a:extLst>
           </p:cNvPr>
@@ -2570,7 +2637,7 @@
           <p:cNvPr id="29" name="evidence-bar-1">
             <a:extLst xmlns:a="http://schemas.openxmlformats.org/drawingml/2006/main">
               <a:ext uri="{FF2B5EF4-FFF2-40B4-BE49-F238E27FC236}">
-                <a16:creationId xmlns:a16="http://schemas.microsoft.com/office/drawing/2014/main" id="{E1D4CD3B-1413-4F23-89D8-7D6D932FB9A9}"/>
+                <a16:creationId xmlns:a16="http://schemas.microsoft.com/office/drawing/2014/main" id="{92050C45-487E-4773-8D46-6A7589DFF300}"/>
               </a:ext>
             </a:extLst>
           </p:cNvPr>
@@ -2603,7 +2670,7 @@
           <p:cNvPr id="30" name="evidence-title-1">
             <a:extLst xmlns:a="http://schemas.openxmlformats.org/drawingml/2006/main">
               <a:ext uri="{FF2B5EF4-FFF2-40B4-BE49-F238E27FC236}">
-                <a16:creationId xmlns:a16="http://schemas.microsoft.com/office/drawing/2014/main" id="{FECBBD11-8719-4334-AE99-8D7050E3EEA1}"/>
+                <a16:creationId xmlns:a16="http://schemas.microsoft.com/office/drawing/2014/main" id="{AE069EFC-1F3B-4928-BF0D-C78EC46CFD86}"/>
               </a:ext>
             </a:extLst>
           </p:cNvPr>
@@ -2653,7 +2720,7 @@
           <p:cNvPr id="31" name="evidence-body-1">
             <a:extLst xmlns:a="http://schemas.openxmlformats.org/drawingml/2006/main">
               <a:ext uri="{FF2B5EF4-FFF2-40B4-BE49-F238E27FC236}">
-                <a16:creationId xmlns:a16="http://schemas.microsoft.com/office/drawing/2014/main" id="{7DA3C8AF-2BE6-4EAA-B12F-E6F86AD4FB73}"/>
+                <a16:creationId xmlns:a16="http://schemas.microsoft.com/office/drawing/2014/main" id="{C4244FE5-551D-4AB6-ABD1-D257415A3E8F}"/>
               </a:ext>
             </a:extLst>
           </p:cNvPr>
@@ -2703,7 +2770,7 @@
           <p:cNvPr id="32" name="evidence-card-2">
             <a:extLst xmlns:a="http://schemas.openxmlformats.org/drawingml/2006/main">
               <a:ext uri="{FF2B5EF4-FFF2-40B4-BE49-F238E27FC236}">
-                <a16:creationId xmlns:a16="http://schemas.microsoft.com/office/drawing/2014/main" id="{0402305E-2FC3-4D57-9615-EC82D4528476}"/>
+                <a16:creationId xmlns:a16="http://schemas.microsoft.com/office/drawing/2014/main" id="{D3999706-A676-46CC-8871-8E62BB80E267}"/>
               </a:ext>
             </a:extLst>
           </p:cNvPr>
@@ -2738,7 +2805,7 @@
           <p:cNvPr id="33" name="evidence-bar-2">
             <a:extLst xmlns:a="http://schemas.openxmlformats.org/drawingml/2006/main">
               <a:ext uri="{FF2B5EF4-FFF2-40B4-BE49-F238E27FC236}">
-                <a16:creationId xmlns:a16="http://schemas.microsoft.com/office/drawing/2014/main" id="{7A0852F6-63E3-4D71-95B8-5D543F31E956}"/>
+                <a16:creationId xmlns:a16="http://schemas.microsoft.com/office/drawing/2014/main" id="{FA6292D2-1300-4D2B-9756-15FA1FF1D6F6}"/>
               </a:ext>
             </a:extLst>
           </p:cNvPr>
@@ -2771,7 +2838,7 @@
           <p:cNvPr id="34" name="evidence-title-2">
             <a:extLst xmlns:a="http://schemas.openxmlformats.org/drawingml/2006/main">
               <a:ext uri="{FF2B5EF4-FFF2-40B4-BE49-F238E27FC236}">
-                <a16:creationId xmlns:a16="http://schemas.microsoft.com/office/drawing/2014/main" id="{00172DA9-9DA4-41F7-93F0-DA3C609E9A45}"/>
+                <a16:creationId xmlns:a16="http://schemas.microsoft.com/office/drawing/2014/main" id="{57D91E72-C2FC-4020-B2FA-F15D015352D7}"/>
               </a:ext>
             </a:extLst>
           </p:cNvPr>
@@ -2821,7 +2888,7 @@
           <p:cNvPr id="35" name="evidence-body-2">
             <a:extLst xmlns:a="http://schemas.openxmlformats.org/drawingml/2006/main">
               <a:ext uri="{FF2B5EF4-FFF2-40B4-BE49-F238E27FC236}">
-                <a16:creationId xmlns:a16="http://schemas.microsoft.com/office/drawing/2014/main" id="{0C1CEADD-B4AF-45C6-A413-BF9B600D5944}"/>
+                <a16:creationId xmlns:a16="http://schemas.microsoft.com/office/drawing/2014/main" id="{8250533F-B925-4437-A9BA-2B30FFAD37FB}"/>
               </a:ext>
             </a:extLst>
           </p:cNvPr>
@@ -2871,7 +2938,7 @@
           <p:cNvPr id="36" name="evidence-card-3">
             <a:extLst xmlns:a="http://schemas.openxmlformats.org/drawingml/2006/main">
               <a:ext uri="{FF2B5EF4-FFF2-40B4-BE49-F238E27FC236}">
-                <a16:creationId xmlns:a16="http://schemas.microsoft.com/office/drawing/2014/main" id="{2FD10DC0-7D6D-4493-B081-68F14DB5E5DD}"/>
+                <a16:creationId xmlns:a16="http://schemas.microsoft.com/office/drawing/2014/main" id="{2440D61D-BA59-44FB-93E0-527A33186F04}"/>
               </a:ext>
             </a:extLst>
           </p:cNvPr>
@@ -2906,7 +2973,7 @@
           <p:cNvPr id="37" name="evidence-bar-3">
             <a:extLst xmlns:a="http://schemas.openxmlformats.org/drawingml/2006/main">
               <a:ext uri="{FF2B5EF4-FFF2-40B4-BE49-F238E27FC236}">
-                <a16:creationId xmlns:a16="http://schemas.microsoft.com/office/drawing/2014/main" id="{71BBF68A-5F9D-46DA-8F79-B0F6D3F28786}"/>
+                <a16:creationId xmlns:a16="http://schemas.microsoft.com/office/drawing/2014/main" id="{90EDC4F0-6B5D-46B9-B858-E72664433829}"/>
               </a:ext>
             </a:extLst>
           </p:cNvPr>
@@ -2939,7 +3006,7 @@
           <p:cNvPr id="38" name="evidence-title-3">
             <a:extLst xmlns:a="http://schemas.openxmlformats.org/drawingml/2006/main">
               <a:ext uri="{FF2B5EF4-FFF2-40B4-BE49-F238E27FC236}">
-                <a16:creationId xmlns:a16="http://schemas.microsoft.com/office/drawing/2014/main" id="{582CC6DC-17B6-4C56-B9C6-4C11AF3FFBBE}"/>
+                <a16:creationId xmlns:a16="http://schemas.microsoft.com/office/drawing/2014/main" id="{2F4E645D-5998-4334-9F21-5DD1A9E2E011}"/>
               </a:ext>
             </a:extLst>
           </p:cNvPr>
@@ -2989,7 +3056,7 @@
           <p:cNvPr id="39" name="evidence-body-3">
             <a:extLst xmlns:a="http://schemas.openxmlformats.org/drawingml/2006/main">
               <a:ext uri="{FF2B5EF4-FFF2-40B4-BE49-F238E27FC236}">
-                <a16:creationId xmlns:a16="http://schemas.microsoft.com/office/drawing/2014/main" id="{7060E1E2-4592-4FEC-84B8-08631965E3D6}"/>
+                <a16:creationId xmlns:a16="http://schemas.microsoft.com/office/drawing/2014/main" id="{92AC30B7-B8D2-489D-A6C4-3AA6BAB60631}"/>
               </a:ext>
             </a:extLst>
           </p:cNvPr>
@@ -3037,7 +3104,7 @@
     </p:spTree>
     <p:extLst>
       <p:ext uri="{BB962C8B-B14F-4D97-AF65-F5344CB8AC3E}">
-        <p14:creationId xmlns:p14="http://schemas.microsoft.com/office/powerpoint/2010/main" val="1414832179"/>
+        <p14:creationId xmlns:p14="http://schemas.microsoft.com/office/powerpoint/2010/main" val="1190684672"/>
       </p:ext>
     </p:extLst>
   </p:cSld>
@@ -3068,7 +3135,7 @@
           <p:cNvPr id="1" name="top-accent">
             <a:extLst xmlns:a="http://schemas.openxmlformats.org/drawingml/2006/main">
               <a:ext uri="{FF2B5EF4-FFF2-40B4-BE49-F238E27FC236}">
-                <a16:creationId xmlns:a16="http://schemas.microsoft.com/office/drawing/2014/main" id="{C5B4065F-AF9C-472D-BEAC-01079763F569}"/>
+                <a16:creationId xmlns:a16="http://schemas.microsoft.com/office/drawing/2014/main" id="{3A43E086-8A89-47E3-B486-42AA2E637266}"/>
               </a:ext>
             </a:extLst>
           </p:cNvPr>
@@ -3101,7 +3168,7 @@
           <p:cNvPr id="2" name="left-accent">
             <a:extLst xmlns:a="http://schemas.openxmlformats.org/drawingml/2006/main">
               <a:ext uri="{FF2B5EF4-FFF2-40B4-BE49-F238E27FC236}">
-                <a16:creationId xmlns:a16="http://schemas.microsoft.com/office/drawing/2014/main" id="{108FB09B-C99E-40FA-B33C-CB151F014D58}"/>
+                <a16:creationId xmlns:a16="http://schemas.microsoft.com/office/drawing/2014/main" id="{8CAB8563-9111-4E26-A49E-089BE172A324}"/>
               </a:ext>
             </a:extLst>
           </p:cNvPr>
@@ -3134,7 +3201,7 @@
           <p:cNvPr id="3" name="eyebrow">
             <a:extLst xmlns:a="http://schemas.openxmlformats.org/drawingml/2006/main">
               <a:ext uri="{FF2B5EF4-FFF2-40B4-BE49-F238E27FC236}">
-                <a16:creationId xmlns:a16="http://schemas.microsoft.com/office/drawing/2014/main" id="{79F5C9BA-0339-4966-B12E-4B48029BD32C}"/>
+                <a16:creationId xmlns:a16="http://schemas.microsoft.com/office/drawing/2014/main" id="{1BEA5706-5583-417F-82EE-3B8A6F18699C}"/>
               </a:ext>
             </a:extLst>
           </p:cNvPr>
@@ -3184,7 +3251,7 @@
           <p:cNvPr id="4" name="footer">
             <a:extLst xmlns:a="http://schemas.openxmlformats.org/drawingml/2006/main">
               <a:ext uri="{FF2B5EF4-FFF2-40B4-BE49-F238E27FC236}">
-                <a16:creationId xmlns:a16="http://schemas.microsoft.com/office/drawing/2014/main" id="{E5F9E4AD-7573-48A5-ACD7-C7697C81D5BD}"/>
+                <a16:creationId xmlns:a16="http://schemas.microsoft.com/office/drawing/2014/main" id="{4A206D99-822B-4291-8893-61B826891897}"/>
               </a:ext>
             </a:extLst>
           </p:cNvPr>
@@ -3234,7 +3301,7 @@
           <p:cNvPr id="5" name="page-no">
             <a:extLst xmlns:a="http://schemas.openxmlformats.org/drawingml/2006/main">
               <a:ext uri="{FF2B5EF4-FFF2-40B4-BE49-F238E27FC236}">
-                <a16:creationId xmlns:a16="http://schemas.microsoft.com/office/drawing/2014/main" id="{EA804ACF-259E-4576-BC80-30A91CFCC5C9}"/>
+                <a16:creationId xmlns:a16="http://schemas.microsoft.com/office/drawing/2014/main" id="{4510B05D-BD79-4AAD-B7CD-91CD538072E5}"/>
               </a:ext>
             </a:extLst>
           </p:cNvPr>
@@ -3284,7 +3351,7 @@
           <p:cNvPr id="6" name="title-02">
             <a:extLst xmlns:a="http://schemas.openxmlformats.org/drawingml/2006/main">
               <a:ext uri="{FF2B5EF4-FFF2-40B4-BE49-F238E27FC236}">
-                <a16:creationId xmlns:a16="http://schemas.microsoft.com/office/drawing/2014/main" id="{78331278-F27C-4F68-B39D-4C8FE45FE7EF}"/>
+                <a16:creationId xmlns:a16="http://schemas.microsoft.com/office/drawing/2014/main" id="{93DA5A2B-44BD-47A5-A31C-4FB7EBBFF8B8}"/>
               </a:ext>
             </a:extLst>
           </p:cNvPr>
@@ -3324,7 +3391,7 @@
                   <a:srgbClr val="FFFFFF"/>
                 </a:solidFill>
               </a:rPr>
-              <a:t>6개월 런칭 준비는 네 축이 병렬로 움직입니다</a:t>
+              <a:t>6개월 런칭 준비는 마일스톤과 릴리즈 기준을 함께 맞춥니다</a:t>
             </a:r>
           </a:p>
         </p:txBody>
@@ -3334,7 +3401,7 @@
           <p:cNvPr id="7" name="subtitle-02">
             <a:extLst xmlns:a="http://schemas.openxmlformats.org/drawingml/2006/main">
               <a:ext uri="{FF2B5EF4-FFF2-40B4-BE49-F238E27FC236}">
-                <a16:creationId xmlns:a16="http://schemas.microsoft.com/office/drawing/2014/main" id="{06A6556A-7FB6-4A2A-894E-DF69689361A0}"/>
+                <a16:creationId xmlns:a16="http://schemas.microsoft.com/office/drawing/2014/main" id="{25E878C4-34F9-4EDE-8FE9-8D979D71A44D}"/>
               </a:ext>
             </a:extLst>
           </p:cNvPr>
@@ -3374,7 +3441,7 @@
                   <a:srgbClr val="CBD5E1"/>
                 </a:solidFill>
               </a:rPr>
-              <a:t>월별 단계는 순차 진행처럼 보이지만, PM 관점에서는 범위·버전·검수 기준을 동시에 맞춰야 합니다.</a:t>
+              <a:t>PM 관점에서는 일정·범위 통제, 빌드·버전 관리, QA, 퍼블리셔 대응을 같은 흐름으로 관리해야 합니다.</a:t>
             </a:r>
           </a:p>
         </p:txBody>
@@ -3384,7 +3451,7 @@
           <p:cNvPr id="8" name="timeline-line">
             <a:extLst xmlns:a="http://schemas.openxmlformats.org/drawingml/2006/main">
               <a:ext uri="{FF2B5EF4-FFF2-40B4-BE49-F238E27FC236}">
-                <a16:creationId xmlns:a16="http://schemas.microsoft.com/office/drawing/2014/main" id="{F91F3DFC-FD0B-49A9-B449-8A082B1A6CA5}"/>
+                <a16:creationId xmlns:a16="http://schemas.microsoft.com/office/drawing/2014/main" id="{DA61E38C-309C-4557-B424-8156157CAC2E}"/>
               </a:ext>
             </a:extLst>
           </p:cNvPr>
@@ -3417,7 +3484,7 @@
           <p:cNvPr id="9" name="timeline-card-1">
             <a:extLst xmlns:a="http://schemas.openxmlformats.org/drawingml/2006/main">
               <a:ext uri="{FF2B5EF4-FFF2-40B4-BE49-F238E27FC236}">
-                <a16:creationId xmlns:a16="http://schemas.microsoft.com/office/drawing/2014/main" id="{7C77F99E-032D-4082-A73D-ACFCA4610A4B}"/>
+                <a16:creationId xmlns:a16="http://schemas.microsoft.com/office/drawing/2014/main" id="{71F326DD-56CB-4AFF-A765-E1FAAC97618F}"/>
               </a:ext>
             </a:extLst>
           </p:cNvPr>
@@ -3452,7 +3519,7 @@
           <p:cNvPr id="10" name="timeline-bar-1">
             <a:extLst xmlns:a="http://schemas.openxmlformats.org/drawingml/2006/main">
               <a:ext uri="{FF2B5EF4-FFF2-40B4-BE49-F238E27FC236}">
-                <a16:creationId xmlns:a16="http://schemas.microsoft.com/office/drawing/2014/main" id="{DC9B893B-A935-411F-BD8B-472C4675A11A}"/>
+                <a16:creationId xmlns:a16="http://schemas.microsoft.com/office/drawing/2014/main" id="{B652463F-AFCF-44F4-94C3-596167665129}"/>
               </a:ext>
             </a:extLst>
           </p:cNvPr>
@@ -3485,7 +3552,7 @@
           <p:cNvPr id="11" name="timeline-month-1">
             <a:extLst xmlns:a="http://schemas.openxmlformats.org/drawingml/2006/main">
               <a:ext uri="{FF2B5EF4-FFF2-40B4-BE49-F238E27FC236}">
-                <a16:creationId xmlns:a16="http://schemas.microsoft.com/office/drawing/2014/main" id="{D8D2538B-AEF6-42C5-83B2-FF5C5510FD29}"/>
+                <a16:creationId xmlns:a16="http://schemas.microsoft.com/office/drawing/2014/main" id="{DCE0EA11-1AAE-4717-95F8-26061B505C24}"/>
               </a:ext>
             </a:extLst>
           </p:cNvPr>
@@ -3535,7 +3602,7 @@
           <p:cNvPr id="12" name="timeline-title-1">
             <a:extLst xmlns:a="http://schemas.openxmlformats.org/drawingml/2006/main">
               <a:ext uri="{FF2B5EF4-FFF2-40B4-BE49-F238E27FC236}">
-                <a16:creationId xmlns:a16="http://schemas.microsoft.com/office/drawing/2014/main" id="{8F055F9B-1FD6-4BD3-A5E6-FFFB716924A6}"/>
+                <a16:creationId xmlns:a16="http://schemas.microsoft.com/office/drawing/2014/main" id="{F9079AF9-10DB-480B-945A-9E18BDF9DA8A}"/>
               </a:ext>
             </a:extLst>
           </p:cNvPr>
@@ -3575,7 +3642,7 @@
                   <a:srgbClr val="FFFFFF"/>
                 </a:solidFill>
               </a:rPr>
-              <a:t>런칭 범위 확정</a:t>
+              <a:t>범위·일정 확정</a:t>
             </a:r>
           </a:p>
         </p:txBody>
@@ -3585,7 +3652,7 @@
           <p:cNvPr id="13" name="timeline-dot-1-1">
             <a:extLst xmlns:a="http://schemas.openxmlformats.org/drawingml/2006/main">
               <a:ext uri="{FF2B5EF4-FFF2-40B4-BE49-F238E27FC236}">
-                <a16:creationId xmlns:a16="http://schemas.microsoft.com/office/drawing/2014/main" id="{80971BCC-3E95-401E-AC84-3D9D98071784}"/>
+                <a16:creationId xmlns:a16="http://schemas.microsoft.com/office/drawing/2014/main" id="{2C5E123D-D31B-4307-9FC4-AF7593AA2603}"/>
               </a:ext>
             </a:extLst>
           </p:cNvPr>
@@ -3635,7 +3702,7 @@
           <p:cNvPr id="14" name="timeline-item-1-1">
             <a:extLst xmlns:a="http://schemas.openxmlformats.org/drawingml/2006/main">
               <a:ext uri="{FF2B5EF4-FFF2-40B4-BE49-F238E27FC236}">
-                <a16:creationId xmlns:a16="http://schemas.microsoft.com/office/drawing/2014/main" id="{CD321824-E8AB-4817-8643-F9EFC76F8F08}"/>
+                <a16:creationId xmlns:a16="http://schemas.microsoft.com/office/drawing/2014/main" id="{901EB455-DC34-4374-9350-63185609CA8E}"/>
               </a:ext>
             </a:extLst>
           </p:cNvPr>
@@ -3685,7 +3752,7 @@
           <p:cNvPr id="15" name="timeline-dot-1-2">
             <a:extLst xmlns:a="http://schemas.openxmlformats.org/drawingml/2006/main">
               <a:ext uri="{FF2B5EF4-FFF2-40B4-BE49-F238E27FC236}">
-                <a16:creationId xmlns:a16="http://schemas.microsoft.com/office/drawing/2014/main" id="{6C80BE1F-3692-402D-A54D-A9AED1732DED}"/>
+                <a16:creationId xmlns:a16="http://schemas.microsoft.com/office/drawing/2014/main" id="{5F4D47F7-3FD2-45BD-9B60-681FE8C9834A}"/>
               </a:ext>
             </a:extLst>
           </p:cNvPr>
@@ -3735,7 +3802,7 @@
           <p:cNvPr id="16" name="timeline-item-1-2">
             <a:extLst xmlns:a="http://schemas.openxmlformats.org/drawingml/2006/main">
               <a:ext uri="{FF2B5EF4-FFF2-40B4-BE49-F238E27FC236}">
-                <a16:creationId xmlns:a16="http://schemas.microsoft.com/office/drawing/2014/main" id="{41ACFFF6-0F0E-491C-9FC3-2F490CF7E94E}"/>
+                <a16:creationId xmlns:a16="http://schemas.microsoft.com/office/drawing/2014/main" id="{7673024C-A4B5-4A58-8D71-2885E6E62120}"/>
               </a:ext>
             </a:extLst>
           </p:cNvPr>
@@ -3775,7 +3842,7 @@
                   <a:srgbClr val="CBD5E1"/>
                 </a:solidFill>
               </a:rPr>
-              <a:t>주요 콘텐츠 기준</a:t>
+              <a:t>마일스톤 기준</a:t>
             </a:r>
           </a:p>
         </p:txBody>
@@ -3785,7 +3852,7 @@
           <p:cNvPr id="17" name="timeline-dot-1-3">
             <a:extLst xmlns:a="http://schemas.openxmlformats.org/drawingml/2006/main">
               <a:ext uri="{FF2B5EF4-FFF2-40B4-BE49-F238E27FC236}">
-                <a16:creationId xmlns:a16="http://schemas.microsoft.com/office/drawing/2014/main" id="{93FB5EA8-3AF8-40B6-A1A6-A1C03486FDAD}"/>
+                <a16:creationId xmlns:a16="http://schemas.microsoft.com/office/drawing/2014/main" id="{2EDB2DB6-7193-4B99-97A0-D09C0D634D40}"/>
               </a:ext>
             </a:extLst>
           </p:cNvPr>
@@ -3835,7 +3902,7 @@
           <p:cNvPr id="18" name="timeline-item-1-3">
             <a:extLst xmlns:a="http://schemas.openxmlformats.org/drawingml/2006/main">
               <a:ext uri="{FF2B5EF4-FFF2-40B4-BE49-F238E27FC236}">
-                <a16:creationId xmlns:a16="http://schemas.microsoft.com/office/drawing/2014/main" id="{688CC708-B5E4-4124-9905-347F2F4DB545}"/>
+                <a16:creationId xmlns:a16="http://schemas.microsoft.com/office/drawing/2014/main" id="{5C633E05-D953-488C-B990-93673E5E7FCF}"/>
               </a:ext>
             </a:extLst>
           </p:cNvPr>
@@ -3885,7 +3952,7 @@
           <p:cNvPr id="19" name="timeline-card-2">
             <a:extLst xmlns:a="http://schemas.openxmlformats.org/drawingml/2006/main">
               <a:ext uri="{FF2B5EF4-FFF2-40B4-BE49-F238E27FC236}">
-                <a16:creationId xmlns:a16="http://schemas.microsoft.com/office/drawing/2014/main" id="{FFDA65BA-3851-4630-AADC-C8C7C5E58341}"/>
+                <a16:creationId xmlns:a16="http://schemas.microsoft.com/office/drawing/2014/main" id="{22F9E5B4-F844-423C-B4DD-6CFFD20B2379}"/>
               </a:ext>
             </a:extLst>
           </p:cNvPr>
@@ -3920,7 +3987,7 @@
           <p:cNvPr id="20" name="timeline-bar-2">
             <a:extLst xmlns:a="http://schemas.openxmlformats.org/drawingml/2006/main">
               <a:ext uri="{FF2B5EF4-FFF2-40B4-BE49-F238E27FC236}">
-                <a16:creationId xmlns:a16="http://schemas.microsoft.com/office/drawing/2014/main" id="{DFB40DC3-62CB-46FF-9115-A62DE7525413}"/>
+                <a16:creationId xmlns:a16="http://schemas.microsoft.com/office/drawing/2014/main" id="{C969E6A5-9E57-43B9-BD01-0773E50338B8}"/>
               </a:ext>
             </a:extLst>
           </p:cNvPr>
@@ -3953,7 +4020,7 @@
           <p:cNvPr id="21" name="timeline-month-2">
             <a:extLst xmlns:a="http://schemas.openxmlformats.org/drawingml/2006/main">
               <a:ext uri="{FF2B5EF4-FFF2-40B4-BE49-F238E27FC236}">
-                <a16:creationId xmlns:a16="http://schemas.microsoft.com/office/drawing/2014/main" id="{8E56C1FC-16A7-46D6-81CC-83BC6D5FBD1A}"/>
+                <a16:creationId xmlns:a16="http://schemas.microsoft.com/office/drawing/2014/main" id="{8BBA170C-B22B-43CE-89F2-DF96FD87787E}"/>
               </a:ext>
             </a:extLst>
           </p:cNvPr>
@@ -4003,7 +4070,7 @@
           <p:cNvPr id="22" name="timeline-title-2">
             <a:extLst xmlns:a="http://schemas.openxmlformats.org/drawingml/2006/main">
               <a:ext uri="{FF2B5EF4-FFF2-40B4-BE49-F238E27FC236}">
-                <a16:creationId xmlns:a16="http://schemas.microsoft.com/office/drawing/2014/main" id="{F5A3600C-4C7E-4B5B-9E0A-4B5C35708D0B}"/>
+                <a16:creationId xmlns:a16="http://schemas.microsoft.com/office/drawing/2014/main" id="{A2DF04A3-5377-45F3-BF16-DC407016C95A}"/>
               </a:ext>
             </a:extLst>
           </p:cNvPr>
@@ -4043,7 +4110,7 @@
                   <a:srgbClr val="FFFFFF"/>
                 </a:solidFill>
               </a:rPr>
-              <a:t>개발·현지화 동기화</a:t>
+              <a:t>개발·현지화 반영</a:t>
             </a:r>
           </a:p>
         </p:txBody>
@@ -4053,7 +4120,7 @@
           <p:cNvPr id="23" name="timeline-dot-2-1">
             <a:extLst xmlns:a="http://schemas.openxmlformats.org/drawingml/2006/main">
               <a:ext uri="{FF2B5EF4-FFF2-40B4-BE49-F238E27FC236}">
-                <a16:creationId xmlns:a16="http://schemas.microsoft.com/office/drawing/2014/main" id="{02A0192B-0F5C-496D-8AFA-9A9A22D38638}"/>
+                <a16:creationId xmlns:a16="http://schemas.microsoft.com/office/drawing/2014/main" id="{E423776E-62F2-4829-897F-1A36521CDF04}"/>
               </a:ext>
             </a:extLst>
           </p:cNvPr>
@@ -4103,7 +4170,7 @@
           <p:cNvPr id="24" name="timeline-item-2-1">
             <a:extLst xmlns:a="http://schemas.openxmlformats.org/drawingml/2006/main">
               <a:ext uri="{FF2B5EF4-FFF2-40B4-BE49-F238E27FC236}">
-                <a16:creationId xmlns:a16="http://schemas.microsoft.com/office/drawing/2014/main" id="{1B617751-0E19-44A9-885C-5248CD6F92B4}"/>
+                <a16:creationId xmlns:a16="http://schemas.microsoft.com/office/drawing/2014/main" id="{C19D0E56-E0B8-419F-84ED-329D7AF56DF5}"/>
               </a:ext>
             </a:extLst>
           </p:cNvPr>
@@ -4143,7 +4210,7 @@
                   <a:srgbClr val="CBD5E1"/>
                 </a:solidFill>
               </a:rPr>
-              <a:t>번역·리소스 반영</a:t>
+              <a:t>번역 리소스 반영</a:t>
             </a:r>
           </a:p>
         </p:txBody>
@@ -4153,7 +4220,7 @@
           <p:cNvPr id="25" name="timeline-dot-2-2">
             <a:extLst xmlns:a="http://schemas.openxmlformats.org/drawingml/2006/main">
               <a:ext uri="{FF2B5EF4-FFF2-40B4-BE49-F238E27FC236}">
-                <a16:creationId xmlns:a16="http://schemas.microsoft.com/office/drawing/2014/main" id="{DCF2427C-B0D1-4741-A7EC-6665F528DAEF}"/>
+                <a16:creationId xmlns:a16="http://schemas.microsoft.com/office/drawing/2014/main" id="{FC1AAA73-D307-4699-80C6-C174401D3800}"/>
               </a:ext>
             </a:extLst>
           </p:cNvPr>
@@ -4203,7 +4270,7 @@
           <p:cNvPr id="26" name="timeline-item-2-2">
             <a:extLst xmlns:a="http://schemas.openxmlformats.org/drawingml/2006/main">
               <a:ext uri="{FF2B5EF4-FFF2-40B4-BE49-F238E27FC236}">
-                <a16:creationId xmlns:a16="http://schemas.microsoft.com/office/drawing/2014/main" id="{C4114685-59AA-4F8D-A302-36C5E17610E6}"/>
+                <a16:creationId xmlns:a16="http://schemas.microsoft.com/office/drawing/2014/main" id="{18C39682-6242-4D80-85E6-860A8FF522BA}"/>
               </a:ext>
             </a:extLst>
           </p:cNvPr>
@@ -4253,7 +4320,7 @@
           <p:cNvPr id="27" name="timeline-dot-2-3">
             <a:extLst xmlns:a="http://schemas.openxmlformats.org/drawingml/2006/main">
               <a:ext uri="{FF2B5EF4-FFF2-40B4-BE49-F238E27FC236}">
-                <a16:creationId xmlns:a16="http://schemas.microsoft.com/office/drawing/2014/main" id="{81570395-076B-4FED-A557-EC569F0B7504}"/>
+                <a16:creationId xmlns:a16="http://schemas.microsoft.com/office/drawing/2014/main" id="{9E21BD62-2784-4B02-AD59-02F013B548A1}"/>
               </a:ext>
             </a:extLst>
           </p:cNvPr>
@@ -4303,7 +4370,7 @@
           <p:cNvPr id="28" name="timeline-item-2-3">
             <a:extLst xmlns:a="http://schemas.openxmlformats.org/drawingml/2006/main">
               <a:ext uri="{FF2B5EF4-FFF2-40B4-BE49-F238E27FC236}">
-                <a16:creationId xmlns:a16="http://schemas.microsoft.com/office/drawing/2014/main" id="{23A0BD52-9FAE-4941-831F-A134F181F5EE}"/>
+                <a16:creationId xmlns:a16="http://schemas.microsoft.com/office/drawing/2014/main" id="{33B048E2-1BBB-487C-BD6F-067CCB2EB70A}"/>
               </a:ext>
             </a:extLst>
           </p:cNvPr>
@@ -4343,7 +4410,7 @@
                   <a:srgbClr val="CBD5E1"/>
                 </a:solidFill>
               </a:rPr>
-              <a:t>기능 마감 기준</a:t>
+              <a:t>개발 마감 기준</a:t>
             </a:r>
           </a:p>
         </p:txBody>
@@ -4353,7 +4420,7 @@
           <p:cNvPr id="29" name="timeline-card-3">
             <a:extLst xmlns:a="http://schemas.openxmlformats.org/drawingml/2006/main">
               <a:ext uri="{FF2B5EF4-FFF2-40B4-BE49-F238E27FC236}">
-                <a16:creationId xmlns:a16="http://schemas.microsoft.com/office/drawing/2014/main" id="{1B6A0DB0-0281-4B47-B3CE-008B196B1D06}"/>
+                <a16:creationId xmlns:a16="http://schemas.microsoft.com/office/drawing/2014/main" id="{DBB47F54-3E3F-45D4-AFB2-C4266C736F28}"/>
               </a:ext>
             </a:extLst>
           </p:cNvPr>
@@ -4388,7 +4455,7 @@
           <p:cNvPr id="30" name="timeline-bar-3">
             <a:extLst xmlns:a="http://schemas.openxmlformats.org/drawingml/2006/main">
               <a:ext uri="{FF2B5EF4-FFF2-40B4-BE49-F238E27FC236}">
-                <a16:creationId xmlns:a16="http://schemas.microsoft.com/office/drawing/2014/main" id="{D01BEA83-8DBD-48F2-B5F4-65C655709F87}"/>
+                <a16:creationId xmlns:a16="http://schemas.microsoft.com/office/drawing/2014/main" id="{E7A7958E-B5C7-45E8-8521-919A33181D1F}"/>
               </a:ext>
             </a:extLst>
           </p:cNvPr>
@@ -4421,7 +4488,7 @@
           <p:cNvPr id="31" name="timeline-month-3">
             <a:extLst xmlns:a="http://schemas.openxmlformats.org/drawingml/2006/main">
               <a:ext uri="{FF2B5EF4-FFF2-40B4-BE49-F238E27FC236}">
-                <a16:creationId xmlns:a16="http://schemas.microsoft.com/office/drawing/2014/main" id="{AB52A153-9088-4B9F-8969-835F9CE5864E}"/>
+                <a16:creationId xmlns:a16="http://schemas.microsoft.com/office/drawing/2014/main" id="{1E316BF3-5FF9-4197-BF12-665826D63B52}"/>
               </a:ext>
             </a:extLst>
           </p:cNvPr>
@@ -4471,7 +4538,7 @@
           <p:cNvPr id="32" name="timeline-title-3">
             <a:extLst xmlns:a="http://schemas.openxmlformats.org/drawingml/2006/main">
               <a:ext uri="{FF2B5EF4-FFF2-40B4-BE49-F238E27FC236}">
-                <a16:creationId xmlns:a16="http://schemas.microsoft.com/office/drawing/2014/main" id="{DB557715-32F0-4615-A65D-51786465E29C}"/>
+                <a16:creationId xmlns:a16="http://schemas.microsoft.com/office/drawing/2014/main" id="{D04C2607-4A9A-4600-BAB4-A72FF6BB59FA}"/>
               </a:ext>
             </a:extLst>
           </p:cNvPr>
@@ -4511,7 +4578,7 @@
                   <a:srgbClr val="FFFFFF"/>
                 </a:solidFill>
               </a:rPr>
-              <a:t>내부 QA 진입</a:t>
+              <a:t>QA 진입</a:t>
             </a:r>
           </a:p>
         </p:txBody>
@@ -4521,7 +4588,7 @@
           <p:cNvPr id="33" name="timeline-dot-3-1">
             <a:extLst xmlns:a="http://schemas.openxmlformats.org/drawingml/2006/main">
               <a:ext uri="{FF2B5EF4-FFF2-40B4-BE49-F238E27FC236}">
-                <a16:creationId xmlns:a16="http://schemas.microsoft.com/office/drawing/2014/main" id="{76A309AA-CA30-499F-BB0E-5856264DC388}"/>
+                <a16:creationId xmlns:a16="http://schemas.microsoft.com/office/drawing/2014/main" id="{4804ACF8-4EA2-4910-8C6D-C38A08045C38}"/>
               </a:ext>
             </a:extLst>
           </p:cNvPr>
@@ -4571,7 +4638,7 @@
           <p:cNvPr id="34" name="timeline-item-3-1">
             <a:extLst xmlns:a="http://schemas.openxmlformats.org/drawingml/2006/main">
               <a:ext uri="{FF2B5EF4-FFF2-40B4-BE49-F238E27FC236}">
-                <a16:creationId xmlns:a16="http://schemas.microsoft.com/office/drawing/2014/main" id="{DB4D1398-DD4C-46B8-9D91-52BCEF95632B}"/>
+                <a16:creationId xmlns:a16="http://schemas.microsoft.com/office/drawing/2014/main" id="{E68D4359-A05F-476C-8FC5-05026FF736DB}"/>
               </a:ext>
             </a:extLst>
           </p:cNvPr>
@@ -4621,7 +4688,7 @@
           <p:cNvPr id="35" name="timeline-dot-3-2">
             <a:extLst xmlns:a="http://schemas.openxmlformats.org/drawingml/2006/main">
               <a:ext uri="{FF2B5EF4-FFF2-40B4-BE49-F238E27FC236}">
-                <a16:creationId xmlns:a16="http://schemas.microsoft.com/office/drawing/2014/main" id="{35BDA465-81F7-40F5-93A7-4A01701CF8C7}"/>
+                <a16:creationId xmlns:a16="http://schemas.microsoft.com/office/drawing/2014/main" id="{1E24820B-82D6-42C0-B322-DE5D7A7102B9}"/>
               </a:ext>
             </a:extLst>
           </p:cNvPr>
@@ -4671,7 +4738,7 @@
           <p:cNvPr id="36" name="timeline-item-3-2">
             <a:extLst xmlns:a="http://schemas.openxmlformats.org/drawingml/2006/main">
               <a:ext uri="{FF2B5EF4-FFF2-40B4-BE49-F238E27FC236}">
-                <a16:creationId xmlns:a16="http://schemas.microsoft.com/office/drawing/2014/main" id="{646CBF00-3F2B-42E7-9FCD-39398F6DC1D1}"/>
+                <a16:creationId xmlns:a16="http://schemas.microsoft.com/office/drawing/2014/main" id="{CF19FC2F-1EA1-47B5-8716-D2D2C1FE4FD0}"/>
               </a:ext>
             </a:extLst>
           </p:cNvPr>
@@ -4711,7 +4778,7 @@
                   <a:srgbClr val="CBD5E1"/>
                 </a:solidFill>
               </a:rPr>
-              <a:t>결함 등급 분류</a:t>
+              <a:t>이슈 등급 분류</a:t>
             </a:r>
           </a:p>
         </p:txBody>
@@ -4721,7 +4788,7 @@
           <p:cNvPr id="37" name="timeline-dot-3-3">
             <a:extLst xmlns:a="http://schemas.openxmlformats.org/drawingml/2006/main">
               <a:ext uri="{FF2B5EF4-FFF2-40B4-BE49-F238E27FC236}">
-                <a16:creationId xmlns:a16="http://schemas.microsoft.com/office/drawing/2014/main" id="{3DF94618-5622-48C6-B2F7-701476A20C61}"/>
+                <a16:creationId xmlns:a16="http://schemas.microsoft.com/office/drawing/2014/main" id="{D210B9CC-E680-4DA6-BB24-614588AFDC0A}"/>
               </a:ext>
             </a:extLst>
           </p:cNvPr>
@@ -4771,7 +4838,7 @@
           <p:cNvPr id="38" name="timeline-item-3-3">
             <a:extLst xmlns:a="http://schemas.openxmlformats.org/drawingml/2006/main">
               <a:ext uri="{FF2B5EF4-FFF2-40B4-BE49-F238E27FC236}">
-                <a16:creationId xmlns:a16="http://schemas.microsoft.com/office/drawing/2014/main" id="{C375F0E8-5005-4417-A950-8E90F7519E6A}"/>
+                <a16:creationId xmlns:a16="http://schemas.microsoft.com/office/drawing/2014/main" id="{92AA4F92-1DAB-41AF-80CF-660871505E6D}"/>
               </a:ext>
             </a:extLst>
           </p:cNvPr>
@@ -4821,7 +4888,7 @@
           <p:cNvPr id="39" name="timeline-card-4">
             <a:extLst xmlns:a="http://schemas.openxmlformats.org/drawingml/2006/main">
               <a:ext uri="{FF2B5EF4-FFF2-40B4-BE49-F238E27FC236}">
-                <a16:creationId xmlns:a16="http://schemas.microsoft.com/office/drawing/2014/main" id="{AAC8974D-9BF0-4614-8443-8BB3A06390B4}"/>
+                <a16:creationId xmlns:a16="http://schemas.microsoft.com/office/drawing/2014/main" id="{0FFA0A42-43DC-4762-A511-B4B1ECDC1645}"/>
               </a:ext>
             </a:extLst>
           </p:cNvPr>
@@ -4856,7 +4923,7 @@
           <p:cNvPr id="40" name="timeline-bar-4">
             <a:extLst xmlns:a="http://schemas.openxmlformats.org/drawingml/2006/main">
               <a:ext uri="{FF2B5EF4-FFF2-40B4-BE49-F238E27FC236}">
-                <a16:creationId xmlns:a16="http://schemas.microsoft.com/office/drawing/2014/main" id="{4D525D06-E5BD-473E-929B-ADC8810D2DB3}"/>
+                <a16:creationId xmlns:a16="http://schemas.microsoft.com/office/drawing/2014/main" id="{12486716-92B3-42AC-A178-9F518C1F7C53}"/>
               </a:ext>
             </a:extLst>
           </p:cNvPr>
@@ -4889,7 +4956,7 @@
           <p:cNvPr id="41" name="timeline-month-4">
             <a:extLst xmlns:a="http://schemas.openxmlformats.org/drawingml/2006/main">
               <a:ext uri="{FF2B5EF4-FFF2-40B4-BE49-F238E27FC236}">
-                <a16:creationId xmlns:a16="http://schemas.microsoft.com/office/drawing/2014/main" id="{39847B26-AE16-4ED8-B115-F124D0270868}"/>
+                <a16:creationId xmlns:a16="http://schemas.microsoft.com/office/drawing/2014/main" id="{2E330539-8CC1-40C6-B096-C1C76C8D6EAB}"/>
               </a:ext>
             </a:extLst>
           </p:cNvPr>
@@ -4939,7 +5006,7 @@
           <p:cNvPr id="42" name="timeline-title-4">
             <a:extLst xmlns:a="http://schemas.openxmlformats.org/drawingml/2006/main">
               <a:ext uri="{FF2B5EF4-FFF2-40B4-BE49-F238E27FC236}">
-                <a16:creationId xmlns:a16="http://schemas.microsoft.com/office/drawing/2014/main" id="{7728BD85-7BAB-462B-B35D-DE20D3C255DB}"/>
+                <a16:creationId xmlns:a16="http://schemas.microsoft.com/office/drawing/2014/main" id="{A9FC81E3-6E02-4707-8FEB-885B1EBFC64A}"/>
               </a:ext>
             </a:extLst>
           </p:cNvPr>
@@ -4989,7 +5056,7 @@
           <p:cNvPr id="43" name="timeline-dot-4-1">
             <a:extLst xmlns:a="http://schemas.openxmlformats.org/drawingml/2006/main">
               <a:ext uri="{FF2B5EF4-FFF2-40B4-BE49-F238E27FC236}">
-                <a16:creationId xmlns:a16="http://schemas.microsoft.com/office/drawing/2014/main" id="{1EF3C154-8231-4A08-8B53-2F8B1AE830A4}"/>
+                <a16:creationId xmlns:a16="http://schemas.microsoft.com/office/drawing/2014/main" id="{1376D649-D37E-495B-BE9D-43E198FDC1DB}"/>
               </a:ext>
             </a:extLst>
           </p:cNvPr>
@@ -5039,7 +5106,7 @@
           <p:cNvPr id="44" name="timeline-item-4-1">
             <a:extLst xmlns:a="http://schemas.openxmlformats.org/drawingml/2006/main">
               <a:ext uri="{FF2B5EF4-FFF2-40B4-BE49-F238E27FC236}">
-                <a16:creationId xmlns:a16="http://schemas.microsoft.com/office/drawing/2014/main" id="{D446BC95-5D78-4F17-8EB5-182E2876B308}"/>
+                <a16:creationId xmlns:a16="http://schemas.microsoft.com/office/drawing/2014/main" id="{512A8B08-988C-462F-8B78-D97B8F7B78D4}"/>
               </a:ext>
             </a:extLst>
           </p:cNvPr>
@@ -5089,7 +5156,7 @@
           <p:cNvPr id="45" name="timeline-dot-4-2">
             <a:extLst xmlns:a="http://schemas.openxmlformats.org/drawingml/2006/main">
               <a:ext uri="{FF2B5EF4-FFF2-40B4-BE49-F238E27FC236}">
-                <a16:creationId xmlns:a16="http://schemas.microsoft.com/office/drawing/2014/main" id="{94AE69AA-75D2-4D23-AEFA-97A6B9C7DDCC}"/>
+                <a16:creationId xmlns:a16="http://schemas.microsoft.com/office/drawing/2014/main" id="{FD4E6DE5-31C1-4FAC-9315-6638BF0E7147}"/>
               </a:ext>
             </a:extLst>
           </p:cNvPr>
@@ -5139,7 +5206,7 @@
           <p:cNvPr id="46" name="timeline-item-4-2">
             <a:extLst xmlns:a="http://schemas.openxmlformats.org/drawingml/2006/main">
               <a:ext uri="{FF2B5EF4-FFF2-40B4-BE49-F238E27FC236}">
-                <a16:creationId xmlns:a16="http://schemas.microsoft.com/office/drawing/2014/main" id="{E95DE8D2-DE78-456D-8B95-1F56149BB8B7}"/>
+                <a16:creationId xmlns:a16="http://schemas.microsoft.com/office/drawing/2014/main" id="{786D1630-04A3-4B3B-8D42-65EEEEBE19CE}"/>
               </a:ext>
             </a:extLst>
           </p:cNvPr>
@@ -5189,7 +5256,7 @@
           <p:cNvPr id="47" name="timeline-dot-4-3">
             <a:extLst xmlns:a="http://schemas.openxmlformats.org/drawingml/2006/main">
               <a:ext uri="{FF2B5EF4-FFF2-40B4-BE49-F238E27FC236}">
-                <a16:creationId xmlns:a16="http://schemas.microsoft.com/office/drawing/2014/main" id="{0D0409BB-B352-4AD4-B4CE-8FFDF30CD2F0}"/>
+                <a16:creationId xmlns:a16="http://schemas.microsoft.com/office/drawing/2014/main" id="{4C7A9791-7C4E-4273-BD47-40D2D5BC6A71}"/>
               </a:ext>
             </a:extLst>
           </p:cNvPr>
@@ -5239,7 +5306,7 @@
           <p:cNvPr id="48" name="timeline-item-4-3">
             <a:extLst xmlns:a="http://schemas.openxmlformats.org/drawingml/2006/main">
               <a:ext uri="{FF2B5EF4-FFF2-40B4-BE49-F238E27FC236}">
-                <a16:creationId xmlns:a16="http://schemas.microsoft.com/office/drawing/2014/main" id="{FF8795DD-3BF8-474F-B441-D2528F5499A0}"/>
+                <a16:creationId xmlns:a16="http://schemas.microsoft.com/office/drawing/2014/main" id="{74047F89-03F6-496D-8425-321CAFDCDD66}"/>
               </a:ext>
             </a:extLst>
           </p:cNvPr>
@@ -5289,7 +5356,7 @@
           <p:cNvPr id="49" name="timeline-card-5">
             <a:extLst xmlns:a="http://schemas.openxmlformats.org/drawingml/2006/main">
               <a:ext uri="{FF2B5EF4-FFF2-40B4-BE49-F238E27FC236}">
-                <a16:creationId xmlns:a16="http://schemas.microsoft.com/office/drawing/2014/main" id="{D1E9EE8D-5ACD-4A39-A481-07953AADB0D6}"/>
+                <a16:creationId xmlns:a16="http://schemas.microsoft.com/office/drawing/2014/main" id="{EC399B6E-744A-467D-9EFC-97702A008EEB}"/>
               </a:ext>
             </a:extLst>
           </p:cNvPr>
@@ -5324,7 +5391,7 @@
           <p:cNvPr id="50" name="timeline-bar-5">
             <a:extLst xmlns:a="http://schemas.openxmlformats.org/drawingml/2006/main">
               <a:ext uri="{FF2B5EF4-FFF2-40B4-BE49-F238E27FC236}">
-                <a16:creationId xmlns:a16="http://schemas.microsoft.com/office/drawing/2014/main" id="{378D48FE-331B-4CCA-A695-197E2D129F2D}"/>
+                <a16:creationId xmlns:a16="http://schemas.microsoft.com/office/drawing/2014/main" id="{61220510-B666-444C-8B7A-8FA61CAB0D8B}"/>
               </a:ext>
             </a:extLst>
           </p:cNvPr>
@@ -5357,7 +5424,7 @@
           <p:cNvPr id="51" name="timeline-month-5">
             <a:extLst xmlns:a="http://schemas.openxmlformats.org/drawingml/2006/main">
               <a:ext uri="{FF2B5EF4-FFF2-40B4-BE49-F238E27FC236}">
-                <a16:creationId xmlns:a16="http://schemas.microsoft.com/office/drawing/2014/main" id="{0272FC7C-3E2D-474C-8746-792FADE9D55F}"/>
+                <a16:creationId xmlns:a16="http://schemas.microsoft.com/office/drawing/2014/main" id="{84921866-73AF-45EA-B166-BD0C644BEABD}"/>
               </a:ext>
             </a:extLst>
           </p:cNvPr>
@@ -5407,7 +5474,7 @@
           <p:cNvPr id="52" name="timeline-title-5">
             <a:extLst xmlns:a="http://schemas.openxmlformats.org/drawingml/2006/main">
               <a:ext uri="{FF2B5EF4-FFF2-40B4-BE49-F238E27FC236}">
-                <a16:creationId xmlns:a16="http://schemas.microsoft.com/office/drawing/2014/main" id="{6782BFB3-41BC-4B05-9E89-7E21A0679A7C}"/>
+                <a16:creationId xmlns:a16="http://schemas.microsoft.com/office/drawing/2014/main" id="{4EF3FDC2-493D-42C0-9377-D9CB6EE760F2}"/>
               </a:ext>
             </a:extLst>
           </p:cNvPr>
@@ -5457,7 +5524,7 @@
           <p:cNvPr id="53" name="timeline-dot-5-1">
             <a:extLst xmlns:a="http://schemas.openxmlformats.org/drawingml/2006/main">
               <a:ext uri="{FF2B5EF4-FFF2-40B4-BE49-F238E27FC236}">
-                <a16:creationId xmlns:a16="http://schemas.microsoft.com/office/drawing/2014/main" id="{EE670B59-AB95-42D3-B87D-55EA92B06E20}"/>
+                <a16:creationId xmlns:a16="http://schemas.microsoft.com/office/drawing/2014/main" id="{CB195D7A-59BA-404C-ABF0-908E1CDCF27D}"/>
               </a:ext>
             </a:extLst>
           </p:cNvPr>
@@ -5507,7 +5574,7 @@
           <p:cNvPr id="54" name="timeline-item-5-1">
             <a:extLst xmlns:a="http://schemas.openxmlformats.org/drawingml/2006/main">
               <a:ext uri="{FF2B5EF4-FFF2-40B4-BE49-F238E27FC236}">
-                <a16:creationId xmlns:a16="http://schemas.microsoft.com/office/drawing/2014/main" id="{267724D5-D8B1-452F-BDA4-33110D16DF3D}"/>
+                <a16:creationId xmlns:a16="http://schemas.microsoft.com/office/drawing/2014/main" id="{EBCAA5AD-FECC-4CA6-A900-014A01291AA4}"/>
               </a:ext>
             </a:extLst>
           </p:cNvPr>
@@ -5557,7 +5624,7 @@
           <p:cNvPr id="55" name="timeline-dot-5-2">
             <a:extLst xmlns:a="http://schemas.openxmlformats.org/drawingml/2006/main">
               <a:ext uri="{FF2B5EF4-FFF2-40B4-BE49-F238E27FC236}">
-                <a16:creationId xmlns:a16="http://schemas.microsoft.com/office/drawing/2014/main" id="{98B057A9-B951-4945-AD07-4B2D35652285}"/>
+                <a16:creationId xmlns:a16="http://schemas.microsoft.com/office/drawing/2014/main" id="{08A31B75-D30E-40AF-BA1F-1EF8F4FE456F}"/>
               </a:ext>
             </a:extLst>
           </p:cNvPr>
@@ -5607,7 +5674,7 @@
           <p:cNvPr id="56" name="timeline-item-5-2">
             <a:extLst xmlns:a="http://schemas.openxmlformats.org/drawingml/2006/main">
               <a:ext uri="{FF2B5EF4-FFF2-40B4-BE49-F238E27FC236}">
-                <a16:creationId xmlns:a16="http://schemas.microsoft.com/office/drawing/2014/main" id="{E7AA0977-2113-4DD8-9B8D-096E8146D6EB}"/>
+                <a16:creationId xmlns:a16="http://schemas.microsoft.com/office/drawing/2014/main" id="{AAC6BC4E-41D7-440D-B91D-9B038415DD1B}"/>
               </a:ext>
             </a:extLst>
           </p:cNvPr>
@@ -5657,7 +5724,7 @@
           <p:cNvPr id="57" name="timeline-dot-5-3">
             <a:extLst xmlns:a="http://schemas.openxmlformats.org/drawingml/2006/main">
               <a:ext uri="{FF2B5EF4-FFF2-40B4-BE49-F238E27FC236}">
-                <a16:creationId xmlns:a16="http://schemas.microsoft.com/office/drawing/2014/main" id="{C608EACA-F1A6-4050-8E59-71BE5578F226}"/>
+                <a16:creationId xmlns:a16="http://schemas.microsoft.com/office/drawing/2014/main" id="{8709111A-CB14-4DC2-B8CD-6EF97408F8E7}"/>
               </a:ext>
             </a:extLst>
           </p:cNvPr>
@@ -5707,7 +5774,7 @@
           <p:cNvPr id="58" name="timeline-item-5-3">
             <a:extLst xmlns:a="http://schemas.openxmlformats.org/drawingml/2006/main">
               <a:ext uri="{FF2B5EF4-FFF2-40B4-BE49-F238E27FC236}">
-                <a16:creationId xmlns:a16="http://schemas.microsoft.com/office/drawing/2014/main" id="{52C54133-7A2A-4A91-A196-5BC77FF16E8D}"/>
+                <a16:creationId xmlns:a16="http://schemas.microsoft.com/office/drawing/2014/main" id="{A04420B3-6574-49A0-A54D-3C0337E9EC35}"/>
               </a:ext>
             </a:extLst>
           </p:cNvPr>
@@ -5747,7 +5814,7 @@
                   <a:srgbClr val="CBD5E1"/>
                 </a:solidFill>
               </a:rPr>
-              <a:t>스토어·심의 체크</a:t>
+              <a:t>심의·스토어 체크</a:t>
             </a:r>
           </a:p>
         </p:txBody>
@@ -5757,7 +5824,7 @@
           <p:cNvPr id="59" name="timeline-card-6">
             <a:extLst xmlns:a="http://schemas.openxmlformats.org/drawingml/2006/main">
               <a:ext uri="{FF2B5EF4-FFF2-40B4-BE49-F238E27FC236}">
-                <a16:creationId xmlns:a16="http://schemas.microsoft.com/office/drawing/2014/main" id="{F6CEE417-E5C5-42A1-836D-640A400B90DA}"/>
+                <a16:creationId xmlns:a16="http://schemas.microsoft.com/office/drawing/2014/main" id="{2BD4F686-2A66-4025-B862-54E59C2EC4CB}"/>
               </a:ext>
             </a:extLst>
           </p:cNvPr>
@@ -5792,7 +5859,7 @@
           <p:cNvPr id="60" name="timeline-bar-6">
             <a:extLst xmlns:a="http://schemas.openxmlformats.org/drawingml/2006/main">
               <a:ext uri="{FF2B5EF4-FFF2-40B4-BE49-F238E27FC236}">
-                <a16:creationId xmlns:a16="http://schemas.microsoft.com/office/drawing/2014/main" id="{DBB628AA-ACB9-47D9-B43E-0EAAF85CAC36}"/>
+                <a16:creationId xmlns:a16="http://schemas.microsoft.com/office/drawing/2014/main" id="{708B108C-1324-411B-9BA7-4A2BFB86C235}"/>
               </a:ext>
             </a:extLst>
           </p:cNvPr>
@@ -5825,7 +5892,7 @@
           <p:cNvPr id="61" name="timeline-month-6">
             <a:extLst xmlns:a="http://schemas.openxmlformats.org/drawingml/2006/main">
               <a:ext uri="{FF2B5EF4-FFF2-40B4-BE49-F238E27FC236}">
-                <a16:creationId xmlns:a16="http://schemas.microsoft.com/office/drawing/2014/main" id="{6483C664-D17D-4AA2-945B-C16AD65457B5}"/>
+                <a16:creationId xmlns:a16="http://schemas.microsoft.com/office/drawing/2014/main" id="{5A956DAE-A19D-46B6-8FD9-A1909D90CF1D}"/>
               </a:ext>
             </a:extLst>
           </p:cNvPr>
@@ -5875,7 +5942,7 @@
           <p:cNvPr id="62" name="timeline-title-6">
             <a:extLst xmlns:a="http://schemas.openxmlformats.org/drawingml/2006/main">
               <a:ext uri="{FF2B5EF4-FFF2-40B4-BE49-F238E27FC236}">
-                <a16:creationId xmlns:a16="http://schemas.microsoft.com/office/drawing/2014/main" id="{5F526A02-A929-4699-99B9-A02F8013D499}"/>
+                <a16:creationId xmlns:a16="http://schemas.microsoft.com/office/drawing/2014/main" id="{6B3E2FED-BFEA-4575-AD32-628E7A71ECB7}"/>
               </a:ext>
             </a:extLst>
           </p:cNvPr>
@@ -5915,7 +5982,7 @@
                   <a:srgbClr val="FFFFFF"/>
                 </a:solidFill>
               </a:rPr>
-              <a:t>리허설·배포</a:t>
+              <a:t>Live 릴리즈 준비</a:t>
             </a:r>
           </a:p>
         </p:txBody>
@@ -5925,7 +5992,7 @@
           <p:cNvPr id="63" name="timeline-dot-6-1">
             <a:extLst xmlns:a="http://schemas.openxmlformats.org/drawingml/2006/main">
               <a:ext uri="{FF2B5EF4-FFF2-40B4-BE49-F238E27FC236}">
-                <a16:creationId xmlns:a16="http://schemas.microsoft.com/office/drawing/2014/main" id="{7AE6970A-196D-4CF4-B9E6-31169E4613C4}"/>
+                <a16:creationId xmlns:a16="http://schemas.microsoft.com/office/drawing/2014/main" id="{23CE8EB4-54C2-4298-BBAC-A48DE6BD8CDD}"/>
               </a:ext>
             </a:extLst>
           </p:cNvPr>
@@ -5975,7 +6042,7 @@
           <p:cNvPr id="64" name="timeline-item-6-1">
             <a:extLst xmlns:a="http://schemas.openxmlformats.org/drawingml/2006/main">
               <a:ext uri="{FF2B5EF4-FFF2-40B4-BE49-F238E27FC236}">
-                <a16:creationId xmlns:a16="http://schemas.microsoft.com/office/drawing/2014/main" id="{62C06B8D-D1A2-4F2E-89FA-6D7B9EFF47D1}"/>
+                <a16:creationId xmlns:a16="http://schemas.microsoft.com/office/drawing/2014/main" id="{43FC7D4C-4B80-4BF1-ABF6-3A3B57D1C162}"/>
               </a:ext>
             </a:extLst>
           </p:cNvPr>
@@ -6025,7 +6092,7 @@
           <p:cNvPr id="65" name="timeline-dot-6-2">
             <a:extLst xmlns:a="http://schemas.openxmlformats.org/drawingml/2006/main">
               <a:ext uri="{FF2B5EF4-FFF2-40B4-BE49-F238E27FC236}">
-                <a16:creationId xmlns:a16="http://schemas.microsoft.com/office/drawing/2014/main" id="{47B44FB4-7CC4-4C6B-BB08-397515522B32}"/>
+                <a16:creationId xmlns:a16="http://schemas.microsoft.com/office/drawing/2014/main" id="{00F3C90B-9B09-4E02-96E6-2EC70BB24F67}"/>
               </a:ext>
             </a:extLst>
           </p:cNvPr>
@@ -6075,7 +6142,7 @@
           <p:cNvPr id="66" name="timeline-item-6-2">
             <a:extLst xmlns:a="http://schemas.openxmlformats.org/drawingml/2006/main">
               <a:ext uri="{FF2B5EF4-FFF2-40B4-BE49-F238E27FC236}">
-                <a16:creationId xmlns:a16="http://schemas.microsoft.com/office/drawing/2014/main" id="{77E639F7-CD89-47FA-B263-EB47EC35C521}"/>
+                <a16:creationId xmlns:a16="http://schemas.microsoft.com/office/drawing/2014/main" id="{F6D35562-8500-46E4-BDD1-E2B11DF4E942}"/>
               </a:ext>
             </a:extLst>
           </p:cNvPr>
@@ -6125,7 +6192,7 @@
           <p:cNvPr id="67" name="timeline-dot-6-3">
             <a:extLst xmlns:a="http://schemas.openxmlformats.org/drawingml/2006/main">
               <a:ext uri="{FF2B5EF4-FFF2-40B4-BE49-F238E27FC236}">
-                <a16:creationId xmlns:a16="http://schemas.microsoft.com/office/drawing/2014/main" id="{F05B7C0A-7E65-4954-9F76-228225B24F65}"/>
+                <a16:creationId xmlns:a16="http://schemas.microsoft.com/office/drawing/2014/main" id="{3C7B0809-D291-486E-8D05-B106B403C6D0}"/>
               </a:ext>
             </a:extLst>
           </p:cNvPr>
@@ -6175,7 +6242,7 @@
           <p:cNvPr id="68" name="timeline-item-6-3">
             <a:extLst xmlns:a="http://schemas.openxmlformats.org/drawingml/2006/main">
               <a:ext uri="{FF2B5EF4-FFF2-40B4-BE49-F238E27FC236}">
-                <a16:creationId xmlns:a16="http://schemas.microsoft.com/office/drawing/2014/main" id="{D2CE6211-C823-44E1-9986-66E6ABC6BEDF}"/>
+                <a16:creationId xmlns:a16="http://schemas.microsoft.com/office/drawing/2014/main" id="{3DB2143D-1795-4F0A-A6B3-2E7CBBFF69FC}"/>
               </a:ext>
             </a:extLst>
           </p:cNvPr>
@@ -6225,7 +6292,7 @@
           <p:cNvPr id="69" name="management-title">
             <a:extLst xmlns:a="http://schemas.openxmlformats.org/drawingml/2006/main">
               <a:ext uri="{FF2B5EF4-FFF2-40B4-BE49-F238E27FC236}">
-                <a16:creationId xmlns:a16="http://schemas.microsoft.com/office/drawing/2014/main" id="{23E6D33D-7CA3-4039-80DB-3AC3DBD23DA0}"/>
+                <a16:creationId xmlns:a16="http://schemas.microsoft.com/office/drawing/2014/main" id="{8B4EED73-B94C-4426-9A47-C3E1523503CD}"/>
               </a:ext>
             </a:extLst>
           </p:cNvPr>
@@ -6275,7 +6342,7 @@
           <p:cNvPr id="70" name="management-note">
             <a:extLst xmlns:a="http://schemas.openxmlformats.org/drawingml/2006/main">
               <a:ext uri="{FF2B5EF4-FFF2-40B4-BE49-F238E27FC236}">
-                <a16:creationId xmlns:a16="http://schemas.microsoft.com/office/drawing/2014/main" id="{46A80453-4025-4817-992D-70C82E4CBB7E}"/>
+                <a16:creationId xmlns:a16="http://schemas.microsoft.com/office/drawing/2014/main" id="{07FBB63D-C0D7-4535-9B80-559FAF62DE84}"/>
               </a:ext>
             </a:extLst>
           </p:cNvPr>
@@ -6315,7 +6382,7 @@
                   <a:srgbClr val="94A3B8"/>
                 </a:solidFill>
               </a:rPr>
-              <a:t>각 단계의 완료 기준을 명확히 두고, 빌드·QA·퍼블리셔 대응을 같은 리듬으로 관리합니다.</a:t>
+              <a:t>마일스톤별 완료 기준을 두고, 빌드·버전·QA·퍼블리셔 대응을 함께 추적합니다.</a:t>
             </a:r>
           </a:p>
         </p:txBody>
@@ -6325,7 +6392,7 @@
           <p:cNvPr id="71" name="mgmt-card-1">
             <a:extLst xmlns:a="http://schemas.openxmlformats.org/drawingml/2006/main">
               <a:ext uri="{FF2B5EF4-FFF2-40B4-BE49-F238E27FC236}">
-                <a16:creationId xmlns:a16="http://schemas.microsoft.com/office/drawing/2014/main" id="{84824C05-2EE7-46D7-9137-44C25129EB91}"/>
+                <a16:creationId xmlns:a16="http://schemas.microsoft.com/office/drawing/2014/main" id="{E15F8F58-41E2-4145-9110-900F0A06D938}"/>
               </a:ext>
             </a:extLst>
           </p:cNvPr>
@@ -6360,7 +6427,7 @@
           <p:cNvPr id="72" name="mgmt-bar-1">
             <a:extLst xmlns:a="http://schemas.openxmlformats.org/drawingml/2006/main">
               <a:ext uri="{FF2B5EF4-FFF2-40B4-BE49-F238E27FC236}">
-                <a16:creationId xmlns:a16="http://schemas.microsoft.com/office/drawing/2014/main" id="{B1B1AEC8-CD5E-4E2E-8972-EE2EA14974F1}"/>
+                <a16:creationId xmlns:a16="http://schemas.microsoft.com/office/drawing/2014/main" id="{5B3F837C-7109-4855-9123-481E74B0D5EB}"/>
               </a:ext>
             </a:extLst>
           </p:cNvPr>
@@ -6393,7 +6460,7 @@
           <p:cNvPr id="73" name="mgmt-label-1">
             <a:extLst xmlns:a="http://schemas.openxmlformats.org/drawingml/2006/main">
               <a:ext uri="{FF2B5EF4-FFF2-40B4-BE49-F238E27FC236}">
-                <a16:creationId xmlns:a16="http://schemas.microsoft.com/office/drawing/2014/main" id="{A8347DE2-982C-49F1-9EFD-0862056DB028}"/>
+                <a16:creationId xmlns:a16="http://schemas.microsoft.com/office/drawing/2014/main" id="{237F3CC8-6D45-4360-AA3C-588249C2306D}"/>
               </a:ext>
             </a:extLst>
           </p:cNvPr>
@@ -6443,7 +6510,7 @@
           <p:cNvPr id="74" name="mgmt-body-1">
             <a:extLst xmlns:a="http://schemas.openxmlformats.org/drawingml/2006/main">
               <a:ext uri="{FF2B5EF4-FFF2-40B4-BE49-F238E27FC236}">
-                <a16:creationId xmlns:a16="http://schemas.microsoft.com/office/drawing/2014/main" id="{8507851C-FCCA-49B7-AC28-D1F10D4C3D8F}"/>
+                <a16:creationId xmlns:a16="http://schemas.microsoft.com/office/drawing/2014/main" id="{A46A886F-0781-4E68-AC80-40EC536D198E}"/>
               </a:ext>
             </a:extLst>
           </p:cNvPr>
@@ -6483,7 +6550,7 @@
                   <a:srgbClr val="CBD5E1"/>
                 </a:solidFill>
               </a:rPr>
-              <a:t>단계별 게이트 기준 관리</a:t>
+              <a:t>일정·범위 통제 기준 관리</a:t>
             </a:r>
           </a:p>
         </p:txBody>
@@ -6493,7 +6560,7 @@
           <p:cNvPr id="75" name="mgmt-card-2">
             <a:extLst xmlns:a="http://schemas.openxmlformats.org/drawingml/2006/main">
               <a:ext uri="{FF2B5EF4-FFF2-40B4-BE49-F238E27FC236}">
-                <a16:creationId xmlns:a16="http://schemas.microsoft.com/office/drawing/2014/main" id="{B35691A3-ECBA-4042-9A05-3C7EAB11FD7A}"/>
+                <a16:creationId xmlns:a16="http://schemas.microsoft.com/office/drawing/2014/main" id="{386A610C-DB9A-401D-9367-B6E589338185}"/>
               </a:ext>
             </a:extLst>
           </p:cNvPr>
@@ -6528,7 +6595,7 @@
           <p:cNvPr id="76" name="mgmt-bar-2">
             <a:extLst xmlns:a="http://schemas.openxmlformats.org/drawingml/2006/main">
               <a:ext uri="{FF2B5EF4-FFF2-40B4-BE49-F238E27FC236}">
-                <a16:creationId xmlns:a16="http://schemas.microsoft.com/office/drawing/2014/main" id="{80969DE9-6307-4C60-83C5-F10AD4B853E0}"/>
+                <a16:creationId xmlns:a16="http://schemas.microsoft.com/office/drawing/2014/main" id="{63907001-3C41-4709-80BB-702F1971E41B}"/>
               </a:ext>
             </a:extLst>
           </p:cNvPr>
@@ -6561,7 +6628,7 @@
           <p:cNvPr id="77" name="mgmt-label-2">
             <a:extLst xmlns:a="http://schemas.openxmlformats.org/drawingml/2006/main">
               <a:ext uri="{FF2B5EF4-FFF2-40B4-BE49-F238E27FC236}">
-                <a16:creationId xmlns:a16="http://schemas.microsoft.com/office/drawing/2014/main" id="{D82233D0-1F10-4EAB-ACD5-B4F4A51F20F5}"/>
+                <a16:creationId xmlns:a16="http://schemas.microsoft.com/office/drawing/2014/main" id="{E31B5C6D-D93C-4418-BA2F-F4ED3A07B9E0}"/>
               </a:ext>
             </a:extLst>
           </p:cNvPr>
@@ -6611,7 +6678,7 @@
           <p:cNvPr id="78" name="mgmt-body-2">
             <a:extLst xmlns:a="http://schemas.openxmlformats.org/drawingml/2006/main">
               <a:ext uri="{FF2B5EF4-FFF2-40B4-BE49-F238E27FC236}">
-                <a16:creationId xmlns:a16="http://schemas.microsoft.com/office/drawing/2014/main" id="{0062A4BE-8F01-4ACE-BC76-65A0C92AACEF}"/>
+                <a16:creationId xmlns:a16="http://schemas.microsoft.com/office/drawing/2014/main" id="{C3AFEF9B-7CB3-407B-BA92-AB46521011C5}"/>
               </a:ext>
             </a:extLst>
           </p:cNvPr>
@@ -6651,7 +6718,7 @@
                   <a:srgbClr val="CBD5E1"/>
                 </a:solidFill>
               </a:rPr>
-              <a:t>Perforce 기반 후보 빌드 통제</a:t>
+              <a:t>Perforce 기반 릴리즈 관리</a:t>
             </a:r>
           </a:p>
         </p:txBody>
@@ -6661,7 +6728,7 @@
           <p:cNvPr id="79" name="mgmt-card-3">
             <a:extLst xmlns:a="http://schemas.openxmlformats.org/drawingml/2006/main">
               <a:ext uri="{FF2B5EF4-FFF2-40B4-BE49-F238E27FC236}">
-                <a16:creationId xmlns:a16="http://schemas.microsoft.com/office/drawing/2014/main" id="{66013F89-EF7E-4898-8DBE-5992D6B0C742}"/>
+                <a16:creationId xmlns:a16="http://schemas.microsoft.com/office/drawing/2014/main" id="{C28F5A7E-C39A-4623-ACD1-2CEB3B2151F9}"/>
               </a:ext>
             </a:extLst>
           </p:cNvPr>
@@ -6696,7 +6763,7 @@
           <p:cNvPr id="80" name="mgmt-bar-3">
             <a:extLst xmlns:a="http://schemas.openxmlformats.org/drawingml/2006/main">
               <a:ext uri="{FF2B5EF4-FFF2-40B4-BE49-F238E27FC236}">
-                <a16:creationId xmlns:a16="http://schemas.microsoft.com/office/drawing/2014/main" id="{04C6820E-BA70-453F-B7ED-F7D9F728EF4F}"/>
+                <a16:creationId xmlns:a16="http://schemas.microsoft.com/office/drawing/2014/main" id="{94BD03DC-19C0-42CA-9D39-3DB7A6821EEA}"/>
               </a:ext>
             </a:extLst>
           </p:cNvPr>
@@ -6729,7 +6796,7 @@
           <p:cNvPr id="81" name="mgmt-label-3">
             <a:extLst xmlns:a="http://schemas.openxmlformats.org/drawingml/2006/main">
               <a:ext uri="{FF2B5EF4-FFF2-40B4-BE49-F238E27FC236}">
-                <a16:creationId xmlns:a16="http://schemas.microsoft.com/office/drawing/2014/main" id="{F44A9C6C-7453-49CF-A2B5-93D31C32F8B6}"/>
+                <a16:creationId xmlns:a16="http://schemas.microsoft.com/office/drawing/2014/main" id="{7712DA1C-365D-40E1-98FF-8AF89476048D}"/>
               </a:ext>
             </a:extLst>
           </p:cNvPr>
@@ -6779,7 +6846,7 @@
           <p:cNvPr id="82" name="mgmt-body-3">
             <a:extLst xmlns:a="http://schemas.openxmlformats.org/drawingml/2006/main">
               <a:ext uri="{FF2B5EF4-FFF2-40B4-BE49-F238E27FC236}">
-                <a16:creationId xmlns:a16="http://schemas.microsoft.com/office/drawing/2014/main" id="{0670FCB6-76ED-45BD-8F37-08C8F5AEFDC1}"/>
+                <a16:creationId xmlns:a16="http://schemas.microsoft.com/office/drawing/2014/main" id="{859373C5-3E2C-418E-A041-8539A06F2746}"/>
               </a:ext>
             </a:extLst>
           </p:cNvPr>
@@ -6819,7 +6886,7 @@
                   <a:srgbClr val="CBD5E1"/>
                 </a:solidFill>
               </a:rPr>
-              <a:t>결함 우선순위와 수정 반영 추적</a:t>
+              <a:t>이슈 대응과 수정 반영 추적</a:t>
             </a:r>
           </a:p>
         </p:txBody>
@@ -6829,7 +6896,7 @@
           <p:cNvPr id="83" name="mgmt-card-4">
             <a:extLst xmlns:a="http://schemas.openxmlformats.org/drawingml/2006/main">
               <a:ext uri="{FF2B5EF4-FFF2-40B4-BE49-F238E27FC236}">
-                <a16:creationId xmlns:a16="http://schemas.microsoft.com/office/drawing/2014/main" id="{AC32FC36-E2E9-465C-B4E9-E56D3B3CE28C}"/>
+                <a16:creationId xmlns:a16="http://schemas.microsoft.com/office/drawing/2014/main" id="{38309886-AD96-4069-9518-C8F8BDB30675}"/>
               </a:ext>
             </a:extLst>
           </p:cNvPr>
@@ -6864,7 +6931,7 @@
           <p:cNvPr id="84" name="mgmt-bar-4">
             <a:extLst xmlns:a="http://schemas.openxmlformats.org/drawingml/2006/main">
               <a:ext uri="{FF2B5EF4-FFF2-40B4-BE49-F238E27FC236}">
-                <a16:creationId xmlns:a16="http://schemas.microsoft.com/office/drawing/2014/main" id="{A0A98AAA-F63F-4B49-8517-8F1EF20D850D}"/>
+                <a16:creationId xmlns:a16="http://schemas.microsoft.com/office/drawing/2014/main" id="{AA81157C-7363-426F-9EDD-131193BABEC3}"/>
               </a:ext>
             </a:extLst>
           </p:cNvPr>
@@ -6897,7 +6964,7 @@
           <p:cNvPr id="85" name="mgmt-label-4">
             <a:extLst xmlns:a="http://schemas.openxmlformats.org/drawingml/2006/main">
               <a:ext uri="{FF2B5EF4-FFF2-40B4-BE49-F238E27FC236}">
-                <a16:creationId xmlns:a16="http://schemas.microsoft.com/office/drawing/2014/main" id="{DAD6C970-B201-402B-9545-3B5D986ACEE1}"/>
+                <a16:creationId xmlns:a16="http://schemas.microsoft.com/office/drawing/2014/main" id="{DBFE5DAB-C994-46F2-A9AD-043F20682AD2}"/>
               </a:ext>
             </a:extLst>
           </p:cNvPr>
@@ -6937,7 +7004,7 @@
                   <a:srgbClr val="FFFFFF"/>
                 </a:solidFill>
               </a:rPr>
-              <a:t>커뮤니케이션</a:t>
+              <a:t>퍼블리셔 대응</a:t>
             </a:r>
           </a:p>
         </p:txBody>
@@ -6947,7 +7014,7 @@
           <p:cNvPr id="86" name="mgmt-body-4">
             <a:extLst xmlns:a="http://schemas.openxmlformats.org/drawingml/2006/main">
               <a:ext uri="{FF2B5EF4-FFF2-40B4-BE49-F238E27FC236}">
-                <a16:creationId xmlns:a16="http://schemas.microsoft.com/office/drawing/2014/main" id="{A08A694A-A422-4068-896D-4D2B709EF470}"/>
+                <a16:creationId xmlns:a16="http://schemas.microsoft.com/office/drawing/2014/main" id="{94101F82-460A-4F56-88F6-E90530C4CC7C}"/>
               </a:ext>
             </a:extLst>
           </p:cNvPr>
@@ -6987,7 +7054,7 @@
                   <a:srgbClr val="CBD5E1"/>
                 </a:solidFill>
               </a:rPr>
-              <a:t>개발·QA·퍼블리셔 의사결정 정리</a:t>
+              <a:t>협업 이슈와 의사결정 정리</a:t>
             </a:r>
           </a:p>
         </p:txBody>
@@ -6995,7 +7062,7 @@
     </p:spTree>
     <p:extLst>
       <p:ext uri="{BB962C8B-B14F-4D97-AF65-F5344CB8AC3E}">
-        <p14:creationId xmlns:p14="http://schemas.microsoft.com/office/powerpoint/2010/main" val="58456663"/>
+        <p14:creationId xmlns:p14="http://schemas.microsoft.com/office/powerpoint/2010/main" val="1115964379"/>
       </p:ext>
     </p:extLst>
   </p:cSld>
@@ -7026,7 +7093,7 @@
           <p:cNvPr id="1" name="top-accent">
             <a:extLst xmlns:a="http://schemas.openxmlformats.org/drawingml/2006/main">
               <a:ext uri="{FF2B5EF4-FFF2-40B4-BE49-F238E27FC236}">
-                <a16:creationId xmlns:a16="http://schemas.microsoft.com/office/drawing/2014/main" id="{F2C4A980-4570-4BB2-A38C-0D91B067527C}"/>
+                <a16:creationId xmlns:a16="http://schemas.microsoft.com/office/drawing/2014/main" id="{D46B4306-9D20-4336-A531-1C1A6DDD207A}"/>
               </a:ext>
             </a:extLst>
           </p:cNvPr>
@@ -7059,7 +7126,7 @@
           <p:cNvPr id="2" name="left-accent">
             <a:extLst xmlns:a="http://schemas.openxmlformats.org/drawingml/2006/main">
               <a:ext uri="{FF2B5EF4-FFF2-40B4-BE49-F238E27FC236}">
-                <a16:creationId xmlns:a16="http://schemas.microsoft.com/office/drawing/2014/main" id="{EA1F300C-3F46-41A4-9832-75643A9E0554}"/>
+                <a16:creationId xmlns:a16="http://schemas.microsoft.com/office/drawing/2014/main" id="{B4128A05-B984-4621-A74D-131000CA0555}"/>
               </a:ext>
             </a:extLst>
           </p:cNvPr>
@@ -7092,7 +7159,7 @@
           <p:cNvPr id="3" name="eyebrow">
             <a:extLst xmlns:a="http://schemas.openxmlformats.org/drawingml/2006/main">
               <a:ext uri="{FF2B5EF4-FFF2-40B4-BE49-F238E27FC236}">
-                <a16:creationId xmlns:a16="http://schemas.microsoft.com/office/drawing/2014/main" id="{7D982622-6C19-49FE-A7AF-7BB7007F7CC7}"/>
+                <a16:creationId xmlns:a16="http://schemas.microsoft.com/office/drawing/2014/main" id="{F08CE8A8-C31D-40E9-87BC-6F2489414B9E}"/>
               </a:ext>
             </a:extLst>
           </p:cNvPr>
@@ -7142,7 +7209,7 @@
           <p:cNvPr id="4" name="footer">
             <a:extLst xmlns:a="http://schemas.openxmlformats.org/drawingml/2006/main">
               <a:ext uri="{FF2B5EF4-FFF2-40B4-BE49-F238E27FC236}">
-                <a16:creationId xmlns:a16="http://schemas.microsoft.com/office/drawing/2014/main" id="{B3B15104-419C-4A4E-B3B5-7AAB760ADB9E}"/>
+                <a16:creationId xmlns:a16="http://schemas.microsoft.com/office/drawing/2014/main" id="{B8C3D7A1-E0C2-49E1-901E-2FA76B0F45F9}"/>
               </a:ext>
             </a:extLst>
           </p:cNvPr>
@@ -7192,7 +7259,7 @@
           <p:cNvPr id="5" name="page-no">
             <a:extLst xmlns:a="http://schemas.openxmlformats.org/drawingml/2006/main">
               <a:ext uri="{FF2B5EF4-FFF2-40B4-BE49-F238E27FC236}">
-                <a16:creationId xmlns:a16="http://schemas.microsoft.com/office/drawing/2014/main" id="{D32EA220-CEB8-4865-93D5-4B1A5DAEE738}"/>
+                <a16:creationId xmlns:a16="http://schemas.microsoft.com/office/drawing/2014/main" id="{26EE5217-6495-42F4-BE93-F02CA7431E84}"/>
               </a:ext>
             </a:extLst>
           </p:cNvPr>
@@ -7242,7 +7309,7 @@
           <p:cNvPr id="6" name="title-03">
             <a:extLst xmlns:a="http://schemas.openxmlformats.org/drawingml/2006/main">
               <a:ext uri="{FF2B5EF4-FFF2-40B4-BE49-F238E27FC236}">
-                <a16:creationId xmlns:a16="http://schemas.microsoft.com/office/drawing/2014/main" id="{77BFF889-8ACA-4062-8395-E09342248453}"/>
+                <a16:creationId xmlns:a16="http://schemas.microsoft.com/office/drawing/2014/main" id="{E3099A91-2E26-4554-A522-2D8D935322F5}"/>
               </a:ext>
             </a:extLst>
           </p:cNvPr>
@@ -7282,7 +7349,7 @@
                   <a:srgbClr val="FFFFFF"/>
                 </a:solidFill>
               </a:rPr>
-              <a:t>런칭 게이트는 일정이 아니라 통과 기준으로 관리합니다</a:t>
+              <a:t>마일스톤은 일정이 아니라 통과 기준으로 관리합니다</a:t>
             </a:r>
           </a:p>
         </p:txBody>
@@ -7292,7 +7359,7 @@
           <p:cNvPr id="7" name="subtitle-03">
             <a:extLst xmlns:a="http://schemas.openxmlformats.org/drawingml/2006/main">
               <a:ext uri="{FF2B5EF4-FFF2-40B4-BE49-F238E27FC236}">
-                <a16:creationId xmlns:a16="http://schemas.microsoft.com/office/drawing/2014/main" id="{C1665073-6F92-4F61-B6CD-36448A6CFFD7}"/>
+                <a16:creationId xmlns:a16="http://schemas.microsoft.com/office/drawing/2014/main" id="{784D9ACE-EA34-4E9C-AC21-2865A4634388}"/>
               </a:ext>
             </a:extLst>
           </p:cNvPr>
@@ -7332,7 +7399,7 @@
                   <a:srgbClr val="CBD5E1"/>
                 </a:solidFill>
               </a:rPr>
-              <a:t>월별 일정표만으로는 리스크가 숨기 쉽기 때문에, 범위·빌드·QA·검수 기준을 게이트로 묶어 판정합니다.</a:t>
+              <a:t>월별 일정표만으로는 리스크가 숨기 쉽기 때문에, 범위·빌드·버전·QA·퍼블리셔 기준을 함께 판정합니다.</a:t>
             </a:r>
           </a:p>
         </p:txBody>
@@ -7342,7 +7409,7 @@
           <p:cNvPr id="8" name="gate-section-title">
             <a:extLst xmlns:a="http://schemas.openxmlformats.org/drawingml/2006/main">
               <a:ext uri="{FF2B5EF4-FFF2-40B4-BE49-F238E27FC236}">
-                <a16:creationId xmlns:a16="http://schemas.microsoft.com/office/drawing/2014/main" id="{0FE4A4AF-373E-4940-BB4C-7F4C74238DA1}"/>
+                <a16:creationId xmlns:a16="http://schemas.microsoft.com/office/drawing/2014/main" id="{FDA28168-CCF0-4E29-9B23-022E05A5A742}"/>
               </a:ext>
             </a:extLst>
           </p:cNvPr>
@@ -7392,7 +7459,7 @@
           <p:cNvPr id="9" name="gate-card-1">
             <a:extLst xmlns:a="http://schemas.openxmlformats.org/drawingml/2006/main">
               <a:ext uri="{FF2B5EF4-FFF2-40B4-BE49-F238E27FC236}">
-                <a16:creationId xmlns:a16="http://schemas.microsoft.com/office/drawing/2014/main" id="{B3111E65-678B-433B-AF3A-81F7AA7B5A4B}"/>
+                <a16:creationId xmlns:a16="http://schemas.microsoft.com/office/drawing/2014/main" id="{7D19993D-E6B5-4344-926F-984B6D27425F}"/>
               </a:ext>
             </a:extLst>
           </p:cNvPr>
@@ -7427,7 +7494,7 @@
           <p:cNvPr id="10" name="gate-bar-1">
             <a:extLst xmlns:a="http://schemas.openxmlformats.org/drawingml/2006/main">
               <a:ext uri="{FF2B5EF4-FFF2-40B4-BE49-F238E27FC236}">
-                <a16:creationId xmlns:a16="http://schemas.microsoft.com/office/drawing/2014/main" id="{8A8850C3-9CB2-4977-AB96-79633811AB4D}"/>
+                <a16:creationId xmlns:a16="http://schemas.microsoft.com/office/drawing/2014/main" id="{46F831CF-0307-4F61-92A8-AE2B682C8730}"/>
               </a:ext>
             </a:extLst>
           </p:cNvPr>
@@ -7460,7 +7527,7 @@
           <p:cNvPr id="11" name="gate-phase-1">
             <a:extLst xmlns:a="http://schemas.openxmlformats.org/drawingml/2006/main">
               <a:ext uri="{FF2B5EF4-FFF2-40B4-BE49-F238E27FC236}">
-                <a16:creationId xmlns:a16="http://schemas.microsoft.com/office/drawing/2014/main" id="{84DD06CD-8B5F-4273-A5B5-179DED53871A}"/>
+                <a16:creationId xmlns:a16="http://schemas.microsoft.com/office/drawing/2014/main" id="{FC19F9D9-955D-46BF-B655-09CF7BE27047}"/>
               </a:ext>
             </a:extLst>
           </p:cNvPr>
@@ -7510,7 +7577,7 @@
           <p:cNvPr id="12" name="gate-title-1">
             <a:extLst xmlns:a="http://schemas.openxmlformats.org/drawingml/2006/main">
               <a:ext uri="{FF2B5EF4-FFF2-40B4-BE49-F238E27FC236}">
-                <a16:creationId xmlns:a16="http://schemas.microsoft.com/office/drawing/2014/main" id="{766CF535-C27B-4F6D-8F4A-D7D4A956B04B}"/>
+                <a16:creationId xmlns:a16="http://schemas.microsoft.com/office/drawing/2014/main" id="{27F803DD-0952-4D72-861C-F7F5AE048CFE}"/>
               </a:ext>
             </a:extLst>
           </p:cNvPr>
@@ -7560,7 +7627,7 @@
           <p:cNvPr id="13" name="gate-body-1">
             <a:extLst xmlns:a="http://schemas.openxmlformats.org/drawingml/2006/main">
               <a:ext uri="{FF2B5EF4-FFF2-40B4-BE49-F238E27FC236}">
-                <a16:creationId xmlns:a16="http://schemas.microsoft.com/office/drawing/2014/main" id="{EF0C9AD2-35DA-4C63-AE64-E7ADD496D969}"/>
+                <a16:creationId xmlns:a16="http://schemas.microsoft.com/office/drawing/2014/main" id="{D6E41A6B-72B9-4140-9002-ED8F685FFCC2}"/>
               </a:ext>
             </a:extLst>
           </p:cNvPr>
@@ -7600,7 +7667,7 @@
                   <a:srgbClr val="CBD5E1"/>
                 </a:solidFill>
               </a:rPr>
-              <a:t>일본 서비스 범위와 콘텐츠 기준을 확정하고, 변경 요청은 영향도 검토 후 반영합니다.</a:t>
+              <a:t>일본 서비스 범위와 마일스톤 기준을 확정하고, 변경 요청은 영향도 검토 후 반영합니다.</a:t>
             </a:r>
           </a:p>
         </p:txBody>
@@ -7610,7 +7677,7 @@
           <p:cNvPr id="14" name="gate-card-2">
             <a:extLst xmlns:a="http://schemas.openxmlformats.org/drawingml/2006/main">
               <a:ext uri="{FF2B5EF4-FFF2-40B4-BE49-F238E27FC236}">
-                <a16:creationId xmlns:a16="http://schemas.microsoft.com/office/drawing/2014/main" id="{3DE61C86-46EA-49A1-BE79-8C6EC96BDC57}"/>
+                <a16:creationId xmlns:a16="http://schemas.microsoft.com/office/drawing/2014/main" id="{A3AE2984-59B3-4320-85BF-DFB52EE9025B}"/>
               </a:ext>
             </a:extLst>
           </p:cNvPr>
@@ -7645,7 +7712,7 @@
           <p:cNvPr id="15" name="gate-bar-2">
             <a:extLst xmlns:a="http://schemas.openxmlformats.org/drawingml/2006/main">
               <a:ext uri="{FF2B5EF4-FFF2-40B4-BE49-F238E27FC236}">
-                <a16:creationId xmlns:a16="http://schemas.microsoft.com/office/drawing/2014/main" id="{308BA253-CF53-40C9-B876-518D53FF1B0A}"/>
+                <a16:creationId xmlns:a16="http://schemas.microsoft.com/office/drawing/2014/main" id="{FA8AD2D0-EEBE-4F9D-9DF4-E42660FEDB7B}"/>
               </a:ext>
             </a:extLst>
           </p:cNvPr>
@@ -7678,7 +7745,7 @@
           <p:cNvPr id="16" name="gate-phase-2">
             <a:extLst xmlns:a="http://schemas.openxmlformats.org/drawingml/2006/main">
               <a:ext uri="{FF2B5EF4-FFF2-40B4-BE49-F238E27FC236}">
-                <a16:creationId xmlns:a16="http://schemas.microsoft.com/office/drawing/2014/main" id="{CADFB0A6-10B6-4B08-9175-22D85E22B330}"/>
+                <a16:creationId xmlns:a16="http://schemas.microsoft.com/office/drawing/2014/main" id="{6C444459-AF88-4266-8B2F-CDAF117C7DC4}"/>
               </a:ext>
             </a:extLst>
           </p:cNvPr>
@@ -7728,7 +7795,7 @@
           <p:cNvPr id="17" name="gate-title-2">
             <a:extLst xmlns:a="http://schemas.openxmlformats.org/drawingml/2006/main">
               <a:ext uri="{FF2B5EF4-FFF2-40B4-BE49-F238E27FC236}">
-                <a16:creationId xmlns:a16="http://schemas.microsoft.com/office/drawing/2014/main" id="{7227540E-5488-441E-8B8D-D2D4E3BD7DF6}"/>
+                <a16:creationId xmlns:a16="http://schemas.microsoft.com/office/drawing/2014/main" id="{F2E6CAC6-313C-43C1-858A-E18C2CC72588}"/>
               </a:ext>
             </a:extLst>
           </p:cNvPr>
@@ -7768,7 +7835,7 @@
                   <a:srgbClr val="FFFFFF"/>
                 </a:solidFill>
               </a:rPr>
-              <a:t>검수 진입</a:t>
+              <a:t>QA·검수 진입</a:t>
             </a:r>
           </a:p>
         </p:txBody>
@@ -7778,7 +7845,7 @@
           <p:cNvPr id="18" name="gate-body-2">
             <a:extLst xmlns:a="http://schemas.openxmlformats.org/drawingml/2006/main">
               <a:ext uri="{FF2B5EF4-FFF2-40B4-BE49-F238E27FC236}">
-                <a16:creationId xmlns:a16="http://schemas.microsoft.com/office/drawing/2014/main" id="{4F9E845A-59D7-49F2-BEDB-FE5B7E20BF67}"/>
+                <a16:creationId xmlns:a16="http://schemas.microsoft.com/office/drawing/2014/main" id="{25422143-0984-4043-AD06-5BBF28838B20}"/>
               </a:ext>
             </a:extLst>
           </p:cNvPr>
@@ -7818,7 +7885,7 @@
                   <a:srgbClr val="CBD5E1"/>
                 </a:solidFill>
               </a:rPr>
-              <a:t>현지화 리소스와 주요 기능 반영 상태를 확인한 뒤 내부 QA와 퍼블리셔 검수에 진입합니다.</a:t>
+              <a:t>현지화 리소스와 빌드 반영 상태를 확인한 뒤 QA와 퍼블리셔 검수에 진입합니다.</a:t>
             </a:r>
           </a:p>
         </p:txBody>
@@ -7828,7 +7895,7 @@
           <p:cNvPr id="19" name="gate-card-3">
             <a:extLst xmlns:a="http://schemas.openxmlformats.org/drawingml/2006/main">
               <a:ext uri="{FF2B5EF4-FFF2-40B4-BE49-F238E27FC236}">
-                <a16:creationId xmlns:a16="http://schemas.microsoft.com/office/drawing/2014/main" id="{A5A89A7E-5FCA-41DC-9187-1D00D84EEB4D}"/>
+                <a16:creationId xmlns:a16="http://schemas.microsoft.com/office/drawing/2014/main" id="{B7F809EA-C6B0-4117-882B-476B2BA41A0D}"/>
               </a:ext>
             </a:extLst>
           </p:cNvPr>
@@ -7863,7 +7930,7 @@
           <p:cNvPr id="20" name="gate-bar-3">
             <a:extLst xmlns:a="http://schemas.openxmlformats.org/drawingml/2006/main">
               <a:ext uri="{FF2B5EF4-FFF2-40B4-BE49-F238E27FC236}">
-                <a16:creationId xmlns:a16="http://schemas.microsoft.com/office/drawing/2014/main" id="{E1475169-C584-4153-9783-4EB14A53593B}"/>
+                <a16:creationId xmlns:a16="http://schemas.microsoft.com/office/drawing/2014/main" id="{5BFE7A5F-F0F4-4950-B8F0-20139CDA088A}"/>
               </a:ext>
             </a:extLst>
           </p:cNvPr>
@@ -7896,7 +7963,7 @@
           <p:cNvPr id="21" name="gate-phase-3">
             <a:extLst xmlns:a="http://schemas.openxmlformats.org/drawingml/2006/main">
               <a:ext uri="{FF2B5EF4-FFF2-40B4-BE49-F238E27FC236}">
-                <a16:creationId xmlns:a16="http://schemas.microsoft.com/office/drawing/2014/main" id="{BBFD7033-5848-4B76-B68F-AB55B36F5916}"/>
+                <a16:creationId xmlns:a16="http://schemas.microsoft.com/office/drawing/2014/main" id="{1EBE3083-D550-451F-990A-0DE78BCE00DF}"/>
               </a:ext>
             </a:extLst>
           </p:cNvPr>
@@ -7946,7 +8013,7 @@
           <p:cNvPr id="22" name="gate-title-3">
             <a:extLst xmlns:a="http://schemas.openxmlformats.org/drawingml/2006/main">
               <a:ext uri="{FF2B5EF4-FFF2-40B4-BE49-F238E27FC236}">
-                <a16:creationId xmlns:a16="http://schemas.microsoft.com/office/drawing/2014/main" id="{F6027F08-AAD3-4A8F-9909-9F83CA3EF5D2}"/>
+                <a16:creationId xmlns:a16="http://schemas.microsoft.com/office/drawing/2014/main" id="{3EA761F6-CCC0-4DCC-866F-9B1D229D0706}"/>
               </a:ext>
             </a:extLst>
           </p:cNvPr>
@@ -7986,7 +8053,7 @@
                   <a:srgbClr val="FFFFFF"/>
                 </a:solidFill>
               </a:rPr>
-              <a:t>런칭 후보</a:t>
+              <a:t>릴리즈 후보</a:t>
             </a:r>
           </a:p>
         </p:txBody>
@@ -7996,7 +8063,7 @@
           <p:cNvPr id="23" name="gate-body-3">
             <a:extLst xmlns:a="http://schemas.openxmlformats.org/drawingml/2006/main">
               <a:ext uri="{FF2B5EF4-FFF2-40B4-BE49-F238E27FC236}">
-                <a16:creationId xmlns:a16="http://schemas.microsoft.com/office/drawing/2014/main" id="{A7C0D76F-0114-47D7-8A81-9F83B6DE3C4B}"/>
+                <a16:creationId xmlns:a16="http://schemas.microsoft.com/office/drawing/2014/main" id="{6CD3FBE4-73F7-41E5-980E-88B634501656}"/>
               </a:ext>
             </a:extLst>
           </p:cNvPr>
@@ -8036,7 +8103,7 @@
                   <a:srgbClr val="CBD5E1"/>
                 </a:solidFill>
               </a:rPr>
-              <a:t>치명 이슈와 잔여 리스크를 분리하고, 배포 가능한 후보 빌드 기준을 고정합니다.</a:t>
+              <a:t>주요 이슈와 잔여 리스크를 분리하고, 배포 가능한 후보 빌드 기준을 고정합니다.</a:t>
             </a:r>
           </a:p>
         </p:txBody>
@@ -8046,7 +8113,7 @@
           <p:cNvPr id="24" name="decision-title">
             <a:extLst xmlns:a="http://schemas.openxmlformats.org/drawingml/2006/main">
               <a:ext uri="{FF2B5EF4-FFF2-40B4-BE49-F238E27FC236}">
-                <a16:creationId xmlns:a16="http://schemas.microsoft.com/office/drawing/2014/main" id="{6D530ED2-89A2-475C-8FDB-9DB6A9222A9A}"/>
+                <a16:creationId xmlns:a16="http://schemas.microsoft.com/office/drawing/2014/main" id="{91BE98DA-DC8E-4009-B02C-74B589B9AF54}"/>
               </a:ext>
             </a:extLst>
           </p:cNvPr>
@@ -8096,7 +8163,7 @@
           <p:cNvPr id="25" name="decision-note">
             <a:extLst xmlns:a="http://schemas.openxmlformats.org/drawingml/2006/main">
               <a:ext uri="{FF2B5EF4-FFF2-40B4-BE49-F238E27FC236}">
-                <a16:creationId xmlns:a16="http://schemas.microsoft.com/office/drawing/2014/main" id="{39536B98-6D8E-4AE8-B165-087F2FB13BC8}"/>
+                <a16:creationId xmlns:a16="http://schemas.microsoft.com/office/drawing/2014/main" id="{FC2CAF70-273B-4045-8C06-94AD914701D6}"/>
               </a:ext>
             </a:extLst>
           </p:cNvPr>
@@ -8136,7 +8203,7 @@
                   <a:srgbClr val="94A3B8"/>
                 </a:solidFill>
               </a:rPr>
-              <a:t>각 항목은 완료 여부보다 다음 단계 진입 가능성을 기준으로 판단합니다.</a:t>
+              <a:t>각 항목은 다음 단계 진입 가능성을 기준으로 판단합니다.</a:t>
             </a:r>
           </a:p>
         </p:txBody>
@@ -8146,7 +8213,7 @@
           <p:cNvPr id="26" name="decision-header">
             <a:extLst xmlns:a="http://schemas.openxmlformats.org/drawingml/2006/main">
               <a:ext uri="{FF2B5EF4-FFF2-40B4-BE49-F238E27FC236}">
-                <a16:creationId xmlns:a16="http://schemas.microsoft.com/office/drawing/2014/main" id="{41D2B7DA-1D40-4D79-8371-8EAD20001EFB}"/>
+                <a16:creationId xmlns:a16="http://schemas.microsoft.com/office/drawing/2014/main" id="{C063CA54-1701-4D04-B059-83D47151CFA2}"/>
               </a:ext>
             </a:extLst>
           </p:cNvPr>
@@ -8179,7 +8246,7 @@
           <p:cNvPr id="27" name="decision-th-1">
             <a:extLst xmlns:a="http://schemas.openxmlformats.org/drawingml/2006/main">
               <a:ext uri="{FF2B5EF4-FFF2-40B4-BE49-F238E27FC236}">
-                <a16:creationId xmlns:a16="http://schemas.microsoft.com/office/drawing/2014/main" id="{5CE88542-8D22-4C90-B2B6-4E7E14F4B53E}"/>
+                <a16:creationId xmlns:a16="http://schemas.microsoft.com/office/drawing/2014/main" id="{B3C1901D-32D8-4B40-87D3-21D9037CC815}"/>
               </a:ext>
             </a:extLst>
           </p:cNvPr>
@@ -8229,7 +8296,7 @@
           <p:cNvPr id="28" name="decision-th-2">
             <a:extLst xmlns:a="http://schemas.openxmlformats.org/drawingml/2006/main">
               <a:ext uri="{FF2B5EF4-FFF2-40B4-BE49-F238E27FC236}">
-                <a16:creationId xmlns:a16="http://schemas.microsoft.com/office/drawing/2014/main" id="{76B20F2D-CE05-4AFA-B6CD-C63C544C76A1}"/>
+                <a16:creationId xmlns:a16="http://schemas.microsoft.com/office/drawing/2014/main" id="{45A0327C-AB85-4FCC-A1AE-EECEAEBABD26}"/>
               </a:ext>
             </a:extLst>
           </p:cNvPr>
@@ -8279,7 +8346,7 @@
           <p:cNvPr id="29" name="decision-th-3">
             <a:extLst xmlns:a="http://schemas.openxmlformats.org/drawingml/2006/main">
               <a:ext uri="{FF2B5EF4-FFF2-40B4-BE49-F238E27FC236}">
-                <a16:creationId xmlns:a16="http://schemas.microsoft.com/office/drawing/2014/main" id="{C86BD559-5D48-4873-A243-398D5833D104}"/>
+                <a16:creationId xmlns:a16="http://schemas.microsoft.com/office/drawing/2014/main" id="{BBD47427-C55A-4E20-9C9B-2BFBB2DBAC1F}"/>
               </a:ext>
             </a:extLst>
           </p:cNvPr>
@@ -8329,7 +8396,7 @@
           <p:cNvPr id="30" name="decision-row-1">
             <a:extLst xmlns:a="http://schemas.openxmlformats.org/drawingml/2006/main">
               <a:ext uri="{FF2B5EF4-FFF2-40B4-BE49-F238E27FC236}">
-                <a16:creationId xmlns:a16="http://schemas.microsoft.com/office/drawing/2014/main" id="{F8AE3080-F1FF-4475-9C7D-CC5961266049}"/>
+                <a16:creationId xmlns:a16="http://schemas.microsoft.com/office/drawing/2014/main" id="{3ED38D39-8961-47AC-A7FF-98E31DD4EB42}"/>
               </a:ext>
             </a:extLst>
           </p:cNvPr>
@@ -8362,7 +8429,7 @@
           <p:cNvPr id="31" name="decision-item-1">
             <a:extLst xmlns:a="http://schemas.openxmlformats.org/drawingml/2006/main">
               <a:ext uri="{FF2B5EF4-FFF2-40B4-BE49-F238E27FC236}">
-                <a16:creationId xmlns:a16="http://schemas.microsoft.com/office/drawing/2014/main" id="{93AF291A-E5D6-4568-B24F-32EE68EDC51D}"/>
+                <a16:creationId xmlns:a16="http://schemas.microsoft.com/office/drawing/2014/main" id="{3B808020-5681-4F4B-A862-31BD16C2E99B}"/>
               </a:ext>
             </a:extLst>
           </p:cNvPr>
@@ -8412,47 +8479,47 @@
           <p:cNvPr id="32" name="decision-gate-1">
             <a:extLst xmlns:a="http://schemas.openxmlformats.org/drawingml/2006/main">
               <a:ext uri="{FF2B5EF4-FFF2-40B4-BE49-F238E27FC236}">
-                <a16:creationId xmlns:a16="http://schemas.microsoft.com/office/drawing/2014/main" id="{F0A265BB-77A5-4636-AE83-9CC6FF767A5F}"/>
-              </a:ext>
-            </a:extLst>
-          </p:cNvPr>
-          <p:cNvSpPr>
-            <a:spLocks xmlns:a="http://schemas.openxmlformats.org/drawingml/2006/main" noGrp="1"/>
-          </p:cNvSpPr>
-          <p:nvPr/>
-        </p:nvSpPr>
-        <p:spPr>
-          <a:xfrm xmlns:a="http://schemas.openxmlformats.org/drawingml/2006/main">
-            <a:off x="6934200" y="2581275"/>
-            <a:ext cx="2857500" cy="285750"/>
-          </a:xfrm>
-          <a:prstGeom xmlns:a="http://schemas.openxmlformats.org/drawingml/2006/main" prst="rect">
-            <a:avLst/>
-          </a:prstGeom>
-          <a:noFill xmlns:a="http://schemas.openxmlformats.org/drawingml/2006/main"/>
-          <a:ln xmlns:a="http://schemas.openxmlformats.org/drawingml/2006/main" w="0">
-            <a:noFill/>
-            <a:prstDash val="solid"/>
-          </a:ln>
-        </p:spPr>
-        <p:txBody>
-          <a:bodyPr xmlns:a="http://schemas.openxmlformats.org/drawingml/2006/main"/>
-          <a:lstStyle xmlns:a="http://schemas.openxmlformats.org/drawingml/2006/main"/>
-          <a:p xmlns:a="http://schemas.openxmlformats.org/drawingml/2006/main">
-            <a:pPr>
-              <a:defRPr sz="1050">
+                <a16:creationId xmlns:a16="http://schemas.microsoft.com/office/drawing/2014/main" id="{EB88E084-E2CB-4FC1-BBCF-BF9209CB4F1D}"/>
+              </a:ext>
+            </a:extLst>
+          </p:cNvPr>
+          <p:cNvSpPr>
+            <a:spLocks xmlns:a="http://schemas.openxmlformats.org/drawingml/2006/main" noGrp="1"/>
+          </p:cNvSpPr>
+          <p:nvPr/>
+        </p:nvSpPr>
+        <p:spPr>
+          <a:xfrm xmlns:a="http://schemas.openxmlformats.org/drawingml/2006/main">
+            <a:off x="6934200" y="2571750"/>
+            <a:ext cx="2857500" cy="323850"/>
+          </a:xfrm>
+          <a:prstGeom xmlns:a="http://schemas.openxmlformats.org/drawingml/2006/main" prst="rect">
+            <a:avLst/>
+          </a:prstGeom>
+          <a:noFill xmlns:a="http://schemas.openxmlformats.org/drawingml/2006/main"/>
+          <a:ln xmlns:a="http://schemas.openxmlformats.org/drawingml/2006/main" w="0">
+            <a:noFill/>
+            <a:prstDash val="solid"/>
+          </a:ln>
+        </p:spPr>
+        <p:txBody>
+          <a:bodyPr xmlns:a="http://schemas.openxmlformats.org/drawingml/2006/main"/>
+          <a:lstStyle xmlns:a="http://schemas.openxmlformats.org/drawingml/2006/main"/>
+          <a:p xmlns:a="http://schemas.openxmlformats.org/drawingml/2006/main">
+            <a:pPr>
+              <a:defRPr sz="1013">
                 <a:solidFill>
                   <a:srgbClr val="FFFFFF"/>
                 </a:solidFill>
               </a:defRPr>
             </a:pPr>
             <a:r>
-              <a:rPr sz="1050">
+              <a:rPr sz="1013">
                 <a:solidFill>
                   <a:srgbClr val="FFFFFF"/>
                 </a:solidFill>
               </a:rPr>
-              <a:t>런칭 포함·제외 콘텐츠와 변경 승인 기준 확정</a:t>
+              <a:t>런칭 포함·제외 범위와 변경 승인 기준 확정</a:t>
             </a:r>
           </a:p>
         </p:txBody>
@@ -8462,7 +8529,7 @@
           <p:cNvPr id="33" name="decision-owner-1">
             <a:extLst xmlns:a="http://schemas.openxmlformats.org/drawingml/2006/main">
               <a:ext uri="{FF2B5EF4-FFF2-40B4-BE49-F238E27FC236}">
-                <a16:creationId xmlns:a16="http://schemas.microsoft.com/office/drawing/2014/main" id="{DB90D8E3-911E-42ED-B905-1D757A23A4AA}"/>
+                <a16:creationId xmlns:a16="http://schemas.microsoft.com/office/drawing/2014/main" id="{5EA37DA0-39F0-4B80-98A6-BAAE1391A657}"/>
               </a:ext>
             </a:extLst>
           </p:cNvPr>
@@ -8512,7 +8579,7 @@
           <p:cNvPr id="34" name="decision-row-2">
             <a:extLst xmlns:a="http://schemas.openxmlformats.org/drawingml/2006/main">
               <a:ext uri="{FF2B5EF4-FFF2-40B4-BE49-F238E27FC236}">
-                <a16:creationId xmlns:a16="http://schemas.microsoft.com/office/drawing/2014/main" id="{DA00C44D-5B34-446A-B3AE-29F6B3F684D2}"/>
+                <a16:creationId xmlns:a16="http://schemas.microsoft.com/office/drawing/2014/main" id="{7E765816-370C-497A-86E7-36371D74BF0A}"/>
               </a:ext>
             </a:extLst>
           </p:cNvPr>
@@ -8545,7 +8612,7 @@
           <p:cNvPr id="35" name="decision-item-2">
             <a:extLst xmlns:a="http://schemas.openxmlformats.org/drawingml/2006/main">
               <a:ext uri="{FF2B5EF4-FFF2-40B4-BE49-F238E27FC236}">
-                <a16:creationId xmlns:a16="http://schemas.microsoft.com/office/drawing/2014/main" id="{E3760915-D434-4E8B-AEAE-A1E1D56F976E}"/>
+                <a16:creationId xmlns:a16="http://schemas.microsoft.com/office/drawing/2014/main" id="{1313EDB3-5DB0-420E-9239-35D5648E257A}"/>
               </a:ext>
             </a:extLst>
           </p:cNvPr>
@@ -8585,7 +8652,7 @@
                   <a:srgbClr val="FF6B35"/>
                 </a:solidFill>
               </a:rPr>
-              <a:t>빌드 기준</a:t>
+              <a:t>빌드·버전</a:t>
             </a:r>
           </a:p>
         </p:txBody>
@@ -8595,47 +8662,47 @@
           <p:cNvPr id="36" name="decision-gate-2">
             <a:extLst xmlns:a="http://schemas.openxmlformats.org/drawingml/2006/main">
               <a:ext uri="{FF2B5EF4-FFF2-40B4-BE49-F238E27FC236}">
-                <a16:creationId xmlns:a16="http://schemas.microsoft.com/office/drawing/2014/main" id="{81E81F00-9AF0-43DB-9D93-F1215693AD5A}"/>
-              </a:ext>
-            </a:extLst>
-          </p:cNvPr>
-          <p:cNvSpPr>
-            <a:spLocks xmlns:a="http://schemas.openxmlformats.org/drawingml/2006/main" noGrp="1"/>
-          </p:cNvSpPr>
-          <p:nvPr/>
-        </p:nvSpPr>
-        <p:spPr>
-          <a:xfrm xmlns:a="http://schemas.openxmlformats.org/drawingml/2006/main">
-            <a:off x="6934200" y="3133725"/>
-            <a:ext cx="2857500" cy="285750"/>
-          </a:xfrm>
-          <a:prstGeom xmlns:a="http://schemas.openxmlformats.org/drawingml/2006/main" prst="rect">
-            <a:avLst/>
-          </a:prstGeom>
-          <a:noFill xmlns:a="http://schemas.openxmlformats.org/drawingml/2006/main"/>
-          <a:ln xmlns:a="http://schemas.openxmlformats.org/drawingml/2006/main" w="0">
-            <a:noFill/>
-            <a:prstDash val="solid"/>
-          </a:ln>
-        </p:spPr>
-        <p:txBody>
-          <a:bodyPr xmlns:a="http://schemas.openxmlformats.org/drawingml/2006/main"/>
-          <a:lstStyle xmlns:a="http://schemas.openxmlformats.org/drawingml/2006/main"/>
-          <a:p xmlns:a="http://schemas.openxmlformats.org/drawingml/2006/main">
-            <a:pPr>
-              <a:defRPr sz="1050">
+                <a16:creationId xmlns:a16="http://schemas.microsoft.com/office/drawing/2014/main" id="{EBED3E62-5C3F-44F3-B31D-188CFDDD7AE0}"/>
+              </a:ext>
+            </a:extLst>
+          </p:cNvPr>
+          <p:cNvSpPr>
+            <a:spLocks xmlns:a="http://schemas.openxmlformats.org/drawingml/2006/main" noGrp="1"/>
+          </p:cNvSpPr>
+          <p:nvPr/>
+        </p:nvSpPr>
+        <p:spPr>
+          <a:xfrm xmlns:a="http://schemas.openxmlformats.org/drawingml/2006/main">
+            <a:off x="6934200" y="3124200"/>
+            <a:ext cx="2857500" cy="323850"/>
+          </a:xfrm>
+          <a:prstGeom xmlns:a="http://schemas.openxmlformats.org/drawingml/2006/main" prst="rect">
+            <a:avLst/>
+          </a:prstGeom>
+          <a:noFill xmlns:a="http://schemas.openxmlformats.org/drawingml/2006/main"/>
+          <a:ln xmlns:a="http://schemas.openxmlformats.org/drawingml/2006/main" w="0">
+            <a:noFill/>
+            <a:prstDash val="solid"/>
+          </a:ln>
+        </p:spPr>
+        <p:txBody>
+          <a:bodyPr xmlns:a="http://schemas.openxmlformats.org/drawingml/2006/main"/>
+          <a:lstStyle xmlns:a="http://schemas.openxmlformats.org/drawingml/2006/main"/>
+          <a:p xmlns:a="http://schemas.openxmlformats.org/drawingml/2006/main">
+            <a:pPr>
+              <a:defRPr sz="1013">
                 <a:solidFill>
                   <a:srgbClr val="FFFFFF"/>
                 </a:solidFill>
               </a:defRPr>
             </a:pPr>
             <a:r>
-              <a:rPr sz="1050">
+              <a:rPr sz="1013">
                 <a:solidFill>
                   <a:srgbClr val="FFFFFF"/>
                 </a:solidFill>
               </a:rPr>
-              <a:t>Perforce 브랜치와 후보 빌드 태그 운영 기준 합의</a:t>
+              <a:t>Perforce 브랜치와 후보 빌드 태그 기준 합의</a:t>
             </a:r>
           </a:p>
         </p:txBody>
@@ -8645,7 +8712,7 @@
           <p:cNvPr id="37" name="decision-owner-2">
             <a:extLst xmlns:a="http://schemas.openxmlformats.org/drawingml/2006/main">
               <a:ext uri="{FF2B5EF4-FFF2-40B4-BE49-F238E27FC236}">
-                <a16:creationId xmlns:a16="http://schemas.microsoft.com/office/drawing/2014/main" id="{DA9AC35A-733C-4589-8D2E-A846E6E651D9}"/>
+                <a16:creationId xmlns:a16="http://schemas.microsoft.com/office/drawing/2014/main" id="{ED943F7E-2499-4806-872C-44A48CD45DA3}"/>
               </a:ext>
             </a:extLst>
           </p:cNvPr>
@@ -8695,7 +8762,7 @@
           <p:cNvPr id="38" name="decision-row-3">
             <a:extLst xmlns:a="http://schemas.openxmlformats.org/drawingml/2006/main">
               <a:ext uri="{FF2B5EF4-FFF2-40B4-BE49-F238E27FC236}">
-                <a16:creationId xmlns:a16="http://schemas.microsoft.com/office/drawing/2014/main" id="{5487862A-C0BE-4868-B70E-AFBCFC8549E3}"/>
+                <a16:creationId xmlns:a16="http://schemas.microsoft.com/office/drawing/2014/main" id="{133B6815-F68D-48EA-B870-1A8AACDD5CC8}"/>
               </a:ext>
             </a:extLst>
           </p:cNvPr>
@@ -8728,7 +8795,7 @@
           <p:cNvPr id="39" name="decision-item-3">
             <a:extLst xmlns:a="http://schemas.openxmlformats.org/drawingml/2006/main">
               <a:ext uri="{FF2B5EF4-FFF2-40B4-BE49-F238E27FC236}">
-                <a16:creationId xmlns:a16="http://schemas.microsoft.com/office/drawing/2014/main" id="{FDFE9D2A-B567-4244-BC99-56FB30F512A5}"/>
+                <a16:creationId xmlns:a16="http://schemas.microsoft.com/office/drawing/2014/main" id="{E75F62CA-379B-4333-A928-B0FBA23063B7}"/>
               </a:ext>
             </a:extLst>
           </p:cNvPr>
@@ -8778,47 +8845,47 @@
           <p:cNvPr id="40" name="decision-gate-3">
             <a:extLst xmlns:a="http://schemas.openxmlformats.org/drawingml/2006/main">
               <a:ext uri="{FF2B5EF4-FFF2-40B4-BE49-F238E27FC236}">
-                <a16:creationId xmlns:a16="http://schemas.microsoft.com/office/drawing/2014/main" id="{C30CBF68-52F3-422D-8E49-F3D8A1CD4407}"/>
-              </a:ext>
-            </a:extLst>
-          </p:cNvPr>
-          <p:cNvSpPr>
-            <a:spLocks xmlns:a="http://schemas.openxmlformats.org/drawingml/2006/main" noGrp="1"/>
-          </p:cNvSpPr>
-          <p:nvPr/>
-        </p:nvSpPr>
-        <p:spPr>
-          <a:xfrm xmlns:a="http://schemas.openxmlformats.org/drawingml/2006/main">
-            <a:off x="6934200" y="3686175"/>
-            <a:ext cx="2857500" cy="285750"/>
-          </a:xfrm>
-          <a:prstGeom xmlns:a="http://schemas.openxmlformats.org/drawingml/2006/main" prst="rect">
-            <a:avLst/>
-          </a:prstGeom>
-          <a:noFill xmlns:a="http://schemas.openxmlformats.org/drawingml/2006/main"/>
-          <a:ln xmlns:a="http://schemas.openxmlformats.org/drawingml/2006/main" w="0">
-            <a:noFill/>
-            <a:prstDash val="solid"/>
-          </a:ln>
-        </p:spPr>
-        <p:txBody>
-          <a:bodyPr xmlns:a="http://schemas.openxmlformats.org/drawingml/2006/main"/>
-          <a:lstStyle xmlns:a="http://schemas.openxmlformats.org/drawingml/2006/main"/>
-          <a:p xmlns:a="http://schemas.openxmlformats.org/drawingml/2006/main">
-            <a:pPr>
-              <a:defRPr sz="1050">
+                <a16:creationId xmlns:a16="http://schemas.microsoft.com/office/drawing/2014/main" id="{35D48100-3790-4EC2-AEFA-0C477444A252}"/>
+              </a:ext>
+            </a:extLst>
+          </p:cNvPr>
+          <p:cNvSpPr>
+            <a:spLocks xmlns:a="http://schemas.openxmlformats.org/drawingml/2006/main" noGrp="1"/>
+          </p:cNvSpPr>
+          <p:nvPr/>
+        </p:nvSpPr>
+        <p:spPr>
+          <a:xfrm xmlns:a="http://schemas.openxmlformats.org/drawingml/2006/main">
+            <a:off x="6934200" y="3676650"/>
+            <a:ext cx="2857500" cy="323850"/>
+          </a:xfrm>
+          <a:prstGeom xmlns:a="http://schemas.openxmlformats.org/drawingml/2006/main" prst="rect">
+            <a:avLst/>
+          </a:prstGeom>
+          <a:noFill xmlns:a="http://schemas.openxmlformats.org/drawingml/2006/main"/>
+          <a:ln xmlns:a="http://schemas.openxmlformats.org/drawingml/2006/main" w="0">
+            <a:noFill/>
+            <a:prstDash val="solid"/>
+          </a:ln>
+        </p:spPr>
+        <p:txBody>
+          <a:bodyPr xmlns:a="http://schemas.openxmlformats.org/drawingml/2006/main"/>
+          <a:lstStyle xmlns:a="http://schemas.openxmlformats.org/drawingml/2006/main"/>
+          <a:p xmlns:a="http://schemas.openxmlformats.org/drawingml/2006/main">
+            <a:pPr>
+              <a:defRPr sz="1013">
                 <a:solidFill>
                   <a:srgbClr val="FFFFFF"/>
                 </a:solidFill>
               </a:defRPr>
             </a:pPr>
             <a:r>
-              <a:rPr sz="1050">
+              <a:rPr sz="1013">
                 <a:solidFill>
                   <a:srgbClr val="FFFFFF"/>
                 </a:solidFill>
               </a:rPr>
-              <a:t>치명 이슈 0건, 주요 이슈 수정 계획과 잔여 리스크 공유</a:t>
+              <a:t>주요 이슈 수정 계획과 잔여 리스크 공유</a:t>
             </a:r>
           </a:p>
         </p:txBody>
@@ -8828,7 +8895,7 @@
           <p:cNvPr id="41" name="decision-owner-3">
             <a:extLst xmlns:a="http://schemas.openxmlformats.org/drawingml/2006/main">
               <a:ext uri="{FF2B5EF4-FFF2-40B4-BE49-F238E27FC236}">
-                <a16:creationId xmlns:a16="http://schemas.microsoft.com/office/drawing/2014/main" id="{CC23460F-80F8-4D1A-B797-3E178C412CFC}"/>
+                <a16:creationId xmlns:a16="http://schemas.microsoft.com/office/drawing/2014/main" id="{66DE90A7-5E34-45B5-BD3B-35AB284FAC92}"/>
               </a:ext>
             </a:extLst>
           </p:cNvPr>
@@ -8878,7 +8945,7 @@
           <p:cNvPr id="42" name="decision-row-4">
             <a:extLst xmlns:a="http://schemas.openxmlformats.org/drawingml/2006/main">
               <a:ext uri="{FF2B5EF4-FFF2-40B4-BE49-F238E27FC236}">
-                <a16:creationId xmlns:a16="http://schemas.microsoft.com/office/drawing/2014/main" id="{8511F758-BA17-42B9-94C8-1A04FCC2E5EE}"/>
+                <a16:creationId xmlns:a16="http://schemas.microsoft.com/office/drawing/2014/main" id="{6B0087D5-23CD-41CC-893C-08ACE8C3DF21}"/>
               </a:ext>
             </a:extLst>
           </p:cNvPr>
@@ -8911,7 +8978,7 @@
           <p:cNvPr id="43" name="decision-item-4">
             <a:extLst xmlns:a="http://schemas.openxmlformats.org/drawingml/2006/main">
               <a:ext uri="{FF2B5EF4-FFF2-40B4-BE49-F238E27FC236}">
-                <a16:creationId xmlns:a16="http://schemas.microsoft.com/office/drawing/2014/main" id="{F14DECFC-7F8D-45E6-B5EC-7ED25711BC91}"/>
+                <a16:creationId xmlns:a16="http://schemas.microsoft.com/office/drawing/2014/main" id="{6DBE7842-D2DA-4895-9349-5A40EBD686FA}"/>
               </a:ext>
             </a:extLst>
           </p:cNvPr>
@@ -8951,7 +9018,7 @@
                   <a:srgbClr val="8BD9E8"/>
                 </a:solidFill>
               </a:rPr>
-              <a:t>퍼블리셔 검수</a:t>
+              <a:t>퍼블리셔 대응</a:t>
             </a:r>
           </a:p>
         </p:txBody>
@@ -8961,47 +9028,47 @@
           <p:cNvPr id="44" name="decision-gate-4">
             <a:extLst xmlns:a="http://schemas.openxmlformats.org/drawingml/2006/main">
               <a:ext uri="{FF2B5EF4-FFF2-40B4-BE49-F238E27FC236}">
-                <a16:creationId xmlns:a16="http://schemas.microsoft.com/office/drawing/2014/main" id="{D1E17F3F-64A1-4AA5-B441-DFCF0531A7F7}"/>
-              </a:ext>
-            </a:extLst>
-          </p:cNvPr>
-          <p:cNvSpPr>
-            <a:spLocks xmlns:a="http://schemas.openxmlformats.org/drawingml/2006/main" noGrp="1"/>
-          </p:cNvSpPr>
-          <p:nvPr/>
-        </p:nvSpPr>
-        <p:spPr>
-          <a:xfrm xmlns:a="http://schemas.openxmlformats.org/drawingml/2006/main">
-            <a:off x="6934200" y="4238625"/>
-            <a:ext cx="2857500" cy="285750"/>
-          </a:xfrm>
-          <a:prstGeom xmlns:a="http://schemas.openxmlformats.org/drawingml/2006/main" prst="rect">
-            <a:avLst/>
-          </a:prstGeom>
-          <a:noFill xmlns:a="http://schemas.openxmlformats.org/drawingml/2006/main"/>
-          <a:ln xmlns:a="http://schemas.openxmlformats.org/drawingml/2006/main" w="0">
-            <a:noFill/>
-            <a:prstDash val="solid"/>
-          </a:ln>
-        </p:spPr>
-        <p:txBody>
-          <a:bodyPr xmlns:a="http://schemas.openxmlformats.org/drawingml/2006/main"/>
-          <a:lstStyle xmlns:a="http://schemas.openxmlformats.org/drawingml/2006/main"/>
-          <a:p xmlns:a="http://schemas.openxmlformats.org/drawingml/2006/main">
-            <a:pPr>
-              <a:defRPr sz="1050">
+                <a16:creationId xmlns:a16="http://schemas.microsoft.com/office/drawing/2014/main" id="{5A9E6EEA-2B1A-4A35-B570-DBEB7193C2B3}"/>
+              </a:ext>
+            </a:extLst>
+          </p:cNvPr>
+          <p:cNvSpPr>
+            <a:spLocks xmlns:a="http://schemas.openxmlformats.org/drawingml/2006/main" noGrp="1"/>
+          </p:cNvSpPr>
+          <p:nvPr/>
+        </p:nvSpPr>
+        <p:spPr>
+          <a:xfrm xmlns:a="http://schemas.openxmlformats.org/drawingml/2006/main">
+            <a:off x="6934200" y="4229100"/>
+            <a:ext cx="2857500" cy="323850"/>
+          </a:xfrm>
+          <a:prstGeom xmlns:a="http://schemas.openxmlformats.org/drawingml/2006/main" prst="rect">
+            <a:avLst/>
+          </a:prstGeom>
+          <a:noFill xmlns:a="http://schemas.openxmlformats.org/drawingml/2006/main"/>
+          <a:ln xmlns:a="http://schemas.openxmlformats.org/drawingml/2006/main" w="0">
+            <a:noFill/>
+            <a:prstDash val="solid"/>
+          </a:ln>
+        </p:spPr>
+        <p:txBody>
+          <a:bodyPr xmlns:a="http://schemas.openxmlformats.org/drawingml/2006/main"/>
+          <a:lstStyle xmlns:a="http://schemas.openxmlformats.org/drawingml/2006/main"/>
+          <a:p xmlns:a="http://schemas.openxmlformats.org/drawingml/2006/main">
+            <a:pPr>
+              <a:defRPr sz="1013">
                 <a:solidFill>
                   <a:srgbClr val="FFFFFF"/>
                 </a:solidFill>
               </a:defRPr>
             </a:pPr>
             <a:r>
-              <a:rPr sz="1050">
+              <a:rPr sz="1013">
                 <a:solidFill>
                   <a:srgbClr val="FFFFFF"/>
                 </a:solidFill>
               </a:rPr>
-              <a:t>검수 요청, 피드백, 재전달 일정이 추적 가능한 상태</a:t>
+              <a:t>검수 요청, 피드백, 재전달 일정 추적</a:t>
             </a:r>
           </a:p>
         </p:txBody>
@@ -9011,7 +9078,7 @@
           <p:cNvPr id="45" name="decision-owner-4">
             <a:extLst xmlns:a="http://schemas.openxmlformats.org/drawingml/2006/main">
               <a:ext uri="{FF2B5EF4-FFF2-40B4-BE49-F238E27FC236}">
-                <a16:creationId xmlns:a16="http://schemas.microsoft.com/office/drawing/2014/main" id="{BB4C2B74-D2E3-47A1-8209-696E666A33A1}"/>
+                <a16:creationId xmlns:a16="http://schemas.microsoft.com/office/drawing/2014/main" id="{438E4FAF-4E13-4C2D-A34C-CECEA7B593CA}"/>
               </a:ext>
             </a:extLst>
           </p:cNvPr>
@@ -9061,7 +9128,7 @@
           <p:cNvPr id="46" name="decision-row-5">
             <a:extLst xmlns:a="http://schemas.openxmlformats.org/drawingml/2006/main">
               <a:ext uri="{FF2B5EF4-FFF2-40B4-BE49-F238E27FC236}">
-                <a16:creationId xmlns:a16="http://schemas.microsoft.com/office/drawing/2014/main" id="{1C8981E7-03FE-4E62-9343-8D1E3A17B4B6}"/>
+                <a16:creationId xmlns:a16="http://schemas.microsoft.com/office/drawing/2014/main" id="{04225715-7089-4861-B6D1-DEA0CEFF3D01}"/>
               </a:ext>
             </a:extLst>
           </p:cNvPr>
@@ -9094,7 +9161,7 @@
           <p:cNvPr id="47" name="decision-item-5">
             <a:extLst xmlns:a="http://schemas.openxmlformats.org/drawingml/2006/main">
               <a:ext uri="{FF2B5EF4-FFF2-40B4-BE49-F238E27FC236}">
-                <a16:creationId xmlns:a16="http://schemas.microsoft.com/office/drawing/2014/main" id="{0AD55C7B-21E5-4802-A2AC-BE70FC586B63}"/>
+                <a16:creationId xmlns:a16="http://schemas.microsoft.com/office/drawing/2014/main" id="{C9675159-5B41-41D7-9A93-FA0F735E6630}"/>
               </a:ext>
             </a:extLst>
           </p:cNvPr>
@@ -9134,7 +9201,7 @@
                   <a:srgbClr val="FF6B35"/>
                 </a:solidFill>
               </a:rPr>
-              <a:t>배포 준비</a:t>
+              <a:t>Live 릴리즈</a:t>
             </a:r>
           </a:p>
         </p:txBody>
@@ -9144,47 +9211,47 @@
           <p:cNvPr id="48" name="decision-gate-5">
             <a:extLst xmlns:a="http://schemas.openxmlformats.org/drawingml/2006/main">
               <a:ext uri="{FF2B5EF4-FFF2-40B4-BE49-F238E27FC236}">
-                <a16:creationId xmlns:a16="http://schemas.microsoft.com/office/drawing/2014/main" id="{B280930C-024D-4D89-8184-525E6467912E}"/>
-              </a:ext>
-            </a:extLst>
-          </p:cNvPr>
-          <p:cNvSpPr>
-            <a:spLocks xmlns:a="http://schemas.openxmlformats.org/drawingml/2006/main" noGrp="1"/>
-          </p:cNvSpPr>
-          <p:nvPr/>
-        </p:nvSpPr>
-        <p:spPr>
-          <a:xfrm xmlns:a="http://schemas.openxmlformats.org/drawingml/2006/main">
-            <a:off x="6934200" y="4791075"/>
-            <a:ext cx="2857500" cy="285750"/>
-          </a:xfrm>
-          <a:prstGeom xmlns:a="http://schemas.openxmlformats.org/drawingml/2006/main" prst="rect">
-            <a:avLst/>
-          </a:prstGeom>
-          <a:noFill xmlns:a="http://schemas.openxmlformats.org/drawingml/2006/main"/>
-          <a:ln xmlns:a="http://schemas.openxmlformats.org/drawingml/2006/main" w="0">
-            <a:noFill/>
-            <a:prstDash val="solid"/>
-          </a:ln>
-        </p:spPr>
-        <p:txBody>
-          <a:bodyPr xmlns:a="http://schemas.openxmlformats.org/drawingml/2006/main"/>
-          <a:lstStyle xmlns:a="http://schemas.openxmlformats.org/drawingml/2006/main"/>
-          <a:p xmlns:a="http://schemas.openxmlformats.org/drawingml/2006/main">
-            <a:pPr>
-              <a:defRPr sz="1050">
+                <a16:creationId xmlns:a16="http://schemas.microsoft.com/office/drawing/2014/main" id="{8B84A2B6-A7A0-4EB8-854F-2B24B5414F78}"/>
+              </a:ext>
+            </a:extLst>
+          </p:cNvPr>
+          <p:cNvSpPr>
+            <a:spLocks xmlns:a="http://schemas.openxmlformats.org/drawingml/2006/main" noGrp="1"/>
+          </p:cNvSpPr>
+          <p:nvPr/>
+        </p:nvSpPr>
+        <p:spPr>
+          <a:xfrm xmlns:a="http://schemas.openxmlformats.org/drawingml/2006/main">
+            <a:off x="6934200" y="4781550"/>
+            <a:ext cx="2857500" cy="323850"/>
+          </a:xfrm>
+          <a:prstGeom xmlns:a="http://schemas.openxmlformats.org/drawingml/2006/main" prst="rect">
+            <a:avLst/>
+          </a:prstGeom>
+          <a:noFill xmlns:a="http://schemas.openxmlformats.org/drawingml/2006/main"/>
+          <a:ln xmlns:a="http://schemas.openxmlformats.org/drawingml/2006/main" w="0">
+            <a:noFill/>
+            <a:prstDash val="solid"/>
+          </a:ln>
+        </p:spPr>
+        <p:txBody>
+          <a:bodyPr xmlns:a="http://schemas.openxmlformats.org/drawingml/2006/main"/>
+          <a:lstStyle xmlns:a="http://schemas.openxmlformats.org/drawingml/2006/main"/>
+          <a:p xmlns:a="http://schemas.openxmlformats.org/drawingml/2006/main">
+            <a:pPr>
+              <a:defRPr sz="1013">
                 <a:solidFill>
                   <a:srgbClr val="FFFFFF"/>
                 </a:solidFill>
               </a:defRPr>
             </a:pPr>
             <a:r>
-              <a:rPr sz="1050">
+              <a:rPr sz="1013">
                 <a:solidFill>
                   <a:srgbClr val="FFFFFF"/>
                 </a:solidFill>
               </a:rPr>
-              <a:t>스토어·공지·장애 대응 플랜의 최종 담당자 확인</a:t>
+              <a:t>배포·공지·장애 대응 담당자 확인</a:t>
             </a:r>
           </a:p>
         </p:txBody>
@@ -9194,7 +9261,7 @@
           <p:cNvPr id="49" name="decision-owner-5">
             <a:extLst xmlns:a="http://schemas.openxmlformats.org/drawingml/2006/main">
               <a:ext uri="{FF2B5EF4-FFF2-40B4-BE49-F238E27FC236}">
-                <a16:creationId xmlns:a16="http://schemas.microsoft.com/office/drawing/2014/main" id="{C25E2986-0D1C-4E0E-B4A7-419E8D084F7D}"/>
+                <a16:creationId xmlns:a16="http://schemas.microsoft.com/office/drawing/2014/main" id="{B1FD36A6-41A5-4800-BB25-912BA864BA2C}"/>
               </a:ext>
             </a:extLst>
           </p:cNvPr>
@@ -9244,7 +9311,7 @@
           <p:cNvPr id="50" name="principle-panel">
             <a:extLst xmlns:a="http://schemas.openxmlformats.org/drawingml/2006/main">
               <a:ext uri="{FF2B5EF4-FFF2-40B4-BE49-F238E27FC236}">
-                <a16:creationId xmlns:a16="http://schemas.microsoft.com/office/drawing/2014/main" id="{21D4491B-93B1-4BE6-90D8-AFAC6F5BA384}"/>
+                <a16:creationId xmlns:a16="http://schemas.microsoft.com/office/drawing/2014/main" id="{8E22E816-F035-4E45-93BA-8627E00E2619}"/>
               </a:ext>
             </a:extLst>
           </p:cNvPr>
@@ -9279,7 +9346,7 @@
           <p:cNvPr id="51" name="principle-label">
             <a:extLst xmlns:a="http://schemas.openxmlformats.org/drawingml/2006/main">
               <a:ext uri="{FF2B5EF4-FFF2-40B4-BE49-F238E27FC236}">
-                <a16:creationId xmlns:a16="http://schemas.microsoft.com/office/drawing/2014/main" id="{9B217DDC-3F38-4CEF-A73A-AEEABAA14758}"/>
+                <a16:creationId xmlns:a16="http://schemas.microsoft.com/office/drawing/2014/main" id="{DEA8794B-D33A-4CAD-BD26-E3683F37E3B3}"/>
               </a:ext>
             </a:extLst>
           </p:cNvPr>
@@ -9329,7 +9396,7 @@
           <p:cNvPr id="52" name="principle-body">
             <a:extLst xmlns:a="http://schemas.openxmlformats.org/drawingml/2006/main">
               <a:ext uri="{FF2B5EF4-FFF2-40B4-BE49-F238E27FC236}">
-                <a16:creationId xmlns:a16="http://schemas.microsoft.com/office/drawing/2014/main" id="{9F9B4364-8B18-44B3-A579-B65AC8A5C124}"/>
+                <a16:creationId xmlns:a16="http://schemas.microsoft.com/office/drawing/2014/main" id="{1E3BB899-BF86-4040-B8FA-898FF5CB2E72}"/>
               </a:ext>
             </a:extLst>
           </p:cNvPr>
@@ -9369,7 +9436,7 @@
                   <a:srgbClr val="FFFFFF"/>
                 </a:solidFill>
               </a:rPr>
-              <a:t>게이트 미통과 항목은 일정 지연이 아니라 의사결정 이슈로 분리해, 영향도와 대안을 함께 보고합니다.</a:t>
+              <a:t>미통과 항목은 일정 지연이 아니라 의사결정 이슈로 분리해, 영향도와 대안을 함께 보고합니다.</a:t>
             </a:r>
           </a:p>
         </p:txBody>
@@ -9377,7 +9444,2631 @@
     </p:spTree>
     <p:extLst>
       <p:ext uri="{BB962C8B-B14F-4D97-AF65-F5344CB8AC3E}">
-        <p14:creationId xmlns:p14="http://schemas.microsoft.com/office/powerpoint/2010/main" val="535118993"/>
+        <p14:creationId xmlns:p14="http://schemas.microsoft.com/office/powerpoint/2010/main" val="1112216715"/>
+      </p:ext>
+    </p:extLst>
+  </p:cSld>
+</p:sld>
+</file>
+
+<file path=ppt/slides/slide4.xml><?xml version="1.0" encoding="utf-8"?>
+<p:sld xmlns:p="http://schemas.openxmlformats.org/presentationml/2006/main">
+  <p:cSld>
+    <p:bg>
+      <p:bgPr>
+        <a:solidFill xmlns:a="http://schemas.openxmlformats.org/drawingml/2006/main">
+          <a:srgbClr val="0B1020"/>
+        </a:solidFill>
+      </p:bgPr>
+    </p:bg>
+    <p:spTree>
+      <p:nvGrpSpPr>
+        <p:cNvPr id="1" name=""/>
+        <p:cNvGrpSpPr/>
+        <p:nvPr/>
+      </p:nvGrpSpPr>
+      <p:grpSpPr>
+        <a:xfrm xmlns:a="http://schemas.openxmlformats.org/drawingml/2006/main"/>
+      </p:grpSpPr>
+      <p:sp>
+        <p:nvSpPr>
+          <p:cNvPr id="1" name="top-accent">
+            <a:extLst xmlns:a="http://schemas.openxmlformats.org/drawingml/2006/main">
+              <a:ext uri="{FF2B5EF4-FFF2-40B4-BE49-F238E27FC236}">
+                <a16:creationId xmlns:a16="http://schemas.microsoft.com/office/drawing/2014/main" id="{39A0876D-8EB1-4BF0-9D87-DDA7C022946C}"/>
+              </a:ext>
+            </a:extLst>
+          </p:cNvPr>
+          <p:cNvSpPr>
+            <a:spLocks xmlns:a="http://schemas.openxmlformats.org/drawingml/2006/main" noGrp="1"/>
+          </p:cNvSpPr>
+          <p:nvPr/>
+        </p:nvSpPr>
+        <p:spPr>
+          <a:xfrm xmlns:a="http://schemas.openxmlformats.org/drawingml/2006/main">
+            <a:off x="0" y="0"/>
+            <a:ext cx="12192000" cy="95250"/>
+          </a:xfrm>
+          <a:prstGeom xmlns:a="http://schemas.openxmlformats.org/drawingml/2006/main" prst="rect">
+            <a:avLst/>
+          </a:prstGeom>
+          <a:solidFill xmlns:a="http://schemas.openxmlformats.org/drawingml/2006/main">
+            <a:srgbClr val="00B8D9"/>
+          </a:solidFill>
+          <a:ln xmlns:a="http://schemas.openxmlformats.org/drawingml/2006/main" w="0">
+            <a:solidFill>
+              <a:srgbClr val="00B8D9"/>
+            </a:solidFill>
+            <a:prstDash val="solid"/>
+          </a:ln>
+        </p:spPr>
+      </p:sp>
+      <p:sp>
+        <p:nvSpPr>
+          <p:cNvPr id="2" name="left-accent">
+            <a:extLst xmlns:a="http://schemas.openxmlformats.org/drawingml/2006/main">
+              <a:ext uri="{FF2B5EF4-FFF2-40B4-BE49-F238E27FC236}">
+                <a16:creationId xmlns:a16="http://schemas.microsoft.com/office/drawing/2014/main" id="{622C2192-D74E-48FA-A02B-967F7C51D43F}"/>
+              </a:ext>
+            </a:extLst>
+          </p:cNvPr>
+          <p:cNvSpPr>
+            <a:spLocks xmlns:a="http://schemas.openxmlformats.org/drawingml/2006/main" noGrp="1"/>
+          </p:cNvSpPr>
+          <p:nvPr/>
+        </p:nvSpPr>
+        <p:spPr>
+          <a:xfrm xmlns:a="http://schemas.openxmlformats.org/drawingml/2006/main">
+            <a:off x="0" y="0"/>
+            <a:ext cx="152400" cy="6858000"/>
+          </a:xfrm>
+          <a:prstGeom xmlns:a="http://schemas.openxmlformats.org/drawingml/2006/main" prst="rect">
+            <a:avLst/>
+          </a:prstGeom>
+          <a:solidFill xmlns:a="http://schemas.openxmlformats.org/drawingml/2006/main">
+            <a:srgbClr val="FF6B35"/>
+          </a:solidFill>
+          <a:ln xmlns:a="http://schemas.openxmlformats.org/drawingml/2006/main" w="0">
+            <a:solidFill>
+              <a:srgbClr val="FF6B35"/>
+            </a:solidFill>
+            <a:prstDash val="solid"/>
+          </a:ln>
+        </p:spPr>
+      </p:sp>
+      <p:sp>
+        <p:nvSpPr>
+          <p:cNvPr id="3" name="eyebrow">
+            <a:extLst xmlns:a="http://schemas.openxmlformats.org/drawingml/2006/main">
+              <a:ext uri="{FF2B5EF4-FFF2-40B4-BE49-F238E27FC236}">
+                <a16:creationId xmlns:a16="http://schemas.microsoft.com/office/drawing/2014/main" id="{A6A72702-4C1C-4910-91D1-2F11299136B0}"/>
+              </a:ext>
+            </a:extLst>
+          </p:cNvPr>
+          <p:cNvSpPr>
+            <a:spLocks xmlns:a="http://schemas.openxmlformats.org/drawingml/2006/main" noGrp="1"/>
+          </p:cNvSpPr>
+          <p:nvPr/>
+        </p:nvSpPr>
+        <p:spPr>
+          <a:xfrm xmlns:a="http://schemas.openxmlformats.org/drawingml/2006/main">
+            <a:off x="514350" y="361950"/>
+            <a:ext cx="5905500" cy="285750"/>
+          </a:xfrm>
+          <a:prstGeom xmlns:a="http://schemas.openxmlformats.org/drawingml/2006/main" prst="rect">
+            <a:avLst/>
+          </a:prstGeom>
+          <a:noFill xmlns:a="http://schemas.openxmlformats.org/drawingml/2006/main"/>
+          <a:ln xmlns:a="http://schemas.openxmlformats.org/drawingml/2006/main" w="0">
+            <a:noFill/>
+            <a:prstDash val="solid"/>
+          </a:ln>
+        </p:spPr>
+        <p:txBody>
+          <a:bodyPr xmlns:a="http://schemas.openxmlformats.org/drawingml/2006/main"/>
+          <a:lstStyle xmlns:a="http://schemas.openxmlformats.org/drawingml/2006/main"/>
+          <a:p xmlns:a="http://schemas.openxmlformats.org/drawingml/2006/main">
+            <a:pPr>
+              <a:defRPr sz="1125" b="1">
+                <a:solidFill>
+                  <a:srgbClr val="8BD9E8"/>
+                </a:solidFill>
+              </a:defRPr>
+            </a:pPr>
+            <a:r>
+              <a:rPr sz="1125" b="1">
+                <a:solidFill>
+                  <a:srgbClr val="8BD9E8"/>
+                </a:solidFill>
+              </a:rPr>
+              <a:t>RISK RESPONSE SYSTEM | PAGE 04</a:t>
+            </a:r>
+          </a:p>
+        </p:txBody>
+      </p:sp>
+      <p:sp>
+        <p:nvSpPr>
+          <p:cNvPr id="4" name="footer">
+            <a:extLst xmlns:a="http://schemas.openxmlformats.org/drawingml/2006/main">
+              <a:ext uri="{FF2B5EF4-FFF2-40B4-BE49-F238E27FC236}">
+                <a16:creationId xmlns:a16="http://schemas.microsoft.com/office/drawing/2014/main" id="{12782A95-2D81-44A5-8285-2F651828A5B5}"/>
+              </a:ext>
+            </a:extLst>
+          </p:cNvPr>
+          <p:cNvSpPr>
+            <a:spLocks xmlns:a="http://schemas.openxmlformats.org/drawingml/2006/main" noGrp="1"/>
+          </p:cNvSpPr>
+          <p:nvPr/>
+        </p:nvSpPr>
+        <p:spPr>
+          <a:xfrm xmlns:a="http://schemas.openxmlformats.org/drawingml/2006/main">
+            <a:off x="514350" y="6457950"/>
+            <a:ext cx="4953000" cy="266700"/>
+          </a:xfrm>
+          <a:prstGeom xmlns:a="http://schemas.openxmlformats.org/drawingml/2006/main" prst="rect">
+            <a:avLst/>
+          </a:prstGeom>
+          <a:noFill xmlns:a="http://schemas.openxmlformats.org/drawingml/2006/main"/>
+          <a:ln xmlns:a="http://schemas.openxmlformats.org/drawingml/2006/main" w="0">
+            <a:noFill/>
+            <a:prstDash val="solid"/>
+          </a:ln>
+        </p:spPr>
+        <p:txBody>
+          <a:bodyPr xmlns:a="http://schemas.openxmlformats.org/drawingml/2006/main"/>
+          <a:lstStyle xmlns:a="http://schemas.openxmlformats.org/drawingml/2006/main"/>
+          <a:p xmlns:a="http://schemas.openxmlformats.org/drawingml/2006/main">
+            <a:pPr>
+              <a:defRPr sz="1125">
+                <a:solidFill>
+                  <a:srgbClr val="94A3B8"/>
+                </a:solidFill>
+              </a:defRPr>
+            </a:pPr>
+            <a:r>
+              <a:rPr sz="1125">
+                <a:solidFill>
+                  <a:srgbClr val="94A3B8"/>
+                </a:solidFill>
+              </a:rPr>
+              <a:t>HIT2 일본 서비스 런칭 6개월 전 로드맵</a:t>
+            </a:r>
+          </a:p>
+        </p:txBody>
+      </p:sp>
+      <p:sp>
+        <p:nvSpPr>
+          <p:cNvPr id="5" name="page-no">
+            <a:extLst xmlns:a="http://schemas.openxmlformats.org/drawingml/2006/main">
+              <a:ext uri="{FF2B5EF4-FFF2-40B4-BE49-F238E27FC236}">
+                <a16:creationId xmlns:a16="http://schemas.microsoft.com/office/drawing/2014/main" id="{08EF888A-88F8-4CBB-A444-E4EFCCFF55D9}"/>
+              </a:ext>
+            </a:extLst>
+          </p:cNvPr>
+          <p:cNvSpPr>
+            <a:spLocks xmlns:a="http://schemas.openxmlformats.org/drawingml/2006/main" noGrp="1"/>
+          </p:cNvSpPr>
+          <p:nvPr/>
+        </p:nvSpPr>
+        <p:spPr>
+          <a:xfrm xmlns:a="http://schemas.openxmlformats.org/drawingml/2006/main">
+            <a:off x="10953750" y="6457950"/>
+            <a:ext cx="419100" cy="266700"/>
+          </a:xfrm>
+          <a:prstGeom xmlns:a="http://schemas.openxmlformats.org/drawingml/2006/main" prst="rect">
+            <a:avLst/>
+          </a:prstGeom>
+          <a:noFill xmlns:a="http://schemas.openxmlformats.org/drawingml/2006/main"/>
+          <a:ln xmlns:a="http://schemas.openxmlformats.org/drawingml/2006/main" w="0">
+            <a:noFill/>
+            <a:prstDash val="solid"/>
+          </a:ln>
+        </p:spPr>
+        <p:txBody>
+          <a:bodyPr xmlns:a="http://schemas.openxmlformats.org/drawingml/2006/main"/>
+          <a:lstStyle xmlns:a="http://schemas.openxmlformats.org/drawingml/2006/main"/>
+          <a:p xmlns:a="http://schemas.openxmlformats.org/drawingml/2006/main">
+            <a:pPr algn="r">
+              <a:defRPr sz="1200" b="1">
+                <a:solidFill>
+                  <a:srgbClr val="94A3B8"/>
+                </a:solidFill>
+              </a:defRPr>
+            </a:pPr>
+            <a:r>
+              <a:rPr sz="1200" b="1">
+                <a:solidFill>
+                  <a:srgbClr val="94A3B8"/>
+                </a:solidFill>
+              </a:rPr>
+              <a:t>04</a:t>
+            </a:r>
+          </a:p>
+        </p:txBody>
+      </p:sp>
+      <p:sp>
+        <p:nvSpPr>
+          <p:cNvPr id="6" name="title-04">
+            <a:extLst xmlns:a="http://schemas.openxmlformats.org/drawingml/2006/main">
+              <a:ext uri="{FF2B5EF4-FFF2-40B4-BE49-F238E27FC236}">
+                <a16:creationId xmlns:a16="http://schemas.microsoft.com/office/drawing/2014/main" id="{02E217CC-2544-41A1-B55F-552EA5F8EF73}"/>
+              </a:ext>
+            </a:extLst>
+          </p:cNvPr>
+          <p:cNvSpPr>
+            <a:spLocks xmlns:a="http://schemas.openxmlformats.org/drawingml/2006/main" noGrp="1"/>
+          </p:cNvSpPr>
+          <p:nvPr/>
+        </p:nvSpPr>
+        <p:spPr>
+          <a:xfrm xmlns:a="http://schemas.openxmlformats.org/drawingml/2006/main">
+            <a:off x="514350" y="781050"/>
+            <a:ext cx="10572750" cy="533400"/>
+          </a:xfrm>
+          <a:prstGeom xmlns:a="http://schemas.openxmlformats.org/drawingml/2006/main" prst="rect">
+            <a:avLst/>
+          </a:prstGeom>
+          <a:noFill xmlns:a="http://schemas.openxmlformats.org/drawingml/2006/main"/>
+          <a:ln xmlns:a="http://schemas.openxmlformats.org/drawingml/2006/main" w="0">
+            <a:noFill/>
+            <a:prstDash val="solid"/>
+          </a:ln>
+        </p:spPr>
+        <p:txBody>
+          <a:bodyPr xmlns:a="http://schemas.openxmlformats.org/drawingml/2006/main"/>
+          <a:lstStyle xmlns:a="http://schemas.openxmlformats.org/drawingml/2006/main"/>
+          <a:p xmlns:a="http://schemas.openxmlformats.org/drawingml/2006/main">
+            <a:pPr>
+              <a:defRPr sz="2550" b="1">
+                <a:solidFill>
+                  <a:srgbClr val="FFFFFF"/>
+                </a:solidFill>
+              </a:defRPr>
+            </a:pPr>
+            <a:r>
+              <a:rPr sz="2550" b="1">
+                <a:solidFill>
+                  <a:srgbClr val="FFFFFF"/>
+                </a:solidFill>
+              </a:rPr>
+              <a:t>런칭 리스크는 조기 분리와 이슈 대응으로 관리합니다</a:t>
+            </a:r>
+          </a:p>
+        </p:txBody>
+      </p:sp>
+      <p:sp>
+        <p:nvSpPr>
+          <p:cNvPr id="7" name="subtitle-04">
+            <a:extLst xmlns:a="http://schemas.openxmlformats.org/drawingml/2006/main">
+              <a:ext uri="{FF2B5EF4-FFF2-40B4-BE49-F238E27FC236}">
+                <a16:creationId xmlns:a16="http://schemas.microsoft.com/office/drawing/2014/main" id="{65806F9C-7D35-4E68-BBE5-B18366436C16}"/>
+              </a:ext>
+            </a:extLst>
+          </p:cNvPr>
+          <p:cNvSpPr>
+            <a:spLocks xmlns:a="http://schemas.openxmlformats.org/drawingml/2006/main" noGrp="1"/>
+          </p:cNvSpPr>
+          <p:nvPr/>
+        </p:nvSpPr>
+        <p:spPr>
+          <a:xfrm xmlns:a="http://schemas.openxmlformats.org/drawingml/2006/main">
+            <a:off x="533400" y="1371600"/>
+            <a:ext cx="10287000" cy="323850"/>
+          </a:xfrm>
+          <a:prstGeom xmlns:a="http://schemas.openxmlformats.org/drawingml/2006/main" prst="rect">
+            <a:avLst/>
+          </a:prstGeom>
+          <a:noFill xmlns:a="http://schemas.openxmlformats.org/drawingml/2006/main"/>
+          <a:ln xmlns:a="http://schemas.openxmlformats.org/drawingml/2006/main" w="0">
+            <a:noFill/>
+            <a:prstDash val="solid"/>
+          </a:ln>
+        </p:spPr>
+        <p:txBody>
+          <a:bodyPr xmlns:a="http://schemas.openxmlformats.org/drawingml/2006/main"/>
+          <a:lstStyle xmlns:a="http://schemas.openxmlformats.org/drawingml/2006/main"/>
+          <a:p xmlns:a="http://schemas.openxmlformats.org/drawingml/2006/main">
+            <a:pPr>
+              <a:defRPr sz="1275">
+                <a:solidFill>
+                  <a:srgbClr val="CBD5E1"/>
+                </a:solidFill>
+              </a:defRPr>
+            </a:pPr>
+            <a:r>
+              <a:rPr sz="1275">
+                <a:solidFill>
+                  <a:srgbClr val="CBD5E1"/>
+                </a:solidFill>
+              </a:rPr>
+              <a:t>일정·범위·빌드·버전·QA에 미치는 영향을 먼저 보이게 만들어야 의사결정이 빨라집니다.</a:t>
+            </a:r>
+          </a:p>
+        </p:txBody>
+      </p:sp>
+      <p:sp>
+        <p:nvSpPr>
+          <p:cNvPr id="8" name="risk-title">
+            <a:extLst xmlns:a="http://schemas.openxmlformats.org/drawingml/2006/main">
+              <a:ext uri="{FF2B5EF4-FFF2-40B4-BE49-F238E27FC236}">
+                <a16:creationId xmlns:a16="http://schemas.microsoft.com/office/drawing/2014/main" id="{A50D9908-FCE2-458C-9331-141D7CF89158}"/>
+              </a:ext>
+            </a:extLst>
+          </p:cNvPr>
+          <p:cNvSpPr>
+            <a:spLocks xmlns:a="http://schemas.openxmlformats.org/drawingml/2006/main" noGrp="1"/>
+          </p:cNvSpPr>
+          <p:nvPr/>
+        </p:nvSpPr>
+        <p:spPr>
+          <a:xfrm xmlns:a="http://schemas.openxmlformats.org/drawingml/2006/main">
+            <a:off x="514350" y="1752600"/>
+            <a:ext cx="2095500" cy="285750"/>
+          </a:xfrm>
+          <a:prstGeom xmlns:a="http://schemas.openxmlformats.org/drawingml/2006/main" prst="rect">
+            <a:avLst/>
+          </a:prstGeom>
+          <a:noFill xmlns:a="http://schemas.openxmlformats.org/drawingml/2006/main"/>
+          <a:ln xmlns:a="http://schemas.openxmlformats.org/drawingml/2006/main" w="0">
+            <a:noFill/>
+            <a:prstDash val="solid"/>
+          </a:ln>
+        </p:spPr>
+        <p:txBody>
+          <a:bodyPr xmlns:a="http://schemas.openxmlformats.org/drawingml/2006/main"/>
+          <a:lstStyle xmlns:a="http://schemas.openxmlformats.org/drawingml/2006/main"/>
+          <a:p xmlns:a="http://schemas.openxmlformats.org/drawingml/2006/main">
+            <a:pPr>
+              <a:defRPr sz="1650" b="1">
+                <a:solidFill>
+                  <a:srgbClr val="FFFFFF"/>
+                </a:solidFill>
+              </a:defRPr>
+            </a:pPr>
+            <a:r>
+              <a:rPr sz="1650" b="1">
+                <a:solidFill>
+                  <a:srgbClr val="FFFFFF"/>
+                </a:solidFill>
+              </a:rPr>
+              <a:t>주요 리스크</a:t>
+            </a:r>
+          </a:p>
+        </p:txBody>
+      </p:sp>
+      <p:sp>
+        <p:nvSpPr>
+          <p:cNvPr id="9" name="risk-header">
+            <a:extLst xmlns:a="http://schemas.openxmlformats.org/drawingml/2006/main">
+              <a:ext uri="{FF2B5EF4-FFF2-40B4-BE49-F238E27FC236}">
+                <a16:creationId xmlns:a16="http://schemas.microsoft.com/office/drawing/2014/main" id="{53971F05-0E1F-4858-B0CA-9DDC16E7E99A}"/>
+              </a:ext>
+            </a:extLst>
+          </p:cNvPr>
+          <p:cNvSpPr>
+            <a:spLocks xmlns:a="http://schemas.openxmlformats.org/drawingml/2006/main" noGrp="1"/>
+          </p:cNvSpPr>
+          <p:nvPr/>
+        </p:nvSpPr>
+        <p:spPr>
+          <a:xfrm xmlns:a="http://schemas.openxmlformats.org/drawingml/2006/main">
+            <a:off x="514350" y="2057400"/>
+            <a:ext cx="6572250" cy="247650"/>
+          </a:xfrm>
+          <a:prstGeom xmlns:a="http://schemas.openxmlformats.org/drawingml/2006/main" prst="rect">
+            <a:avLst/>
+          </a:prstGeom>
+          <a:solidFill xmlns:a="http://schemas.openxmlformats.org/drawingml/2006/main">
+            <a:srgbClr val="00B8D9"/>
+          </a:solidFill>
+          <a:ln xmlns:a="http://schemas.openxmlformats.org/drawingml/2006/main" w="0">
+            <a:solidFill>
+              <a:srgbClr val="00B8D9"/>
+            </a:solidFill>
+            <a:prstDash val="solid"/>
+          </a:ln>
+        </p:spPr>
+      </p:sp>
+      <p:sp>
+        <p:nvSpPr>
+          <p:cNvPr id="10" name="risk-th-1">
+            <a:extLst xmlns:a="http://schemas.openxmlformats.org/drawingml/2006/main">
+              <a:ext uri="{FF2B5EF4-FFF2-40B4-BE49-F238E27FC236}">
+                <a16:creationId xmlns:a16="http://schemas.microsoft.com/office/drawing/2014/main" id="{C647D4A6-393E-497B-BB6D-FCD1F53C9D8C}"/>
+              </a:ext>
+            </a:extLst>
+          </p:cNvPr>
+          <p:cNvSpPr>
+            <a:spLocks xmlns:a="http://schemas.openxmlformats.org/drawingml/2006/main" noGrp="1"/>
+          </p:cNvSpPr>
+          <p:nvPr/>
+        </p:nvSpPr>
+        <p:spPr>
+          <a:xfrm xmlns:a="http://schemas.openxmlformats.org/drawingml/2006/main">
+            <a:off x="742950" y="2105025"/>
+            <a:ext cx="1047750" cy="171450"/>
+          </a:xfrm>
+          <a:prstGeom xmlns:a="http://schemas.openxmlformats.org/drawingml/2006/main" prst="rect">
+            <a:avLst/>
+          </a:prstGeom>
+          <a:noFill xmlns:a="http://schemas.openxmlformats.org/drawingml/2006/main"/>
+          <a:ln xmlns:a="http://schemas.openxmlformats.org/drawingml/2006/main" w="0">
+            <a:noFill/>
+            <a:prstDash val="solid"/>
+          </a:ln>
+        </p:spPr>
+        <p:txBody>
+          <a:bodyPr xmlns:a="http://schemas.openxmlformats.org/drawingml/2006/main"/>
+          <a:lstStyle xmlns:a="http://schemas.openxmlformats.org/drawingml/2006/main"/>
+          <a:p xmlns:a="http://schemas.openxmlformats.org/drawingml/2006/main">
+            <a:pPr>
+              <a:defRPr sz="975" b="1">
+                <a:solidFill>
+                  <a:srgbClr val="06111F"/>
+                </a:solidFill>
+              </a:defRPr>
+            </a:pPr>
+            <a:r>
+              <a:rPr sz="975" b="1">
+                <a:solidFill>
+                  <a:srgbClr val="06111F"/>
+                </a:solidFill>
+              </a:rPr>
+              <a:t>리스크</a:t>
+            </a:r>
+          </a:p>
+        </p:txBody>
+      </p:sp>
+      <p:sp>
+        <p:nvSpPr>
+          <p:cNvPr id="11" name="risk-th-2">
+            <a:extLst xmlns:a="http://schemas.openxmlformats.org/drawingml/2006/main">
+              <a:ext uri="{FF2B5EF4-FFF2-40B4-BE49-F238E27FC236}">
+                <a16:creationId xmlns:a16="http://schemas.microsoft.com/office/drawing/2014/main" id="{4A489B56-9255-4125-8967-067B66508EAF}"/>
+              </a:ext>
+            </a:extLst>
+          </p:cNvPr>
+          <p:cNvSpPr>
+            <a:spLocks xmlns:a="http://schemas.openxmlformats.org/drawingml/2006/main" noGrp="1"/>
+          </p:cNvSpPr>
+          <p:nvPr/>
+        </p:nvSpPr>
+        <p:spPr>
+          <a:xfrm xmlns:a="http://schemas.openxmlformats.org/drawingml/2006/main">
+            <a:off x="2152650" y="2105025"/>
+            <a:ext cx="1143000" cy="171450"/>
+          </a:xfrm>
+          <a:prstGeom xmlns:a="http://schemas.openxmlformats.org/drawingml/2006/main" prst="rect">
+            <a:avLst/>
+          </a:prstGeom>
+          <a:noFill xmlns:a="http://schemas.openxmlformats.org/drawingml/2006/main"/>
+          <a:ln xmlns:a="http://schemas.openxmlformats.org/drawingml/2006/main" w="0">
+            <a:noFill/>
+            <a:prstDash val="solid"/>
+          </a:ln>
+        </p:spPr>
+        <p:txBody>
+          <a:bodyPr xmlns:a="http://schemas.openxmlformats.org/drawingml/2006/main"/>
+          <a:lstStyle xmlns:a="http://schemas.openxmlformats.org/drawingml/2006/main"/>
+          <a:p xmlns:a="http://schemas.openxmlformats.org/drawingml/2006/main">
+            <a:pPr>
+              <a:defRPr sz="975" b="1">
+                <a:solidFill>
+                  <a:srgbClr val="06111F"/>
+                </a:solidFill>
+              </a:defRPr>
+            </a:pPr>
+            <a:r>
+              <a:rPr sz="975" b="1">
+                <a:solidFill>
+                  <a:srgbClr val="06111F"/>
+                </a:solidFill>
+              </a:rPr>
+              <a:t>영향</a:t>
+            </a:r>
+          </a:p>
+        </p:txBody>
+      </p:sp>
+      <p:sp>
+        <p:nvSpPr>
+          <p:cNvPr id="12" name="risk-th-3">
+            <a:extLst xmlns:a="http://schemas.openxmlformats.org/drawingml/2006/main">
+              <a:ext uri="{FF2B5EF4-FFF2-40B4-BE49-F238E27FC236}">
+                <a16:creationId xmlns:a16="http://schemas.microsoft.com/office/drawing/2014/main" id="{8836B600-8042-40F5-959F-02189E2E3691}"/>
+              </a:ext>
+            </a:extLst>
+          </p:cNvPr>
+          <p:cNvSpPr>
+            <a:spLocks xmlns:a="http://schemas.openxmlformats.org/drawingml/2006/main" noGrp="1"/>
+          </p:cNvSpPr>
+          <p:nvPr/>
+        </p:nvSpPr>
+        <p:spPr>
+          <a:xfrm xmlns:a="http://schemas.openxmlformats.org/drawingml/2006/main">
+            <a:off x="4762500" y="2105025"/>
+            <a:ext cx="1143000" cy="171450"/>
+          </a:xfrm>
+          <a:prstGeom xmlns:a="http://schemas.openxmlformats.org/drawingml/2006/main" prst="rect">
+            <a:avLst/>
+          </a:prstGeom>
+          <a:noFill xmlns:a="http://schemas.openxmlformats.org/drawingml/2006/main"/>
+          <a:ln xmlns:a="http://schemas.openxmlformats.org/drawingml/2006/main" w="0">
+            <a:noFill/>
+            <a:prstDash val="solid"/>
+          </a:ln>
+        </p:spPr>
+        <p:txBody>
+          <a:bodyPr xmlns:a="http://schemas.openxmlformats.org/drawingml/2006/main"/>
+          <a:lstStyle xmlns:a="http://schemas.openxmlformats.org/drawingml/2006/main"/>
+          <a:p xmlns:a="http://schemas.openxmlformats.org/drawingml/2006/main">
+            <a:pPr>
+              <a:defRPr sz="975" b="1">
+                <a:solidFill>
+                  <a:srgbClr val="06111F"/>
+                </a:solidFill>
+              </a:defRPr>
+            </a:pPr>
+            <a:r>
+              <a:rPr sz="975" b="1">
+                <a:solidFill>
+                  <a:srgbClr val="06111F"/>
+                </a:solidFill>
+              </a:rPr>
+              <a:t>대응</a:t>
+            </a:r>
+          </a:p>
+        </p:txBody>
+      </p:sp>
+      <p:sp>
+        <p:nvSpPr>
+          <p:cNvPr id="13" name="risk-row-1">
+            <a:extLst xmlns:a="http://schemas.openxmlformats.org/drawingml/2006/main">
+              <a:ext uri="{FF2B5EF4-FFF2-40B4-BE49-F238E27FC236}">
+                <a16:creationId xmlns:a16="http://schemas.microsoft.com/office/drawing/2014/main" id="{93507CBD-58EB-473A-868E-D06A2634E88F}"/>
+              </a:ext>
+            </a:extLst>
+          </p:cNvPr>
+          <p:cNvSpPr>
+            <a:spLocks xmlns:a="http://schemas.openxmlformats.org/drawingml/2006/main" noGrp="1"/>
+          </p:cNvSpPr>
+          <p:nvPr/>
+        </p:nvSpPr>
+        <p:spPr>
+          <a:xfrm xmlns:a="http://schemas.openxmlformats.org/drawingml/2006/main">
+            <a:off x="514350" y="2305050"/>
+            <a:ext cx="6572250" cy="628650"/>
+          </a:xfrm>
+          <a:prstGeom xmlns:a="http://schemas.openxmlformats.org/drawingml/2006/main" prst="rect">
+            <a:avLst/>
+          </a:prstGeom>
+          <a:solidFill xmlns:a="http://schemas.openxmlformats.org/drawingml/2006/main">
+            <a:srgbClr val="151F34"/>
+          </a:solidFill>
+          <a:ln xmlns:a="http://schemas.openxmlformats.org/drawingml/2006/main" w="9525">
+            <a:solidFill>
+              <a:srgbClr val="2F3B55"/>
+            </a:solidFill>
+            <a:prstDash val="solid"/>
+          </a:ln>
+        </p:spPr>
+      </p:sp>
+      <p:sp>
+        <p:nvSpPr>
+          <p:cNvPr id="14" name="risk-name-1">
+            <a:extLst xmlns:a="http://schemas.openxmlformats.org/drawingml/2006/main">
+              <a:ext uri="{FF2B5EF4-FFF2-40B4-BE49-F238E27FC236}">
+                <a16:creationId xmlns:a16="http://schemas.microsoft.com/office/drawing/2014/main" id="{8AC7D2E4-F22A-4559-97B2-1EEECC4B8D2B}"/>
+              </a:ext>
+            </a:extLst>
+          </p:cNvPr>
+          <p:cNvSpPr>
+            <a:spLocks xmlns:a="http://schemas.openxmlformats.org/drawingml/2006/main" noGrp="1"/>
+          </p:cNvSpPr>
+          <p:nvPr/>
+        </p:nvSpPr>
+        <p:spPr>
+          <a:xfrm xmlns:a="http://schemas.openxmlformats.org/drawingml/2006/main">
+            <a:off x="742950" y="2495550"/>
+            <a:ext cx="1238250" cy="228600"/>
+          </a:xfrm>
+          <a:prstGeom xmlns:a="http://schemas.openxmlformats.org/drawingml/2006/main" prst="rect">
+            <a:avLst/>
+          </a:prstGeom>
+          <a:noFill xmlns:a="http://schemas.openxmlformats.org/drawingml/2006/main"/>
+          <a:ln xmlns:a="http://schemas.openxmlformats.org/drawingml/2006/main" w="0">
+            <a:noFill/>
+            <a:prstDash val="solid"/>
+          </a:ln>
+        </p:spPr>
+        <p:txBody>
+          <a:bodyPr xmlns:a="http://schemas.openxmlformats.org/drawingml/2006/main"/>
+          <a:lstStyle xmlns:a="http://schemas.openxmlformats.org/drawingml/2006/main"/>
+          <a:p xmlns:a="http://schemas.openxmlformats.org/drawingml/2006/main">
+            <a:pPr>
+              <a:defRPr sz="1125" b="1">
+                <a:solidFill>
+                  <a:srgbClr val="00B8D9"/>
+                </a:solidFill>
+              </a:defRPr>
+            </a:pPr>
+            <a:r>
+              <a:rPr sz="1125" b="1">
+                <a:solidFill>
+                  <a:srgbClr val="00B8D9"/>
+                </a:solidFill>
+              </a:rPr>
+              <a:t>현지화 지연</a:t>
+            </a:r>
+          </a:p>
+        </p:txBody>
+      </p:sp>
+      <p:sp>
+        <p:nvSpPr>
+          <p:cNvPr id="15" name="risk-impact-1">
+            <a:extLst xmlns:a="http://schemas.openxmlformats.org/drawingml/2006/main">
+              <a:ext uri="{FF2B5EF4-FFF2-40B4-BE49-F238E27FC236}">
+                <a16:creationId xmlns:a16="http://schemas.microsoft.com/office/drawing/2014/main" id="{0D9174B5-71CC-4883-ACA0-CD6FBABB6C9E}"/>
+              </a:ext>
+            </a:extLst>
+          </p:cNvPr>
+          <p:cNvSpPr>
+            <a:spLocks xmlns:a="http://schemas.openxmlformats.org/drawingml/2006/main" noGrp="1"/>
+          </p:cNvSpPr>
+          <p:nvPr/>
+        </p:nvSpPr>
+        <p:spPr>
+          <a:xfrm xmlns:a="http://schemas.openxmlformats.org/drawingml/2006/main">
+            <a:off x="2152650" y="2428875"/>
+            <a:ext cx="2381250" cy="361950"/>
+          </a:xfrm>
+          <a:prstGeom xmlns:a="http://schemas.openxmlformats.org/drawingml/2006/main" prst="rect">
+            <a:avLst/>
+          </a:prstGeom>
+          <a:noFill xmlns:a="http://schemas.openxmlformats.org/drawingml/2006/main"/>
+          <a:ln xmlns:a="http://schemas.openxmlformats.org/drawingml/2006/main" w="0">
+            <a:noFill/>
+            <a:prstDash val="solid"/>
+          </a:ln>
+        </p:spPr>
+        <p:txBody>
+          <a:bodyPr xmlns:a="http://schemas.openxmlformats.org/drawingml/2006/main"/>
+          <a:lstStyle xmlns:a="http://schemas.openxmlformats.org/drawingml/2006/main"/>
+          <a:p xmlns:a="http://schemas.openxmlformats.org/drawingml/2006/main">
+            <a:pPr>
+              <a:defRPr sz="975">
+                <a:solidFill>
+                  <a:srgbClr val="CBD5E1"/>
+                </a:solidFill>
+              </a:defRPr>
+            </a:pPr>
+            <a:r>
+              <a:rPr sz="975">
+                <a:solidFill>
+                  <a:srgbClr val="CBD5E1"/>
+                </a:solidFill>
+              </a:rPr>
+              <a:t>번역·리소스 반영 지연으로 검수 일정 압박</a:t>
+            </a:r>
+          </a:p>
+        </p:txBody>
+      </p:sp>
+      <p:sp>
+        <p:nvSpPr>
+          <p:cNvPr id="16" name="risk-response-1">
+            <a:extLst xmlns:a="http://schemas.openxmlformats.org/drawingml/2006/main">
+              <a:ext uri="{FF2B5EF4-FFF2-40B4-BE49-F238E27FC236}">
+                <a16:creationId xmlns:a16="http://schemas.microsoft.com/office/drawing/2014/main" id="{8F3096FA-1397-4C3A-9C64-B9A153F146FE}"/>
+              </a:ext>
+            </a:extLst>
+          </p:cNvPr>
+          <p:cNvSpPr>
+            <a:spLocks xmlns:a="http://schemas.openxmlformats.org/drawingml/2006/main" noGrp="1"/>
+          </p:cNvSpPr>
+          <p:nvPr/>
+        </p:nvSpPr>
+        <p:spPr>
+          <a:xfrm xmlns:a="http://schemas.openxmlformats.org/drawingml/2006/main">
+            <a:off x="4762500" y="2428875"/>
+            <a:ext cx="1809750" cy="361950"/>
+          </a:xfrm>
+          <a:prstGeom xmlns:a="http://schemas.openxmlformats.org/drawingml/2006/main" prst="rect">
+            <a:avLst/>
+          </a:prstGeom>
+          <a:noFill xmlns:a="http://schemas.openxmlformats.org/drawingml/2006/main"/>
+          <a:ln xmlns:a="http://schemas.openxmlformats.org/drawingml/2006/main" w="0">
+            <a:noFill/>
+            <a:prstDash val="solid"/>
+          </a:ln>
+        </p:spPr>
+        <p:txBody>
+          <a:bodyPr xmlns:a="http://schemas.openxmlformats.org/drawingml/2006/main"/>
+          <a:lstStyle xmlns:a="http://schemas.openxmlformats.org/drawingml/2006/main"/>
+          <a:p xmlns:a="http://schemas.openxmlformats.org/drawingml/2006/main">
+            <a:pPr>
+              <a:defRPr sz="975">
+                <a:solidFill>
+                  <a:srgbClr val="FFFFFF"/>
+                </a:solidFill>
+              </a:defRPr>
+            </a:pPr>
+            <a:r>
+              <a:rPr sz="975">
+                <a:solidFill>
+                  <a:srgbClr val="FFFFFF"/>
+                </a:solidFill>
+              </a:rPr>
+              <a:t>반영 범위와 우선순위 재정렬</a:t>
+            </a:r>
+          </a:p>
+        </p:txBody>
+      </p:sp>
+      <p:sp>
+        <p:nvSpPr>
+          <p:cNvPr id="17" name="risk-row-2">
+            <a:extLst xmlns:a="http://schemas.openxmlformats.org/drawingml/2006/main">
+              <a:ext uri="{FF2B5EF4-FFF2-40B4-BE49-F238E27FC236}">
+                <a16:creationId xmlns:a16="http://schemas.microsoft.com/office/drawing/2014/main" id="{22B574F3-663F-4C1E-A62B-0F376042CA9E}"/>
+              </a:ext>
+            </a:extLst>
+          </p:cNvPr>
+          <p:cNvSpPr>
+            <a:spLocks xmlns:a="http://schemas.openxmlformats.org/drawingml/2006/main" noGrp="1"/>
+          </p:cNvSpPr>
+          <p:nvPr/>
+        </p:nvSpPr>
+        <p:spPr>
+          <a:xfrm xmlns:a="http://schemas.openxmlformats.org/drawingml/2006/main">
+            <a:off x="514350" y="2933700"/>
+            <a:ext cx="6572250" cy="628650"/>
+          </a:xfrm>
+          <a:prstGeom xmlns:a="http://schemas.openxmlformats.org/drawingml/2006/main" prst="rect">
+            <a:avLst/>
+          </a:prstGeom>
+          <a:solidFill xmlns:a="http://schemas.openxmlformats.org/drawingml/2006/main">
+            <a:srgbClr val="111827"/>
+          </a:solidFill>
+          <a:ln xmlns:a="http://schemas.openxmlformats.org/drawingml/2006/main" w="9525">
+            <a:solidFill>
+              <a:srgbClr val="2F3B55"/>
+            </a:solidFill>
+            <a:prstDash val="solid"/>
+          </a:ln>
+        </p:spPr>
+      </p:sp>
+      <p:sp>
+        <p:nvSpPr>
+          <p:cNvPr id="18" name="risk-name-2">
+            <a:extLst xmlns:a="http://schemas.openxmlformats.org/drawingml/2006/main">
+              <a:ext uri="{FF2B5EF4-FFF2-40B4-BE49-F238E27FC236}">
+                <a16:creationId xmlns:a16="http://schemas.microsoft.com/office/drawing/2014/main" id="{A7A4FBD0-69B9-4DF1-8FBF-F1A4210C7403}"/>
+              </a:ext>
+            </a:extLst>
+          </p:cNvPr>
+          <p:cNvSpPr>
+            <a:spLocks xmlns:a="http://schemas.openxmlformats.org/drawingml/2006/main" noGrp="1"/>
+          </p:cNvSpPr>
+          <p:nvPr/>
+        </p:nvSpPr>
+        <p:spPr>
+          <a:xfrm xmlns:a="http://schemas.openxmlformats.org/drawingml/2006/main">
+            <a:off x="742950" y="3124200"/>
+            <a:ext cx="1238250" cy="228600"/>
+          </a:xfrm>
+          <a:prstGeom xmlns:a="http://schemas.openxmlformats.org/drawingml/2006/main" prst="rect">
+            <a:avLst/>
+          </a:prstGeom>
+          <a:noFill xmlns:a="http://schemas.openxmlformats.org/drawingml/2006/main"/>
+          <a:ln xmlns:a="http://schemas.openxmlformats.org/drawingml/2006/main" w="0">
+            <a:noFill/>
+            <a:prstDash val="solid"/>
+          </a:ln>
+        </p:spPr>
+        <p:txBody>
+          <a:bodyPr xmlns:a="http://schemas.openxmlformats.org/drawingml/2006/main"/>
+          <a:lstStyle xmlns:a="http://schemas.openxmlformats.org/drawingml/2006/main"/>
+          <a:p xmlns:a="http://schemas.openxmlformats.org/drawingml/2006/main">
+            <a:pPr>
+              <a:defRPr sz="1125" b="1">
+                <a:solidFill>
+                  <a:srgbClr val="FF6B35"/>
+                </a:solidFill>
+              </a:defRPr>
+            </a:pPr>
+            <a:r>
+              <a:rPr sz="1125" b="1">
+                <a:solidFill>
+                  <a:srgbClr val="FF6B35"/>
+                </a:solidFill>
+              </a:rPr>
+              <a:t>빌드 불안정</a:t>
+            </a:r>
+          </a:p>
+        </p:txBody>
+      </p:sp>
+      <p:sp>
+        <p:nvSpPr>
+          <p:cNvPr id="19" name="risk-impact-2">
+            <a:extLst xmlns:a="http://schemas.openxmlformats.org/drawingml/2006/main">
+              <a:ext uri="{FF2B5EF4-FFF2-40B4-BE49-F238E27FC236}">
+                <a16:creationId xmlns:a16="http://schemas.microsoft.com/office/drawing/2014/main" id="{2D87ABAF-6CB8-4DA7-88E6-9D954572536B}"/>
+              </a:ext>
+            </a:extLst>
+          </p:cNvPr>
+          <p:cNvSpPr>
+            <a:spLocks xmlns:a="http://schemas.openxmlformats.org/drawingml/2006/main" noGrp="1"/>
+          </p:cNvSpPr>
+          <p:nvPr/>
+        </p:nvSpPr>
+        <p:spPr>
+          <a:xfrm xmlns:a="http://schemas.openxmlformats.org/drawingml/2006/main">
+            <a:off x="2152650" y="3057525"/>
+            <a:ext cx="2381250" cy="361950"/>
+          </a:xfrm>
+          <a:prstGeom xmlns:a="http://schemas.openxmlformats.org/drawingml/2006/main" prst="rect">
+            <a:avLst/>
+          </a:prstGeom>
+          <a:noFill xmlns:a="http://schemas.openxmlformats.org/drawingml/2006/main"/>
+          <a:ln xmlns:a="http://schemas.openxmlformats.org/drawingml/2006/main" w="0">
+            <a:noFill/>
+            <a:prstDash val="solid"/>
+          </a:ln>
+        </p:spPr>
+        <p:txBody>
+          <a:bodyPr xmlns:a="http://schemas.openxmlformats.org/drawingml/2006/main"/>
+          <a:lstStyle xmlns:a="http://schemas.openxmlformats.org/drawingml/2006/main"/>
+          <a:p xmlns:a="http://schemas.openxmlformats.org/drawingml/2006/main">
+            <a:pPr>
+              <a:defRPr sz="975">
+                <a:solidFill>
+                  <a:srgbClr val="CBD5E1"/>
+                </a:solidFill>
+              </a:defRPr>
+            </a:pPr>
+            <a:r>
+              <a:rPr sz="975">
+                <a:solidFill>
+                  <a:srgbClr val="CBD5E1"/>
+                </a:solidFill>
+              </a:rPr>
+              <a:t>후보 빌드 기준 미고정과 긴급 수정 누적</a:t>
+            </a:r>
+          </a:p>
+        </p:txBody>
+      </p:sp>
+      <p:sp>
+        <p:nvSpPr>
+          <p:cNvPr id="20" name="risk-response-2">
+            <a:extLst xmlns:a="http://schemas.openxmlformats.org/drawingml/2006/main">
+              <a:ext uri="{FF2B5EF4-FFF2-40B4-BE49-F238E27FC236}">
+                <a16:creationId xmlns:a16="http://schemas.microsoft.com/office/drawing/2014/main" id="{3417579A-CE04-41C1-977A-DB1056926B87}"/>
+              </a:ext>
+            </a:extLst>
+          </p:cNvPr>
+          <p:cNvSpPr>
+            <a:spLocks xmlns:a="http://schemas.openxmlformats.org/drawingml/2006/main" noGrp="1"/>
+          </p:cNvSpPr>
+          <p:nvPr/>
+        </p:nvSpPr>
+        <p:spPr>
+          <a:xfrm xmlns:a="http://schemas.openxmlformats.org/drawingml/2006/main">
+            <a:off x="4762500" y="3057525"/>
+            <a:ext cx="1809750" cy="361950"/>
+          </a:xfrm>
+          <a:prstGeom xmlns:a="http://schemas.openxmlformats.org/drawingml/2006/main" prst="rect">
+            <a:avLst/>
+          </a:prstGeom>
+          <a:noFill xmlns:a="http://schemas.openxmlformats.org/drawingml/2006/main"/>
+          <a:ln xmlns:a="http://schemas.openxmlformats.org/drawingml/2006/main" w="0">
+            <a:noFill/>
+            <a:prstDash val="solid"/>
+          </a:ln>
+        </p:spPr>
+        <p:txBody>
+          <a:bodyPr xmlns:a="http://schemas.openxmlformats.org/drawingml/2006/main"/>
+          <a:lstStyle xmlns:a="http://schemas.openxmlformats.org/drawingml/2006/main"/>
+          <a:p xmlns:a="http://schemas.openxmlformats.org/drawingml/2006/main">
+            <a:pPr>
+              <a:defRPr sz="975">
+                <a:solidFill>
+                  <a:srgbClr val="FFFFFF"/>
+                </a:solidFill>
+              </a:defRPr>
+            </a:pPr>
+            <a:r>
+              <a:rPr sz="975">
+                <a:solidFill>
+                  <a:srgbClr val="FFFFFF"/>
+                </a:solidFill>
+              </a:rPr>
+              <a:t>브랜치·태그 기준 고정</a:t>
+            </a:r>
+          </a:p>
+        </p:txBody>
+      </p:sp>
+      <p:sp>
+        <p:nvSpPr>
+          <p:cNvPr id="21" name="risk-row-3">
+            <a:extLst xmlns:a="http://schemas.openxmlformats.org/drawingml/2006/main">
+              <a:ext uri="{FF2B5EF4-FFF2-40B4-BE49-F238E27FC236}">
+                <a16:creationId xmlns:a16="http://schemas.microsoft.com/office/drawing/2014/main" id="{268A2E18-532E-42C9-A2EC-9EF168E6D370}"/>
+              </a:ext>
+            </a:extLst>
+          </p:cNvPr>
+          <p:cNvSpPr>
+            <a:spLocks xmlns:a="http://schemas.openxmlformats.org/drawingml/2006/main" noGrp="1"/>
+          </p:cNvSpPr>
+          <p:nvPr/>
+        </p:nvSpPr>
+        <p:spPr>
+          <a:xfrm xmlns:a="http://schemas.openxmlformats.org/drawingml/2006/main">
+            <a:off x="514350" y="3562350"/>
+            <a:ext cx="6572250" cy="628650"/>
+          </a:xfrm>
+          <a:prstGeom xmlns:a="http://schemas.openxmlformats.org/drawingml/2006/main" prst="rect">
+            <a:avLst/>
+          </a:prstGeom>
+          <a:solidFill xmlns:a="http://schemas.openxmlformats.org/drawingml/2006/main">
+            <a:srgbClr val="151F34"/>
+          </a:solidFill>
+          <a:ln xmlns:a="http://schemas.openxmlformats.org/drawingml/2006/main" w="9525">
+            <a:solidFill>
+              <a:srgbClr val="2F3B55"/>
+            </a:solidFill>
+            <a:prstDash val="solid"/>
+          </a:ln>
+        </p:spPr>
+      </p:sp>
+      <p:sp>
+        <p:nvSpPr>
+          <p:cNvPr id="22" name="risk-name-3">
+            <a:extLst xmlns:a="http://schemas.openxmlformats.org/drawingml/2006/main">
+              <a:ext uri="{FF2B5EF4-FFF2-40B4-BE49-F238E27FC236}">
+                <a16:creationId xmlns:a16="http://schemas.microsoft.com/office/drawing/2014/main" id="{A7C85972-FB73-4108-AB59-E3AD2B6A4AD6}"/>
+              </a:ext>
+            </a:extLst>
+          </p:cNvPr>
+          <p:cNvSpPr>
+            <a:spLocks xmlns:a="http://schemas.openxmlformats.org/drawingml/2006/main" noGrp="1"/>
+          </p:cNvSpPr>
+          <p:nvPr/>
+        </p:nvSpPr>
+        <p:spPr>
+          <a:xfrm xmlns:a="http://schemas.openxmlformats.org/drawingml/2006/main">
+            <a:off x="742950" y="3752850"/>
+            <a:ext cx="1238250" cy="228600"/>
+          </a:xfrm>
+          <a:prstGeom xmlns:a="http://schemas.openxmlformats.org/drawingml/2006/main" prst="rect">
+            <a:avLst/>
+          </a:prstGeom>
+          <a:noFill xmlns:a="http://schemas.openxmlformats.org/drawingml/2006/main"/>
+          <a:ln xmlns:a="http://schemas.openxmlformats.org/drawingml/2006/main" w="0">
+            <a:noFill/>
+            <a:prstDash val="solid"/>
+          </a:ln>
+        </p:spPr>
+        <p:txBody>
+          <a:bodyPr xmlns:a="http://schemas.openxmlformats.org/drawingml/2006/main"/>
+          <a:lstStyle xmlns:a="http://schemas.openxmlformats.org/drawingml/2006/main"/>
+          <a:p xmlns:a="http://schemas.openxmlformats.org/drawingml/2006/main">
+            <a:pPr>
+              <a:defRPr sz="1125" b="1">
+                <a:solidFill>
+                  <a:srgbClr val="7C3AED"/>
+                </a:solidFill>
+              </a:defRPr>
+            </a:pPr>
+            <a:r>
+              <a:rPr sz="1125" b="1">
+                <a:solidFill>
+                  <a:srgbClr val="7C3AED"/>
+                </a:solidFill>
+              </a:rPr>
+              <a:t>QA 병목</a:t>
+            </a:r>
+          </a:p>
+        </p:txBody>
+      </p:sp>
+      <p:sp>
+        <p:nvSpPr>
+          <p:cNvPr id="23" name="risk-impact-3">
+            <a:extLst xmlns:a="http://schemas.openxmlformats.org/drawingml/2006/main">
+              <a:ext uri="{FF2B5EF4-FFF2-40B4-BE49-F238E27FC236}">
+                <a16:creationId xmlns:a16="http://schemas.microsoft.com/office/drawing/2014/main" id="{76A45D05-E701-41F9-802B-6A49F0A61A63}"/>
+              </a:ext>
+            </a:extLst>
+          </p:cNvPr>
+          <p:cNvSpPr>
+            <a:spLocks xmlns:a="http://schemas.openxmlformats.org/drawingml/2006/main" noGrp="1"/>
+          </p:cNvSpPr>
+          <p:nvPr/>
+        </p:nvSpPr>
+        <p:spPr>
+          <a:xfrm xmlns:a="http://schemas.openxmlformats.org/drawingml/2006/main">
+            <a:off x="2152650" y="3686175"/>
+            <a:ext cx="2381250" cy="361950"/>
+          </a:xfrm>
+          <a:prstGeom xmlns:a="http://schemas.openxmlformats.org/drawingml/2006/main" prst="rect">
+            <a:avLst/>
+          </a:prstGeom>
+          <a:noFill xmlns:a="http://schemas.openxmlformats.org/drawingml/2006/main"/>
+          <a:ln xmlns:a="http://schemas.openxmlformats.org/drawingml/2006/main" w="0">
+            <a:noFill/>
+            <a:prstDash val="solid"/>
+          </a:ln>
+        </p:spPr>
+        <p:txBody>
+          <a:bodyPr xmlns:a="http://schemas.openxmlformats.org/drawingml/2006/main"/>
+          <a:lstStyle xmlns:a="http://schemas.openxmlformats.org/drawingml/2006/main"/>
+          <a:p xmlns:a="http://schemas.openxmlformats.org/drawingml/2006/main">
+            <a:pPr>
+              <a:defRPr sz="975">
+                <a:solidFill>
+                  <a:srgbClr val="CBD5E1"/>
+                </a:solidFill>
+              </a:defRPr>
+            </a:pPr>
+            <a:r>
+              <a:rPr sz="975">
+                <a:solidFill>
+                  <a:srgbClr val="CBD5E1"/>
+                </a:solidFill>
+              </a:rPr>
+              <a:t>이슈 분류 지연과 수정 검증 대기 증가</a:t>
+            </a:r>
+          </a:p>
+        </p:txBody>
+      </p:sp>
+      <p:sp>
+        <p:nvSpPr>
+          <p:cNvPr id="24" name="risk-response-3">
+            <a:extLst xmlns:a="http://schemas.openxmlformats.org/drawingml/2006/main">
+              <a:ext uri="{FF2B5EF4-FFF2-40B4-BE49-F238E27FC236}">
+                <a16:creationId xmlns:a16="http://schemas.microsoft.com/office/drawing/2014/main" id="{CA4518BD-7A2A-436E-87AE-B436A1654CC0}"/>
+              </a:ext>
+            </a:extLst>
+          </p:cNvPr>
+          <p:cNvSpPr>
+            <a:spLocks xmlns:a="http://schemas.openxmlformats.org/drawingml/2006/main" noGrp="1"/>
+          </p:cNvSpPr>
+          <p:nvPr/>
+        </p:nvSpPr>
+        <p:spPr>
+          <a:xfrm xmlns:a="http://schemas.openxmlformats.org/drawingml/2006/main">
+            <a:off x="4762500" y="3686175"/>
+            <a:ext cx="1809750" cy="361950"/>
+          </a:xfrm>
+          <a:prstGeom xmlns:a="http://schemas.openxmlformats.org/drawingml/2006/main" prst="rect">
+            <a:avLst/>
+          </a:prstGeom>
+          <a:noFill xmlns:a="http://schemas.openxmlformats.org/drawingml/2006/main"/>
+          <a:ln xmlns:a="http://schemas.openxmlformats.org/drawingml/2006/main" w="0">
+            <a:noFill/>
+            <a:prstDash val="solid"/>
+          </a:ln>
+        </p:spPr>
+        <p:txBody>
+          <a:bodyPr xmlns:a="http://schemas.openxmlformats.org/drawingml/2006/main"/>
+          <a:lstStyle xmlns:a="http://schemas.openxmlformats.org/drawingml/2006/main"/>
+          <a:p xmlns:a="http://schemas.openxmlformats.org/drawingml/2006/main">
+            <a:pPr>
+              <a:defRPr sz="975">
+                <a:solidFill>
+                  <a:srgbClr val="FFFFFF"/>
+                </a:solidFill>
+              </a:defRPr>
+            </a:pPr>
+            <a:r>
+              <a:rPr sz="975">
+                <a:solidFill>
+                  <a:srgbClr val="FFFFFF"/>
+                </a:solidFill>
+              </a:rPr>
+              <a:t>재현 정보와 수정 일정 추적</a:t>
+            </a:r>
+          </a:p>
+        </p:txBody>
+      </p:sp>
+      <p:sp>
+        <p:nvSpPr>
+          <p:cNvPr id="25" name="risk-row-4">
+            <a:extLst xmlns:a="http://schemas.openxmlformats.org/drawingml/2006/main">
+              <a:ext uri="{FF2B5EF4-FFF2-40B4-BE49-F238E27FC236}">
+                <a16:creationId xmlns:a16="http://schemas.microsoft.com/office/drawing/2014/main" id="{9F34B709-23C2-4E70-8392-E6960C0F7423}"/>
+              </a:ext>
+            </a:extLst>
+          </p:cNvPr>
+          <p:cNvSpPr>
+            <a:spLocks xmlns:a="http://schemas.openxmlformats.org/drawingml/2006/main" noGrp="1"/>
+          </p:cNvSpPr>
+          <p:nvPr/>
+        </p:nvSpPr>
+        <p:spPr>
+          <a:xfrm xmlns:a="http://schemas.openxmlformats.org/drawingml/2006/main">
+            <a:off x="514350" y="4191000"/>
+            <a:ext cx="6572250" cy="628650"/>
+          </a:xfrm>
+          <a:prstGeom xmlns:a="http://schemas.openxmlformats.org/drawingml/2006/main" prst="rect">
+            <a:avLst/>
+          </a:prstGeom>
+          <a:solidFill xmlns:a="http://schemas.openxmlformats.org/drawingml/2006/main">
+            <a:srgbClr val="111827"/>
+          </a:solidFill>
+          <a:ln xmlns:a="http://schemas.openxmlformats.org/drawingml/2006/main" w="9525">
+            <a:solidFill>
+              <a:srgbClr val="2F3B55"/>
+            </a:solidFill>
+            <a:prstDash val="solid"/>
+          </a:ln>
+        </p:spPr>
+      </p:sp>
+      <p:sp>
+        <p:nvSpPr>
+          <p:cNvPr id="26" name="risk-name-4">
+            <a:extLst xmlns:a="http://schemas.openxmlformats.org/drawingml/2006/main">
+              <a:ext uri="{FF2B5EF4-FFF2-40B4-BE49-F238E27FC236}">
+                <a16:creationId xmlns:a16="http://schemas.microsoft.com/office/drawing/2014/main" id="{79282555-94FE-46C4-9553-10E1CB4AAF49}"/>
+              </a:ext>
+            </a:extLst>
+          </p:cNvPr>
+          <p:cNvSpPr>
+            <a:spLocks xmlns:a="http://schemas.openxmlformats.org/drawingml/2006/main" noGrp="1"/>
+          </p:cNvSpPr>
+          <p:nvPr/>
+        </p:nvSpPr>
+        <p:spPr>
+          <a:xfrm xmlns:a="http://schemas.openxmlformats.org/drawingml/2006/main">
+            <a:off x="742950" y="4381500"/>
+            <a:ext cx="1238250" cy="228600"/>
+          </a:xfrm>
+          <a:prstGeom xmlns:a="http://schemas.openxmlformats.org/drawingml/2006/main" prst="rect">
+            <a:avLst/>
+          </a:prstGeom>
+          <a:noFill xmlns:a="http://schemas.openxmlformats.org/drawingml/2006/main"/>
+          <a:ln xmlns:a="http://schemas.openxmlformats.org/drawingml/2006/main" w="0">
+            <a:noFill/>
+            <a:prstDash val="solid"/>
+          </a:ln>
+        </p:spPr>
+        <p:txBody>
+          <a:bodyPr xmlns:a="http://schemas.openxmlformats.org/drawingml/2006/main"/>
+          <a:lstStyle xmlns:a="http://schemas.openxmlformats.org/drawingml/2006/main"/>
+          <a:p xmlns:a="http://schemas.openxmlformats.org/drawingml/2006/main">
+            <a:pPr>
+              <a:defRPr sz="1125" b="1">
+                <a:solidFill>
+                  <a:srgbClr val="8BD9E8"/>
+                </a:solidFill>
+              </a:defRPr>
+            </a:pPr>
+            <a:r>
+              <a:rPr sz="1125" b="1">
+                <a:solidFill>
+                  <a:srgbClr val="8BD9E8"/>
+                </a:solidFill>
+              </a:rPr>
+              <a:t>피드백 지연</a:t>
+            </a:r>
+          </a:p>
+        </p:txBody>
+      </p:sp>
+      <p:sp>
+        <p:nvSpPr>
+          <p:cNvPr id="27" name="risk-impact-4">
+            <a:extLst xmlns:a="http://schemas.openxmlformats.org/drawingml/2006/main">
+              <a:ext uri="{FF2B5EF4-FFF2-40B4-BE49-F238E27FC236}">
+                <a16:creationId xmlns:a16="http://schemas.microsoft.com/office/drawing/2014/main" id="{4461E9A9-CD62-4FEE-9906-EFD5682946C4}"/>
+              </a:ext>
+            </a:extLst>
+          </p:cNvPr>
+          <p:cNvSpPr>
+            <a:spLocks xmlns:a="http://schemas.openxmlformats.org/drawingml/2006/main" noGrp="1"/>
+          </p:cNvSpPr>
+          <p:nvPr/>
+        </p:nvSpPr>
+        <p:spPr>
+          <a:xfrm xmlns:a="http://schemas.openxmlformats.org/drawingml/2006/main">
+            <a:off x="2152650" y="4314825"/>
+            <a:ext cx="2381250" cy="361950"/>
+          </a:xfrm>
+          <a:prstGeom xmlns:a="http://schemas.openxmlformats.org/drawingml/2006/main" prst="rect">
+            <a:avLst/>
+          </a:prstGeom>
+          <a:noFill xmlns:a="http://schemas.openxmlformats.org/drawingml/2006/main"/>
+          <a:ln xmlns:a="http://schemas.openxmlformats.org/drawingml/2006/main" w="0">
+            <a:noFill/>
+            <a:prstDash val="solid"/>
+          </a:ln>
+        </p:spPr>
+        <p:txBody>
+          <a:bodyPr xmlns:a="http://schemas.openxmlformats.org/drawingml/2006/main"/>
+          <a:lstStyle xmlns:a="http://schemas.openxmlformats.org/drawingml/2006/main"/>
+          <a:p xmlns:a="http://schemas.openxmlformats.org/drawingml/2006/main">
+            <a:pPr>
+              <a:defRPr sz="975">
+                <a:solidFill>
+                  <a:srgbClr val="CBD5E1"/>
+                </a:solidFill>
+              </a:defRPr>
+            </a:pPr>
+            <a:r>
+              <a:rPr sz="975">
+                <a:solidFill>
+                  <a:srgbClr val="CBD5E1"/>
+                </a:solidFill>
+              </a:rPr>
+              <a:t>퍼블리셔 검수 의견 회신과 재전달 일정 불명확</a:t>
+            </a:r>
+          </a:p>
+        </p:txBody>
+      </p:sp>
+      <p:sp>
+        <p:nvSpPr>
+          <p:cNvPr id="28" name="risk-response-4">
+            <a:extLst xmlns:a="http://schemas.openxmlformats.org/drawingml/2006/main">
+              <a:ext uri="{FF2B5EF4-FFF2-40B4-BE49-F238E27FC236}">
+                <a16:creationId xmlns:a16="http://schemas.microsoft.com/office/drawing/2014/main" id="{BC5103D7-B8E3-4BF2-B208-E019718BE190}"/>
+              </a:ext>
+            </a:extLst>
+          </p:cNvPr>
+          <p:cNvSpPr>
+            <a:spLocks xmlns:a="http://schemas.openxmlformats.org/drawingml/2006/main" noGrp="1"/>
+          </p:cNvSpPr>
+          <p:nvPr/>
+        </p:nvSpPr>
+        <p:spPr>
+          <a:xfrm xmlns:a="http://schemas.openxmlformats.org/drawingml/2006/main">
+            <a:off x="4762500" y="4314825"/>
+            <a:ext cx="1809750" cy="361950"/>
+          </a:xfrm>
+          <a:prstGeom xmlns:a="http://schemas.openxmlformats.org/drawingml/2006/main" prst="rect">
+            <a:avLst/>
+          </a:prstGeom>
+          <a:noFill xmlns:a="http://schemas.openxmlformats.org/drawingml/2006/main"/>
+          <a:ln xmlns:a="http://schemas.openxmlformats.org/drawingml/2006/main" w="0">
+            <a:noFill/>
+            <a:prstDash val="solid"/>
+          </a:ln>
+        </p:spPr>
+        <p:txBody>
+          <a:bodyPr xmlns:a="http://schemas.openxmlformats.org/drawingml/2006/main"/>
+          <a:lstStyle xmlns:a="http://schemas.openxmlformats.org/drawingml/2006/main"/>
+          <a:p xmlns:a="http://schemas.openxmlformats.org/drawingml/2006/main">
+            <a:pPr>
+              <a:defRPr sz="975">
+                <a:solidFill>
+                  <a:srgbClr val="FFFFFF"/>
+                </a:solidFill>
+              </a:defRPr>
+            </a:pPr>
+            <a:r>
+              <a:rPr sz="975">
+                <a:solidFill>
+                  <a:srgbClr val="FFFFFF"/>
+                </a:solidFill>
+              </a:rPr>
+              <a:t>요청·회신·재전달 상태 관리</a:t>
+            </a:r>
+          </a:p>
+        </p:txBody>
+      </p:sp>
+      <p:sp>
+        <p:nvSpPr>
+          <p:cNvPr id="29" name="risk-row-5">
+            <a:extLst xmlns:a="http://schemas.openxmlformats.org/drawingml/2006/main">
+              <a:ext uri="{FF2B5EF4-FFF2-40B4-BE49-F238E27FC236}">
+                <a16:creationId xmlns:a16="http://schemas.microsoft.com/office/drawing/2014/main" id="{FBE01808-DA87-46C9-B5E2-BEB2C1CB5060}"/>
+              </a:ext>
+            </a:extLst>
+          </p:cNvPr>
+          <p:cNvSpPr>
+            <a:spLocks xmlns:a="http://schemas.openxmlformats.org/drawingml/2006/main" noGrp="1"/>
+          </p:cNvSpPr>
+          <p:nvPr/>
+        </p:nvSpPr>
+        <p:spPr>
+          <a:xfrm xmlns:a="http://schemas.openxmlformats.org/drawingml/2006/main">
+            <a:off x="514350" y="4819650"/>
+            <a:ext cx="6572250" cy="628650"/>
+          </a:xfrm>
+          <a:prstGeom xmlns:a="http://schemas.openxmlformats.org/drawingml/2006/main" prst="rect">
+            <a:avLst/>
+          </a:prstGeom>
+          <a:solidFill xmlns:a="http://schemas.openxmlformats.org/drawingml/2006/main">
+            <a:srgbClr val="151F34"/>
+          </a:solidFill>
+          <a:ln xmlns:a="http://schemas.openxmlformats.org/drawingml/2006/main" w="9525">
+            <a:solidFill>
+              <a:srgbClr val="2F3B55"/>
+            </a:solidFill>
+            <a:prstDash val="solid"/>
+          </a:ln>
+        </p:spPr>
+      </p:sp>
+      <p:sp>
+        <p:nvSpPr>
+          <p:cNvPr id="30" name="risk-name-5">
+            <a:extLst xmlns:a="http://schemas.openxmlformats.org/drawingml/2006/main">
+              <a:ext uri="{FF2B5EF4-FFF2-40B4-BE49-F238E27FC236}">
+                <a16:creationId xmlns:a16="http://schemas.microsoft.com/office/drawing/2014/main" id="{9C8A501E-EAE5-40BF-8A11-2EDDE292ABBB}"/>
+              </a:ext>
+            </a:extLst>
+          </p:cNvPr>
+          <p:cNvSpPr>
+            <a:spLocks xmlns:a="http://schemas.openxmlformats.org/drawingml/2006/main" noGrp="1"/>
+          </p:cNvSpPr>
+          <p:nvPr/>
+        </p:nvSpPr>
+        <p:spPr>
+          <a:xfrm xmlns:a="http://schemas.openxmlformats.org/drawingml/2006/main">
+            <a:off x="742950" y="5010150"/>
+            <a:ext cx="1238250" cy="228600"/>
+          </a:xfrm>
+          <a:prstGeom xmlns:a="http://schemas.openxmlformats.org/drawingml/2006/main" prst="rect">
+            <a:avLst/>
+          </a:prstGeom>
+          <a:noFill xmlns:a="http://schemas.openxmlformats.org/drawingml/2006/main"/>
+          <a:ln xmlns:a="http://schemas.openxmlformats.org/drawingml/2006/main" w="0">
+            <a:noFill/>
+            <a:prstDash val="solid"/>
+          </a:ln>
+        </p:spPr>
+        <p:txBody>
+          <a:bodyPr xmlns:a="http://schemas.openxmlformats.org/drawingml/2006/main"/>
+          <a:lstStyle xmlns:a="http://schemas.openxmlformats.org/drawingml/2006/main"/>
+          <a:p xmlns:a="http://schemas.openxmlformats.org/drawingml/2006/main">
+            <a:pPr>
+              <a:defRPr sz="1125" b="1">
+                <a:solidFill>
+                  <a:srgbClr val="FF6B35"/>
+                </a:solidFill>
+              </a:defRPr>
+            </a:pPr>
+            <a:r>
+              <a:rPr sz="1125" b="1">
+                <a:solidFill>
+                  <a:srgbClr val="FF6B35"/>
+                </a:solidFill>
+              </a:rPr>
+              <a:t>직전 변경</a:t>
+            </a:r>
+          </a:p>
+        </p:txBody>
+      </p:sp>
+      <p:sp>
+        <p:nvSpPr>
+          <p:cNvPr id="31" name="risk-impact-5">
+            <a:extLst xmlns:a="http://schemas.openxmlformats.org/drawingml/2006/main">
+              <a:ext uri="{FF2B5EF4-FFF2-40B4-BE49-F238E27FC236}">
+                <a16:creationId xmlns:a16="http://schemas.microsoft.com/office/drawing/2014/main" id="{0AA21A79-AE73-4EE4-802E-BA69370F6707}"/>
+              </a:ext>
+            </a:extLst>
+          </p:cNvPr>
+          <p:cNvSpPr>
+            <a:spLocks xmlns:a="http://schemas.openxmlformats.org/drawingml/2006/main" noGrp="1"/>
+          </p:cNvSpPr>
+          <p:nvPr/>
+        </p:nvSpPr>
+        <p:spPr>
+          <a:xfrm xmlns:a="http://schemas.openxmlformats.org/drawingml/2006/main">
+            <a:off x="2152650" y="4943475"/>
+            <a:ext cx="2381250" cy="361950"/>
+          </a:xfrm>
+          <a:prstGeom xmlns:a="http://schemas.openxmlformats.org/drawingml/2006/main" prst="rect">
+            <a:avLst/>
+          </a:prstGeom>
+          <a:noFill xmlns:a="http://schemas.openxmlformats.org/drawingml/2006/main"/>
+          <a:ln xmlns:a="http://schemas.openxmlformats.org/drawingml/2006/main" w="0">
+            <a:noFill/>
+            <a:prstDash val="solid"/>
+          </a:ln>
+        </p:spPr>
+        <p:txBody>
+          <a:bodyPr xmlns:a="http://schemas.openxmlformats.org/drawingml/2006/main"/>
+          <a:lstStyle xmlns:a="http://schemas.openxmlformats.org/drawingml/2006/main"/>
+          <a:p xmlns:a="http://schemas.openxmlformats.org/drawingml/2006/main">
+            <a:pPr>
+              <a:defRPr sz="975">
+                <a:solidFill>
+                  <a:srgbClr val="CBD5E1"/>
+                </a:solidFill>
+              </a:defRPr>
+            </a:pPr>
+            <a:r>
+              <a:rPr sz="975">
+                <a:solidFill>
+                  <a:srgbClr val="CBD5E1"/>
+                </a:solidFill>
+              </a:rPr>
+              <a:t>서비스 범위와 운영 정책 변경으로 품질 흔들림</a:t>
+            </a:r>
+          </a:p>
+        </p:txBody>
+      </p:sp>
+      <p:sp>
+        <p:nvSpPr>
+          <p:cNvPr id="32" name="risk-response-5">
+            <a:extLst xmlns:a="http://schemas.openxmlformats.org/drawingml/2006/main">
+              <a:ext uri="{FF2B5EF4-FFF2-40B4-BE49-F238E27FC236}">
+                <a16:creationId xmlns:a16="http://schemas.microsoft.com/office/drawing/2014/main" id="{BCD13F04-70D9-4FC0-B8E6-F5CE575A48C6}"/>
+              </a:ext>
+            </a:extLst>
+          </p:cNvPr>
+          <p:cNvSpPr>
+            <a:spLocks xmlns:a="http://schemas.openxmlformats.org/drawingml/2006/main" noGrp="1"/>
+          </p:cNvSpPr>
+          <p:nvPr/>
+        </p:nvSpPr>
+        <p:spPr>
+          <a:xfrm xmlns:a="http://schemas.openxmlformats.org/drawingml/2006/main">
+            <a:off x="4762500" y="4943475"/>
+            <a:ext cx="1809750" cy="361950"/>
+          </a:xfrm>
+          <a:prstGeom xmlns:a="http://schemas.openxmlformats.org/drawingml/2006/main" prst="rect">
+            <a:avLst/>
+          </a:prstGeom>
+          <a:noFill xmlns:a="http://schemas.openxmlformats.org/drawingml/2006/main"/>
+          <a:ln xmlns:a="http://schemas.openxmlformats.org/drawingml/2006/main" w="0">
+            <a:noFill/>
+            <a:prstDash val="solid"/>
+          </a:ln>
+        </p:spPr>
+        <p:txBody>
+          <a:bodyPr xmlns:a="http://schemas.openxmlformats.org/drawingml/2006/main"/>
+          <a:lstStyle xmlns:a="http://schemas.openxmlformats.org/drawingml/2006/main"/>
+          <a:p xmlns:a="http://schemas.openxmlformats.org/drawingml/2006/main">
+            <a:pPr>
+              <a:defRPr sz="975">
+                <a:solidFill>
+                  <a:srgbClr val="FFFFFF"/>
+                </a:solidFill>
+              </a:defRPr>
+            </a:pPr>
+            <a:r>
+              <a:rPr sz="975">
+                <a:solidFill>
+                  <a:srgbClr val="FFFFFF"/>
+                </a:solidFill>
+              </a:rPr>
+              <a:t>영향도 검토 후 반영·보류 결정</a:t>
+            </a:r>
+          </a:p>
+        </p:txBody>
+      </p:sp>
+      <p:sp>
+        <p:nvSpPr>
+          <p:cNvPr id="33" name="process-title">
+            <a:extLst xmlns:a="http://schemas.openxmlformats.org/drawingml/2006/main">
+              <a:ext uri="{FF2B5EF4-FFF2-40B4-BE49-F238E27FC236}">
+                <a16:creationId xmlns:a16="http://schemas.microsoft.com/office/drawing/2014/main" id="{B5107125-E0BE-4968-B698-4F923A4E15D5}"/>
+              </a:ext>
+            </a:extLst>
+          </p:cNvPr>
+          <p:cNvSpPr>
+            <a:spLocks xmlns:a="http://schemas.openxmlformats.org/drawingml/2006/main" noGrp="1"/>
+          </p:cNvSpPr>
+          <p:nvPr/>
+        </p:nvSpPr>
+        <p:spPr>
+          <a:xfrm xmlns:a="http://schemas.openxmlformats.org/drawingml/2006/main">
+            <a:off x="7620000" y="1752600"/>
+            <a:ext cx="2286000" cy="285750"/>
+          </a:xfrm>
+          <a:prstGeom xmlns:a="http://schemas.openxmlformats.org/drawingml/2006/main" prst="rect">
+            <a:avLst/>
+          </a:prstGeom>
+          <a:noFill xmlns:a="http://schemas.openxmlformats.org/drawingml/2006/main"/>
+          <a:ln xmlns:a="http://schemas.openxmlformats.org/drawingml/2006/main" w="0">
+            <a:noFill/>
+            <a:prstDash val="solid"/>
+          </a:ln>
+        </p:spPr>
+        <p:txBody>
+          <a:bodyPr xmlns:a="http://schemas.openxmlformats.org/drawingml/2006/main"/>
+          <a:lstStyle xmlns:a="http://schemas.openxmlformats.org/drawingml/2006/main"/>
+          <a:p xmlns:a="http://schemas.openxmlformats.org/drawingml/2006/main">
+            <a:pPr>
+              <a:defRPr sz="1650" b="1">
+                <a:solidFill>
+                  <a:srgbClr val="FFFFFF"/>
+                </a:solidFill>
+              </a:defRPr>
+            </a:pPr>
+            <a:r>
+              <a:rPr sz="1650" b="1">
+                <a:solidFill>
+                  <a:srgbClr val="FFFFFF"/>
+                </a:solidFill>
+              </a:rPr>
+              <a:t>대응 프로세스</a:t>
+            </a:r>
+          </a:p>
+        </p:txBody>
+      </p:sp>
+      <p:sp>
+        <p:nvSpPr>
+          <p:cNvPr id="34" name="process-note">
+            <a:extLst xmlns:a="http://schemas.openxmlformats.org/drawingml/2006/main">
+              <a:ext uri="{FF2B5EF4-FFF2-40B4-BE49-F238E27FC236}">
+                <a16:creationId xmlns:a16="http://schemas.microsoft.com/office/drawing/2014/main" id="{032563F5-12B6-4E82-8A7F-008800CEADB6}"/>
+              </a:ext>
+            </a:extLst>
+          </p:cNvPr>
+          <p:cNvSpPr>
+            <a:spLocks xmlns:a="http://schemas.openxmlformats.org/drawingml/2006/main" noGrp="1"/>
+          </p:cNvSpPr>
+          <p:nvPr/>
+        </p:nvSpPr>
+        <p:spPr>
+          <a:xfrm xmlns:a="http://schemas.openxmlformats.org/drawingml/2006/main">
+            <a:off x="9429750" y="1809750"/>
+            <a:ext cx="2095500" cy="209550"/>
+          </a:xfrm>
+          <a:prstGeom xmlns:a="http://schemas.openxmlformats.org/drawingml/2006/main" prst="rect">
+            <a:avLst/>
+          </a:prstGeom>
+          <a:noFill xmlns:a="http://schemas.openxmlformats.org/drawingml/2006/main"/>
+          <a:ln xmlns:a="http://schemas.openxmlformats.org/drawingml/2006/main" w="0">
+            <a:noFill/>
+            <a:prstDash val="solid"/>
+          </a:ln>
+        </p:spPr>
+        <p:txBody>
+          <a:bodyPr xmlns:a="http://schemas.openxmlformats.org/drawingml/2006/main"/>
+          <a:lstStyle xmlns:a="http://schemas.openxmlformats.org/drawingml/2006/main"/>
+          <a:p xmlns:a="http://schemas.openxmlformats.org/drawingml/2006/main">
+            <a:pPr>
+              <a:defRPr sz="975">
+                <a:solidFill>
+                  <a:srgbClr val="94A3B8"/>
+                </a:solidFill>
+              </a:defRPr>
+            </a:pPr>
+            <a:r>
+              <a:rPr sz="975">
+                <a:solidFill>
+                  <a:srgbClr val="94A3B8"/>
+                </a:solidFill>
+              </a:rPr>
+              <a:t>먼저 분류·담당을 잡습니다.</a:t>
+            </a:r>
+          </a:p>
+        </p:txBody>
+      </p:sp>
+      <p:sp>
+        <p:nvSpPr>
+          <p:cNvPr id="35" name="process-step-1">
+            <a:extLst xmlns:a="http://schemas.openxmlformats.org/drawingml/2006/main">
+              <a:ext uri="{FF2B5EF4-FFF2-40B4-BE49-F238E27FC236}">
+                <a16:creationId xmlns:a16="http://schemas.microsoft.com/office/drawing/2014/main" id="{1E2BF19E-623C-4F31-B490-F48BD5CF7C13}"/>
+              </a:ext>
+            </a:extLst>
+          </p:cNvPr>
+          <p:cNvSpPr>
+            <a:spLocks xmlns:a="http://schemas.openxmlformats.org/drawingml/2006/main" noGrp="1"/>
+          </p:cNvSpPr>
+          <p:nvPr/>
+        </p:nvSpPr>
+        <p:spPr>
+          <a:xfrm xmlns:a="http://schemas.openxmlformats.org/drawingml/2006/main">
+            <a:off x="7620000" y="2247900"/>
+            <a:ext cx="3714750" cy="704850"/>
+          </a:xfrm>
+          <a:prstGeom xmlns:a="http://schemas.openxmlformats.org/drawingml/2006/main" prst="roundRect">
+            <a:avLst>
+              <a:gd name="adj" fmla="val 10811"/>
+            </a:avLst>
+          </a:prstGeom>
+          <a:solidFill xmlns:a="http://schemas.openxmlformats.org/drawingml/2006/main">
+            <a:srgbClr val="111827"/>
+          </a:solidFill>
+          <a:ln xmlns:a="http://schemas.openxmlformats.org/drawingml/2006/main" w="9525">
+            <a:solidFill>
+              <a:srgbClr val="2F3B55"/>
+            </a:solidFill>
+            <a:prstDash val="solid"/>
+          </a:ln>
+        </p:spPr>
+      </p:sp>
+      <p:sp>
+        <p:nvSpPr>
+          <p:cNvPr id="36" name="process-step-bar-1">
+            <a:extLst xmlns:a="http://schemas.openxmlformats.org/drawingml/2006/main">
+              <a:ext uri="{FF2B5EF4-FFF2-40B4-BE49-F238E27FC236}">
+                <a16:creationId xmlns:a16="http://schemas.microsoft.com/office/drawing/2014/main" id="{2044ACCD-7C49-4A62-8690-82A907B04775}"/>
+              </a:ext>
+            </a:extLst>
+          </p:cNvPr>
+          <p:cNvSpPr>
+            <a:spLocks xmlns:a="http://schemas.openxmlformats.org/drawingml/2006/main" noGrp="1"/>
+          </p:cNvSpPr>
+          <p:nvPr/>
+        </p:nvSpPr>
+        <p:spPr>
+          <a:xfrm xmlns:a="http://schemas.openxmlformats.org/drawingml/2006/main">
+            <a:off x="7620000" y="2247900"/>
+            <a:ext cx="57150" cy="704850"/>
+          </a:xfrm>
+          <a:prstGeom xmlns:a="http://schemas.openxmlformats.org/drawingml/2006/main" prst="rect">
+            <a:avLst/>
+          </a:prstGeom>
+          <a:solidFill xmlns:a="http://schemas.openxmlformats.org/drawingml/2006/main">
+            <a:srgbClr val="00B8D9"/>
+          </a:solidFill>
+          <a:ln xmlns:a="http://schemas.openxmlformats.org/drawingml/2006/main" w="0">
+            <a:solidFill>
+              <a:srgbClr val="00B8D9"/>
+            </a:solidFill>
+            <a:prstDash val="solid"/>
+          </a:ln>
+        </p:spPr>
+      </p:sp>
+      <p:sp>
+        <p:nvSpPr>
+          <p:cNvPr id="37" name="process-step-no-1">
+            <a:extLst xmlns:a="http://schemas.openxmlformats.org/drawingml/2006/main">
+              <a:ext uri="{FF2B5EF4-FFF2-40B4-BE49-F238E27FC236}">
+                <a16:creationId xmlns:a16="http://schemas.microsoft.com/office/drawing/2014/main" id="{3AD6421B-B48D-4183-96AB-3B199DF5B24A}"/>
+              </a:ext>
+            </a:extLst>
+          </p:cNvPr>
+          <p:cNvSpPr>
+            <a:spLocks xmlns:a="http://schemas.openxmlformats.org/drawingml/2006/main" noGrp="1"/>
+          </p:cNvSpPr>
+          <p:nvPr/>
+        </p:nvSpPr>
+        <p:spPr>
+          <a:xfrm xmlns:a="http://schemas.openxmlformats.org/drawingml/2006/main">
+            <a:off x="7848600" y="2419350"/>
+            <a:ext cx="552450" cy="323850"/>
+          </a:xfrm>
+          <a:prstGeom xmlns:a="http://schemas.openxmlformats.org/drawingml/2006/main" prst="roundRect">
+            <a:avLst>
+              <a:gd name="adj" fmla="val 23529"/>
+            </a:avLst>
+          </a:prstGeom>
+          <a:solidFill xmlns:a="http://schemas.openxmlformats.org/drawingml/2006/main">
+            <a:srgbClr val="00B8D9"/>
+          </a:solidFill>
+          <a:ln xmlns:a="http://schemas.openxmlformats.org/drawingml/2006/main" w="9525">
+            <a:solidFill>
+              <a:srgbClr val="00B8D9"/>
+            </a:solidFill>
+            <a:prstDash val="solid"/>
+          </a:ln>
+        </p:spPr>
+        <p:txBody>
+          <a:bodyPr xmlns:a="http://schemas.openxmlformats.org/drawingml/2006/main"/>
+          <a:lstStyle xmlns:a="http://schemas.openxmlformats.org/drawingml/2006/main"/>
+          <a:p xmlns:a="http://schemas.openxmlformats.org/drawingml/2006/main">
+            <a:pPr algn="ctr">
+              <a:defRPr sz="1125" b="1">
+                <a:solidFill>
+                  <a:srgbClr val="06111F"/>
+                </a:solidFill>
+              </a:defRPr>
+            </a:pPr>
+            <a:r>
+              <a:rPr sz="1125" b="1">
+                <a:solidFill>
+                  <a:srgbClr val="06111F"/>
+                </a:solidFill>
+              </a:rPr>
+              <a:t>01</a:t>
+            </a:r>
+          </a:p>
+        </p:txBody>
+      </p:sp>
+      <p:sp>
+        <p:nvSpPr>
+          <p:cNvPr id="38" name="process-step-title-1">
+            <a:extLst xmlns:a="http://schemas.openxmlformats.org/drawingml/2006/main">
+              <a:ext uri="{FF2B5EF4-FFF2-40B4-BE49-F238E27FC236}">
+                <a16:creationId xmlns:a16="http://schemas.microsoft.com/office/drawing/2014/main" id="{65C72DE7-0046-44DB-8E3C-17DE26760D42}"/>
+              </a:ext>
+            </a:extLst>
+          </p:cNvPr>
+          <p:cNvSpPr>
+            <a:spLocks xmlns:a="http://schemas.openxmlformats.org/drawingml/2006/main" noGrp="1"/>
+          </p:cNvSpPr>
+          <p:nvPr/>
+        </p:nvSpPr>
+        <p:spPr>
+          <a:xfrm xmlns:a="http://schemas.openxmlformats.org/drawingml/2006/main">
+            <a:off x="8591550" y="2362200"/>
+            <a:ext cx="2095500" cy="228600"/>
+          </a:xfrm>
+          <a:prstGeom xmlns:a="http://schemas.openxmlformats.org/drawingml/2006/main" prst="rect">
+            <a:avLst/>
+          </a:prstGeom>
+          <a:noFill xmlns:a="http://schemas.openxmlformats.org/drawingml/2006/main"/>
+          <a:ln xmlns:a="http://schemas.openxmlformats.org/drawingml/2006/main" w="0">
+            <a:noFill/>
+            <a:prstDash val="solid"/>
+          </a:ln>
+        </p:spPr>
+        <p:txBody>
+          <a:bodyPr xmlns:a="http://schemas.openxmlformats.org/drawingml/2006/main"/>
+          <a:lstStyle xmlns:a="http://schemas.openxmlformats.org/drawingml/2006/main"/>
+          <a:p xmlns:a="http://schemas.openxmlformats.org/drawingml/2006/main">
+            <a:pPr>
+              <a:defRPr sz="1350" b="1">
+                <a:solidFill>
+                  <a:srgbClr val="FFFFFF"/>
+                </a:solidFill>
+              </a:defRPr>
+            </a:pPr>
+            <a:r>
+              <a:rPr sz="1350" b="1">
+                <a:solidFill>
+                  <a:srgbClr val="FFFFFF"/>
+                </a:solidFill>
+              </a:rPr>
+              <a:t>이슈 등록</a:t>
+            </a:r>
+          </a:p>
+        </p:txBody>
+      </p:sp>
+      <p:sp>
+        <p:nvSpPr>
+          <p:cNvPr id="39" name="process-step-body-1">
+            <a:extLst xmlns:a="http://schemas.openxmlformats.org/drawingml/2006/main">
+              <a:ext uri="{FF2B5EF4-FFF2-40B4-BE49-F238E27FC236}">
+                <a16:creationId xmlns:a16="http://schemas.microsoft.com/office/drawing/2014/main" id="{6EE4C32B-4C91-4A1B-939F-A3093548CFA6}"/>
+              </a:ext>
+            </a:extLst>
+          </p:cNvPr>
+          <p:cNvSpPr>
+            <a:spLocks xmlns:a="http://schemas.openxmlformats.org/drawingml/2006/main" noGrp="1"/>
+          </p:cNvSpPr>
+          <p:nvPr/>
+        </p:nvSpPr>
+        <p:spPr>
+          <a:xfrm xmlns:a="http://schemas.openxmlformats.org/drawingml/2006/main">
+            <a:off x="8591550" y="2619375"/>
+            <a:ext cx="2381250" cy="266700"/>
+          </a:xfrm>
+          <a:prstGeom xmlns:a="http://schemas.openxmlformats.org/drawingml/2006/main" prst="rect">
+            <a:avLst/>
+          </a:prstGeom>
+          <a:noFill xmlns:a="http://schemas.openxmlformats.org/drawingml/2006/main"/>
+          <a:ln xmlns:a="http://schemas.openxmlformats.org/drawingml/2006/main" w="0">
+            <a:noFill/>
+            <a:prstDash val="solid"/>
+          </a:ln>
+        </p:spPr>
+        <p:txBody>
+          <a:bodyPr xmlns:a="http://schemas.openxmlformats.org/drawingml/2006/main"/>
+          <a:lstStyle xmlns:a="http://schemas.openxmlformats.org/drawingml/2006/main"/>
+          <a:p xmlns:a="http://schemas.openxmlformats.org/drawingml/2006/main">
+            <a:pPr>
+              <a:defRPr sz="938">
+                <a:solidFill>
+                  <a:srgbClr val="CBD5E1"/>
+                </a:solidFill>
+              </a:defRPr>
+            </a:pPr>
+            <a:r>
+              <a:rPr sz="938">
+                <a:solidFill>
+                  <a:srgbClr val="CBD5E1"/>
+                </a:solidFill>
+              </a:rPr>
+              <a:t>일정·빌드·QA·퍼블리셔 항목 분류</a:t>
+            </a:r>
+          </a:p>
+        </p:txBody>
+      </p:sp>
+      <p:sp>
+        <p:nvSpPr>
+          <p:cNvPr id="40" name="process-step-2">
+            <a:extLst xmlns:a="http://schemas.openxmlformats.org/drawingml/2006/main">
+              <a:ext uri="{FF2B5EF4-FFF2-40B4-BE49-F238E27FC236}">
+                <a16:creationId xmlns:a16="http://schemas.microsoft.com/office/drawing/2014/main" id="{0843C6C3-C3E5-42FB-80E5-EF0EC09175E0}"/>
+              </a:ext>
+            </a:extLst>
+          </p:cNvPr>
+          <p:cNvSpPr>
+            <a:spLocks xmlns:a="http://schemas.openxmlformats.org/drawingml/2006/main" noGrp="1"/>
+          </p:cNvSpPr>
+          <p:nvPr/>
+        </p:nvSpPr>
+        <p:spPr>
+          <a:xfrm xmlns:a="http://schemas.openxmlformats.org/drawingml/2006/main">
+            <a:off x="7620000" y="3067050"/>
+            <a:ext cx="3714750" cy="704850"/>
+          </a:xfrm>
+          <a:prstGeom xmlns:a="http://schemas.openxmlformats.org/drawingml/2006/main" prst="roundRect">
+            <a:avLst>
+              <a:gd name="adj" fmla="val 10811"/>
+            </a:avLst>
+          </a:prstGeom>
+          <a:solidFill xmlns:a="http://schemas.openxmlformats.org/drawingml/2006/main">
+            <a:srgbClr val="111827"/>
+          </a:solidFill>
+          <a:ln xmlns:a="http://schemas.openxmlformats.org/drawingml/2006/main" w="9525">
+            <a:solidFill>
+              <a:srgbClr val="2F3B55"/>
+            </a:solidFill>
+            <a:prstDash val="solid"/>
+          </a:ln>
+        </p:spPr>
+      </p:sp>
+      <p:sp>
+        <p:nvSpPr>
+          <p:cNvPr id="41" name="process-step-bar-2">
+            <a:extLst xmlns:a="http://schemas.openxmlformats.org/drawingml/2006/main">
+              <a:ext uri="{FF2B5EF4-FFF2-40B4-BE49-F238E27FC236}">
+                <a16:creationId xmlns:a16="http://schemas.microsoft.com/office/drawing/2014/main" id="{A80D8D44-E243-41CA-A4E4-DD81CA5192B6}"/>
+              </a:ext>
+            </a:extLst>
+          </p:cNvPr>
+          <p:cNvSpPr>
+            <a:spLocks xmlns:a="http://schemas.openxmlformats.org/drawingml/2006/main" noGrp="1"/>
+          </p:cNvSpPr>
+          <p:nvPr/>
+        </p:nvSpPr>
+        <p:spPr>
+          <a:xfrm xmlns:a="http://schemas.openxmlformats.org/drawingml/2006/main">
+            <a:off x="7620000" y="3067050"/>
+            <a:ext cx="57150" cy="704850"/>
+          </a:xfrm>
+          <a:prstGeom xmlns:a="http://schemas.openxmlformats.org/drawingml/2006/main" prst="rect">
+            <a:avLst/>
+          </a:prstGeom>
+          <a:solidFill xmlns:a="http://schemas.openxmlformats.org/drawingml/2006/main">
+            <a:srgbClr val="FF6B35"/>
+          </a:solidFill>
+          <a:ln xmlns:a="http://schemas.openxmlformats.org/drawingml/2006/main" w="0">
+            <a:solidFill>
+              <a:srgbClr val="FF6B35"/>
+            </a:solidFill>
+            <a:prstDash val="solid"/>
+          </a:ln>
+        </p:spPr>
+      </p:sp>
+      <p:sp>
+        <p:nvSpPr>
+          <p:cNvPr id="42" name="process-step-no-2">
+            <a:extLst xmlns:a="http://schemas.openxmlformats.org/drawingml/2006/main">
+              <a:ext uri="{FF2B5EF4-FFF2-40B4-BE49-F238E27FC236}">
+                <a16:creationId xmlns:a16="http://schemas.microsoft.com/office/drawing/2014/main" id="{72A1295D-C6B6-4393-BE39-73D24CF06D50}"/>
+              </a:ext>
+            </a:extLst>
+          </p:cNvPr>
+          <p:cNvSpPr>
+            <a:spLocks xmlns:a="http://schemas.openxmlformats.org/drawingml/2006/main" noGrp="1"/>
+          </p:cNvSpPr>
+          <p:nvPr/>
+        </p:nvSpPr>
+        <p:spPr>
+          <a:xfrm xmlns:a="http://schemas.openxmlformats.org/drawingml/2006/main">
+            <a:off x="7848600" y="3238500"/>
+            <a:ext cx="552450" cy="323850"/>
+          </a:xfrm>
+          <a:prstGeom xmlns:a="http://schemas.openxmlformats.org/drawingml/2006/main" prst="roundRect">
+            <a:avLst>
+              <a:gd name="adj" fmla="val 23529"/>
+            </a:avLst>
+          </a:prstGeom>
+          <a:solidFill xmlns:a="http://schemas.openxmlformats.org/drawingml/2006/main">
+            <a:srgbClr val="FF6B35"/>
+          </a:solidFill>
+          <a:ln xmlns:a="http://schemas.openxmlformats.org/drawingml/2006/main" w="9525">
+            <a:solidFill>
+              <a:srgbClr val="FF6B35"/>
+            </a:solidFill>
+            <a:prstDash val="solid"/>
+          </a:ln>
+        </p:spPr>
+        <p:txBody>
+          <a:bodyPr xmlns:a="http://schemas.openxmlformats.org/drawingml/2006/main"/>
+          <a:lstStyle xmlns:a="http://schemas.openxmlformats.org/drawingml/2006/main"/>
+          <a:p xmlns:a="http://schemas.openxmlformats.org/drawingml/2006/main">
+            <a:pPr algn="ctr">
+              <a:defRPr sz="1125" b="1">
+                <a:solidFill>
+                  <a:srgbClr val="FFFFFF"/>
+                </a:solidFill>
+              </a:defRPr>
+            </a:pPr>
+            <a:r>
+              <a:rPr sz="1125" b="1">
+                <a:solidFill>
+                  <a:srgbClr val="FFFFFF"/>
+                </a:solidFill>
+              </a:rPr>
+              <a:t>02</a:t>
+            </a:r>
+          </a:p>
+        </p:txBody>
+      </p:sp>
+      <p:sp>
+        <p:nvSpPr>
+          <p:cNvPr id="43" name="process-step-title-2">
+            <a:extLst xmlns:a="http://schemas.openxmlformats.org/drawingml/2006/main">
+              <a:ext uri="{FF2B5EF4-FFF2-40B4-BE49-F238E27FC236}">
+                <a16:creationId xmlns:a16="http://schemas.microsoft.com/office/drawing/2014/main" id="{06758EF0-4849-45F1-BB65-2BC49EA0ACFB}"/>
+              </a:ext>
+            </a:extLst>
+          </p:cNvPr>
+          <p:cNvSpPr>
+            <a:spLocks xmlns:a="http://schemas.openxmlformats.org/drawingml/2006/main" noGrp="1"/>
+          </p:cNvSpPr>
+          <p:nvPr/>
+        </p:nvSpPr>
+        <p:spPr>
+          <a:xfrm xmlns:a="http://schemas.openxmlformats.org/drawingml/2006/main">
+            <a:off x="8591550" y="3181350"/>
+            <a:ext cx="2095500" cy="228600"/>
+          </a:xfrm>
+          <a:prstGeom xmlns:a="http://schemas.openxmlformats.org/drawingml/2006/main" prst="rect">
+            <a:avLst/>
+          </a:prstGeom>
+          <a:noFill xmlns:a="http://schemas.openxmlformats.org/drawingml/2006/main"/>
+          <a:ln xmlns:a="http://schemas.openxmlformats.org/drawingml/2006/main" w="0">
+            <a:noFill/>
+            <a:prstDash val="solid"/>
+          </a:ln>
+        </p:spPr>
+        <p:txBody>
+          <a:bodyPr xmlns:a="http://schemas.openxmlformats.org/drawingml/2006/main"/>
+          <a:lstStyle xmlns:a="http://schemas.openxmlformats.org/drawingml/2006/main"/>
+          <a:p xmlns:a="http://schemas.openxmlformats.org/drawingml/2006/main">
+            <a:pPr>
+              <a:defRPr sz="1350" b="1">
+                <a:solidFill>
+                  <a:srgbClr val="FFFFFF"/>
+                </a:solidFill>
+              </a:defRPr>
+            </a:pPr>
+            <a:r>
+              <a:rPr sz="1350" b="1">
+                <a:solidFill>
+                  <a:srgbClr val="FFFFFF"/>
+                </a:solidFill>
+              </a:rPr>
+              <a:t>영향도 판단</a:t>
+            </a:r>
+          </a:p>
+        </p:txBody>
+      </p:sp>
+      <p:sp>
+        <p:nvSpPr>
+          <p:cNvPr id="44" name="process-step-body-2">
+            <a:extLst xmlns:a="http://schemas.openxmlformats.org/drawingml/2006/main">
+              <a:ext uri="{FF2B5EF4-FFF2-40B4-BE49-F238E27FC236}">
+                <a16:creationId xmlns:a16="http://schemas.microsoft.com/office/drawing/2014/main" id="{4D73D3B8-2FBA-4D28-882A-29464555190B}"/>
+              </a:ext>
+            </a:extLst>
+          </p:cNvPr>
+          <p:cNvSpPr>
+            <a:spLocks xmlns:a="http://schemas.openxmlformats.org/drawingml/2006/main" noGrp="1"/>
+          </p:cNvSpPr>
+          <p:nvPr/>
+        </p:nvSpPr>
+        <p:spPr>
+          <a:xfrm xmlns:a="http://schemas.openxmlformats.org/drawingml/2006/main">
+            <a:off x="8591550" y="3438525"/>
+            <a:ext cx="2381250" cy="266700"/>
+          </a:xfrm>
+          <a:prstGeom xmlns:a="http://schemas.openxmlformats.org/drawingml/2006/main" prst="rect">
+            <a:avLst/>
+          </a:prstGeom>
+          <a:noFill xmlns:a="http://schemas.openxmlformats.org/drawingml/2006/main"/>
+          <a:ln xmlns:a="http://schemas.openxmlformats.org/drawingml/2006/main" w="0">
+            <a:noFill/>
+            <a:prstDash val="solid"/>
+          </a:ln>
+        </p:spPr>
+        <p:txBody>
+          <a:bodyPr xmlns:a="http://schemas.openxmlformats.org/drawingml/2006/main"/>
+          <a:lstStyle xmlns:a="http://schemas.openxmlformats.org/drawingml/2006/main"/>
+          <a:p xmlns:a="http://schemas.openxmlformats.org/drawingml/2006/main">
+            <a:pPr>
+              <a:defRPr sz="938">
+                <a:solidFill>
+                  <a:srgbClr val="CBD5E1"/>
+                </a:solidFill>
+              </a:defRPr>
+            </a:pPr>
+            <a:r>
+              <a:rPr sz="938">
+                <a:solidFill>
+                  <a:srgbClr val="CBD5E1"/>
+                </a:solidFill>
+              </a:rPr>
+              <a:t>일정·범위·품질 영향도 확인</a:t>
+            </a:r>
+          </a:p>
+        </p:txBody>
+      </p:sp>
+      <p:sp>
+        <p:nvSpPr>
+          <p:cNvPr id="45" name="process-step-3">
+            <a:extLst xmlns:a="http://schemas.openxmlformats.org/drawingml/2006/main">
+              <a:ext uri="{FF2B5EF4-FFF2-40B4-BE49-F238E27FC236}">
+                <a16:creationId xmlns:a16="http://schemas.microsoft.com/office/drawing/2014/main" id="{3C282961-8379-4729-BF6F-53B53D173ECB}"/>
+              </a:ext>
+            </a:extLst>
+          </p:cNvPr>
+          <p:cNvSpPr>
+            <a:spLocks xmlns:a="http://schemas.openxmlformats.org/drawingml/2006/main" noGrp="1"/>
+          </p:cNvSpPr>
+          <p:nvPr/>
+        </p:nvSpPr>
+        <p:spPr>
+          <a:xfrm xmlns:a="http://schemas.openxmlformats.org/drawingml/2006/main">
+            <a:off x="7620000" y="3886200"/>
+            <a:ext cx="3714750" cy="704850"/>
+          </a:xfrm>
+          <a:prstGeom xmlns:a="http://schemas.openxmlformats.org/drawingml/2006/main" prst="roundRect">
+            <a:avLst>
+              <a:gd name="adj" fmla="val 10811"/>
+            </a:avLst>
+          </a:prstGeom>
+          <a:solidFill xmlns:a="http://schemas.openxmlformats.org/drawingml/2006/main">
+            <a:srgbClr val="111827"/>
+          </a:solidFill>
+          <a:ln xmlns:a="http://schemas.openxmlformats.org/drawingml/2006/main" w="9525">
+            <a:solidFill>
+              <a:srgbClr val="2F3B55"/>
+            </a:solidFill>
+            <a:prstDash val="solid"/>
+          </a:ln>
+        </p:spPr>
+      </p:sp>
+      <p:sp>
+        <p:nvSpPr>
+          <p:cNvPr id="46" name="process-step-bar-3">
+            <a:extLst xmlns:a="http://schemas.openxmlformats.org/drawingml/2006/main">
+              <a:ext uri="{FF2B5EF4-FFF2-40B4-BE49-F238E27FC236}">
+                <a16:creationId xmlns:a16="http://schemas.microsoft.com/office/drawing/2014/main" id="{8F5E6589-7A82-48D8-BC4D-84C278D13749}"/>
+              </a:ext>
+            </a:extLst>
+          </p:cNvPr>
+          <p:cNvSpPr>
+            <a:spLocks xmlns:a="http://schemas.openxmlformats.org/drawingml/2006/main" noGrp="1"/>
+          </p:cNvSpPr>
+          <p:nvPr/>
+        </p:nvSpPr>
+        <p:spPr>
+          <a:xfrm xmlns:a="http://schemas.openxmlformats.org/drawingml/2006/main">
+            <a:off x="7620000" y="3886200"/>
+            <a:ext cx="57150" cy="704850"/>
+          </a:xfrm>
+          <a:prstGeom xmlns:a="http://schemas.openxmlformats.org/drawingml/2006/main" prst="rect">
+            <a:avLst/>
+          </a:prstGeom>
+          <a:solidFill xmlns:a="http://schemas.openxmlformats.org/drawingml/2006/main">
+            <a:srgbClr val="7C3AED"/>
+          </a:solidFill>
+          <a:ln xmlns:a="http://schemas.openxmlformats.org/drawingml/2006/main" w="0">
+            <a:solidFill>
+              <a:srgbClr val="7C3AED"/>
+            </a:solidFill>
+            <a:prstDash val="solid"/>
+          </a:ln>
+        </p:spPr>
+      </p:sp>
+      <p:sp>
+        <p:nvSpPr>
+          <p:cNvPr id="47" name="process-step-no-3">
+            <a:extLst xmlns:a="http://schemas.openxmlformats.org/drawingml/2006/main">
+              <a:ext uri="{FF2B5EF4-FFF2-40B4-BE49-F238E27FC236}">
+                <a16:creationId xmlns:a16="http://schemas.microsoft.com/office/drawing/2014/main" id="{23707AA8-D05B-4F71-9317-3F7640B23CB9}"/>
+              </a:ext>
+            </a:extLst>
+          </p:cNvPr>
+          <p:cNvSpPr>
+            <a:spLocks xmlns:a="http://schemas.openxmlformats.org/drawingml/2006/main" noGrp="1"/>
+          </p:cNvSpPr>
+          <p:nvPr/>
+        </p:nvSpPr>
+        <p:spPr>
+          <a:xfrm xmlns:a="http://schemas.openxmlformats.org/drawingml/2006/main">
+            <a:off x="7848600" y="4057650"/>
+            <a:ext cx="552450" cy="323850"/>
+          </a:xfrm>
+          <a:prstGeom xmlns:a="http://schemas.openxmlformats.org/drawingml/2006/main" prst="roundRect">
+            <a:avLst>
+              <a:gd name="adj" fmla="val 23529"/>
+            </a:avLst>
+          </a:prstGeom>
+          <a:solidFill xmlns:a="http://schemas.openxmlformats.org/drawingml/2006/main">
+            <a:srgbClr val="7C3AED"/>
+          </a:solidFill>
+          <a:ln xmlns:a="http://schemas.openxmlformats.org/drawingml/2006/main" w="9525">
+            <a:solidFill>
+              <a:srgbClr val="7C3AED"/>
+            </a:solidFill>
+            <a:prstDash val="solid"/>
+          </a:ln>
+        </p:spPr>
+        <p:txBody>
+          <a:bodyPr xmlns:a="http://schemas.openxmlformats.org/drawingml/2006/main"/>
+          <a:lstStyle xmlns:a="http://schemas.openxmlformats.org/drawingml/2006/main"/>
+          <a:p xmlns:a="http://schemas.openxmlformats.org/drawingml/2006/main">
+            <a:pPr algn="ctr">
+              <a:defRPr sz="1125" b="1">
+                <a:solidFill>
+                  <a:srgbClr val="FFFFFF"/>
+                </a:solidFill>
+              </a:defRPr>
+            </a:pPr>
+            <a:r>
+              <a:rPr sz="1125" b="1">
+                <a:solidFill>
+                  <a:srgbClr val="FFFFFF"/>
+                </a:solidFill>
+              </a:rPr>
+              <a:t>03</a:t>
+            </a:r>
+          </a:p>
+        </p:txBody>
+      </p:sp>
+      <p:sp>
+        <p:nvSpPr>
+          <p:cNvPr id="48" name="process-step-title-3">
+            <a:extLst xmlns:a="http://schemas.openxmlformats.org/drawingml/2006/main">
+              <a:ext uri="{FF2B5EF4-FFF2-40B4-BE49-F238E27FC236}">
+                <a16:creationId xmlns:a16="http://schemas.microsoft.com/office/drawing/2014/main" id="{3C77EEDA-1980-49E6-ACD3-77A8005A4188}"/>
+              </a:ext>
+            </a:extLst>
+          </p:cNvPr>
+          <p:cNvSpPr>
+            <a:spLocks xmlns:a="http://schemas.openxmlformats.org/drawingml/2006/main" noGrp="1"/>
+          </p:cNvSpPr>
+          <p:nvPr/>
+        </p:nvSpPr>
+        <p:spPr>
+          <a:xfrm xmlns:a="http://schemas.openxmlformats.org/drawingml/2006/main">
+            <a:off x="8591550" y="4000500"/>
+            <a:ext cx="2095500" cy="228600"/>
+          </a:xfrm>
+          <a:prstGeom xmlns:a="http://schemas.openxmlformats.org/drawingml/2006/main" prst="rect">
+            <a:avLst/>
+          </a:prstGeom>
+          <a:noFill xmlns:a="http://schemas.openxmlformats.org/drawingml/2006/main"/>
+          <a:ln xmlns:a="http://schemas.openxmlformats.org/drawingml/2006/main" w="0">
+            <a:noFill/>
+            <a:prstDash val="solid"/>
+          </a:ln>
+        </p:spPr>
+        <p:txBody>
+          <a:bodyPr xmlns:a="http://schemas.openxmlformats.org/drawingml/2006/main"/>
+          <a:lstStyle xmlns:a="http://schemas.openxmlformats.org/drawingml/2006/main"/>
+          <a:p xmlns:a="http://schemas.openxmlformats.org/drawingml/2006/main">
+            <a:pPr>
+              <a:defRPr sz="1350" b="1">
+                <a:solidFill>
+                  <a:srgbClr val="FFFFFF"/>
+                </a:solidFill>
+              </a:defRPr>
+            </a:pPr>
+            <a:r>
+              <a:rPr sz="1350" b="1">
+                <a:solidFill>
+                  <a:srgbClr val="FFFFFF"/>
+                </a:solidFill>
+              </a:rPr>
+              <a:t>담당·기한 지정</a:t>
+            </a:r>
+          </a:p>
+        </p:txBody>
+      </p:sp>
+      <p:sp>
+        <p:nvSpPr>
+          <p:cNvPr id="49" name="process-step-body-3">
+            <a:extLst xmlns:a="http://schemas.openxmlformats.org/drawingml/2006/main">
+              <a:ext uri="{FF2B5EF4-FFF2-40B4-BE49-F238E27FC236}">
+                <a16:creationId xmlns:a16="http://schemas.microsoft.com/office/drawing/2014/main" id="{C059B267-FBCE-4BF0-BF7E-89FFA9805957}"/>
+              </a:ext>
+            </a:extLst>
+          </p:cNvPr>
+          <p:cNvSpPr>
+            <a:spLocks xmlns:a="http://schemas.openxmlformats.org/drawingml/2006/main" noGrp="1"/>
+          </p:cNvSpPr>
+          <p:nvPr/>
+        </p:nvSpPr>
+        <p:spPr>
+          <a:xfrm xmlns:a="http://schemas.openxmlformats.org/drawingml/2006/main">
+            <a:off x="8591550" y="4257675"/>
+            <a:ext cx="2381250" cy="266700"/>
+          </a:xfrm>
+          <a:prstGeom xmlns:a="http://schemas.openxmlformats.org/drawingml/2006/main" prst="rect">
+            <a:avLst/>
+          </a:prstGeom>
+          <a:noFill xmlns:a="http://schemas.openxmlformats.org/drawingml/2006/main"/>
+          <a:ln xmlns:a="http://schemas.openxmlformats.org/drawingml/2006/main" w="0">
+            <a:noFill/>
+            <a:prstDash val="solid"/>
+          </a:ln>
+        </p:spPr>
+        <p:txBody>
+          <a:bodyPr xmlns:a="http://schemas.openxmlformats.org/drawingml/2006/main"/>
+          <a:lstStyle xmlns:a="http://schemas.openxmlformats.org/drawingml/2006/main"/>
+          <a:p xmlns:a="http://schemas.openxmlformats.org/drawingml/2006/main">
+            <a:pPr>
+              <a:defRPr sz="938">
+                <a:solidFill>
+                  <a:srgbClr val="CBD5E1"/>
+                </a:solidFill>
+              </a:defRPr>
+            </a:pPr>
+            <a:r>
+              <a:rPr sz="938">
+                <a:solidFill>
+                  <a:srgbClr val="CBD5E1"/>
+                </a:solidFill>
+              </a:rPr>
+              <a:t>개발·QA·퍼블리셔 담당 확정</a:t>
+            </a:r>
+          </a:p>
+        </p:txBody>
+      </p:sp>
+      <p:sp>
+        <p:nvSpPr>
+          <p:cNvPr id="50" name="process-step-4">
+            <a:extLst xmlns:a="http://schemas.openxmlformats.org/drawingml/2006/main">
+              <a:ext uri="{FF2B5EF4-FFF2-40B4-BE49-F238E27FC236}">
+                <a16:creationId xmlns:a16="http://schemas.microsoft.com/office/drawing/2014/main" id="{43B09CBB-AF12-488C-AFFC-C3BCC49D9BB6}"/>
+              </a:ext>
+            </a:extLst>
+          </p:cNvPr>
+          <p:cNvSpPr>
+            <a:spLocks xmlns:a="http://schemas.openxmlformats.org/drawingml/2006/main" noGrp="1"/>
+          </p:cNvSpPr>
+          <p:nvPr/>
+        </p:nvSpPr>
+        <p:spPr>
+          <a:xfrm xmlns:a="http://schemas.openxmlformats.org/drawingml/2006/main">
+            <a:off x="7620000" y="4705350"/>
+            <a:ext cx="3714750" cy="704850"/>
+          </a:xfrm>
+          <a:prstGeom xmlns:a="http://schemas.openxmlformats.org/drawingml/2006/main" prst="roundRect">
+            <a:avLst>
+              <a:gd name="adj" fmla="val 10811"/>
+            </a:avLst>
+          </a:prstGeom>
+          <a:solidFill xmlns:a="http://schemas.openxmlformats.org/drawingml/2006/main">
+            <a:srgbClr val="111827"/>
+          </a:solidFill>
+          <a:ln xmlns:a="http://schemas.openxmlformats.org/drawingml/2006/main" w="9525">
+            <a:solidFill>
+              <a:srgbClr val="2F3B55"/>
+            </a:solidFill>
+            <a:prstDash val="solid"/>
+          </a:ln>
+        </p:spPr>
+      </p:sp>
+      <p:sp>
+        <p:nvSpPr>
+          <p:cNvPr id="51" name="process-step-bar-4">
+            <a:extLst xmlns:a="http://schemas.openxmlformats.org/drawingml/2006/main">
+              <a:ext uri="{FF2B5EF4-FFF2-40B4-BE49-F238E27FC236}">
+                <a16:creationId xmlns:a16="http://schemas.microsoft.com/office/drawing/2014/main" id="{4D0D22F9-D61C-4405-9677-EB6E61EA7517}"/>
+              </a:ext>
+            </a:extLst>
+          </p:cNvPr>
+          <p:cNvSpPr>
+            <a:spLocks xmlns:a="http://schemas.openxmlformats.org/drawingml/2006/main" noGrp="1"/>
+          </p:cNvSpPr>
+          <p:nvPr/>
+        </p:nvSpPr>
+        <p:spPr>
+          <a:xfrm xmlns:a="http://schemas.openxmlformats.org/drawingml/2006/main">
+            <a:off x="7620000" y="4705350"/>
+            <a:ext cx="57150" cy="704850"/>
+          </a:xfrm>
+          <a:prstGeom xmlns:a="http://schemas.openxmlformats.org/drawingml/2006/main" prst="rect">
+            <a:avLst/>
+          </a:prstGeom>
+          <a:solidFill xmlns:a="http://schemas.openxmlformats.org/drawingml/2006/main">
+            <a:srgbClr val="8BD9E8"/>
+          </a:solidFill>
+          <a:ln xmlns:a="http://schemas.openxmlformats.org/drawingml/2006/main" w="0">
+            <a:solidFill>
+              <a:srgbClr val="8BD9E8"/>
+            </a:solidFill>
+            <a:prstDash val="solid"/>
+          </a:ln>
+        </p:spPr>
+      </p:sp>
+      <p:sp>
+        <p:nvSpPr>
+          <p:cNvPr id="52" name="process-step-no-4">
+            <a:extLst xmlns:a="http://schemas.openxmlformats.org/drawingml/2006/main">
+              <a:ext uri="{FF2B5EF4-FFF2-40B4-BE49-F238E27FC236}">
+                <a16:creationId xmlns:a16="http://schemas.microsoft.com/office/drawing/2014/main" id="{ED85CB50-CACA-41A3-B24E-ABCF8ACA5FAE}"/>
+              </a:ext>
+            </a:extLst>
+          </p:cNvPr>
+          <p:cNvSpPr>
+            <a:spLocks xmlns:a="http://schemas.openxmlformats.org/drawingml/2006/main" noGrp="1"/>
+          </p:cNvSpPr>
+          <p:nvPr/>
+        </p:nvSpPr>
+        <p:spPr>
+          <a:xfrm xmlns:a="http://schemas.openxmlformats.org/drawingml/2006/main">
+            <a:off x="7848600" y="4876800"/>
+            <a:ext cx="552450" cy="323850"/>
+          </a:xfrm>
+          <a:prstGeom xmlns:a="http://schemas.openxmlformats.org/drawingml/2006/main" prst="roundRect">
+            <a:avLst>
+              <a:gd name="adj" fmla="val 23529"/>
+            </a:avLst>
+          </a:prstGeom>
+          <a:solidFill xmlns:a="http://schemas.openxmlformats.org/drawingml/2006/main">
+            <a:srgbClr val="8BD9E8"/>
+          </a:solidFill>
+          <a:ln xmlns:a="http://schemas.openxmlformats.org/drawingml/2006/main" w="9525">
+            <a:solidFill>
+              <a:srgbClr val="8BD9E8"/>
+            </a:solidFill>
+            <a:prstDash val="solid"/>
+          </a:ln>
+        </p:spPr>
+        <p:txBody>
+          <a:bodyPr xmlns:a="http://schemas.openxmlformats.org/drawingml/2006/main"/>
+          <a:lstStyle xmlns:a="http://schemas.openxmlformats.org/drawingml/2006/main"/>
+          <a:p xmlns:a="http://schemas.openxmlformats.org/drawingml/2006/main">
+            <a:pPr algn="ctr">
+              <a:defRPr sz="1125" b="1">
+                <a:solidFill>
+                  <a:srgbClr val="FFFFFF"/>
+                </a:solidFill>
+              </a:defRPr>
+            </a:pPr>
+            <a:r>
+              <a:rPr sz="1125" b="1">
+                <a:solidFill>
+                  <a:srgbClr val="FFFFFF"/>
+                </a:solidFill>
+              </a:rPr>
+              <a:t>04</a:t>
+            </a:r>
+          </a:p>
+        </p:txBody>
+      </p:sp>
+      <p:sp>
+        <p:nvSpPr>
+          <p:cNvPr id="53" name="process-step-title-4">
+            <a:extLst xmlns:a="http://schemas.openxmlformats.org/drawingml/2006/main">
+              <a:ext uri="{FF2B5EF4-FFF2-40B4-BE49-F238E27FC236}">
+                <a16:creationId xmlns:a16="http://schemas.microsoft.com/office/drawing/2014/main" id="{8A04F538-988F-4067-956C-9C9A927CBAF1}"/>
+              </a:ext>
+            </a:extLst>
+          </p:cNvPr>
+          <p:cNvSpPr>
+            <a:spLocks xmlns:a="http://schemas.openxmlformats.org/drawingml/2006/main" noGrp="1"/>
+          </p:cNvSpPr>
+          <p:nvPr/>
+        </p:nvSpPr>
+        <p:spPr>
+          <a:xfrm xmlns:a="http://schemas.openxmlformats.org/drawingml/2006/main">
+            <a:off x="8591550" y="4819650"/>
+            <a:ext cx="2095500" cy="228600"/>
+          </a:xfrm>
+          <a:prstGeom xmlns:a="http://schemas.openxmlformats.org/drawingml/2006/main" prst="rect">
+            <a:avLst/>
+          </a:prstGeom>
+          <a:noFill xmlns:a="http://schemas.openxmlformats.org/drawingml/2006/main"/>
+          <a:ln xmlns:a="http://schemas.openxmlformats.org/drawingml/2006/main" w="0">
+            <a:noFill/>
+            <a:prstDash val="solid"/>
+          </a:ln>
+        </p:spPr>
+        <p:txBody>
+          <a:bodyPr xmlns:a="http://schemas.openxmlformats.org/drawingml/2006/main"/>
+          <a:lstStyle xmlns:a="http://schemas.openxmlformats.org/drawingml/2006/main"/>
+          <a:p xmlns:a="http://schemas.openxmlformats.org/drawingml/2006/main">
+            <a:pPr>
+              <a:defRPr sz="1350" b="1">
+                <a:solidFill>
+                  <a:srgbClr val="FFFFFF"/>
+                </a:solidFill>
+              </a:defRPr>
+            </a:pPr>
+            <a:r>
+              <a:rPr sz="1350" b="1">
+                <a:solidFill>
+                  <a:srgbClr val="FFFFFF"/>
+                </a:solidFill>
+              </a:rPr>
+              <a:t>마일스톤 재판정</a:t>
+            </a:r>
+          </a:p>
+        </p:txBody>
+      </p:sp>
+      <p:sp>
+        <p:nvSpPr>
+          <p:cNvPr id="54" name="process-step-body-4">
+            <a:extLst xmlns:a="http://schemas.openxmlformats.org/drawingml/2006/main">
+              <a:ext uri="{FF2B5EF4-FFF2-40B4-BE49-F238E27FC236}">
+                <a16:creationId xmlns:a16="http://schemas.microsoft.com/office/drawing/2014/main" id="{3D7D4080-A6BA-471A-9FD8-748A4521D512}"/>
+              </a:ext>
+            </a:extLst>
+          </p:cNvPr>
+          <p:cNvSpPr>
+            <a:spLocks xmlns:a="http://schemas.openxmlformats.org/drawingml/2006/main" noGrp="1"/>
+          </p:cNvSpPr>
+          <p:nvPr/>
+        </p:nvSpPr>
+        <p:spPr>
+          <a:xfrm xmlns:a="http://schemas.openxmlformats.org/drawingml/2006/main">
+            <a:off x="8591550" y="5076825"/>
+            <a:ext cx="2381250" cy="266700"/>
+          </a:xfrm>
+          <a:prstGeom xmlns:a="http://schemas.openxmlformats.org/drawingml/2006/main" prst="rect">
+            <a:avLst/>
+          </a:prstGeom>
+          <a:noFill xmlns:a="http://schemas.openxmlformats.org/drawingml/2006/main"/>
+          <a:ln xmlns:a="http://schemas.openxmlformats.org/drawingml/2006/main" w="0">
+            <a:noFill/>
+            <a:prstDash val="solid"/>
+          </a:ln>
+        </p:spPr>
+        <p:txBody>
+          <a:bodyPr xmlns:a="http://schemas.openxmlformats.org/drawingml/2006/main"/>
+          <a:lstStyle xmlns:a="http://schemas.openxmlformats.org/drawingml/2006/main"/>
+          <a:p xmlns:a="http://schemas.openxmlformats.org/drawingml/2006/main">
+            <a:pPr>
+              <a:defRPr sz="938">
+                <a:solidFill>
+                  <a:srgbClr val="CBD5E1"/>
+                </a:solidFill>
+              </a:defRPr>
+            </a:pPr>
+            <a:r>
+              <a:rPr sz="938">
+                <a:solidFill>
+                  <a:srgbClr val="CBD5E1"/>
+                </a:solidFill>
+              </a:rPr>
+              <a:t>해결·보류·제외 기준 정리</a:t>
+            </a:r>
+          </a:p>
+        </p:txBody>
+      </p:sp>
+      <p:sp>
+        <p:nvSpPr>
+          <p:cNvPr id="55" name="risk-principle-panel">
+            <a:extLst xmlns:a="http://schemas.openxmlformats.org/drawingml/2006/main">
+              <a:ext uri="{FF2B5EF4-FFF2-40B4-BE49-F238E27FC236}">
+                <a16:creationId xmlns:a16="http://schemas.microsoft.com/office/drawing/2014/main" id="{7FFE48EA-70D0-46E9-BAD0-D27FA47B54F8}"/>
+              </a:ext>
+            </a:extLst>
+          </p:cNvPr>
+          <p:cNvSpPr>
+            <a:spLocks xmlns:a="http://schemas.openxmlformats.org/drawingml/2006/main" noGrp="1"/>
+          </p:cNvSpPr>
+          <p:nvPr/>
+        </p:nvSpPr>
+        <p:spPr>
+          <a:xfrm xmlns:a="http://schemas.openxmlformats.org/drawingml/2006/main">
+            <a:off x="514350" y="5791200"/>
+            <a:ext cx="10877550" cy="419100"/>
+          </a:xfrm>
+          <a:prstGeom xmlns:a="http://schemas.openxmlformats.org/drawingml/2006/main" prst="roundRect">
+            <a:avLst>
+              <a:gd name="adj" fmla="val 18182"/>
+            </a:avLst>
+          </a:prstGeom>
+          <a:solidFill xmlns:a="http://schemas.openxmlformats.org/drawingml/2006/main">
+            <a:srgbClr val="10192E"/>
+          </a:solidFill>
+          <a:ln xmlns:a="http://schemas.openxmlformats.org/drawingml/2006/main" w="9525">
+            <a:solidFill>
+              <a:srgbClr val="22304E"/>
+            </a:solidFill>
+            <a:prstDash val="solid"/>
+          </a:ln>
+        </p:spPr>
+      </p:sp>
+      <p:sp>
+        <p:nvSpPr>
+          <p:cNvPr id="56" name="risk-principle-label">
+            <a:extLst xmlns:a="http://schemas.openxmlformats.org/drawingml/2006/main">
+              <a:ext uri="{FF2B5EF4-FFF2-40B4-BE49-F238E27FC236}">
+                <a16:creationId xmlns:a16="http://schemas.microsoft.com/office/drawing/2014/main" id="{C722B008-8634-43F1-89FC-CA63AB240F71}"/>
+              </a:ext>
+            </a:extLst>
+          </p:cNvPr>
+          <p:cNvSpPr>
+            <a:spLocks xmlns:a="http://schemas.openxmlformats.org/drawingml/2006/main" noGrp="1"/>
+          </p:cNvSpPr>
+          <p:nvPr/>
+        </p:nvSpPr>
+        <p:spPr>
+          <a:xfrm xmlns:a="http://schemas.openxmlformats.org/drawingml/2006/main">
+            <a:off x="781050" y="5905500"/>
+            <a:ext cx="1143000" cy="209550"/>
+          </a:xfrm>
+          <a:prstGeom xmlns:a="http://schemas.openxmlformats.org/drawingml/2006/main" prst="rect">
+            <a:avLst/>
+          </a:prstGeom>
+          <a:noFill xmlns:a="http://schemas.openxmlformats.org/drawingml/2006/main"/>
+          <a:ln xmlns:a="http://schemas.openxmlformats.org/drawingml/2006/main" w="0">
+            <a:noFill/>
+            <a:prstDash val="solid"/>
+          </a:ln>
+        </p:spPr>
+        <p:txBody>
+          <a:bodyPr xmlns:a="http://schemas.openxmlformats.org/drawingml/2006/main"/>
+          <a:lstStyle xmlns:a="http://schemas.openxmlformats.org/drawingml/2006/main"/>
+          <a:p xmlns:a="http://schemas.openxmlformats.org/drawingml/2006/main">
+            <a:pPr>
+              <a:defRPr sz="1200" b="1">
+                <a:solidFill>
+                  <a:srgbClr val="8BD9E8"/>
+                </a:solidFill>
+              </a:defRPr>
+            </a:pPr>
+            <a:r>
+              <a:rPr sz="1200" b="1">
+                <a:solidFill>
+                  <a:srgbClr val="8BD9E8"/>
+                </a:solidFill>
+              </a:rPr>
+              <a:t>PM 역할</a:t>
+            </a:r>
+          </a:p>
+        </p:txBody>
+      </p:sp>
+      <p:sp>
+        <p:nvSpPr>
+          <p:cNvPr id="57" name="risk-principle-body">
+            <a:extLst xmlns:a="http://schemas.openxmlformats.org/drawingml/2006/main">
+              <a:ext uri="{FF2B5EF4-FFF2-40B4-BE49-F238E27FC236}">
+                <a16:creationId xmlns:a16="http://schemas.microsoft.com/office/drawing/2014/main" id="{9B515F3A-9ABC-42BC-BBEA-78033A6B69E7}"/>
+              </a:ext>
+            </a:extLst>
+          </p:cNvPr>
+          <p:cNvSpPr>
+            <a:spLocks xmlns:a="http://schemas.openxmlformats.org/drawingml/2006/main" noGrp="1"/>
+          </p:cNvSpPr>
+          <p:nvPr/>
+        </p:nvSpPr>
+        <p:spPr>
+          <a:xfrm xmlns:a="http://schemas.openxmlformats.org/drawingml/2006/main">
+            <a:off x="1962150" y="5905500"/>
+            <a:ext cx="8096250" cy="209550"/>
+          </a:xfrm>
+          <a:prstGeom xmlns:a="http://schemas.openxmlformats.org/drawingml/2006/main" prst="rect">
+            <a:avLst/>
+          </a:prstGeom>
+          <a:noFill xmlns:a="http://schemas.openxmlformats.org/drawingml/2006/main"/>
+          <a:ln xmlns:a="http://schemas.openxmlformats.org/drawingml/2006/main" w="0">
+            <a:noFill/>
+            <a:prstDash val="solid"/>
+          </a:ln>
+        </p:spPr>
+        <p:txBody>
+          <a:bodyPr xmlns:a="http://schemas.openxmlformats.org/drawingml/2006/main"/>
+          <a:lstStyle xmlns:a="http://schemas.openxmlformats.org/drawingml/2006/main"/>
+          <a:p xmlns:a="http://schemas.openxmlformats.org/drawingml/2006/main">
+            <a:pPr>
+              <a:defRPr sz="1125">
+                <a:solidFill>
+                  <a:srgbClr val="FFFFFF"/>
+                </a:solidFill>
+              </a:defRPr>
+            </a:pPr>
+            <a:r>
+              <a:rPr sz="1125">
+                <a:solidFill>
+                  <a:srgbClr val="FFFFFF"/>
+                </a:solidFill>
+              </a:rPr>
+              <a:t>리스크를 직접 해결하기보다, 일정·버전·이슈를 의사결정 가능한 상태로 정리하는 것이 핵심입니다.</a:t>
+            </a:r>
+          </a:p>
+        </p:txBody>
+      </p:sp>
+    </p:spTree>
+    <p:extLst>
+      <p:ext uri="{BB962C8B-B14F-4D97-AF65-F5344CB8AC3E}">
+        <p14:creationId xmlns:p14="http://schemas.microsoft.com/office/powerpoint/2010/main" val="907856749"/>
       </p:ext>
     </p:extLst>
   </p:cSld>

--- a/outputs/HIT2_일본_런칭_6개월전_로드맵_초안.pptx
+++ b/outputs/HIT2_일본_런칭_6개월전_로드맵_초안.pptx
@@ -2,16 +2,17 @@
 <file path=ppt/presentation.xml><?xml version="1.0" encoding="utf-8"?>
 <p:presentation xmlns:p="http://schemas.openxmlformats.org/presentationml/2006/main">
   <p:sldMasterIdLst>
-    <p:sldMasterId xmlns:r="http://schemas.openxmlformats.org/officeDocument/2006/relationships" id="2147483648" r:id="Re2abd73a81de496d"/>
+    <p:sldMasterId xmlns:r="http://schemas.openxmlformats.org/officeDocument/2006/relationships" id="2147483648" r:id="R0f4e2906c5564482"/>
   </p:sldMasterIdLst>
   <p:notesMasterIdLst>
-    <p:notesMasterId xmlns:r="http://schemas.openxmlformats.org/officeDocument/2006/relationships" r:id="Rbbabfd3ada2b443a"/>
+    <p:notesMasterId xmlns:r="http://schemas.openxmlformats.org/officeDocument/2006/relationships" r:id="R018a978c719e42bc"/>
   </p:notesMasterIdLst>
   <p:sldIdLst>
-    <p:sldId xmlns:r="http://schemas.openxmlformats.org/officeDocument/2006/relationships" id="256" r:id="R024cdb1efd834df7"/>
-    <p:sldId xmlns:r="http://schemas.openxmlformats.org/officeDocument/2006/relationships" id="257" r:id="R2dc7314c8eb643cc"/>
-    <p:sldId xmlns:r="http://schemas.openxmlformats.org/officeDocument/2006/relationships" id="258" r:id="Rcc906091a5b44633"/>
-    <p:sldId xmlns:r="http://schemas.openxmlformats.org/officeDocument/2006/relationships" id="259" r:id="R02074470234f403d"/>
+    <p:sldId xmlns:r="http://schemas.openxmlformats.org/officeDocument/2006/relationships" id="256" r:id="R0b4de0f0eb014910"/>
+    <p:sldId xmlns:r="http://schemas.openxmlformats.org/officeDocument/2006/relationships" id="257" r:id="R59024428d4db44eb"/>
+    <p:sldId xmlns:r="http://schemas.openxmlformats.org/officeDocument/2006/relationships" id="258" r:id="Rd386ec5c90b04c2e"/>
+    <p:sldId xmlns:r="http://schemas.openxmlformats.org/officeDocument/2006/relationships" id="259" r:id="Rdee226c7bc5f4471"/>
+    <p:sldId xmlns:r="http://schemas.openxmlformats.org/officeDocument/2006/relationships" id="260" r:id="Rbaca3daf6c3f4a45"/>
   </p:sldIdLst>
   <p:sldSz cx="12192000" cy="6858000"/>
   <p:notesSz cx="6858000" cy="9144000"/>
@@ -764,6 +765,72 @@
 </p:notes>
 </file>
 
+<file path=ppt/notesSlides/notesSlide5.xml><?xml version="1.0" encoding="utf-8"?>
+<p:notes xmlns:p="http://schemas.openxmlformats.org/presentationml/2006/main">
+  <p:cSld>
+    <p:spTree>
+      <p:nvGrpSpPr>
+        <p:cNvPr id="1" name=""/>
+        <p:cNvGrpSpPr/>
+        <p:nvPr/>
+      </p:nvGrpSpPr>
+      <p:grpSpPr>
+        <a:xfrm xmlns:a="http://schemas.openxmlformats.org/drawingml/2006/main"/>
+      </p:grpSpPr>
+      <p:sp>
+        <p:nvSpPr>
+          <p:cNvPr id="2" name="Slide Image Placeholder 1"/>
+          <p:cNvSpPr>
+            <a:spLocks xmlns:a="http://schemas.openxmlformats.org/drawingml/2006/main" noGrp="1"/>
+          </p:cNvSpPr>
+          <p:nvPr>
+            <p:ph type="sldImg" idx="0"/>
+          </p:nvPr>
+        </p:nvSpPr>
+        <p:spPr/>
+      </p:sp>
+      <p:sp>
+        <p:nvSpPr>
+          <p:cNvPr id="3" name="Notes Placeholder 2"/>
+          <p:cNvSpPr>
+            <a:spLocks xmlns:a="http://schemas.openxmlformats.org/drawingml/2006/main" noGrp="1"/>
+          </p:cNvSpPr>
+          <p:nvPr>
+            <p:ph type="body" idx="1"/>
+          </p:nvPr>
+        </p:nvSpPr>
+        <p:spPr/>
+        <p:txBody>
+          <a:bodyPr xmlns:a="http://schemas.openxmlformats.org/drawingml/2006/main"/>
+          <a:lstStyle xmlns:a="http://schemas.openxmlformats.org/drawingml/2006/main"/>
+          <a:p xmlns:a="http://schemas.openxmlformats.org/drawingml/2006/main"/>
+        </p:txBody>
+      </p:sp>
+      <p:sp>
+        <p:nvSpPr>
+          <p:cNvPr id="4" name="Slide Number Placeholder 3"/>
+          <p:cNvSpPr>
+            <a:spLocks xmlns:a="http://schemas.openxmlformats.org/drawingml/2006/main" noGrp="1"/>
+          </p:cNvSpPr>
+          <p:nvPr>
+            <p:ph type="sldNum" idx="5"/>
+          </p:nvPr>
+        </p:nvSpPr>
+        <p:spPr/>
+        <p:txBody>
+          <a:bodyPr xmlns:a="http://schemas.openxmlformats.org/drawingml/2006/main"/>
+          <a:lstStyle xmlns:a="http://schemas.openxmlformats.org/drawingml/2006/main"/>
+          <a:p xmlns:a="http://schemas.openxmlformats.org/drawingml/2006/main"/>
+        </p:txBody>
+      </p:sp>
+    </p:spTree>
+  </p:cSld>
+  <p:clrMapOvr>
+    <a:masterClrMapping xmlns:a="http://schemas.openxmlformats.org/drawingml/2006/main"/>
+  </p:clrMapOvr>
+</p:notes>
+</file>
+
 <file path=ppt/slideLayouts/slideLayout1.xml><?xml version="1.0" encoding="utf-8"?>
 <p:sldLayout xmlns:p="http://schemas.openxmlformats.org/presentationml/2006/main" type="title">
   <p:cSld name="Title Slide">
@@ -802,7 +869,7 @@
   </p:cSld>
   <p:clrMap bg1="lt1" tx1="dk1" bg2="lt2" tx2="dk2" accent1="accent1" accent2="accent2" accent3="accent3" accent4="accent4" accent5="accent5" accent6="accent6" hlink="hlink" folHlink="folHlink"/>
   <p:sldLayoutIdLst>
-    <p:sldLayoutId xmlns:r="http://schemas.openxmlformats.org/officeDocument/2006/relationships" id="2147483649" r:id="Re05a8c3bde804376"/>
+    <p:sldLayoutId xmlns:r="http://schemas.openxmlformats.org/officeDocument/2006/relationships" id="2147483649" r:id="R2886663c659b4dea"/>
   </p:sldLayoutIdLst>
   <p:txStyles>
     <p:titleStyle>
@@ -1353,7 +1420,7 @@
           <p:cNvPr id="1" name="top-accent">
             <a:extLst xmlns:a="http://schemas.openxmlformats.org/drawingml/2006/main">
               <a:ext uri="{FF2B5EF4-FFF2-40B4-BE49-F238E27FC236}">
-                <a16:creationId xmlns:a16="http://schemas.microsoft.com/office/drawing/2014/main" id="{EF6E871E-54F0-46E6-8632-C6221EA04BE9}"/>
+                <a16:creationId xmlns:a16="http://schemas.microsoft.com/office/drawing/2014/main" id="{D525A329-662B-4E1E-879A-47558BA40F59}"/>
               </a:ext>
             </a:extLst>
           </p:cNvPr>
@@ -1386,7 +1453,7 @@
           <p:cNvPr id="2" name="left-accent">
             <a:extLst xmlns:a="http://schemas.openxmlformats.org/drawingml/2006/main">
               <a:ext uri="{FF2B5EF4-FFF2-40B4-BE49-F238E27FC236}">
-                <a16:creationId xmlns:a16="http://schemas.microsoft.com/office/drawing/2014/main" id="{3A14BE7F-9051-4111-8876-2915016BCA97}"/>
+                <a16:creationId xmlns:a16="http://schemas.microsoft.com/office/drawing/2014/main" id="{C3736106-017C-465F-8141-4605B34D8EE3}"/>
               </a:ext>
             </a:extLst>
           </p:cNvPr>
@@ -1419,7 +1486,7 @@
           <p:cNvPr id="3" name="eyebrow">
             <a:extLst xmlns:a="http://schemas.openxmlformats.org/drawingml/2006/main">
               <a:ext uri="{FF2B5EF4-FFF2-40B4-BE49-F238E27FC236}">
-                <a16:creationId xmlns:a16="http://schemas.microsoft.com/office/drawing/2014/main" id="{C32C1A1C-5FFC-41B9-A302-1295D55D94DB}"/>
+                <a16:creationId xmlns:a16="http://schemas.microsoft.com/office/drawing/2014/main" id="{0997F52B-B956-4F75-8395-E67F44EE76BA}"/>
               </a:ext>
             </a:extLst>
           </p:cNvPr>
@@ -1469,7 +1536,7 @@
           <p:cNvPr id="4" name="footer">
             <a:extLst xmlns:a="http://schemas.openxmlformats.org/drawingml/2006/main">
               <a:ext uri="{FF2B5EF4-FFF2-40B4-BE49-F238E27FC236}">
-                <a16:creationId xmlns:a16="http://schemas.microsoft.com/office/drawing/2014/main" id="{FD5DD82E-E3DB-4FEB-9FCB-F5EA6BE73D10}"/>
+                <a16:creationId xmlns:a16="http://schemas.microsoft.com/office/drawing/2014/main" id="{6402F021-522B-4B59-8F67-3216470FFFBC}"/>
               </a:ext>
             </a:extLst>
           </p:cNvPr>
@@ -1519,7 +1586,7 @@
           <p:cNvPr id="5" name="page-no">
             <a:extLst xmlns:a="http://schemas.openxmlformats.org/drawingml/2006/main">
               <a:ext uri="{FF2B5EF4-FFF2-40B4-BE49-F238E27FC236}">
-                <a16:creationId xmlns:a16="http://schemas.microsoft.com/office/drawing/2014/main" id="{CA3927E2-ED2A-4F33-A815-A4799442B53B}"/>
+                <a16:creationId xmlns:a16="http://schemas.microsoft.com/office/drawing/2014/main" id="{E5CCAA25-2851-4E1E-9BD1-9AC235830C51}"/>
               </a:ext>
             </a:extLst>
           </p:cNvPr>
@@ -1569,7 +1636,7 @@
           <p:cNvPr id="6" name="hero-panel">
             <a:extLst xmlns:a="http://schemas.openxmlformats.org/drawingml/2006/main">
               <a:ext uri="{FF2B5EF4-FFF2-40B4-BE49-F238E27FC236}">
-                <a16:creationId xmlns:a16="http://schemas.microsoft.com/office/drawing/2014/main" id="{B5FF9048-4163-4B0B-93C6-B38C81DB7D1D}"/>
+                <a16:creationId xmlns:a16="http://schemas.microsoft.com/office/drawing/2014/main" id="{A1DF9B5C-4AB8-410D-A72E-781621CE4CBA}"/>
               </a:ext>
             </a:extLst>
           </p:cNvPr>
@@ -1602,7 +1669,7 @@
           <p:cNvPr id="7" name="hero-kicker">
             <a:extLst xmlns:a="http://schemas.openxmlformats.org/drawingml/2006/main">
               <a:ext uri="{FF2B5EF4-FFF2-40B4-BE49-F238E27FC236}">
-                <a16:creationId xmlns:a16="http://schemas.microsoft.com/office/drawing/2014/main" id="{4B3D6365-598D-4C53-A782-0DDE18628968}"/>
+                <a16:creationId xmlns:a16="http://schemas.microsoft.com/office/drawing/2014/main" id="{C7D75EF8-8865-483C-8B2D-065E94DA65DD}"/>
               </a:ext>
             </a:extLst>
           </p:cNvPr>
@@ -1652,7 +1719,7 @@
           <p:cNvPr id="8" name="hero-title">
             <a:extLst xmlns:a="http://schemas.openxmlformats.org/drawingml/2006/main">
               <a:ext uri="{FF2B5EF4-FFF2-40B4-BE49-F238E27FC236}">
-                <a16:creationId xmlns:a16="http://schemas.microsoft.com/office/drawing/2014/main" id="{ADDCD46F-298C-4890-A394-6DEB66135A7D}"/>
+                <a16:creationId xmlns:a16="http://schemas.microsoft.com/office/drawing/2014/main" id="{2069AD49-0885-4AFC-ACAF-1FFE22298F2D}"/>
               </a:ext>
             </a:extLst>
           </p:cNvPr>
@@ -1702,7 +1769,7 @@
           <p:cNvPr id="9" name="hero-subtitle">
             <a:extLst xmlns:a="http://schemas.openxmlformats.org/drawingml/2006/main">
               <a:ext uri="{FF2B5EF4-FFF2-40B4-BE49-F238E27FC236}">
-                <a16:creationId xmlns:a16="http://schemas.microsoft.com/office/drawing/2014/main" id="{B2035ACF-A406-4B83-8FC5-790E60FECC20}"/>
+                <a16:creationId xmlns:a16="http://schemas.microsoft.com/office/drawing/2014/main" id="{D7D1E961-57F8-4862-820D-D0D41A6BCC41}"/>
               </a:ext>
             </a:extLst>
           </p:cNvPr>
@@ -1752,7 +1819,7 @@
           <p:cNvPr id="10" name="tag-1">
             <a:extLst xmlns:a="http://schemas.openxmlformats.org/drawingml/2006/main">
               <a:ext uri="{FF2B5EF4-FFF2-40B4-BE49-F238E27FC236}">
-                <a16:creationId xmlns:a16="http://schemas.microsoft.com/office/drawing/2014/main" id="{CF57E612-CB17-4AD0-8089-6E513D93C944}"/>
+                <a16:creationId xmlns:a16="http://schemas.microsoft.com/office/drawing/2014/main" id="{7271F69F-6372-4D92-938C-012638DF5290}"/>
               </a:ext>
             </a:extLst>
           </p:cNvPr>
@@ -1808,7 +1875,7 @@
           <p:cNvPr id="11" name="tag-2">
             <a:extLst xmlns:a="http://schemas.openxmlformats.org/drawingml/2006/main">
               <a:ext uri="{FF2B5EF4-FFF2-40B4-BE49-F238E27FC236}">
-                <a16:creationId xmlns:a16="http://schemas.microsoft.com/office/drawing/2014/main" id="{24F0C8BB-A82A-4004-849C-D4BF74FA91B4}"/>
+                <a16:creationId xmlns:a16="http://schemas.microsoft.com/office/drawing/2014/main" id="{13006991-AB93-4AFF-AD33-51054B86942C}"/>
               </a:ext>
             </a:extLst>
           </p:cNvPr>
@@ -1864,7 +1931,7 @@
           <p:cNvPr id="12" name="tag-3">
             <a:extLst xmlns:a="http://schemas.openxmlformats.org/drawingml/2006/main">
               <a:ext uri="{FF2B5EF4-FFF2-40B4-BE49-F238E27FC236}">
-                <a16:creationId xmlns:a16="http://schemas.microsoft.com/office/drawing/2014/main" id="{54D690C4-BCBD-4C88-A91C-A0CF61AFFA22}"/>
+                <a16:creationId xmlns:a16="http://schemas.microsoft.com/office/drawing/2014/main" id="{5D81AF81-23E5-403A-86BD-3DC97EB1499D}"/>
               </a:ext>
             </a:extLst>
           </p:cNvPr>
@@ -1920,7 +1987,7 @@
           <p:cNvPr id="13" name="scope-title">
             <a:extLst xmlns:a="http://schemas.openxmlformats.org/drawingml/2006/main">
               <a:ext uri="{FF2B5EF4-FFF2-40B4-BE49-F238E27FC236}">
-                <a16:creationId xmlns:a16="http://schemas.microsoft.com/office/drawing/2014/main" id="{E2FD3ADC-F90D-4E4B-A9F3-78846F15D4D1}"/>
+                <a16:creationId xmlns:a16="http://schemas.microsoft.com/office/drawing/2014/main" id="{6E54867F-4036-471B-B990-F9FE15985109}"/>
               </a:ext>
             </a:extLst>
           </p:cNvPr>
@@ -1970,7 +2037,7 @@
           <p:cNvPr id="14" name="scope-note">
             <a:extLst xmlns:a="http://schemas.openxmlformats.org/drawingml/2006/main">
               <a:ext uri="{FF2B5EF4-FFF2-40B4-BE49-F238E27FC236}">
-                <a16:creationId xmlns:a16="http://schemas.microsoft.com/office/drawing/2014/main" id="{67DB9ADC-84EC-4214-8A32-A95E83F163AD}"/>
+                <a16:creationId xmlns:a16="http://schemas.microsoft.com/office/drawing/2014/main" id="{E2D34601-1E73-4F19-8786-DF5D1D6A3FBC}"/>
               </a:ext>
             </a:extLst>
           </p:cNvPr>
@@ -2020,7 +2087,7 @@
           <p:cNvPr id="15" name="scope-row-1">
             <a:extLst xmlns:a="http://schemas.openxmlformats.org/drawingml/2006/main">
               <a:ext uri="{FF2B5EF4-FFF2-40B4-BE49-F238E27FC236}">
-                <a16:creationId xmlns:a16="http://schemas.microsoft.com/office/drawing/2014/main" id="{4C12610D-4C0A-4214-A87F-4CE4CFCC5388}"/>
+                <a16:creationId xmlns:a16="http://schemas.microsoft.com/office/drawing/2014/main" id="{D901AC89-D41E-4707-96A9-09350985BD60}"/>
               </a:ext>
             </a:extLst>
           </p:cNvPr>
@@ -2053,7 +2120,7 @@
           <p:cNvPr id="16" name="scope-label-1">
             <a:extLst xmlns:a="http://schemas.openxmlformats.org/drawingml/2006/main">
               <a:ext uri="{FF2B5EF4-FFF2-40B4-BE49-F238E27FC236}">
-                <a16:creationId xmlns:a16="http://schemas.microsoft.com/office/drawing/2014/main" id="{335F205F-678E-4644-BF6F-DFF2B1A0CB01}"/>
+                <a16:creationId xmlns:a16="http://schemas.microsoft.com/office/drawing/2014/main" id="{20E3B0BB-46D1-4EFB-8251-6CE6F500FCF9}"/>
               </a:ext>
             </a:extLst>
           </p:cNvPr>
@@ -2103,7 +2170,7 @@
           <p:cNvPr id="17" name="scope-value-1">
             <a:extLst xmlns:a="http://schemas.openxmlformats.org/drawingml/2006/main">
               <a:ext uri="{FF2B5EF4-FFF2-40B4-BE49-F238E27FC236}">
-                <a16:creationId xmlns:a16="http://schemas.microsoft.com/office/drawing/2014/main" id="{00DBFD1A-EB29-4725-B716-FAFE3197E388}"/>
+                <a16:creationId xmlns:a16="http://schemas.microsoft.com/office/drawing/2014/main" id="{7DCE4F36-59BA-4B61-B892-32722182660B}"/>
               </a:ext>
             </a:extLst>
           </p:cNvPr>
@@ -2153,7 +2220,7 @@
           <p:cNvPr id="18" name="scope-row-2">
             <a:extLst xmlns:a="http://schemas.openxmlformats.org/drawingml/2006/main">
               <a:ext uri="{FF2B5EF4-FFF2-40B4-BE49-F238E27FC236}">
-                <a16:creationId xmlns:a16="http://schemas.microsoft.com/office/drawing/2014/main" id="{E2C42690-E149-4D87-BB53-D4C433F83DEF}"/>
+                <a16:creationId xmlns:a16="http://schemas.microsoft.com/office/drawing/2014/main" id="{E1C394BD-43EC-437D-8F0C-92DB4DDBC204}"/>
               </a:ext>
             </a:extLst>
           </p:cNvPr>
@@ -2186,7 +2253,7 @@
           <p:cNvPr id="19" name="scope-label-2">
             <a:extLst xmlns:a="http://schemas.openxmlformats.org/drawingml/2006/main">
               <a:ext uri="{FF2B5EF4-FFF2-40B4-BE49-F238E27FC236}">
-                <a16:creationId xmlns:a16="http://schemas.microsoft.com/office/drawing/2014/main" id="{7564D172-F2AA-47A5-B310-FB14808851A8}"/>
+                <a16:creationId xmlns:a16="http://schemas.microsoft.com/office/drawing/2014/main" id="{63A94C3C-9B5D-42BB-9BDB-9C3E5EDD72B2}"/>
               </a:ext>
             </a:extLst>
           </p:cNvPr>
@@ -2236,7 +2303,7 @@
           <p:cNvPr id="20" name="scope-value-2">
             <a:extLst xmlns:a="http://schemas.openxmlformats.org/drawingml/2006/main">
               <a:ext uri="{FF2B5EF4-FFF2-40B4-BE49-F238E27FC236}">
-                <a16:creationId xmlns:a16="http://schemas.microsoft.com/office/drawing/2014/main" id="{72CE553D-A5A4-460B-A0A0-645FA4F87452}"/>
+                <a16:creationId xmlns:a16="http://schemas.microsoft.com/office/drawing/2014/main" id="{8A8C55C6-C1E1-4B2B-BAE3-AB2BF93CFE2F}"/>
               </a:ext>
             </a:extLst>
           </p:cNvPr>
@@ -2286,7 +2353,7 @@
           <p:cNvPr id="21" name="scope-row-3">
             <a:extLst xmlns:a="http://schemas.openxmlformats.org/drawingml/2006/main">
               <a:ext uri="{FF2B5EF4-FFF2-40B4-BE49-F238E27FC236}">
-                <a16:creationId xmlns:a16="http://schemas.microsoft.com/office/drawing/2014/main" id="{B667751D-BD09-406F-99F1-722EEC65EB80}"/>
+                <a16:creationId xmlns:a16="http://schemas.microsoft.com/office/drawing/2014/main" id="{645D2397-DC14-4A9E-AA68-00AB23387FAF}"/>
               </a:ext>
             </a:extLst>
           </p:cNvPr>
@@ -2319,7 +2386,7 @@
           <p:cNvPr id="22" name="scope-label-3">
             <a:extLst xmlns:a="http://schemas.openxmlformats.org/drawingml/2006/main">
               <a:ext uri="{FF2B5EF4-FFF2-40B4-BE49-F238E27FC236}">
-                <a16:creationId xmlns:a16="http://schemas.microsoft.com/office/drawing/2014/main" id="{2F87E506-3350-4812-A89B-23CE9E6A589D}"/>
+                <a16:creationId xmlns:a16="http://schemas.microsoft.com/office/drawing/2014/main" id="{3ED07AB6-ADDE-4E94-B3E4-B82B3C36CA14}"/>
               </a:ext>
             </a:extLst>
           </p:cNvPr>
@@ -2369,7 +2436,7 @@
           <p:cNvPr id="23" name="scope-value-3">
             <a:extLst xmlns:a="http://schemas.openxmlformats.org/drawingml/2006/main">
               <a:ext uri="{FF2B5EF4-FFF2-40B4-BE49-F238E27FC236}">
-                <a16:creationId xmlns:a16="http://schemas.microsoft.com/office/drawing/2014/main" id="{536D4063-A103-4223-ABBD-5BE69D1DAD6B}"/>
+                <a16:creationId xmlns:a16="http://schemas.microsoft.com/office/drawing/2014/main" id="{EAFE7E26-A785-4A0B-BA21-BA4EB41C5317}"/>
               </a:ext>
             </a:extLst>
           </p:cNvPr>
@@ -2419,7 +2486,7 @@
           <p:cNvPr id="24" name="scope-row-4">
             <a:extLst xmlns:a="http://schemas.openxmlformats.org/drawingml/2006/main">
               <a:ext uri="{FF2B5EF4-FFF2-40B4-BE49-F238E27FC236}">
-                <a16:creationId xmlns:a16="http://schemas.microsoft.com/office/drawing/2014/main" id="{833BE1D9-9783-4146-A0CC-C52E2D831BD0}"/>
+                <a16:creationId xmlns:a16="http://schemas.microsoft.com/office/drawing/2014/main" id="{3D93DF95-1C3C-47D9-9031-D0C2ADB9C525}"/>
               </a:ext>
             </a:extLst>
           </p:cNvPr>
@@ -2452,7 +2519,7 @@
           <p:cNvPr id="25" name="scope-label-4">
             <a:extLst xmlns:a="http://schemas.openxmlformats.org/drawingml/2006/main">
               <a:ext uri="{FF2B5EF4-FFF2-40B4-BE49-F238E27FC236}">
-                <a16:creationId xmlns:a16="http://schemas.microsoft.com/office/drawing/2014/main" id="{48716E3A-78B4-4F01-B41F-738A48415E0E}"/>
+                <a16:creationId xmlns:a16="http://schemas.microsoft.com/office/drawing/2014/main" id="{730C58EB-F327-4F62-97DC-5F29DD03FB1C}"/>
               </a:ext>
             </a:extLst>
           </p:cNvPr>
@@ -2502,7 +2569,7 @@
           <p:cNvPr id="26" name="scope-value-4">
             <a:extLst xmlns:a="http://schemas.openxmlformats.org/drawingml/2006/main">
               <a:ext uri="{FF2B5EF4-FFF2-40B4-BE49-F238E27FC236}">
-                <a16:creationId xmlns:a16="http://schemas.microsoft.com/office/drawing/2014/main" id="{20287506-F50E-4BEC-9DDD-AE98ACFE6920}"/>
+                <a16:creationId xmlns:a16="http://schemas.microsoft.com/office/drawing/2014/main" id="{04DE913E-8DBC-43D2-B930-E089A1A2E9DA}"/>
               </a:ext>
             </a:extLst>
           </p:cNvPr>
@@ -2552,7 +2619,7 @@
           <p:cNvPr id="27" name="evidence-title">
             <a:extLst xmlns:a="http://schemas.openxmlformats.org/drawingml/2006/main">
               <a:ext uri="{FF2B5EF4-FFF2-40B4-BE49-F238E27FC236}">
-                <a16:creationId xmlns:a16="http://schemas.microsoft.com/office/drawing/2014/main" id="{5FC098D1-8FE2-4FA9-B3BA-39F847ED071A}"/>
+                <a16:creationId xmlns:a16="http://schemas.microsoft.com/office/drawing/2014/main" id="{0F559203-26D9-40E6-B522-173F94C7F277}"/>
               </a:ext>
             </a:extLst>
           </p:cNvPr>
@@ -2602,7 +2669,7 @@
           <p:cNvPr id="28" name="evidence-card-1">
             <a:extLst xmlns:a="http://schemas.openxmlformats.org/drawingml/2006/main">
               <a:ext uri="{FF2B5EF4-FFF2-40B4-BE49-F238E27FC236}">
-                <a16:creationId xmlns:a16="http://schemas.microsoft.com/office/drawing/2014/main" id="{0557C158-E4DA-4C69-9F38-744AF0D0AC43}"/>
+                <a16:creationId xmlns:a16="http://schemas.microsoft.com/office/drawing/2014/main" id="{9EBEBA66-4D73-4B27-9377-0D59A5B06AD5}"/>
               </a:ext>
             </a:extLst>
           </p:cNvPr>
@@ -2637,7 +2704,7 @@
           <p:cNvPr id="29" name="evidence-bar-1">
             <a:extLst xmlns:a="http://schemas.openxmlformats.org/drawingml/2006/main">
               <a:ext uri="{FF2B5EF4-FFF2-40B4-BE49-F238E27FC236}">
-                <a16:creationId xmlns:a16="http://schemas.microsoft.com/office/drawing/2014/main" id="{92050C45-487E-4773-8D46-6A7589DFF300}"/>
+                <a16:creationId xmlns:a16="http://schemas.microsoft.com/office/drawing/2014/main" id="{037484AB-83E7-489B-8045-8A964E78C48E}"/>
               </a:ext>
             </a:extLst>
           </p:cNvPr>
@@ -2670,7 +2737,7 @@
           <p:cNvPr id="30" name="evidence-title-1">
             <a:extLst xmlns:a="http://schemas.openxmlformats.org/drawingml/2006/main">
               <a:ext uri="{FF2B5EF4-FFF2-40B4-BE49-F238E27FC236}">
-                <a16:creationId xmlns:a16="http://schemas.microsoft.com/office/drawing/2014/main" id="{AE069EFC-1F3B-4928-BF0D-C78EC46CFD86}"/>
+                <a16:creationId xmlns:a16="http://schemas.microsoft.com/office/drawing/2014/main" id="{73A19240-579C-468D-8B72-CB8853DF42E0}"/>
               </a:ext>
             </a:extLst>
           </p:cNvPr>
@@ -2720,7 +2787,7 @@
           <p:cNvPr id="31" name="evidence-body-1">
             <a:extLst xmlns:a="http://schemas.openxmlformats.org/drawingml/2006/main">
               <a:ext uri="{FF2B5EF4-FFF2-40B4-BE49-F238E27FC236}">
-                <a16:creationId xmlns:a16="http://schemas.microsoft.com/office/drawing/2014/main" id="{C4244FE5-551D-4AB6-ABD1-D257415A3E8F}"/>
+                <a16:creationId xmlns:a16="http://schemas.microsoft.com/office/drawing/2014/main" id="{E1AA3CAB-41CD-4244-9DEB-204D77317B84}"/>
               </a:ext>
             </a:extLst>
           </p:cNvPr>
@@ -2770,7 +2837,7 @@
           <p:cNvPr id="32" name="evidence-card-2">
             <a:extLst xmlns:a="http://schemas.openxmlformats.org/drawingml/2006/main">
               <a:ext uri="{FF2B5EF4-FFF2-40B4-BE49-F238E27FC236}">
-                <a16:creationId xmlns:a16="http://schemas.microsoft.com/office/drawing/2014/main" id="{D3999706-A676-46CC-8871-8E62BB80E267}"/>
+                <a16:creationId xmlns:a16="http://schemas.microsoft.com/office/drawing/2014/main" id="{184F8552-8CB7-4D79-9B5C-9C9FDA38B918}"/>
               </a:ext>
             </a:extLst>
           </p:cNvPr>
@@ -2805,7 +2872,7 @@
           <p:cNvPr id="33" name="evidence-bar-2">
             <a:extLst xmlns:a="http://schemas.openxmlformats.org/drawingml/2006/main">
               <a:ext uri="{FF2B5EF4-FFF2-40B4-BE49-F238E27FC236}">
-                <a16:creationId xmlns:a16="http://schemas.microsoft.com/office/drawing/2014/main" id="{FA6292D2-1300-4D2B-9756-15FA1FF1D6F6}"/>
+                <a16:creationId xmlns:a16="http://schemas.microsoft.com/office/drawing/2014/main" id="{193B2708-8307-40D1-AADD-F6D1E2917D5C}"/>
               </a:ext>
             </a:extLst>
           </p:cNvPr>
@@ -2838,7 +2905,7 @@
           <p:cNvPr id="34" name="evidence-title-2">
             <a:extLst xmlns:a="http://schemas.openxmlformats.org/drawingml/2006/main">
               <a:ext uri="{FF2B5EF4-FFF2-40B4-BE49-F238E27FC236}">
-                <a16:creationId xmlns:a16="http://schemas.microsoft.com/office/drawing/2014/main" id="{57D91E72-C2FC-4020-B2FA-F15D015352D7}"/>
+                <a16:creationId xmlns:a16="http://schemas.microsoft.com/office/drawing/2014/main" id="{EDFB530F-DBA5-4C89-8CDC-FC831453A6EE}"/>
               </a:ext>
             </a:extLst>
           </p:cNvPr>
@@ -2888,7 +2955,7 @@
           <p:cNvPr id="35" name="evidence-body-2">
             <a:extLst xmlns:a="http://schemas.openxmlformats.org/drawingml/2006/main">
               <a:ext uri="{FF2B5EF4-FFF2-40B4-BE49-F238E27FC236}">
-                <a16:creationId xmlns:a16="http://schemas.microsoft.com/office/drawing/2014/main" id="{8250533F-B925-4437-A9BA-2B30FFAD37FB}"/>
+                <a16:creationId xmlns:a16="http://schemas.microsoft.com/office/drawing/2014/main" id="{4F83195D-5DDC-4DB0-BA4D-32F93DCC987D}"/>
               </a:ext>
             </a:extLst>
           </p:cNvPr>
@@ -2938,7 +3005,7 @@
           <p:cNvPr id="36" name="evidence-card-3">
             <a:extLst xmlns:a="http://schemas.openxmlformats.org/drawingml/2006/main">
               <a:ext uri="{FF2B5EF4-FFF2-40B4-BE49-F238E27FC236}">
-                <a16:creationId xmlns:a16="http://schemas.microsoft.com/office/drawing/2014/main" id="{2440D61D-BA59-44FB-93E0-527A33186F04}"/>
+                <a16:creationId xmlns:a16="http://schemas.microsoft.com/office/drawing/2014/main" id="{2AEE5DA7-235C-4D0F-B071-D543CD29FEC2}"/>
               </a:ext>
             </a:extLst>
           </p:cNvPr>
@@ -2973,7 +3040,7 @@
           <p:cNvPr id="37" name="evidence-bar-3">
             <a:extLst xmlns:a="http://schemas.openxmlformats.org/drawingml/2006/main">
               <a:ext uri="{FF2B5EF4-FFF2-40B4-BE49-F238E27FC236}">
-                <a16:creationId xmlns:a16="http://schemas.microsoft.com/office/drawing/2014/main" id="{90EDC4F0-6B5D-46B9-B858-E72664433829}"/>
+                <a16:creationId xmlns:a16="http://schemas.microsoft.com/office/drawing/2014/main" id="{95DC26A0-75AE-4942-A3BB-C4033B3A14C5}"/>
               </a:ext>
             </a:extLst>
           </p:cNvPr>
@@ -3006,7 +3073,7 @@
           <p:cNvPr id="38" name="evidence-title-3">
             <a:extLst xmlns:a="http://schemas.openxmlformats.org/drawingml/2006/main">
               <a:ext uri="{FF2B5EF4-FFF2-40B4-BE49-F238E27FC236}">
-                <a16:creationId xmlns:a16="http://schemas.microsoft.com/office/drawing/2014/main" id="{2F4E645D-5998-4334-9F21-5DD1A9E2E011}"/>
+                <a16:creationId xmlns:a16="http://schemas.microsoft.com/office/drawing/2014/main" id="{A20F3B48-C6D1-4D48-A1B2-9E3CBC9C54A4}"/>
               </a:ext>
             </a:extLst>
           </p:cNvPr>
@@ -3056,7 +3123,7 @@
           <p:cNvPr id="39" name="evidence-body-3">
             <a:extLst xmlns:a="http://schemas.openxmlformats.org/drawingml/2006/main">
               <a:ext uri="{FF2B5EF4-FFF2-40B4-BE49-F238E27FC236}">
-                <a16:creationId xmlns:a16="http://schemas.microsoft.com/office/drawing/2014/main" id="{92AC30B7-B8D2-489D-A6C4-3AA6BAB60631}"/>
+                <a16:creationId xmlns:a16="http://schemas.microsoft.com/office/drawing/2014/main" id="{178CF731-7961-4A2E-9838-8C0D12F51263}"/>
               </a:ext>
             </a:extLst>
           </p:cNvPr>
@@ -3104,7 +3171,7 @@
     </p:spTree>
     <p:extLst>
       <p:ext uri="{BB962C8B-B14F-4D97-AF65-F5344CB8AC3E}">
-        <p14:creationId xmlns:p14="http://schemas.microsoft.com/office/powerpoint/2010/main" val="1190684672"/>
+        <p14:creationId xmlns:p14="http://schemas.microsoft.com/office/powerpoint/2010/main" val="311528660"/>
       </p:ext>
     </p:extLst>
   </p:cSld>
@@ -3135,7 +3202,7 @@
           <p:cNvPr id="1" name="top-accent">
             <a:extLst xmlns:a="http://schemas.openxmlformats.org/drawingml/2006/main">
               <a:ext uri="{FF2B5EF4-FFF2-40B4-BE49-F238E27FC236}">
-                <a16:creationId xmlns:a16="http://schemas.microsoft.com/office/drawing/2014/main" id="{3A43E086-8A89-47E3-B486-42AA2E637266}"/>
+                <a16:creationId xmlns:a16="http://schemas.microsoft.com/office/drawing/2014/main" id="{D008C26C-49E7-4593-9F48-D58CAF302B4A}"/>
               </a:ext>
             </a:extLst>
           </p:cNvPr>
@@ -3168,7 +3235,7 @@
           <p:cNvPr id="2" name="left-accent">
             <a:extLst xmlns:a="http://schemas.openxmlformats.org/drawingml/2006/main">
               <a:ext uri="{FF2B5EF4-FFF2-40B4-BE49-F238E27FC236}">
-                <a16:creationId xmlns:a16="http://schemas.microsoft.com/office/drawing/2014/main" id="{8CAB8563-9111-4E26-A49E-089BE172A324}"/>
+                <a16:creationId xmlns:a16="http://schemas.microsoft.com/office/drawing/2014/main" id="{B5C8DC5C-93FD-4042-A2B0-3961D1176853}"/>
               </a:ext>
             </a:extLst>
           </p:cNvPr>
@@ -3201,7 +3268,7 @@
           <p:cNvPr id="3" name="eyebrow">
             <a:extLst xmlns:a="http://schemas.openxmlformats.org/drawingml/2006/main">
               <a:ext uri="{FF2B5EF4-FFF2-40B4-BE49-F238E27FC236}">
-                <a16:creationId xmlns:a16="http://schemas.microsoft.com/office/drawing/2014/main" id="{1BEA5706-5583-417F-82EE-3B8A6F18699C}"/>
+                <a16:creationId xmlns:a16="http://schemas.microsoft.com/office/drawing/2014/main" id="{91F275C3-74A7-4AF5-8139-95F8F6139C3A}"/>
               </a:ext>
             </a:extLst>
           </p:cNvPr>
@@ -3251,7 +3318,7 @@
           <p:cNvPr id="4" name="footer">
             <a:extLst xmlns:a="http://schemas.openxmlformats.org/drawingml/2006/main">
               <a:ext uri="{FF2B5EF4-FFF2-40B4-BE49-F238E27FC236}">
-                <a16:creationId xmlns:a16="http://schemas.microsoft.com/office/drawing/2014/main" id="{4A206D99-822B-4291-8893-61B826891897}"/>
+                <a16:creationId xmlns:a16="http://schemas.microsoft.com/office/drawing/2014/main" id="{0549C1F4-758F-4951-8282-F7BFCEEA4E5B}"/>
               </a:ext>
             </a:extLst>
           </p:cNvPr>
@@ -3301,7 +3368,7 @@
           <p:cNvPr id="5" name="page-no">
             <a:extLst xmlns:a="http://schemas.openxmlformats.org/drawingml/2006/main">
               <a:ext uri="{FF2B5EF4-FFF2-40B4-BE49-F238E27FC236}">
-                <a16:creationId xmlns:a16="http://schemas.microsoft.com/office/drawing/2014/main" id="{4510B05D-BD79-4AAD-B7CD-91CD538072E5}"/>
+                <a16:creationId xmlns:a16="http://schemas.microsoft.com/office/drawing/2014/main" id="{FD7992B9-0433-4F62-8728-ED33BD94C08C}"/>
               </a:ext>
             </a:extLst>
           </p:cNvPr>
@@ -3351,7 +3418,7 @@
           <p:cNvPr id="6" name="title-02">
             <a:extLst xmlns:a="http://schemas.openxmlformats.org/drawingml/2006/main">
               <a:ext uri="{FF2B5EF4-FFF2-40B4-BE49-F238E27FC236}">
-                <a16:creationId xmlns:a16="http://schemas.microsoft.com/office/drawing/2014/main" id="{93DA5A2B-44BD-47A5-A31C-4FB7EBBFF8B8}"/>
+                <a16:creationId xmlns:a16="http://schemas.microsoft.com/office/drawing/2014/main" id="{9760BE5F-8F71-4A80-8F1D-3E9F42202ED6}"/>
               </a:ext>
             </a:extLst>
           </p:cNvPr>
@@ -3401,7 +3468,7 @@
           <p:cNvPr id="7" name="subtitle-02">
             <a:extLst xmlns:a="http://schemas.openxmlformats.org/drawingml/2006/main">
               <a:ext uri="{FF2B5EF4-FFF2-40B4-BE49-F238E27FC236}">
-                <a16:creationId xmlns:a16="http://schemas.microsoft.com/office/drawing/2014/main" id="{25E878C4-34F9-4EDE-8FE9-8D979D71A44D}"/>
+                <a16:creationId xmlns:a16="http://schemas.microsoft.com/office/drawing/2014/main" id="{A789E998-CEA2-4A01-B99C-D0F285779BF4}"/>
               </a:ext>
             </a:extLst>
           </p:cNvPr>
@@ -3451,7 +3518,7 @@
           <p:cNvPr id="8" name="timeline-line">
             <a:extLst xmlns:a="http://schemas.openxmlformats.org/drawingml/2006/main">
               <a:ext uri="{FF2B5EF4-FFF2-40B4-BE49-F238E27FC236}">
-                <a16:creationId xmlns:a16="http://schemas.microsoft.com/office/drawing/2014/main" id="{DA61E38C-309C-4557-B424-8156157CAC2E}"/>
+                <a16:creationId xmlns:a16="http://schemas.microsoft.com/office/drawing/2014/main" id="{6A73C8FB-F0C9-400A-B403-24BC2554AC6C}"/>
               </a:ext>
             </a:extLst>
           </p:cNvPr>
@@ -3484,7 +3551,7 @@
           <p:cNvPr id="9" name="timeline-card-1">
             <a:extLst xmlns:a="http://schemas.openxmlformats.org/drawingml/2006/main">
               <a:ext uri="{FF2B5EF4-FFF2-40B4-BE49-F238E27FC236}">
-                <a16:creationId xmlns:a16="http://schemas.microsoft.com/office/drawing/2014/main" id="{71F326DD-56CB-4AFF-A765-E1FAAC97618F}"/>
+                <a16:creationId xmlns:a16="http://schemas.microsoft.com/office/drawing/2014/main" id="{50AD8E23-E918-49D5-9ABC-9EB42BA3C4DA}"/>
               </a:ext>
             </a:extLst>
           </p:cNvPr>
@@ -3519,7 +3586,7 @@
           <p:cNvPr id="10" name="timeline-bar-1">
             <a:extLst xmlns:a="http://schemas.openxmlformats.org/drawingml/2006/main">
               <a:ext uri="{FF2B5EF4-FFF2-40B4-BE49-F238E27FC236}">
-                <a16:creationId xmlns:a16="http://schemas.microsoft.com/office/drawing/2014/main" id="{B652463F-AFCF-44F4-94C3-596167665129}"/>
+                <a16:creationId xmlns:a16="http://schemas.microsoft.com/office/drawing/2014/main" id="{21205AC0-C031-4FC5-AD4D-DDA927253703}"/>
               </a:ext>
             </a:extLst>
           </p:cNvPr>
@@ -3552,7 +3619,7 @@
           <p:cNvPr id="11" name="timeline-month-1">
             <a:extLst xmlns:a="http://schemas.openxmlformats.org/drawingml/2006/main">
               <a:ext uri="{FF2B5EF4-FFF2-40B4-BE49-F238E27FC236}">
-                <a16:creationId xmlns:a16="http://schemas.microsoft.com/office/drawing/2014/main" id="{DCE0EA11-1AAE-4717-95F8-26061B505C24}"/>
+                <a16:creationId xmlns:a16="http://schemas.microsoft.com/office/drawing/2014/main" id="{93E7E5F9-A5C5-428C-ABCB-BA7684FBD195}"/>
               </a:ext>
             </a:extLst>
           </p:cNvPr>
@@ -3602,7 +3669,7 @@
           <p:cNvPr id="12" name="timeline-title-1">
             <a:extLst xmlns:a="http://schemas.openxmlformats.org/drawingml/2006/main">
               <a:ext uri="{FF2B5EF4-FFF2-40B4-BE49-F238E27FC236}">
-                <a16:creationId xmlns:a16="http://schemas.microsoft.com/office/drawing/2014/main" id="{F9079AF9-10DB-480B-945A-9E18BDF9DA8A}"/>
+                <a16:creationId xmlns:a16="http://schemas.microsoft.com/office/drawing/2014/main" id="{2DC829D3-0EF0-424C-AE94-E148AC3238E7}"/>
               </a:ext>
             </a:extLst>
           </p:cNvPr>
@@ -3652,7 +3719,7 @@
           <p:cNvPr id="13" name="timeline-dot-1-1">
             <a:extLst xmlns:a="http://schemas.openxmlformats.org/drawingml/2006/main">
               <a:ext uri="{FF2B5EF4-FFF2-40B4-BE49-F238E27FC236}">
-                <a16:creationId xmlns:a16="http://schemas.microsoft.com/office/drawing/2014/main" id="{2C5E123D-D31B-4307-9FC4-AF7593AA2603}"/>
+                <a16:creationId xmlns:a16="http://schemas.microsoft.com/office/drawing/2014/main" id="{FE9A58D4-DE9F-4678-A1CA-A3A2ACE71835}"/>
               </a:ext>
             </a:extLst>
           </p:cNvPr>
@@ -3702,7 +3769,7 @@
           <p:cNvPr id="14" name="timeline-item-1-1">
             <a:extLst xmlns:a="http://schemas.openxmlformats.org/drawingml/2006/main">
               <a:ext uri="{FF2B5EF4-FFF2-40B4-BE49-F238E27FC236}">
-                <a16:creationId xmlns:a16="http://schemas.microsoft.com/office/drawing/2014/main" id="{901EB455-DC34-4374-9350-63185609CA8E}"/>
+                <a16:creationId xmlns:a16="http://schemas.microsoft.com/office/drawing/2014/main" id="{378E6B1D-0092-40FB-90B8-F5C2DF3EC347}"/>
               </a:ext>
             </a:extLst>
           </p:cNvPr>
@@ -3752,7 +3819,7 @@
           <p:cNvPr id="15" name="timeline-dot-1-2">
             <a:extLst xmlns:a="http://schemas.openxmlformats.org/drawingml/2006/main">
               <a:ext uri="{FF2B5EF4-FFF2-40B4-BE49-F238E27FC236}">
-                <a16:creationId xmlns:a16="http://schemas.microsoft.com/office/drawing/2014/main" id="{5F4D47F7-3FD2-45BD-9B60-681FE8C9834A}"/>
+                <a16:creationId xmlns:a16="http://schemas.microsoft.com/office/drawing/2014/main" id="{CE34D2C6-F879-427F-A0A6-C46C3E7C6733}"/>
               </a:ext>
             </a:extLst>
           </p:cNvPr>
@@ -3802,7 +3869,7 @@
           <p:cNvPr id="16" name="timeline-item-1-2">
             <a:extLst xmlns:a="http://schemas.openxmlformats.org/drawingml/2006/main">
               <a:ext uri="{FF2B5EF4-FFF2-40B4-BE49-F238E27FC236}">
-                <a16:creationId xmlns:a16="http://schemas.microsoft.com/office/drawing/2014/main" id="{7673024C-A4B5-4A58-8D71-2885E6E62120}"/>
+                <a16:creationId xmlns:a16="http://schemas.microsoft.com/office/drawing/2014/main" id="{AC38438E-16D0-4F94-B936-47835CF3B69B}"/>
               </a:ext>
             </a:extLst>
           </p:cNvPr>
@@ -3852,7 +3919,7 @@
           <p:cNvPr id="17" name="timeline-dot-1-3">
             <a:extLst xmlns:a="http://schemas.openxmlformats.org/drawingml/2006/main">
               <a:ext uri="{FF2B5EF4-FFF2-40B4-BE49-F238E27FC236}">
-                <a16:creationId xmlns:a16="http://schemas.microsoft.com/office/drawing/2014/main" id="{2EDB2DB6-7193-4B99-97A0-D09C0D634D40}"/>
+                <a16:creationId xmlns:a16="http://schemas.microsoft.com/office/drawing/2014/main" id="{34AEFCB3-8161-4D94-BB2C-1334C47B523F}"/>
               </a:ext>
             </a:extLst>
           </p:cNvPr>
@@ -3902,7 +3969,7 @@
           <p:cNvPr id="18" name="timeline-item-1-3">
             <a:extLst xmlns:a="http://schemas.openxmlformats.org/drawingml/2006/main">
               <a:ext uri="{FF2B5EF4-FFF2-40B4-BE49-F238E27FC236}">
-                <a16:creationId xmlns:a16="http://schemas.microsoft.com/office/drawing/2014/main" id="{5C633E05-D953-488C-B990-93673E5E7FCF}"/>
+                <a16:creationId xmlns:a16="http://schemas.microsoft.com/office/drawing/2014/main" id="{8C831A34-4CD0-4746-BAC6-1CBF51F762DA}"/>
               </a:ext>
             </a:extLst>
           </p:cNvPr>
@@ -3952,7 +4019,7 @@
           <p:cNvPr id="19" name="timeline-card-2">
             <a:extLst xmlns:a="http://schemas.openxmlformats.org/drawingml/2006/main">
               <a:ext uri="{FF2B5EF4-FFF2-40B4-BE49-F238E27FC236}">
-                <a16:creationId xmlns:a16="http://schemas.microsoft.com/office/drawing/2014/main" id="{22F9E5B4-F844-423C-B4DD-6CFFD20B2379}"/>
+                <a16:creationId xmlns:a16="http://schemas.microsoft.com/office/drawing/2014/main" id="{443459AC-8B53-44D6-A78B-B270067A13EF}"/>
               </a:ext>
             </a:extLst>
           </p:cNvPr>
@@ -3987,7 +4054,7 @@
           <p:cNvPr id="20" name="timeline-bar-2">
             <a:extLst xmlns:a="http://schemas.openxmlformats.org/drawingml/2006/main">
               <a:ext uri="{FF2B5EF4-FFF2-40B4-BE49-F238E27FC236}">
-                <a16:creationId xmlns:a16="http://schemas.microsoft.com/office/drawing/2014/main" id="{C969E6A5-9E57-43B9-BD01-0773E50338B8}"/>
+                <a16:creationId xmlns:a16="http://schemas.microsoft.com/office/drawing/2014/main" id="{ED1A2207-CE81-44E9-88DD-68F732E32CD1}"/>
               </a:ext>
             </a:extLst>
           </p:cNvPr>
@@ -4020,7 +4087,7 @@
           <p:cNvPr id="21" name="timeline-month-2">
             <a:extLst xmlns:a="http://schemas.openxmlformats.org/drawingml/2006/main">
               <a:ext uri="{FF2B5EF4-FFF2-40B4-BE49-F238E27FC236}">
-                <a16:creationId xmlns:a16="http://schemas.microsoft.com/office/drawing/2014/main" id="{8BBA170C-B22B-43CE-89F2-DF96FD87787E}"/>
+                <a16:creationId xmlns:a16="http://schemas.microsoft.com/office/drawing/2014/main" id="{D340F70A-D544-4D48-AD9B-D815581C4596}"/>
               </a:ext>
             </a:extLst>
           </p:cNvPr>
@@ -4070,7 +4137,7 @@
           <p:cNvPr id="22" name="timeline-title-2">
             <a:extLst xmlns:a="http://schemas.openxmlformats.org/drawingml/2006/main">
               <a:ext uri="{FF2B5EF4-FFF2-40B4-BE49-F238E27FC236}">
-                <a16:creationId xmlns:a16="http://schemas.microsoft.com/office/drawing/2014/main" id="{A2DF04A3-5377-45F3-BF16-DC407016C95A}"/>
+                <a16:creationId xmlns:a16="http://schemas.microsoft.com/office/drawing/2014/main" id="{A8713D08-1DD6-4DE5-9B22-7AE2A5B85807}"/>
               </a:ext>
             </a:extLst>
           </p:cNvPr>
@@ -4120,7 +4187,7 @@
           <p:cNvPr id="23" name="timeline-dot-2-1">
             <a:extLst xmlns:a="http://schemas.openxmlformats.org/drawingml/2006/main">
               <a:ext uri="{FF2B5EF4-FFF2-40B4-BE49-F238E27FC236}">
-                <a16:creationId xmlns:a16="http://schemas.microsoft.com/office/drawing/2014/main" id="{E423776E-62F2-4829-897F-1A36521CDF04}"/>
+                <a16:creationId xmlns:a16="http://schemas.microsoft.com/office/drawing/2014/main" id="{BBB1DBA0-9B84-4D8A-8078-99349BFE6686}"/>
               </a:ext>
             </a:extLst>
           </p:cNvPr>
@@ -4170,7 +4237,7 @@
           <p:cNvPr id="24" name="timeline-item-2-1">
             <a:extLst xmlns:a="http://schemas.openxmlformats.org/drawingml/2006/main">
               <a:ext uri="{FF2B5EF4-FFF2-40B4-BE49-F238E27FC236}">
-                <a16:creationId xmlns:a16="http://schemas.microsoft.com/office/drawing/2014/main" id="{C19D0E56-E0B8-419F-84ED-329D7AF56DF5}"/>
+                <a16:creationId xmlns:a16="http://schemas.microsoft.com/office/drawing/2014/main" id="{9F81B927-1AEF-41A8-BBBE-2CFE255B5A7E}"/>
               </a:ext>
             </a:extLst>
           </p:cNvPr>
@@ -4220,7 +4287,7 @@
           <p:cNvPr id="25" name="timeline-dot-2-2">
             <a:extLst xmlns:a="http://schemas.openxmlformats.org/drawingml/2006/main">
               <a:ext uri="{FF2B5EF4-FFF2-40B4-BE49-F238E27FC236}">
-                <a16:creationId xmlns:a16="http://schemas.microsoft.com/office/drawing/2014/main" id="{FC1AAA73-D307-4699-80C6-C174401D3800}"/>
+                <a16:creationId xmlns:a16="http://schemas.microsoft.com/office/drawing/2014/main" id="{BD9D03A1-701A-41F1-9703-E4F55031FEED}"/>
               </a:ext>
             </a:extLst>
           </p:cNvPr>
@@ -4270,7 +4337,7 @@
           <p:cNvPr id="26" name="timeline-item-2-2">
             <a:extLst xmlns:a="http://schemas.openxmlformats.org/drawingml/2006/main">
               <a:ext uri="{FF2B5EF4-FFF2-40B4-BE49-F238E27FC236}">
-                <a16:creationId xmlns:a16="http://schemas.microsoft.com/office/drawing/2014/main" id="{18C39682-6242-4D80-85E6-860A8FF522BA}"/>
+                <a16:creationId xmlns:a16="http://schemas.microsoft.com/office/drawing/2014/main" id="{623B4C2F-4B5C-493F-AD32-BE2A99B2419B}"/>
               </a:ext>
             </a:extLst>
           </p:cNvPr>
@@ -4320,7 +4387,7 @@
           <p:cNvPr id="27" name="timeline-dot-2-3">
             <a:extLst xmlns:a="http://schemas.openxmlformats.org/drawingml/2006/main">
               <a:ext uri="{FF2B5EF4-FFF2-40B4-BE49-F238E27FC236}">
-                <a16:creationId xmlns:a16="http://schemas.microsoft.com/office/drawing/2014/main" id="{9E21BD62-2784-4B02-AD59-02F013B548A1}"/>
+                <a16:creationId xmlns:a16="http://schemas.microsoft.com/office/drawing/2014/main" id="{9667D6D9-BF9B-49E4-86DD-16425A1B7121}"/>
               </a:ext>
             </a:extLst>
           </p:cNvPr>
@@ -4370,7 +4437,7 @@
           <p:cNvPr id="28" name="timeline-item-2-3">
             <a:extLst xmlns:a="http://schemas.openxmlformats.org/drawingml/2006/main">
               <a:ext uri="{FF2B5EF4-FFF2-40B4-BE49-F238E27FC236}">
-                <a16:creationId xmlns:a16="http://schemas.microsoft.com/office/drawing/2014/main" id="{33B048E2-1BBB-487C-BD6F-067CCB2EB70A}"/>
+                <a16:creationId xmlns:a16="http://schemas.microsoft.com/office/drawing/2014/main" id="{52B431F4-B0F5-460B-AAB7-A065E6D54AD1}"/>
               </a:ext>
             </a:extLst>
           </p:cNvPr>
@@ -4420,7 +4487,7 @@
           <p:cNvPr id="29" name="timeline-card-3">
             <a:extLst xmlns:a="http://schemas.openxmlformats.org/drawingml/2006/main">
               <a:ext uri="{FF2B5EF4-FFF2-40B4-BE49-F238E27FC236}">
-                <a16:creationId xmlns:a16="http://schemas.microsoft.com/office/drawing/2014/main" id="{DBB47F54-3E3F-45D4-AFB2-C4266C736F28}"/>
+                <a16:creationId xmlns:a16="http://schemas.microsoft.com/office/drawing/2014/main" id="{9C2870AC-46E6-4B04-B6E2-72ABFB606BAB}"/>
               </a:ext>
             </a:extLst>
           </p:cNvPr>
@@ -4455,7 +4522,7 @@
           <p:cNvPr id="30" name="timeline-bar-3">
             <a:extLst xmlns:a="http://schemas.openxmlformats.org/drawingml/2006/main">
               <a:ext uri="{FF2B5EF4-FFF2-40B4-BE49-F238E27FC236}">
-                <a16:creationId xmlns:a16="http://schemas.microsoft.com/office/drawing/2014/main" id="{E7A7958E-B5C7-45E8-8521-919A33181D1F}"/>
+                <a16:creationId xmlns:a16="http://schemas.microsoft.com/office/drawing/2014/main" id="{898122BB-EAFF-4625-A0DC-241F4A423B57}"/>
               </a:ext>
             </a:extLst>
           </p:cNvPr>
@@ -4488,7 +4555,7 @@
           <p:cNvPr id="31" name="timeline-month-3">
             <a:extLst xmlns:a="http://schemas.openxmlformats.org/drawingml/2006/main">
               <a:ext uri="{FF2B5EF4-FFF2-40B4-BE49-F238E27FC236}">
-                <a16:creationId xmlns:a16="http://schemas.microsoft.com/office/drawing/2014/main" id="{1E316BF3-5FF9-4197-BF12-665826D63B52}"/>
+                <a16:creationId xmlns:a16="http://schemas.microsoft.com/office/drawing/2014/main" id="{3F917B4B-531F-4EE4-9CE2-5DEEBF4909B4}"/>
               </a:ext>
             </a:extLst>
           </p:cNvPr>
@@ -4538,7 +4605,7 @@
           <p:cNvPr id="32" name="timeline-title-3">
             <a:extLst xmlns:a="http://schemas.openxmlformats.org/drawingml/2006/main">
               <a:ext uri="{FF2B5EF4-FFF2-40B4-BE49-F238E27FC236}">
-                <a16:creationId xmlns:a16="http://schemas.microsoft.com/office/drawing/2014/main" id="{D04C2607-4A9A-4600-BAB4-A72FF6BB59FA}"/>
+                <a16:creationId xmlns:a16="http://schemas.microsoft.com/office/drawing/2014/main" id="{916539F5-C754-4A2C-A49F-C15E8CC892FE}"/>
               </a:ext>
             </a:extLst>
           </p:cNvPr>
@@ -4588,7 +4655,7 @@
           <p:cNvPr id="33" name="timeline-dot-3-1">
             <a:extLst xmlns:a="http://schemas.openxmlformats.org/drawingml/2006/main">
               <a:ext uri="{FF2B5EF4-FFF2-40B4-BE49-F238E27FC236}">
-                <a16:creationId xmlns:a16="http://schemas.microsoft.com/office/drawing/2014/main" id="{4804ACF8-4EA2-4910-8C6D-C38A08045C38}"/>
+                <a16:creationId xmlns:a16="http://schemas.microsoft.com/office/drawing/2014/main" id="{D8EF4228-09EB-405A-8BAA-11ACDEA90E8E}"/>
               </a:ext>
             </a:extLst>
           </p:cNvPr>
@@ -4638,7 +4705,7 @@
           <p:cNvPr id="34" name="timeline-item-3-1">
             <a:extLst xmlns:a="http://schemas.openxmlformats.org/drawingml/2006/main">
               <a:ext uri="{FF2B5EF4-FFF2-40B4-BE49-F238E27FC236}">
-                <a16:creationId xmlns:a16="http://schemas.microsoft.com/office/drawing/2014/main" id="{E68D4359-A05F-476C-8FC5-05026FF736DB}"/>
+                <a16:creationId xmlns:a16="http://schemas.microsoft.com/office/drawing/2014/main" id="{D693FF3B-3B2A-43D6-A388-A6B67494B955}"/>
               </a:ext>
             </a:extLst>
           </p:cNvPr>
@@ -4688,7 +4755,7 @@
           <p:cNvPr id="35" name="timeline-dot-3-2">
             <a:extLst xmlns:a="http://schemas.openxmlformats.org/drawingml/2006/main">
               <a:ext uri="{FF2B5EF4-FFF2-40B4-BE49-F238E27FC236}">
-                <a16:creationId xmlns:a16="http://schemas.microsoft.com/office/drawing/2014/main" id="{1E24820B-82D6-42C0-B322-DE5D7A7102B9}"/>
+                <a16:creationId xmlns:a16="http://schemas.microsoft.com/office/drawing/2014/main" id="{8B3E188F-AC56-4563-91F0-4A1F430E0820}"/>
               </a:ext>
             </a:extLst>
           </p:cNvPr>
@@ -4738,7 +4805,7 @@
           <p:cNvPr id="36" name="timeline-item-3-2">
             <a:extLst xmlns:a="http://schemas.openxmlformats.org/drawingml/2006/main">
               <a:ext uri="{FF2B5EF4-FFF2-40B4-BE49-F238E27FC236}">
-                <a16:creationId xmlns:a16="http://schemas.microsoft.com/office/drawing/2014/main" id="{CF19FC2F-1EA1-47B5-8716-D2D2C1FE4FD0}"/>
+                <a16:creationId xmlns:a16="http://schemas.microsoft.com/office/drawing/2014/main" id="{63BB9DFC-9A19-4BE3-9453-5E5ABA762996}"/>
               </a:ext>
             </a:extLst>
           </p:cNvPr>
@@ -4788,7 +4855,7 @@
           <p:cNvPr id="37" name="timeline-dot-3-3">
             <a:extLst xmlns:a="http://schemas.openxmlformats.org/drawingml/2006/main">
               <a:ext uri="{FF2B5EF4-FFF2-40B4-BE49-F238E27FC236}">
-                <a16:creationId xmlns:a16="http://schemas.microsoft.com/office/drawing/2014/main" id="{D210B9CC-E680-4DA6-BB24-614588AFDC0A}"/>
+                <a16:creationId xmlns:a16="http://schemas.microsoft.com/office/drawing/2014/main" id="{A1236104-CDC5-42DB-9FE5-CCA7F2590D56}"/>
               </a:ext>
             </a:extLst>
           </p:cNvPr>
@@ -4838,7 +4905,7 @@
           <p:cNvPr id="38" name="timeline-item-3-3">
             <a:extLst xmlns:a="http://schemas.openxmlformats.org/drawingml/2006/main">
               <a:ext uri="{FF2B5EF4-FFF2-40B4-BE49-F238E27FC236}">
-                <a16:creationId xmlns:a16="http://schemas.microsoft.com/office/drawing/2014/main" id="{92AA4F92-1DAB-41AF-80CF-660871505E6D}"/>
+                <a16:creationId xmlns:a16="http://schemas.microsoft.com/office/drawing/2014/main" id="{D39C3BC7-ACFA-4841-9022-82C3A1BAD829}"/>
               </a:ext>
             </a:extLst>
           </p:cNvPr>
@@ -4888,7 +4955,7 @@
           <p:cNvPr id="39" name="timeline-card-4">
             <a:extLst xmlns:a="http://schemas.openxmlformats.org/drawingml/2006/main">
               <a:ext uri="{FF2B5EF4-FFF2-40B4-BE49-F238E27FC236}">
-                <a16:creationId xmlns:a16="http://schemas.microsoft.com/office/drawing/2014/main" id="{0FFA0A42-43DC-4762-A511-B4B1ECDC1645}"/>
+                <a16:creationId xmlns:a16="http://schemas.microsoft.com/office/drawing/2014/main" id="{B4D14956-6D5C-4C90-966C-6E7BB78FFD22}"/>
               </a:ext>
             </a:extLst>
           </p:cNvPr>
@@ -4923,7 +4990,7 @@
           <p:cNvPr id="40" name="timeline-bar-4">
             <a:extLst xmlns:a="http://schemas.openxmlformats.org/drawingml/2006/main">
               <a:ext uri="{FF2B5EF4-FFF2-40B4-BE49-F238E27FC236}">
-                <a16:creationId xmlns:a16="http://schemas.microsoft.com/office/drawing/2014/main" id="{12486716-92B3-42AC-A178-9F518C1F7C53}"/>
+                <a16:creationId xmlns:a16="http://schemas.microsoft.com/office/drawing/2014/main" id="{296E9C69-E527-4D83-A2C7-9336D93E74B1}"/>
               </a:ext>
             </a:extLst>
           </p:cNvPr>
@@ -4956,7 +5023,7 @@
           <p:cNvPr id="41" name="timeline-month-4">
             <a:extLst xmlns:a="http://schemas.openxmlformats.org/drawingml/2006/main">
               <a:ext uri="{FF2B5EF4-FFF2-40B4-BE49-F238E27FC236}">
-                <a16:creationId xmlns:a16="http://schemas.microsoft.com/office/drawing/2014/main" id="{2E330539-8CC1-40C6-B096-C1C76C8D6EAB}"/>
+                <a16:creationId xmlns:a16="http://schemas.microsoft.com/office/drawing/2014/main" id="{0F448554-0161-4E25-A3BF-8975EFC966E5}"/>
               </a:ext>
             </a:extLst>
           </p:cNvPr>
@@ -5006,7 +5073,7 @@
           <p:cNvPr id="42" name="timeline-title-4">
             <a:extLst xmlns:a="http://schemas.openxmlformats.org/drawingml/2006/main">
               <a:ext uri="{FF2B5EF4-FFF2-40B4-BE49-F238E27FC236}">
-                <a16:creationId xmlns:a16="http://schemas.microsoft.com/office/drawing/2014/main" id="{A9FC81E3-6E02-4707-8FEB-885B1EBFC64A}"/>
+                <a16:creationId xmlns:a16="http://schemas.microsoft.com/office/drawing/2014/main" id="{DA72E42F-20E8-4C6C-8EED-DCD0E9181AA7}"/>
               </a:ext>
             </a:extLst>
           </p:cNvPr>
@@ -5056,7 +5123,7 @@
           <p:cNvPr id="43" name="timeline-dot-4-1">
             <a:extLst xmlns:a="http://schemas.openxmlformats.org/drawingml/2006/main">
               <a:ext uri="{FF2B5EF4-FFF2-40B4-BE49-F238E27FC236}">
-                <a16:creationId xmlns:a16="http://schemas.microsoft.com/office/drawing/2014/main" id="{1376D649-D37E-495B-BE9D-43E198FDC1DB}"/>
+                <a16:creationId xmlns:a16="http://schemas.microsoft.com/office/drawing/2014/main" id="{C14ACAC3-5DFA-4021-B923-30C871249218}"/>
               </a:ext>
             </a:extLst>
           </p:cNvPr>
@@ -5106,7 +5173,7 @@
           <p:cNvPr id="44" name="timeline-item-4-1">
             <a:extLst xmlns:a="http://schemas.openxmlformats.org/drawingml/2006/main">
               <a:ext uri="{FF2B5EF4-FFF2-40B4-BE49-F238E27FC236}">
-                <a16:creationId xmlns:a16="http://schemas.microsoft.com/office/drawing/2014/main" id="{512A8B08-988C-462F-8B78-D97B8F7B78D4}"/>
+                <a16:creationId xmlns:a16="http://schemas.microsoft.com/office/drawing/2014/main" id="{570D08F0-AF79-430C-B45F-20E58625586D}"/>
               </a:ext>
             </a:extLst>
           </p:cNvPr>
@@ -5156,7 +5223,7 @@
           <p:cNvPr id="45" name="timeline-dot-4-2">
             <a:extLst xmlns:a="http://schemas.openxmlformats.org/drawingml/2006/main">
               <a:ext uri="{FF2B5EF4-FFF2-40B4-BE49-F238E27FC236}">
-                <a16:creationId xmlns:a16="http://schemas.microsoft.com/office/drawing/2014/main" id="{FD4E6DE5-31C1-4FAC-9315-6638BF0E7147}"/>
+                <a16:creationId xmlns:a16="http://schemas.microsoft.com/office/drawing/2014/main" id="{72A4BF9D-26D5-4376-82C3-B42C0228182D}"/>
               </a:ext>
             </a:extLst>
           </p:cNvPr>
@@ -5206,7 +5273,7 @@
           <p:cNvPr id="46" name="timeline-item-4-2">
             <a:extLst xmlns:a="http://schemas.openxmlformats.org/drawingml/2006/main">
               <a:ext uri="{FF2B5EF4-FFF2-40B4-BE49-F238E27FC236}">
-                <a16:creationId xmlns:a16="http://schemas.microsoft.com/office/drawing/2014/main" id="{786D1630-04A3-4B3B-8D42-65EEEEBE19CE}"/>
+                <a16:creationId xmlns:a16="http://schemas.microsoft.com/office/drawing/2014/main" id="{AD0F8898-BBD7-4BCE-BE84-2C826B2E99C9}"/>
               </a:ext>
             </a:extLst>
           </p:cNvPr>
@@ -5256,7 +5323,7 @@
           <p:cNvPr id="47" name="timeline-dot-4-3">
             <a:extLst xmlns:a="http://schemas.openxmlformats.org/drawingml/2006/main">
               <a:ext uri="{FF2B5EF4-FFF2-40B4-BE49-F238E27FC236}">
-                <a16:creationId xmlns:a16="http://schemas.microsoft.com/office/drawing/2014/main" id="{4C7A9791-7C4E-4273-BD47-40D2D5BC6A71}"/>
+                <a16:creationId xmlns:a16="http://schemas.microsoft.com/office/drawing/2014/main" id="{E32EF289-7BED-4765-A1B0-278093DE1B2B}"/>
               </a:ext>
             </a:extLst>
           </p:cNvPr>
@@ -5306,7 +5373,7 @@
           <p:cNvPr id="48" name="timeline-item-4-3">
             <a:extLst xmlns:a="http://schemas.openxmlformats.org/drawingml/2006/main">
               <a:ext uri="{FF2B5EF4-FFF2-40B4-BE49-F238E27FC236}">
-                <a16:creationId xmlns:a16="http://schemas.microsoft.com/office/drawing/2014/main" id="{74047F89-03F6-496D-8425-321CAFDCDD66}"/>
+                <a16:creationId xmlns:a16="http://schemas.microsoft.com/office/drawing/2014/main" id="{E2677658-2AD6-4000-AE32-15169054D23B}"/>
               </a:ext>
             </a:extLst>
           </p:cNvPr>
@@ -5356,7 +5423,7 @@
           <p:cNvPr id="49" name="timeline-card-5">
             <a:extLst xmlns:a="http://schemas.openxmlformats.org/drawingml/2006/main">
               <a:ext uri="{FF2B5EF4-FFF2-40B4-BE49-F238E27FC236}">
-                <a16:creationId xmlns:a16="http://schemas.microsoft.com/office/drawing/2014/main" id="{EC399B6E-744A-467D-9EFC-97702A008EEB}"/>
+                <a16:creationId xmlns:a16="http://schemas.microsoft.com/office/drawing/2014/main" id="{A9D66DAB-0362-4878-832A-9ED3FE647013}"/>
               </a:ext>
             </a:extLst>
           </p:cNvPr>
@@ -5391,7 +5458,7 @@
           <p:cNvPr id="50" name="timeline-bar-5">
             <a:extLst xmlns:a="http://schemas.openxmlformats.org/drawingml/2006/main">
               <a:ext uri="{FF2B5EF4-FFF2-40B4-BE49-F238E27FC236}">
-                <a16:creationId xmlns:a16="http://schemas.microsoft.com/office/drawing/2014/main" id="{61220510-B666-444C-8B7A-8FA61CAB0D8B}"/>
+                <a16:creationId xmlns:a16="http://schemas.microsoft.com/office/drawing/2014/main" id="{4A3F7C06-32FD-4CF0-8FA4-C7497142B8FA}"/>
               </a:ext>
             </a:extLst>
           </p:cNvPr>
@@ -5424,7 +5491,7 @@
           <p:cNvPr id="51" name="timeline-month-5">
             <a:extLst xmlns:a="http://schemas.openxmlformats.org/drawingml/2006/main">
               <a:ext uri="{FF2B5EF4-FFF2-40B4-BE49-F238E27FC236}">
-                <a16:creationId xmlns:a16="http://schemas.microsoft.com/office/drawing/2014/main" id="{84921866-73AF-45EA-B166-BD0C644BEABD}"/>
+                <a16:creationId xmlns:a16="http://schemas.microsoft.com/office/drawing/2014/main" id="{4E16BD14-9B21-418B-83DD-A902C56B18B3}"/>
               </a:ext>
             </a:extLst>
           </p:cNvPr>
@@ -5474,7 +5541,7 @@
           <p:cNvPr id="52" name="timeline-title-5">
             <a:extLst xmlns:a="http://schemas.openxmlformats.org/drawingml/2006/main">
               <a:ext uri="{FF2B5EF4-FFF2-40B4-BE49-F238E27FC236}">
-                <a16:creationId xmlns:a16="http://schemas.microsoft.com/office/drawing/2014/main" id="{4EF3FDC2-493D-42C0-9377-D9CB6EE760F2}"/>
+                <a16:creationId xmlns:a16="http://schemas.microsoft.com/office/drawing/2014/main" id="{D003105F-21BC-4943-938C-9D9DCCD32C13}"/>
               </a:ext>
             </a:extLst>
           </p:cNvPr>
@@ -5524,7 +5591,7 @@
           <p:cNvPr id="53" name="timeline-dot-5-1">
             <a:extLst xmlns:a="http://schemas.openxmlformats.org/drawingml/2006/main">
               <a:ext uri="{FF2B5EF4-FFF2-40B4-BE49-F238E27FC236}">
-                <a16:creationId xmlns:a16="http://schemas.microsoft.com/office/drawing/2014/main" id="{CB195D7A-59BA-404C-ABF0-908E1CDCF27D}"/>
+                <a16:creationId xmlns:a16="http://schemas.microsoft.com/office/drawing/2014/main" id="{A3328863-8ABF-46B4-BC08-5D536D3370EC}"/>
               </a:ext>
             </a:extLst>
           </p:cNvPr>
@@ -5574,7 +5641,7 @@
           <p:cNvPr id="54" name="timeline-item-5-1">
             <a:extLst xmlns:a="http://schemas.openxmlformats.org/drawingml/2006/main">
               <a:ext uri="{FF2B5EF4-FFF2-40B4-BE49-F238E27FC236}">
-                <a16:creationId xmlns:a16="http://schemas.microsoft.com/office/drawing/2014/main" id="{EBCAA5AD-FECC-4CA6-A900-014A01291AA4}"/>
+                <a16:creationId xmlns:a16="http://schemas.microsoft.com/office/drawing/2014/main" id="{C73D93CB-2EC1-4850-82BB-19F9CE5B7155}"/>
               </a:ext>
             </a:extLst>
           </p:cNvPr>
@@ -5624,7 +5691,7 @@
           <p:cNvPr id="55" name="timeline-dot-5-2">
             <a:extLst xmlns:a="http://schemas.openxmlformats.org/drawingml/2006/main">
               <a:ext uri="{FF2B5EF4-FFF2-40B4-BE49-F238E27FC236}">
-                <a16:creationId xmlns:a16="http://schemas.microsoft.com/office/drawing/2014/main" id="{08A31B75-D30E-40AF-BA1F-1EF8F4FE456F}"/>
+                <a16:creationId xmlns:a16="http://schemas.microsoft.com/office/drawing/2014/main" id="{C302F47F-BB9F-4379-97B6-FF83396D4BCF}"/>
               </a:ext>
             </a:extLst>
           </p:cNvPr>
@@ -5674,7 +5741,7 @@
           <p:cNvPr id="56" name="timeline-item-5-2">
             <a:extLst xmlns:a="http://schemas.openxmlformats.org/drawingml/2006/main">
               <a:ext uri="{FF2B5EF4-FFF2-40B4-BE49-F238E27FC236}">
-                <a16:creationId xmlns:a16="http://schemas.microsoft.com/office/drawing/2014/main" id="{AAC6BC4E-41D7-440D-B91D-9B038415DD1B}"/>
+                <a16:creationId xmlns:a16="http://schemas.microsoft.com/office/drawing/2014/main" id="{F7E1DD83-02DD-4C95-A7A8-8A2F5B938FEE}"/>
               </a:ext>
             </a:extLst>
           </p:cNvPr>
@@ -5724,7 +5791,7 @@
           <p:cNvPr id="57" name="timeline-dot-5-3">
             <a:extLst xmlns:a="http://schemas.openxmlformats.org/drawingml/2006/main">
               <a:ext uri="{FF2B5EF4-FFF2-40B4-BE49-F238E27FC236}">
-                <a16:creationId xmlns:a16="http://schemas.microsoft.com/office/drawing/2014/main" id="{8709111A-CB14-4DC2-B8CD-6EF97408F8E7}"/>
+                <a16:creationId xmlns:a16="http://schemas.microsoft.com/office/drawing/2014/main" id="{F1D56A04-667B-40AE-BFA1-55825E2DDD6F}"/>
               </a:ext>
             </a:extLst>
           </p:cNvPr>
@@ -5774,7 +5841,7 @@
           <p:cNvPr id="58" name="timeline-item-5-3">
             <a:extLst xmlns:a="http://schemas.openxmlformats.org/drawingml/2006/main">
               <a:ext uri="{FF2B5EF4-FFF2-40B4-BE49-F238E27FC236}">
-                <a16:creationId xmlns:a16="http://schemas.microsoft.com/office/drawing/2014/main" id="{A04420B3-6574-49A0-A54D-3C0337E9EC35}"/>
+                <a16:creationId xmlns:a16="http://schemas.microsoft.com/office/drawing/2014/main" id="{60770133-819C-4AA1-B205-B5A8A961C5E1}"/>
               </a:ext>
             </a:extLst>
           </p:cNvPr>
@@ -5824,7 +5891,7 @@
           <p:cNvPr id="59" name="timeline-card-6">
             <a:extLst xmlns:a="http://schemas.openxmlformats.org/drawingml/2006/main">
               <a:ext uri="{FF2B5EF4-FFF2-40B4-BE49-F238E27FC236}">
-                <a16:creationId xmlns:a16="http://schemas.microsoft.com/office/drawing/2014/main" id="{2BD4F686-2A66-4025-B862-54E59C2EC4CB}"/>
+                <a16:creationId xmlns:a16="http://schemas.microsoft.com/office/drawing/2014/main" id="{15290961-8E24-4462-A65D-2F028CEEDC85}"/>
               </a:ext>
             </a:extLst>
           </p:cNvPr>
@@ -5859,7 +5926,7 @@
           <p:cNvPr id="60" name="timeline-bar-6">
             <a:extLst xmlns:a="http://schemas.openxmlformats.org/drawingml/2006/main">
               <a:ext uri="{FF2B5EF4-FFF2-40B4-BE49-F238E27FC236}">
-                <a16:creationId xmlns:a16="http://schemas.microsoft.com/office/drawing/2014/main" id="{708B108C-1324-411B-9BA7-4A2BFB86C235}"/>
+                <a16:creationId xmlns:a16="http://schemas.microsoft.com/office/drawing/2014/main" id="{38EB7C6D-BC0C-4179-ADF7-15EBF4A8CB42}"/>
               </a:ext>
             </a:extLst>
           </p:cNvPr>
@@ -5892,7 +5959,7 @@
           <p:cNvPr id="61" name="timeline-month-6">
             <a:extLst xmlns:a="http://schemas.openxmlformats.org/drawingml/2006/main">
               <a:ext uri="{FF2B5EF4-FFF2-40B4-BE49-F238E27FC236}">
-                <a16:creationId xmlns:a16="http://schemas.microsoft.com/office/drawing/2014/main" id="{5A956DAE-A19D-46B6-8FD9-A1909D90CF1D}"/>
+                <a16:creationId xmlns:a16="http://schemas.microsoft.com/office/drawing/2014/main" id="{3406176A-40B7-4A4F-8DA0-29A711F41D68}"/>
               </a:ext>
             </a:extLst>
           </p:cNvPr>
@@ -5942,7 +6009,7 @@
           <p:cNvPr id="62" name="timeline-title-6">
             <a:extLst xmlns:a="http://schemas.openxmlformats.org/drawingml/2006/main">
               <a:ext uri="{FF2B5EF4-FFF2-40B4-BE49-F238E27FC236}">
-                <a16:creationId xmlns:a16="http://schemas.microsoft.com/office/drawing/2014/main" id="{6B3E2FED-BFEA-4575-AD32-628E7A71ECB7}"/>
+                <a16:creationId xmlns:a16="http://schemas.microsoft.com/office/drawing/2014/main" id="{F8B50DD9-E9C0-404B-AB7A-A60BA1C8EC6B}"/>
               </a:ext>
             </a:extLst>
           </p:cNvPr>
@@ -5992,7 +6059,7 @@
           <p:cNvPr id="63" name="timeline-dot-6-1">
             <a:extLst xmlns:a="http://schemas.openxmlformats.org/drawingml/2006/main">
               <a:ext uri="{FF2B5EF4-FFF2-40B4-BE49-F238E27FC236}">
-                <a16:creationId xmlns:a16="http://schemas.microsoft.com/office/drawing/2014/main" id="{23CE8EB4-54C2-4298-BBAC-A48DE6BD8CDD}"/>
+                <a16:creationId xmlns:a16="http://schemas.microsoft.com/office/drawing/2014/main" id="{83F7F17E-DFF5-4602-A433-7EC80410F6D4}"/>
               </a:ext>
             </a:extLst>
           </p:cNvPr>
@@ -6042,7 +6109,7 @@
           <p:cNvPr id="64" name="timeline-item-6-1">
             <a:extLst xmlns:a="http://schemas.openxmlformats.org/drawingml/2006/main">
               <a:ext uri="{FF2B5EF4-FFF2-40B4-BE49-F238E27FC236}">
-                <a16:creationId xmlns:a16="http://schemas.microsoft.com/office/drawing/2014/main" id="{43FC7D4C-4B80-4BF1-ABF6-3A3B57D1C162}"/>
+                <a16:creationId xmlns:a16="http://schemas.microsoft.com/office/drawing/2014/main" id="{CF434223-636B-4CFF-BBF6-B4A450BFD78C}"/>
               </a:ext>
             </a:extLst>
           </p:cNvPr>
@@ -6092,7 +6159,7 @@
           <p:cNvPr id="65" name="timeline-dot-6-2">
             <a:extLst xmlns:a="http://schemas.openxmlformats.org/drawingml/2006/main">
               <a:ext uri="{FF2B5EF4-FFF2-40B4-BE49-F238E27FC236}">
-                <a16:creationId xmlns:a16="http://schemas.microsoft.com/office/drawing/2014/main" id="{00F3C90B-9B09-4E02-96E6-2EC70BB24F67}"/>
+                <a16:creationId xmlns:a16="http://schemas.microsoft.com/office/drawing/2014/main" id="{E5F42866-D2C3-4A9C-909E-4CD3FFA45FBB}"/>
               </a:ext>
             </a:extLst>
           </p:cNvPr>
@@ -6142,7 +6209,7 @@
           <p:cNvPr id="66" name="timeline-item-6-2">
             <a:extLst xmlns:a="http://schemas.openxmlformats.org/drawingml/2006/main">
               <a:ext uri="{FF2B5EF4-FFF2-40B4-BE49-F238E27FC236}">
-                <a16:creationId xmlns:a16="http://schemas.microsoft.com/office/drawing/2014/main" id="{F6D35562-8500-46E4-BDD1-E2B11DF4E942}"/>
+                <a16:creationId xmlns:a16="http://schemas.microsoft.com/office/drawing/2014/main" id="{444BF3D4-9B1D-486F-BF7E-3ACDE7EED7B8}"/>
               </a:ext>
             </a:extLst>
           </p:cNvPr>
@@ -6192,7 +6259,7 @@
           <p:cNvPr id="67" name="timeline-dot-6-3">
             <a:extLst xmlns:a="http://schemas.openxmlformats.org/drawingml/2006/main">
               <a:ext uri="{FF2B5EF4-FFF2-40B4-BE49-F238E27FC236}">
-                <a16:creationId xmlns:a16="http://schemas.microsoft.com/office/drawing/2014/main" id="{3C7B0809-D291-486E-8D05-B106B403C6D0}"/>
+                <a16:creationId xmlns:a16="http://schemas.microsoft.com/office/drawing/2014/main" id="{49B73551-D3AD-469F-837F-9F061FB7C950}"/>
               </a:ext>
             </a:extLst>
           </p:cNvPr>
@@ -6242,7 +6309,7 @@
           <p:cNvPr id="68" name="timeline-item-6-3">
             <a:extLst xmlns:a="http://schemas.openxmlformats.org/drawingml/2006/main">
               <a:ext uri="{FF2B5EF4-FFF2-40B4-BE49-F238E27FC236}">
-                <a16:creationId xmlns:a16="http://schemas.microsoft.com/office/drawing/2014/main" id="{3DB2143D-1795-4F0A-A6B3-2E7CBBFF69FC}"/>
+                <a16:creationId xmlns:a16="http://schemas.microsoft.com/office/drawing/2014/main" id="{01D074BC-7C5F-4480-8E3B-478348A888D0}"/>
               </a:ext>
             </a:extLst>
           </p:cNvPr>
@@ -6292,7 +6359,7 @@
           <p:cNvPr id="69" name="management-title">
             <a:extLst xmlns:a="http://schemas.openxmlformats.org/drawingml/2006/main">
               <a:ext uri="{FF2B5EF4-FFF2-40B4-BE49-F238E27FC236}">
-                <a16:creationId xmlns:a16="http://schemas.microsoft.com/office/drawing/2014/main" id="{8B4EED73-B94C-4426-9A47-C3E1523503CD}"/>
+                <a16:creationId xmlns:a16="http://schemas.microsoft.com/office/drawing/2014/main" id="{81FD49B8-6E8B-4979-A9A3-BBDB8F8FDF5B}"/>
               </a:ext>
             </a:extLst>
           </p:cNvPr>
@@ -6342,7 +6409,7 @@
           <p:cNvPr id="70" name="management-note">
             <a:extLst xmlns:a="http://schemas.openxmlformats.org/drawingml/2006/main">
               <a:ext uri="{FF2B5EF4-FFF2-40B4-BE49-F238E27FC236}">
-                <a16:creationId xmlns:a16="http://schemas.microsoft.com/office/drawing/2014/main" id="{07FBB63D-C0D7-4535-9B80-559FAF62DE84}"/>
+                <a16:creationId xmlns:a16="http://schemas.microsoft.com/office/drawing/2014/main" id="{F2BF0368-45DB-4324-810D-9BB1807276F6}"/>
               </a:ext>
             </a:extLst>
           </p:cNvPr>
@@ -6392,7 +6459,7 @@
           <p:cNvPr id="71" name="mgmt-card-1">
             <a:extLst xmlns:a="http://schemas.openxmlformats.org/drawingml/2006/main">
               <a:ext uri="{FF2B5EF4-FFF2-40B4-BE49-F238E27FC236}">
-                <a16:creationId xmlns:a16="http://schemas.microsoft.com/office/drawing/2014/main" id="{E15F8F58-41E2-4145-9110-900F0A06D938}"/>
+                <a16:creationId xmlns:a16="http://schemas.microsoft.com/office/drawing/2014/main" id="{214330EA-8D20-4A58-BF4D-9198743EA625}"/>
               </a:ext>
             </a:extLst>
           </p:cNvPr>
@@ -6427,7 +6494,7 @@
           <p:cNvPr id="72" name="mgmt-bar-1">
             <a:extLst xmlns:a="http://schemas.openxmlformats.org/drawingml/2006/main">
               <a:ext uri="{FF2B5EF4-FFF2-40B4-BE49-F238E27FC236}">
-                <a16:creationId xmlns:a16="http://schemas.microsoft.com/office/drawing/2014/main" id="{5B3F837C-7109-4855-9123-481E74B0D5EB}"/>
+                <a16:creationId xmlns:a16="http://schemas.microsoft.com/office/drawing/2014/main" id="{5B12E241-16BC-4C4F-8FE8-A9FDEF3074EC}"/>
               </a:ext>
             </a:extLst>
           </p:cNvPr>
@@ -6460,7 +6527,7 @@
           <p:cNvPr id="73" name="mgmt-label-1">
             <a:extLst xmlns:a="http://schemas.openxmlformats.org/drawingml/2006/main">
               <a:ext uri="{FF2B5EF4-FFF2-40B4-BE49-F238E27FC236}">
-                <a16:creationId xmlns:a16="http://schemas.microsoft.com/office/drawing/2014/main" id="{237F3CC8-6D45-4360-AA3C-588249C2306D}"/>
+                <a16:creationId xmlns:a16="http://schemas.microsoft.com/office/drawing/2014/main" id="{F42E2ECB-244E-40D9-BF5D-EFDD728C65B3}"/>
               </a:ext>
             </a:extLst>
           </p:cNvPr>
@@ -6510,7 +6577,7 @@
           <p:cNvPr id="74" name="mgmt-body-1">
             <a:extLst xmlns:a="http://schemas.openxmlformats.org/drawingml/2006/main">
               <a:ext uri="{FF2B5EF4-FFF2-40B4-BE49-F238E27FC236}">
-                <a16:creationId xmlns:a16="http://schemas.microsoft.com/office/drawing/2014/main" id="{A46A886F-0781-4E68-AC80-40EC536D198E}"/>
+                <a16:creationId xmlns:a16="http://schemas.microsoft.com/office/drawing/2014/main" id="{52794ABA-1CCD-4D6F-A11C-58F1F7B37F62}"/>
               </a:ext>
             </a:extLst>
           </p:cNvPr>
@@ -6560,7 +6627,7 @@
           <p:cNvPr id="75" name="mgmt-card-2">
             <a:extLst xmlns:a="http://schemas.openxmlformats.org/drawingml/2006/main">
               <a:ext uri="{FF2B5EF4-FFF2-40B4-BE49-F238E27FC236}">
-                <a16:creationId xmlns:a16="http://schemas.microsoft.com/office/drawing/2014/main" id="{386A610C-DB9A-401D-9367-B6E589338185}"/>
+                <a16:creationId xmlns:a16="http://schemas.microsoft.com/office/drawing/2014/main" id="{DA3EF0D6-CFA6-4C8F-8D14-652F84BFCE92}"/>
               </a:ext>
             </a:extLst>
           </p:cNvPr>
@@ -6595,7 +6662,7 @@
           <p:cNvPr id="76" name="mgmt-bar-2">
             <a:extLst xmlns:a="http://schemas.openxmlformats.org/drawingml/2006/main">
               <a:ext uri="{FF2B5EF4-FFF2-40B4-BE49-F238E27FC236}">
-                <a16:creationId xmlns:a16="http://schemas.microsoft.com/office/drawing/2014/main" id="{63907001-3C41-4709-80BB-702F1971E41B}"/>
+                <a16:creationId xmlns:a16="http://schemas.microsoft.com/office/drawing/2014/main" id="{ECCCCFB0-304F-4563-9A03-0FA192DAD55F}"/>
               </a:ext>
             </a:extLst>
           </p:cNvPr>
@@ -6628,7 +6695,7 @@
           <p:cNvPr id="77" name="mgmt-label-2">
             <a:extLst xmlns:a="http://schemas.openxmlformats.org/drawingml/2006/main">
               <a:ext uri="{FF2B5EF4-FFF2-40B4-BE49-F238E27FC236}">
-                <a16:creationId xmlns:a16="http://schemas.microsoft.com/office/drawing/2014/main" id="{E31B5C6D-D93C-4418-BA2F-F4ED3A07B9E0}"/>
+                <a16:creationId xmlns:a16="http://schemas.microsoft.com/office/drawing/2014/main" id="{9380BBCB-6962-42AD-A88A-19303B09C6ED}"/>
               </a:ext>
             </a:extLst>
           </p:cNvPr>
@@ -6678,7 +6745,7 @@
           <p:cNvPr id="78" name="mgmt-body-2">
             <a:extLst xmlns:a="http://schemas.openxmlformats.org/drawingml/2006/main">
               <a:ext uri="{FF2B5EF4-FFF2-40B4-BE49-F238E27FC236}">
-                <a16:creationId xmlns:a16="http://schemas.microsoft.com/office/drawing/2014/main" id="{C3AFEF9B-7CB3-407B-BA92-AB46521011C5}"/>
+                <a16:creationId xmlns:a16="http://schemas.microsoft.com/office/drawing/2014/main" id="{8D40C479-AE52-4CD2-BDFE-E9B3F5B8C24D}"/>
               </a:ext>
             </a:extLst>
           </p:cNvPr>
@@ -6728,7 +6795,7 @@
           <p:cNvPr id="79" name="mgmt-card-3">
             <a:extLst xmlns:a="http://schemas.openxmlformats.org/drawingml/2006/main">
               <a:ext uri="{FF2B5EF4-FFF2-40B4-BE49-F238E27FC236}">
-                <a16:creationId xmlns:a16="http://schemas.microsoft.com/office/drawing/2014/main" id="{C28F5A7E-C39A-4623-ACD1-2CEB3B2151F9}"/>
+                <a16:creationId xmlns:a16="http://schemas.microsoft.com/office/drawing/2014/main" id="{40D50289-9EB1-4105-BE93-AA937C0AE794}"/>
               </a:ext>
             </a:extLst>
           </p:cNvPr>
@@ -6763,7 +6830,7 @@
           <p:cNvPr id="80" name="mgmt-bar-3">
             <a:extLst xmlns:a="http://schemas.openxmlformats.org/drawingml/2006/main">
               <a:ext uri="{FF2B5EF4-FFF2-40B4-BE49-F238E27FC236}">
-                <a16:creationId xmlns:a16="http://schemas.microsoft.com/office/drawing/2014/main" id="{94BD03DC-19C0-42CA-9D39-3DB7A6821EEA}"/>
+                <a16:creationId xmlns:a16="http://schemas.microsoft.com/office/drawing/2014/main" id="{2C605BFE-34C6-4383-87B8-F42DD2B305D8}"/>
               </a:ext>
             </a:extLst>
           </p:cNvPr>
@@ -6796,7 +6863,7 @@
           <p:cNvPr id="81" name="mgmt-label-3">
             <a:extLst xmlns:a="http://schemas.openxmlformats.org/drawingml/2006/main">
               <a:ext uri="{FF2B5EF4-FFF2-40B4-BE49-F238E27FC236}">
-                <a16:creationId xmlns:a16="http://schemas.microsoft.com/office/drawing/2014/main" id="{7712DA1C-365D-40E1-98FF-8AF89476048D}"/>
+                <a16:creationId xmlns:a16="http://schemas.microsoft.com/office/drawing/2014/main" id="{08476F31-B075-4AE3-B056-2214BF85E904}"/>
               </a:ext>
             </a:extLst>
           </p:cNvPr>
@@ -6846,7 +6913,7 @@
           <p:cNvPr id="82" name="mgmt-body-3">
             <a:extLst xmlns:a="http://schemas.openxmlformats.org/drawingml/2006/main">
               <a:ext uri="{FF2B5EF4-FFF2-40B4-BE49-F238E27FC236}">
-                <a16:creationId xmlns:a16="http://schemas.microsoft.com/office/drawing/2014/main" id="{859373C5-3E2C-418E-A041-8539A06F2746}"/>
+                <a16:creationId xmlns:a16="http://schemas.microsoft.com/office/drawing/2014/main" id="{FDB9E9C8-7650-4EE3-B203-C8A44ADA1DCF}"/>
               </a:ext>
             </a:extLst>
           </p:cNvPr>
@@ -6896,7 +6963,7 @@
           <p:cNvPr id="83" name="mgmt-card-4">
             <a:extLst xmlns:a="http://schemas.openxmlformats.org/drawingml/2006/main">
               <a:ext uri="{FF2B5EF4-FFF2-40B4-BE49-F238E27FC236}">
-                <a16:creationId xmlns:a16="http://schemas.microsoft.com/office/drawing/2014/main" id="{38309886-AD96-4069-9518-C8F8BDB30675}"/>
+                <a16:creationId xmlns:a16="http://schemas.microsoft.com/office/drawing/2014/main" id="{FC84B524-684F-4CBF-9CB6-68EBC400B8CA}"/>
               </a:ext>
             </a:extLst>
           </p:cNvPr>
@@ -6931,7 +6998,7 @@
           <p:cNvPr id="84" name="mgmt-bar-4">
             <a:extLst xmlns:a="http://schemas.openxmlformats.org/drawingml/2006/main">
               <a:ext uri="{FF2B5EF4-FFF2-40B4-BE49-F238E27FC236}">
-                <a16:creationId xmlns:a16="http://schemas.microsoft.com/office/drawing/2014/main" id="{AA81157C-7363-426F-9EDD-131193BABEC3}"/>
+                <a16:creationId xmlns:a16="http://schemas.microsoft.com/office/drawing/2014/main" id="{2D9CF502-AB23-4BDB-95A2-7D528CB79A62}"/>
               </a:ext>
             </a:extLst>
           </p:cNvPr>
@@ -6964,7 +7031,7 @@
           <p:cNvPr id="85" name="mgmt-label-4">
             <a:extLst xmlns:a="http://schemas.openxmlformats.org/drawingml/2006/main">
               <a:ext uri="{FF2B5EF4-FFF2-40B4-BE49-F238E27FC236}">
-                <a16:creationId xmlns:a16="http://schemas.microsoft.com/office/drawing/2014/main" id="{DBFE5DAB-C994-46F2-A9AD-043F20682AD2}"/>
+                <a16:creationId xmlns:a16="http://schemas.microsoft.com/office/drawing/2014/main" id="{0121B710-2DF0-4BFD-9537-D7CBB0CB085D}"/>
               </a:ext>
             </a:extLst>
           </p:cNvPr>
@@ -7014,7 +7081,7 @@
           <p:cNvPr id="86" name="mgmt-body-4">
             <a:extLst xmlns:a="http://schemas.openxmlformats.org/drawingml/2006/main">
               <a:ext uri="{FF2B5EF4-FFF2-40B4-BE49-F238E27FC236}">
-                <a16:creationId xmlns:a16="http://schemas.microsoft.com/office/drawing/2014/main" id="{94101F82-460A-4F56-88F6-E90530C4CC7C}"/>
+                <a16:creationId xmlns:a16="http://schemas.microsoft.com/office/drawing/2014/main" id="{202840B4-DCA8-4FBD-B5BD-1E29AE970E85}"/>
               </a:ext>
             </a:extLst>
           </p:cNvPr>
@@ -7062,7 +7129,7 @@
     </p:spTree>
     <p:extLst>
       <p:ext uri="{BB962C8B-B14F-4D97-AF65-F5344CB8AC3E}">
-        <p14:creationId xmlns:p14="http://schemas.microsoft.com/office/powerpoint/2010/main" val="1115964379"/>
+        <p14:creationId xmlns:p14="http://schemas.microsoft.com/office/powerpoint/2010/main" val="260725782"/>
       </p:ext>
     </p:extLst>
   </p:cSld>
@@ -7093,7 +7160,7 @@
           <p:cNvPr id="1" name="top-accent">
             <a:extLst xmlns:a="http://schemas.openxmlformats.org/drawingml/2006/main">
               <a:ext uri="{FF2B5EF4-FFF2-40B4-BE49-F238E27FC236}">
-                <a16:creationId xmlns:a16="http://schemas.microsoft.com/office/drawing/2014/main" id="{D46B4306-9D20-4336-A531-1C1A6DDD207A}"/>
+                <a16:creationId xmlns:a16="http://schemas.microsoft.com/office/drawing/2014/main" id="{3EB7BB60-A81A-4221-BFAA-856A7B5822B7}"/>
               </a:ext>
             </a:extLst>
           </p:cNvPr>
@@ -7126,7 +7193,7 @@
           <p:cNvPr id="2" name="left-accent">
             <a:extLst xmlns:a="http://schemas.openxmlformats.org/drawingml/2006/main">
               <a:ext uri="{FF2B5EF4-FFF2-40B4-BE49-F238E27FC236}">
-                <a16:creationId xmlns:a16="http://schemas.microsoft.com/office/drawing/2014/main" id="{B4128A05-B984-4621-A74D-131000CA0555}"/>
+                <a16:creationId xmlns:a16="http://schemas.microsoft.com/office/drawing/2014/main" id="{857E7642-8C6F-4856-9A76-EDB1D51067FD}"/>
               </a:ext>
             </a:extLst>
           </p:cNvPr>
@@ -7159,7 +7226,7 @@
           <p:cNvPr id="3" name="eyebrow">
             <a:extLst xmlns:a="http://schemas.openxmlformats.org/drawingml/2006/main">
               <a:ext uri="{FF2B5EF4-FFF2-40B4-BE49-F238E27FC236}">
-                <a16:creationId xmlns:a16="http://schemas.microsoft.com/office/drawing/2014/main" id="{F08CE8A8-C31D-40E9-87BC-6F2489414B9E}"/>
+                <a16:creationId xmlns:a16="http://schemas.microsoft.com/office/drawing/2014/main" id="{8C239429-1459-4355-A120-9AC580184E99}"/>
               </a:ext>
             </a:extLst>
           </p:cNvPr>
@@ -7209,7 +7276,7 @@
           <p:cNvPr id="4" name="footer">
             <a:extLst xmlns:a="http://schemas.openxmlformats.org/drawingml/2006/main">
               <a:ext uri="{FF2B5EF4-FFF2-40B4-BE49-F238E27FC236}">
-                <a16:creationId xmlns:a16="http://schemas.microsoft.com/office/drawing/2014/main" id="{B8C3D7A1-E0C2-49E1-901E-2FA76B0F45F9}"/>
+                <a16:creationId xmlns:a16="http://schemas.microsoft.com/office/drawing/2014/main" id="{F87AAE41-6BE4-4EAD-B114-B0363D01BDD8}"/>
               </a:ext>
             </a:extLst>
           </p:cNvPr>
@@ -7259,7 +7326,7 @@
           <p:cNvPr id="5" name="page-no">
             <a:extLst xmlns:a="http://schemas.openxmlformats.org/drawingml/2006/main">
               <a:ext uri="{FF2B5EF4-FFF2-40B4-BE49-F238E27FC236}">
-                <a16:creationId xmlns:a16="http://schemas.microsoft.com/office/drawing/2014/main" id="{26EE5217-6495-42F4-BE93-F02CA7431E84}"/>
+                <a16:creationId xmlns:a16="http://schemas.microsoft.com/office/drawing/2014/main" id="{0192D806-A68B-450E-AF46-A519864A6638}"/>
               </a:ext>
             </a:extLst>
           </p:cNvPr>
@@ -7309,7 +7376,7 @@
           <p:cNvPr id="6" name="title-03">
             <a:extLst xmlns:a="http://schemas.openxmlformats.org/drawingml/2006/main">
               <a:ext uri="{FF2B5EF4-FFF2-40B4-BE49-F238E27FC236}">
-                <a16:creationId xmlns:a16="http://schemas.microsoft.com/office/drawing/2014/main" id="{E3099A91-2E26-4554-A522-2D8D935322F5}"/>
+                <a16:creationId xmlns:a16="http://schemas.microsoft.com/office/drawing/2014/main" id="{400FF3BB-E8B4-4B4B-917D-E56A14F44F83}"/>
               </a:ext>
             </a:extLst>
           </p:cNvPr>
@@ -7359,7 +7426,7 @@
           <p:cNvPr id="7" name="subtitle-03">
             <a:extLst xmlns:a="http://schemas.openxmlformats.org/drawingml/2006/main">
               <a:ext uri="{FF2B5EF4-FFF2-40B4-BE49-F238E27FC236}">
-                <a16:creationId xmlns:a16="http://schemas.microsoft.com/office/drawing/2014/main" id="{784D9ACE-EA34-4E9C-AC21-2865A4634388}"/>
+                <a16:creationId xmlns:a16="http://schemas.microsoft.com/office/drawing/2014/main" id="{FFCF6FD9-A654-471F-8086-0D62B0336EEA}"/>
               </a:ext>
             </a:extLst>
           </p:cNvPr>
@@ -7409,7 +7476,7 @@
           <p:cNvPr id="8" name="gate-section-title">
             <a:extLst xmlns:a="http://schemas.openxmlformats.org/drawingml/2006/main">
               <a:ext uri="{FF2B5EF4-FFF2-40B4-BE49-F238E27FC236}">
-                <a16:creationId xmlns:a16="http://schemas.microsoft.com/office/drawing/2014/main" id="{FDA28168-CCF0-4E29-9B23-022E05A5A742}"/>
+                <a16:creationId xmlns:a16="http://schemas.microsoft.com/office/drawing/2014/main" id="{25C9F0AE-3359-4748-A3D9-B5E334B1A028}"/>
               </a:ext>
             </a:extLst>
           </p:cNvPr>
@@ -7459,7 +7526,7 @@
           <p:cNvPr id="9" name="gate-card-1">
             <a:extLst xmlns:a="http://schemas.openxmlformats.org/drawingml/2006/main">
               <a:ext uri="{FF2B5EF4-FFF2-40B4-BE49-F238E27FC236}">
-                <a16:creationId xmlns:a16="http://schemas.microsoft.com/office/drawing/2014/main" id="{7D19993D-E6B5-4344-926F-984B6D27425F}"/>
+                <a16:creationId xmlns:a16="http://schemas.microsoft.com/office/drawing/2014/main" id="{777B3A21-3CB8-4DC1-91DD-DC22CED55E10}"/>
               </a:ext>
             </a:extLst>
           </p:cNvPr>
@@ -7494,7 +7561,7 @@
           <p:cNvPr id="10" name="gate-bar-1">
             <a:extLst xmlns:a="http://schemas.openxmlformats.org/drawingml/2006/main">
               <a:ext uri="{FF2B5EF4-FFF2-40B4-BE49-F238E27FC236}">
-                <a16:creationId xmlns:a16="http://schemas.microsoft.com/office/drawing/2014/main" id="{46F831CF-0307-4F61-92A8-AE2B682C8730}"/>
+                <a16:creationId xmlns:a16="http://schemas.microsoft.com/office/drawing/2014/main" id="{4E207772-F4D0-4C99-87CD-3516997E8BFE}"/>
               </a:ext>
             </a:extLst>
           </p:cNvPr>
@@ -7527,7 +7594,7 @@
           <p:cNvPr id="11" name="gate-phase-1">
             <a:extLst xmlns:a="http://schemas.openxmlformats.org/drawingml/2006/main">
               <a:ext uri="{FF2B5EF4-FFF2-40B4-BE49-F238E27FC236}">
-                <a16:creationId xmlns:a16="http://schemas.microsoft.com/office/drawing/2014/main" id="{FC19F9D9-955D-46BF-B655-09CF7BE27047}"/>
+                <a16:creationId xmlns:a16="http://schemas.microsoft.com/office/drawing/2014/main" id="{3EC8A907-0B52-4D17-841D-AB36FEDE415E}"/>
               </a:ext>
             </a:extLst>
           </p:cNvPr>
@@ -7577,7 +7644,7 @@
           <p:cNvPr id="12" name="gate-title-1">
             <a:extLst xmlns:a="http://schemas.openxmlformats.org/drawingml/2006/main">
               <a:ext uri="{FF2B5EF4-FFF2-40B4-BE49-F238E27FC236}">
-                <a16:creationId xmlns:a16="http://schemas.microsoft.com/office/drawing/2014/main" id="{27F803DD-0952-4D72-861C-F7F5AE048CFE}"/>
+                <a16:creationId xmlns:a16="http://schemas.microsoft.com/office/drawing/2014/main" id="{F42D4286-B71C-449F-B843-1C6AB38AB5DF}"/>
               </a:ext>
             </a:extLst>
           </p:cNvPr>
@@ -7627,7 +7694,7 @@
           <p:cNvPr id="13" name="gate-body-1">
             <a:extLst xmlns:a="http://schemas.openxmlformats.org/drawingml/2006/main">
               <a:ext uri="{FF2B5EF4-FFF2-40B4-BE49-F238E27FC236}">
-                <a16:creationId xmlns:a16="http://schemas.microsoft.com/office/drawing/2014/main" id="{D6E41A6B-72B9-4140-9002-ED8F685FFCC2}"/>
+                <a16:creationId xmlns:a16="http://schemas.microsoft.com/office/drawing/2014/main" id="{D26BF611-48EB-4465-850B-46149BAB3CDF}"/>
               </a:ext>
             </a:extLst>
           </p:cNvPr>
@@ -7677,7 +7744,7 @@
           <p:cNvPr id="14" name="gate-card-2">
             <a:extLst xmlns:a="http://schemas.openxmlformats.org/drawingml/2006/main">
               <a:ext uri="{FF2B5EF4-FFF2-40B4-BE49-F238E27FC236}">
-                <a16:creationId xmlns:a16="http://schemas.microsoft.com/office/drawing/2014/main" id="{A3AE2984-59B3-4320-85BF-DFB52EE9025B}"/>
+                <a16:creationId xmlns:a16="http://schemas.microsoft.com/office/drawing/2014/main" id="{AE9E34CF-3C33-4346-86F5-F484F381D114}"/>
               </a:ext>
             </a:extLst>
           </p:cNvPr>
@@ -7712,7 +7779,7 @@
           <p:cNvPr id="15" name="gate-bar-2">
             <a:extLst xmlns:a="http://schemas.openxmlformats.org/drawingml/2006/main">
               <a:ext uri="{FF2B5EF4-FFF2-40B4-BE49-F238E27FC236}">
-                <a16:creationId xmlns:a16="http://schemas.microsoft.com/office/drawing/2014/main" id="{FA8AD2D0-EEBE-4F9D-9DF4-E42660FEDB7B}"/>
+                <a16:creationId xmlns:a16="http://schemas.microsoft.com/office/drawing/2014/main" id="{63D4C70D-0ADE-482A-B033-B79C4BB635A3}"/>
               </a:ext>
             </a:extLst>
           </p:cNvPr>
@@ -7745,7 +7812,7 @@
           <p:cNvPr id="16" name="gate-phase-2">
             <a:extLst xmlns:a="http://schemas.openxmlformats.org/drawingml/2006/main">
               <a:ext uri="{FF2B5EF4-FFF2-40B4-BE49-F238E27FC236}">
-                <a16:creationId xmlns:a16="http://schemas.microsoft.com/office/drawing/2014/main" id="{6C444459-AF88-4266-8B2F-CDAF117C7DC4}"/>
+                <a16:creationId xmlns:a16="http://schemas.microsoft.com/office/drawing/2014/main" id="{B62AB49F-1D11-4D70-92BF-2B061CF8FA45}"/>
               </a:ext>
             </a:extLst>
           </p:cNvPr>
@@ -7795,7 +7862,7 @@
           <p:cNvPr id="17" name="gate-title-2">
             <a:extLst xmlns:a="http://schemas.openxmlformats.org/drawingml/2006/main">
               <a:ext uri="{FF2B5EF4-FFF2-40B4-BE49-F238E27FC236}">
-                <a16:creationId xmlns:a16="http://schemas.microsoft.com/office/drawing/2014/main" id="{F2E6CAC6-313C-43C1-858A-E18C2CC72588}"/>
+                <a16:creationId xmlns:a16="http://schemas.microsoft.com/office/drawing/2014/main" id="{0A57A3EF-2428-4F6F-BC17-4168736382D5}"/>
               </a:ext>
             </a:extLst>
           </p:cNvPr>
@@ -7845,7 +7912,7 @@
           <p:cNvPr id="18" name="gate-body-2">
             <a:extLst xmlns:a="http://schemas.openxmlformats.org/drawingml/2006/main">
               <a:ext uri="{FF2B5EF4-FFF2-40B4-BE49-F238E27FC236}">
-                <a16:creationId xmlns:a16="http://schemas.microsoft.com/office/drawing/2014/main" id="{25422143-0984-4043-AD06-5BBF28838B20}"/>
+                <a16:creationId xmlns:a16="http://schemas.microsoft.com/office/drawing/2014/main" id="{7E89D2E4-89B8-45AD-94F2-22D33DF6C848}"/>
               </a:ext>
             </a:extLst>
           </p:cNvPr>
@@ -7895,7 +7962,7 @@
           <p:cNvPr id="19" name="gate-card-3">
             <a:extLst xmlns:a="http://schemas.openxmlformats.org/drawingml/2006/main">
               <a:ext uri="{FF2B5EF4-FFF2-40B4-BE49-F238E27FC236}">
-                <a16:creationId xmlns:a16="http://schemas.microsoft.com/office/drawing/2014/main" id="{B7F809EA-C6B0-4117-882B-476B2BA41A0D}"/>
+                <a16:creationId xmlns:a16="http://schemas.microsoft.com/office/drawing/2014/main" id="{1A6B040D-2F1D-48C0-8F8A-D747FF0B5062}"/>
               </a:ext>
             </a:extLst>
           </p:cNvPr>
@@ -7930,7 +7997,7 @@
           <p:cNvPr id="20" name="gate-bar-3">
             <a:extLst xmlns:a="http://schemas.openxmlformats.org/drawingml/2006/main">
               <a:ext uri="{FF2B5EF4-FFF2-40B4-BE49-F238E27FC236}">
-                <a16:creationId xmlns:a16="http://schemas.microsoft.com/office/drawing/2014/main" id="{5BFE7A5F-F0F4-4950-B8F0-20139CDA088A}"/>
+                <a16:creationId xmlns:a16="http://schemas.microsoft.com/office/drawing/2014/main" id="{C26EB7B0-6A96-44C6-B725-5F95E5E83A5B}"/>
               </a:ext>
             </a:extLst>
           </p:cNvPr>
@@ -7963,7 +8030,7 @@
           <p:cNvPr id="21" name="gate-phase-3">
             <a:extLst xmlns:a="http://schemas.openxmlformats.org/drawingml/2006/main">
               <a:ext uri="{FF2B5EF4-FFF2-40B4-BE49-F238E27FC236}">
-                <a16:creationId xmlns:a16="http://schemas.microsoft.com/office/drawing/2014/main" id="{1EBE3083-D550-451F-990A-0DE78BCE00DF}"/>
+                <a16:creationId xmlns:a16="http://schemas.microsoft.com/office/drawing/2014/main" id="{581CC93B-D294-4E54-A343-5A62810EB5F3}"/>
               </a:ext>
             </a:extLst>
           </p:cNvPr>
@@ -8013,7 +8080,7 @@
           <p:cNvPr id="22" name="gate-title-3">
             <a:extLst xmlns:a="http://schemas.openxmlformats.org/drawingml/2006/main">
               <a:ext uri="{FF2B5EF4-FFF2-40B4-BE49-F238E27FC236}">
-                <a16:creationId xmlns:a16="http://schemas.microsoft.com/office/drawing/2014/main" id="{3EA761F6-CCC0-4DCC-866F-9B1D229D0706}"/>
+                <a16:creationId xmlns:a16="http://schemas.microsoft.com/office/drawing/2014/main" id="{FC4C5FEA-83E8-4A41-A89C-0A6AF97654B8}"/>
               </a:ext>
             </a:extLst>
           </p:cNvPr>
@@ -8063,7 +8130,7 @@
           <p:cNvPr id="23" name="gate-body-3">
             <a:extLst xmlns:a="http://schemas.openxmlformats.org/drawingml/2006/main">
               <a:ext uri="{FF2B5EF4-FFF2-40B4-BE49-F238E27FC236}">
-                <a16:creationId xmlns:a16="http://schemas.microsoft.com/office/drawing/2014/main" id="{6CD3FBE4-73F7-41E5-980E-88B634501656}"/>
+                <a16:creationId xmlns:a16="http://schemas.microsoft.com/office/drawing/2014/main" id="{BDD61952-2842-4629-A9A9-9BB996A7E707}"/>
               </a:ext>
             </a:extLst>
           </p:cNvPr>
@@ -8113,7 +8180,7 @@
           <p:cNvPr id="24" name="decision-title">
             <a:extLst xmlns:a="http://schemas.openxmlformats.org/drawingml/2006/main">
               <a:ext uri="{FF2B5EF4-FFF2-40B4-BE49-F238E27FC236}">
-                <a16:creationId xmlns:a16="http://schemas.microsoft.com/office/drawing/2014/main" id="{91BE98DA-DC8E-4009-B02C-74B589B9AF54}"/>
+                <a16:creationId xmlns:a16="http://schemas.microsoft.com/office/drawing/2014/main" id="{6EFC0A1C-F1B5-443B-81ED-F3E7A6212B5B}"/>
               </a:ext>
             </a:extLst>
           </p:cNvPr>
@@ -8163,7 +8230,7 @@
           <p:cNvPr id="25" name="decision-note">
             <a:extLst xmlns:a="http://schemas.openxmlformats.org/drawingml/2006/main">
               <a:ext uri="{FF2B5EF4-FFF2-40B4-BE49-F238E27FC236}">
-                <a16:creationId xmlns:a16="http://schemas.microsoft.com/office/drawing/2014/main" id="{FC2CAF70-273B-4045-8C06-94AD914701D6}"/>
+                <a16:creationId xmlns:a16="http://schemas.microsoft.com/office/drawing/2014/main" id="{8E7E10EE-8412-4C41-9548-5028061E59B7}"/>
               </a:ext>
             </a:extLst>
           </p:cNvPr>
@@ -8213,7 +8280,7 @@
           <p:cNvPr id="26" name="decision-header">
             <a:extLst xmlns:a="http://schemas.openxmlformats.org/drawingml/2006/main">
               <a:ext uri="{FF2B5EF4-FFF2-40B4-BE49-F238E27FC236}">
-                <a16:creationId xmlns:a16="http://schemas.microsoft.com/office/drawing/2014/main" id="{C063CA54-1701-4D04-B059-83D47151CFA2}"/>
+                <a16:creationId xmlns:a16="http://schemas.microsoft.com/office/drawing/2014/main" id="{5A9DEEFA-748D-4FB6-A755-3DE04EC5D892}"/>
               </a:ext>
             </a:extLst>
           </p:cNvPr>
@@ -8246,7 +8313,7 @@
           <p:cNvPr id="27" name="decision-th-1">
             <a:extLst xmlns:a="http://schemas.openxmlformats.org/drawingml/2006/main">
               <a:ext uri="{FF2B5EF4-FFF2-40B4-BE49-F238E27FC236}">
-                <a16:creationId xmlns:a16="http://schemas.microsoft.com/office/drawing/2014/main" id="{B3C1901D-32D8-4B40-87D3-21D9037CC815}"/>
+                <a16:creationId xmlns:a16="http://schemas.microsoft.com/office/drawing/2014/main" id="{A505AA36-0942-4E43-A8F8-F469B3E60904}"/>
               </a:ext>
             </a:extLst>
           </p:cNvPr>
@@ -8296,7 +8363,7 @@
           <p:cNvPr id="28" name="decision-th-2">
             <a:extLst xmlns:a="http://schemas.openxmlformats.org/drawingml/2006/main">
               <a:ext uri="{FF2B5EF4-FFF2-40B4-BE49-F238E27FC236}">
-                <a16:creationId xmlns:a16="http://schemas.microsoft.com/office/drawing/2014/main" id="{45A0327C-AB85-4FCC-A1AE-EECEAEBABD26}"/>
+                <a16:creationId xmlns:a16="http://schemas.microsoft.com/office/drawing/2014/main" id="{4637E029-5CFD-4253-B3A8-7FD1A37B91C8}"/>
               </a:ext>
             </a:extLst>
           </p:cNvPr>
@@ -8346,7 +8413,7 @@
           <p:cNvPr id="29" name="decision-th-3">
             <a:extLst xmlns:a="http://schemas.openxmlformats.org/drawingml/2006/main">
               <a:ext uri="{FF2B5EF4-FFF2-40B4-BE49-F238E27FC236}">
-                <a16:creationId xmlns:a16="http://schemas.microsoft.com/office/drawing/2014/main" id="{BBD47427-C55A-4E20-9C9B-2BFBB2DBAC1F}"/>
+                <a16:creationId xmlns:a16="http://schemas.microsoft.com/office/drawing/2014/main" id="{70E682DF-3770-401C-B16E-191F17249714}"/>
               </a:ext>
             </a:extLst>
           </p:cNvPr>
@@ -8396,7 +8463,7 @@
           <p:cNvPr id="30" name="decision-row-1">
             <a:extLst xmlns:a="http://schemas.openxmlformats.org/drawingml/2006/main">
               <a:ext uri="{FF2B5EF4-FFF2-40B4-BE49-F238E27FC236}">
-                <a16:creationId xmlns:a16="http://schemas.microsoft.com/office/drawing/2014/main" id="{3ED38D39-8961-47AC-A7FF-98E31DD4EB42}"/>
+                <a16:creationId xmlns:a16="http://schemas.microsoft.com/office/drawing/2014/main" id="{5DCDC5A9-612F-4C52-B3C0-87B20D2A850C}"/>
               </a:ext>
             </a:extLst>
           </p:cNvPr>
@@ -8429,7 +8496,7 @@
           <p:cNvPr id="31" name="decision-item-1">
             <a:extLst xmlns:a="http://schemas.openxmlformats.org/drawingml/2006/main">
               <a:ext uri="{FF2B5EF4-FFF2-40B4-BE49-F238E27FC236}">
-                <a16:creationId xmlns:a16="http://schemas.microsoft.com/office/drawing/2014/main" id="{3B808020-5681-4F4B-A862-31BD16C2E99B}"/>
+                <a16:creationId xmlns:a16="http://schemas.microsoft.com/office/drawing/2014/main" id="{6783431C-648C-43B2-8080-806C043E79B8}"/>
               </a:ext>
             </a:extLst>
           </p:cNvPr>
@@ -8479,7 +8546,7 @@
           <p:cNvPr id="32" name="decision-gate-1">
             <a:extLst xmlns:a="http://schemas.openxmlformats.org/drawingml/2006/main">
               <a:ext uri="{FF2B5EF4-FFF2-40B4-BE49-F238E27FC236}">
-                <a16:creationId xmlns:a16="http://schemas.microsoft.com/office/drawing/2014/main" id="{EB88E084-E2CB-4FC1-BBCF-BF9209CB4F1D}"/>
+                <a16:creationId xmlns:a16="http://schemas.microsoft.com/office/drawing/2014/main" id="{0578B333-7423-4D96-8DD6-4CB412EC15B0}"/>
               </a:ext>
             </a:extLst>
           </p:cNvPr>
@@ -8529,7 +8596,7 @@
           <p:cNvPr id="33" name="decision-owner-1">
             <a:extLst xmlns:a="http://schemas.openxmlformats.org/drawingml/2006/main">
               <a:ext uri="{FF2B5EF4-FFF2-40B4-BE49-F238E27FC236}">
-                <a16:creationId xmlns:a16="http://schemas.microsoft.com/office/drawing/2014/main" id="{5EA37DA0-39F0-4B80-98A6-BAAE1391A657}"/>
+                <a16:creationId xmlns:a16="http://schemas.microsoft.com/office/drawing/2014/main" id="{338EF0B4-274D-4D1D-B4DC-2DE25FCAE402}"/>
               </a:ext>
             </a:extLst>
           </p:cNvPr>
@@ -8579,7 +8646,7 @@
           <p:cNvPr id="34" name="decision-row-2">
             <a:extLst xmlns:a="http://schemas.openxmlformats.org/drawingml/2006/main">
               <a:ext uri="{FF2B5EF4-FFF2-40B4-BE49-F238E27FC236}">
-                <a16:creationId xmlns:a16="http://schemas.microsoft.com/office/drawing/2014/main" id="{7E765816-370C-497A-86E7-36371D74BF0A}"/>
+                <a16:creationId xmlns:a16="http://schemas.microsoft.com/office/drawing/2014/main" id="{C8E36A90-677B-44C3-AA97-06A01AC73DA1}"/>
               </a:ext>
             </a:extLst>
           </p:cNvPr>
@@ -8612,7 +8679,7 @@
           <p:cNvPr id="35" name="decision-item-2">
             <a:extLst xmlns:a="http://schemas.openxmlformats.org/drawingml/2006/main">
               <a:ext uri="{FF2B5EF4-FFF2-40B4-BE49-F238E27FC236}">
-                <a16:creationId xmlns:a16="http://schemas.microsoft.com/office/drawing/2014/main" id="{1313EDB3-5DB0-420E-9239-35D5648E257A}"/>
+                <a16:creationId xmlns:a16="http://schemas.microsoft.com/office/drawing/2014/main" id="{276669F5-8BB1-4538-A815-95960E7AC83A}"/>
               </a:ext>
             </a:extLst>
           </p:cNvPr>
@@ -8662,7 +8729,7 @@
           <p:cNvPr id="36" name="decision-gate-2">
             <a:extLst xmlns:a="http://schemas.openxmlformats.org/drawingml/2006/main">
               <a:ext uri="{FF2B5EF4-FFF2-40B4-BE49-F238E27FC236}">
-                <a16:creationId xmlns:a16="http://schemas.microsoft.com/office/drawing/2014/main" id="{EBED3E62-5C3F-44F3-B31D-188CFDDD7AE0}"/>
+                <a16:creationId xmlns:a16="http://schemas.microsoft.com/office/drawing/2014/main" id="{30CF9AFA-FA2E-4CDD-8FED-932CC196DA2A}"/>
               </a:ext>
             </a:extLst>
           </p:cNvPr>
@@ -8712,7 +8779,7 @@
           <p:cNvPr id="37" name="decision-owner-2">
             <a:extLst xmlns:a="http://schemas.openxmlformats.org/drawingml/2006/main">
               <a:ext uri="{FF2B5EF4-FFF2-40B4-BE49-F238E27FC236}">
-                <a16:creationId xmlns:a16="http://schemas.microsoft.com/office/drawing/2014/main" id="{ED943F7E-2499-4806-872C-44A48CD45DA3}"/>
+                <a16:creationId xmlns:a16="http://schemas.microsoft.com/office/drawing/2014/main" id="{6DAC7832-FB6C-4174-8953-41C19985F3C3}"/>
               </a:ext>
             </a:extLst>
           </p:cNvPr>
@@ -8762,7 +8829,7 @@
           <p:cNvPr id="38" name="decision-row-3">
             <a:extLst xmlns:a="http://schemas.openxmlformats.org/drawingml/2006/main">
               <a:ext uri="{FF2B5EF4-FFF2-40B4-BE49-F238E27FC236}">
-                <a16:creationId xmlns:a16="http://schemas.microsoft.com/office/drawing/2014/main" id="{133B6815-F68D-48EA-B870-1A8AACDD5CC8}"/>
+                <a16:creationId xmlns:a16="http://schemas.microsoft.com/office/drawing/2014/main" id="{248F2F7F-3B06-417E-BC69-AD30E74515DB}"/>
               </a:ext>
             </a:extLst>
           </p:cNvPr>
@@ -8795,7 +8862,7 @@
           <p:cNvPr id="39" name="decision-item-3">
             <a:extLst xmlns:a="http://schemas.openxmlformats.org/drawingml/2006/main">
               <a:ext uri="{FF2B5EF4-FFF2-40B4-BE49-F238E27FC236}">
-                <a16:creationId xmlns:a16="http://schemas.microsoft.com/office/drawing/2014/main" id="{E75F62CA-379B-4333-A928-B0FBA23063B7}"/>
+                <a16:creationId xmlns:a16="http://schemas.microsoft.com/office/drawing/2014/main" id="{530EA9C0-16E5-48C4-8F67-16E0E0EE7E91}"/>
               </a:ext>
             </a:extLst>
           </p:cNvPr>
@@ -8845,7 +8912,7 @@
           <p:cNvPr id="40" name="decision-gate-3">
             <a:extLst xmlns:a="http://schemas.openxmlformats.org/drawingml/2006/main">
               <a:ext uri="{FF2B5EF4-FFF2-40B4-BE49-F238E27FC236}">
-                <a16:creationId xmlns:a16="http://schemas.microsoft.com/office/drawing/2014/main" id="{35D48100-3790-4EC2-AEFA-0C477444A252}"/>
+                <a16:creationId xmlns:a16="http://schemas.microsoft.com/office/drawing/2014/main" id="{A1CF1751-1721-45C0-9C15-CA90830979B7}"/>
               </a:ext>
             </a:extLst>
           </p:cNvPr>
@@ -8895,7 +8962,7 @@
           <p:cNvPr id="41" name="decision-owner-3">
             <a:extLst xmlns:a="http://schemas.openxmlformats.org/drawingml/2006/main">
               <a:ext uri="{FF2B5EF4-FFF2-40B4-BE49-F238E27FC236}">
-                <a16:creationId xmlns:a16="http://schemas.microsoft.com/office/drawing/2014/main" id="{66DE90A7-5E34-45B5-BD3B-35AB284FAC92}"/>
+                <a16:creationId xmlns:a16="http://schemas.microsoft.com/office/drawing/2014/main" id="{37626D71-7F82-45E2-9449-6423B51BDC51}"/>
               </a:ext>
             </a:extLst>
           </p:cNvPr>
@@ -8945,7 +9012,7 @@
           <p:cNvPr id="42" name="decision-row-4">
             <a:extLst xmlns:a="http://schemas.openxmlformats.org/drawingml/2006/main">
               <a:ext uri="{FF2B5EF4-FFF2-40B4-BE49-F238E27FC236}">
-                <a16:creationId xmlns:a16="http://schemas.microsoft.com/office/drawing/2014/main" id="{6B0087D5-23CD-41CC-893C-08ACE8C3DF21}"/>
+                <a16:creationId xmlns:a16="http://schemas.microsoft.com/office/drawing/2014/main" id="{194EA436-81B0-46C4-AB60-A222572D5CFF}"/>
               </a:ext>
             </a:extLst>
           </p:cNvPr>
@@ -8978,7 +9045,7 @@
           <p:cNvPr id="43" name="decision-item-4">
             <a:extLst xmlns:a="http://schemas.openxmlformats.org/drawingml/2006/main">
               <a:ext uri="{FF2B5EF4-FFF2-40B4-BE49-F238E27FC236}">
-                <a16:creationId xmlns:a16="http://schemas.microsoft.com/office/drawing/2014/main" id="{6DBE7842-D2DA-4895-9349-5A40EBD686FA}"/>
+                <a16:creationId xmlns:a16="http://schemas.microsoft.com/office/drawing/2014/main" id="{1CCE1734-81CB-4B4F-AE20-F153661D15D5}"/>
               </a:ext>
             </a:extLst>
           </p:cNvPr>
@@ -9028,7 +9095,7 @@
           <p:cNvPr id="44" name="decision-gate-4">
             <a:extLst xmlns:a="http://schemas.openxmlformats.org/drawingml/2006/main">
               <a:ext uri="{FF2B5EF4-FFF2-40B4-BE49-F238E27FC236}">
-                <a16:creationId xmlns:a16="http://schemas.microsoft.com/office/drawing/2014/main" id="{5A9E6EEA-2B1A-4A35-B570-DBEB7193C2B3}"/>
+                <a16:creationId xmlns:a16="http://schemas.microsoft.com/office/drawing/2014/main" id="{76575866-2F77-4717-B3F0-62D65A102A6B}"/>
               </a:ext>
             </a:extLst>
           </p:cNvPr>
@@ -9078,7 +9145,7 @@
           <p:cNvPr id="45" name="decision-owner-4">
             <a:extLst xmlns:a="http://schemas.openxmlformats.org/drawingml/2006/main">
               <a:ext uri="{FF2B5EF4-FFF2-40B4-BE49-F238E27FC236}">
-                <a16:creationId xmlns:a16="http://schemas.microsoft.com/office/drawing/2014/main" id="{438E4FAF-4E13-4C2D-A34C-CECEA7B593CA}"/>
+                <a16:creationId xmlns:a16="http://schemas.microsoft.com/office/drawing/2014/main" id="{B15E2F0D-A642-4366-A5A3-3EB73FB9DE33}"/>
               </a:ext>
             </a:extLst>
           </p:cNvPr>
@@ -9128,7 +9195,7 @@
           <p:cNvPr id="46" name="decision-row-5">
             <a:extLst xmlns:a="http://schemas.openxmlformats.org/drawingml/2006/main">
               <a:ext uri="{FF2B5EF4-FFF2-40B4-BE49-F238E27FC236}">
-                <a16:creationId xmlns:a16="http://schemas.microsoft.com/office/drawing/2014/main" id="{04225715-7089-4861-B6D1-DEA0CEFF3D01}"/>
+                <a16:creationId xmlns:a16="http://schemas.microsoft.com/office/drawing/2014/main" id="{32ABCF23-BBC8-4B04-9EEE-D3536755EE2E}"/>
               </a:ext>
             </a:extLst>
           </p:cNvPr>
@@ -9161,7 +9228,7 @@
           <p:cNvPr id="47" name="decision-item-5">
             <a:extLst xmlns:a="http://schemas.openxmlformats.org/drawingml/2006/main">
               <a:ext uri="{FF2B5EF4-FFF2-40B4-BE49-F238E27FC236}">
-                <a16:creationId xmlns:a16="http://schemas.microsoft.com/office/drawing/2014/main" id="{C9675159-5B41-41D7-9A93-FA0F735E6630}"/>
+                <a16:creationId xmlns:a16="http://schemas.microsoft.com/office/drawing/2014/main" id="{3F752D59-5BA9-4112-96F2-0F3977543531}"/>
               </a:ext>
             </a:extLst>
           </p:cNvPr>
@@ -9211,7 +9278,7 @@
           <p:cNvPr id="48" name="decision-gate-5">
             <a:extLst xmlns:a="http://schemas.openxmlformats.org/drawingml/2006/main">
               <a:ext uri="{FF2B5EF4-FFF2-40B4-BE49-F238E27FC236}">
-                <a16:creationId xmlns:a16="http://schemas.microsoft.com/office/drawing/2014/main" id="{8B84A2B6-A7A0-4EB8-854F-2B24B5414F78}"/>
+                <a16:creationId xmlns:a16="http://schemas.microsoft.com/office/drawing/2014/main" id="{6374686F-E9DF-430D-B14B-3733572417C3}"/>
               </a:ext>
             </a:extLst>
           </p:cNvPr>
@@ -9261,7 +9328,7 @@
           <p:cNvPr id="49" name="decision-owner-5">
             <a:extLst xmlns:a="http://schemas.openxmlformats.org/drawingml/2006/main">
               <a:ext uri="{FF2B5EF4-FFF2-40B4-BE49-F238E27FC236}">
-                <a16:creationId xmlns:a16="http://schemas.microsoft.com/office/drawing/2014/main" id="{B1FD36A6-41A5-4800-BB25-912BA864BA2C}"/>
+                <a16:creationId xmlns:a16="http://schemas.microsoft.com/office/drawing/2014/main" id="{03AD10AD-F592-491E-B9B9-A1DBDAC8E06B}"/>
               </a:ext>
             </a:extLst>
           </p:cNvPr>
@@ -9311,7 +9378,7 @@
           <p:cNvPr id="50" name="principle-panel">
             <a:extLst xmlns:a="http://schemas.openxmlformats.org/drawingml/2006/main">
               <a:ext uri="{FF2B5EF4-FFF2-40B4-BE49-F238E27FC236}">
-                <a16:creationId xmlns:a16="http://schemas.microsoft.com/office/drawing/2014/main" id="{8E22E816-F035-4E45-93BA-8627E00E2619}"/>
+                <a16:creationId xmlns:a16="http://schemas.microsoft.com/office/drawing/2014/main" id="{B7A51F87-951F-4FF3-AC21-FFE2B5CD18BA}"/>
               </a:ext>
             </a:extLst>
           </p:cNvPr>
@@ -9346,7 +9413,7 @@
           <p:cNvPr id="51" name="principle-label">
             <a:extLst xmlns:a="http://schemas.openxmlformats.org/drawingml/2006/main">
               <a:ext uri="{FF2B5EF4-FFF2-40B4-BE49-F238E27FC236}">
-                <a16:creationId xmlns:a16="http://schemas.microsoft.com/office/drawing/2014/main" id="{DEA8794B-D33A-4CAD-BD26-E3683F37E3B3}"/>
+                <a16:creationId xmlns:a16="http://schemas.microsoft.com/office/drawing/2014/main" id="{B302CAEE-D70A-4378-B701-1D40B8A62F17}"/>
               </a:ext>
             </a:extLst>
           </p:cNvPr>
@@ -9396,7 +9463,7 @@
           <p:cNvPr id="52" name="principle-body">
             <a:extLst xmlns:a="http://schemas.openxmlformats.org/drawingml/2006/main">
               <a:ext uri="{FF2B5EF4-FFF2-40B4-BE49-F238E27FC236}">
-                <a16:creationId xmlns:a16="http://schemas.microsoft.com/office/drawing/2014/main" id="{1E3BB899-BF86-4040-B8FA-898FF5CB2E72}"/>
+                <a16:creationId xmlns:a16="http://schemas.microsoft.com/office/drawing/2014/main" id="{4685F22A-EBB4-4F9E-A088-EFC1DC77D2B9}"/>
               </a:ext>
             </a:extLst>
           </p:cNvPr>
@@ -9444,7 +9511,7 @@
     </p:spTree>
     <p:extLst>
       <p:ext uri="{BB962C8B-B14F-4D97-AF65-F5344CB8AC3E}">
-        <p14:creationId xmlns:p14="http://schemas.microsoft.com/office/powerpoint/2010/main" val="1112216715"/>
+        <p14:creationId xmlns:p14="http://schemas.microsoft.com/office/powerpoint/2010/main" val="1058277699"/>
       </p:ext>
     </p:extLst>
   </p:cSld>
@@ -9475,7 +9542,7 @@
           <p:cNvPr id="1" name="top-accent">
             <a:extLst xmlns:a="http://schemas.openxmlformats.org/drawingml/2006/main">
               <a:ext uri="{FF2B5EF4-FFF2-40B4-BE49-F238E27FC236}">
-                <a16:creationId xmlns:a16="http://schemas.microsoft.com/office/drawing/2014/main" id="{39A0876D-8EB1-4BF0-9D87-DDA7C022946C}"/>
+                <a16:creationId xmlns:a16="http://schemas.microsoft.com/office/drawing/2014/main" id="{3D1DD3BA-E824-49B7-9465-28FB8ED57BBF}"/>
               </a:ext>
             </a:extLst>
           </p:cNvPr>
@@ -9508,7 +9575,7 @@
           <p:cNvPr id="2" name="left-accent">
             <a:extLst xmlns:a="http://schemas.openxmlformats.org/drawingml/2006/main">
               <a:ext uri="{FF2B5EF4-FFF2-40B4-BE49-F238E27FC236}">
-                <a16:creationId xmlns:a16="http://schemas.microsoft.com/office/drawing/2014/main" id="{622C2192-D74E-48FA-A02B-967F7C51D43F}"/>
+                <a16:creationId xmlns:a16="http://schemas.microsoft.com/office/drawing/2014/main" id="{E3202ACC-02D2-4488-98EE-045BC9D24075}"/>
               </a:ext>
             </a:extLst>
           </p:cNvPr>
@@ -9541,7 +9608,7 @@
           <p:cNvPr id="3" name="eyebrow">
             <a:extLst xmlns:a="http://schemas.openxmlformats.org/drawingml/2006/main">
               <a:ext uri="{FF2B5EF4-FFF2-40B4-BE49-F238E27FC236}">
-                <a16:creationId xmlns:a16="http://schemas.microsoft.com/office/drawing/2014/main" id="{A6A72702-4C1C-4910-91D1-2F11299136B0}"/>
+                <a16:creationId xmlns:a16="http://schemas.microsoft.com/office/drawing/2014/main" id="{F0CA4231-3117-48E9-BDD2-6B2B27A424C3}"/>
               </a:ext>
             </a:extLst>
           </p:cNvPr>
@@ -9591,7 +9658,7 @@
           <p:cNvPr id="4" name="footer">
             <a:extLst xmlns:a="http://schemas.openxmlformats.org/drawingml/2006/main">
               <a:ext uri="{FF2B5EF4-FFF2-40B4-BE49-F238E27FC236}">
-                <a16:creationId xmlns:a16="http://schemas.microsoft.com/office/drawing/2014/main" id="{12782A95-2D81-44A5-8285-2F651828A5B5}"/>
+                <a16:creationId xmlns:a16="http://schemas.microsoft.com/office/drawing/2014/main" id="{A14C1E5B-42EC-4E69-8992-D005965A516E}"/>
               </a:ext>
             </a:extLst>
           </p:cNvPr>
@@ -9641,7 +9708,7 @@
           <p:cNvPr id="5" name="page-no">
             <a:extLst xmlns:a="http://schemas.openxmlformats.org/drawingml/2006/main">
               <a:ext uri="{FF2B5EF4-FFF2-40B4-BE49-F238E27FC236}">
-                <a16:creationId xmlns:a16="http://schemas.microsoft.com/office/drawing/2014/main" id="{08EF888A-88F8-4CBB-A444-E4EFCCFF55D9}"/>
+                <a16:creationId xmlns:a16="http://schemas.microsoft.com/office/drawing/2014/main" id="{7E654D18-5FF2-43F7-A11B-8411472A9FCB}"/>
               </a:ext>
             </a:extLst>
           </p:cNvPr>
@@ -9691,7 +9758,7 @@
           <p:cNvPr id="6" name="title-04">
             <a:extLst xmlns:a="http://schemas.openxmlformats.org/drawingml/2006/main">
               <a:ext uri="{FF2B5EF4-FFF2-40B4-BE49-F238E27FC236}">
-                <a16:creationId xmlns:a16="http://schemas.microsoft.com/office/drawing/2014/main" id="{02E217CC-2544-41A1-B55F-552EA5F8EF73}"/>
+                <a16:creationId xmlns:a16="http://schemas.microsoft.com/office/drawing/2014/main" id="{4F10B533-1D00-4F38-ABFD-15EF38AC7EBB}"/>
               </a:ext>
             </a:extLst>
           </p:cNvPr>
@@ -9741,7 +9808,7 @@
           <p:cNvPr id="7" name="subtitle-04">
             <a:extLst xmlns:a="http://schemas.openxmlformats.org/drawingml/2006/main">
               <a:ext uri="{FF2B5EF4-FFF2-40B4-BE49-F238E27FC236}">
-                <a16:creationId xmlns:a16="http://schemas.microsoft.com/office/drawing/2014/main" id="{65806F9C-7D35-4E68-BBE5-B18366436C16}"/>
+                <a16:creationId xmlns:a16="http://schemas.microsoft.com/office/drawing/2014/main" id="{AD5E2A23-461D-4F26-A113-BF32CFF48FF1}"/>
               </a:ext>
             </a:extLst>
           </p:cNvPr>
@@ -9791,7 +9858,7 @@
           <p:cNvPr id="8" name="risk-title">
             <a:extLst xmlns:a="http://schemas.openxmlformats.org/drawingml/2006/main">
               <a:ext uri="{FF2B5EF4-FFF2-40B4-BE49-F238E27FC236}">
-                <a16:creationId xmlns:a16="http://schemas.microsoft.com/office/drawing/2014/main" id="{A50D9908-FCE2-458C-9331-141D7CF89158}"/>
+                <a16:creationId xmlns:a16="http://schemas.microsoft.com/office/drawing/2014/main" id="{92E71329-C5A1-4AC5-BFC2-73387B120960}"/>
               </a:ext>
             </a:extLst>
           </p:cNvPr>
@@ -9841,7 +9908,7 @@
           <p:cNvPr id="9" name="risk-header">
             <a:extLst xmlns:a="http://schemas.openxmlformats.org/drawingml/2006/main">
               <a:ext uri="{FF2B5EF4-FFF2-40B4-BE49-F238E27FC236}">
-                <a16:creationId xmlns:a16="http://schemas.microsoft.com/office/drawing/2014/main" id="{53971F05-0E1F-4858-B0CA-9DDC16E7E99A}"/>
+                <a16:creationId xmlns:a16="http://schemas.microsoft.com/office/drawing/2014/main" id="{A1D3FE82-5D24-488A-A8B2-386E5ABFBC6D}"/>
               </a:ext>
             </a:extLst>
           </p:cNvPr>
@@ -9874,7 +9941,7 @@
           <p:cNvPr id="10" name="risk-th-1">
             <a:extLst xmlns:a="http://schemas.openxmlformats.org/drawingml/2006/main">
               <a:ext uri="{FF2B5EF4-FFF2-40B4-BE49-F238E27FC236}">
-                <a16:creationId xmlns:a16="http://schemas.microsoft.com/office/drawing/2014/main" id="{C647D4A6-393E-497B-BB6D-FCD1F53C9D8C}"/>
+                <a16:creationId xmlns:a16="http://schemas.microsoft.com/office/drawing/2014/main" id="{BB462AE6-EDCE-4369-B244-33CFE27B7945}"/>
               </a:ext>
             </a:extLst>
           </p:cNvPr>
@@ -9924,7 +9991,7 @@
           <p:cNvPr id="11" name="risk-th-2">
             <a:extLst xmlns:a="http://schemas.openxmlformats.org/drawingml/2006/main">
               <a:ext uri="{FF2B5EF4-FFF2-40B4-BE49-F238E27FC236}">
-                <a16:creationId xmlns:a16="http://schemas.microsoft.com/office/drawing/2014/main" id="{4A489B56-9255-4125-8967-067B66508EAF}"/>
+                <a16:creationId xmlns:a16="http://schemas.microsoft.com/office/drawing/2014/main" id="{7F8C72E4-DD69-40AE-B072-3269BB3B6D7C}"/>
               </a:ext>
             </a:extLst>
           </p:cNvPr>
@@ -9974,7 +10041,7 @@
           <p:cNvPr id="12" name="risk-th-3">
             <a:extLst xmlns:a="http://schemas.openxmlformats.org/drawingml/2006/main">
               <a:ext uri="{FF2B5EF4-FFF2-40B4-BE49-F238E27FC236}">
-                <a16:creationId xmlns:a16="http://schemas.microsoft.com/office/drawing/2014/main" id="{8836B600-8042-40F5-959F-02189E2E3691}"/>
+                <a16:creationId xmlns:a16="http://schemas.microsoft.com/office/drawing/2014/main" id="{BF826932-1720-45B4-8EF1-80A4405743E1}"/>
               </a:ext>
             </a:extLst>
           </p:cNvPr>
@@ -10024,7 +10091,7 @@
           <p:cNvPr id="13" name="risk-row-1">
             <a:extLst xmlns:a="http://schemas.openxmlformats.org/drawingml/2006/main">
               <a:ext uri="{FF2B5EF4-FFF2-40B4-BE49-F238E27FC236}">
-                <a16:creationId xmlns:a16="http://schemas.microsoft.com/office/drawing/2014/main" id="{93507CBD-58EB-473A-868E-D06A2634E88F}"/>
+                <a16:creationId xmlns:a16="http://schemas.microsoft.com/office/drawing/2014/main" id="{19A36367-2373-4506-B7D5-7C500B57B6E2}"/>
               </a:ext>
             </a:extLst>
           </p:cNvPr>
@@ -10057,7 +10124,7 @@
           <p:cNvPr id="14" name="risk-name-1">
             <a:extLst xmlns:a="http://schemas.openxmlformats.org/drawingml/2006/main">
               <a:ext uri="{FF2B5EF4-FFF2-40B4-BE49-F238E27FC236}">
-                <a16:creationId xmlns:a16="http://schemas.microsoft.com/office/drawing/2014/main" id="{8AC7D2E4-F22A-4559-97B2-1EEECC4B8D2B}"/>
+                <a16:creationId xmlns:a16="http://schemas.microsoft.com/office/drawing/2014/main" id="{30B24D23-58B8-4217-8AD6-B8BB7DF5FC67}"/>
               </a:ext>
             </a:extLst>
           </p:cNvPr>
@@ -10107,7 +10174,7 @@
           <p:cNvPr id="15" name="risk-impact-1">
             <a:extLst xmlns:a="http://schemas.openxmlformats.org/drawingml/2006/main">
               <a:ext uri="{FF2B5EF4-FFF2-40B4-BE49-F238E27FC236}">
-                <a16:creationId xmlns:a16="http://schemas.microsoft.com/office/drawing/2014/main" id="{0D9174B5-71CC-4883-ACA0-CD6FBABB6C9E}"/>
+                <a16:creationId xmlns:a16="http://schemas.microsoft.com/office/drawing/2014/main" id="{D7545920-CB75-4C45-8BCA-57D8AE3DE3F1}"/>
               </a:ext>
             </a:extLst>
           </p:cNvPr>
@@ -10157,7 +10224,7 @@
           <p:cNvPr id="16" name="risk-response-1">
             <a:extLst xmlns:a="http://schemas.openxmlformats.org/drawingml/2006/main">
               <a:ext uri="{FF2B5EF4-FFF2-40B4-BE49-F238E27FC236}">
-                <a16:creationId xmlns:a16="http://schemas.microsoft.com/office/drawing/2014/main" id="{8F3096FA-1397-4C3A-9C64-B9A153F146FE}"/>
+                <a16:creationId xmlns:a16="http://schemas.microsoft.com/office/drawing/2014/main" id="{B223A67A-C558-43FE-A7FE-92FB98168659}"/>
               </a:ext>
             </a:extLst>
           </p:cNvPr>
@@ -10207,7 +10274,7 @@
           <p:cNvPr id="17" name="risk-row-2">
             <a:extLst xmlns:a="http://schemas.openxmlformats.org/drawingml/2006/main">
               <a:ext uri="{FF2B5EF4-FFF2-40B4-BE49-F238E27FC236}">
-                <a16:creationId xmlns:a16="http://schemas.microsoft.com/office/drawing/2014/main" id="{22B574F3-663F-4C1E-A62B-0F376042CA9E}"/>
+                <a16:creationId xmlns:a16="http://schemas.microsoft.com/office/drawing/2014/main" id="{B8F07442-B041-43EE-ACE4-BF96F5587EBA}"/>
               </a:ext>
             </a:extLst>
           </p:cNvPr>
@@ -10240,7 +10307,7 @@
           <p:cNvPr id="18" name="risk-name-2">
             <a:extLst xmlns:a="http://schemas.openxmlformats.org/drawingml/2006/main">
               <a:ext uri="{FF2B5EF4-FFF2-40B4-BE49-F238E27FC236}">
-                <a16:creationId xmlns:a16="http://schemas.microsoft.com/office/drawing/2014/main" id="{A7A4FBD0-69B9-4DF1-8FBF-F1A4210C7403}"/>
+                <a16:creationId xmlns:a16="http://schemas.microsoft.com/office/drawing/2014/main" id="{6BC3FC08-1AA5-42AC-B8E3-850CE04CD4AD}"/>
               </a:ext>
             </a:extLst>
           </p:cNvPr>
@@ -10290,7 +10357,7 @@
           <p:cNvPr id="19" name="risk-impact-2">
             <a:extLst xmlns:a="http://schemas.openxmlformats.org/drawingml/2006/main">
               <a:ext uri="{FF2B5EF4-FFF2-40B4-BE49-F238E27FC236}">
-                <a16:creationId xmlns:a16="http://schemas.microsoft.com/office/drawing/2014/main" id="{2D87ABAF-6CB8-4DA7-88E6-9D954572536B}"/>
+                <a16:creationId xmlns:a16="http://schemas.microsoft.com/office/drawing/2014/main" id="{C256356F-F8A9-46D1-BF25-30995E9E8A3F}"/>
               </a:ext>
             </a:extLst>
           </p:cNvPr>
@@ -10340,7 +10407,7 @@
           <p:cNvPr id="20" name="risk-response-2">
             <a:extLst xmlns:a="http://schemas.openxmlformats.org/drawingml/2006/main">
               <a:ext uri="{FF2B5EF4-FFF2-40B4-BE49-F238E27FC236}">
-                <a16:creationId xmlns:a16="http://schemas.microsoft.com/office/drawing/2014/main" id="{3417579A-CE04-41C1-977A-DB1056926B87}"/>
+                <a16:creationId xmlns:a16="http://schemas.microsoft.com/office/drawing/2014/main" id="{212CA89D-0EE7-466B-B4FC-44FB17C767FB}"/>
               </a:ext>
             </a:extLst>
           </p:cNvPr>
@@ -10390,7 +10457,7 @@
           <p:cNvPr id="21" name="risk-row-3">
             <a:extLst xmlns:a="http://schemas.openxmlformats.org/drawingml/2006/main">
               <a:ext uri="{FF2B5EF4-FFF2-40B4-BE49-F238E27FC236}">
-                <a16:creationId xmlns:a16="http://schemas.microsoft.com/office/drawing/2014/main" id="{268A2E18-532E-42C9-A2EC-9EF168E6D370}"/>
+                <a16:creationId xmlns:a16="http://schemas.microsoft.com/office/drawing/2014/main" id="{36DE9415-A7FF-4112-9801-404B294843A2}"/>
               </a:ext>
             </a:extLst>
           </p:cNvPr>
@@ -10423,7 +10490,7 @@
           <p:cNvPr id="22" name="risk-name-3">
             <a:extLst xmlns:a="http://schemas.openxmlformats.org/drawingml/2006/main">
               <a:ext uri="{FF2B5EF4-FFF2-40B4-BE49-F238E27FC236}">
-                <a16:creationId xmlns:a16="http://schemas.microsoft.com/office/drawing/2014/main" id="{A7C85972-FB73-4108-AB59-E3AD2B6A4AD6}"/>
+                <a16:creationId xmlns:a16="http://schemas.microsoft.com/office/drawing/2014/main" id="{97427AFE-B221-4FEE-9279-6EB471437E90}"/>
               </a:ext>
             </a:extLst>
           </p:cNvPr>
@@ -10473,7 +10540,7 @@
           <p:cNvPr id="23" name="risk-impact-3">
             <a:extLst xmlns:a="http://schemas.openxmlformats.org/drawingml/2006/main">
               <a:ext uri="{FF2B5EF4-FFF2-40B4-BE49-F238E27FC236}">
-                <a16:creationId xmlns:a16="http://schemas.microsoft.com/office/drawing/2014/main" id="{76A45D05-E701-41F9-802B-6A49F0A61A63}"/>
+                <a16:creationId xmlns:a16="http://schemas.microsoft.com/office/drawing/2014/main" id="{C8F9A1FD-6D07-4FE5-AD3A-A8F9D883536A}"/>
               </a:ext>
             </a:extLst>
           </p:cNvPr>
@@ -10523,7 +10590,7 @@
           <p:cNvPr id="24" name="risk-response-3">
             <a:extLst xmlns:a="http://schemas.openxmlformats.org/drawingml/2006/main">
               <a:ext uri="{FF2B5EF4-FFF2-40B4-BE49-F238E27FC236}">
-                <a16:creationId xmlns:a16="http://schemas.microsoft.com/office/drawing/2014/main" id="{CA4518BD-7A2A-436E-87AE-B436A1654CC0}"/>
+                <a16:creationId xmlns:a16="http://schemas.microsoft.com/office/drawing/2014/main" id="{4E81B17D-F124-4A04-995C-AC4ED1AFEA9D}"/>
               </a:ext>
             </a:extLst>
           </p:cNvPr>
@@ -10573,7 +10640,7 @@
           <p:cNvPr id="25" name="risk-row-4">
             <a:extLst xmlns:a="http://schemas.openxmlformats.org/drawingml/2006/main">
               <a:ext uri="{FF2B5EF4-FFF2-40B4-BE49-F238E27FC236}">
-                <a16:creationId xmlns:a16="http://schemas.microsoft.com/office/drawing/2014/main" id="{9F34B709-23C2-4E70-8392-E6960C0F7423}"/>
+                <a16:creationId xmlns:a16="http://schemas.microsoft.com/office/drawing/2014/main" id="{02B2386E-E4D1-4C4F-9EF7-FE688D832248}"/>
               </a:ext>
             </a:extLst>
           </p:cNvPr>
@@ -10606,7 +10673,7 @@
           <p:cNvPr id="26" name="risk-name-4">
             <a:extLst xmlns:a="http://schemas.openxmlformats.org/drawingml/2006/main">
               <a:ext uri="{FF2B5EF4-FFF2-40B4-BE49-F238E27FC236}">
-                <a16:creationId xmlns:a16="http://schemas.microsoft.com/office/drawing/2014/main" id="{79282555-94FE-46C4-9553-10E1CB4AAF49}"/>
+                <a16:creationId xmlns:a16="http://schemas.microsoft.com/office/drawing/2014/main" id="{02EEAAA6-98C8-42EF-8748-FA6DF9DCE0FA}"/>
               </a:ext>
             </a:extLst>
           </p:cNvPr>
@@ -10656,7 +10723,7 @@
           <p:cNvPr id="27" name="risk-impact-4">
             <a:extLst xmlns:a="http://schemas.openxmlformats.org/drawingml/2006/main">
               <a:ext uri="{FF2B5EF4-FFF2-40B4-BE49-F238E27FC236}">
-                <a16:creationId xmlns:a16="http://schemas.microsoft.com/office/drawing/2014/main" id="{4461E9A9-CD62-4FEE-9906-EFD5682946C4}"/>
+                <a16:creationId xmlns:a16="http://schemas.microsoft.com/office/drawing/2014/main" id="{60A0EC7B-F0C2-4445-A96D-5D5FB1CB14CE}"/>
               </a:ext>
             </a:extLst>
           </p:cNvPr>
@@ -10706,7 +10773,7 @@
           <p:cNvPr id="28" name="risk-response-4">
             <a:extLst xmlns:a="http://schemas.openxmlformats.org/drawingml/2006/main">
               <a:ext uri="{FF2B5EF4-FFF2-40B4-BE49-F238E27FC236}">
-                <a16:creationId xmlns:a16="http://schemas.microsoft.com/office/drawing/2014/main" id="{BC5103D7-B8E3-4BF2-B208-E019718BE190}"/>
+                <a16:creationId xmlns:a16="http://schemas.microsoft.com/office/drawing/2014/main" id="{81488550-F3B0-4662-B1F0-C95F55F6A2A0}"/>
               </a:ext>
             </a:extLst>
           </p:cNvPr>
@@ -10756,7 +10823,7 @@
           <p:cNvPr id="29" name="risk-row-5">
             <a:extLst xmlns:a="http://schemas.openxmlformats.org/drawingml/2006/main">
               <a:ext uri="{FF2B5EF4-FFF2-40B4-BE49-F238E27FC236}">
-                <a16:creationId xmlns:a16="http://schemas.microsoft.com/office/drawing/2014/main" id="{FBE01808-DA87-46C9-B5E2-BEB2C1CB5060}"/>
+                <a16:creationId xmlns:a16="http://schemas.microsoft.com/office/drawing/2014/main" id="{4BB9C0CF-A96E-401D-82A6-3947352F413E}"/>
               </a:ext>
             </a:extLst>
           </p:cNvPr>
@@ -10789,7 +10856,7 @@
           <p:cNvPr id="30" name="risk-name-5">
             <a:extLst xmlns:a="http://schemas.openxmlformats.org/drawingml/2006/main">
               <a:ext uri="{FF2B5EF4-FFF2-40B4-BE49-F238E27FC236}">
-                <a16:creationId xmlns:a16="http://schemas.microsoft.com/office/drawing/2014/main" id="{9C8A501E-EAE5-40BF-8A11-2EDDE292ABBB}"/>
+                <a16:creationId xmlns:a16="http://schemas.microsoft.com/office/drawing/2014/main" id="{12242980-0AE6-4E7D-AC63-44E17093A853}"/>
               </a:ext>
             </a:extLst>
           </p:cNvPr>
@@ -10839,7 +10906,7 @@
           <p:cNvPr id="31" name="risk-impact-5">
             <a:extLst xmlns:a="http://schemas.openxmlformats.org/drawingml/2006/main">
               <a:ext uri="{FF2B5EF4-FFF2-40B4-BE49-F238E27FC236}">
-                <a16:creationId xmlns:a16="http://schemas.microsoft.com/office/drawing/2014/main" id="{0AA21A79-AE73-4EE4-802E-BA69370F6707}"/>
+                <a16:creationId xmlns:a16="http://schemas.microsoft.com/office/drawing/2014/main" id="{73A3FADF-EBBA-4AF0-B062-43D6AF062DC4}"/>
               </a:ext>
             </a:extLst>
           </p:cNvPr>
@@ -10889,7 +10956,7 @@
           <p:cNvPr id="32" name="risk-response-5">
             <a:extLst xmlns:a="http://schemas.openxmlformats.org/drawingml/2006/main">
               <a:ext uri="{FF2B5EF4-FFF2-40B4-BE49-F238E27FC236}">
-                <a16:creationId xmlns:a16="http://schemas.microsoft.com/office/drawing/2014/main" id="{BCD13F04-70D9-4FC0-B8E6-F5CE575A48C6}"/>
+                <a16:creationId xmlns:a16="http://schemas.microsoft.com/office/drawing/2014/main" id="{FD422774-2EA4-4B65-94EB-30A95E8B1F12}"/>
               </a:ext>
             </a:extLst>
           </p:cNvPr>
@@ -10939,7 +11006,7 @@
           <p:cNvPr id="33" name="process-title">
             <a:extLst xmlns:a="http://schemas.openxmlformats.org/drawingml/2006/main">
               <a:ext uri="{FF2B5EF4-FFF2-40B4-BE49-F238E27FC236}">
-                <a16:creationId xmlns:a16="http://schemas.microsoft.com/office/drawing/2014/main" id="{B5107125-E0BE-4968-B698-4F923A4E15D5}"/>
+                <a16:creationId xmlns:a16="http://schemas.microsoft.com/office/drawing/2014/main" id="{1E27B84F-80CC-4742-BCFB-BB1A72541EC6}"/>
               </a:ext>
             </a:extLst>
           </p:cNvPr>
@@ -10989,7 +11056,7 @@
           <p:cNvPr id="34" name="process-note">
             <a:extLst xmlns:a="http://schemas.openxmlformats.org/drawingml/2006/main">
               <a:ext uri="{FF2B5EF4-FFF2-40B4-BE49-F238E27FC236}">
-                <a16:creationId xmlns:a16="http://schemas.microsoft.com/office/drawing/2014/main" id="{032563F5-12B6-4E82-8A7F-008800CEADB6}"/>
+                <a16:creationId xmlns:a16="http://schemas.microsoft.com/office/drawing/2014/main" id="{4809E51F-C8E9-4951-BF2C-C3ED53CC265B}"/>
               </a:ext>
             </a:extLst>
           </p:cNvPr>
@@ -11039,7 +11106,7 @@
           <p:cNvPr id="35" name="process-step-1">
             <a:extLst xmlns:a="http://schemas.openxmlformats.org/drawingml/2006/main">
               <a:ext uri="{FF2B5EF4-FFF2-40B4-BE49-F238E27FC236}">
-                <a16:creationId xmlns:a16="http://schemas.microsoft.com/office/drawing/2014/main" id="{1E2BF19E-623C-4F31-B490-F48BD5CF7C13}"/>
+                <a16:creationId xmlns:a16="http://schemas.microsoft.com/office/drawing/2014/main" id="{7736445A-6FAB-4DB4-BCBF-755DB9B35528}"/>
               </a:ext>
             </a:extLst>
           </p:cNvPr>
@@ -11074,7 +11141,7 @@
           <p:cNvPr id="36" name="process-step-bar-1">
             <a:extLst xmlns:a="http://schemas.openxmlformats.org/drawingml/2006/main">
               <a:ext uri="{FF2B5EF4-FFF2-40B4-BE49-F238E27FC236}">
-                <a16:creationId xmlns:a16="http://schemas.microsoft.com/office/drawing/2014/main" id="{2044ACCD-7C49-4A62-8690-82A907B04775}"/>
+                <a16:creationId xmlns:a16="http://schemas.microsoft.com/office/drawing/2014/main" id="{6AD7E1BB-9884-4A5D-95F9-47F4E296F919}"/>
               </a:ext>
             </a:extLst>
           </p:cNvPr>
@@ -11107,7 +11174,7 @@
           <p:cNvPr id="37" name="process-step-no-1">
             <a:extLst xmlns:a="http://schemas.openxmlformats.org/drawingml/2006/main">
               <a:ext uri="{FF2B5EF4-FFF2-40B4-BE49-F238E27FC236}">
-                <a16:creationId xmlns:a16="http://schemas.microsoft.com/office/drawing/2014/main" id="{3AD6421B-B48D-4183-96AB-3B199DF5B24A}"/>
+                <a16:creationId xmlns:a16="http://schemas.microsoft.com/office/drawing/2014/main" id="{8AC36751-3C7F-41B0-AEBC-018D0FE2461F}"/>
               </a:ext>
             </a:extLst>
           </p:cNvPr>
@@ -11163,7 +11230,7 @@
           <p:cNvPr id="38" name="process-step-title-1">
             <a:extLst xmlns:a="http://schemas.openxmlformats.org/drawingml/2006/main">
               <a:ext uri="{FF2B5EF4-FFF2-40B4-BE49-F238E27FC236}">
-                <a16:creationId xmlns:a16="http://schemas.microsoft.com/office/drawing/2014/main" id="{65C72DE7-0046-44DB-8E3C-17DE26760D42}"/>
+                <a16:creationId xmlns:a16="http://schemas.microsoft.com/office/drawing/2014/main" id="{92C67C38-D8B8-4427-8F2E-A546AEE507A7}"/>
               </a:ext>
             </a:extLst>
           </p:cNvPr>
@@ -11213,7 +11280,7 @@
           <p:cNvPr id="39" name="process-step-body-1">
             <a:extLst xmlns:a="http://schemas.openxmlformats.org/drawingml/2006/main">
               <a:ext uri="{FF2B5EF4-FFF2-40B4-BE49-F238E27FC236}">
-                <a16:creationId xmlns:a16="http://schemas.microsoft.com/office/drawing/2014/main" id="{6EE4C32B-4C91-4A1B-939F-A3093548CFA6}"/>
+                <a16:creationId xmlns:a16="http://schemas.microsoft.com/office/drawing/2014/main" id="{79414D4D-EAF6-453F-B78E-A0CD3C757BC0}"/>
               </a:ext>
             </a:extLst>
           </p:cNvPr>
@@ -11263,7 +11330,7 @@
           <p:cNvPr id="40" name="process-step-2">
             <a:extLst xmlns:a="http://schemas.openxmlformats.org/drawingml/2006/main">
               <a:ext uri="{FF2B5EF4-FFF2-40B4-BE49-F238E27FC236}">
-                <a16:creationId xmlns:a16="http://schemas.microsoft.com/office/drawing/2014/main" id="{0843C6C3-C3E5-42FB-80E5-EF0EC09175E0}"/>
+                <a16:creationId xmlns:a16="http://schemas.microsoft.com/office/drawing/2014/main" id="{FB065011-CA28-49C8-A031-0C726CBB91FD}"/>
               </a:ext>
             </a:extLst>
           </p:cNvPr>
@@ -11298,7 +11365,7 @@
           <p:cNvPr id="41" name="process-step-bar-2">
             <a:extLst xmlns:a="http://schemas.openxmlformats.org/drawingml/2006/main">
               <a:ext uri="{FF2B5EF4-FFF2-40B4-BE49-F238E27FC236}">
-                <a16:creationId xmlns:a16="http://schemas.microsoft.com/office/drawing/2014/main" id="{A80D8D44-E243-41CA-A4E4-DD81CA5192B6}"/>
+                <a16:creationId xmlns:a16="http://schemas.microsoft.com/office/drawing/2014/main" id="{663DF561-0F16-4EE6-AF25-C37AED96F0E5}"/>
               </a:ext>
             </a:extLst>
           </p:cNvPr>
@@ -11331,7 +11398,7 @@
           <p:cNvPr id="42" name="process-step-no-2">
             <a:extLst xmlns:a="http://schemas.openxmlformats.org/drawingml/2006/main">
               <a:ext uri="{FF2B5EF4-FFF2-40B4-BE49-F238E27FC236}">
-                <a16:creationId xmlns:a16="http://schemas.microsoft.com/office/drawing/2014/main" id="{72A1295D-C6B6-4393-BE39-73D24CF06D50}"/>
+                <a16:creationId xmlns:a16="http://schemas.microsoft.com/office/drawing/2014/main" id="{79BA2F2B-69C8-41B4-B543-4E0426E0AB30}"/>
               </a:ext>
             </a:extLst>
           </p:cNvPr>
@@ -11387,7 +11454,7 @@
           <p:cNvPr id="43" name="process-step-title-2">
             <a:extLst xmlns:a="http://schemas.openxmlformats.org/drawingml/2006/main">
               <a:ext uri="{FF2B5EF4-FFF2-40B4-BE49-F238E27FC236}">
-                <a16:creationId xmlns:a16="http://schemas.microsoft.com/office/drawing/2014/main" id="{06758EF0-4849-45F1-BB65-2BC49EA0ACFB}"/>
+                <a16:creationId xmlns:a16="http://schemas.microsoft.com/office/drawing/2014/main" id="{50C64D57-9222-4D60-9877-84F2A2E89F67}"/>
               </a:ext>
             </a:extLst>
           </p:cNvPr>
@@ -11437,7 +11504,7 @@
           <p:cNvPr id="44" name="process-step-body-2">
             <a:extLst xmlns:a="http://schemas.openxmlformats.org/drawingml/2006/main">
               <a:ext uri="{FF2B5EF4-FFF2-40B4-BE49-F238E27FC236}">
-                <a16:creationId xmlns:a16="http://schemas.microsoft.com/office/drawing/2014/main" id="{4D73D3B8-2FBA-4D28-882A-29464555190B}"/>
+                <a16:creationId xmlns:a16="http://schemas.microsoft.com/office/drawing/2014/main" id="{DAE552A3-EBC4-4C91-A5CD-E6E24DD73089}"/>
               </a:ext>
             </a:extLst>
           </p:cNvPr>
@@ -11487,7 +11554,7 @@
           <p:cNvPr id="45" name="process-step-3">
             <a:extLst xmlns:a="http://schemas.openxmlformats.org/drawingml/2006/main">
               <a:ext uri="{FF2B5EF4-FFF2-40B4-BE49-F238E27FC236}">
-                <a16:creationId xmlns:a16="http://schemas.microsoft.com/office/drawing/2014/main" id="{3C282961-8379-4729-BF6F-53B53D173ECB}"/>
+                <a16:creationId xmlns:a16="http://schemas.microsoft.com/office/drawing/2014/main" id="{18BF9AE5-FB78-472B-91C0-FA8C32AF677F}"/>
               </a:ext>
             </a:extLst>
           </p:cNvPr>
@@ -11522,7 +11589,7 @@
           <p:cNvPr id="46" name="process-step-bar-3">
             <a:extLst xmlns:a="http://schemas.openxmlformats.org/drawingml/2006/main">
               <a:ext uri="{FF2B5EF4-FFF2-40B4-BE49-F238E27FC236}">
-                <a16:creationId xmlns:a16="http://schemas.microsoft.com/office/drawing/2014/main" id="{8F5E6589-7A82-48D8-BC4D-84C278D13749}"/>
+                <a16:creationId xmlns:a16="http://schemas.microsoft.com/office/drawing/2014/main" id="{58BF1799-ECBD-4CB4-9169-04C5EDA23DAF}"/>
               </a:ext>
             </a:extLst>
           </p:cNvPr>
@@ -11555,7 +11622,7 @@
           <p:cNvPr id="47" name="process-step-no-3">
             <a:extLst xmlns:a="http://schemas.openxmlformats.org/drawingml/2006/main">
               <a:ext uri="{FF2B5EF4-FFF2-40B4-BE49-F238E27FC236}">
-                <a16:creationId xmlns:a16="http://schemas.microsoft.com/office/drawing/2014/main" id="{23707AA8-D05B-4F71-9317-3F7640B23CB9}"/>
+                <a16:creationId xmlns:a16="http://schemas.microsoft.com/office/drawing/2014/main" id="{4E505C1B-BD74-4588-AEA7-C7560563C524}"/>
               </a:ext>
             </a:extLst>
           </p:cNvPr>
@@ -11611,7 +11678,7 @@
           <p:cNvPr id="48" name="process-step-title-3">
             <a:extLst xmlns:a="http://schemas.openxmlformats.org/drawingml/2006/main">
               <a:ext uri="{FF2B5EF4-FFF2-40B4-BE49-F238E27FC236}">
-                <a16:creationId xmlns:a16="http://schemas.microsoft.com/office/drawing/2014/main" id="{3C77EEDA-1980-49E6-ACD3-77A8005A4188}"/>
+                <a16:creationId xmlns:a16="http://schemas.microsoft.com/office/drawing/2014/main" id="{B56F5445-0464-4F8B-A162-1937B61EB668}"/>
               </a:ext>
             </a:extLst>
           </p:cNvPr>
@@ -11661,7 +11728,7 @@
           <p:cNvPr id="49" name="process-step-body-3">
             <a:extLst xmlns:a="http://schemas.openxmlformats.org/drawingml/2006/main">
               <a:ext uri="{FF2B5EF4-FFF2-40B4-BE49-F238E27FC236}">
-                <a16:creationId xmlns:a16="http://schemas.microsoft.com/office/drawing/2014/main" id="{C059B267-FBCE-4BF0-BF7E-89FFA9805957}"/>
+                <a16:creationId xmlns:a16="http://schemas.microsoft.com/office/drawing/2014/main" id="{3EDB0870-B370-4C94-B25C-4AD93AE0A420}"/>
               </a:ext>
             </a:extLst>
           </p:cNvPr>
@@ -11711,7 +11778,7 @@
           <p:cNvPr id="50" name="process-step-4">
             <a:extLst xmlns:a="http://schemas.openxmlformats.org/drawingml/2006/main">
               <a:ext uri="{FF2B5EF4-FFF2-40B4-BE49-F238E27FC236}">
-                <a16:creationId xmlns:a16="http://schemas.microsoft.com/office/drawing/2014/main" id="{43B09CBB-AF12-488C-AFFC-C3BCC49D9BB6}"/>
+                <a16:creationId xmlns:a16="http://schemas.microsoft.com/office/drawing/2014/main" id="{8C2F8CA5-FF73-4D00-8FFF-F247C024C7A1}"/>
               </a:ext>
             </a:extLst>
           </p:cNvPr>
@@ -11746,7 +11813,7 @@
           <p:cNvPr id="51" name="process-step-bar-4">
             <a:extLst xmlns:a="http://schemas.openxmlformats.org/drawingml/2006/main">
               <a:ext uri="{FF2B5EF4-FFF2-40B4-BE49-F238E27FC236}">
-                <a16:creationId xmlns:a16="http://schemas.microsoft.com/office/drawing/2014/main" id="{4D0D22F9-D61C-4405-9677-EB6E61EA7517}"/>
+                <a16:creationId xmlns:a16="http://schemas.microsoft.com/office/drawing/2014/main" id="{E8C9B1E4-8378-4E07-A3D2-93FA55C24E8A}"/>
               </a:ext>
             </a:extLst>
           </p:cNvPr>
@@ -11779,7 +11846,7 @@
           <p:cNvPr id="52" name="process-step-no-4">
             <a:extLst xmlns:a="http://schemas.openxmlformats.org/drawingml/2006/main">
               <a:ext uri="{FF2B5EF4-FFF2-40B4-BE49-F238E27FC236}">
-                <a16:creationId xmlns:a16="http://schemas.microsoft.com/office/drawing/2014/main" id="{ED85CB50-CACA-41A3-B24E-ABCF8ACA5FAE}"/>
+                <a16:creationId xmlns:a16="http://schemas.microsoft.com/office/drawing/2014/main" id="{E38F3C81-37A1-45E1-BB89-61B2F51414D8}"/>
               </a:ext>
             </a:extLst>
           </p:cNvPr>
@@ -11835,7 +11902,7 @@
           <p:cNvPr id="53" name="process-step-title-4">
             <a:extLst xmlns:a="http://schemas.openxmlformats.org/drawingml/2006/main">
               <a:ext uri="{FF2B5EF4-FFF2-40B4-BE49-F238E27FC236}">
-                <a16:creationId xmlns:a16="http://schemas.microsoft.com/office/drawing/2014/main" id="{8A04F538-988F-4067-956C-9C9A927CBAF1}"/>
+                <a16:creationId xmlns:a16="http://schemas.microsoft.com/office/drawing/2014/main" id="{5D9FA32D-6361-4205-BC4E-9820CFC60A44}"/>
               </a:ext>
             </a:extLst>
           </p:cNvPr>
@@ -11885,7 +11952,7 @@
           <p:cNvPr id="54" name="process-step-body-4">
             <a:extLst xmlns:a="http://schemas.openxmlformats.org/drawingml/2006/main">
               <a:ext uri="{FF2B5EF4-FFF2-40B4-BE49-F238E27FC236}">
-                <a16:creationId xmlns:a16="http://schemas.microsoft.com/office/drawing/2014/main" id="{3D7D4080-A6BA-471A-9FD8-748A4521D512}"/>
+                <a16:creationId xmlns:a16="http://schemas.microsoft.com/office/drawing/2014/main" id="{5886BB72-0198-4A26-B851-B955D23AEAA9}"/>
               </a:ext>
             </a:extLst>
           </p:cNvPr>
@@ -11935,7 +12002,7 @@
           <p:cNvPr id="55" name="risk-principle-panel">
             <a:extLst xmlns:a="http://schemas.openxmlformats.org/drawingml/2006/main">
               <a:ext uri="{FF2B5EF4-FFF2-40B4-BE49-F238E27FC236}">
-                <a16:creationId xmlns:a16="http://schemas.microsoft.com/office/drawing/2014/main" id="{7FFE48EA-70D0-46E9-BAD0-D27FA47B54F8}"/>
+                <a16:creationId xmlns:a16="http://schemas.microsoft.com/office/drawing/2014/main" id="{C8761D44-51E3-4537-8D53-2819790D247D}"/>
               </a:ext>
             </a:extLst>
           </p:cNvPr>
@@ -11970,7 +12037,7 @@
           <p:cNvPr id="56" name="risk-principle-label">
             <a:extLst xmlns:a="http://schemas.openxmlformats.org/drawingml/2006/main">
               <a:ext uri="{FF2B5EF4-FFF2-40B4-BE49-F238E27FC236}">
-                <a16:creationId xmlns:a16="http://schemas.microsoft.com/office/drawing/2014/main" id="{C722B008-8634-43F1-89FC-CA63AB240F71}"/>
+                <a16:creationId xmlns:a16="http://schemas.microsoft.com/office/drawing/2014/main" id="{B44F54F3-792E-4033-9F26-F26C531ABC14}"/>
               </a:ext>
             </a:extLst>
           </p:cNvPr>
@@ -12020,7 +12087,7 @@
           <p:cNvPr id="57" name="risk-principle-body">
             <a:extLst xmlns:a="http://schemas.openxmlformats.org/drawingml/2006/main">
               <a:ext uri="{FF2B5EF4-FFF2-40B4-BE49-F238E27FC236}">
-                <a16:creationId xmlns:a16="http://schemas.microsoft.com/office/drawing/2014/main" id="{9B515F3A-9ABC-42BC-BBEA-78033A6B69E7}"/>
+                <a16:creationId xmlns:a16="http://schemas.microsoft.com/office/drawing/2014/main" id="{E48AE211-E007-4DFD-B7F5-2A08CD0E6A07}"/>
               </a:ext>
             </a:extLst>
           </p:cNvPr>
@@ -12068,7 +12135,3574 @@
     </p:spTree>
     <p:extLst>
       <p:ext uri="{BB962C8B-B14F-4D97-AF65-F5344CB8AC3E}">
-        <p14:creationId xmlns:p14="http://schemas.microsoft.com/office/powerpoint/2010/main" val="907856749"/>
+        <p14:creationId xmlns:p14="http://schemas.microsoft.com/office/powerpoint/2010/main" val="1980520844"/>
+      </p:ext>
+    </p:extLst>
+  </p:cSld>
+</p:sld>
+</file>
+
+<file path=ppt/slides/slide5.xml><?xml version="1.0" encoding="utf-8"?>
+<p:sld xmlns:p="http://schemas.openxmlformats.org/presentationml/2006/main">
+  <p:cSld>
+    <p:bg>
+      <p:bgPr>
+        <a:solidFill xmlns:a="http://schemas.openxmlformats.org/drawingml/2006/main">
+          <a:srgbClr val="0B1020"/>
+        </a:solidFill>
+      </p:bgPr>
+    </p:bg>
+    <p:spTree>
+      <p:nvGrpSpPr>
+        <p:cNvPr id="1" name=""/>
+        <p:cNvGrpSpPr/>
+        <p:nvPr/>
+      </p:nvGrpSpPr>
+      <p:grpSpPr>
+        <a:xfrm xmlns:a="http://schemas.openxmlformats.org/drawingml/2006/main"/>
+      </p:grpSpPr>
+      <p:sp>
+        <p:nvSpPr>
+          <p:cNvPr id="1" name="top-accent">
+            <a:extLst xmlns:a="http://schemas.openxmlformats.org/drawingml/2006/main">
+              <a:ext uri="{FF2B5EF4-FFF2-40B4-BE49-F238E27FC236}">
+                <a16:creationId xmlns:a16="http://schemas.microsoft.com/office/drawing/2014/main" id="{529DA18F-8C7F-4B66-90D5-0941BAECCA97}"/>
+              </a:ext>
+            </a:extLst>
+          </p:cNvPr>
+          <p:cNvSpPr>
+            <a:spLocks xmlns:a="http://schemas.openxmlformats.org/drawingml/2006/main" noGrp="1"/>
+          </p:cNvSpPr>
+          <p:nvPr/>
+        </p:nvSpPr>
+        <p:spPr>
+          <a:xfrm xmlns:a="http://schemas.openxmlformats.org/drawingml/2006/main">
+            <a:off x="0" y="0"/>
+            <a:ext cx="12192000" cy="95250"/>
+          </a:xfrm>
+          <a:prstGeom xmlns:a="http://schemas.openxmlformats.org/drawingml/2006/main" prst="rect">
+            <a:avLst/>
+          </a:prstGeom>
+          <a:solidFill xmlns:a="http://schemas.openxmlformats.org/drawingml/2006/main">
+            <a:srgbClr val="00B8D9"/>
+          </a:solidFill>
+          <a:ln xmlns:a="http://schemas.openxmlformats.org/drawingml/2006/main" w="0">
+            <a:solidFill>
+              <a:srgbClr val="00B8D9"/>
+            </a:solidFill>
+            <a:prstDash val="solid"/>
+          </a:ln>
+        </p:spPr>
+      </p:sp>
+      <p:sp>
+        <p:nvSpPr>
+          <p:cNvPr id="2" name="left-accent">
+            <a:extLst xmlns:a="http://schemas.openxmlformats.org/drawingml/2006/main">
+              <a:ext uri="{FF2B5EF4-FFF2-40B4-BE49-F238E27FC236}">
+                <a16:creationId xmlns:a16="http://schemas.microsoft.com/office/drawing/2014/main" id="{18D5079A-051D-474F-A480-28DBA45FB0EB}"/>
+              </a:ext>
+            </a:extLst>
+          </p:cNvPr>
+          <p:cNvSpPr>
+            <a:spLocks xmlns:a="http://schemas.openxmlformats.org/drawingml/2006/main" noGrp="1"/>
+          </p:cNvSpPr>
+          <p:nvPr/>
+        </p:nvSpPr>
+        <p:spPr>
+          <a:xfrm xmlns:a="http://schemas.openxmlformats.org/drawingml/2006/main">
+            <a:off x="0" y="0"/>
+            <a:ext cx="152400" cy="6858000"/>
+          </a:xfrm>
+          <a:prstGeom xmlns:a="http://schemas.openxmlformats.org/drawingml/2006/main" prst="rect">
+            <a:avLst/>
+          </a:prstGeom>
+          <a:solidFill xmlns:a="http://schemas.openxmlformats.org/drawingml/2006/main">
+            <a:srgbClr val="FF6B35"/>
+          </a:solidFill>
+          <a:ln xmlns:a="http://schemas.openxmlformats.org/drawingml/2006/main" w="0">
+            <a:solidFill>
+              <a:srgbClr val="FF6B35"/>
+            </a:solidFill>
+            <a:prstDash val="solid"/>
+          </a:ln>
+        </p:spPr>
+      </p:sp>
+      <p:sp>
+        <p:nvSpPr>
+          <p:cNvPr id="3" name="eyebrow">
+            <a:extLst xmlns:a="http://schemas.openxmlformats.org/drawingml/2006/main">
+              <a:ext uri="{FF2B5EF4-FFF2-40B4-BE49-F238E27FC236}">
+                <a16:creationId xmlns:a16="http://schemas.microsoft.com/office/drawing/2014/main" id="{F341EA56-D0C6-4884-B5F1-BA5DB9E0A020}"/>
+              </a:ext>
+            </a:extLst>
+          </p:cNvPr>
+          <p:cNvSpPr>
+            <a:spLocks xmlns:a="http://schemas.openxmlformats.org/drawingml/2006/main" noGrp="1"/>
+          </p:cNvSpPr>
+          <p:nvPr/>
+        </p:nvSpPr>
+        <p:spPr>
+          <a:xfrm xmlns:a="http://schemas.openxmlformats.org/drawingml/2006/main">
+            <a:off x="514350" y="361950"/>
+            <a:ext cx="5905500" cy="285750"/>
+          </a:xfrm>
+          <a:prstGeom xmlns:a="http://schemas.openxmlformats.org/drawingml/2006/main" prst="rect">
+            <a:avLst/>
+          </a:prstGeom>
+          <a:noFill xmlns:a="http://schemas.openxmlformats.org/drawingml/2006/main"/>
+          <a:ln xmlns:a="http://schemas.openxmlformats.org/drawingml/2006/main" w="0">
+            <a:noFill/>
+            <a:prstDash val="solid"/>
+          </a:ln>
+        </p:spPr>
+        <p:txBody>
+          <a:bodyPr xmlns:a="http://schemas.openxmlformats.org/drawingml/2006/main"/>
+          <a:lstStyle xmlns:a="http://schemas.openxmlformats.org/drawingml/2006/main"/>
+          <a:p xmlns:a="http://schemas.openxmlformats.org/drawingml/2006/main">
+            <a:pPr>
+              <a:defRPr sz="1125" b="1">
+                <a:solidFill>
+                  <a:srgbClr val="8BD9E8"/>
+                </a:solidFill>
+              </a:defRPr>
+            </a:pPr>
+            <a:r>
+              <a:rPr sz="1125" b="1">
+                <a:solidFill>
+                  <a:srgbClr val="8BD9E8"/>
+                </a:solidFill>
+              </a:rPr>
+              <a:t>PUBLISHER COMMUNICATION | PAGE 05</a:t>
+            </a:r>
+          </a:p>
+        </p:txBody>
+      </p:sp>
+      <p:sp>
+        <p:nvSpPr>
+          <p:cNvPr id="4" name="footer">
+            <a:extLst xmlns:a="http://schemas.openxmlformats.org/drawingml/2006/main">
+              <a:ext uri="{FF2B5EF4-FFF2-40B4-BE49-F238E27FC236}">
+                <a16:creationId xmlns:a16="http://schemas.microsoft.com/office/drawing/2014/main" id="{BE840AE0-561E-40FC-AE5C-B42DB9C1A492}"/>
+              </a:ext>
+            </a:extLst>
+          </p:cNvPr>
+          <p:cNvSpPr>
+            <a:spLocks xmlns:a="http://schemas.openxmlformats.org/drawingml/2006/main" noGrp="1"/>
+          </p:cNvSpPr>
+          <p:nvPr/>
+        </p:nvSpPr>
+        <p:spPr>
+          <a:xfrm xmlns:a="http://schemas.openxmlformats.org/drawingml/2006/main">
+            <a:off x="514350" y="6457950"/>
+            <a:ext cx="4953000" cy="266700"/>
+          </a:xfrm>
+          <a:prstGeom xmlns:a="http://schemas.openxmlformats.org/drawingml/2006/main" prst="rect">
+            <a:avLst/>
+          </a:prstGeom>
+          <a:noFill xmlns:a="http://schemas.openxmlformats.org/drawingml/2006/main"/>
+          <a:ln xmlns:a="http://schemas.openxmlformats.org/drawingml/2006/main" w="0">
+            <a:noFill/>
+            <a:prstDash val="solid"/>
+          </a:ln>
+        </p:spPr>
+        <p:txBody>
+          <a:bodyPr xmlns:a="http://schemas.openxmlformats.org/drawingml/2006/main"/>
+          <a:lstStyle xmlns:a="http://schemas.openxmlformats.org/drawingml/2006/main"/>
+          <a:p xmlns:a="http://schemas.openxmlformats.org/drawingml/2006/main">
+            <a:pPr>
+              <a:defRPr sz="1125">
+                <a:solidFill>
+                  <a:srgbClr val="94A3B8"/>
+                </a:solidFill>
+              </a:defRPr>
+            </a:pPr>
+            <a:r>
+              <a:rPr sz="1125">
+                <a:solidFill>
+                  <a:srgbClr val="94A3B8"/>
+                </a:solidFill>
+              </a:rPr>
+              <a:t>HIT2 일본 서비스 런칭 6개월 전 로드맵</a:t>
+            </a:r>
+          </a:p>
+        </p:txBody>
+      </p:sp>
+      <p:sp>
+        <p:nvSpPr>
+          <p:cNvPr id="5" name="page-no">
+            <a:extLst xmlns:a="http://schemas.openxmlformats.org/drawingml/2006/main">
+              <a:ext uri="{FF2B5EF4-FFF2-40B4-BE49-F238E27FC236}">
+                <a16:creationId xmlns:a16="http://schemas.microsoft.com/office/drawing/2014/main" id="{61D03185-FBC9-4C65-9885-93E63560B505}"/>
+              </a:ext>
+            </a:extLst>
+          </p:cNvPr>
+          <p:cNvSpPr>
+            <a:spLocks xmlns:a="http://schemas.openxmlformats.org/drawingml/2006/main" noGrp="1"/>
+          </p:cNvSpPr>
+          <p:nvPr/>
+        </p:nvSpPr>
+        <p:spPr>
+          <a:xfrm xmlns:a="http://schemas.openxmlformats.org/drawingml/2006/main">
+            <a:off x="10953750" y="6457950"/>
+            <a:ext cx="419100" cy="266700"/>
+          </a:xfrm>
+          <a:prstGeom xmlns:a="http://schemas.openxmlformats.org/drawingml/2006/main" prst="rect">
+            <a:avLst/>
+          </a:prstGeom>
+          <a:noFill xmlns:a="http://schemas.openxmlformats.org/drawingml/2006/main"/>
+          <a:ln xmlns:a="http://schemas.openxmlformats.org/drawingml/2006/main" w="0">
+            <a:noFill/>
+            <a:prstDash val="solid"/>
+          </a:ln>
+        </p:spPr>
+        <p:txBody>
+          <a:bodyPr xmlns:a="http://schemas.openxmlformats.org/drawingml/2006/main"/>
+          <a:lstStyle xmlns:a="http://schemas.openxmlformats.org/drawingml/2006/main"/>
+          <a:p xmlns:a="http://schemas.openxmlformats.org/drawingml/2006/main">
+            <a:pPr algn="r">
+              <a:defRPr sz="1200" b="1">
+                <a:solidFill>
+                  <a:srgbClr val="94A3B8"/>
+                </a:solidFill>
+              </a:defRPr>
+            </a:pPr>
+            <a:r>
+              <a:rPr sz="1200" b="1">
+                <a:solidFill>
+                  <a:srgbClr val="94A3B8"/>
+                </a:solidFill>
+              </a:rPr>
+              <a:t>05</a:t>
+            </a:r>
+          </a:p>
+        </p:txBody>
+      </p:sp>
+      <p:sp>
+        <p:nvSpPr>
+          <p:cNvPr id="6" name="title-05">
+            <a:extLst xmlns:a="http://schemas.openxmlformats.org/drawingml/2006/main">
+              <a:ext uri="{FF2B5EF4-FFF2-40B4-BE49-F238E27FC236}">
+                <a16:creationId xmlns:a16="http://schemas.microsoft.com/office/drawing/2014/main" id="{541B6587-00A1-47F4-A3BE-11A3F1D95890}"/>
+              </a:ext>
+            </a:extLst>
+          </p:cNvPr>
+          <p:cNvSpPr>
+            <a:spLocks xmlns:a="http://schemas.openxmlformats.org/drawingml/2006/main" noGrp="1"/>
+          </p:cNvSpPr>
+          <p:nvPr/>
+        </p:nvSpPr>
+        <p:spPr>
+          <a:xfrm xmlns:a="http://schemas.openxmlformats.org/drawingml/2006/main">
+            <a:off x="514350" y="781050"/>
+            <a:ext cx="10572750" cy="533400"/>
+          </a:xfrm>
+          <a:prstGeom xmlns:a="http://schemas.openxmlformats.org/drawingml/2006/main" prst="rect">
+            <a:avLst/>
+          </a:prstGeom>
+          <a:noFill xmlns:a="http://schemas.openxmlformats.org/drawingml/2006/main"/>
+          <a:ln xmlns:a="http://schemas.openxmlformats.org/drawingml/2006/main" w="0">
+            <a:noFill/>
+            <a:prstDash val="solid"/>
+          </a:ln>
+        </p:spPr>
+        <p:txBody>
+          <a:bodyPr xmlns:a="http://schemas.openxmlformats.org/drawingml/2006/main"/>
+          <a:lstStyle xmlns:a="http://schemas.openxmlformats.org/drawingml/2006/main"/>
+          <a:p xmlns:a="http://schemas.openxmlformats.org/drawingml/2006/main">
+            <a:pPr>
+              <a:defRPr sz="2550" b="1">
+                <a:solidFill>
+                  <a:srgbClr val="FFFFFF"/>
+                </a:solidFill>
+              </a:defRPr>
+            </a:pPr>
+            <a:r>
+              <a:rPr sz="2550" b="1">
+                <a:solidFill>
+                  <a:srgbClr val="FFFFFF"/>
+                </a:solidFill>
+              </a:rPr>
+              <a:t>퍼블리셔 대응은 일정·버전·이슈 기준을 하나로 맞춰 운영합니다</a:t>
+            </a:r>
+          </a:p>
+        </p:txBody>
+      </p:sp>
+      <p:sp>
+        <p:nvSpPr>
+          <p:cNvPr id="7" name="subtitle-05">
+            <a:extLst xmlns:a="http://schemas.openxmlformats.org/drawingml/2006/main">
+              <a:ext uri="{FF2B5EF4-FFF2-40B4-BE49-F238E27FC236}">
+                <a16:creationId xmlns:a16="http://schemas.microsoft.com/office/drawing/2014/main" id="{E009D2CA-0B0D-4591-840C-CE89AC43C17D}"/>
+              </a:ext>
+            </a:extLst>
+          </p:cNvPr>
+          <p:cNvSpPr>
+            <a:spLocks xmlns:a="http://schemas.openxmlformats.org/drawingml/2006/main" noGrp="1"/>
+          </p:cNvSpPr>
+          <p:nvPr/>
+        </p:nvSpPr>
+        <p:spPr>
+          <a:xfrm xmlns:a="http://schemas.openxmlformats.org/drawingml/2006/main">
+            <a:off x="533400" y="1371600"/>
+            <a:ext cx="10287000" cy="323850"/>
+          </a:xfrm>
+          <a:prstGeom xmlns:a="http://schemas.openxmlformats.org/drawingml/2006/main" prst="rect">
+            <a:avLst/>
+          </a:prstGeom>
+          <a:noFill xmlns:a="http://schemas.openxmlformats.org/drawingml/2006/main"/>
+          <a:ln xmlns:a="http://schemas.openxmlformats.org/drawingml/2006/main" w="0">
+            <a:noFill/>
+            <a:prstDash val="solid"/>
+          </a:ln>
+        </p:spPr>
+        <p:txBody>
+          <a:bodyPr xmlns:a="http://schemas.openxmlformats.org/drawingml/2006/main"/>
+          <a:lstStyle xmlns:a="http://schemas.openxmlformats.org/drawingml/2006/main"/>
+          <a:p xmlns:a="http://schemas.openxmlformats.org/drawingml/2006/main">
+            <a:pPr>
+              <a:defRPr sz="1275">
+                <a:solidFill>
+                  <a:srgbClr val="CBD5E1"/>
+                </a:solidFill>
+              </a:defRPr>
+            </a:pPr>
+            <a:r>
+              <a:rPr sz="1275">
+                <a:solidFill>
+                  <a:srgbClr val="CBD5E1"/>
+                </a:solidFill>
+              </a:rPr>
+              <a:t>한·일 협업 구간에서는 요청과 피드백을 분리하지 않고, 마일스톤 판단에 필요한 상태값으로 정리해야 합니다.</a:t>
+            </a:r>
+          </a:p>
+        </p:txBody>
+      </p:sp>
+      <p:sp>
+        <p:nvSpPr>
+          <p:cNvPr id="8" name="stakeholder-title">
+            <a:extLst xmlns:a="http://schemas.openxmlformats.org/drawingml/2006/main">
+              <a:ext uri="{FF2B5EF4-FFF2-40B4-BE49-F238E27FC236}">
+                <a16:creationId xmlns:a16="http://schemas.microsoft.com/office/drawing/2014/main" id="{D0C1F87A-C0BE-4195-8E76-76C2992EA6E3}"/>
+              </a:ext>
+            </a:extLst>
+          </p:cNvPr>
+          <p:cNvSpPr>
+            <a:spLocks xmlns:a="http://schemas.openxmlformats.org/drawingml/2006/main" noGrp="1"/>
+          </p:cNvSpPr>
+          <p:nvPr/>
+        </p:nvSpPr>
+        <p:spPr>
+          <a:xfrm xmlns:a="http://schemas.openxmlformats.org/drawingml/2006/main">
+            <a:off x="514350" y="1752600"/>
+            <a:ext cx="1714500" cy="285750"/>
+          </a:xfrm>
+          <a:prstGeom xmlns:a="http://schemas.openxmlformats.org/drawingml/2006/main" prst="rect">
+            <a:avLst/>
+          </a:prstGeom>
+          <a:noFill xmlns:a="http://schemas.openxmlformats.org/drawingml/2006/main"/>
+          <a:ln xmlns:a="http://schemas.openxmlformats.org/drawingml/2006/main" w="0">
+            <a:noFill/>
+            <a:prstDash val="solid"/>
+          </a:ln>
+        </p:spPr>
+        <p:txBody>
+          <a:bodyPr xmlns:a="http://schemas.openxmlformats.org/drawingml/2006/main"/>
+          <a:lstStyle xmlns:a="http://schemas.openxmlformats.org/drawingml/2006/main"/>
+          <a:p xmlns:a="http://schemas.openxmlformats.org/drawingml/2006/main">
+            <a:pPr>
+              <a:defRPr sz="1650" b="1">
+                <a:solidFill>
+                  <a:srgbClr val="FFFFFF"/>
+                </a:solidFill>
+              </a:defRPr>
+            </a:pPr>
+            <a:r>
+              <a:rPr sz="1650" b="1">
+                <a:solidFill>
+                  <a:srgbClr val="FFFFFF"/>
+                </a:solidFill>
+              </a:rPr>
+              <a:t>협업 대상</a:t>
+            </a:r>
+          </a:p>
+        </p:txBody>
+      </p:sp>
+      <p:sp>
+        <p:nvSpPr>
+          <p:cNvPr id="9" name="stakeholder-note">
+            <a:extLst xmlns:a="http://schemas.openxmlformats.org/drawingml/2006/main">
+              <a:ext uri="{FF2B5EF4-FFF2-40B4-BE49-F238E27FC236}">
+                <a16:creationId xmlns:a16="http://schemas.microsoft.com/office/drawing/2014/main" id="{99359DB5-8F38-4FA6-A7EB-714BBC407CA8}"/>
+              </a:ext>
+            </a:extLst>
+          </p:cNvPr>
+          <p:cNvSpPr>
+            <a:spLocks xmlns:a="http://schemas.openxmlformats.org/drawingml/2006/main" noGrp="1"/>
+          </p:cNvSpPr>
+          <p:nvPr/>
+        </p:nvSpPr>
+        <p:spPr>
+          <a:xfrm xmlns:a="http://schemas.openxmlformats.org/drawingml/2006/main">
+            <a:off x="1752600" y="1809750"/>
+            <a:ext cx="4095750" cy="209550"/>
+          </a:xfrm>
+          <a:prstGeom xmlns:a="http://schemas.openxmlformats.org/drawingml/2006/main" prst="rect">
+            <a:avLst/>
+          </a:prstGeom>
+          <a:noFill xmlns:a="http://schemas.openxmlformats.org/drawingml/2006/main"/>
+          <a:ln xmlns:a="http://schemas.openxmlformats.org/drawingml/2006/main" w="0">
+            <a:noFill/>
+            <a:prstDash val="solid"/>
+          </a:ln>
+        </p:spPr>
+        <p:txBody>
+          <a:bodyPr xmlns:a="http://schemas.openxmlformats.org/drawingml/2006/main"/>
+          <a:lstStyle xmlns:a="http://schemas.openxmlformats.org/drawingml/2006/main"/>
+          <a:p xmlns:a="http://schemas.openxmlformats.org/drawingml/2006/main">
+            <a:pPr>
+              <a:defRPr sz="975">
+                <a:solidFill>
+                  <a:srgbClr val="94A3B8"/>
+                </a:solidFill>
+              </a:defRPr>
+            </a:pPr>
+            <a:r>
+              <a:rPr sz="975">
+                <a:solidFill>
+                  <a:srgbClr val="94A3B8"/>
+                </a:solidFill>
+              </a:rPr>
+              <a:t>역할별 확인 기준을 고정해 커뮤니케이션 누락을 줄입니다.</a:t>
+            </a:r>
+          </a:p>
+        </p:txBody>
+      </p:sp>
+      <p:sp>
+        <p:nvSpPr>
+          <p:cNvPr id="10" name="stakeholder-card-1">
+            <a:extLst xmlns:a="http://schemas.openxmlformats.org/drawingml/2006/main">
+              <a:ext uri="{FF2B5EF4-FFF2-40B4-BE49-F238E27FC236}">
+                <a16:creationId xmlns:a16="http://schemas.microsoft.com/office/drawing/2014/main" id="{FD4BF2B2-32E6-4EB9-B2A2-DE36FD22133C}"/>
+              </a:ext>
+            </a:extLst>
+          </p:cNvPr>
+          <p:cNvSpPr>
+            <a:spLocks xmlns:a="http://schemas.openxmlformats.org/drawingml/2006/main" noGrp="1"/>
+          </p:cNvSpPr>
+          <p:nvPr/>
+        </p:nvSpPr>
+        <p:spPr>
+          <a:xfrm xmlns:a="http://schemas.openxmlformats.org/drawingml/2006/main">
+            <a:off x="514350" y="2152650"/>
+            <a:ext cx="1238250" cy="1085850"/>
+          </a:xfrm>
+          <a:prstGeom xmlns:a="http://schemas.openxmlformats.org/drawingml/2006/main" prst="roundRect">
+            <a:avLst>
+              <a:gd name="adj" fmla="val 7018"/>
+            </a:avLst>
+          </a:prstGeom>
+          <a:solidFill xmlns:a="http://schemas.openxmlformats.org/drawingml/2006/main">
+            <a:srgbClr val="111827"/>
+          </a:solidFill>
+          <a:ln xmlns:a="http://schemas.openxmlformats.org/drawingml/2006/main" w="9525">
+            <a:solidFill>
+              <a:srgbClr val="2F3B55"/>
+            </a:solidFill>
+            <a:prstDash val="solid"/>
+          </a:ln>
+        </p:spPr>
+      </p:sp>
+      <p:sp>
+        <p:nvSpPr>
+          <p:cNvPr id="11" name="stakeholder-bar-1">
+            <a:extLst xmlns:a="http://schemas.openxmlformats.org/drawingml/2006/main">
+              <a:ext uri="{FF2B5EF4-FFF2-40B4-BE49-F238E27FC236}">
+                <a16:creationId xmlns:a16="http://schemas.microsoft.com/office/drawing/2014/main" id="{0E65F953-366C-48C4-943A-EB237E89FDD4}"/>
+              </a:ext>
+            </a:extLst>
+          </p:cNvPr>
+          <p:cNvSpPr>
+            <a:spLocks xmlns:a="http://schemas.openxmlformats.org/drawingml/2006/main" noGrp="1"/>
+          </p:cNvSpPr>
+          <p:nvPr/>
+        </p:nvSpPr>
+        <p:spPr>
+          <a:xfrm xmlns:a="http://schemas.openxmlformats.org/drawingml/2006/main">
+            <a:off x="514350" y="2152650"/>
+            <a:ext cx="1238250" cy="57150"/>
+          </a:xfrm>
+          <a:prstGeom xmlns:a="http://schemas.openxmlformats.org/drawingml/2006/main" prst="rect">
+            <a:avLst/>
+          </a:prstGeom>
+          <a:solidFill xmlns:a="http://schemas.openxmlformats.org/drawingml/2006/main">
+            <a:srgbClr val="00B8D9"/>
+          </a:solidFill>
+          <a:ln xmlns:a="http://schemas.openxmlformats.org/drawingml/2006/main" w="0">
+            <a:solidFill>
+              <a:srgbClr val="00B8D9"/>
+            </a:solidFill>
+            <a:prstDash val="solid"/>
+          </a:ln>
+        </p:spPr>
+      </p:sp>
+      <p:sp>
+        <p:nvSpPr>
+          <p:cNvPr id="12" name="stakeholder-role-1">
+            <a:extLst xmlns:a="http://schemas.openxmlformats.org/drawingml/2006/main">
+              <a:ext uri="{FF2B5EF4-FFF2-40B4-BE49-F238E27FC236}">
+                <a16:creationId xmlns:a16="http://schemas.microsoft.com/office/drawing/2014/main" id="{8EAFB506-5AF5-4BCD-8512-699C66503BFA}"/>
+              </a:ext>
+            </a:extLst>
+          </p:cNvPr>
+          <p:cNvSpPr>
+            <a:spLocks xmlns:a="http://schemas.openxmlformats.org/drawingml/2006/main" noGrp="1"/>
+          </p:cNvSpPr>
+          <p:nvPr/>
+        </p:nvSpPr>
+        <p:spPr>
+          <a:xfrm xmlns:a="http://schemas.openxmlformats.org/drawingml/2006/main">
+            <a:off x="628650" y="2381250"/>
+            <a:ext cx="1009650" cy="228600"/>
+          </a:xfrm>
+          <a:prstGeom xmlns:a="http://schemas.openxmlformats.org/drawingml/2006/main" prst="rect">
+            <a:avLst/>
+          </a:prstGeom>
+          <a:noFill xmlns:a="http://schemas.openxmlformats.org/drawingml/2006/main"/>
+          <a:ln xmlns:a="http://schemas.openxmlformats.org/drawingml/2006/main" w="0">
+            <a:noFill/>
+            <a:prstDash val="solid"/>
+          </a:ln>
+        </p:spPr>
+        <p:txBody>
+          <a:bodyPr xmlns:a="http://schemas.openxmlformats.org/drawingml/2006/main"/>
+          <a:lstStyle xmlns:a="http://schemas.openxmlformats.org/drawingml/2006/main"/>
+          <a:p xmlns:a="http://schemas.openxmlformats.org/drawingml/2006/main">
+            <a:pPr algn="ctr">
+              <a:defRPr sz="1125" b="1">
+                <a:solidFill>
+                  <a:srgbClr val="FFFFFF"/>
+                </a:solidFill>
+              </a:defRPr>
+            </a:pPr>
+            <a:r>
+              <a:rPr sz="1125" b="1">
+                <a:solidFill>
+                  <a:srgbClr val="FFFFFF"/>
+                </a:solidFill>
+              </a:rPr>
+              <a:t>개발 PM</a:t>
+            </a:r>
+          </a:p>
+        </p:txBody>
+      </p:sp>
+      <p:sp>
+        <p:nvSpPr>
+          <p:cNvPr id="13" name="stakeholder-focus-1">
+            <a:extLst xmlns:a="http://schemas.openxmlformats.org/drawingml/2006/main">
+              <a:ext uri="{FF2B5EF4-FFF2-40B4-BE49-F238E27FC236}">
+                <a16:creationId xmlns:a16="http://schemas.microsoft.com/office/drawing/2014/main" id="{3EE6BCD1-912E-4893-A4B6-9F5F3770B924}"/>
+              </a:ext>
+            </a:extLst>
+          </p:cNvPr>
+          <p:cNvSpPr>
+            <a:spLocks xmlns:a="http://schemas.openxmlformats.org/drawingml/2006/main" noGrp="1"/>
+          </p:cNvSpPr>
+          <p:nvPr/>
+        </p:nvSpPr>
+        <p:spPr>
+          <a:xfrm xmlns:a="http://schemas.openxmlformats.org/drawingml/2006/main">
+            <a:off x="628650" y="2705100"/>
+            <a:ext cx="1009650" cy="361950"/>
+          </a:xfrm>
+          <a:prstGeom xmlns:a="http://schemas.openxmlformats.org/drawingml/2006/main" prst="rect">
+            <a:avLst/>
+          </a:prstGeom>
+          <a:noFill xmlns:a="http://schemas.openxmlformats.org/drawingml/2006/main"/>
+          <a:ln xmlns:a="http://schemas.openxmlformats.org/drawingml/2006/main" w="0">
+            <a:noFill/>
+            <a:prstDash val="solid"/>
+          </a:ln>
+        </p:spPr>
+        <p:txBody>
+          <a:bodyPr xmlns:a="http://schemas.openxmlformats.org/drawingml/2006/main"/>
+          <a:lstStyle xmlns:a="http://schemas.openxmlformats.org/drawingml/2006/main"/>
+          <a:p xmlns:a="http://schemas.openxmlformats.org/drawingml/2006/main">
+            <a:pPr algn="ctr">
+              <a:defRPr sz="863">
+                <a:solidFill>
+                  <a:srgbClr val="CBD5E1"/>
+                </a:solidFill>
+              </a:defRPr>
+            </a:pPr>
+            <a:r>
+              <a:rPr sz="863">
+                <a:solidFill>
+                  <a:srgbClr val="CBD5E1"/>
+                </a:solidFill>
+              </a:rPr>
+              <a:t>일정·범위 통제</a:t>
+            </a:r>
+          </a:p>
+          <a:p xmlns:a="http://schemas.openxmlformats.org/drawingml/2006/main">
+            <a:pPr algn="ctr">
+              <a:defRPr sz="863">
+                <a:solidFill>
+                  <a:srgbClr val="CBD5E1"/>
+                </a:solidFill>
+              </a:defRPr>
+            </a:pPr>
+            <a:r>
+              <a:rPr sz="863">
+                <a:solidFill>
+                  <a:srgbClr val="CBD5E1"/>
+                </a:solidFill>
+              </a:rPr>
+              <a:t>이슈 우선순위</a:t>
+            </a:r>
+          </a:p>
+        </p:txBody>
+      </p:sp>
+      <p:sp>
+        <p:nvSpPr>
+          <p:cNvPr id="14" name="stakeholder-card-2">
+            <a:extLst xmlns:a="http://schemas.openxmlformats.org/drawingml/2006/main">
+              <a:ext uri="{FF2B5EF4-FFF2-40B4-BE49-F238E27FC236}">
+                <a16:creationId xmlns:a16="http://schemas.microsoft.com/office/drawing/2014/main" id="{62892338-EB02-4DD2-A3C9-D46B7663B262}"/>
+              </a:ext>
+            </a:extLst>
+          </p:cNvPr>
+          <p:cNvSpPr>
+            <a:spLocks xmlns:a="http://schemas.openxmlformats.org/drawingml/2006/main" noGrp="1"/>
+          </p:cNvSpPr>
+          <p:nvPr/>
+        </p:nvSpPr>
+        <p:spPr>
+          <a:xfrm xmlns:a="http://schemas.openxmlformats.org/drawingml/2006/main">
+            <a:off x="1943100" y="2152650"/>
+            <a:ext cx="1238250" cy="1085850"/>
+          </a:xfrm>
+          <a:prstGeom xmlns:a="http://schemas.openxmlformats.org/drawingml/2006/main" prst="roundRect">
+            <a:avLst>
+              <a:gd name="adj" fmla="val 7018"/>
+            </a:avLst>
+          </a:prstGeom>
+          <a:solidFill xmlns:a="http://schemas.openxmlformats.org/drawingml/2006/main">
+            <a:srgbClr val="111827"/>
+          </a:solidFill>
+          <a:ln xmlns:a="http://schemas.openxmlformats.org/drawingml/2006/main" w="9525">
+            <a:solidFill>
+              <a:srgbClr val="2F3B55"/>
+            </a:solidFill>
+            <a:prstDash val="solid"/>
+          </a:ln>
+        </p:spPr>
+      </p:sp>
+      <p:sp>
+        <p:nvSpPr>
+          <p:cNvPr id="15" name="stakeholder-bar-2">
+            <a:extLst xmlns:a="http://schemas.openxmlformats.org/drawingml/2006/main">
+              <a:ext uri="{FF2B5EF4-FFF2-40B4-BE49-F238E27FC236}">
+                <a16:creationId xmlns:a16="http://schemas.microsoft.com/office/drawing/2014/main" id="{D8600CF9-F901-437B-A7FD-4CCFE1996F0E}"/>
+              </a:ext>
+            </a:extLst>
+          </p:cNvPr>
+          <p:cNvSpPr>
+            <a:spLocks xmlns:a="http://schemas.openxmlformats.org/drawingml/2006/main" noGrp="1"/>
+          </p:cNvSpPr>
+          <p:nvPr/>
+        </p:nvSpPr>
+        <p:spPr>
+          <a:xfrm xmlns:a="http://schemas.openxmlformats.org/drawingml/2006/main">
+            <a:off x="1943100" y="2152650"/>
+            <a:ext cx="1238250" cy="57150"/>
+          </a:xfrm>
+          <a:prstGeom xmlns:a="http://schemas.openxmlformats.org/drawingml/2006/main" prst="rect">
+            <a:avLst/>
+          </a:prstGeom>
+          <a:solidFill xmlns:a="http://schemas.openxmlformats.org/drawingml/2006/main">
+            <a:srgbClr val="FF6B35"/>
+          </a:solidFill>
+          <a:ln xmlns:a="http://schemas.openxmlformats.org/drawingml/2006/main" w="0">
+            <a:solidFill>
+              <a:srgbClr val="FF6B35"/>
+            </a:solidFill>
+            <a:prstDash val="solid"/>
+          </a:ln>
+        </p:spPr>
+      </p:sp>
+      <p:sp>
+        <p:nvSpPr>
+          <p:cNvPr id="16" name="stakeholder-role-2">
+            <a:extLst xmlns:a="http://schemas.openxmlformats.org/drawingml/2006/main">
+              <a:ext uri="{FF2B5EF4-FFF2-40B4-BE49-F238E27FC236}">
+                <a16:creationId xmlns:a16="http://schemas.microsoft.com/office/drawing/2014/main" id="{B1AF91D6-F98B-4379-A515-F767BC1B4986}"/>
+              </a:ext>
+            </a:extLst>
+          </p:cNvPr>
+          <p:cNvSpPr>
+            <a:spLocks xmlns:a="http://schemas.openxmlformats.org/drawingml/2006/main" noGrp="1"/>
+          </p:cNvSpPr>
+          <p:nvPr/>
+        </p:nvSpPr>
+        <p:spPr>
+          <a:xfrm xmlns:a="http://schemas.openxmlformats.org/drawingml/2006/main">
+            <a:off x="2057400" y="2381250"/>
+            <a:ext cx="1009650" cy="228600"/>
+          </a:xfrm>
+          <a:prstGeom xmlns:a="http://schemas.openxmlformats.org/drawingml/2006/main" prst="rect">
+            <a:avLst/>
+          </a:prstGeom>
+          <a:noFill xmlns:a="http://schemas.openxmlformats.org/drawingml/2006/main"/>
+          <a:ln xmlns:a="http://schemas.openxmlformats.org/drawingml/2006/main" w="0">
+            <a:noFill/>
+            <a:prstDash val="solid"/>
+          </a:ln>
+        </p:spPr>
+        <p:txBody>
+          <a:bodyPr xmlns:a="http://schemas.openxmlformats.org/drawingml/2006/main"/>
+          <a:lstStyle xmlns:a="http://schemas.openxmlformats.org/drawingml/2006/main"/>
+          <a:p xmlns:a="http://schemas.openxmlformats.org/drawingml/2006/main">
+            <a:pPr algn="ctr">
+              <a:defRPr sz="1125" b="1">
+                <a:solidFill>
+                  <a:srgbClr val="FFFFFF"/>
+                </a:solidFill>
+              </a:defRPr>
+            </a:pPr>
+            <a:r>
+              <a:rPr sz="1125" b="1">
+                <a:solidFill>
+                  <a:srgbClr val="FFFFFF"/>
+                </a:solidFill>
+              </a:rPr>
+              <a:t>개발</a:t>
+            </a:r>
+          </a:p>
+        </p:txBody>
+      </p:sp>
+      <p:sp>
+        <p:nvSpPr>
+          <p:cNvPr id="17" name="stakeholder-focus-2">
+            <a:extLst xmlns:a="http://schemas.openxmlformats.org/drawingml/2006/main">
+              <a:ext uri="{FF2B5EF4-FFF2-40B4-BE49-F238E27FC236}">
+                <a16:creationId xmlns:a16="http://schemas.microsoft.com/office/drawing/2014/main" id="{A7FEF5DC-50AA-4E37-B615-A5DEE7C210F9}"/>
+              </a:ext>
+            </a:extLst>
+          </p:cNvPr>
+          <p:cNvSpPr>
+            <a:spLocks xmlns:a="http://schemas.openxmlformats.org/drawingml/2006/main" noGrp="1"/>
+          </p:cNvSpPr>
+          <p:nvPr/>
+        </p:nvSpPr>
+        <p:spPr>
+          <a:xfrm xmlns:a="http://schemas.openxmlformats.org/drawingml/2006/main">
+            <a:off x="2057400" y="2705100"/>
+            <a:ext cx="1009650" cy="361950"/>
+          </a:xfrm>
+          <a:prstGeom xmlns:a="http://schemas.openxmlformats.org/drawingml/2006/main" prst="rect">
+            <a:avLst/>
+          </a:prstGeom>
+          <a:noFill xmlns:a="http://schemas.openxmlformats.org/drawingml/2006/main"/>
+          <a:ln xmlns:a="http://schemas.openxmlformats.org/drawingml/2006/main" w="0">
+            <a:noFill/>
+            <a:prstDash val="solid"/>
+          </a:ln>
+        </p:spPr>
+        <p:txBody>
+          <a:bodyPr xmlns:a="http://schemas.openxmlformats.org/drawingml/2006/main"/>
+          <a:lstStyle xmlns:a="http://schemas.openxmlformats.org/drawingml/2006/main"/>
+          <a:p xmlns:a="http://schemas.openxmlformats.org/drawingml/2006/main">
+            <a:pPr algn="ctr">
+              <a:defRPr sz="863">
+                <a:solidFill>
+                  <a:srgbClr val="CBD5E1"/>
+                </a:solidFill>
+              </a:defRPr>
+            </a:pPr>
+            <a:r>
+              <a:rPr sz="863">
+                <a:solidFill>
+                  <a:srgbClr val="CBD5E1"/>
+                </a:solidFill>
+              </a:rPr>
+              <a:t>빌드 반영</a:t>
+            </a:r>
+          </a:p>
+          <a:p xmlns:a="http://schemas.openxmlformats.org/drawingml/2006/main">
+            <a:pPr algn="ctr">
+              <a:defRPr sz="863">
+                <a:solidFill>
+                  <a:srgbClr val="CBD5E1"/>
+                </a:solidFill>
+              </a:defRPr>
+            </a:pPr>
+            <a:r>
+              <a:rPr sz="863">
+                <a:solidFill>
+                  <a:srgbClr val="CBD5E1"/>
+                </a:solidFill>
+              </a:rPr>
+              <a:t>버전 기준 관리</a:t>
+            </a:r>
+          </a:p>
+        </p:txBody>
+      </p:sp>
+      <p:sp>
+        <p:nvSpPr>
+          <p:cNvPr id="18" name="stakeholder-card-3">
+            <a:extLst xmlns:a="http://schemas.openxmlformats.org/drawingml/2006/main">
+              <a:ext uri="{FF2B5EF4-FFF2-40B4-BE49-F238E27FC236}">
+                <a16:creationId xmlns:a16="http://schemas.microsoft.com/office/drawing/2014/main" id="{4B416683-299F-4FB4-BD66-34C42B8353E6}"/>
+              </a:ext>
+            </a:extLst>
+          </p:cNvPr>
+          <p:cNvSpPr>
+            <a:spLocks xmlns:a="http://schemas.openxmlformats.org/drawingml/2006/main" noGrp="1"/>
+          </p:cNvSpPr>
+          <p:nvPr/>
+        </p:nvSpPr>
+        <p:spPr>
+          <a:xfrm xmlns:a="http://schemas.openxmlformats.org/drawingml/2006/main">
+            <a:off x="3371850" y="2152650"/>
+            <a:ext cx="1238250" cy="1085850"/>
+          </a:xfrm>
+          <a:prstGeom xmlns:a="http://schemas.openxmlformats.org/drawingml/2006/main" prst="roundRect">
+            <a:avLst>
+              <a:gd name="adj" fmla="val 7018"/>
+            </a:avLst>
+          </a:prstGeom>
+          <a:solidFill xmlns:a="http://schemas.openxmlformats.org/drawingml/2006/main">
+            <a:srgbClr val="111827"/>
+          </a:solidFill>
+          <a:ln xmlns:a="http://schemas.openxmlformats.org/drawingml/2006/main" w="9525">
+            <a:solidFill>
+              <a:srgbClr val="2F3B55"/>
+            </a:solidFill>
+            <a:prstDash val="solid"/>
+          </a:ln>
+        </p:spPr>
+      </p:sp>
+      <p:sp>
+        <p:nvSpPr>
+          <p:cNvPr id="19" name="stakeholder-bar-3">
+            <a:extLst xmlns:a="http://schemas.openxmlformats.org/drawingml/2006/main">
+              <a:ext uri="{FF2B5EF4-FFF2-40B4-BE49-F238E27FC236}">
+                <a16:creationId xmlns:a16="http://schemas.microsoft.com/office/drawing/2014/main" id="{D9A779D5-4871-4DE1-92B6-62857D02CFD9}"/>
+              </a:ext>
+            </a:extLst>
+          </p:cNvPr>
+          <p:cNvSpPr>
+            <a:spLocks xmlns:a="http://schemas.openxmlformats.org/drawingml/2006/main" noGrp="1"/>
+          </p:cNvSpPr>
+          <p:nvPr/>
+        </p:nvSpPr>
+        <p:spPr>
+          <a:xfrm xmlns:a="http://schemas.openxmlformats.org/drawingml/2006/main">
+            <a:off x="3371850" y="2152650"/>
+            <a:ext cx="1238250" cy="57150"/>
+          </a:xfrm>
+          <a:prstGeom xmlns:a="http://schemas.openxmlformats.org/drawingml/2006/main" prst="rect">
+            <a:avLst/>
+          </a:prstGeom>
+          <a:solidFill xmlns:a="http://schemas.openxmlformats.org/drawingml/2006/main">
+            <a:srgbClr val="7C3AED"/>
+          </a:solidFill>
+          <a:ln xmlns:a="http://schemas.openxmlformats.org/drawingml/2006/main" w="0">
+            <a:solidFill>
+              <a:srgbClr val="7C3AED"/>
+            </a:solidFill>
+            <a:prstDash val="solid"/>
+          </a:ln>
+        </p:spPr>
+      </p:sp>
+      <p:sp>
+        <p:nvSpPr>
+          <p:cNvPr id="20" name="stakeholder-role-3">
+            <a:extLst xmlns:a="http://schemas.openxmlformats.org/drawingml/2006/main">
+              <a:ext uri="{FF2B5EF4-FFF2-40B4-BE49-F238E27FC236}">
+                <a16:creationId xmlns:a16="http://schemas.microsoft.com/office/drawing/2014/main" id="{BEF8E61E-1B97-48E8-97D1-281DCD067C8C}"/>
+              </a:ext>
+            </a:extLst>
+          </p:cNvPr>
+          <p:cNvSpPr>
+            <a:spLocks xmlns:a="http://schemas.openxmlformats.org/drawingml/2006/main" noGrp="1"/>
+          </p:cNvSpPr>
+          <p:nvPr/>
+        </p:nvSpPr>
+        <p:spPr>
+          <a:xfrm xmlns:a="http://schemas.openxmlformats.org/drawingml/2006/main">
+            <a:off x="3486150" y="2381250"/>
+            <a:ext cx="1009650" cy="228600"/>
+          </a:xfrm>
+          <a:prstGeom xmlns:a="http://schemas.openxmlformats.org/drawingml/2006/main" prst="rect">
+            <a:avLst/>
+          </a:prstGeom>
+          <a:noFill xmlns:a="http://schemas.openxmlformats.org/drawingml/2006/main"/>
+          <a:ln xmlns:a="http://schemas.openxmlformats.org/drawingml/2006/main" w="0">
+            <a:noFill/>
+            <a:prstDash val="solid"/>
+          </a:ln>
+        </p:spPr>
+        <p:txBody>
+          <a:bodyPr xmlns:a="http://schemas.openxmlformats.org/drawingml/2006/main"/>
+          <a:lstStyle xmlns:a="http://schemas.openxmlformats.org/drawingml/2006/main"/>
+          <a:p xmlns:a="http://schemas.openxmlformats.org/drawingml/2006/main">
+            <a:pPr algn="ctr">
+              <a:defRPr sz="1125" b="1">
+                <a:solidFill>
+                  <a:srgbClr val="FFFFFF"/>
+                </a:solidFill>
+              </a:defRPr>
+            </a:pPr>
+            <a:r>
+              <a:rPr sz="1125" b="1">
+                <a:solidFill>
+                  <a:srgbClr val="FFFFFF"/>
+                </a:solidFill>
+              </a:rPr>
+              <a:t>QA</a:t>
+            </a:r>
+          </a:p>
+        </p:txBody>
+      </p:sp>
+      <p:sp>
+        <p:nvSpPr>
+          <p:cNvPr id="21" name="stakeholder-focus-3">
+            <a:extLst xmlns:a="http://schemas.openxmlformats.org/drawingml/2006/main">
+              <a:ext uri="{FF2B5EF4-FFF2-40B4-BE49-F238E27FC236}">
+                <a16:creationId xmlns:a16="http://schemas.microsoft.com/office/drawing/2014/main" id="{318C3653-E1D8-439D-82F9-02D6CC4454E2}"/>
+              </a:ext>
+            </a:extLst>
+          </p:cNvPr>
+          <p:cNvSpPr>
+            <a:spLocks xmlns:a="http://schemas.openxmlformats.org/drawingml/2006/main" noGrp="1"/>
+          </p:cNvSpPr>
+          <p:nvPr/>
+        </p:nvSpPr>
+        <p:spPr>
+          <a:xfrm xmlns:a="http://schemas.openxmlformats.org/drawingml/2006/main">
+            <a:off x="3486150" y="2705100"/>
+            <a:ext cx="1009650" cy="361950"/>
+          </a:xfrm>
+          <a:prstGeom xmlns:a="http://schemas.openxmlformats.org/drawingml/2006/main" prst="rect">
+            <a:avLst/>
+          </a:prstGeom>
+          <a:noFill xmlns:a="http://schemas.openxmlformats.org/drawingml/2006/main"/>
+          <a:ln xmlns:a="http://schemas.openxmlformats.org/drawingml/2006/main" w="0">
+            <a:noFill/>
+            <a:prstDash val="solid"/>
+          </a:ln>
+        </p:spPr>
+        <p:txBody>
+          <a:bodyPr xmlns:a="http://schemas.openxmlformats.org/drawingml/2006/main"/>
+          <a:lstStyle xmlns:a="http://schemas.openxmlformats.org/drawingml/2006/main"/>
+          <a:p xmlns:a="http://schemas.openxmlformats.org/drawingml/2006/main">
+            <a:pPr algn="ctr">
+              <a:defRPr sz="863">
+                <a:solidFill>
+                  <a:srgbClr val="CBD5E1"/>
+                </a:solidFill>
+              </a:defRPr>
+            </a:pPr>
+            <a:r>
+              <a:rPr sz="863">
+                <a:solidFill>
+                  <a:srgbClr val="CBD5E1"/>
+                </a:solidFill>
+              </a:rPr>
+              <a:t>검수 결과</a:t>
+            </a:r>
+          </a:p>
+          <a:p xmlns:a="http://schemas.openxmlformats.org/drawingml/2006/main">
+            <a:pPr algn="ctr">
+              <a:defRPr sz="863">
+                <a:solidFill>
+                  <a:srgbClr val="CBD5E1"/>
+                </a:solidFill>
+              </a:defRPr>
+            </a:pPr>
+            <a:r>
+              <a:rPr sz="863">
+                <a:solidFill>
+                  <a:srgbClr val="CBD5E1"/>
+                </a:solidFill>
+              </a:rPr>
+              <a:t>수정 반영 추적</a:t>
+            </a:r>
+          </a:p>
+        </p:txBody>
+      </p:sp>
+      <p:sp>
+        <p:nvSpPr>
+          <p:cNvPr id="22" name="stakeholder-card-4">
+            <a:extLst xmlns:a="http://schemas.openxmlformats.org/drawingml/2006/main">
+              <a:ext uri="{FF2B5EF4-FFF2-40B4-BE49-F238E27FC236}">
+                <a16:creationId xmlns:a16="http://schemas.microsoft.com/office/drawing/2014/main" id="{EEC2A7B4-0CC1-432C-A378-8E1DF5EC46D0}"/>
+              </a:ext>
+            </a:extLst>
+          </p:cNvPr>
+          <p:cNvSpPr>
+            <a:spLocks xmlns:a="http://schemas.openxmlformats.org/drawingml/2006/main" noGrp="1"/>
+          </p:cNvSpPr>
+          <p:nvPr/>
+        </p:nvSpPr>
+        <p:spPr>
+          <a:xfrm xmlns:a="http://schemas.openxmlformats.org/drawingml/2006/main">
+            <a:off x="4800600" y="2152650"/>
+            <a:ext cx="1238250" cy="1085850"/>
+          </a:xfrm>
+          <a:prstGeom xmlns:a="http://schemas.openxmlformats.org/drawingml/2006/main" prst="roundRect">
+            <a:avLst>
+              <a:gd name="adj" fmla="val 7018"/>
+            </a:avLst>
+          </a:prstGeom>
+          <a:solidFill xmlns:a="http://schemas.openxmlformats.org/drawingml/2006/main">
+            <a:srgbClr val="111827"/>
+          </a:solidFill>
+          <a:ln xmlns:a="http://schemas.openxmlformats.org/drawingml/2006/main" w="9525">
+            <a:solidFill>
+              <a:srgbClr val="2F3B55"/>
+            </a:solidFill>
+            <a:prstDash val="solid"/>
+          </a:ln>
+        </p:spPr>
+      </p:sp>
+      <p:sp>
+        <p:nvSpPr>
+          <p:cNvPr id="23" name="stakeholder-bar-4">
+            <a:extLst xmlns:a="http://schemas.openxmlformats.org/drawingml/2006/main">
+              <a:ext uri="{FF2B5EF4-FFF2-40B4-BE49-F238E27FC236}">
+                <a16:creationId xmlns:a16="http://schemas.microsoft.com/office/drawing/2014/main" id="{4BAF6961-98A7-4956-BD19-85037E26D3E9}"/>
+              </a:ext>
+            </a:extLst>
+          </p:cNvPr>
+          <p:cNvSpPr>
+            <a:spLocks xmlns:a="http://schemas.openxmlformats.org/drawingml/2006/main" noGrp="1"/>
+          </p:cNvSpPr>
+          <p:nvPr/>
+        </p:nvSpPr>
+        <p:spPr>
+          <a:xfrm xmlns:a="http://schemas.openxmlformats.org/drawingml/2006/main">
+            <a:off x="4800600" y="2152650"/>
+            <a:ext cx="1238250" cy="57150"/>
+          </a:xfrm>
+          <a:prstGeom xmlns:a="http://schemas.openxmlformats.org/drawingml/2006/main" prst="rect">
+            <a:avLst/>
+          </a:prstGeom>
+          <a:solidFill xmlns:a="http://schemas.openxmlformats.org/drawingml/2006/main">
+            <a:srgbClr val="8BD9E8"/>
+          </a:solidFill>
+          <a:ln xmlns:a="http://schemas.openxmlformats.org/drawingml/2006/main" w="0">
+            <a:solidFill>
+              <a:srgbClr val="8BD9E8"/>
+            </a:solidFill>
+            <a:prstDash val="solid"/>
+          </a:ln>
+        </p:spPr>
+      </p:sp>
+      <p:sp>
+        <p:nvSpPr>
+          <p:cNvPr id="24" name="stakeholder-role-4">
+            <a:extLst xmlns:a="http://schemas.openxmlformats.org/drawingml/2006/main">
+              <a:ext uri="{FF2B5EF4-FFF2-40B4-BE49-F238E27FC236}">
+                <a16:creationId xmlns:a16="http://schemas.microsoft.com/office/drawing/2014/main" id="{4603777A-F2AA-497B-8878-01388CC88F52}"/>
+              </a:ext>
+            </a:extLst>
+          </p:cNvPr>
+          <p:cNvSpPr>
+            <a:spLocks xmlns:a="http://schemas.openxmlformats.org/drawingml/2006/main" noGrp="1"/>
+          </p:cNvSpPr>
+          <p:nvPr/>
+        </p:nvSpPr>
+        <p:spPr>
+          <a:xfrm xmlns:a="http://schemas.openxmlformats.org/drawingml/2006/main">
+            <a:off x="4914900" y="2381250"/>
+            <a:ext cx="1009650" cy="228600"/>
+          </a:xfrm>
+          <a:prstGeom xmlns:a="http://schemas.openxmlformats.org/drawingml/2006/main" prst="rect">
+            <a:avLst/>
+          </a:prstGeom>
+          <a:noFill xmlns:a="http://schemas.openxmlformats.org/drawingml/2006/main"/>
+          <a:ln xmlns:a="http://schemas.openxmlformats.org/drawingml/2006/main" w="0">
+            <a:noFill/>
+            <a:prstDash val="solid"/>
+          </a:ln>
+        </p:spPr>
+        <p:txBody>
+          <a:bodyPr xmlns:a="http://schemas.openxmlformats.org/drawingml/2006/main"/>
+          <a:lstStyle xmlns:a="http://schemas.openxmlformats.org/drawingml/2006/main"/>
+          <a:p xmlns:a="http://schemas.openxmlformats.org/drawingml/2006/main">
+            <a:pPr algn="ctr">
+              <a:defRPr sz="1125" b="1">
+                <a:solidFill>
+                  <a:srgbClr val="FFFFFF"/>
+                </a:solidFill>
+              </a:defRPr>
+            </a:pPr>
+            <a:r>
+              <a:rPr sz="1125" b="1">
+                <a:solidFill>
+                  <a:srgbClr val="FFFFFF"/>
+                </a:solidFill>
+              </a:rPr>
+              <a:t>운영</a:t>
+            </a:r>
+          </a:p>
+        </p:txBody>
+      </p:sp>
+      <p:sp>
+        <p:nvSpPr>
+          <p:cNvPr id="25" name="stakeholder-focus-4">
+            <a:extLst xmlns:a="http://schemas.openxmlformats.org/drawingml/2006/main">
+              <a:ext uri="{FF2B5EF4-FFF2-40B4-BE49-F238E27FC236}">
+                <a16:creationId xmlns:a16="http://schemas.microsoft.com/office/drawing/2014/main" id="{D1A393FD-F335-4C8A-9828-E507A6D007BF}"/>
+              </a:ext>
+            </a:extLst>
+          </p:cNvPr>
+          <p:cNvSpPr>
+            <a:spLocks xmlns:a="http://schemas.openxmlformats.org/drawingml/2006/main" noGrp="1"/>
+          </p:cNvSpPr>
+          <p:nvPr/>
+        </p:nvSpPr>
+        <p:spPr>
+          <a:xfrm xmlns:a="http://schemas.openxmlformats.org/drawingml/2006/main">
+            <a:off x="4914900" y="2705100"/>
+            <a:ext cx="1009650" cy="361950"/>
+          </a:xfrm>
+          <a:prstGeom xmlns:a="http://schemas.openxmlformats.org/drawingml/2006/main" prst="rect">
+            <a:avLst/>
+          </a:prstGeom>
+          <a:noFill xmlns:a="http://schemas.openxmlformats.org/drawingml/2006/main"/>
+          <a:ln xmlns:a="http://schemas.openxmlformats.org/drawingml/2006/main" w="0">
+            <a:noFill/>
+            <a:prstDash val="solid"/>
+          </a:ln>
+        </p:spPr>
+        <p:txBody>
+          <a:bodyPr xmlns:a="http://schemas.openxmlformats.org/drawingml/2006/main"/>
+          <a:lstStyle xmlns:a="http://schemas.openxmlformats.org/drawingml/2006/main"/>
+          <a:p xmlns:a="http://schemas.openxmlformats.org/drawingml/2006/main">
+            <a:pPr algn="ctr">
+              <a:defRPr sz="863">
+                <a:solidFill>
+                  <a:srgbClr val="CBD5E1"/>
+                </a:solidFill>
+              </a:defRPr>
+            </a:pPr>
+            <a:r>
+              <a:rPr sz="863">
+                <a:solidFill>
+                  <a:srgbClr val="CBD5E1"/>
+                </a:solidFill>
+              </a:rPr>
+              <a:t>공지·이벤트</a:t>
+            </a:r>
+          </a:p>
+          <a:p xmlns:a="http://schemas.openxmlformats.org/drawingml/2006/main">
+            <a:pPr algn="ctr">
+              <a:defRPr sz="863">
+                <a:solidFill>
+                  <a:srgbClr val="CBD5E1"/>
+                </a:solidFill>
+              </a:defRPr>
+            </a:pPr>
+            <a:r>
+              <a:rPr sz="863">
+                <a:solidFill>
+                  <a:srgbClr val="CBD5E1"/>
+                </a:solidFill>
+              </a:rPr>
+              <a:t>Live 준비</a:t>
+            </a:r>
+          </a:p>
+        </p:txBody>
+      </p:sp>
+      <p:sp>
+        <p:nvSpPr>
+          <p:cNvPr id="26" name="stakeholder-card-5">
+            <a:extLst xmlns:a="http://schemas.openxmlformats.org/drawingml/2006/main">
+              <a:ext uri="{FF2B5EF4-FFF2-40B4-BE49-F238E27FC236}">
+                <a16:creationId xmlns:a16="http://schemas.microsoft.com/office/drawing/2014/main" id="{5B20F428-89F6-43A2-9AA0-27C85EB1BC8B}"/>
+              </a:ext>
+            </a:extLst>
+          </p:cNvPr>
+          <p:cNvSpPr>
+            <a:spLocks xmlns:a="http://schemas.openxmlformats.org/drawingml/2006/main" noGrp="1"/>
+          </p:cNvSpPr>
+          <p:nvPr/>
+        </p:nvSpPr>
+        <p:spPr>
+          <a:xfrm xmlns:a="http://schemas.openxmlformats.org/drawingml/2006/main">
+            <a:off x="6229350" y="2152650"/>
+            <a:ext cx="1238250" cy="1085850"/>
+          </a:xfrm>
+          <a:prstGeom xmlns:a="http://schemas.openxmlformats.org/drawingml/2006/main" prst="roundRect">
+            <a:avLst>
+              <a:gd name="adj" fmla="val 7018"/>
+            </a:avLst>
+          </a:prstGeom>
+          <a:solidFill xmlns:a="http://schemas.openxmlformats.org/drawingml/2006/main">
+            <a:srgbClr val="111827"/>
+          </a:solidFill>
+          <a:ln xmlns:a="http://schemas.openxmlformats.org/drawingml/2006/main" w="9525">
+            <a:solidFill>
+              <a:srgbClr val="2F3B55"/>
+            </a:solidFill>
+            <a:prstDash val="solid"/>
+          </a:ln>
+        </p:spPr>
+      </p:sp>
+      <p:sp>
+        <p:nvSpPr>
+          <p:cNvPr id="27" name="stakeholder-bar-5">
+            <a:extLst xmlns:a="http://schemas.openxmlformats.org/drawingml/2006/main">
+              <a:ext uri="{FF2B5EF4-FFF2-40B4-BE49-F238E27FC236}">
+                <a16:creationId xmlns:a16="http://schemas.microsoft.com/office/drawing/2014/main" id="{B0AC7B9D-8064-4CD5-B91D-728D54B677CE}"/>
+              </a:ext>
+            </a:extLst>
+          </p:cNvPr>
+          <p:cNvSpPr>
+            <a:spLocks xmlns:a="http://schemas.openxmlformats.org/drawingml/2006/main" noGrp="1"/>
+          </p:cNvSpPr>
+          <p:nvPr/>
+        </p:nvSpPr>
+        <p:spPr>
+          <a:xfrm xmlns:a="http://schemas.openxmlformats.org/drawingml/2006/main">
+            <a:off x="6229350" y="2152650"/>
+            <a:ext cx="1238250" cy="57150"/>
+          </a:xfrm>
+          <a:prstGeom xmlns:a="http://schemas.openxmlformats.org/drawingml/2006/main" prst="rect">
+            <a:avLst/>
+          </a:prstGeom>
+          <a:solidFill xmlns:a="http://schemas.openxmlformats.org/drawingml/2006/main">
+            <a:srgbClr val="FF6B35"/>
+          </a:solidFill>
+          <a:ln xmlns:a="http://schemas.openxmlformats.org/drawingml/2006/main" w="0">
+            <a:solidFill>
+              <a:srgbClr val="FF6B35"/>
+            </a:solidFill>
+            <a:prstDash val="solid"/>
+          </a:ln>
+        </p:spPr>
+      </p:sp>
+      <p:sp>
+        <p:nvSpPr>
+          <p:cNvPr id="28" name="stakeholder-role-5">
+            <a:extLst xmlns:a="http://schemas.openxmlformats.org/drawingml/2006/main">
+              <a:ext uri="{FF2B5EF4-FFF2-40B4-BE49-F238E27FC236}">
+                <a16:creationId xmlns:a16="http://schemas.microsoft.com/office/drawing/2014/main" id="{0A807E03-FE0C-459B-99DA-A3E3D0C79D75}"/>
+              </a:ext>
+            </a:extLst>
+          </p:cNvPr>
+          <p:cNvSpPr>
+            <a:spLocks xmlns:a="http://schemas.openxmlformats.org/drawingml/2006/main" noGrp="1"/>
+          </p:cNvSpPr>
+          <p:nvPr/>
+        </p:nvSpPr>
+        <p:spPr>
+          <a:xfrm xmlns:a="http://schemas.openxmlformats.org/drawingml/2006/main">
+            <a:off x="6343650" y="2381250"/>
+            <a:ext cx="1009650" cy="228600"/>
+          </a:xfrm>
+          <a:prstGeom xmlns:a="http://schemas.openxmlformats.org/drawingml/2006/main" prst="rect">
+            <a:avLst/>
+          </a:prstGeom>
+          <a:noFill xmlns:a="http://schemas.openxmlformats.org/drawingml/2006/main"/>
+          <a:ln xmlns:a="http://schemas.openxmlformats.org/drawingml/2006/main" w="0">
+            <a:noFill/>
+            <a:prstDash val="solid"/>
+          </a:ln>
+        </p:spPr>
+        <p:txBody>
+          <a:bodyPr xmlns:a="http://schemas.openxmlformats.org/drawingml/2006/main"/>
+          <a:lstStyle xmlns:a="http://schemas.openxmlformats.org/drawingml/2006/main"/>
+          <a:p xmlns:a="http://schemas.openxmlformats.org/drawingml/2006/main">
+            <a:pPr algn="ctr">
+              <a:defRPr sz="1125" b="1">
+                <a:solidFill>
+                  <a:srgbClr val="FFFFFF"/>
+                </a:solidFill>
+              </a:defRPr>
+            </a:pPr>
+            <a:r>
+              <a:rPr sz="1125" b="1">
+                <a:solidFill>
+                  <a:srgbClr val="FFFFFF"/>
+                </a:solidFill>
+              </a:rPr>
+              <a:t>일본 퍼블리셔</a:t>
+            </a:r>
+          </a:p>
+        </p:txBody>
+      </p:sp>
+      <p:sp>
+        <p:nvSpPr>
+          <p:cNvPr id="29" name="stakeholder-focus-5">
+            <a:extLst xmlns:a="http://schemas.openxmlformats.org/drawingml/2006/main">
+              <a:ext uri="{FF2B5EF4-FFF2-40B4-BE49-F238E27FC236}">
+                <a16:creationId xmlns:a16="http://schemas.microsoft.com/office/drawing/2014/main" id="{F9984B3B-88DE-4566-94C8-8DAA1B8A301E}"/>
+              </a:ext>
+            </a:extLst>
+          </p:cNvPr>
+          <p:cNvSpPr>
+            <a:spLocks xmlns:a="http://schemas.openxmlformats.org/drawingml/2006/main" noGrp="1"/>
+          </p:cNvSpPr>
+          <p:nvPr/>
+        </p:nvSpPr>
+        <p:spPr>
+          <a:xfrm xmlns:a="http://schemas.openxmlformats.org/drawingml/2006/main">
+            <a:off x="6343650" y="2705100"/>
+            <a:ext cx="1009650" cy="361950"/>
+          </a:xfrm>
+          <a:prstGeom xmlns:a="http://schemas.openxmlformats.org/drawingml/2006/main" prst="rect">
+            <a:avLst/>
+          </a:prstGeom>
+          <a:noFill xmlns:a="http://schemas.openxmlformats.org/drawingml/2006/main"/>
+          <a:ln xmlns:a="http://schemas.openxmlformats.org/drawingml/2006/main" w="0">
+            <a:noFill/>
+            <a:prstDash val="solid"/>
+          </a:ln>
+        </p:spPr>
+        <p:txBody>
+          <a:bodyPr xmlns:a="http://schemas.openxmlformats.org/drawingml/2006/main"/>
+          <a:lstStyle xmlns:a="http://schemas.openxmlformats.org/drawingml/2006/main"/>
+          <a:p xmlns:a="http://schemas.openxmlformats.org/drawingml/2006/main">
+            <a:pPr algn="ctr">
+              <a:defRPr sz="863">
+                <a:solidFill>
+                  <a:srgbClr val="CBD5E1"/>
+                </a:solidFill>
+              </a:defRPr>
+            </a:pPr>
+            <a:r>
+              <a:rPr sz="863">
+                <a:solidFill>
+                  <a:srgbClr val="CBD5E1"/>
+                </a:solidFill>
+              </a:rPr>
+              <a:t>검수 피드백</a:t>
+            </a:r>
+          </a:p>
+          <a:p xmlns:a="http://schemas.openxmlformats.org/drawingml/2006/main">
+            <a:pPr algn="ctr">
+              <a:defRPr sz="863">
+                <a:solidFill>
+                  <a:srgbClr val="CBD5E1"/>
+                </a:solidFill>
+              </a:defRPr>
+            </a:pPr>
+            <a:r>
+              <a:rPr sz="863">
+                <a:solidFill>
+                  <a:srgbClr val="CBD5E1"/>
+                </a:solidFill>
+              </a:rPr>
+              <a:t>사업 요청사항</a:t>
+            </a:r>
+          </a:p>
+        </p:txBody>
+      </p:sp>
+      <p:sp>
+        <p:nvSpPr>
+          <p:cNvPr id="30" name="flow-title">
+            <a:extLst xmlns:a="http://schemas.openxmlformats.org/drawingml/2006/main">
+              <a:ext uri="{FF2B5EF4-FFF2-40B4-BE49-F238E27FC236}">
+                <a16:creationId xmlns:a16="http://schemas.microsoft.com/office/drawing/2014/main" id="{7F4C8C27-CCE1-4C82-9AC1-7DF263493B69}"/>
+              </a:ext>
+            </a:extLst>
+          </p:cNvPr>
+          <p:cNvSpPr>
+            <a:spLocks xmlns:a="http://schemas.openxmlformats.org/drawingml/2006/main" noGrp="1"/>
+          </p:cNvSpPr>
+          <p:nvPr/>
+        </p:nvSpPr>
+        <p:spPr>
+          <a:xfrm xmlns:a="http://schemas.openxmlformats.org/drawingml/2006/main">
+            <a:off x="514350" y="3638550"/>
+            <a:ext cx="2571750" cy="285750"/>
+          </a:xfrm>
+          <a:prstGeom xmlns:a="http://schemas.openxmlformats.org/drawingml/2006/main" prst="rect">
+            <a:avLst/>
+          </a:prstGeom>
+          <a:noFill xmlns:a="http://schemas.openxmlformats.org/drawingml/2006/main"/>
+          <a:ln xmlns:a="http://schemas.openxmlformats.org/drawingml/2006/main" w="0">
+            <a:noFill/>
+            <a:prstDash val="solid"/>
+          </a:ln>
+        </p:spPr>
+        <p:txBody>
+          <a:bodyPr xmlns:a="http://schemas.openxmlformats.org/drawingml/2006/main"/>
+          <a:lstStyle xmlns:a="http://schemas.openxmlformats.org/drawingml/2006/main"/>
+          <a:p xmlns:a="http://schemas.openxmlformats.org/drawingml/2006/main">
+            <a:pPr>
+              <a:defRPr sz="1650" b="1">
+                <a:solidFill>
+                  <a:srgbClr val="FFFFFF"/>
+                </a:solidFill>
+              </a:defRPr>
+            </a:pPr>
+            <a:r>
+              <a:rPr sz="1650" b="1">
+                <a:solidFill>
+                  <a:srgbClr val="FFFFFF"/>
+                </a:solidFill>
+              </a:rPr>
+              <a:t>주간 커뮤니케이션 흐름</a:t>
+            </a:r>
+          </a:p>
+        </p:txBody>
+      </p:sp>
+      <p:sp>
+        <p:nvSpPr>
+          <p:cNvPr id="31" name="flow-note">
+            <a:extLst xmlns:a="http://schemas.openxmlformats.org/drawingml/2006/main">
+              <a:ext uri="{FF2B5EF4-FFF2-40B4-BE49-F238E27FC236}">
+                <a16:creationId xmlns:a16="http://schemas.microsoft.com/office/drawing/2014/main" id="{89F1AE71-AE6F-4E06-8711-ED455E58F488}"/>
+              </a:ext>
+            </a:extLst>
+          </p:cNvPr>
+          <p:cNvSpPr>
+            <a:spLocks xmlns:a="http://schemas.openxmlformats.org/drawingml/2006/main" noGrp="1"/>
+          </p:cNvSpPr>
+          <p:nvPr/>
+        </p:nvSpPr>
+        <p:spPr>
+          <a:xfrm xmlns:a="http://schemas.openxmlformats.org/drawingml/2006/main">
+            <a:off x="2914650" y="3695700"/>
+            <a:ext cx="4476750" cy="209550"/>
+          </a:xfrm>
+          <a:prstGeom xmlns:a="http://schemas.openxmlformats.org/drawingml/2006/main" prst="rect">
+            <a:avLst/>
+          </a:prstGeom>
+          <a:noFill xmlns:a="http://schemas.openxmlformats.org/drawingml/2006/main"/>
+          <a:ln xmlns:a="http://schemas.openxmlformats.org/drawingml/2006/main" w="0">
+            <a:noFill/>
+            <a:prstDash val="solid"/>
+          </a:ln>
+        </p:spPr>
+        <p:txBody>
+          <a:bodyPr xmlns:a="http://schemas.openxmlformats.org/drawingml/2006/main"/>
+          <a:lstStyle xmlns:a="http://schemas.openxmlformats.org/drawingml/2006/main"/>
+          <a:p xmlns:a="http://schemas.openxmlformats.org/drawingml/2006/main">
+            <a:pPr>
+              <a:defRPr sz="975">
+                <a:solidFill>
+                  <a:srgbClr val="94A3B8"/>
+                </a:solidFill>
+              </a:defRPr>
+            </a:pPr>
+            <a:r>
+              <a:rPr sz="975">
+                <a:solidFill>
+                  <a:srgbClr val="94A3B8"/>
+                </a:solidFill>
+              </a:rPr>
+              <a:t>공유 목적은 보고가 아니라 다음 마일스톤 진입 가능 여부 판단입니다.</a:t>
+            </a:r>
+          </a:p>
+        </p:txBody>
+      </p:sp>
+      <p:sp>
+        <p:nvSpPr>
+          <p:cNvPr id="32" name="collab-flow-step-1">
+            <a:extLst xmlns:a="http://schemas.openxmlformats.org/drawingml/2006/main">
+              <a:ext uri="{FF2B5EF4-FFF2-40B4-BE49-F238E27FC236}">
+                <a16:creationId xmlns:a16="http://schemas.microsoft.com/office/drawing/2014/main" id="{897EE40C-2F42-4441-BA01-3966B0EA2918}"/>
+              </a:ext>
+            </a:extLst>
+          </p:cNvPr>
+          <p:cNvSpPr>
+            <a:spLocks xmlns:a="http://schemas.openxmlformats.org/drawingml/2006/main" noGrp="1"/>
+          </p:cNvSpPr>
+          <p:nvPr/>
+        </p:nvSpPr>
+        <p:spPr>
+          <a:xfrm xmlns:a="http://schemas.openxmlformats.org/drawingml/2006/main">
+            <a:off x="590550" y="4019550"/>
+            <a:ext cx="1162050" cy="990600"/>
+          </a:xfrm>
+          <a:prstGeom xmlns:a="http://schemas.openxmlformats.org/drawingml/2006/main" prst="roundRect">
+            <a:avLst>
+              <a:gd name="adj" fmla="val 7692"/>
+            </a:avLst>
+          </a:prstGeom>
+          <a:solidFill xmlns:a="http://schemas.openxmlformats.org/drawingml/2006/main">
+            <a:srgbClr val="151F34"/>
+          </a:solidFill>
+          <a:ln xmlns:a="http://schemas.openxmlformats.org/drawingml/2006/main" w="9525">
+            <a:solidFill>
+              <a:srgbClr val="2F3B55"/>
+            </a:solidFill>
+            <a:prstDash val="solid"/>
+          </a:ln>
+        </p:spPr>
+      </p:sp>
+      <p:sp>
+        <p:nvSpPr>
+          <p:cNvPr id="33" name="collab-flow-no-1">
+            <a:extLst xmlns:a="http://schemas.openxmlformats.org/drawingml/2006/main">
+              <a:ext uri="{FF2B5EF4-FFF2-40B4-BE49-F238E27FC236}">
+                <a16:creationId xmlns:a16="http://schemas.microsoft.com/office/drawing/2014/main" id="{26928740-74FA-4E3C-AD21-00494667CF9D}"/>
+              </a:ext>
+            </a:extLst>
+          </p:cNvPr>
+          <p:cNvSpPr>
+            <a:spLocks xmlns:a="http://schemas.openxmlformats.org/drawingml/2006/main" noGrp="1"/>
+          </p:cNvSpPr>
+          <p:nvPr/>
+        </p:nvSpPr>
+        <p:spPr>
+          <a:xfrm xmlns:a="http://schemas.openxmlformats.org/drawingml/2006/main">
+            <a:off x="923925" y="4133850"/>
+            <a:ext cx="495300" cy="323850"/>
+          </a:xfrm>
+          <a:prstGeom xmlns:a="http://schemas.openxmlformats.org/drawingml/2006/main" prst="roundRect">
+            <a:avLst>
+              <a:gd name="adj" fmla="val 23529"/>
+            </a:avLst>
+          </a:prstGeom>
+          <a:solidFill xmlns:a="http://schemas.openxmlformats.org/drawingml/2006/main">
+            <a:srgbClr val="00B8D9"/>
+          </a:solidFill>
+          <a:ln xmlns:a="http://schemas.openxmlformats.org/drawingml/2006/main" w="9525">
+            <a:solidFill>
+              <a:srgbClr val="00B8D9"/>
+            </a:solidFill>
+            <a:prstDash val="solid"/>
+          </a:ln>
+        </p:spPr>
+        <p:txBody>
+          <a:bodyPr xmlns:a="http://schemas.openxmlformats.org/drawingml/2006/main"/>
+          <a:lstStyle xmlns:a="http://schemas.openxmlformats.org/drawingml/2006/main"/>
+          <a:p xmlns:a="http://schemas.openxmlformats.org/drawingml/2006/main">
+            <a:pPr algn="ctr">
+              <a:defRPr sz="1125" b="1">
+                <a:solidFill>
+                  <a:srgbClr val="06111F"/>
+                </a:solidFill>
+              </a:defRPr>
+            </a:pPr>
+            <a:r>
+              <a:rPr sz="1125" b="1">
+                <a:solidFill>
+                  <a:srgbClr val="06111F"/>
+                </a:solidFill>
+              </a:rPr>
+              <a:t>01</a:t>
+            </a:r>
+          </a:p>
+        </p:txBody>
+      </p:sp>
+      <p:sp>
+        <p:nvSpPr>
+          <p:cNvPr id="34" name="collab-flow-title-1">
+            <a:extLst xmlns:a="http://schemas.openxmlformats.org/drawingml/2006/main">
+              <a:ext uri="{FF2B5EF4-FFF2-40B4-BE49-F238E27FC236}">
+                <a16:creationId xmlns:a16="http://schemas.microsoft.com/office/drawing/2014/main" id="{905782E4-E867-4516-B181-82D9E7B61B7F}"/>
+              </a:ext>
+            </a:extLst>
+          </p:cNvPr>
+          <p:cNvSpPr>
+            <a:spLocks xmlns:a="http://schemas.openxmlformats.org/drawingml/2006/main" noGrp="1"/>
+          </p:cNvSpPr>
+          <p:nvPr/>
+        </p:nvSpPr>
+        <p:spPr>
+          <a:xfrm xmlns:a="http://schemas.openxmlformats.org/drawingml/2006/main">
+            <a:off x="781050" y="4448175"/>
+            <a:ext cx="781050" cy="190500"/>
+          </a:xfrm>
+          <a:prstGeom xmlns:a="http://schemas.openxmlformats.org/drawingml/2006/main" prst="rect">
+            <a:avLst/>
+          </a:prstGeom>
+          <a:noFill xmlns:a="http://schemas.openxmlformats.org/drawingml/2006/main"/>
+          <a:ln xmlns:a="http://schemas.openxmlformats.org/drawingml/2006/main" w="0">
+            <a:noFill/>
+            <a:prstDash val="solid"/>
+          </a:ln>
+        </p:spPr>
+        <p:txBody>
+          <a:bodyPr xmlns:a="http://schemas.openxmlformats.org/drawingml/2006/main"/>
+          <a:lstStyle xmlns:a="http://schemas.openxmlformats.org/drawingml/2006/main"/>
+          <a:p xmlns:a="http://schemas.openxmlformats.org/drawingml/2006/main">
+            <a:pPr algn="ctr">
+              <a:defRPr sz="975" b="1">
+                <a:solidFill>
+                  <a:srgbClr val="FFFFFF"/>
+                </a:solidFill>
+              </a:defRPr>
+            </a:pPr>
+            <a:r>
+              <a:rPr sz="975" b="1">
+                <a:solidFill>
+                  <a:srgbClr val="FFFFFF"/>
+                </a:solidFill>
+              </a:rPr>
+              <a:t>점검</a:t>
+            </a:r>
+          </a:p>
+        </p:txBody>
+      </p:sp>
+      <p:sp>
+        <p:nvSpPr>
+          <p:cNvPr id="35" name="collab-flow-body-1">
+            <a:extLst xmlns:a="http://schemas.openxmlformats.org/drawingml/2006/main">
+              <a:ext uri="{FF2B5EF4-FFF2-40B4-BE49-F238E27FC236}">
+                <a16:creationId xmlns:a16="http://schemas.microsoft.com/office/drawing/2014/main" id="{E401C370-B6F7-4265-9181-EB443CAC0460}"/>
+              </a:ext>
+            </a:extLst>
+          </p:cNvPr>
+          <p:cNvSpPr>
+            <a:spLocks xmlns:a="http://schemas.openxmlformats.org/drawingml/2006/main" noGrp="1"/>
+          </p:cNvSpPr>
+          <p:nvPr/>
+        </p:nvSpPr>
+        <p:spPr>
+          <a:xfrm xmlns:a="http://schemas.openxmlformats.org/drawingml/2006/main">
+            <a:off x="666750" y="4667250"/>
+            <a:ext cx="1009650" cy="285750"/>
+          </a:xfrm>
+          <a:prstGeom xmlns:a="http://schemas.openxmlformats.org/drawingml/2006/main" prst="rect">
+            <a:avLst/>
+          </a:prstGeom>
+          <a:noFill xmlns:a="http://schemas.openxmlformats.org/drawingml/2006/main"/>
+          <a:ln xmlns:a="http://schemas.openxmlformats.org/drawingml/2006/main" w="0">
+            <a:noFill/>
+            <a:prstDash val="solid"/>
+          </a:ln>
+        </p:spPr>
+        <p:txBody>
+          <a:bodyPr xmlns:a="http://schemas.openxmlformats.org/drawingml/2006/main"/>
+          <a:lstStyle xmlns:a="http://schemas.openxmlformats.org/drawingml/2006/main"/>
+          <a:p xmlns:a="http://schemas.openxmlformats.org/drawingml/2006/main">
+            <a:pPr algn="ctr">
+              <a:defRPr sz="675">
+                <a:solidFill>
+                  <a:srgbClr val="CBD5E1"/>
+                </a:solidFill>
+              </a:defRPr>
+            </a:pPr>
+            <a:r>
+              <a:rPr sz="675">
+                <a:solidFill>
+                  <a:srgbClr val="CBD5E1"/>
+                </a:solidFill>
+              </a:rPr>
+              <a:t>마일스톤 진행률</a:t>
+            </a:r>
+          </a:p>
+          <a:p xmlns:a="http://schemas.openxmlformats.org/drawingml/2006/main">
+            <a:pPr algn="ctr">
+              <a:defRPr sz="675">
+                <a:solidFill>
+                  <a:srgbClr val="CBD5E1"/>
+                </a:solidFill>
+              </a:defRPr>
+            </a:pPr>
+            <a:r>
+              <a:rPr sz="675">
+                <a:solidFill>
+                  <a:srgbClr val="CBD5E1"/>
+                </a:solidFill>
+              </a:rPr>
+              <a:t>및 지연 항목 확인</a:t>
+            </a:r>
+          </a:p>
+        </p:txBody>
+      </p:sp>
+      <p:sp>
+        <p:nvSpPr>
+          <p:cNvPr id="36" name="collab-flow-arrow-1">
+            <a:extLst xmlns:a="http://schemas.openxmlformats.org/drawingml/2006/main">
+              <a:ext uri="{FF2B5EF4-FFF2-40B4-BE49-F238E27FC236}">
+                <a16:creationId xmlns:a16="http://schemas.microsoft.com/office/drawing/2014/main" id="{B9EF05F0-8FAA-4A1C-9918-1C3F87562252}"/>
+              </a:ext>
+            </a:extLst>
+          </p:cNvPr>
+          <p:cNvSpPr>
+            <a:spLocks xmlns:a="http://schemas.openxmlformats.org/drawingml/2006/main" noGrp="1"/>
+          </p:cNvSpPr>
+          <p:nvPr/>
+        </p:nvSpPr>
+        <p:spPr>
+          <a:xfrm xmlns:a="http://schemas.openxmlformats.org/drawingml/2006/main">
+            <a:off x="1771650" y="4381500"/>
+            <a:ext cx="228600" cy="266700"/>
+          </a:xfrm>
+          <a:prstGeom xmlns:a="http://schemas.openxmlformats.org/drawingml/2006/main" prst="rect">
+            <a:avLst/>
+          </a:prstGeom>
+          <a:noFill xmlns:a="http://schemas.openxmlformats.org/drawingml/2006/main"/>
+          <a:ln xmlns:a="http://schemas.openxmlformats.org/drawingml/2006/main" w="0">
+            <a:noFill/>
+            <a:prstDash val="solid"/>
+          </a:ln>
+        </p:spPr>
+        <p:txBody>
+          <a:bodyPr xmlns:a="http://schemas.openxmlformats.org/drawingml/2006/main"/>
+          <a:lstStyle xmlns:a="http://schemas.openxmlformats.org/drawingml/2006/main"/>
+          <a:p xmlns:a="http://schemas.openxmlformats.org/drawingml/2006/main">
+            <a:pPr algn="ctr">
+              <a:defRPr sz="1350" b="1">
+                <a:solidFill>
+                  <a:srgbClr val="94A3B8"/>
+                </a:solidFill>
+              </a:defRPr>
+            </a:pPr>
+            <a:r>
+              <a:rPr sz="1350" b="1">
+                <a:solidFill>
+                  <a:srgbClr val="94A3B8"/>
+                </a:solidFill>
+              </a:rPr>
+              <a:t>&gt;</a:t>
+            </a:r>
+          </a:p>
+        </p:txBody>
+      </p:sp>
+      <p:sp>
+        <p:nvSpPr>
+          <p:cNvPr id="37" name="collab-flow-step-2">
+            <a:extLst xmlns:a="http://schemas.openxmlformats.org/drawingml/2006/main">
+              <a:ext uri="{FF2B5EF4-FFF2-40B4-BE49-F238E27FC236}">
+                <a16:creationId xmlns:a16="http://schemas.microsoft.com/office/drawing/2014/main" id="{5BCCC36C-0FA8-47C9-9082-EE8BD2756F3B}"/>
+              </a:ext>
+            </a:extLst>
+          </p:cNvPr>
+          <p:cNvSpPr>
+            <a:spLocks xmlns:a="http://schemas.openxmlformats.org/drawingml/2006/main" noGrp="1"/>
+          </p:cNvSpPr>
+          <p:nvPr/>
+        </p:nvSpPr>
+        <p:spPr>
+          <a:xfrm xmlns:a="http://schemas.openxmlformats.org/drawingml/2006/main">
+            <a:off x="2000250" y="4019550"/>
+            <a:ext cx="1162050" cy="990600"/>
+          </a:xfrm>
+          <a:prstGeom xmlns:a="http://schemas.openxmlformats.org/drawingml/2006/main" prst="roundRect">
+            <a:avLst>
+              <a:gd name="adj" fmla="val 7692"/>
+            </a:avLst>
+          </a:prstGeom>
+          <a:solidFill xmlns:a="http://schemas.openxmlformats.org/drawingml/2006/main">
+            <a:srgbClr val="151F34"/>
+          </a:solidFill>
+          <a:ln xmlns:a="http://schemas.openxmlformats.org/drawingml/2006/main" w="9525">
+            <a:solidFill>
+              <a:srgbClr val="2F3B55"/>
+            </a:solidFill>
+            <a:prstDash val="solid"/>
+          </a:ln>
+        </p:spPr>
+      </p:sp>
+      <p:sp>
+        <p:nvSpPr>
+          <p:cNvPr id="38" name="collab-flow-no-2">
+            <a:extLst xmlns:a="http://schemas.openxmlformats.org/drawingml/2006/main">
+              <a:ext uri="{FF2B5EF4-FFF2-40B4-BE49-F238E27FC236}">
+                <a16:creationId xmlns:a16="http://schemas.microsoft.com/office/drawing/2014/main" id="{CDA0A251-0EF5-4410-8656-256F45ECE7C6}"/>
+              </a:ext>
+            </a:extLst>
+          </p:cNvPr>
+          <p:cNvSpPr>
+            <a:spLocks xmlns:a="http://schemas.openxmlformats.org/drawingml/2006/main" noGrp="1"/>
+          </p:cNvSpPr>
+          <p:nvPr/>
+        </p:nvSpPr>
+        <p:spPr>
+          <a:xfrm xmlns:a="http://schemas.openxmlformats.org/drawingml/2006/main">
+            <a:off x="2333625" y="4133850"/>
+            <a:ext cx="495300" cy="323850"/>
+          </a:xfrm>
+          <a:prstGeom xmlns:a="http://schemas.openxmlformats.org/drawingml/2006/main" prst="roundRect">
+            <a:avLst>
+              <a:gd name="adj" fmla="val 23529"/>
+            </a:avLst>
+          </a:prstGeom>
+          <a:solidFill xmlns:a="http://schemas.openxmlformats.org/drawingml/2006/main">
+            <a:srgbClr val="FF6B35"/>
+          </a:solidFill>
+          <a:ln xmlns:a="http://schemas.openxmlformats.org/drawingml/2006/main" w="9525">
+            <a:solidFill>
+              <a:srgbClr val="FF6B35"/>
+            </a:solidFill>
+            <a:prstDash val="solid"/>
+          </a:ln>
+        </p:spPr>
+        <p:txBody>
+          <a:bodyPr xmlns:a="http://schemas.openxmlformats.org/drawingml/2006/main"/>
+          <a:lstStyle xmlns:a="http://schemas.openxmlformats.org/drawingml/2006/main"/>
+          <a:p xmlns:a="http://schemas.openxmlformats.org/drawingml/2006/main">
+            <a:pPr algn="ctr">
+              <a:defRPr sz="1125" b="1">
+                <a:solidFill>
+                  <a:srgbClr val="FFFFFF"/>
+                </a:solidFill>
+              </a:defRPr>
+            </a:pPr>
+            <a:r>
+              <a:rPr sz="1125" b="1">
+                <a:solidFill>
+                  <a:srgbClr val="FFFFFF"/>
+                </a:solidFill>
+              </a:rPr>
+              <a:t>02</a:t>
+            </a:r>
+          </a:p>
+        </p:txBody>
+      </p:sp>
+      <p:sp>
+        <p:nvSpPr>
+          <p:cNvPr id="39" name="collab-flow-title-2">
+            <a:extLst xmlns:a="http://schemas.openxmlformats.org/drawingml/2006/main">
+              <a:ext uri="{FF2B5EF4-FFF2-40B4-BE49-F238E27FC236}">
+                <a16:creationId xmlns:a16="http://schemas.microsoft.com/office/drawing/2014/main" id="{0B8C23B3-41E4-4968-9A0A-0346A54E12E9}"/>
+              </a:ext>
+            </a:extLst>
+          </p:cNvPr>
+          <p:cNvSpPr>
+            <a:spLocks xmlns:a="http://schemas.openxmlformats.org/drawingml/2006/main" noGrp="1"/>
+          </p:cNvSpPr>
+          <p:nvPr/>
+        </p:nvSpPr>
+        <p:spPr>
+          <a:xfrm xmlns:a="http://schemas.openxmlformats.org/drawingml/2006/main">
+            <a:off x="2190750" y="4448175"/>
+            <a:ext cx="781050" cy="190500"/>
+          </a:xfrm>
+          <a:prstGeom xmlns:a="http://schemas.openxmlformats.org/drawingml/2006/main" prst="rect">
+            <a:avLst/>
+          </a:prstGeom>
+          <a:noFill xmlns:a="http://schemas.openxmlformats.org/drawingml/2006/main"/>
+          <a:ln xmlns:a="http://schemas.openxmlformats.org/drawingml/2006/main" w="0">
+            <a:noFill/>
+            <a:prstDash val="solid"/>
+          </a:ln>
+        </p:spPr>
+        <p:txBody>
+          <a:bodyPr xmlns:a="http://schemas.openxmlformats.org/drawingml/2006/main"/>
+          <a:lstStyle xmlns:a="http://schemas.openxmlformats.org/drawingml/2006/main"/>
+          <a:p xmlns:a="http://schemas.openxmlformats.org/drawingml/2006/main">
+            <a:pPr algn="ctr">
+              <a:defRPr sz="975" b="1">
+                <a:solidFill>
+                  <a:srgbClr val="FFFFFF"/>
+                </a:solidFill>
+              </a:defRPr>
+            </a:pPr>
+            <a:r>
+              <a:rPr sz="975" b="1">
+                <a:solidFill>
+                  <a:srgbClr val="FFFFFF"/>
+                </a:solidFill>
+              </a:rPr>
+              <a:t>전달</a:t>
+            </a:r>
+          </a:p>
+        </p:txBody>
+      </p:sp>
+      <p:sp>
+        <p:nvSpPr>
+          <p:cNvPr id="40" name="collab-flow-body-2">
+            <a:extLst xmlns:a="http://schemas.openxmlformats.org/drawingml/2006/main">
+              <a:ext uri="{FF2B5EF4-FFF2-40B4-BE49-F238E27FC236}">
+                <a16:creationId xmlns:a16="http://schemas.microsoft.com/office/drawing/2014/main" id="{EA884AD4-1EB7-4FBC-97F3-F8CC2D7938D7}"/>
+              </a:ext>
+            </a:extLst>
+          </p:cNvPr>
+          <p:cNvSpPr>
+            <a:spLocks xmlns:a="http://schemas.openxmlformats.org/drawingml/2006/main" noGrp="1"/>
+          </p:cNvSpPr>
+          <p:nvPr/>
+        </p:nvSpPr>
+        <p:spPr>
+          <a:xfrm xmlns:a="http://schemas.openxmlformats.org/drawingml/2006/main">
+            <a:off x="2076450" y="4667250"/>
+            <a:ext cx="1009650" cy="285750"/>
+          </a:xfrm>
+          <a:prstGeom xmlns:a="http://schemas.openxmlformats.org/drawingml/2006/main" prst="rect">
+            <a:avLst/>
+          </a:prstGeom>
+          <a:noFill xmlns:a="http://schemas.openxmlformats.org/drawingml/2006/main"/>
+          <a:ln xmlns:a="http://schemas.openxmlformats.org/drawingml/2006/main" w="0">
+            <a:noFill/>
+            <a:prstDash val="solid"/>
+          </a:ln>
+        </p:spPr>
+        <p:txBody>
+          <a:bodyPr xmlns:a="http://schemas.openxmlformats.org/drawingml/2006/main"/>
+          <a:lstStyle xmlns:a="http://schemas.openxmlformats.org/drawingml/2006/main"/>
+          <a:p xmlns:a="http://schemas.openxmlformats.org/drawingml/2006/main">
+            <a:pPr algn="ctr">
+              <a:defRPr sz="675">
+                <a:solidFill>
+                  <a:srgbClr val="CBD5E1"/>
+                </a:solidFill>
+              </a:defRPr>
+            </a:pPr>
+            <a:r>
+              <a:rPr sz="675">
+                <a:solidFill>
+                  <a:srgbClr val="CBD5E1"/>
+                </a:solidFill>
+              </a:rPr>
+              <a:t>Perforce 기준</a:t>
+            </a:r>
+          </a:p>
+          <a:p xmlns:a="http://schemas.openxmlformats.org/drawingml/2006/main">
+            <a:pPr algn="ctr">
+              <a:defRPr sz="675">
+                <a:solidFill>
+                  <a:srgbClr val="CBD5E1"/>
+                </a:solidFill>
+              </a:defRPr>
+            </a:pPr>
+            <a:r>
+              <a:rPr sz="675">
+                <a:solidFill>
+                  <a:srgbClr val="CBD5E1"/>
+                </a:solidFill>
+              </a:rPr>
+              <a:t>빌드·버전 공유</a:t>
+            </a:r>
+          </a:p>
+        </p:txBody>
+      </p:sp>
+      <p:sp>
+        <p:nvSpPr>
+          <p:cNvPr id="41" name="collab-flow-arrow-2">
+            <a:extLst xmlns:a="http://schemas.openxmlformats.org/drawingml/2006/main">
+              <a:ext uri="{FF2B5EF4-FFF2-40B4-BE49-F238E27FC236}">
+                <a16:creationId xmlns:a16="http://schemas.microsoft.com/office/drawing/2014/main" id="{6A820557-6D18-46DC-B4D1-F9636B5F11D5}"/>
+              </a:ext>
+            </a:extLst>
+          </p:cNvPr>
+          <p:cNvSpPr>
+            <a:spLocks xmlns:a="http://schemas.openxmlformats.org/drawingml/2006/main" noGrp="1"/>
+          </p:cNvSpPr>
+          <p:nvPr/>
+        </p:nvSpPr>
+        <p:spPr>
+          <a:xfrm xmlns:a="http://schemas.openxmlformats.org/drawingml/2006/main">
+            <a:off x="3181350" y="4381500"/>
+            <a:ext cx="228600" cy="266700"/>
+          </a:xfrm>
+          <a:prstGeom xmlns:a="http://schemas.openxmlformats.org/drawingml/2006/main" prst="rect">
+            <a:avLst/>
+          </a:prstGeom>
+          <a:noFill xmlns:a="http://schemas.openxmlformats.org/drawingml/2006/main"/>
+          <a:ln xmlns:a="http://schemas.openxmlformats.org/drawingml/2006/main" w="0">
+            <a:noFill/>
+            <a:prstDash val="solid"/>
+          </a:ln>
+        </p:spPr>
+        <p:txBody>
+          <a:bodyPr xmlns:a="http://schemas.openxmlformats.org/drawingml/2006/main"/>
+          <a:lstStyle xmlns:a="http://schemas.openxmlformats.org/drawingml/2006/main"/>
+          <a:p xmlns:a="http://schemas.openxmlformats.org/drawingml/2006/main">
+            <a:pPr algn="ctr">
+              <a:defRPr sz="1350" b="1">
+                <a:solidFill>
+                  <a:srgbClr val="94A3B8"/>
+                </a:solidFill>
+              </a:defRPr>
+            </a:pPr>
+            <a:r>
+              <a:rPr sz="1350" b="1">
+                <a:solidFill>
+                  <a:srgbClr val="94A3B8"/>
+                </a:solidFill>
+              </a:rPr>
+              <a:t>&gt;</a:t>
+            </a:r>
+          </a:p>
+        </p:txBody>
+      </p:sp>
+      <p:sp>
+        <p:nvSpPr>
+          <p:cNvPr id="42" name="collab-flow-step-3">
+            <a:extLst xmlns:a="http://schemas.openxmlformats.org/drawingml/2006/main">
+              <a:ext uri="{FF2B5EF4-FFF2-40B4-BE49-F238E27FC236}">
+                <a16:creationId xmlns:a16="http://schemas.microsoft.com/office/drawing/2014/main" id="{C05FFA4B-42D4-445B-861B-23375C9D28B6}"/>
+              </a:ext>
+            </a:extLst>
+          </p:cNvPr>
+          <p:cNvSpPr>
+            <a:spLocks xmlns:a="http://schemas.openxmlformats.org/drawingml/2006/main" noGrp="1"/>
+          </p:cNvSpPr>
+          <p:nvPr/>
+        </p:nvSpPr>
+        <p:spPr>
+          <a:xfrm xmlns:a="http://schemas.openxmlformats.org/drawingml/2006/main">
+            <a:off x="3409950" y="4019550"/>
+            <a:ext cx="1162050" cy="990600"/>
+          </a:xfrm>
+          <a:prstGeom xmlns:a="http://schemas.openxmlformats.org/drawingml/2006/main" prst="roundRect">
+            <a:avLst>
+              <a:gd name="adj" fmla="val 7692"/>
+            </a:avLst>
+          </a:prstGeom>
+          <a:solidFill xmlns:a="http://schemas.openxmlformats.org/drawingml/2006/main">
+            <a:srgbClr val="151F34"/>
+          </a:solidFill>
+          <a:ln xmlns:a="http://schemas.openxmlformats.org/drawingml/2006/main" w="9525">
+            <a:solidFill>
+              <a:srgbClr val="2F3B55"/>
+            </a:solidFill>
+            <a:prstDash val="solid"/>
+          </a:ln>
+        </p:spPr>
+      </p:sp>
+      <p:sp>
+        <p:nvSpPr>
+          <p:cNvPr id="43" name="collab-flow-no-3">
+            <a:extLst xmlns:a="http://schemas.openxmlformats.org/drawingml/2006/main">
+              <a:ext uri="{FF2B5EF4-FFF2-40B4-BE49-F238E27FC236}">
+                <a16:creationId xmlns:a16="http://schemas.microsoft.com/office/drawing/2014/main" id="{4157E4E7-97FF-4A3D-8D70-67202DF871E2}"/>
+              </a:ext>
+            </a:extLst>
+          </p:cNvPr>
+          <p:cNvSpPr>
+            <a:spLocks xmlns:a="http://schemas.openxmlformats.org/drawingml/2006/main" noGrp="1"/>
+          </p:cNvSpPr>
+          <p:nvPr/>
+        </p:nvSpPr>
+        <p:spPr>
+          <a:xfrm xmlns:a="http://schemas.openxmlformats.org/drawingml/2006/main">
+            <a:off x="3743325" y="4133850"/>
+            <a:ext cx="495300" cy="323850"/>
+          </a:xfrm>
+          <a:prstGeom xmlns:a="http://schemas.openxmlformats.org/drawingml/2006/main" prst="roundRect">
+            <a:avLst>
+              <a:gd name="adj" fmla="val 23529"/>
+            </a:avLst>
+          </a:prstGeom>
+          <a:solidFill xmlns:a="http://schemas.openxmlformats.org/drawingml/2006/main">
+            <a:srgbClr val="7C3AED"/>
+          </a:solidFill>
+          <a:ln xmlns:a="http://schemas.openxmlformats.org/drawingml/2006/main" w="9525">
+            <a:solidFill>
+              <a:srgbClr val="7C3AED"/>
+            </a:solidFill>
+            <a:prstDash val="solid"/>
+          </a:ln>
+        </p:spPr>
+        <p:txBody>
+          <a:bodyPr xmlns:a="http://schemas.openxmlformats.org/drawingml/2006/main"/>
+          <a:lstStyle xmlns:a="http://schemas.openxmlformats.org/drawingml/2006/main"/>
+          <a:p xmlns:a="http://schemas.openxmlformats.org/drawingml/2006/main">
+            <a:pPr algn="ctr">
+              <a:defRPr sz="1125" b="1">
+                <a:solidFill>
+                  <a:srgbClr val="FFFFFF"/>
+                </a:solidFill>
+              </a:defRPr>
+            </a:pPr>
+            <a:r>
+              <a:rPr sz="1125" b="1">
+                <a:solidFill>
+                  <a:srgbClr val="FFFFFF"/>
+                </a:solidFill>
+              </a:rPr>
+              <a:t>03</a:t>
+            </a:r>
+          </a:p>
+        </p:txBody>
+      </p:sp>
+      <p:sp>
+        <p:nvSpPr>
+          <p:cNvPr id="44" name="collab-flow-title-3">
+            <a:extLst xmlns:a="http://schemas.openxmlformats.org/drawingml/2006/main">
+              <a:ext uri="{FF2B5EF4-FFF2-40B4-BE49-F238E27FC236}">
+                <a16:creationId xmlns:a16="http://schemas.microsoft.com/office/drawing/2014/main" id="{29326225-BB6F-44B3-BC37-58667F28809E}"/>
+              </a:ext>
+            </a:extLst>
+          </p:cNvPr>
+          <p:cNvSpPr>
+            <a:spLocks xmlns:a="http://schemas.openxmlformats.org/drawingml/2006/main" noGrp="1"/>
+          </p:cNvSpPr>
+          <p:nvPr/>
+        </p:nvSpPr>
+        <p:spPr>
+          <a:xfrm xmlns:a="http://schemas.openxmlformats.org/drawingml/2006/main">
+            <a:off x="3600450" y="4448175"/>
+            <a:ext cx="781050" cy="190500"/>
+          </a:xfrm>
+          <a:prstGeom xmlns:a="http://schemas.openxmlformats.org/drawingml/2006/main" prst="rect">
+            <a:avLst/>
+          </a:prstGeom>
+          <a:noFill xmlns:a="http://schemas.openxmlformats.org/drawingml/2006/main"/>
+          <a:ln xmlns:a="http://schemas.openxmlformats.org/drawingml/2006/main" w="0">
+            <a:noFill/>
+            <a:prstDash val="solid"/>
+          </a:ln>
+        </p:spPr>
+        <p:txBody>
+          <a:bodyPr xmlns:a="http://schemas.openxmlformats.org/drawingml/2006/main"/>
+          <a:lstStyle xmlns:a="http://schemas.openxmlformats.org/drawingml/2006/main"/>
+          <a:p xmlns:a="http://schemas.openxmlformats.org/drawingml/2006/main">
+            <a:pPr algn="ctr">
+              <a:defRPr sz="975" b="1">
+                <a:solidFill>
+                  <a:srgbClr val="FFFFFF"/>
+                </a:solidFill>
+              </a:defRPr>
+            </a:pPr>
+            <a:r>
+              <a:rPr sz="975" b="1">
+                <a:solidFill>
+                  <a:srgbClr val="FFFFFF"/>
+                </a:solidFill>
+              </a:rPr>
+              <a:t>수집</a:t>
+            </a:r>
+          </a:p>
+        </p:txBody>
+      </p:sp>
+      <p:sp>
+        <p:nvSpPr>
+          <p:cNvPr id="45" name="collab-flow-body-3">
+            <a:extLst xmlns:a="http://schemas.openxmlformats.org/drawingml/2006/main">
+              <a:ext uri="{FF2B5EF4-FFF2-40B4-BE49-F238E27FC236}">
+                <a16:creationId xmlns:a16="http://schemas.microsoft.com/office/drawing/2014/main" id="{95ACBAEE-6644-48A1-ABF6-34F6BBBDE092}"/>
+              </a:ext>
+            </a:extLst>
+          </p:cNvPr>
+          <p:cNvSpPr>
+            <a:spLocks xmlns:a="http://schemas.openxmlformats.org/drawingml/2006/main" noGrp="1"/>
+          </p:cNvSpPr>
+          <p:nvPr/>
+        </p:nvSpPr>
+        <p:spPr>
+          <a:xfrm xmlns:a="http://schemas.openxmlformats.org/drawingml/2006/main">
+            <a:off x="3486150" y="4667250"/>
+            <a:ext cx="1009650" cy="285750"/>
+          </a:xfrm>
+          <a:prstGeom xmlns:a="http://schemas.openxmlformats.org/drawingml/2006/main" prst="rect">
+            <a:avLst/>
+          </a:prstGeom>
+          <a:noFill xmlns:a="http://schemas.openxmlformats.org/drawingml/2006/main"/>
+          <a:ln xmlns:a="http://schemas.openxmlformats.org/drawingml/2006/main" w="0">
+            <a:noFill/>
+            <a:prstDash val="solid"/>
+          </a:ln>
+        </p:spPr>
+        <p:txBody>
+          <a:bodyPr xmlns:a="http://schemas.openxmlformats.org/drawingml/2006/main"/>
+          <a:lstStyle xmlns:a="http://schemas.openxmlformats.org/drawingml/2006/main"/>
+          <a:p xmlns:a="http://schemas.openxmlformats.org/drawingml/2006/main">
+            <a:pPr algn="ctr">
+              <a:defRPr sz="675">
+                <a:solidFill>
+                  <a:srgbClr val="CBD5E1"/>
+                </a:solidFill>
+              </a:defRPr>
+            </a:pPr>
+            <a:r>
+              <a:rPr sz="675">
+                <a:solidFill>
+                  <a:srgbClr val="CBD5E1"/>
+                </a:solidFill>
+              </a:rPr>
+              <a:t>퍼블리셔 검수</a:t>
+            </a:r>
+          </a:p>
+          <a:p xmlns:a="http://schemas.openxmlformats.org/drawingml/2006/main">
+            <a:pPr algn="ctr">
+              <a:defRPr sz="675">
+                <a:solidFill>
+                  <a:srgbClr val="CBD5E1"/>
+                </a:solidFill>
+              </a:defRPr>
+            </a:pPr>
+            <a:r>
+              <a:rPr sz="675">
+                <a:solidFill>
+                  <a:srgbClr val="CBD5E1"/>
+                </a:solidFill>
+              </a:rPr>
+              <a:t>피드백 정리</a:t>
+            </a:r>
+          </a:p>
+        </p:txBody>
+      </p:sp>
+      <p:sp>
+        <p:nvSpPr>
+          <p:cNvPr id="46" name="collab-flow-arrow-3">
+            <a:extLst xmlns:a="http://schemas.openxmlformats.org/drawingml/2006/main">
+              <a:ext uri="{FF2B5EF4-FFF2-40B4-BE49-F238E27FC236}">
+                <a16:creationId xmlns:a16="http://schemas.microsoft.com/office/drawing/2014/main" id="{EA8C0D94-690B-4DCC-9E2A-8A00C55E8B3E}"/>
+              </a:ext>
+            </a:extLst>
+          </p:cNvPr>
+          <p:cNvSpPr>
+            <a:spLocks xmlns:a="http://schemas.openxmlformats.org/drawingml/2006/main" noGrp="1"/>
+          </p:cNvSpPr>
+          <p:nvPr/>
+        </p:nvSpPr>
+        <p:spPr>
+          <a:xfrm xmlns:a="http://schemas.openxmlformats.org/drawingml/2006/main">
+            <a:off x="4591050" y="4381500"/>
+            <a:ext cx="228600" cy="266700"/>
+          </a:xfrm>
+          <a:prstGeom xmlns:a="http://schemas.openxmlformats.org/drawingml/2006/main" prst="rect">
+            <a:avLst/>
+          </a:prstGeom>
+          <a:noFill xmlns:a="http://schemas.openxmlformats.org/drawingml/2006/main"/>
+          <a:ln xmlns:a="http://schemas.openxmlformats.org/drawingml/2006/main" w="0">
+            <a:noFill/>
+            <a:prstDash val="solid"/>
+          </a:ln>
+        </p:spPr>
+        <p:txBody>
+          <a:bodyPr xmlns:a="http://schemas.openxmlformats.org/drawingml/2006/main"/>
+          <a:lstStyle xmlns:a="http://schemas.openxmlformats.org/drawingml/2006/main"/>
+          <a:p xmlns:a="http://schemas.openxmlformats.org/drawingml/2006/main">
+            <a:pPr algn="ctr">
+              <a:defRPr sz="1350" b="1">
+                <a:solidFill>
+                  <a:srgbClr val="94A3B8"/>
+                </a:solidFill>
+              </a:defRPr>
+            </a:pPr>
+            <a:r>
+              <a:rPr sz="1350" b="1">
+                <a:solidFill>
+                  <a:srgbClr val="94A3B8"/>
+                </a:solidFill>
+              </a:rPr>
+              <a:t>&gt;</a:t>
+            </a:r>
+          </a:p>
+        </p:txBody>
+      </p:sp>
+      <p:sp>
+        <p:nvSpPr>
+          <p:cNvPr id="47" name="collab-flow-step-4">
+            <a:extLst xmlns:a="http://schemas.openxmlformats.org/drawingml/2006/main">
+              <a:ext uri="{FF2B5EF4-FFF2-40B4-BE49-F238E27FC236}">
+                <a16:creationId xmlns:a16="http://schemas.microsoft.com/office/drawing/2014/main" id="{E0820FD3-4CDB-47D5-BE3A-4F8B27564184}"/>
+              </a:ext>
+            </a:extLst>
+          </p:cNvPr>
+          <p:cNvSpPr>
+            <a:spLocks xmlns:a="http://schemas.openxmlformats.org/drawingml/2006/main" noGrp="1"/>
+          </p:cNvSpPr>
+          <p:nvPr/>
+        </p:nvSpPr>
+        <p:spPr>
+          <a:xfrm xmlns:a="http://schemas.openxmlformats.org/drawingml/2006/main">
+            <a:off x="4819650" y="4019550"/>
+            <a:ext cx="1162050" cy="990600"/>
+          </a:xfrm>
+          <a:prstGeom xmlns:a="http://schemas.openxmlformats.org/drawingml/2006/main" prst="roundRect">
+            <a:avLst>
+              <a:gd name="adj" fmla="val 7692"/>
+            </a:avLst>
+          </a:prstGeom>
+          <a:solidFill xmlns:a="http://schemas.openxmlformats.org/drawingml/2006/main">
+            <a:srgbClr val="151F34"/>
+          </a:solidFill>
+          <a:ln xmlns:a="http://schemas.openxmlformats.org/drawingml/2006/main" w="9525">
+            <a:solidFill>
+              <a:srgbClr val="2F3B55"/>
+            </a:solidFill>
+            <a:prstDash val="solid"/>
+          </a:ln>
+        </p:spPr>
+      </p:sp>
+      <p:sp>
+        <p:nvSpPr>
+          <p:cNvPr id="48" name="collab-flow-no-4">
+            <a:extLst xmlns:a="http://schemas.openxmlformats.org/drawingml/2006/main">
+              <a:ext uri="{FF2B5EF4-FFF2-40B4-BE49-F238E27FC236}">
+                <a16:creationId xmlns:a16="http://schemas.microsoft.com/office/drawing/2014/main" id="{E2C78C33-8F73-45E3-95CC-52612C83D528}"/>
+              </a:ext>
+            </a:extLst>
+          </p:cNvPr>
+          <p:cNvSpPr>
+            <a:spLocks xmlns:a="http://schemas.openxmlformats.org/drawingml/2006/main" noGrp="1"/>
+          </p:cNvSpPr>
+          <p:nvPr/>
+        </p:nvSpPr>
+        <p:spPr>
+          <a:xfrm xmlns:a="http://schemas.openxmlformats.org/drawingml/2006/main">
+            <a:off x="5153025" y="4133850"/>
+            <a:ext cx="495300" cy="323850"/>
+          </a:xfrm>
+          <a:prstGeom xmlns:a="http://schemas.openxmlformats.org/drawingml/2006/main" prst="roundRect">
+            <a:avLst>
+              <a:gd name="adj" fmla="val 23529"/>
+            </a:avLst>
+          </a:prstGeom>
+          <a:solidFill xmlns:a="http://schemas.openxmlformats.org/drawingml/2006/main">
+            <a:srgbClr val="8BD9E8"/>
+          </a:solidFill>
+          <a:ln xmlns:a="http://schemas.openxmlformats.org/drawingml/2006/main" w="9525">
+            <a:solidFill>
+              <a:srgbClr val="8BD9E8"/>
+            </a:solidFill>
+            <a:prstDash val="solid"/>
+          </a:ln>
+        </p:spPr>
+        <p:txBody>
+          <a:bodyPr xmlns:a="http://schemas.openxmlformats.org/drawingml/2006/main"/>
+          <a:lstStyle xmlns:a="http://schemas.openxmlformats.org/drawingml/2006/main"/>
+          <a:p xmlns:a="http://schemas.openxmlformats.org/drawingml/2006/main">
+            <a:pPr algn="ctr">
+              <a:defRPr sz="1125" b="1">
+                <a:solidFill>
+                  <a:srgbClr val="FFFFFF"/>
+                </a:solidFill>
+              </a:defRPr>
+            </a:pPr>
+            <a:r>
+              <a:rPr sz="1125" b="1">
+                <a:solidFill>
+                  <a:srgbClr val="FFFFFF"/>
+                </a:solidFill>
+              </a:rPr>
+              <a:t>04</a:t>
+            </a:r>
+          </a:p>
+        </p:txBody>
+      </p:sp>
+      <p:sp>
+        <p:nvSpPr>
+          <p:cNvPr id="49" name="collab-flow-title-4">
+            <a:extLst xmlns:a="http://schemas.openxmlformats.org/drawingml/2006/main">
+              <a:ext uri="{FF2B5EF4-FFF2-40B4-BE49-F238E27FC236}">
+                <a16:creationId xmlns:a16="http://schemas.microsoft.com/office/drawing/2014/main" id="{D1E6299F-07BC-405C-B8EC-A925C698A61D}"/>
+              </a:ext>
+            </a:extLst>
+          </p:cNvPr>
+          <p:cNvSpPr>
+            <a:spLocks xmlns:a="http://schemas.openxmlformats.org/drawingml/2006/main" noGrp="1"/>
+          </p:cNvSpPr>
+          <p:nvPr/>
+        </p:nvSpPr>
+        <p:spPr>
+          <a:xfrm xmlns:a="http://schemas.openxmlformats.org/drawingml/2006/main">
+            <a:off x="5010150" y="4448175"/>
+            <a:ext cx="781050" cy="190500"/>
+          </a:xfrm>
+          <a:prstGeom xmlns:a="http://schemas.openxmlformats.org/drawingml/2006/main" prst="rect">
+            <a:avLst/>
+          </a:prstGeom>
+          <a:noFill xmlns:a="http://schemas.openxmlformats.org/drawingml/2006/main"/>
+          <a:ln xmlns:a="http://schemas.openxmlformats.org/drawingml/2006/main" w="0">
+            <a:noFill/>
+            <a:prstDash val="solid"/>
+          </a:ln>
+        </p:spPr>
+        <p:txBody>
+          <a:bodyPr xmlns:a="http://schemas.openxmlformats.org/drawingml/2006/main"/>
+          <a:lstStyle xmlns:a="http://schemas.openxmlformats.org/drawingml/2006/main"/>
+          <a:p xmlns:a="http://schemas.openxmlformats.org/drawingml/2006/main">
+            <a:pPr algn="ctr">
+              <a:defRPr sz="975" b="1">
+                <a:solidFill>
+                  <a:srgbClr val="FFFFFF"/>
+                </a:solidFill>
+              </a:defRPr>
+            </a:pPr>
+            <a:r>
+              <a:rPr sz="975" b="1">
+                <a:solidFill>
+                  <a:srgbClr val="FFFFFF"/>
+                </a:solidFill>
+              </a:rPr>
+              <a:t>조정</a:t>
+            </a:r>
+          </a:p>
+        </p:txBody>
+      </p:sp>
+      <p:sp>
+        <p:nvSpPr>
+          <p:cNvPr id="50" name="collab-flow-body-4">
+            <a:extLst xmlns:a="http://schemas.openxmlformats.org/drawingml/2006/main">
+              <a:ext uri="{FF2B5EF4-FFF2-40B4-BE49-F238E27FC236}">
+                <a16:creationId xmlns:a16="http://schemas.microsoft.com/office/drawing/2014/main" id="{83F38D6A-4CB6-4AAA-BC21-D1DE780ACC28}"/>
+              </a:ext>
+            </a:extLst>
+          </p:cNvPr>
+          <p:cNvSpPr>
+            <a:spLocks xmlns:a="http://schemas.openxmlformats.org/drawingml/2006/main" noGrp="1"/>
+          </p:cNvSpPr>
+          <p:nvPr/>
+        </p:nvSpPr>
+        <p:spPr>
+          <a:xfrm xmlns:a="http://schemas.openxmlformats.org/drawingml/2006/main">
+            <a:off x="4895850" y="4667250"/>
+            <a:ext cx="1009650" cy="285750"/>
+          </a:xfrm>
+          <a:prstGeom xmlns:a="http://schemas.openxmlformats.org/drawingml/2006/main" prst="rect">
+            <a:avLst/>
+          </a:prstGeom>
+          <a:noFill xmlns:a="http://schemas.openxmlformats.org/drawingml/2006/main"/>
+          <a:ln xmlns:a="http://schemas.openxmlformats.org/drawingml/2006/main" w="0">
+            <a:noFill/>
+            <a:prstDash val="solid"/>
+          </a:ln>
+        </p:spPr>
+        <p:txBody>
+          <a:bodyPr xmlns:a="http://schemas.openxmlformats.org/drawingml/2006/main"/>
+          <a:lstStyle xmlns:a="http://schemas.openxmlformats.org/drawingml/2006/main"/>
+          <a:p xmlns:a="http://schemas.openxmlformats.org/drawingml/2006/main">
+            <a:pPr algn="ctr">
+              <a:defRPr sz="675">
+                <a:solidFill>
+                  <a:srgbClr val="CBD5E1"/>
+                </a:solidFill>
+              </a:defRPr>
+            </a:pPr>
+            <a:r>
+              <a:rPr sz="675">
+                <a:solidFill>
+                  <a:srgbClr val="CBD5E1"/>
+                </a:solidFill>
+              </a:rPr>
+              <a:t>일정·범위 영향도</a:t>
+            </a:r>
+          </a:p>
+          <a:p xmlns:a="http://schemas.openxmlformats.org/drawingml/2006/main">
+            <a:pPr algn="ctr">
+              <a:defRPr sz="675">
+                <a:solidFill>
+                  <a:srgbClr val="CBD5E1"/>
+                </a:solidFill>
+              </a:defRPr>
+            </a:pPr>
+            <a:r>
+              <a:rPr sz="675">
+                <a:solidFill>
+                  <a:srgbClr val="CBD5E1"/>
+                </a:solidFill>
+              </a:rPr>
+              <a:t>우선순위 판단</a:t>
+            </a:r>
+          </a:p>
+        </p:txBody>
+      </p:sp>
+      <p:sp>
+        <p:nvSpPr>
+          <p:cNvPr id="51" name="collab-flow-arrow-4">
+            <a:extLst xmlns:a="http://schemas.openxmlformats.org/drawingml/2006/main">
+              <a:ext uri="{FF2B5EF4-FFF2-40B4-BE49-F238E27FC236}">
+                <a16:creationId xmlns:a16="http://schemas.microsoft.com/office/drawing/2014/main" id="{80109B93-AD6B-4359-845A-1AAB1A6DB6A3}"/>
+              </a:ext>
+            </a:extLst>
+          </p:cNvPr>
+          <p:cNvSpPr>
+            <a:spLocks xmlns:a="http://schemas.openxmlformats.org/drawingml/2006/main" noGrp="1"/>
+          </p:cNvSpPr>
+          <p:nvPr/>
+        </p:nvSpPr>
+        <p:spPr>
+          <a:xfrm xmlns:a="http://schemas.openxmlformats.org/drawingml/2006/main">
+            <a:off x="6000750" y="4381500"/>
+            <a:ext cx="228600" cy="266700"/>
+          </a:xfrm>
+          <a:prstGeom xmlns:a="http://schemas.openxmlformats.org/drawingml/2006/main" prst="rect">
+            <a:avLst/>
+          </a:prstGeom>
+          <a:noFill xmlns:a="http://schemas.openxmlformats.org/drawingml/2006/main"/>
+          <a:ln xmlns:a="http://schemas.openxmlformats.org/drawingml/2006/main" w="0">
+            <a:noFill/>
+            <a:prstDash val="solid"/>
+          </a:ln>
+        </p:spPr>
+        <p:txBody>
+          <a:bodyPr xmlns:a="http://schemas.openxmlformats.org/drawingml/2006/main"/>
+          <a:lstStyle xmlns:a="http://schemas.openxmlformats.org/drawingml/2006/main"/>
+          <a:p xmlns:a="http://schemas.openxmlformats.org/drawingml/2006/main">
+            <a:pPr algn="ctr">
+              <a:defRPr sz="1350" b="1">
+                <a:solidFill>
+                  <a:srgbClr val="94A3B8"/>
+                </a:solidFill>
+              </a:defRPr>
+            </a:pPr>
+            <a:r>
+              <a:rPr sz="1350" b="1">
+                <a:solidFill>
+                  <a:srgbClr val="94A3B8"/>
+                </a:solidFill>
+              </a:rPr>
+              <a:t>&gt;</a:t>
+            </a:r>
+          </a:p>
+        </p:txBody>
+      </p:sp>
+      <p:sp>
+        <p:nvSpPr>
+          <p:cNvPr id="52" name="collab-flow-step-5">
+            <a:extLst xmlns:a="http://schemas.openxmlformats.org/drawingml/2006/main">
+              <a:ext uri="{FF2B5EF4-FFF2-40B4-BE49-F238E27FC236}">
+                <a16:creationId xmlns:a16="http://schemas.microsoft.com/office/drawing/2014/main" id="{62BF5EBD-371C-4634-9F02-C6D022282F28}"/>
+              </a:ext>
+            </a:extLst>
+          </p:cNvPr>
+          <p:cNvSpPr>
+            <a:spLocks xmlns:a="http://schemas.openxmlformats.org/drawingml/2006/main" noGrp="1"/>
+          </p:cNvSpPr>
+          <p:nvPr/>
+        </p:nvSpPr>
+        <p:spPr>
+          <a:xfrm xmlns:a="http://schemas.openxmlformats.org/drawingml/2006/main">
+            <a:off x="6229350" y="4019550"/>
+            <a:ext cx="1162050" cy="990600"/>
+          </a:xfrm>
+          <a:prstGeom xmlns:a="http://schemas.openxmlformats.org/drawingml/2006/main" prst="roundRect">
+            <a:avLst>
+              <a:gd name="adj" fmla="val 7692"/>
+            </a:avLst>
+          </a:prstGeom>
+          <a:solidFill xmlns:a="http://schemas.openxmlformats.org/drawingml/2006/main">
+            <a:srgbClr val="151F34"/>
+          </a:solidFill>
+          <a:ln xmlns:a="http://schemas.openxmlformats.org/drawingml/2006/main" w="9525">
+            <a:solidFill>
+              <a:srgbClr val="2F3B55"/>
+            </a:solidFill>
+            <a:prstDash val="solid"/>
+          </a:ln>
+        </p:spPr>
+      </p:sp>
+      <p:sp>
+        <p:nvSpPr>
+          <p:cNvPr id="53" name="collab-flow-no-5">
+            <a:extLst xmlns:a="http://schemas.openxmlformats.org/drawingml/2006/main">
+              <a:ext uri="{FF2B5EF4-FFF2-40B4-BE49-F238E27FC236}">
+                <a16:creationId xmlns:a16="http://schemas.microsoft.com/office/drawing/2014/main" id="{380E6CB0-BCC4-423F-B77A-33733EDCE6F4}"/>
+              </a:ext>
+            </a:extLst>
+          </p:cNvPr>
+          <p:cNvSpPr>
+            <a:spLocks xmlns:a="http://schemas.openxmlformats.org/drawingml/2006/main" noGrp="1"/>
+          </p:cNvSpPr>
+          <p:nvPr/>
+        </p:nvSpPr>
+        <p:spPr>
+          <a:xfrm xmlns:a="http://schemas.openxmlformats.org/drawingml/2006/main">
+            <a:off x="6562725" y="4133850"/>
+            <a:ext cx="495300" cy="323850"/>
+          </a:xfrm>
+          <a:prstGeom xmlns:a="http://schemas.openxmlformats.org/drawingml/2006/main" prst="roundRect">
+            <a:avLst>
+              <a:gd name="adj" fmla="val 23529"/>
+            </a:avLst>
+          </a:prstGeom>
+          <a:solidFill xmlns:a="http://schemas.openxmlformats.org/drawingml/2006/main">
+            <a:srgbClr val="FF6B35"/>
+          </a:solidFill>
+          <a:ln xmlns:a="http://schemas.openxmlformats.org/drawingml/2006/main" w="9525">
+            <a:solidFill>
+              <a:srgbClr val="FF6B35"/>
+            </a:solidFill>
+            <a:prstDash val="solid"/>
+          </a:ln>
+        </p:spPr>
+        <p:txBody>
+          <a:bodyPr xmlns:a="http://schemas.openxmlformats.org/drawingml/2006/main"/>
+          <a:lstStyle xmlns:a="http://schemas.openxmlformats.org/drawingml/2006/main"/>
+          <a:p xmlns:a="http://schemas.openxmlformats.org/drawingml/2006/main">
+            <a:pPr algn="ctr">
+              <a:defRPr sz="1125" b="1">
+                <a:solidFill>
+                  <a:srgbClr val="FFFFFF"/>
+                </a:solidFill>
+              </a:defRPr>
+            </a:pPr>
+            <a:r>
+              <a:rPr sz="1125" b="1">
+                <a:solidFill>
+                  <a:srgbClr val="FFFFFF"/>
+                </a:solidFill>
+              </a:rPr>
+              <a:t>05</a:t>
+            </a:r>
+          </a:p>
+        </p:txBody>
+      </p:sp>
+      <p:sp>
+        <p:nvSpPr>
+          <p:cNvPr id="54" name="collab-flow-title-5">
+            <a:extLst xmlns:a="http://schemas.openxmlformats.org/drawingml/2006/main">
+              <a:ext uri="{FF2B5EF4-FFF2-40B4-BE49-F238E27FC236}">
+                <a16:creationId xmlns:a16="http://schemas.microsoft.com/office/drawing/2014/main" id="{254893B7-B1DE-4527-AB3A-A9B630398AB0}"/>
+              </a:ext>
+            </a:extLst>
+          </p:cNvPr>
+          <p:cNvSpPr>
+            <a:spLocks xmlns:a="http://schemas.openxmlformats.org/drawingml/2006/main" noGrp="1"/>
+          </p:cNvSpPr>
+          <p:nvPr/>
+        </p:nvSpPr>
+        <p:spPr>
+          <a:xfrm xmlns:a="http://schemas.openxmlformats.org/drawingml/2006/main">
+            <a:off x="6419850" y="4448175"/>
+            <a:ext cx="781050" cy="190500"/>
+          </a:xfrm>
+          <a:prstGeom xmlns:a="http://schemas.openxmlformats.org/drawingml/2006/main" prst="rect">
+            <a:avLst/>
+          </a:prstGeom>
+          <a:noFill xmlns:a="http://schemas.openxmlformats.org/drawingml/2006/main"/>
+          <a:ln xmlns:a="http://schemas.openxmlformats.org/drawingml/2006/main" w="0">
+            <a:noFill/>
+            <a:prstDash val="solid"/>
+          </a:ln>
+        </p:spPr>
+        <p:txBody>
+          <a:bodyPr xmlns:a="http://schemas.openxmlformats.org/drawingml/2006/main"/>
+          <a:lstStyle xmlns:a="http://schemas.openxmlformats.org/drawingml/2006/main"/>
+          <a:p xmlns:a="http://schemas.openxmlformats.org/drawingml/2006/main">
+            <a:pPr algn="ctr">
+              <a:defRPr sz="975" b="1">
+                <a:solidFill>
+                  <a:srgbClr val="FFFFFF"/>
+                </a:solidFill>
+              </a:defRPr>
+            </a:pPr>
+            <a:r>
+              <a:rPr sz="975" b="1">
+                <a:solidFill>
+                  <a:srgbClr val="FFFFFF"/>
+                </a:solidFill>
+              </a:rPr>
+              <a:t>판단</a:t>
+            </a:r>
+          </a:p>
+        </p:txBody>
+      </p:sp>
+      <p:sp>
+        <p:nvSpPr>
+          <p:cNvPr id="55" name="collab-flow-body-5">
+            <a:extLst xmlns:a="http://schemas.openxmlformats.org/drawingml/2006/main">
+              <a:ext uri="{FF2B5EF4-FFF2-40B4-BE49-F238E27FC236}">
+                <a16:creationId xmlns:a16="http://schemas.microsoft.com/office/drawing/2014/main" id="{53DE79D3-535D-4B10-93E8-C1E16DDEAC71}"/>
+              </a:ext>
+            </a:extLst>
+          </p:cNvPr>
+          <p:cNvSpPr>
+            <a:spLocks xmlns:a="http://schemas.openxmlformats.org/drawingml/2006/main" noGrp="1"/>
+          </p:cNvSpPr>
+          <p:nvPr/>
+        </p:nvSpPr>
+        <p:spPr>
+          <a:xfrm xmlns:a="http://schemas.openxmlformats.org/drawingml/2006/main">
+            <a:off x="6305550" y="4667250"/>
+            <a:ext cx="1009650" cy="285750"/>
+          </a:xfrm>
+          <a:prstGeom xmlns:a="http://schemas.openxmlformats.org/drawingml/2006/main" prst="rect">
+            <a:avLst/>
+          </a:prstGeom>
+          <a:noFill xmlns:a="http://schemas.openxmlformats.org/drawingml/2006/main"/>
+          <a:ln xmlns:a="http://schemas.openxmlformats.org/drawingml/2006/main" w="0">
+            <a:noFill/>
+            <a:prstDash val="solid"/>
+          </a:ln>
+        </p:spPr>
+        <p:txBody>
+          <a:bodyPr xmlns:a="http://schemas.openxmlformats.org/drawingml/2006/main"/>
+          <a:lstStyle xmlns:a="http://schemas.openxmlformats.org/drawingml/2006/main"/>
+          <a:p xmlns:a="http://schemas.openxmlformats.org/drawingml/2006/main">
+            <a:pPr algn="ctr">
+              <a:defRPr sz="675">
+                <a:solidFill>
+                  <a:srgbClr val="CBD5E1"/>
+                </a:solidFill>
+              </a:defRPr>
+            </a:pPr>
+            <a:r>
+              <a:rPr sz="675">
+                <a:solidFill>
+                  <a:srgbClr val="CBD5E1"/>
+                </a:solidFill>
+              </a:rPr>
+              <a:t>릴리즈 후보</a:t>
+            </a:r>
+          </a:p>
+          <a:p xmlns:a="http://schemas.openxmlformats.org/drawingml/2006/main">
+            <a:pPr algn="ctr">
+              <a:defRPr sz="675">
+                <a:solidFill>
+                  <a:srgbClr val="CBD5E1"/>
+                </a:solidFill>
+              </a:defRPr>
+            </a:pPr>
+            <a:r>
+              <a:rPr sz="675">
+                <a:solidFill>
+                  <a:srgbClr val="CBD5E1"/>
+                </a:solidFill>
+              </a:rPr>
+              <a:t>진입 여부 확정</a:t>
+            </a:r>
+          </a:p>
+        </p:txBody>
+      </p:sp>
+      <p:sp>
+        <p:nvSpPr>
+          <p:cNvPr id="56" name="pm-points-title">
+            <a:extLst xmlns:a="http://schemas.openxmlformats.org/drawingml/2006/main">
+              <a:ext uri="{FF2B5EF4-FFF2-40B4-BE49-F238E27FC236}">
+                <a16:creationId xmlns:a16="http://schemas.microsoft.com/office/drawing/2014/main" id="{A7491B5E-6A55-4E10-8B1E-86B682B69894}"/>
+              </a:ext>
+            </a:extLst>
+          </p:cNvPr>
+          <p:cNvSpPr>
+            <a:spLocks xmlns:a="http://schemas.openxmlformats.org/drawingml/2006/main" noGrp="1"/>
+          </p:cNvSpPr>
+          <p:nvPr/>
+        </p:nvSpPr>
+        <p:spPr>
+          <a:xfrm xmlns:a="http://schemas.openxmlformats.org/drawingml/2006/main">
+            <a:off x="8096250" y="1752600"/>
+            <a:ext cx="2095500" cy="285750"/>
+          </a:xfrm>
+          <a:prstGeom xmlns:a="http://schemas.openxmlformats.org/drawingml/2006/main" prst="rect">
+            <a:avLst/>
+          </a:prstGeom>
+          <a:noFill xmlns:a="http://schemas.openxmlformats.org/drawingml/2006/main"/>
+          <a:ln xmlns:a="http://schemas.openxmlformats.org/drawingml/2006/main" w="0">
+            <a:noFill/>
+            <a:prstDash val="solid"/>
+          </a:ln>
+        </p:spPr>
+        <p:txBody>
+          <a:bodyPr xmlns:a="http://schemas.openxmlformats.org/drawingml/2006/main"/>
+          <a:lstStyle xmlns:a="http://schemas.openxmlformats.org/drawingml/2006/main"/>
+          <a:p xmlns:a="http://schemas.openxmlformats.org/drawingml/2006/main">
+            <a:pPr>
+              <a:defRPr sz="1650" b="1">
+                <a:solidFill>
+                  <a:srgbClr val="FFFFFF"/>
+                </a:solidFill>
+              </a:defRPr>
+            </a:pPr>
+            <a:r>
+              <a:rPr sz="1650" b="1">
+                <a:solidFill>
+                  <a:srgbClr val="FFFFFF"/>
+                </a:solidFill>
+              </a:rPr>
+              <a:t>PM 관리 포인트</a:t>
+            </a:r>
+          </a:p>
+        </p:txBody>
+      </p:sp>
+      <p:sp>
+        <p:nvSpPr>
+          <p:cNvPr id="57" name="pm-point-1">
+            <a:extLst xmlns:a="http://schemas.openxmlformats.org/drawingml/2006/main">
+              <a:ext uri="{FF2B5EF4-FFF2-40B4-BE49-F238E27FC236}">
+                <a16:creationId xmlns:a16="http://schemas.microsoft.com/office/drawing/2014/main" id="{327C6F12-583B-494A-A860-F55325A915FF}"/>
+              </a:ext>
+            </a:extLst>
+          </p:cNvPr>
+          <p:cNvSpPr>
+            <a:spLocks xmlns:a="http://schemas.openxmlformats.org/drawingml/2006/main" noGrp="1"/>
+          </p:cNvSpPr>
+          <p:nvPr/>
+        </p:nvSpPr>
+        <p:spPr>
+          <a:xfrm xmlns:a="http://schemas.openxmlformats.org/drawingml/2006/main">
+            <a:off x="8096250" y="2152650"/>
+            <a:ext cx="3295650" cy="609600"/>
+          </a:xfrm>
+          <a:prstGeom xmlns:a="http://schemas.openxmlformats.org/drawingml/2006/main" prst="roundRect">
+            <a:avLst>
+              <a:gd name="adj" fmla="val 12500"/>
+            </a:avLst>
+          </a:prstGeom>
+          <a:solidFill xmlns:a="http://schemas.openxmlformats.org/drawingml/2006/main">
+            <a:srgbClr val="111827"/>
+          </a:solidFill>
+          <a:ln xmlns:a="http://schemas.openxmlformats.org/drawingml/2006/main" w="9525">
+            <a:solidFill>
+              <a:srgbClr val="2F3B55"/>
+            </a:solidFill>
+            <a:prstDash val="solid"/>
+          </a:ln>
+        </p:spPr>
+      </p:sp>
+      <p:sp>
+        <p:nvSpPr>
+          <p:cNvPr id="58" name="pm-point-bar-1">
+            <a:extLst xmlns:a="http://schemas.openxmlformats.org/drawingml/2006/main">
+              <a:ext uri="{FF2B5EF4-FFF2-40B4-BE49-F238E27FC236}">
+                <a16:creationId xmlns:a16="http://schemas.microsoft.com/office/drawing/2014/main" id="{AE12F192-B14F-4E88-8507-ED3E41053D10}"/>
+              </a:ext>
+            </a:extLst>
+          </p:cNvPr>
+          <p:cNvSpPr>
+            <a:spLocks xmlns:a="http://schemas.openxmlformats.org/drawingml/2006/main" noGrp="1"/>
+          </p:cNvSpPr>
+          <p:nvPr/>
+        </p:nvSpPr>
+        <p:spPr>
+          <a:xfrm xmlns:a="http://schemas.openxmlformats.org/drawingml/2006/main">
+            <a:off x="8096250" y="2152650"/>
+            <a:ext cx="57150" cy="609600"/>
+          </a:xfrm>
+          <a:prstGeom xmlns:a="http://schemas.openxmlformats.org/drawingml/2006/main" prst="rect">
+            <a:avLst/>
+          </a:prstGeom>
+          <a:solidFill xmlns:a="http://schemas.openxmlformats.org/drawingml/2006/main">
+            <a:srgbClr val="00B8D9"/>
+          </a:solidFill>
+          <a:ln xmlns:a="http://schemas.openxmlformats.org/drawingml/2006/main" w="0">
+            <a:solidFill>
+              <a:srgbClr val="00B8D9"/>
+            </a:solidFill>
+            <a:prstDash val="solid"/>
+          </a:ln>
+        </p:spPr>
+      </p:sp>
+      <p:sp>
+        <p:nvSpPr>
+          <p:cNvPr id="59" name="pm-point-label-1">
+            <a:extLst xmlns:a="http://schemas.openxmlformats.org/drawingml/2006/main">
+              <a:ext uri="{FF2B5EF4-FFF2-40B4-BE49-F238E27FC236}">
+                <a16:creationId xmlns:a16="http://schemas.microsoft.com/office/drawing/2014/main" id="{DB716F90-D566-46AF-BF5F-D3639B239F1A}"/>
+              </a:ext>
+            </a:extLst>
+          </p:cNvPr>
+          <p:cNvSpPr>
+            <a:spLocks xmlns:a="http://schemas.openxmlformats.org/drawingml/2006/main" noGrp="1"/>
+          </p:cNvSpPr>
+          <p:nvPr/>
+        </p:nvSpPr>
+        <p:spPr>
+          <a:xfrm xmlns:a="http://schemas.openxmlformats.org/drawingml/2006/main">
+            <a:off x="8324850" y="2257425"/>
+            <a:ext cx="2495550" cy="209550"/>
+          </a:xfrm>
+          <a:prstGeom xmlns:a="http://schemas.openxmlformats.org/drawingml/2006/main" prst="rect">
+            <a:avLst/>
+          </a:prstGeom>
+          <a:noFill xmlns:a="http://schemas.openxmlformats.org/drawingml/2006/main"/>
+          <a:ln xmlns:a="http://schemas.openxmlformats.org/drawingml/2006/main" w="0">
+            <a:noFill/>
+            <a:prstDash val="solid"/>
+          </a:ln>
+        </p:spPr>
+        <p:txBody>
+          <a:bodyPr xmlns:a="http://schemas.openxmlformats.org/drawingml/2006/main"/>
+          <a:lstStyle xmlns:a="http://schemas.openxmlformats.org/drawingml/2006/main"/>
+          <a:p xmlns:a="http://schemas.openxmlformats.org/drawingml/2006/main">
+            <a:pPr>
+              <a:defRPr sz="1200" b="1">
+                <a:solidFill>
+                  <a:srgbClr val="FFFFFF"/>
+                </a:solidFill>
+              </a:defRPr>
+            </a:pPr>
+            <a:r>
+              <a:rPr sz="1200" b="1">
+                <a:solidFill>
+                  <a:srgbClr val="FFFFFF"/>
+                </a:solidFill>
+              </a:rPr>
+              <a:t>요청사항 단일화</a:t>
+            </a:r>
+          </a:p>
+        </p:txBody>
+      </p:sp>
+      <p:sp>
+        <p:nvSpPr>
+          <p:cNvPr id="60" name="pm-point-body-1">
+            <a:extLst xmlns:a="http://schemas.openxmlformats.org/drawingml/2006/main">
+              <a:ext uri="{FF2B5EF4-FFF2-40B4-BE49-F238E27FC236}">
+                <a16:creationId xmlns:a16="http://schemas.microsoft.com/office/drawing/2014/main" id="{7C9C5543-36F1-4DD6-9F0D-885484B38212}"/>
+              </a:ext>
+            </a:extLst>
+          </p:cNvPr>
+          <p:cNvSpPr>
+            <a:spLocks xmlns:a="http://schemas.openxmlformats.org/drawingml/2006/main" noGrp="1"/>
+          </p:cNvSpPr>
+          <p:nvPr/>
+        </p:nvSpPr>
+        <p:spPr>
+          <a:xfrm xmlns:a="http://schemas.openxmlformats.org/drawingml/2006/main">
+            <a:off x="8324850" y="2495550"/>
+            <a:ext cx="2647950" cy="171450"/>
+          </a:xfrm>
+          <a:prstGeom xmlns:a="http://schemas.openxmlformats.org/drawingml/2006/main" prst="rect">
+            <a:avLst/>
+          </a:prstGeom>
+          <a:noFill xmlns:a="http://schemas.openxmlformats.org/drawingml/2006/main"/>
+          <a:ln xmlns:a="http://schemas.openxmlformats.org/drawingml/2006/main" w="0">
+            <a:noFill/>
+            <a:prstDash val="solid"/>
+          </a:ln>
+        </p:spPr>
+        <p:txBody>
+          <a:bodyPr xmlns:a="http://schemas.openxmlformats.org/drawingml/2006/main"/>
+          <a:lstStyle xmlns:a="http://schemas.openxmlformats.org/drawingml/2006/main"/>
+          <a:p xmlns:a="http://schemas.openxmlformats.org/drawingml/2006/main">
+            <a:pPr>
+              <a:defRPr sz="938">
+                <a:solidFill>
+                  <a:srgbClr val="CBD5E1"/>
+                </a:solidFill>
+              </a:defRPr>
+            </a:pPr>
+            <a:r>
+              <a:rPr sz="938">
+                <a:solidFill>
+                  <a:srgbClr val="CBD5E1"/>
+                </a:solidFill>
+              </a:rPr>
+              <a:t>퍼블리셔 요청을 일정·범위·이슈로 재분류</a:t>
+            </a:r>
+          </a:p>
+        </p:txBody>
+      </p:sp>
+      <p:sp>
+        <p:nvSpPr>
+          <p:cNvPr id="61" name="pm-point-2">
+            <a:extLst xmlns:a="http://schemas.openxmlformats.org/drawingml/2006/main">
+              <a:ext uri="{FF2B5EF4-FFF2-40B4-BE49-F238E27FC236}">
+                <a16:creationId xmlns:a16="http://schemas.microsoft.com/office/drawing/2014/main" id="{4505E69E-6A5F-4700-AB39-40973B6E9955}"/>
+              </a:ext>
+            </a:extLst>
+          </p:cNvPr>
+          <p:cNvSpPr>
+            <a:spLocks xmlns:a="http://schemas.openxmlformats.org/drawingml/2006/main" noGrp="1"/>
+          </p:cNvSpPr>
+          <p:nvPr/>
+        </p:nvSpPr>
+        <p:spPr>
+          <a:xfrm xmlns:a="http://schemas.openxmlformats.org/drawingml/2006/main">
+            <a:off x="8096250" y="2933700"/>
+            <a:ext cx="3295650" cy="609600"/>
+          </a:xfrm>
+          <a:prstGeom xmlns:a="http://schemas.openxmlformats.org/drawingml/2006/main" prst="roundRect">
+            <a:avLst>
+              <a:gd name="adj" fmla="val 12500"/>
+            </a:avLst>
+          </a:prstGeom>
+          <a:solidFill xmlns:a="http://schemas.openxmlformats.org/drawingml/2006/main">
+            <a:srgbClr val="111827"/>
+          </a:solidFill>
+          <a:ln xmlns:a="http://schemas.openxmlformats.org/drawingml/2006/main" w="9525">
+            <a:solidFill>
+              <a:srgbClr val="2F3B55"/>
+            </a:solidFill>
+            <a:prstDash val="solid"/>
+          </a:ln>
+        </p:spPr>
+      </p:sp>
+      <p:sp>
+        <p:nvSpPr>
+          <p:cNvPr id="62" name="pm-point-bar-2">
+            <a:extLst xmlns:a="http://schemas.openxmlformats.org/drawingml/2006/main">
+              <a:ext uri="{FF2B5EF4-FFF2-40B4-BE49-F238E27FC236}">
+                <a16:creationId xmlns:a16="http://schemas.microsoft.com/office/drawing/2014/main" id="{6CC939E3-305E-4A11-A6B6-B44301955BEA}"/>
+              </a:ext>
+            </a:extLst>
+          </p:cNvPr>
+          <p:cNvSpPr>
+            <a:spLocks xmlns:a="http://schemas.openxmlformats.org/drawingml/2006/main" noGrp="1"/>
+          </p:cNvSpPr>
+          <p:nvPr/>
+        </p:nvSpPr>
+        <p:spPr>
+          <a:xfrm xmlns:a="http://schemas.openxmlformats.org/drawingml/2006/main">
+            <a:off x="8096250" y="2933700"/>
+            <a:ext cx="57150" cy="609600"/>
+          </a:xfrm>
+          <a:prstGeom xmlns:a="http://schemas.openxmlformats.org/drawingml/2006/main" prst="rect">
+            <a:avLst/>
+          </a:prstGeom>
+          <a:solidFill xmlns:a="http://schemas.openxmlformats.org/drawingml/2006/main">
+            <a:srgbClr val="FF6B35"/>
+          </a:solidFill>
+          <a:ln xmlns:a="http://schemas.openxmlformats.org/drawingml/2006/main" w="0">
+            <a:solidFill>
+              <a:srgbClr val="FF6B35"/>
+            </a:solidFill>
+            <a:prstDash val="solid"/>
+          </a:ln>
+        </p:spPr>
+      </p:sp>
+      <p:sp>
+        <p:nvSpPr>
+          <p:cNvPr id="63" name="pm-point-label-2">
+            <a:extLst xmlns:a="http://schemas.openxmlformats.org/drawingml/2006/main">
+              <a:ext uri="{FF2B5EF4-FFF2-40B4-BE49-F238E27FC236}">
+                <a16:creationId xmlns:a16="http://schemas.microsoft.com/office/drawing/2014/main" id="{49D1B667-118D-4FF2-8E47-B1C98D613170}"/>
+              </a:ext>
+            </a:extLst>
+          </p:cNvPr>
+          <p:cNvSpPr>
+            <a:spLocks xmlns:a="http://schemas.openxmlformats.org/drawingml/2006/main" noGrp="1"/>
+          </p:cNvSpPr>
+          <p:nvPr/>
+        </p:nvSpPr>
+        <p:spPr>
+          <a:xfrm xmlns:a="http://schemas.openxmlformats.org/drawingml/2006/main">
+            <a:off x="8324850" y="3038475"/>
+            <a:ext cx="2495550" cy="209550"/>
+          </a:xfrm>
+          <a:prstGeom xmlns:a="http://schemas.openxmlformats.org/drawingml/2006/main" prst="rect">
+            <a:avLst/>
+          </a:prstGeom>
+          <a:noFill xmlns:a="http://schemas.openxmlformats.org/drawingml/2006/main"/>
+          <a:ln xmlns:a="http://schemas.openxmlformats.org/drawingml/2006/main" w="0">
+            <a:noFill/>
+            <a:prstDash val="solid"/>
+          </a:ln>
+        </p:spPr>
+        <p:txBody>
+          <a:bodyPr xmlns:a="http://schemas.openxmlformats.org/drawingml/2006/main"/>
+          <a:lstStyle xmlns:a="http://schemas.openxmlformats.org/drawingml/2006/main"/>
+          <a:p xmlns:a="http://schemas.openxmlformats.org/drawingml/2006/main">
+            <a:pPr>
+              <a:defRPr sz="1200" b="1">
+                <a:solidFill>
+                  <a:srgbClr val="FFFFFF"/>
+                </a:solidFill>
+              </a:defRPr>
+            </a:pPr>
+            <a:r>
+              <a:rPr sz="1200" b="1">
+                <a:solidFill>
+                  <a:srgbClr val="FFFFFF"/>
+                </a:solidFill>
+              </a:rPr>
+              <a:t>버전 기준 고정</a:t>
+            </a:r>
+          </a:p>
+        </p:txBody>
+      </p:sp>
+      <p:sp>
+        <p:nvSpPr>
+          <p:cNvPr id="64" name="pm-point-body-2">
+            <a:extLst xmlns:a="http://schemas.openxmlformats.org/drawingml/2006/main">
+              <a:ext uri="{FF2B5EF4-FFF2-40B4-BE49-F238E27FC236}">
+                <a16:creationId xmlns:a16="http://schemas.microsoft.com/office/drawing/2014/main" id="{DE8FFD82-141E-41EF-AA18-30D7B55E84D3}"/>
+              </a:ext>
+            </a:extLst>
+          </p:cNvPr>
+          <p:cNvSpPr>
+            <a:spLocks xmlns:a="http://schemas.openxmlformats.org/drawingml/2006/main" noGrp="1"/>
+          </p:cNvSpPr>
+          <p:nvPr/>
+        </p:nvSpPr>
+        <p:spPr>
+          <a:xfrm xmlns:a="http://schemas.openxmlformats.org/drawingml/2006/main">
+            <a:off x="8324850" y="3276600"/>
+            <a:ext cx="2647950" cy="171450"/>
+          </a:xfrm>
+          <a:prstGeom xmlns:a="http://schemas.openxmlformats.org/drawingml/2006/main" prst="rect">
+            <a:avLst/>
+          </a:prstGeom>
+          <a:noFill xmlns:a="http://schemas.openxmlformats.org/drawingml/2006/main"/>
+          <a:ln xmlns:a="http://schemas.openxmlformats.org/drawingml/2006/main" w="0">
+            <a:noFill/>
+            <a:prstDash val="solid"/>
+          </a:ln>
+        </p:spPr>
+        <p:txBody>
+          <a:bodyPr xmlns:a="http://schemas.openxmlformats.org/drawingml/2006/main"/>
+          <a:lstStyle xmlns:a="http://schemas.openxmlformats.org/drawingml/2006/main"/>
+          <a:p xmlns:a="http://schemas.openxmlformats.org/drawingml/2006/main">
+            <a:pPr>
+              <a:defRPr sz="938">
+                <a:solidFill>
+                  <a:srgbClr val="CBD5E1"/>
+                </a:solidFill>
+              </a:defRPr>
+            </a:pPr>
+            <a:r>
+              <a:rPr sz="938">
+                <a:solidFill>
+                  <a:srgbClr val="CBD5E1"/>
+                </a:solidFill>
+              </a:rPr>
+              <a:t>빌드 전달 시점과 검수 대상 버전을 명확화</a:t>
+            </a:r>
+          </a:p>
+        </p:txBody>
+      </p:sp>
+      <p:sp>
+        <p:nvSpPr>
+          <p:cNvPr id="65" name="pm-point-3">
+            <a:extLst xmlns:a="http://schemas.openxmlformats.org/drawingml/2006/main">
+              <a:ext uri="{FF2B5EF4-FFF2-40B4-BE49-F238E27FC236}">
+                <a16:creationId xmlns:a16="http://schemas.microsoft.com/office/drawing/2014/main" id="{A6305CF2-348E-4240-B55D-B42757EFC4E7}"/>
+              </a:ext>
+            </a:extLst>
+          </p:cNvPr>
+          <p:cNvSpPr>
+            <a:spLocks xmlns:a="http://schemas.openxmlformats.org/drawingml/2006/main" noGrp="1"/>
+          </p:cNvSpPr>
+          <p:nvPr/>
+        </p:nvSpPr>
+        <p:spPr>
+          <a:xfrm xmlns:a="http://schemas.openxmlformats.org/drawingml/2006/main">
+            <a:off x="8096250" y="3714750"/>
+            <a:ext cx="3295650" cy="609600"/>
+          </a:xfrm>
+          <a:prstGeom xmlns:a="http://schemas.openxmlformats.org/drawingml/2006/main" prst="roundRect">
+            <a:avLst>
+              <a:gd name="adj" fmla="val 12500"/>
+            </a:avLst>
+          </a:prstGeom>
+          <a:solidFill xmlns:a="http://schemas.openxmlformats.org/drawingml/2006/main">
+            <a:srgbClr val="111827"/>
+          </a:solidFill>
+          <a:ln xmlns:a="http://schemas.openxmlformats.org/drawingml/2006/main" w="9525">
+            <a:solidFill>
+              <a:srgbClr val="2F3B55"/>
+            </a:solidFill>
+            <a:prstDash val="solid"/>
+          </a:ln>
+        </p:spPr>
+      </p:sp>
+      <p:sp>
+        <p:nvSpPr>
+          <p:cNvPr id="66" name="pm-point-bar-3">
+            <a:extLst xmlns:a="http://schemas.openxmlformats.org/drawingml/2006/main">
+              <a:ext uri="{FF2B5EF4-FFF2-40B4-BE49-F238E27FC236}">
+                <a16:creationId xmlns:a16="http://schemas.microsoft.com/office/drawing/2014/main" id="{0FE04E26-66B1-4ACD-AC41-8836B88EBDCE}"/>
+              </a:ext>
+            </a:extLst>
+          </p:cNvPr>
+          <p:cNvSpPr>
+            <a:spLocks xmlns:a="http://schemas.openxmlformats.org/drawingml/2006/main" noGrp="1"/>
+          </p:cNvSpPr>
+          <p:nvPr/>
+        </p:nvSpPr>
+        <p:spPr>
+          <a:xfrm xmlns:a="http://schemas.openxmlformats.org/drawingml/2006/main">
+            <a:off x="8096250" y="3714750"/>
+            <a:ext cx="57150" cy="609600"/>
+          </a:xfrm>
+          <a:prstGeom xmlns:a="http://schemas.openxmlformats.org/drawingml/2006/main" prst="rect">
+            <a:avLst/>
+          </a:prstGeom>
+          <a:solidFill xmlns:a="http://schemas.openxmlformats.org/drawingml/2006/main">
+            <a:srgbClr val="7C3AED"/>
+          </a:solidFill>
+          <a:ln xmlns:a="http://schemas.openxmlformats.org/drawingml/2006/main" w="0">
+            <a:solidFill>
+              <a:srgbClr val="7C3AED"/>
+            </a:solidFill>
+            <a:prstDash val="solid"/>
+          </a:ln>
+        </p:spPr>
+      </p:sp>
+      <p:sp>
+        <p:nvSpPr>
+          <p:cNvPr id="67" name="pm-point-label-3">
+            <a:extLst xmlns:a="http://schemas.openxmlformats.org/drawingml/2006/main">
+              <a:ext uri="{FF2B5EF4-FFF2-40B4-BE49-F238E27FC236}">
+                <a16:creationId xmlns:a16="http://schemas.microsoft.com/office/drawing/2014/main" id="{ABB1FFB6-9406-4998-A002-B0C319BC3750}"/>
+              </a:ext>
+            </a:extLst>
+          </p:cNvPr>
+          <p:cNvSpPr>
+            <a:spLocks xmlns:a="http://schemas.openxmlformats.org/drawingml/2006/main" noGrp="1"/>
+          </p:cNvSpPr>
+          <p:nvPr/>
+        </p:nvSpPr>
+        <p:spPr>
+          <a:xfrm xmlns:a="http://schemas.openxmlformats.org/drawingml/2006/main">
+            <a:off x="8324850" y="3819525"/>
+            <a:ext cx="2495550" cy="209550"/>
+          </a:xfrm>
+          <a:prstGeom xmlns:a="http://schemas.openxmlformats.org/drawingml/2006/main" prst="rect">
+            <a:avLst/>
+          </a:prstGeom>
+          <a:noFill xmlns:a="http://schemas.openxmlformats.org/drawingml/2006/main"/>
+          <a:ln xmlns:a="http://schemas.openxmlformats.org/drawingml/2006/main" w="0">
+            <a:noFill/>
+            <a:prstDash val="solid"/>
+          </a:ln>
+        </p:spPr>
+        <p:txBody>
+          <a:bodyPr xmlns:a="http://schemas.openxmlformats.org/drawingml/2006/main"/>
+          <a:lstStyle xmlns:a="http://schemas.openxmlformats.org/drawingml/2006/main"/>
+          <a:p xmlns:a="http://schemas.openxmlformats.org/drawingml/2006/main">
+            <a:pPr>
+              <a:defRPr sz="1200" b="1">
+                <a:solidFill>
+                  <a:srgbClr val="FFFFFF"/>
+                </a:solidFill>
+              </a:defRPr>
+            </a:pPr>
+            <a:r>
+              <a:rPr sz="1200" b="1">
+                <a:solidFill>
+                  <a:srgbClr val="FFFFFF"/>
+                </a:solidFill>
+              </a:rPr>
+              <a:t>의사결정 이슈 분리</a:t>
+            </a:r>
+          </a:p>
+        </p:txBody>
+      </p:sp>
+      <p:sp>
+        <p:nvSpPr>
+          <p:cNvPr id="68" name="pm-point-body-3">
+            <a:extLst xmlns:a="http://schemas.openxmlformats.org/drawingml/2006/main">
+              <a:ext uri="{FF2B5EF4-FFF2-40B4-BE49-F238E27FC236}">
+                <a16:creationId xmlns:a16="http://schemas.microsoft.com/office/drawing/2014/main" id="{1387DA5F-8E12-4E96-AC8F-BA5B5FF7EE0C}"/>
+              </a:ext>
+            </a:extLst>
+          </p:cNvPr>
+          <p:cNvSpPr>
+            <a:spLocks xmlns:a="http://schemas.openxmlformats.org/drawingml/2006/main" noGrp="1"/>
+          </p:cNvSpPr>
+          <p:nvPr/>
+        </p:nvSpPr>
+        <p:spPr>
+          <a:xfrm xmlns:a="http://schemas.openxmlformats.org/drawingml/2006/main">
+            <a:off x="8324850" y="4057650"/>
+            <a:ext cx="2647950" cy="171450"/>
+          </a:xfrm>
+          <a:prstGeom xmlns:a="http://schemas.openxmlformats.org/drawingml/2006/main" prst="rect">
+            <a:avLst/>
+          </a:prstGeom>
+          <a:noFill xmlns:a="http://schemas.openxmlformats.org/drawingml/2006/main"/>
+          <a:ln xmlns:a="http://schemas.openxmlformats.org/drawingml/2006/main" w="0">
+            <a:noFill/>
+            <a:prstDash val="solid"/>
+          </a:ln>
+        </p:spPr>
+        <p:txBody>
+          <a:bodyPr xmlns:a="http://schemas.openxmlformats.org/drawingml/2006/main"/>
+          <a:lstStyle xmlns:a="http://schemas.openxmlformats.org/drawingml/2006/main"/>
+          <a:p xmlns:a="http://schemas.openxmlformats.org/drawingml/2006/main">
+            <a:pPr>
+              <a:defRPr sz="938">
+                <a:solidFill>
+                  <a:srgbClr val="CBD5E1"/>
+                </a:solidFill>
+              </a:defRPr>
+            </a:pPr>
+            <a:r>
+              <a:rPr sz="938">
+                <a:solidFill>
+                  <a:srgbClr val="CBD5E1"/>
+                </a:solidFill>
+              </a:rPr>
+              <a:t>지연 가능 항목은 마일스톤 판단 안건으로 전환</a:t>
+            </a:r>
+          </a:p>
+        </p:txBody>
+      </p:sp>
+      <p:sp>
+        <p:nvSpPr>
+          <p:cNvPr id="69" name="pm-point-4">
+            <a:extLst xmlns:a="http://schemas.openxmlformats.org/drawingml/2006/main">
+              <a:ext uri="{FF2B5EF4-FFF2-40B4-BE49-F238E27FC236}">
+                <a16:creationId xmlns:a16="http://schemas.microsoft.com/office/drawing/2014/main" id="{23627E4A-87CC-4F91-947C-E463B2A11221}"/>
+              </a:ext>
+            </a:extLst>
+          </p:cNvPr>
+          <p:cNvSpPr>
+            <a:spLocks xmlns:a="http://schemas.openxmlformats.org/drawingml/2006/main" noGrp="1"/>
+          </p:cNvSpPr>
+          <p:nvPr/>
+        </p:nvSpPr>
+        <p:spPr>
+          <a:xfrm xmlns:a="http://schemas.openxmlformats.org/drawingml/2006/main">
+            <a:off x="8096250" y="4495800"/>
+            <a:ext cx="3295650" cy="609600"/>
+          </a:xfrm>
+          <a:prstGeom xmlns:a="http://schemas.openxmlformats.org/drawingml/2006/main" prst="roundRect">
+            <a:avLst>
+              <a:gd name="adj" fmla="val 12500"/>
+            </a:avLst>
+          </a:prstGeom>
+          <a:solidFill xmlns:a="http://schemas.openxmlformats.org/drawingml/2006/main">
+            <a:srgbClr val="111827"/>
+          </a:solidFill>
+          <a:ln xmlns:a="http://schemas.openxmlformats.org/drawingml/2006/main" w="9525">
+            <a:solidFill>
+              <a:srgbClr val="2F3B55"/>
+            </a:solidFill>
+            <a:prstDash val="solid"/>
+          </a:ln>
+        </p:spPr>
+      </p:sp>
+      <p:sp>
+        <p:nvSpPr>
+          <p:cNvPr id="70" name="pm-point-bar-4">
+            <a:extLst xmlns:a="http://schemas.openxmlformats.org/drawingml/2006/main">
+              <a:ext uri="{FF2B5EF4-FFF2-40B4-BE49-F238E27FC236}">
+                <a16:creationId xmlns:a16="http://schemas.microsoft.com/office/drawing/2014/main" id="{D8A6EDDA-AFBA-4902-AB32-869A14CC93E0}"/>
+              </a:ext>
+            </a:extLst>
+          </p:cNvPr>
+          <p:cNvSpPr>
+            <a:spLocks xmlns:a="http://schemas.openxmlformats.org/drawingml/2006/main" noGrp="1"/>
+          </p:cNvSpPr>
+          <p:nvPr/>
+        </p:nvSpPr>
+        <p:spPr>
+          <a:xfrm xmlns:a="http://schemas.openxmlformats.org/drawingml/2006/main">
+            <a:off x="8096250" y="4495800"/>
+            <a:ext cx="57150" cy="609600"/>
+          </a:xfrm>
+          <a:prstGeom xmlns:a="http://schemas.openxmlformats.org/drawingml/2006/main" prst="rect">
+            <a:avLst/>
+          </a:prstGeom>
+          <a:solidFill xmlns:a="http://schemas.openxmlformats.org/drawingml/2006/main">
+            <a:srgbClr val="8BD9E8"/>
+          </a:solidFill>
+          <a:ln xmlns:a="http://schemas.openxmlformats.org/drawingml/2006/main" w="0">
+            <a:solidFill>
+              <a:srgbClr val="8BD9E8"/>
+            </a:solidFill>
+            <a:prstDash val="solid"/>
+          </a:ln>
+        </p:spPr>
+      </p:sp>
+      <p:sp>
+        <p:nvSpPr>
+          <p:cNvPr id="71" name="pm-point-label-4">
+            <a:extLst xmlns:a="http://schemas.openxmlformats.org/drawingml/2006/main">
+              <a:ext uri="{FF2B5EF4-FFF2-40B4-BE49-F238E27FC236}">
+                <a16:creationId xmlns:a16="http://schemas.microsoft.com/office/drawing/2014/main" id="{60A691B2-DB87-4542-9C9A-CB2106517A13}"/>
+              </a:ext>
+            </a:extLst>
+          </p:cNvPr>
+          <p:cNvSpPr>
+            <a:spLocks xmlns:a="http://schemas.openxmlformats.org/drawingml/2006/main" noGrp="1"/>
+          </p:cNvSpPr>
+          <p:nvPr/>
+        </p:nvSpPr>
+        <p:spPr>
+          <a:xfrm xmlns:a="http://schemas.openxmlformats.org/drawingml/2006/main">
+            <a:off x="8324850" y="4600575"/>
+            <a:ext cx="2495550" cy="209550"/>
+          </a:xfrm>
+          <a:prstGeom xmlns:a="http://schemas.openxmlformats.org/drawingml/2006/main" prst="rect">
+            <a:avLst/>
+          </a:prstGeom>
+          <a:noFill xmlns:a="http://schemas.openxmlformats.org/drawingml/2006/main"/>
+          <a:ln xmlns:a="http://schemas.openxmlformats.org/drawingml/2006/main" w="0">
+            <a:noFill/>
+            <a:prstDash val="solid"/>
+          </a:ln>
+        </p:spPr>
+        <p:txBody>
+          <a:bodyPr xmlns:a="http://schemas.openxmlformats.org/drawingml/2006/main"/>
+          <a:lstStyle xmlns:a="http://schemas.openxmlformats.org/drawingml/2006/main"/>
+          <a:p xmlns:a="http://schemas.openxmlformats.org/drawingml/2006/main">
+            <a:pPr>
+              <a:defRPr sz="1200" b="1">
+                <a:solidFill>
+                  <a:srgbClr val="FFFFFF"/>
+                </a:solidFill>
+              </a:defRPr>
+            </a:pPr>
+            <a:r>
+              <a:rPr sz="1200" b="1">
+                <a:solidFill>
+                  <a:srgbClr val="FFFFFF"/>
+                </a:solidFill>
+              </a:rPr>
+              <a:t>Live 릴리즈 준비</a:t>
+            </a:r>
+          </a:p>
+        </p:txBody>
+      </p:sp>
+      <p:sp>
+        <p:nvSpPr>
+          <p:cNvPr id="72" name="pm-point-body-4">
+            <a:extLst xmlns:a="http://schemas.openxmlformats.org/drawingml/2006/main">
+              <a:ext uri="{FF2B5EF4-FFF2-40B4-BE49-F238E27FC236}">
+                <a16:creationId xmlns:a16="http://schemas.microsoft.com/office/drawing/2014/main" id="{95D206E0-7A04-49EF-8549-2C6D2FA40EFF}"/>
+              </a:ext>
+            </a:extLst>
+          </p:cNvPr>
+          <p:cNvSpPr>
+            <a:spLocks xmlns:a="http://schemas.openxmlformats.org/drawingml/2006/main" noGrp="1"/>
+          </p:cNvSpPr>
+          <p:nvPr/>
+        </p:nvSpPr>
+        <p:spPr>
+          <a:xfrm xmlns:a="http://schemas.openxmlformats.org/drawingml/2006/main">
+            <a:off x="8324850" y="4838700"/>
+            <a:ext cx="2647950" cy="171450"/>
+          </a:xfrm>
+          <a:prstGeom xmlns:a="http://schemas.openxmlformats.org/drawingml/2006/main" prst="rect">
+            <a:avLst/>
+          </a:prstGeom>
+          <a:noFill xmlns:a="http://schemas.openxmlformats.org/drawingml/2006/main"/>
+          <a:ln xmlns:a="http://schemas.openxmlformats.org/drawingml/2006/main" w="0">
+            <a:noFill/>
+            <a:prstDash val="solid"/>
+          </a:ln>
+        </p:spPr>
+        <p:txBody>
+          <a:bodyPr xmlns:a="http://schemas.openxmlformats.org/drawingml/2006/main"/>
+          <a:lstStyle xmlns:a="http://schemas.openxmlformats.org/drawingml/2006/main"/>
+          <a:p xmlns:a="http://schemas.openxmlformats.org/drawingml/2006/main">
+            <a:pPr>
+              <a:defRPr sz="938">
+                <a:solidFill>
+                  <a:srgbClr val="CBD5E1"/>
+                </a:solidFill>
+              </a:defRPr>
+            </a:pPr>
+            <a:r>
+              <a:rPr sz="938">
+                <a:solidFill>
+                  <a:srgbClr val="CBD5E1"/>
+                </a:solidFill>
+              </a:rPr>
+              <a:t>배포·공지·운영 대응 항목을 같은 기준으로 확인</a:t>
+            </a:r>
+          </a:p>
+        </p:txBody>
+      </p:sp>
+      <p:sp>
+        <p:nvSpPr>
+          <p:cNvPr id="73" name="collab-principle-panel">
+            <a:extLst xmlns:a="http://schemas.openxmlformats.org/drawingml/2006/main">
+              <a:ext uri="{FF2B5EF4-FFF2-40B4-BE49-F238E27FC236}">
+                <a16:creationId xmlns:a16="http://schemas.microsoft.com/office/drawing/2014/main" id="{7FF8A68B-864B-4768-BFE6-462445782034}"/>
+              </a:ext>
+            </a:extLst>
+          </p:cNvPr>
+          <p:cNvSpPr>
+            <a:spLocks xmlns:a="http://schemas.openxmlformats.org/drawingml/2006/main" noGrp="1"/>
+          </p:cNvSpPr>
+          <p:nvPr/>
+        </p:nvSpPr>
+        <p:spPr>
+          <a:xfrm xmlns:a="http://schemas.openxmlformats.org/drawingml/2006/main">
+            <a:off x="514350" y="5791200"/>
+            <a:ext cx="10877550" cy="419100"/>
+          </a:xfrm>
+          <a:prstGeom xmlns:a="http://schemas.openxmlformats.org/drawingml/2006/main" prst="roundRect">
+            <a:avLst>
+              <a:gd name="adj" fmla="val 18182"/>
+            </a:avLst>
+          </a:prstGeom>
+          <a:solidFill xmlns:a="http://schemas.openxmlformats.org/drawingml/2006/main">
+            <a:srgbClr val="10192E"/>
+          </a:solidFill>
+          <a:ln xmlns:a="http://schemas.openxmlformats.org/drawingml/2006/main" w="9525">
+            <a:solidFill>
+              <a:srgbClr val="22304E"/>
+            </a:solidFill>
+            <a:prstDash val="solid"/>
+          </a:ln>
+        </p:spPr>
+      </p:sp>
+      <p:sp>
+        <p:nvSpPr>
+          <p:cNvPr id="74" name="collab-principle-label">
+            <a:extLst xmlns:a="http://schemas.openxmlformats.org/drawingml/2006/main">
+              <a:ext uri="{FF2B5EF4-FFF2-40B4-BE49-F238E27FC236}">
+                <a16:creationId xmlns:a16="http://schemas.microsoft.com/office/drawing/2014/main" id="{CCBD61E5-0D67-4D94-962E-814230089B6C}"/>
+              </a:ext>
+            </a:extLst>
+          </p:cNvPr>
+          <p:cNvSpPr>
+            <a:spLocks xmlns:a="http://schemas.openxmlformats.org/drawingml/2006/main" noGrp="1"/>
+          </p:cNvSpPr>
+          <p:nvPr/>
+        </p:nvSpPr>
+        <p:spPr>
+          <a:xfrm xmlns:a="http://schemas.openxmlformats.org/drawingml/2006/main">
+            <a:off x="781050" y="5905500"/>
+            <a:ext cx="1143000" cy="209550"/>
+          </a:xfrm>
+          <a:prstGeom xmlns:a="http://schemas.openxmlformats.org/drawingml/2006/main" prst="rect">
+            <a:avLst/>
+          </a:prstGeom>
+          <a:noFill xmlns:a="http://schemas.openxmlformats.org/drawingml/2006/main"/>
+          <a:ln xmlns:a="http://schemas.openxmlformats.org/drawingml/2006/main" w="0">
+            <a:noFill/>
+            <a:prstDash val="solid"/>
+          </a:ln>
+        </p:spPr>
+        <p:txBody>
+          <a:bodyPr xmlns:a="http://schemas.openxmlformats.org/drawingml/2006/main"/>
+          <a:lstStyle xmlns:a="http://schemas.openxmlformats.org/drawingml/2006/main"/>
+          <a:p xmlns:a="http://schemas.openxmlformats.org/drawingml/2006/main">
+            <a:pPr>
+              <a:defRPr sz="1200" b="1">
+                <a:solidFill>
+                  <a:srgbClr val="8BD9E8"/>
+                </a:solidFill>
+              </a:defRPr>
+            </a:pPr>
+            <a:r>
+              <a:rPr sz="1200" b="1">
+                <a:solidFill>
+                  <a:srgbClr val="8BD9E8"/>
+                </a:solidFill>
+              </a:rPr>
+              <a:t>운영 원칙</a:t>
+            </a:r>
+          </a:p>
+        </p:txBody>
+      </p:sp>
+      <p:sp>
+        <p:nvSpPr>
+          <p:cNvPr id="75" name="collab-principle-body">
+            <a:extLst xmlns:a="http://schemas.openxmlformats.org/drawingml/2006/main">
+              <a:ext uri="{FF2B5EF4-FFF2-40B4-BE49-F238E27FC236}">
+                <a16:creationId xmlns:a16="http://schemas.microsoft.com/office/drawing/2014/main" id="{07C02F0D-89EF-4AD2-9CD0-B219AD83D765}"/>
+              </a:ext>
+            </a:extLst>
+          </p:cNvPr>
+          <p:cNvSpPr>
+            <a:spLocks xmlns:a="http://schemas.openxmlformats.org/drawingml/2006/main" noGrp="1"/>
+          </p:cNvSpPr>
+          <p:nvPr/>
+        </p:nvSpPr>
+        <p:spPr>
+          <a:xfrm xmlns:a="http://schemas.openxmlformats.org/drawingml/2006/main">
+            <a:off x="1962150" y="5905500"/>
+            <a:ext cx="8191500" cy="209550"/>
+          </a:xfrm>
+          <a:prstGeom xmlns:a="http://schemas.openxmlformats.org/drawingml/2006/main" prst="rect">
+            <a:avLst/>
+          </a:prstGeom>
+          <a:noFill xmlns:a="http://schemas.openxmlformats.org/drawingml/2006/main"/>
+          <a:ln xmlns:a="http://schemas.openxmlformats.org/drawingml/2006/main" w="0">
+            <a:noFill/>
+            <a:prstDash val="solid"/>
+          </a:ln>
+        </p:spPr>
+        <p:txBody>
+          <a:bodyPr xmlns:a="http://schemas.openxmlformats.org/drawingml/2006/main"/>
+          <a:lstStyle xmlns:a="http://schemas.openxmlformats.org/drawingml/2006/main"/>
+          <a:p xmlns:a="http://schemas.openxmlformats.org/drawingml/2006/main">
+            <a:pPr>
+              <a:defRPr sz="1125">
+                <a:solidFill>
+                  <a:srgbClr val="FFFFFF"/>
+                </a:solidFill>
+              </a:defRPr>
+            </a:pPr>
+            <a:r>
+              <a:rPr sz="1125">
+                <a:solidFill>
+                  <a:srgbClr val="FFFFFF"/>
+                </a:solidFill>
+              </a:rPr>
+              <a:t>퍼블리셔 대응은 별도 보고가 아니라 일정·버전·이슈를 통합 관리하는 PM 운영 흐름 안에서 처리합니다.</a:t>
+            </a:r>
+          </a:p>
+        </p:txBody>
+      </p:sp>
+    </p:spTree>
+    <p:extLst>
+      <p:ext uri="{BB962C8B-B14F-4D97-AF65-F5344CB8AC3E}">
+        <p14:creationId xmlns:p14="http://schemas.microsoft.com/office/powerpoint/2010/main" val="640420574"/>
       </p:ext>
     </p:extLst>
   </p:cSld>

--- a/outputs/HIT2_일본_런칭_6개월전_로드맵_초안.pptx
+++ b/outputs/HIT2_일본_런칭_6개월전_로드맵_초안.pptx
@@ -2,17 +2,19 @@
 <file path=ppt/presentation.xml><?xml version="1.0" encoding="utf-8"?>
 <p:presentation xmlns:p="http://schemas.openxmlformats.org/presentationml/2006/main">
   <p:sldMasterIdLst>
-    <p:sldMasterId xmlns:r="http://schemas.openxmlformats.org/officeDocument/2006/relationships" id="2147483648" r:id="R0f4e2906c5564482"/>
+    <p:sldMasterId xmlns:r="http://schemas.openxmlformats.org/officeDocument/2006/relationships" id="2147483648" r:id="R951e457da61f431b"/>
   </p:sldMasterIdLst>
   <p:notesMasterIdLst>
-    <p:notesMasterId xmlns:r="http://schemas.openxmlformats.org/officeDocument/2006/relationships" r:id="R018a978c719e42bc"/>
+    <p:notesMasterId xmlns:r="http://schemas.openxmlformats.org/officeDocument/2006/relationships" r:id="R382cc6224cdc4a6d"/>
   </p:notesMasterIdLst>
   <p:sldIdLst>
-    <p:sldId xmlns:r="http://schemas.openxmlformats.org/officeDocument/2006/relationships" id="256" r:id="R0b4de0f0eb014910"/>
-    <p:sldId xmlns:r="http://schemas.openxmlformats.org/officeDocument/2006/relationships" id="257" r:id="R59024428d4db44eb"/>
-    <p:sldId xmlns:r="http://schemas.openxmlformats.org/officeDocument/2006/relationships" id="258" r:id="Rd386ec5c90b04c2e"/>
-    <p:sldId xmlns:r="http://schemas.openxmlformats.org/officeDocument/2006/relationships" id="259" r:id="Rdee226c7bc5f4471"/>
-    <p:sldId xmlns:r="http://schemas.openxmlformats.org/officeDocument/2006/relationships" id="260" r:id="Rbaca3daf6c3f4a45"/>
+    <p:sldId xmlns:r="http://schemas.openxmlformats.org/officeDocument/2006/relationships" id="256" r:id="Rd54145426948439b"/>
+    <p:sldId xmlns:r="http://schemas.openxmlformats.org/officeDocument/2006/relationships" id="257" r:id="Rdbeb5f865a4846a3"/>
+    <p:sldId xmlns:r="http://schemas.openxmlformats.org/officeDocument/2006/relationships" id="258" r:id="R8c3829b6d8d4458a"/>
+    <p:sldId xmlns:r="http://schemas.openxmlformats.org/officeDocument/2006/relationships" id="259" r:id="Rb375aa8b7f3e4a50"/>
+    <p:sldId xmlns:r="http://schemas.openxmlformats.org/officeDocument/2006/relationships" id="260" r:id="Rd574ef4790724f77"/>
+    <p:sldId xmlns:r="http://schemas.openxmlformats.org/officeDocument/2006/relationships" id="261" r:id="R2ee38afcfcc34086"/>
+    <p:sldId xmlns:r="http://schemas.openxmlformats.org/officeDocument/2006/relationships" id="262" r:id="R4088cb7060934242"/>
   </p:sldIdLst>
   <p:sldSz cx="12192000" cy="6858000"/>
   <p:notesSz cx="6858000" cy="9144000"/>
@@ -831,6 +833,138 @@
 </p:notes>
 </file>
 
+<file path=ppt/notesSlides/notesSlide6.xml><?xml version="1.0" encoding="utf-8"?>
+<p:notes xmlns:p="http://schemas.openxmlformats.org/presentationml/2006/main">
+  <p:cSld>
+    <p:spTree>
+      <p:nvGrpSpPr>
+        <p:cNvPr id="1" name=""/>
+        <p:cNvGrpSpPr/>
+        <p:nvPr/>
+      </p:nvGrpSpPr>
+      <p:grpSpPr>
+        <a:xfrm xmlns:a="http://schemas.openxmlformats.org/drawingml/2006/main"/>
+      </p:grpSpPr>
+      <p:sp>
+        <p:nvSpPr>
+          <p:cNvPr id="2" name="Slide Image Placeholder 1"/>
+          <p:cNvSpPr>
+            <a:spLocks xmlns:a="http://schemas.openxmlformats.org/drawingml/2006/main" noGrp="1"/>
+          </p:cNvSpPr>
+          <p:nvPr>
+            <p:ph type="sldImg" idx="0"/>
+          </p:nvPr>
+        </p:nvSpPr>
+        <p:spPr/>
+      </p:sp>
+      <p:sp>
+        <p:nvSpPr>
+          <p:cNvPr id="3" name="Notes Placeholder 2"/>
+          <p:cNvSpPr>
+            <a:spLocks xmlns:a="http://schemas.openxmlformats.org/drawingml/2006/main" noGrp="1"/>
+          </p:cNvSpPr>
+          <p:nvPr>
+            <p:ph type="body" idx="1"/>
+          </p:nvPr>
+        </p:nvSpPr>
+        <p:spPr/>
+        <p:txBody>
+          <a:bodyPr xmlns:a="http://schemas.openxmlformats.org/drawingml/2006/main"/>
+          <a:lstStyle xmlns:a="http://schemas.openxmlformats.org/drawingml/2006/main"/>
+          <a:p xmlns:a="http://schemas.openxmlformats.org/drawingml/2006/main"/>
+        </p:txBody>
+      </p:sp>
+      <p:sp>
+        <p:nvSpPr>
+          <p:cNvPr id="4" name="Slide Number Placeholder 3"/>
+          <p:cNvSpPr>
+            <a:spLocks xmlns:a="http://schemas.openxmlformats.org/drawingml/2006/main" noGrp="1"/>
+          </p:cNvSpPr>
+          <p:nvPr>
+            <p:ph type="sldNum" idx="5"/>
+          </p:nvPr>
+        </p:nvSpPr>
+        <p:spPr/>
+        <p:txBody>
+          <a:bodyPr xmlns:a="http://schemas.openxmlformats.org/drawingml/2006/main"/>
+          <a:lstStyle xmlns:a="http://schemas.openxmlformats.org/drawingml/2006/main"/>
+          <a:p xmlns:a="http://schemas.openxmlformats.org/drawingml/2006/main"/>
+        </p:txBody>
+      </p:sp>
+    </p:spTree>
+  </p:cSld>
+  <p:clrMapOvr>
+    <a:masterClrMapping xmlns:a="http://schemas.openxmlformats.org/drawingml/2006/main"/>
+  </p:clrMapOvr>
+</p:notes>
+</file>
+
+<file path=ppt/notesSlides/notesSlide7.xml><?xml version="1.0" encoding="utf-8"?>
+<p:notes xmlns:p="http://schemas.openxmlformats.org/presentationml/2006/main">
+  <p:cSld>
+    <p:spTree>
+      <p:nvGrpSpPr>
+        <p:cNvPr id="1" name=""/>
+        <p:cNvGrpSpPr/>
+        <p:nvPr/>
+      </p:nvGrpSpPr>
+      <p:grpSpPr>
+        <a:xfrm xmlns:a="http://schemas.openxmlformats.org/drawingml/2006/main"/>
+      </p:grpSpPr>
+      <p:sp>
+        <p:nvSpPr>
+          <p:cNvPr id="2" name="Slide Image Placeholder 1"/>
+          <p:cNvSpPr>
+            <a:spLocks xmlns:a="http://schemas.openxmlformats.org/drawingml/2006/main" noGrp="1"/>
+          </p:cNvSpPr>
+          <p:nvPr>
+            <p:ph type="sldImg" idx="0"/>
+          </p:nvPr>
+        </p:nvSpPr>
+        <p:spPr/>
+      </p:sp>
+      <p:sp>
+        <p:nvSpPr>
+          <p:cNvPr id="3" name="Notes Placeholder 2"/>
+          <p:cNvSpPr>
+            <a:spLocks xmlns:a="http://schemas.openxmlformats.org/drawingml/2006/main" noGrp="1"/>
+          </p:cNvSpPr>
+          <p:nvPr>
+            <p:ph type="body" idx="1"/>
+          </p:nvPr>
+        </p:nvSpPr>
+        <p:spPr/>
+        <p:txBody>
+          <a:bodyPr xmlns:a="http://schemas.openxmlformats.org/drawingml/2006/main"/>
+          <a:lstStyle xmlns:a="http://schemas.openxmlformats.org/drawingml/2006/main"/>
+          <a:p xmlns:a="http://schemas.openxmlformats.org/drawingml/2006/main"/>
+        </p:txBody>
+      </p:sp>
+      <p:sp>
+        <p:nvSpPr>
+          <p:cNvPr id="4" name="Slide Number Placeholder 3"/>
+          <p:cNvSpPr>
+            <a:spLocks xmlns:a="http://schemas.openxmlformats.org/drawingml/2006/main" noGrp="1"/>
+          </p:cNvSpPr>
+          <p:nvPr>
+            <p:ph type="sldNum" idx="5"/>
+          </p:nvPr>
+        </p:nvSpPr>
+        <p:spPr/>
+        <p:txBody>
+          <a:bodyPr xmlns:a="http://schemas.openxmlformats.org/drawingml/2006/main"/>
+          <a:lstStyle xmlns:a="http://schemas.openxmlformats.org/drawingml/2006/main"/>
+          <a:p xmlns:a="http://schemas.openxmlformats.org/drawingml/2006/main"/>
+        </p:txBody>
+      </p:sp>
+    </p:spTree>
+  </p:cSld>
+  <p:clrMapOvr>
+    <a:masterClrMapping xmlns:a="http://schemas.openxmlformats.org/drawingml/2006/main"/>
+  </p:clrMapOvr>
+</p:notes>
+</file>
+
 <file path=ppt/slideLayouts/slideLayout1.xml><?xml version="1.0" encoding="utf-8"?>
 <p:sldLayout xmlns:p="http://schemas.openxmlformats.org/presentationml/2006/main" type="title">
   <p:cSld name="Title Slide">
@@ -869,7 +1003,7 @@
   </p:cSld>
   <p:clrMap bg1="lt1" tx1="dk1" bg2="lt2" tx2="dk2" accent1="accent1" accent2="accent2" accent3="accent3" accent4="accent4" accent5="accent5" accent6="accent6" hlink="hlink" folHlink="folHlink"/>
   <p:sldLayoutIdLst>
-    <p:sldLayoutId xmlns:r="http://schemas.openxmlformats.org/officeDocument/2006/relationships" id="2147483649" r:id="R2886663c659b4dea"/>
+    <p:sldLayoutId xmlns:r="http://schemas.openxmlformats.org/officeDocument/2006/relationships" id="2147483649" r:id="R176a50cff6c54c8c"/>
   </p:sldLayoutIdLst>
   <p:txStyles>
     <p:titleStyle>
@@ -1420,7 +1554,7 @@
           <p:cNvPr id="1" name="top-accent">
             <a:extLst xmlns:a="http://schemas.openxmlformats.org/drawingml/2006/main">
               <a:ext uri="{FF2B5EF4-FFF2-40B4-BE49-F238E27FC236}">
-                <a16:creationId xmlns:a16="http://schemas.microsoft.com/office/drawing/2014/main" id="{D525A329-662B-4E1E-879A-47558BA40F59}"/>
+                <a16:creationId xmlns:a16="http://schemas.microsoft.com/office/drawing/2014/main" id="{338B7869-48BA-4476-84A0-1D47A519CB52}"/>
               </a:ext>
             </a:extLst>
           </p:cNvPr>
@@ -1453,7 +1587,7 @@
           <p:cNvPr id="2" name="left-accent">
             <a:extLst xmlns:a="http://schemas.openxmlformats.org/drawingml/2006/main">
               <a:ext uri="{FF2B5EF4-FFF2-40B4-BE49-F238E27FC236}">
-                <a16:creationId xmlns:a16="http://schemas.microsoft.com/office/drawing/2014/main" id="{C3736106-017C-465F-8141-4605B34D8EE3}"/>
+                <a16:creationId xmlns:a16="http://schemas.microsoft.com/office/drawing/2014/main" id="{721F31E0-2753-40D4-BA8A-E01D4A48ECCC}"/>
               </a:ext>
             </a:extLst>
           </p:cNvPr>
@@ -1486,7 +1620,7 @@
           <p:cNvPr id="3" name="eyebrow">
             <a:extLst xmlns:a="http://schemas.openxmlformats.org/drawingml/2006/main">
               <a:ext uri="{FF2B5EF4-FFF2-40B4-BE49-F238E27FC236}">
-                <a16:creationId xmlns:a16="http://schemas.microsoft.com/office/drawing/2014/main" id="{0997F52B-B956-4F75-8395-E67F44EE76BA}"/>
+                <a16:creationId xmlns:a16="http://schemas.microsoft.com/office/drawing/2014/main" id="{4F252F1B-5E50-465E-B476-9A8DFF5DE462}"/>
               </a:ext>
             </a:extLst>
           </p:cNvPr>
@@ -1536,7 +1670,7 @@
           <p:cNvPr id="4" name="footer">
             <a:extLst xmlns:a="http://schemas.openxmlformats.org/drawingml/2006/main">
               <a:ext uri="{FF2B5EF4-FFF2-40B4-BE49-F238E27FC236}">
-                <a16:creationId xmlns:a16="http://schemas.microsoft.com/office/drawing/2014/main" id="{6402F021-522B-4B59-8F67-3216470FFFBC}"/>
+                <a16:creationId xmlns:a16="http://schemas.microsoft.com/office/drawing/2014/main" id="{94528164-5034-419E-BAD0-DB3B1FF95084}"/>
               </a:ext>
             </a:extLst>
           </p:cNvPr>
@@ -1586,7 +1720,7 @@
           <p:cNvPr id="5" name="page-no">
             <a:extLst xmlns:a="http://schemas.openxmlformats.org/drawingml/2006/main">
               <a:ext uri="{FF2B5EF4-FFF2-40B4-BE49-F238E27FC236}">
-                <a16:creationId xmlns:a16="http://schemas.microsoft.com/office/drawing/2014/main" id="{E5CCAA25-2851-4E1E-9BD1-9AC235830C51}"/>
+                <a16:creationId xmlns:a16="http://schemas.microsoft.com/office/drawing/2014/main" id="{15FD46E2-73B5-4E48-95AC-42FE7A99805C}"/>
               </a:ext>
             </a:extLst>
           </p:cNvPr>
@@ -1636,7 +1770,7 @@
           <p:cNvPr id="6" name="hero-panel">
             <a:extLst xmlns:a="http://schemas.openxmlformats.org/drawingml/2006/main">
               <a:ext uri="{FF2B5EF4-FFF2-40B4-BE49-F238E27FC236}">
-                <a16:creationId xmlns:a16="http://schemas.microsoft.com/office/drawing/2014/main" id="{A1DF9B5C-4AB8-410D-A72E-781621CE4CBA}"/>
+                <a16:creationId xmlns:a16="http://schemas.microsoft.com/office/drawing/2014/main" id="{866F667F-3C48-43F3-B50D-F9BF7471D44A}"/>
               </a:ext>
             </a:extLst>
           </p:cNvPr>
@@ -1669,7 +1803,7 @@
           <p:cNvPr id="7" name="hero-kicker">
             <a:extLst xmlns:a="http://schemas.openxmlformats.org/drawingml/2006/main">
               <a:ext uri="{FF2B5EF4-FFF2-40B4-BE49-F238E27FC236}">
-                <a16:creationId xmlns:a16="http://schemas.microsoft.com/office/drawing/2014/main" id="{C7D75EF8-8865-483C-8B2D-065E94DA65DD}"/>
+                <a16:creationId xmlns:a16="http://schemas.microsoft.com/office/drawing/2014/main" id="{718C4C22-20B8-4372-AE0F-70CD2D1C3C02}"/>
               </a:ext>
             </a:extLst>
           </p:cNvPr>
@@ -1719,7 +1853,7 @@
           <p:cNvPr id="8" name="hero-title">
             <a:extLst xmlns:a="http://schemas.openxmlformats.org/drawingml/2006/main">
               <a:ext uri="{FF2B5EF4-FFF2-40B4-BE49-F238E27FC236}">
-                <a16:creationId xmlns:a16="http://schemas.microsoft.com/office/drawing/2014/main" id="{2069AD49-0885-4AFC-ACAF-1FFE22298F2D}"/>
+                <a16:creationId xmlns:a16="http://schemas.microsoft.com/office/drawing/2014/main" id="{54D4AE4C-15ED-412A-93B4-1A40FCA9428A}"/>
               </a:ext>
             </a:extLst>
           </p:cNvPr>
@@ -1769,7 +1903,7 @@
           <p:cNvPr id="9" name="hero-subtitle">
             <a:extLst xmlns:a="http://schemas.openxmlformats.org/drawingml/2006/main">
               <a:ext uri="{FF2B5EF4-FFF2-40B4-BE49-F238E27FC236}">
-                <a16:creationId xmlns:a16="http://schemas.microsoft.com/office/drawing/2014/main" id="{D7D1E961-57F8-4862-820D-D0D41A6BCC41}"/>
+                <a16:creationId xmlns:a16="http://schemas.microsoft.com/office/drawing/2014/main" id="{C861C6A9-E714-42F6-8C47-CC3E9FE797AB}"/>
               </a:ext>
             </a:extLst>
           </p:cNvPr>
@@ -1819,7 +1953,7 @@
           <p:cNvPr id="10" name="tag-1">
             <a:extLst xmlns:a="http://schemas.openxmlformats.org/drawingml/2006/main">
               <a:ext uri="{FF2B5EF4-FFF2-40B4-BE49-F238E27FC236}">
-                <a16:creationId xmlns:a16="http://schemas.microsoft.com/office/drawing/2014/main" id="{7271F69F-6372-4D92-938C-012638DF5290}"/>
+                <a16:creationId xmlns:a16="http://schemas.microsoft.com/office/drawing/2014/main" id="{BE15BFDD-52EC-40C3-BF05-57F7667D1D9C}"/>
               </a:ext>
             </a:extLst>
           </p:cNvPr>
@@ -1875,7 +2009,7 @@
           <p:cNvPr id="11" name="tag-2">
             <a:extLst xmlns:a="http://schemas.openxmlformats.org/drawingml/2006/main">
               <a:ext uri="{FF2B5EF4-FFF2-40B4-BE49-F238E27FC236}">
-                <a16:creationId xmlns:a16="http://schemas.microsoft.com/office/drawing/2014/main" id="{13006991-AB93-4AFF-AD33-51054B86942C}"/>
+                <a16:creationId xmlns:a16="http://schemas.microsoft.com/office/drawing/2014/main" id="{E1C4C4BD-3D78-4DD6-A747-6E79C895E917}"/>
               </a:ext>
             </a:extLst>
           </p:cNvPr>
@@ -1931,7 +2065,7 @@
           <p:cNvPr id="12" name="tag-3">
             <a:extLst xmlns:a="http://schemas.openxmlformats.org/drawingml/2006/main">
               <a:ext uri="{FF2B5EF4-FFF2-40B4-BE49-F238E27FC236}">
-                <a16:creationId xmlns:a16="http://schemas.microsoft.com/office/drawing/2014/main" id="{5D81AF81-23E5-403A-86BD-3DC97EB1499D}"/>
+                <a16:creationId xmlns:a16="http://schemas.microsoft.com/office/drawing/2014/main" id="{B302DE31-C199-4BE6-A19C-2233968A5F98}"/>
               </a:ext>
             </a:extLst>
           </p:cNvPr>
@@ -1987,7 +2121,7 @@
           <p:cNvPr id="13" name="scope-title">
             <a:extLst xmlns:a="http://schemas.openxmlformats.org/drawingml/2006/main">
               <a:ext uri="{FF2B5EF4-FFF2-40B4-BE49-F238E27FC236}">
-                <a16:creationId xmlns:a16="http://schemas.microsoft.com/office/drawing/2014/main" id="{6E54867F-4036-471B-B990-F9FE15985109}"/>
+                <a16:creationId xmlns:a16="http://schemas.microsoft.com/office/drawing/2014/main" id="{6B4A82FE-2259-44D6-A517-D3AC422264D6}"/>
               </a:ext>
             </a:extLst>
           </p:cNvPr>
@@ -2037,7 +2171,7 @@
           <p:cNvPr id="14" name="scope-note">
             <a:extLst xmlns:a="http://schemas.openxmlformats.org/drawingml/2006/main">
               <a:ext uri="{FF2B5EF4-FFF2-40B4-BE49-F238E27FC236}">
-                <a16:creationId xmlns:a16="http://schemas.microsoft.com/office/drawing/2014/main" id="{E2D34601-1E73-4F19-8786-DF5D1D6A3FBC}"/>
+                <a16:creationId xmlns:a16="http://schemas.microsoft.com/office/drawing/2014/main" id="{E1E7F2DD-8416-42AA-BFD1-AFF9CDE3A761}"/>
               </a:ext>
             </a:extLst>
           </p:cNvPr>
@@ -2087,7 +2221,7 @@
           <p:cNvPr id="15" name="scope-row-1">
             <a:extLst xmlns:a="http://schemas.openxmlformats.org/drawingml/2006/main">
               <a:ext uri="{FF2B5EF4-FFF2-40B4-BE49-F238E27FC236}">
-                <a16:creationId xmlns:a16="http://schemas.microsoft.com/office/drawing/2014/main" id="{D901AC89-D41E-4707-96A9-09350985BD60}"/>
+                <a16:creationId xmlns:a16="http://schemas.microsoft.com/office/drawing/2014/main" id="{2195C9E2-A3B2-49C5-B94E-E57B7CB691F9}"/>
               </a:ext>
             </a:extLst>
           </p:cNvPr>
@@ -2120,7 +2254,7 @@
           <p:cNvPr id="16" name="scope-label-1">
             <a:extLst xmlns:a="http://schemas.openxmlformats.org/drawingml/2006/main">
               <a:ext uri="{FF2B5EF4-FFF2-40B4-BE49-F238E27FC236}">
-                <a16:creationId xmlns:a16="http://schemas.microsoft.com/office/drawing/2014/main" id="{20E3B0BB-46D1-4EFB-8251-6CE6F500FCF9}"/>
+                <a16:creationId xmlns:a16="http://schemas.microsoft.com/office/drawing/2014/main" id="{95CA921A-7092-450A-86BA-044C980FED25}"/>
               </a:ext>
             </a:extLst>
           </p:cNvPr>
@@ -2170,7 +2304,7 @@
           <p:cNvPr id="17" name="scope-value-1">
             <a:extLst xmlns:a="http://schemas.openxmlformats.org/drawingml/2006/main">
               <a:ext uri="{FF2B5EF4-FFF2-40B4-BE49-F238E27FC236}">
-                <a16:creationId xmlns:a16="http://schemas.microsoft.com/office/drawing/2014/main" id="{7DCE4F36-59BA-4B61-B892-32722182660B}"/>
+                <a16:creationId xmlns:a16="http://schemas.microsoft.com/office/drawing/2014/main" id="{806CE8A6-D87C-4433-A61E-03DE4C72EB48}"/>
               </a:ext>
             </a:extLst>
           </p:cNvPr>
@@ -2220,7 +2354,7 @@
           <p:cNvPr id="18" name="scope-row-2">
             <a:extLst xmlns:a="http://schemas.openxmlformats.org/drawingml/2006/main">
               <a:ext uri="{FF2B5EF4-FFF2-40B4-BE49-F238E27FC236}">
-                <a16:creationId xmlns:a16="http://schemas.microsoft.com/office/drawing/2014/main" id="{E1C394BD-43EC-437D-8F0C-92DB4DDBC204}"/>
+                <a16:creationId xmlns:a16="http://schemas.microsoft.com/office/drawing/2014/main" id="{17C5B018-C231-4857-B28D-0B73F02733AE}"/>
               </a:ext>
             </a:extLst>
           </p:cNvPr>
@@ -2253,7 +2387,7 @@
           <p:cNvPr id="19" name="scope-label-2">
             <a:extLst xmlns:a="http://schemas.openxmlformats.org/drawingml/2006/main">
               <a:ext uri="{FF2B5EF4-FFF2-40B4-BE49-F238E27FC236}">
-                <a16:creationId xmlns:a16="http://schemas.microsoft.com/office/drawing/2014/main" id="{63A94C3C-9B5D-42BB-9BDB-9C3E5EDD72B2}"/>
+                <a16:creationId xmlns:a16="http://schemas.microsoft.com/office/drawing/2014/main" id="{D07D771E-B4B2-49B5-8D8A-5E5BE5D200C4}"/>
               </a:ext>
             </a:extLst>
           </p:cNvPr>
@@ -2303,7 +2437,7 @@
           <p:cNvPr id="20" name="scope-value-2">
             <a:extLst xmlns:a="http://schemas.openxmlformats.org/drawingml/2006/main">
               <a:ext uri="{FF2B5EF4-FFF2-40B4-BE49-F238E27FC236}">
-                <a16:creationId xmlns:a16="http://schemas.microsoft.com/office/drawing/2014/main" id="{8A8C55C6-C1E1-4B2B-BAE3-AB2BF93CFE2F}"/>
+                <a16:creationId xmlns:a16="http://schemas.microsoft.com/office/drawing/2014/main" id="{6AF83045-BEE7-4585-B0D4-7E82C954E342}"/>
               </a:ext>
             </a:extLst>
           </p:cNvPr>
@@ -2353,7 +2487,7 @@
           <p:cNvPr id="21" name="scope-row-3">
             <a:extLst xmlns:a="http://schemas.openxmlformats.org/drawingml/2006/main">
               <a:ext uri="{FF2B5EF4-FFF2-40B4-BE49-F238E27FC236}">
-                <a16:creationId xmlns:a16="http://schemas.microsoft.com/office/drawing/2014/main" id="{645D2397-DC14-4A9E-AA68-00AB23387FAF}"/>
+                <a16:creationId xmlns:a16="http://schemas.microsoft.com/office/drawing/2014/main" id="{B8B9BDD7-9925-468C-8B0C-7ED7D5451227}"/>
               </a:ext>
             </a:extLst>
           </p:cNvPr>
@@ -2386,7 +2520,7 @@
           <p:cNvPr id="22" name="scope-label-3">
             <a:extLst xmlns:a="http://schemas.openxmlformats.org/drawingml/2006/main">
               <a:ext uri="{FF2B5EF4-FFF2-40B4-BE49-F238E27FC236}">
-                <a16:creationId xmlns:a16="http://schemas.microsoft.com/office/drawing/2014/main" id="{3ED07AB6-ADDE-4E94-B3E4-B82B3C36CA14}"/>
+                <a16:creationId xmlns:a16="http://schemas.microsoft.com/office/drawing/2014/main" id="{B870DF5A-263A-4956-B2D0-468E594259CD}"/>
               </a:ext>
             </a:extLst>
           </p:cNvPr>
@@ -2436,7 +2570,7 @@
           <p:cNvPr id="23" name="scope-value-3">
             <a:extLst xmlns:a="http://schemas.openxmlformats.org/drawingml/2006/main">
               <a:ext uri="{FF2B5EF4-FFF2-40B4-BE49-F238E27FC236}">
-                <a16:creationId xmlns:a16="http://schemas.microsoft.com/office/drawing/2014/main" id="{EAFE7E26-A785-4A0B-BA21-BA4EB41C5317}"/>
+                <a16:creationId xmlns:a16="http://schemas.microsoft.com/office/drawing/2014/main" id="{36CFC961-094F-43A9-A5CD-C80455AA4BBD}"/>
               </a:ext>
             </a:extLst>
           </p:cNvPr>
@@ -2486,7 +2620,7 @@
           <p:cNvPr id="24" name="scope-row-4">
             <a:extLst xmlns:a="http://schemas.openxmlformats.org/drawingml/2006/main">
               <a:ext uri="{FF2B5EF4-FFF2-40B4-BE49-F238E27FC236}">
-                <a16:creationId xmlns:a16="http://schemas.microsoft.com/office/drawing/2014/main" id="{3D93DF95-1C3C-47D9-9031-D0C2ADB9C525}"/>
+                <a16:creationId xmlns:a16="http://schemas.microsoft.com/office/drawing/2014/main" id="{54654E60-0BB1-4F5C-A01D-13EF57D033E1}"/>
               </a:ext>
             </a:extLst>
           </p:cNvPr>
@@ -2519,7 +2653,7 @@
           <p:cNvPr id="25" name="scope-label-4">
             <a:extLst xmlns:a="http://schemas.openxmlformats.org/drawingml/2006/main">
               <a:ext uri="{FF2B5EF4-FFF2-40B4-BE49-F238E27FC236}">
-                <a16:creationId xmlns:a16="http://schemas.microsoft.com/office/drawing/2014/main" id="{730C58EB-F327-4F62-97DC-5F29DD03FB1C}"/>
+                <a16:creationId xmlns:a16="http://schemas.microsoft.com/office/drawing/2014/main" id="{CCF1C1A2-DAAD-4900-AF40-E2BB1047C11A}"/>
               </a:ext>
             </a:extLst>
           </p:cNvPr>
@@ -2569,7 +2703,7 @@
           <p:cNvPr id="26" name="scope-value-4">
             <a:extLst xmlns:a="http://schemas.openxmlformats.org/drawingml/2006/main">
               <a:ext uri="{FF2B5EF4-FFF2-40B4-BE49-F238E27FC236}">
-                <a16:creationId xmlns:a16="http://schemas.microsoft.com/office/drawing/2014/main" id="{04DE913E-8DBC-43D2-B930-E089A1A2E9DA}"/>
+                <a16:creationId xmlns:a16="http://schemas.microsoft.com/office/drawing/2014/main" id="{AEA6BDD3-F9C4-4497-B4D4-61F199513D3C}"/>
               </a:ext>
             </a:extLst>
           </p:cNvPr>
@@ -2619,7 +2753,7 @@
           <p:cNvPr id="27" name="evidence-title">
             <a:extLst xmlns:a="http://schemas.openxmlformats.org/drawingml/2006/main">
               <a:ext uri="{FF2B5EF4-FFF2-40B4-BE49-F238E27FC236}">
-                <a16:creationId xmlns:a16="http://schemas.microsoft.com/office/drawing/2014/main" id="{0F559203-26D9-40E6-B522-173F94C7F277}"/>
+                <a16:creationId xmlns:a16="http://schemas.microsoft.com/office/drawing/2014/main" id="{D39F6C00-41F0-4883-9701-F7AFE0957EDB}"/>
               </a:ext>
             </a:extLst>
           </p:cNvPr>
@@ -2669,7 +2803,7 @@
           <p:cNvPr id="28" name="evidence-card-1">
             <a:extLst xmlns:a="http://schemas.openxmlformats.org/drawingml/2006/main">
               <a:ext uri="{FF2B5EF4-FFF2-40B4-BE49-F238E27FC236}">
-                <a16:creationId xmlns:a16="http://schemas.microsoft.com/office/drawing/2014/main" id="{9EBEBA66-4D73-4B27-9377-0D59A5B06AD5}"/>
+                <a16:creationId xmlns:a16="http://schemas.microsoft.com/office/drawing/2014/main" id="{478D13FC-EDD7-4B87-A77A-B0FCB8A4C6F2}"/>
               </a:ext>
             </a:extLst>
           </p:cNvPr>
@@ -2704,7 +2838,7 @@
           <p:cNvPr id="29" name="evidence-bar-1">
             <a:extLst xmlns:a="http://schemas.openxmlformats.org/drawingml/2006/main">
               <a:ext uri="{FF2B5EF4-FFF2-40B4-BE49-F238E27FC236}">
-                <a16:creationId xmlns:a16="http://schemas.microsoft.com/office/drawing/2014/main" id="{037484AB-83E7-489B-8045-8A964E78C48E}"/>
+                <a16:creationId xmlns:a16="http://schemas.microsoft.com/office/drawing/2014/main" id="{B8214933-BADE-4DAE-874B-32DF245E53BA}"/>
               </a:ext>
             </a:extLst>
           </p:cNvPr>
@@ -2737,7 +2871,7 @@
           <p:cNvPr id="30" name="evidence-title-1">
             <a:extLst xmlns:a="http://schemas.openxmlformats.org/drawingml/2006/main">
               <a:ext uri="{FF2B5EF4-FFF2-40B4-BE49-F238E27FC236}">
-                <a16:creationId xmlns:a16="http://schemas.microsoft.com/office/drawing/2014/main" id="{73A19240-579C-468D-8B72-CB8853DF42E0}"/>
+                <a16:creationId xmlns:a16="http://schemas.microsoft.com/office/drawing/2014/main" id="{627E4988-BB1F-4682-96F9-A2F6AC169D9E}"/>
               </a:ext>
             </a:extLst>
           </p:cNvPr>
@@ -2787,7 +2921,7 @@
           <p:cNvPr id="31" name="evidence-body-1">
             <a:extLst xmlns:a="http://schemas.openxmlformats.org/drawingml/2006/main">
               <a:ext uri="{FF2B5EF4-FFF2-40B4-BE49-F238E27FC236}">
-                <a16:creationId xmlns:a16="http://schemas.microsoft.com/office/drawing/2014/main" id="{E1AA3CAB-41CD-4244-9DEB-204D77317B84}"/>
+                <a16:creationId xmlns:a16="http://schemas.microsoft.com/office/drawing/2014/main" id="{F1501850-2853-47FE-9447-451D63F55501}"/>
               </a:ext>
             </a:extLst>
           </p:cNvPr>
@@ -2837,7 +2971,7 @@
           <p:cNvPr id="32" name="evidence-card-2">
             <a:extLst xmlns:a="http://schemas.openxmlformats.org/drawingml/2006/main">
               <a:ext uri="{FF2B5EF4-FFF2-40B4-BE49-F238E27FC236}">
-                <a16:creationId xmlns:a16="http://schemas.microsoft.com/office/drawing/2014/main" id="{184F8552-8CB7-4D79-9B5C-9C9FDA38B918}"/>
+                <a16:creationId xmlns:a16="http://schemas.microsoft.com/office/drawing/2014/main" id="{56EB03B8-8776-4FAA-B100-0564CA7B0F8A}"/>
               </a:ext>
             </a:extLst>
           </p:cNvPr>
@@ -2872,7 +3006,7 @@
           <p:cNvPr id="33" name="evidence-bar-2">
             <a:extLst xmlns:a="http://schemas.openxmlformats.org/drawingml/2006/main">
               <a:ext uri="{FF2B5EF4-FFF2-40B4-BE49-F238E27FC236}">
-                <a16:creationId xmlns:a16="http://schemas.microsoft.com/office/drawing/2014/main" id="{193B2708-8307-40D1-AADD-F6D1E2917D5C}"/>
+                <a16:creationId xmlns:a16="http://schemas.microsoft.com/office/drawing/2014/main" id="{B440CDF5-29DF-4C5E-85E8-24D1EFFBDFA3}"/>
               </a:ext>
             </a:extLst>
           </p:cNvPr>
@@ -2905,7 +3039,7 @@
           <p:cNvPr id="34" name="evidence-title-2">
             <a:extLst xmlns:a="http://schemas.openxmlformats.org/drawingml/2006/main">
               <a:ext uri="{FF2B5EF4-FFF2-40B4-BE49-F238E27FC236}">
-                <a16:creationId xmlns:a16="http://schemas.microsoft.com/office/drawing/2014/main" id="{EDFB530F-DBA5-4C89-8CDC-FC831453A6EE}"/>
+                <a16:creationId xmlns:a16="http://schemas.microsoft.com/office/drawing/2014/main" id="{A5659612-63C0-4604-A324-72274B28672A}"/>
               </a:ext>
             </a:extLst>
           </p:cNvPr>
@@ -2955,7 +3089,7 @@
           <p:cNvPr id="35" name="evidence-body-2">
             <a:extLst xmlns:a="http://schemas.openxmlformats.org/drawingml/2006/main">
               <a:ext uri="{FF2B5EF4-FFF2-40B4-BE49-F238E27FC236}">
-                <a16:creationId xmlns:a16="http://schemas.microsoft.com/office/drawing/2014/main" id="{4F83195D-5DDC-4DB0-BA4D-32F93DCC987D}"/>
+                <a16:creationId xmlns:a16="http://schemas.microsoft.com/office/drawing/2014/main" id="{686C33A9-38E0-4D6F-B002-74E3F7AC5EFB}"/>
               </a:ext>
             </a:extLst>
           </p:cNvPr>
@@ -3005,7 +3139,7 @@
           <p:cNvPr id="36" name="evidence-card-3">
             <a:extLst xmlns:a="http://schemas.openxmlformats.org/drawingml/2006/main">
               <a:ext uri="{FF2B5EF4-FFF2-40B4-BE49-F238E27FC236}">
-                <a16:creationId xmlns:a16="http://schemas.microsoft.com/office/drawing/2014/main" id="{2AEE5DA7-235C-4D0F-B071-D543CD29FEC2}"/>
+                <a16:creationId xmlns:a16="http://schemas.microsoft.com/office/drawing/2014/main" id="{BEC05E98-D787-46D7-84D3-CA36FDF2803F}"/>
               </a:ext>
             </a:extLst>
           </p:cNvPr>
@@ -3040,7 +3174,7 @@
           <p:cNvPr id="37" name="evidence-bar-3">
             <a:extLst xmlns:a="http://schemas.openxmlformats.org/drawingml/2006/main">
               <a:ext uri="{FF2B5EF4-FFF2-40B4-BE49-F238E27FC236}">
-                <a16:creationId xmlns:a16="http://schemas.microsoft.com/office/drawing/2014/main" id="{95DC26A0-75AE-4942-A3BB-C4033B3A14C5}"/>
+                <a16:creationId xmlns:a16="http://schemas.microsoft.com/office/drawing/2014/main" id="{A7719CF0-43E4-4C90-A4AB-00935AA1DFB9}"/>
               </a:ext>
             </a:extLst>
           </p:cNvPr>
@@ -3073,7 +3207,7 @@
           <p:cNvPr id="38" name="evidence-title-3">
             <a:extLst xmlns:a="http://schemas.openxmlformats.org/drawingml/2006/main">
               <a:ext uri="{FF2B5EF4-FFF2-40B4-BE49-F238E27FC236}">
-                <a16:creationId xmlns:a16="http://schemas.microsoft.com/office/drawing/2014/main" id="{A20F3B48-C6D1-4D48-A1B2-9E3CBC9C54A4}"/>
+                <a16:creationId xmlns:a16="http://schemas.microsoft.com/office/drawing/2014/main" id="{A5FF6C65-9D3D-4941-9974-F1F44C3916DC}"/>
               </a:ext>
             </a:extLst>
           </p:cNvPr>
@@ -3123,7 +3257,7 @@
           <p:cNvPr id="39" name="evidence-body-3">
             <a:extLst xmlns:a="http://schemas.openxmlformats.org/drawingml/2006/main">
               <a:ext uri="{FF2B5EF4-FFF2-40B4-BE49-F238E27FC236}">
-                <a16:creationId xmlns:a16="http://schemas.microsoft.com/office/drawing/2014/main" id="{178CF731-7961-4A2E-9838-8C0D12F51263}"/>
+                <a16:creationId xmlns:a16="http://schemas.microsoft.com/office/drawing/2014/main" id="{3C62C094-F477-442D-A926-374062639295}"/>
               </a:ext>
             </a:extLst>
           </p:cNvPr>
@@ -3171,7 +3305,7 @@
     </p:spTree>
     <p:extLst>
       <p:ext uri="{BB962C8B-B14F-4D97-AF65-F5344CB8AC3E}">
-        <p14:creationId xmlns:p14="http://schemas.microsoft.com/office/powerpoint/2010/main" val="311528660"/>
+        <p14:creationId xmlns:p14="http://schemas.microsoft.com/office/powerpoint/2010/main" val="481125836"/>
       </p:ext>
     </p:extLst>
   </p:cSld>
@@ -3202,7 +3336,7 @@
           <p:cNvPr id="1" name="top-accent">
             <a:extLst xmlns:a="http://schemas.openxmlformats.org/drawingml/2006/main">
               <a:ext uri="{FF2B5EF4-FFF2-40B4-BE49-F238E27FC236}">
-                <a16:creationId xmlns:a16="http://schemas.microsoft.com/office/drawing/2014/main" id="{D008C26C-49E7-4593-9F48-D58CAF302B4A}"/>
+                <a16:creationId xmlns:a16="http://schemas.microsoft.com/office/drawing/2014/main" id="{B5C9BB29-8785-4F6D-84E9-E0CA520618D3}"/>
               </a:ext>
             </a:extLst>
           </p:cNvPr>
@@ -3235,7 +3369,7 @@
           <p:cNvPr id="2" name="left-accent">
             <a:extLst xmlns:a="http://schemas.openxmlformats.org/drawingml/2006/main">
               <a:ext uri="{FF2B5EF4-FFF2-40B4-BE49-F238E27FC236}">
-                <a16:creationId xmlns:a16="http://schemas.microsoft.com/office/drawing/2014/main" id="{B5C8DC5C-93FD-4042-A2B0-3961D1176853}"/>
+                <a16:creationId xmlns:a16="http://schemas.microsoft.com/office/drawing/2014/main" id="{31021B7B-5A93-4F61-8B6E-566625935E93}"/>
               </a:ext>
             </a:extLst>
           </p:cNvPr>
@@ -3268,7 +3402,7 @@
           <p:cNvPr id="3" name="eyebrow">
             <a:extLst xmlns:a="http://schemas.openxmlformats.org/drawingml/2006/main">
               <a:ext uri="{FF2B5EF4-FFF2-40B4-BE49-F238E27FC236}">
-                <a16:creationId xmlns:a16="http://schemas.microsoft.com/office/drawing/2014/main" id="{91F275C3-74A7-4AF5-8139-95F8F6139C3A}"/>
+                <a16:creationId xmlns:a16="http://schemas.microsoft.com/office/drawing/2014/main" id="{E6E27629-7C00-4986-9EF1-38C591B50301}"/>
               </a:ext>
             </a:extLst>
           </p:cNvPr>
@@ -3318,7 +3452,7 @@
           <p:cNvPr id="4" name="footer">
             <a:extLst xmlns:a="http://schemas.openxmlformats.org/drawingml/2006/main">
               <a:ext uri="{FF2B5EF4-FFF2-40B4-BE49-F238E27FC236}">
-                <a16:creationId xmlns:a16="http://schemas.microsoft.com/office/drawing/2014/main" id="{0549C1F4-758F-4951-8282-F7BFCEEA4E5B}"/>
+                <a16:creationId xmlns:a16="http://schemas.microsoft.com/office/drawing/2014/main" id="{C1EF3D95-0C74-4AC8-8AE6-033B3472B55A}"/>
               </a:ext>
             </a:extLst>
           </p:cNvPr>
@@ -3368,7 +3502,7 @@
           <p:cNvPr id="5" name="page-no">
             <a:extLst xmlns:a="http://schemas.openxmlformats.org/drawingml/2006/main">
               <a:ext uri="{FF2B5EF4-FFF2-40B4-BE49-F238E27FC236}">
-                <a16:creationId xmlns:a16="http://schemas.microsoft.com/office/drawing/2014/main" id="{FD7992B9-0433-4F62-8728-ED33BD94C08C}"/>
+                <a16:creationId xmlns:a16="http://schemas.microsoft.com/office/drawing/2014/main" id="{1AC12CCC-5B01-474F-A2F0-A844D87EE910}"/>
               </a:ext>
             </a:extLst>
           </p:cNvPr>
@@ -3418,7 +3552,7 @@
           <p:cNvPr id="6" name="title-02">
             <a:extLst xmlns:a="http://schemas.openxmlformats.org/drawingml/2006/main">
               <a:ext uri="{FF2B5EF4-FFF2-40B4-BE49-F238E27FC236}">
-                <a16:creationId xmlns:a16="http://schemas.microsoft.com/office/drawing/2014/main" id="{9760BE5F-8F71-4A80-8F1D-3E9F42202ED6}"/>
+                <a16:creationId xmlns:a16="http://schemas.microsoft.com/office/drawing/2014/main" id="{0056667D-F91D-458C-BF1D-DCAD874C9BC0}"/>
               </a:ext>
             </a:extLst>
           </p:cNvPr>
@@ -3468,7 +3602,7 @@
           <p:cNvPr id="7" name="subtitle-02">
             <a:extLst xmlns:a="http://schemas.openxmlformats.org/drawingml/2006/main">
               <a:ext uri="{FF2B5EF4-FFF2-40B4-BE49-F238E27FC236}">
-                <a16:creationId xmlns:a16="http://schemas.microsoft.com/office/drawing/2014/main" id="{A789E998-CEA2-4A01-B99C-D0F285779BF4}"/>
+                <a16:creationId xmlns:a16="http://schemas.microsoft.com/office/drawing/2014/main" id="{4A2B82A9-7CEB-4EA7-9AF6-AC7A18F96C15}"/>
               </a:ext>
             </a:extLst>
           </p:cNvPr>
@@ -3518,7 +3652,7 @@
           <p:cNvPr id="8" name="timeline-line">
             <a:extLst xmlns:a="http://schemas.openxmlformats.org/drawingml/2006/main">
               <a:ext uri="{FF2B5EF4-FFF2-40B4-BE49-F238E27FC236}">
-                <a16:creationId xmlns:a16="http://schemas.microsoft.com/office/drawing/2014/main" id="{6A73C8FB-F0C9-400A-B403-24BC2554AC6C}"/>
+                <a16:creationId xmlns:a16="http://schemas.microsoft.com/office/drawing/2014/main" id="{A98ED615-B16F-4215-974F-761C3D38D954}"/>
               </a:ext>
             </a:extLst>
           </p:cNvPr>
@@ -3551,7 +3685,7 @@
           <p:cNvPr id="9" name="timeline-card-1">
             <a:extLst xmlns:a="http://schemas.openxmlformats.org/drawingml/2006/main">
               <a:ext uri="{FF2B5EF4-FFF2-40B4-BE49-F238E27FC236}">
-                <a16:creationId xmlns:a16="http://schemas.microsoft.com/office/drawing/2014/main" id="{50AD8E23-E918-49D5-9ABC-9EB42BA3C4DA}"/>
+                <a16:creationId xmlns:a16="http://schemas.microsoft.com/office/drawing/2014/main" id="{19FF5EBD-AA55-4359-B971-A8A1C930F8F2}"/>
               </a:ext>
             </a:extLst>
           </p:cNvPr>
@@ -3586,7 +3720,7 @@
           <p:cNvPr id="10" name="timeline-bar-1">
             <a:extLst xmlns:a="http://schemas.openxmlformats.org/drawingml/2006/main">
               <a:ext uri="{FF2B5EF4-FFF2-40B4-BE49-F238E27FC236}">
-                <a16:creationId xmlns:a16="http://schemas.microsoft.com/office/drawing/2014/main" id="{21205AC0-C031-4FC5-AD4D-DDA927253703}"/>
+                <a16:creationId xmlns:a16="http://schemas.microsoft.com/office/drawing/2014/main" id="{7947128D-C393-47FF-B0DB-CCB529B52AC8}"/>
               </a:ext>
             </a:extLst>
           </p:cNvPr>
@@ -3619,7 +3753,7 @@
           <p:cNvPr id="11" name="timeline-month-1">
             <a:extLst xmlns:a="http://schemas.openxmlformats.org/drawingml/2006/main">
               <a:ext uri="{FF2B5EF4-FFF2-40B4-BE49-F238E27FC236}">
-                <a16:creationId xmlns:a16="http://schemas.microsoft.com/office/drawing/2014/main" id="{93E7E5F9-A5C5-428C-ABCB-BA7684FBD195}"/>
+                <a16:creationId xmlns:a16="http://schemas.microsoft.com/office/drawing/2014/main" id="{EF7D6E69-D79C-4D2E-968C-9566D59FBA5C}"/>
               </a:ext>
             </a:extLst>
           </p:cNvPr>
@@ -3669,7 +3803,7 @@
           <p:cNvPr id="12" name="timeline-title-1">
             <a:extLst xmlns:a="http://schemas.openxmlformats.org/drawingml/2006/main">
               <a:ext uri="{FF2B5EF4-FFF2-40B4-BE49-F238E27FC236}">
-                <a16:creationId xmlns:a16="http://schemas.microsoft.com/office/drawing/2014/main" id="{2DC829D3-0EF0-424C-AE94-E148AC3238E7}"/>
+                <a16:creationId xmlns:a16="http://schemas.microsoft.com/office/drawing/2014/main" id="{0051B348-333B-4411-9F1B-07B6A2434D58}"/>
               </a:ext>
             </a:extLst>
           </p:cNvPr>
@@ -3719,7 +3853,7 @@
           <p:cNvPr id="13" name="timeline-dot-1-1">
             <a:extLst xmlns:a="http://schemas.openxmlformats.org/drawingml/2006/main">
               <a:ext uri="{FF2B5EF4-FFF2-40B4-BE49-F238E27FC236}">
-                <a16:creationId xmlns:a16="http://schemas.microsoft.com/office/drawing/2014/main" id="{FE9A58D4-DE9F-4678-A1CA-A3A2ACE71835}"/>
+                <a16:creationId xmlns:a16="http://schemas.microsoft.com/office/drawing/2014/main" id="{09B50DC9-59D3-4BE5-B134-98B756B82FEC}"/>
               </a:ext>
             </a:extLst>
           </p:cNvPr>
@@ -3769,7 +3903,7 @@
           <p:cNvPr id="14" name="timeline-item-1-1">
             <a:extLst xmlns:a="http://schemas.openxmlformats.org/drawingml/2006/main">
               <a:ext uri="{FF2B5EF4-FFF2-40B4-BE49-F238E27FC236}">
-                <a16:creationId xmlns:a16="http://schemas.microsoft.com/office/drawing/2014/main" id="{378E6B1D-0092-40FB-90B8-F5C2DF3EC347}"/>
+                <a16:creationId xmlns:a16="http://schemas.microsoft.com/office/drawing/2014/main" id="{CAE1DA3A-A0E3-4FAE-9E60-1E92B1ABAA30}"/>
               </a:ext>
             </a:extLst>
           </p:cNvPr>
@@ -3819,7 +3953,7 @@
           <p:cNvPr id="15" name="timeline-dot-1-2">
             <a:extLst xmlns:a="http://schemas.openxmlformats.org/drawingml/2006/main">
               <a:ext uri="{FF2B5EF4-FFF2-40B4-BE49-F238E27FC236}">
-                <a16:creationId xmlns:a16="http://schemas.microsoft.com/office/drawing/2014/main" id="{CE34D2C6-F879-427F-A0A6-C46C3E7C6733}"/>
+                <a16:creationId xmlns:a16="http://schemas.microsoft.com/office/drawing/2014/main" id="{2AD57A43-3245-4BEE-ADD1-D040C12C289E}"/>
               </a:ext>
             </a:extLst>
           </p:cNvPr>
@@ -3869,7 +4003,7 @@
           <p:cNvPr id="16" name="timeline-item-1-2">
             <a:extLst xmlns:a="http://schemas.openxmlformats.org/drawingml/2006/main">
               <a:ext uri="{FF2B5EF4-FFF2-40B4-BE49-F238E27FC236}">
-                <a16:creationId xmlns:a16="http://schemas.microsoft.com/office/drawing/2014/main" id="{AC38438E-16D0-4F94-B936-47835CF3B69B}"/>
+                <a16:creationId xmlns:a16="http://schemas.microsoft.com/office/drawing/2014/main" id="{BC8E7022-06F0-4342-967A-473F16207B49}"/>
               </a:ext>
             </a:extLst>
           </p:cNvPr>
@@ -3919,7 +4053,7 @@
           <p:cNvPr id="17" name="timeline-dot-1-3">
             <a:extLst xmlns:a="http://schemas.openxmlformats.org/drawingml/2006/main">
               <a:ext uri="{FF2B5EF4-FFF2-40B4-BE49-F238E27FC236}">
-                <a16:creationId xmlns:a16="http://schemas.microsoft.com/office/drawing/2014/main" id="{34AEFCB3-8161-4D94-BB2C-1334C47B523F}"/>
+                <a16:creationId xmlns:a16="http://schemas.microsoft.com/office/drawing/2014/main" id="{2AF428D4-48E1-46B3-BAD9-3B3FE9ACADC5}"/>
               </a:ext>
             </a:extLst>
           </p:cNvPr>
@@ -3969,7 +4103,7 @@
           <p:cNvPr id="18" name="timeline-item-1-3">
             <a:extLst xmlns:a="http://schemas.openxmlformats.org/drawingml/2006/main">
               <a:ext uri="{FF2B5EF4-FFF2-40B4-BE49-F238E27FC236}">
-                <a16:creationId xmlns:a16="http://schemas.microsoft.com/office/drawing/2014/main" id="{8C831A34-4CD0-4746-BAC6-1CBF51F762DA}"/>
+                <a16:creationId xmlns:a16="http://schemas.microsoft.com/office/drawing/2014/main" id="{80D6E426-3928-4508-9D0E-9D025B4B603A}"/>
               </a:ext>
             </a:extLst>
           </p:cNvPr>
@@ -4019,7 +4153,7 @@
           <p:cNvPr id="19" name="timeline-card-2">
             <a:extLst xmlns:a="http://schemas.openxmlformats.org/drawingml/2006/main">
               <a:ext uri="{FF2B5EF4-FFF2-40B4-BE49-F238E27FC236}">
-                <a16:creationId xmlns:a16="http://schemas.microsoft.com/office/drawing/2014/main" id="{443459AC-8B53-44D6-A78B-B270067A13EF}"/>
+                <a16:creationId xmlns:a16="http://schemas.microsoft.com/office/drawing/2014/main" id="{4F97EE22-2309-42A8-B3F8-6738964AFCDB}"/>
               </a:ext>
             </a:extLst>
           </p:cNvPr>
@@ -4054,7 +4188,7 @@
           <p:cNvPr id="20" name="timeline-bar-2">
             <a:extLst xmlns:a="http://schemas.openxmlformats.org/drawingml/2006/main">
               <a:ext uri="{FF2B5EF4-FFF2-40B4-BE49-F238E27FC236}">
-                <a16:creationId xmlns:a16="http://schemas.microsoft.com/office/drawing/2014/main" id="{ED1A2207-CE81-44E9-88DD-68F732E32CD1}"/>
+                <a16:creationId xmlns:a16="http://schemas.microsoft.com/office/drawing/2014/main" id="{E820D218-4686-4122-AEA2-F3E293FED28E}"/>
               </a:ext>
             </a:extLst>
           </p:cNvPr>
@@ -4087,7 +4221,7 @@
           <p:cNvPr id="21" name="timeline-month-2">
             <a:extLst xmlns:a="http://schemas.openxmlformats.org/drawingml/2006/main">
               <a:ext uri="{FF2B5EF4-FFF2-40B4-BE49-F238E27FC236}">
-                <a16:creationId xmlns:a16="http://schemas.microsoft.com/office/drawing/2014/main" id="{D340F70A-D544-4D48-AD9B-D815581C4596}"/>
+                <a16:creationId xmlns:a16="http://schemas.microsoft.com/office/drawing/2014/main" id="{9FB21346-F3A4-412E-B2B3-15E871B907DA}"/>
               </a:ext>
             </a:extLst>
           </p:cNvPr>
@@ -4137,7 +4271,7 @@
           <p:cNvPr id="22" name="timeline-title-2">
             <a:extLst xmlns:a="http://schemas.openxmlformats.org/drawingml/2006/main">
               <a:ext uri="{FF2B5EF4-FFF2-40B4-BE49-F238E27FC236}">
-                <a16:creationId xmlns:a16="http://schemas.microsoft.com/office/drawing/2014/main" id="{A8713D08-1DD6-4DE5-9B22-7AE2A5B85807}"/>
+                <a16:creationId xmlns:a16="http://schemas.microsoft.com/office/drawing/2014/main" id="{B2B67B73-B55A-495C-BBBE-BCC8C804C8EB}"/>
               </a:ext>
             </a:extLst>
           </p:cNvPr>
@@ -4187,7 +4321,7 @@
           <p:cNvPr id="23" name="timeline-dot-2-1">
             <a:extLst xmlns:a="http://schemas.openxmlformats.org/drawingml/2006/main">
               <a:ext uri="{FF2B5EF4-FFF2-40B4-BE49-F238E27FC236}">
-                <a16:creationId xmlns:a16="http://schemas.microsoft.com/office/drawing/2014/main" id="{BBB1DBA0-9B84-4D8A-8078-99349BFE6686}"/>
+                <a16:creationId xmlns:a16="http://schemas.microsoft.com/office/drawing/2014/main" id="{6A85C0EC-DA84-4B7B-982A-A945D57254D8}"/>
               </a:ext>
             </a:extLst>
           </p:cNvPr>
@@ -4237,7 +4371,7 @@
           <p:cNvPr id="24" name="timeline-item-2-1">
             <a:extLst xmlns:a="http://schemas.openxmlformats.org/drawingml/2006/main">
               <a:ext uri="{FF2B5EF4-FFF2-40B4-BE49-F238E27FC236}">
-                <a16:creationId xmlns:a16="http://schemas.microsoft.com/office/drawing/2014/main" id="{9F81B927-1AEF-41A8-BBBE-2CFE255B5A7E}"/>
+                <a16:creationId xmlns:a16="http://schemas.microsoft.com/office/drawing/2014/main" id="{FC8A3625-D93E-4129-BD57-D3A7545ACC5C}"/>
               </a:ext>
             </a:extLst>
           </p:cNvPr>
@@ -4287,7 +4421,7 @@
           <p:cNvPr id="25" name="timeline-dot-2-2">
             <a:extLst xmlns:a="http://schemas.openxmlformats.org/drawingml/2006/main">
               <a:ext uri="{FF2B5EF4-FFF2-40B4-BE49-F238E27FC236}">
-                <a16:creationId xmlns:a16="http://schemas.microsoft.com/office/drawing/2014/main" id="{BD9D03A1-701A-41F1-9703-E4F55031FEED}"/>
+                <a16:creationId xmlns:a16="http://schemas.microsoft.com/office/drawing/2014/main" id="{59452A27-3BE3-4089-9AC5-454F603DE2D8}"/>
               </a:ext>
             </a:extLst>
           </p:cNvPr>
@@ -4337,7 +4471,7 @@
           <p:cNvPr id="26" name="timeline-item-2-2">
             <a:extLst xmlns:a="http://schemas.openxmlformats.org/drawingml/2006/main">
               <a:ext uri="{FF2B5EF4-FFF2-40B4-BE49-F238E27FC236}">
-                <a16:creationId xmlns:a16="http://schemas.microsoft.com/office/drawing/2014/main" id="{623B4C2F-4B5C-493F-AD32-BE2A99B2419B}"/>
+                <a16:creationId xmlns:a16="http://schemas.microsoft.com/office/drawing/2014/main" id="{E5AD71EE-31F5-4A89-8D87-04A15605D8FB}"/>
               </a:ext>
             </a:extLst>
           </p:cNvPr>
@@ -4387,7 +4521,7 @@
           <p:cNvPr id="27" name="timeline-dot-2-3">
             <a:extLst xmlns:a="http://schemas.openxmlformats.org/drawingml/2006/main">
               <a:ext uri="{FF2B5EF4-FFF2-40B4-BE49-F238E27FC236}">
-                <a16:creationId xmlns:a16="http://schemas.microsoft.com/office/drawing/2014/main" id="{9667D6D9-BF9B-49E4-86DD-16425A1B7121}"/>
+                <a16:creationId xmlns:a16="http://schemas.microsoft.com/office/drawing/2014/main" id="{9D50C6EB-827E-4F24-9968-C09536342FA9}"/>
               </a:ext>
             </a:extLst>
           </p:cNvPr>
@@ -4437,7 +4571,7 @@
           <p:cNvPr id="28" name="timeline-item-2-3">
             <a:extLst xmlns:a="http://schemas.openxmlformats.org/drawingml/2006/main">
               <a:ext uri="{FF2B5EF4-FFF2-40B4-BE49-F238E27FC236}">
-                <a16:creationId xmlns:a16="http://schemas.microsoft.com/office/drawing/2014/main" id="{52B431F4-B0F5-460B-AAB7-A065E6D54AD1}"/>
+                <a16:creationId xmlns:a16="http://schemas.microsoft.com/office/drawing/2014/main" id="{635612BA-E62F-4F6D-8A26-121B133A397D}"/>
               </a:ext>
             </a:extLst>
           </p:cNvPr>
@@ -4487,7 +4621,7 @@
           <p:cNvPr id="29" name="timeline-card-3">
             <a:extLst xmlns:a="http://schemas.openxmlformats.org/drawingml/2006/main">
               <a:ext uri="{FF2B5EF4-FFF2-40B4-BE49-F238E27FC236}">
-                <a16:creationId xmlns:a16="http://schemas.microsoft.com/office/drawing/2014/main" id="{9C2870AC-46E6-4B04-B6E2-72ABFB606BAB}"/>
+                <a16:creationId xmlns:a16="http://schemas.microsoft.com/office/drawing/2014/main" id="{88D0633D-E493-4F5C-B735-25841431C57E}"/>
               </a:ext>
             </a:extLst>
           </p:cNvPr>
@@ -4522,7 +4656,7 @@
           <p:cNvPr id="30" name="timeline-bar-3">
             <a:extLst xmlns:a="http://schemas.openxmlformats.org/drawingml/2006/main">
               <a:ext uri="{FF2B5EF4-FFF2-40B4-BE49-F238E27FC236}">
-                <a16:creationId xmlns:a16="http://schemas.microsoft.com/office/drawing/2014/main" id="{898122BB-EAFF-4625-A0DC-241F4A423B57}"/>
+                <a16:creationId xmlns:a16="http://schemas.microsoft.com/office/drawing/2014/main" id="{129C74A0-731F-470B-BAE8-0EB73EEC466B}"/>
               </a:ext>
             </a:extLst>
           </p:cNvPr>
@@ -4555,7 +4689,7 @@
           <p:cNvPr id="31" name="timeline-month-3">
             <a:extLst xmlns:a="http://schemas.openxmlformats.org/drawingml/2006/main">
               <a:ext uri="{FF2B5EF4-FFF2-40B4-BE49-F238E27FC236}">
-                <a16:creationId xmlns:a16="http://schemas.microsoft.com/office/drawing/2014/main" id="{3F917B4B-531F-4EE4-9CE2-5DEEBF4909B4}"/>
+                <a16:creationId xmlns:a16="http://schemas.microsoft.com/office/drawing/2014/main" id="{58E70DDD-963E-49BE-B949-3F79816093F2}"/>
               </a:ext>
             </a:extLst>
           </p:cNvPr>
@@ -4605,7 +4739,7 @@
           <p:cNvPr id="32" name="timeline-title-3">
             <a:extLst xmlns:a="http://schemas.openxmlformats.org/drawingml/2006/main">
               <a:ext uri="{FF2B5EF4-FFF2-40B4-BE49-F238E27FC236}">
-                <a16:creationId xmlns:a16="http://schemas.microsoft.com/office/drawing/2014/main" id="{916539F5-C754-4A2C-A49F-C15E8CC892FE}"/>
+                <a16:creationId xmlns:a16="http://schemas.microsoft.com/office/drawing/2014/main" id="{9619AB87-FBC3-46C4-BDC7-B8591B84061C}"/>
               </a:ext>
             </a:extLst>
           </p:cNvPr>
@@ -4655,7 +4789,7 @@
           <p:cNvPr id="33" name="timeline-dot-3-1">
             <a:extLst xmlns:a="http://schemas.openxmlformats.org/drawingml/2006/main">
               <a:ext uri="{FF2B5EF4-FFF2-40B4-BE49-F238E27FC236}">
-                <a16:creationId xmlns:a16="http://schemas.microsoft.com/office/drawing/2014/main" id="{D8EF4228-09EB-405A-8BAA-11ACDEA90E8E}"/>
+                <a16:creationId xmlns:a16="http://schemas.microsoft.com/office/drawing/2014/main" id="{FF3206E2-6380-4C33-AD39-8298507C01C7}"/>
               </a:ext>
             </a:extLst>
           </p:cNvPr>
@@ -4705,7 +4839,7 @@
           <p:cNvPr id="34" name="timeline-item-3-1">
             <a:extLst xmlns:a="http://schemas.openxmlformats.org/drawingml/2006/main">
               <a:ext uri="{FF2B5EF4-FFF2-40B4-BE49-F238E27FC236}">
-                <a16:creationId xmlns:a16="http://schemas.microsoft.com/office/drawing/2014/main" id="{D693FF3B-3B2A-43D6-A388-A6B67494B955}"/>
+                <a16:creationId xmlns:a16="http://schemas.microsoft.com/office/drawing/2014/main" id="{766C3FED-DB4B-4FB3-BCE0-A62E9D7AD626}"/>
               </a:ext>
             </a:extLst>
           </p:cNvPr>
@@ -4755,7 +4889,7 @@
           <p:cNvPr id="35" name="timeline-dot-3-2">
             <a:extLst xmlns:a="http://schemas.openxmlformats.org/drawingml/2006/main">
               <a:ext uri="{FF2B5EF4-FFF2-40B4-BE49-F238E27FC236}">
-                <a16:creationId xmlns:a16="http://schemas.microsoft.com/office/drawing/2014/main" id="{8B3E188F-AC56-4563-91F0-4A1F430E0820}"/>
+                <a16:creationId xmlns:a16="http://schemas.microsoft.com/office/drawing/2014/main" id="{2472EF4A-9A54-4ED4-8E7B-0CD06E14F953}"/>
               </a:ext>
             </a:extLst>
           </p:cNvPr>
@@ -4805,7 +4939,7 @@
           <p:cNvPr id="36" name="timeline-item-3-2">
             <a:extLst xmlns:a="http://schemas.openxmlformats.org/drawingml/2006/main">
               <a:ext uri="{FF2B5EF4-FFF2-40B4-BE49-F238E27FC236}">
-                <a16:creationId xmlns:a16="http://schemas.microsoft.com/office/drawing/2014/main" id="{63BB9DFC-9A19-4BE3-9453-5E5ABA762996}"/>
+                <a16:creationId xmlns:a16="http://schemas.microsoft.com/office/drawing/2014/main" id="{474A33EB-5457-4AE0-9C51-B2A68EC5727A}"/>
               </a:ext>
             </a:extLst>
           </p:cNvPr>
@@ -4855,7 +4989,7 @@
           <p:cNvPr id="37" name="timeline-dot-3-3">
             <a:extLst xmlns:a="http://schemas.openxmlformats.org/drawingml/2006/main">
               <a:ext uri="{FF2B5EF4-FFF2-40B4-BE49-F238E27FC236}">
-                <a16:creationId xmlns:a16="http://schemas.microsoft.com/office/drawing/2014/main" id="{A1236104-CDC5-42DB-9FE5-CCA7F2590D56}"/>
+                <a16:creationId xmlns:a16="http://schemas.microsoft.com/office/drawing/2014/main" id="{98AD1116-5FF8-49F7-A147-E83401DE23AC}"/>
               </a:ext>
             </a:extLst>
           </p:cNvPr>
@@ -4905,7 +5039,7 @@
           <p:cNvPr id="38" name="timeline-item-3-3">
             <a:extLst xmlns:a="http://schemas.openxmlformats.org/drawingml/2006/main">
               <a:ext uri="{FF2B5EF4-FFF2-40B4-BE49-F238E27FC236}">
-                <a16:creationId xmlns:a16="http://schemas.microsoft.com/office/drawing/2014/main" id="{D39C3BC7-ACFA-4841-9022-82C3A1BAD829}"/>
+                <a16:creationId xmlns:a16="http://schemas.microsoft.com/office/drawing/2014/main" id="{5E9646AC-D99E-4134-8702-5EDDA790F591}"/>
               </a:ext>
             </a:extLst>
           </p:cNvPr>
@@ -4955,7 +5089,7 @@
           <p:cNvPr id="39" name="timeline-card-4">
             <a:extLst xmlns:a="http://schemas.openxmlformats.org/drawingml/2006/main">
               <a:ext uri="{FF2B5EF4-FFF2-40B4-BE49-F238E27FC236}">
-                <a16:creationId xmlns:a16="http://schemas.microsoft.com/office/drawing/2014/main" id="{B4D14956-6D5C-4C90-966C-6E7BB78FFD22}"/>
+                <a16:creationId xmlns:a16="http://schemas.microsoft.com/office/drawing/2014/main" id="{2837ABDF-E83A-4373-9D9C-C5D46CC817F2}"/>
               </a:ext>
             </a:extLst>
           </p:cNvPr>
@@ -4990,7 +5124,7 @@
           <p:cNvPr id="40" name="timeline-bar-4">
             <a:extLst xmlns:a="http://schemas.openxmlformats.org/drawingml/2006/main">
               <a:ext uri="{FF2B5EF4-FFF2-40B4-BE49-F238E27FC236}">
-                <a16:creationId xmlns:a16="http://schemas.microsoft.com/office/drawing/2014/main" id="{296E9C69-E527-4D83-A2C7-9336D93E74B1}"/>
+                <a16:creationId xmlns:a16="http://schemas.microsoft.com/office/drawing/2014/main" id="{7B1AAC40-C8D4-4E17-93EB-3803BF276C8D}"/>
               </a:ext>
             </a:extLst>
           </p:cNvPr>
@@ -5023,7 +5157,7 @@
           <p:cNvPr id="41" name="timeline-month-4">
             <a:extLst xmlns:a="http://schemas.openxmlformats.org/drawingml/2006/main">
               <a:ext uri="{FF2B5EF4-FFF2-40B4-BE49-F238E27FC236}">
-                <a16:creationId xmlns:a16="http://schemas.microsoft.com/office/drawing/2014/main" id="{0F448554-0161-4E25-A3BF-8975EFC966E5}"/>
+                <a16:creationId xmlns:a16="http://schemas.microsoft.com/office/drawing/2014/main" id="{2AB0AE2D-8111-42AC-AC53-B4EA370EBEF9}"/>
               </a:ext>
             </a:extLst>
           </p:cNvPr>
@@ -5073,7 +5207,7 @@
           <p:cNvPr id="42" name="timeline-title-4">
             <a:extLst xmlns:a="http://schemas.openxmlformats.org/drawingml/2006/main">
               <a:ext uri="{FF2B5EF4-FFF2-40B4-BE49-F238E27FC236}">
-                <a16:creationId xmlns:a16="http://schemas.microsoft.com/office/drawing/2014/main" id="{DA72E42F-20E8-4C6C-8EED-DCD0E9181AA7}"/>
+                <a16:creationId xmlns:a16="http://schemas.microsoft.com/office/drawing/2014/main" id="{DB4E4A9B-ED1A-4B08-8FAF-FC20881B71D3}"/>
               </a:ext>
             </a:extLst>
           </p:cNvPr>
@@ -5123,7 +5257,7 @@
           <p:cNvPr id="43" name="timeline-dot-4-1">
             <a:extLst xmlns:a="http://schemas.openxmlformats.org/drawingml/2006/main">
               <a:ext uri="{FF2B5EF4-FFF2-40B4-BE49-F238E27FC236}">
-                <a16:creationId xmlns:a16="http://schemas.microsoft.com/office/drawing/2014/main" id="{C14ACAC3-5DFA-4021-B923-30C871249218}"/>
+                <a16:creationId xmlns:a16="http://schemas.microsoft.com/office/drawing/2014/main" id="{0E459CB0-351B-49B5-9801-CDE9552A1062}"/>
               </a:ext>
             </a:extLst>
           </p:cNvPr>
@@ -5173,7 +5307,7 @@
           <p:cNvPr id="44" name="timeline-item-4-1">
             <a:extLst xmlns:a="http://schemas.openxmlformats.org/drawingml/2006/main">
               <a:ext uri="{FF2B5EF4-FFF2-40B4-BE49-F238E27FC236}">
-                <a16:creationId xmlns:a16="http://schemas.microsoft.com/office/drawing/2014/main" id="{570D08F0-AF79-430C-B45F-20E58625586D}"/>
+                <a16:creationId xmlns:a16="http://schemas.microsoft.com/office/drawing/2014/main" id="{B234954C-13E4-4F54-BDDC-EFE1574128F0}"/>
               </a:ext>
             </a:extLst>
           </p:cNvPr>
@@ -5223,7 +5357,7 @@
           <p:cNvPr id="45" name="timeline-dot-4-2">
             <a:extLst xmlns:a="http://schemas.openxmlformats.org/drawingml/2006/main">
               <a:ext uri="{FF2B5EF4-FFF2-40B4-BE49-F238E27FC236}">
-                <a16:creationId xmlns:a16="http://schemas.microsoft.com/office/drawing/2014/main" id="{72A4BF9D-26D5-4376-82C3-B42C0228182D}"/>
+                <a16:creationId xmlns:a16="http://schemas.microsoft.com/office/drawing/2014/main" id="{C8683D17-29C7-4FB8-A164-7C7FCE41F451}"/>
               </a:ext>
             </a:extLst>
           </p:cNvPr>
@@ -5273,7 +5407,7 @@
           <p:cNvPr id="46" name="timeline-item-4-2">
             <a:extLst xmlns:a="http://schemas.openxmlformats.org/drawingml/2006/main">
               <a:ext uri="{FF2B5EF4-FFF2-40B4-BE49-F238E27FC236}">
-                <a16:creationId xmlns:a16="http://schemas.microsoft.com/office/drawing/2014/main" id="{AD0F8898-BBD7-4BCE-BE84-2C826B2E99C9}"/>
+                <a16:creationId xmlns:a16="http://schemas.microsoft.com/office/drawing/2014/main" id="{562A1AA4-DC8C-46DD-BE40-E2453CFEB037}"/>
               </a:ext>
             </a:extLst>
           </p:cNvPr>
@@ -5323,7 +5457,7 @@
           <p:cNvPr id="47" name="timeline-dot-4-3">
             <a:extLst xmlns:a="http://schemas.openxmlformats.org/drawingml/2006/main">
               <a:ext uri="{FF2B5EF4-FFF2-40B4-BE49-F238E27FC236}">
-                <a16:creationId xmlns:a16="http://schemas.microsoft.com/office/drawing/2014/main" id="{E32EF289-7BED-4765-A1B0-278093DE1B2B}"/>
+                <a16:creationId xmlns:a16="http://schemas.microsoft.com/office/drawing/2014/main" id="{07C3A789-ECE9-4258-A450-EFB2BCABB274}"/>
               </a:ext>
             </a:extLst>
           </p:cNvPr>
@@ -5373,7 +5507,7 @@
           <p:cNvPr id="48" name="timeline-item-4-3">
             <a:extLst xmlns:a="http://schemas.openxmlformats.org/drawingml/2006/main">
               <a:ext uri="{FF2B5EF4-FFF2-40B4-BE49-F238E27FC236}">
-                <a16:creationId xmlns:a16="http://schemas.microsoft.com/office/drawing/2014/main" id="{E2677658-2AD6-4000-AE32-15169054D23B}"/>
+                <a16:creationId xmlns:a16="http://schemas.microsoft.com/office/drawing/2014/main" id="{DA0304E2-EDAE-4B74-8630-C77391C819B9}"/>
               </a:ext>
             </a:extLst>
           </p:cNvPr>
@@ -5423,7 +5557,7 @@
           <p:cNvPr id="49" name="timeline-card-5">
             <a:extLst xmlns:a="http://schemas.openxmlformats.org/drawingml/2006/main">
               <a:ext uri="{FF2B5EF4-FFF2-40B4-BE49-F238E27FC236}">
-                <a16:creationId xmlns:a16="http://schemas.microsoft.com/office/drawing/2014/main" id="{A9D66DAB-0362-4878-832A-9ED3FE647013}"/>
+                <a16:creationId xmlns:a16="http://schemas.microsoft.com/office/drawing/2014/main" id="{0E84A1C9-94BD-46BE-A9A3-6C0AB35F4B1A}"/>
               </a:ext>
             </a:extLst>
           </p:cNvPr>
@@ -5458,7 +5592,7 @@
           <p:cNvPr id="50" name="timeline-bar-5">
             <a:extLst xmlns:a="http://schemas.openxmlformats.org/drawingml/2006/main">
               <a:ext uri="{FF2B5EF4-FFF2-40B4-BE49-F238E27FC236}">
-                <a16:creationId xmlns:a16="http://schemas.microsoft.com/office/drawing/2014/main" id="{4A3F7C06-32FD-4CF0-8FA4-C7497142B8FA}"/>
+                <a16:creationId xmlns:a16="http://schemas.microsoft.com/office/drawing/2014/main" id="{A32FE097-6DC0-4847-A898-ED38F2B4134C}"/>
               </a:ext>
             </a:extLst>
           </p:cNvPr>
@@ -5491,7 +5625,7 @@
           <p:cNvPr id="51" name="timeline-month-5">
             <a:extLst xmlns:a="http://schemas.openxmlformats.org/drawingml/2006/main">
               <a:ext uri="{FF2B5EF4-FFF2-40B4-BE49-F238E27FC236}">
-                <a16:creationId xmlns:a16="http://schemas.microsoft.com/office/drawing/2014/main" id="{4E16BD14-9B21-418B-83DD-A902C56B18B3}"/>
+                <a16:creationId xmlns:a16="http://schemas.microsoft.com/office/drawing/2014/main" id="{2F5942A3-D61C-4732-8909-BFBDA83C31F2}"/>
               </a:ext>
             </a:extLst>
           </p:cNvPr>
@@ -5541,7 +5675,7 @@
           <p:cNvPr id="52" name="timeline-title-5">
             <a:extLst xmlns:a="http://schemas.openxmlformats.org/drawingml/2006/main">
               <a:ext uri="{FF2B5EF4-FFF2-40B4-BE49-F238E27FC236}">
-                <a16:creationId xmlns:a16="http://schemas.microsoft.com/office/drawing/2014/main" id="{D003105F-21BC-4943-938C-9D9DCCD32C13}"/>
+                <a16:creationId xmlns:a16="http://schemas.microsoft.com/office/drawing/2014/main" id="{CE1960C5-9CFB-4029-9107-FC8BE3714934}"/>
               </a:ext>
             </a:extLst>
           </p:cNvPr>
@@ -5591,7 +5725,7 @@
           <p:cNvPr id="53" name="timeline-dot-5-1">
             <a:extLst xmlns:a="http://schemas.openxmlformats.org/drawingml/2006/main">
               <a:ext uri="{FF2B5EF4-FFF2-40B4-BE49-F238E27FC236}">
-                <a16:creationId xmlns:a16="http://schemas.microsoft.com/office/drawing/2014/main" id="{A3328863-8ABF-46B4-BC08-5D536D3370EC}"/>
+                <a16:creationId xmlns:a16="http://schemas.microsoft.com/office/drawing/2014/main" id="{E3783F20-49A8-4839-8A56-6E4609B46C4E}"/>
               </a:ext>
             </a:extLst>
           </p:cNvPr>
@@ -5641,7 +5775,7 @@
           <p:cNvPr id="54" name="timeline-item-5-1">
             <a:extLst xmlns:a="http://schemas.openxmlformats.org/drawingml/2006/main">
               <a:ext uri="{FF2B5EF4-FFF2-40B4-BE49-F238E27FC236}">
-                <a16:creationId xmlns:a16="http://schemas.microsoft.com/office/drawing/2014/main" id="{C73D93CB-2EC1-4850-82BB-19F9CE5B7155}"/>
+                <a16:creationId xmlns:a16="http://schemas.microsoft.com/office/drawing/2014/main" id="{7538284F-43E4-44CB-A08E-44802AC7CA27}"/>
               </a:ext>
             </a:extLst>
           </p:cNvPr>
@@ -5691,7 +5825,7 @@
           <p:cNvPr id="55" name="timeline-dot-5-2">
             <a:extLst xmlns:a="http://schemas.openxmlformats.org/drawingml/2006/main">
               <a:ext uri="{FF2B5EF4-FFF2-40B4-BE49-F238E27FC236}">
-                <a16:creationId xmlns:a16="http://schemas.microsoft.com/office/drawing/2014/main" id="{C302F47F-BB9F-4379-97B6-FF83396D4BCF}"/>
+                <a16:creationId xmlns:a16="http://schemas.microsoft.com/office/drawing/2014/main" id="{6C301AFF-0AE2-4EDF-8619-D771E0DD5BF4}"/>
               </a:ext>
             </a:extLst>
           </p:cNvPr>
@@ -5741,7 +5875,7 @@
           <p:cNvPr id="56" name="timeline-item-5-2">
             <a:extLst xmlns:a="http://schemas.openxmlformats.org/drawingml/2006/main">
               <a:ext uri="{FF2B5EF4-FFF2-40B4-BE49-F238E27FC236}">
-                <a16:creationId xmlns:a16="http://schemas.microsoft.com/office/drawing/2014/main" id="{F7E1DD83-02DD-4C95-A7A8-8A2F5B938FEE}"/>
+                <a16:creationId xmlns:a16="http://schemas.microsoft.com/office/drawing/2014/main" id="{CC4F24CD-42EC-487C-A54B-4F5C46805EA4}"/>
               </a:ext>
             </a:extLst>
           </p:cNvPr>
@@ -5791,7 +5925,7 @@
           <p:cNvPr id="57" name="timeline-dot-5-3">
             <a:extLst xmlns:a="http://schemas.openxmlformats.org/drawingml/2006/main">
               <a:ext uri="{FF2B5EF4-FFF2-40B4-BE49-F238E27FC236}">
-                <a16:creationId xmlns:a16="http://schemas.microsoft.com/office/drawing/2014/main" id="{F1D56A04-667B-40AE-BFA1-55825E2DDD6F}"/>
+                <a16:creationId xmlns:a16="http://schemas.microsoft.com/office/drawing/2014/main" id="{B93E89BE-D4EB-40AB-B0BF-B4D4F764DA66}"/>
               </a:ext>
             </a:extLst>
           </p:cNvPr>
@@ -5841,7 +5975,7 @@
           <p:cNvPr id="58" name="timeline-item-5-3">
             <a:extLst xmlns:a="http://schemas.openxmlformats.org/drawingml/2006/main">
               <a:ext uri="{FF2B5EF4-FFF2-40B4-BE49-F238E27FC236}">
-                <a16:creationId xmlns:a16="http://schemas.microsoft.com/office/drawing/2014/main" id="{60770133-819C-4AA1-B205-B5A8A961C5E1}"/>
+                <a16:creationId xmlns:a16="http://schemas.microsoft.com/office/drawing/2014/main" id="{3B04F55E-784D-4556-AB48-12AD863B566D}"/>
               </a:ext>
             </a:extLst>
           </p:cNvPr>
@@ -5891,7 +6025,7 @@
           <p:cNvPr id="59" name="timeline-card-6">
             <a:extLst xmlns:a="http://schemas.openxmlformats.org/drawingml/2006/main">
               <a:ext uri="{FF2B5EF4-FFF2-40B4-BE49-F238E27FC236}">
-                <a16:creationId xmlns:a16="http://schemas.microsoft.com/office/drawing/2014/main" id="{15290961-8E24-4462-A65D-2F028CEEDC85}"/>
+                <a16:creationId xmlns:a16="http://schemas.microsoft.com/office/drawing/2014/main" id="{E1044EE8-00BD-4D10-8544-D0F0A800A732}"/>
               </a:ext>
             </a:extLst>
           </p:cNvPr>
@@ -5926,7 +6060,7 @@
           <p:cNvPr id="60" name="timeline-bar-6">
             <a:extLst xmlns:a="http://schemas.openxmlformats.org/drawingml/2006/main">
               <a:ext uri="{FF2B5EF4-FFF2-40B4-BE49-F238E27FC236}">
-                <a16:creationId xmlns:a16="http://schemas.microsoft.com/office/drawing/2014/main" id="{38EB7C6D-BC0C-4179-ADF7-15EBF4A8CB42}"/>
+                <a16:creationId xmlns:a16="http://schemas.microsoft.com/office/drawing/2014/main" id="{37481FE2-B7A6-49DD-98AF-D62AC2F35E0D}"/>
               </a:ext>
             </a:extLst>
           </p:cNvPr>
@@ -5959,7 +6093,7 @@
           <p:cNvPr id="61" name="timeline-month-6">
             <a:extLst xmlns:a="http://schemas.openxmlformats.org/drawingml/2006/main">
               <a:ext uri="{FF2B5EF4-FFF2-40B4-BE49-F238E27FC236}">
-                <a16:creationId xmlns:a16="http://schemas.microsoft.com/office/drawing/2014/main" id="{3406176A-40B7-4A4F-8DA0-29A711F41D68}"/>
+                <a16:creationId xmlns:a16="http://schemas.microsoft.com/office/drawing/2014/main" id="{1E951D0B-58C9-4187-A0C0-2B74FE300FC1}"/>
               </a:ext>
             </a:extLst>
           </p:cNvPr>
@@ -6009,7 +6143,7 @@
           <p:cNvPr id="62" name="timeline-title-6">
             <a:extLst xmlns:a="http://schemas.openxmlformats.org/drawingml/2006/main">
               <a:ext uri="{FF2B5EF4-FFF2-40B4-BE49-F238E27FC236}">
-                <a16:creationId xmlns:a16="http://schemas.microsoft.com/office/drawing/2014/main" id="{F8B50DD9-E9C0-404B-AB7A-A60BA1C8EC6B}"/>
+                <a16:creationId xmlns:a16="http://schemas.microsoft.com/office/drawing/2014/main" id="{83AC6351-33BB-4670-8DFC-0BA4790035AE}"/>
               </a:ext>
             </a:extLst>
           </p:cNvPr>
@@ -6059,7 +6193,7 @@
           <p:cNvPr id="63" name="timeline-dot-6-1">
             <a:extLst xmlns:a="http://schemas.openxmlformats.org/drawingml/2006/main">
               <a:ext uri="{FF2B5EF4-FFF2-40B4-BE49-F238E27FC236}">
-                <a16:creationId xmlns:a16="http://schemas.microsoft.com/office/drawing/2014/main" id="{83F7F17E-DFF5-4602-A433-7EC80410F6D4}"/>
+                <a16:creationId xmlns:a16="http://schemas.microsoft.com/office/drawing/2014/main" id="{3A5187EB-BED7-4AB1-B5A4-DCC62B69533E}"/>
               </a:ext>
             </a:extLst>
           </p:cNvPr>
@@ -6109,7 +6243,7 @@
           <p:cNvPr id="64" name="timeline-item-6-1">
             <a:extLst xmlns:a="http://schemas.openxmlformats.org/drawingml/2006/main">
               <a:ext uri="{FF2B5EF4-FFF2-40B4-BE49-F238E27FC236}">
-                <a16:creationId xmlns:a16="http://schemas.microsoft.com/office/drawing/2014/main" id="{CF434223-636B-4CFF-BBF6-B4A450BFD78C}"/>
+                <a16:creationId xmlns:a16="http://schemas.microsoft.com/office/drawing/2014/main" id="{1C1654EC-7832-49EC-A91B-04B44C74F216}"/>
               </a:ext>
             </a:extLst>
           </p:cNvPr>
@@ -6159,7 +6293,7 @@
           <p:cNvPr id="65" name="timeline-dot-6-2">
             <a:extLst xmlns:a="http://schemas.openxmlformats.org/drawingml/2006/main">
               <a:ext uri="{FF2B5EF4-FFF2-40B4-BE49-F238E27FC236}">
-                <a16:creationId xmlns:a16="http://schemas.microsoft.com/office/drawing/2014/main" id="{E5F42866-D2C3-4A9C-909E-4CD3FFA45FBB}"/>
+                <a16:creationId xmlns:a16="http://schemas.microsoft.com/office/drawing/2014/main" id="{786AE07F-CCB9-403C-8BD9-DCC1B5A98FD6}"/>
               </a:ext>
             </a:extLst>
           </p:cNvPr>
@@ -6209,7 +6343,7 @@
           <p:cNvPr id="66" name="timeline-item-6-2">
             <a:extLst xmlns:a="http://schemas.openxmlformats.org/drawingml/2006/main">
               <a:ext uri="{FF2B5EF4-FFF2-40B4-BE49-F238E27FC236}">
-                <a16:creationId xmlns:a16="http://schemas.microsoft.com/office/drawing/2014/main" id="{444BF3D4-9B1D-486F-BF7E-3ACDE7EED7B8}"/>
+                <a16:creationId xmlns:a16="http://schemas.microsoft.com/office/drawing/2014/main" id="{0405E25A-DD0A-4F8D-9F53-E15DFB1B3A80}"/>
               </a:ext>
             </a:extLst>
           </p:cNvPr>
@@ -6259,7 +6393,7 @@
           <p:cNvPr id="67" name="timeline-dot-6-3">
             <a:extLst xmlns:a="http://schemas.openxmlformats.org/drawingml/2006/main">
               <a:ext uri="{FF2B5EF4-FFF2-40B4-BE49-F238E27FC236}">
-                <a16:creationId xmlns:a16="http://schemas.microsoft.com/office/drawing/2014/main" id="{49B73551-D3AD-469F-837F-9F061FB7C950}"/>
+                <a16:creationId xmlns:a16="http://schemas.microsoft.com/office/drawing/2014/main" id="{ED21E156-9534-429A-B2DC-A47D925C5751}"/>
               </a:ext>
             </a:extLst>
           </p:cNvPr>
@@ -6309,7 +6443,7 @@
           <p:cNvPr id="68" name="timeline-item-6-3">
             <a:extLst xmlns:a="http://schemas.openxmlformats.org/drawingml/2006/main">
               <a:ext uri="{FF2B5EF4-FFF2-40B4-BE49-F238E27FC236}">
-                <a16:creationId xmlns:a16="http://schemas.microsoft.com/office/drawing/2014/main" id="{01D074BC-7C5F-4480-8E3B-478348A888D0}"/>
+                <a16:creationId xmlns:a16="http://schemas.microsoft.com/office/drawing/2014/main" id="{86F6EEC1-EEDE-4E6F-8778-CBAD78A079FC}"/>
               </a:ext>
             </a:extLst>
           </p:cNvPr>
@@ -6359,7 +6493,7 @@
           <p:cNvPr id="69" name="management-title">
             <a:extLst xmlns:a="http://schemas.openxmlformats.org/drawingml/2006/main">
               <a:ext uri="{FF2B5EF4-FFF2-40B4-BE49-F238E27FC236}">
-                <a16:creationId xmlns:a16="http://schemas.microsoft.com/office/drawing/2014/main" id="{81FD49B8-6E8B-4979-A9A3-BBDB8F8FDF5B}"/>
+                <a16:creationId xmlns:a16="http://schemas.microsoft.com/office/drawing/2014/main" id="{13BDE2D4-63D5-49FC-B091-CCE6C4505AD5}"/>
               </a:ext>
             </a:extLst>
           </p:cNvPr>
@@ -6409,7 +6543,7 @@
           <p:cNvPr id="70" name="management-note">
             <a:extLst xmlns:a="http://schemas.openxmlformats.org/drawingml/2006/main">
               <a:ext uri="{FF2B5EF4-FFF2-40B4-BE49-F238E27FC236}">
-                <a16:creationId xmlns:a16="http://schemas.microsoft.com/office/drawing/2014/main" id="{F2BF0368-45DB-4324-810D-9BB1807276F6}"/>
+                <a16:creationId xmlns:a16="http://schemas.microsoft.com/office/drawing/2014/main" id="{C2B6ECB1-B257-4BCE-A5DB-06F305300AB1}"/>
               </a:ext>
             </a:extLst>
           </p:cNvPr>
@@ -6459,7 +6593,7 @@
           <p:cNvPr id="71" name="mgmt-card-1">
             <a:extLst xmlns:a="http://schemas.openxmlformats.org/drawingml/2006/main">
               <a:ext uri="{FF2B5EF4-FFF2-40B4-BE49-F238E27FC236}">
-                <a16:creationId xmlns:a16="http://schemas.microsoft.com/office/drawing/2014/main" id="{214330EA-8D20-4A58-BF4D-9198743EA625}"/>
+                <a16:creationId xmlns:a16="http://schemas.microsoft.com/office/drawing/2014/main" id="{7D5318CC-4E0B-462B-9190-3BEA38DF3428}"/>
               </a:ext>
             </a:extLst>
           </p:cNvPr>
@@ -6494,7 +6628,7 @@
           <p:cNvPr id="72" name="mgmt-bar-1">
             <a:extLst xmlns:a="http://schemas.openxmlformats.org/drawingml/2006/main">
               <a:ext uri="{FF2B5EF4-FFF2-40B4-BE49-F238E27FC236}">
-                <a16:creationId xmlns:a16="http://schemas.microsoft.com/office/drawing/2014/main" id="{5B12E241-16BC-4C4F-8FE8-A9FDEF3074EC}"/>
+                <a16:creationId xmlns:a16="http://schemas.microsoft.com/office/drawing/2014/main" id="{63A63332-0B50-4FDE-B821-2671829D7B84}"/>
               </a:ext>
             </a:extLst>
           </p:cNvPr>
@@ -6527,7 +6661,7 @@
           <p:cNvPr id="73" name="mgmt-label-1">
             <a:extLst xmlns:a="http://schemas.openxmlformats.org/drawingml/2006/main">
               <a:ext uri="{FF2B5EF4-FFF2-40B4-BE49-F238E27FC236}">
-                <a16:creationId xmlns:a16="http://schemas.microsoft.com/office/drawing/2014/main" id="{F42E2ECB-244E-40D9-BF5D-EFDD728C65B3}"/>
+                <a16:creationId xmlns:a16="http://schemas.microsoft.com/office/drawing/2014/main" id="{8DBDC134-34B6-4D51-AB77-35C8A5A32FC3}"/>
               </a:ext>
             </a:extLst>
           </p:cNvPr>
@@ -6577,7 +6711,7 @@
           <p:cNvPr id="74" name="mgmt-body-1">
             <a:extLst xmlns:a="http://schemas.openxmlformats.org/drawingml/2006/main">
               <a:ext uri="{FF2B5EF4-FFF2-40B4-BE49-F238E27FC236}">
-                <a16:creationId xmlns:a16="http://schemas.microsoft.com/office/drawing/2014/main" id="{52794ABA-1CCD-4D6F-A11C-58F1F7B37F62}"/>
+                <a16:creationId xmlns:a16="http://schemas.microsoft.com/office/drawing/2014/main" id="{ABD32344-090E-49C0-8B07-BEE7B478369E}"/>
               </a:ext>
             </a:extLst>
           </p:cNvPr>
@@ -6627,7 +6761,7 @@
           <p:cNvPr id="75" name="mgmt-card-2">
             <a:extLst xmlns:a="http://schemas.openxmlformats.org/drawingml/2006/main">
               <a:ext uri="{FF2B5EF4-FFF2-40B4-BE49-F238E27FC236}">
-                <a16:creationId xmlns:a16="http://schemas.microsoft.com/office/drawing/2014/main" id="{DA3EF0D6-CFA6-4C8F-8D14-652F84BFCE92}"/>
+                <a16:creationId xmlns:a16="http://schemas.microsoft.com/office/drawing/2014/main" id="{725417DA-AA26-4E0E-A92F-E8ECE17B2E89}"/>
               </a:ext>
             </a:extLst>
           </p:cNvPr>
@@ -6662,7 +6796,7 @@
           <p:cNvPr id="76" name="mgmt-bar-2">
             <a:extLst xmlns:a="http://schemas.openxmlformats.org/drawingml/2006/main">
               <a:ext uri="{FF2B5EF4-FFF2-40B4-BE49-F238E27FC236}">
-                <a16:creationId xmlns:a16="http://schemas.microsoft.com/office/drawing/2014/main" id="{ECCCCFB0-304F-4563-9A03-0FA192DAD55F}"/>
+                <a16:creationId xmlns:a16="http://schemas.microsoft.com/office/drawing/2014/main" id="{A83136FC-189F-4A72-97CD-BEE985BF4722}"/>
               </a:ext>
             </a:extLst>
           </p:cNvPr>
@@ -6695,7 +6829,7 @@
           <p:cNvPr id="77" name="mgmt-label-2">
             <a:extLst xmlns:a="http://schemas.openxmlformats.org/drawingml/2006/main">
               <a:ext uri="{FF2B5EF4-FFF2-40B4-BE49-F238E27FC236}">
-                <a16:creationId xmlns:a16="http://schemas.microsoft.com/office/drawing/2014/main" id="{9380BBCB-6962-42AD-A88A-19303B09C6ED}"/>
+                <a16:creationId xmlns:a16="http://schemas.microsoft.com/office/drawing/2014/main" id="{4F4DF249-8755-4DF2-845E-362D75FC1BC0}"/>
               </a:ext>
             </a:extLst>
           </p:cNvPr>
@@ -6745,7 +6879,7 @@
           <p:cNvPr id="78" name="mgmt-body-2">
             <a:extLst xmlns:a="http://schemas.openxmlformats.org/drawingml/2006/main">
               <a:ext uri="{FF2B5EF4-FFF2-40B4-BE49-F238E27FC236}">
-                <a16:creationId xmlns:a16="http://schemas.microsoft.com/office/drawing/2014/main" id="{8D40C479-AE52-4CD2-BDFE-E9B3F5B8C24D}"/>
+                <a16:creationId xmlns:a16="http://schemas.microsoft.com/office/drawing/2014/main" id="{AC6E90F0-6527-4973-93D3-6DDC76904C81}"/>
               </a:ext>
             </a:extLst>
           </p:cNvPr>
@@ -6795,7 +6929,7 @@
           <p:cNvPr id="79" name="mgmt-card-3">
             <a:extLst xmlns:a="http://schemas.openxmlformats.org/drawingml/2006/main">
               <a:ext uri="{FF2B5EF4-FFF2-40B4-BE49-F238E27FC236}">
-                <a16:creationId xmlns:a16="http://schemas.microsoft.com/office/drawing/2014/main" id="{40D50289-9EB1-4105-BE93-AA937C0AE794}"/>
+                <a16:creationId xmlns:a16="http://schemas.microsoft.com/office/drawing/2014/main" id="{53EF7DD4-9853-4A93-A1FF-D8B0717DE98A}"/>
               </a:ext>
             </a:extLst>
           </p:cNvPr>
@@ -6830,7 +6964,7 @@
           <p:cNvPr id="80" name="mgmt-bar-3">
             <a:extLst xmlns:a="http://schemas.openxmlformats.org/drawingml/2006/main">
               <a:ext uri="{FF2B5EF4-FFF2-40B4-BE49-F238E27FC236}">
-                <a16:creationId xmlns:a16="http://schemas.microsoft.com/office/drawing/2014/main" id="{2C605BFE-34C6-4383-87B8-F42DD2B305D8}"/>
+                <a16:creationId xmlns:a16="http://schemas.microsoft.com/office/drawing/2014/main" id="{4EDC733E-7981-4A18-8A2B-8B23AA286343}"/>
               </a:ext>
             </a:extLst>
           </p:cNvPr>
@@ -6863,7 +6997,7 @@
           <p:cNvPr id="81" name="mgmt-label-3">
             <a:extLst xmlns:a="http://schemas.openxmlformats.org/drawingml/2006/main">
               <a:ext uri="{FF2B5EF4-FFF2-40B4-BE49-F238E27FC236}">
-                <a16:creationId xmlns:a16="http://schemas.microsoft.com/office/drawing/2014/main" id="{08476F31-B075-4AE3-B056-2214BF85E904}"/>
+                <a16:creationId xmlns:a16="http://schemas.microsoft.com/office/drawing/2014/main" id="{84008BF1-CCE8-4C99-BEF7-622BA4DE9935}"/>
               </a:ext>
             </a:extLst>
           </p:cNvPr>
@@ -6913,7 +7047,7 @@
           <p:cNvPr id="82" name="mgmt-body-3">
             <a:extLst xmlns:a="http://schemas.openxmlformats.org/drawingml/2006/main">
               <a:ext uri="{FF2B5EF4-FFF2-40B4-BE49-F238E27FC236}">
-                <a16:creationId xmlns:a16="http://schemas.microsoft.com/office/drawing/2014/main" id="{FDB9E9C8-7650-4EE3-B203-C8A44ADA1DCF}"/>
+                <a16:creationId xmlns:a16="http://schemas.microsoft.com/office/drawing/2014/main" id="{C2D117AA-DB63-43E0-A6E3-391148ED4587}"/>
               </a:ext>
             </a:extLst>
           </p:cNvPr>
@@ -6963,7 +7097,7 @@
           <p:cNvPr id="83" name="mgmt-card-4">
             <a:extLst xmlns:a="http://schemas.openxmlformats.org/drawingml/2006/main">
               <a:ext uri="{FF2B5EF4-FFF2-40B4-BE49-F238E27FC236}">
-                <a16:creationId xmlns:a16="http://schemas.microsoft.com/office/drawing/2014/main" id="{FC84B524-684F-4CBF-9CB6-68EBC400B8CA}"/>
+                <a16:creationId xmlns:a16="http://schemas.microsoft.com/office/drawing/2014/main" id="{6BE774E0-5A41-475A-AB03-5BA2AAE5E0A6}"/>
               </a:ext>
             </a:extLst>
           </p:cNvPr>
@@ -6998,7 +7132,7 @@
           <p:cNvPr id="84" name="mgmt-bar-4">
             <a:extLst xmlns:a="http://schemas.openxmlformats.org/drawingml/2006/main">
               <a:ext uri="{FF2B5EF4-FFF2-40B4-BE49-F238E27FC236}">
-                <a16:creationId xmlns:a16="http://schemas.microsoft.com/office/drawing/2014/main" id="{2D9CF502-AB23-4BDB-95A2-7D528CB79A62}"/>
+                <a16:creationId xmlns:a16="http://schemas.microsoft.com/office/drawing/2014/main" id="{3ADF5BDC-E152-43AB-85DA-226F0CC4BBB4}"/>
               </a:ext>
             </a:extLst>
           </p:cNvPr>
@@ -7031,7 +7165,7 @@
           <p:cNvPr id="85" name="mgmt-label-4">
             <a:extLst xmlns:a="http://schemas.openxmlformats.org/drawingml/2006/main">
               <a:ext uri="{FF2B5EF4-FFF2-40B4-BE49-F238E27FC236}">
-                <a16:creationId xmlns:a16="http://schemas.microsoft.com/office/drawing/2014/main" id="{0121B710-2DF0-4BFD-9537-D7CBB0CB085D}"/>
+                <a16:creationId xmlns:a16="http://schemas.microsoft.com/office/drawing/2014/main" id="{5B06F7FB-DBEE-4E23-A6EE-40378932CED9}"/>
               </a:ext>
             </a:extLst>
           </p:cNvPr>
@@ -7081,7 +7215,7 @@
           <p:cNvPr id="86" name="mgmt-body-4">
             <a:extLst xmlns:a="http://schemas.openxmlformats.org/drawingml/2006/main">
               <a:ext uri="{FF2B5EF4-FFF2-40B4-BE49-F238E27FC236}">
-                <a16:creationId xmlns:a16="http://schemas.microsoft.com/office/drawing/2014/main" id="{202840B4-DCA8-4FBD-B5BD-1E29AE970E85}"/>
+                <a16:creationId xmlns:a16="http://schemas.microsoft.com/office/drawing/2014/main" id="{E970A9B4-FEDE-4AE6-8689-8C472030ECA3}"/>
               </a:ext>
             </a:extLst>
           </p:cNvPr>
@@ -7129,7 +7263,7 @@
     </p:spTree>
     <p:extLst>
       <p:ext uri="{BB962C8B-B14F-4D97-AF65-F5344CB8AC3E}">
-        <p14:creationId xmlns:p14="http://schemas.microsoft.com/office/powerpoint/2010/main" val="260725782"/>
+        <p14:creationId xmlns:p14="http://schemas.microsoft.com/office/powerpoint/2010/main" val="1555370533"/>
       </p:ext>
     </p:extLst>
   </p:cSld>
@@ -7160,7 +7294,7 @@
           <p:cNvPr id="1" name="top-accent">
             <a:extLst xmlns:a="http://schemas.openxmlformats.org/drawingml/2006/main">
               <a:ext uri="{FF2B5EF4-FFF2-40B4-BE49-F238E27FC236}">
-                <a16:creationId xmlns:a16="http://schemas.microsoft.com/office/drawing/2014/main" id="{3EB7BB60-A81A-4221-BFAA-856A7B5822B7}"/>
+                <a16:creationId xmlns:a16="http://schemas.microsoft.com/office/drawing/2014/main" id="{CB24658F-C70B-44A8-9E02-BD77665E1D29}"/>
               </a:ext>
             </a:extLst>
           </p:cNvPr>
@@ -7193,7 +7327,7 @@
           <p:cNvPr id="2" name="left-accent">
             <a:extLst xmlns:a="http://schemas.openxmlformats.org/drawingml/2006/main">
               <a:ext uri="{FF2B5EF4-FFF2-40B4-BE49-F238E27FC236}">
-                <a16:creationId xmlns:a16="http://schemas.microsoft.com/office/drawing/2014/main" id="{857E7642-8C6F-4856-9A76-EDB1D51067FD}"/>
+                <a16:creationId xmlns:a16="http://schemas.microsoft.com/office/drawing/2014/main" id="{3F9C8118-88AD-4D84-BF8E-5A9F3BA3DD7E}"/>
               </a:ext>
             </a:extLst>
           </p:cNvPr>
@@ -7226,7 +7360,7 @@
           <p:cNvPr id="3" name="eyebrow">
             <a:extLst xmlns:a="http://schemas.openxmlformats.org/drawingml/2006/main">
               <a:ext uri="{FF2B5EF4-FFF2-40B4-BE49-F238E27FC236}">
-                <a16:creationId xmlns:a16="http://schemas.microsoft.com/office/drawing/2014/main" id="{8C239429-1459-4355-A120-9AC580184E99}"/>
+                <a16:creationId xmlns:a16="http://schemas.microsoft.com/office/drawing/2014/main" id="{37F9D1F7-C1AF-4B2D-844C-ECD95D7A41ED}"/>
               </a:ext>
             </a:extLst>
           </p:cNvPr>
@@ -7276,7 +7410,7 @@
           <p:cNvPr id="4" name="footer">
             <a:extLst xmlns:a="http://schemas.openxmlformats.org/drawingml/2006/main">
               <a:ext uri="{FF2B5EF4-FFF2-40B4-BE49-F238E27FC236}">
-                <a16:creationId xmlns:a16="http://schemas.microsoft.com/office/drawing/2014/main" id="{F87AAE41-6BE4-4EAD-B114-B0363D01BDD8}"/>
+                <a16:creationId xmlns:a16="http://schemas.microsoft.com/office/drawing/2014/main" id="{2BA45D33-C0EC-4B60-BB1B-6E22BC659229}"/>
               </a:ext>
             </a:extLst>
           </p:cNvPr>
@@ -7326,7 +7460,7 @@
           <p:cNvPr id="5" name="page-no">
             <a:extLst xmlns:a="http://schemas.openxmlformats.org/drawingml/2006/main">
               <a:ext uri="{FF2B5EF4-FFF2-40B4-BE49-F238E27FC236}">
-                <a16:creationId xmlns:a16="http://schemas.microsoft.com/office/drawing/2014/main" id="{0192D806-A68B-450E-AF46-A519864A6638}"/>
+                <a16:creationId xmlns:a16="http://schemas.microsoft.com/office/drawing/2014/main" id="{7C9EE60D-91D0-4918-8C10-6F763C5BEABB}"/>
               </a:ext>
             </a:extLst>
           </p:cNvPr>
@@ -7376,7 +7510,7 @@
           <p:cNvPr id="6" name="title-03">
             <a:extLst xmlns:a="http://schemas.openxmlformats.org/drawingml/2006/main">
               <a:ext uri="{FF2B5EF4-FFF2-40B4-BE49-F238E27FC236}">
-                <a16:creationId xmlns:a16="http://schemas.microsoft.com/office/drawing/2014/main" id="{400FF3BB-E8B4-4B4B-917D-E56A14F44F83}"/>
+                <a16:creationId xmlns:a16="http://schemas.microsoft.com/office/drawing/2014/main" id="{C92B21C0-88A5-4DD1-8407-54CE4D60FEA1}"/>
               </a:ext>
             </a:extLst>
           </p:cNvPr>
@@ -7426,7 +7560,7 @@
           <p:cNvPr id="7" name="subtitle-03">
             <a:extLst xmlns:a="http://schemas.openxmlformats.org/drawingml/2006/main">
               <a:ext uri="{FF2B5EF4-FFF2-40B4-BE49-F238E27FC236}">
-                <a16:creationId xmlns:a16="http://schemas.microsoft.com/office/drawing/2014/main" id="{FFCF6FD9-A654-471F-8086-0D62B0336EEA}"/>
+                <a16:creationId xmlns:a16="http://schemas.microsoft.com/office/drawing/2014/main" id="{17E9BE4E-6F1D-4C6B-98C2-F34E6B968DBF}"/>
               </a:ext>
             </a:extLst>
           </p:cNvPr>
@@ -7476,7 +7610,7 @@
           <p:cNvPr id="8" name="gate-section-title">
             <a:extLst xmlns:a="http://schemas.openxmlformats.org/drawingml/2006/main">
               <a:ext uri="{FF2B5EF4-FFF2-40B4-BE49-F238E27FC236}">
-                <a16:creationId xmlns:a16="http://schemas.microsoft.com/office/drawing/2014/main" id="{25C9F0AE-3359-4748-A3D9-B5E334B1A028}"/>
+                <a16:creationId xmlns:a16="http://schemas.microsoft.com/office/drawing/2014/main" id="{89EEDE1B-C597-4A2C-A0D0-436DBA6B7AB8}"/>
               </a:ext>
             </a:extLst>
           </p:cNvPr>
@@ -7526,7 +7660,7 @@
           <p:cNvPr id="9" name="gate-card-1">
             <a:extLst xmlns:a="http://schemas.openxmlformats.org/drawingml/2006/main">
               <a:ext uri="{FF2B5EF4-FFF2-40B4-BE49-F238E27FC236}">
-                <a16:creationId xmlns:a16="http://schemas.microsoft.com/office/drawing/2014/main" id="{777B3A21-3CB8-4DC1-91DD-DC22CED55E10}"/>
+                <a16:creationId xmlns:a16="http://schemas.microsoft.com/office/drawing/2014/main" id="{C4639DF8-DC5D-443A-A686-52D13A8EF992}"/>
               </a:ext>
             </a:extLst>
           </p:cNvPr>
@@ -7561,7 +7695,7 @@
           <p:cNvPr id="10" name="gate-bar-1">
             <a:extLst xmlns:a="http://schemas.openxmlformats.org/drawingml/2006/main">
               <a:ext uri="{FF2B5EF4-FFF2-40B4-BE49-F238E27FC236}">
-                <a16:creationId xmlns:a16="http://schemas.microsoft.com/office/drawing/2014/main" id="{4E207772-F4D0-4C99-87CD-3516997E8BFE}"/>
+                <a16:creationId xmlns:a16="http://schemas.microsoft.com/office/drawing/2014/main" id="{99E52605-60D1-4AF5-8E47-731E6629A82E}"/>
               </a:ext>
             </a:extLst>
           </p:cNvPr>
@@ -7594,7 +7728,7 @@
           <p:cNvPr id="11" name="gate-phase-1">
             <a:extLst xmlns:a="http://schemas.openxmlformats.org/drawingml/2006/main">
               <a:ext uri="{FF2B5EF4-FFF2-40B4-BE49-F238E27FC236}">
-                <a16:creationId xmlns:a16="http://schemas.microsoft.com/office/drawing/2014/main" id="{3EC8A907-0B52-4D17-841D-AB36FEDE415E}"/>
+                <a16:creationId xmlns:a16="http://schemas.microsoft.com/office/drawing/2014/main" id="{75E3F072-2541-4A87-ADF2-FB4AB0BD92B9}"/>
               </a:ext>
             </a:extLst>
           </p:cNvPr>
@@ -7644,7 +7778,7 @@
           <p:cNvPr id="12" name="gate-title-1">
             <a:extLst xmlns:a="http://schemas.openxmlformats.org/drawingml/2006/main">
               <a:ext uri="{FF2B5EF4-FFF2-40B4-BE49-F238E27FC236}">
-                <a16:creationId xmlns:a16="http://schemas.microsoft.com/office/drawing/2014/main" id="{F42D4286-B71C-449F-B843-1C6AB38AB5DF}"/>
+                <a16:creationId xmlns:a16="http://schemas.microsoft.com/office/drawing/2014/main" id="{F8873DC4-0D8D-4F7A-A3C4-31ECB47F435F}"/>
               </a:ext>
             </a:extLst>
           </p:cNvPr>
@@ -7694,7 +7828,7 @@
           <p:cNvPr id="13" name="gate-body-1">
             <a:extLst xmlns:a="http://schemas.openxmlformats.org/drawingml/2006/main">
               <a:ext uri="{FF2B5EF4-FFF2-40B4-BE49-F238E27FC236}">
-                <a16:creationId xmlns:a16="http://schemas.microsoft.com/office/drawing/2014/main" id="{D26BF611-48EB-4465-850B-46149BAB3CDF}"/>
+                <a16:creationId xmlns:a16="http://schemas.microsoft.com/office/drawing/2014/main" id="{EE403EFC-91CC-416A-AD4F-024E16ED9A01}"/>
               </a:ext>
             </a:extLst>
           </p:cNvPr>
@@ -7744,7 +7878,7 @@
           <p:cNvPr id="14" name="gate-card-2">
             <a:extLst xmlns:a="http://schemas.openxmlformats.org/drawingml/2006/main">
               <a:ext uri="{FF2B5EF4-FFF2-40B4-BE49-F238E27FC236}">
-                <a16:creationId xmlns:a16="http://schemas.microsoft.com/office/drawing/2014/main" id="{AE9E34CF-3C33-4346-86F5-F484F381D114}"/>
+                <a16:creationId xmlns:a16="http://schemas.microsoft.com/office/drawing/2014/main" id="{01B8BEF5-376A-4B1C-B6DD-6CC54757C4CB}"/>
               </a:ext>
             </a:extLst>
           </p:cNvPr>
@@ -7779,7 +7913,7 @@
           <p:cNvPr id="15" name="gate-bar-2">
             <a:extLst xmlns:a="http://schemas.openxmlformats.org/drawingml/2006/main">
               <a:ext uri="{FF2B5EF4-FFF2-40B4-BE49-F238E27FC236}">
-                <a16:creationId xmlns:a16="http://schemas.microsoft.com/office/drawing/2014/main" id="{63D4C70D-0ADE-482A-B033-B79C4BB635A3}"/>
+                <a16:creationId xmlns:a16="http://schemas.microsoft.com/office/drawing/2014/main" id="{87232C18-FD1D-49C9-A21B-75BA092F9C0F}"/>
               </a:ext>
             </a:extLst>
           </p:cNvPr>
@@ -7812,7 +7946,7 @@
           <p:cNvPr id="16" name="gate-phase-2">
             <a:extLst xmlns:a="http://schemas.openxmlformats.org/drawingml/2006/main">
               <a:ext uri="{FF2B5EF4-FFF2-40B4-BE49-F238E27FC236}">
-                <a16:creationId xmlns:a16="http://schemas.microsoft.com/office/drawing/2014/main" id="{B62AB49F-1D11-4D70-92BF-2B061CF8FA45}"/>
+                <a16:creationId xmlns:a16="http://schemas.microsoft.com/office/drawing/2014/main" id="{558913B4-44D7-4242-B9E8-A3C01D27F4E9}"/>
               </a:ext>
             </a:extLst>
           </p:cNvPr>
@@ -7862,7 +7996,7 @@
           <p:cNvPr id="17" name="gate-title-2">
             <a:extLst xmlns:a="http://schemas.openxmlformats.org/drawingml/2006/main">
               <a:ext uri="{FF2B5EF4-FFF2-40B4-BE49-F238E27FC236}">
-                <a16:creationId xmlns:a16="http://schemas.microsoft.com/office/drawing/2014/main" id="{0A57A3EF-2428-4F6F-BC17-4168736382D5}"/>
+                <a16:creationId xmlns:a16="http://schemas.microsoft.com/office/drawing/2014/main" id="{B92A1B5C-7393-465D-BB1C-186738EBD293}"/>
               </a:ext>
             </a:extLst>
           </p:cNvPr>
@@ -7912,7 +8046,7 @@
           <p:cNvPr id="18" name="gate-body-2">
             <a:extLst xmlns:a="http://schemas.openxmlformats.org/drawingml/2006/main">
               <a:ext uri="{FF2B5EF4-FFF2-40B4-BE49-F238E27FC236}">
-                <a16:creationId xmlns:a16="http://schemas.microsoft.com/office/drawing/2014/main" id="{7E89D2E4-89B8-45AD-94F2-22D33DF6C848}"/>
+                <a16:creationId xmlns:a16="http://schemas.microsoft.com/office/drawing/2014/main" id="{C496CA57-D8AE-4DEE-BA4F-B15E18A23578}"/>
               </a:ext>
             </a:extLst>
           </p:cNvPr>
@@ -7962,7 +8096,7 @@
           <p:cNvPr id="19" name="gate-card-3">
             <a:extLst xmlns:a="http://schemas.openxmlformats.org/drawingml/2006/main">
               <a:ext uri="{FF2B5EF4-FFF2-40B4-BE49-F238E27FC236}">
-                <a16:creationId xmlns:a16="http://schemas.microsoft.com/office/drawing/2014/main" id="{1A6B040D-2F1D-48C0-8F8A-D747FF0B5062}"/>
+                <a16:creationId xmlns:a16="http://schemas.microsoft.com/office/drawing/2014/main" id="{B397FFF9-375D-4064-9091-604BEF927D12}"/>
               </a:ext>
             </a:extLst>
           </p:cNvPr>
@@ -7997,7 +8131,7 @@
           <p:cNvPr id="20" name="gate-bar-3">
             <a:extLst xmlns:a="http://schemas.openxmlformats.org/drawingml/2006/main">
               <a:ext uri="{FF2B5EF4-FFF2-40B4-BE49-F238E27FC236}">
-                <a16:creationId xmlns:a16="http://schemas.microsoft.com/office/drawing/2014/main" id="{C26EB7B0-6A96-44C6-B725-5F95E5E83A5B}"/>
+                <a16:creationId xmlns:a16="http://schemas.microsoft.com/office/drawing/2014/main" id="{3ED5AB73-683A-49BF-9937-89CE512145C5}"/>
               </a:ext>
             </a:extLst>
           </p:cNvPr>
@@ -8030,7 +8164,7 @@
           <p:cNvPr id="21" name="gate-phase-3">
             <a:extLst xmlns:a="http://schemas.openxmlformats.org/drawingml/2006/main">
               <a:ext uri="{FF2B5EF4-FFF2-40B4-BE49-F238E27FC236}">
-                <a16:creationId xmlns:a16="http://schemas.microsoft.com/office/drawing/2014/main" id="{581CC93B-D294-4E54-A343-5A62810EB5F3}"/>
+                <a16:creationId xmlns:a16="http://schemas.microsoft.com/office/drawing/2014/main" id="{C6FBC27B-B5A0-41A5-ACA6-3D50BEB56FCC}"/>
               </a:ext>
             </a:extLst>
           </p:cNvPr>
@@ -8080,7 +8214,7 @@
           <p:cNvPr id="22" name="gate-title-3">
             <a:extLst xmlns:a="http://schemas.openxmlformats.org/drawingml/2006/main">
               <a:ext uri="{FF2B5EF4-FFF2-40B4-BE49-F238E27FC236}">
-                <a16:creationId xmlns:a16="http://schemas.microsoft.com/office/drawing/2014/main" id="{FC4C5FEA-83E8-4A41-A89C-0A6AF97654B8}"/>
+                <a16:creationId xmlns:a16="http://schemas.microsoft.com/office/drawing/2014/main" id="{30304D02-0E2A-48C5-86BF-E1524EEC42D8}"/>
               </a:ext>
             </a:extLst>
           </p:cNvPr>
@@ -8130,7 +8264,7 @@
           <p:cNvPr id="23" name="gate-body-3">
             <a:extLst xmlns:a="http://schemas.openxmlformats.org/drawingml/2006/main">
               <a:ext uri="{FF2B5EF4-FFF2-40B4-BE49-F238E27FC236}">
-                <a16:creationId xmlns:a16="http://schemas.microsoft.com/office/drawing/2014/main" id="{BDD61952-2842-4629-A9A9-9BB996A7E707}"/>
+                <a16:creationId xmlns:a16="http://schemas.microsoft.com/office/drawing/2014/main" id="{AD1A3E39-0C94-4683-8EA5-328042409E7C}"/>
               </a:ext>
             </a:extLst>
           </p:cNvPr>
@@ -8180,7 +8314,7 @@
           <p:cNvPr id="24" name="decision-title">
             <a:extLst xmlns:a="http://schemas.openxmlformats.org/drawingml/2006/main">
               <a:ext uri="{FF2B5EF4-FFF2-40B4-BE49-F238E27FC236}">
-                <a16:creationId xmlns:a16="http://schemas.microsoft.com/office/drawing/2014/main" id="{6EFC0A1C-F1B5-443B-81ED-F3E7A6212B5B}"/>
+                <a16:creationId xmlns:a16="http://schemas.microsoft.com/office/drawing/2014/main" id="{845C6101-F11F-4092-9FB3-1AC087C2F9DB}"/>
               </a:ext>
             </a:extLst>
           </p:cNvPr>
@@ -8230,7 +8364,7 @@
           <p:cNvPr id="25" name="decision-note">
             <a:extLst xmlns:a="http://schemas.openxmlformats.org/drawingml/2006/main">
               <a:ext uri="{FF2B5EF4-FFF2-40B4-BE49-F238E27FC236}">
-                <a16:creationId xmlns:a16="http://schemas.microsoft.com/office/drawing/2014/main" id="{8E7E10EE-8412-4C41-9548-5028061E59B7}"/>
+                <a16:creationId xmlns:a16="http://schemas.microsoft.com/office/drawing/2014/main" id="{32F0E363-5098-4C41-8E65-0FE3DD6432B9}"/>
               </a:ext>
             </a:extLst>
           </p:cNvPr>
@@ -8280,7 +8414,7 @@
           <p:cNvPr id="26" name="decision-header">
             <a:extLst xmlns:a="http://schemas.openxmlformats.org/drawingml/2006/main">
               <a:ext uri="{FF2B5EF4-FFF2-40B4-BE49-F238E27FC236}">
-                <a16:creationId xmlns:a16="http://schemas.microsoft.com/office/drawing/2014/main" id="{5A9DEEFA-748D-4FB6-A755-3DE04EC5D892}"/>
+                <a16:creationId xmlns:a16="http://schemas.microsoft.com/office/drawing/2014/main" id="{E3E863F3-C878-4A48-89C1-57AE5BA15878}"/>
               </a:ext>
             </a:extLst>
           </p:cNvPr>
@@ -8313,7 +8447,7 @@
           <p:cNvPr id="27" name="decision-th-1">
             <a:extLst xmlns:a="http://schemas.openxmlformats.org/drawingml/2006/main">
               <a:ext uri="{FF2B5EF4-FFF2-40B4-BE49-F238E27FC236}">
-                <a16:creationId xmlns:a16="http://schemas.microsoft.com/office/drawing/2014/main" id="{A505AA36-0942-4E43-A8F8-F469B3E60904}"/>
+                <a16:creationId xmlns:a16="http://schemas.microsoft.com/office/drawing/2014/main" id="{3279A369-A326-4450-9F94-B8D5AF27B9C2}"/>
               </a:ext>
             </a:extLst>
           </p:cNvPr>
@@ -8363,7 +8497,7 @@
           <p:cNvPr id="28" name="decision-th-2">
             <a:extLst xmlns:a="http://schemas.openxmlformats.org/drawingml/2006/main">
               <a:ext uri="{FF2B5EF4-FFF2-40B4-BE49-F238E27FC236}">
-                <a16:creationId xmlns:a16="http://schemas.microsoft.com/office/drawing/2014/main" id="{4637E029-5CFD-4253-B3A8-7FD1A37B91C8}"/>
+                <a16:creationId xmlns:a16="http://schemas.microsoft.com/office/drawing/2014/main" id="{8C2A1CD9-F59D-451E-8F58-F7AD23FCE8EA}"/>
               </a:ext>
             </a:extLst>
           </p:cNvPr>
@@ -8413,7 +8547,7 @@
           <p:cNvPr id="29" name="decision-th-3">
             <a:extLst xmlns:a="http://schemas.openxmlformats.org/drawingml/2006/main">
               <a:ext uri="{FF2B5EF4-FFF2-40B4-BE49-F238E27FC236}">
-                <a16:creationId xmlns:a16="http://schemas.microsoft.com/office/drawing/2014/main" id="{70E682DF-3770-401C-B16E-191F17249714}"/>
+                <a16:creationId xmlns:a16="http://schemas.microsoft.com/office/drawing/2014/main" id="{ED9A55B6-C2C7-43FF-A264-153DBA94209B}"/>
               </a:ext>
             </a:extLst>
           </p:cNvPr>
@@ -8463,7 +8597,7 @@
           <p:cNvPr id="30" name="decision-row-1">
             <a:extLst xmlns:a="http://schemas.openxmlformats.org/drawingml/2006/main">
               <a:ext uri="{FF2B5EF4-FFF2-40B4-BE49-F238E27FC236}">
-                <a16:creationId xmlns:a16="http://schemas.microsoft.com/office/drawing/2014/main" id="{5DCDC5A9-612F-4C52-B3C0-87B20D2A850C}"/>
+                <a16:creationId xmlns:a16="http://schemas.microsoft.com/office/drawing/2014/main" id="{0078B63F-8C94-48B6-B335-9798DB1A9AFC}"/>
               </a:ext>
             </a:extLst>
           </p:cNvPr>
@@ -8496,7 +8630,7 @@
           <p:cNvPr id="31" name="decision-item-1">
             <a:extLst xmlns:a="http://schemas.openxmlformats.org/drawingml/2006/main">
               <a:ext uri="{FF2B5EF4-FFF2-40B4-BE49-F238E27FC236}">
-                <a16:creationId xmlns:a16="http://schemas.microsoft.com/office/drawing/2014/main" id="{6783431C-648C-43B2-8080-806C043E79B8}"/>
+                <a16:creationId xmlns:a16="http://schemas.microsoft.com/office/drawing/2014/main" id="{02F3DB7A-6429-4A79-B205-DF6B6F9FD620}"/>
               </a:ext>
             </a:extLst>
           </p:cNvPr>
@@ -8546,7 +8680,7 @@
           <p:cNvPr id="32" name="decision-gate-1">
             <a:extLst xmlns:a="http://schemas.openxmlformats.org/drawingml/2006/main">
               <a:ext uri="{FF2B5EF4-FFF2-40B4-BE49-F238E27FC236}">
-                <a16:creationId xmlns:a16="http://schemas.microsoft.com/office/drawing/2014/main" id="{0578B333-7423-4D96-8DD6-4CB412EC15B0}"/>
+                <a16:creationId xmlns:a16="http://schemas.microsoft.com/office/drawing/2014/main" id="{37A93B14-9417-4F61-8F1A-F6AEE15F99E9}"/>
               </a:ext>
             </a:extLst>
           </p:cNvPr>
@@ -8596,7 +8730,7 @@
           <p:cNvPr id="33" name="decision-owner-1">
             <a:extLst xmlns:a="http://schemas.openxmlformats.org/drawingml/2006/main">
               <a:ext uri="{FF2B5EF4-FFF2-40B4-BE49-F238E27FC236}">
-                <a16:creationId xmlns:a16="http://schemas.microsoft.com/office/drawing/2014/main" id="{338EF0B4-274D-4D1D-B4DC-2DE25FCAE402}"/>
+                <a16:creationId xmlns:a16="http://schemas.microsoft.com/office/drawing/2014/main" id="{8B17E5CE-43F0-4367-B8ED-E300925CED57}"/>
               </a:ext>
             </a:extLst>
           </p:cNvPr>
@@ -8646,7 +8780,7 @@
           <p:cNvPr id="34" name="decision-row-2">
             <a:extLst xmlns:a="http://schemas.openxmlformats.org/drawingml/2006/main">
               <a:ext uri="{FF2B5EF4-FFF2-40B4-BE49-F238E27FC236}">
-                <a16:creationId xmlns:a16="http://schemas.microsoft.com/office/drawing/2014/main" id="{C8E36A90-677B-44C3-AA97-06A01AC73DA1}"/>
+                <a16:creationId xmlns:a16="http://schemas.microsoft.com/office/drawing/2014/main" id="{39AB7B13-5573-4176-A17A-240E02FCCAD5}"/>
               </a:ext>
             </a:extLst>
           </p:cNvPr>
@@ -8679,7 +8813,7 @@
           <p:cNvPr id="35" name="decision-item-2">
             <a:extLst xmlns:a="http://schemas.openxmlformats.org/drawingml/2006/main">
               <a:ext uri="{FF2B5EF4-FFF2-40B4-BE49-F238E27FC236}">
-                <a16:creationId xmlns:a16="http://schemas.microsoft.com/office/drawing/2014/main" id="{276669F5-8BB1-4538-A815-95960E7AC83A}"/>
+                <a16:creationId xmlns:a16="http://schemas.microsoft.com/office/drawing/2014/main" id="{3A06068D-32B5-4AA4-837D-76FD60F13F2D}"/>
               </a:ext>
             </a:extLst>
           </p:cNvPr>
@@ -8729,7 +8863,7 @@
           <p:cNvPr id="36" name="decision-gate-2">
             <a:extLst xmlns:a="http://schemas.openxmlformats.org/drawingml/2006/main">
               <a:ext uri="{FF2B5EF4-FFF2-40B4-BE49-F238E27FC236}">
-                <a16:creationId xmlns:a16="http://schemas.microsoft.com/office/drawing/2014/main" id="{30CF9AFA-FA2E-4CDD-8FED-932CC196DA2A}"/>
+                <a16:creationId xmlns:a16="http://schemas.microsoft.com/office/drawing/2014/main" id="{0784043E-7881-4034-95A7-CA63E0DFE5EC}"/>
               </a:ext>
             </a:extLst>
           </p:cNvPr>
@@ -8779,7 +8913,7 @@
           <p:cNvPr id="37" name="decision-owner-2">
             <a:extLst xmlns:a="http://schemas.openxmlformats.org/drawingml/2006/main">
               <a:ext uri="{FF2B5EF4-FFF2-40B4-BE49-F238E27FC236}">
-                <a16:creationId xmlns:a16="http://schemas.microsoft.com/office/drawing/2014/main" id="{6DAC7832-FB6C-4174-8953-41C19985F3C3}"/>
+                <a16:creationId xmlns:a16="http://schemas.microsoft.com/office/drawing/2014/main" id="{16080DEC-AF24-41C2-A791-A8D16EC172B4}"/>
               </a:ext>
             </a:extLst>
           </p:cNvPr>
@@ -8829,7 +8963,7 @@
           <p:cNvPr id="38" name="decision-row-3">
             <a:extLst xmlns:a="http://schemas.openxmlformats.org/drawingml/2006/main">
               <a:ext uri="{FF2B5EF4-FFF2-40B4-BE49-F238E27FC236}">
-                <a16:creationId xmlns:a16="http://schemas.microsoft.com/office/drawing/2014/main" id="{248F2F7F-3B06-417E-BC69-AD30E74515DB}"/>
+                <a16:creationId xmlns:a16="http://schemas.microsoft.com/office/drawing/2014/main" id="{88A1870A-6CAE-4B93-BF37-6527D3C67567}"/>
               </a:ext>
             </a:extLst>
           </p:cNvPr>
@@ -8862,7 +8996,7 @@
           <p:cNvPr id="39" name="decision-item-3">
             <a:extLst xmlns:a="http://schemas.openxmlformats.org/drawingml/2006/main">
               <a:ext uri="{FF2B5EF4-FFF2-40B4-BE49-F238E27FC236}">
-                <a16:creationId xmlns:a16="http://schemas.microsoft.com/office/drawing/2014/main" id="{530EA9C0-16E5-48C4-8F67-16E0E0EE7E91}"/>
+                <a16:creationId xmlns:a16="http://schemas.microsoft.com/office/drawing/2014/main" id="{DEABC419-63DE-4EB0-963D-F97FDDA17C7C}"/>
               </a:ext>
             </a:extLst>
           </p:cNvPr>
@@ -8912,7 +9046,7 @@
           <p:cNvPr id="40" name="decision-gate-3">
             <a:extLst xmlns:a="http://schemas.openxmlformats.org/drawingml/2006/main">
               <a:ext uri="{FF2B5EF4-FFF2-40B4-BE49-F238E27FC236}">
-                <a16:creationId xmlns:a16="http://schemas.microsoft.com/office/drawing/2014/main" id="{A1CF1751-1721-45C0-9C15-CA90830979B7}"/>
+                <a16:creationId xmlns:a16="http://schemas.microsoft.com/office/drawing/2014/main" id="{FB3F5876-5F9B-4017-A45C-6075B49AC060}"/>
               </a:ext>
             </a:extLst>
           </p:cNvPr>
@@ -8962,7 +9096,7 @@
           <p:cNvPr id="41" name="decision-owner-3">
             <a:extLst xmlns:a="http://schemas.openxmlformats.org/drawingml/2006/main">
               <a:ext uri="{FF2B5EF4-FFF2-40B4-BE49-F238E27FC236}">
-                <a16:creationId xmlns:a16="http://schemas.microsoft.com/office/drawing/2014/main" id="{37626D71-7F82-45E2-9449-6423B51BDC51}"/>
+                <a16:creationId xmlns:a16="http://schemas.microsoft.com/office/drawing/2014/main" id="{70E4539C-9C11-475E-81B8-4D59EE5BDE6C}"/>
               </a:ext>
             </a:extLst>
           </p:cNvPr>
@@ -9012,7 +9146,7 @@
           <p:cNvPr id="42" name="decision-row-4">
             <a:extLst xmlns:a="http://schemas.openxmlformats.org/drawingml/2006/main">
               <a:ext uri="{FF2B5EF4-FFF2-40B4-BE49-F238E27FC236}">
-                <a16:creationId xmlns:a16="http://schemas.microsoft.com/office/drawing/2014/main" id="{194EA436-81B0-46C4-AB60-A222572D5CFF}"/>
+                <a16:creationId xmlns:a16="http://schemas.microsoft.com/office/drawing/2014/main" id="{139C464C-B4F2-4F33-A8F9-A94FC2E67E83}"/>
               </a:ext>
             </a:extLst>
           </p:cNvPr>
@@ -9045,7 +9179,7 @@
           <p:cNvPr id="43" name="decision-item-4">
             <a:extLst xmlns:a="http://schemas.openxmlformats.org/drawingml/2006/main">
               <a:ext uri="{FF2B5EF4-FFF2-40B4-BE49-F238E27FC236}">
-                <a16:creationId xmlns:a16="http://schemas.microsoft.com/office/drawing/2014/main" id="{1CCE1734-81CB-4B4F-AE20-F153661D15D5}"/>
+                <a16:creationId xmlns:a16="http://schemas.microsoft.com/office/drawing/2014/main" id="{E37F0AE2-4661-4D29-98B3-B33AF9156391}"/>
               </a:ext>
             </a:extLst>
           </p:cNvPr>
@@ -9095,7 +9229,7 @@
           <p:cNvPr id="44" name="decision-gate-4">
             <a:extLst xmlns:a="http://schemas.openxmlformats.org/drawingml/2006/main">
               <a:ext uri="{FF2B5EF4-FFF2-40B4-BE49-F238E27FC236}">
-                <a16:creationId xmlns:a16="http://schemas.microsoft.com/office/drawing/2014/main" id="{76575866-2F77-4717-B3F0-62D65A102A6B}"/>
+                <a16:creationId xmlns:a16="http://schemas.microsoft.com/office/drawing/2014/main" id="{8494A5EA-EBF3-499D-A3FE-4F85097A97FB}"/>
               </a:ext>
             </a:extLst>
           </p:cNvPr>
@@ -9145,7 +9279,7 @@
           <p:cNvPr id="45" name="decision-owner-4">
             <a:extLst xmlns:a="http://schemas.openxmlformats.org/drawingml/2006/main">
               <a:ext uri="{FF2B5EF4-FFF2-40B4-BE49-F238E27FC236}">
-                <a16:creationId xmlns:a16="http://schemas.microsoft.com/office/drawing/2014/main" id="{B15E2F0D-A642-4366-A5A3-3EB73FB9DE33}"/>
+                <a16:creationId xmlns:a16="http://schemas.microsoft.com/office/drawing/2014/main" id="{4641D92C-5EA3-47E7-AFF1-4061CE0153B9}"/>
               </a:ext>
             </a:extLst>
           </p:cNvPr>
@@ -9195,7 +9329,7 @@
           <p:cNvPr id="46" name="decision-row-5">
             <a:extLst xmlns:a="http://schemas.openxmlformats.org/drawingml/2006/main">
               <a:ext uri="{FF2B5EF4-FFF2-40B4-BE49-F238E27FC236}">
-                <a16:creationId xmlns:a16="http://schemas.microsoft.com/office/drawing/2014/main" id="{32ABCF23-BBC8-4B04-9EEE-D3536755EE2E}"/>
+                <a16:creationId xmlns:a16="http://schemas.microsoft.com/office/drawing/2014/main" id="{94B3FB14-8819-4662-91EE-9D3EE6508272}"/>
               </a:ext>
             </a:extLst>
           </p:cNvPr>
@@ -9228,7 +9362,7 @@
           <p:cNvPr id="47" name="decision-item-5">
             <a:extLst xmlns:a="http://schemas.openxmlformats.org/drawingml/2006/main">
               <a:ext uri="{FF2B5EF4-FFF2-40B4-BE49-F238E27FC236}">
-                <a16:creationId xmlns:a16="http://schemas.microsoft.com/office/drawing/2014/main" id="{3F752D59-5BA9-4112-96F2-0F3977543531}"/>
+                <a16:creationId xmlns:a16="http://schemas.microsoft.com/office/drawing/2014/main" id="{A91CED1B-74DC-4207-A7A3-7822C80A2ED7}"/>
               </a:ext>
             </a:extLst>
           </p:cNvPr>
@@ -9278,7 +9412,7 @@
           <p:cNvPr id="48" name="decision-gate-5">
             <a:extLst xmlns:a="http://schemas.openxmlformats.org/drawingml/2006/main">
               <a:ext uri="{FF2B5EF4-FFF2-40B4-BE49-F238E27FC236}">
-                <a16:creationId xmlns:a16="http://schemas.microsoft.com/office/drawing/2014/main" id="{6374686F-E9DF-430D-B14B-3733572417C3}"/>
+                <a16:creationId xmlns:a16="http://schemas.microsoft.com/office/drawing/2014/main" id="{0D9A1F29-DE95-4630-90CF-44777E16D0E7}"/>
               </a:ext>
             </a:extLst>
           </p:cNvPr>
@@ -9328,7 +9462,7 @@
           <p:cNvPr id="49" name="decision-owner-5">
             <a:extLst xmlns:a="http://schemas.openxmlformats.org/drawingml/2006/main">
               <a:ext uri="{FF2B5EF4-FFF2-40B4-BE49-F238E27FC236}">
-                <a16:creationId xmlns:a16="http://schemas.microsoft.com/office/drawing/2014/main" id="{03AD10AD-F592-491E-B9B9-A1DBDAC8E06B}"/>
+                <a16:creationId xmlns:a16="http://schemas.microsoft.com/office/drawing/2014/main" id="{44563B5F-924A-4470-818D-CEBB79ACA284}"/>
               </a:ext>
             </a:extLst>
           </p:cNvPr>
@@ -9378,7 +9512,7 @@
           <p:cNvPr id="50" name="principle-panel">
             <a:extLst xmlns:a="http://schemas.openxmlformats.org/drawingml/2006/main">
               <a:ext uri="{FF2B5EF4-FFF2-40B4-BE49-F238E27FC236}">
-                <a16:creationId xmlns:a16="http://schemas.microsoft.com/office/drawing/2014/main" id="{B7A51F87-951F-4FF3-AC21-FFE2B5CD18BA}"/>
+                <a16:creationId xmlns:a16="http://schemas.microsoft.com/office/drawing/2014/main" id="{B9F7C0A1-EE92-4A98-8F37-BEBD5B083C18}"/>
               </a:ext>
             </a:extLst>
           </p:cNvPr>
@@ -9413,7 +9547,7 @@
           <p:cNvPr id="51" name="principle-label">
             <a:extLst xmlns:a="http://schemas.openxmlformats.org/drawingml/2006/main">
               <a:ext uri="{FF2B5EF4-FFF2-40B4-BE49-F238E27FC236}">
-                <a16:creationId xmlns:a16="http://schemas.microsoft.com/office/drawing/2014/main" id="{B302CAEE-D70A-4378-B701-1D40B8A62F17}"/>
+                <a16:creationId xmlns:a16="http://schemas.microsoft.com/office/drawing/2014/main" id="{D9191CD0-9703-48A4-A0A1-740619285CDA}"/>
               </a:ext>
             </a:extLst>
           </p:cNvPr>
@@ -9463,7 +9597,7 @@
           <p:cNvPr id="52" name="principle-body">
             <a:extLst xmlns:a="http://schemas.openxmlformats.org/drawingml/2006/main">
               <a:ext uri="{FF2B5EF4-FFF2-40B4-BE49-F238E27FC236}">
-                <a16:creationId xmlns:a16="http://schemas.microsoft.com/office/drawing/2014/main" id="{4685F22A-EBB4-4F9E-A088-EFC1DC77D2B9}"/>
+                <a16:creationId xmlns:a16="http://schemas.microsoft.com/office/drawing/2014/main" id="{0C7EF4DC-864D-4B0D-8EA1-57D41054432A}"/>
               </a:ext>
             </a:extLst>
           </p:cNvPr>
@@ -9511,7 +9645,7 @@
     </p:spTree>
     <p:extLst>
       <p:ext uri="{BB962C8B-B14F-4D97-AF65-F5344CB8AC3E}">
-        <p14:creationId xmlns:p14="http://schemas.microsoft.com/office/powerpoint/2010/main" val="1058277699"/>
+        <p14:creationId xmlns:p14="http://schemas.microsoft.com/office/powerpoint/2010/main" val="2108557434"/>
       </p:ext>
     </p:extLst>
   </p:cSld>
@@ -9542,7 +9676,7 @@
           <p:cNvPr id="1" name="top-accent">
             <a:extLst xmlns:a="http://schemas.openxmlformats.org/drawingml/2006/main">
               <a:ext uri="{FF2B5EF4-FFF2-40B4-BE49-F238E27FC236}">
-                <a16:creationId xmlns:a16="http://schemas.microsoft.com/office/drawing/2014/main" id="{3D1DD3BA-E824-49B7-9465-28FB8ED57BBF}"/>
+                <a16:creationId xmlns:a16="http://schemas.microsoft.com/office/drawing/2014/main" id="{5598F297-60FB-4261-81CB-B222C24DC27F}"/>
               </a:ext>
             </a:extLst>
           </p:cNvPr>
@@ -9575,7 +9709,7 @@
           <p:cNvPr id="2" name="left-accent">
             <a:extLst xmlns:a="http://schemas.openxmlformats.org/drawingml/2006/main">
               <a:ext uri="{FF2B5EF4-FFF2-40B4-BE49-F238E27FC236}">
-                <a16:creationId xmlns:a16="http://schemas.microsoft.com/office/drawing/2014/main" id="{E3202ACC-02D2-4488-98EE-045BC9D24075}"/>
+                <a16:creationId xmlns:a16="http://schemas.microsoft.com/office/drawing/2014/main" id="{9A7C5779-8631-475E-A80E-15C89055746B}"/>
               </a:ext>
             </a:extLst>
           </p:cNvPr>
@@ -9608,7 +9742,7 @@
           <p:cNvPr id="3" name="eyebrow">
             <a:extLst xmlns:a="http://schemas.openxmlformats.org/drawingml/2006/main">
               <a:ext uri="{FF2B5EF4-FFF2-40B4-BE49-F238E27FC236}">
-                <a16:creationId xmlns:a16="http://schemas.microsoft.com/office/drawing/2014/main" id="{F0CA4231-3117-48E9-BDD2-6B2B27A424C3}"/>
+                <a16:creationId xmlns:a16="http://schemas.microsoft.com/office/drawing/2014/main" id="{E42C498B-20FC-4495-9D33-C7BD864A8795}"/>
               </a:ext>
             </a:extLst>
           </p:cNvPr>
@@ -9658,7 +9792,7 @@
           <p:cNvPr id="4" name="footer">
             <a:extLst xmlns:a="http://schemas.openxmlformats.org/drawingml/2006/main">
               <a:ext uri="{FF2B5EF4-FFF2-40B4-BE49-F238E27FC236}">
-                <a16:creationId xmlns:a16="http://schemas.microsoft.com/office/drawing/2014/main" id="{A14C1E5B-42EC-4E69-8992-D005965A516E}"/>
+                <a16:creationId xmlns:a16="http://schemas.microsoft.com/office/drawing/2014/main" id="{E570A599-8BA2-4E73-B8C6-89405A9EE0D3}"/>
               </a:ext>
             </a:extLst>
           </p:cNvPr>
@@ -9708,7 +9842,7 @@
           <p:cNvPr id="5" name="page-no">
             <a:extLst xmlns:a="http://schemas.openxmlformats.org/drawingml/2006/main">
               <a:ext uri="{FF2B5EF4-FFF2-40B4-BE49-F238E27FC236}">
-                <a16:creationId xmlns:a16="http://schemas.microsoft.com/office/drawing/2014/main" id="{7E654D18-5FF2-43F7-A11B-8411472A9FCB}"/>
+                <a16:creationId xmlns:a16="http://schemas.microsoft.com/office/drawing/2014/main" id="{16731244-85E4-4A23-8550-AAB66CF5DF7B}"/>
               </a:ext>
             </a:extLst>
           </p:cNvPr>
@@ -9758,7 +9892,7 @@
           <p:cNvPr id="6" name="title-04">
             <a:extLst xmlns:a="http://schemas.openxmlformats.org/drawingml/2006/main">
               <a:ext uri="{FF2B5EF4-FFF2-40B4-BE49-F238E27FC236}">
-                <a16:creationId xmlns:a16="http://schemas.microsoft.com/office/drawing/2014/main" id="{4F10B533-1D00-4F38-ABFD-15EF38AC7EBB}"/>
+                <a16:creationId xmlns:a16="http://schemas.microsoft.com/office/drawing/2014/main" id="{3045BF0B-0F80-4FC8-8C22-BE1853BBA09C}"/>
               </a:ext>
             </a:extLst>
           </p:cNvPr>
@@ -9808,7 +9942,7 @@
           <p:cNvPr id="7" name="subtitle-04">
             <a:extLst xmlns:a="http://schemas.openxmlformats.org/drawingml/2006/main">
               <a:ext uri="{FF2B5EF4-FFF2-40B4-BE49-F238E27FC236}">
-                <a16:creationId xmlns:a16="http://schemas.microsoft.com/office/drawing/2014/main" id="{AD5E2A23-461D-4F26-A113-BF32CFF48FF1}"/>
+                <a16:creationId xmlns:a16="http://schemas.microsoft.com/office/drawing/2014/main" id="{607308B7-2C2D-4C51-A742-97C64B0B1B53}"/>
               </a:ext>
             </a:extLst>
           </p:cNvPr>
@@ -9858,7 +9992,7 @@
           <p:cNvPr id="8" name="risk-title">
             <a:extLst xmlns:a="http://schemas.openxmlformats.org/drawingml/2006/main">
               <a:ext uri="{FF2B5EF4-FFF2-40B4-BE49-F238E27FC236}">
-                <a16:creationId xmlns:a16="http://schemas.microsoft.com/office/drawing/2014/main" id="{92E71329-C5A1-4AC5-BFC2-73387B120960}"/>
+                <a16:creationId xmlns:a16="http://schemas.microsoft.com/office/drawing/2014/main" id="{2B244777-16CD-47ED-B27F-D2468E8A88E0}"/>
               </a:ext>
             </a:extLst>
           </p:cNvPr>
@@ -9908,7 +10042,7 @@
           <p:cNvPr id="9" name="risk-header">
             <a:extLst xmlns:a="http://schemas.openxmlformats.org/drawingml/2006/main">
               <a:ext uri="{FF2B5EF4-FFF2-40B4-BE49-F238E27FC236}">
-                <a16:creationId xmlns:a16="http://schemas.microsoft.com/office/drawing/2014/main" id="{A1D3FE82-5D24-488A-A8B2-386E5ABFBC6D}"/>
+                <a16:creationId xmlns:a16="http://schemas.microsoft.com/office/drawing/2014/main" id="{80F4A867-FA4E-4B12-BCD0-E07F0B1114D4}"/>
               </a:ext>
             </a:extLst>
           </p:cNvPr>
@@ -9941,7 +10075,7 @@
           <p:cNvPr id="10" name="risk-th-1">
             <a:extLst xmlns:a="http://schemas.openxmlformats.org/drawingml/2006/main">
               <a:ext uri="{FF2B5EF4-FFF2-40B4-BE49-F238E27FC236}">
-                <a16:creationId xmlns:a16="http://schemas.microsoft.com/office/drawing/2014/main" id="{BB462AE6-EDCE-4369-B244-33CFE27B7945}"/>
+                <a16:creationId xmlns:a16="http://schemas.microsoft.com/office/drawing/2014/main" id="{2229E4BD-CD28-409C-843C-50F233C5AA3B}"/>
               </a:ext>
             </a:extLst>
           </p:cNvPr>
@@ -9991,7 +10125,7 @@
           <p:cNvPr id="11" name="risk-th-2">
             <a:extLst xmlns:a="http://schemas.openxmlformats.org/drawingml/2006/main">
               <a:ext uri="{FF2B5EF4-FFF2-40B4-BE49-F238E27FC236}">
-                <a16:creationId xmlns:a16="http://schemas.microsoft.com/office/drawing/2014/main" id="{7F8C72E4-DD69-40AE-B072-3269BB3B6D7C}"/>
+                <a16:creationId xmlns:a16="http://schemas.microsoft.com/office/drawing/2014/main" id="{8DD61028-8F18-4E74-BE53-1FAE0B6887BD}"/>
               </a:ext>
             </a:extLst>
           </p:cNvPr>
@@ -10041,7 +10175,7 @@
           <p:cNvPr id="12" name="risk-th-3">
             <a:extLst xmlns:a="http://schemas.openxmlformats.org/drawingml/2006/main">
               <a:ext uri="{FF2B5EF4-FFF2-40B4-BE49-F238E27FC236}">
-                <a16:creationId xmlns:a16="http://schemas.microsoft.com/office/drawing/2014/main" id="{BF826932-1720-45B4-8EF1-80A4405743E1}"/>
+                <a16:creationId xmlns:a16="http://schemas.microsoft.com/office/drawing/2014/main" id="{CFFC2B78-28CE-4A59-8384-C0DBD4A56A6D}"/>
               </a:ext>
             </a:extLst>
           </p:cNvPr>
@@ -10091,7 +10225,7 @@
           <p:cNvPr id="13" name="risk-row-1">
             <a:extLst xmlns:a="http://schemas.openxmlformats.org/drawingml/2006/main">
               <a:ext uri="{FF2B5EF4-FFF2-40B4-BE49-F238E27FC236}">
-                <a16:creationId xmlns:a16="http://schemas.microsoft.com/office/drawing/2014/main" id="{19A36367-2373-4506-B7D5-7C500B57B6E2}"/>
+                <a16:creationId xmlns:a16="http://schemas.microsoft.com/office/drawing/2014/main" id="{45153C32-6469-4CEC-8A0B-0CE34046C669}"/>
               </a:ext>
             </a:extLst>
           </p:cNvPr>
@@ -10124,7 +10258,7 @@
           <p:cNvPr id="14" name="risk-name-1">
             <a:extLst xmlns:a="http://schemas.openxmlformats.org/drawingml/2006/main">
               <a:ext uri="{FF2B5EF4-FFF2-40B4-BE49-F238E27FC236}">
-                <a16:creationId xmlns:a16="http://schemas.microsoft.com/office/drawing/2014/main" id="{30B24D23-58B8-4217-8AD6-B8BB7DF5FC67}"/>
+                <a16:creationId xmlns:a16="http://schemas.microsoft.com/office/drawing/2014/main" id="{F75476A3-D6F5-458A-8CAB-56D8D330F5C5}"/>
               </a:ext>
             </a:extLst>
           </p:cNvPr>
@@ -10174,7 +10308,7 @@
           <p:cNvPr id="15" name="risk-impact-1">
             <a:extLst xmlns:a="http://schemas.openxmlformats.org/drawingml/2006/main">
               <a:ext uri="{FF2B5EF4-FFF2-40B4-BE49-F238E27FC236}">
-                <a16:creationId xmlns:a16="http://schemas.microsoft.com/office/drawing/2014/main" id="{D7545920-CB75-4C45-8BCA-57D8AE3DE3F1}"/>
+                <a16:creationId xmlns:a16="http://schemas.microsoft.com/office/drawing/2014/main" id="{D0058333-4211-4392-B4D9-5C29C8037D74}"/>
               </a:ext>
             </a:extLst>
           </p:cNvPr>
@@ -10224,7 +10358,7 @@
           <p:cNvPr id="16" name="risk-response-1">
             <a:extLst xmlns:a="http://schemas.openxmlformats.org/drawingml/2006/main">
               <a:ext uri="{FF2B5EF4-FFF2-40B4-BE49-F238E27FC236}">
-                <a16:creationId xmlns:a16="http://schemas.microsoft.com/office/drawing/2014/main" id="{B223A67A-C558-43FE-A7FE-92FB98168659}"/>
+                <a16:creationId xmlns:a16="http://schemas.microsoft.com/office/drawing/2014/main" id="{D5C34D59-216A-4DC9-B57D-F04C3B7414FD}"/>
               </a:ext>
             </a:extLst>
           </p:cNvPr>
@@ -10274,7 +10408,7 @@
           <p:cNvPr id="17" name="risk-row-2">
             <a:extLst xmlns:a="http://schemas.openxmlformats.org/drawingml/2006/main">
               <a:ext uri="{FF2B5EF4-FFF2-40B4-BE49-F238E27FC236}">
-                <a16:creationId xmlns:a16="http://schemas.microsoft.com/office/drawing/2014/main" id="{B8F07442-B041-43EE-ACE4-BF96F5587EBA}"/>
+                <a16:creationId xmlns:a16="http://schemas.microsoft.com/office/drawing/2014/main" id="{431D04C2-4FF9-43A0-A1E8-6E0216CFCA99}"/>
               </a:ext>
             </a:extLst>
           </p:cNvPr>
@@ -10307,7 +10441,7 @@
           <p:cNvPr id="18" name="risk-name-2">
             <a:extLst xmlns:a="http://schemas.openxmlformats.org/drawingml/2006/main">
               <a:ext uri="{FF2B5EF4-FFF2-40B4-BE49-F238E27FC236}">
-                <a16:creationId xmlns:a16="http://schemas.microsoft.com/office/drawing/2014/main" id="{6BC3FC08-1AA5-42AC-B8E3-850CE04CD4AD}"/>
+                <a16:creationId xmlns:a16="http://schemas.microsoft.com/office/drawing/2014/main" id="{A6509169-703E-4C0F-BBC6-594643C96B88}"/>
               </a:ext>
             </a:extLst>
           </p:cNvPr>
@@ -10357,7 +10491,7 @@
           <p:cNvPr id="19" name="risk-impact-2">
             <a:extLst xmlns:a="http://schemas.openxmlformats.org/drawingml/2006/main">
               <a:ext uri="{FF2B5EF4-FFF2-40B4-BE49-F238E27FC236}">
-                <a16:creationId xmlns:a16="http://schemas.microsoft.com/office/drawing/2014/main" id="{C256356F-F8A9-46D1-BF25-30995E9E8A3F}"/>
+                <a16:creationId xmlns:a16="http://schemas.microsoft.com/office/drawing/2014/main" id="{C1C481E0-E186-4E1A-AA96-E65E93AA1277}"/>
               </a:ext>
             </a:extLst>
           </p:cNvPr>
@@ -10407,7 +10541,7 @@
           <p:cNvPr id="20" name="risk-response-2">
             <a:extLst xmlns:a="http://schemas.openxmlformats.org/drawingml/2006/main">
               <a:ext uri="{FF2B5EF4-FFF2-40B4-BE49-F238E27FC236}">
-                <a16:creationId xmlns:a16="http://schemas.microsoft.com/office/drawing/2014/main" id="{212CA89D-0EE7-466B-B4FC-44FB17C767FB}"/>
+                <a16:creationId xmlns:a16="http://schemas.microsoft.com/office/drawing/2014/main" id="{F87B4F42-AA66-46B6-99E2-D93CB2447C56}"/>
               </a:ext>
             </a:extLst>
           </p:cNvPr>
@@ -10457,7 +10591,7 @@
           <p:cNvPr id="21" name="risk-row-3">
             <a:extLst xmlns:a="http://schemas.openxmlformats.org/drawingml/2006/main">
               <a:ext uri="{FF2B5EF4-FFF2-40B4-BE49-F238E27FC236}">
-                <a16:creationId xmlns:a16="http://schemas.microsoft.com/office/drawing/2014/main" id="{36DE9415-A7FF-4112-9801-404B294843A2}"/>
+                <a16:creationId xmlns:a16="http://schemas.microsoft.com/office/drawing/2014/main" id="{5F716B16-9D5E-4EA0-8ED5-0459E4479342}"/>
               </a:ext>
             </a:extLst>
           </p:cNvPr>
@@ -10490,7 +10624,7 @@
           <p:cNvPr id="22" name="risk-name-3">
             <a:extLst xmlns:a="http://schemas.openxmlformats.org/drawingml/2006/main">
               <a:ext uri="{FF2B5EF4-FFF2-40B4-BE49-F238E27FC236}">
-                <a16:creationId xmlns:a16="http://schemas.microsoft.com/office/drawing/2014/main" id="{97427AFE-B221-4FEE-9279-6EB471437E90}"/>
+                <a16:creationId xmlns:a16="http://schemas.microsoft.com/office/drawing/2014/main" id="{29622FBB-2278-4412-BE83-B9C7978D90C3}"/>
               </a:ext>
             </a:extLst>
           </p:cNvPr>
@@ -10540,7 +10674,7 @@
           <p:cNvPr id="23" name="risk-impact-3">
             <a:extLst xmlns:a="http://schemas.openxmlformats.org/drawingml/2006/main">
               <a:ext uri="{FF2B5EF4-FFF2-40B4-BE49-F238E27FC236}">
-                <a16:creationId xmlns:a16="http://schemas.microsoft.com/office/drawing/2014/main" id="{C8F9A1FD-6D07-4FE5-AD3A-A8F9D883536A}"/>
+                <a16:creationId xmlns:a16="http://schemas.microsoft.com/office/drawing/2014/main" id="{1E335576-656B-4EB7-B41E-8D122B543542}"/>
               </a:ext>
             </a:extLst>
           </p:cNvPr>
@@ -10590,7 +10724,7 @@
           <p:cNvPr id="24" name="risk-response-3">
             <a:extLst xmlns:a="http://schemas.openxmlformats.org/drawingml/2006/main">
               <a:ext uri="{FF2B5EF4-FFF2-40B4-BE49-F238E27FC236}">
-                <a16:creationId xmlns:a16="http://schemas.microsoft.com/office/drawing/2014/main" id="{4E81B17D-F124-4A04-995C-AC4ED1AFEA9D}"/>
+                <a16:creationId xmlns:a16="http://schemas.microsoft.com/office/drawing/2014/main" id="{4796CF2A-12FD-43D7-9F90-94A40F0B48D2}"/>
               </a:ext>
             </a:extLst>
           </p:cNvPr>
@@ -10640,7 +10774,7 @@
           <p:cNvPr id="25" name="risk-row-4">
             <a:extLst xmlns:a="http://schemas.openxmlformats.org/drawingml/2006/main">
               <a:ext uri="{FF2B5EF4-FFF2-40B4-BE49-F238E27FC236}">
-                <a16:creationId xmlns:a16="http://schemas.microsoft.com/office/drawing/2014/main" id="{02B2386E-E4D1-4C4F-9EF7-FE688D832248}"/>
+                <a16:creationId xmlns:a16="http://schemas.microsoft.com/office/drawing/2014/main" id="{497BB222-411E-4DF4-A85D-A04998CB8FBB}"/>
               </a:ext>
             </a:extLst>
           </p:cNvPr>
@@ -10673,7 +10807,7 @@
           <p:cNvPr id="26" name="risk-name-4">
             <a:extLst xmlns:a="http://schemas.openxmlformats.org/drawingml/2006/main">
               <a:ext uri="{FF2B5EF4-FFF2-40B4-BE49-F238E27FC236}">
-                <a16:creationId xmlns:a16="http://schemas.microsoft.com/office/drawing/2014/main" id="{02EEAAA6-98C8-42EF-8748-FA6DF9DCE0FA}"/>
+                <a16:creationId xmlns:a16="http://schemas.microsoft.com/office/drawing/2014/main" id="{B9DE8712-5664-4FF5-B400-C7EAB2144E8D}"/>
               </a:ext>
             </a:extLst>
           </p:cNvPr>
@@ -10723,7 +10857,7 @@
           <p:cNvPr id="27" name="risk-impact-4">
             <a:extLst xmlns:a="http://schemas.openxmlformats.org/drawingml/2006/main">
               <a:ext uri="{FF2B5EF4-FFF2-40B4-BE49-F238E27FC236}">
-                <a16:creationId xmlns:a16="http://schemas.microsoft.com/office/drawing/2014/main" id="{60A0EC7B-F0C2-4445-A96D-5D5FB1CB14CE}"/>
+                <a16:creationId xmlns:a16="http://schemas.microsoft.com/office/drawing/2014/main" id="{D092BC23-40EA-47D1-BD7C-EEF12E340D21}"/>
               </a:ext>
             </a:extLst>
           </p:cNvPr>
@@ -10773,7 +10907,7 @@
           <p:cNvPr id="28" name="risk-response-4">
             <a:extLst xmlns:a="http://schemas.openxmlformats.org/drawingml/2006/main">
               <a:ext uri="{FF2B5EF4-FFF2-40B4-BE49-F238E27FC236}">
-                <a16:creationId xmlns:a16="http://schemas.microsoft.com/office/drawing/2014/main" id="{81488550-F3B0-4662-B1F0-C95F55F6A2A0}"/>
+                <a16:creationId xmlns:a16="http://schemas.microsoft.com/office/drawing/2014/main" id="{3CD7C106-5083-4B86-8684-EC222DB9E235}"/>
               </a:ext>
             </a:extLst>
           </p:cNvPr>
@@ -10823,7 +10957,7 @@
           <p:cNvPr id="29" name="risk-row-5">
             <a:extLst xmlns:a="http://schemas.openxmlformats.org/drawingml/2006/main">
               <a:ext uri="{FF2B5EF4-FFF2-40B4-BE49-F238E27FC236}">
-                <a16:creationId xmlns:a16="http://schemas.microsoft.com/office/drawing/2014/main" id="{4BB9C0CF-A96E-401D-82A6-3947352F413E}"/>
+                <a16:creationId xmlns:a16="http://schemas.microsoft.com/office/drawing/2014/main" id="{03A545E8-0F09-4A15-B761-7B02C68CD294}"/>
               </a:ext>
             </a:extLst>
           </p:cNvPr>
@@ -10856,7 +10990,7 @@
           <p:cNvPr id="30" name="risk-name-5">
             <a:extLst xmlns:a="http://schemas.openxmlformats.org/drawingml/2006/main">
               <a:ext uri="{FF2B5EF4-FFF2-40B4-BE49-F238E27FC236}">
-                <a16:creationId xmlns:a16="http://schemas.microsoft.com/office/drawing/2014/main" id="{12242980-0AE6-4E7D-AC63-44E17093A853}"/>
+                <a16:creationId xmlns:a16="http://schemas.microsoft.com/office/drawing/2014/main" id="{8EB7D1CA-2CA5-4A02-AA31-C80BDF010798}"/>
               </a:ext>
             </a:extLst>
           </p:cNvPr>
@@ -10906,7 +11040,7 @@
           <p:cNvPr id="31" name="risk-impact-5">
             <a:extLst xmlns:a="http://schemas.openxmlformats.org/drawingml/2006/main">
               <a:ext uri="{FF2B5EF4-FFF2-40B4-BE49-F238E27FC236}">
-                <a16:creationId xmlns:a16="http://schemas.microsoft.com/office/drawing/2014/main" id="{73A3FADF-EBBA-4AF0-B062-43D6AF062DC4}"/>
+                <a16:creationId xmlns:a16="http://schemas.microsoft.com/office/drawing/2014/main" id="{F19CA585-E583-4B9F-9FCE-E6B110A05050}"/>
               </a:ext>
             </a:extLst>
           </p:cNvPr>
@@ -10956,7 +11090,7 @@
           <p:cNvPr id="32" name="risk-response-5">
             <a:extLst xmlns:a="http://schemas.openxmlformats.org/drawingml/2006/main">
               <a:ext uri="{FF2B5EF4-FFF2-40B4-BE49-F238E27FC236}">
-                <a16:creationId xmlns:a16="http://schemas.microsoft.com/office/drawing/2014/main" id="{FD422774-2EA4-4B65-94EB-30A95E8B1F12}"/>
+                <a16:creationId xmlns:a16="http://schemas.microsoft.com/office/drawing/2014/main" id="{20A39B6F-A07E-46FB-9386-330939B01FC7}"/>
               </a:ext>
             </a:extLst>
           </p:cNvPr>
@@ -11006,7 +11140,7 @@
           <p:cNvPr id="33" name="process-title">
             <a:extLst xmlns:a="http://schemas.openxmlformats.org/drawingml/2006/main">
               <a:ext uri="{FF2B5EF4-FFF2-40B4-BE49-F238E27FC236}">
-                <a16:creationId xmlns:a16="http://schemas.microsoft.com/office/drawing/2014/main" id="{1E27B84F-80CC-4742-BCFB-BB1A72541EC6}"/>
+                <a16:creationId xmlns:a16="http://schemas.microsoft.com/office/drawing/2014/main" id="{4D3B033C-EB40-48EF-B395-7CED2BDFC118}"/>
               </a:ext>
             </a:extLst>
           </p:cNvPr>
@@ -11056,7 +11190,7 @@
           <p:cNvPr id="34" name="process-note">
             <a:extLst xmlns:a="http://schemas.openxmlformats.org/drawingml/2006/main">
               <a:ext uri="{FF2B5EF4-FFF2-40B4-BE49-F238E27FC236}">
-                <a16:creationId xmlns:a16="http://schemas.microsoft.com/office/drawing/2014/main" id="{4809E51F-C8E9-4951-BF2C-C3ED53CC265B}"/>
+                <a16:creationId xmlns:a16="http://schemas.microsoft.com/office/drawing/2014/main" id="{66BADF33-9E3E-4A66-9978-56BA19148751}"/>
               </a:ext>
             </a:extLst>
           </p:cNvPr>
@@ -11106,7 +11240,7 @@
           <p:cNvPr id="35" name="process-step-1">
             <a:extLst xmlns:a="http://schemas.openxmlformats.org/drawingml/2006/main">
               <a:ext uri="{FF2B5EF4-FFF2-40B4-BE49-F238E27FC236}">
-                <a16:creationId xmlns:a16="http://schemas.microsoft.com/office/drawing/2014/main" id="{7736445A-6FAB-4DB4-BCBF-755DB9B35528}"/>
+                <a16:creationId xmlns:a16="http://schemas.microsoft.com/office/drawing/2014/main" id="{D84FC7D3-3BBC-444D-AE87-B720546C6F84}"/>
               </a:ext>
             </a:extLst>
           </p:cNvPr>
@@ -11141,7 +11275,7 @@
           <p:cNvPr id="36" name="process-step-bar-1">
             <a:extLst xmlns:a="http://schemas.openxmlformats.org/drawingml/2006/main">
               <a:ext uri="{FF2B5EF4-FFF2-40B4-BE49-F238E27FC236}">
-                <a16:creationId xmlns:a16="http://schemas.microsoft.com/office/drawing/2014/main" id="{6AD7E1BB-9884-4A5D-95F9-47F4E296F919}"/>
+                <a16:creationId xmlns:a16="http://schemas.microsoft.com/office/drawing/2014/main" id="{975402FD-B16D-437F-A995-9331663CA2E2}"/>
               </a:ext>
             </a:extLst>
           </p:cNvPr>
@@ -11174,7 +11308,7 @@
           <p:cNvPr id="37" name="process-step-no-1">
             <a:extLst xmlns:a="http://schemas.openxmlformats.org/drawingml/2006/main">
               <a:ext uri="{FF2B5EF4-FFF2-40B4-BE49-F238E27FC236}">
-                <a16:creationId xmlns:a16="http://schemas.microsoft.com/office/drawing/2014/main" id="{8AC36751-3C7F-41B0-AEBC-018D0FE2461F}"/>
+                <a16:creationId xmlns:a16="http://schemas.microsoft.com/office/drawing/2014/main" id="{1A91AC8C-EAE6-48BF-B74B-54C1D0EDE18A}"/>
               </a:ext>
             </a:extLst>
           </p:cNvPr>
@@ -11230,7 +11364,7 @@
           <p:cNvPr id="38" name="process-step-title-1">
             <a:extLst xmlns:a="http://schemas.openxmlformats.org/drawingml/2006/main">
               <a:ext uri="{FF2B5EF4-FFF2-40B4-BE49-F238E27FC236}">
-                <a16:creationId xmlns:a16="http://schemas.microsoft.com/office/drawing/2014/main" id="{92C67C38-D8B8-4427-8F2E-A546AEE507A7}"/>
+                <a16:creationId xmlns:a16="http://schemas.microsoft.com/office/drawing/2014/main" id="{C309C938-4C52-4294-9559-9275ED9E0D18}"/>
               </a:ext>
             </a:extLst>
           </p:cNvPr>
@@ -11280,7 +11414,7 @@
           <p:cNvPr id="39" name="process-step-body-1">
             <a:extLst xmlns:a="http://schemas.openxmlformats.org/drawingml/2006/main">
               <a:ext uri="{FF2B5EF4-FFF2-40B4-BE49-F238E27FC236}">
-                <a16:creationId xmlns:a16="http://schemas.microsoft.com/office/drawing/2014/main" id="{79414D4D-EAF6-453F-B78E-A0CD3C757BC0}"/>
+                <a16:creationId xmlns:a16="http://schemas.microsoft.com/office/drawing/2014/main" id="{5ACBBB59-5018-4DF1-A833-DDC5F6F65F21}"/>
               </a:ext>
             </a:extLst>
           </p:cNvPr>
@@ -11330,7 +11464,7 @@
           <p:cNvPr id="40" name="process-step-2">
             <a:extLst xmlns:a="http://schemas.openxmlformats.org/drawingml/2006/main">
               <a:ext uri="{FF2B5EF4-FFF2-40B4-BE49-F238E27FC236}">
-                <a16:creationId xmlns:a16="http://schemas.microsoft.com/office/drawing/2014/main" id="{FB065011-CA28-49C8-A031-0C726CBB91FD}"/>
+                <a16:creationId xmlns:a16="http://schemas.microsoft.com/office/drawing/2014/main" id="{77F098CB-3A57-4FBA-9AC9-B5E1DE16F90D}"/>
               </a:ext>
             </a:extLst>
           </p:cNvPr>
@@ -11365,7 +11499,7 @@
           <p:cNvPr id="41" name="process-step-bar-2">
             <a:extLst xmlns:a="http://schemas.openxmlformats.org/drawingml/2006/main">
               <a:ext uri="{FF2B5EF4-FFF2-40B4-BE49-F238E27FC236}">
-                <a16:creationId xmlns:a16="http://schemas.microsoft.com/office/drawing/2014/main" id="{663DF561-0F16-4EE6-AF25-C37AED96F0E5}"/>
+                <a16:creationId xmlns:a16="http://schemas.microsoft.com/office/drawing/2014/main" id="{791B40FB-0717-4087-B151-27DD88207B38}"/>
               </a:ext>
             </a:extLst>
           </p:cNvPr>
@@ -11398,7 +11532,7 @@
           <p:cNvPr id="42" name="process-step-no-2">
             <a:extLst xmlns:a="http://schemas.openxmlformats.org/drawingml/2006/main">
               <a:ext uri="{FF2B5EF4-FFF2-40B4-BE49-F238E27FC236}">
-                <a16:creationId xmlns:a16="http://schemas.microsoft.com/office/drawing/2014/main" id="{79BA2F2B-69C8-41B4-B543-4E0426E0AB30}"/>
+                <a16:creationId xmlns:a16="http://schemas.microsoft.com/office/drawing/2014/main" id="{C26FB469-E7FC-4B3B-92FC-534E9FDE4F5A}"/>
               </a:ext>
             </a:extLst>
           </p:cNvPr>
@@ -11454,7 +11588,7 @@
           <p:cNvPr id="43" name="process-step-title-2">
             <a:extLst xmlns:a="http://schemas.openxmlformats.org/drawingml/2006/main">
               <a:ext uri="{FF2B5EF4-FFF2-40B4-BE49-F238E27FC236}">
-                <a16:creationId xmlns:a16="http://schemas.microsoft.com/office/drawing/2014/main" id="{50C64D57-9222-4D60-9877-84F2A2E89F67}"/>
+                <a16:creationId xmlns:a16="http://schemas.microsoft.com/office/drawing/2014/main" id="{A356D546-169B-4D68-8343-C39384A63B5E}"/>
               </a:ext>
             </a:extLst>
           </p:cNvPr>
@@ -11504,7 +11638,7 @@
           <p:cNvPr id="44" name="process-step-body-2">
             <a:extLst xmlns:a="http://schemas.openxmlformats.org/drawingml/2006/main">
               <a:ext uri="{FF2B5EF4-FFF2-40B4-BE49-F238E27FC236}">
-                <a16:creationId xmlns:a16="http://schemas.microsoft.com/office/drawing/2014/main" id="{DAE552A3-EBC4-4C91-A5CD-E6E24DD73089}"/>
+                <a16:creationId xmlns:a16="http://schemas.microsoft.com/office/drawing/2014/main" id="{5F9746E8-0C96-466B-8FF7-BFF23F132627}"/>
               </a:ext>
             </a:extLst>
           </p:cNvPr>
@@ -11554,7 +11688,7 @@
           <p:cNvPr id="45" name="process-step-3">
             <a:extLst xmlns:a="http://schemas.openxmlformats.org/drawingml/2006/main">
               <a:ext uri="{FF2B5EF4-FFF2-40B4-BE49-F238E27FC236}">
-                <a16:creationId xmlns:a16="http://schemas.microsoft.com/office/drawing/2014/main" id="{18BF9AE5-FB78-472B-91C0-FA8C32AF677F}"/>
+                <a16:creationId xmlns:a16="http://schemas.microsoft.com/office/drawing/2014/main" id="{E358508B-E4CF-4627-AC82-A084FC17AF41}"/>
               </a:ext>
             </a:extLst>
           </p:cNvPr>
@@ -11589,7 +11723,7 @@
           <p:cNvPr id="46" name="process-step-bar-3">
             <a:extLst xmlns:a="http://schemas.openxmlformats.org/drawingml/2006/main">
               <a:ext uri="{FF2B5EF4-FFF2-40B4-BE49-F238E27FC236}">
-                <a16:creationId xmlns:a16="http://schemas.microsoft.com/office/drawing/2014/main" id="{58BF1799-ECBD-4CB4-9169-04C5EDA23DAF}"/>
+                <a16:creationId xmlns:a16="http://schemas.microsoft.com/office/drawing/2014/main" id="{CB5DA6A3-E6C7-4E6F-B3F6-6AC8A19259D6}"/>
               </a:ext>
             </a:extLst>
           </p:cNvPr>
@@ -11622,7 +11756,7 @@
           <p:cNvPr id="47" name="process-step-no-3">
             <a:extLst xmlns:a="http://schemas.openxmlformats.org/drawingml/2006/main">
               <a:ext uri="{FF2B5EF4-FFF2-40B4-BE49-F238E27FC236}">
-                <a16:creationId xmlns:a16="http://schemas.microsoft.com/office/drawing/2014/main" id="{4E505C1B-BD74-4588-AEA7-C7560563C524}"/>
+                <a16:creationId xmlns:a16="http://schemas.microsoft.com/office/drawing/2014/main" id="{5C7C69AC-DFE3-46C2-B5F9-9B7E800C25D5}"/>
               </a:ext>
             </a:extLst>
           </p:cNvPr>
@@ -11678,7 +11812,7 @@
           <p:cNvPr id="48" name="process-step-title-3">
             <a:extLst xmlns:a="http://schemas.openxmlformats.org/drawingml/2006/main">
               <a:ext uri="{FF2B5EF4-FFF2-40B4-BE49-F238E27FC236}">
-                <a16:creationId xmlns:a16="http://schemas.microsoft.com/office/drawing/2014/main" id="{B56F5445-0464-4F8B-A162-1937B61EB668}"/>
+                <a16:creationId xmlns:a16="http://schemas.microsoft.com/office/drawing/2014/main" id="{2D143EB5-D82B-482C-82EE-483B0C8717FA}"/>
               </a:ext>
             </a:extLst>
           </p:cNvPr>
@@ -11728,7 +11862,7 @@
           <p:cNvPr id="49" name="process-step-body-3">
             <a:extLst xmlns:a="http://schemas.openxmlformats.org/drawingml/2006/main">
               <a:ext uri="{FF2B5EF4-FFF2-40B4-BE49-F238E27FC236}">
-                <a16:creationId xmlns:a16="http://schemas.microsoft.com/office/drawing/2014/main" id="{3EDB0870-B370-4C94-B25C-4AD93AE0A420}"/>
+                <a16:creationId xmlns:a16="http://schemas.microsoft.com/office/drawing/2014/main" id="{7AFD1F56-E357-498A-8C5F-32011BD3E06E}"/>
               </a:ext>
             </a:extLst>
           </p:cNvPr>
@@ -11778,7 +11912,7 @@
           <p:cNvPr id="50" name="process-step-4">
             <a:extLst xmlns:a="http://schemas.openxmlformats.org/drawingml/2006/main">
               <a:ext uri="{FF2B5EF4-FFF2-40B4-BE49-F238E27FC236}">
-                <a16:creationId xmlns:a16="http://schemas.microsoft.com/office/drawing/2014/main" id="{8C2F8CA5-FF73-4D00-8FFF-F247C024C7A1}"/>
+                <a16:creationId xmlns:a16="http://schemas.microsoft.com/office/drawing/2014/main" id="{E123EEFC-7596-4EC4-8B9C-3F6B3D962526}"/>
               </a:ext>
             </a:extLst>
           </p:cNvPr>
@@ -11813,7 +11947,7 @@
           <p:cNvPr id="51" name="process-step-bar-4">
             <a:extLst xmlns:a="http://schemas.openxmlformats.org/drawingml/2006/main">
               <a:ext uri="{FF2B5EF4-FFF2-40B4-BE49-F238E27FC236}">
-                <a16:creationId xmlns:a16="http://schemas.microsoft.com/office/drawing/2014/main" id="{E8C9B1E4-8378-4E07-A3D2-93FA55C24E8A}"/>
+                <a16:creationId xmlns:a16="http://schemas.microsoft.com/office/drawing/2014/main" id="{D043167F-9B33-4460-BB2A-7C816C0F0720}"/>
               </a:ext>
             </a:extLst>
           </p:cNvPr>
@@ -11846,7 +11980,7 @@
           <p:cNvPr id="52" name="process-step-no-4">
             <a:extLst xmlns:a="http://schemas.openxmlformats.org/drawingml/2006/main">
               <a:ext uri="{FF2B5EF4-FFF2-40B4-BE49-F238E27FC236}">
-                <a16:creationId xmlns:a16="http://schemas.microsoft.com/office/drawing/2014/main" id="{E38F3C81-37A1-45E1-BB89-61B2F51414D8}"/>
+                <a16:creationId xmlns:a16="http://schemas.microsoft.com/office/drawing/2014/main" id="{0DFF67E8-603C-43F3-994E-6FCA7726AB84}"/>
               </a:ext>
             </a:extLst>
           </p:cNvPr>
@@ -11902,7 +12036,7 @@
           <p:cNvPr id="53" name="process-step-title-4">
             <a:extLst xmlns:a="http://schemas.openxmlformats.org/drawingml/2006/main">
               <a:ext uri="{FF2B5EF4-FFF2-40B4-BE49-F238E27FC236}">
-                <a16:creationId xmlns:a16="http://schemas.microsoft.com/office/drawing/2014/main" id="{5D9FA32D-6361-4205-BC4E-9820CFC60A44}"/>
+                <a16:creationId xmlns:a16="http://schemas.microsoft.com/office/drawing/2014/main" id="{A40D73F8-2FBE-41E2-8436-E09715005777}"/>
               </a:ext>
             </a:extLst>
           </p:cNvPr>
@@ -11952,7 +12086,7 @@
           <p:cNvPr id="54" name="process-step-body-4">
             <a:extLst xmlns:a="http://schemas.openxmlformats.org/drawingml/2006/main">
               <a:ext uri="{FF2B5EF4-FFF2-40B4-BE49-F238E27FC236}">
-                <a16:creationId xmlns:a16="http://schemas.microsoft.com/office/drawing/2014/main" id="{5886BB72-0198-4A26-B851-B955D23AEAA9}"/>
+                <a16:creationId xmlns:a16="http://schemas.microsoft.com/office/drawing/2014/main" id="{4402F9E0-E585-4E00-A937-1655D9F873D3}"/>
               </a:ext>
             </a:extLst>
           </p:cNvPr>
@@ -12002,7 +12136,7 @@
           <p:cNvPr id="55" name="risk-principle-panel">
             <a:extLst xmlns:a="http://schemas.openxmlformats.org/drawingml/2006/main">
               <a:ext uri="{FF2B5EF4-FFF2-40B4-BE49-F238E27FC236}">
-                <a16:creationId xmlns:a16="http://schemas.microsoft.com/office/drawing/2014/main" id="{C8761D44-51E3-4537-8D53-2819790D247D}"/>
+                <a16:creationId xmlns:a16="http://schemas.microsoft.com/office/drawing/2014/main" id="{8A41CE75-F7B5-4EF0-855E-2760BE776449}"/>
               </a:ext>
             </a:extLst>
           </p:cNvPr>
@@ -12037,7 +12171,7 @@
           <p:cNvPr id="56" name="risk-principle-label">
             <a:extLst xmlns:a="http://schemas.openxmlformats.org/drawingml/2006/main">
               <a:ext uri="{FF2B5EF4-FFF2-40B4-BE49-F238E27FC236}">
-                <a16:creationId xmlns:a16="http://schemas.microsoft.com/office/drawing/2014/main" id="{B44F54F3-792E-4033-9F26-F26C531ABC14}"/>
+                <a16:creationId xmlns:a16="http://schemas.microsoft.com/office/drawing/2014/main" id="{8E4DB6C8-9E79-4DDC-B7F9-5A868A7C0AAC}"/>
               </a:ext>
             </a:extLst>
           </p:cNvPr>
@@ -12087,7 +12221,7 @@
           <p:cNvPr id="57" name="risk-principle-body">
             <a:extLst xmlns:a="http://schemas.openxmlformats.org/drawingml/2006/main">
               <a:ext uri="{FF2B5EF4-FFF2-40B4-BE49-F238E27FC236}">
-                <a16:creationId xmlns:a16="http://schemas.microsoft.com/office/drawing/2014/main" id="{E48AE211-E007-4DFD-B7F5-2A08CD0E6A07}"/>
+                <a16:creationId xmlns:a16="http://schemas.microsoft.com/office/drawing/2014/main" id="{A5A08EB5-40BE-45F6-A5BC-4CF42FBC93B2}"/>
               </a:ext>
             </a:extLst>
           </p:cNvPr>
@@ -12135,7 +12269,7 @@
     </p:spTree>
     <p:extLst>
       <p:ext uri="{BB962C8B-B14F-4D97-AF65-F5344CB8AC3E}">
-        <p14:creationId xmlns:p14="http://schemas.microsoft.com/office/powerpoint/2010/main" val="1980520844"/>
+        <p14:creationId xmlns:p14="http://schemas.microsoft.com/office/powerpoint/2010/main" val="1585992958"/>
       </p:ext>
     </p:extLst>
   </p:cSld>
@@ -12166,7 +12300,7 @@
           <p:cNvPr id="1" name="top-accent">
             <a:extLst xmlns:a="http://schemas.openxmlformats.org/drawingml/2006/main">
               <a:ext uri="{FF2B5EF4-FFF2-40B4-BE49-F238E27FC236}">
-                <a16:creationId xmlns:a16="http://schemas.microsoft.com/office/drawing/2014/main" id="{529DA18F-8C7F-4B66-90D5-0941BAECCA97}"/>
+                <a16:creationId xmlns:a16="http://schemas.microsoft.com/office/drawing/2014/main" id="{B7BA4F86-DBBD-44B3-8F3B-AE93607A7E8A}"/>
               </a:ext>
             </a:extLst>
           </p:cNvPr>
@@ -12199,7 +12333,7 @@
           <p:cNvPr id="2" name="left-accent">
             <a:extLst xmlns:a="http://schemas.openxmlformats.org/drawingml/2006/main">
               <a:ext uri="{FF2B5EF4-FFF2-40B4-BE49-F238E27FC236}">
-                <a16:creationId xmlns:a16="http://schemas.microsoft.com/office/drawing/2014/main" id="{18D5079A-051D-474F-A480-28DBA45FB0EB}"/>
+                <a16:creationId xmlns:a16="http://schemas.microsoft.com/office/drawing/2014/main" id="{910F5FF8-B253-4829-B9D2-116A61DAA6F5}"/>
               </a:ext>
             </a:extLst>
           </p:cNvPr>
@@ -12232,7 +12366,7 @@
           <p:cNvPr id="3" name="eyebrow">
             <a:extLst xmlns:a="http://schemas.openxmlformats.org/drawingml/2006/main">
               <a:ext uri="{FF2B5EF4-FFF2-40B4-BE49-F238E27FC236}">
-                <a16:creationId xmlns:a16="http://schemas.microsoft.com/office/drawing/2014/main" id="{F341EA56-D0C6-4884-B5F1-BA5DB9E0A020}"/>
+                <a16:creationId xmlns:a16="http://schemas.microsoft.com/office/drawing/2014/main" id="{434F399A-641F-4544-A9A0-6E74FD9C4BF4}"/>
               </a:ext>
             </a:extLst>
           </p:cNvPr>
@@ -12282,7 +12416,7 @@
           <p:cNvPr id="4" name="footer">
             <a:extLst xmlns:a="http://schemas.openxmlformats.org/drawingml/2006/main">
               <a:ext uri="{FF2B5EF4-FFF2-40B4-BE49-F238E27FC236}">
-                <a16:creationId xmlns:a16="http://schemas.microsoft.com/office/drawing/2014/main" id="{BE840AE0-561E-40FC-AE5C-B42DB9C1A492}"/>
+                <a16:creationId xmlns:a16="http://schemas.microsoft.com/office/drawing/2014/main" id="{7E4EAC49-BEFC-4A76-91D6-F3804E0420D7}"/>
               </a:ext>
             </a:extLst>
           </p:cNvPr>
@@ -12332,7 +12466,7 @@
           <p:cNvPr id="5" name="page-no">
             <a:extLst xmlns:a="http://schemas.openxmlformats.org/drawingml/2006/main">
               <a:ext uri="{FF2B5EF4-FFF2-40B4-BE49-F238E27FC236}">
-                <a16:creationId xmlns:a16="http://schemas.microsoft.com/office/drawing/2014/main" id="{61D03185-FBC9-4C65-9885-93E63560B505}"/>
+                <a16:creationId xmlns:a16="http://schemas.microsoft.com/office/drawing/2014/main" id="{87A98F15-45C6-47D1-A421-7CDEA26A7209}"/>
               </a:ext>
             </a:extLst>
           </p:cNvPr>
@@ -12382,7 +12516,7 @@
           <p:cNvPr id="6" name="title-05">
             <a:extLst xmlns:a="http://schemas.openxmlformats.org/drawingml/2006/main">
               <a:ext uri="{FF2B5EF4-FFF2-40B4-BE49-F238E27FC236}">
-                <a16:creationId xmlns:a16="http://schemas.microsoft.com/office/drawing/2014/main" id="{541B6587-00A1-47F4-A3BE-11A3F1D95890}"/>
+                <a16:creationId xmlns:a16="http://schemas.microsoft.com/office/drawing/2014/main" id="{9F27C330-965A-4321-921A-E648A1815577}"/>
               </a:ext>
             </a:extLst>
           </p:cNvPr>
@@ -12432,7 +12566,7 @@
           <p:cNvPr id="7" name="subtitle-05">
             <a:extLst xmlns:a="http://schemas.openxmlformats.org/drawingml/2006/main">
               <a:ext uri="{FF2B5EF4-FFF2-40B4-BE49-F238E27FC236}">
-                <a16:creationId xmlns:a16="http://schemas.microsoft.com/office/drawing/2014/main" id="{E009D2CA-0B0D-4591-840C-CE89AC43C17D}"/>
+                <a16:creationId xmlns:a16="http://schemas.microsoft.com/office/drawing/2014/main" id="{F42A4B53-51A2-44E7-BDC7-B04363D69CB2}"/>
               </a:ext>
             </a:extLst>
           </p:cNvPr>
@@ -12482,7 +12616,7 @@
           <p:cNvPr id="8" name="stakeholder-title">
             <a:extLst xmlns:a="http://schemas.openxmlformats.org/drawingml/2006/main">
               <a:ext uri="{FF2B5EF4-FFF2-40B4-BE49-F238E27FC236}">
-                <a16:creationId xmlns:a16="http://schemas.microsoft.com/office/drawing/2014/main" id="{D0C1F87A-C0BE-4195-8E76-76C2992EA6E3}"/>
+                <a16:creationId xmlns:a16="http://schemas.microsoft.com/office/drawing/2014/main" id="{BB039524-B0BA-4303-94DF-43A09A7B24D1}"/>
               </a:ext>
             </a:extLst>
           </p:cNvPr>
@@ -12532,7 +12666,7 @@
           <p:cNvPr id="9" name="stakeholder-note">
             <a:extLst xmlns:a="http://schemas.openxmlformats.org/drawingml/2006/main">
               <a:ext uri="{FF2B5EF4-FFF2-40B4-BE49-F238E27FC236}">
-                <a16:creationId xmlns:a16="http://schemas.microsoft.com/office/drawing/2014/main" id="{99359DB5-8F38-4FA6-A7EB-714BBC407CA8}"/>
+                <a16:creationId xmlns:a16="http://schemas.microsoft.com/office/drawing/2014/main" id="{995B5933-AFD9-4CC6-83ED-7E2B2175093F}"/>
               </a:ext>
             </a:extLst>
           </p:cNvPr>
@@ -12582,7 +12716,7 @@
           <p:cNvPr id="10" name="stakeholder-card-1">
             <a:extLst xmlns:a="http://schemas.openxmlformats.org/drawingml/2006/main">
               <a:ext uri="{FF2B5EF4-FFF2-40B4-BE49-F238E27FC236}">
-                <a16:creationId xmlns:a16="http://schemas.microsoft.com/office/drawing/2014/main" id="{FD4BF2B2-32E6-4EB9-B2A2-DE36FD22133C}"/>
+                <a16:creationId xmlns:a16="http://schemas.microsoft.com/office/drawing/2014/main" id="{30CB89A1-37A1-425E-84B0-C44AF567B770}"/>
               </a:ext>
             </a:extLst>
           </p:cNvPr>
@@ -12617,7 +12751,7 @@
           <p:cNvPr id="11" name="stakeholder-bar-1">
             <a:extLst xmlns:a="http://schemas.openxmlformats.org/drawingml/2006/main">
               <a:ext uri="{FF2B5EF4-FFF2-40B4-BE49-F238E27FC236}">
-                <a16:creationId xmlns:a16="http://schemas.microsoft.com/office/drawing/2014/main" id="{0E65F953-366C-48C4-943A-EB237E89FDD4}"/>
+                <a16:creationId xmlns:a16="http://schemas.microsoft.com/office/drawing/2014/main" id="{5710F474-3D2F-4BA2-B183-594F2A4397C1}"/>
               </a:ext>
             </a:extLst>
           </p:cNvPr>
@@ -12650,7 +12784,7 @@
           <p:cNvPr id="12" name="stakeholder-role-1">
             <a:extLst xmlns:a="http://schemas.openxmlformats.org/drawingml/2006/main">
               <a:ext uri="{FF2B5EF4-FFF2-40B4-BE49-F238E27FC236}">
-                <a16:creationId xmlns:a16="http://schemas.microsoft.com/office/drawing/2014/main" id="{8EAFB506-5AF5-4BCD-8512-699C66503BFA}"/>
+                <a16:creationId xmlns:a16="http://schemas.microsoft.com/office/drawing/2014/main" id="{E58C1E39-8073-46C0-8F70-39203CB26E1A}"/>
               </a:ext>
             </a:extLst>
           </p:cNvPr>
@@ -12700,7 +12834,7 @@
           <p:cNvPr id="13" name="stakeholder-focus-1">
             <a:extLst xmlns:a="http://schemas.openxmlformats.org/drawingml/2006/main">
               <a:ext uri="{FF2B5EF4-FFF2-40B4-BE49-F238E27FC236}">
-                <a16:creationId xmlns:a16="http://schemas.microsoft.com/office/drawing/2014/main" id="{3EE6BCD1-912E-4893-A4B6-9F5F3770B924}"/>
+                <a16:creationId xmlns:a16="http://schemas.microsoft.com/office/drawing/2014/main" id="{1BA09A18-8DC4-415C-ABEF-8C9AA15E953F}"/>
               </a:ext>
             </a:extLst>
           </p:cNvPr>
@@ -12767,7 +12901,7 @@
           <p:cNvPr id="14" name="stakeholder-card-2">
             <a:extLst xmlns:a="http://schemas.openxmlformats.org/drawingml/2006/main">
               <a:ext uri="{FF2B5EF4-FFF2-40B4-BE49-F238E27FC236}">
-                <a16:creationId xmlns:a16="http://schemas.microsoft.com/office/drawing/2014/main" id="{62892338-EB02-4DD2-A3C9-D46B7663B262}"/>
+                <a16:creationId xmlns:a16="http://schemas.microsoft.com/office/drawing/2014/main" id="{55A9FF6F-E5D7-405A-BAD6-761A198FF23C}"/>
               </a:ext>
             </a:extLst>
           </p:cNvPr>
@@ -12802,7 +12936,7 @@
           <p:cNvPr id="15" name="stakeholder-bar-2">
             <a:extLst xmlns:a="http://schemas.openxmlformats.org/drawingml/2006/main">
               <a:ext uri="{FF2B5EF4-FFF2-40B4-BE49-F238E27FC236}">
-                <a16:creationId xmlns:a16="http://schemas.microsoft.com/office/drawing/2014/main" id="{D8600CF9-F901-437B-A7FD-4CCFE1996F0E}"/>
+                <a16:creationId xmlns:a16="http://schemas.microsoft.com/office/drawing/2014/main" id="{3C83B317-4798-478C-94CD-3D55BD1678E2}"/>
               </a:ext>
             </a:extLst>
           </p:cNvPr>
@@ -12835,7 +12969,7 @@
           <p:cNvPr id="16" name="stakeholder-role-2">
             <a:extLst xmlns:a="http://schemas.openxmlformats.org/drawingml/2006/main">
               <a:ext uri="{FF2B5EF4-FFF2-40B4-BE49-F238E27FC236}">
-                <a16:creationId xmlns:a16="http://schemas.microsoft.com/office/drawing/2014/main" id="{B1AF91D6-F98B-4379-A515-F767BC1B4986}"/>
+                <a16:creationId xmlns:a16="http://schemas.microsoft.com/office/drawing/2014/main" id="{0F7AFAA3-64B6-40D5-AAB8-7875BD7C270C}"/>
               </a:ext>
             </a:extLst>
           </p:cNvPr>
@@ -12885,7 +13019,7 @@
           <p:cNvPr id="17" name="stakeholder-focus-2">
             <a:extLst xmlns:a="http://schemas.openxmlformats.org/drawingml/2006/main">
               <a:ext uri="{FF2B5EF4-FFF2-40B4-BE49-F238E27FC236}">
-                <a16:creationId xmlns:a16="http://schemas.microsoft.com/office/drawing/2014/main" id="{A7FEF5DC-50AA-4E37-B615-A5DEE7C210F9}"/>
+                <a16:creationId xmlns:a16="http://schemas.microsoft.com/office/drawing/2014/main" id="{DB4DDB17-419F-43A3-B9A3-A47B439BC0FB}"/>
               </a:ext>
             </a:extLst>
           </p:cNvPr>
@@ -12952,7 +13086,7 @@
           <p:cNvPr id="18" name="stakeholder-card-3">
             <a:extLst xmlns:a="http://schemas.openxmlformats.org/drawingml/2006/main">
               <a:ext uri="{FF2B5EF4-FFF2-40B4-BE49-F238E27FC236}">
-                <a16:creationId xmlns:a16="http://schemas.microsoft.com/office/drawing/2014/main" id="{4B416683-299F-4FB4-BD66-34C42B8353E6}"/>
+                <a16:creationId xmlns:a16="http://schemas.microsoft.com/office/drawing/2014/main" id="{FB2DBA7E-E304-498A-B33D-6849B15DD6B5}"/>
               </a:ext>
             </a:extLst>
           </p:cNvPr>
@@ -12987,7 +13121,7 @@
           <p:cNvPr id="19" name="stakeholder-bar-3">
             <a:extLst xmlns:a="http://schemas.openxmlformats.org/drawingml/2006/main">
               <a:ext uri="{FF2B5EF4-FFF2-40B4-BE49-F238E27FC236}">
-                <a16:creationId xmlns:a16="http://schemas.microsoft.com/office/drawing/2014/main" id="{D9A779D5-4871-4DE1-92B6-62857D02CFD9}"/>
+                <a16:creationId xmlns:a16="http://schemas.microsoft.com/office/drawing/2014/main" id="{2E993D69-DA78-4141-9FB7-EA686C2ECECE}"/>
               </a:ext>
             </a:extLst>
           </p:cNvPr>
@@ -13020,7 +13154,7 @@
           <p:cNvPr id="20" name="stakeholder-role-3">
             <a:extLst xmlns:a="http://schemas.openxmlformats.org/drawingml/2006/main">
               <a:ext uri="{FF2B5EF4-FFF2-40B4-BE49-F238E27FC236}">
-                <a16:creationId xmlns:a16="http://schemas.microsoft.com/office/drawing/2014/main" id="{BEF8E61E-1B97-48E8-97D1-281DCD067C8C}"/>
+                <a16:creationId xmlns:a16="http://schemas.microsoft.com/office/drawing/2014/main" id="{8046A7E3-EE16-4A6A-A344-ABE7A5FEB4E2}"/>
               </a:ext>
             </a:extLst>
           </p:cNvPr>
@@ -13070,7 +13204,7 @@
           <p:cNvPr id="21" name="stakeholder-focus-3">
             <a:extLst xmlns:a="http://schemas.openxmlformats.org/drawingml/2006/main">
               <a:ext uri="{FF2B5EF4-FFF2-40B4-BE49-F238E27FC236}">
-                <a16:creationId xmlns:a16="http://schemas.microsoft.com/office/drawing/2014/main" id="{318C3653-E1D8-439D-82F9-02D6CC4454E2}"/>
+                <a16:creationId xmlns:a16="http://schemas.microsoft.com/office/drawing/2014/main" id="{127F3C56-D712-4523-8EE3-C60F3AFDD7F1}"/>
               </a:ext>
             </a:extLst>
           </p:cNvPr>
@@ -13137,7 +13271,7 @@
           <p:cNvPr id="22" name="stakeholder-card-4">
             <a:extLst xmlns:a="http://schemas.openxmlformats.org/drawingml/2006/main">
               <a:ext uri="{FF2B5EF4-FFF2-40B4-BE49-F238E27FC236}">
-                <a16:creationId xmlns:a16="http://schemas.microsoft.com/office/drawing/2014/main" id="{EEC2A7B4-0CC1-432C-A378-8E1DF5EC46D0}"/>
+                <a16:creationId xmlns:a16="http://schemas.microsoft.com/office/drawing/2014/main" id="{4704B625-7F60-4CB5-B706-E2B6A08193DE}"/>
               </a:ext>
             </a:extLst>
           </p:cNvPr>
@@ -13172,7 +13306,7 @@
           <p:cNvPr id="23" name="stakeholder-bar-4">
             <a:extLst xmlns:a="http://schemas.openxmlformats.org/drawingml/2006/main">
               <a:ext uri="{FF2B5EF4-FFF2-40B4-BE49-F238E27FC236}">
-                <a16:creationId xmlns:a16="http://schemas.microsoft.com/office/drawing/2014/main" id="{4BAF6961-98A7-4956-BD19-85037E26D3E9}"/>
+                <a16:creationId xmlns:a16="http://schemas.microsoft.com/office/drawing/2014/main" id="{BE3A2CD2-1545-44B2-B207-C724A1CFCFB1}"/>
               </a:ext>
             </a:extLst>
           </p:cNvPr>
@@ -13205,7 +13339,7 @@
           <p:cNvPr id="24" name="stakeholder-role-4">
             <a:extLst xmlns:a="http://schemas.openxmlformats.org/drawingml/2006/main">
               <a:ext uri="{FF2B5EF4-FFF2-40B4-BE49-F238E27FC236}">
-                <a16:creationId xmlns:a16="http://schemas.microsoft.com/office/drawing/2014/main" id="{4603777A-F2AA-497B-8878-01388CC88F52}"/>
+                <a16:creationId xmlns:a16="http://schemas.microsoft.com/office/drawing/2014/main" id="{C106AAC2-0958-4A6C-9E24-FCDE2C5ECD7F}"/>
               </a:ext>
             </a:extLst>
           </p:cNvPr>
@@ -13255,7 +13389,7 @@
           <p:cNvPr id="25" name="stakeholder-focus-4">
             <a:extLst xmlns:a="http://schemas.openxmlformats.org/drawingml/2006/main">
               <a:ext uri="{FF2B5EF4-FFF2-40B4-BE49-F238E27FC236}">
-                <a16:creationId xmlns:a16="http://schemas.microsoft.com/office/drawing/2014/main" id="{D1A393FD-F335-4C8A-9828-E507A6D007BF}"/>
+                <a16:creationId xmlns:a16="http://schemas.microsoft.com/office/drawing/2014/main" id="{A7D1A309-BB68-4F37-947D-7006DB01145A}"/>
               </a:ext>
             </a:extLst>
           </p:cNvPr>
@@ -13322,7 +13456,7 @@
           <p:cNvPr id="26" name="stakeholder-card-5">
             <a:extLst xmlns:a="http://schemas.openxmlformats.org/drawingml/2006/main">
               <a:ext uri="{FF2B5EF4-FFF2-40B4-BE49-F238E27FC236}">
-                <a16:creationId xmlns:a16="http://schemas.microsoft.com/office/drawing/2014/main" id="{5B20F428-89F6-43A2-9AA0-27C85EB1BC8B}"/>
+                <a16:creationId xmlns:a16="http://schemas.microsoft.com/office/drawing/2014/main" id="{650767C8-280B-4DF5-ABAC-728595E183BF}"/>
               </a:ext>
             </a:extLst>
           </p:cNvPr>
@@ -13357,7 +13491,7 @@
           <p:cNvPr id="27" name="stakeholder-bar-5">
             <a:extLst xmlns:a="http://schemas.openxmlformats.org/drawingml/2006/main">
               <a:ext uri="{FF2B5EF4-FFF2-40B4-BE49-F238E27FC236}">
-                <a16:creationId xmlns:a16="http://schemas.microsoft.com/office/drawing/2014/main" id="{B0AC7B9D-8064-4CD5-B91D-728D54B677CE}"/>
+                <a16:creationId xmlns:a16="http://schemas.microsoft.com/office/drawing/2014/main" id="{A042F7DA-D390-4E25-8659-6D7967C66E28}"/>
               </a:ext>
             </a:extLst>
           </p:cNvPr>
@@ -13390,7 +13524,7 @@
           <p:cNvPr id="28" name="stakeholder-role-5">
             <a:extLst xmlns:a="http://schemas.openxmlformats.org/drawingml/2006/main">
               <a:ext uri="{FF2B5EF4-FFF2-40B4-BE49-F238E27FC236}">
-                <a16:creationId xmlns:a16="http://schemas.microsoft.com/office/drawing/2014/main" id="{0A807E03-FE0C-459B-99DA-A3E3D0C79D75}"/>
+                <a16:creationId xmlns:a16="http://schemas.microsoft.com/office/drawing/2014/main" id="{67609F9D-0269-4523-82B8-13FB7FCAB023}"/>
               </a:ext>
             </a:extLst>
           </p:cNvPr>
@@ -13440,7 +13574,7 @@
           <p:cNvPr id="29" name="stakeholder-focus-5">
             <a:extLst xmlns:a="http://schemas.openxmlformats.org/drawingml/2006/main">
               <a:ext uri="{FF2B5EF4-FFF2-40B4-BE49-F238E27FC236}">
-                <a16:creationId xmlns:a16="http://schemas.microsoft.com/office/drawing/2014/main" id="{F9984B3B-88DE-4566-94C8-8DAA1B8A301E}"/>
+                <a16:creationId xmlns:a16="http://schemas.microsoft.com/office/drawing/2014/main" id="{C3D13DDE-DC85-47FF-B729-1C4A32C00A20}"/>
               </a:ext>
             </a:extLst>
           </p:cNvPr>
@@ -13507,7 +13641,7 @@
           <p:cNvPr id="30" name="flow-title">
             <a:extLst xmlns:a="http://schemas.openxmlformats.org/drawingml/2006/main">
               <a:ext uri="{FF2B5EF4-FFF2-40B4-BE49-F238E27FC236}">
-                <a16:creationId xmlns:a16="http://schemas.microsoft.com/office/drawing/2014/main" id="{7F4C8C27-CCE1-4C82-9AC1-7DF263493B69}"/>
+                <a16:creationId xmlns:a16="http://schemas.microsoft.com/office/drawing/2014/main" id="{1D7C9ABB-6E75-4126-A88B-6E77960364D1}"/>
               </a:ext>
             </a:extLst>
           </p:cNvPr>
@@ -13557,7 +13691,7 @@
           <p:cNvPr id="31" name="flow-note">
             <a:extLst xmlns:a="http://schemas.openxmlformats.org/drawingml/2006/main">
               <a:ext uri="{FF2B5EF4-FFF2-40B4-BE49-F238E27FC236}">
-                <a16:creationId xmlns:a16="http://schemas.microsoft.com/office/drawing/2014/main" id="{89F1AE71-AE6F-4E06-8711-ED455E58F488}"/>
+                <a16:creationId xmlns:a16="http://schemas.microsoft.com/office/drawing/2014/main" id="{3E7EFC4D-4179-4935-BE19-017FED4A69F1}"/>
               </a:ext>
             </a:extLst>
           </p:cNvPr>
@@ -13607,7 +13741,7 @@
           <p:cNvPr id="32" name="collab-flow-step-1">
             <a:extLst xmlns:a="http://schemas.openxmlformats.org/drawingml/2006/main">
               <a:ext uri="{FF2B5EF4-FFF2-40B4-BE49-F238E27FC236}">
-                <a16:creationId xmlns:a16="http://schemas.microsoft.com/office/drawing/2014/main" id="{897EE40C-2F42-4441-BA01-3966B0EA2918}"/>
+                <a16:creationId xmlns:a16="http://schemas.microsoft.com/office/drawing/2014/main" id="{DCC82B2C-6C8D-4EC1-A618-1650BAA71FD4}"/>
               </a:ext>
             </a:extLst>
           </p:cNvPr>
@@ -13642,7 +13776,7 @@
           <p:cNvPr id="33" name="collab-flow-no-1">
             <a:extLst xmlns:a="http://schemas.openxmlformats.org/drawingml/2006/main">
               <a:ext uri="{FF2B5EF4-FFF2-40B4-BE49-F238E27FC236}">
-                <a16:creationId xmlns:a16="http://schemas.microsoft.com/office/drawing/2014/main" id="{26928740-74FA-4E3C-AD21-00494667CF9D}"/>
+                <a16:creationId xmlns:a16="http://schemas.microsoft.com/office/drawing/2014/main" id="{CD885F0B-F299-4B79-9184-20E2C24853E2}"/>
               </a:ext>
             </a:extLst>
           </p:cNvPr>
@@ -13698,7 +13832,7 @@
           <p:cNvPr id="34" name="collab-flow-title-1">
             <a:extLst xmlns:a="http://schemas.openxmlformats.org/drawingml/2006/main">
               <a:ext uri="{FF2B5EF4-FFF2-40B4-BE49-F238E27FC236}">
-                <a16:creationId xmlns:a16="http://schemas.microsoft.com/office/drawing/2014/main" id="{905782E4-E867-4516-B181-82D9E7B61B7F}"/>
+                <a16:creationId xmlns:a16="http://schemas.microsoft.com/office/drawing/2014/main" id="{BD5F008C-D4C7-4C86-9C78-E5E0A703881A}"/>
               </a:ext>
             </a:extLst>
           </p:cNvPr>
@@ -13748,7 +13882,7 @@
           <p:cNvPr id="35" name="collab-flow-body-1">
             <a:extLst xmlns:a="http://schemas.openxmlformats.org/drawingml/2006/main">
               <a:ext uri="{FF2B5EF4-FFF2-40B4-BE49-F238E27FC236}">
-                <a16:creationId xmlns:a16="http://schemas.microsoft.com/office/drawing/2014/main" id="{E401C370-B6F7-4265-9181-EB443CAC0460}"/>
+                <a16:creationId xmlns:a16="http://schemas.microsoft.com/office/drawing/2014/main" id="{6F43E07F-4BEA-4475-B42B-F81FEA338568}"/>
               </a:ext>
             </a:extLst>
           </p:cNvPr>
@@ -13815,7 +13949,7 @@
           <p:cNvPr id="36" name="collab-flow-arrow-1">
             <a:extLst xmlns:a="http://schemas.openxmlformats.org/drawingml/2006/main">
               <a:ext uri="{FF2B5EF4-FFF2-40B4-BE49-F238E27FC236}">
-                <a16:creationId xmlns:a16="http://schemas.microsoft.com/office/drawing/2014/main" id="{B9EF05F0-8FAA-4A1C-9918-1C3F87562252}"/>
+                <a16:creationId xmlns:a16="http://schemas.microsoft.com/office/drawing/2014/main" id="{04E2F5D1-3AAB-43D5-AAF8-AEE8E0891CA2}"/>
               </a:ext>
             </a:extLst>
           </p:cNvPr>
@@ -13865,7 +13999,7 @@
           <p:cNvPr id="37" name="collab-flow-step-2">
             <a:extLst xmlns:a="http://schemas.openxmlformats.org/drawingml/2006/main">
               <a:ext uri="{FF2B5EF4-FFF2-40B4-BE49-F238E27FC236}">
-                <a16:creationId xmlns:a16="http://schemas.microsoft.com/office/drawing/2014/main" id="{5BCCC36C-0FA8-47C9-9082-EE8BD2756F3B}"/>
+                <a16:creationId xmlns:a16="http://schemas.microsoft.com/office/drawing/2014/main" id="{4534EF5E-22D3-49B6-8724-2B1C1A99643A}"/>
               </a:ext>
             </a:extLst>
           </p:cNvPr>
@@ -13900,7 +14034,7 @@
           <p:cNvPr id="38" name="collab-flow-no-2">
             <a:extLst xmlns:a="http://schemas.openxmlformats.org/drawingml/2006/main">
               <a:ext uri="{FF2B5EF4-FFF2-40B4-BE49-F238E27FC236}">
-                <a16:creationId xmlns:a16="http://schemas.microsoft.com/office/drawing/2014/main" id="{CDA0A251-0EF5-4410-8656-256F45ECE7C6}"/>
+                <a16:creationId xmlns:a16="http://schemas.microsoft.com/office/drawing/2014/main" id="{21E802AB-1174-467B-9A00-1313DD825844}"/>
               </a:ext>
             </a:extLst>
           </p:cNvPr>
@@ -13956,7 +14090,7 @@
           <p:cNvPr id="39" name="collab-flow-title-2">
             <a:extLst xmlns:a="http://schemas.openxmlformats.org/drawingml/2006/main">
               <a:ext uri="{FF2B5EF4-FFF2-40B4-BE49-F238E27FC236}">
-                <a16:creationId xmlns:a16="http://schemas.microsoft.com/office/drawing/2014/main" id="{0B8C23B3-41E4-4968-9A0A-0346A54E12E9}"/>
+                <a16:creationId xmlns:a16="http://schemas.microsoft.com/office/drawing/2014/main" id="{125B3102-AE0F-4961-A1D4-B4FCDFFCB2C1}"/>
               </a:ext>
             </a:extLst>
           </p:cNvPr>
@@ -14006,7 +14140,7 @@
           <p:cNvPr id="40" name="collab-flow-body-2">
             <a:extLst xmlns:a="http://schemas.openxmlformats.org/drawingml/2006/main">
               <a:ext uri="{FF2B5EF4-FFF2-40B4-BE49-F238E27FC236}">
-                <a16:creationId xmlns:a16="http://schemas.microsoft.com/office/drawing/2014/main" id="{EA884AD4-1EB7-4FBC-97F3-F8CC2D7938D7}"/>
+                <a16:creationId xmlns:a16="http://schemas.microsoft.com/office/drawing/2014/main" id="{969C5AB7-6AA7-4A24-A123-ADD67EFA0278}"/>
               </a:ext>
             </a:extLst>
           </p:cNvPr>
@@ -14073,7 +14207,7 @@
           <p:cNvPr id="41" name="collab-flow-arrow-2">
             <a:extLst xmlns:a="http://schemas.openxmlformats.org/drawingml/2006/main">
               <a:ext uri="{FF2B5EF4-FFF2-40B4-BE49-F238E27FC236}">
-                <a16:creationId xmlns:a16="http://schemas.microsoft.com/office/drawing/2014/main" id="{6A820557-6D18-46DC-B4D1-F9636B5F11D5}"/>
+                <a16:creationId xmlns:a16="http://schemas.microsoft.com/office/drawing/2014/main" id="{CB397057-51CE-45C3-B68C-1045F8853AEB}"/>
               </a:ext>
             </a:extLst>
           </p:cNvPr>
@@ -14123,7 +14257,7 @@
           <p:cNvPr id="42" name="collab-flow-step-3">
             <a:extLst xmlns:a="http://schemas.openxmlformats.org/drawingml/2006/main">
               <a:ext uri="{FF2B5EF4-FFF2-40B4-BE49-F238E27FC236}">
-                <a16:creationId xmlns:a16="http://schemas.microsoft.com/office/drawing/2014/main" id="{C05FFA4B-42D4-445B-861B-23375C9D28B6}"/>
+                <a16:creationId xmlns:a16="http://schemas.microsoft.com/office/drawing/2014/main" id="{46847F1C-9F06-4B1B-B26A-11E3A427C1FF}"/>
               </a:ext>
             </a:extLst>
           </p:cNvPr>
@@ -14158,7 +14292,7 @@
           <p:cNvPr id="43" name="collab-flow-no-3">
             <a:extLst xmlns:a="http://schemas.openxmlformats.org/drawingml/2006/main">
               <a:ext uri="{FF2B5EF4-FFF2-40B4-BE49-F238E27FC236}">
-                <a16:creationId xmlns:a16="http://schemas.microsoft.com/office/drawing/2014/main" id="{4157E4E7-97FF-4A3D-8D70-67202DF871E2}"/>
+                <a16:creationId xmlns:a16="http://schemas.microsoft.com/office/drawing/2014/main" id="{82E3BDFA-930B-4DFA-8328-17C0F971DA73}"/>
               </a:ext>
             </a:extLst>
           </p:cNvPr>
@@ -14214,7 +14348,7 @@
           <p:cNvPr id="44" name="collab-flow-title-3">
             <a:extLst xmlns:a="http://schemas.openxmlformats.org/drawingml/2006/main">
               <a:ext uri="{FF2B5EF4-FFF2-40B4-BE49-F238E27FC236}">
-                <a16:creationId xmlns:a16="http://schemas.microsoft.com/office/drawing/2014/main" id="{29326225-BB6F-44B3-BC37-58667F28809E}"/>
+                <a16:creationId xmlns:a16="http://schemas.microsoft.com/office/drawing/2014/main" id="{B466603D-8583-40EF-AFBE-5A811F0D550B}"/>
               </a:ext>
             </a:extLst>
           </p:cNvPr>
@@ -14264,7 +14398,7 @@
           <p:cNvPr id="45" name="collab-flow-body-3">
             <a:extLst xmlns:a="http://schemas.openxmlformats.org/drawingml/2006/main">
               <a:ext uri="{FF2B5EF4-FFF2-40B4-BE49-F238E27FC236}">
-                <a16:creationId xmlns:a16="http://schemas.microsoft.com/office/drawing/2014/main" id="{95ACBAEE-6644-48A1-ABF6-34F6BBBDE092}"/>
+                <a16:creationId xmlns:a16="http://schemas.microsoft.com/office/drawing/2014/main" id="{B7D66E13-894F-40AC-8DA7-31B9407247AC}"/>
               </a:ext>
             </a:extLst>
           </p:cNvPr>
@@ -14331,7 +14465,7 @@
           <p:cNvPr id="46" name="collab-flow-arrow-3">
             <a:extLst xmlns:a="http://schemas.openxmlformats.org/drawingml/2006/main">
               <a:ext uri="{FF2B5EF4-FFF2-40B4-BE49-F238E27FC236}">
-                <a16:creationId xmlns:a16="http://schemas.microsoft.com/office/drawing/2014/main" id="{EA8C0D94-690B-4DCC-9E2A-8A00C55E8B3E}"/>
+                <a16:creationId xmlns:a16="http://schemas.microsoft.com/office/drawing/2014/main" id="{CF790700-AB9B-42EB-A2A2-CDC729A03DCA}"/>
               </a:ext>
             </a:extLst>
           </p:cNvPr>
@@ -14381,7 +14515,7 @@
           <p:cNvPr id="47" name="collab-flow-step-4">
             <a:extLst xmlns:a="http://schemas.openxmlformats.org/drawingml/2006/main">
               <a:ext uri="{FF2B5EF4-FFF2-40B4-BE49-F238E27FC236}">
-                <a16:creationId xmlns:a16="http://schemas.microsoft.com/office/drawing/2014/main" id="{E0820FD3-4CDB-47D5-BE3A-4F8B27564184}"/>
+                <a16:creationId xmlns:a16="http://schemas.microsoft.com/office/drawing/2014/main" id="{5704B333-6FAB-40A1-B292-CC913E50F17A}"/>
               </a:ext>
             </a:extLst>
           </p:cNvPr>
@@ -14416,7 +14550,7 @@
           <p:cNvPr id="48" name="collab-flow-no-4">
             <a:extLst xmlns:a="http://schemas.openxmlformats.org/drawingml/2006/main">
               <a:ext uri="{FF2B5EF4-FFF2-40B4-BE49-F238E27FC236}">
-                <a16:creationId xmlns:a16="http://schemas.microsoft.com/office/drawing/2014/main" id="{E2C78C33-8F73-45E3-95CC-52612C83D528}"/>
+                <a16:creationId xmlns:a16="http://schemas.microsoft.com/office/drawing/2014/main" id="{D2A1AFA7-581D-4FD2-8142-263B2B560950}"/>
               </a:ext>
             </a:extLst>
           </p:cNvPr>
@@ -14472,7 +14606,7 @@
           <p:cNvPr id="49" name="collab-flow-title-4">
             <a:extLst xmlns:a="http://schemas.openxmlformats.org/drawingml/2006/main">
               <a:ext uri="{FF2B5EF4-FFF2-40B4-BE49-F238E27FC236}">
-                <a16:creationId xmlns:a16="http://schemas.microsoft.com/office/drawing/2014/main" id="{D1E6299F-07BC-405C-B8EC-A925C698A61D}"/>
+                <a16:creationId xmlns:a16="http://schemas.microsoft.com/office/drawing/2014/main" id="{D44B0A20-8EAF-4AFA-BA11-92C94A4E19F8}"/>
               </a:ext>
             </a:extLst>
           </p:cNvPr>
@@ -14522,7 +14656,7 @@
           <p:cNvPr id="50" name="collab-flow-body-4">
             <a:extLst xmlns:a="http://schemas.openxmlformats.org/drawingml/2006/main">
               <a:ext uri="{FF2B5EF4-FFF2-40B4-BE49-F238E27FC236}">
-                <a16:creationId xmlns:a16="http://schemas.microsoft.com/office/drawing/2014/main" id="{83F38D6A-4CB6-4AAA-BC21-D1DE780ACC28}"/>
+                <a16:creationId xmlns:a16="http://schemas.microsoft.com/office/drawing/2014/main" id="{43B79919-671A-4D0F-AA95-FD8765D43EC3}"/>
               </a:ext>
             </a:extLst>
           </p:cNvPr>
@@ -14589,7 +14723,7 @@
           <p:cNvPr id="51" name="collab-flow-arrow-4">
             <a:extLst xmlns:a="http://schemas.openxmlformats.org/drawingml/2006/main">
               <a:ext uri="{FF2B5EF4-FFF2-40B4-BE49-F238E27FC236}">
-                <a16:creationId xmlns:a16="http://schemas.microsoft.com/office/drawing/2014/main" id="{80109B93-AD6B-4359-845A-1AAB1A6DB6A3}"/>
+                <a16:creationId xmlns:a16="http://schemas.microsoft.com/office/drawing/2014/main" id="{C91A0096-FB28-45C6-B9A5-2C8799501F0C}"/>
               </a:ext>
             </a:extLst>
           </p:cNvPr>
@@ -14639,7 +14773,7 @@
           <p:cNvPr id="52" name="collab-flow-step-5">
             <a:extLst xmlns:a="http://schemas.openxmlformats.org/drawingml/2006/main">
               <a:ext uri="{FF2B5EF4-FFF2-40B4-BE49-F238E27FC236}">
-                <a16:creationId xmlns:a16="http://schemas.microsoft.com/office/drawing/2014/main" id="{62BF5EBD-371C-4634-9F02-C6D022282F28}"/>
+                <a16:creationId xmlns:a16="http://schemas.microsoft.com/office/drawing/2014/main" id="{4771CF3C-A458-4231-9E7A-E2C09E1B0F81}"/>
               </a:ext>
             </a:extLst>
           </p:cNvPr>
@@ -14674,7 +14808,7 @@
           <p:cNvPr id="53" name="collab-flow-no-5">
             <a:extLst xmlns:a="http://schemas.openxmlformats.org/drawingml/2006/main">
               <a:ext uri="{FF2B5EF4-FFF2-40B4-BE49-F238E27FC236}">
-                <a16:creationId xmlns:a16="http://schemas.microsoft.com/office/drawing/2014/main" id="{380E6CB0-BCC4-423F-B77A-33733EDCE6F4}"/>
+                <a16:creationId xmlns:a16="http://schemas.microsoft.com/office/drawing/2014/main" id="{2383A6A3-D12C-4B07-9B04-2F214326AC08}"/>
               </a:ext>
             </a:extLst>
           </p:cNvPr>
@@ -14730,7 +14864,7 @@
           <p:cNvPr id="54" name="collab-flow-title-5">
             <a:extLst xmlns:a="http://schemas.openxmlformats.org/drawingml/2006/main">
               <a:ext uri="{FF2B5EF4-FFF2-40B4-BE49-F238E27FC236}">
-                <a16:creationId xmlns:a16="http://schemas.microsoft.com/office/drawing/2014/main" id="{254893B7-B1DE-4527-AB3A-A9B630398AB0}"/>
+                <a16:creationId xmlns:a16="http://schemas.microsoft.com/office/drawing/2014/main" id="{BBB3EE9D-BB81-4380-A572-3F3F888908DB}"/>
               </a:ext>
             </a:extLst>
           </p:cNvPr>
@@ -14780,7 +14914,7 @@
           <p:cNvPr id="55" name="collab-flow-body-5">
             <a:extLst xmlns:a="http://schemas.openxmlformats.org/drawingml/2006/main">
               <a:ext uri="{FF2B5EF4-FFF2-40B4-BE49-F238E27FC236}">
-                <a16:creationId xmlns:a16="http://schemas.microsoft.com/office/drawing/2014/main" id="{53DE79D3-535D-4B10-93E8-C1E16DDEAC71}"/>
+                <a16:creationId xmlns:a16="http://schemas.microsoft.com/office/drawing/2014/main" id="{D9268798-0C2D-4D99-BFAD-EF8F32532D46}"/>
               </a:ext>
             </a:extLst>
           </p:cNvPr>
@@ -14847,7 +14981,7 @@
           <p:cNvPr id="56" name="pm-points-title">
             <a:extLst xmlns:a="http://schemas.openxmlformats.org/drawingml/2006/main">
               <a:ext uri="{FF2B5EF4-FFF2-40B4-BE49-F238E27FC236}">
-                <a16:creationId xmlns:a16="http://schemas.microsoft.com/office/drawing/2014/main" id="{A7491B5E-6A55-4E10-8B1E-86B682B69894}"/>
+                <a16:creationId xmlns:a16="http://schemas.microsoft.com/office/drawing/2014/main" id="{BA0D61FD-2FB8-4657-93D3-A2890845F141}"/>
               </a:ext>
             </a:extLst>
           </p:cNvPr>
@@ -14897,7 +15031,7 @@
           <p:cNvPr id="57" name="pm-point-1">
             <a:extLst xmlns:a="http://schemas.openxmlformats.org/drawingml/2006/main">
               <a:ext uri="{FF2B5EF4-FFF2-40B4-BE49-F238E27FC236}">
-                <a16:creationId xmlns:a16="http://schemas.microsoft.com/office/drawing/2014/main" id="{327C6F12-583B-494A-A860-F55325A915FF}"/>
+                <a16:creationId xmlns:a16="http://schemas.microsoft.com/office/drawing/2014/main" id="{6B47073D-39A3-4359-818E-E3938F249FA3}"/>
               </a:ext>
             </a:extLst>
           </p:cNvPr>
@@ -14932,7 +15066,7 @@
           <p:cNvPr id="58" name="pm-point-bar-1">
             <a:extLst xmlns:a="http://schemas.openxmlformats.org/drawingml/2006/main">
               <a:ext uri="{FF2B5EF4-FFF2-40B4-BE49-F238E27FC236}">
-                <a16:creationId xmlns:a16="http://schemas.microsoft.com/office/drawing/2014/main" id="{AE12F192-B14F-4E88-8507-ED3E41053D10}"/>
+                <a16:creationId xmlns:a16="http://schemas.microsoft.com/office/drawing/2014/main" id="{FD6D9794-B950-4F5A-A1BD-35C9B40B4D6B}"/>
               </a:ext>
             </a:extLst>
           </p:cNvPr>
@@ -14965,7 +15099,7 @@
           <p:cNvPr id="59" name="pm-point-label-1">
             <a:extLst xmlns:a="http://schemas.openxmlformats.org/drawingml/2006/main">
               <a:ext uri="{FF2B5EF4-FFF2-40B4-BE49-F238E27FC236}">
-                <a16:creationId xmlns:a16="http://schemas.microsoft.com/office/drawing/2014/main" id="{DB716F90-D566-46AF-BF5F-D3639B239F1A}"/>
+                <a16:creationId xmlns:a16="http://schemas.microsoft.com/office/drawing/2014/main" id="{F8E8A94E-C269-4FA1-85BE-12CFF868BE01}"/>
               </a:ext>
             </a:extLst>
           </p:cNvPr>
@@ -15015,7 +15149,7 @@
           <p:cNvPr id="60" name="pm-point-body-1">
             <a:extLst xmlns:a="http://schemas.openxmlformats.org/drawingml/2006/main">
               <a:ext uri="{FF2B5EF4-FFF2-40B4-BE49-F238E27FC236}">
-                <a16:creationId xmlns:a16="http://schemas.microsoft.com/office/drawing/2014/main" id="{7C9C5543-36F1-4DD6-9F0D-885484B38212}"/>
+                <a16:creationId xmlns:a16="http://schemas.microsoft.com/office/drawing/2014/main" id="{2BC89429-E242-42F9-96E4-85BD89823D9F}"/>
               </a:ext>
             </a:extLst>
           </p:cNvPr>
@@ -15065,7 +15199,7 @@
           <p:cNvPr id="61" name="pm-point-2">
             <a:extLst xmlns:a="http://schemas.openxmlformats.org/drawingml/2006/main">
               <a:ext uri="{FF2B5EF4-FFF2-40B4-BE49-F238E27FC236}">
-                <a16:creationId xmlns:a16="http://schemas.microsoft.com/office/drawing/2014/main" id="{4505E69E-6A5F-4700-AB39-40973B6E9955}"/>
+                <a16:creationId xmlns:a16="http://schemas.microsoft.com/office/drawing/2014/main" id="{D1876C62-1CFD-4AEF-A47A-C6027076C13F}"/>
               </a:ext>
             </a:extLst>
           </p:cNvPr>
@@ -15100,7 +15234,7 @@
           <p:cNvPr id="62" name="pm-point-bar-2">
             <a:extLst xmlns:a="http://schemas.openxmlformats.org/drawingml/2006/main">
               <a:ext uri="{FF2B5EF4-FFF2-40B4-BE49-F238E27FC236}">
-                <a16:creationId xmlns:a16="http://schemas.microsoft.com/office/drawing/2014/main" id="{6CC939E3-305E-4A11-A6B6-B44301955BEA}"/>
+                <a16:creationId xmlns:a16="http://schemas.microsoft.com/office/drawing/2014/main" id="{E3914884-34C0-40C1-94D7-7606FD65389F}"/>
               </a:ext>
             </a:extLst>
           </p:cNvPr>
@@ -15133,7 +15267,7 @@
           <p:cNvPr id="63" name="pm-point-label-2">
             <a:extLst xmlns:a="http://schemas.openxmlformats.org/drawingml/2006/main">
               <a:ext uri="{FF2B5EF4-FFF2-40B4-BE49-F238E27FC236}">
-                <a16:creationId xmlns:a16="http://schemas.microsoft.com/office/drawing/2014/main" id="{49D1B667-118D-4FF2-8E47-B1C98D613170}"/>
+                <a16:creationId xmlns:a16="http://schemas.microsoft.com/office/drawing/2014/main" id="{3205F012-A741-458D-9D35-2D81883318CA}"/>
               </a:ext>
             </a:extLst>
           </p:cNvPr>
@@ -15183,7 +15317,7 @@
           <p:cNvPr id="64" name="pm-point-body-2">
             <a:extLst xmlns:a="http://schemas.openxmlformats.org/drawingml/2006/main">
               <a:ext uri="{FF2B5EF4-FFF2-40B4-BE49-F238E27FC236}">
-                <a16:creationId xmlns:a16="http://schemas.microsoft.com/office/drawing/2014/main" id="{DE8FFD82-141E-41EF-AA18-30D7B55E84D3}"/>
+                <a16:creationId xmlns:a16="http://schemas.microsoft.com/office/drawing/2014/main" id="{4762CA77-7B6B-4D2E-AC11-9CABB91A52E9}"/>
               </a:ext>
             </a:extLst>
           </p:cNvPr>
@@ -15233,7 +15367,7 @@
           <p:cNvPr id="65" name="pm-point-3">
             <a:extLst xmlns:a="http://schemas.openxmlformats.org/drawingml/2006/main">
               <a:ext uri="{FF2B5EF4-FFF2-40B4-BE49-F238E27FC236}">
-                <a16:creationId xmlns:a16="http://schemas.microsoft.com/office/drawing/2014/main" id="{A6305CF2-348E-4240-B55D-B42757EFC4E7}"/>
+                <a16:creationId xmlns:a16="http://schemas.microsoft.com/office/drawing/2014/main" id="{96A27567-6AFD-4971-8EBC-D35CD1FEBFAE}"/>
               </a:ext>
             </a:extLst>
           </p:cNvPr>
@@ -15268,7 +15402,7 @@
           <p:cNvPr id="66" name="pm-point-bar-3">
             <a:extLst xmlns:a="http://schemas.openxmlformats.org/drawingml/2006/main">
               <a:ext uri="{FF2B5EF4-FFF2-40B4-BE49-F238E27FC236}">
-                <a16:creationId xmlns:a16="http://schemas.microsoft.com/office/drawing/2014/main" id="{0FE04E26-66B1-4ACD-AC41-8836B88EBDCE}"/>
+                <a16:creationId xmlns:a16="http://schemas.microsoft.com/office/drawing/2014/main" id="{681C3C38-A5E1-4E0E-A70D-92842DCDB4FF}"/>
               </a:ext>
             </a:extLst>
           </p:cNvPr>
@@ -15301,7 +15435,7 @@
           <p:cNvPr id="67" name="pm-point-label-3">
             <a:extLst xmlns:a="http://schemas.openxmlformats.org/drawingml/2006/main">
               <a:ext uri="{FF2B5EF4-FFF2-40B4-BE49-F238E27FC236}">
-                <a16:creationId xmlns:a16="http://schemas.microsoft.com/office/drawing/2014/main" id="{ABB1FFB6-9406-4998-A002-B0C319BC3750}"/>
+                <a16:creationId xmlns:a16="http://schemas.microsoft.com/office/drawing/2014/main" id="{22651C25-683A-4EAD-8C7C-4C4A209307BB}"/>
               </a:ext>
             </a:extLst>
           </p:cNvPr>
@@ -15351,7 +15485,7 @@
           <p:cNvPr id="68" name="pm-point-body-3">
             <a:extLst xmlns:a="http://schemas.openxmlformats.org/drawingml/2006/main">
               <a:ext uri="{FF2B5EF4-FFF2-40B4-BE49-F238E27FC236}">
-                <a16:creationId xmlns:a16="http://schemas.microsoft.com/office/drawing/2014/main" id="{1387DA5F-8E12-4E96-AC8F-BA5B5FF7EE0C}"/>
+                <a16:creationId xmlns:a16="http://schemas.microsoft.com/office/drawing/2014/main" id="{44C23B2C-672D-4B6C-A4CE-EA08F9069570}"/>
               </a:ext>
             </a:extLst>
           </p:cNvPr>
@@ -15401,7 +15535,7 @@
           <p:cNvPr id="69" name="pm-point-4">
             <a:extLst xmlns:a="http://schemas.openxmlformats.org/drawingml/2006/main">
               <a:ext uri="{FF2B5EF4-FFF2-40B4-BE49-F238E27FC236}">
-                <a16:creationId xmlns:a16="http://schemas.microsoft.com/office/drawing/2014/main" id="{23627E4A-87CC-4F91-947C-E463B2A11221}"/>
+                <a16:creationId xmlns:a16="http://schemas.microsoft.com/office/drawing/2014/main" id="{F70786F9-E1DB-46FA-BA08-F282C9199B6D}"/>
               </a:ext>
             </a:extLst>
           </p:cNvPr>
@@ -15436,7 +15570,7 @@
           <p:cNvPr id="70" name="pm-point-bar-4">
             <a:extLst xmlns:a="http://schemas.openxmlformats.org/drawingml/2006/main">
               <a:ext uri="{FF2B5EF4-FFF2-40B4-BE49-F238E27FC236}">
-                <a16:creationId xmlns:a16="http://schemas.microsoft.com/office/drawing/2014/main" id="{D8A6EDDA-AFBA-4902-AB32-869A14CC93E0}"/>
+                <a16:creationId xmlns:a16="http://schemas.microsoft.com/office/drawing/2014/main" id="{E50F909E-EC18-4815-802A-1BDB540BE2CA}"/>
               </a:ext>
             </a:extLst>
           </p:cNvPr>
@@ -15469,7 +15603,7 @@
           <p:cNvPr id="71" name="pm-point-label-4">
             <a:extLst xmlns:a="http://schemas.openxmlformats.org/drawingml/2006/main">
               <a:ext uri="{FF2B5EF4-FFF2-40B4-BE49-F238E27FC236}">
-                <a16:creationId xmlns:a16="http://schemas.microsoft.com/office/drawing/2014/main" id="{60A691B2-DB87-4542-9C9A-CB2106517A13}"/>
+                <a16:creationId xmlns:a16="http://schemas.microsoft.com/office/drawing/2014/main" id="{72E7DD99-3ADD-4CD1-BFBE-E375D7E592AA}"/>
               </a:ext>
             </a:extLst>
           </p:cNvPr>
@@ -15519,7 +15653,7 @@
           <p:cNvPr id="72" name="pm-point-body-4">
             <a:extLst xmlns:a="http://schemas.openxmlformats.org/drawingml/2006/main">
               <a:ext uri="{FF2B5EF4-FFF2-40B4-BE49-F238E27FC236}">
-                <a16:creationId xmlns:a16="http://schemas.microsoft.com/office/drawing/2014/main" id="{95D206E0-7A04-49EF-8549-2C6D2FA40EFF}"/>
+                <a16:creationId xmlns:a16="http://schemas.microsoft.com/office/drawing/2014/main" id="{5DA4F347-76F7-4E46-B61F-45F39B6B9497}"/>
               </a:ext>
             </a:extLst>
           </p:cNvPr>
@@ -15569,7 +15703,7 @@
           <p:cNvPr id="73" name="collab-principle-panel">
             <a:extLst xmlns:a="http://schemas.openxmlformats.org/drawingml/2006/main">
               <a:ext uri="{FF2B5EF4-FFF2-40B4-BE49-F238E27FC236}">
-                <a16:creationId xmlns:a16="http://schemas.microsoft.com/office/drawing/2014/main" id="{7FF8A68B-864B-4768-BFE6-462445782034}"/>
+                <a16:creationId xmlns:a16="http://schemas.microsoft.com/office/drawing/2014/main" id="{EDC3A41F-291D-4B7B-B455-8BF02BAEB494}"/>
               </a:ext>
             </a:extLst>
           </p:cNvPr>
@@ -15604,7 +15738,7 @@
           <p:cNvPr id="74" name="collab-principle-label">
             <a:extLst xmlns:a="http://schemas.openxmlformats.org/drawingml/2006/main">
               <a:ext uri="{FF2B5EF4-FFF2-40B4-BE49-F238E27FC236}">
-                <a16:creationId xmlns:a16="http://schemas.microsoft.com/office/drawing/2014/main" id="{CCBD61E5-0D67-4D94-962E-814230089B6C}"/>
+                <a16:creationId xmlns:a16="http://schemas.microsoft.com/office/drawing/2014/main" id="{D016C2AB-8000-4167-9120-F6944A2F3F4E}"/>
               </a:ext>
             </a:extLst>
           </p:cNvPr>
@@ -15654,7 +15788,7 @@
           <p:cNvPr id="75" name="collab-principle-body">
             <a:extLst xmlns:a="http://schemas.openxmlformats.org/drawingml/2006/main">
               <a:ext uri="{FF2B5EF4-FFF2-40B4-BE49-F238E27FC236}">
-                <a16:creationId xmlns:a16="http://schemas.microsoft.com/office/drawing/2014/main" id="{07C02F0D-89EF-4AD2-9CD0-B219AD83D765}"/>
+                <a16:creationId xmlns:a16="http://schemas.microsoft.com/office/drawing/2014/main" id="{DF4A6D04-192E-43F5-B52F-9BFD427B989F}"/>
               </a:ext>
             </a:extLst>
           </p:cNvPr>
@@ -15702,7 +15836,5678 @@
     </p:spTree>
     <p:extLst>
       <p:ext uri="{BB962C8B-B14F-4D97-AF65-F5344CB8AC3E}">
-        <p14:creationId xmlns:p14="http://schemas.microsoft.com/office/powerpoint/2010/main" val="640420574"/>
+        <p14:creationId xmlns:p14="http://schemas.microsoft.com/office/powerpoint/2010/main" val="674555413"/>
+      </p:ext>
+    </p:extLst>
+  </p:cSld>
+</p:sld>
+</file>
+
+<file path=ppt/slides/slide6.xml><?xml version="1.0" encoding="utf-8"?>
+<p:sld xmlns:p="http://schemas.openxmlformats.org/presentationml/2006/main">
+  <p:cSld>
+    <p:bg>
+      <p:bgPr>
+        <a:solidFill xmlns:a="http://schemas.openxmlformats.org/drawingml/2006/main">
+          <a:srgbClr val="0B1020"/>
+        </a:solidFill>
+      </p:bgPr>
+    </p:bg>
+    <p:spTree>
+      <p:nvGrpSpPr>
+        <p:cNvPr id="1" name=""/>
+        <p:cNvGrpSpPr/>
+        <p:nvPr/>
+      </p:nvGrpSpPr>
+      <p:grpSpPr>
+        <a:xfrm xmlns:a="http://schemas.openxmlformats.org/drawingml/2006/main"/>
+      </p:grpSpPr>
+      <p:sp>
+        <p:nvSpPr>
+          <p:cNvPr id="1" name="top-accent">
+            <a:extLst xmlns:a="http://schemas.openxmlformats.org/drawingml/2006/main">
+              <a:ext uri="{FF2B5EF4-FFF2-40B4-BE49-F238E27FC236}">
+                <a16:creationId xmlns:a16="http://schemas.microsoft.com/office/drawing/2014/main" id="{9FE1A36E-5AD6-4FB6-8EC8-2DA387AB183A}"/>
+              </a:ext>
+            </a:extLst>
+          </p:cNvPr>
+          <p:cNvSpPr>
+            <a:spLocks xmlns:a="http://schemas.openxmlformats.org/drawingml/2006/main" noGrp="1"/>
+          </p:cNvSpPr>
+          <p:nvPr/>
+        </p:nvSpPr>
+        <p:spPr>
+          <a:xfrm xmlns:a="http://schemas.openxmlformats.org/drawingml/2006/main">
+            <a:off x="0" y="0"/>
+            <a:ext cx="12192000" cy="95250"/>
+          </a:xfrm>
+          <a:prstGeom xmlns:a="http://schemas.openxmlformats.org/drawingml/2006/main" prst="rect">
+            <a:avLst/>
+          </a:prstGeom>
+          <a:solidFill xmlns:a="http://schemas.openxmlformats.org/drawingml/2006/main">
+            <a:srgbClr val="00B8D9"/>
+          </a:solidFill>
+          <a:ln xmlns:a="http://schemas.openxmlformats.org/drawingml/2006/main" w="0">
+            <a:solidFill>
+              <a:srgbClr val="00B8D9"/>
+            </a:solidFill>
+            <a:prstDash val="solid"/>
+          </a:ln>
+        </p:spPr>
+      </p:sp>
+      <p:sp>
+        <p:nvSpPr>
+          <p:cNvPr id="2" name="left-accent">
+            <a:extLst xmlns:a="http://schemas.openxmlformats.org/drawingml/2006/main">
+              <a:ext uri="{FF2B5EF4-FFF2-40B4-BE49-F238E27FC236}">
+                <a16:creationId xmlns:a16="http://schemas.microsoft.com/office/drawing/2014/main" id="{7059062C-F983-4EE9-A203-904E3CCA0649}"/>
+              </a:ext>
+            </a:extLst>
+          </p:cNvPr>
+          <p:cNvSpPr>
+            <a:spLocks xmlns:a="http://schemas.openxmlformats.org/drawingml/2006/main" noGrp="1"/>
+          </p:cNvSpPr>
+          <p:nvPr/>
+        </p:nvSpPr>
+        <p:spPr>
+          <a:xfrm xmlns:a="http://schemas.openxmlformats.org/drawingml/2006/main">
+            <a:off x="0" y="0"/>
+            <a:ext cx="152400" cy="6858000"/>
+          </a:xfrm>
+          <a:prstGeom xmlns:a="http://schemas.openxmlformats.org/drawingml/2006/main" prst="rect">
+            <a:avLst/>
+          </a:prstGeom>
+          <a:solidFill xmlns:a="http://schemas.openxmlformats.org/drawingml/2006/main">
+            <a:srgbClr val="FF6B35"/>
+          </a:solidFill>
+          <a:ln xmlns:a="http://schemas.openxmlformats.org/drawingml/2006/main" w="0">
+            <a:solidFill>
+              <a:srgbClr val="FF6B35"/>
+            </a:solidFill>
+            <a:prstDash val="solid"/>
+          </a:ln>
+        </p:spPr>
+      </p:sp>
+      <p:sp>
+        <p:nvSpPr>
+          <p:cNvPr id="3" name="eyebrow">
+            <a:extLst xmlns:a="http://schemas.openxmlformats.org/drawingml/2006/main">
+              <a:ext uri="{FF2B5EF4-FFF2-40B4-BE49-F238E27FC236}">
+                <a16:creationId xmlns:a16="http://schemas.microsoft.com/office/drawing/2014/main" id="{07EF28C9-7C48-41A8-BBE9-D83215BFA805}"/>
+              </a:ext>
+            </a:extLst>
+          </p:cNvPr>
+          <p:cNvSpPr>
+            <a:spLocks xmlns:a="http://schemas.openxmlformats.org/drawingml/2006/main" noGrp="1"/>
+          </p:cNvSpPr>
+          <p:nvPr/>
+        </p:nvSpPr>
+        <p:spPr>
+          <a:xfrm xmlns:a="http://schemas.openxmlformats.org/drawingml/2006/main">
+            <a:off x="514350" y="361950"/>
+            <a:ext cx="5905500" cy="285750"/>
+          </a:xfrm>
+          <a:prstGeom xmlns:a="http://schemas.openxmlformats.org/drawingml/2006/main" prst="rect">
+            <a:avLst/>
+          </a:prstGeom>
+          <a:noFill xmlns:a="http://schemas.openxmlformats.org/drawingml/2006/main"/>
+          <a:ln xmlns:a="http://schemas.openxmlformats.org/drawingml/2006/main" w="0">
+            <a:noFill/>
+            <a:prstDash val="solid"/>
+          </a:ln>
+        </p:spPr>
+        <p:txBody>
+          <a:bodyPr xmlns:a="http://schemas.openxmlformats.org/drawingml/2006/main"/>
+          <a:lstStyle xmlns:a="http://schemas.openxmlformats.org/drawingml/2006/main"/>
+          <a:p xmlns:a="http://schemas.openxmlformats.org/drawingml/2006/main">
+            <a:pPr>
+              <a:defRPr sz="1125" b="1">
+                <a:solidFill>
+                  <a:srgbClr val="8BD9E8"/>
+                </a:solidFill>
+              </a:defRPr>
+            </a:pPr>
+            <a:r>
+              <a:rPr sz="1125" b="1">
+                <a:solidFill>
+                  <a:srgbClr val="8BD9E8"/>
+                </a:solidFill>
+              </a:rPr>
+              <a:t>BUILD QA RELEASE FLOW | PAGE 06</a:t>
+            </a:r>
+          </a:p>
+        </p:txBody>
+      </p:sp>
+      <p:sp>
+        <p:nvSpPr>
+          <p:cNvPr id="4" name="footer">
+            <a:extLst xmlns:a="http://schemas.openxmlformats.org/drawingml/2006/main">
+              <a:ext uri="{FF2B5EF4-FFF2-40B4-BE49-F238E27FC236}">
+                <a16:creationId xmlns:a16="http://schemas.microsoft.com/office/drawing/2014/main" id="{A9FBB266-2A5B-44BB-A33F-A8778705A5AC}"/>
+              </a:ext>
+            </a:extLst>
+          </p:cNvPr>
+          <p:cNvSpPr>
+            <a:spLocks xmlns:a="http://schemas.openxmlformats.org/drawingml/2006/main" noGrp="1"/>
+          </p:cNvSpPr>
+          <p:nvPr/>
+        </p:nvSpPr>
+        <p:spPr>
+          <a:xfrm xmlns:a="http://schemas.openxmlformats.org/drawingml/2006/main">
+            <a:off x="514350" y="6457950"/>
+            <a:ext cx="4953000" cy="266700"/>
+          </a:xfrm>
+          <a:prstGeom xmlns:a="http://schemas.openxmlformats.org/drawingml/2006/main" prst="rect">
+            <a:avLst/>
+          </a:prstGeom>
+          <a:noFill xmlns:a="http://schemas.openxmlformats.org/drawingml/2006/main"/>
+          <a:ln xmlns:a="http://schemas.openxmlformats.org/drawingml/2006/main" w="0">
+            <a:noFill/>
+            <a:prstDash val="solid"/>
+          </a:ln>
+        </p:spPr>
+        <p:txBody>
+          <a:bodyPr xmlns:a="http://schemas.openxmlformats.org/drawingml/2006/main"/>
+          <a:lstStyle xmlns:a="http://schemas.openxmlformats.org/drawingml/2006/main"/>
+          <a:p xmlns:a="http://schemas.openxmlformats.org/drawingml/2006/main">
+            <a:pPr>
+              <a:defRPr sz="1125">
+                <a:solidFill>
+                  <a:srgbClr val="94A3B8"/>
+                </a:solidFill>
+              </a:defRPr>
+            </a:pPr>
+            <a:r>
+              <a:rPr sz="1125">
+                <a:solidFill>
+                  <a:srgbClr val="94A3B8"/>
+                </a:solidFill>
+              </a:rPr>
+              <a:t>HIT2 일본 서비스 런칭 6개월 전 로드맵</a:t>
+            </a:r>
+          </a:p>
+        </p:txBody>
+      </p:sp>
+      <p:sp>
+        <p:nvSpPr>
+          <p:cNvPr id="5" name="page-no">
+            <a:extLst xmlns:a="http://schemas.openxmlformats.org/drawingml/2006/main">
+              <a:ext uri="{FF2B5EF4-FFF2-40B4-BE49-F238E27FC236}">
+                <a16:creationId xmlns:a16="http://schemas.microsoft.com/office/drawing/2014/main" id="{985A60D2-B976-4032-9AED-C0E77DBE1291}"/>
+              </a:ext>
+            </a:extLst>
+          </p:cNvPr>
+          <p:cNvSpPr>
+            <a:spLocks xmlns:a="http://schemas.openxmlformats.org/drawingml/2006/main" noGrp="1"/>
+          </p:cNvSpPr>
+          <p:nvPr/>
+        </p:nvSpPr>
+        <p:spPr>
+          <a:xfrm xmlns:a="http://schemas.openxmlformats.org/drawingml/2006/main">
+            <a:off x="10953750" y="6457950"/>
+            <a:ext cx="419100" cy="266700"/>
+          </a:xfrm>
+          <a:prstGeom xmlns:a="http://schemas.openxmlformats.org/drawingml/2006/main" prst="rect">
+            <a:avLst/>
+          </a:prstGeom>
+          <a:noFill xmlns:a="http://schemas.openxmlformats.org/drawingml/2006/main"/>
+          <a:ln xmlns:a="http://schemas.openxmlformats.org/drawingml/2006/main" w="0">
+            <a:noFill/>
+            <a:prstDash val="solid"/>
+          </a:ln>
+        </p:spPr>
+        <p:txBody>
+          <a:bodyPr xmlns:a="http://schemas.openxmlformats.org/drawingml/2006/main"/>
+          <a:lstStyle xmlns:a="http://schemas.openxmlformats.org/drawingml/2006/main"/>
+          <a:p xmlns:a="http://schemas.openxmlformats.org/drawingml/2006/main">
+            <a:pPr algn="r">
+              <a:defRPr sz="1200" b="1">
+                <a:solidFill>
+                  <a:srgbClr val="94A3B8"/>
+                </a:solidFill>
+              </a:defRPr>
+            </a:pPr>
+            <a:r>
+              <a:rPr sz="1200" b="1">
+                <a:solidFill>
+                  <a:srgbClr val="94A3B8"/>
+                </a:solidFill>
+              </a:rPr>
+              <a:t>06</a:t>
+            </a:r>
+          </a:p>
+        </p:txBody>
+      </p:sp>
+      <p:sp>
+        <p:nvSpPr>
+          <p:cNvPr id="6" name="title-06">
+            <a:extLst xmlns:a="http://schemas.openxmlformats.org/drawingml/2006/main">
+              <a:ext uri="{FF2B5EF4-FFF2-40B4-BE49-F238E27FC236}">
+                <a16:creationId xmlns:a16="http://schemas.microsoft.com/office/drawing/2014/main" id="{6F1A3AAB-E39C-4FF1-9DFD-B9973BF273C2}"/>
+              </a:ext>
+            </a:extLst>
+          </p:cNvPr>
+          <p:cNvSpPr>
+            <a:spLocks xmlns:a="http://schemas.openxmlformats.org/drawingml/2006/main" noGrp="1"/>
+          </p:cNvSpPr>
+          <p:nvPr/>
+        </p:nvSpPr>
+        <p:spPr>
+          <a:xfrm xmlns:a="http://schemas.openxmlformats.org/drawingml/2006/main">
+            <a:off x="514350" y="781050"/>
+            <a:ext cx="10572750" cy="533400"/>
+          </a:xfrm>
+          <a:prstGeom xmlns:a="http://schemas.openxmlformats.org/drawingml/2006/main" prst="rect">
+            <a:avLst/>
+          </a:prstGeom>
+          <a:noFill xmlns:a="http://schemas.openxmlformats.org/drawingml/2006/main"/>
+          <a:ln xmlns:a="http://schemas.openxmlformats.org/drawingml/2006/main" w="0">
+            <a:noFill/>
+            <a:prstDash val="solid"/>
+          </a:ln>
+        </p:spPr>
+        <p:txBody>
+          <a:bodyPr xmlns:a="http://schemas.openxmlformats.org/drawingml/2006/main"/>
+          <a:lstStyle xmlns:a="http://schemas.openxmlformats.org/drawingml/2006/main"/>
+          <a:p xmlns:a="http://schemas.openxmlformats.org/drawingml/2006/main">
+            <a:pPr>
+              <a:defRPr sz="2550" b="1">
+                <a:solidFill>
+                  <a:srgbClr val="FFFFFF"/>
+                </a:solidFill>
+              </a:defRPr>
+            </a:pPr>
+            <a:r>
+              <a:rPr sz="2550" b="1">
+                <a:solidFill>
+                  <a:srgbClr val="FFFFFF"/>
+                </a:solidFill>
+              </a:rPr>
+              <a:t>릴리즈 운영은 빌드·QA·검수 상태를 같은 기준으로 묶어 판단합니다</a:t>
+            </a:r>
+          </a:p>
+        </p:txBody>
+      </p:sp>
+      <p:sp>
+        <p:nvSpPr>
+          <p:cNvPr id="7" name="subtitle-06">
+            <a:extLst xmlns:a="http://schemas.openxmlformats.org/drawingml/2006/main">
+              <a:ext uri="{FF2B5EF4-FFF2-40B4-BE49-F238E27FC236}">
+                <a16:creationId xmlns:a16="http://schemas.microsoft.com/office/drawing/2014/main" id="{B4E1D7C4-B072-4262-9F15-19F7CCDAE257}"/>
+              </a:ext>
+            </a:extLst>
+          </p:cNvPr>
+          <p:cNvSpPr>
+            <a:spLocks xmlns:a="http://schemas.openxmlformats.org/drawingml/2006/main" noGrp="1"/>
+          </p:cNvSpPr>
+          <p:nvPr/>
+        </p:nvSpPr>
+        <p:spPr>
+          <a:xfrm xmlns:a="http://schemas.openxmlformats.org/drawingml/2006/main">
+            <a:off x="533400" y="1371600"/>
+            <a:ext cx="10287000" cy="323850"/>
+          </a:xfrm>
+          <a:prstGeom xmlns:a="http://schemas.openxmlformats.org/drawingml/2006/main" prst="rect">
+            <a:avLst/>
+          </a:prstGeom>
+          <a:noFill xmlns:a="http://schemas.openxmlformats.org/drawingml/2006/main"/>
+          <a:ln xmlns:a="http://schemas.openxmlformats.org/drawingml/2006/main" w="0">
+            <a:noFill/>
+            <a:prstDash val="solid"/>
+          </a:ln>
+        </p:spPr>
+        <p:txBody>
+          <a:bodyPr xmlns:a="http://schemas.openxmlformats.org/drawingml/2006/main"/>
+          <a:lstStyle xmlns:a="http://schemas.openxmlformats.org/drawingml/2006/main"/>
+          <a:p xmlns:a="http://schemas.openxmlformats.org/drawingml/2006/main">
+            <a:pPr>
+              <a:defRPr sz="1275">
+                <a:solidFill>
+                  <a:srgbClr val="CBD5E1"/>
+                </a:solidFill>
+              </a:defRPr>
+            </a:pPr>
+            <a:r>
+              <a:rPr sz="1275">
+                <a:solidFill>
+                  <a:srgbClr val="CBD5E1"/>
+                </a:solidFill>
+              </a:rPr>
+              <a:t>Perforce 기반 버전 관리와 QA 결과, 퍼블리셔 검수 피드백을 연결해 릴리즈 후보 판단 기준을 고정합니다.</a:t>
+            </a:r>
+          </a:p>
+        </p:txBody>
+      </p:sp>
+      <p:sp>
+        <p:nvSpPr>
+          <p:cNvPr id="8" name="release-flow-title">
+            <a:extLst xmlns:a="http://schemas.openxmlformats.org/drawingml/2006/main">
+              <a:ext uri="{FF2B5EF4-FFF2-40B4-BE49-F238E27FC236}">
+                <a16:creationId xmlns:a16="http://schemas.microsoft.com/office/drawing/2014/main" id="{47F53654-FDD8-4A97-87BE-43D458F8455C}"/>
+              </a:ext>
+            </a:extLst>
+          </p:cNvPr>
+          <p:cNvSpPr>
+            <a:spLocks xmlns:a="http://schemas.openxmlformats.org/drawingml/2006/main" noGrp="1"/>
+          </p:cNvSpPr>
+          <p:nvPr/>
+        </p:nvSpPr>
+        <p:spPr>
+          <a:xfrm xmlns:a="http://schemas.openxmlformats.org/drawingml/2006/main">
+            <a:off x="514350" y="1924050"/>
+            <a:ext cx="2095500" cy="285750"/>
+          </a:xfrm>
+          <a:prstGeom xmlns:a="http://schemas.openxmlformats.org/drawingml/2006/main" prst="rect">
+            <a:avLst/>
+          </a:prstGeom>
+          <a:noFill xmlns:a="http://schemas.openxmlformats.org/drawingml/2006/main"/>
+          <a:ln xmlns:a="http://schemas.openxmlformats.org/drawingml/2006/main" w="0">
+            <a:noFill/>
+            <a:prstDash val="solid"/>
+          </a:ln>
+        </p:spPr>
+        <p:txBody>
+          <a:bodyPr xmlns:a="http://schemas.openxmlformats.org/drawingml/2006/main"/>
+          <a:lstStyle xmlns:a="http://schemas.openxmlformats.org/drawingml/2006/main"/>
+          <a:p xmlns:a="http://schemas.openxmlformats.org/drawingml/2006/main">
+            <a:pPr>
+              <a:defRPr sz="1650" b="1">
+                <a:solidFill>
+                  <a:srgbClr val="FFFFFF"/>
+                </a:solidFill>
+              </a:defRPr>
+            </a:pPr>
+            <a:r>
+              <a:rPr sz="1650" b="1">
+                <a:solidFill>
+                  <a:srgbClr val="FFFFFF"/>
+                </a:solidFill>
+              </a:rPr>
+              <a:t>릴리즈 운영 흐름</a:t>
+            </a:r>
+          </a:p>
+        </p:txBody>
+      </p:sp>
+      <p:sp>
+        <p:nvSpPr>
+          <p:cNvPr id="9" name="release-flow-note">
+            <a:extLst xmlns:a="http://schemas.openxmlformats.org/drawingml/2006/main">
+              <a:ext uri="{FF2B5EF4-FFF2-40B4-BE49-F238E27FC236}">
+                <a16:creationId xmlns:a16="http://schemas.microsoft.com/office/drawing/2014/main" id="{A8382150-C147-455A-B29B-07A40145FFBB}"/>
+              </a:ext>
+            </a:extLst>
+          </p:cNvPr>
+          <p:cNvSpPr>
+            <a:spLocks xmlns:a="http://schemas.openxmlformats.org/drawingml/2006/main" noGrp="1"/>
+          </p:cNvSpPr>
+          <p:nvPr/>
+        </p:nvSpPr>
+        <p:spPr>
+          <a:xfrm xmlns:a="http://schemas.openxmlformats.org/drawingml/2006/main">
+            <a:off x="2381250" y="1981200"/>
+            <a:ext cx="4953000" cy="209550"/>
+          </a:xfrm>
+          <a:prstGeom xmlns:a="http://schemas.openxmlformats.org/drawingml/2006/main" prst="rect">
+            <a:avLst/>
+          </a:prstGeom>
+          <a:noFill xmlns:a="http://schemas.openxmlformats.org/drawingml/2006/main"/>
+          <a:ln xmlns:a="http://schemas.openxmlformats.org/drawingml/2006/main" w="0">
+            <a:noFill/>
+            <a:prstDash val="solid"/>
+          </a:ln>
+        </p:spPr>
+        <p:txBody>
+          <a:bodyPr xmlns:a="http://schemas.openxmlformats.org/drawingml/2006/main"/>
+          <a:lstStyle xmlns:a="http://schemas.openxmlformats.org/drawingml/2006/main"/>
+          <a:p xmlns:a="http://schemas.openxmlformats.org/drawingml/2006/main">
+            <a:pPr>
+              <a:defRPr sz="975">
+                <a:solidFill>
+                  <a:srgbClr val="94A3B8"/>
+                </a:solidFill>
+              </a:defRPr>
+            </a:pPr>
+            <a:r>
+              <a:rPr sz="975">
+                <a:solidFill>
+                  <a:srgbClr val="94A3B8"/>
+                </a:solidFill>
+              </a:rPr>
+              <a:t>각 단계는 완료 여부보다 다음 단계로 넘길 수 있는 기준을 확인합니다.</a:t>
+            </a:r>
+          </a:p>
+        </p:txBody>
+      </p:sp>
+      <p:sp>
+        <p:nvSpPr>
+          <p:cNvPr id="10" name="release-flow-step-1">
+            <a:extLst xmlns:a="http://schemas.openxmlformats.org/drawingml/2006/main">
+              <a:ext uri="{FF2B5EF4-FFF2-40B4-BE49-F238E27FC236}">
+                <a16:creationId xmlns:a16="http://schemas.microsoft.com/office/drawing/2014/main" id="{25733F75-FB48-4CCB-B41D-07412118DB4A}"/>
+              </a:ext>
+            </a:extLst>
+          </p:cNvPr>
+          <p:cNvSpPr>
+            <a:spLocks xmlns:a="http://schemas.openxmlformats.org/drawingml/2006/main" noGrp="1"/>
+          </p:cNvSpPr>
+          <p:nvPr/>
+        </p:nvSpPr>
+        <p:spPr>
+          <a:xfrm xmlns:a="http://schemas.openxmlformats.org/drawingml/2006/main">
+            <a:off x="514350" y="2457450"/>
+            <a:ext cx="1200150" cy="1200150"/>
+          </a:xfrm>
+          <a:prstGeom xmlns:a="http://schemas.openxmlformats.org/drawingml/2006/main" prst="roundRect">
+            <a:avLst>
+              <a:gd name="adj" fmla="val 6349"/>
+            </a:avLst>
+          </a:prstGeom>
+          <a:solidFill xmlns:a="http://schemas.openxmlformats.org/drawingml/2006/main">
+            <a:srgbClr val="111827"/>
+          </a:solidFill>
+          <a:ln xmlns:a="http://schemas.openxmlformats.org/drawingml/2006/main" w="9525">
+            <a:solidFill>
+              <a:srgbClr val="2F3B55"/>
+            </a:solidFill>
+            <a:prstDash val="solid"/>
+          </a:ln>
+        </p:spPr>
+      </p:sp>
+      <p:sp>
+        <p:nvSpPr>
+          <p:cNvPr id="11" name="release-flow-bar-1">
+            <a:extLst xmlns:a="http://schemas.openxmlformats.org/drawingml/2006/main">
+              <a:ext uri="{FF2B5EF4-FFF2-40B4-BE49-F238E27FC236}">
+                <a16:creationId xmlns:a16="http://schemas.microsoft.com/office/drawing/2014/main" id="{F173E0F8-421D-4ECD-A010-F1B91A1B7912}"/>
+              </a:ext>
+            </a:extLst>
+          </p:cNvPr>
+          <p:cNvSpPr>
+            <a:spLocks xmlns:a="http://schemas.openxmlformats.org/drawingml/2006/main" noGrp="1"/>
+          </p:cNvSpPr>
+          <p:nvPr/>
+        </p:nvSpPr>
+        <p:spPr>
+          <a:xfrm xmlns:a="http://schemas.openxmlformats.org/drawingml/2006/main">
+            <a:off x="514350" y="2457450"/>
+            <a:ext cx="1200150" cy="57150"/>
+          </a:xfrm>
+          <a:prstGeom xmlns:a="http://schemas.openxmlformats.org/drawingml/2006/main" prst="rect">
+            <a:avLst/>
+          </a:prstGeom>
+          <a:solidFill xmlns:a="http://schemas.openxmlformats.org/drawingml/2006/main">
+            <a:srgbClr val="00B8D9"/>
+          </a:solidFill>
+          <a:ln xmlns:a="http://schemas.openxmlformats.org/drawingml/2006/main" w="0">
+            <a:solidFill>
+              <a:srgbClr val="00B8D9"/>
+            </a:solidFill>
+            <a:prstDash val="solid"/>
+          </a:ln>
+        </p:spPr>
+      </p:sp>
+      <p:sp>
+        <p:nvSpPr>
+          <p:cNvPr id="12" name="release-flow-no-1">
+            <a:extLst xmlns:a="http://schemas.openxmlformats.org/drawingml/2006/main">
+              <a:ext uri="{FF2B5EF4-FFF2-40B4-BE49-F238E27FC236}">
+                <a16:creationId xmlns:a16="http://schemas.microsoft.com/office/drawing/2014/main" id="{808734E7-82DF-4188-9349-5454EC63CD2B}"/>
+              </a:ext>
+            </a:extLst>
+          </p:cNvPr>
+          <p:cNvSpPr>
+            <a:spLocks xmlns:a="http://schemas.openxmlformats.org/drawingml/2006/main" noGrp="1"/>
+          </p:cNvSpPr>
+          <p:nvPr/>
+        </p:nvSpPr>
+        <p:spPr>
+          <a:xfrm xmlns:a="http://schemas.openxmlformats.org/drawingml/2006/main">
+            <a:off x="857250" y="2667000"/>
+            <a:ext cx="514350" cy="323850"/>
+          </a:xfrm>
+          <a:prstGeom xmlns:a="http://schemas.openxmlformats.org/drawingml/2006/main" prst="roundRect">
+            <a:avLst>
+              <a:gd name="adj" fmla="val 23529"/>
+            </a:avLst>
+          </a:prstGeom>
+          <a:solidFill xmlns:a="http://schemas.openxmlformats.org/drawingml/2006/main">
+            <a:srgbClr val="00B8D9"/>
+          </a:solidFill>
+          <a:ln xmlns:a="http://schemas.openxmlformats.org/drawingml/2006/main" w="9525">
+            <a:solidFill>
+              <a:srgbClr val="00B8D9"/>
+            </a:solidFill>
+            <a:prstDash val="solid"/>
+          </a:ln>
+        </p:spPr>
+        <p:txBody>
+          <a:bodyPr xmlns:a="http://schemas.openxmlformats.org/drawingml/2006/main"/>
+          <a:lstStyle xmlns:a="http://schemas.openxmlformats.org/drawingml/2006/main"/>
+          <a:p xmlns:a="http://schemas.openxmlformats.org/drawingml/2006/main">
+            <a:pPr algn="ctr">
+              <a:defRPr sz="1125" b="1">
+                <a:solidFill>
+                  <a:srgbClr val="06111F"/>
+                </a:solidFill>
+              </a:defRPr>
+            </a:pPr>
+            <a:r>
+              <a:rPr sz="1125" b="1">
+                <a:solidFill>
+                  <a:srgbClr val="06111F"/>
+                </a:solidFill>
+              </a:rPr>
+              <a:t>01</a:t>
+            </a:r>
+          </a:p>
+        </p:txBody>
+      </p:sp>
+      <p:sp>
+        <p:nvSpPr>
+          <p:cNvPr id="13" name="release-flow-title-1">
+            <a:extLst xmlns:a="http://schemas.openxmlformats.org/drawingml/2006/main">
+              <a:ext uri="{FF2B5EF4-FFF2-40B4-BE49-F238E27FC236}">
+                <a16:creationId xmlns:a16="http://schemas.microsoft.com/office/drawing/2014/main" id="{AB1DCC5B-3656-401E-9CE0-5048A815FA73}"/>
+              </a:ext>
+            </a:extLst>
+          </p:cNvPr>
+          <p:cNvSpPr>
+            <a:spLocks xmlns:a="http://schemas.openxmlformats.org/drawingml/2006/main" noGrp="1"/>
+          </p:cNvSpPr>
+          <p:nvPr/>
+        </p:nvSpPr>
+        <p:spPr>
+          <a:xfrm xmlns:a="http://schemas.openxmlformats.org/drawingml/2006/main">
+            <a:off x="647700" y="3048000"/>
+            <a:ext cx="933450" cy="228600"/>
+          </a:xfrm>
+          <a:prstGeom xmlns:a="http://schemas.openxmlformats.org/drawingml/2006/main" prst="rect">
+            <a:avLst/>
+          </a:prstGeom>
+          <a:noFill xmlns:a="http://schemas.openxmlformats.org/drawingml/2006/main"/>
+          <a:ln xmlns:a="http://schemas.openxmlformats.org/drawingml/2006/main" w="0">
+            <a:noFill/>
+            <a:prstDash val="solid"/>
+          </a:ln>
+        </p:spPr>
+        <p:txBody>
+          <a:bodyPr xmlns:a="http://schemas.openxmlformats.org/drawingml/2006/main"/>
+          <a:lstStyle xmlns:a="http://schemas.openxmlformats.org/drawingml/2006/main"/>
+          <a:p xmlns:a="http://schemas.openxmlformats.org/drawingml/2006/main">
+            <a:pPr algn="ctr">
+              <a:defRPr sz="1050" b="1">
+                <a:solidFill>
+                  <a:srgbClr val="FFFFFF"/>
+                </a:solidFill>
+              </a:defRPr>
+            </a:pPr>
+            <a:r>
+              <a:rPr sz="1050" b="1">
+                <a:solidFill>
+                  <a:srgbClr val="FFFFFF"/>
+                </a:solidFill>
+              </a:rPr>
+              <a:t>버전 고정</a:t>
+            </a:r>
+          </a:p>
+        </p:txBody>
+      </p:sp>
+      <p:sp>
+        <p:nvSpPr>
+          <p:cNvPr id="14" name="release-flow-body-1">
+            <a:extLst xmlns:a="http://schemas.openxmlformats.org/drawingml/2006/main">
+              <a:ext uri="{FF2B5EF4-FFF2-40B4-BE49-F238E27FC236}">
+                <a16:creationId xmlns:a16="http://schemas.microsoft.com/office/drawing/2014/main" id="{8DEBA8F2-E696-4C61-8BBA-94DE0C281D3E}"/>
+              </a:ext>
+            </a:extLst>
+          </p:cNvPr>
+          <p:cNvSpPr>
+            <a:spLocks xmlns:a="http://schemas.openxmlformats.org/drawingml/2006/main" noGrp="1"/>
+          </p:cNvSpPr>
+          <p:nvPr/>
+        </p:nvSpPr>
+        <p:spPr>
+          <a:xfrm xmlns:a="http://schemas.openxmlformats.org/drawingml/2006/main">
+            <a:off x="609600" y="3324225"/>
+            <a:ext cx="1009650" cy="228600"/>
+          </a:xfrm>
+          <a:prstGeom xmlns:a="http://schemas.openxmlformats.org/drawingml/2006/main" prst="rect">
+            <a:avLst/>
+          </a:prstGeom>
+          <a:noFill xmlns:a="http://schemas.openxmlformats.org/drawingml/2006/main"/>
+          <a:ln xmlns:a="http://schemas.openxmlformats.org/drawingml/2006/main" w="0">
+            <a:noFill/>
+            <a:prstDash val="solid"/>
+          </a:ln>
+        </p:spPr>
+        <p:txBody>
+          <a:bodyPr xmlns:a="http://schemas.openxmlformats.org/drawingml/2006/main"/>
+          <a:lstStyle xmlns:a="http://schemas.openxmlformats.org/drawingml/2006/main"/>
+          <a:p xmlns:a="http://schemas.openxmlformats.org/drawingml/2006/main">
+            <a:pPr algn="ctr">
+              <a:defRPr sz="750">
+                <a:solidFill>
+                  <a:srgbClr val="CBD5E1"/>
+                </a:solidFill>
+              </a:defRPr>
+            </a:pPr>
+            <a:r>
+              <a:rPr sz="750">
+                <a:solidFill>
+                  <a:srgbClr val="CBD5E1"/>
+                </a:solidFill>
+              </a:rPr>
+              <a:t>Perforce 브랜치</a:t>
+            </a:r>
+          </a:p>
+          <a:p xmlns:a="http://schemas.openxmlformats.org/drawingml/2006/main">
+            <a:pPr algn="ctr">
+              <a:defRPr sz="750">
+                <a:solidFill>
+                  <a:srgbClr val="CBD5E1"/>
+                </a:solidFill>
+              </a:defRPr>
+            </a:pPr>
+            <a:r>
+              <a:rPr sz="750">
+                <a:solidFill>
+                  <a:srgbClr val="CBD5E1"/>
+                </a:solidFill>
+              </a:rPr>
+              <a:t>태그 기준 확정</a:t>
+            </a:r>
+          </a:p>
+        </p:txBody>
+      </p:sp>
+      <p:sp>
+        <p:nvSpPr>
+          <p:cNvPr id="15" name="release-flow-arrow-1">
+            <a:extLst xmlns:a="http://schemas.openxmlformats.org/drawingml/2006/main">
+              <a:ext uri="{FF2B5EF4-FFF2-40B4-BE49-F238E27FC236}">
+                <a16:creationId xmlns:a16="http://schemas.microsoft.com/office/drawing/2014/main" id="{7B225864-3E45-4064-9B7C-7816F636B4AA}"/>
+              </a:ext>
+            </a:extLst>
+          </p:cNvPr>
+          <p:cNvSpPr>
+            <a:spLocks xmlns:a="http://schemas.openxmlformats.org/drawingml/2006/main" noGrp="1"/>
+          </p:cNvSpPr>
+          <p:nvPr/>
+        </p:nvSpPr>
+        <p:spPr>
+          <a:xfrm xmlns:a="http://schemas.openxmlformats.org/drawingml/2006/main">
+            <a:off x="1733550" y="2914650"/>
+            <a:ext cx="209550" cy="304800"/>
+          </a:xfrm>
+          <a:prstGeom xmlns:a="http://schemas.openxmlformats.org/drawingml/2006/main" prst="rect">
+            <a:avLst/>
+          </a:prstGeom>
+          <a:noFill xmlns:a="http://schemas.openxmlformats.org/drawingml/2006/main"/>
+          <a:ln xmlns:a="http://schemas.openxmlformats.org/drawingml/2006/main" w="0">
+            <a:noFill/>
+            <a:prstDash val="solid"/>
+          </a:ln>
+        </p:spPr>
+        <p:txBody>
+          <a:bodyPr xmlns:a="http://schemas.openxmlformats.org/drawingml/2006/main"/>
+          <a:lstStyle xmlns:a="http://schemas.openxmlformats.org/drawingml/2006/main"/>
+          <a:p xmlns:a="http://schemas.openxmlformats.org/drawingml/2006/main">
+            <a:pPr algn="ctr">
+              <a:defRPr sz="1500" b="1">
+                <a:solidFill>
+                  <a:srgbClr val="94A3B8"/>
+                </a:solidFill>
+              </a:defRPr>
+            </a:pPr>
+            <a:r>
+              <a:rPr sz="1500" b="1">
+                <a:solidFill>
+                  <a:srgbClr val="94A3B8"/>
+                </a:solidFill>
+              </a:rPr>
+              <a:t>&gt;</a:t>
+            </a:r>
+          </a:p>
+        </p:txBody>
+      </p:sp>
+      <p:sp>
+        <p:nvSpPr>
+          <p:cNvPr id="16" name="release-flow-step-2">
+            <a:extLst xmlns:a="http://schemas.openxmlformats.org/drawingml/2006/main">
+              <a:ext uri="{FF2B5EF4-FFF2-40B4-BE49-F238E27FC236}">
+                <a16:creationId xmlns:a16="http://schemas.microsoft.com/office/drawing/2014/main" id="{AD032D26-06D1-4FA5-BF16-A2B93AEF8D7C}"/>
+              </a:ext>
+            </a:extLst>
+          </p:cNvPr>
+          <p:cNvSpPr>
+            <a:spLocks xmlns:a="http://schemas.openxmlformats.org/drawingml/2006/main" noGrp="1"/>
+          </p:cNvSpPr>
+          <p:nvPr/>
+        </p:nvSpPr>
+        <p:spPr>
+          <a:xfrm xmlns:a="http://schemas.openxmlformats.org/drawingml/2006/main">
+            <a:off x="1943100" y="2457450"/>
+            <a:ext cx="1200150" cy="1200150"/>
+          </a:xfrm>
+          <a:prstGeom xmlns:a="http://schemas.openxmlformats.org/drawingml/2006/main" prst="roundRect">
+            <a:avLst>
+              <a:gd name="adj" fmla="val 6349"/>
+            </a:avLst>
+          </a:prstGeom>
+          <a:solidFill xmlns:a="http://schemas.openxmlformats.org/drawingml/2006/main">
+            <a:srgbClr val="111827"/>
+          </a:solidFill>
+          <a:ln xmlns:a="http://schemas.openxmlformats.org/drawingml/2006/main" w="9525">
+            <a:solidFill>
+              <a:srgbClr val="2F3B55"/>
+            </a:solidFill>
+            <a:prstDash val="solid"/>
+          </a:ln>
+        </p:spPr>
+      </p:sp>
+      <p:sp>
+        <p:nvSpPr>
+          <p:cNvPr id="17" name="release-flow-bar-2">
+            <a:extLst xmlns:a="http://schemas.openxmlformats.org/drawingml/2006/main">
+              <a:ext uri="{FF2B5EF4-FFF2-40B4-BE49-F238E27FC236}">
+                <a16:creationId xmlns:a16="http://schemas.microsoft.com/office/drawing/2014/main" id="{AADBD585-4471-4459-8E42-ECC38044010E}"/>
+              </a:ext>
+            </a:extLst>
+          </p:cNvPr>
+          <p:cNvSpPr>
+            <a:spLocks xmlns:a="http://schemas.openxmlformats.org/drawingml/2006/main" noGrp="1"/>
+          </p:cNvSpPr>
+          <p:nvPr/>
+        </p:nvSpPr>
+        <p:spPr>
+          <a:xfrm xmlns:a="http://schemas.openxmlformats.org/drawingml/2006/main">
+            <a:off x="1943100" y="2457450"/>
+            <a:ext cx="1200150" cy="57150"/>
+          </a:xfrm>
+          <a:prstGeom xmlns:a="http://schemas.openxmlformats.org/drawingml/2006/main" prst="rect">
+            <a:avLst/>
+          </a:prstGeom>
+          <a:solidFill xmlns:a="http://schemas.openxmlformats.org/drawingml/2006/main">
+            <a:srgbClr val="FF6B35"/>
+          </a:solidFill>
+          <a:ln xmlns:a="http://schemas.openxmlformats.org/drawingml/2006/main" w="0">
+            <a:solidFill>
+              <a:srgbClr val="FF6B35"/>
+            </a:solidFill>
+            <a:prstDash val="solid"/>
+          </a:ln>
+        </p:spPr>
+      </p:sp>
+      <p:sp>
+        <p:nvSpPr>
+          <p:cNvPr id="18" name="release-flow-no-2">
+            <a:extLst xmlns:a="http://schemas.openxmlformats.org/drawingml/2006/main">
+              <a:ext uri="{FF2B5EF4-FFF2-40B4-BE49-F238E27FC236}">
+                <a16:creationId xmlns:a16="http://schemas.microsoft.com/office/drawing/2014/main" id="{1BEFE169-C8D8-475E-8D18-6ED6CF65B208}"/>
+              </a:ext>
+            </a:extLst>
+          </p:cNvPr>
+          <p:cNvSpPr>
+            <a:spLocks xmlns:a="http://schemas.openxmlformats.org/drawingml/2006/main" noGrp="1"/>
+          </p:cNvSpPr>
+          <p:nvPr/>
+        </p:nvSpPr>
+        <p:spPr>
+          <a:xfrm xmlns:a="http://schemas.openxmlformats.org/drawingml/2006/main">
+            <a:off x="2286000" y="2667000"/>
+            <a:ext cx="514350" cy="323850"/>
+          </a:xfrm>
+          <a:prstGeom xmlns:a="http://schemas.openxmlformats.org/drawingml/2006/main" prst="roundRect">
+            <a:avLst>
+              <a:gd name="adj" fmla="val 23529"/>
+            </a:avLst>
+          </a:prstGeom>
+          <a:solidFill xmlns:a="http://schemas.openxmlformats.org/drawingml/2006/main">
+            <a:srgbClr val="FF6B35"/>
+          </a:solidFill>
+          <a:ln xmlns:a="http://schemas.openxmlformats.org/drawingml/2006/main" w="9525">
+            <a:solidFill>
+              <a:srgbClr val="FF6B35"/>
+            </a:solidFill>
+            <a:prstDash val="solid"/>
+          </a:ln>
+        </p:spPr>
+        <p:txBody>
+          <a:bodyPr xmlns:a="http://schemas.openxmlformats.org/drawingml/2006/main"/>
+          <a:lstStyle xmlns:a="http://schemas.openxmlformats.org/drawingml/2006/main"/>
+          <a:p xmlns:a="http://schemas.openxmlformats.org/drawingml/2006/main">
+            <a:pPr algn="ctr">
+              <a:defRPr sz="1125" b="1">
+                <a:solidFill>
+                  <a:srgbClr val="FFFFFF"/>
+                </a:solidFill>
+              </a:defRPr>
+            </a:pPr>
+            <a:r>
+              <a:rPr sz="1125" b="1">
+                <a:solidFill>
+                  <a:srgbClr val="FFFFFF"/>
+                </a:solidFill>
+              </a:rPr>
+              <a:t>02</a:t>
+            </a:r>
+          </a:p>
+        </p:txBody>
+      </p:sp>
+      <p:sp>
+        <p:nvSpPr>
+          <p:cNvPr id="19" name="release-flow-title-2">
+            <a:extLst xmlns:a="http://schemas.openxmlformats.org/drawingml/2006/main">
+              <a:ext uri="{FF2B5EF4-FFF2-40B4-BE49-F238E27FC236}">
+                <a16:creationId xmlns:a16="http://schemas.microsoft.com/office/drawing/2014/main" id="{14873D34-3BF9-4ED9-B1DA-EF673F593061}"/>
+              </a:ext>
+            </a:extLst>
+          </p:cNvPr>
+          <p:cNvSpPr>
+            <a:spLocks xmlns:a="http://schemas.openxmlformats.org/drawingml/2006/main" noGrp="1"/>
+          </p:cNvSpPr>
+          <p:nvPr/>
+        </p:nvSpPr>
+        <p:spPr>
+          <a:xfrm xmlns:a="http://schemas.openxmlformats.org/drawingml/2006/main">
+            <a:off x="2076450" y="3048000"/>
+            <a:ext cx="933450" cy="228600"/>
+          </a:xfrm>
+          <a:prstGeom xmlns:a="http://schemas.openxmlformats.org/drawingml/2006/main" prst="rect">
+            <a:avLst/>
+          </a:prstGeom>
+          <a:noFill xmlns:a="http://schemas.openxmlformats.org/drawingml/2006/main"/>
+          <a:ln xmlns:a="http://schemas.openxmlformats.org/drawingml/2006/main" w="0">
+            <a:noFill/>
+            <a:prstDash val="solid"/>
+          </a:ln>
+        </p:spPr>
+        <p:txBody>
+          <a:bodyPr xmlns:a="http://schemas.openxmlformats.org/drawingml/2006/main"/>
+          <a:lstStyle xmlns:a="http://schemas.openxmlformats.org/drawingml/2006/main"/>
+          <a:p xmlns:a="http://schemas.openxmlformats.org/drawingml/2006/main">
+            <a:pPr algn="ctr">
+              <a:defRPr sz="1050" b="1">
+                <a:solidFill>
+                  <a:srgbClr val="FFFFFF"/>
+                </a:solidFill>
+              </a:defRPr>
+            </a:pPr>
+            <a:r>
+              <a:rPr sz="1050" b="1">
+                <a:solidFill>
+                  <a:srgbClr val="FFFFFF"/>
+                </a:solidFill>
+              </a:rPr>
+              <a:t>빌드 전달</a:t>
+            </a:r>
+          </a:p>
+        </p:txBody>
+      </p:sp>
+      <p:sp>
+        <p:nvSpPr>
+          <p:cNvPr id="20" name="release-flow-body-2">
+            <a:extLst xmlns:a="http://schemas.openxmlformats.org/drawingml/2006/main">
+              <a:ext uri="{FF2B5EF4-FFF2-40B4-BE49-F238E27FC236}">
+                <a16:creationId xmlns:a16="http://schemas.microsoft.com/office/drawing/2014/main" id="{C97C760C-2511-4499-8B6D-8CD62281BCE4}"/>
+              </a:ext>
+            </a:extLst>
+          </p:cNvPr>
+          <p:cNvSpPr>
+            <a:spLocks xmlns:a="http://schemas.openxmlformats.org/drawingml/2006/main" noGrp="1"/>
+          </p:cNvSpPr>
+          <p:nvPr/>
+        </p:nvSpPr>
+        <p:spPr>
+          <a:xfrm xmlns:a="http://schemas.openxmlformats.org/drawingml/2006/main">
+            <a:off x="2038350" y="3324225"/>
+            <a:ext cx="1009650" cy="228600"/>
+          </a:xfrm>
+          <a:prstGeom xmlns:a="http://schemas.openxmlformats.org/drawingml/2006/main" prst="rect">
+            <a:avLst/>
+          </a:prstGeom>
+          <a:noFill xmlns:a="http://schemas.openxmlformats.org/drawingml/2006/main"/>
+          <a:ln xmlns:a="http://schemas.openxmlformats.org/drawingml/2006/main" w="0">
+            <a:noFill/>
+            <a:prstDash val="solid"/>
+          </a:ln>
+        </p:spPr>
+        <p:txBody>
+          <a:bodyPr xmlns:a="http://schemas.openxmlformats.org/drawingml/2006/main"/>
+          <a:lstStyle xmlns:a="http://schemas.openxmlformats.org/drawingml/2006/main"/>
+          <a:p xmlns:a="http://schemas.openxmlformats.org/drawingml/2006/main">
+            <a:pPr algn="ctr">
+              <a:defRPr sz="750">
+                <a:solidFill>
+                  <a:srgbClr val="CBD5E1"/>
+                </a:solidFill>
+              </a:defRPr>
+            </a:pPr>
+            <a:r>
+              <a:rPr sz="750">
+                <a:solidFill>
+                  <a:srgbClr val="CBD5E1"/>
+                </a:solidFill>
+              </a:rPr>
+              <a:t>QA·검수 대상</a:t>
+            </a:r>
+          </a:p>
+          <a:p xmlns:a="http://schemas.openxmlformats.org/drawingml/2006/main">
+            <a:pPr algn="ctr">
+              <a:defRPr sz="750">
+                <a:solidFill>
+                  <a:srgbClr val="CBD5E1"/>
+                </a:solidFill>
+              </a:defRPr>
+            </a:pPr>
+            <a:r>
+              <a:rPr sz="750">
+                <a:solidFill>
+                  <a:srgbClr val="CBD5E1"/>
+                </a:solidFill>
+              </a:rPr>
+              <a:t>빌드 공유</a:t>
+            </a:r>
+          </a:p>
+        </p:txBody>
+      </p:sp>
+      <p:sp>
+        <p:nvSpPr>
+          <p:cNvPr id="21" name="release-flow-arrow-2">
+            <a:extLst xmlns:a="http://schemas.openxmlformats.org/drawingml/2006/main">
+              <a:ext uri="{FF2B5EF4-FFF2-40B4-BE49-F238E27FC236}">
+                <a16:creationId xmlns:a16="http://schemas.microsoft.com/office/drawing/2014/main" id="{4994E8DE-CCBA-4184-923B-F2E3DFE5037A}"/>
+              </a:ext>
+            </a:extLst>
+          </p:cNvPr>
+          <p:cNvSpPr>
+            <a:spLocks xmlns:a="http://schemas.openxmlformats.org/drawingml/2006/main" noGrp="1"/>
+          </p:cNvSpPr>
+          <p:nvPr/>
+        </p:nvSpPr>
+        <p:spPr>
+          <a:xfrm xmlns:a="http://schemas.openxmlformats.org/drawingml/2006/main">
+            <a:off x="3162300" y="2914650"/>
+            <a:ext cx="209550" cy="304800"/>
+          </a:xfrm>
+          <a:prstGeom xmlns:a="http://schemas.openxmlformats.org/drawingml/2006/main" prst="rect">
+            <a:avLst/>
+          </a:prstGeom>
+          <a:noFill xmlns:a="http://schemas.openxmlformats.org/drawingml/2006/main"/>
+          <a:ln xmlns:a="http://schemas.openxmlformats.org/drawingml/2006/main" w="0">
+            <a:noFill/>
+            <a:prstDash val="solid"/>
+          </a:ln>
+        </p:spPr>
+        <p:txBody>
+          <a:bodyPr xmlns:a="http://schemas.openxmlformats.org/drawingml/2006/main"/>
+          <a:lstStyle xmlns:a="http://schemas.openxmlformats.org/drawingml/2006/main"/>
+          <a:p xmlns:a="http://schemas.openxmlformats.org/drawingml/2006/main">
+            <a:pPr algn="ctr">
+              <a:defRPr sz="1500" b="1">
+                <a:solidFill>
+                  <a:srgbClr val="94A3B8"/>
+                </a:solidFill>
+              </a:defRPr>
+            </a:pPr>
+            <a:r>
+              <a:rPr sz="1500" b="1">
+                <a:solidFill>
+                  <a:srgbClr val="94A3B8"/>
+                </a:solidFill>
+              </a:rPr>
+              <a:t>&gt;</a:t>
+            </a:r>
+          </a:p>
+        </p:txBody>
+      </p:sp>
+      <p:sp>
+        <p:nvSpPr>
+          <p:cNvPr id="22" name="release-flow-step-3">
+            <a:extLst xmlns:a="http://schemas.openxmlformats.org/drawingml/2006/main">
+              <a:ext uri="{FF2B5EF4-FFF2-40B4-BE49-F238E27FC236}">
+                <a16:creationId xmlns:a16="http://schemas.microsoft.com/office/drawing/2014/main" id="{14AE066F-A90A-444D-A1BD-97605BF7797A}"/>
+              </a:ext>
+            </a:extLst>
+          </p:cNvPr>
+          <p:cNvSpPr>
+            <a:spLocks xmlns:a="http://schemas.openxmlformats.org/drawingml/2006/main" noGrp="1"/>
+          </p:cNvSpPr>
+          <p:nvPr/>
+        </p:nvSpPr>
+        <p:spPr>
+          <a:xfrm xmlns:a="http://schemas.openxmlformats.org/drawingml/2006/main">
+            <a:off x="3371850" y="2457450"/>
+            <a:ext cx="1200150" cy="1200150"/>
+          </a:xfrm>
+          <a:prstGeom xmlns:a="http://schemas.openxmlformats.org/drawingml/2006/main" prst="roundRect">
+            <a:avLst>
+              <a:gd name="adj" fmla="val 6349"/>
+            </a:avLst>
+          </a:prstGeom>
+          <a:solidFill xmlns:a="http://schemas.openxmlformats.org/drawingml/2006/main">
+            <a:srgbClr val="111827"/>
+          </a:solidFill>
+          <a:ln xmlns:a="http://schemas.openxmlformats.org/drawingml/2006/main" w="9525">
+            <a:solidFill>
+              <a:srgbClr val="2F3B55"/>
+            </a:solidFill>
+            <a:prstDash val="solid"/>
+          </a:ln>
+        </p:spPr>
+      </p:sp>
+      <p:sp>
+        <p:nvSpPr>
+          <p:cNvPr id="23" name="release-flow-bar-3">
+            <a:extLst xmlns:a="http://schemas.openxmlformats.org/drawingml/2006/main">
+              <a:ext uri="{FF2B5EF4-FFF2-40B4-BE49-F238E27FC236}">
+                <a16:creationId xmlns:a16="http://schemas.microsoft.com/office/drawing/2014/main" id="{D597780D-6454-4313-81F7-B1EA486276FB}"/>
+              </a:ext>
+            </a:extLst>
+          </p:cNvPr>
+          <p:cNvSpPr>
+            <a:spLocks xmlns:a="http://schemas.openxmlformats.org/drawingml/2006/main" noGrp="1"/>
+          </p:cNvSpPr>
+          <p:nvPr/>
+        </p:nvSpPr>
+        <p:spPr>
+          <a:xfrm xmlns:a="http://schemas.openxmlformats.org/drawingml/2006/main">
+            <a:off x="3371850" y="2457450"/>
+            <a:ext cx="1200150" cy="57150"/>
+          </a:xfrm>
+          <a:prstGeom xmlns:a="http://schemas.openxmlformats.org/drawingml/2006/main" prst="rect">
+            <a:avLst/>
+          </a:prstGeom>
+          <a:solidFill xmlns:a="http://schemas.openxmlformats.org/drawingml/2006/main">
+            <a:srgbClr val="7C3AED"/>
+          </a:solidFill>
+          <a:ln xmlns:a="http://schemas.openxmlformats.org/drawingml/2006/main" w="0">
+            <a:solidFill>
+              <a:srgbClr val="7C3AED"/>
+            </a:solidFill>
+            <a:prstDash val="solid"/>
+          </a:ln>
+        </p:spPr>
+      </p:sp>
+      <p:sp>
+        <p:nvSpPr>
+          <p:cNvPr id="24" name="release-flow-no-3">
+            <a:extLst xmlns:a="http://schemas.openxmlformats.org/drawingml/2006/main">
+              <a:ext uri="{FF2B5EF4-FFF2-40B4-BE49-F238E27FC236}">
+                <a16:creationId xmlns:a16="http://schemas.microsoft.com/office/drawing/2014/main" id="{097E357B-AB7C-4186-A72C-221237EC3FB5}"/>
+              </a:ext>
+            </a:extLst>
+          </p:cNvPr>
+          <p:cNvSpPr>
+            <a:spLocks xmlns:a="http://schemas.openxmlformats.org/drawingml/2006/main" noGrp="1"/>
+          </p:cNvSpPr>
+          <p:nvPr/>
+        </p:nvSpPr>
+        <p:spPr>
+          <a:xfrm xmlns:a="http://schemas.openxmlformats.org/drawingml/2006/main">
+            <a:off x="3714750" y="2667000"/>
+            <a:ext cx="514350" cy="323850"/>
+          </a:xfrm>
+          <a:prstGeom xmlns:a="http://schemas.openxmlformats.org/drawingml/2006/main" prst="roundRect">
+            <a:avLst>
+              <a:gd name="adj" fmla="val 23529"/>
+            </a:avLst>
+          </a:prstGeom>
+          <a:solidFill xmlns:a="http://schemas.openxmlformats.org/drawingml/2006/main">
+            <a:srgbClr val="7C3AED"/>
+          </a:solidFill>
+          <a:ln xmlns:a="http://schemas.openxmlformats.org/drawingml/2006/main" w="9525">
+            <a:solidFill>
+              <a:srgbClr val="7C3AED"/>
+            </a:solidFill>
+            <a:prstDash val="solid"/>
+          </a:ln>
+        </p:spPr>
+        <p:txBody>
+          <a:bodyPr xmlns:a="http://schemas.openxmlformats.org/drawingml/2006/main"/>
+          <a:lstStyle xmlns:a="http://schemas.openxmlformats.org/drawingml/2006/main"/>
+          <a:p xmlns:a="http://schemas.openxmlformats.org/drawingml/2006/main">
+            <a:pPr algn="ctr">
+              <a:defRPr sz="1125" b="1">
+                <a:solidFill>
+                  <a:srgbClr val="FFFFFF"/>
+                </a:solidFill>
+              </a:defRPr>
+            </a:pPr>
+            <a:r>
+              <a:rPr sz="1125" b="1">
+                <a:solidFill>
+                  <a:srgbClr val="FFFFFF"/>
+                </a:solidFill>
+              </a:rPr>
+              <a:t>03</a:t>
+            </a:r>
+          </a:p>
+        </p:txBody>
+      </p:sp>
+      <p:sp>
+        <p:nvSpPr>
+          <p:cNvPr id="25" name="release-flow-title-3">
+            <a:extLst xmlns:a="http://schemas.openxmlformats.org/drawingml/2006/main">
+              <a:ext uri="{FF2B5EF4-FFF2-40B4-BE49-F238E27FC236}">
+                <a16:creationId xmlns:a16="http://schemas.microsoft.com/office/drawing/2014/main" id="{FC214249-8F9B-4932-B013-BCE59DECA390}"/>
+              </a:ext>
+            </a:extLst>
+          </p:cNvPr>
+          <p:cNvSpPr>
+            <a:spLocks xmlns:a="http://schemas.openxmlformats.org/drawingml/2006/main" noGrp="1"/>
+          </p:cNvSpPr>
+          <p:nvPr/>
+        </p:nvSpPr>
+        <p:spPr>
+          <a:xfrm xmlns:a="http://schemas.openxmlformats.org/drawingml/2006/main">
+            <a:off x="3505200" y="3048000"/>
+            <a:ext cx="933450" cy="228600"/>
+          </a:xfrm>
+          <a:prstGeom xmlns:a="http://schemas.openxmlformats.org/drawingml/2006/main" prst="rect">
+            <a:avLst/>
+          </a:prstGeom>
+          <a:noFill xmlns:a="http://schemas.openxmlformats.org/drawingml/2006/main"/>
+          <a:ln xmlns:a="http://schemas.openxmlformats.org/drawingml/2006/main" w="0">
+            <a:noFill/>
+            <a:prstDash val="solid"/>
+          </a:ln>
+        </p:spPr>
+        <p:txBody>
+          <a:bodyPr xmlns:a="http://schemas.openxmlformats.org/drawingml/2006/main"/>
+          <a:lstStyle xmlns:a="http://schemas.openxmlformats.org/drawingml/2006/main"/>
+          <a:p xmlns:a="http://schemas.openxmlformats.org/drawingml/2006/main">
+            <a:pPr algn="ctr">
+              <a:defRPr sz="1050" b="1">
+                <a:solidFill>
+                  <a:srgbClr val="FFFFFF"/>
+                </a:solidFill>
+              </a:defRPr>
+            </a:pPr>
+            <a:r>
+              <a:rPr sz="1050" b="1">
+                <a:solidFill>
+                  <a:srgbClr val="FFFFFF"/>
+                </a:solidFill>
+              </a:rPr>
+              <a:t>QA 확인</a:t>
+            </a:r>
+          </a:p>
+        </p:txBody>
+      </p:sp>
+      <p:sp>
+        <p:nvSpPr>
+          <p:cNvPr id="26" name="release-flow-body-3">
+            <a:extLst xmlns:a="http://schemas.openxmlformats.org/drawingml/2006/main">
+              <a:ext uri="{FF2B5EF4-FFF2-40B4-BE49-F238E27FC236}">
+                <a16:creationId xmlns:a16="http://schemas.microsoft.com/office/drawing/2014/main" id="{C27D0AC7-E37B-485D-AED4-376C0DEB850A}"/>
+              </a:ext>
+            </a:extLst>
+          </p:cNvPr>
+          <p:cNvSpPr>
+            <a:spLocks xmlns:a="http://schemas.openxmlformats.org/drawingml/2006/main" noGrp="1"/>
+          </p:cNvSpPr>
+          <p:nvPr/>
+        </p:nvSpPr>
+        <p:spPr>
+          <a:xfrm xmlns:a="http://schemas.openxmlformats.org/drawingml/2006/main">
+            <a:off x="3467100" y="3324225"/>
+            <a:ext cx="1009650" cy="228600"/>
+          </a:xfrm>
+          <a:prstGeom xmlns:a="http://schemas.openxmlformats.org/drawingml/2006/main" prst="rect">
+            <a:avLst/>
+          </a:prstGeom>
+          <a:noFill xmlns:a="http://schemas.openxmlformats.org/drawingml/2006/main"/>
+          <a:ln xmlns:a="http://schemas.openxmlformats.org/drawingml/2006/main" w="0">
+            <a:noFill/>
+            <a:prstDash val="solid"/>
+          </a:ln>
+        </p:spPr>
+        <p:txBody>
+          <a:bodyPr xmlns:a="http://schemas.openxmlformats.org/drawingml/2006/main"/>
+          <a:lstStyle xmlns:a="http://schemas.openxmlformats.org/drawingml/2006/main"/>
+          <a:p xmlns:a="http://schemas.openxmlformats.org/drawingml/2006/main">
+            <a:pPr algn="ctr">
+              <a:defRPr sz="750">
+                <a:solidFill>
+                  <a:srgbClr val="CBD5E1"/>
+                </a:solidFill>
+              </a:defRPr>
+            </a:pPr>
+            <a:r>
+              <a:rPr sz="750">
+                <a:solidFill>
+                  <a:srgbClr val="CBD5E1"/>
+                </a:solidFill>
+              </a:rPr>
+              <a:t>주요 이슈와</a:t>
+            </a:r>
+          </a:p>
+          <a:p xmlns:a="http://schemas.openxmlformats.org/drawingml/2006/main">
+            <a:pPr algn="ctr">
+              <a:defRPr sz="750">
+                <a:solidFill>
+                  <a:srgbClr val="CBD5E1"/>
+                </a:solidFill>
+              </a:defRPr>
+            </a:pPr>
+            <a:r>
+              <a:rPr sz="750">
+                <a:solidFill>
+                  <a:srgbClr val="CBD5E1"/>
+                </a:solidFill>
+              </a:rPr>
+              <a:t>수정 반영 추적</a:t>
+            </a:r>
+          </a:p>
+        </p:txBody>
+      </p:sp>
+      <p:sp>
+        <p:nvSpPr>
+          <p:cNvPr id="27" name="release-flow-arrow-3">
+            <a:extLst xmlns:a="http://schemas.openxmlformats.org/drawingml/2006/main">
+              <a:ext uri="{FF2B5EF4-FFF2-40B4-BE49-F238E27FC236}">
+                <a16:creationId xmlns:a16="http://schemas.microsoft.com/office/drawing/2014/main" id="{C6F0DAE6-8225-4E75-A863-21A23FEFB4B2}"/>
+              </a:ext>
+            </a:extLst>
+          </p:cNvPr>
+          <p:cNvSpPr>
+            <a:spLocks xmlns:a="http://schemas.openxmlformats.org/drawingml/2006/main" noGrp="1"/>
+          </p:cNvSpPr>
+          <p:nvPr/>
+        </p:nvSpPr>
+        <p:spPr>
+          <a:xfrm xmlns:a="http://schemas.openxmlformats.org/drawingml/2006/main">
+            <a:off x="4591050" y="2914650"/>
+            <a:ext cx="209550" cy="304800"/>
+          </a:xfrm>
+          <a:prstGeom xmlns:a="http://schemas.openxmlformats.org/drawingml/2006/main" prst="rect">
+            <a:avLst/>
+          </a:prstGeom>
+          <a:noFill xmlns:a="http://schemas.openxmlformats.org/drawingml/2006/main"/>
+          <a:ln xmlns:a="http://schemas.openxmlformats.org/drawingml/2006/main" w="0">
+            <a:noFill/>
+            <a:prstDash val="solid"/>
+          </a:ln>
+        </p:spPr>
+        <p:txBody>
+          <a:bodyPr xmlns:a="http://schemas.openxmlformats.org/drawingml/2006/main"/>
+          <a:lstStyle xmlns:a="http://schemas.openxmlformats.org/drawingml/2006/main"/>
+          <a:p xmlns:a="http://schemas.openxmlformats.org/drawingml/2006/main">
+            <a:pPr algn="ctr">
+              <a:defRPr sz="1500" b="1">
+                <a:solidFill>
+                  <a:srgbClr val="94A3B8"/>
+                </a:solidFill>
+              </a:defRPr>
+            </a:pPr>
+            <a:r>
+              <a:rPr sz="1500" b="1">
+                <a:solidFill>
+                  <a:srgbClr val="94A3B8"/>
+                </a:solidFill>
+              </a:rPr>
+              <a:t>&gt;</a:t>
+            </a:r>
+          </a:p>
+        </p:txBody>
+      </p:sp>
+      <p:sp>
+        <p:nvSpPr>
+          <p:cNvPr id="28" name="release-flow-step-4">
+            <a:extLst xmlns:a="http://schemas.openxmlformats.org/drawingml/2006/main">
+              <a:ext uri="{FF2B5EF4-FFF2-40B4-BE49-F238E27FC236}">
+                <a16:creationId xmlns:a16="http://schemas.microsoft.com/office/drawing/2014/main" id="{ABF07530-48FC-444D-9953-5827316CCBBB}"/>
+              </a:ext>
+            </a:extLst>
+          </p:cNvPr>
+          <p:cNvSpPr>
+            <a:spLocks xmlns:a="http://schemas.openxmlformats.org/drawingml/2006/main" noGrp="1"/>
+          </p:cNvSpPr>
+          <p:nvPr/>
+        </p:nvSpPr>
+        <p:spPr>
+          <a:xfrm xmlns:a="http://schemas.openxmlformats.org/drawingml/2006/main">
+            <a:off x="4800600" y="2457450"/>
+            <a:ext cx="1200150" cy="1200150"/>
+          </a:xfrm>
+          <a:prstGeom xmlns:a="http://schemas.openxmlformats.org/drawingml/2006/main" prst="roundRect">
+            <a:avLst>
+              <a:gd name="adj" fmla="val 6349"/>
+            </a:avLst>
+          </a:prstGeom>
+          <a:solidFill xmlns:a="http://schemas.openxmlformats.org/drawingml/2006/main">
+            <a:srgbClr val="111827"/>
+          </a:solidFill>
+          <a:ln xmlns:a="http://schemas.openxmlformats.org/drawingml/2006/main" w="9525">
+            <a:solidFill>
+              <a:srgbClr val="2F3B55"/>
+            </a:solidFill>
+            <a:prstDash val="solid"/>
+          </a:ln>
+        </p:spPr>
+      </p:sp>
+      <p:sp>
+        <p:nvSpPr>
+          <p:cNvPr id="29" name="release-flow-bar-4">
+            <a:extLst xmlns:a="http://schemas.openxmlformats.org/drawingml/2006/main">
+              <a:ext uri="{FF2B5EF4-FFF2-40B4-BE49-F238E27FC236}">
+                <a16:creationId xmlns:a16="http://schemas.microsoft.com/office/drawing/2014/main" id="{E1FB955B-57CC-4843-972D-68C951F4465E}"/>
+              </a:ext>
+            </a:extLst>
+          </p:cNvPr>
+          <p:cNvSpPr>
+            <a:spLocks xmlns:a="http://schemas.openxmlformats.org/drawingml/2006/main" noGrp="1"/>
+          </p:cNvSpPr>
+          <p:nvPr/>
+        </p:nvSpPr>
+        <p:spPr>
+          <a:xfrm xmlns:a="http://schemas.openxmlformats.org/drawingml/2006/main">
+            <a:off x="4800600" y="2457450"/>
+            <a:ext cx="1200150" cy="57150"/>
+          </a:xfrm>
+          <a:prstGeom xmlns:a="http://schemas.openxmlformats.org/drawingml/2006/main" prst="rect">
+            <a:avLst/>
+          </a:prstGeom>
+          <a:solidFill xmlns:a="http://schemas.openxmlformats.org/drawingml/2006/main">
+            <a:srgbClr val="8BD9E8"/>
+          </a:solidFill>
+          <a:ln xmlns:a="http://schemas.openxmlformats.org/drawingml/2006/main" w="0">
+            <a:solidFill>
+              <a:srgbClr val="8BD9E8"/>
+            </a:solidFill>
+            <a:prstDash val="solid"/>
+          </a:ln>
+        </p:spPr>
+      </p:sp>
+      <p:sp>
+        <p:nvSpPr>
+          <p:cNvPr id="30" name="release-flow-no-4">
+            <a:extLst xmlns:a="http://schemas.openxmlformats.org/drawingml/2006/main">
+              <a:ext uri="{FF2B5EF4-FFF2-40B4-BE49-F238E27FC236}">
+                <a16:creationId xmlns:a16="http://schemas.microsoft.com/office/drawing/2014/main" id="{7424A65D-68DE-45EE-A3E2-C30944A8EC77}"/>
+              </a:ext>
+            </a:extLst>
+          </p:cNvPr>
+          <p:cNvSpPr>
+            <a:spLocks xmlns:a="http://schemas.openxmlformats.org/drawingml/2006/main" noGrp="1"/>
+          </p:cNvSpPr>
+          <p:nvPr/>
+        </p:nvSpPr>
+        <p:spPr>
+          <a:xfrm xmlns:a="http://schemas.openxmlformats.org/drawingml/2006/main">
+            <a:off x="5143500" y="2667000"/>
+            <a:ext cx="514350" cy="323850"/>
+          </a:xfrm>
+          <a:prstGeom xmlns:a="http://schemas.openxmlformats.org/drawingml/2006/main" prst="roundRect">
+            <a:avLst>
+              <a:gd name="adj" fmla="val 23529"/>
+            </a:avLst>
+          </a:prstGeom>
+          <a:solidFill xmlns:a="http://schemas.openxmlformats.org/drawingml/2006/main">
+            <a:srgbClr val="8BD9E8"/>
+          </a:solidFill>
+          <a:ln xmlns:a="http://schemas.openxmlformats.org/drawingml/2006/main" w="9525">
+            <a:solidFill>
+              <a:srgbClr val="8BD9E8"/>
+            </a:solidFill>
+            <a:prstDash val="solid"/>
+          </a:ln>
+        </p:spPr>
+        <p:txBody>
+          <a:bodyPr xmlns:a="http://schemas.openxmlformats.org/drawingml/2006/main"/>
+          <a:lstStyle xmlns:a="http://schemas.openxmlformats.org/drawingml/2006/main"/>
+          <a:p xmlns:a="http://schemas.openxmlformats.org/drawingml/2006/main">
+            <a:pPr algn="ctr">
+              <a:defRPr sz="1125" b="1">
+                <a:solidFill>
+                  <a:srgbClr val="FFFFFF"/>
+                </a:solidFill>
+              </a:defRPr>
+            </a:pPr>
+            <a:r>
+              <a:rPr sz="1125" b="1">
+                <a:solidFill>
+                  <a:srgbClr val="FFFFFF"/>
+                </a:solidFill>
+              </a:rPr>
+              <a:t>04</a:t>
+            </a:r>
+          </a:p>
+        </p:txBody>
+      </p:sp>
+      <p:sp>
+        <p:nvSpPr>
+          <p:cNvPr id="31" name="release-flow-title-4">
+            <a:extLst xmlns:a="http://schemas.openxmlformats.org/drawingml/2006/main">
+              <a:ext uri="{FF2B5EF4-FFF2-40B4-BE49-F238E27FC236}">
+                <a16:creationId xmlns:a16="http://schemas.microsoft.com/office/drawing/2014/main" id="{24B59A91-9145-414C-85C6-760F5A460C34}"/>
+              </a:ext>
+            </a:extLst>
+          </p:cNvPr>
+          <p:cNvSpPr>
+            <a:spLocks xmlns:a="http://schemas.openxmlformats.org/drawingml/2006/main" noGrp="1"/>
+          </p:cNvSpPr>
+          <p:nvPr/>
+        </p:nvSpPr>
+        <p:spPr>
+          <a:xfrm xmlns:a="http://schemas.openxmlformats.org/drawingml/2006/main">
+            <a:off x="4933950" y="3048000"/>
+            <a:ext cx="933450" cy="228600"/>
+          </a:xfrm>
+          <a:prstGeom xmlns:a="http://schemas.openxmlformats.org/drawingml/2006/main" prst="rect">
+            <a:avLst/>
+          </a:prstGeom>
+          <a:noFill xmlns:a="http://schemas.openxmlformats.org/drawingml/2006/main"/>
+          <a:ln xmlns:a="http://schemas.openxmlformats.org/drawingml/2006/main" w="0">
+            <a:noFill/>
+            <a:prstDash val="solid"/>
+          </a:ln>
+        </p:spPr>
+        <p:txBody>
+          <a:bodyPr xmlns:a="http://schemas.openxmlformats.org/drawingml/2006/main"/>
+          <a:lstStyle xmlns:a="http://schemas.openxmlformats.org/drawingml/2006/main"/>
+          <a:p xmlns:a="http://schemas.openxmlformats.org/drawingml/2006/main">
+            <a:pPr algn="ctr">
+              <a:defRPr sz="1050" b="1">
+                <a:solidFill>
+                  <a:srgbClr val="FFFFFF"/>
+                </a:solidFill>
+              </a:defRPr>
+            </a:pPr>
+            <a:r>
+              <a:rPr sz="1050" b="1">
+                <a:solidFill>
+                  <a:srgbClr val="FFFFFF"/>
+                </a:solidFill>
+              </a:rPr>
+              <a:t>검수 반영</a:t>
+            </a:r>
+          </a:p>
+        </p:txBody>
+      </p:sp>
+      <p:sp>
+        <p:nvSpPr>
+          <p:cNvPr id="32" name="release-flow-body-4">
+            <a:extLst xmlns:a="http://schemas.openxmlformats.org/drawingml/2006/main">
+              <a:ext uri="{FF2B5EF4-FFF2-40B4-BE49-F238E27FC236}">
+                <a16:creationId xmlns:a16="http://schemas.microsoft.com/office/drawing/2014/main" id="{31E94E52-82DD-4850-A448-1B888A3450B4}"/>
+              </a:ext>
+            </a:extLst>
+          </p:cNvPr>
+          <p:cNvSpPr>
+            <a:spLocks xmlns:a="http://schemas.openxmlformats.org/drawingml/2006/main" noGrp="1"/>
+          </p:cNvSpPr>
+          <p:nvPr/>
+        </p:nvSpPr>
+        <p:spPr>
+          <a:xfrm xmlns:a="http://schemas.openxmlformats.org/drawingml/2006/main">
+            <a:off x="4895850" y="3324225"/>
+            <a:ext cx="1009650" cy="228600"/>
+          </a:xfrm>
+          <a:prstGeom xmlns:a="http://schemas.openxmlformats.org/drawingml/2006/main" prst="rect">
+            <a:avLst/>
+          </a:prstGeom>
+          <a:noFill xmlns:a="http://schemas.openxmlformats.org/drawingml/2006/main"/>
+          <a:ln xmlns:a="http://schemas.openxmlformats.org/drawingml/2006/main" w="0">
+            <a:noFill/>
+            <a:prstDash val="solid"/>
+          </a:ln>
+        </p:spPr>
+        <p:txBody>
+          <a:bodyPr xmlns:a="http://schemas.openxmlformats.org/drawingml/2006/main"/>
+          <a:lstStyle xmlns:a="http://schemas.openxmlformats.org/drawingml/2006/main"/>
+          <a:p xmlns:a="http://schemas.openxmlformats.org/drawingml/2006/main">
+            <a:pPr algn="ctr">
+              <a:defRPr sz="750">
+                <a:solidFill>
+                  <a:srgbClr val="CBD5E1"/>
+                </a:solidFill>
+              </a:defRPr>
+            </a:pPr>
+            <a:r>
+              <a:rPr sz="750">
+                <a:solidFill>
+                  <a:srgbClr val="CBD5E1"/>
+                </a:solidFill>
+              </a:rPr>
+              <a:t>퍼블리셔 피드백</a:t>
+            </a:r>
+          </a:p>
+          <a:p xmlns:a="http://schemas.openxmlformats.org/drawingml/2006/main">
+            <a:pPr algn="ctr">
+              <a:defRPr sz="750">
+                <a:solidFill>
+                  <a:srgbClr val="CBD5E1"/>
+                </a:solidFill>
+              </a:defRPr>
+            </a:pPr>
+            <a:r>
+              <a:rPr sz="750">
+                <a:solidFill>
+                  <a:srgbClr val="CBD5E1"/>
+                </a:solidFill>
+              </a:rPr>
+              <a:t>영향도 분리</a:t>
+            </a:r>
+          </a:p>
+        </p:txBody>
+      </p:sp>
+      <p:sp>
+        <p:nvSpPr>
+          <p:cNvPr id="33" name="release-flow-arrow-4">
+            <a:extLst xmlns:a="http://schemas.openxmlformats.org/drawingml/2006/main">
+              <a:ext uri="{FF2B5EF4-FFF2-40B4-BE49-F238E27FC236}">
+                <a16:creationId xmlns:a16="http://schemas.microsoft.com/office/drawing/2014/main" id="{466D20DF-578E-4460-94A4-4EF5F64051D8}"/>
+              </a:ext>
+            </a:extLst>
+          </p:cNvPr>
+          <p:cNvSpPr>
+            <a:spLocks xmlns:a="http://schemas.openxmlformats.org/drawingml/2006/main" noGrp="1"/>
+          </p:cNvSpPr>
+          <p:nvPr/>
+        </p:nvSpPr>
+        <p:spPr>
+          <a:xfrm xmlns:a="http://schemas.openxmlformats.org/drawingml/2006/main">
+            <a:off x="6019800" y="2914650"/>
+            <a:ext cx="209550" cy="304800"/>
+          </a:xfrm>
+          <a:prstGeom xmlns:a="http://schemas.openxmlformats.org/drawingml/2006/main" prst="rect">
+            <a:avLst/>
+          </a:prstGeom>
+          <a:noFill xmlns:a="http://schemas.openxmlformats.org/drawingml/2006/main"/>
+          <a:ln xmlns:a="http://schemas.openxmlformats.org/drawingml/2006/main" w="0">
+            <a:noFill/>
+            <a:prstDash val="solid"/>
+          </a:ln>
+        </p:spPr>
+        <p:txBody>
+          <a:bodyPr xmlns:a="http://schemas.openxmlformats.org/drawingml/2006/main"/>
+          <a:lstStyle xmlns:a="http://schemas.openxmlformats.org/drawingml/2006/main"/>
+          <a:p xmlns:a="http://schemas.openxmlformats.org/drawingml/2006/main">
+            <a:pPr algn="ctr">
+              <a:defRPr sz="1500" b="1">
+                <a:solidFill>
+                  <a:srgbClr val="94A3B8"/>
+                </a:solidFill>
+              </a:defRPr>
+            </a:pPr>
+            <a:r>
+              <a:rPr sz="1500" b="1">
+                <a:solidFill>
+                  <a:srgbClr val="94A3B8"/>
+                </a:solidFill>
+              </a:rPr>
+              <a:t>&gt;</a:t>
+            </a:r>
+          </a:p>
+        </p:txBody>
+      </p:sp>
+      <p:sp>
+        <p:nvSpPr>
+          <p:cNvPr id="34" name="release-flow-step-5">
+            <a:extLst xmlns:a="http://schemas.openxmlformats.org/drawingml/2006/main">
+              <a:ext uri="{FF2B5EF4-FFF2-40B4-BE49-F238E27FC236}">
+                <a16:creationId xmlns:a16="http://schemas.microsoft.com/office/drawing/2014/main" id="{679EE6F9-14F4-497D-A81A-C195F76D8053}"/>
+              </a:ext>
+            </a:extLst>
+          </p:cNvPr>
+          <p:cNvSpPr>
+            <a:spLocks xmlns:a="http://schemas.openxmlformats.org/drawingml/2006/main" noGrp="1"/>
+          </p:cNvSpPr>
+          <p:nvPr/>
+        </p:nvSpPr>
+        <p:spPr>
+          <a:xfrm xmlns:a="http://schemas.openxmlformats.org/drawingml/2006/main">
+            <a:off x="6229350" y="2457450"/>
+            <a:ext cx="1200150" cy="1200150"/>
+          </a:xfrm>
+          <a:prstGeom xmlns:a="http://schemas.openxmlformats.org/drawingml/2006/main" prst="roundRect">
+            <a:avLst>
+              <a:gd name="adj" fmla="val 6349"/>
+            </a:avLst>
+          </a:prstGeom>
+          <a:solidFill xmlns:a="http://schemas.openxmlformats.org/drawingml/2006/main">
+            <a:srgbClr val="111827"/>
+          </a:solidFill>
+          <a:ln xmlns:a="http://schemas.openxmlformats.org/drawingml/2006/main" w="9525">
+            <a:solidFill>
+              <a:srgbClr val="2F3B55"/>
+            </a:solidFill>
+            <a:prstDash val="solid"/>
+          </a:ln>
+        </p:spPr>
+      </p:sp>
+      <p:sp>
+        <p:nvSpPr>
+          <p:cNvPr id="35" name="release-flow-bar-5">
+            <a:extLst xmlns:a="http://schemas.openxmlformats.org/drawingml/2006/main">
+              <a:ext uri="{FF2B5EF4-FFF2-40B4-BE49-F238E27FC236}">
+                <a16:creationId xmlns:a16="http://schemas.microsoft.com/office/drawing/2014/main" id="{91D4EC81-65F2-42E9-8A65-0776298E03E6}"/>
+              </a:ext>
+            </a:extLst>
+          </p:cNvPr>
+          <p:cNvSpPr>
+            <a:spLocks xmlns:a="http://schemas.openxmlformats.org/drawingml/2006/main" noGrp="1"/>
+          </p:cNvSpPr>
+          <p:nvPr/>
+        </p:nvSpPr>
+        <p:spPr>
+          <a:xfrm xmlns:a="http://schemas.openxmlformats.org/drawingml/2006/main">
+            <a:off x="6229350" y="2457450"/>
+            <a:ext cx="1200150" cy="57150"/>
+          </a:xfrm>
+          <a:prstGeom xmlns:a="http://schemas.openxmlformats.org/drawingml/2006/main" prst="rect">
+            <a:avLst/>
+          </a:prstGeom>
+          <a:solidFill xmlns:a="http://schemas.openxmlformats.org/drawingml/2006/main">
+            <a:srgbClr val="FF6B35"/>
+          </a:solidFill>
+          <a:ln xmlns:a="http://schemas.openxmlformats.org/drawingml/2006/main" w="0">
+            <a:solidFill>
+              <a:srgbClr val="FF6B35"/>
+            </a:solidFill>
+            <a:prstDash val="solid"/>
+          </a:ln>
+        </p:spPr>
+      </p:sp>
+      <p:sp>
+        <p:nvSpPr>
+          <p:cNvPr id="36" name="release-flow-no-5">
+            <a:extLst xmlns:a="http://schemas.openxmlformats.org/drawingml/2006/main">
+              <a:ext uri="{FF2B5EF4-FFF2-40B4-BE49-F238E27FC236}">
+                <a16:creationId xmlns:a16="http://schemas.microsoft.com/office/drawing/2014/main" id="{D4F6152F-9257-4862-A148-0215266C0A08}"/>
+              </a:ext>
+            </a:extLst>
+          </p:cNvPr>
+          <p:cNvSpPr>
+            <a:spLocks xmlns:a="http://schemas.openxmlformats.org/drawingml/2006/main" noGrp="1"/>
+          </p:cNvSpPr>
+          <p:nvPr/>
+        </p:nvSpPr>
+        <p:spPr>
+          <a:xfrm xmlns:a="http://schemas.openxmlformats.org/drawingml/2006/main">
+            <a:off x="6572250" y="2667000"/>
+            <a:ext cx="514350" cy="323850"/>
+          </a:xfrm>
+          <a:prstGeom xmlns:a="http://schemas.openxmlformats.org/drawingml/2006/main" prst="roundRect">
+            <a:avLst>
+              <a:gd name="adj" fmla="val 23529"/>
+            </a:avLst>
+          </a:prstGeom>
+          <a:solidFill xmlns:a="http://schemas.openxmlformats.org/drawingml/2006/main">
+            <a:srgbClr val="FF6B35"/>
+          </a:solidFill>
+          <a:ln xmlns:a="http://schemas.openxmlformats.org/drawingml/2006/main" w="9525">
+            <a:solidFill>
+              <a:srgbClr val="FF6B35"/>
+            </a:solidFill>
+            <a:prstDash val="solid"/>
+          </a:ln>
+        </p:spPr>
+        <p:txBody>
+          <a:bodyPr xmlns:a="http://schemas.openxmlformats.org/drawingml/2006/main"/>
+          <a:lstStyle xmlns:a="http://schemas.openxmlformats.org/drawingml/2006/main"/>
+          <a:p xmlns:a="http://schemas.openxmlformats.org/drawingml/2006/main">
+            <a:pPr algn="ctr">
+              <a:defRPr sz="1125" b="1">
+                <a:solidFill>
+                  <a:srgbClr val="FFFFFF"/>
+                </a:solidFill>
+              </a:defRPr>
+            </a:pPr>
+            <a:r>
+              <a:rPr sz="1125" b="1">
+                <a:solidFill>
+                  <a:srgbClr val="FFFFFF"/>
+                </a:solidFill>
+              </a:rPr>
+              <a:t>05</a:t>
+            </a:r>
+          </a:p>
+        </p:txBody>
+      </p:sp>
+      <p:sp>
+        <p:nvSpPr>
+          <p:cNvPr id="37" name="release-flow-title-5">
+            <a:extLst xmlns:a="http://schemas.openxmlformats.org/drawingml/2006/main">
+              <a:ext uri="{FF2B5EF4-FFF2-40B4-BE49-F238E27FC236}">
+                <a16:creationId xmlns:a16="http://schemas.microsoft.com/office/drawing/2014/main" id="{7229336C-747A-4229-B216-1B7F9B7DABC5}"/>
+              </a:ext>
+            </a:extLst>
+          </p:cNvPr>
+          <p:cNvSpPr>
+            <a:spLocks xmlns:a="http://schemas.openxmlformats.org/drawingml/2006/main" noGrp="1"/>
+          </p:cNvSpPr>
+          <p:nvPr/>
+        </p:nvSpPr>
+        <p:spPr>
+          <a:xfrm xmlns:a="http://schemas.openxmlformats.org/drawingml/2006/main">
+            <a:off x="6362700" y="3048000"/>
+            <a:ext cx="933450" cy="228600"/>
+          </a:xfrm>
+          <a:prstGeom xmlns:a="http://schemas.openxmlformats.org/drawingml/2006/main" prst="rect">
+            <a:avLst/>
+          </a:prstGeom>
+          <a:noFill xmlns:a="http://schemas.openxmlformats.org/drawingml/2006/main"/>
+          <a:ln xmlns:a="http://schemas.openxmlformats.org/drawingml/2006/main" w="0">
+            <a:noFill/>
+            <a:prstDash val="solid"/>
+          </a:ln>
+        </p:spPr>
+        <p:txBody>
+          <a:bodyPr xmlns:a="http://schemas.openxmlformats.org/drawingml/2006/main"/>
+          <a:lstStyle xmlns:a="http://schemas.openxmlformats.org/drawingml/2006/main"/>
+          <a:p xmlns:a="http://schemas.openxmlformats.org/drawingml/2006/main">
+            <a:pPr algn="ctr">
+              <a:defRPr sz="1050" b="1">
+                <a:solidFill>
+                  <a:srgbClr val="FFFFFF"/>
+                </a:solidFill>
+              </a:defRPr>
+            </a:pPr>
+            <a:r>
+              <a:rPr sz="1050" b="1">
+                <a:solidFill>
+                  <a:srgbClr val="FFFFFF"/>
+                </a:solidFill>
+              </a:rPr>
+              <a:t>RC 판단</a:t>
+            </a:r>
+          </a:p>
+        </p:txBody>
+      </p:sp>
+      <p:sp>
+        <p:nvSpPr>
+          <p:cNvPr id="38" name="release-flow-body-5">
+            <a:extLst xmlns:a="http://schemas.openxmlformats.org/drawingml/2006/main">
+              <a:ext uri="{FF2B5EF4-FFF2-40B4-BE49-F238E27FC236}">
+                <a16:creationId xmlns:a16="http://schemas.microsoft.com/office/drawing/2014/main" id="{B263D6D2-6DAB-44BD-A6AF-DA26368F8B7E}"/>
+              </a:ext>
+            </a:extLst>
+          </p:cNvPr>
+          <p:cNvSpPr>
+            <a:spLocks xmlns:a="http://schemas.openxmlformats.org/drawingml/2006/main" noGrp="1"/>
+          </p:cNvSpPr>
+          <p:nvPr/>
+        </p:nvSpPr>
+        <p:spPr>
+          <a:xfrm xmlns:a="http://schemas.openxmlformats.org/drawingml/2006/main">
+            <a:off x="6324600" y="3324225"/>
+            <a:ext cx="1009650" cy="228600"/>
+          </a:xfrm>
+          <a:prstGeom xmlns:a="http://schemas.openxmlformats.org/drawingml/2006/main" prst="rect">
+            <a:avLst/>
+          </a:prstGeom>
+          <a:noFill xmlns:a="http://schemas.openxmlformats.org/drawingml/2006/main"/>
+          <a:ln xmlns:a="http://schemas.openxmlformats.org/drawingml/2006/main" w="0">
+            <a:noFill/>
+            <a:prstDash val="solid"/>
+          </a:ln>
+        </p:spPr>
+        <p:txBody>
+          <a:bodyPr xmlns:a="http://schemas.openxmlformats.org/drawingml/2006/main"/>
+          <a:lstStyle xmlns:a="http://schemas.openxmlformats.org/drawingml/2006/main"/>
+          <a:p xmlns:a="http://schemas.openxmlformats.org/drawingml/2006/main">
+            <a:pPr algn="ctr">
+              <a:defRPr sz="750">
+                <a:solidFill>
+                  <a:srgbClr val="CBD5E1"/>
+                </a:solidFill>
+              </a:defRPr>
+            </a:pPr>
+            <a:r>
+              <a:rPr sz="750">
+                <a:solidFill>
+                  <a:srgbClr val="CBD5E1"/>
+                </a:solidFill>
+              </a:rPr>
+              <a:t>릴리즈 후보</a:t>
+            </a:r>
+          </a:p>
+          <a:p xmlns:a="http://schemas.openxmlformats.org/drawingml/2006/main">
+            <a:pPr algn="ctr">
+              <a:defRPr sz="750">
+                <a:solidFill>
+                  <a:srgbClr val="CBD5E1"/>
+                </a:solidFill>
+              </a:defRPr>
+            </a:pPr>
+            <a:r>
+              <a:rPr sz="750">
+                <a:solidFill>
+                  <a:srgbClr val="CBD5E1"/>
+                </a:solidFill>
+              </a:rPr>
+              <a:t>진입 기준 확정</a:t>
+            </a:r>
+          </a:p>
+        </p:txBody>
+      </p:sp>
+      <p:sp>
+        <p:nvSpPr>
+          <p:cNvPr id="39" name="ops-table-title">
+            <a:extLst xmlns:a="http://schemas.openxmlformats.org/drawingml/2006/main">
+              <a:ext uri="{FF2B5EF4-FFF2-40B4-BE49-F238E27FC236}">
+                <a16:creationId xmlns:a16="http://schemas.microsoft.com/office/drawing/2014/main" id="{78DF677D-FDE9-462A-9871-31B4AC6EC59C}"/>
+              </a:ext>
+            </a:extLst>
+          </p:cNvPr>
+          <p:cNvSpPr>
+            <a:spLocks xmlns:a="http://schemas.openxmlformats.org/drawingml/2006/main" noGrp="1"/>
+          </p:cNvSpPr>
+          <p:nvPr/>
+        </p:nvSpPr>
+        <p:spPr>
+          <a:xfrm xmlns:a="http://schemas.openxmlformats.org/drawingml/2006/main">
+            <a:off x="514350" y="3867150"/>
+            <a:ext cx="2095500" cy="228600"/>
+          </a:xfrm>
+          <a:prstGeom xmlns:a="http://schemas.openxmlformats.org/drawingml/2006/main" prst="rect">
+            <a:avLst/>
+          </a:prstGeom>
+          <a:noFill xmlns:a="http://schemas.openxmlformats.org/drawingml/2006/main"/>
+          <a:ln xmlns:a="http://schemas.openxmlformats.org/drawingml/2006/main" w="0">
+            <a:noFill/>
+            <a:prstDash val="solid"/>
+          </a:ln>
+        </p:spPr>
+        <p:txBody>
+          <a:bodyPr xmlns:a="http://schemas.openxmlformats.org/drawingml/2006/main"/>
+          <a:lstStyle xmlns:a="http://schemas.openxmlformats.org/drawingml/2006/main"/>
+          <a:p xmlns:a="http://schemas.openxmlformats.org/drawingml/2006/main">
+            <a:pPr>
+              <a:defRPr sz="1575" b="1">
+                <a:solidFill>
+                  <a:srgbClr val="FFFFFF"/>
+                </a:solidFill>
+              </a:defRPr>
+            </a:pPr>
+            <a:r>
+              <a:rPr sz="1575" b="1">
+                <a:solidFill>
+                  <a:srgbClr val="FFFFFF"/>
+                </a:solidFill>
+              </a:rPr>
+              <a:t>단계별 확인 기준</a:t>
+            </a:r>
+          </a:p>
+        </p:txBody>
+      </p:sp>
+      <p:sp>
+        <p:nvSpPr>
+          <p:cNvPr id="40" name="ops-table-header">
+            <a:extLst xmlns:a="http://schemas.openxmlformats.org/drawingml/2006/main">
+              <a:ext uri="{FF2B5EF4-FFF2-40B4-BE49-F238E27FC236}">
+                <a16:creationId xmlns:a16="http://schemas.microsoft.com/office/drawing/2014/main" id="{37BAC8A5-A454-4CC3-BAEA-915593809A5A}"/>
+              </a:ext>
+            </a:extLst>
+          </p:cNvPr>
+          <p:cNvSpPr>
+            <a:spLocks xmlns:a="http://schemas.openxmlformats.org/drawingml/2006/main" noGrp="1"/>
+          </p:cNvSpPr>
+          <p:nvPr/>
+        </p:nvSpPr>
+        <p:spPr>
+          <a:xfrm xmlns:a="http://schemas.openxmlformats.org/drawingml/2006/main">
+            <a:off x="514350" y="4248150"/>
+            <a:ext cx="7067550" cy="228600"/>
+          </a:xfrm>
+          <a:prstGeom xmlns:a="http://schemas.openxmlformats.org/drawingml/2006/main" prst="rect">
+            <a:avLst/>
+          </a:prstGeom>
+          <a:solidFill xmlns:a="http://schemas.openxmlformats.org/drawingml/2006/main">
+            <a:srgbClr val="00B8D9"/>
+          </a:solidFill>
+          <a:ln xmlns:a="http://schemas.openxmlformats.org/drawingml/2006/main" w="0">
+            <a:solidFill>
+              <a:srgbClr val="00B8D9"/>
+            </a:solidFill>
+            <a:prstDash val="solid"/>
+          </a:ln>
+        </p:spPr>
+      </p:sp>
+      <p:sp>
+        <p:nvSpPr>
+          <p:cNvPr id="41" name="ops-th-1">
+            <a:extLst xmlns:a="http://schemas.openxmlformats.org/drawingml/2006/main">
+              <a:ext uri="{FF2B5EF4-FFF2-40B4-BE49-F238E27FC236}">
+                <a16:creationId xmlns:a16="http://schemas.microsoft.com/office/drawing/2014/main" id="{5F3EC813-53E5-4872-B7C9-28362AD432AE}"/>
+              </a:ext>
+            </a:extLst>
+          </p:cNvPr>
+          <p:cNvSpPr>
+            <a:spLocks xmlns:a="http://schemas.openxmlformats.org/drawingml/2006/main" noGrp="1"/>
+          </p:cNvSpPr>
+          <p:nvPr/>
+        </p:nvSpPr>
+        <p:spPr>
+          <a:xfrm xmlns:a="http://schemas.openxmlformats.org/drawingml/2006/main">
+            <a:off x="723900" y="4267200"/>
+            <a:ext cx="762000" cy="152400"/>
+          </a:xfrm>
+          <a:prstGeom xmlns:a="http://schemas.openxmlformats.org/drawingml/2006/main" prst="rect">
+            <a:avLst/>
+          </a:prstGeom>
+          <a:noFill xmlns:a="http://schemas.openxmlformats.org/drawingml/2006/main"/>
+          <a:ln xmlns:a="http://schemas.openxmlformats.org/drawingml/2006/main" w="0">
+            <a:noFill/>
+            <a:prstDash val="solid"/>
+          </a:ln>
+        </p:spPr>
+        <p:txBody>
+          <a:bodyPr xmlns:a="http://schemas.openxmlformats.org/drawingml/2006/main"/>
+          <a:lstStyle xmlns:a="http://schemas.openxmlformats.org/drawingml/2006/main"/>
+          <a:p xmlns:a="http://schemas.openxmlformats.org/drawingml/2006/main">
+            <a:pPr>
+              <a:defRPr sz="900" b="1">
+                <a:solidFill>
+                  <a:srgbClr val="06111F"/>
+                </a:solidFill>
+              </a:defRPr>
+            </a:pPr>
+            <a:r>
+              <a:rPr sz="900" b="1">
+                <a:solidFill>
+                  <a:srgbClr val="06111F"/>
+                </a:solidFill>
+              </a:rPr>
+              <a:t>구분</a:t>
+            </a:r>
+          </a:p>
+        </p:txBody>
+      </p:sp>
+      <p:sp>
+        <p:nvSpPr>
+          <p:cNvPr id="42" name="ops-th-2">
+            <a:extLst xmlns:a="http://schemas.openxmlformats.org/drawingml/2006/main">
+              <a:ext uri="{FF2B5EF4-FFF2-40B4-BE49-F238E27FC236}">
+                <a16:creationId xmlns:a16="http://schemas.microsoft.com/office/drawing/2014/main" id="{62880520-04DB-4956-8922-D815C20AACC2}"/>
+              </a:ext>
+            </a:extLst>
+          </p:cNvPr>
+          <p:cNvSpPr>
+            <a:spLocks xmlns:a="http://schemas.openxmlformats.org/drawingml/2006/main" noGrp="1"/>
+          </p:cNvSpPr>
+          <p:nvPr/>
+        </p:nvSpPr>
+        <p:spPr>
+          <a:xfrm xmlns:a="http://schemas.openxmlformats.org/drawingml/2006/main">
+            <a:off x="2305050" y="4267200"/>
+            <a:ext cx="1143000" cy="152400"/>
+          </a:xfrm>
+          <a:prstGeom xmlns:a="http://schemas.openxmlformats.org/drawingml/2006/main" prst="rect">
+            <a:avLst/>
+          </a:prstGeom>
+          <a:noFill xmlns:a="http://schemas.openxmlformats.org/drawingml/2006/main"/>
+          <a:ln xmlns:a="http://schemas.openxmlformats.org/drawingml/2006/main" w="0">
+            <a:noFill/>
+            <a:prstDash val="solid"/>
+          </a:ln>
+        </p:spPr>
+        <p:txBody>
+          <a:bodyPr xmlns:a="http://schemas.openxmlformats.org/drawingml/2006/main"/>
+          <a:lstStyle xmlns:a="http://schemas.openxmlformats.org/drawingml/2006/main"/>
+          <a:p xmlns:a="http://schemas.openxmlformats.org/drawingml/2006/main">
+            <a:pPr>
+              <a:defRPr sz="900" b="1">
+                <a:solidFill>
+                  <a:srgbClr val="06111F"/>
+                </a:solidFill>
+              </a:defRPr>
+            </a:pPr>
+            <a:r>
+              <a:rPr sz="900" b="1">
+                <a:solidFill>
+                  <a:srgbClr val="06111F"/>
+                </a:solidFill>
+              </a:rPr>
+              <a:t>확인 기준</a:t>
+            </a:r>
+          </a:p>
+        </p:txBody>
+      </p:sp>
+      <p:sp>
+        <p:nvSpPr>
+          <p:cNvPr id="43" name="ops-th-3">
+            <a:extLst xmlns:a="http://schemas.openxmlformats.org/drawingml/2006/main">
+              <a:ext uri="{FF2B5EF4-FFF2-40B4-BE49-F238E27FC236}">
+                <a16:creationId xmlns:a16="http://schemas.microsoft.com/office/drawing/2014/main" id="{EB1FA545-5D73-47E7-98FC-6B5DEA11B7BF}"/>
+              </a:ext>
+            </a:extLst>
+          </p:cNvPr>
+          <p:cNvSpPr>
+            <a:spLocks xmlns:a="http://schemas.openxmlformats.org/drawingml/2006/main" noGrp="1"/>
+          </p:cNvSpPr>
+          <p:nvPr/>
+        </p:nvSpPr>
+        <p:spPr>
+          <a:xfrm xmlns:a="http://schemas.openxmlformats.org/drawingml/2006/main">
+            <a:off x="6210300" y="4267200"/>
+            <a:ext cx="666750" cy="152400"/>
+          </a:xfrm>
+          <a:prstGeom xmlns:a="http://schemas.openxmlformats.org/drawingml/2006/main" prst="rect">
+            <a:avLst/>
+          </a:prstGeom>
+          <a:noFill xmlns:a="http://schemas.openxmlformats.org/drawingml/2006/main"/>
+          <a:ln xmlns:a="http://schemas.openxmlformats.org/drawingml/2006/main" w="0">
+            <a:noFill/>
+            <a:prstDash val="solid"/>
+          </a:ln>
+        </p:spPr>
+        <p:txBody>
+          <a:bodyPr xmlns:a="http://schemas.openxmlformats.org/drawingml/2006/main"/>
+          <a:lstStyle xmlns:a="http://schemas.openxmlformats.org/drawingml/2006/main"/>
+          <a:p xmlns:a="http://schemas.openxmlformats.org/drawingml/2006/main">
+            <a:pPr algn="ctr">
+              <a:defRPr sz="900" b="1">
+                <a:solidFill>
+                  <a:srgbClr val="06111F"/>
+                </a:solidFill>
+              </a:defRPr>
+            </a:pPr>
+            <a:r>
+              <a:rPr sz="900" b="1">
+                <a:solidFill>
+                  <a:srgbClr val="06111F"/>
+                </a:solidFill>
+              </a:rPr>
+              <a:t>주관</a:t>
+            </a:r>
+          </a:p>
+        </p:txBody>
+      </p:sp>
+      <p:sp>
+        <p:nvSpPr>
+          <p:cNvPr id="44" name="ops-row-1">
+            <a:extLst xmlns:a="http://schemas.openxmlformats.org/drawingml/2006/main">
+              <a:ext uri="{FF2B5EF4-FFF2-40B4-BE49-F238E27FC236}">
+                <a16:creationId xmlns:a16="http://schemas.microsoft.com/office/drawing/2014/main" id="{66590E3D-4905-484E-A755-6407ED98737F}"/>
+              </a:ext>
+            </a:extLst>
+          </p:cNvPr>
+          <p:cNvSpPr>
+            <a:spLocks xmlns:a="http://schemas.openxmlformats.org/drawingml/2006/main" noGrp="1"/>
+          </p:cNvSpPr>
+          <p:nvPr/>
+        </p:nvSpPr>
+        <p:spPr>
+          <a:xfrm xmlns:a="http://schemas.openxmlformats.org/drawingml/2006/main">
+            <a:off x="514350" y="4476750"/>
+            <a:ext cx="7067550" cy="400050"/>
+          </a:xfrm>
+          <a:prstGeom xmlns:a="http://schemas.openxmlformats.org/drawingml/2006/main" prst="rect">
+            <a:avLst/>
+          </a:prstGeom>
+          <a:solidFill xmlns:a="http://schemas.openxmlformats.org/drawingml/2006/main">
+            <a:srgbClr val="151F34"/>
+          </a:solidFill>
+          <a:ln xmlns:a="http://schemas.openxmlformats.org/drawingml/2006/main" w="9525">
+            <a:solidFill>
+              <a:srgbClr val="2F3B55"/>
+            </a:solidFill>
+            <a:prstDash val="solid"/>
+          </a:ln>
+        </p:spPr>
+      </p:sp>
+      <p:sp>
+        <p:nvSpPr>
+          <p:cNvPr id="45" name="ops-label-1">
+            <a:extLst xmlns:a="http://schemas.openxmlformats.org/drawingml/2006/main">
+              <a:ext uri="{FF2B5EF4-FFF2-40B4-BE49-F238E27FC236}">
+                <a16:creationId xmlns:a16="http://schemas.microsoft.com/office/drawing/2014/main" id="{F251F284-A197-4576-85B7-11F4ABE23D02}"/>
+              </a:ext>
+            </a:extLst>
+          </p:cNvPr>
+          <p:cNvSpPr>
+            <a:spLocks xmlns:a="http://schemas.openxmlformats.org/drawingml/2006/main" noGrp="1"/>
+          </p:cNvSpPr>
+          <p:nvPr/>
+        </p:nvSpPr>
+        <p:spPr>
+          <a:xfrm xmlns:a="http://schemas.openxmlformats.org/drawingml/2006/main">
+            <a:off x="723900" y="4581525"/>
+            <a:ext cx="1428750" cy="190500"/>
+          </a:xfrm>
+          <a:prstGeom xmlns:a="http://schemas.openxmlformats.org/drawingml/2006/main" prst="rect">
+            <a:avLst/>
+          </a:prstGeom>
+          <a:noFill xmlns:a="http://schemas.openxmlformats.org/drawingml/2006/main"/>
+          <a:ln xmlns:a="http://schemas.openxmlformats.org/drawingml/2006/main" w="0">
+            <a:noFill/>
+            <a:prstDash val="solid"/>
+          </a:ln>
+        </p:spPr>
+        <p:txBody>
+          <a:bodyPr xmlns:a="http://schemas.openxmlformats.org/drawingml/2006/main"/>
+          <a:lstStyle xmlns:a="http://schemas.openxmlformats.org/drawingml/2006/main"/>
+          <a:p xmlns:a="http://schemas.openxmlformats.org/drawingml/2006/main">
+            <a:pPr>
+              <a:defRPr sz="1013" b="1">
+                <a:solidFill>
+                  <a:srgbClr val="00B8D9"/>
+                </a:solidFill>
+              </a:defRPr>
+            </a:pPr>
+            <a:r>
+              <a:rPr sz="1013" b="1">
+                <a:solidFill>
+                  <a:srgbClr val="00B8D9"/>
+                </a:solidFill>
+              </a:rPr>
+              <a:t>빌드·버전</a:t>
+            </a:r>
+          </a:p>
+        </p:txBody>
+      </p:sp>
+      <p:sp>
+        <p:nvSpPr>
+          <p:cNvPr id="46" name="ops-check-1">
+            <a:extLst xmlns:a="http://schemas.openxmlformats.org/drawingml/2006/main">
+              <a:ext uri="{FF2B5EF4-FFF2-40B4-BE49-F238E27FC236}">
+                <a16:creationId xmlns:a16="http://schemas.microsoft.com/office/drawing/2014/main" id="{EEFD8246-76DD-4488-BD83-2140CE181766}"/>
+              </a:ext>
+            </a:extLst>
+          </p:cNvPr>
+          <p:cNvSpPr>
+            <a:spLocks xmlns:a="http://schemas.openxmlformats.org/drawingml/2006/main" noGrp="1"/>
+          </p:cNvSpPr>
+          <p:nvPr/>
+        </p:nvSpPr>
+        <p:spPr>
+          <a:xfrm xmlns:a="http://schemas.openxmlformats.org/drawingml/2006/main">
+            <a:off x="2305050" y="4572000"/>
+            <a:ext cx="3429000" cy="209550"/>
+          </a:xfrm>
+          <a:prstGeom xmlns:a="http://schemas.openxmlformats.org/drawingml/2006/main" prst="rect">
+            <a:avLst/>
+          </a:prstGeom>
+          <a:noFill xmlns:a="http://schemas.openxmlformats.org/drawingml/2006/main"/>
+          <a:ln xmlns:a="http://schemas.openxmlformats.org/drawingml/2006/main" w="0">
+            <a:noFill/>
+            <a:prstDash val="solid"/>
+          </a:ln>
+        </p:spPr>
+        <p:txBody>
+          <a:bodyPr xmlns:a="http://schemas.openxmlformats.org/drawingml/2006/main"/>
+          <a:lstStyle xmlns:a="http://schemas.openxmlformats.org/drawingml/2006/main"/>
+          <a:p xmlns:a="http://schemas.openxmlformats.org/drawingml/2006/main">
+            <a:pPr>
+              <a:defRPr sz="938">
+                <a:solidFill>
+                  <a:srgbClr val="FFFFFF"/>
+                </a:solidFill>
+              </a:defRPr>
+            </a:pPr>
+            <a:r>
+              <a:rPr sz="938">
+                <a:solidFill>
+                  <a:srgbClr val="FFFFFF"/>
+                </a:solidFill>
+              </a:rPr>
+              <a:t>검수 대상 빌드와 브랜치 기준이 일치하는지 확인</a:t>
+            </a:r>
+          </a:p>
+        </p:txBody>
+      </p:sp>
+      <p:sp>
+        <p:nvSpPr>
+          <p:cNvPr id="47" name="ops-owner-1">
+            <a:extLst xmlns:a="http://schemas.openxmlformats.org/drawingml/2006/main">
+              <a:ext uri="{FF2B5EF4-FFF2-40B4-BE49-F238E27FC236}">
+                <a16:creationId xmlns:a16="http://schemas.microsoft.com/office/drawing/2014/main" id="{6858D189-9778-4C4D-90FC-D30BA9D2C65A}"/>
+              </a:ext>
+            </a:extLst>
+          </p:cNvPr>
+          <p:cNvSpPr>
+            <a:spLocks xmlns:a="http://schemas.openxmlformats.org/drawingml/2006/main" noGrp="1"/>
+          </p:cNvSpPr>
+          <p:nvPr/>
+        </p:nvSpPr>
+        <p:spPr>
+          <a:xfrm xmlns:a="http://schemas.openxmlformats.org/drawingml/2006/main">
+            <a:off x="6153150" y="4572000"/>
+            <a:ext cx="819150" cy="209550"/>
+          </a:xfrm>
+          <a:prstGeom xmlns:a="http://schemas.openxmlformats.org/drawingml/2006/main" prst="rect">
+            <a:avLst/>
+          </a:prstGeom>
+          <a:noFill xmlns:a="http://schemas.openxmlformats.org/drawingml/2006/main"/>
+          <a:ln xmlns:a="http://schemas.openxmlformats.org/drawingml/2006/main" w="0">
+            <a:noFill/>
+            <a:prstDash val="solid"/>
+          </a:ln>
+        </p:spPr>
+        <p:txBody>
+          <a:bodyPr xmlns:a="http://schemas.openxmlformats.org/drawingml/2006/main"/>
+          <a:lstStyle xmlns:a="http://schemas.openxmlformats.org/drawingml/2006/main"/>
+          <a:p xmlns:a="http://schemas.openxmlformats.org/drawingml/2006/main">
+            <a:pPr algn="ctr">
+              <a:defRPr sz="938" b="1">
+                <a:solidFill>
+                  <a:srgbClr val="CBD5E1"/>
+                </a:solidFill>
+              </a:defRPr>
+            </a:pPr>
+            <a:r>
+              <a:rPr sz="938" b="1">
+                <a:solidFill>
+                  <a:srgbClr val="CBD5E1"/>
+                </a:solidFill>
+              </a:rPr>
+              <a:t>개발 PM</a:t>
+            </a:r>
+          </a:p>
+        </p:txBody>
+      </p:sp>
+      <p:sp>
+        <p:nvSpPr>
+          <p:cNvPr id="48" name="ops-row-2">
+            <a:extLst xmlns:a="http://schemas.openxmlformats.org/drawingml/2006/main">
+              <a:ext uri="{FF2B5EF4-FFF2-40B4-BE49-F238E27FC236}">
+                <a16:creationId xmlns:a16="http://schemas.microsoft.com/office/drawing/2014/main" id="{48A07688-DB14-48B6-ACDD-3833DA9E1D4D}"/>
+              </a:ext>
+            </a:extLst>
+          </p:cNvPr>
+          <p:cNvSpPr>
+            <a:spLocks xmlns:a="http://schemas.openxmlformats.org/drawingml/2006/main" noGrp="1"/>
+          </p:cNvSpPr>
+          <p:nvPr/>
+        </p:nvSpPr>
+        <p:spPr>
+          <a:xfrm xmlns:a="http://schemas.openxmlformats.org/drawingml/2006/main">
+            <a:off x="514350" y="4876800"/>
+            <a:ext cx="7067550" cy="400050"/>
+          </a:xfrm>
+          <a:prstGeom xmlns:a="http://schemas.openxmlformats.org/drawingml/2006/main" prst="rect">
+            <a:avLst/>
+          </a:prstGeom>
+          <a:solidFill xmlns:a="http://schemas.openxmlformats.org/drawingml/2006/main">
+            <a:srgbClr val="111827"/>
+          </a:solidFill>
+          <a:ln xmlns:a="http://schemas.openxmlformats.org/drawingml/2006/main" w="9525">
+            <a:solidFill>
+              <a:srgbClr val="2F3B55"/>
+            </a:solidFill>
+            <a:prstDash val="solid"/>
+          </a:ln>
+        </p:spPr>
+      </p:sp>
+      <p:sp>
+        <p:nvSpPr>
+          <p:cNvPr id="49" name="ops-label-2">
+            <a:extLst xmlns:a="http://schemas.openxmlformats.org/drawingml/2006/main">
+              <a:ext uri="{FF2B5EF4-FFF2-40B4-BE49-F238E27FC236}">
+                <a16:creationId xmlns:a16="http://schemas.microsoft.com/office/drawing/2014/main" id="{D997CAA9-A065-4A39-9B8E-66F6279D2192}"/>
+              </a:ext>
+            </a:extLst>
+          </p:cNvPr>
+          <p:cNvSpPr>
+            <a:spLocks xmlns:a="http://schemas.openxmlformats.org/drawingml/2006/main" noGrp="1"/>
+          </p:cNvSpPr>
+          <p:nvPr/>
+        </p:nvSpPr>
+        <p:spPr>
+          <a:xfrm xmlns:a="http://schemas.openxmlformats.org/drawingml/2006/main">
+            <a:off x="723900" y="4981575"/>
+            <a:ext cx="1428750" cy="190500"/>
+          </a:xfrm>
+          <a:prstGeom xmlns:a="http://schemas.openxmlformats.org/drawingml/2006/main" prst="rect">
+            <a:avLst/>
+          </a:prstGeom>
+          <a:noFill xmlns:a="http://schemas.openxmlformats.org/drawingml/2006/main"/>
+          <a:ln xmlns:a="http://schemas.openxmlformats.org/drawingml/2006/main" w="0">
+            <a:noFill/>
+            <a:prstDash val="solid"/>
+          </a:ln>
+        </p:spPr>
+        <p:txBody>
+          <a:bodyPr xmlns:a="http://schemas.openxmlformats.org/drawingml/2006/main"/>
+          <a:lstStyle xmlns:a="http://schemas.openxmlformats.org/drawingml/2006/main"/>
+          <a:p xmlns:a="http://schemas.openxmlformats.org/drawingml/2006/main">
+            <a:pPr>
+              <a:defRPr sz="1013" b="1">
+                <a:solidFill>
+                  <a:srgbClr val="7C3AED"/>
+                </a:solidFill>
+              </a:defRPr>
+            </a:pPr>
+            <a:r>
+              <a:rPr sz="1013" b="1">
+                <a:solidFill>
+                  <a:srgbClr val="7C3AED"/>
+                </a:solidFill>
+              </a:rPr>
+              <a:t>QA 안정성</a:t>
+            </a:r>
+          </a:p>
+        </p:txBody>
+      </p:sp>
+      <p:sp>
+        <p:nvSpPr>
+          <p:cNvPr id="50" name="ops-check-2">
+            <a:extLst xmlns:a="http://schemas.openxmlformats.org/drawingml/2006/main">
+              <a:ext uri="{FF2B5EF4-FFF2-40B4-BE49-F238E27FC236}">
+                <a16:creationId xmlns:a16="http://schemas.microsoft.com/office/drawing/2014/main" id="{E0F9B834-ABD5-4619-AF63-0C9C733CD15D}"/>
+              </a:ext>
+            </a:extLst>
+          </p:cNvPr>
+          <p:cNvSpPr>
+            <a:spLocks xmlns:a="http://schemas.openxmlformats.org/drawingml/2006/main" noGrp="1"/>
+          </p:cNvSpPr>
+          <p:nvPr/>
+        </p:nvSpPr>
+        <p:spPr>
+          <a:xfrm xmlns:a="http://schemas.openxmlformats.org/drawingml/2006/main">
+            <a:off x="2305050" y="4972050"/>
+            <a:ext cx="3429000" cy="209550"/>
+          </a:xfrm>
+          <a:prstGeom xmlns:a="http://schemas.openxmlformats.org/drawingml/2006/main" prst="rect">
+            <a:avLst/>
+          </a:prstGeom>
+          <a:noFill xmlns:a="http://schemas.openxmlformats.org/drawingml/2006/main"/>
+          <a:ln xmlns:a="http://schemas.openxmlformats.org/drawingml/2006/main" w="0">
+            <a:noFill/>
+            <a:prstDash val="solid"/>
+          </a:ln>
+        </p:spPr>
+        <p:txBody>
+          <a:bodyPr xmlns:a="http://schemas.openxmlformats.org/drawingml/2006/main"/>
+          <a:lstStyle xmlns:a="http://schemas.openxmlformats.org/drawingml/2006/main"/>
+          <a:p xmlns:a="http://schemas.openxmlformats.org/drawingml/2006/main">
+            <a:pPr>
+              <a:defRPr sz="938">
+                <a:solidFill>
+                  <a:srgbClr val="FFFFFF"/>
+                </a:solidFill>
+              </a:defRPr>
+            </a:pPr>
+            <a:r>
+              <a:rPr sz="938">
+                <a:solidFill>
+                  <a:srgbClr val="FFFFFF"/>
+                </a:solidFill>
+              </a:rPr>
+              <a:t>주요 이슈의 수정 계획과 잔여 리스크를 분리</a:t>
+            </a:r>
+          </a:p>
+        </p:txBody>
+      </p:sp>
+      <p:sp>
+        <p:nvSpPr>
+          <p:cNvPr id="51" name="ops-owner-2">
+            <a:extLst xmlns:a="http://schemas.openxmlformats.org/drawingml/2006/main">
+              <a:ext uri="{FF2B5EF4-FFF2-40B4-BE49-F238E27FC236}">
+                <a16:creationId xmlns:a16="http://schemas.microsoft.com/office/drawing/2014/main" id="{FF870683-3CBA-4C02-A6EF-474E76FEECD6}"/>
+              </a:ext>
+            </a:extLst>
+          </p:cNvPr>
+          <p:cNvSpPr>
+            <a:spLocks xmlns:a="http://schemas.openxmlformats.org/drawingml/2006/main" noGrp="1"/>
+          </p:cNvSpPr>
+          <p:nvPr/>
+        </p:nvSpPr>
+        <p:spPr>
+          <a:xfrm xmlns:a="http://schemas.openxmlformats.org/drawingml/2006/main">
+            <a:off x="6153150" y="4972050"/>
+            <a:ext cx="819150" cy="209550"/>
+          </a:xfrm>
+          <a:prstGeom xmlns:a="http://schemas.openxmlformats.org/drawingml/2006/main" prst="rect">
+            <a:avLst/>
+          </a:prstGeom>
+          <a:noFill xmlns:a="http://schemas.openxmlformats.org/drawingml/2006/main"/>
+          <a:ln xmlns:a="http://schemas.openxmlformats.org/drawingml/2006/main" w="0">
+            <a:noFill/>
+            <a:prstDash val="solid"/>
+          </a:ln>
+        </p:spPr>
+        <p:txBody>
+          <a:bodyPr xmlns:a="http://schemas.openxmlformats.org/drawingml/2006/main"/>
+          <a:lstStyle xmlns:a="http://schemas.openxmlformats.org/drawingml/2006/main"/>
+          <a:p xmlns:a="http://schemas.openxmlformats.org/drawingml/2006/main">
+            <a:pPr algn="ctr">
+              <a:defRPr sz="938" b="1">
+                <a:solidFill>
+                  <a:srgbClr val="CBD5E1"/>
+                </a:solidFill>
+              </a:defRPr>
+            </a:pPr>
+            <a:r>
+              <a:rPr sz="938" b="1">
+                <a:solidFill>
+                  <a:srgbClr val="CBD5E1"/>
+                </a:solidFill>
+              </a:rPr>
+              <a:t>QA</a:t>
+            </a:r>
+          </a:p>
+        </p:txBody>
+      </p:sp>
+      <p:sp>
+        <p:nvSpPr>
+          <p:cNvPr id="52" name="ops-row-3">
+            <a:extLst xmlns:a="http://schemas.openxmlformats.org/drawingml/2006/main">
+              <a:ext uri="{FF2B5EF4-FFF2-40B4-BE49-F238E27FC236}">
+                <a16:creationId xmlns:a16="http://schemas.microsoft.com/office/drawing/2014/main" id="{EB3FC04B-DE1D-4F8D-9967-F054B889C56A}"/>
+              </a:ext>
+            </a:extLst>
+          </p:cNvPr>
+          <p:cNvSpPr>
+            <a:spLocks xmlns:a="http://schemas.openxmlformats.org/drawingml/2006/main" noGrp="1"/>
+          </p:cNvSpPr>
+          <p:nvPr/>
+        </p:nvSpPr>
+        <p:spPr>
+          <a:xfrm xmlns:a="http://schemas.openxmlformats.org/drawingml/2006/main">
+            <a:off x="514350" y="5276850"/>
+            <a:ext cx="7067550" cy="400050"/>
+          </a:xfrm>
+          <a:prstGeom xmlns:a="http://schemas.openxmlformats.org/drawingml/2006/main" prst="rect">
+            <a:avLst/>
+          </a:prstGeom>
+          <a:solidFill xmlns:a="http://schemas.openxmlformats.org/drawingml/2006/main">
+            <a:srgbClr val="151F34"/>
+          </a:solidFill>
+          <a:ln xmlns:a="http://schemas.openxmlformats.org/drawingml/2006/main" w="9525">
+            <a:solidFill>
+              <a:srgbClr val="2F3B55"/>
+            </a:solidFill>
+            <a:prstDash val="solid"/>
+          </a:ln>
+        </p:spPr>
+      </p:sp>
+      <p:sp>
+        <p:nvSpPr>
+          <p:cNvPr id="53" name="ops-label-3">
+            <a:extLst xmlns:a="http://schemas.openxmlformats.org/drawingml/2006/main">
+              <a:ext uri="{FF2B5EF4-FFF2-40B4-BE49-F238E27FC236}">
+                <a16:creationId xmlns:a16="http://schemas.microsoft.com/office/drawing/2014/main" id="{718FAC35-E4A5-4C5A-8ACF-F6A968B5907D}"/>
+              </a:ext>
+            </a:extLst>
+          </p:cNvPr>
+          <p:cNvSpPr>
+            <a:spLocks xmlns:a="http://schemas.openxmlformats.org/drawingml/2006/main" noGrp="1"/>
+          </p:cNvSpPr>
+          <p:nvPr/>
+        </p:nvSpPr>
+        <p:spPr>
+          <a:xfrm xmlns:a="http://schemas.openxmlformats.org/drawingml/2006/main">
+            <a:off x="723900" y="5381625"/>
+            <a:ext cx="1428750" cy="190500"/>
+          </a:xfrm>
+          <a:prstGeom xmlns:a="http://schemas.openxmlformats.org/drawingml/2006/main" prst="rect">
+            <a:avLst/>
+          </a:prstGeom>
+          <a:noFill xmlns:a="http://schemas.openxmlformats.org/drawingml/2006/main"/>
+          <a:ln xmlns:a="http://schemas.openxmlformats.org/drawingml/2006/main" w="0">
+            <a:noFill/>
+            <a:prstDash val="solid"/>
+          </a:ln>
+        </p:spPr>
+        <p:txBody>
+          <a:bodyPr xmlns:a="http://schemas.openxmlformats.org/drawingml/2006/main"/>
+          <a:lstStyle xmlns:a="http://schemas.openxmlformats.org/drawingml/2006/main"/>
+          <a:p xmlns:a="http://schemas.openxmlformats.org/drawingml/2006/main">
+            <a:pPr>
+              <a:defRPr sz="1013" b="1">
+                <a:solidFill>
+                  <a:srgbClr val="FF6B35"/>
+                </a:solidFill>
+              </a:defRPr>
+            </a:pPr>
+            <a:r>
+              <a:rPr sz="1013" b="1">
+                <a:solidFill>
+                  <a:srgbClr val="FF6B35"/>
+                </a:solidFill>
+              </a:rPr>
+              <a:t>퍼블리셔 검수</a:t>
+            </a:r>
+          </a:p>
+        </p:txBody>
+      </p:sp>
+      <p:sp>
+        <p:nvSpPr>
+          <p:cNvPr id="54" name="ops-check-3">
+            <a:extLst xmlns:a="http://schemas.openxmlformats.org/drawingml/2006/main">
+              <a:ext uri="{FF2B5EF4-FFF2-40B4-BE49-F238E27FC236}">
+                <a16:creationId xmlns:a16="http://schemas.microsoft.com/office/drawing/2014/main" id="{4A18D751-F8AF-496F-90DC-F0C365EDBABB}"/>
+              </a:ext>
+            </a:extLst>
+          </p:cNvPr>
+          <p:cNvSpPr>
+            <a:spLocks xmlns:a="http://schemas.openxmlformats.org/drawingml/2006/main" noGrp="1"/>
+          </p:cNvSpPr>
+          <p:nvPr/>
+        </p:nvSpPr>
+        <p:spPr>
+          <a:xfrm xmlns:a="http://schemas.openxmlformats.org/drawingml/2006/main">
+            <a:off x="2305050" y="5372100"/>
+            <a:ext cx="3429000" cy="209550"/>
+          </a:xfrm>
+          <a:prstGeom xmlns:a="http://schemas.openxmlformats.org/drawingml/2006/main" prst="rect">
+            <a:avLst/>
+          </a:prstGeom>
+          <a:noFill xmlns:a="http://schemas.openxmlformats.org/drawingml/2006/main"/>
+          <a:ln xmlns:a="http://schemas.openxmlformats.org/drawingml/2006/main" w="0">
+            <a:noFill/>
+            <a:prstDash val="solid"/>
+          </a:ln>
+        </p:spPr>
+        <p:txBody>
+          <a:bodyPr xmlns:a="http://schemas.openxmlformats.org/drawingml/2006/main"/>
+          <a:lstStyle xmlns:a="http://schemas.openxmlformats.org/drawingml/2006/main"/>
+          <a:p xmlns:a="http://schemas.openxmlformats.org/drawingml/2006/main">
+            <a:pPr>
+              <a:defRPr sz="938">
+                <a:solidFill>
+                  <a:srgbClr val="FFFFFF"/>
+                </a:solidFill>
+              </a:defRPr>
+            </a:pPr>
+            <a:r>
+              <a:rPr sz="938">
+                <a:solidFill>
+                  <a:srgbClr val="FFFFFF"/>
+                </a:solidFill>
+              </a:rPr>
+              <a:t>피드백 반영·보류·차기 대응 항목을 구분</a:t>
+            </a:r>
+          </a:p>
+        </p:txBody>
+      </p:sp>
+      <p:sp>
+        <p:nvSpPr>
+          <p:cNvPr id="55" name="ops-owner-3">
+            <a:extLst xmlns:a="http://schemas.openxmlformats.org/drawingml/2006/main">
+              <a:ext uri="{FF2B5EF4-FFF2-40B4-BE49-F238E27FC236}">
+                <a16:creationId xmlns:a16="http://schemas.microsoft.com/office/drawing/2014/main" id="{B2E36F08-E0BA-4639-B18C-C598C70B95EF}"/>
+              </a:ext>
+            </a:extLst>
+          </p:cNvPr>
+          <p:cNvSpPr>
+            <a:spLocks xmlns:a="http://schemas.openxmlformats.org/drawingml/2006/main" noGrp="1"/>
+          </p:cNvSpPr>
+          <p:nvPr/>
+        </p:nvSpPr>
+        <p:spPr>
+          <a:xfrm xmlns:a="http://schemas.openxmlformats.org/drawingml/2006/main">
+            <a:off x="6153150" y="5372100"/>
+            <a:ext cx="819150" cy="209550"/>
+          </a:xfrm>
+          <a:prstGeom xmlns:a="http://schemas.openxmlformats.org/drawingml/2006/main" prst="rect">
+            <a:avLst/>
+          </a:prstGeom>
+          <a:noFill xmlns:a="http://schemas.openxmlformats.org/drawingml/2006/main"/>
+          <a:ln xmlns:a="http://schemas.openxmlformats.org/drawingml/2006/main" w="0">
+            <a:noFill/>
+            <a:prstDash val="solid"/>
+          </a:ln>
+        </p:spPr>
+        <p:txBody>
+          <a:bodyPr xmlns:a="http://schemas.openxmlformats.org/drawingml/2006/main"/>
+          <a:lstStyle xmlns:a="http://schemas.openxmlformats.org/drawingml/2006/main"/>
+          <a:p xmlns:a="http://schemas.openxmlformats.org/drawingml/2006/main">
+            <a:pPr algn="ctr">
+              <a:defRPr sz="938" b="1">
+                <a:solidFill>
+                  <a:srgbClr val="CBD5E1"/>
+                </a:solidFill>
+              </a:defRPr>
+            </a:pPr>
+            <a:r>
+              <a:rPr sz="938" b="1">
+                <a:solidFill>
+                  <a:srgbClr val="CBD5E1"/>
+                </a:solidFill>
+              </a:rPr>
+              <a:t>PM</a:t>
+            </a:r>
+          </a:p>
+        </p:txBody>
+      </p:sp>
+      <p:sp>
+        <p:nvSpPr>
+          <p:cNvPr id="56" name="build-control-title">
+            <a:extLst xmlns:a="http://schemas.openxmlformats.org/drawingml/2006/main">
+              <a:ext uri="{FF2B5EF4-FFF2-40B4-BE49-F238E27FC236}">
+                <a16:creationId xmlns:a16="http://schemas.microsoft.com/office/drawing/2014/main" id="{F14FEB12-9FDD-4725-98AC-B86D1815A004}"/>
+              </a:ext>
+            </a:extLst>
+          </p:cNvPr>
+          <p:cNvSpPr>
+            <a:spLocks xmlns:a="http://schemas.openxmlformats.org/drawingml/2006/main" noGrp="1"/>
+          </p:cNvSpPr>
+          <p:nvPr/>
+        </p:nvSpPr>
+        <p:spPr>
+          <a:xfrm xmlns:a="http://schemas.openxmlformats.org/drawingml/2006/main">
+            <a:off x="8096250" y="1924050"/>
+            <a:ext cx="2095500" cy="285750"/>
+          </a:xfrm>
+          <a:prstGeom xmlns:a="http://schemas.openxmlformats.org/drawingml/2006/main" prst="rect">
+            <a:avLst/>
+          </a:prstGeom>
+          <a:noFill xmlns:a="http://schemas.openxmlformats.org/drawingml/2006/main"/>
+          <a:ln xmlns:a="http://schemas.openxmlformats.org/drawingml/2006/main" w="0">
+            <a:noFill/>
+            <a:prstDash val="solid"/>
+          </a:ln>
+        </p:spPr>
+        <p:txBody>
+          <a:bodyPr xmlns:a="http://schemas.openxmlformats.org/drawingml/2006/main"/>
+          <a:lstStyle xmlns:a="http://schemas.openxmlformats.org/drawingml/2006/main"/>
+          <a:p xmlns:a="http://schemas.openxmlformats.org/drawingml/2006/main">
+            <a:pPr>
+              <a:defRPr sz="1650" b="1">
+                <a:solidFill>
+                  <a:srgbClr val="FFFFFF"/>
+                </a:solidFill>
+              </a:defRPr>
+            </a:pPr>
+            <a:r>
+              <a:rPr sz="1650" b="1">
+                <a:solidFill>
+                  <a:srgbClr val="FFFFFF"/>
+                </a:solidFill>
+              </a:rPr>
+              <a:t>PM 통제 항목</a:t>
+            </a:r>
+          </a:p>
+        </p:txBody>
+      </p:sp>
+      <p:sp>
+        <p:nvSpPr>
+          <p:cNvPr id="57" name="build-control-card-1">
+            <a:extLst xmlns:a="http://schemas.openxmlformats.org/drawingml/2006/main">
+              <a:ext uri="{FF2B5EF4-FFF2-40B4-BE49-F238E27FC236}">
+                <a16:creationId xmlns:a16="http://schemas.microsoft.com/office/drawing/2014/main" id="{E7DB076A-660B-4924-A7F8-5BB64373D769}"/>
+              </a:ext>
+            </a:extLst>
+          </p:cNvPr>
+          <p:cNvSpPr>
+            <a:spLocks xmlns:a="http://schemas.openxmlformats.org/drawingml/2006/main" noGrp="1"/>
+          </p:cNvSpPr>
+          <p:nvPr/>
+        </p:nvSpPr>
+        <p:spPr>
+          <a:xfrm xmlns:a="http://schemas.openxmlformats.org/drawingml/2006/main">
+            <a:off x="8096250" y="2381250"/>
+            <a:ext cx="3295650" cy="742950"/>
+          </a:xfrm>
+          <a:prstGeom xmlns:a="http://schemas.openxmlformats.org/drawingml/2006/main" prst="roundRect">
+            <a:avLst>
+              <a:gd name="adj" fmla="val 10256"/>
+            </a:avLst>
+          </a:prstGeom>
+          <a:solidFill xmlns:a="http://schemas.openxmlformats.org/drawingml/2006/main">
+            <a:srgbClr val="111827"/>
+          </a:solidFill>
+          <a:ln xmlns:a="http://schemas.openxmlformats.org/drawingml/2006/main" w="9525">
+            <a:solidFill>
+              <a:srgbClr val="2F3B55"/>
+            </a:solidFill>
+            <a:prstDash val="solid"/>
+          </a:ln>
+        </p:spPr>
+      </p:sp>
+      <p:sp>
+        <p:nvSpPr>
+          <p:cNvPr id="58" name="build-control-bar-1">
+            <a:extLst xmlns:a="http://schemas.openxmlformats.org/drawingml/2006/main">
+              <a:ext uri="{FF2B5EF4-FFF2-40B4-BE49-F238E27FC236}">
+                <a16:creationId xmlns:a16="http://schemas.microsoft.com/office/drawing/2014/main" id="{27DF7B3E-252D-46E0-8182-EF1A4FFD57C1}"/>
+              </a:ext>
+            </a:extLst>
+          </p:cNvPr>
+          <p:cNvSpPr>
+            <a:spLocks xmlns:a="http://schemas.openxmlformats.org/drawingml/2006/main" noGrp="1"/>
+          </p:cNvSpPr>
+          <p:nvPr/>
+        </p:nvSpPr>
+        <p:spPr>
+          <a:xfrm xmlns:a="http://schemas.openxmlformats.org/drawingml/2006/main">
+            <a:off x="8096250" y="2381250"/>
+            <a:ext cx="57150" cy="742950"/>
+          </a:xfrm>
+          <a:prstGeom xmlns:a="http://schemas.openxmlformats.org/drawingml/2006/main" prst="rect">
+            <a:avLst/>
+          </a:prstGeom>
+          <a:solidFill xmlns:a="http://schemas.openxmlformats.org/drawingml/2006/main">
+            <a:srgbClr val="00B8D9"/>
+          </a:solidFill>
+          <a:ln xmlns:a="http://schemas.openxmlformats.org/drawingml/2006/main" w="0">
+            <a:solidFill>
+              <a:srgbClr val="00B8D9"/>
+            </a:solidFill>
+            <a:prstDash val="solid"/>
+          </a:ln>
+        </p:spPr>
+      </p:sp>
+      <p:sp>
+        <p:nvSpPr>
+          <p:cNvPr id="59" name="build-control-title-1">
+            <a:extLst xmlns:a="http://schemas.openxmlformats.org/drawingml/2006/main">
+              <a:ext uri="{FF2B5EF4-FFF2-40B4-BE49-F238E27FC236}">
+                <a16:creationId xmlns:a16="http://schemas.microsoft.com/office/drawing/2014/main" id="{2098AAD0-F9F5-4D9C-8FA1-DDE0802DDC14}"/>
+              </a:ext>
+            </a:extLst>
+          </p:cNvPr>
+          <p:cNvSpPr>
+            <a:spLocks xmlns:a="http://schemas.openxmlformats.org/drawingml/2006/main" noGrp="1"/>
+          </p:cNvSpPr>
+          <p:nvPr/>
+        </p:nvSpPr>
+        <p:spPr>
+          <a:xfrm xmlns:a="http://schemas.openxmlformats.org/drawingml/2006/main">
+            <a:off x="8343900" y="2476500"/>
+            <a:ext cx="2381250" cy="209550"/>
+          </a:xfrm>
+          <a:prstGeom xmlns:a="http://schemas.openxmlformats.org/drawingml/2006/main" prst="rect">
+            <a:avLst/>
+          </a:prstGeom>
+          <a:noFill xmlns:a="http://schemas.openxmlformats.org/drawingml/2006/main"/>
+          <a:ln xmlns:a="http://schemas.openxmlformats.org/drawingml/2006/main" w="0">
+            <a:noFill/>
+            <a:prstDash val="solid"/>
+          </a:ln>
+        </p:spPr>
+        <p:txBody>
+          <a:bodyPr xmlns:a="http://schemas.openxmlformats.org/drawingml/2006/main"/>
+          <a:lstStyle xmlns:a="http://schemas.openxmlformats.org/drawingml/2006/main"/>
+          <a:p xmlns:a="http://schemas.openxmlformats.org/drawingml/2006/main">
+            <a:pPr>
+              <a:defRPr sz="1200" b="1">
+                <a:solidFill>
+                  <a:srgbClr val="FFFFFF"/>
+                </a:solidFill>
+              </a:defRPr>
+            </a:pPr>
+            <a:r>
+              <a:rPr sz="1200" b="1">
+                <a:solidFill>
+                  <a:srgbClr val="FFFFFF"/>
+                </a:solidFill>
+              </a:rPr>
+              <a:t>버전 기준 관리</a:t>
+            </a:r>
+          </a:p>
+        </p:txBody>
+      </p:sp>
+      <p:sp>
+        <p:nvSpPr>
+          <p:cNvPr id="60" name="build-control-body-1">
+            <a:extLst xmlns:a="http://schemas.openxmlformats.org/drawingml/2006/main">
+              <a:ext uri="{FF2B5EF4-FFF2-40B4-BE49-F238E27FC236}">
+                <a16:creationId xmlns:a16="http://schemas.microsoft.com/office/drawing/2014/main" id="{41DD256C-4BD8-433D-B0DF-9B205828C9AC}"/>
+              </a:ext>
+            </a:extLst>
+          </p:cNvPr>
+          <p:cNvSpPr>
+            <a:spLocks xmlns:a="http://schemas.openxmlformats.org/drawingml/2006/main" noGrp="1"/>
+          </p:cNvSpPr>
+          <p:nvPr/>
+        </p:nvSpPr>
+        <p:spPr>
+          <a:xfrm xmlns:a="http://schemas.openxmlformats.org/drawingml/2006/main">
+            <a:off x="8343900" y="2705100"/>
+            <a:ext cx="2609850" cy="323850"/>
+          </a:xfrm>
+          <a:prstGeom xmlns:a="http://schemas.openxmlformats.org/drawingml/2006/main" prst="rect">
+            <a:avLst/>
+          </a:prstGeom>
+          <a:noFill xmlns:a="http://schemas.openxmlformats.org/drawingml/2006/main"/>
+          <a:ln xmlns:a="http://schemas.openxmlformats.org/drawingml/2006/main" w="0">
+            <a:noFill/>
+            <a:prstDash val="solid"/>
+          </a:ln>
+        </p:spPr>
+        <p:txBody>
+          <a:bodyPr xmlns:a="http://schemas.openxmlformats.org/drawingml/2006/main"/>
+          <a:lstStyle xmlns:a="http://schemas.openxmlformats.org/drawingml/2006/main"/>
+          <a:p xmlns:a="http://schemas.openxmlformats.org/drawingml/2006/main">
+            <a:pPr>
+              <a:defRPr sz="900">
+                <a:solidFill>
+                  <a:srgbClr val="CBD5E1"/>
+                </a:solidFill>
+              </a:defRPr>
+            </a:pPr>
+            <a:r>
+              <a:rPr sz="900">
+                <a:solidFill>
+                  <a:srgbClr val="CBD5E1"/>
+                </a:solidFill>
+              </a:rPr>
+              <a:t>빌드 전달 시점, 브랜치, 태그 정보를 하나의 기준으로 관리</a:t>
+            </a:r>
+          </a:p>
+        </p:txBody>
+      </p:sp>
+      <p:sp>
+        <p:nvSpPr>
+          <p:cNvPr id="61" name="build-control-card-2">
+            <a:extLst xmlns:a="http://schemas.openxmlformats.org/drawingml/2006/main">
+              <a:ext uri="{FF2B5EF4-FFF2-40B4-BE49-F238E27FC236}">
+                <a16:creationId xmlns:a16="http://schemas.microsoft.com/office/drawing/2014/main" id="{06B1EFFD-2FF5-4BC4-8E60-74FD07C293D0}"/>
+              </a:ext>
+            </a:extLst>
+          </p:cNvPr>
+          <p:cNvSpPr>
+            <a:spLocks xmlns:a="http://schemas.openxmlformats.org/drawingml/2006/main" noGrp="1"/>
+          </p:cNvSpPr>
+          <p:nvPr/>
+        </p:nvSpPr>
+        <p:spPr>
+          <a:xfrm xmlns:a="http://schemas.openxmlformats.org/drawingml/2006/main">
+            <a:off x="8096250" y="3371850"/>
+            <a:ext cx="3295650" cy="742950"/>
+          </a:xfrm>
+          <a:prstGeom xmlns:a="http://schemas.openxmlformats.org/drawingml/2006/main" prst="roundRect">
+            <a:avLst>
+              <a:gd name="adj" fmla="val 10256"/>
+            </a:avLst>
+          </a:prstGeom>
+          <a:solidFill xmlns:a="http://schemas.openxmlformats.org/drawingml/2006/main">
+            <a:srgbClr val="111827"/>
+          </a:solidFill>
+          <a:ln xmlns:a="http://schemas.openxmlformats.org/drawingml/2006/main" w="9525">
+            <a:solidFill>
+              <a:srgbClr val="2F3B55"/>
+            </a:solidFill>
+            <a:prstDash val="solid"/>
+          </a:ln>
+        </p:spPr>
+      </p:sp>
+      <p:sp>
+        <p:nvSpPr>
+          <p:cNvPr id="62" name="build-control-bar-2">
+            <a:extLst xmlns:a="http://schemas.openxmlformats.org/drawingml/2006/main">
+              <a:ext uri="{FF2B5EF4-FFF2-40B4-BE49-F238E27FC236}">
+                <a16:creationId xmlns:a16="http://schemas.microsoft.com/office/drawing/2014/main" id="{218509C0-F73E-4CDF-98C2-B4D4A272FC97}"/>
+              </a:ext>
+            </a:extLst>
+          </p:cNvPr>
+          <p:cNvSpPr>
+            <a:spLocks xmlns:a="http://schemas.openxmlformats.org/drawingml/2006/main" noGrp="1"/>
+          </p:cNvSpPr>
+          <p:nvPr/>
+        </p:nvSpPr>
+        <p:spPr>
+          <a:xfrm xmlns:a="http://schemas.openxmlformats.org/drawingml/2006/main">
+            <a:off x="8096250" y="3371850"/>
+            <a:ext cx="57150" cy="742950"/>
+          </a:xfrm>
+          <a:prstGeom xmlns:a="http://schemas.openxmlformats.org/drawingml/2006/main" prst="rect">
+            <a:avLst/>
+          </a:prstGeom>
+          <a:solidFill xmlns:a="http://schemas.openxmlformats.org/drawingml/2006/main">
+            <a:srgbClr val="FF6B35"/>
+          </a:solidFill>
+          <a:ln xmlns:a="http://schemas.openxmlformats.org/drawingml/2006/main" w="0">
+            <a:solidFill>
+              <a:srgbClr val="FF6B35"/>
+            </a:solidFill>
+            <a:prstDash val="solid"/>
+          </a:ln>
+        </p:spPr>
+      </p:sp>
+      <p:sp>
+        <p:nvSpPr>
+          <p:cNvPr id="63" name="build-control-title-2">
+            <a:extLst xmlns:a="http://schemas.openxmlformats.org/drawingml/2006/main">
+              <a:ext uri="{FF2B5EF4-FFF2-40B4-BE49-F238E27FC236}">
+                <a16:creationId xmlns:a16="http://schemas.microsoft.com/office/drawing/2014/main" id="{D8A86D82-D67D-4609-83E3-61D49A6E55AA}"/>
+              </a:ext>
+            </a:extLst>
+          </p:cNvPr>
+          <p:cNvSpPr>
+            <a:spLocks xmlns:a="http://schemas.openxmlformats.org/drawingml/2006/main" noGrp="1"/>
+          </p:cNvSpPr>
+          <p:nvPr/>
+        </p:nvSpPr>
+        <p:spPr>
+          <a:xfrm xmlns:a="http://schemas.openxmlformats.org/drawingml/2006/main">
+            <a:off x="8343900" y="3467100"/>
+            <a:ext cx="2381250" cy="209550"/>
+          </a:xfrm>
+          <a:prstGeom xmlns:a="http://schemas.openxmlformats.org/drawingml/2006/main" prst="rect">
+            <a:avLst/>
+          </a:prstGeom>
+          <a:noFill xmlns:a="http://schemas.openxmlformats.org/drawingml/2006/main"/>
+          <a:ln xmlns:a="http://schemas.openxmlformats.org/drawingml/2006/main" w="0">
+            <a:noFill/>
+            <a:prstDash val="solid"/>
+          </a:ln>
+        </p:spPr>
+        <p:txBody>
+          <a:bodyPr xmlns:a="http://schemas.openxmlformats.org/drawingml/2006/main"/>
+          <a:lstStyle xmlns:a="http://schemas.openxmlformats.org/drawingml/2006/main"/>
+          <a:p xmlns:a="http://schemas.openxmlformats.org/drawingml/2006/main">
+            <a:pPr>
+              <a:defRPr sz="1200" b="1">
+                <a:solidFill>
+                  <a:srgbClr val="FFFFFF"/>
+                </a:solidFill>
+              </a:defRPr>
+            </a:pPr>
+            <a:r>
+              <a:rPr sz="1200" b="1">
+                <a:solidFill>
+                  <a:srgbClr val="FFFFFF"/>
+                </a:solidFill>
+              </a:rPr>
+              <a:t>이슈 영향도 분리</a:t>
+            </a:r>
+          </a:p>
+        </p:txBody>
+      </p:sp>
+      <p:sp>
+        <p:nvSpPr>
+          <p:cNvPr id="64" name="build-control-body-2">
+            <a:extLst xmlns:a="http://schemas.openxmlformats.org/drawingml/2006/main">
+              <a:ext uri="{FF2B5EF4-FFF2-40B4-BE49-F238E27FC236}">
+                <a16:creationId xmlns:a16="http://schemas.microsoft.com/office/drawing/2014/main" id="{DB6E5543-8877-4E6E-8C00-C90E051C9259}"/>
+              </a:ext>
+            </a:extLst>
+          </p:cNvPr>
+          <p:cNvSpPr>
+            <a:spLocks xmlns:a="http://schemas.openxmlformats.org/drawingml/2006/main" noGrp="1"/>
+          </p:cNvSpPr>
+          <p:nvPr/>
+        </p:nvSpPr>
+        <p:spPr>
+          <a:xfrm xmlns:a="http://schemas.openxmlformats.org/drawingml/2006/main">
+            <a:off x="8343900" y="3695700"/>
+            <a:ext cx="2609850" cy="323850"/>
+          </a:xfrm>
+          <a:prstGeom xmlns:a="http://schemas.openxmlformats.org/drawingml/2006/main" prst="rect">
+            <a:avLst/>
+          </a:prstGeom>
+          <a:noFill xmlns:a="http://schemas.openxmlformats.org/drawingml/2006/main"/>
+          <a:ln xmlns:a="http://schemas.openxmlformats.org/drawingml/2006/main" w="0">
+            <a:noFill/>
+            <a:prstDash val="solid"/>
+          </a:ln>
+        </p:spPr>
+        <p:txBody>
+          <a:bodyPr xmlns:a="http://schemas.openxmlformats.org/drawingml/2006/main"/>
+          <a:lstStyle xmlns:a="http://schemas.openxmlformats.org/drawingml/2006/main"/>
+          <a:p xmlns:a="http://schemas.openxmlformats.org/drawingml/2006/main">
+            <a:pPr>
+              <a:defRPr sz="900">
+                <a:solidFill>
+                  <a:srgbClr val="CBD5E1"/>
+                </a:solidFill>
+              </a:defRPr>
+            </a:pPr>
+            <a:r>
+              <a:rPr sz="900">
+                <a:solidFill>
+                  <a:srgbClr val="CBD5E1"/>
+                </a:solidFill>
+              </a:rPr>
+              <a:t>런칭 영향 이슈와 차기 대응 이슈를 구분해 의사결정</a:t>
+            </a:r>
+          </a:p>
+        </p:txBody>
+      </p:sp>
+      <p:sp>
+        <p:nvSpPr>
+          <p:cNvPr id="65" name="build-control-card-3">
+            <a:extLst xmlns:a="http://schemas.openxmlformats.org/drawingml/2006/main">
+              <a:ext uri="{FF2B5EF4-FFF2-40B4-BE49-F238E27FC236}">
+                <a16:creationId xmlns:a16="http://schemas.microsoft.com/office/drawing/2014/main" id="{9F0F9E21-5F25-499E-9EA2-81D3E20055F3}"/>
+              </a:ext>
+            </a:extLst>
+          </p:cNvPr>
+          <p:cNvSpPr>
+            <a:spLocks xmlns:a="http://schemas.openxmlformats.org/drawingml/2006/main" noGrp="1"/>
+          </p:cNvSpPr>
+          <p:nvPr/>
+        </p:nvSpPr>
+        <p:spPr>
+          <a:xfrm xmlns:a="http://schemas.openxmlformats.org/drawingml/2006/main">
+            <a:off x="8096250" y="4362450"/>
+            <a:ext cx="3295650" cy="742950"/>
+          </a:xfrm>
+          <a:prstGeom xmlns:a="http://schemas.openxmlformats.org/drawingml/2006/main" prst="roundRect">
+            <a:avLst>
+              <a:gd name="adj" fmla="val 10256"/>
+            </a:avLst>
+          </a:prstGeom>
+          <a:solidFill xmlns:a="http://schemas.openxmlformats.org/drawingml/2006/main">
+            <a:srgbClr val="111827"/>
+          </a:solidFill>
+          <a:ln xmlns:a="http://schemas.openxmlformats.org/drawingml/2006/main" w="9525">
+            <a:solidFill>
+              <a:srgbClr val="2F3B55"/>
+            </a:solidFill>
+            <a:prstDash val="solid"/>
+          </a:ln>
+        </p:spPr>
+      </p:sp>
+      <p:sp>
+        <p:nvSpPr>
+          <p:cNvPr id="66" name="build-control-bar-3">
+            <a:extLst xmlns:a="http://schemas.openxmlformats.org/drawingml/2006/main">
+              <a:ext uri="{FF2B5EF4-FFF2-40B4-BE49-F238E27FC236}">
+                <a16:creationId xmlns:a16="http://schemas.microsoft.com/office/drawing/2014/main" id="{7C6ECCC3-207D-4A5C-86DE-33266D8C916F}"/>
+              </a:ext>
+            </a:extLst>
+          </p:cNvPr>
+          <p:cNvSpPr>
+            <a:spLocks xmlns:a="http://schemas.openxmlformats.org/drawingml/2006/main" noGrp="1"/>
+          </p:cNvSpPr>
+          <p:nvPr/>
+        </p:nvSpPr>
+        <p:spPr>
+          <a:xfrm xmlns:a="http://schemas.openxmlformats.org/drawingml/2006/main">
+            <a:off x="8096250" y="4362450"/>
+            <a:ext cx="57150" cy="742950"/>
+          </a:xfrm>
+          <a:prstGeom xmlns:a="http://schemas.openxmlformats.org/drawingml/2006/main" prst="rect">
+            <a:avLst/>
+          </a:prstGeom>
+          <a:solidFill xmlns:a="http://schemas.openxmlformats.org/drawingml/2006/main">
+            <a:srgbClr val="7C3AED"/>
+          </a:solidFill>
+          <a:ln xmlns:a="http://schemas.openxmlformats.org/drawingml/2006/main" w="0">
+            <a:solidFill>
+              <a:srgbClr val="7C3AED"/>
+            </a:solidFill>
+            <a:prstDash val="solid"/>
+          </a:ln>
+        </p:spPr>
+      </p:sp>
+      <p:sp>
+        <p:nvSpPr>
+          <p:cNvPr id="67" name="build-control-title-3">
+            <a:extLst xmlns:a="http://schemas.openxmlformats.org/drawingml/2006/main">
+              <a:ext uri="{FF2B5EF4-FFF2-40B4-BE49-F238E27FC236}">
+                <a16:creationId xmlns:a16="http://schemas.microsoft.com/office/drawing/2014/main" id="{4BCAA5A7-AA76-4EB1-9E67-E8285ACD9910}"/>
+              </a:ext>
+            </a:extLst>
+          </p:cNvPr>
+          <p:cNvSpPr>
+            <a:spLocks xmlns:a="http://schemas.openxmlformats.org/drawingml/2006/main" noGrp="1"/>
+          </p:cNvSpPr>
+          <p:nvPr/>
+        </p:nvSpPr>
+        <p:spPr>
+          <a:xfrm xmlns:a="http://schemas.openxmlformats.org/drawingml/2006/main">
+            <a:off x="8343900" y="4457700"/>
+            <a:ext cx="2381250" cy="209550"/>
+          </a:xfrm>
+          <a:prstGeom xmlns:a="http://schemas.openxmlformats.org/drawingml/2006/main" prst="rect">
+            <a:avLst/>
+          </a:prstGeom>
+          <a:noFill xmlns:a="http://schemas.openxmlformats.org/drawingml/2006/main"/>
+          <a:ln xmlns:a="http://schemas.openxmlformats.org/drawingml/2006/main" w="0">
+            <a:noFill/>
+            <a:prstDash val="solid"/>
+          </a:ln>
+        </p:spPr>
+        <p:txBody>
+          <a:bodyPr xmlns:a="http://schemas.openxmlformats.org/drawingml/2006/main"/>
+          <a:lstStyle xmlns:a="http://schemas.openxmlformats.org/drawingml/2006/main"/>
+          <a:p xmlns:a="http://schemas.openxmlformats.org/drawingml/2006/main">
+            <a:pPr>
+              <a:defRPr sz="1200" b="1">
+                <a:solidFill>
+                  <a:srgbClr val="FFFFFF"/>
+                </a:solidFill>
+              </a:defRPr>
+            </a:pPr>
+            <a:r>
+              <a:rPr sz="1200" b="1">
+                <a:solidFill>
+                  <a:srgbClr val="FFFFFF"/>
+                </a:solidFill>
+              </a:rPr>
+              <a:t>배포 준비 연결</a:t>
+            </a:r>
+          </a:p>
+        </p:txBody>
+      </p:sp>
+      <p:sp>
+        <p:nvSpPr>
+          <p:cNvPr id="68" name="build-control-body-3">
+            <a:extLst xmlns:a="http://schemas.openxmlformats.org/drawingml/2006/main">
+              <a:ext uri="{FF2B5EF4-FFF2-40B4-BE49-F238E27FC236}">
+                <a16:creationId xmlns:a16="http://schemas.microsoft.com/office/drawing/2014/main" id="{16FB5B07-0673-4B45-B190-C83B55D9FAAD}"/>
+              </a:ext>
+            </a:extLst>
+          </p:cNvPr>
+          <p:cNvSpPr>
+            <a:spLocks xmlns:a="http://schemas.openxmlformats.org/drawingml/2006/main" noGrp="1"/>
+          </p:cNvSpPr>
+          <p:nvPr/>
+        </p:nvSpPr>
+        <p:spPr>
+          <a:xfrm xmlns:a="http://schemas.openxmlformats.org/drawingml/2006/main">
+            <a:off x="8343900" y="4686300"/>
+            <a:ext cx="2609850" cy="323850"/>
+          </a:xfrm>
+          <a:prstGeom xmlns:a="http://schemas.openxmlformats.org/drawingml/2006/main" prst="rect">
+            <a:avLst/>
+          </a:prstGeom>
+          <a:noFill xmlns:a="http://schemas.openxmlformats.org/drawingml/2006/main"/>
+          <a:ln xmlns:a="http://schemas.openxmlformats.org/drawingml/2006/main" w="0">
+            <a:noFill/>
+            <a:prstDash val="solid"/>
+          </a:ln>
+        </p:spPr>
+        <p:txBody>
+          <a:bodyPr xmlns:a="http://schemas.openxmlformats.org/drawingml/2006/main"/>
+          <a:lstStyle xmlns:a="http://schemas.openxmlformats.org/drawingml/2006/main"/>
+          <a:p xmlns:a="http://schemas.openxmlformats.org/drawingml/2006/main">
+            <a:pPr>
+              <a:defRPr sz="900">
+                <a:solidFill>
+                  <a:srgbClr val="CBD5E1"/>
+                </a:solidFill>
+              </a:defRPr>
+            </a:pPr>
+            <a:r>
+              <a:rPr sz="900">
+                <a:solidFill>
+                  <a:srgbClr val="CBD5E1"/>
+                </a:solidFill>
+              </a:rPr>
+              <a:t>QA·검수 결과를 Live 릴리즈 준비 항목으로 전환</a:t>
+            </a:r>
+          </a:p>
+        </p:txBody>
+      </p:sp>
+      <p:sp>
+        <p:nvSpPr>
+          <p:cNvPr id="69" name="release-principle-panel">
+            <a:extLst xmlns:a="http://schemas.openxmlformats.org/drawingml/2006/main">
+              <a:ext uri="{FF2B5EF4-FFF2-40B4-BE49-F238E27FC236}">
+                <a16:creationId xmlns:a16="http://schemas.microsoft.com/office/drawing/2014/main" id="{0F5B9B27-382C-4221-98A4-D29CFB0EF914}"/>
+              </a:ext>
+            </a:extLst>
+          </p:cNvPr>
+          <p:cNvSpPr>
+            <a:spLocks xmlns:a="http://schemas.openxmlformats.org/drawingml/2006/main" noGrp="1"/>
+          </p:cNvSpPr>
+          <p:nvPr/>
+        </p:nvSpPr>
+        <p:spPr>
+          <a:xfrm xmlns:a="http://schemas.openxmlformats.org/drawingml/2006/main">
+            <a:off x="514350" y="5905500"/>
+            <a:ext cx="10877550" cy="419100"/>
+          </a:xfrm>
+          <a:prstGeom xmlns:a="http://schemas.openxmlformats.org/drawingml/2006/main" prst="roundRect">
+            <a:avLst>
+              <a:gd name="adj" fmla="val 18182"/>
+            </a:avLst>
+          </a:prstGeom>
+          <a:solidFill xmlns:a="http://schemas.openxmlformats.org/drawingml/2006/main">
+            <a:srgbClr val="10192E"/>
+          </a:solidFill>
+          <a:ln xmlns:a="http://schemas.openxmlformats.org/drawingml/2006/main" w="9525">
+            <a:solidFill>
+              <a:srgbClr val="22304E"/>
+            </a:solidFill>
+            <a:prstDash val="solid"/>
+          </a:ln>
+        </p:spPr>
+      </p:sp>
+      <p:sp>
+        <p:nvSpPr>
+          <p:cNvPr id="70" name="release-principle-label">
+            <a:extLst xmlns:a="http://schemas.openxmlformats.org/drawingml/2006/main">
+              <a:ext uri="{FF2B5EF4-FFF2-40B4-BE49-F238E27FC236}">
+                <a16:creationId xmlns:a16="http://schemas.microsoft.com/office/drawing/2014/main" id="{33942DF5-1AEE-4691-93A9-36420D351F75}"/>
+              </a:ext>
+            </a:extLst>
+          </p:cNvPr>
+          <p:cNvSpPr>
+            <a:spLocks xmlns:a="http://schemas.openxmlformats.org/drawingml/2006/main" noGrp="1"/>
+          </p:cNvSpPr>
+          <p:nvPr/>
+        </p:nvSpPr>
+        <p:spPr>
+          <a:xfrm xmlns:a="http://schemas.openxmlformats.org/drawingml/2006/main">
+            <a:off x="781050" y="6019800"/>
+            <a:ext cx="1143000" cy="209550"/>
+          </a:xfrm>
+          <a:prstGeom xmlns:a="http://schemas.openxmlformats.org/drawingml/2006/main" prst="rect">
+            <a:avLst/>
+          </a:prstGeom>
+          <a:noFill xmlns:a="http://schemas.openxmlformats.org/drawingml/2006/main"/>
+          <a:ln xmlns:a="http://schemas.openxmlformats.org/drawingml/2006/main" w="0">
+            <a:noFill/>
+            <a:prstDash val="solid"/>
+          </a:ln>
+        </p:spPr>
+        <p:txBody>
+          <a:bodyPr xmlns:a="http://schemas.openxmlformats.org/drawingml/2006/main"/>
+          <a:lstStyle xmlns:a="http://schemas.openxmlformats.org/drawingml/2006/main"/>
+          <a:p xmlns:a="http://schemas.openxmlformats.org/drawingml/2006/main">
+            <a:pPr>
+              <a:defRPr sz="1200" b="1">
+                <a:solidFill>
+                  <a:srgbClr val="8BD9E8"/>
+                </a:solidFill>
+              </a:defRPr>
+            </a:pPr>
+            <a:r>
+              <a:rPr sz="1200" b="1">
+                <a:solidFill>
+                  <a:srgbClr val="8BD9E8"/>
+                </a:solidFill>
+              </a:rPr>
+              <a:t>운영 원칙</a:t>
+            </a:r>
+          </a:p>
+        </p:txBody>
+      </p:sp>
+      <p:sp>
+        <p:nvSpPr>
+          <p:cNvPr id="71" name="release-principle-body">
+            <a:extLst xmlns:a="http://schemas.openxmlformats.org/drawingml/2006/main">
+              <a:ext uri="{FF2B5EF4-FFF2-40B4-BE49-F238E27FC236}">
+                <a16:creationId xmlns:a16="http://schemas.microsoft.com/office/drawing/2014/main" id="{FECE0CDF-3820-408A-9670-37FE205CA715}"/>
+              </a:ext>
+            </a:extLst>
+          </p:cNvPr>
+          <p:cNvSpPr>
+            <a:spLocks xmlns:a="http://schemas.openxmlformats.org/drawingml/2006/main" noGrp="1"/>
+          </p:cNvSpPr>
+          <p:nvPr/>
+        </p:nvSpPr>
+        <p:spPr>
+          <a:xfrm xmlns:a="http://schemas.openxmlformats.org/drawingml/2006/main">
+            <a:off x="1962150" y="6019800"/>
+            <a:ext cx="8191500" cy="209550"/>
+          </a:xfrm>
+          <a:prstGeom xmlns:a="http://schemas.openxmlformats.org/drawingml/2006/main" prst="rect">
+            <a:avLst/>
+          </a:prstGeom>
+          <a:noFill xmlns:a="http://schemas.openxmlformats.org/drawingml/2006/main"/>
+          <a:ln xmlns:a="http://schemas.openxmlformats.org/drawingml/2006/main" w="0">
+            <a:noFill/>
+            <a:prstDash val="solid"/>
+          </a:ln>
+        </p:spPr>
+        <p:txBody>
+          <a:bodyPr xmlns:a="http://schemas.openxmlformats.org/drawingml/2006/main"/>
+          <a:lstStyle xmlns:a="http://schemas.openxmlformats.org/drawingml/2006/main"/>
+          <a:p xmlns:a="http://schemas.openxmlformats.org/drawingml/2006/main">
+            <a:pPr>
+              <a:defRPr sz="1125">
+                <a:solidFill>
+                  <a:srgbClr val="FFFFFF"/>
+                </a:solidFill>
+              </a:defRPr>
+            </a:pPr>
+            <a:r>
+              <a:rPr sz="1125">
+                <a:solidFill>
+                  <a:srgbClr val="FFFFFF"/>
+                </a:solidFill>
+              </a:rPr>
+              <a:t>빌드가 준비됐는지가 아니라, QA·검수·운영 대응까지 같은 버전 기준으로 설명 가능한지가 핵심입니다.</a:t>
+            </a:r>
+          </a:p>
+        </p:txBody>
+      </p:sp>
+    </p:spTree>
+    <p:extLst>
+      <p:ext uri="{BB962C8B-B14F-4D97-AF65-F5344CB8AC3E}">
+        <p14:creationId xmlns:p14="http://schemas.microsoft.com/office/powerpoint/2010/main" val="1928015623"/>
+      </p:ext>
+    </p:extLst>
+  </p:cSld>
+</p:sld>
+</file>
+
+<file path=ppt/slides/slide7.xml><?xml version="1.0" encoding="utf-8"?>
+<p:sld xmlns:p="http://schemas.openxmlformats.org/presentationml/2006/main">
+  <p:cSld>
+    <p:bg>
+      <p:bgPr>
+        <a:solidFill xmlns:a="http://schemas.openxmlformats.org/drawingml/2006/main">
+          <a:srgbClr val="0B1020"/>
+        </a:solidFill>
+      </p:bgPr>
+    </p:bg>
+    <p:spTree>
+      <p:nvGrpSpPr>
+        <p:cNvPr id="1" name=""/>
+        <p:cNvGrpSpPr/>
+        <p:nvPr/>
+      </p:nvGrpSpPr>
+      <p:grpSpPr>
+        <a:xfrm xmlns:a="http://schemas.openxmlformats.org/drawingml/2006/main"/>
+      </p:grpSpPr>
+      <p:sp>
+        <p:nvSpPr>
+          <p:cNvPr id="1" name="top-accent">
+            <a:extLst xmlns:a="http://schemas.openxmlformats.org/drawingml/2006/main">
+              <a:ext uri="{FF2B5EF4-FFF2-40B4-BE49-F238E27FC236}">
+                <a16:creationId xmlns:a16="http://schemas.microsoft.com/office/drawing/2014/main" id="{BCFB32D7-4D07-4027-B8DC-1149B7DFFE81}"/>
+              </a:ext>
+            </a:extLst>
+          </p:cNvPr>
+          <p:cNvSpPr>
+            <a:spLocks xmlns:a="http://schemas.openxmlformats.org/drawingml/2006/main" noGrp="1"/>
+          </p:cNvSpPr>
+          <p:nvPr/>
+        </p:nvSpPr>
+        <p:spPr>
+          <a:xfrm xmlns:a="http://schemas.openxmlformats.org/drawingml/2006/main">
+            <a:off x="0" y="0"/>
+            <a:ext cx="12192000" cy="95250"/>
+          </a:xfrm>
+          <a:prstGeom xmlns:a="http://schemas.openxmlformats.org/drawingml/2006/main" prst="rect">
+            <a:avLst/>
+          </a:prstGeom>
+          <a:solidFill xmlns:a="http://schemas.openxmlformats.org/drawingml/2006/main">
+            <a:srgbClr val="00B8D9"/>
+          </a:solidFill>
+          <a:ln xmlns:a="http://schemas.openxmlformats.org/drawingml/2006/main" w="0">
+            <a:solidFill>
+              <a:srgbClr val="00B8D9"/>
+            </a:solidFill>
+            <a:prstDash val="solid"/>
+          </a:ln>
+        </p:spPr>
+      </p:sp>
+      <p:sp>
+        <p:nvSpPr>
+          <p:cNvPr id="2" name="left-accent">
+            <a:extLst xmlns:a="http://schemas.openxmlformats.org/drawingml/2006/main">
+              <a:ext uri="{FF2B5EF4-FFF2-40B4-BE49-F238E27FC236}">
+                <a16:creationId xmlns:a16="http://schemas.microsoft.com/office/drawing/2014/main" id="{F6A92960-047B-4938-98F3-7E439B909230}"/>
+              </a:ext>
+            </a:extLst>
+          </p:cNvPr>
+          <p:cNvSpPr>
+            <a:spLocks xmlns:a="http://schemas.openxmlformats.org/drawingml/2006/main" noGrp="1"/>
+          </p:cNvSpPr>
+          <p:nvPr/>
+        </p:nvSpPr>
+        <p:spPr>
+          <a:xfrm xmlns:a="http://schemas.openxmlformats.org/drawingml/2006/main">
+            <a:off x="0" y="0"/>
+            <a:ext cx="152400" cy="6858000"/>
+          </a:xfrm>
+          <a:prstGeom xmlns:a="http://schemas.openxmlformats.org/drawingml/2006/main" prst="rect">
+            <a:avLst/>
+          </a:prstGeom>
+          <a:solidFill xmlns:a="http://schemas.openxmlformats.org/drawingml/2006/main">
+            <a:srgbClr val="FF6B35"/>
+          </a:solidFill>
+          <a:ln xmlns:a="http://schemas.openxmlformats.org/drawingml/2006/main" w="0">
+            <a:solidFill>
+              <a:srgbClr val="FF6B35"/>
+            </a:solidFill>
+            <a:prstDash val="solid"/>
+          </a:ln>
+        </p:spPr>
+      </p:sp>
+      <p:sp>
+        <p:nvSpPr>
+          <p:cNvPr id="3" name="eyebrow">
+            <a:extLst xmlns:a="http://schemas.openxmlformats.org/drawingml/2006/main">
+              <a:ext uri="{FF2B5EF4-FFF2-40B4-BE49-F238E27FC236}">
+                <a16:creationId xmlns:a16="http://schemas.microsoft.com/office/drawing/2014/main" id="{C5E44BBC-E164-4504-BDAC-3E22260E878B}"/>
+              </a:ext>
+            </a:extLst>
+          </p:cNvPr>
+          <p:cNvSpPr>
+            <a:spLocks xmlns:a="http://schemas.openxmlformats.org/drawingml/2006/main" noGrp="1"/>
+          </p:cNvSpPr>
+          <p:nvPr/>
+        </p:nvSpPr>
+        <p:spPr>
+          <a:xfrm xmlns:a="http://schemas.openxmlformats.org/drawingml/2006/main">
+            <a:off x="514350" y="361950"/>
+            <a:ext cx="5905500" cy="285750"/>
+          </a:xfrm>
+          <a:prstGeom xmlns:a="http://schemas.openxmlformats.org/drawingml/2006/main" prst="rect">
+            <a:avLst/>
+          </a:prstGeom>
+          <a:noFill xmlns:a="http://schemas.openxmlformats.org/drawingml/2006/main"/>
+          <a:ln xmlns:a="http://schemas.openxmlformats.org/drawingml/2006/main" w="0">
+            <a:noFill/>
+            <a:prstDash val="solid"/>
+          </a:ln>
+        </p:spPr>
+        <p:txBody>
+          <a:bodyPr xmlns:a="http://schemas.openxmlformats.org/drawingml/2006/main"/>
+          <a:lstStyle xmlns:a="http://schemas.openxmlformats.org/drawingml/2006/main"/>
+          <a:p xmlns:a="http://schemas.openxmlformats.org/drawingml/2006/main">
+            <a:pPr>
+              <a:defRPr sz="1125" b="1">
+                <a:solidFill>
+                  <a:srgbClr val="8BD9E8"/>
+                </a:solidFill>
+              </a:defRPr>
+            </a:pPr>
+            <a:r>
+              <a:rPr sz="1125" b="1">
+                <a:solidFill>
+                  <a:srgbClr val="8BD9E8"/>
+                </a:solidFill>
+              </a:rPr>
+              <a:t>FINAL LAUNCH READINESS | PAGE 07</a:t>
+            </a:r>
+          </a:p>
+        </p:txBody>
+      </p:sp>
+      <p:sp>
+        <p:nvSpPr>
+          <p:cNvPr id="4" name="footer">
+            <a:extLst xmlns:a="http://schemas.openxmlformats.org/drawingml/2006/main">
+              <a:ext uri="{FF2B5EF4-FFF2-40B4-BE49-F238E27FC236}">
+                <a16:creationId xmlns:a16="http://schemas.microsoft.com/office/drawing/2014/main" id="{9158F89C-5695-4007-98E5-58AEC2407D93}"/>
+              </a:ext>
+            </a:extLst>
+          </p:cNvPr>
+          <p:cNvSpPr>
+            <a:spLocks xmlns:a="http://schemas.openxmlformats.org/drawingml/2006/main" noGrp="1"/>
+          </p:cNvSpPr>
+          <p:nvPr/>
+        </p:nvSpPr>
+        <p:spPr>
+          <a:xfrm xmlns:a="http://schemas.openxmlformats.org/drawingml/2006/main">
+            <a:off x="514350" y="6457950"/>
+            <a:ext cx="4953000" cy="266700"/>
+          </a:xfrm>
+          <a:prstGeom xmlns:a="http://schemas.openxmlformats.org/drawingml/2006/main" prst="rect">
+            <a:avLst/>
+          </a:prstGeom>
+          <a:noFill xmlns:a="http://schemas.openxmlformats.org/drawingml/2006/main"/>
+          <a:ln xmlns:a="http://schemas.openxmlformats.org/drawingml/2006/main" w="0">
+            <a:noFill/>
+            <a:prstDash val="solid"/>
+          </a:ln>
+        </p:spPr>
+        <p:txBody>
+          <a:bodyPr xmlns:a="http://schemas.openxmlformats.org/drawingml/2006/main"/>
+          <a:lstStyle xmlns:a="http://schemas.openxmlformats.org/drawingml/2006/main"/>
+          <a:p xmlns:a="http://schemas.openxmlformats.org/drawingml/2006/main">
+            <a:pPr>
+              <a:defRPr sz="1125">
+                <a:solidFill>
+                  <a:srgbClr val="94A3B8"/>
+                </a:solidFill>
+              </a:defRPr>
+            </a:pPr>
+            <a:r>
+              <a:rPr sz="1125">
+                <a:solidFill>
+                  <a:srgbClr val="94A3B8"/>
+                </a:solidFill>
+              </a:rPr>
+              <a:t>HIT2 일본 서비스 런칭 6개월 전 로드맵</a:t>
+            </a:r>
+          </a:p>
+        </p:txBody>
+      </p:sp>
+      <p:sp>
+        <p:nvSpPr>
+          <p:cNvPr id="5" name="page-no">
+            <a:extLst xmlns:a="http://schemas.openxmlformats.org/drawingml/2006/main">
+              <a:ext uri="{FF2B5EF4-FFF2-40B4-BE49-F238E27FC236}">
+                <a16:creationId xmlns:a16="http://schemas.microsoft.com/office/drawing/2014/main" id="{1EA95397-D746-4989-B5DD-4D4FBB5C1FCD}"/>
+              </a:ext>
+            </a:extLst>
+          </p:cNvPr>
+          <p:cNvSpPr>
+            <a:spLocks xmlns:a="http://schemas.openxmlformats.org/drawingml/2006/main" noGrp="1"/>
+          </p:cNvSpPr>
+          <p:nvPr/>
+        </p:nvSpPr>
+        <p:spPr>
+          <a:xfrm xmlns:a="http://schemas.openxmlformats.org/drawingml/2006/main">
+            <a:off x="10953750" y="6457950"/>
+            <a:ext cx="419100" cy="266700"/>
+          </a:xfrm>
+          <a:prstGeom xmlns:a="http://schemas.openxmlformats.org/drawingml/2006/main" prst="rect">
+            <a:avLst/>
+          </a:prstGeom>
+          <a:noFill xmlns:a="http://schemas.openxmlformats.org/drawingml/2006/main"/>
+          <a:ln xmlns:a="http://schemas.openxmlformats.org/drawingml/2006/main" w="0">
+            <a:noFill/>
+            <a:prstDash val="solid"/>
+          </a:ln>
+        </p:spPr>
+        <p:txBody>
+          <a:bodyPr xmlns:a="http://schemas.openxmlformats.org/drawingml/2006/main"/>
+          <a:lstStyle xmlns:a="http://schemas.openxmlformats.org/drawingml/2006/main"/>
+          <a:p xmlns:a="http://schemas.openxmlformats.org/drawingml/2006/main">
+            <a:pPr algn="r">
+              <a:defRPr sz="1200" b="1">
+                <a:solidFill>
+                  <a:srgbClr val="94A3B8"/>
+                </a:solidFill>
+              </a:defRPr>
+            </a:pPr>
+            <a:r>
+              <a:rPr sz="1200" b="1">
+                <a:solidFill>
+                  <a:srgbClr val="94A3B8"/>
+                </a:solidFill>
+              </a:rPr>
+              <a:t>07</a:t>
+            </a:r>
+          </a:p>
+        </p:txBody>
+      </p:sp>
+      <p:sp>
+        <p:nvSpPr>
+          <p:cNvPr id="6" name="title-07">
+            <a:extLst xmlns:a="http://schemas.openxmlformats.org/drawingml/2006/main">
+              <a:ext uri="{FF2B5EF4-FFF2-40B4-BE49-F238E27FC236}">
+                <a16:creationId xmlns:a16="http://schemas.microsoft.com/office/drawing/2014/main" id="{D8E93AF0-0AAD-47DC-BDE6-F88BA5BFE3F6}"/>
+              </a:ext>
+            </a:extLst>
+          </p:cNvPr>
+          <p:cNvSpPr>
+            <a:spLocks xmlns:a="http://schemas.openxmlformats.org/drawingml/2006/main" noGrp="1"/>
+          </p:cNvSpPr>
+          <p:nvPr/>
+        </p:nvSpPr>
+        <p:spPr>
+          <a:xfrm xmlns:a="http://schemas.openxmlformats.org/drawingml/2006/main">
+            <a:off x="514350" y="781050"/>
+            <a:ext cx="10572750" cy="533400"/>
+          </a:xfrm>
+          <a:prstGeom xmlns:a="http://schemas.openxmlformats.org/drawingml/2006/main" prst="rect">
+            <a:avLst/>
+          </a:prstGeom>
+          <a:noFill xmlns:a="http://schemas.openxmlformats.org/drawingml/2006/main"/>
+          <a:ln xmlns:a="http://schemas.openxmlformats.org/drawingml/2006/main" w="0">
+            <a:noFill/>
+            <a:prstDash val="solid"/>
+          </a:ln>
+        </p:spPr>
+        <p:txBody>
+          <a:bodyPr xmlns:a="http://schemas.openxmlformats.org/drawingml/2006/main"/>
+          <a:lstStyle xmlns:a="http://schemas.openxmlformats.org/drawingml/2006/main"/>
+          <a:p xmlns:a="http://schemas.openxmlformats.org/drawingml/2006/main">
+            <a:pPr>
+              <a:defRPr sz="2550" b="1">
+                <a:solidFill>
+                  <a:srgbClr val="FFFFFF"/>
+                </a:solidFill>
+              </a:defRPr>
+            </a:pPr>
+            <a:r>
+              <a:rPr sz="2550" b="1">
+                <a:solidFill>
+                  <a:srgbClr val="FFFFFF"/>
+                </a:solidFill>
+              </a:rPr>
+              <a:t>최종 런칭 판단은 일정·버전·이슈가 설명 가능한 상태에서 진행합니다</a:t>
+            </a:r>
+          </a:p>
+        </p:txBody>
+      </p:sp>
+      <p:sp>
+        <p:nvSpPr>
+          <p:cNvPr id="7" name="subtitle-07">
+            <a:extLst xmlns:a="http://schemas.openxmlformats.org/drawingml/2006/main">
+              <a:ext uri="{FF2B5EF4-FFF2-40B4-BE49-F238E27FC236}">
+                <a16:creationId xmlns:a16="http://schemas.microsoft.com/office/drawing/2014/main" id="{95C20752-822E-488F-B27F-B8B79DCC3EB4}"/>
+              </a:ext>
+            </a:extLst>
+          </p:cNvPr>
+          <p:cNvSpPr>
+            <a:spLocks xmlns:a="http://schemas.openxmlformats.org/drawingml/2006/main" noGrp="1"/>
+          </p:cNvSpPr>
+          <p:nvPr/>
+        </p:nvSpPr>
+        <p:spPr>
+          <a:xfrm xmlns:a="http://schemas.openxmlformats.org/drawingml/2006/main">
+            <a:off x="533400" y="1371600"/>
+            <a:ext cx="10287000" cy="323850"/>
+          </a:xfrm>
+          <a:prstGeom xmlns:a="http://schemas.openxmlformats.org/drawingml/2006/main" prst="rect">
+            <a:avLst/>
+          </a:prstGeom>
+          <a:noFill xmlns:a="http://schemas.openxmlformats.org/drawingml/2006/main"/>
+          <a:ln xmlns:a="http://schemas.openxmlformats.org/drawingml/2006/main" w="0">
+            <a:noFill/>
+            <a:prstDash val="solid"/>
+          </a:ln>
+        </p:spPr>
+        <p:txBody>
+          <a:bodyPr xmlns:a="http://schemas.openxmlformats.org/drawingml/2006/main"/>
+          <a:lstStyle xmlns:a="http://schemas.openxmlformats.org/drawingml/2006/main"/>
+          <a:p xmlns:a="http://schemas.openxmlformats.org/drawingml/2006/main">
+            <a:pPr>
+              <a:defRPr sz="1275">
+                <a:solidFill>
+                  <a:srgbClr val="CBD5E1"/>
+                </a:solidFill>
+              </a:defRPr>
+            </a:pPr>
+            <a:r>
+              <a:rPr sz="1275">
+                <a:solidFill>
+                  <a:srgbClr val="CBD5E1"/>
+                </a:solidFill>
+              </a:rPr>
+              <a:t>6개월 로드맵의 목적은 모든 이슈 제거가 아니라, Live 릴리즈 가능한 기준과 잔여 리스크를 명확히 남기는 것입니다.</a:t>
+            </a:r>
+          </a:p>
+        </p:txBody>
+      </p:sp>
+      <p:sp>
+        <p:nvSpPr>
+          <p:cNvPr id="8" name="final-check-title">
+            <a:extLst xmlns:a="http://schemas.openxmlformats.org/drawingml/2006/main">
+              <a:ext uri="{FF2B5EF4-FFF2-40B4-BE49-F238E27FC236}">
+                <a16:creationId xmlns:a16="http://schemas.microsoft.com/office/drawing/2014/main" id="{5F4FE8FE-0B73-49A4-A03F-70AD226DB28D}"/>
+              </a:ext>
+            </a:extLst>
+          </p:cNvPr>
+          <p:cNvSpPr>
+            <a:spLocks xmlns:a="http://schemas.openxmlformats.org/drawingml/2006/main" noGrp="1"/>
+          </p:cNvSpPr>
+          <p:nvPr/>
+        </p:nvSpPr>
+        <p:spPr>
+          <a:xfrm xmlns:a="http://schemas.openxmlformats.org/drawingml/2006/main">
+            <a:off x="514350" y="1809750"/>
+            <a:ext cx="2571750" cy="285750"/>
+          </a:xfrm>
+          <a:prstGeom xmlns:a="http://schemas.openxmlformats.org/drawingml/2006/main" prst="rect">
+            <a:avLst/>
+          </a:prstGeom>
+          <a:noFill xmlns:a="http://schemas.openxmlformats.org/drawingml/2006/main"/>
+          <a:ln xmlns:a="http://schemas.openxmlformats.org/drawingml/2006/main" w="0">
+            <a:noFill/>
+            <a:prstDash val="solid"/>
+          </a:ln>
+        </p:spPr>
+        <p:txBody>
+          <a:bodyPr xmlns:a="http://schemas.openxmlformats.org/drawingml/2006/main"/>
+          <a:lstStyle xmlns:a="http://schemas.openxmlformats.org/drawingml/2006/main"/>
+          <a:p xmlns:a="http://schemas.openxmlformats.org/drawingml/2006/main">
+            <a:pPr>
+              <a:defRPr sz="1650" b="1">
+                <a:solidFill>
+                  <a:srgbClr val="FFFFFF"/>
+                </a:solidFill>
+              </a:defRPr>
+            </a:pPr>
+            <a:r>
+              <a:rPr sz="1650" b="1">
+                <a:solidFill>
+                  <a:srgbClr val="FFFFFF"/>
+                </a:solidFill>
+              </a:rPr>
+              <a:t>런칭 전 최종 점검 기준</a:t>
+            </a:r>
+          </a:p>
+        </p:txBody>
+      </p:sp>
+      <p:sp>
+        <p:nvSpPr>
+          <p:cNvPr id="9" name="final-check-header">
+            <a:extLst xmlns:a="http://schemas.openxmlformats.org/drawingml/2006/main">
+              <a:ext uri="{FF2B5EF4-FFF2-40B4-BE49-F238E27FC236}">
+                <a16:creationId xmlns:a16="http://schemas.microsoft.com/office/drawing/2014/main" id="{2B143A68-BC3B-4C0D-91B7-9D2829ED9777}"/>
+              </a:ext>
+            </a:extLst>
+          </p:cNvPr>
+          <p:cNvSpPr>
+            <a:spLocks xmlns:a="http://schemas.openxmlformats.org/drawingml/2006/main" noGrp="1"/>
+          </p:cNvSpPr>
+          <p:nvPr/>
+        </p:nvSpPr>
+        <p:spPr>
+          <a:xfrm xmlns:a="http://schemas.openxmlformats.org/drawingml/2006/main">
+            <a:off x="514350" y="2209800"/>
+            <a:ext cx="6800850" cy="228600"/>
+          </a:xfrm>
+          <a:prstGeom xmlns:a="http://schemas.openxmlformats.org/drawingml/2006/main" prst="rect">
+            <a:avLst/>
+          </a:prstGeom>
+          <a:solidFill xmlns:a="http://schemas.openxmlformats.org/drawingml/2006/main">
+            <a:srgbClr val="00B8D9"/>
+          </a:solidFill>
+          <a:ln xmlns:a="http://schemas.openxmlformats.org/drawingml/2006/main" w="0">
+            <a:solidFill>
+              <a:srgbClr val="00B8D9"/>
+            </a:solidFill>
+            <a:prstDash val="solid"/>
+          </a:ln>
+        </p:spPr>
+      </p:sp>
+      <p:sp>
+        <p:nvSpPr>
+          <p:cNvPr id="10" name="final-th-1">
+            <a:extLst xmlns:a="http://schemas.openxmlformats.org/drawingml/2006/main">
+              <a:ext uri="{FF2B5EF4-FFF2-40B4-BE49-F238E27FC236}">
+                <a16:creationId xmlns:a16="http://schemas.microsoft.com/office/drawing/2014/main" id="{8F4FF304-FD43-4D2D-88A7-D60342E6F807}"/>
+              </a:ext>
+            </a:extLst>
+          </p:cNvPr>
+          <p:cNvSpPr>
+            <a:spLocks xmlns:a="http://schemas.openxmlformats.org/drawingml/2006/main" noGrp="1"/>
+          </p:cNvSpPr>
+          <p:nvPr/>
+        </p:nvSpPr>
+        <p:spPr>
+          <a:xfrm xmlns:a="http://schemas.openxmlformats.org/drawingml/2006/main">
+            <a:off x="742950" y="2200275"/>
+            <a:ext cx="762000" cy="152400"/>
+          </a:xfrm>
+          <a:prstGeom xmlns:a="http://schemas.openxmlformats.org/drawingml/2006/main" prst="rect">
+            <a:avLst/>
+          </a:prstGeom>
+          <a:noFill xmlns:a="http://schemas.openxmlformats.org/drawingml/2006/main"/>
+          <a:ln xmlns:a="http://schemas.openxmlformats.org/drawingml/2006/main" w="0">
+            <a:noFill/>
+            <a:prstDash val="solid"/>
+          </a:ln>
+        </p:spPr>
+        <p:txBody>
+          <a:bodyPr xmlns:a="http://schemas.openxmlformats.org/drawingml/2006/main"/>
+          <a:lstStyle xmlns:a="http://schemas.openxmlformats.org/drawingml/2006/main"/>
+          <a:p xmlns:a="http://schemas.openxmlformats.org/drawingml/2006/main">
+            <a:pPr>
+              <a:defRPr sz="900" b="1">
+                <a:solidFill>
+                  <a:srgbClr val="06111F"/>
+                </a:solidFill>
+              </a:defRPr>
+            </a:pPr>
+            <a:r>
+              <a:rPr sz="900" b="1">
+                <a:solidFill>
+                  <a:srgbClr val="06111F"/>
+                </a:solidFill>
+              </a:rPr>
+              <a:t>항목</a:t>
+            </a:r>
+          </a:p>
+        </p:txBody>
+      </p:sp>
+      <p:sp>
+        <p:nvSpPr>
+          <p:cNvPr id="11" name="final-th-2">
+            <a:extLst xmlns:a="http://schemas.openxmlformats.org/drawingml/2006/main">
+              <a:ext uri="{FF2B5EF4-FFF2-40B4-BE49-F238E27FC236}">
+                <a16:creationId xmlns:a16="http://schemas.microsoft.com/office/drawing/2014/main" id="{B93B5448-A2B4-43BA-8F70-1D8FF5737FEF}"/>
+              </a:ext>
+            </a:extLst>
+          </p:cNvPr>
+          <p:cNvSpPr>
+            <a:spLocks xmlns:a="http://schemas.openxmlformats.org/drawingml/2006/main" noGrp="1"/>
+          </p:cNvSpPr>
+          <p:nvPr/>
+        </p:nvSpPr>
+        <p:spPr>
+          <a:xfrm xmlns:a="http://schemas.openxmlformats.org/drawingml/2006/main">
+            <a:off x="2286000" y="2200275"/>
+            <a:ext cx="1143000" cy="152400"/>
+          </a:xfrm>
+          <a:prstGeom xmlns:a="http://schemas.openxmlformats.org/drawingml/2006/main" prst="rect">
+            <a:avLst/>
+          </a:prstGeom>
+          <a:noFill xmlns:a="http://schemas.openxmlformats.org/drawingml/2006/main"/>
+          <a:ln xmlns:a="http://schemas.openxmlformats.org/drawingml/2006/main" w="0">
+            <a:noFill/>
+            <a:prstDash val="solid"/>
+          </a:ln>
+        </p:spPr>
+        <p:txBody>
+          <a:bodyPr xmlns:a="http://schemas.openxmlformats.org/drawingml/2006/main"/>
+          <a:lstStyle xmlns:a="http://schemas.openxmlformats.org/drawingml/2006/main"/>
+          <a:p xmlns:a="http://schemas.openxmlformats.org/drawingml/2006/main">
+            <a:pPr>
+              <a:defRPr sz="900" b="1">
+                <a:solidFill>
+                  <a:srgbClr val="06111F"/>
+                </a:solidFill>
+              </a:defRPr>
+            </a:pPr>
+            <a:r>
+              <a:rPr sz="900" b="1">
+                <a:solidFill>
+                  <a:srgbClr val="06111F"/>
+                </a:solidFill>
+              </a:rPr>
+              <a:t>판단 기준</a:t>
+            </a:r>
+          </a:p>
+        </p:txBody>
+      </p:sp>
+      <p:sp>
+        <p:nvSpPr>
+          <p:cNvPr id="12" name="final-th-3">
+            <a:extLst xmlns:a="http://schemas.openxmlformats.org/drawingml/2006/main">
+              <a:ext uri="{FF2B5EF4-FFF2-40B4-BE49-F238E27FC236}">
+                <a16:creationId xmlns:a16="http://schemas.microsoft.com/office/drawing/2014/main" id="{B297917C-7AF0-4C21-94B1-808AD6668E75}"/>
+              </a:ext>
+            </a:extLst>
+          </p:cNvPr>
+          <p:cNvSpPr>
+            <a:spLocks xmlns:a="http://schemas.openxmlformats.org/drawingml/2006/main" noGrp="1"/>
+          </p:cNvSpPr>
+          <p:nvPr/>
+        </p:nvSpPr>
+        <p:spPr>
+          <a:xfrm xmlns:a="http://schemas.openxmlformats.org/drawingml/2006/main">
+            <a:off x="4972050" y="2200275"/>
+            <a:ext cx="952500" cy="152400"/>
+          </a:xfrm>
+          <a:prstGeom xmlns:a="http://schemas.openxmlformats.org/drawingml/2006/main" prst="rect">
+            <a:avLst/>
+          </a:prstGeom>
+          <a:noFill xmlns:a="http://schemas.openxmlformats.org/drawingml/2006/main"/>
+          <a:ln xmlns:a="http://schemas.openxmlformats.org/drawingml/2006/main" w="0">
+            <a:noFill/>
+            <a:prstDash val="solid"/>
+          </a:ln>
+        </p:spPr>
+        <p:txBody>
+          <a:bodyPr xmlns:a="http://schemas.openxmlformats.org/drawingml/2006/main"/>
+          <a:lstStyle xmlns:a="http://schemas.openxmlformats.org/drawingml/2006/main"/>
+          <a:p xmlns:a="http://schemas.openxmlformats.org/drawingml/2006/main">
+            <a:pPr>
+              <a:defRPr sz="900" b="1">
+                <a:solidFill>
+                  <a:srgbClr val="06111F"/>
+                </a:solidFill>
+              </a:defRPr>
+            </a:pPr>
+            <a:r>
+              <a:rPr sz="900" b="1">
+                <a:solidFill>
+                  <a:srgbClr val="06111F"/>
+                </a:solidFill>
+              </a:rPr>
+              <a:t>PM 확인</a:t>
+            </a:r>
+          </a:p>
+        </p:txBody>
+      </p:sp>
+      <p:sp>
+        <p:nvSpPr>
+          <p:cNvPr id="13" name="final-check-row-1">
+            <a:extLst xmlns:a="http://schemas.openxmlformats.org/drawingml/2006/main">
+              <a:ext uri="{FF2B5EF4-FFF2-40B4-BE49-F238E27FC236}">
+                <a16:creationId xmlns:a16="http://schemas.microsoft.com/office/drawing/2014/main" id="{D7C90FAD-2EB3-4BE2-9A97-404C3EC279B3}"/>
+              </a:ext>
+            </a:extLst>
+          </p:cNvPr>
+          <p:cNvSpPr>
+            <a:spLocks xmlns:a="http://schemas.openxmlformats.org/drawingml/2006/main" noGrp="1"/>
+          </p:cNvSpPr>
+          <p:nvPr/>
+        </p:nvSpPr>
+        <p:spPr>
+          <a:xfrm xmlns:a="http://schemas.openxmlformats.org/drawingml/2006/main">
+            <a:off x="514350" y="2438400"/>
+            <a:ext cx="6800850" cy="533400"/>
+          </a:xfrm>
+          <a:prstGeom xmlns:a="http://schemas.openxmlformats.org/drawingml/2006/main" prst="rect">
+            <a:avLst/>
+          </a:prstGeom>
+          <a:solidFill xmlns:a="http://schemas.openxmlformats.org/drawingml/2006/main">
+            <a:srgbClr val="151F34"/>
+          </a:solidFill>
+          <a:ln xmlns:a="http://schemas.openxmlformats.org/drawingml/2006/main" w="9525">
+            <a:solidFill>
+              <a:srgbClr val="2F3B55"/>
+            </a:solidFill>
+            <a:prstDash val="solid"/>
+          </a:ln>
+        </p:spPr>
+      </p:sp>
+      <p:sp>
+        <p:nvSpPr>
+          <p:cNvPr id="14" name="final-check-item-1">
+            <a:extLst xmlns:a="http://schemas.openxmlformats.org/drawingml/2006/main">
+              <a:ext uri="{FF2B5EF4-FFF2-40B4-BE49-F238E27FC236}">
+                <a16:creationId xmlns:a16="http://schemas.microsoft.com/office/drawing/2014/main" id="{DE6DDC9E-1559-45FE-9A5E-22648B2710BA}"/>
+              </a:ext>
+            </a:extLst>
+          </p:cNvPr>
+          <p:cNvSpPr>
+            <a:spLocks xmlns:a="http://schemas.openxmlformats.org/drawingml/2006/main" noGrp="1"/>
+          </p:cNvSpPr>
+          <p:nvPr/>
+        </p:nvSpPr>
+        <p:spPr>
+          <a:xfrm xmlns:a="http://schemas.openxmlformats.org/drawingml/2006/main">
+            <a:off x="742950" y="2590800"/>
+            <a:ext cx="1352550" cy="228600"/>
+          </a:xfrm>
+          <a:prstGeom xmlns:a="http://schemas.openxmlformats.org/drawingml/2006/main" prst="rect">
+            <a:avLst/>
+          </a:prstGeom>
+          <a:noFill xmlns:a="http://schemas.openxmlformats.org/drawingml/2006/main"/>
+          <a:ln xmlns:a="http://schemas.openxmlformats.org/drawingml/2006/main" w="0">
+            <a:noFill/>
+            <a:prstDash val="solid"/>
+          </a:ln>
+        </p:spPr>
+        <p:txBody>
+          <a:bodyPr xmlns:a="http://schemas.openxmlformats.org/drawingml/2006/main"/>
+          <a:lstStyle xmlns:a="http://schemas.openxmlformats.org/drawingml/2006/main"/>
+          <a:p xmlns:a="http://schemas.openxmlformats.org/drawingml/2006/main">
+            <a:pPr>
+              <a:defRPr sz="1050" b="1">
+                <a:solidFill>
+                  <a:srgbClr val="00B8D9"/>
+                </a:solidFill>
+              </a:defRPr>
+            </a:pPr>
+            <a:r>
+              <a:rPr sz="1050" b="1">
+                <a:solidFill>
+                  <a:srgbClr val="00B8D9"/>
+                </a:solidFill>
+              </a:rPr>
+              <a:t>마일스톤</a:t>
+            </a:r>
+          </a:p>
+        </p:txBody>
+      </p:sp>
+      <p:sp>
+        <p:nvSpPr>
+          <p:cNvPr id="15" name="final-check-standard-1">
+            <a:extLst xmlns:a="http://schemas.openxmlformats.org/drawingml/2006/main">
+              <a:ext uri="{FF2B5EF4-FFF2-40B4-BE49-F238E27FC236}">
+                <a16:creationId xmlns:a16="http://schemas.microsoft.com/office/drawing/2014/main" id="{E27BCD5A-2E37-42EC-BB0D-0F384F4948D3}"/>
+              </a:ext>
+            </a:extLst>
+          </p:cNvPr>
+          <p:cNvSpPr>
+            <a:spLocks xmlns:a="http://schemas.openxmlformats.org/drawingml/2006/main" noGrp="1"/>
+          </p:cNvSpPr>
+          <p:nvPr/>
+        </p:nvSpPr>
+        <p:spPr>
+          <a:xfrm xmlns:a="http://schemas.openxmlformats.org/drawingml/2006/main">
+            <a:off x="2286000" y="2543175"/>
+            <a:ext cx="2476500" cy="304800"/>
+          </a:xfrm>
+          <a:prstGeom xmlns:a="http://schemas.openxmlformats.org/drawingml/2006/main" prst="rect">
+            <a:avLst/>
+          </a:prstGeom>
+          <a:noFill xmlns:a="http://schemas.openxmlformats.org/drawingml/2006/main"/>
+          <a:ln xmlns:a="http://schemas.openxmlformats.org/drawingml/2006/main" w="0">
+            <a:noFill/>
+            <a:prstDash val="solid"/>
+          </a:ln>
+        </p:spPr>
+        <p:txBody>
+          <a:bodyPr xmlns:a="http://schemas.openxmlformats.org/drawingml/2006/main"/>
+          <a:lstStyle xmlns:a="http://schemas.openxmlformats.org/drawingml/2006/main"/>
+          <a:p xmlns:a="http://schemas.openxmlformats.org/drawingml/2006/main">
+            <a:pPr>
+              <a:defRPr sz="938">
+                <a:solidFill>
+                  <a:srgbClr val="FFFFFF"/>
+                </a:solidFill>
+              </a:defRPr>
+            </a:pPr>
+            <a:r>
+              <a:rPr sz="938">
+                <a:solidFill>
+                  <a:srgbClr val="FFFFFF"/>
+                </a:solidFill>
+              </a:rPr>
+              <a:t>런칭 전 필수 범위와 보류 범위가 구분됨</a:t>
+            </a:r>
+          </a:p>
+        </p:txBody>
+      </p:sp>
+      <p:sp>
+        <p:nvSpPr>
+          <p:cNvPr id="16" name="final-check-action-1">
+            <a:extLst xmlns:a="http://schemas.openxmlformats.org/drawingml/2006/main">
+              <a:ext uri="{FF2B5EF4-FFF2-40B4-BE49-F238E27FC236}">
+                <a16:creationId xmlns:a16="http://schemas.microsoft.com/office/drawing/2014/main" id="{08F5C667-881D-4821-AFF2-7AF68C0258A1}"/>
+              </a:ext>
+            </a:extLst>
+          </p:cNvPr>
+          <p:cNvSpPr>
+            <a:spLocks xmlns:a="http://schemas.openxmlformats.org/drawingml/2006/main" noGrp="1"/>
+          </p:cNvSpPr>
+          <p:nvPr/>
+        </p:nvSpPr>
+        <p:spPr>
+          <a:xfrm xmlns:a="http://schemas.openxmlformats.org/drawingml/2006/main">
+            <a:off x="4972050" y="2543175"/>
+            <a:ext cx="1809750" cy="304800"/>
+          </a:xfrm>
+          <a:prstGeom xmlns:a="http://schemas.openxmlformats.org/drawingml/2006/main" prst="rect">
+            <a:avLst/>
+          </a:prstGeom>
+          <a:noFill xmlns:a="http://schemas.openxmlformats.org/drawingml/2006/main"/>
+          <a:ln xmlns:a="http://schemas.openxmlformats.org/drawingml/2006/main" w="0">
+            <a:noFill/>
+            <a:prstDash val="solid"/>
+          </a:ln>
+        </p:spPr>
+        <p:txBody>
+          <a:bodyPr xmlns:a="http://schemas.openxmlformats.org/drawingml/2006/main"/>
+          <a:lstStyle xmlns:a="http://schemas.openxmlformats.org/drawingml/2006/main"/>
+          <a:p xmlns:a="http://schemas.openxmlformats.org/drawingml/2006/main">
+            <a:pPr>
+              <a:defRPr sz="938">
+                <a:solidFill>
+                  <a:srgbClr val="CBD5E1"/>
+                </a:solidFill>
+              </a:defRPr>
+            </a:pPr>
+            <a:r>
+              <a:rPr sz="938">
+                <a:solidFill>
+                  <a:srgbClr val="CBD5E1"/>
+                </a:solidFill>
+              </a:rPr>
+              <a:t>진행률보다 통과 기준 확인</a:t>
+            </a:r>
+          </a:p>
+        </p:txBody>
+      </p:sp>
+      <p:sp>
+        <p:nvSpPr>
+          <p:cNvPr id="17" name="final-check-row-2">
+            <a:extLst xmlns:a="http://schemas.openxmlformats.org/drawingml/2006/main">
+              <a:ext uri="{FF2B5EF4-FFF2-40B4-BE49-F238E27FC236}">
+                <a16:creationId xmlns:a16="http://schemas.microsoft.com/office/drawing/2014/main" id="{1A4CB59B-F103-4FFB-8BD9-3679DED4C9BF}"/>
+              </a:ext>
+            </a:extLst>
+          </p:cNvPr>
+          <p:cNvSpPr>
+            <a:spLocks xmlns:a="http://schemas.openxmlformats.org/drawingml/2006/main" noGrp="1"/>
+          </p:cNvSpPr>
+          <p:nvPr/>
+        </p:nvSpPr>
+        <p:spPr>
+          <a:xfrm xmlns:a="http://schemas.openxmlformats.org/drawingml/2006/main">
+            <a:off x="514350" y="2971800"/>
+            <a:ext cx="6800850" cy="533400"/>
+          </a:xfrm>
+          <a:prstGeom xmlns:a="http://schemas.openxmlformats.org/drawingml/2006/main" prst="rect">
+            <a:avLst/>
+          </a:prstGeom>
+          <a:solidFill xmlns:a="http://schemas.openxmlformats.org/drawingml/2006/main">
+            <a:srgbClr val="111827"/>
+          </a:solidFill>
+          <a:ln xmlns:a="http://schemas.openxmlformats.org/drawingml/2006/main" w="9525">
+            <a:solidFill>
+              <a:srgbClr val="2F3B55"/>
+            </a:solidFill>
+            <a:prstDash val="solid"/>
+          </a:ln>
+        </p:spPr>
+      </p:sp>
+      <p:sp>
+        <p:nvSpPr>
+          <p:cNvPr id="18" name="final-check-item-2">
+            <a:extLst xmlns:a="http://schemas.openxmlformats.org/drawingml/2006/main">
+              <a:ext uri="{FF2B5EF4-FFF2-40B4-BE49-F238E27FC236}">
+                <a16:creationId xmlns:a16="http://schemas.microsoft.com/office/drawing/2014/main" id="{044D0E67-2B67-43C2-9D32-5EF00AFEFC24}"/>
+              </a:ext>
+            </a:extLst>
+          </p:cNvPr>
+          <p:cNvSpPr>
+            <a:spLocks xmlns:a="http://schemas.openxmlformats.org/drawingml/2006/main" noGrp="1"/>
+          </p:cNvSpPr>
+          <p:nvPr/>
+        </p:nvSpPr>
+        <p:spPr>
+          <a:xfrm xmlns:a="http://schemas.openxmlformats.org/drawingml/2006/main">
+            <a:off x="742950" y="3124200"/>
+            <a:ext cx="1352550" cy="228600"/>
+          </a:xfrm>
+          <a:prstGeom xmlns:a="http://schemas.openxmlformats.org/drawingml/2006/main" prst="rect">
+            <a:avLst/>
+          </a:prstGeom>
+          <a:noFill xmlns:a="http://schemas.openxmlformats.org/drawingml/2006/main"/>
+          <a:ln xmlns:a="http://schemas.openxmlformats.org/drawingml/2006/main" w="0">
+            <a:noFill/>
+            <a:prstDash val="solid"/>
+          </a:ln>
+        </p:spPr>
+        <p:txBody>
+          <a:bodyPr xmlns:a="http://schemas.openxmlformats.org/drawingml/2006/main"/>
+          <a:lstStyle xmlns:a="http://schemas.openxmlformats.org/drawingml/2006/main"/>
+          <a:p xmlns:a="http://schemas.openxmlformats.org/drawingml/2006/main">
+            <a:pPr>
+              <a:defRPr sz="1050" b="1">
+                <a:solidFill>
+                  <a:srgbClr val="FF6B35"/>
+                </a:solidFill>
+              </a:defRPr>
+            </a:pPr>
+            <a:r>
+              <a:rPr sz="1050" b="1">
+                <a:solidFill>
+                  <a:srgbClr val="FF6B35"/>
+                </a:solidFill>
+              </a:rPr>
+              <a:t>빌드·버전</a:t>
+            </a:r>
+          </a:p>
+        </p:txBody>
+      </p:sp>
+      <p:sp>
+        <p:nvSpPr>
+          <p:cNvPr id="19" name="final-check-standard-2">
+            <a:extLst xmlns:a="http://schemas.openxmlformats.org/drawingml/2006/main">
+              <a:ext uri="{FF2B5EF4-FFF2-40B4-BE49-F238E27FC236}">
+                <a16:creationId xmlns:a16="http://schemas.microsoft.com/office/drawing/2014/main" id="{912C22F0-6F22-4990-A410-160D76924B4E}"/>
+              </a:ext>
+            </a:extLst>
+          </p:cNvPr>
+          <p:cNvSpPr>
+            <a:spLocks xmlns:a="http://schemas.openxmlformats.org/drawingml/2006/main" noGrp="1"/>
+          </p:cNvSpPr>
+          <p:nvPr/>
+        </p:nvSpPr>
+        <p:spPr>
+          <a:xfrm xmlns:a="http://schemas.openxmlformats.org/drawingml/2006/main">
+            <a:off x="2286000" y="3076575"/>
+            <a:ext cx="2476500" cy="304800"/>
+          </a:xfrm>
+          <a:prstGeom xmlns:a="http://schemas.openxmlformats.org/drawingml/2006/main" prst="rect">
+            <a:avLst/>
+          </a:prstGeom>
+          <a:noFill xmlns:a="http://schemas.openxmlformats.org/drawingml/2006/main"/>
+          <a:ln xmlns:a="http://schemas.openxmlformats.org/drawingml/2006/main" w="0">
+            <a:noFill/>
+            <a:prstDash val="solid"/>
+          </a:ln>
+        </p:spPr>
+        <p:txBody>
+          <a:bodyPr xmlns:a="http://schemas.openxmlformats.org/drawingml/2006/main"/>
+          <a:lstStyle xmlns:a="http://schemas.openxmlformats.org/drawingml/2006/main"/>
+          <a:p xmlns:a="http://schemas.openxmlformats.org/drawingml/2006/main">
+            <a:pPr>
+              <a:defRPr sz="938">
+                <a:solidFill>
+                  <a:srgbClr val="FFFFFF"/>
+                </a:solidFill>
+              </a:defRPr>
+            </a:pPr>
+            <a:r>
+              <a:rPr sz="938">
+                <a:solidFill>
+                  <a:srgbClr val="FFFFFF"/>
+                </a:solidFill>
+              </a:rPr>
+              <a:t>Live 후보 빌드 기준과 변경 이력이 정리됨</a:t>
+            </a:r>
+          </a:p>
+        </p:txBody>
+      </p:sp>
+      <p:sp>
+        <p:nvSpPr>
+          <p:cNvPr id="20" name="final-check-action-2">
+            <a:extLst xmlns:a="http://schemas.openxmlformats.org/drawingml/2006/main">
+              <a:ext uri="{FF2B5EF4-FFF2-40B4-BE49-F238E27FC236}">
+                <a16:creationId xmlns:a16="http://schemas.microsoft.com/office/drawing/2014/main" id="{F5716A4F-F525-4FDF-BA6C-B7AAFDB4E8C1}"/>
+              </a:ext>
+            </a:extLst>
+          </p:cNvPr>
+          <p:cNvSpPr>
+            <a:spLocks xmlns:a="http://schemas.openxmlformats.org/drawingml/2006/main" noGrp="1"/>
+          </p:cNvSpPr>
+          <p:nvPr/>
+        </p:nvSpPr>
+        <p:spPr>
+          <a:xfrm xmlns:a="http://schemas.openxmlformats.org/drawingml/2006/main">
+            <a:off x="4972050" y="3076575"/>
+            <a:ext cx="1809750" cy="304800"/>
+          </a:xfrm>
+          <a:prstGeom xmlns:a="http://schemas.openxmlformats.org/drawingml/2006/main" prst="rect">
+            <a:avLst/>
+          </a:prstGeom>
+          <a:noFill xmlns:a="http://schemas.openxmlformats.org/drawingml/2006/main"/>
+          <a:ln xmlns:a="http://schemas.openxmlformats.org/drawingml/2006/main" w="0">
+            <a:noFill/>
+            <a:prstDash val="solid"/>
+          </a:ln>
+        </p:spPr>
+        <p:txBody>
+          <a:bodyPr xmlns:a="http://schemas.openxmlformats.org/drawingml/2006/main"/>
+          <a:lstStyle xmlns:a="http://schemas.openxmlformats.org/drawingml/2006/main"/>
+          <a:p xmlns:a="http://schemas.openxmlformats.org/drawingml/2006/main">
+            <a:pPr>
+              <a:defRPr sz="938">
+                <a:solidFill>
+                  <a:srgbClr val="CBD5E1"/>
+                </a:solidFill>
+              </a:defRPr>
+            </a:pPr>
+            <a:r>
+              <a:rPr sz="938">
+                <a:solidFill>
+                  <a:srgbClr val="CBD5E1"/>
+                </a:solidFill>
+              </a:rPr>
+              <a:t>Perforce 기준 상태 공유</a:t>
+            </a:r>
+          </a:p>
+        </p:txBody>
+      </p:sp>
+      <p:sp>
+        <p:nvSpPr>
+          <p:cNvPr id="21" name="final-check-row-3">
+            <a:extLst xmlns:a="http://schemas.openxmlformats.org/drawingml/2006/main">
+              <a:ext uri="{FF2B5EF4-FFF2-40B4-BE49-F238E27FC236}">
+                <a16:creationId xmlns:a16="http://schemas.microsoft.com/office/drawing/2014/main" id="{293EB2C4-63B6-45BF-BC4C-8BF888FA842C}"/>
+              </a:ext>
+            </a:extLst>
+          </p:cNvPr>
+          <p:cNvSpPr>
+            <a:spLocks xmlns:a="http://schemas.openxmlformats.org/drawingml/2006/main" noGrp="1"/>
+          </p:cNvSpPr>
+          <p:nvPr/>
+        </p:nvSpPr>
+        <p:spPr>
+          <a:xfrm xmlns:a="http://schemas.openxmlformats.org/drawingml/2006/main">
+            <a:off x="514350" y="3505200"/>
+            <a:ext cx="6800850" cy="533400"/>
+          </a:xfrm>
+          <a:prstGeom xmlns:a="http://schemas.openxmlformats.org/drawingml/2006/main" prst="rect">
+            <a:avLst/>
+          </a:prstGeom>
+          <a:solidFill xmlns:a="http://schemas.openxmlformats.org/drawingml/2006/main">
+            <a:srgbClr val="151F34"/>
+          </a:solidFill>
+          <a:ln xmlns:a="http://schemas.openxmlformats.org/drawingml/2006/main" w="9525">
+            <a:solidFill>
+              <a:srgbClr val="2F3B55"/>
+            </a:solidFill>
+            <a:prstDash val="solid"/>
+          </a:ln>
+        </p:spPr>
+      </p:sp>
+      <p:sp>
+        <p:nvSpPr>
+          <p:cNvPr id="22" name="final-check-item-3">
+            <a:extLst xmlns:a="http://schemas.openxmlformats.org/drawingml/2006/main">
+              <a:ext uri="{FF2B5EF4-FFF2-40B4-BE49-F238E27FC236}">
+                <a16:creationId xmlns:a16="http://schemas.microsoft.com/office/drawing/2014/main" id="{C297F16A-30BB-4A44-A265-2C3D03AE198B}"/>
+              </a:ext>
+            </a:extLst>
+          </p:cNvPr>
+          <p:cNvSpPr>
+            <a:spLocks xmlns:a="http://schemas.openxmlformats.org/drawingml/2006/main" noGrp="1"/>
+          </p:cNvSpPr>
+          <p:nvPr/>
+        </p:nvSpPr>
+        <p:spPr>
+          <a:xfrm xmlns:a="http://schemas.openxmlformats.org/drawingml/2006/main">
+            <a:off x="742950" y="3657600"/>
+            <a:ext cx="1352550" cy="228600"/>
+          </a:xfrm>
+          <a:prstGeom xmlns:a="http://schemas.openxmlformats.org/drawingml/2006/main" prst="rect">
+            <a:avLst/>
+          </a:prstGeom>
+          <a:noFill xmlns:a="http://schemas.openxmlformats.org/drawingml/2006/main"/>
+          <a:ln xmlns:a="http://schemas.openxmlformats.org/drawingml/2006/main" w="0">
+            <a:noFill/>
+            <a:prstDash val="solid"/>
+          </a:ln>
+        </p:spPr>
+        <p:txBody>
+          <a:bodyPr xmlns:a="http://schemas.openxmlformats.org/drawingml/2006/main"/>
+          <a:lstStyle xmlns:a="http://schemas.openxmlformats.org/drawingml/2006/main"/>
+          <a:p xmlns:a="http://schemas.openxmlformats.org/drawingml/2006/main">
+            <a:pPr>
+              <a:defRPr sz="1050" b="1">
+                <a:solidFill>
+                  <a:srgbClr val="7C3AED"/>
+                </a:solidFill>
+              </a:defRPr>
+            </a:pPr>
+            <a:r>
+              <a:rPr sz="1050" b="1">
+                <a:solidFill>
+                  <a:srgbClr val="7C3AED"/>
+                </a:solidFill>
+              </a:rPr>
+              <a:t>QA·검수</a:t>
+            </a:r>
+          </a:p>
+        </p:txBody>
+      </p:sp>
+      <p:sp>
+        <p:nvSpPr>
+          <p:cNvPr id="23" name="final-check-standard-3">
+            <a:extLst xmlns:a="http://schemas.openxmlformats.org/drawingml/2006/main">
+              <a:ext uri="{FF2B5EF4-FFF2-40B4-BE49-F238E27FC236}">
+                <a16:creationId xmlns:a16="http://schemas.microsoft.com/office/drawing/2014/main" id="{CA8C3050-E137-448F-8A6D-FC8C6946D99A}"/>
+              </a:ext>
+            </a:extLst>
+          </p:cNvPr>
+          <p:cNvSpPr>
+            <a:spLocks xmlns:a="http://schemas.openxmlformats.org/drawingml/2006/main" noGrp="1"/>
+          </p:cNvSpPr>
+          <p:nvPr/>
+        </p:nvSpPr>
+        <p:spPr>
+          <a:xfrm xmlns:a="http://schemas.openxmlformats.org/drawingml/2006/main">
+            <a:off x="2286000" y="3609975"/>
+            <a:ext cx="2476500" cy="304800"/>
+          </a:xfrm>
+          <a:prstGeom xmlns:a="http://schemas.openxmlformats.org/drawingml/2006/main" prst="rect">
+            <a:avLst/>
+          </a:prstGeom>
+          <a:noFill xmlns:a="http://schemas.openxmlformats.org/drawingml/2006/main"/>
+          <a:ln xmlns:a="http://schemas.openxmlformats.org/drawingml/2006/main" w="0">
+            <a:noFill/>
+            <a:prstDash val="solid"/>
+          </a:ln>
+        </p:spPr>
+        <p:txBody>
+          <a:bodyPr xmlns:a="http://schemas.openxmlformats.org/drawingml/2006/main"/>
+          <a:lstStyle xmlns:a="http://schemas.openxmlformats.org/drawingml/2006/main"/>
+          <a:p xmlns:a="http://schemas.openxmlformats.org/drawingml/2006/main">
+            <a:pPr>
+              <a:defRPr sz="938">
+                <a:solidFill>
+                  <a:srgbClr val="FFFFFF"/>
+                </a:solidFill>
+              </a:defRPr>
+            </a:pPr>
+            <a:r>
+              <a:rPr sz="938">
+                <a:solidFill>
+                  <a:srgbClr val="FFFFFF"/>
+                </a:solidFill>
+              </a:rPr>
+              <a:t>주요 이슈의 조치 계획과 잔여 리스크가 분리됨</a:t>
+            </a:r>
+          </a:p>
+        </p:txBody>
+      </p:sp>
+      <p:sp>
+        <p:nvSpPr>
+          <p:cNvPr id="24" name="final-check-action-3">
+            <a:extLst xmlns:a="http://schemas.openxmlformats.org/drawingml/2006/main">
+              <a:ext uri="{FF2B5EF4-FFF2-40B4-BE49-F238E27FC236}">
+                <a16:creationId xmlns:a16="http://schemas.microsoft.com/office/drawing/2014/main" id="{FA7D4506-D765-435A-972C-5A473ACD4A70}"/>
+              </a:ext>
+            </a:extLst>
+          </p:cNvPr>
+          <p:cNvSpPr>
+            <a:spLocks xmlns:a="http://schemas.openxmlformats.org/drawingml/2006/main" noGrp="1"/>
+          </p:cNvSpPr>
+          <p:nvPr/>
+        </p:nvSpPr>
+        <p:spPr>
+          <a:xfrm xmlns:a="http://schemas.openxmlformats.org/drawingml/2006/main">
+            <a:off x="4972050" y="3609975"/>
+            <a:ext cx="1809750" cy="304800"/>
+          </a:xfrm>
+          <a:prstGeom xmlns:a="http://schemas.openxmlformats.org/drawingml/2006/main" prst="rect">
+            <a:avLst/>
+          </a:prstGeom>
+          <a:noFill xmlns:a="http://schemas.openxmlformats.org/drawingml/2006/main"/>
+          <a:ln xmlns:a="http://schemas.openxmlformats.org/drawingml/2006/main" w="0">
+            <a:noFill/>
+            <a:prstDash val="solid"/>
+          </a:ln>
+        </p:spPr>
+        <p:txBody>
+          <a:bodyPr xmlns:a="http://schemas.openxmlformats.org/drawingml/2006/main"/>
+          <a:lstStyle xmlns:a="http://schemas.openxmlformats.org/drawingml/2006/main"/>
+          <a:p xmlns:a="http://schemas.openxmlformats.org/drawingml/2006/main">
+            <a:pPr>
+              <a:defRPr sz="938">
+                <a:solidFill>
+                  <a:srgbClr val="CBD5E1"/>
+                </a:solidFill>
+              </a:defRPr>
+            </a:pPr>
+            <a:r>
+              <a:rPr sz="938">
+                <a:solidFill>
+                  <a:srgbClr val="CBD5E1"/>
+                </a:solidFill>
+              </a:rPr>
+              <a:t>런칭 영향도 중심 점검</a:t>
+            </a:r>
+          </a:p>
+        </p:txBody>
+      </p:sp>
+      <p:sp>
+        <p:nvSpPr>
+          <p:cNvPr id="25" name="final-check-row-4">
+            <a:extLst xmlns:a="http://schemas.openxmlformats.org/drawingml/2006/main">
+              <a:ext uri="{FF2B5EF4-FFF2-40B4-BE49-F238E27FC236}">
+                <a16:creationId xmlns:a16="http://schemas.microsoft.com/office/drawing/2014/main" id="{C3C131C6-01E5-49EA-9920-B70F04C1DAEA}"/>
+              </a:ext>
+            </a:extLst>
+          </p:cNvPr>
+          <p:cNvSpPr>
+            <a:spLocks xmlns:a="http://schemas.openxmlformats.org/drawingml/2006/main" noGrp="1"/>
+          </p:cNvSpPr>
+          <p:nvPr/>
+        </p:nvSpPr>
+        <p:spPr>
+          <a:xfrm xmlns:a="http://schemas.openxmlformats.org/drawingml/2006/main">
+            <a:off x="514350" y="4038600"/>
+            <a:ext cx="6800850" cy="533400"/>
+          </a:xfrm>
+          <a:prstGeom xmlns:a="http://schemas.openxmlformats.org/drawingml/2006/main" prst="rect">
+            <a:avLst/>
+          </a:prstGeom>
+          <a:solidFill xmlns:a="http://schemas.openxmlformats.org/drawingml/2006/main">
+            <a:srgbClr val="111827"/>
+          </a:solidFill>
+          <a:ln xmlns:a="http://schemas.openxmlformats.org/drawingml/2006/main" w="9525">
+            <a:solidFill>
+              <a:srgbClr val="2F3B55"/>
+            </a:solidFill>
+            <a:prstDash val="solid"/>
+          </a:ln>
+        </p:spPr>
+      </p:sp>
+      <p:sp>
+        <p:nvSpPr>
+          <p:cNvPr id="26" name="final-check-item-4">
+            <a:extLst xmlns:a="http://schemas.openxmlformats.org/drawingml/2006/main">
+              <a:ext uri="{FF2B5EF4-FFF2-40B4-BE49-F238E27FC236}">
+                <a16:creationId xmlns:a16="http://schemas.microsoft.com/office/drawing/2014/main" id="{AF24902C-DFC2-443F-B830-1A0F2C58E624}"/>
+              </a:ext>
+            </a:extLst>
+          </p:cNvPr>
+          <p:cNvSpPr>
+            <a:spLocks xmlns:a="http://schemas.openxmlformats.org/drawingml/2006/main" noGrp="1"/>
+          </p:cNvSpPr>
+          <p:nvPr/>
+        </p:nvSpPr>
+        <p:spPr>
+          <a:xfrm xmlns:a="http://schemas.openxmlformats.org/drawingml/2006/main">
+            <a:off x="742950" y="4191000"/>
+            <a:ext cx="1352550" cy="228600"/>
+          </a:xfrm>
+          <a:prstGeom xmlns:a="http://schemas.openxmlformats.org/drawingml/2006/main" prst="rect">
+            <a:avLst/>
+          </a:prstGeom>
+          <a:noFill xmlns:a="http://schemas.openxmlformats.org/drawingml/2006/main"/>
+          <a:ln xmlns:a="http://schemas.openxmlformats.org/drawingml/2006/main" w="0">
+            <a:noFill/>
+            <a:prstDash val="solid"/>
+          </a:ln>
+        </p:spPr>
+        <p:txBody>
+          <a:bodyPr xmlns:a="http://schemas.openxmlformats.org/drawingml/2006/main"/>
+          <a:lstStyle xmlns:a="http://schemas.openxmlformats.org/drawingml/2006/main"/>
+          <a:p xmlns:a="http://schemas.openxmlformats.org/drawingml/2006/main">
+            <a:pPr>
+              <a:defRPr sz="1050" b="1">
+                <a:solidFill>
+                  <a:srgbClr val="8BD9E8"/>
+                </a:solidFill>
+              </a:defRPr>
+            </a:pPr>
+            <a:r>
+              <a:rPr sz="1050" b="1">
+                <a:solidFill>
+                  <a:srgbClr val="8BD9E8"/>
+                </a:solidFill>
+              </a:rPr>
+              <a:t>퍼블리셔 대응</a:t>
+            </a:r>
+          </a:p>
+        </p:txBody>
+      </p:sp>
+      <p:sp>
+        <p:nvSpPr>
+          <p:cNvPr id="27" name="final-check-standard-4">
+            <a:extLst xmlns:a="http://schemas.openxmlformats.org/drawingml/2006/main">
+              <a:ext uri="{FF2B5EF4-FFF2-40B4-BE49-F238E27FC236}">
+                <a16:creationId xmlns:a16="http://schemas.microsoft.com/office/drawing/2014/main" id="{FB9616C7-0F61-4E37-AA38-1BFA35CA4580}"/>
+              </a:ext>
+            </a:extLst>
+          </p:cNvPr>
+          <p:cNvSpPr>
+            <a:spLocks xmlns:a="http://schemas.openxmlformats.org/drawingml/2006/main" noGrp="1"/>
+          </p:cNvSpPr>
+          <p:nvPr/>
+        </p:nvSpPr>
+        <p:spPr>
+          <a:xfrm xmlns:a="http://schemas.openxmlformats.org/drawingml/2006/main">
+            <a:off x="2286000" y="4143375"/>
+            <a:ext cx="2476500" cy="304800"/>
+          </a:xfrm>
+          <a:prstGeom xmlns:a="http://schemas.openxmlformats.org/drawingml/2006/main" prst="rect">
+            <a:avLst/>
+          </a:prstGeom>
+          <a:noFill xmlns:a="http://schemas.openxmlformats.org/drawingml/2006/main"/>
+          <a:ln xmlns:a="http://schemas.openxmlformats.org/drawingml/2006/main" w="0">
+            <a:noFill/>
+            <a:prstDash val="solid"/>
+          </a:ln>
+        </p:spPr>
+        <p:txBody>
+          <a:bodyPr xmlns:a="http://schemas.openxmlformats.org/drawingml/2006/main"/>
+          <a:lstStyle xmlns:a="http://schemas.openxmlformats.org/drawingml/2006/main"/>
+          <a:p xmlns:a="http://schemas.openxmlformats.org/drawingml/2006/main">
+            <a:pPr>
+              <a:defRPr sz="938">
+                <a:solidFill>
+                  <a:srgbClr val="FFFFFF"/>
+                </a:solidFill>
+              </a:defRPr>
+            </a:pPr>
+            <a:r>
+              <a:rPr sz="938">
+                <a:solidFill>
+                  <a:srgbClr val="FFFFFF"/>
+                </a:solidFill>
+              </a:rPr>
+              <a:t>요청사항의 반영·보류·차기 대응 기준이 남음</a:t>
+            </a:r>
+          </a:p>
+        </p:txBody>
+      </p:sp>
+      <p:sp>
+        <p:nvSpPr>
+          <p:cNvPr id="28" name="final-check-action-4">
+            <a:extLst xmlns:a="http://schemas.openxmlformats.org/drawingml/2006/main">
+              <a:ext uri="{FF2B5EF4-FFF2-40B4-BE49-F238E27FC236}">
+                <a16:creationId xmlns:a16="http://schemas.microsoft.com/office/drawing/2014/main" id="{0598CD25-DFCF-4FCB-94BF-5DC1B5699099}"/>
+              </a:ext>
+            </a:extLst>
+          </p:cNvPr>
+          <p:cNvSpPr>
+            <a:spLocks xmlns:a="http://schemas.openxmlformats.org/drawingml/2006/main" noGrp="1"/>
+          </p:cNvSpPr>
+          <p:nvPr/>
+        </p:nvSpPr>
+        <p:spPr>
+          <a:xfrm xmlns:a="http://schemas.openxmlformats.org/drawingml/2006/main">
+            <a:off x="4972050" y="4143375"/>
+            <a:ext cx="1809750" cy="304800"/>
+          </a:xfrm>
+          <a:prstGeom xmlns:a="http://schemas.openxmlformats.org/drawingml/2006/main" prst="rect">
+            <a:avLst/>
+          </a:prstGeom>
+          <a:noFill xmlns:a="http://schemas.openxmlformats.org/drawingml/2006/main"/>
+          <a:ln xmlns:a="http://schemas.openxmlformats.org/drawingml/2006/main" w="0">
+            <a:noFill/>
+            <a:prstDash val="solid"/>
+          </a:ln>
+        </p:spPr>
+        <p:txBody>
+          <a:bodyPr xmlns:a="http://schemas.openxmlformats.org/drawingml/2006/main"/>
+          <a:lstStyle xmlns:a="http://schemas.openxmlformats.org/drawingml/2006/main"/>
+          <a:p xmlns:a="http://schemas.openxmlformats.org/drawingml/2006/main">
+            <a:pPr>
+              <a:defRPr sz="938">
+                <a:solidFill>
+                  <a:srgbClr val="CBD5E1"/>
+                </a:solidFill>
+              </a:defRPr>
+            </a:pPr>
+            <a:r>
+              <a:rPr sz="938">
+                <a:solidFill>
+                  <a:srgbClr val="CBD5E1"/>
+                </a:solidFill>
+              </a:rPr>
+              <a:t>의사결정 이력 정리</a:t>
+            </a:r>
+          </a:p>
+        </p:txBody>
+      </p:sp>
+      <p:sp>
+        <p:nvSpPr>
+          <p:cNvPr id="29" name="final-check-row-5">
+            <a:extLst xmlns:a="http://schemas.openxmlformats.org/drawingml/2006/main">
+              <a:ext uri="{FF2B5EF4-FFF2-40B4-BE49-F238E27FC236}">
+                <a16:creationId xmlns:a16="http://schemas.microsoft.com/office/drawing/2014/main" id="{E4409FA2-3378-478A-8AB9-2D461F82773E}"/>
+              </a:ext>
+            </a:extLst>
+          </p:cNvPr>
+          <p:cNvSpPr>
+            <a:spLocks xmlns:a="http://schemas.openxmlformats.org/drawingml/2006/main" noGrp="1"/>
+          </p:cNvSpPr>
+          <p:nvPr/>
+        </p:nvSpPr>
+        <p:spPr>
+          <a:xfrm xmlns:a="http://schemas.openxmlformats.org/drawingml/2006/main">
+            <a:off x="514350" y="4572000"/>
+            <a:ext cx="6800850" cy="533400"/>
+          </a:xfrm>
+          <a:prstGeom xmlns:a="http://schemas.openxmlformats.org/drawingml/2006/main" prst="rect">
+            <a:avLst/>
+          </a:prstGeom>
+          <a:solidFill xmlns:a="http://schemas.openxmlformats.org/drawingml/2006/main">
+            <a:srgbClr val="151F34"/>
+          </a:solidFill>
+          <a:ln xmlns:a="http://schemas.openxmlformats.org/drawingml/2006/main" w="9525">
+            <a:solidFill>
+              <a:srgbClr val="2F3B55"/>
+            </a:solidFill>
+            <a:prstDash val="solid"/>
+          </a:ln>
+        </p:spPr>
+      </p:sp>
+      <p:sp>
+        <p:nvSpPr>
+          <p:cNvPr id="30" name="final-check-item-5">
+            <a:extLst xmlns:a="http://schemas.openxmlformats.org/drawingml/2006/main">
+              <a:ext uri="{FF2B5EF4-FFF2-40B4-BE49-F238E27FC236}">
+                <a16:creationId xmlns:a16="http://schemas.microsoft.com/office/drawing/2014/main" id="{A2F2616B-B969-4383-B85A-44A209BBAC2D}"/>
+              </a:ext>
+            </a:extLst>
+          </p:cNvPr>
+          <p:cNvSpPr>
+            <a:spLocks xmlns:a="http://schemas.openxmlformats.org/drawingml/2006/main" noGrp="1"/>
+          </p:cNvSpPr>
+          <p:nvPr/>
+        </p:nvSpPr>
+        <p:spPr>
+          <a:xfrm xmlns:a="http://schemas.openxmlformats.org/drawingml/2006/main">
+            <a:off x="742950" y="4724400"/>
+            <a:ext cx="1352550" cy="228600"/>
+          </a:xfrm>
+          <a:prstGeom xmlns:a="http://schemas.openxmlformats.org/drawingml/2006/main" prst="rect">
+            <a:avLst/>
+          </a:prstGeom>
+          <a:noFill xmlns:a="http://schemas.openxmlformats.org/drawingml/2006/main"/>
+          <a:ln xmlns:a="http://schemas.openxmlformats.org/drawingml/2006/main" w="0">
+            <a:noFill/>
+            <a:prstDash val="solid"/>
+          </a:ln>
+        </p:spPr>
+        <p:txBody>
+          <a:bodyPr xmlns:a="http://schemas.openxmlformats.org/drawingml/2006/main"/>
+          <a:lstStyle xmlns:a="http://schemas.openxmlformats.org/drawingml/2006/main"/>
+          <a:p xmlns:a="http://schemas.openxmlformats.org/drawingml/2006/main">
+            <a:pPr>
+              <a:defRPr sz="1050" b="1">
+                <a:solidFill>
+                  <a:srgbClr val="FF6B35"/>
+                </a:solidFill>
+              </a:defRPr>
+            </a:pPr>
+            <a:r>
+              <a:rPr sz="1050" b="1">
+                <a:solidFill>
+                  <a:srgbClr val="FF6B35"/>
+                </a:solidFill>
+              </a:rPr>
+              <a:t>운영 준비</a:t>
+            </a:r>
+          </a:p>
+        </p:txBody>
+      </p:sp>
+      <p:sp>
+        <p:nvSpPr>
+          <p:cNvPr id="31" name="final-check-standard-5">
+            <a:extLst xmlns:a="http://schemas.openxmlformats.org/drawingml/2006/main">
+              <a:ext uri="{FF2B5EF4-FFF2-40B4-BE49-F238E27FC236}">
+                <a16:creationId xmlns:a16="http://schemas.microsoft.com/office/drawing/2014/main" id="{C0472DBD-F99B-4DE2-8173-591A141CC516}"/>
+              </a:ext>
+            </a:extLst>
+          </p:cNvPr>
+          <p:cNvSpPr>
+            <a:spLocks xmlns:a="http://schemas.openxmlformats.org/drawingml/2006/main" noGrp="1"/>
+          </p:cNvSpPr>
+          <p:nvPr/>
+        </p:nvSpPr>
+        <p:spPr>
+          <a:xfrm xmlns:a="http://schemas.openxmlformats.org/drawingml/2006/main">
+            <a:off x="2286000" y="4676775"/>
+            <a:ext cx="2476500" cy="304800"/>
+          </a:xfrm>
+          <a:prstGeom xmlns:a="http://schemas.openxmlformats.org/drawingml/2006/main" prst="rect">
+            <a:avLst/>
+          </a:prstGeom>
+          <a:noFill xmlns:a="http://schemas.openxmlformats.org/drawingml/2006/main"/>
+          <a:ln xmlns:a="http://schemas.openxmlformats.org/drawingml/2006/main" w="0">
+            <a:noFill/>
+            <a:prstDash val="solid"/>
+          </a:ln>
+        </p:spPr>
+        <p:txBody>
+          <a:bodyPr xmlns:a="http://schemas.openxmlformats.org/drawingml/2006/main"/>
+          <a:lstStyle xmlns:a="http://schemas.openxmlformats.org/drawingml/2006/main"/>
+          <a:p xmlns:a="http://schemas.openxmlformats.org/drawingml/2006/main">
+            <a:pPr>
+              <a:defRPr sz="938">
+                <a:solidFill>
+                  <a:srgbClr val="FFFFFF"/>
+                </a:solidFill>
+              </a:defRPr>
+            </a:pPr>
+            <a:r>
+              <a:rPr sz="938">
+                <a:solidFill>
+                  <a:srgbClr val="FFFFFF"/>
+                </a:solidFill>
+              </a:rPr>
+              <a:t>배포·공지·운영 대응 항목의 담당이 확정됨</a:t>
+            </a:r>
+          </a:p>
+        </p:txBody>
+      </p:sp>
+      <p:sp>
+        <p:nvSpPr>
+          <p:cNvPr id="32" name="final-check-action-5">
+            <a:extLst xmlns:a="http://schemas.openxmlformats.org/drawingml/2006/main">
+              <a:ext uri="{FF2B5EF4-FFF2-40B4-BE49-F238E27FC236}">
+                <a16:creationId xmlns:a16="http://schemas.microsoft.com/office/drawing/2014/main" id="{37C70743-0A6C-4C2A-B2E6-ED2628C924FC}"/>
+              </a:ext>
+            </a:extLst>
+          </p:cNvPr>
+          <p:cNvSpPr>
+            <a:spLocks xmlns:a="http://schemas.openxmlformats.org/drawingml/2006/main" noGrp="1"/>
+          </p:cNvSpPr>
+          <p:nvPr/>
+        </p:nvSpPr>
+        <p:spPr>
+          <a:xfrm xmlns:a="http://schemas.openxmlformats.org/drawingml/2006/main">
+            <a:off x="4972050" y="4676775"/>
+            <a:ext cx="1809750" cy="304800"/>
+          </a:xfrm>
+          <a:prstGeom xmlns:a="http://schemas.openxmlformats.org/drawingml/2006/main" prst="rect">
+            <a:avLst/>
+          </a:prstGeom>
+          <a:noFill xmlns:a="http://schemas.openxmlformats.org/drawingml/2006/main"/>
+          <a:ln xmlns:a="http://schemas.openxmlformats.org/drawingml/2006/main" w="0">
+            <a:noFill/>
+            <a:prstDash val="solid"/>
+          </a:ln>
+        </p:spPr>
+        <p:txBody>
+          <a:bodyPr xmlns:a="http://schemas.openxmlformats.org/drawingml/2006/main"/>
+          <a:lstStyle xmlns:a="http://schemas.openxmlformats.org/drawingml/2006/main"/>
+          <a:p xmlns:a="http://schemas.openxmlformats.org/drawingml/2006/main">
+            <a:pPr>
+              <a:defRPr sz="938">
+                <a:solidFill>
+                  <a:srgbClr val="CBD5E1"/>
+                </a:solidFill>
+              </a:defRPr>
+            </a:pPr>
+            <a:r>
+              <a:rPr sz="938">
+                <a:solidFill>
+                  <a:srgbClr val="CBD5E1"/>
+                </a:solidFill>
+              </a:rPr>
+              <a:t>Live 릴리즈 체크</a:t>
+            </a:r>
+          </a:p>
+        </p:txBody>
+      </p:sp>
+      <p:sp>
+        <p:nvSpPr>
+          <p:cNvPr id="33" name="effect-title">
+            <a:extLst xmlns:a="http://schemas.openxmlformats.org/drawingml/2006/main">
+              <a:ext uri="{FF2B5EF4-FFF2-40B4-BE49-F238E27FC236}">
+                <a16:creationId xmlns:a16="http://schemas.microsoft.com/office/drawing/2014/main" id="{594337DF-1909-4FAB-BBA6-01908A1B72BB}"/>
+              </a:ext>
+            </a:extLst>
+          </p:cNvPr>
+          <p:cNvSpPr>
+            <a:spLocks xmlns:a="http://schemas.openxmlformats.org/drawingml/2006/main" noGrp="1"/>
+          </p:cNvSpPr>
+          <p:nvPr/>
+        </p:nvSpPr>
+        <p:spPr>
+          <a:xfrm xmlns:a="http://schemas.openxmlformats.org/drawingml/2006/main">
+            <a:off x="7905750" y="1924050"/>
+            <a:ext cx="2476500" cy="285750"/>
+          </a:xfrm>
+          <a:prstGeom xmlns:a="http://schemas.openxmlformats.org/drawingml/2006/main" prst="rect">
+            <a:avLst/>
+          </a:prstGeom>
+          <a:noFill xmlns:a="http://schemas.openxmlformats.org/drawingml/2006/main"/>
+          <a:ln xmlns:a="http://schemas.openxmlformats.org/drawingml/2006/main" w="0">
+            <a:noFill/>
+            <a:prstDash val="solid"/>
+          </a:ln>
+        </p:spPr>
+        <p:txBody>
+          <a:bodyPr xmlns:a="http://schemas.openxmlformats.org/drawingml/2006/main"/>
+          <a:lstStyle xmlns:a="http://schemas.openxmlformats.org/drawingml/2006/main"/>
+          <a:p xmlns:a="http://schemas.openxmlformats.org/drawingml/2006/main">
+            <a:pPr>
+              <a:defRPr sz="1650" b="1">
+                <a:solidFill>
+                  <a:srgbClr val="FFFFFF"/>
+                </a:solidFill>
+              </a:defRPr>
+            </a:pPr>
+            <a:r>
+              <a:rPr sz="1650" b="1">
+                <a:solidFill>
+                  <a:srgbClr val="FFFFFF"/>
+                </a:solidFill>
+              </a:rPr>
+              <a:t>PM 관점 기대 효과</a:t>
+            </a:r>
+          </a:p>
+        </p:txBody>
+      </p:sp>
+      <p:sp>
+        <p:nvSpPr>
+          <p:cNvPr id="34" name="effect-card-1">
+            <a:extLst xmlns:a="http://schemas.openxmlformats.org/drawingml/2006/main">
+              <a:ext uri="{FF2B5EF4-FFF2-40B4-BE49-F238E27FC236}">
+                <a16:creationId xmlns:a16="http://schemas.microsoft.com/office/drawing/2014/main" id="{74C611F0-0534-495B-A39A-335CD4CE1402}"/>
+              </a:ext>
+            </a:extLst>
+          </p:cNvPr>
+          <p:cNvSpPr>
+            <a:spLocks xmlns:a="http://schemas.openxmlformats.org/drawingml/2006/main" noGrp="1"/>
+          </p:cNvSpPr>
+          <p:nvPr/>
+        </p:nvSpPr>
+        <p:spPr>
+          <a:xfrm xmlns:a="http://schemas.openxmlformats.org/drawingml/2006/main">
+            <a:off x="7905750" y="2324100"/>
+            <a:ext cx="3486150" cy="666750"/>
+          </a:xfrm>
+          <a:prstGeom xmlns:a="http://schemas.openxmlformats.org/drawingml/2006/main" prst="roundRect">
+            <a:avLst>
+              <a:gd name="adj" fmla="val 11429"/>
+            </a:avLst>
+          </a:prstGeom>
+          <a:solidFill xmlns:a="http://schemas.openxmlformats.org/drawingml/2006/main">
+            <a:srgbClr val="111827"/>
+          </a:solidFill>
+          <a:ln xmlns:a="http://schemas.openxmlformats.org/drawingml/2006/main" w="9525">
+            <a:solidFill>
+              <a:srgbClr val="2F3B55"/>
+            </a:solidFill>
+            <a:prstDash val="solid"/>
+          </a:ln>
+        </p:spPr>
+      </p:sp>
+      <p:sp>
+        <p:nvSpPr>
+          <p:cNvPr id="35" name="effect-card-bar-1">
+            <a:extLst xmlns:a="http://schemas.openxmlformats.org/drawingml/2006/main">
+              <a:ext uri="{FF2B5EF4-FFF2-40B4-BE49-F238E27FC236}">
+                <a16:creationId xmlns:a16="http://schemas.microsoft.com/office/drawing/2014/main" id="{A6D51F0D-A548-4626-A20A-3F3B32707162}"/>
+              </a:ext>
+            </a:extLst>
+          </p:cNvPr>
+          <p:cNvSpPr>
+            <a:spLocks xmlns:a="http://schemas.openxmlformats.org/drawingml/2006/main" noGrp="1"/>
+          </p:cNvSpPr>
+          <p:nvPr/>
+        </p:nvSpPr>
+        <p:spPr>
+          <a:xfrm xmlns:a="http://schemas.openxmlformats.org/drawingml/2006/main">
+            <a:off x="7905750" y="2324100"/>
+            <a:ext cx="57150" cy="666750"/>
+          </a:xfrm>
+          <a:prstGeom xmlns:a="http://schemas.openxmlformats.org/drawingml/2006/main" prst="rect">
+            <a:avLst/>
+          </a:prstGeom>
+          <a:solidFill xmlns:a="http://schemas.openxmlformats.org/drawingml/2006/main">
+            <a:srgbClr val="00B8D9"/>
+          </a:solidFill>
+          <a:ln xmlns:a="http://schemas.openxmlformats.org/drawingml/2006/main" w="0">
+            <a:solidFill>
+              <a:srgbClr val="00B8D9"/>
+            </a:solidFill>
+            <a:prstDash val="solid"/>
+          </a:ln>
+        </p:spPr>
+      </p:sp>
+      <p:sp>
+        <p:nvSpPr>
+          <p:cNvPr id="36" name="effect-label-1">
+            <a:extLst xmlns:a="http://schemas.openxmlformats.org/drawingml/2006/main">
+              <a:ext uri="{FF2B5EF4-FFF2-40B4-BE49-F238E27FC236}">
+                <a16:creationId xmlns:a16="http://schemas.microsoft.com/office/drawing/2014/main" id="{8838B068-7B9E-4988-BE40-075DA774B48E}"/>
+              </a:ext>
+            </a:extLst>
+          </p:cNvPr>
+          <p:cNvSpPr>
+            <a:spLocks xmlns:a="http://schemas.openxmlformats.org/drawingml/2006/main" noGrp="1"/>
+          </p:cNvSpPr>
+          <p:nvPr/>
+        </p:nvSpPr>
+        <p:spPr>
+          <a:xfrm xmlns:a="http://schemas.openxmlformats.org/drawingml/2006/main">
+            <a:off x="8153400" y="2390775"/>
+            <a:ext cx="2476500" cy="209550"/>
+          </a:xfrm>
+          <a:prstGeom xmlns:a="http://schemas.openxmlformats.org/drawingml/2006/main" prst="rect">
+            <a:avLst/>
+          </a:prstGeom>
+          <a:noFill xmlns:a="http://schemas.openxmlformats.org/drawingml/2006/main"/>
+          <a:ln xmlns:a="http://schemas.openxmlformats.org/drawingml/2006/main" w="0">
+            <a:noFill/>
+            <a:prstDash val="solid"/>
+          </a:ln>
+        </p:spPr>
+        <p:txBody>
+          <a:bodyPr xmlns:a="http://schemas.openxmlformats.org/drawingml/2006/main"/>
+          <a:lstStyle xmlns:a="http://schemas.openxmlformats.org/drawingml/2006/main"/>
+          <a:p xmlns:a="http://schemas.openxmlformats.org/drawingml/2006/main">
+            <a:pPr>
+              <a:defRPr sz="1200" b="1">
+                <a:solidFill>
+                  <a:srgbClr val="FFFFFF"/>
+                </a:solidFill>
+              </a:defRPr>
+            </a:pPr>
+            <a:r>
+              <a:rPr sz="1200" b="1">
+                <a:solidFill>
+                  <a:srgbClr val="FFFFFF"/>
+                </a:solidFill>
+              </a:rPr>
+              <a:t>일정·범위 통제 강화</a:t>
+            </a:r>
+          </a:p>
+        </p:txBody>
+      </p:sp>
+      <p:sp>
+        <p:nvSpPr>
+          <p:cNvPr id="37" name="effect-body-1">
+            <a:extLst xmlns:a="http://schemas.openxmlformats.org/drawingml/2006/main">
+              <a:ext uri="{FF2B5EF4-FFF2-40B4-BE49-F238E27FC236}">
+                <a16:creationId xmlns:a16="http://schemas.microsoft.com/office/drawing/2014/main" id="{69721F98-6EED-46A9-ADB4-0A70ADA130DD}"/>
+              </a:ext>
+            </a:extLst>
+          </p:cNvPr>
+          <p:cNvSpPr>
+            <a:spLocks xmlns:a="http://schemas.openxmlformats.org/drawingml/2006/main" noGrp="1"/>
+          </p:cNvSpPr>
+          <p:nvPr/>
+        </p:nvSpPr>
+        <p:spPr>
+          <a:xfrm xmlns:a="http://schemas.openxmlformats.org/drawingml/2006/main">
+            <a:off x="8153400" y="2628900"/>
+            <a:ext cx="2724150" cy="285750"/>
+          </a:xfrm>
+          <a:prstGeom xmlns:a="http://schemas.openxmlformats.org/drawingml/2006/main" prst="rect">
+            <a:avLst/>
+          </a:prstGeom>
+          <a:noFill xmlns:a="http://schemas.openxmlformats.org/drawingml/2006/main"/>
+          <a:ln xmlns:a="http://schemas.openxmlformats.org/drawingml/2006/main" w="0">
+            <a:noFill/>
+            <a:prstDash val="solid"/>
+          </a:ln>
+        </p:spPr>
+        <p:txBody>
+          <a:bodyPr xmlns:a="http://schemas.openxmlformats.org/drawingml/2006/main"/>
+          <a:lstStyle xmlns:a="http://schemas.openxmlformats.org/drawingml/2006/main"/>
+          <a:p xmlns:a="http://schemas.openxmlformats.org/drawingml/2006/main">
+            <a:pPr>
+              <a:defRPr sz="900">
+                <a:solidFill>
+                  <a:srgbClr val="CBD5E1"/>
+                </a:solidFill>
+              </a:defRPr>
+            </a:pPr>
+            <a:r>
+              <a:rPr sz="900">
+                <a:solidFill>
+                  <a:srgbClr val="CBD5E1"/>
+                </a:solidFill>
+              </a:rPr>
+              <a:t>변경 요청을 영향도 기준으로 분리해 일정 흔들림을 줄입니다.</a:t>
+            </a:r>
+          </a:p>
+        </p:txBody>
+      </p:sp>
+      <p:sp>
+        <p:nvSpPr>
+          <p:cNvPr id="38" name="effect-card-2">
+            <a:extLst xmlns:a="http://schemas.openxmlformats.org/drawingml/2006/main">
+              <a:ext uri="{FF2B5EF4-FFF2-40B4-BE49-F238E27FC236}">
+                <a16:creationId xmlns:a16="http://schemas.microsoft.com/office/drawing/2014/main" id="{967C900A-DDB4-4F70-B744-F9CEEED18CAA}"/>
+              </a:ext>
+            </a:extLst>
+          </p:cNvPr>
+          <p:cNvSpPr>
+            <a:spLocks xmlns:a="http://schemas.openxmlformats.org/drawingml/2006/main" noGrp="1"/>
+          </p:cNvSpPr>
+          <p:nvPr/>
+        </p:nvSpPr>
+        <p:spPr>
+          <a:xfrm xmlns:a="http://schemas.openxmlformats.org/drawingml/2006/main">
+            <a:off x="7905750" y="3162300"/>
+            <a:ext cx="3486150" cy="666750"/>
+          </a:xfrm>
+          <a:prstGeom xmlns:a="http://schemas.openxmlformats.org/drawingml/2006/main" prst="roundRect">
+            <a:avLst>
+              <a:gd name="adj" fmla="val 11429"/>
+            </a:avLst>
+          </a:prstGeom>
+          <a:solidFill xmlns:a="http://schemas.openxmlformats.org/drawingml/2006/main">
+            <a:srgbClr val="111827"/>
+          </a:solidFill>
+          <a:ln xmlns:a="http://schemas.openxmlformats.org/drawingml/2006/main" w="9525">
+            <a:solidFill>
+              <a:srgbClr val="2F3B55"/>
+            </a:solidFill>
+            <a:prstDash val="solid"/>
+          </a:ln>
+        </p:spPr>
+      </p:sp>
+      <p:sp>
+        <p:nvSpPr>
+          <p:cNvPr id="39" name="effect-card-bar-2">
+            <a:extLst xmlns:a="http://schemas.openxmlformats.org/drawingml/2006/main">
+              <a:ext uri="{FF2B5EF4-FFF2-40B4-BE49-F238E27FC236}">
+                <a16:creationId xmlns:a16="http://schemas.microsoft.com/office/drawing/2014/main" id="{56C7FF7A-F60E-4AE5-909C-06171F16664C}"/>
+              </a:ext>
+            </a:extLst>
+          </p:cNvPr>
+          <p:cNvSpPr>
+            <a:spLocks xmlns:a="http://schemas.openxmlformats.org/drawingml/2006/main" noGrp="1"/>
+          </p:cNvSpPr>
+          <p:nvPr/>
+        </p:nvSpPr>
+        <p:spPr>
+          <a:xfrm xmlns:a="http://schemas.openxmlformats.org/drawingml/2006/main">
+            <a:off x="7905750" y="3162300"/>
+            <a:ext cx="57150" cy="666750"/>
+          </a:xfrm>
+          <a:prstGeom xmlns:a="http://schemas.openxmlformats.org/drawingml/2006/main" prst="rect">
+            <a:avLst/>
+          </a:prstGeom>
+          <a:solidFill xmlns:a="http://schemas.openxmlformats.org/drawingml/2006/main">
+            <a:srgbClr val="FF6B35"/>
+          </a:solidFill>
+          <a:ln xmlns:a="http://schemas.openxmlformats.org/drawingml/2006/main" w="0">
+            <a:solidFill>
+              <a:srgbClr val="FF6B35"/>
+            </a:solidFill>
+            <a:prstDash val="solid"/>
+          </a:ln>
+        </p:spPr>
+      </p:sp>
+      <p:sp>
+        <p:nvSpPr>
+          <p:cNvPr id="40" name="effect-label-2">
+            <a:extLst xmlns:a="http://schemas.openxmlformats.org/drawingml/2006/main">
+              <a:ext uri="{FF2B5EF4-FFF2-40B4-BE49-F238E27FC236}">
+                <a16:creationId xmlns:a16="http://schemas.microsoft.com/office/drawing/2014/main" id="{63018349-1B04-499A-B28A-8741AE94A179}"/>
+              </a:ext>
+            </a:extLst>
+          </p:cNvPr>
+          <p:cNvSpPr>
+            <a:spLocks xmlns:a="http://schemas.openxmlformats.org/drawingml/2006/main" noGrp="1"/>
+          </p:cNvSpPr>
+          <p:nvPr/>
+        </p:nvSpPr>
+        <p:spPr>
+          <a:xfrm xmlns:a="http://schemas.openxmlformats.org/drawingml/2006/main">
+            <a:off x="8153400" y="3228975"/>
+            <a:ext cx="2476500" cy="209550"/>
+          </a:xfrm>
+          <a:prstGeom xmlns:a="http://schemas.openxmlformats.org/drawingml/2006/main" prst="rect">
+            <a:avLst/>
+          </a:prstGeom>
+          <a:noFill xmlns:a="http://schemas.openxmlformats.org/drawingml/2006/main"/>
+          <a:ln xmlns:a="http://schemas.openxmlformats.org/drawingml/2006/main" w="0">
+            <a:noFill/>
+            <a:prstDash val="solid"/>
+          </a:ln>
+        </p:spPr>
+        <p:txBody>
+          <a:bodyPr xmlns:a="http://schemas.openxmlformats.org/drawingml/2006/main"/>
+          <a:lstStyle xmlns:a="http://schemas.openxmlformats.org/drawingml/2006/main"/>
+          <a:p xmlns:a="http://schemas.openxmlformats.org/drawingml/2006/main">
+            <a:pPr>
+              <a:defRPr sz="1200" b="1">
+                <a:solidFill>
+                  <a:srgbClr val="FFFFFF"/>
+                </a:solidFill>
+              </a:defRPr>
+            </a:pPr>
+            <a:r>
+              <a:rPr sz="1200" b="1">
+                <a:solidFill>
+                  <a:srgbClr val="FFFFFF"/>
+                </a:solidFill>
+              </a:rPr>
+              <a:t>버전·이슈 추적성 확보</a:t>
+            </a:r>
+          </a:p>
+        </p:txBody>
+      </p:sp>
+      <p:sp>
+        <p:nvSpPr>
+          <p:cNvPr id="41" name="effect-body-2">
+            <a:extLst xmlns:a="http://schemas.openxmlformats.org/drawingml/2006/main">
+              <a:ext uri="{FF2B5EF4-FFF2-40B4-BE49-F238E27FC236}">
+                <a16:creationId xmlns:a16="http://schemas.microsoft.com/office/drawing/2014/main" id="{40D1848E-844B-4E0C-8BC1-23C44ED2D869}"/>
+              </a:ext>
+            </a:extLst>
+          </p:cNvPr>
+          <p:cNvSpPr>
+            <a:spLocks xmlns:a="http://schemas.openxmlformats.org/drawingml/2006/main" noGrp="1"/>
+          </p:cNvSpPr>
+          <p:nvPr/>
+        </p:nvSpPr>
+        <p:spPr>
+          <a:xfrm xmlns:a="http://schemas.openxmlformats.org/drawingml/2006/main">
+            <a:off x="8153400" y="3467100"/>
+            <a:ext cx="2724150" cy="285750"/>
+          </a:xfrm>
+          <a:prstGeom xmlns:a="http://schemas.openxmlformats.org/drawingml/2006/main" prst="rect">
+            <a:avLst/>
+          </a:prstGeom>
+          <a:noFill xmlns:a="http://schemas.openxmlformats.org/drawingml/2006/main"/>
+          <a:ln xmlns:a="http://schemas.openxmlformats.org/drawingml/2006/main" w="0">
+            <a:noFill/>
+            <a:prstDash val="solid"/>
+          </a:ln>
+        </p:spPr>
+        <p:txBody>
+          <a:bodyPr xmlns:a="http://schemas.openxmlformats.org/drawingml/2006/main"/>
+          <a:lstStyle xmlns:a="http://schemas.openxmlformats.org/drawingml/2006/main"/>
+          <a:p xmlns:a="http://schemas.openxmlformats.org/drawingml/2006/main">
+            <a:pPr>
+              <a:defRPr sz="900">
+                <a:solidFill>
+                  <a:srgbClr val="CBD5E1"/>
+                </a:solidFill>
+              </a:defRPr>
+            </a:pPr>
+            <a:r>
+              <a:rPr sz="900">
+                <a:solidFill>
+                  <a:srgbClr val="CBD5E1"/>
+                </a:solidFill>
+              </a:rPr>
+              <a:t>빌드 기준과 이슈 상태를 연결해 의사결정 근거를 남깁니다.</a:t>
+            </a:r>
+          </a:p>
+        </p:txBody>
+      </p:sp>
+      <p:sp>
+        <p:nvSpPr>
+          <p:cNvPr id="42" name="effect-card-3">
+            <a:extLst xmlns:a="http://schemas.openxmlformats.org/drawingml/2006/main">
+              <a:ext uri="{FF2B5EF4-FFF2-40B4-BE49-F238E27FC236}">
+                <a16:creationId xmlns:a16="http://schemas.microsoft.com/office/drawing/2014/main" id="{B095F5A8-9E3C-46A4-A70C-FF695A46C595}"/>
+              </a:ext>
+            </a:extLst>
+          </p:cNvPr>
+          <p:cNvSpPr>
+            <a:spLocks xmlns:a="http://schemas.openxmlformats.org/drawingml/2006/main" noGrp="1"/>
+          </p:cNvSpPr>
+          <p:nvPr/>
+        </p:nvSpPr>
+        <p:spPr>
+          <a:xfrm xmlns:a="http://schemas.openxmlformats.org/drawingml/2006/main">
+            <a:off x="7905750" y="4000500"/>
+            <a:ext cx="3486150" cy="666750"/>
+          </a:xfrm>
+          <a:prstGeom xmlns:a="http://schemas.openxmlformats.org/drawingml/2006/main" prst="roundRect">
+            <a:avLst>
+              <a:gd name="adj" fmla="val 11429"/>
+            </a:avLst>
+          </a:prstGeom>
+          <a:solidFill xmlns:a="http://schemas.openxmlformats.org/drawingml/2006/main">
+            <a:srgbClr val="111827"/>
+          </a:solidFill>
+          <a:ln xmlns:a="http://schemas.openxmlformats.org/drawingml/2006/main" w="9525">
+            <a:solidFill>
+              <a:srgbClr val="2F3B55"/>
+            </a:solidFill>
+            <a:prstDash val="solid"/>
+          </a:ln>
+        </p:spPr>
+      </p:sp>
+      <p:sp>
+        <p:nvSpPr>
+          <p:cNvPr id="43" name="effect-card-bar-3">
+            <a:extLst xmlns:a="http://schemas.openxmlformats.org/drawingml/2006/main">
+              <a:ext uri="{FF2B5EF4-FFF2-40B4-BE49-F238E27FC236}">
+                <a16:creationId xmlns:a16="http://schemas.microsoft.com/office/drawing/2014/main" id="{923BD5E9-7041-48E1-B833-D72C0442C1CA}"/>
+              </a:ext>
+            </a:extLst>
+          </p:cNvPr>
+          <p:cNvSpPr>
+            <a:spLocks xmlns:a="http://schemas.openxmlformats.org/drawingml/2006/main" noGrp="1"/>
+          </p:cNvSpPr>
+          <p:nvPr/>
+        </p:nvSpPr>
+        <p:spPr>
+          <a:xfrm xmlns:a="http://schemas.openxmlformats.org/drawingml/2006/main">
+            <a:off x="7905750" y="4000500"/>
+            <a:ext cx="57150" cy="666750"/>
+          </a:xfrm>
+          <a:prstGeom xmlns:a="http://schemas.openxmlformats.org/drawingml/2006/main" prst="rect">
+            <a:avLst/>
+          </a:prstGeom>
+          <a:solidFill xmlns:a="http://schemas.openxmlformats.org/drawingml/2006/main">
+            <a:srgbClr val="7C3AED"/>
+          </a:solidFill>
+          <a:ln xmlns:a="http://schemas.openxmlformats.org/drawingml/2006/main" w="0">
+            <a:solidFill>
+              <a:srgbClr val="7C3AED"/>
+            </a:solidFill>
+            <a:prstDash val="solid"/>
+          </a:ln>
+        </p:spPr>
+      </p:sp>
+      <p:sp>
+        <p:nvSpPr>
+          <p:cNvPr id="44" name="effect-label-3">
+            <a:extLst xmlns:a="http://schemas.openxmlformats.org/drawingml/2006/main">
+              <a:ext uri="{FF2B5EF4-FFF2-40B4-BE49-F238E27FC236}">
+                <a16:creationId xmlns:a16="http://schemas.microsoft.com/office/drawing/2014/main" id="{75899F6A-DEAB-4962-9948-B509DBBDCF9E}"/>
+              </a:ext>
+            </a:extLst>
+          </p:cNvPr>
+          <p:cNvSpPr>
+            <a:spLocks xmlns:a="http://schemas.openxmlformats.org/drawingml/2006/main" noGrp="1"/>
+          </p:cNvSpPr>
+          <p:nvPr/>
+        </p:nvSpPr>
+        <p:spPr>
+          <a:xfrm xmlns:a="http://schemas.openxmlformats.org/drawingml/2006/main">
+            <a:off x="8153400" y="4067175"/>
+            <a:ext cx="2476500" cy="209550"/>
+          </a:xfrm>
+          <a:prstGeom xmlns:a="http://schemas.openxmlformats.org/drawingml/2006/main" prst="rect">
+            <a:avLst/>
+          </a:prstGeom>
+          <a:noFill xmlns:a="http://schemas.openxmlformats.org/drawingml/2006/main"/>
+          <a:ln xmlns:a="http://schemas.openxmlformats.org/drawingml/2006/main" w="0">
+            <a:noFill/>
+            <a:prstDash val="solid"/>
+          </a:ln>
+        </p:spPr>
+        <p:txBody>
+          <a:bodyPr xmlns:a="http://schemas.openxmlformats.org/drawingml/2006/main"/>
+          <a:lstStyle xmlns:a="http://schemas.openxmlformats.org/drawingml/2006/main"/>
+          <a:p xmlns:a="http://schemas.openxmlformats.org/drawingml/2006/main">
+            <a:pPr>
+              <a:defRPr sz="1200" b="1">
+                <a:solidFill>
+                  <a:srgbClr val="FFFFFF"/>
+                </a:solidFill>
+              </a:defRPr>
+            </a:pPr>
+            <a:r>
+              <a:rPr sz="1200" b="1">
+                <a:solidFill>
+                  <a:srgbClr val="FFFFFF"/>
+                </a:solidFill>
+              </a:rPr>
+              <a:t>퍼블리셔 대응 명확화</a:t>
+            </a:r>
+          </a:p>
+        </p:txBody>
+      </p:sp>
+      <p:sp>
+        <p:nvSpPr>
+          <p:cNvPr id="45" name="effect-body-3">
+            <a:extLst xmlns:a="http://schemas.openxmlformats.org/drawingml/2006/main">
+              <a:ext uri="{FF2B5EF4-FFF2-40B4-BE49-F238E27FC236}">
+                <a16:creationId xmlns:a16="http://schemas.microsoft.com/office/drawing/2014/main" id="{7A262619-0ED7-4960-862E-7231166DE5A1}"/>
+              </a:ext>
+            </a:extLst>
+          </p:cNvPr>
+          <p:cNvSpPr>
+            <a:spLocks xmlns:a="http://schemas.openxmlformats.org/drawingml/2006/main" noGrp="1"/>
+          </p:cNvSpPr>
+          <p:nvPr/>
+        </p:nvSpPr>
+        <p:spPr>
+          <a:xfrm xmlns:a="http://schemas.openxmlformats.org/drawingml/2006/main">
+            <a:off x="8153400" y="4305300"/>
+            <a:ext cx="2724150" cy="285750"/>
+          </a:xfrm>
+          <a:prstGeom xmlns:a="http://schemas.openxmlformats.org/drawingml/2006/main" prst="rect">
+            <a:avLst/>
+          </a:prstGeom>
+          <a:noFill xmlns:a="http://schemas.openxmlformats.org/drawingml/2006/main"/>
+          <a:ln xmlns:a="http://schemas.openxmlformats.org/drawingml/2006/main" w="0">
+            <a:noFill/>
+            <a:prstDash val="solid"/>
+          </a:ln>
+        </p:spPr>
+        <p:txBody>
+          <a:bodyPr xmlns:a="http://schemas.openxmlformats.org/drawingml/2006/main"/>
+          <a:lstStyle xmlns:a="http://schemas.openxmlformats.org/drawingml/2006/main"/>
+          <a:p xmlns:a="http://schemas.openxmlformats.org/drawingml/2006/main">
+            <a:pPr>
+              <a:defRPr sz="900">
+                <a:solidFill>
+                  <a:srgbClr val="CBD5E1"/>
+                </a:solidFill>
+              </a:defRPr>
+            </a:pPr>
+            <a:r>
+              <a:rPr sz="900">
+                <a:solidFill>
+                  <a:srgbClr val="CBD5E1"/>
+                </a:solidFill>
+              </a:rPr>
+              <a:t>검수 피드백을 운영 가능한 액션으로 정리합니다.</a:t>
+            </a:r>
+          </a:p>
+        </p:txBody>
+      </p:sp>
+      <p:sp>
+        <p:nvSpPr>
+          <p:cNvPr id="46" name="effect-card-4">
+            <a:extLst xmlns:a="http://schemas.openxmlformats.org/drawingml/2006/main">
+              <a:ext uri="{FF2B5EF4-FFF2-40B4-BE49-F238E27FC236}">
+                <a16:creationId xmlns:a16="http://schemas.microsoft.com/office/drawing/2014/main" id="{0AEC824B-4105-4461-8F63-259BD36DE72A}"/>
+              </a:ext>
+            </a:extLst>
+          </p:cNvPr>
+          <p:cNvSpPr>
+            <a:spLocks xmlns:a="http://schemas.openxmlformats.org/drawingml/2006/main" noGrp="1"/>
+          </p:cNvSpPr>
+          <p:nvPr/>
+        </p:nvSpPr>
+        <p:spPr>
+          <a:xfrm xmlns:a="http://schemas.openxmlformats.org/drawingml/2006/main">
+            <a:off x="7905750" y="4838700"/>
+            <a:ext cx="3486150" cy="666750"/>
+          </a:xfrm>
+          <a:prstGeom xmlns:a="http://schemas.openxmlformats.org/drawingml/2006/main" prst="roundRect">
+            <a:avLst>
+              <a:gd name="adj" fmla="val 11429"/>
+            </a:avLst>
+          </a:prstGeom>
+          <a:solidFill xmlns:a="http://schemas.openxmlformats.org/drawingml/2006/main">
+            <a:srgbClr val="111827"/>
+          </a:solidFill>
+          <a:ln xmlns:a="http://schemas.openxmlformats.org/drawingml/2006/main" w="9525">
+            <a:solidFill>
+              <a:srgbClr val="2F3B55"/>
+            </a:solidFill>
+            <a:prstDash val="solid"/>
+          </a:ln>
+        </p:spPr>
+      </p:sp>
+      <p:sp>
+        <p:nvSpPr>
+          <p:cNvPr id="47" name="effect-card-bar-4">
+            <a:extLst xmlns:a="http://schemas.openxmlformats.org/drawingml/2006/main">
+              <a:ext uri="{FF2B5EF4-FFF2-40B4-BE49-F238E27FC236}">
+                <a16:creationId xmlns:a16="http://schemas.microsoft.com/office/drawing/2014/main" id="{6C6CEA68-77CB-4C50-8A76-F38BEEE3C8EF}"/>
+              </a:ext>
+            </a:extLst>
+          </p:cNvPr>
+          <p:cNvSpPr>
+            <a:spLocks xmlns:a="http://schemas.openxmlformats.org/drawingml/2006/main" noGrp="1"/>
+          </p:cNvSpPr>
+          <p:nvPr/>
+        </p:nvSpPr>
+        <p:spPr>
+          <a:xfrm xmlns:a="http://schemas.openxmlformats.org/drawingml/2006/main">
+            <a:off x="7905750" y="4838700"/>
+            <a:ext cx="57150" cy="666750"/>
+          </a:xfrm>
+          <a:prstGeom xmlns:a="http://schemas.openxmlformats.org/drawingml/2006/main" prst="rect">
+            <a:avLst/>
+          </a:prstGeom>
+          <a:solidFill xmlns:a="http://schemas.openxmlformats.org/drawingml/2006/main">
+            <a:srgbClr val="8BD9E8"/>
+          </a:solidFill>
+          <a:ln xmlns:a="http://schemas.openxmlformats.org/drawingml/2006/main" w="0">
+            <a:solidFill>
+              <a:srgbClr val="8BD9E8"/>
+            </a:solidFill>
+            <a:prstDash val="solid"/>
+          </a:ln>
+        </p:spPr>
+      </p:sp>
+      <p:sp>
+        <p:nvSpPr>
+          <p:cNvPr id="48" name="effect-label-4">
+            <a:extLst xmlns:a="http://schemas.openxmlformats.org/drawingml/2006/main">
+              <a:ext uri="{FF2B5EF4-FFF2-40B4-BE49-F238E27FC236}">
+                <a16:creationId xmlns:a16="http://schemas.microsoft.com/office/drawing/2014/main" id="{43C4EBAC-12C1-482A-B40C-31F39811C2E7}"/>
+              </a:ext>
+            </a:extLst>
+          </p:cNvPr>
+          <p:cNvSpPr>
+            <a:spLocks xmlns:a="http://schemas.openxmlformats.org/drawingml/2006/main" noGrp="1"/>
+          </p:cNvSpPr>
+          <p:nvPr/>
+        </p:nvSpPr>
+        <p:spPr>
+          <a:xfrm xmlns:a="http://schemas.openxmlformats.org/drawingml/2006/main">
+            <a:off x="8153400" y="4905375"/>
+            <a:ext cx="2476500" cy="209550"/>
+          </a:xfrm>
+          <a:prstGeom xmlns:a="http://schemas.openxmlformats.org/drawingml/2006/main" prst="rect">
+            <a:avLst/>
+          </a:prstGeom>
+          <a:noFill xmlns:a="http://schemas.openxmlformats.org/drawingml/2006/main"/>
+          <a:ln xmlns:a="http://schemas.openxmlformats.org/drawingml/2006/main" w="0">
+            <a:noFill/>
+            <a:prstDash val="solid"/>
+          </a:ln>
+        </p:spPr>
+        <p:txBody>
+          <a:bodyPr xmlns:a="http://schemas.openxmlformats.org/drawingml/2006/main"/>
+          <a:lstStyle xmlns:a="http://schemas.openxmlformats.org/drawingml/2006/main"/>
+          <a:p xmlns:a="http://schemas.openxmlformats.org/drawingml/2006/main">
+            <a:pPr>
+              <a:defRPr sz="1200" b="1">
+                <a:solidFill>
+                  <a:srgbClr val="FFFFFF"/>
+                </a:solidFill>
+              </a:defRPr>
+            </a:pPr>
+            <a:r>
+              <a:rPr sz="1200" b="1">
+                <a:solidFill>
+                  <a:srgbClr val="FFFFFF"/>
+                </a:solidFill>
+              </a:rPr>
+              <a:t>Live 릴리즈 준비 완성</a:t>
+            </a:r>
+          </a:p>
+        </p:txBody>
+      </p:sp>
+      <p:sp>
+        <p:nvSpPr>
+          <p:cNvPr id="49" name="effect-body-4">
+            <a:extLst xmlns:a="http://schemas.openxmlformats.org/drawingml/2006/main">
+              <a:ext uri="{FF2B5EF4-FFF2-40B4-BE49-F238E27FC236}">
+                <a16:creationId xmlns:a16="http://schemas.microsoft.com/office/drawing/2014/main" id="{5FC3A7C7-5B3E-458F-91F8-D149E75DB607}"/>
+              </a:ext>
+            </a:extLst>
+          </p:cNvPr>
+          <p:cNvSpPr>
+            <a:spLocks xmlns:a="http://schemas.openxmlformats.org/drawingml/2006/main" noGrp="1"/>
+          </p:cNvSpPr>
+          <p:nvPr/>
+        </p:nvSpPr>
+        <p:spPr>
+          <a:xfrm xmlns:a="http://schemas.openxmlformats.org/drawingml/2006/main">
+            <a:off x="8153400" y="5143500"/>
+            <a:ext cx="2724150" cy="285750"/>
+          </a:xfrm>
+          <a:prstGeom xmlns:a="http://schemas.openxmlformats.org/drawingml/2006/main" prst="rect">
+            <a:avLst/>
+          </a:prstGeom>
+          <a:noFill xmlns:a="http://schemas.openxmlformats.org/drawingml/2006/main"/>
+          <a:ln xmlns:a="http://schemas.openxmlformats.org/drawingml/2006/main" w="0">
+            <a:noFill/>
+            <a:prstDash val="solid"/>
+          </a:ln>
+        </p:spPr>
+        <p:txBody>
+          <a:bodyPr xmlns:a="http://schemas.openxmlformats.org/drawingml/2006/main"/>
+          <a:lstStyle xmlns:a="http://schemas.openxmlformats.org/drawingml/2006/main"/>
+          <a:p xmlns:a="http://schemas.openxmlformats.org/drawingml/2006/main">
+            <a:pPr>
+              <a:defRPr sz="900">
+                <a:solidFill>
+                  <a:srgbClr val="CBD5E1"/>
+                </a:solidFill>
+              </a:defRPr>
+            </a:pPr>
+            <a:r>
+              <a:rPr sz="900">
+                <a:solidFill>
+                  <a:srgbClr val="CBD5E1"/>
+                </a:solidFill>
+              </a:rPr>
+              <a:t>배포 직전까지 필요한 담당·일정·리스크를 확인합니다.</a:t>
+            </a:r>
+          </a:p>
+        </p:txBody>
+      </p:sp>
+      <p:sp>
+        <p:nvSpPr>
+          <p:cNvPr id="50" name="final-message-panel">
+            <a:extLst xmlns:a="http://schemas.openxmlformats.org/drawingml/2006/main">
+              <a:ext uri="{FF2B5EF4-FFF2-40B4-BE49-F238E27FC236}">
+                <a16:creationId xmlns:a16="http://schemas.microsoft.com/office/drawing/2014/main" id="{850BB057-AA22-4B7E-80BA-FDC3893DD698}"/>
+              </a:ext>
+            </a:extLst>
+          </p:cNvPr>
+          <p:cNvSpPr>
+            <a:spLocks xmlns:a="http://schemas.openxmlformats.org/drawingml/2006/main" noGrp="1"/>
+          </p:cNvSpPr>
+          <p:nvPr/>
+        </p:nvSpPr>
+        <p:spPr>
+          <a:xfrm xmlns:a="http://schemas.openxmlformats.org/drawingml/2006/main">
+            <a:off x="514350" y="5791200"/>
+            <a:ext cx="10877550" cy="419100"/>
+          </a:xfrm>
+          <a:prstGeom xmlns:a="http://schemas.openxmlformats.org/drawingml/2006/main" prst="roundRect">
+            <a:avLst>
+              <a:gd name="adj" fmla="val 18182"/>
+            </a:avLst>
+          </a:prstGeom>
+          <a:solidFill xmlns:a="http://schemas.openxmlformats.org/drawingml/2006/main">
+            <a:srgbClr val="10192E"/>
+          </a:solidFill>
+          <a:ln xmlns:a="http://schemas.openxmlformats.org/drawingml/2006/main" w="9525">
+            <a:solidFill>
+              <a:srgbClr val="22304E"/>
+            </a:solidFill>
+            <a:prstDash val="solid"/>
+          </a:ln>
+        </p:spPr>
+      </p:sp>
+      <p:sp>
+        <p:nvSpPr>
+          <p:cNvPr id="51" name="final-message-label">
+            <a:extLst xmlns:a="http://schemas.openxmlformats.org/drawingml/2006/main">
+              <a:ext uri="{FF2B5EF4-FFF2-40B4-BE49-F238E27FC236}">
+                <a16:creationId xmlns:a16="http://schemas.microsoft.com/office/drawing/2014/main" id="{3E8A81CE-7719-4951-A618-2DE70F9E3054}"/>
+              </a:ext>
+            </a:extLst>
+          </p:cNvPr>
+          <p:cNvSpPr>
+            <a:spLocks xmlns:a="http://schemas.openxmlformats.org/drawingml/2006/main" noGrp="1"/>
+          </p:cNvSpPr>
+          <p:nvPr/>
+        </p:nvSpPr>
+        <p:spPr>
+          <a:xfrm xmlns:a="http://schemas.openxmlformats.org/drawingml/2006/main">
+            <a:off x="781050" y="5905500"/>
+            <a:ext cx="1143000" cy="209550"/>
+          </a:xfrm>
+          <a:prstGeom xmlns:a="http://schemas.openxmlformats.org/drawingml/2006/main" prst="rect">
+            <a:avLst/>
+          </a:prstGeom>
+          <a:noFill xmlns:a="http://schemas.openxmlformats.org/drawingml/2006/main"/>
+          <a:ln xmlns:a="http://schemas.openxmlformats.org/drawingml/2006/main" w="0">
+            <a:noFill/>
+            <a:prstDash val="solid"/>
+          </a:ln>
+        </p:spPr>
+        <p:txBody>
+          <a:bodyPr xmlns:a="http://schemas.openxmlformats.org/drawingml/2006/main"/>
+          <a:lstStyle xmlns:a="http://schemas.openxmlformats.org/drawingml/2006/main"/>
+          <a:p xmlns:a="http://schemas.openxmlformats.org/drawingml/2006/main">
+            <a:pPr>
+              <a:defRPr sz="1200" b="1">
+                <a:solidFill>
+                  <a:srgbClr val="8BD9E8"/>
+                </a:solidFill>
+              </a:defRPr>
+            </a:pPr>
+            <a:r>
+              <a:rPr sz="1200" b="1">
+                <a:solidFill>
+                  <a:srgbClr val="8BD9E8"/>
+                </a:solidFill>
+              </a:rPr>
+              <a:t>정리</a:t>
+            </a:r>
+          </a:p>
+        </p:txBody>
+      </p:sp>
+      <p:sp>
+        <p:nvSpPr>
+          <p:cNvPr id="52" name="final-message-body">
+            <a:extLst xmlns:a="http://schemas.openxmlformats.org/drawingml/2006/main">
+              <a:ext uri="{FF2B5EF4-FFF2-40B4-BE49-F238E27FC236}">
+                <a16:creationId xmlns:a16="http://schemas.microsoft.com/office/drawing/2014/main" id="{BDA761DC-62BE-4DC1-81ED-EFAFE4FC2EEE}"/>
+              </a:ext>
+            </a:extLst>
+          </p:cNvPr>
+          <p:cNvSpPr>
+            <a:spLocks xmlns:a="http://schemas.openxmlformats.org/drawingml/2006/main" noGrp="1"/>
+          </p:cNvSpPr>
+          <p:nvPr/>
+        </p:nvSpPr>
+        <p:spPr>
+          <a:xfrm xmlns:a="http://schemas.openxmlformats.org/drawingml/2006/main">
+            <a:off x="1962150" y="5905500"/>
+            <a:ext cx="8572500" cy="209550"/>
+          </a:xfrm>
+          <a:prstGeom xmlns:a="http://schemas.openxmlformats.org/drawingml/2006/main" prst="rect">
+            <a:avLst/>
+          </a:prstGeom>
+          <a:noFill xmlns:a="http://schemas.openxmlformats.org/drawingml/2006/main"/>
+          <a:ln xmlns:a="http://schemas.openxmlformats.org/drawingml/2006/main" w="0">
+            <a:noFill/>
+            <a:prstDash val="solid"/>
+          </a:ln>
+        </p:spPr>
+        <p:txBody>
+          <a:bodyPr xmlns:a="http://schemas.openxmlformats.org/drawingml/2006/main"/>
+          <a:lstStyle xmlns:a="http://schemas.openxmlformats.org/drawingml/2006/main"/>
+          <a:p xmlns:a="http://schemas.openxmlformats.org/drawingml/2006/main">
+            <a:pPr>
+              <a:defRPr sz="1125">
+                <a:solidFill>
+                  <a:srgbClr val="FFFFFF"/>
+                </a:solidFill>
+              </a:defRPr>
+            </a:pPr>
+            <a:r>
+              <a:rPr sz="1125">
+                <a:solidFill>
+                  <a:srgbClr val="FFFFFF"/>
+                </a:solidFill>
+              </a:rPr>
+              <a:t>HIT2 일본 런칭 준비는 마일스톤, 빌드·버전, QA, 퍼블리셔 대응을 하나의 릴리즈 판단 흐름으로 묶어 관리합니다.</a:t>
+            </a:r>
+          </a:p>
+        </p:txBody>
+      </p:sp>
+    </p:spTree>
+    <p:extLst>
+      <p:ext uri="{BB962C8B-B14F-4D97-AF65-F5344CB8AC3E}">
+        <p14:creationId xmlns:p14="http://schemas.microsoft.com/office/powerpoint/2010/main" val="1970272094"/>
       </p:ext>
     </p:extLst>
   </p:cSld>
